--- a/docs/video_slides_draft.pptx
+++ b/docs/video_slides_draft.pptx
@@ -142,7 +142,7 @@
     </p:spTree>
     <p:extLst>
       <p:ext uri="{BB962C8B-B14F-4D97-AF65-F5344CB8AC3E}">
-        <p14:creationId xmlns:p14="http://schemas.microsoft.com/office/powerpoint/2010/main" val="2900677154"/>
+        <p14:creationId xmlns:p14="http://schemas.microsoft.com/office/powerpoint/2010/main" val="317768001"/>
       </p:ext>
     </p:extLst>
   </p:cSld>
@@ -735,6 +735,7 @@
             <a:r>
               <a:rPr lang="en-US" dirty="0"/>
               <a:t>The audience's glossary for the terminal scenes - point back at the slide-5 diagram while reading it.
+Entry keys in the real demos are the provisioned protocols: ready (the readiness gate), isolette_sysmlv2_rust_props (blessed model), _l1a (file hashes), _l2 (contract slices), _verus, _cheat, _sysproof, _gensrc, _report. Every row of the checklist the audience is about to watch is one of these keys.
 Predicate and restart-episode are deliberately OFF this slide (parked; placement TBD - possibly an 'evaluation primitives' strip). If asked: a predicate is the judge (one evaluation = one attestation episode), restart-episode is the freshness primitive (forget memoized verdicts, reset, re-evaluate).
 Also deliberately excluded (README-level detail): partition mechanics, component-wise entries and success handoff, dispatch latching, max_cycles.</a:t>
             </a:r>
@@ -4969,7 +4970,7 @@
           <a:bodyPr wrap="square" lIns="0" tIns="0" rIns="0" bIns="0" rtlCol="0" anchor="ctr"/>
           <a:lstStyle/>
           <a:p>
-            <a:pPr marL="0" indent="0" algn="ctr">
+            <a:pPr marL="0" indent="0" algn="l">
               <a:buNone/>
             </a:pPr>
             <a:r>
@@ -5016,9 +5017,10 @@
               </a:rPr>
               <a:t>of failure— every repair is </a:t>
             </a:r>
-          </a:p>
-          <a:p>
-            <a:pPr marL="0" indent="0" algn="ctr">
+            <a:endParaRPr lang="en-US" sz="1300" dirty="0"/>
+          </a:p>
+          <a:p>
+            <a:pPr marL="0" indent="0" algn="l">
               <a:buNone/>
             </a:pPr>
             <a:r>
@@ -5228,8 +5230,8 @@
         </p:nvSpPr>
         <p:spPr>
           <a:xfrm>
-            <a:off x="640080" y="1463040"/>
-            <a:ext cx="10972800" cy="4846320"/>
+            <a:off x="640080" y="1371600"/>
+            <a:ext cx="10972800" cy="5212080"/>
           </a:xfrm>
           <a:prstGeom prst="rect">
             <a:avLst/>
@@ -5246,7 +5248,7 @@
               <a:buChar char="•"/>
             </a:pPr>
             <a:r>
-              <a:rPr lang="en-US" sz="1700" b="1" dirty="0">
+              <a:rPr lang="en-US" sz="1600" b="1" dirty="0">
                 <a:solidFill>
                   <a:srgbClr val="1E2761"/>
                 </a:solidFill>
@@ -5257,7 +5259,7 @@
               <a:t>Blackboard</a:t>
             </a:r>
             <a:r>
-              <a:rPr lang="en-US" sz="1700" dirty="0">
+              <a:rPr lang="en-US" sz="1600" dirty="0">
                 <a:solidFill>
                   <a:srgbClr val="212121"/>
                 </a:solidFill>
@@ -5267,7 +5269,7 @@
               </a:rPr>
               <a:t> — the shared store: every measurement lands as an entry with its condition and standing; three segments (provision · certify · escalate) plus a full history of every change</a:t>
             </a:r>
-            <a:endParaRPr lang="en-US" sz="1700" dirty="0"/>
+            <a:endParaRPr lang="en-US" sz="1600" dirty="0"/>
           </a:p>
           <a:p>
             <a:pPr marL="342900" indent="-342900" algn="l">
@@ -5275,7 +5277,7 @@
               <a:buChar char="•"/>
             </a:pPr>
             <a:r>
-              <a:rPr lang="en-US" sz="1700" b="1" dirty="0">
+              <a:rPr lang="en-US" sz="1600" b="1" dirty="0">
                 <a:solidFill>
                   <a:srgbClr val="1E2761"/>
                 </a:solidFill>
@@ -5283,10 +5285,10 @@
                 <a:ea typeface="Calibri" pitchFamily="34" charset="-122"/>
                 <a:cs typeface="Calibri" pitchFamily="34" charset="-120"/>
               </a:rPr>
-              <a:t>Partition</a:t>
-            </a:r>
-            <a:r>
-              <a:rPr lang="en-US" sz="1700" dirty="0">
+              <a:t>Blackboard Entry (Key)</a:t>
+            </a:r>
+            <a:r>
+              <a:rPr lang="en-US" sz="1600" dirty="0">
                 <a:solidFill>
                   <a:srgbClr val="212121"/>
                 </a:solidFill>
@@ -5294,9 +5296,9 @@
                 <a:ea typeface="Calibri" pitchFamily="34" charset="-122"/>
                 <a:cs typeface="Calibri" pitchFamily="34" charset="-120"/>
               </a:rPr>
-              <a:t> — the division of blackboard entries among repairers: each knowledge source watches its own collection of keys, and an entry sits in the partition of whichever rung currently owns it</a:t>
-            </a:r>
-            <a:endParaRPr lang="en-US" sz="1700" dirty="0"/>
+              <a:t> — one measurement under judgment, identified by its key: the measurement, its condition, its standing, its repair history</a:t>
+            </a:r>
+            <a:endParaRPr lang="en-US" sz="1600" dirty="0"/>
           </a:p>
           <a:p>
             <a:pPr marL="342900" indent="-342900" algn="l">
@@ -5304,7 +5306,7 @@
               <a:buChar char="•"/>
             </a:pPr>
             <a:r>
-              <a:rPr lang="en-US" sz="1700" b="1" dirty="0">
+              <a:rPr lang="en-US" sz="1600" b="1" dirty="0">
                 <a:solidFill>
                   <a:srgbClr val="1E2761"/>
                 </a:solidFill>
@@ -5312,10 +5314,10 @@
                 <a:ea typeface="Calibri" pitchFamily="34" charset="-122"/>
                 <a:cs typeface="Calibri" pitchFamily="34" charset="-120"/>
               </a:rPr>
-              <a:t>Controller</a:t>
-            </a:r>
-            <a:r>
-              <a:rPr lang="en-US" sz="1700" dirty="0">
+              <a:t>Episode</a:t>
+            </a:r>
+            <a:r>
+              <a:rPr lang="en-US" sz="1600" dirty="0">
                 <a:solidFill>
                   <a:srgbClr val="212121"/>
                 </a:solidFill>
@@ -5323,9 +5325,9 @@
                 <a:ea typeface="Calibri" pitchFamily="34" charset="-122"/>
                 <a:cs typeface="Calibri" pitchFamily="34" charset="-120"/>
               </a:rPr>
-              <a:t> — the cycle: evaluates every entry (provision first), dispatches keys onto outcome-routed chains, advances or hands off, escalates; halts only when everything is in good standing</a:t>
-            </a:r>
-            <a:endParaRPr lang="en-US" sz="1700" dirty="0"/>
+              <a:t> — one full judgment of an entry: the attestation runs once and its verdicts are memoized until the episode ends — or is restarted for genuinely fresh measurement</a:t>
+            </a:r>
+            <a:endParaRPr lang="en-US" sz="1600" dirty="0"/>
           </a:p>
           <a:p>
             <a:pPr marL="342900" indent="-342900" algn="l">
@@ -5333,7 +5335,7 @@
               <a:buChar char="•"/>
             </a:pPr>
             <a:r>
-              <a:rPr lang="en-US" sz="1700" b="1" dirty="0">
+              <a:rPr lang="en-US" sz="1600" b="1" dirty="0">
                 <a:solidFill>
                   <a:srgbClr val="1E2761"/>
                 </a:solidFill>
@@ -5341,10 +5343,10 @@
                 <a:ea typeface="Calibri" pitchFamily="34" charset="-122"/>
                 <a:cs typeface="Calibri" pitchFamily="34" charset="-120"/>
               </a:rPr>
-              <a:t>Knowledge source (KS)</a:t>
-            </a:r>
-            <a:r>
-              <a:rPr lang="en-US" sz="1700" dirty="0">
+              <a:t>Partition</a:t>
+            </a:r>
+            <a:r>
+              <a:rPr lang="en-US" sz="1600" dirty="0">
                 <a:solidFill>
                   <a:srgbClr val="212121"/>
                 </a:solidFill>
@@ -5352,9 +5354,9 @@
                 <a:ea typeface="Calibri" pitchFamily="34" charset="-122"/>
                 <a:cs typeface="Calibri" pitchFamily="34" charset="-120"/>
               </a:rPr>
-              <a:t> — a repair rung: operates only on entries in its partition (optionally a single component), bounded by max_attempts; its work is always re-judged, never trusted</a:t>
-            </a:r>
-            <a:endParaRPr lang="en-US" sz="1700" dirty="0"/>
+              <a:t> — the division of blackboard entries among different workflow stages: each knowledge source watches its own collection of keys, and an entry sits in the partition of whichever rung currently owns it</a:t>
+            </a:r>
+            <a:endParaRPr lang="en-US" sz="1600" dirty="0"/>
           </a:p>
           <a:p>
             <a:pPr marL="342900" indent="-342900" algn="l">
@@ -5362,7 +5364,7 @@
               <a:buChar char="•"/>
             </a:pPr>
             <a:r>
-              <a:rPr lang="en-US" sz="1700" b="1" dirty="0">
+              <a:rPr lang="en-US" sz="1600" b="1" dirty="0">
                 <a:solidFill>
                   <a:srgbClr val="1E2761"/>
                 </a:solidFill>
@@ -5370,10 +5372,68 @@
                 <a:ea typeface="Calibri" pitchFamily="34" charset="-122"/>
                 <a:cs typeface="Calibri" pitchFamily="34" charset="-120"/>
               </a:rPr>
+              <a:t>Controller</a:t>
+            </a:r>
+            <a:r>
+              <a:rPr lang="en-US" sz="1600" dirty="0">
+                <a:solidFill>
+                  <a:srgbClr val="212121"/>
+                </a:solidFill>
+                <a:latin typeface="Calibri" pitchFamily="34" charset="0"/>
+                <a:ea typeface="Calibri" pitchFamily="34" charset="-122"/>
+                <a:cs typeface="Calibri" pitchFamily="34" charset="-120"/>
+              </a:rPr>
+              <a:t> — the cycle: evaluates every entry (provision first), dispatches keys onto outcome-routed chains, advances or hands off, escalates; halts only when everything is in good standing</a:t>
+            </a:r>
+            <a:endParaRPr lang="en-US" sz="1600" dirty="0"/>
+          </a:p>
+          <a:p>
+            <a:pPr marL="342900" indent="-342900" algn="l">
+              <a:buSzPct val="100000"/>
+              <a:buChar char="•"/>
+            </a:pPr>
+            <a:r>
+              <a:rPr lang="en-US" sz="1600" b="1" dirty="0">
+                <a:solidFill>
+                  <a:srgbClr val="1E2761"/>
+                </a:solidFill>
+                <a:latin typeface="Calibri" pitchFamily="34" charset="0"/>
+                <a:ea typeface="Calibri" pitchFamily="34" charset="-122"/>
+                <a:cs typeface="Calibri" pitchFamily="34" charset="-120"/>
+              </a:rPr>
+              <a:t>Knowledge source (KS)</a:t>
+            </a:r>
+            <a:r>
+              <a:rPr lang="en-US" sz="1600" dirty="0">
+                <a:solidFill>
+                  <a:srgbClr val="212121"/>
+                </a:solidFill>
+                <a:latin typeface="Calibri" pitchFamily="34" charset="0"/>
+                <a:ea typeface="Calibri" pitchFamily="34" charset="-122"/>
+                <a:cs typeface="Calibri" pitchFamily="34" charset="-120"/>
+              </a:rPr>
+              <a:t> — a repair rung: operates only on entries in its partition (optionally a single component), bounded by max_attempts; its work is always re-judged, never trusted</a:t>
+            </a:r>
+            <a:endParaRPr lang="en-US" sz="1600" dirty="0"/>
+          </a:p>
+          <a:p>
+            <a:pPr marL="342900" indent="-342900" algn="l">
+              <a:buSzPct val="100000"/>
+              <a:buChar char="•"/>
+            </a:pPr>
+            <a:r>
+              <a:rPr lang="en-US" sz="1600" b="1" dirty="0">
+                <a:solidFill>
+                  <a:srgbClr val="1E2761"/>
+                </a:solidFill>
+                <a:latin typeface="Calibri" pitchFamily="34" charset="0"/>
+                <a:ea typeface="Calibri" pitchFamily="34" charset="-122"/>
+                <a:cs typeface="Calibri" pitchFamily="34" charset="-120"/>
+              </a:rPr>
               <a:t>Route</a:t>
             </a:r>
             <a:r>
-              <a:rPr lang="en-US" sz="1700" dirty="0">
+              <a:rPr lang="en-US" sz="1600" dirty="0">
                 <a:solidFill>
                   <a:srgbClr val="212121"/>
                 </a:solidFill>
@@ -5383,7 +5443,36 @@
               </a:rPr>
               <a:t> — the per-key chains: on_fail = the repair ladder, on_pass = a confirmation chain before an entry may rest in good standing</a:t>
             </a:r>
-            <a:endParaRPr lang="en-US" sz="1700" dirty="0"/>
+            <a:endParaRPr lang="en-US" sz="1600" dirty="0"/>
+          </a:p>
+          <a:p>
+            <a:pPr marL="342900" indent="-342900" algn="l">
+              <a:buSzPct val="100000"/>
+              <a:buChar char="•"/>
+            </a:pPr>
+            <a:r>
+              <a:rPr lang="en-US" sz="1600" b="1" dirty="0">
+                <a:solidFill>
+                  <a:srgbClr val="1E2761"/>
+                </a:solidFill>
+                <a:latin typeface="Calibri" pitchFamily="34" charset="0"/>
+                <a:ea typeface="Calibri" pitchFamily="34" charset="-122"/>
+                <a:cs typeface="Calibri" pitchFamily="34" charset="-120"/>
+              </a:rPr>
+              <a:t>History / Ledger</a:t>
+            </a:r>
+            <a:r>
+              <a:rPr lang="en-US" sz="1600" dirty="0">
+                <a:solidFill>
+                  <a:srgbClr val="212121"/>
+                </a:solidFill>
+                <a:latin typeface="Calibri" pitchFamily="34" charset="0"/>
+                <a:ea typeface="Calibri" pitchFamily="34" charset="-122"/>
+                <a:cs typeface="Calibri" pitchFamily="34" charset="-120"/>
+              </a:rPr>
+              <a:t> — the blackboard's running record of every change across all segments — measurements, repairs, verdicts — the audit trail of the repair lifecycle</a:t>
+            </a:r>
+            <a:endParaRPr lang="en-US" sz="1600" dirty="0"/>
           </a:p>
         </p:txBody>
       </p:sp>

--- a/docs/video_slides_draft.pptx
+++ b/docs/video_slides_draft.pptx
@@ -5,7 +5,7 @@
     <p:sldMasterId id="2147483648" r:id="rId1"/>
   </p:sldMasterIdLst>
   <p:notesMasterIdLst>
-    <p:notesMasterId r:id="rId8"/>
+    <p:notesMasterId r:id="rId9"/>
   </p:notesMasterIdLst>
   <p:sldIdLst>
     <p:sldId id="256" r:id="rId2"/>
@@ -14,6 +14,7 @@
     <p:sldId id="259" r:id="rId5"/>
     <p:sldId id="260" r:id="rId6"/>
     <p:sldId id="261" r:id="rId7"/>
+    <p:sldId id="262" r:id="rId8"/>
   </p:sldIdLst>
   <p:sldSz cx="12192000" cy="6858000"/>
   <p:notesSz cx="6858000" cy="12192000"/>
@@ -142,7 +143,7 @@
     </p:spTree>
     <p:extLst>
       <p:ext uri="{BB962C8B-B14F-4D97-AF65-F5344CB8AC3E}">
-        <p14:creationId xmlns:p14="http://schemas.microsoft.com/office/powerpoint/2010/main" val="317768001"/>
+        <p14:creationId xmlns:p14="http://schemas.microsoft.com/office/powerpoint/2010/main" val="1495642631"/>
       </p:ext>
     </p:extLst>
   </p:cSld>
@@ -760,6 +761,95 @@
             <a:fld id="{F7021451-1387-4CA6-816F-3879F97B5CBC}" type="slidenum">
               <a:rPr lang="en-US"/>
               <a:t>6</a:t>
+            </a:fld>
+            <a:endParaRPr lang="en-US"/>
+          </a:p>
+        </p:txBody>
+      </p:sp>
+    </p:spTree>
+    <p:extLst>
+      <p:ext uri="{BB962C8B-B14F-4D97-AF65-F5344CB8AC3E}">
+        <p14:creationId xmlns:p14="http://schemas.microsoft.com/office/powerpoint/2010/main" val="1024086991"/>
+      </p:ext>
+    </p:extLst>
+  </p:cSld>
+  <p:clrMapOvr>
+    <a:masterClrMapping/>
+  </p:clrMapOvr>
+</p:notes>
+</file>
+
+<file path=ppt/notesSlides/notesSlide7.xml><?xml version="1.0" encoding="utf-8"?>
+<p:notes xmlns:a="http://schemas.openxmlformats.org/drawingml/2006/main" xmlns:r="http://schemas.openxmlformats.org/officeDocument/2006/relationships" xmlns:p="http://schemas.openxmlformats.org/presentationml/2006/main">
+  <p:cSld>
+    <p:spTree>
+      <p:nvGrpSpPr>
+        <p:cNvPr id="1" name=""/>
+        <p:cNvGrpSpPr/>
+        <p:nvPr/>
+      </p:nvGrpSpPr>
+      <p:grpSpPr>
+        <a:xfrm>
+          <a:off x="0" y="0"/>
+          <a:ext cx="0" cy="0"/>
+          <a:chOff x="0" y="0"/>
+          <a:chExt cx="0" cy="0"/>
+        </a:xfrm>
+      </p:grpSpPr>
+      <p:sp>
+        <p:nvSpPr>
+          <p:cNvPr id="2" name="Slide Image Placeholder 1"/>
+          <p:cNvSpPr>
+            <a:spLocks noGrp="1" noRot="1" noChangeAspect="1"/>
+          </p:cNvSpPr>
+          <p:nvPr>
+            <p:ph type="sldImg"/>
+          </p:nvPr>
+        </p:nvSpPr>
+        <p:spPr/>
+      </p:sp>
+      <p:sp>
+        <p:nvSpPr>
+          <p:cNvPr id="3" name="Notes Placeholder 2"/>
+          <p:cNvSpPr>
+            <a:spLocks noGrp="1"/>
+          </p:cNvSpPr>
+          <p:nvPr>
+            <p:ph type="body" idx="1"/>
+          </p:nvPr>
+        </p:nvSpPr>
+        <p:spPr/>
+        <p:txBody>
+          <a:bodyPr/>
+          <a:lstStyle/>
+          <a:p>
+            <a:r>
+              <a:rPr lang="en-US" dirty="0"/>
+              <a:t>The last two rows are the surprising ones - scenes 6-7 exist for them.
+Spoken hook (never on-slide text): 'This table is deliberately incomplete - the demo will show why.' The cheat / sysproof / gensrc tiers are capstone slide C's punchline: attacks forced them into existence. Do not pre-introduce them here.
+Same column shape (class -&gt; measured how -&gt; judged by -&gt; repair) as capstone slide B, so the audience recognizes it when it returns.</a:t>
+            </a:r>
+          </a:p>
+        </p:txBody>
+      </p:sp>
+      <p:sp>
+        <p:nvSpPr>
+          <p:cNvPr id="4" name="Slide Number Placeholder 3"/>
+          <p:cNvSpPr>
+            <a:spLocks noGrp="1"/>
+          </p:cNvSpPr>
+          <p:nvPr>
+            <p:ph type="sldNum" sz="quarter" idx="10"/>
+          </p:nvPr>
+        </p:nvSpPr>
+        <p:spPr/>
+        <p:txBody>
+          <a:bodyPr/>
+          <a:lstStyle/>
+          <a:p>
+            <a:fld id="{F7021451-1387-4CA6-816F-3879F97B5CBC}" type="slidenum">
+              <a:rPr lang="en-US"/>
+              <a:t>7</a:t>
             </a:fld>
             <a:endParaRPr lang="en-US"/>
           </a:p>
@@ -5476,6 +5566,2153 @@
           </a:p>
         </p:txBody>
       </p:sp>
+    </p:spTree>
+  </p:cSld>
+  <p:clrMapOvr>
+    <a:masterClrMapping/>
+  </p:clrMapOvr>
+</p:sld>
+</file>
+
+<file path=ppt/slides/slide7.xml><?xml version="1.0" encoding="utf-8"?>
+<p:sld xmlns:a="http://schemas.openxmlformats.org/drawingml/2006/main" xmlns:r="http://schemas.openxmlformats.org/officeDocument/2006/relationships" xmlns:p="http://schemas.openxmlformats.org/presentationml/2006/main">
+  <p:cSld name="Slide 7">
+    <p:bg>
+      <p:bgPr>
+        <a:solidFill>
+          <a:srgbClr val="FFFFFF"/>
+        </a:solidFill>
+        <a:effectLst/>
+      </p:bgPr>
+    </p:bg>
+    <p:spTree>
+      <p:nvGrpSpPr>
+        <p:cNvPr id="1" name=""/>
+        <p:cNvGrpSpPr/>
+        <p:nvPr/>
+      </p:nvGrpSpPr>
+      <p:grpSpPr>
+        <a:xfrm>
+          <a:off x="0" y="0"/>
+          <a:ext cx="0" cy="0"/>
+          <a:chOff x="0" y="0"/>
+          <a:chExt cx="0" cy="0"/>
+        </a:xfrm>
+      </p:grpSpPr>
+      <p:sp>
+        <p:nvSpPr>
+          <p:cNvPr id="2" name="Text 0"/>
+          <p:cNvSpPr/>
+          <p:nvPr/>
+        </p:nvSpPr>
+        <p:spPr>
+          <a:xfrm>
+            <a:off x="640080" y="411480"/>
+            <a:ext cx="10972800" cy="731520"/>
+          </a:xfrm>
+          <a:prstGeom prst="rect">
+            <a:avLst/>
+          </a:prstGeom>
+          <a:noFill/>
+          <a:ln/>
+        </p:spPr>
+        <p:txBody>
+          <a:bodyPr wrap="square" lIns="0" tIns="0" rIns="0" bIns="0" rtlCol="0" anchor="ctr"/>
+          <a:lstStyle/>
+          <a:p>
+            <a:pPr marL="0" indent="0">
+              <a:buNone/>
+            </a:pPr>
+            <a:r>
+              <a:rPr lang="en-US" sz="3400" b="1" dirty="0">
+                <a:solidFill>
+                  <a:srgbClr val="1E2761"/>
+                </a:solidFill>
+                <a:latin typeface="Cambria" pitchFamily="34" charset="0"/>
+                <a:ea typeface="Cambria" pitchFamily="34" charset="-122"/>
+                <a:cs typeface="Cambria" pitchFamily="34" charset="-120"/>
+              </a:rPr>
+              <a:t>Artifact classes</a:t>
+            </a:r>
+            <a:endParaRPr lang="en-US" sz="3400" dirty="0"/>
+          </a:p>
+        </p:txBody>
+      </p:sp>
+      <p:graphicFrame>
+        <p:nvGraphicFramePr>
+          <p:cNvPr id="8" name="Table 0"/>
+          <p:cNvGraphicFramePr>
+            <a:graphicFrameLocks noGrp="1"/>
+          </p:cNvGraphicFramePr>
+          <p:nvPr>
+            <p:extLst>
+              <p:ext uri="{D42A27DB-BD31-4B8C-83A1-F6EECF244321}">
+                <p14:modId xmlns:p14="http://schemas.microsoft.com/office/powerpoint/2010/main" val="191026570"/>
+              </p:ext>
+            </p:extLst>
+          </p:nvPr>
+        </p:nvGraphicFramePr>
+        <p:xfrm>
+          <a:off x="640080" y="1417320"/>
+          <a:ext cx="10881360" cy="4608576"/>
+        </p:xfrm>
+        <a:graphic>
+          <a:graphicData uri="http://schemas.openxmlformats.org/drawingml/2006/table">
+            <a:tbl>
+              <a:tblPr/>
+              <a:tblGrid>
+                <a:gridCol w="2194560">
+                  <a:extLst>
+                    <a:ext uri="{9D8B030D-6E8A-4147-A177-3AD203B41FA5}">
+                      <a16:colId xmlns:a16="http://schemas.microsoft.com/office/drawing/2014/main" val="20000"/>
+                    </a:ext>
+                  </a:extLst>
+                </a:gridCol>
+                <a:gridCol w="2651760">
+                  <a:extLst>
+                    <a:ext uri="{9D8B030D-6E8A-4147-A177-3AD203B41FA5}">
+                      <a16:colId xmlns:a16="http://schemas.microsoft.com/office/drawing/2014/main" val="20001"/>
+                    </a:ext>
+                  </a:extLst>
+                </a:gridCol>
+                <a:gridCol w="3017520">
+                  <a:extLst>
+                    <a:ext uri="{9D8B030D-6E8A-4147-A177-3AD203B41FA5}">
+                      <a16:colId xmlns:a16="http://schemas.microsoft.com/office/drawing/2014/main" val="20002"/>
+                    </a:ext>
+                  </a:extLst>
+                </a:gridCol>
+                <a:gridCol w="3017520">
+                  <a:extLst>
+                    <a:ext uri="{9D8B030D-6E8A-4147-A177-3AD203B41FA5}">
+                      <a16:colId xmlns:a16="http://schemas.microsoft.com/office/drawing/2014/main" val="20003"/>
+                    </a:ext>
+                  </a:extLst>
+                </a:gridCol>
+              </a:tblGrid>
+              <a:tr h="658368">
+                <a:tc>
+                  <a:txBody>
+                    <a:bodyPr/>
+                    <a:lstStyle/>
+                    <a:p>
+                      <a:pPr marL="0" indent="0" algn="l">
+                        <a:buNone/>
+                      </a:pPr>
+                      <a:r>
+                        <a:rPr lang="en-US" sz="1400" b="1" dirty="0">
+                          <a:solidFill>
+                            <a:srgbClr val="FFFFFF"/>
+                          </a:solidFill>
+                          <a:latin typeface="Calibri" pitchFamily="34" charset="0"/>
+                          <a:ea typeface="Calibri" pitchFamily="34" charset="-122"/>
+                          <a:cs typeface="Calibri" pitchFamily="34" charset="-120"/>
+                        </a:rPr>
+                        <a:t>Artifact Class</a:t>
+                      </a:r>
+                      <a:endParaRPr lang="en-US" sz="1400" dirty="0">
+                        <a:latin typeface="Calibri" charset="0"/>
+                        <a:ea typeface="Calibri" charset="0"/>
+                        <a:cs typeface="Calibri" charset="0"/>
+                      </a:endParaRPr>
+                    </a:p>
+                  </a:txBody>
+                  <a:tcPr marL="73152" marR="73152" marT="73152" marB="73152" anchor="ctr">
+                    <a:lnL w="12700" cap="flat" cmpd="sng" algn="ctr">
+                      <a:solidFill>
+                        <a:srgbClr val="D8DEEA"/>
+                      </a:solidFill>
+                      <a:prstDash val="solid"/>
+                      <a:round/>
+                      <a:headEnd type="none" w="med" len="med"/>
+                      <a:tailEnd type="none" w="med" len="med"/>
+                    </a:lnL>
+                    <a:lnR w="12700" cap="flat" cmpd="sng" algn="ctr">
+                      <a:solidFill>
+                        <a:srgbClr val="D8DEEA"/>
+                      </a:solidFill>
+                      <a:prstDash val="solid"/>
+                      <a:round/>
+                      <a:headEnd type="none" w="med" len="med"/>
+                      <a:tailEnd type="none" w="med" len="med"/>
+                    </a:lnR>
+                    <a:lnT w="12700" cap="flat" cmpd="sng" algn="ctr">
+                      <a:solidFill>
+                        <a:srgbClr val="D8DEEA"/>
+                      </a:solidFill>
+                      <a:prstDash val="solid"/>
+                      <a:round/>
+                      <a:headEnd type="none" w="med" len="med"/>
+                      <a:tailEnd type="none" w="med" len="med"/>
+                    </a:lnT>
+                    <a:lnB w="12700" cap="flat" cmpd="sng" algn="ctr">
+                      <a:solidFill>
+                        <a:srgbClr val="D8DEEA"/>
+                      </a:solidFill>
+                      <a:prstDash val="solid"/>
+                      <a:round/>
+                      <a:headEnd type="none" w="med" len="med"/>
+                      <a:tailEnd type="none" w="med" len="med"/>
+                    </a:lnB>
+                    <a:solidFill>
+                      <a:srgbClr val="1E2761"/>
+                    </a:solidFill>
+                  </a:tcPr>
+                </a:tc>
+                <a:tc>
+                  <a:txBody>
+                    <a:bodyPr/>
+                    <a:lstStyle/>
+                    <a:p>
+                      <a:pPr marL="0" indent="0" algn="l">
+                        <a:buNone/>
+                      </a:pPr>
+                      <a:r>
+                        <a:rPr lang="en-US" sz="1400" b="1" dirty="0">
+                          <a:solidFill>
+                            <a:srgbClr val="FFFFFF"/>
+                          </a:solidFill>
+                          <a:latin typeface="Calibri" pitchFamily="34" charset="0"/>
+                          <a:ea typeface="Calibri" pitchFamily="34" charset="-122"/>
+                          <a:cs typeface="Calibri" pitchFamily="34" charset="-120"/>
+                        </a:rPr>
+                        <a:t>Measured how</a:t>
+                      </a:r>
+                      <a:endParaRPr lang="en-US" sz="1400" dirty="0">
+                        <a:latin typeface="Calibri" charset="0"/>
+                        <a:ea typeface="Calibri" charset="0"/>
+                        <a:cs typeface="Calibri" charset="0"/>
+                      </a:endParaRPr>
+                    </a:p>
+                  </a:txBody>
+                  <a:tcPr marL="73152" marR="73152" marT="73152" marB="73152" anchor="ctr">
+                    <a:lnL w="12700" cap="flat" cmpd="sng" algn="ctr">
+                      <a:solidFill>
+                        <a:srgbClr val="D8DEEA"/>
+                      </a:solidFill>
+                      <a:prstDash val="solid"/>
+                      <a:round/>
+                      <a:headEnd type="none" w="med" len="med"/>
+                      <a:tailEnd type="none" w="med" len="med"/>
+                    </a:lnL>
+                    <a:lnR w="12700" cap="flat" cmpd="sng" algn="ctr">
+                      <a:solidFill>
+                        <a:srgbClr val="D8DEEA"/>
+                      </a:solidFill>
+                      <a:prstDash val="solid"/>
+                      <a:round/>
+                      <a:headEnd type="none" w="med" len="med"/>
+                      <a:tailEnd type="none" w="med" len="med"/>
+                    </a:lnR>
+                    <a:lnT w="12700" cap="flat" cmpd="sng" algn="ctr">
+                      <a:solidFill>
+                        <a:srgbClr val="D8DEEA"/>
+                      </a:solidFill>
+                      <a:prstDash val="solid"/>
+                      <a:round/>
+                      <a:headEnd type="none" w="med" len="med"/>
+                      <a:tailEnd type="none" w="med" len="med"/>
+                    </a:lnT>
+                    <a:lnB w="12700" cap="flat" cmpd="sng" algn="ctr">
+                      <a:solidFill>
+                        <a:srgbClr val="D8DEEA"/>
+                      </a:solidFill>
+                      <a:prstDash val="solid"/>
+                      <a:round/>
+                      <a:headEnd type="none" w="med" len="med"/>
+                      <a:tailEnd type="none" w="med" len="med"/>
+                    </a:lnB>
+                    <a:solidFill>
+                      <a:srgbClr val="1E2761"/>
+                    </a:solidFill>
+                  </a:tcPr>
+                </a:tc>
+                <a:tc>
+                  <a:txBody>
+                    <a:bodyPr/>
+                    <a:lstStyle/>
+                    <a:p>
+                      <a:pPr marL="0" indent="0" algn="l">
+                        <a:buNone/>
+                      </a:pPr>
+                      <a:r>
+                        <a:rPr lang="en-US" sz="1400" b="1" dirty="0">
+                          <a:solidFill>
+                            <a:srgbClr val="FFFFFF"/>
+                          </a:solidFill>
+                          <a:latin typeface="Calibri" pitchFamily="34" charset="0"/>
+                          <a:ea typeface="Calibri" pitchFamily="34" charset="-122"/>
+                          <a:cs typeface="Calibri" pitchFamily="34" charset="-120"/>
+                        </a:rPr>
+                        <a:t>Judged by</a:t>
+                      </a:r>
+                      <a:endParaRPr lang="en-US" sz="1400" dirty="0">
+                        <a:latin typeface="Calibri" charset="0"/>
+                        <a:ea typeface="Calibri" charset="0"/>
+                        <a:cs typeface="Calibri" charset="0"/>
+                      </a:endParaRPr>
+                    </a:p>
+                  </a:txBody>
+                  <a:tcPr marL="73152" marR="73152" marT="73152" marB="73152" anchor="ctr">
+                    <a:lnL w="12700" cap="flat" cmpd="sng" algn="ctr">
+                      <a:solidFill>
+                        <a:srgbClr val="D8DEEA"/>
+                      </a:solidFill>
+                      <a:prstDash val="solid"/>
+                      <a:round/>
+                      <a:headEnd type="none" w="med" len="med"/>
+                      <a:tailEnd type="none" w="med" len="med"/>
+                    </a:lnL>
+                    <a:lnR w="12700" cap="flat" cmpd="sng" algn="ctr">
+                      <a:solidFill>
+                        <a:srgbClr val="D8DEEA"/>
+                      </a:solidFill>
+                      <a:prstDash val="solid"/>
+                      <a:round/>
+                      <a:headEnd type="none" w="med" len="med"/>
+                      <a:tailEnd type="none" w="med" len="med"/>
+                    </a:lnR>
+                    <a:lnT w="12700" cap="flat" cmpd="sng" algn="ctr">
+                      <a:solidFill>
+                        <a:srgbClr val="D8DEEA"/>
+                      </a:solidFill>
+                      <a:prstDash val="solid"/>
+                      <a:round/>
+                      <a:headEnd type="none" w="med" len="med"/>
+                      <a:tailEnd type="none" w="med" len="med"/>
+                    </a:lnT>
+                    <a:lnB w="12700" cap="flat" cmpd="sng" algn="ctr">
+                      <a:solidFill>
+                        <a:srgbClr val="D8DEEA"/>
+                      </a:solidFill>
+                      <a:prstDash val="solid"/>
+                      <a:round/>
+                      <a:headEnd type="none" w="med" len="med"/>
+                      <a:tailEnd type="none" w="med" len="med"/>
+                    </a:lnB>
+                    <a:solidFill>
+                      <a:srgbClr val="1E2761"/>
+                    </a:solidFill>
+                  </a:tcPr>
+                </a:tc>
+                <a:tc>
+                  <a:txBody>
+                    <a:bodyPr/>
+                    <a:lstStyle/>
+                    <a:p>
+                      <a:pPr marL="0" indent="0" algn="l">
+                        <a:buNone/>
+                      </a:pPr>
+                      <a:r>
+                        <a:rPr lang="en-US" sz="1400" b="1" dirty="0">
+                          <a:solidFill>
+                            <a:srgbClr val="FFFFFF"/>
+                          </a:solidFill>
+                          <a:latin typeface="Calibri" pitchFamily="34" charset="0"/>
+                          <a:ea typeface="Calibri" pitchFamily="34" charset="-122"/>
+                          <a:cs typeface="Calibri" pitchFamily="34" charset="-120"/>
+                        </a:rPr>
+                        <a:t>Repair type</a:t>
+                      </a:r>
+                      <a:endParaRPr lang="en-US" sz="1400" dirty="0">
+                        <a:latin typeface="Calibri" charset="0"/>
+                        <a:ea typeface="Calibri" charset="0"/>
+                        <a:cs typeface="Calibri" charset="0"/>
+                      </a:endParaRPr>
+                    </a:p>
+                  </a:txBody>
+                  <a:tcPr marL="73152" marR="73152" marT="73152" marB="73152" anchor="ctr">
+                    <a:lnL w="12700" cap="flat" cmpd="sng" algn="ctr">
+                      <a:solidFill>
+                        <a:srgbClr val="D8DEEA"/>
+                      </a:solidFill>
+                      <a:prstDash val="solid"/>
+                      <a:round/>
+                      <a:headEnd type="none" w="med" len="med"/>
+                      <a:tailEnd type="none" w="med" len="med"/>
+                    </a:lnL>
+                    <a:lnR w="12700" cap="flat" cmpd="sng" algn="ctr">
+                      <a:solidFill>
+                        <a:srgbClr val="D8DEEA"/>
+                      </a:solidFill>
+                      <a:prstDash val="solid"/>
+                      <a:round/>
+                      <a:headEnd type="none" w="med" len="med"/>
+                      <a:tailEnd type="none" w="med" len="med"/>
+                    </a:lnR>
+                    <a:lnT w="12700" cap="flat" cmpd="sng" algn="ctr">
+                      <a:solidFill>
+                        <a:srgbClr val="D8DEEA"/>
+                      </a:solidFill>
+                      <a:prstDash val="solid"/>
+                      <a:round/>
+                      <a:headEnd type="none" w="med" len="med"/>
+                      <a:tailEnd type="none" w="med" len="med"/>
+                    </a:lnT>
+                    <a:lnB w="12700" cap="flat" cmpd="sng" algn="ctr">
+                      <a:solidFill>
+                        <a:srgbClr val="D8DEEA"/>
+                      </a:solidFill>
+                      <a:prstDash val="solid"/>
+                      <a:round/>
+                      <a:headEnd type="none" w="med" len="med"/>
+                      <a:tailEnd type="none" w="med" len="med"/>
+                    </a:lnB>
+                    <a:solidFill>
+                      <a:srgbClr val="1E2761"/>
+                    </a:solidFill>
+                  </a:tcPr>
+                </a:tc>
+                <a:extLst>
+                  <a:ext uri="{0D108BD9-81ED-4DB2-BD59-A6C34878D82A}">
+                    <a16:rowId xmlns:a16="http://schemas.microsoft.com/office/drawing/2014/main" val="10000"/>
+                  </a:ext>
+                </a:extLst>
+              </a:tr>
+              <a:tr h="658368">
+                <a:tc>
+                  <a:txBody>
+                    <a:bodyPr/>
+                    <a:lstStyle/>
+                    <a:p>
+                      <a:pPr marL="0" indent="0" algn="l">
+                        <a:buNone/>
+                      </a:pPr>
+                      <a:r>
+                        <a:rPr lang="en-US" sz="1250" b="1" dirty="0">
+                          <a:solidFill>
+                            <a:srgbClr val="212121"/>
+                          </a:solidFill>
+                          <a:latin typeface="Calibri" pitchFamily="34" charset="0"/>
+                          <a:ea typeface="Calibri" pitchFamily="34" charset="-122"/>
+                          <a:cs typeface="Calibri" pitchFamily="34" charset="-120"/>
+                        </a:rPr>
+                        <a:t>Model</a:t>
+                      </a:r>
+                      <a:endParaRPr lang="en-US" sz="1250" dirty="0">
+                        <a:latin typeface="Calibri" charset="0"/>
+                        <a:ea typeface="Calibri" charset="0"/>
+                        <a:cs typeface="Calibri" charset="0"/>
+                      </a:endParaRPr>
+                    </a:p>
+                  </a:txBody>
+                  <a:tcPr marL="73152" marR="73152" marT="73152" marB="73152" anchor="ctr">
+                    <a:lnL w="12700" cap="flat" cmpd="sng" algn="ctr">
+                      <a:solidFill>
+                        <a:srgbClr val="D8DEEA"/>
+                      </a:solidFill>
+                      <a:prstDash val="solid"/>
+                      <a:round/>
+                      <a:headEnd type="none" w="med" len="med"/>
+                      <a:tailEnd type="none" w="med" len="med"/>
+                    </a:lnL>
+                    <a:lnR w="12700" cap="flat" cmpd="sng" algn="ctr">
+                      <a:solidFill>
+                        <a:srgbClr val="D8DEEA"/>
+                      </a:solidFill>
+                      <a:prstDash val="solid"/>
+                      <a:round/>
+                      <a:headEnd type="none" w="med" len="med"/>
+                      <a:tailEnd type="none" w="med" len="med"/>
+                    </a:lnR>
+                    <a:lnT w="12700" cap="flat" cmpd="sng" algn="ctr">
+                      <a:solidFill>
+                        <a:srgbClr val="D8DEEA"/>
+                      </a:solidFill>
+                      <a:prstDash val="solid"/>
+                      <a:round/>
+                      <a:headEnd type="none" w="med" len="med"/>
+                      <a:tailEnd type="none" w="med" len="med"/>
+                    </a:lnT>
+                    <a:lnB w="12700" cap="flat" cmpd="sng" algn="ctr">
+                      <a:solidFill>
+                        <a:srgbClr val="D8DEEA"/>
+                      </a:solidFill>
+                      <a:prstDash val="solid"/>
+                      <a:round/>
+                      <a:headEnd type="none" w="med" len="med"/>
+                      <a:tailEnd type="none" w="med" len="med"/>
+                    </a:lnB>
+                    <a:solidFill>
+                      <a:srgbClr val="FFFFFF"/>
+                    </a:solidFill>
+                  </a:tcPr>
+                </a:tc>
+                <a:tc>
+                  <a:txBody>
+                    <a:bodyPr/>
+                    <a:lstStyle/>
+                    <a:p>
+                      <a:pPr marL="0" indent="0" algn="l">
+                        <a:buNone/>
+                      </a:pPr>
+                      <a:r>
+                        <a:rPr lang="en-US" sz="1250" dirty="0">
+                          <a:solidFill>
+                            <a:srgbClr val="212121"/>
+                          </a:solidFill>
+                          <a:latin typeface="Calibri" pitchFamily="34" charset="0"/>
+                          <a:ea typeface="Calibri" pitchFamily="34" charset="-122"/>
+                          <a:cs typeface="Calibri" pitchFamily="34" charset="-120"/>
+                        </a:rPr>
+                        <a:t>whole-file hash of spec files</a:t>
+                      </a:r>
+                      <a:endParaRPr lang="en-US" sz="1250" dirty="0">
+                        <a:latin typeface="Calibri" charset="0"/>
+                        <a:ea typeface="Calibri" charset="0"/>
+                        <a:cs typeface="Calibri" charset="0"/>
+                      </a:endParaRPr>
+                    </a:p>
+                  </a:txBody>
+                  <a:tcPr marL="73152" marR="73152" marT="73152" marB="73152" anchor="ctr">
+                    <a:lnL w="12700" cap="flat" cmpd="sng" algn="ctr">
+                      <a:solidFill>
+                        <a:srgbClr val="D8DEEA"/>
+                      </a:solidFill>
+                      <a:prstDash val="solid"/>
+                      <a:round/>
+                      <a:headEnd type="none" w="med" len="med"/>
+                      <a:tailEnd type="none" w="med" len="med"/>
+                    </a:lnL>
+                    <a:lnR w="12700" cap="flat" cmpd="sng" algn="ctr">
+                      <a:solidFill>
+                        <a:srgbClr val="D8DEEA"/>
+                      </a:solidFill>
+                      <a:prstDash val="solid"/>
+                      <a:round/>
+                      <a:headEnd type="none" w="med" len="med"/>
+                      <a:tailEnd type="none" w="med" len="med"/>
+                    </a:lnR>
+                    <a:lnT w="12700" cap="flat" cmpd="sng" algn="ctr">
+                      <a:solidFill>
+                        <a:srgbClr val="D8DEEA"/>
+                      </a:solidFill>
+                      <a:prstDash val="solid"/>
+                      <a:round/>
+                      <a:headEnd type="none" w="med" len="med"/>
+                      <a:tailEnd type="none" w="med" len="med"/>
+                    </a:lnT>
+                    <a:lnB w="12700" cap="flat" cmpd="sng" algn="ctr">
+                      <a:solidFill>
+                        <a:srgbClr val="D8DEEA"/>
+                      </a:solidFill>
+                      <a:prstDash val="solid"/>
+                      <a:round/>
+                      <a:headEnd type="none" w="med" len="med"/>
+                      <a:tailEnd type="none" w="med" len="med"/>
+                    </a:lnB>
+                    <a:solidFill>
+                      <a:srgbClr val="FFFFFF"/>
+                    </a:solidFill>
+                  </a:tcPr>
+                </a:tc>
+                <a:tc>
+                  <a:txBody>
+                    <a:bodyPr/>
+                    <a:lstStyle/>
+                    <a:p>
+                      <a:pPr marL="0" indent="0" algn="l">
+                        <a:buNone/>
+                      </a:pPr>
+                      <a:r>
+                        <a:rPr lang="en-US" sz="1250" dirty="0">
+                          <a:solidFill>
+                            <a:srgbClr val="212121"/>
+                          </a:solidFill>
+                          <a:latin typeface="Calibri" pitchFamily="34" charset="0"/>
+                          <a:ea typeface="Calibri" pitchFamily="34" charset="-122"/>
+                          <a:cs typeface="Calibri" pitchFamily="34" charset="-120"/>
+                        </a:rPr>
+                        <a:t>appraisal vs the signed golden</a:t>
+                      </a:r>
+                      <a:endParaRPr lang="en-US" sz="1250" dirty="0">
+                        <a:latin typeface="Calibri" charset="0"/>
+                        <a:ea typeface="Calibri" charset="0"/>
+                        <a:cs typeface="Calibri" charset="0"/>
+                      </a:endParaRPr>
+                    </a:p>
+                  </a:txBody>
+                  <a:tcPr marL="73152" marR="73152" marT="73152" marB="73152" anchor="ctr">
+                    <a:lnL w="12700" cap="flat" cmpd="sng" algn="ctr">
+                      <a:solidFill>
+                        <a:srgbClr val="D8DEEA"/>
+                      </a:solidFill>
+                      <a:prstDash val="solid"/>
+                      <a:round/>
+                      <a:headEnd type="none" w="med" len="med"/>
+                      <a:tailEnd type="none" w="med" len="med"/>
+                    </a:lnL>
+                    <a:lnR w="12700" cap="flat" cmpd="sng" algn="ctr">
+                      <a:solidFill>
+                        <a:srgbClr val="D8DEEA"/>
+                      </a:solidFill>
+                      <a:prstDash val="solid"/>
+                      <a:round/>
+                      <a:headEnd type="none" w="med" len="med"/>
+                      <a:tailEnd type="none" w="med" len="med"/>
+                    </a:lnR>
+                    <a:lnT w="12700" cap="flat" cmpd="sng" algn="ctr">
+                      <a:solidFill>
+                        <a:srgbClr val="D8DEEA"/>
+                      </a:solidFill>
+                      <a:prstDash val="solid"/>
+                      <a:round/>
+                      <a:headEnd type="none" w="med" len="med"/>
+                      <a:tailEnd type="none" w="med" len="med"/>
+                    </a:lnT>
+                    <a:lnB w="12700" cap="flat" cmpd="sng" algn="ctr">
+                      <a:solidFill>
+                        <a:srgbClr val="D8DEEA"/>
+                      </a:solidFill>
+                      <a:prstDash val="solid"/>
+                      <a:round/>
+                      <a:headEnd type="none" w="med" len="med"/>
+                      <a:tailEnd type="none" w="med" len="med"/>
+                    </a:lnB>
+                    <a:solidFill>
+                      <a:srgbClr val="FFFFFF"/>
+                    </a:solidFill>
+                  </a:tcPr>
+                </a:tc>
+                <a:tc>
+                  <a:txBody>
+                    <a:bodyPr/>
+                    <a:lstStyle/>
+                    <a:p>
+                      <a:pPr marL="0" indent="0" algn="l">
+                        <a:buNone/>
+                      </a:pPr>
+                      <a:r>
+                        <a:rPr lang="en-US" sz="1250" dirty="0">
+                          <a:solidFill>
+                            <a:srgbClr val="212121"/>
+                          </a:solidFill>
+                          <a:latin typeface="Calibri" pitchFamily="34" charset="0"/>
+                          <a:ea typeface="Calibri" pitchFamily="34" charset="-122"/>
+                          <a:cs typeface="Calibri" pitchFamily="34" charset="-120"/>
+                        </a:rPr>
+                        <a:t>restore from golden — or </a:t>
+                      </a:r>
+                      <a:r>
+                        <a:rPr lang="en-US" sz="1250" i="1" dirty="0">
+                          <a:solidFill>
+                            <a:srgbClr val="212121"/>
+                          </a:solidFill>
+                          <a:latin typeface="Calibri" pitchFamily="34" charset="0"/>
+                          <a:ea typeface="Calibri" pitchFamily="34" charset="-122"/>
+                          <a:cs typeface="Calibri" pitchFamily="34" charset="-120"/>
+                        </a:rPr>
+                        <a:t>bless</a:t>
+                      </a:r>
+                      <a:r>
+                        <a:rPr lang="en-US" sz="1250" dirty="0">
+                          <a:solidFill>
+                            <a:srgbClr val="212121"/>
+                          </a:solidFill>
+                          <a:latin typeface="Calibri" pitchFamily="34" charset="0"/>
+                          <a:ea typeface="Calibri" pitchFamily="34" charset="-122"/>
+                          <a:cs typeface="Calibri" pitchFamily="34" charset="-120"/>
+                        </a:rPr>
+                        <a:t> (sanctioned change)</a:t>
+                      </a:r>
+                      <a:endParaRPr lang="en-US" sz="1250" dirty="0">
+                        <a:latin typeface="Calibri" charset="0"/>
+                        <a:ea typeface="Calibri" charset="0"/>
+                        <a:cs typeface="Calibri" charset="0"/>
+                      </a:endParaRPr>
+                    </a:p>
+                  </a:txBody>
+                  <a:tcPr marL="73152" marR="73152" marT="73152" marB="73152" anchor="ctr">
+                    <a:lnL w="12700" cap="flat" cmpd="sng" algn="ctr">
+                      <a:solidFill>
+                        <a:srgbClr val="D8DEEA"/>
+                      </a:solidFill>
+                      <a:prstDash val="solid"/>
+                      <a:round/>
+                      <a:headEnd type="none" w="med" len="med"/>
+                      <a:tailEnd type="none" w="med" len="med"/>
+                    </a:lnL>
+                    <a:lnR w="12700" cap="flat" cmpd="sng" algn="ctr">
+                      <a:solidFill>
+                        <a:srgbClr val="D8DEEA"/>
+                      </a:solidFill>
+                      <a:prstDash val="solid"/>
+                      <a:round/>
+                      <a:headEnd type="none" w="med" len="med"/>
+                      <a:tailEnd type="none" w="med" len="med"/>
+                    </a:lnR>
+                    <a:lnT w="12700" cap="flat" cmpd="sng" algn="ctr">
+                      <a:solidFill>
+                        <a:srgbClr val="D8DEEA"/>
+                      </a:solidFill>
+                      <a:prstDash val="solid"/>
+                      <a:round/>
+                      <a:headEnd type="none" w="med" len="med"/>
+                      <a:tailEnd type="none" w="med" len="med"/>
+                    </a:lnT>
+                    <a:lnB w="12700" cap="flat" cmpd="sng" algn="ctr">
+                      <a:solidFill>
+                        <a:srgbClr val="D8DEEA"/>
+                      </a:solidFill>
+                      <a:prstDash val="solid"/>
+                      <a:round/>
+                      <a:headEnd type="none" w="med" len="med"/>
+                      <a:tailEnd type="none" w="med" len="med"/>
+                    </a:lnB>
+                    <a:solidFill>
+                      <a:srgbClr val="FFFFFF"/>
+                    </a:solidFill>
+                  </a:tcPr>
+                </a:tc>
+                <a:extLst>
+                  <a:ext uri="{0D108BD9-81ED-4DB2-BD59-A6C34878D82A}">
+                    <a16:rowId xmlns:a16="http://schemas.microsoft.com/office/drawing/2014/main" val="10001"/>
+                  </a:ext>
+                </a:extLst>
+              </a:tr>
+              <a:tr h="658368">
+                <a:tc>
+                  <a:txBody>
+                    <a:bodyPr/>
+                    <a:lstStyle/>
+                    <a:p>
+                      <a:pPr marL="0" indent="0" algn="l">
+                        <a:buNone/>
+                      </a:pPr>
+                      <a:r>
+                        <a:rPr lang="en-US" sz="1250" b="1" dirty="0">
+                          <a:solidFill>
+                            <a:srgbClr val="212121"/>
+                          </a:solidFill>
+                          <a:latin typeface="Calibri" pitchFamily="34" charset="0"/>
+                          <a:ea typeface="Calibri" pitchFamily="34" charset="-122"/>
+                          <a:cs typeface="Calibri" pitchFamily="34" charset="-120"/>
+                        </a:rPr>
+                        <a:t>Contract</a:t>
+                      </a:r>
+                      <a:endParaRPr lang="en-US" sz="1250" dirty="0">
+                        <a:latin typeface="Calibri" charset="0"/>
+                        <a:ea typeface="Calibri" charset="0"/>
+                        <a:cs typeface="Calibri" charset="0"/>
+                      </a:endParaRPr>
+                    </a:p>
+                  </a:txBody>
+                  <a:tcPr marL="73152" marR="73152" marT="73152" marB="73152" anchor="ctr">
+                    <a:lnL w="12700" cap="flat" cmpd="sng" algn="ctr">
+                      <a:solidFill>
+                        <a:srgbClr val="D8DEEA"/>
+                      </a:solidFill>
+                      <a:prstDash val="solid"/>
+                      <a:round/>
+                      <a:headEnd type="none" w="med" len="med"/>
+                      <a:tailEnd type="none" w="med" len="med"/>
+                    </a:lnL>
+                    <a:lnR w="12700" cap="flat" cmpd="sng" algn="ctr">
+                      <a:solidFill>
+                        <a:srgbClr val="D8DEEA"/>
+                      </a:solidFill>
+                      <a:prstDash val="solid"/>
+                      <a:round/>
+                      <a:headEnd type="none" w="med" len="med"/>
+                      <a:tailEnd type="none" w="med" len="med"/>
+                    </a:lnR>
+                    <a:lnT w="12700" cap="flat" cmpd="sng" algn="ctr">
+                      <a:solidFill>
+                        <a:srgbClr val="D8DEEA"/>
+                      </a:solidFill>
+                      <a:prstDash val="solid"/>
+                      <a:round/>
+                      <a:headEnd type="none" w="med" len="med"/>
+                      <a:tailEnd type="none" w="med" len="med"/>
+                    </a:lnT>
+                    <a:lnB w="12700" cap="flat" cmpd="sng" algn="ctr">
+                      <a:solidFill>
+                        <a:srgbClr val="D8DEEA"/>
+                      </a:solidFill>
+                      <a:prstDash val="solid"/>
+                      <a:round/>
+                      <a:headEnd type="none" w="med" len="med"/>
+                      <a:tailEnd type="none" w="med" len="med"/>
+                    </a:lnB>
+                    <a:solidFill>
+                      <a:srgbClr val="FFFFFF"/>
+                    </a:solidFill>
+                  </a:tcPr>
+                </a:tc>
+                <a:tc>
+                  <a:txBody>
+                    <a:bodyPr/>
+                    <a:lstStyle/>
+                    <a:p>
+                      <a:pPr marL="0" indent="0" algn="l">
+                        <a:buNone/>
+                      </a:pPr>
+                      <a:r>
+                        <a:rPr lang="en-US" sz="1250" dirty="0">
+                          <a:solidFill>
+                            <a:srgbClr val="212121"/>
+                          </a:solidFill>
+                          <a:latin typeface="Calibri" pitchFamily="34" charset="0"/>
+                          <a:ea typeface="Calibri" pitchFamily="34" charset="-122"/>
+                          <a:cs typeface="Calibri" pitchFamily="34" charset="-120"/>
+                        </a:rPr>
+                        <a:t>syntax-guided file slices</a:t>
+                      </a:r>
+                      <a:endParaRPr lang="en-US" sz="1250" dirty="0">
+                        <a:latin typeface="Calibri" charset="0"/>
+                        <a:ea typeface="Calibri" charset="0"/>
+                        <a:cs typeface="Calibri" charset="0"/>
+                      </a:endParaRPr>
+                    </a:p>
+                  </a:txBody>
+                  <a:tcPr marL="73152" marR="73152" marT="73152" marB="73152" anchor="ctr">
+                    <a:lnL w="12700" cap="flat" cmpd="sng" algn="ctr">
+                      <a:solidFill>
+                        <a:srgbClr val="D8DEEA"/>
+                      </a:solidFill>
+                      <a:prstDash val="solid"/>
+                      <a:round/>
+                      <a:headEnd type="none" w="med" len="med"/>
+                      <a:tailEnd type="none" w="med" len="med"/>
+                    </a:lnL>
+                    <a:lnR w="12700" cap="flat" cmpd="sng" algn="ctr">
+                      <a:solidFill>
+                        <a:srgbClr val="D8DEEA"/>
+                      </a:solidFill>
+                      <a:prstDash val="solid"/>
+                      <a:round/>
+                      <a:headEnd type="none" w="med" len="med"/>
+                      <a:tailEnd type="none" w="med" len="med"/>
+                    </a:lnR>
+                    <a:lnT w="12700" cap="flat" cmpd="sng" algn="ctr">
+                      <a:solidFill>
+                        <a:srgbClr val="D8DEEA"/>
+                      </a:solidFill>
+                      <a:prstDash val="solid"/>
+                      <a:round/>
+                      <a:headEnd type="none" w="med" len="med"/>
+                      <a:tailEnd type="none" w="med" len="med"/>
+                    </a:lnT>
+                    <a:lnB w="12700" cap="flat" cmpd="sng" algn="ctr">
+                      <a:solidFill>
+                        <a:srgbClr val="D8DEEA"/>
+                      </a:solidFill>
+                      <a:prstDash val="solid"/>
+                      <a:round/>
+                      <a:headEnd type="none" w="med" len="med"/>
+                      <a:tailEnd type="none" w="med" len="med"/>
+                    </a:lnB>
+                    <a:solidFill>
+                      <a:srgbClr val="FFFFFF"/>
+                    </a:solidFill>
+                  </a:tcPr>
+                </a:tc>
+                <a:tc>
+                  <a:txBody>
+                    <a:bodyPr/>
+                    <a:lstStyle/>
+                    <a:p>
+                      <a:pPr marL="0" indent="0" algn="l">
+                        <a:buNone/>
+                      </a:pPr>
+                      <a:r>
+                        <a:rPr lang="en-US" sz="1250" dirty="0">
+                          <a:solidFill>
+                            <a:srgbClr val="212121"/>
+                          </a:solidFill>
+                          <a:latin typeface="Calibri" pitchFamily="34" charset="0"/>
+                          <a:ea typeface="Calibri" pitchFamily="34" charset="-122"/>
+                          <a:cs typeface="Calibri" pitchFamily="34" charset="-120"/>
+                        </a:rPr>
+                        <a:t>slice-level appraisal, attributed by name</a:t>
+                      </a:r>
+                      <a:endParaRPr lang="en-US" sz="1250" dirty="0">
+                        <a:latin typeface="Calibri" charset="0"/>
+                        <a:ea typeface="Calibri" charset="0"/>
+                        <a:cs typeface="Calibri" charset="0"/>
+                      </a:endParaRPr>
+                    </a:p>
+                  </a:txBody>
+                  <a:tcPr marL="73152" marR="73152" marT="73152" marB="73152" anchor="ctr">
+                    <a:lnL w="12700" cap="flat" cmpd="sng" algn="ctr">
+                      <a:solidFill>
+                        <a:srgbClr val="D8DEEA"/>
+                      </a:solidFill>
+                      <a:prstDash val="solid"/>
+                      <a:round/>
+                      <a:headEnd type="none" w="med" len="med"/>
+                      <a:tailEnd type="none" w="med" len="med"/>
+                    </a:lnL>
+                    <a:lnR w="12700" cap="flat" cmpd="sng" algn="ctr">
+                      <a:solidFill>
+                        <a:srgbClr val="D8DEEA"/>
+                      </a:solidFill>
+                      <a:prstDash val="solid"/>
+                      <a:round/>
+                      <a:headEnd type="none" w="med" len="med"/>
+                      <a:tailEnd type="none" w="med" len="med"/>
+                    </a:lnR>
+                    <a:lnT w="12700" cap="flat" cmpd="sng" algn="ctr">
+                      <a:solidFill>
+                        <a:srgbClr val="D8DEEA"/>
+                      </a:solidFill>
+                      <a:prstDash val="solid"/>
+                      <a:round/>
+                      <a:headEnd type="none" w="med" len="med"/>
+                      <a:tailEnd type="none" w="med" len="med"/>
+                    </a:lnT>
+                    <a:lnB w="12700" cap="flat" cmpd="sng" algn="ctr">
+                      <a:solidFill>
+                        <a:srgbClr val="D8DEEA"/>
+                      </a:solidFill>
+                      <a:prstDash val="solid"/>
+                      <a:round/>
+                      <a:headEnd type="none" w="med" len="med"/>
+                      <a:tailEnd type="none" w="med" len="med"/>
+                    </a:lnB>
+                    <a:solidFill>
+                      <a:srgbClr val="FFFFFF"/>
+                    </a:solidFill>
+                  </a:tcPr>
+                </a:tc>
+                <a:tc>
+                  <a:txBody>
+                    <a:bodyPr/>
+                    <a:lstStyle/>
+                    <a:p>
+                      <a:pPr marL="0" indent="0" algn="l">
+                        <a:buNone/>
+                      </a:pPr>
+                      <a:r>
+                        <a:rPr lang="en-US" sz="1250" dirty="0">
+                          <a:solidFill>
+                            <a:srgbClr val="212121"/>
+                          </a:solidFill>
+                          <a:latin typeface="Calibri" pitchFamily="34" charset="0"/>
+                          <a:ea typeface="Calibri" pitchFamily="34" charset="-122"/>
+                          <a:cs typeface="Calibri" pitchFamily="34" charset="-120"/>
+                        </a:rPr>
+                        <a:t>restore golden slice</a:t>
+                      </a:r>
+                      <a:endParaRPr lang="en-US" sz="1250" dirty="0">
+                        <a:latin typeface="Calibri" charset="0"/>
+                        <a:ea typeface="Calibri" charset="0"/>
+                        <a:cs typeface="Calibri" charset="0"/>
+                      </a:endParaRPr>
+                    </a:p>
+                  </a:txBody>
+                  <a:tcPr marL="73152" marR="73152" marT="73152" marB="73152" anchor="ctr">
+                    <a:lnL w="12700" cap="flat" cmpd="sng" algn="ctr">
+                      <a:solidFill>
+                        <a:srgbClr val="D8DEEA"/>
+                      </a:solidFill>
+                      <a:prstDash val="solid"/>
+                      <a:round/>
+                      <a:headEnd type="none" w="med" len="med"/>
+                      <a:tailEnd type="none" w="med" len="med"/>
+                    </a:lnL>
+                    <a:lnR w="12700" cap="flat" cmpd="sng" algn="ctr">
+                      <a:solidFill>
+                        <a:srgbClr val="D8DEEA"/>
+                      </a:solidFill>
+                      <a:prstDash val="solid"/>
+                      <a:round/>
+                      <a:headEnd type="none" w="med" len="med"/>
+                      <a:tailEnd type="none" w="med" len="med"/>
+                    </a:lnR>
+                    <a:lnT w="12700" cap="flat" cmpd="sng" algn="ctr">
+                      <a:solidFill>
+                        <a:srgbClr val="D8DEEA"/>
+                      </a:solidFill>
+                      <a:prstDash val="solid"/>
+                      <a:round/>
+                      <a:headEnd type="none" w="med" len="med"/>
+                      <a:tailEnd type="none" w="med" len="med"/>
+                    </a:lnT>
+                    <a:lnB w="12700" cap="flat" cmpd="sng" algn="ctr">
+                      <a:solidFill>
+                        <a:srgbClr val="D8DEEA"/>
+                      </a:solidFill>
+                      <a:prstDash val="solid"/>
+                      <a:round/>
+                      <a:headEnd type="none" w="med" len="med"/>
+                      <a:tailEnd type="none" w="med" len="med"/>
+                    </a:lnB>
+                    <a:solidFill>
+                      <a:srgbClr val="FFFFFF"/>
+                    </a:solidFill>
+                  </a:tcPr>
+                </a:tc>
+                <a:extLst>
+                  <a:ext uri="{0D108BD9-81ED-4DB2-BD59-A6C34878D82A}">
+                    <a16:rowId xmlns:a16="http://schemas.microsoft.com/office/drawing/2014/main" val="10002"/>
+                  </a:ext>
+                </a:extLst>
+              </a:tr>
+              <a:tr h="658368">
+                <a:tc>
+                  <a:txBody>
+                    <a:bodyPr/>
+                    <a:lstStyle/>
+                    <a:p>
+                      <a:pPr marL="0" indent="0" algn="l">
+                        <a:buNone/>
+                      </a:pPr>
+                      <a:r>
+                        <a:rPr lang="en-US" sz="1250" b="1" dirty="0">
+                          <a:solidFill>
+                            <a:srgbClr val="212121"/>
+                          </a:solidFill>
+                          <a:latin typeface="Calibri" pitchFamily="34" charset="0"/>
+                          <a:ea typeface="Calibri" pitchFamily="34" charset="-122"/>
+                          <a:cs typeface="Calibri" pitchFamily="34" charset="-120"/>
+                        </a:rPr>
+                        <a:t>Implementation</a:t>
+                      </a:r>
+                      <a:endParaRPr lang="en-US" sz="1250" dirty="0">
+                        <a:latin typeface="Calibri" charset="0"/>
+                        <a:ea typeface="Calibri" charset="0"/>
+                        <a:cs typeface="Calibri" charset="0"/>
+                      </a:endParaRPr>
+                    </a:p>
+                  </a:txBody>
+                  <a:tcPr marL="73152" marR="73152" marT="73152" marB="73152" anchor="ctr">
+                    <a:lnL w="12700" cap="flat" cmpd="sng" algn="ctr">
+                      <a:solidFill>
+                        <a:srgbClr val="D8DEEA"/>
+                      </a:solidFill>
+                      <a:prstDash val="solid"/>
+                      <a:round/>
+                      <a:headEnd type="none" w="med" len="med"/>
+                      <a:tailEnd type="none" w="med" len="med"/>
+                    </a:lnL>
+                    <a:lnR w="12700" cap="flat" cmpd="sng" algn="ctr">
+                      <a:solidFill>
+                        <a:srgbClr val="D8DEEA"/>
+                      </a:solidFill>
+                      <a:prstDash val="solid"/>
+                      <a:round/>
+                      <a:headEnd type="none" w="med" len="med"/>
+                      <a:tailEnd type="none" w="med" len="med"/>
+                    </a:lnR>
+                    <a:lnT w="12700" cap="flat" cmpd="sng" algn="ctr">
+                      <a:solidFill>
+                        <a:srgbClr val="D8DEEA"/>
+                      </a:solidFill>
+                      <a:prstDash val="solid"/>
+                      <a:round/>
+                      <a:headEnd type="none" w="med" len="med"/>
+                      <a:tailEnd type="none" w="med" len="med"/>
+                    </a:lnT>
+                    <a:lnB w="12700" cap="flat" cmpd="sng" algn="ctr">
+                      <a:solidFill>
+                        <a:srgbClr val="D8DEEA"/>
+                      </a:solidFill>
+                      <a:prstDash val="solid"/>
+                      <a:round/>
+                      <a:headEnd type="none" w="med" len="med"/>
+                      <a:tailEnd type="none" w="med" len="med"/>
+                    </a:lnB>
+                    <a:solidFill>
+                      <a:srgbClr val="FFFFFF"/>
+                    </a:solidFill>
+                  </a:tcPr>
+                </a:tc>
+                <a:tc>
+                  <a:txBody>
+                    <a:bodyPr/>
+                    <a:lstStyle/>
+                    <a:p>
+                      <a:pPr marL="0" indent="0" algn="l">
+                        <a:buNone/>
+                      </a:pPr>
+                      <a:r>
+                        <a:rPr lang="en-US" sz="1250" dirty="0">
+                          <a:solidFill>
+                            <a:srgbClr val="212121"/>
+                          </a:solidFill>
+                          <a:latin typeface="Calibri" pitchFamily="34" charset="0"/>
+                          <a:ea typeface="Calibri" pitchFamily="34" charset="-122"/>
+                          <a:cs typeface="Calibri" pitchFamily="34" charset="-120"/>
+                        </a:rPr>
+                        <a:t>developer-owned code</a:t>
+                      </a:r>
+                      <a:endParaRPr lang="en-US" sz="1250" dirty="0">
+                        <a:latin typeface="Calibri" charset="0"/>
+                        <a:ea typeface="Calibri" charset="0"/>
+                        <a:cs typeface="Calibri" charset="0"/>
+                      </a:endParaRPr>
+                    </a:p>
+                  </a:txBody>
+                  <a:tcPr marL="73152" marR="73152" marT="73152" marB="73152" anchor="ctr">
+                    <a:lnL w="12700" cap="flat" cmpd="sng" algn="ctr">
+                      <a:solidFill>
+                        <a:srgbClr val="D8DEEA"/>
+                      </a:solidFill>
+                      <a:prstDash val="solid"/>
+                      <a:round/>
+                      <a:headEnd type="none" w="med" len="med"/>
+                      <a:tailEnd type="none" w="med" len="med"/>
+                    </a:lnL>
+                    <a:lnR w="12700" cap="flat" cmpd="sng" algn="ctr">
+                      <a:solidFill>
+                        <a:srgbClr val="D8DEEA"/>
+                      </a:solidFill>
+                      <a:prstDash val="solid"/>
+                      <a:round/>
+                      <a:headEnd type="none" w="med" len="med"/>
+                      <a:tailEnd type="none" w="med" len="med"/>
+                    </a:lnR>
+                    <a:lnT w="12700" cap="flat" cmpd="sng" algn="ctr">
+                      <a:solidFill>
+                        <a:srgbClr val="D8DEEA"/>
+                      </a:solidFill>
+                      <a:prstDash val="solid"/>
+                      <a:round/>
+                      <a:headEnd type="none" w="med" len="med"/>
+                      <a:tailEnd type="none" w="med" len="med"/>
+                    </a:lnT>
+                    <a:lnB w="12700" cap="flat" cmpd="sng" algn="ctr">
+                      <a:solidFill>
+                        <a:srgbClr val="D8DEEA"/>
+                      </a:solidFill>
+                      <a:prstDash val="solid"/>
+                      <a:round/>
+                      <a:headEnd type="none" w="med" len="med"/>
+                      <a:tailEnd type="none" w="med" len="med"/>
+                    </a:lnB>
+                    <a:solidFill>
+                      <a:srgbClr val="FFFFFF"/>
+                    </a:solidFill>
+                  </a:tcPr>
+                </a:tc>
+                <a:tc>
+                  <a:txBody>
+                    <a:bodyPr/>
+                    <a:lstStyle/>
+                    <a:p>
+                      <a:pPr marL="0" indent="0" algn="l">
+                        <a:buNone/>
+                      </a:pPr>
+                      <a:r>
+                        <a:rPr lang="en-US" sz="1250" dirty="0">
+                          <a:solidFill>
+                            <a:srgbClr val="212121"/>
+                          </a:solidFill>
+                          <a:latin typeface="Calibri" pitchFamily="34" charset="0"/>
+                          <a:ea typeface="Calibri" charset="0"/>
+                          <a:cs typeface="Calibri" pitchFamily="34" charset="-120"/>
+                        </a:rPr>
+                        <a:t>tests + verification of contracts</a:t>
+                      </a:r>
+                      <a:endParaRPr lang="en-US" sz="1250" dirty="0">
+                        <a:latin typeface="Calibri" charset="0"/>
+                        <a:ea typeface="Calibri" charset="0"/>
+                        <a:cs typeface="Calibri" charset="0"/>
+                      </a:endParaRPr>
+                    </a:p>
+                  </a:txBody>
+                  <a:tcPr marL="73152" marR="73152" marT="73152" marB="73152" anchor="ctr">
+                    <a:lnL w="12700" cap="flat" cmpd="sng" algn="ctr">
+                      <a:solidFill>
+                        <a:srgbClr val="D8DEEA"/>
+                      </a:solidFill>
+                      <a:prstDash val="solid"/>
+                      <a:round/>
+                      <a:headEnd type="none" w="med" len="med"/>
+                      <a:tailEnd type="none" w="med" len="med"/>
+                    </a:lnL>
+                    <a:lnR w="12700" cap="flat" cmpd="sng" algn="ctr">
+                      <a:solidFill>
+                        <a:srgbClr val="D8DEEA"/>
+                      </a:solidFill>
+                      <a:prstDash val="solid"/>
+                      <a:round/>
+                      <a:headEnd type="none" w="med" len="med"/>
+                      <a:tailEnd type="none" w="med" len="med"/>
+                    </a:lnR>
+                    <a:lnT w="12700" cap="flat" cmpd="sng" algn="ctr">
+                      <a:solidFill>
+                        <a:srgbClr val="D8DEEA"/>
+                      </a:solidFill>
+                      <a:prstDash val="solid"/>
+                      <a:round/>
+                      <a:headEnd type="none" w="med" len="med"/>
+                      <a:tailEnd type="none" w="med" len="med"/>
+                    </a:lnT>
+                    <a:lnB w="12700" cap="flat" cmpd="sng" algn="ctr">
+                      <a:solidFill>
+                        <a:srgbClr val="D8DEEA"/>
+                      </a:solidFill>
+                      <a:prstDash val="solid"/>
+                      <a:round/>
+                      <a:headEnd type="none" w="med" len="med"/>
+                      <a:tailEnd type="none" w="med" len="med"/>
+                    </a:lnB>
+                    <a:solidFill>
+                      <a:srgbClr val="FFFFFF"/>
+                    </a:solidFill>
+                  </a:tcPr>
+                </a:tc>
+                <a:tc>
+                  <a:txBody>
+                    <a:bodyPr/>
+                    <a:lstStyle/>
+                    <a:p>
+                      <a:pPr marL="0" indent="0" algn="l">
+                        <a:buNone/>
+                      </a:pPr>
+                      <a:r>
+                        <a:rPr lang="en-US" sz="1250" dirty="0">
+                          <a:solidFill>
+                            <a:srgbClr val="212121"/>
+                          </a:solidFill>
+                          <a:latin typeface="Calibri" pitchFamily="34" charset="0"/>
+                          <a:ea typeface="Calibri" pitchFamily="34" charset="-122"/>
+                          <a:cs typeface="Calibri" pitchFamily="34" charset="-120"/>
+                        </a:rPr>
+                        <a:t>code synthesis/repair</a:t>
+                      </a:r>
+                      <a:endParaRPr lang="en-US" sz="1250" dirty="0">
+                        <a:latin typeface="Calibri" charset="0"/>
+                        <a:ea typeface="Calibri" charset="0"/>
+                        <a:cs typeface="Calibri" charset="0"/>
+                      </a:endParaRPr>
+                    </a:p>
+                  </a:txBody>
+                  <a:tcPr marL="73152" marR="73152" marT="73152" marB="73152" anchor="ctr">
+                    <a:lnL w="12700" cap="flat" cmpd="sng" algn="ctr">
+                      <a:solidFill>
+                        <a:srgbClr val="D8DEEA"/>
+                      </a:solidFill>
+                      <a:prstDash val="solid"/>
+                      <a:round/>
+                      <a:headEnd type="none" w="med" len="med"/>
+                      <a:tailEnd type="none" w="med" len="med"/>
+                    </a:lnL>
+                    <a:lnR w="12700" cap="flat" cmpd="sng" algn="ctr">
+                      <a:solidFill>
+                        <a:srgbClr val="D8DEEA"/>
+                      </a:solidFill>
+                      <a:prstDash val="solid"/>
+                      <a:round/>
+                      <a:headEnd type="none" w="med" len="med"/>
+                      <a:tailEnd type="none" w="med" len="med"/>
+                    </a:lnR>
+                    <a:lnT w="12700" cap="flat" cmpd="sng" algn="ctr">
+                      <a:solidFill>
+                        <a:srgbClr val="D8DEEA"/>
+                      </a:solidFill>
+                      <a:prstDash val="solid"/>
+                      <a:round/>
+                      <a:headEnd type="none" w="med" len="med"/>
+                      <a:tailEnd type="none" w="med" len="med"/>
+                    </a:lnT>
+                    <a:lnB w="12700" cap="flat" cmpd="sng" algn="ctr">
+                      <a:solidFill>
+                        <a:srgbClr val="D8DEEA"/>
+                      </a:solidFill>
+                      <a:prstDash val="solid"/>
+                      <a:round/>
+                      <a:headEnd type="none" w="med" len="med"/>
+                      <a:tailEnd type="none" w="med" len="med"/>
+                    </a:lnB>
+                    <a:solidFill>
+                      <a:srgbClr val="FFFFFF"/>
+                    </a:solidFill>
+                  </a:tcPr>
+                </a:tc>
+                <a:extLst>
+                  <a:ext uri="{0D108BD9-81ED-4DB2-BD59-A6C34878D82A}">
+                    <a16:rowId xmlns:a16="http://schemas.microsoft.com/office/drawing/2014/main" val="10003"/>
+                  </a:ext>
+                </a:extLst>
+              </a:tr>
+              <a:tr h="658368">
+                <a:tc>
+                  <a:txBody>
+                    <a:bodyPr/>
+                    <a:lstStyle/>
+                    <a:p>
+                      <a:pPr marL="0" indent="0" algn="l">
+                        <a:buNone/>
+                      </a:pPr>
+                      <a:r>
+                        <a:rPr lang="en-US" sz="1250" b="1" dirty="0">
+                          <a:solidFill>
+                            <a:srgbClr val="212121"/>
+                          </a:solidFill>
+                          <a:latin typeface="Calibri" pitchFamily="34" charset="0"/>
+                          <a:ea typeface="Calibri" pitchFamily="34" charset="-122"/>
+                          <a:cs typeface="Calibri" pitchFamily="34" charset="-120"/>
+                        </a:rPr>
+                        <a:t>Proof / Verification</a:t>
+                      </a:r>
+                      <a:endParaRPr lang="en-US" sz="1250" dirty="0">
+                        <a:latin typeface="Calibri" charset="0"/>
+                        <a:ea typeface="Calibri" charset="0"/>
+                        <a:cs typeface="Calibri" charset="0"/>
+                      </a:endParaRPr>
+                    </a:p>
+                  </a:txBody>
+                  <a:tcPr marL="73152" marR="73152" marT="73152" marB="73152" anchor="ctr">
+                    <a:lnL w="12700" cap="flat" cmpd="sng" algn="ctr">
+                      <a:solidFill>
+                        <a:srgbClr val="D8DEEA"/>
+                      </a:solidFill>
+                      <a:prstDash val="solid"/>
+                      <a:round/>
+                      <a:headEnd type="none" w="med" len="med"/>
+                      <a:tailEnd type="none" w="med" len="med"/>
+                    </a:lnL>
+                    <a:lnR w="12700" cap="flat" cmpd="sng" algn="ctr">
+                      <a:solidFill>
+                        <a:srgbClr val="D8DEEA"/>
+                      </a:solidFill>
+                      <a:prstDash val="solid"/>
+                      <a:round/>
+                      <a:headEnd type="none" w="med" len="med"/>
+                      <a:tailEnd type="none" w="med" len="med"/>
+                    </a:lnR>
+                    <a:lnT w="12700" cap="flat" cmpd="sng" algn="ctr">
+                      <a:solidFill>
+                        <a:srgbClr val="D8DEEA"/>
+                      </a:solidFill>
+                      <a:prstDash val="solid"/>
+                      <a:round/>
+                      <a:headEnd type="none" w="med" len="med"/>
+                      <a:tailEnd type="none" w="med" len="med"/>
+                    </a:lnT>
+                    <a:lnB w="12700" cap="flat" cmpd="sng" algn="ctr">
+                      <a:solidFill>
+                        <a:srgbClr val="D8DEEA"/>
+                      </a:solidFill>
+                      <a:prstDash val="solid"/>
+                      <a:round/>
+                      <a:headEnd type="none" w="med" len="med"/>
+                      <a:tailEnd type="none" w="med" len="med"/>
+                    </a:lnB>
+                    <a:solidFill>
+                      <a:srgbClr val="FFFFFF"/>
+                    </a:solidFill>
+                  </a:tcPr>
+                </a:tc>
+                <a:tc>
+                  <a:txBody>
+                    <a:bodyPr/>
+                    <a:lstStyle/>
+                    <a:p>
+                      <a:pPr marL="0" indent="0" algn="l">
+                        <a:buNone/>
+                      </a:pPr>
+                      <a:r>
+                        <a:rPr lang="en-US" sz="1250" dirty="0">
+                          <a:solidFill>
+                            <a:srgbClr val="212121"/>
+                          </a:solidFill>
+                          <a:latin typeface="Calibri" pitchFamily="34" charset="0"/>
+                          <a:ea typeface="Calibri" pitchFamily="34" charset="-122"/>
+                          <a:cs typeface="Calibri" pitchFamily="34" charset="-120"/>
+                        </a:rPr>
+                        <a:t>live verification run</a:t>
+                      </a:r>
+                      <a:endParaRPr lang="en-US" sz="1250" dirty="0">
+                        <a:latin typeface="Calibri" charset="0"/>
+                        <a:ea typeface="Calibri" charset="0"/>
+                        <a:cs typeface="Calibri" charset="0"/>
+                      </a:endParaRPr>
+                    </a:p>
+                  </a:txBody>
+                  <a:tcPr marL="73152" marR="73152" marT="73152" marB="73152" anchor="ctr">
+                    <a:lnL w="12700" cap="flat" cmpd="sng" algn="ctr">
+                      <a:solidFill>
+                        <a:srgbClr val="D8DEEA"/>
+                      </a:solidFill>
+                      <a:prstDash val="solid"/>
+                      <a:round/>
+                      <a:headEnd type="none" w="med" len="med"/>
+                      <a:tailEnd type="none" w="med" len="med"/>
+                    </a:lnL>
+                    <a:lnR w="12700" cap="flat" cmpd="sng" algn="ctr">
+                      <a:solidFill>
+                        <a:srgbClr val="D8DEEA"/>
+                      </a:solidFill>
+                      <a:prstDash val="solid"/>
+                      <a:round/>
+                      <a:headEnd type="none" w="med" len="med"/>
+                      <a:tailEnd type="none" w="med" len="med"/>
+                    </a:lnR>
+                    <a:lnT w="12700" cap="flat" cmpd="sng" algn="ctr">
+                      <a:solidFill>
+                        <a:srgbClr val="D8DEEA"/>
+                      </a:solidFill>
+                      <a:prstDash val="solid"/>
+                      <a:round/>
+                      <a:headEnd type="none" w="med" len="med"/>
+                      <a:tailEnd type="none" w="med" len="med"/>
+                    </a:lnT>
+                    <a:lnB w="12700" cap="flat" cmpd="sng" algn="ctr">
+                      <a:solidFill>
+                        <a:srgbClr val="D8DEEA"/>
+                      </a:solidFill>
+                      <a:prstDash val="solid"/>
+                      <a:round/>
+                      <a:headEnd type="none" w="med" len="med"/>
+                      <a:tailEnd type="none" w="med" len="med"/>
+                    </a:lnB>
+                    <a:solidFill>
+                      <a:srgbClr val="FFFFFF"/>
+                    </a:solidFill>
+                  </a:tcPr>
+                </a:tc>
+                <a:tc>
+                  <a:txBody>
+                    <a:bodyPr/>
+                    <a:lstStyle/>
+                    <a:p>
+                      <a:pPr marL="0" indent="0" algn="l">
+                        <a:buNone/>
+                      </a:pPr>
+                      <a:r>
+                        <a:rPr lang="en-US" sz="1250" dirty="0">
+                          <a:solidFill>
+                            <a:srgbClr val="212121"/>
+                          </a:solidFill>
+                          <a:latin typeface="Calibri" pitchFamily="34" charset="0"/>
+                          <a:ea typeface="Calibri" pitchFamily="34" charset="-122"/>
+                          <a:cs typeface="Calibri" pitchFamily="34" charset="-120"/>
+                        </a:rPr>
+                        <a:t>verification kernel — fresh, never cached</a:t>
+                      </a:r>
+                      <a:endParaRPr lang="en-US" sz="1250" dirty="0">
+                        <a:latin typeface="Calibri" charset="0"/>
+                        <a:ea typeface="Calibri" charset="0"/>
+                        <a:cs typeface="Calibri" charset="0"/>
+                      </a:endParaRPr>
+                    </a:p>
+                  </a:txBody>
+                  <a:tcPr marL="73152" marR="73152" marT="73152" marB="73152" anchor="ctr">
+                    <a:lnL w="12700" cap="flat" cmpd="sng" algn="ctr">
+                      <a:solidFill>
+                        <a:srgbClr val="D8DEEA"/>
+                      </a:solidFill>
+                      <a:prstDash val="solid"/>
+                      <a:round/>
+                      <a:headEnd type="none" w="med" len="med"/>
+                      <a:tailEnd type="none" w="med" len="med"/>
+                    </a:lnL>
+                    <a:lnR w="12700" cap="flat" cmpd="sng" algn="ctr">
+                      <a:solidFill>
+                        <a:srgbClr val="D8DEEA"/>
+                      </a:solidFill>
+                      <a:prstDash val="solid"/>
+                      <a:round/>
+                      <a:headEnd type="none" w="med" len="med"/>
+                      <a:tailEnd type="none" w="med" len="med"/>
+                    </a:lnR>
+                    <a:lnT w="12700" cap="flat" cmpd="sng" algn="ctr">
+                      <a:solidFill>
+                        <a:srgbClr val="D8DEEA"/>
+                      </a:solidFill>
+                      <a:prstDash val="solid"/>
+                      <a:round/>
+                      <a:headEnd type="none" w="med" len="med"/>
+                      <a:tailEnd type="none" w="med" len="med"/>
+                    </a:lnT>
+                    <a:lnB w="12700" cap="flat" cmpd="sng" algn="ctr">
+                      <a:solidFill>
+                        <a:srgbClr val="D8DEEA"/>
+                      </a:solidFill>
+                      <a:prstDash val="solid"/>
+                      <a:round/>
+                      <a:headEnd type="none" w="med" len="med"/>
+                      <a:tailEnd type="none" w="med" len="med"/>
+                    </a:lnB>
+                    <a:solidFill>
+                      <a:srgbClr val="FFFFFF"/>
+                    </a:solidFill>
+                  </a:tcPr>
+                </a:tc>
+                <a:tc>
+                  <a:txBody>
+                    <a:bodyPr/>
+                    <a:lstStyle/>
+                    <a:p>
+                      <a:pPr marL="0" indent="0" algn="l">
+                        <a:buNone/>
+                      </a:pPr>
+                      <a:r>
+                        <a:rPr lang="en-US" sz="1250" dirty="0">
+                          <a:solidFill>
+                            <a:srgbClr val="212121"/>
+                          </a:solidFill>
+                          <a:latin typeface="Calibri" pitchFamily="34" charset="0"/>
+                          <a:ea typeface="Calibri" pitchFamily="34" charset="-122"/>
+                          <a:cs typeface="Calibri" pitchFamily="34" charset="-120"/>
+                        </a:rPr>
+                        <a:t>proof synthesis/repair</a:t>
+                      </a:r>
+                      <a:endParaRPr lang="en-US" sz="1250" dirty="0">
+                        <a:latin typeface="Calibri" charset="0"/>
+                        <a:ea typeface="Calibri" charset="0"/>
+                        <a:cs typeface="Calibri" charset="0"/>
+                      </a:endParaRPr>
+                    </a:p>
+                  </a:txBody>
+                  <a:tcPr marL="73152" marR="73152" marT="73152" marB="73152" anchor="ctr">
+                    <a:lnL w="12700" cap="flat" cmpd="sng" algn="ctr">
+                      <a:solidFill>
+                        <a:srgbClr val="D8DEEA"/>
+                      </a:solidFill>
+                      <a:prstDash val="solid"/>
+                      <a:round/>
+                      <a:headEnd type="none" w="med" len="med"/>
+                      <a:tailEnd type="none" w="med" len="med"/>
+                    </a:lnL>
+                    <a:lnR w="12700" cap="flat" cmpd="sng" algn="ctr">
+                      <a:solidFill>
+                        <a:srgbClr val="D8DEEA"/>
+                      </a:solidFill>
+                      <a:prstDash val="solid"/>
+                      <a:round/>
+                      <a:headEnd type="none" w="med" len="med"/>
+                      <a:tailEnd type="none" w="med" len="med"/>
+                    </a:lnR>
+                    <a:lnT w="12700" cap="flat" cmpd="sng" algn="ctr">
+                      <a:solidFill>
+                        <a:srgbClr val="D8DEEA"/>
+                      </a:solidFill>
+                      <a:prstDash val="solid"/>
+                      <a:round/>
+                      <a:headEnd type="none" w="med" len="med"/>
+                      <a:tailEnd type="none" w="med" len="med"/>
+                    </a:lnT>
+                    <a:lnB w="12700" cap="flat" cmpd="sng" algn="ctr">
+                      <a:solidFill>
+                        <a:srgbClr val="D8DEEA"/>
+                      </a:solidFill>
+                      <a:prstDash val="solid"/>
+                      <a:round/>
+                      <a:headEnd type="none" w="med" len="med"/>
+                      <a:tailEnd type="none" w="med" len="med"/>
+                    </a:lnB>
+                    <a:solidFill>
+                      <a:srgbClr val="FFFFFF"/>
+                    </a:solidFill>
+                  </a:tcPr>
+                </a:tc>
+                <a:extLst>
+                  <a:ext uri="{0D108BD9-81ED-4DB2-BD59-A6C34878D82A}">
+                    <a16:rowId xmlns:a16="http://schemas.microsoft.com/office/drawing/2014/main" val="10004"/>
+                  </a:ext>
+                </a:extLst>
+              </a:tr>
+              <a:tr h="658368">
+                <a:tc>
+                  <a:txBody>
+                    <a:bodyPr/>
+                    <a:lstStyle/>
+                    <a:p>
+                      <a:pPr marL="0" indent="0" algn="l">
+                        <a:buNone/>
+                      </a:pPr>
+                      <a:r>
+                        <a:rPr lang="en-US" sz="1250" b="1" dirty="0">
+                          <a:solidFill>
+                            <a:srgbClr val="1E2761"/>
+                          </a:solidFill>
+                          <a:latin typeface="Calibri" pitchFamily="34" charset="0"/>
+                          <a:ea typeface="Calibri" pitchFamily="34" charset="-122"/>
+                          <a:cs typeface="Calibri" pitchFamily="34" charset="-120"/>
+                        </a:rPr>
+                        <a:t>Toolchain </a:t>
+                      </a:r>
+                      <a:r>
+                        <a:rPr lang="en-US" sz="1100" i="1" dirty="0">
+                          <a:solidFill>
+                            <a:srgbClr val="1E2761"/>
+                          </a:solidFill>
+                          <a:latin typeface="Calibri" pitchFamily="34" charset="0"/>
+                          <a:ea typeface="Calibri" pitchFamily="34" charset="-122"/>
+                          <a:cs typeface="Calibri" pitchFamily="34" charset="-120"/>
+                        </a:rPr>
+                        <a:t>(cross-cutting)</a:t>
+                      </a:r>
+                      <a:endParaRPr lang="en-US" sz="1250" dirty="0">
+                        <a:latin typeface="Calibri" charset="0"/>
+                        <a:ea typeface="Calibri" charset="0"/>
+                        <a:cs typeface="Calibri" charset="0"/>
+                      </a:endParaRPr>
+                    </a:p>
+                  </a:txBody>
+                  <a:tcPr marL="73152" marR="73152" marT="73152" marB="73152" anchor="ctr">
+                    <a:lnL w="12700" cap="flat" cmpd="sng" algn="ctr">
+                      <a:solidFill>
+                        <a:srgbClr val="D8DEEA"/>
+                      </a:solidFill>
+                      <a:prstDash val="solid"/>
+                      <a:round/>
+                      <a:headEnd type="none" w="med" len="med"/>
+                      <a:tailEnd type="none" w="med" len="med"/>
+                    </a:lnL>
+                    <a:lnR w="12700" cap="flat" cmpd="sng" algn="ctr">
+                      <a:solidFill>
+                        <a:srgbClr val="D8DEEA"/>
+                      </a:solidFill>
+                      <a:prstDash val="solid"/>
+                      <a:round/>
+                      <a:headEnd type="none" w="med" len="med"/>
+                      <a:tailEnd type="none" w="med" len="med"/>
+                    </a:lnR>
+                    <a:lnT w="12700" cap="flat" cmpd="sng" algn="ctr">
+                      <a:solidFill>
+                        <a:srgbClr val="D8DEEA"/>
+                      </a:solidFill>
+                      <a:prstDash val="solid"/>
+                      <a:round/>
+                      <a:headEnd type="none" w="med" len="med"/>
+                      <a:tailEnd type="none" w="med" len="med"/>
+                    </a:lnT>
+                    <a:lnB w="12700" cap="flat" cmpd="sng" algn="ctr">
+                      <a:solidFill>
+                        <a:srgbClr val="D8DEEA"/>
+                      </a:solidFill>
+                      <a:prstDash val="solid"/>
+                      <a:round/>
+                      <a:headEnd type="none" w="med" len="med"/>
+                      <a:tailEnd type="none" w="med" len="med"/>
+                    </a:lnB>
+                    <a:solidFill>
+                      <a:srgbClr val="FFFFFF"/>
+                    </a:solidFill>
+                  </a:tcPr>
+                </a:tc>
+                <a:tc>
+                  <a:txBody>
+                    <a:bodyPr/>
+                    <a:lstStyle/>
+                    <a:p>
+                      <a:pPr marL="0" indent="0" algn="l">
+                        <a:buNone/>
+                      </a:pPr>
+                      <a:r>
+                        <a:rPr lang="en-US" sz="1250" dirty="0">
+                          <a:solidFill>
+                            <a:srgbClr val="212121"/>
+                          </a:solidFill>
+                          <a:latin typeface="Calibri" pitchFamily="34" charset="0"/>
+                          <a:ea typeface="Calibri" pitchFamily="34" charset="-122"/>
+                          <a:cs typeface="Calibri" pitchFamily="34" charset="-120"/>
+                        </a:rPr>
+                        <a:t>hashed </a:t>
+                      </a:r>
+                      <a:r>
+                        <a:rPr lang="en-US" sz="1250" b="1" dirty="0">
+                          <a:solidFill>
+                            <a:srgbClr val="212121"/>
+                          </a:solidFill>
+                          <a:latin typeface="Calibri" pitchFamily="34" charset="0"/>
+                          <a:ea typeface="Calibri" pitchFamily="34" charset="-122"/>
+                          <a:cs typeface="Calibri" pitchFamily="34" charset="-120"/>
+                        </a:rPr>
+                        <a:t>measure-then-use</a:t>
+                      </a:r>
+                      <a:endParaRPr lang="en-US" sz="1250" dirty="0">
+                        <a:latin typeface="Calibri" charset="0"/>
+                        <a:ea typeface="Calibri" charset="0"/>
+                        <a:cs typeface="Calibri" charset="0"/>
+                      </a:endParaRPr>
+                    </a:p>
+                  </a:txBody>
+                  <a:tcPr marL="73152" marR="73152" marT="73152" marB="73152" anchor="ctr">
+                    <a:lnL w="12700" cap="flat" cmpd="sng" algn="ctr">
+                      <a:solidFill>
+                        <a:srgbClr val="D8DEEA"/>
+                      </a:solidFill>
+                      <a:prstDash val="solid"/>
+                      <a:round/>
+                      <a:headEnd type="none" w="med" len="med"/>
+                      <a:tailEnd type="none" w="med" len="med"/>
+                    </a:lnL>
+                    <a:lnR w="12700" cap="flat" cmpd="sng" algn="ctr">
+                      <a:solidFill>
+                        <a:srgbClr val="D8DEEA"/>
+                      </a:solidFill>
+                      <a:prstDash val="solid"/>
+                      <a:round/>
+                      <a:headEnd type="none" w="med" len="med"/>
+                      <a:tailEnd type="none" w="med" len="med"/>
+                    </a:lnR>
+                    <a:lnT w="12700" cap="flat" cmpd="sng" algn="ctr">
+                      <a:solidFill>
+                        <a:srgbClr val="D8DEEA"/>
+                      </a:solidFill>
+                      <a:prstDash val="solid"/>
+                      <a:round/>
+                      <a:headEnd type="none" w="med" len="med"/>
+                      <a:tailEnd type="none" w="med" len="med"/>
+                    </a:lnT>
+                    <a:lnB w="12700" cap="flat" cmpd="sng" algn="ctr">
+                      <a:solidFill>
+                        <a:srgbClr val="D8DEEA"/>
+                      </a:solidFill>
+                      <a:prstDash val="solid"/>
+                      <a:round/>
+                      <a:headEnd type="none" w="med" len="med"/>
+                      <a:tailEnd type="none" w="med" len="med"/>
+                    </a:lnB>
+                    <a:solidFill>
+                      <a:srgbClr val="FFFFFF"/>
+                    </a:solidFill>
+                  </a:tcPr>
+                </a:tc>
+                <a:tc>
+                  <a:txBody>
+                    <a:bodyPr/>
+                    <a:lstStyle/>
+                    <a:p>
+                      <a:pPr marL="0" indent="0" algn="l">
+                        <a:buNone/>
+                      </a:pPr>
+                      <a:r>
+                        <a:rPr lang="en-US" sz="1250" dirty="0">
+                          <a:solidFill>
+                            <a:srgbClr val="212121"/>
+                          </a:solidFill>
+                          <a:latin typeface="Calibri" pitchFamily="34" charset="0"/>
+                          <a:ea typeface="Calibri" pitchFamily="34" charset="-122"/>
+                          <a:cs typeface="Calibri" pitchFamily="34" charset="-120"/>
+                        </a:rPr>
+                        <a:t>the tool hash(es), taken in the same term</a:t>
+                      </a:r>
+                      <a:endParaRPr lang="en-US" sz="1250" dirty="0">
+                        <a:latin typeface="Calibri" charset="0"/>
+                        <a:ea typeface="Calibri" charset="0"/>
+                        <a:cs typeface="Calibri" charset="0"/>
+                      </a:endParaRPr>
+                    </a:p>
+                  </a:txBody>
+                  <a:tcPr marL="73152" marR="73152" marT="73152" marB="73152" anchor="ctr">
+                    <a:lnL w="12700" cap="flat" cmpd="sng" algn="ctr">
+                      <a:solidFill>
+                        <a:srgbClr val="D8DEEA"/>
+                      </a:solidFill>
+                      <a:prstDash val="solid"/>
+                      <a:round/>
+                      <a:headEnd type="none" w="med" len="med"/>
+                      <a:tailEnd type="none" w="med" len="med"/>
+                    </a:lnL>
+                    <a:lnR w="12700" cap="flat" cmpd="sng" algn="ctr">
+                      <a:solidFill>
+                        <a:srgbClr val="D8DEEA"/>
+                      </a:solidFill>
+                      <a:prstDash val="solid"/>
+                      <a:round/>
+                      <a:headEnd type="none" w="med" len="med"/>
+                      <a:tailEnd type="none" w="med" len="med"/>
+                    </a:lnR>
+                    <a:lnT w="12700" cap="flat" cmpd="sng" algn="ctr">
+                      <a:solidFill>
+                        <a:srgbClr val="D8DEEA"/>
+                      </a:solidFill>
+                      <a:prstDash val="solid"/>
+                      <a:round/>
+                      <a:headEnd type="none" w="med" len="med"/>
+                      <a:tailEnd type="none" w="med" len="med"/>
+                    </a:lnT>
+                    <a:lnB w="12700" cap="flat" cmpd="sng" algn="ctr">
+                      <a:solidFill>
+                        <a:srgbClr val="D8DEEA"/>
+                      </a:solidFill>
+                      <a:prstDash val="solid"/>
+                      <a:round/>
+                      <a:headEnd type="none" w="med" len="med"/>
+                      <a:tailEnd type="none" w="med" len="med"/>
+                    </a:lnB>
+                    <a:solidFill>
+                      <a:srgbClr val="FFFFFF"/>
+                    </a:solidFill>
+                  </a:tcPr>
+                </a:tc>
+                <a:tc>
+                  <a:txBody>
+                    <a:bodyPr/>
+                    <a:lstStyle/>
+                    <a:p>
+                      <a:pPr marL="0" indent="0" algn="l">
+                        <a:buNone/>
+                      </a:pPr>
+                      <a:r>
+                        <a:rPr lang="en-US" sz="1250" dirty="0">
+                          <a:solidFill>
+                            <a:srgbClr val="212121"/>
+                          </a:solidFill>
+                          <a:latin typeface="Calibri" pitchFamily="34" charset="0"/>
+                          <a:ea typeface="Calibri" pitchFamily="34" charset="-122"/>
+                          <a:cs typeface="Calibri" pitchFamily="34" charset="-120"/>
+                        </a:rPr>
+                        <a:t>out-of-band or pre-sanctioned restore</a:t>
+                      </a:r>
+                      <a:endParaRPr lang="en-US" sz="1250" dirty="0">
+                        <a:latin typeface="Calibri" charset="0"/>
+                        <a:ea typeface="Calibri" charset="0"/>
+                        <a:cs typeface="Calibri" charset="0"/>
+                      </a:endParaRPr>
+                    </a:p>
+                  </a:txBody>
+                  <a:tcPr marL="73152" marR="73152" marT="73152" marB="73152" anchor="ctr">
+                    <a:lnL w="12700" cap="flat" cmpd="sng" algn="ctr">
+                      <a:solidFill>
+                        <a:srgbClr val="D8DEEA"/>
+                      </a:solidFill>
+                      <a:prstDash val="solid"/>
+                      <a:round/>
+                      <a:headEnd type="none" w="med" len="med"/>
+                      <a:tailEnd type="none" w="med" len="med"/>
+                    </a:lnL>
+                    <a:lnR w="12700" cap="flat" cmpd="sng" algn="ctr">
+                      <a:solidFill>
+                        <a:srgbClr val="D8DEEA"/>
+                      </a:solidFill>
+                      <a:prstDash val="solid"/>
+                      <a:round/>
+                      <a:headEnd type="none" w="med" len="med"/>
+                      <a:tailEnd type="none" w="med" len="med"/>
+                    </a:lnR>
+                    <a:lnT w="12700" cap="flat" cmpd="sng" algn="ctr">
+                      <a:solidFill>
+                        <a:srgbClr val="D8DEEA"/>
+                      </a:solidFill>
+                      <a:prstDash val="solid"/>
+                      <a:round/>
+                      <a:headEnd type="none" w="med" len="med"/>
+                      <a:tailEnd type="none" w="med" len="med"/>
+                    </a:lnT>
+                    <a:lnB w="12700" cap="flat" cmpd="sng" algn="ctr">
+                      <a:solidFill>
+                        <a:srgbClr val="D8DEEA"/>
+                      </a:solidFill>
+                      <a:prstDash val="solid"/>
+                      <a:round/>
+                      <a:headEnd type="none" w="med" len="med"/>
+                      <a:tailEnd type="none" w="med" len="med"/>
+                    </a:lnB>
+                    <a:solidFill>
+                      <a:srgbClr val="FFFFFF"/>
+                    </a:solidFill>
+                  </a:tcPr>
+                </a:tc>
+                <a:extLst>
+                  <a:ext uri="{0D108BD9-81ED-4DB2-BD59-A6C34878D82A}">
+                    <a16:rowId xmlns:a16="http://schemas.microsoft.com/office/drawing/2014/main" val="10005"/>
+                  </a:ext>
+                </a:extLst>
+              </a:tr>
+              <a:tr h="658368">
+                <a:tc>
+                  <a:txBody>
+                    <a:bodyPr/>
+                    <a:lstStyle/>
+                    <a:p>
+                      <a:pPr marL="0" indent="0" algn="l">
+                        <a:buNone/>
+                      </a:pPr>
+                      <a:r>
+                        <a:rPr lang="en-US" sz="1250" b="1" dirty="0">
+                          <a:solidFill>
+                            <a:srgbClr val="1E2761"/>
+                          </a:solidFill>
+                          <a:latin typeface="Calibri" pitchFamily="34" charset="0"/>
+                          <a:ea typeface="Calibri" pitchFamily="34" charset="-122"/>
+                          <a:cs typeface="Calibri" pitchFamily="34" charset="-120"/>
+                        </a:rPr>
+                        <a:t>Trust state </a:t>
+                      </a:r>
+                      <a:r>
+                        <a:rPr lang="en-US" sz="1100" i="1" dirty="0">
+                          <a:solidFill>
+                            <a:srgbClr val="1E2761"/>
+                          </a:solidFill>
+                          <a:latin typeface="Calibri" pitchFamily="34" charset="0"/>
+                          <a:ea typeface="Calibri" pitchFamily="34" charset="-122"/>
+                          <a:cs typeface="Calibri" pitchFamily="34" charset="-120"/>
+                        </a:rPr>
+                        <a:t>(cross-cutting)</a:t>
+                      </a:r>
+                      <a:endParaRPr lang="en-US" sz="1250" dirty="0">
+                        <a:latin typeface="Calibri" charset="0"/>
+                        <a:ea typeface="Calibri" charset="0"/>
+                        <a:cs typeface="Calibri" charset="0"/>
+                      </a:endParaRPr>
+                    </a:p>
+                  </a:txBody>
+                  <a:tcPr marL="73152" marR="73152" marT="73152" marB="73152" anchor="ctr">
+                    <a:lnL w="12700" cap="flat" cmpd="sng" algn="ctr">
+                      <a:solidFill>
+                        <a:srgbClr val="D8DEEA"/>
+                      </a:solidFill>
+                      <a:prstDash val="solid"/>
+                      <a:round/>
+                      <a:headEnd type="none" w="med" len="med"/>
+                      <a:tailEnd type="none" w="med" len="med"/>
+                    </a:lnL>
+                    <a:lnR w="12700" cap="flat" cmpd="sng" algn="ctr">
+                      <a:solidFill>
+                        <a:srgbClr val="D8DEEA"/>
+                      </a:solidFill>
+                      <a:prstDash val="solid"/>
+                      <a:round/>
+                      <a:headEnd type="none" w="med" len="med"/>
+                      <a:tailEnd type="none" w="med" len="med"/>
+                    </a:lnR>
+                    <a:lnT w="12700" cap="flat" cmpd="sng" algn="ctr">
+                      <a:solidFill>
+                        <a:srgbClr val="D8DEEA"/>
+                      </a:solidFill>
+                      <a:prstDash val="solid"/>
+                      <a:round/>
+                      <a:headEnd type="none" w="med" len="med"/>
+                      <a:tailEnd type="none" w="med" len="med"/>
+                    </a:lnT>
+                    <a:lnB w="12700" cap="flat" cmpd="sng" algn="ctr">
+                      <a:solidFill>
+                        <a:srgbClr val="D8DEEA"/>
+                      </a:solidFill>
+                      <a:prstDash val="solid"/>
+                      <a:round/>
+                      <a:headEnd type="none" w="med" len="med"/>
+                      <a:tailEnd type="none" w="med" len="med"/>
+                    </a:lnB>
+                    <a:solidFill>
+                      <a:srgbClr val="FFFFFF"/>
+                    </a:solidFill>
+                  </a:tcPr>
+                </a:tc>
+                <a:tc>
+                  <a:txBody>
+                    <a:bodyPr/>
+                    <a:lstStyle/>
+                    <a:p>
+                      <a:pPr marL="0" indent="0" algn="l">
+                        <a:buNone/>
+                      </a:pPr>
+                      <a:r>
+                        <a:rPr lang="en-US" sz="1250" dirty="0">
+                          <a:solidFill>
+                            <a:srgbClr val="212121"/>
+                          </a:solidFill>
+                          <a:latin typeface="Calibri" pitchFamily="34" charset="0"/>
+                          <a:ea typeface="Calibri" pitchFamily="34" charset="-122"/>
+                          <a:cs typeface="Calibri" pitchFamily="34" charset="-120"/>
+                        </a:rPr>
+                        <a:t>bundles, goldens, signatures</a:t>
+                      </a:r>
+                      <a:endParaRPr lang="en-US" sz="1250" dirty="0">
+                        <a:latin typeface="Calibri" charset="0"/>
+                        <a:ea typeface="Calibri" charset="0"/>
+                        <a:cs typeface="Calibri" charset="0"/>
+                      </a:endParaRPr>
+                    </a:p>
+                  </a:txBody>
+                  <a:tcPr marL="73152" marR="73152" marT="73152" marB="73152" anchor="ctr">
+                    <a:lnL w="12700" cap="flat" cmpd="sng" algn="ctr">
+                      <a:solidFill>
+                        <a:srgbClr val="D8DEEA"/>
+                      </a:solidFill>
+                      <a:prstDash val="solid"/>
+                      <a:round/>
+                      <a:headEnd type="none" w="med" len="med"/>
+                      <a:tailEnd type="none" w="med" len="med"/>
+                    </a:lnL>
+                    <a:lnR w="12700" cap="flat" cmpd="sng" algn="ctr">
+                      <a:solidFill>
+                        <a:srgbClr val="D8DEEA"/>
+                      </a:solidFill>
+                      <a:prstDash val="solid"/>
+                      <a:round/>
+                      <a:headEnd type="none" w="med" len="med"/>
+                      <a:tailEnd type="none" w="med" len="med"/>
+                    </a:lnR>
+                    <a:lnT w="12700" cap="flat" cmpd="sng" algn="ctr">
+                      <a:solidFill>
+                        <a:srgbClr val="D8DEEA"/>
+                      </a:solidFill>
+                      <a:prstDash val="solid"/>
+                      <a:round/>
+                      <a:headEnd type="none" w="med" len="med"/>
+                      <a:tailEnd type="none" w="med" len="med"/>
+                    </a:lnT>
+                    <a:lnB w="12700" cap="flat" cmpd="sng" algn="ctr">
+                      <a:solidFill>
+                        <a:srgbClr val="D8DEEA"/>
+                      </a:solidFill>
+                      <a:prstDash val="solid"/>
+                      <a:round/>
+                      <a:headEnd type="none" w="med" len="med"/>
+                      <a:tailEnd type="none" w="med" len="med"/>
+                    </a:lnB>
+                    <a:solidFill>
+                      <a:srgbClr val="FFFFFF"/>
+                    </a:solidFill>
+                  </a:tcPr>
+                </a:tc>
+                <a:tc>
+                  <a:txBody>
+                    <a:bodyPr/>
+                    <a:lstStyle/>
+                    <a:p>
+                      <a:pPr marL="0" indent="0" algn="l">
+                        <a:buNone/>
+                      </a:pPr>
+                      <a:r>
+                        <a:rPr lang="en-US" sz="1250" dirty="0">
+                          <a:solidFill>
+                            <a:srgbClr val="212121"/>
+                          </a:solidFill>
+                          <a:latin typeface="Calibri" pitchFamily="34" charset="0"/>
+                          <a:ea typeface="Calibri" pitchFamily="34" charset="-122"/>
+                          <a:cs typeface="Calibri" pitchFamily="34" charset="-120"/>
+                        </a:rPr>
+                        <a:t>appraisal vs the signed golden or derived</a:t>
+                      </a:r>
+                      <a:endParaRPr lang="en-US" sz="1250" dirty="0">
+                        <a:latin typeface="Calibri" charset="0"/>
+                        <a:ea typeface="Calibri" charset="0"/>
+                        <a:cs typeface="Calibri" charset="0"/>
+                      </a:endParaRPr>
+                    </a:p>
+                  </a:txBody>
+                  <a:tcPr marL="73152" marR="73152" marT="73152" marB="73152" anchor="ctr">
+                    <a:lnL w="12700" cap="flat" cmpd="sng" algn="ctr">
+                      <a:solidFill>
+                        <a:srgbClr val="D8DEEA"/>
+                      </a:solidFill>
+                      <a:prstDash val="solid"/>
+                      <a:round/>
+                      <a:headEnd type="none" w="med" len="med"/>
+                      <a:tailEnd type="none" w="med" len="med"/>
+                    </a:lnL>
+                    <a:lnR w="12700" cap="flat" cmpd="sng" algn="ctr">
+                      <a:solidFill>
+                        <a:srgbClr val="D8DEEA"/>
+                      </a:solidFill>
+                      <a:prstDash val="solid"/>
+                      <a:round/>
+                      <a:headEnd type="none" w="med" len="med"/>
+                      <a:tailEnd type="none" w="med" len="med"/>
+                    </a:lnR>
+                    <a:lnT w="12700" cap="flat" cmpd="sng" algn="ctr">
+                      <a:solidFill>
+                        <a:srgbClr val="D8DEEA"/>
+                      </a:solidFill>
+                      <a:prstDash val="solid"/>
+                      <a:round/>
+                      <a:headEnd type="none" w="med" len="med"/>
+                      <a:tailEnd type="none" w="med" len="med"/>
+                    </a:lnT>
+                    <a:lnB w="12700" cap="flat" cmpd="sng" algn="ctr">
+                      <a:solidFill>
+                        <a:srgbClr val="D8DEEA"/>
+                      </a:solidFill>
+                      <a:prstDash val="solid"/>
+                      <a:round/>
+                      <a:headEnd type="none" w="med" len="med"/>
+                      <a:tailEnd type="none" w="med" len="med"/>
+                    </a:lnB>
+                    <a:solidFill>
+                      <a:srgbClr val="FFFFFF"/>
+                    </a:solidFill>
+                  </a:tcPr>
+                </a:tc>
+                <a:tc>
+                  <a:txBody>
+                    <a:bodyPr/>
+                    <a:lstStyle/>
+                    <a:p>
+                      <a:pPr marL="0" indent="0" algn="l">
+                        <a:buNone/>
+                      </a:pPr>
+                      <a:r>
+                        <a:rPr lang="en-US" sz="1250" b="1" dirty="0">
+                          <a:solidFill>
+                            <a:srgbClr val="212121"/>
+                          </a:solidFill>
+                          <a:latin typeface="Calibri" pitchFamily="34" charset="0"/>
+                          <a:ea typeface="Calibri" pitchFamily="34" charset="-122"/>
+                          <a:cs typeface="Calibri" pitchFamily="34" charset="-120"/>
+                        </a:rPr>
+                        <a:t>principled refusal</a:t>
+                      </a:r>
+                      <a:r>
+                        <a:rPr lang="en-US" sz="1250" dirty="0">
+                          <a:solidFill>
+                            <a:srgbClr val="212121"/>
+                          </a:solidFill>
+                          <a:latin typeface="Calibri" pitchFamily="34" charset="0"/>
+                          <a:ea typeface="Calibri" pitchFamily="34" charset="-122"/>
+                          <a:cs typeface="Calibri" pitchFamily="34" charset="-120"/>
+                        </a:rPr>
+                        <a:t> — out-of-band re-bless</a:t>
+                      </a:r>
+                      <a:endParaRPr lang="en-US" sz="1250" dirty="0">
+                        <a:latin typeface="Calibri" charset="0"/>
+                        <a:ea typeface="Calibri" charset="0"/>
+                        <a:cs typeface="Calibri" charset="0"/>
+                      </a:endParaRPr>
+                    </a:p>
+                  </a:txBody>
+                  <a:tcPr marL="73152" marR="73152" marT="73152" marB="73152" anchor="ctr">
+                    <a:lnL w="12700" cap="flat" cmpd="sng" algn="ctr">
+                      <a:solidFill>
+                        <a:srgbClr val="D8DEEA"/>
+                      </a:solidFill>
+                      <a:prstDash val="solid"/>
+                      <a:round/>
+                      <a:headEnd type="none" w="med" len="med"/>
+                      <a:tailEnd type="none" w="med" len="med"/>
+                    </a:lnL>
+                    <a:lnR w="12700" cap="flat" cmpd="sng" algn="ctr">
+                      <a:solidFill>
+                        <a:srgbClr val="D8DEEA"/>
+                      </a:solidFill>
+                      <a:prstDash val="solid"/>
+                      <a:round/>
+                      <a:headEnd type="none" w="med" len="med"/>
+                      <a:tailEnd type="none" w="med" len="med"/>
+                    </a:lnR>
+                    <a:lnT w="12700" cap="flat" cmpd="sng" algn="ctr">
+                      <a:solidFill>
+                        <a:srgbClr val="D8DEEA"/>
+                      </a:solidFill>
+                      <a:prstDash val="solid"/>
+                      <a:round/>
+                      <a:headEnd type="none" w="med" len="med"/>
+                      <a:tailEnd type="none" w="med" len="med"/>
+                    </a:lnT>
+                    <a:lnB w="12700" cap="flat" cmpd="sng" algn="ctr">
+                      <a:solidFill>
+                        <a:srgbClr val="D8DEEA"/>
+                      </a:solidFill>
+                      <a:prstDash val="solid"/>
+                      <a:round/>
+                      <a:headEnd type="none" w="med" len="med"/>
+                      <a:tailEnd type="none" w="med" len="med"/>
+                    </a:lnB>
+                    <a:solidFill>
+                      <a:srgbClr val="FFFFFF"/>
+                    </a:solidFill>
+                  </a:tcPr>
+                </a:tc>
+                <a:extLst>
+                  <a:ext uri="{0D108BD9-81ED-4DB2-BD59-A6C34878D82A}">
+                    <a16:rowId xmlns:a16="http://schemas.microsoft.com/office/drawing/2014/main" val="10006"/>
+                  </a:ext>
+                </a:extLst>
+              </a:tr>
+            </a:tbl>
+          </a:graphicData>
+        </a:graphic>
+      </p:graphicFrame>
     </p:spTree>
   </p:cSld>
   <p:clrMapOvr>

--- a/docs/video_slides_draft.pptx
+++ b/docs/video_slides_draft.pptx
@@ -5,7 +5,7 @@
     <p:sldMasterId id="2147483648" r:id="rId1"/>
   </p:sldMasterIdLst>
   <p:notesMasterIdLst>
-    <p:notesMasterId r:id="rId9"/>
+    <p:notesMasterId r:id="rId10"/>
   </p:notesMasterIdLst>
   <p:sldIdLst>
     <p:sldId id="256" r:id="rId2"/>
@@ -15,6 +15,7 @@
     <p:sldId id="260" r:id="rId6"/>
     <p:sldId id="261" r:id="rId7"/>
     <p:sldId id="262" r:id="rId8"/>
+    <p:sldId id="263" r:id="rId9"/>
   </p:sldIdLst>
   <p:sldSz cx="12192000" cy="6858000"/>
   <p:notesSz cx="6858000" cy="12192000"/>
@@ -143,7 +144,7 @@
     </p:spTree>
     <p:extLst>
       <p:ext uri="{BB962C8B-B14F-4D97-AF65-F5344CB8AC3E}">
-        <p14:creationId xmlns:p14="http://schemas.microsoft.com/office/powerpoint/2010/main" val="1495642631"/>
+        <p14:creationId xmlns:p14="http://schemas.microsoft.com/office/powerpoint/2010/main" val="1964892576"/>
       </p:ext>
     </p:extLst>
   </p:cSld>
@@ -850,6 +851,97 @@
             <a:fld id="{F7021451-1387-4CA6-816F-3879F97B5CBC}" type="slidenum">
               <a:rPr lang="en-US"/>
               <a:t>7</a:t>
+            </a:fld>
+            <a:endParaRPr lang="en-US"/>
+          </a:p>
+        </p:txBody>
+      </p:sp>
+    </p:spTree>
+    <p:extLst>
+      <p:ext uri="{BB962C8B-B14F-4D97-AF65-F5344CB8AC3E}">
+        <p14:creationId xmlns:p14="http://schemas.microsoft.com/office/powerpoint/2010/main" val="1024086991"/>
+      </p:ext>
+    </p:extLst>
+  </p:cSld>
+  <p:clrMapOvr>
+    <a:masterClrMapping/>
+  </p:clrMapOvr>
+</p:notes>
+</file>
+
+<file path=ppt/notesSlides/notesSlide8.xml><?xml version="1.0" encoding="utf-8"?>
+<p:notes xmlns:a="http://schemas.openxmlformats.org/drawingml/2006/main" xmlns:r="http://schemas.openxmlformats.org/officeDocument/2006/relationships" xmlns:p="http://schemas.openxmlformats.org/presentationml/2006/main">
+  <p:cSld>
+    <p:spTree>
+      <p:nvGrpSpPr>
+        <p:cNvPr id="1" name=""/>
+        <p:cNvGrpSpPr/>
+        <p:nvPr/>
+      </p:nvGrpSpPr>
+      <p:grpSpPr>
+        <a:xfrm>
+          <a:off x="0" y="0"/>
+          <a:ext cx="0" cy="0"/>
+          <a:chOff x="0" y="0"/>
+          <a:chExt cx="0" cy="0"/>
+        </a:xfrm>
+      </p:grpSpPr>
+      <p:sp>
+        <p:nvSpPr>
+          <p:cNvPr id="2" name="Slide Image Placeholder 1"/>
+          <p:cNvSpPr>
+            <a:spLocks noGrp="1" noRot="1" noChangeAspect="1"/>
+          </p:cNvSpPr>
+          <p:nvPr>
+            <p:ph type="sldImg"/>
+          </p:nvPr>
+        </p:nvSpPr>
+        <p:spPr/>
+      </p:sp>
+      <p:sp>
+        <p:nvSpPr>
+          <p:cNvPr id="3" name="Notes Placeholder 2"/>
+          <p:cNvSpPr>
+            <a:spLocks noGrp="1"/>
+          </p:cNvSpPr>
+          <p:nvPr>
+            <p:ph type="body" idx="1"/>
+          </p:nvPr>
+        </p:nvSpPr>
+        <p:spPr/>
+        <p:txBody>
+          <a:bodyPr/>
+          <a:lstStyle/>
+          <a:p>
+            <a:r>
+              <a:rPr lang="en-US" dirty="0"/>
+              <a:t>This slide IS the section transition into the demo (strip: Demo segment highlighted).
+The tiers callout is the bridge: these keys are the glossary's entry keys, and every checklist row in the scenes is one of them.
+Spoken line on the why-beat: 'the table you just saw, instantiated.'
+Held back on purpose (scene 9's reveal): cheat-tier depth stats - 86 blessed external_body sites, 10 scanned crates.
+Numbers verified exact 2026-08-25 (l1a targets, l2 slices, verus term, pub-proof-fn count); provision-dependent - re-verify before recording day.</a:t>
+            </a:r>
+          </a:p>
+        </p:txBody>
+      </p:sp>
+      <p:sp>
+        <p:nvSpPr>
+          <p:cNvPr id="4" name="Slide Number Placeholder 3"/>
+          <p:cNvSpPr>
+            <a:spLocks noGrp="1"/>
+          </p:cNvSpPr>
+          <p:nvPr>
+            <p:ph type="sldNum" sz="quarter" idx="10"/>
+          </p:nvPr>
+        </p:nvSpPr>
+        <p:spPr/>
+        <p:txBody>
+          <a:bodyPr/>
+          <a:lstStyle/>
+          <a:p>
+            <a:fld id="{F7021451-1387-4CA6-816F-3879F97B5CBC}" type="slidenum">
+              <a:rPr lang="en-US"/>
+              <a:t>8</a:t>
             </a:fld>
             <a:endParaRPr lang="en-US"/>
           </a:p>
@@ -5647,14 +5739,14 @@
           <p:nvPr>
             <p:extLst>
               <p:ext uri="{D42A27DB-BD31-4B8C-83A1-F6EECF244321}">
-                <p14:modId xmlns:p14="http://schemas.microsoft.com/office/powerpoint/2010/main" val="191026570"/>
+                <p14:modId xmlns:p14="http://schemas.microsoft.com/office/powerpoint/2010/main" val="1579011935"/>
               </p:ext>
             </p:extLst>
           </p:nvPr>
         </p:nvGraphicFramePr>
         <p:xfrm>
           <a:off x="640080" y="1417320"/>
-          <a:ext cx="10881360" cy="4608576"/>
+          <a:ext cx="10881360" cy="914400"/>
         </p:xfrm>
         <a:graphic>
           <a:graphicData uri="http://schemas.openxmlformats.org/drawingml/2006/table">
@@ -6700,7 +6792,7 @@
                             <a:srgbClr val="212121"/>
                           </a:solidFill>
                           <a:latin typeface="Calibri" pitchFamily="34" charset="0"/>
-                          <a:ea typeface="Calibri" charset="0"/>
+                          <a:ea typeface="Calibri" pitchFamily="34" charset="-122"/>
                           <a:cs typeface="Calibri" pitchFamily="34" charset="-120"/>
                         </a:rPr>
                         <a:t>tests + verification of contracts</a:t>
@@ -7713,6 +7805,1681 @@
           </a:graphicData>
         </a:graphic>
       </p:graphicFrame>
+    </p:spTree>
+  </p:cSld>
+  <p:clrMapOvr>
+    <a:masterClrMapping/>
+  </p:clrMapOvr>
+</p:sld>
+</file>
+
+<file path=ppt/slides/slide8.xml><?xml version="1.0" encoding="utf-8"?>
+<p:sld xmlns:a="http://schemas.openxmlformats.org/drawingml/2006/main" xmlns:r="http://schemas.openxmlformats.org/officeDocument/2006/relationships" xmlns:p="http://schemas.openxmlformats.org/presentationml/2006/main">
+  <p:cSld name="Slide 8">
+    <p:bg>
+      <p:bgPr>
+        <a:solidFill>
+          <a:srgbClr val="FFFFFF"/>
+        </a:solidFill>
+        <a:effectLst/>
+      </p:bgPr>
+    </p:bg>
+    <p:spTree>
+      <p:nvGrpSpPr>
+        <p:cNvPr id="1" name=""/>
+        <p:cNvGrpSpPr/>
+        <p:nvPr/>
+      </p:nvGrpSpPr>
+      <p:grpSpPr>
+        <a:xfrm>
+          <a:off x="0" y="0"/>
+          <a:ext cx="0" cy="0"/>
+          <a:chOff x="0" y="0"/>
+          <a:chExt cx="0" cy="0"/>
+        </a:xfrm>
+      </p:grpSpPr>
+      <p:sp>
+        <p:nvSpPr>
+          <p:cNvPr id="2" name="Shape 0"/>
+          <p:cNvSpPr/>
+          <p:nvPr/>
+        </p:nvSpPr>
+        <p:spPr>
+          <a:xfrm>
+            <a:off x="640080" y="201168"/>
+            <a:ext cx="2073859" cy="502920"/>
+          </a:xfrm>
+          <a:prstGeom prst="roundRect">
+            <a:avLst>
+              <a:gd name="adj" fmla="val 9091"/>
+            </a:avLst>
+          </a:prstGeom>
+          <a:solidFill>
+            <a:srgbClr val="E4EAF4"/>
+          </a:solidFill>
+          <a:ln/>
+        </p:spPr>
+        <p:txBody>
+          <a:bodyPr/>
+          <a:lstStyle/>
+          <a:p>
+            <a:endParaRPr lang="en-US"/>
+          </a:p>
+        </p:txBody>
+      </p:sp>
+      <p:sp>
+        <p:nvSpPr>
+          <p:cNvPr id="3" name="Text 1"/>
+          <p:cNvSpPr/>
+          <p:nvPr/>
+        </p:nvSpPr>
+        <p:spPr>
+          <a:xfrm>
+            <a:off x="640080" y="201168"/>
+            <a:ext cx="2073859" cy="502920"/>
+          </a:xfrm>
+          <a:prstGeom prst="rect">
+            <a:avLst/>
+          </a:prstGeom>
+          <a:noFill/>
+          <a:ln/>
+        </p:spPr>
+        <p:txBody>
+          <a:bodyPr wrap="square" lIns="254" tIns="254" rIns="254" bIns="254" rtlCol="0" anchor="ctr"/>
+          <a:lstStyle/>
+          <a:p>
+            <a:pPr marL="0" indent="0" algn="ctr">
+              <a:buNone/>
+            </a:pPr>
+            <a:r>
+              <a:rPr lang="en-US" sz="900" dirty="0">
+                <a:solidFill>
+                  <a:srgbClr val="5A6478"/>
+                </a:solidFill>
+                <a:latin typeface="Calibri" pitchFamily="34" charset="0"/>
+                <a:ea typeface="Calibri" pitchFamily="34" charset="-122"/>
+                <a:cs typeface="Calibri" pitchFamily="34" charset="-120"/>
+              </a:rPr>
+              <a:t>Preliminaries</a:t>
+            </a:r>
+            <a:endParaRPr lang="en-US" sz="900" dirty="0"/>
+          </a:p>
+        </p:txBody>
+      </p:sp>
+      <p:sp>
+        <p:nvSpPr>
+          <p:cNvPr id="4" name="Shape 2"/>
+          <p:cNvSpPr/>
+          <p:nvPr/>
+        </p:nvSpPr>
+        <p:spPr>
+          <a:xfrm>
+            <a:off x="2841955" y="201168"/>
+            <a:ext cx="2073859" cy="502920"/>
+          </a:xfrm>
+          <a:prstGeom prst="roundRect">
+            <a:avLst>
+              <a:gd name="adj" fmla="val 9091"/>
+            </a:avLst>
+          </a:prstGeom>
+          <a:solidFill>
+            <a:srgbClr val="1E2761"/>
+          </a:solidFill>
+          <a:ln/>
+        </p:spPr>
+        <p:txBody>
+          <a:bodyPr/>
+          <a:lstStyle/>
+          <a:p>
+            <a:endParaRPr lang="en-US"/>
+          </a:p>
+        </p:txBody>
+      </p:sp>
+      <p:sp>
+        <p:nvSpPr>
+          <p:cNvPr id="5" name="Text 3"/>
+          <p:cNvSpPr/>
+          <p:nvPr/>
+        </p:nvSpPr>
+        <p:spPr>
+          <a:xfrm>
+            <a:off x="2841955" y="201168"/>
+            <a:ext cx="2073859" cy="502920"/>
+          </a:xfrm>
+          <a:prstGeom prst="rect">
+            <a:avLst/>
+          </a:prstGeom>
+          <a:noFill/>
+          <a:ln/>
+        </p:spPr>
+        <p:txBody>
+          <a:bodyPr wrap="square" lIns="254" tIns="254" rIns="254" bIns="254" rtlCol="0" anchor="ctr"/>
+          <a:lstStyle/>
+          <a:p>
+            <a:pPr marL="0" indent="0" algn="ctr">
+              <a:buNone/>
+            </a:pPr>
+            <a:r>
+              <a:rPr lang="en-US" sz="900" b="1" dirty="0">
+                <a:solidFill>
+                  <a:srgbClr val="FFFFFF"/>
+                </a:solidFill>
+                <a:latin typeface="Calibri" pitchFamily="34" charset="0"/>
+                <a:ea typeface="Calibri" pitchFamily="34" charset="-122"/>
+                <a:cs typeface="Calibri" pitchFamily="34" charset="-120"/>
+              </a:rPr>
+              <a:t>Demo:</a:t>
+            </a:r>
+            <a:endParaRPr lang="en-US" sz="900" dirty="0"/>
+          </a:p>
+          <a:p>
+            <a:pPr marL="0" indent="0" algn="ctr">
+              <a:buNone/>
+            </a:pPr>
+            <a:r>
+              <a:rPr lang="en-US" sz="900" b="1" dirty="0">
+                <a:solidFill>
+                  <a:srgbClr val="FFFFFF"/>
+                </a:solidFill>
+                <a:latin typeface="Calibri" pitchFamily="34" charset="0"/>
+                <a:ea typeface="Calibri" pitchFamily="34" charset="-122"/>
+                <a:cs typeface="Calibri" pitchFamily="34" charset="-120"/>
+              </a:rPr>
+              <a:t>Isolette (SysMLv2 → Rust)</a:t>
+            </a:r>
+            <a:endParaRPr lang="en-US" sz="900" dirty="0"/>
+          </a:p>
+        </p:txBody>
+      </p:sp>
+      <p:sp>
+        <p:nvSpPr>
+          <p:cNvPr id="6" name="Shape 4"/>
+          <p:cNvSpPr/>
+          <p:nvPr/>
+        </p:nvSpPr>
+        <p:spPr>
+          <a:xfrm>
+            <a:off x="5043830" y="201168"/>
+            <a:ext cx="2073859" cy="502920"/>
+          </a:xfrm>
+          <a:prstGeom prst="roundRect">
+            <a:avLst>
+              <a:gd name="adj" fmla="val 9091"/>
+            </a:avLst>
+          </a:prstGeom>
+          <a:solidFill>
+            <a:srgbClr val="E4EAF4"/>
+          </a:solidFill>
+          <a:ln/>
+        </p:spPr>
+        <p:txBody>
+          <a:bodyPr/>
+          <a:lstStyle/>
+          <a:p>
+            <a:endParaRPr lang="en-US"/>
+          </a:p>
+        </p:txBody>
+      </p:sp>
+      <p:sp>
+        <p:nvSpPr>
+          <p:cNvPr id="7" name="Text 5"/>
+          <p:cNvSpPr/>
+          <p:nvPr/>
+        </p:nvSpPr>
+        <p:spPr>
+          <a:xfrm>
+            <a:off x="5043830" y="201168"/>
+            <a:ext cx="2073859" cy="502920"/>
+          </a:xfrm>
+          <a:prstGeom prst="rect">
+            <a:avLst/>
+          </a:prstGeom>
+          <a:noFill/>
+          <a:ln/>
+        </p:spPr>
+        <p:txBody>
+          <a:bodyPr wrap="square" lIns="254" tIns="254" rIns="254" bIns="254" rtlCol="0" anchor="ctr"/>
+          <a:lstStyle/>
+          <a:p>
+            <a:pPr marL="0" indent="0" algn="ctr">
+              <a:buNone/>
+            </a:pPr>
+            <a:r>
+              <a:rPr lang="en-US" sz="900" dirty="0">
+                <a:solidFill>
+                  <a:srgbClr val="5A6478"/>
+                </a:solidFill>
+                <a:latin typeface="Calibri" pitchFamily="34" charset="0"/>
+                <a:ea typeface="Calibri" pitchFamily="34" charset="-122"/>
+                <a:cs typeface="Calibri" pitchFamily="34" charset="-120"/>
+              </a:rPr>
+              <a:t>Other Ecosystems</a:t>
+            </a:r>
+            <a:endParaRPr lang="en-US" sz="900" dirty="0"/>
+          </a:p>
+        </p:txBody>
+      </p:sp>
+      <p:sp>
+        <p:nvSpPr>
+          <p:cNvPr id="8" name="Shape 6"/>
+          <p:cNvSpPr/>
+          <p:nvPr/>
+        </p:nvSpPr>
+        <p:spPr>
+          <a:xfrm>
+            <a:off x="7245706" y="201168"/>
+            <a:ext cx="2073859" cy="502920"/>
+          </a:xfrm>
+          <a:prstGeom prst="roundRect">
+            <a:avLst>
+              <a:gd name="adj" fmla="val 9091"/>
+            </a:avLst>
+          </a:prstGeom>
+          <a:solidFill>
+            <a:srgbClr val="E4EAF4"/>
+          </a:solidFill>
+          <a:ln/>
+        </p:spPr>
+        <p:txBody>
+          <a:bodyPr/>
+          <a:lstStyle/>
+          <a:p>
+            <a:endParaRPr lang="en-US"/>
+          </a:p>
+        </p:txBody>
+      </p:sp>
+      <p:sp>
+        <p:nvSpPr>
+          <p:cNvPr id="9" name="Text 7"/>
+          <p:cNvSpPr/>
+          <p:nvPr/>
+        </p:nvSpPr>
+        <p:spPr>
+          <a:xfrm>
+            <a:off x="7245706" y="201168"/>
+            <a:ext cx="2073859" cy="502920"/>
+          </a:xfrm>
+          <a:prstGeom prst="rect">
+            <a:avLst/>
+          </a:prstGeom>
+          <a:noFill/>
+          <a:ln/>
+        </p:spPr>
+        <p:txBody>
+          <a:bodyPr wrap="square" lIns="254" tIns="254" rIns="254" bIns="254" rtlCol="0" anchor="ctr"/>
+          <a:lstStyle/>
+          <a:p>
+            <a:pPr marL="0" indent="0" algn="ctr">
+              <a:buNone/>
+            </a:pPr>
+            <a:r>
+              <a:rPr lang="en-US" sz="900" dirty="0">
+                <a:solidFill>
+                  <a:srgbClr val="5A6478"/>
+                </a:solidFill>
+                <a:latin typeface="Calibri" pitchFamily="34" charset="0"/>
+                <a:ea typeface="Calibri" pitchFamily="34" charset="-122"/>
+                <a:cs typeface="Calibri" pitchFamily="34" charset="-120"/>
+              </a:rPr>
+              <a:t>AI in the Loop</a:t>
+            </a:r>
+            <a:endParaRPr lang="en-US" sz="900" dirty="0"/>
+          </a:p>
+        </p:txBody>
+      </p:sp>
+      <p:sp>
+        <p:nvSpPr>
+          <p:cNvPr id="10" name="Shape 8"/>
+          <p:cNvSpPr/>
+          <p:nvPr/>
+        </p:nvSpPr>
+        <p:spPr>
+          <a:xfrm>
+            <a:off x="9447581" y="201168"/>
+            <a:ext cx="2073859" cy="502920"/>
+          </a:xfrm>
+          <a:prstGeom prst="roundRect">
+            <a:avLst>
+              <a:gd name="adj" fmla="val 9091"/>
+            </a:avLst>
+          </a:prstGeom>
+          <a:solidFill>
+            <a:srgbClr val="E4EAF4"/>
+          </a:solidFill>
+          <a:ln/>
+        </p:spPr>
+        <p:txBody>
+          <a:bodyPr/>
+          <a:lstStyle/>
+          <a:p>
+            <a:endParaRPr lang="en-US"/>
+          </a:p>
+        </p:txBody>
+      </p:sp>
+      <p:sp>
+        <p:nvSpPr>
+          <p:cNvPr id="11" name="Text 9"/>
+          <p:cNvSpPr/>
+          <p:nvPr/>
+        </p:nvSpPr>
+        <p:spPr>
+          <a:xfrm>
+            <a:off x="9447581" y="201168"/>
+            <a:ext cx="2073859" cy="502920"/>
+          </a:xfrm>
+          <a:prstGeom prst="rect">
+            <a:avLst/>
+          </a:prstGeom>
+          <a:noFill/>
+          <a:ln/>
+        </p:spPr>
+        <p:txBody>
+          <a:bodyPr wrap="square" lIns="254" tIns="254" rIns="254" bIns="254" rtlCol="0" anchor="ctr"/>
+          <a:lstStyle/>
+          <a:p>
+            <a:pPr marL="0" indent="0" algn="ctr">
+              <a:buNone/>
+            </a:pPr>
+            <a:r>
+              <a:rPr lang="en-US" sz="900" dirty="0">
+                <a:solidFill>
+                  <a:srgbClr val="5A6478"/>
+                </a:solidFill>
+                <a:latin typeface="Calibri" pitchFamily="34" charset="0"/>
+                <a:ea typeface="Calibri" pitchFamily="34" charset="-122"/>
+                <a:cs typeface="Calibri" pitchFamily="34" charset="-120"/>
+              </a:rPr>
+              <a:t>Close</a:t>
+            </a:r>
+            <a:endParaRPr lang="en-US" sz="900" dirty="0"/>
+          </a:p>
+        </p:txBody>
+      </p:sp>
+      <p:sp>
+        <p:nvSpPr>
+          <p:cNvPr id="12" name="Text 10"/>
+          <p:cNvSpPr/>
+          <p:nvPr/>
+        </p:nvSpPr>
+        <p:spPr>
+          <a:xfrm>
+            <a:off x="640080" y="952760"/>
+            <a:ext cx="7315200" cy="640080"/>
+          </a:xfrm>
+          <a:prstGeom prst="rect">
+            <a:avLst/>
+          </a:prstGeom>
+          <a:noFill/>
+          <a:ln/>
+        </p:spPr>
+        <p:txBody>
+          <a:bodyPr wrap="square" lIns="0" tIns="0" rIns="0" bIns="0" rtlCol="0" anchor="ctr"/>
+          <a:lstStyle/>
+          <a:p>
+            <a:pPr marL="0" indent="0">
+              <a:buNone/>
+            </a:pPr>
+            <a:r>
+              <a:rPr lang="en-US" sz="3400" b="1" dirty="0">
+                <a:solidFill>
+                  <a:srgbClr val="1E2761"/>
+                </a:solidFill>
+                <a:latin typeface="Cambria" pitchFamily="34" charset="0"/>
+                <a:ea typeface="Cambria" pitchFamily="34" charset="-122"/>
+                <a:cs typeface="Cambria" pitchFamily="34" charset="-120"/>
+              </a:rPr>
+              <a:t>The isolette</a:t>
+            </a:r>
+            <a:endParaRPr lang="en-US" sz="3400" dirty="0"/>
+          </a:p>
+        </p:txBody>
+      </p:sp>
+      <p:sp>
+        <p:nvSpPr>
+          <p:cNvPr id="13" name="Text 11"/>
+          <p:cNvSpPr/>
+          <p:nvPr/>
+        </p:nvSpPr>
+        <p:spPr>
+          <a:xfrm>
+            <a:off x="640080" y="1730000"/>
+            <a:ext cx="6035040" cy="2286000"/>
+          </a:xfrm>
+          <a:prstGeom prst="rect">
+            <a:avLst/>
+          </a:prstGeom>
+          <a:noFill/>
+          <a:ln/>
+        </p:spPr>
+        <p:txBody>
+          <a:bodyPr wrap="square" lIns="0" tIns="0" rIns="0" bIns="0" rtlCol="0" anchor="t"/>
+          <a:lstStyle/>
+          <a:p>
+            <a:pPr marL="342900" indent="-342900" algn="l">
+              <a:buSzPct val="100000"/>
+              <a:buChar char="•"/>
+            </a:pPr>
+            <a:r>
+              <a:rPr lang="en-US" sz="1350" b="1" dirty="0">
+                <a:solidFill>
+                  <a:srgbClr val="212121"/>
+                </a:solidFill>
+                <a:latin typeface="Calibri" pitchFamily="34" charset="0"/>
+                <a:ea typeface="Calibri" pitchFamily="34" charset="-122"/>
+                <a:cs typeface="Calibri" pitchFamily="34" charset="-120"/>
+              </a:rPr>
+              <a:t>The system: </a:t>
+            </a:r>
+            <a:r>
+              <a:rPr lang="en-US" sz="1350" dirty="0">
+                <a:solidFill>
+                  <a:srgbClr val="212121"/>
+                </a:solidFill>
+                <a:latin typeface="Calibri" pitchFamily="34" charset="0"/>
+                <a:ea typeface="Calibri" pitchFamily="34" charset="-122"/>
+                <a:cs typeface="Calibri" pitchFamily="34" charset="-120"/>
+              </a:rPr>
+              <a:t>an infant-incubator thermostat — regulate and monitor functions keep a newborn's environment in a safe temperature range; heat control on/off</a:t>
+            </a:r>
+            <a:endParaRPr lang="en-US" sz="1350" dirty="0"/>
+          </a:p>
+          <a:p>
+            <a:pPr marL="0" indent="0" algn="l">
+              <a:spcAft>
+                <a:spcPts val="1000"/>
+              </a:spcAft>
+              <a:buNone/>
+            </a:pPr>
+            <a:r>
+              <a:rPr lang="en-US" sz="1100" i="1" dirty="0">
+                <a:solidFill>
+                  <a:srgbClr val="5A6478"/>
+                </a:solidFill>
+                <a:latin typeface="Calibri" pitchFamily="34" charset="0"/>
+                <a:ea typeface="Calibri" pitchFamily="34" charset="-122"/>
+                <a:cs typeface="Calibri" pitchFamily="34" charset="-120"/>
+              </a:rPr>
+              <a:t>requirements traceable to FAA AR-08-32 (the REQ-MHS-* family the scenes will tamper with)</a:t>
+            </a:r>
+            <a:endParaRPr lang="en-US" sz="1350" dirty="0"/>
+          </a:p>
+          <a:p>
+            <a:pPr marL="342900" indent="-342900" algn="l">
+              <a:buSzPct val="100000"/>
+              <a:buChar char="•"/>
+            </a:pPr>
+            <a:r>
+              <a:rPr lang="en-US" sz="1350" b="1" dirty="0">
+                <a:solidFill>
+                  <a:srgbClr val="212121"/>
+                </a:solidFill>
+                <a:latin typeface="Calibri" pitchFamily="34" charset="0"/>
+                <a:ea typeface="Calibri" pitchFamily="34" charset="-122"/>
+                <a:cs typeface="Calibri" pitchFamily="34" charset="-120"/>
+              </a:rPr>
+              <a:t>The relevance: </a:t>
+            </a:r>
+            <a:r>
+              <a:rPr lang="en-US" sz="1350" dirty="0">
+                <a:solidFill>
+                  <a:srgbClr val="212121"/>
+                </a:solidFill>
+                <a:latin typeface="Calibri" pitchFamily="34" charset="0"/>
+                <a:ea typeface="Calibri" pitchFamily="34" charset="-122"/>
+                <a:cs typeface="Calibri" pitchFamily="34" charset="-120"/>
+              </a:rPr>
+              <a:t>the INSPECTA program's seL4/</a:t>
+            </a:r>
+            <a:r>
+              <a:rPr lang="en-US" sz="1350" dirty="0" err="1">
+                <a:solidFill>
+                  <a:srgbClr val="212121"/>
+                </a:solidFill>
+                <a:latin typeface="Calibri" pitchFamily="34" charset="0"/>
+                <a:ea typeface="Calibri" pitchFamily="34" charset="-122"/>
+                <a:cs typeface="Calibri" pitchFamily="34" charset="-120"/>
+              </a:rPr>
+              <a:t>Microkit</a:t>
+            </a:r>
+            <a:r>
+              <a:rPr lang="en-US" sz="1350" dirty="0">
+                <a:solidFill>
+                  <a:srgbClr val="212121"/>
+                </a:solidFill>
+                <a:latin typeface="Calibri" pitchFamily="34" charset="0"/>
+                <a:ea typeface="Calibri" pitchFamily="34" charset="-122"/>
+                <a:cs typeface="Calibri" pitchFamily="34" charset="-120"/>
+              </a:rPr>
+              <a:t> target — a real, current, safety-critical development artifact, not a toy example</a:t>
+            </a:r>
+            <a:endParaRPr lang="en-US" sz="1350" dirty="0"/>
+          </a:p>
+        </p:txBody>
+      </p:sp>
+      <p:sp>
+        <p:nvSpPr>
+          <p:cNvPr id="14" name="Shape 12"/>
+          <p:cNvSpPr/>
+          <p:nvPr/>
+        </p:nvSpPr>
+        <p:spPr>
+          <a:xfrm>
+            <a:off x="640080" y="3977640"/>
+            <a:ext cx="1275588" cy="777240"/>
+          </a:xfrm>
+          <a:prstGeom prst="roundRect">
+            <a:avLst>
+              <a:gd name="adj" fmla="val 7059"/>
+            </a:avLst>
+          </a:prstGeom>
+          <a:solidFill>
+            <a:srgbClr val="3A4A8C"/>
+          </a:solidFill>
+          <a:ln/>
+        </p:spPr>
+        <p:txBody>
+          <a:bodyPr/>
+          <a:lstStyle/>
+          <a:p>
+            <a:endParaRPr lang="en-US"/>
+          </a:p>
+        </p:txBody>
+      </p:sp>
+      <p:sp>
+        <p:nvSpPr>
+          <p:cNvPr id="15" name="Text 13"/>
+          <p:cNvSpPr/>
+          <p:nvPr/>
+        </p:nvSpPr>
+        <p:spPr>
+          <a:xfrm>
+            <a:off x="640080" y="3977640"/>
+            <a:ext cx="1275588" cy="777240"/>
+          </a:xfrm>
+          <a:prstGeom prst="rect">
+            <a:avLst/>
+          </a:prstGeom>
+          <a:noFill/>
+          <a:ln/>
+        </p:spPr>
+        <p:txBody>
+          <a:bodyPr wrap="square" lIns="254" tIns="254" rIns="254" bIns="254" rtlCol="0" anchor="ctr"/>
+          <a:lstStyle/>
+          <a:p>
+            <a:pPr marL="0" indent="0" algn="ctr">
+              <a:buNone/>
+            </a:pPr>
+            <a:r>
+              <a:rPr lang="en-US" sz="1050" b="1" dirty="0">
+                <a:solidFill>
+                  <a:srgbClr val="FFFFFF"/>
+                </a:solidFill>
+                <a:latin typeface="Calibri" pitchFamily="34" charset="0"/>
+                <a:ea typeface="Calibri" pitchFamily="34" charset="-122"/>
+                <a:cs typeface="Calibri" pitchFamily="34" charset="-120"/>
+              </a:rPr>
+              <a:t>SysMLv2 model</a:t>
+            </a:r>
+            <a:endParaRPr lang="en-US" sz="1050" dirty="0"/>
+          </a:p>
+          <a:p>
+            <a:pPr marL="0" indent="0" algn="ctr">
+              <a:buNone/>
+            </a:pPr>
+            <a:r>
+              <a:rPr lang="en-US" sz="1050" b="1" dirty="0">
+                <a:solidFill>
+                  <a:srgbClr val="FFFFFF"/>
+                </a:solidFill>
+                <a:latin typeface="Calibri" pitchFamily="34" charset="0"/>
+                <a:ea typeface="Calibri" pitchFamily="34" charset="-122"/>
+                <a:cs typeface="Calibri" pitchFamily="34" charset="-120"/>
+              </a:rPr>
+              <a:t>+ GUMBO contracts</a:t>
+            </a:r>
+            <a:endParaRPr lang="en-US" sz="1050" dirty="0"/>
+          </a:p>
+        </p:txBody>
+      </p:sp>
+      <p:sp>
+        <p:nvSpPr>
+          <p:cNvPr id="16" name="Text 14"/>
+          <p:cNvSpPr/>
+          <p:nvPr/>
+        </p:nvSpPr>
+        <p:spPr>
+          <a:xfrm>
+            <a:off x="1879092" y="3977640"/>
+            <a:ext cx="384048" cy="777240"/>
+          </a:xfrm>
+          <a:prstGeom prst="rect">
+            <a:avLst/>
+          </a:prstGeom>
+          <a:noFill/>
+          <a:ln/>
+        </p:spPr>
+        <p:txBody>
+          <a:bodyPr wrap="square" lIns="0" tIns="0" rIns="0" bIns="0" rtlCol="0" anchor="ctr"/>
+          <a:lstStyle/>
+          <a:p>
+            <a:pPr marL="0" indent="0" algn="ctr">
+              <a:buNone/>
+            </a:pPr>
+            <a:r>
+              <a:rPr lang="en-US" sz="1300" dirty="0">
+                <a:solidFill>
+                  <a:srgbClr val="5A6478"/>
+                </a:solidFill>
+                <a:latin typeface="Calibri" pitchFamily="34" charset="0"/>
+                <a:ea typeface="Calibri" pitchFamily="34" charset="-122"/>
+                <a:cs typeface="Calibri" pitchFamily="34" charset="-120"/>
+              </a:rPr>
+              <a:t>→</a:t>
+            </a:r>
+            <a:endParaRPr lang="en-US" sz="1300" dirty="0"/>
+          </a:p>
+        </p:txBody>
+      </p:sp>
+      <p:sp>
+        <p:nvSpPr>
+          <p:cNvPr id="17" name="Shape 15"/>
+          <p:cNvSpPr/>
+          <p:nvPr/>
+        </p:nvSpPr>
+        <p:spPr>
+          <a:xfrm>
+            <a:off x="2226564" y="3977640"/>
+            <a:ext cx="1275588" cy="777240"/>
+          </a:xfrm>
+          <a:prstGeom prst="roundRect">
+            <a:avLst>
+              <a:gd name="adj" fmla="val 7059"/>
+            </a:avLst>
+          </a:prstGeom>
+          <a:solidFill>
+            <a:srgbClr val="3A4A8C"/>
+          </a:solidFill>
+          <a:ln/>
+        </p:spPr>
+        <p:txBody>
+          <a:bodyPr/>
+          <a:lstStyle/>
+          <a:p>
+            <a:endParaRPr lang="en-US"/>
+          </a:p>
+        </p:txBody>
+      </p:sp>
+      <p:sp>
+        <p:nvSpPr>
+          <p:cNvPr id="18" name="Text 16"/>
+          <p:cNvSpPr/>
+          <p:nvPr/>
+        </p:nvSpPr>
+        <p:spPr>
+          <a:xfrm>
+            <a:off x="2226564" y="3977640"/>
+            <a:ext cx="1275588" cy="777240"/>
+          </a:xfrm>
+          <a:prstGeom prst="rect">
+            <a:avLst/>
+          </a:prstGeom>
+          <a:noFill/>
+          <a:ln/>
+        </p:spPr>
+        <p:txBody>
+          <a:bodyPr wrap="square" lIns="254" tIns="254" rIns="254" bIns="254" rtlCol="0" anchor="ctr"/>
+          <a:lstStyle/>
+          <a:p>
+            <a:pPr marL="0" indent="0" algn="ctr">
+              <a:buNone/>
+            </a:pPr>
+            <a:r>
+              <a:rPr lang="en-US" sz="1050" b="1" dirty="0">
+                <a:solidFill>
+                  <a:srgbClr val="FFFFFF"/>
+                </a:solidFill>
+                <a:latin typeface="Calibri" pitchFamily="34" charset="0"/>
+                <a:ea typeface="Calibri" pitchFamily="34" charset="-122"/>
+                <a:cs typeface="Calibri" pitchFamily="34" charset="-120"/>
+              </a:rPr>
+              <a:t>HAMR</a:t>
+            </a:r>
+            <a:endParaRPr lang="en-US" sz="1050" dirty="0"/>
+          </a:p>
+          <a:p>
+            <a:pPr marL="0" indent="0" algn="ctr">
+              <a:buNone/>
+            </a:pPr>
+            <a:r>
+              <a:rPr lang="en-US" sz="1050" b="1" dirty="0">
+                <a:solidFill>
+                  <a:srgbClr val="FFFFFF"/>
+                </a:solidFill>
+                <a:latin typeface="Calibri" pitchFamily="34" charset="0"/>
+                <a:ea typeface="Calibri" pitchFamily="34" charset="-122"/>
+                <a:cs typeface="Calibri" pitchFamily="34" charset="-120"/>
+              </a:rPr>
+              <a:t>codegen</a:t>
+            </a:r>
+            <a:endParaRPr lang="en-US" sz="1050" dirty="0"/>
+          </a:p>
+        </p:txBody>
+      </p:sp>
+      <p:sp>
+        <p:nvSpPr>
+          <p:cNvPr id="19" name="Text 17"/>
+          <p:cNvSpPr/>
+          <p:nvPr/>
+        </p:nvSpPr>
+        <p:spPr>
+          <a:xfrm>
+            <a:off x="3465576" y="3977640"/>
+            <a:ext cx="384048" cy="777240"/>
+          </a:xfrm>
+          <a:prstGeom prst="rect">
+            <a:avLst/>
+          </a:prstGeom>
+          <a:noFill/>
+          <a:ln/>
+        </p:spPr>
+        <p:txBody>
+          <a:bodyPr wrap="square" lIns="0" tIns="0" rIns="0" bIns="0" rtlCol="0" anchor="ctr"/>
+          <a:lstStyle/>
+          <a:p>
+            <a:pPr marL="0" indent="0" algn="ctr">
+              <a:buNone/>
+            </a:pPr>
+            <a:r>
+              <a:rPr lang="en-US" sz="1300" dirty="0">
+                <a:solidFill>
+                  <a:srgbClr val="5A6478"/>
+                </a:solidFill>
+                <a:latin typeface="Calibri" pitchFamily="34" charset="0"/>
+                <a:ea typeface="Calibri" pitchFamily="34" charset="-122"/>
+                <a:cs typeface="Calibri" pitchFamily="34" charset="-120"/>
+              </a:rPr>
+              <a:t>→</a:t>
+            </a:r>
+            <a:endParaRPr lang="en-US" sz="1300" dirty="0"/>
+          </a:p>
+        </p:txBody>
+      </p:sp>
+      <p:sp>
+        <p:nvSpPr>
+          <p:cNvPr id="20" name="Shape 18"/>
+          <p:cNvSpPr/>
+          <p:nvPr/>
+        </p:nvSpPr>
+        <p:spPr>
+          <a:xfrm>
+            <a:off x="3813048" y="3977640"/>
+            <a:ext cx="1275588" cy="777240"/>
+          </a:xfrm>
+          <a:prstGeom prst="roundRect">
+            <a:avLst>
+              <a:gd name="adj" fmla="val 7059"/>
+            </a:avLst>
+          </a:prstGeom>
+          <a:solidFill>
+            <a:srgbClr val="3A4A8C"/>
+          </a:solidFill>
+          <a:ln/>
+        </p:spPr>
+        <p:txBody>
+          <a:bodyPr/>
+          <a:lstStyle/>
+          <a:p>
+            <a:endParaRPr lang="en-US"/>
+          </a:p>
+        </p:txBody>
+      </p:sp>
+      <p:sp>
+        <p:nvSpPr>
+          <p:cNvPr id="21" name="Text 19"/>
+          <p:cNvSpPr/>
+          <p:nvPr/>
+        </p:nvSpPr>
+        <p:spPr>
+          <a:xfrm>
+            <a:off x="3813048" y="3977640"/>
+            <a:ext cx="1275588" cy="777240"/>
+          </a:xfrm>
+          <a:prstGeom prst="rect">
+            <a:avLst/>
+          </a:prstGeom>
+          <a:noFill/>
+          <a:ln/>
+        </p:spPr>
+        <p:txBody>
+          <a:bodyPr wrap="square" lIns="254" tIns="254" rIns="254" bIns="254" rtlCol="0" anchor="ctr"/>
+          <a:lstStyle/>
+          <a:p>
+            <a:pPr marL="0" indent="0" algn="ctr">
+              <a:buNone/>
+            </a:pPr>
+            <a:r>
+              <a:rPr lang="en-US" sz="1050" b="1" dirty="0">
+                <a:solidFill>
+                  <a:srgbClr val="FFFFFF"/>
+                </a:solidFill>
+                <a:latin typeface="Calibri" pitchFamily="34" charset="0"/>
+                <a:ea typeface="Calibri" pitchFamily="34" charset="-122"/>
+                <a:cs typeface="Calibri" pitchFamily="34" charset="-120"/>
+              </a:rPr>
+              <a:t>Verus-verified</a:t>
+            </a:r>
+            <a:endParaRPr lang="en-US" sz="1050" dirty="0"/>
+          </a:p>
+          <a:p>
+            <a:pPr marL="0" indent="0" algn="ctr">
+              <a:buNone/>
+            </a:pPr>
+            <a:r>
+              <a:rPr lang="en-US" sz="1050" b="1" dirty="0">
+                <a:solidFill>
+                  <a:srgbClr val="FFFFFF"/>
+                </a:solidFill>
+                <a:latin typeface="Calibri" pitchFamily="34" charset="0"/>
+                <a:ea typeface="Calibri" pitchFamily="34" charset="-122"/>
+                <a:cs typeface="Calibri" pitchFamily="34" charset="-120"/>
+              </a:rPr>
+              <a:t>Rust</a:t>
+            </a:r>
+            <a:endParaRPr lang="en-US" sz="1050" dirty="0"/>
+          </a:p>
+        </p:txBody>
+      </p:sp>
+      <p:sp>
+        <p:nvSpPr>
+          <p:cNvPr id="22" name="Text 20"/>
+          <p:cNvSpPr/>
+          <p:nvPr/>
+        </p:nvSpPr>
+        <p:spPr>
+          <a:xfrm>
+            <a:off x="5052060" y="3977640"/>
+            <a:ext cx="384048" cy="777240"/>
+          </a:xfrm>
+          <a:prstGeom prst="rect">
+            <a:avLst/>
+          </a:prstGeom>
+          <a:noFill/>
+          <a:ln/>
+        </p:spPr>
+        <p:txBody>
+          <a:bodyPr wrap="square" lIns="0" tIns="0" rIns="0" bIns="0" rtlCol="0" anchor="ctr"/>
+          <a:lstStyle/>
+          <a:p>
+            <a:pPr marL="0" indent="0" algn="ctr">
+              <a:buNone/>
+            </a:pPr>
+            <a:r>
+              <a:rPr lang="en-US" sz="1300" dirty="0">
+                <a:solidFill>
+                  <a:srgbClr val="5A6478"/>
+                </a:solidFill>
+                <a:latin typeface="Calibri" pitchFamily="34" charset="0"/>
+                <a:ea typeface="Calibri" pitchFamily="34" charset="-122"/>
+                <a:cs typeface="Calibri" pitchFamily="34" charset="-120"/>
+              </a:rPr>
+              <a:t>→</a:t>
+            </a:r>
+            <a:endParaRPr lang="en-US" sz="1300" dirty="0"/>
+          </a:p>
+        </p:txBody>
+      </p:sp>
+      <p:sp>
+        <p:nvSpPr>
+          <p:cNvPr id="23" name="Shape 21"/>
+          <p:cNvSpPr/>
+          <p:nvPr/>
+        </p:nvSpPr>
+        <p:spPr>
+          <a:xfrm>
+            <a:off x="5399532" y="3977640"/>
+            <a:ext cx="1275588" cy="777240"/>
+          </a:xfrm>
+          <a:prstGeom prst="roundRect">
+            <a:avLst>
+              <a:gd name="adj" fmla="val 7059"/>
+            </a:avLst>
+          </a:prstGeom>
+          <a:solidFill>
+            <a:srgbClr val="3A4A8C"/>
+          </a:solidFill>
+          <a:ln/>
+        </p:spPr>
+        <p:txBody>
+          <a:bodyPr/>
+          <a:lstStyle/>
+          <a:p>
+            <a:endParaRPr lang="en-US"/>
+          </a:p>
+        </p:txBody>
+      </p:sp>
+      <p:sp>
+        <p:nvSpPr>
+          <p:cNvPr id="24" name="Text 22"/>
+          <p:cNvSpPr/>
+          <p:nvPr/>
+        </p:nvSpPr>
+        <p:spPr>
+          <a:xfrm>
+            <a:off x="5399532" y="3977640"/>
+            <a:ext cx="1275588" cy="777240"/>
+          </a:xfrm>
+          <a:prstGeom prst="rect">
+            <a:avLst/>
+          </a:prstGeom>
+          <a:noFill/>
+          <a:ln/>
+        </p:spPr>
+        <p:txBody>
+          <a:bodyPr wrap="square" lIns="254" tIns="254" rIns="254" bIns="254" rtlCol="0" anchor="ctr"/>
+          <a:lstStyle/>
+          <a:p>
+            <a:pPr marL="0" indent="0" algn="ctr">
+              <a:buNone/>
+            </a:pPr>
+            <a:r>
+              <a:rPr lang="en-US" sz="1050" b="1" dirty="0">
+                <a:solidFill>
+                  <a:srgbClr val="FFFFFF"/>
+                </a:solidFill>
+                <a:latin typeface="Calibri" pitchFamily="34" charset="0"/>
+                <a:ea typeface="Calibri" pitchFamily="34" charset="-122"/>
+                <a:cs typeface="Calibri" pitchFamily="34" charset="-120"/>
+              </a:rPr>
+              <a:t>seL4 / Microkit</a:t>
+            </a:r>
+            <a:endParaRPr lang="en-US" sz="1050" dirty="0"/>
+          </a:p>
+          <a:p>
+            <a:pPr marL="0" indent="0" algn="ctr">
+              <a:buNone/>
+            </a:pPr>
+            <a:r>
+              <a:rPr lang="en-US" sz="1050" b="1" dirty="0">
+                <a:solidFill>
+                  <a:srgbClr val="FFFFFF"/>
+                </a:solidFill>
+                <a:latin typeface="Calibri" pitchFamily="34" charset="0"/>
+                <a:ea typeface="Calibri" pitchFamily="34" charset="-122"/>
+                <a:cs typeface="Calibri" pitchFamily="34" charset="-120"/>
+              </a:rPr>
+              <a:t>target</a:t>
+            </a:r>
+            <a:endParaRPr lang="en-US" sz="1050" dirty="0"/>
+          </a:p>
+        </p:txBody>
+      </p:sp>
+      <p:sp>
+        <p:nvSpPr>
+          <p:cNvPr id="25" name="Text 23"/>
+          <p:cNvSpPr/>
+          <p:nvPr/>
+        </p:nvSpPr>
+        <p:spPr>
+          <a:xfrm>
+            <a:off x="640080" y="5029200"/>
+            <a:ext cx="6035040" cy="1371600"/>
+          </a:xfrm>
+          <a:prstGeom prst="rect">
+            <a:avLst/>
+          </a:prstGeom>
+          <a:noFill/>
+          <a:ln/>
+        </p:spPr>
+        <p:txBody>
+          <a:bodyPr wrap="square" lIns="0" tIns="0" rIns="0" bIns="0" rtlCol="0" anchor="t"/>
+          <a:lstStyle/>
+          <a:p>
+            <a:pPr marL="342900" indent="-342900" algn="l">
+              <a:buSzPct val="100000"/>
+              <a:buChar char="•"/>
+            </a:pPr>
+            <a:r>
+              <a:rPr lang="en-US" sz="1350" b="1" dirty="0">
+                <a:solidFill>
+                  <a:srgbClr val="212121"/>
+                </a:solidFill>
+                <a:latin typeface="Calibri" pitchFamily="34" charset="0"/>
+                <a:ea typeface="Calibri" pitchFamily="34" charset="-122"/>
+                <a:cs typeface="Calibri" pitchFamily="34" charset="-120"/>
+              </a:rPr>
+              <a:t>Why this example: </a:t>
+            </a:r>
+            <a:r>
+              <a:rPr lang="en-US" sz="1350" dirty="0">
+                <a:solidFill>
+                  <a:srgbClr val="212121"/>
+                </a:solidFill>
+                <a:latin typeface="Calibri" pitchFamily="34" charset="0"/>
+                <a:ea typeface="Calibri" pitchFamily="34" charset="-122"/>
+                <a:cs typeface="Calibri" pitchFamily="34" charset="-120"/>
+              </a:rPr>
+              <a:t>every artifact class from the previous slide is present and measured — blessed model, generated contracts, developer-owned implementation, machine-checked proofs, pinned toolchain</a:t>
+            </a:r>
+            <a:endParaRPr lang="en-US" sz="1350" dirty="0"/>
+          </a:p>
+        </p:txBody>
+      </p:sp>
+      <p:sp>
+        <p:nvSpPr>
+          <p:cNvPr id="26" name="Text 24"/>
+          <p:cNvSpPr/>
+          <p:nvPr/>
+        </p:nvSpPr>
+        <p:spPr>
+          <a:xfrm>
+            <a:off x="7040880" y="1325880"/>
+            <a:ext cx="4480560" cy="320040"/>
+          </a:xfrm>
+          <a:prstGeom prst="rect">
+            <a:avLst/>
+          </a:prstGeom>
+          <a:noFill/>
+          <a:ln/>
+        </p:spPr>
+        <p:txBody>
+          <a:bodyPr wrap="square" lIns="0" tIns="0" rIns="0" bIns="0" rtlCol="0" anchor="ctr"/>
+          <a:lstStyle/>
+          <a:p>
+            <a:pPr marL="0" indent="0" algn="l">
+              <a:buNone/>
+            </a:pPr>
+            <a:r>
+              <a:rPr lang="en-US" sz="1300" i="1" dirty="0">
+                <a:solidFill>
+                  <a:srgbClr val="5A6478"/>
+                </a:solidFill>
+                <a:latin typeface="Calibri" pitchFamily="34" charset="0"/>
+                <a:ea typeface="Calibri" pitchFamily="34" charset="-122"/>
+                <a:cs typeface="Calibri" pitchFamily="34" charset="-120"/>
+              </a:rPr>
+              <a:t>the measured surface</a:t>
+            </a:r>
+            <a:endParaRPr lang="en-US" sz="1300" dirty="0"/>
+          </a:p>
+        </p:txBody>
+      </p:sp>
+      <p:sp>
+        <p:nvSpPr>
+          <p:cNvPr id="27" name="Shape 25"/>
+          <p:cNvSpPr/>
+          <p:nvPr/>
+        </p:nvSpPr>
+        <p:spPr>
+          <a:xfrm>
+            <a:off x="7040880" y="1737360"/>
+            <a:ext cx="4480560" cy="822960"/>
+          </a:xfrm>
+          <a:prstGeom prst="roundRect">
+            <a:avLst>
+              <a:gd name="adj" fmla="val 6667"/>
+            </a:avLst>
+          </a:prstGeom>
+          <a:solidFill>
+            <a:srgbClr val="F2F4F8"/>
+          </a:solidFill>
+          <a:ln w="12700">
+            <a:solidFill>
+              <a:srgbClr val="CADCFC"/>
+            </a:solidFill>
+            <a:prstDash val="solid"/>
+          </a:ln>
+        </p:spPr>
+        <p:txBody>
+          <a:bodyPr/>
+          <a:lstStyle/>
+          <a:p>
+            <a:endParaRPr lang="en-US"/>
+          </a:p>
+        </p:txBody>
+      </p:sp>
+      <p:sp>
+        <p:nvSpPr>
+          <p:cNvPr id="28" name="Text 26"/>
+          <p:cNvSpPr/>
+          <p:nvPr/>
+        </p:nvSpPr>
+        <p:spPr>
+          <a:xfrm>
+            <a:off x="7178040" y="1737360"/>
+            <a:ext cx="1234440" cy="822960"/>
+          </a:xfrm>
+          <a:prstGeom prst="rect">
+            <a:avLst/>
+          </a:prstGeom>
+          <a:noFill/>
+          <a:ln/>
+        </p:spPr>
+        <p:txBody>
+          <a:bodyPr wrap="square" lIns="0" tIns="0" rIns="0" bIns="0" rtlCol="0" anchor="ctr"/>
+          <a:lstStyle/>
+          <a:p>
+            <a:pPr marL="0" indent="0" algn="l">
+              <a:buNone/>
+            </a:pPr>
+            <a:r>
+              <a:rPr lang="en-US" sz="3000" b="1" dirty="0">
+                <a:solidFill>
+                  <a:srgbClr val="1E2761"/>
+                </a:solidFill>
+                <a:latin typeface="Cambria" pitchFamily="34" charset="0"/>
+                <a:ea typeface="Cambria" pitchFamily="34" charset="-122"/>
+                <a:cs typeface="Cambria" pitchFamily="34" charset="-120"/>
+              </a:rPr>
+              <a:t>13</a:t>
+            </a:r>
+            <a:endParaRPr lang="en-US" sz="3000" dirty="0"/>
+          </a:p>
+        </p:txBody>
+      </p:sp>
+      <p:sp>
+        <p:nvSpPr>
+          <p:cNvPr id="29" name="Text 27"/>
+          <p:cNvSpPr/>
+          <p:nvPr/>
+        </p:nvSpPr>
+        <p:spPr>
+          <a:xfrm>
+            <a:off x="8458200" y="1737360"/>
+            <a:ext cx="2971800" cy="822960"/>
+          </a:xfrm>
+          <a:prstGeom prst="rect">
+            <a:avLst/>
+          </a:prstGeom>
+          <a:noFill/>
+          <a:ln/>
+        </p:spPr>
+        <p:txBody>
+          <a:bodyPr wrap="square" lIns="0" tIns="0" rIns="0" bIns="0" rtlCol="0" anchor="ctr"/>
+          <a:lstStyle/>
+          <a:p>
+            <a:pPr marL="0" indent="0" algn="l">
+              <a:buNone/>
+            </a:pPr>
+            <a:r>
+              <a:rPr lang="en-US" sz="1100" dirty="0">
+                <a:solidFill>
+                  <a:srgbClr val="212121"/>
+                </a:solidFill>
+                <a:latin typeface="Calibri" pitchFamily="34" charset="0"/>
+                <a:ea typeface="Calibri" pitchFamily="34" charset="-122"/>
+                <a:cs typeface="Calibri" pitchFamily="34" charset="-120"/>
+              </a:rPr>
+              <a:t>measured files (SysML packages + contract-bearing Rust)</a:t>
+            </a:r>
+            <a:endParaRPr lang="en-US" sz="1100" dirty="0"/>
+          </a:p>
+        </p:txBody>
+      </p:sp>
+      <p:sp>
+        <p:nvSpPr>
+          <p:cNvPr id="30" name="Shape 28"/>
+          <p:cNvSpPr/>
+          <p:nvPr/>
+        </p:nvSpPr>
+        <p:spPr>
+          <a:xfrm>
+            <a:off x="7040880" y="2651760"/>
+            <a:ext cx="4480560" cy="822960"/>
+          </a:xfrm>
+          <a:prstGeom prst="roundRect">
+            <a:avLst>
+              <a:gd name="adj" fmla="val 6667"/>
+            </a:avLst>
+          </a:prstGeom>
+          <a:solidFill>
+            <a:srgbClr val="F2F4F8"/>
+          </a:solidFill>
+          <a:ln w="12700">
+            <a:solidFill>
+              <a:srgbClr val="CADCFC"/>
+            </a:solidFill>
+            <a:prstDash val="solid"/>
+          </a:ln>
+        </p:spPr>
+        <p:txBody>
+          <a:bodyPr/>
+          <a:lstStyle/>
+          <a:p>
+            <a:endParaRPr lang="en-US"/>
+          </a:p>
+        </p:txBody>
+      </p:sp>
+      <p:sp>
+        <p:nvSpPr>
+          <p:cNvPr id="31" name="Text 29"/>
+          <p:cNvSpPr/>
+          <p:nvPr/>
+        </p:nvSpPr>
+        <p:spPr>
+          <a:xfrm>
+            <a:off x="7178040" y="2651760"/>
+            <a:ext cx="1234440" cy="822960"/>
+          </a:xfrm>
+          <a:prstGeom prst="rect">
+            <a:avLst/>
+          </a:prstGeom>
+          <a:noFill/>
+          <a:ln/>
+        </p:spPr>
+        <p:txBody>
+          <a:bodyPr wrap="square" lIns="0" tIns="0" rIns="0" bIns="0" rtlCol="0" anchor="ctr"/>
+          <a:lstStyle/>
+          <a:p>
+            <a:pPr marL="0" indent="0" algn="l">
+              <a:buNone/>
+            </a:pPr>
+            <a:r>
+              <a:rPr lang="en-US" sz="3000" b="1" dirty="0">
+                <a:solidFill>
+                  <a:srgbClr val="1E2761"/>
+                </a:solidFill>
+                <a:latin typeface="Cambria" pitchFamily="34" charset="0"/>
+                <a:ea typeface="Cambria" pitchFamily="34" charset="-122"/>
+                <a:cs typeface="Cambria" pitchFamily="34" charset="-120"/>
+              </a:rPr>
+              <a:t>67</a:t>
+            </a:r>
+            <a:endParaRPr lang="en-US" sz="3000" dirty="0"/>
+          </a:p>
+        </p:txBody>
+      </p:sp>
+      <p:sp>
+        <p:nvSpPr>
+          <p:cNvPr id="32" name="Text 30"/>
+          <p:cNvSpPr/>
+          <p:nvPr/>
+        </p:nvSpPr>
+        <p:spPr>
+          <a:xfrm>
+            <a:off x="8458200" y="2651760"/>
+            <a:ext cx="2971800" cy="822960"/>
+          </a:xfrm>
+          <a:prstGeom prst="rect">
+            <a:avLst/>
+          </a:prstGeom>
+          <a:noFill/>
+          <a:ln/>
+        </p:spPr>
+        <p:txBody>
+          <a:bodyPr wrap="square" lIns="0" tIns="0" rIns="0" bIns="0" rtlCol="0" anchor="ctr"/>
+          <a:lstStyle/>
+          <a:p>
+            <a:pPr marL="0" indent="0" algn="l">
+              <a:buNone/>
+            </a:pPr>
+            <a:r>
+              <a:rPr lang="en-US" sz="1100" dirty="0">
+                <a:solidFill>
+                  <a:srgbClr val="212121"/>
+                </a:solidFill>
+                <a:latin typeface="Calibri" pitchFamily="34" charset="0"/>
+                <a:ea typeface="Calibri" pitchFamily="34" charset="-122"/>
+                <a:cs typeface="Calibri" pitchFamily="34" charset="-120"/>
+              </a:rPr>
+              <a:t>contract slices</a:t>
+            </a:r>
+            <a:endParaRPr lang="en-US" sz="1100" dirty="0"/>
+          </a:p>
+        </p:txBody>
+      </p:sp>
+      <p:sp>
+        <p:nvSpPr>
+          <p:cNvPr id="33" name="Shape 31"/>
+          <p:cNvSpPr/>
+          <p:nvPr/>
+        </p:nvSpPr>
+        <p:spPr>
+          <a:xfrm>
+            <a:off x="7040880" y="3566160"/>
+            <a:ext cx="4480560" cy="822960"/>
+          </a:xfrm>
+          <a:prstGeom prst="roundRect">
+            <a:avLst>
+              <a:gd name="adj" fmla="val 6667"/>
+            </a:avLst>
+          </a:prstGeom>
+          <a:solidFill>
+            <a:srgbClr val="F2F4F8"/>
+          </a:solidFill>
+          <a:ln w="12700">
+            <a:solidFill>
+              <a:srgbClr val="CADCFC"/>
+            </a:solidFill>
+            <a:prstDash val="solid"/>
+          </a:ln>
+        </p:spPr>
+        <p:txBody>
+          <a:bodyPr/>
+          <a:lstStyle/>
+          <a:p>
+            <a:endParaRPr lang="en-US"/>
+          </a:p>
+        </p:txBody>
+      </p:sp>
+      <p:sp>
+        <p:nvSpPr>
+          <p:cNvPr id="34" name="Text 32"/>
+          <p:cNvSpPr/>
+          <p:nvPr/>
+        </p:nvSpPr>
+        <p:spPr>
+          <a:xfrm>
+            <a:off x="7178040" y="3566160"/>
+            <a:ext cx="1234440" cy="822960"/>
+          </a:xfrm>
+          <a:prstGeom prst="rect">
+            <a:avLst/>
+          </a:prstGeom>
+          <a:noFill/>
+          <a:ln/>
+        </p:spPr>
+        <p:txBody>
+          <a:bodyPr wrap="square" lIns="0" tIns="0" rIns="0" bIns="0" rtlCol="0" anchor="ctr"/>
+          <a:lstStyle/>
+          <a:p>
+            <a:pPr marL="0" indent="0" algn="l">
+              <a:buNone/>
+            </a:pPr>
+            <a:r>
+              <a:rPr lang="en-US" sz="3000" b="1" dirty="0">
+                <a:solidFill>
+                  <a:srgbClr val="1E2761"/>
+                </a:solidFill>
+                <a:latin typeface="Cambria" pitchFamily="34" charset="0"/>
+                <a:ea typeface="Cambria" pitchFamily="34" charset="-122"/>
+                <a:cs typeface="Cambria" pitchFamily="34" charset="-120"/>
+              </a:rPr>
+              <a:t>8</a:t>
+            </a:r>
+            <a:endParaRPr lang="en-US" sz="3000" dirty="0"/>
+          </a:p>
+        </p:txBody>
+      </p:sp>
+      <p:sp>
+        <p:nvSpPr>
+          <p:cNvPr id="35" name="Text 33"/>
+          <p:cNvSpPr/>
+          <p:nvPr/>
+        </p:nvSpPr>
+        <p:spPr>
+          <a:xfrm>
+            <a:off x="8458200" y="3566160"/>
+            <a:ext cx="2971800" cy="822960"/>
+          </a:xfrm>
+          <a:prstGeom prst="rect">
+            <a:avLst/>
+          </a:prstGeom>
+          <a:noFill/>
+          <a:ln/>
+        </p:spPr>
+        <p:txBody>
+          <a:bodyPr wrap="square" lIns="0" tIns="0" rIns="0" bIns="0" rtlCol="0" anchor="ctr"/>
+          <a:lstStyle/>
+          <a:p>
+            <a:pPr marL="0" indent="0" algn="l">
+              <a:buNone/>
+            </a:pPr>
+            <a:r>
+              <a:rPr lang="en-US" sz="1100" dirty="0">
+                <a:solidFill>
+                  <a:srgbClr val="212121"/>
+                </a:solidFill>
+                <a:latin typeface="Calibri" pitchFamily="34" charset="0"/>
+                <a:ea typeface="Calibri" pitchFamily="34" charset="-122"/>
+                <a:cs typeface="Calibri" pitchFamily="34" charset="-120"/>
+              </a:rPr>
+              <a:t>crates re-verified every episode (7 components + the system proof)</a:t>
+            </a:r>
+            <a:endParaRPr lang="en-US" sz="1100" dirty="0"/>
+          </a:p>
+        </p:txBody>
+      </p:sp>
+      <p:sp>
+        <p:nvSpPr>
+          <p:cNvPr id="36" name="Shape 34"/>
+          <p:cNvSpPr/>
+          <p:nvPr/>
+        </p:nvSpPr>
+        <p:spPr>
+          <a:xfrm>
+            <a:off x="7040880" y="4480560"/>
+            <a:ext cx="4480560" cy="822960"/>
+          </a:xfrm>
+          <a:prstGeom prst="roundRect">
+            <a:avLst>
+              <a:gd name="adj" fmla="val 6667"/>
+            </a:avLst>
+          </a:prstGeom>
+          <a:solidFill>
+            <a:srgbClr val="F2F4F8"/>
+          </a:solidFill>
+          <a:ln w="12700">
+            <a:solidFill>
+              <a:srgbClr val="CADCFC"/>
+            </a:solidFill>
+            <a:prstDash val="solid"/>
+          </a:ln>
+        </p:spPr>
+        <p:txBody>
+          <a:bodyPr/>
+          <a:lstStyle/>
+          <a:p>
+            <a:endParaRPr lang="en-US"/>
+          </a:p>
+        </p:txBody>
+      </p:sp>
+      <p:sp>
+        <p:nvSpPr>
+          <p:cNvPr id="37" name="Text 35"/>
+          <p:cNvSpPr/>
+          <p:nvPr/>
+        </p:nvSpPr>
+        <p:spPr>
+          <a:xfrm>
+            <a:off x="7178040" y="4480560"/>
+            <a:ext cx="1234440" cy="822960"/>
+          </a:xfrm>
+          <a:prstGeom prst="rect">
+            <a:avLst/>
+          </a:prstGeom>
+          <a:noFill/>
+          <a:ln/>
+        </p:spPr>
+        <p:txBody>
+          <a:bodyPr wrap="square" lIns="0" tIns="0" rIns="0" bIns="0" rtlCol="0" anchor="ctr"/>
+          <a:lstStyle/>
+          <a:p>
+            <a:pPr marL="0" indent="0" algn="l">
+              <a:buNone/>
+            </a:pPr>
+            <a:r>
+              <a:rPr lang="en-US" sz="3000" b="1" dirty="0">
+                <a:solidFill>
+                  <a:srgbClr val="1E2761"/>
+                </a:solidFill>
+                <a:latin typeface="Cambria" pitchFamily="34" charset="0"/>
+                <a:ea typeface="Cambria" pitchFamily="34" charset="-122"/>
+                <a:cs typeface="Cambria" pitchFamily="34" charset="-120"/>
+              </a:rPr>
+              <a:t>1,862</a:t>
+            </a:r>
+            <a:endParaRPr lang="en-US" sz="3000" dirty="0"/>
+          </a:p>
+        </p:txBody>
+      </p:sp>
+      <p:sp>
+        <p:nvSpPr>
+          <p:cNvPr id="38" name="Text 36"/>
+          <p:cNvSpPr/>
+          <p:nvPr/>
+        </p:nvSpPr>
+        <p:spPr>
+          <a:xfrm>
+            <a:off x="8458200" y="4480560"/>
+            <a:ext cx="2971800" cy="822960"/>
+          </a:xfrm>
+          <a:prstGeom prst="rect">
+            <a:avLst/>
+          </a:prstGeom>
+          <a:noFill/>
+          <a:ln/>
+        </p:spPr>
+        <p:txBody>
+          <a:bodyPr wrap="square" lIns="0" tIns="0" rIns="0" bIns="0" rtlCol="0" anchor="ctr"/>
+          <a:lstStyle/>
+          <a:p>
+            <a:pPr marL="0" indent="0" algn="l">
+              <a:buNone/>
+            </a:pPr>
+            <a:r>
+              <a:rPr lang="en-US" sz="1100" dirty="0">
+                <a:solidFill>
+                  <a:srgbClr val="212121"/>
+                </a:solidFill>
+                <a:latin typeface="Calibri" pitchFamily="34" charset="0"/>
+                <a:ea typeface="Calibri" pitchFamily="34" charset="-122"/>
+                <a:cs typeface="Calibri" pitchFamily="34" charset="-120"/>
+              </a:rPr>
+              <a:t>system-proof obligations</a:t>
+            </a:r>
+            <a:endParaRPr lang="en-US" sz="1100" dirty="0"/>
+          </a:p>
+        </p:txBody>
+      </p:sp>
+      <p:sp>
+        <p:nvSpPr>
+          <p:cNvPr id="39" name="Shape 37"/>
+          <p:cNvSpPr/>
+          <p:nvPr/>
+        </p:nvSpPr>
+        <p:spPr>
+          <a:xfrm>
+            <a:off x="7040880" y="5394960"/>
+            <a:ext cx="4480560" cy="822960"/>
+          </a:xfrm>
+          <a:prstGeom prst="roundRect">
+            <a:avLst>
+              <a:gd name="adj" fmla="val 6667"/>
+            </a:avLst>
+          </a:prstGeom>
+          <a:solidFill>
+            <a:srgbClr val="F2F4F8"/>
+          </a:solidFill>
+          <a:ln w="12700">
+            <a:solidFill>
+              <a:srgbClr val="CADCFC"/>
+            </a:solidFill>
+            <a:prstDash val="solid"/>
+          </a:ln>
+        </p:spPr>
+        <p:txBody>
+          <a:bodyPr/>
+          <a:lstStyle/>
+          <a:p>
+            <a:endParaRPr lang="en-US"/>
+          </a:p>
+        </p:txBody>
+      </p:sp>
+      <p:sp>
+        <p:nvSpPr>
+          <p:cNvPr id="40" name="Text 38"/>
+          <p:cNvSpPr/>
+          <p:nvPr/>
+        </p:nvSpPr>
+        <p:spPr>
+          <a:xfrm>
+            <a:off x="7178040" y="5394960"/>
+            <a:ext cx="1234440" cy="822960"/>
+          </a:xfrm>
+          <a:prstGeom prst="rect">
+            <a:avLst/>
+          </a:prstGeom>
+          <a:noFill/>
+          <a:ln/>
+        </p:spPr>
+        <p:txBody>
+          <a:bodyPr wrap="square" lIns="0" tIns="0" rIns="0" bIns="0" rtlCol="0" anchor="ctr"/>
+          <a:lstStyle/>
+          <a:p>
+            <a:pPr marL="0" indent="0" algn="l">
+              <a:buNone/>
+            </a:pPr>
+            <a:r>
+              <a:rPr lang="en-US" sz="3000" b="1" dirty="0">
+                <a:solidFill>
+                  <a:srgbClr val="1E2761"/>
+                </a:solidFill>
+                <a:latin typeface="Cambria" pitchFamily="34" charset="0"/>
+                <a:ea typeface="Cambria" pitchFamily="34" charset="-122"/>
+                <a:cs typeface="Cambria" pitchFamily="34" charset="-120"/>
+              </a:rPr>
+              <a:t>8</a:t>
+            </a:r>
+            <a:endParaRPr lang="en-US" sz="3000" dirty="0"/>
+          </a:p>
+        </p:txBody>
+      </p:sp>
+      <p:sp>
+        <p:nvSpPr>
+          <p:cNvPr id="41" name="Text 39"/>
+          <p:cNvSpPr/>
+          <p:nvPr/>
+        </p:nvSpPr>
+        <p:spPr>
+          <a:xfrm>
+            <a:off x="8458200" y="5394960"/>
+            <a:ext cx="2971800" cy="822960"/>
+          </a:xfrm>
+          <a:prstGeom prst="rect">
+            <a:avLst/>
+          </a:prstGeom>
+          <a:noFill/>
+          <a:ln/>
+        </p:spPr>
+        <p:txBody>
+          <a:bodyPr wrap="square" lIns="0" tIns="0" rIns="0" bIns="0" rtlCol="0" anchor="ctr"/>
+          <a:lstStyle/>
+          <a:p>
+            <a:pPr marL="0" indent="0" algn="l">
+              <a:buNone/>
+            </a:pPr>
+            <a:r>
+              <a:rPr lang="en-US" sz="1100" dirty="0">
+                <a:solidFill>
+                  <a:srgbClr val="212121"/>
+                </a:solidFill>
+                <a:latin typeface="Calibri" pitchFamily="34" charset="0"/>
+                <a:ea typeface="Calibri" pitchFamily="34" charset="-122"/>
+                <a:cs typeface="Calibri" pitchFamily="34" charset="-120"/>
+              </a:rPr>
+              <a:t>attestation tiers — the glossary's entry keys:</a:t>
+            </a:r>
+            <a:endParaRPr lang="en-US" sz="1100" dirty="0"/>
+          </a:p>
+          <a:p>
+            <a:pPr marL="0" indent="0" algn="l">
+              <a:buNone/>
+            </a:pPr>
+            <a:r>
+              <a:rPr lang="en-US" sz="1100" dirty="0">
+                <a:solidFill>
+                  <a:srgbClr val="212121"/>
+                </a:solidFill>
+                <a:latin typeface="Calibri" pitchFamily="34" charset="0"/>
+                <a:ea typeface="Calibri" pitchFamily="34" charset="-122"/>
+                <a:cs typeface="Calibri" pitchFamily="34" charset="-120"/>
+              </a:rPr>
+              <a:t>props · l1a · l2 · verus · cheat · sysproof · gensrc · report</a:t>
+            </a:r>
+            <a:endParaRPr lang="en-US" sz="1100" dirty="0"/>
+          </a:p>
+        </p:txBody>
+      </p:sp>
     </p:spTree>
   </p:cSld>
   <p:clrMapOvr>

--- a/docs/video_slides_draft.pptx
+++ b/docs/video_slides_draft.pptx
@@ -4,9 +4,6 @@
   <p:sldMasterIdLst>
     <p:sldMasterId id="2147483648" r:id="rId1"/>
   </p:sldMasterIdLst>
-  <p:notesMasterIdLst>
-    <p:notesMasterId r:id="rId10"/>
-  </p:notesMasterIdLst>
   <p:sldIdLst>
     <p:sldId id="256" r:id="rId2"/>
     <p:sldId id="257" r:id="rId3"/>
@@ -16,7 +13,11 @@
     <p:sldId id="261" r:id="rId7"/>
     <p:sldId id="262" r:id="rId8"/>
     <p:sldId id="263" r:id="rId9"/>
+    <p:sldId id="264" r:id="rId10"/>
   </p:sldIdLst>
+  <p:notesMasterIdLst>
+    <p:notesMasterId r:id="rId11"/>
+  </p:notesMasterIdLst>
   <p:sldSz cx="12192000" cy="6858000"/>
   <p:notesSz cx="6858000" cy="12192000"/>
   <p:defaultTextStyle>
@@ -111,11 +112,6 @@
       </a:defRPr>
     </a:lvl9pPr>
   </p:defaultTextStyle>
-  <p:extLst>
-    <p:ext uri="{EFAFB233-063F-42B5-8137-9DF3F51BA10A}">
-      <p15:sldGuideLst xmlns:p15="http://schemas.microsoft.com/office/powerpoint/2012/main"/>
-    </p:ext>
-  </p:extLst>
 </p:presentation>
 </file>
 
@@ -141,10 +137,234 @@
           <a:chExt cx="0" cy="0"/>
         </a:xfrm>
       </p:grpSpPr>
+      <p:sp>
+        <p:nvSpPr>
+          <p:cNvPr id="2" name="Header Placeholder 1"/>
+          <p:cNvSpPr>
+            <a:spLocks noGrp="1"/>
+          </p:cNvSpPr>
+          <p:nvPr>
+            <p:ph type="hdr" sz="quarter"/>
+          </p:nvPr>
+        </p:nvSpPr>
+        <p:spPr>
+          <a:xfrm>
+            <a:off x="0" y="0"/>
+            <a:ext cx="2971800" cy="458788"/>
+          </a:xfrm>
+          <a:prstGeom prst="rect">
+            <a:avLst/>
+          </a:prstGeom>
+        </p:spPr>
+        <p:txBody>
+          <a:bodyPr vert="horz" lIns="91440" tIns="45720" rIns="91440" bIns="45720" rtlCol="0"/>
+          <a:lstStyle>
+            <a:lvl1pPr algn="l">
+              <a:defRPr sz="1200"/>
+            </a:lvl1pPr>
+          </a:lstStyle>
+          <a:p>
+            <a:endParaRPr lang="en-US"/>
+          </a:p>
+        </p:txBody>
+      </p:sp>
+      <p:sp>
+        <p:nvSpPr>
+          <p:cNvPr id="3" name="Date Placeholder 2"/>
+          <p:cNvSpPr>
+            <a:spLocks noGrp="1"/>
+          </p:cNvSpPr>
+          <p:nvPr>
+            <p:ph type="dt" idx="1"/>
+          </p:nvPr>
+        </p:nvSpPr>
+        <p:spPr>
+          <a:xfrm>
+            <a:off x="3884613" y="0"/>
+            <a:ext cx="2971800" cy="458788"/>
+          </a:xfrm>
+          <a:prstGeom prst="rect">
+            <a:avLst/>
+          </a:prstGeom>
+        </p:spPr>
+        <p:txBody>
+          <a:bodyPr vert="horz" lIns="91440" tIns="45720" rIns="91440" bIns="45720" rtlCol="0"/>
+          <a:lstStyle>
+            <a:lvl1pPr algn="r">
+              <a:defRPr sz="1200"/>
+            </a:lvl1pPr>
+          </a:lstStyle>
+          <a:p>
+            <a:fld id="{5282F153-3F37-0F45-9E97-73ACFA13230C}" type="datetimeFigureOut">
+              <a:rPr lang="en-US"/>
+              <a:t>7/23/19</a:t>
+            </a:fld>
+            <a:endParaRPr lang="en-US"/>
+          </a:p>
+        </p:txBody>
+      </p:sp>
+      <p:sp>
+        <p:nvSpPr>
+          <p:cNvPr id="4" name="Slide Image Placeholder 3"/>
+          <p:cNvSpPr>
+            <a:spLocks noGrp="1" noRot="1" noChangeAspect="1"/>
+          </p:cNvSpPr>
+          <p:nvPr>
+            <p:ph type="sldImg" idx="2"/>
+          </p:nvPr>
+        </p:nvSpPr>
+        <p:spPr>
+          <a:xfrm>
+            <a:off x="685800" y="1143000"/>
+            <a:ext cx="5486400" cy="3086100"/>
+          </a:xfrm>
+          <a:prstGeom prst="rect">
+            <a:avLst/>
+          </a:prstGeom>
+          <a:noFill/>
+          <a:ln w="12700">
+            <a:solidFill>
+              <a:prstClr val="black"/>
+            </a:solidFill>
+          </a:ln>
+        </p:spPr>
+        <p:txBody>
+          <a:bodyPr vert="horz" lIns="91440" tIns="45720" rIns="91440" bIns="45720" rtlCol="0" anchor="ctr"/>
+          <a:lstStyle/>
+          <a:p>
+            <a:endParaRPr lang="en-US"/>
+          </a:p>
+        </p:txBody>
+      </p:sp>
+      <p:sp>
+        <p:nvSpPr>
+          <p:cNvPr id="5" name="Notes Placeholder 4"/>
+          <p:cNvSpPr>
+            <a:spLocks noGrp="1"/>
+          </p:cNvSpPr>
+          <p:nvPr>
+            <p:ph type="body" sz="quarter" idx="3"/>
+          </p:nvPr>
+        </p:nvSpPr>
+        <p:spPr>
+          <a:xfrm>
+            <a:off x="685800" y="4400550"/>
+            <a:ext cx="5486400" cy="3600450"/>
+          </a:xfrm>
+          <a:prstGeom prst="rect">
+            <a:avLst/>
+          </a:prstGeom>
+        </p:spPr>
+        <p:txBody>
+          <a:bodyPr vert="horz" lIns="91440" tIns="45720" rIns="91440" bIns="45720" rtlCol="0"/>
+          <a:lstStyle/>
+          <a:p>
+            <a:pPr lvl="0"/>
+            <a:r>
+              <a:rPr lang="en-US"/>
+              <a:t>Click to edit Master text styles</a:t>
+            </a:r>
+          </a:p>
+          <a:p>
+            <a:pPr lvl="1"/>
+            <a:r>
+              <a:rPr lang="en-US"/>
+              <a:t>Second level</a:t>
+            </a:r>
+          </a:p>
+          <a:p>
+            <a:pPr lvl="2"/>
+            <a:r>
+              <a:rPr lang="en-US"/>
+              <a:t>Third level</a:t>
+            </a:r>
+          </a:p>
+          <a:p>
+            <a:pPr lvl="3"/>
+            <a:r>
+              <a:rPr lang="en-US"/>
+              <a:t>Fourth level</a:t>
+            </a:r>
+          </a:p>
+          <a:p>
+            <a:pPr lvl="4"/>
+            <a:r>
+              <a:rPr lang="en-US"/>
+              <a:t>Fifth level</a:t>
+            </a:r>
+          </a:p>
+        </p:txBody>
+      </p:sp>
+      <p:sp>
+        <p:nvSpPr>
+          <p:cNvPr id="6" name="Footer Placeholder 5"/>
+          <p:cNvSpPr>
+            <a:spLocks noGrp="1"/>
+          </p:cNvSpPr>
+          <p:nvPr>
+            <p:ph type="ftr" sz="quarter" idx="4"/>
+          </p:nvPr>
+        </p:nvSpPr>
+        <p:spPr>
+          <a:xfrm>
+            <a:off x="0" y="8685213"/>
+            <a:ext cx="2971800" cy="458787"/>
+          </a:xfrm>
+          <a:prstGeom prst="rect">
+            <a:avLst/>
+          </a:prstGeom>
+        </p:spPr>
+        <p:txBody>
+          <a:bodyPr vert="horz" lIns="91440" tIns="45720" rIns="91440" bIns="45720" rtlCol="0" anchor="b"/>
+          <a:lstStyle>
+            <a:lvl1pPr algn="l">
+              <a:defRPr sz="1200"/>
+            </a:lvl1pPr>
+          </a:lstStyle>
+          <a:p>
+            <a:endParaRPr lang="en-US"/>
+          </a:p>
+        </p:txBody>
+      </p:sp>
+      <p:sp>
+        <p:nvSpPr>
+          <p:cNvPr id="7" name="Slide Number Placeholder 6"/>
+          <p:cNvSpPr>
+            <a:spLocks noGrp="1"/>
+          </p:cNvSpPr>
+          <p:nvPr>
+            <p:ph type="sldNum" sz="quarter" idx="5"/>
+          </p:nvPr>
+        </p:nvSpPr>
+        <p:spPr>
+          <a:xfrm>
+            <a:off x="3884613" y="8685213"/>
+            <a:ext cx="2971800" cy="458787"/>
+          </a:xfrm>
+          <a:prstGeom prst="rect">
+            <a:avLst/>
+          </a:prstGeom>
+        </p:spPr>
+        <p:txBody>
+          <a:bodyPr vert="horz" lIns="91440" tIns="45720" rIns="91440" bIns="45720" rtlCol="0" anchor="b"/>
+          <a:lstStyle>
+            <a:lvl1pPr algn="r">
+              <a:defRPr sz="1200"/>
+            </a:lvl1pPr>
+          </a:lstStyle>
+          <a:p>
+            <a:fld id="{CE5E9CC1-C706-0F49-92D6-E571CC5EEA8F}" type="slidenum">
+              <a:rPr lang="en-US"/>
+              <a:t>‹#›</a:t>
+            </a:fld>
+            <a:endParaRPr lang="en-US"/>
+          </a:p>
+        </p:txBody>
+      </p:sp>
     </p:spTree>
     <p:extLst>
       <p:ext uri="{BB962C8B-B14F-4D97-AF65-F5344CB8AC3E}">
-        <p14:creationId xmlns:p14="http://schemas.microsoft.com/office/powerpoint/2010/main" val="1964892576"/>
+        <p14:creationId xmlns:p14="http://schemas.microsoft.com/office/powerpoint/2010/main" val="1024086991"/>
       </p:ext>
     </p:extLst>
   </p:cSld>
@@ -292,6 +512,7 @@
               <a:rPr lang="en-US" dirty="0"/>
               <a:t>Title card. Subtitle deliberately names the four core artifact classes - the deck's first echo of the artifact-class table (slide 6). Optional footer: INSPECTA program context.</a:t>
             </a:r>
+            <a:endParaRPr lang="en-US" dirty="0"/>
           </a:p>
         </p:txBody>
       </p:sp>
@@ -382,6 +603,7 @@
 Subline payoffs: developer claims -&gt; scenes 5/7; untrusted tools -&gt; scene 7; LLM outputs -&gt; capstone slides A/B; cached verdicts -&gt; scene 11.
 Visual TODO: three-stage widening-scope progression (boot-time -&gt; layered runtime -&gt; lifecycle loop) to replace/join the bullets.</a:t>
             </a:r>
+            <a:endParaRPr lang="en-US" dirty="0"/>
           </a:p>
         </p:txBody>
       </p:sp>
@@ -470,6 +692,7 @@
               <a:t>~15 seconds on first appearance; afterwards it rides on transition slides for free.
 Design decision: one master/layout holds the strip text so a section rename is a single edit. Header titles are provisional.</a:t>
             </a:r>
+            <a:endParaRPr lang="en-US" dirty="0"/>
           </a:p>
         </p:txBody>
       </p:sp>
@@ -560,6 +783,7 @@
 Snippet source: tests/fixtures/isolette_sysmlv2_rust_props/term.json, rendered in concrete syntax (branches flattened, target IDs shortened to file names - cosmetic).
 The verus-tier measure-then-use phrase is deliberately held back for scene 7's reveal.</a:t>
             </a:r>
+            <a:endParaRPr lang="en-US" dirty="0"/>
           </a:p>
         </p:txBody>
       </p:sp>
@@ -651,6 +875,7 @@
 Speaker-note-only details (cut from the slide): on_pass/on_fail dispatch mechanics, success-driven handoff for component-wise entries, max_attempts per rung.
 The legend earns its space: every scene's checklist frames render through these glyphs.</a:t>
             </a:r>
+            <a:endParaRPr lang="en-US" dirty="0"/>
           </a:p>
         </p:txBody>
       </p:sp>
@@ -741,6 +966,7 @@
 Predicate and restart-episode are deliberately OFF this slide (parked; placement TBD - possibly an 'evaluation primitives' strip). If asked: a predicate is the judge (one evaluation = one attestation episode), restart-episode is the freshness primitive (forget memoized verdicts, reset, re-evaluate).
 Also deliberately excluded (README-level detail): partition mechanics, component-wise entries and success handoff, dispatch latching, max_cycles.</a:t>
             </a:r>
+            <a:endParaRPr lang="en-US" dirty="0"/>
           </a:p>
         </p:txBody>
       </p:sp>
@@ -830,6 +1056,7 @@
 Spoken hook (never on-slide text): 'This table is deliberately incomplete - the demo will show why.' The cheat / sysproof / gensrc tiers are capstone slide C's punchline: attacks forced them into existence. Do not pre-introduce them here.
 Same column shape (class -&gt; measured how -&gt; judged by -&gt; repair) as capstone slide B, so the audience recognizes it when it returns.</a:t>
             </a:r>
+            <a:endParaRPr lang="en-US" dirty="0"/>
           </a:p>
         </p:txBody>
       </p:sp>
@@ -921,6 +1148,7 @@
 Held back on purpose (scene 9's reveal): cheat-tier depth stats - 86 blessed external_body sites, 10 scanned crates.
 Numbers verified exact 2026-08-25 (l1a targets, l2 slices, verus term, pub-proof-fn count); provision-dependent - re-verify before recording day.</a:t>
             </a:r>
+            <a:endParaRPr lang="en-US" dirty="0"/>
           </a:p>
         </p:txBody>
       </p:sp>
@@ -942,6 +1170,95 @@
             <a:fld id="{F7021451-1387-4CA6-816F-3879F97B5CBC}" type="slidenum">
               <a:rPr lang="en-US"/>
               <a:t>8</a:t>
+            </a:fld>
+            <a:endParaRPr lang="en-US"/>
+          </a:p>
+        </p:txBody>
+      </p:sp>
+    </p:spTree>
+    <p:extLst>
+      <p:ext uri="{BB962C8B-B14F-4D97-AF65-F5344CB8AC3E}">
+        <p14:creationId xmlns:p14="http://schemas.microsoft.com/office/powerpoint/2010/main" val="1024086991"/>
+      </p:ext>
+    </p:extLst>
+  </p:cSld>
+  <p:clrMapOvr>
+    <a:masterClrMapping/>
+  </p:clrMapOvr>
+</p:notes>
+</file>
+
+<file path=ppt/notesSlides/notesSlide9.xml><?xml version="1.0" encoding="utf-8"?>
+<p:notes xmlns:a="http://schemas.openxmlformats.org/drawingml/2006/main" xmlns:r="http://schemas.openxmlformats.org/officeDocument/2006/relationships" xmlns:p="http://schemas.openxmlformats.org/presentationml/2006/main">
+  <p:cSld>
+    <p:spTree>
+      <p:nvGrpSpPr>
+        <p:cNvPr id="1" name=""/>
+        <p:cNvGrpSpPr/>
+        <p:nvPr/>
+      </p:nvGrpSpPr>
+      <p:grpSpPr>
+        <a:xfrm>
+          <a:off x="0" y="0"/>
+          <a:ext cx="0" cy="0"/>
+          <a:chOff x="0" y="0"/>
+          <a:chExt cx="0" cy="0"/>
+        </a:xfrm>
+      </p:grpSpPr>
+      <p:sp>
+        <p:nvSpPr>
+          <p:cNvPr id="2" name="Slide Image Placeholder 1"/>
+          <p:cNvSpPr>
+            <a:spLocks noGrp="1" noRot="1" noChangeAspect="1"/>
+          </p:cNvSpPr>
+          <p:nvPr>
+            <p:ph type="sldImg"/>
+          </p:nvPr>
+        </p:nvSpPr>
+        <p:spPr/>
+      </p:sp>
+      <p:sp>
+        <p:nvSpPr>
+          <p:cNvPr id="3" name="Notes Placeholder 2"/>
+          <p:cNvSpPr>
+            <a:spLocks noGrp="1"/>
+          </p:cNvSpPr>
+          <p:nvPr>
+            <p:ph type="body" idx="1"/>
+          </p:nvPr>
+        </p:nvSpPr>
+        <p:spPr/>
+        <p:txBody>
+          <a:bodyPr/>
+          <a:lstStyle/>
+          <a:p>
+            <a:r>
+              <a:rPr lang="en-US" dirty="0"/>
+              <a:t>Collection point for every reference in the deck - keep this slide current as sections are added (isolette slide carries the K-State + AR-08-32 citations inline; Copland/Verus/seL4 seeded here ahead of their sections).
+DOIs on record in docs/video_slide_drafts.md.</a:t>
+            </a:r>
+            <a:endParaRPr lang="en-US" dirty="0"/>
+          </a:p>
+        </p:txBody>
+      </p:sp>
+      <p:sp>
+        <p:nvSpPr>
+          <p:cNvPr id="4" name="Slide Number Placeholder 3"/>
+          <p:cNvSpPr>
+            <a:spLocks noGrp="1"/>
+          </p:cNvSpPr>
+          <p:nvPr>
+            <p:ph type="sldNum" sz="quarter" idx="10"/>
+          </p:nvPr>
+        </p:nvSpPr>
+        <p:spPr/>
+        <p:txBody>
+          <a:bodyPr/>
+          <a:lstStyle/>
+          <a:p>
+            <a:fld id="{F7021451-1387-4CA6-816F-3879F97B5CBC}" type="slidenum">
+              <a:rPr lang="en-US"/>
+              <a:t>9</a:t>
             </a:fld>
             <a:endParaRPr lang="en-US"/>
           </a:p>
@@ -993,11 +1310,6 @@
 <file path=ppt/slideMasters/slideMaster1.xml><?xml version="1.0" encoding="utf-8"?>
 <p:sldMaster xmlns:a="http://schemas.openxmlformats.org/drawingml/2006/main" xmlns:r="http://schemas.openxmlformats.org/officeDocument/2006/relationships" xmlns:p="http://schemas.openxmlformats.org/presentationml/2006/main">
   <p:cSld>
-    <p:bg>
-      <p:bgRef idx="1001">
-        <a:schemeClr val="bg1"/>
-      </p:bgRef>
-    </p:bg>
     <p:spTree>
       <p:nvGrpSpPr>
         <p:cNvPr id="1" name=""/>
@@ -1280,7 +1592,6 @@
         <a:solidFill>
           <a:srgbClr val="1E2761"/>
         </a:solidFill>
-        <a:effectLst/>
       </p:bgPr>
     </p:bg>
     <p:spTree>
@@ -1318,7 +1629,7 @@
           <a:bodyPr wrap="square" lIns="0" tIns="0" rIns="0" bIns="0" rtlCol="0" anchor="ctr"/>
           <a:lstStyle/>
           <a:p>
-            <a:pPr marL="0" indent="0" algn="l">
+            <a:pPr algn="l" indent="0" marL="0">
               <a:buNone/>
             </a:pPr>
             <a:r>
@@ -1357,7 +1668,7 @@
           <a:bodyPr wrap="square" lIns="0" tIns="0" rIns="0" bIns="0" rtlCol="0" anchor="ctr"/>
           <a:lstStyle/>
           <a:p>
-            <a:pPr marL="0" indent="0" algn="l">
+            <a:pPr algn="l" indent="0" marL="0">
               <a:buNone/>
             </a:pPr>
             <a:r>
@@ -1396,7 +1707,7 @@
           <a:bodyPr wrap="square" lIns="0" tIns="0" rIns="0" bIns="0" rtlCol="0" anchor="ctr"/>
           <a:lstStyle/>
           <a:p>
-            <a:pPr marL="0" indent="0" algn="l">
+            <a:pPr algn="l" indent="0" marL="0">
               <a:buNone/>
             </a:pPr>
             <a:r>
@@ -1430,7 +1741,6 @@
         <a:solidFill>
           <a:srgbClr val="FFFFFF"/>
         </a:solidFill>
-        <a:effectLst/>
       </p:bgPr>
     </p:bg>
     <p:spTree>
@@ -1468,7 +1778,7 @@
           <a:bodyPr wrap="square" lIns="0" tIns="0" rIns="0" bIns="0" rtlCol="0" anchor="ctr"/>
           <a:lstStyle/>
           <a:p>
-            <a:pPr marL="0" indent="0">
+            <a:pPr indent="0" marL="0">
               <a:buNone/>
             </a:pPr>
             <a:r>
@@ -1507,7 +1817,7 @@
           <a:bodyPr wrap="square" lIns="0" tIns="0" rIns="0" bIns="0" rtlCol="0" anchor="t"/>
           <a:lstStyle/>
           <a:p>
-            <a:pPr marL="342900" indent="-342900" algn="l">
+            <a:pPr algn="l" marL="342900" indent="-342900">
               <a:buSzPct val="100000"/>
               <a:buChar char="•"/>
             </a:pPr>
@@ -1520,8 +1830,28 @@
                 <a:ea typeface="Calibri" pitchFamily="34" charset="-122"/>
                 <a:cs typeface="Calibri" pitchFamily="34" charset="-120"/>
               </a:rPr>
-              <a:t>Traditional remote attestation: did system components boot into a predictable state?</a:t>
-            </a:r>
+              <a:t>Traditional remote attestation: </a:t>
+            </a:r>
+            <a:pPr algn="l" indent="0" marL="0">
+              <a:buNone/>
+            </a:pPr>
+            <a:r>
+              <a:rPr lang="en-US" sz="1700" b="1" dirty="0">
+                <a:solidFill>
+                  <a:srgbClr val="212121"/>
+                </a:solidFill>
+                <a:latin typeface="Calibri" pitchFamily="34" charset="0"/>
+                <a:ea typeface="Calibri" pitchFamily="34" charset="-122"/>
+                <a:cs typeface="Calibri" pitchFamily="34" charset="-120"/>
+              </a:rPr>
+              <a:t>did system components boot into a predictable state?</a:t>
+            </a:r>
+            <a:pPr algn="l" indent="0" marL="0">
+              <a:spcAft>
+                <a:spcPts val="1000"/>
+              </a:spcAft>
+              <a:buNone/>
+            </a:pPr>
             <a:r>
               <a:rPr lang="en-US" sz="1700" dirty="0">
                 <a:solidFill>
@@ -1536,7 +1866,7 @@
             <a:endParaRPr lang="en-US" sz="1700" dirty="0"/>
           </a:p>
           <a:p>
-            <a:pPr marL="342900" indent="-342900" algn="l">
+            <a:pPr algn="l" marL="342900" indent="-342900">
               <a:buSzPct val="100000"/>
               <a:buChar char="•"/>
             </a:pPr>
@@ -1551,6 +1881,9 @@
               </a:rPr>
               <a:t>Layered, runtime attestation: </a:t>
             </a:r>
+            <a:pPr algn="l" indent="0" marL="0">
+              <a:buNone/>
+            </a:pPr>
             <a:r>
               <a:rPr lang="en-US" sz="1700" dirty="0">
                 <a:solidFill>
@@ -1562,6 +1895,12 @@
               </a:rPr>
               <a:t>extend boot-time trust via dynamic measurement of system components </a:t>
             </a:r>
+            <a:pPr algn="l" indent="0" marL="0">
+              <a:spcAft>
+                <a:spcPts val="1000"/>
+              </a:spcAft>
+              <a:buNone/>
+            </a:pPr>
             <a:r>
               <a:rPr lang="en-US" sz="1700" b="1" dirty="0">
                 <a:solidFill>
@@ -1576,7 +1915,7 @@
             <a:endParaRPr lang="en-US" sz="1700" dirty="0"/>
           </a:p>
           <a:p>
-            <a:pPr marL="342900" indent="-342900" algn="l">
+            <a:pPr algn="l" marL="342900" indent="-342900">
               <a:buSzPct val="100000"/>
               <a:buChar char="•"/>
             </a:pPr>
@@ -1591,6 +1930,9 @@
               </a:rPr>
               <a:t>Lifecycle attestation: </a:t>
             </a:r>
+            <a:pPr algn="l" indent="0" marL="0">
+              <a:buNone/>
+            </a:pPr>
             <a:r>
               <a:rPr lang="en-US" sz="1700" dirty="0">
                 <a:solidFill>
@@ -1602,6 +1944,9 @@
               </a:rPr>
               <a:t>extends this notion to </a:t>
             </a:r>
+            <a:pPr algn="l" indent="0" marL="0">
+              <a:buNone/>
+            </a:pPr>
             <a:r>
               <a:rPr lang="en-US" sz="1700" b="1" dirty="0">
                 <a:solidFill>
@@ -1613,6 +1958,12 @@
               </a:rPr>
               <a:t>artifacts of the development lifecycle</a:t>
             </a:r>
+            <a:pPr algn="l" indent="0" marL="0">
+              <a:spcAft>
+                <a:spcPts val="1000"/>
+              </a:spcAft>
+              <a:buNone/>
+            </a:pPr>
             <a:r>
               <a:rPr lang="en-US" sz="1700" dirty="0">
                 <a:solidFill>
@@ -1627,7 +1978,7 @@
             <a:endParaRPr lang="en-US" sz="1700" dirty="0"/>
           </a:p>
           <a:p>
-            <a:pPr marL="685800" lvl="1" indent="-342900" algn="l">
+            <a:pPr algn="l" lvl="1" marL="685800" indent="-342900">
               <a:spcAft>
                 <a:spcPts val="1000"/>
               </a:spcAft>
@@ -1648,7 +1999,7 @@
             <a:endParaRPr lang="en-US" sz="1700" dirty="0"/>
           </a:p>
           <a:p>
-            <a:pPr marL="685800" lvl="1" indent="-342900" algn="l">
+            <a:pPr algn="l" lvl="1" marL="685800" indent="-342900">
               <a:buSzPct val="100000"/>
               <a:buChar char="–"/>
             </a:pPr>
@@ -1663,6 +2014,9 @@
               </a:rPr>
               <a:t>…and to lifecycle </a:t>
             </a:r>
+            <a:pPr algn="l" indent="0" marL="0">
+              <a:buNone/>
+            </a:pPr>
             <a:r>
               <a:rPr lang="en-US" sz="1700" b="1" dirty="0">
                 <a:solidFill>
@@ -1674,6 +2028,12 @@
               </a:rPr>
               <a:t>events</a:t>
             </a:r>
+            <a:pPr algn="l" indent="0" marL="0">
+              <a:spcAft>
+                <a:spcPts val="1000"/>
+              </a:spcAft>
+              <a:buNone/>
+            </a:pPr>
             <a:r>
               <a:rPr lang="en-US" sz="1700" dirty="0">
                 <a:solidFill>
@@ -1688,7 +2048,7 @@
             <a:endParaRPr lang="en-US" sz="1700" dirty="0"/>
           </a:p>
           <a:p>
-            <a:pPr marL="1028700" lvl="2" indent="-342900" algn="l">
+            <a:pPr algn="l" lvl="2" marL="1028700" indent="-342900">
               <a:spcAft>
                 <a:spcPts val="200"/>
               </a:spcAft>
@@ -1709,7 +2069,7 @@
             <a:endParaRPr lang="en-US" sz="1700" dirty="0"/>
           </a:p>
           <a:p>
-            <a:pPr marL="1028700" lvl="2" indent="-342900" algn="l">
+            <a:pPr algn="l" lvl="2" marL="1028700" indent="-342900">
               <a:spcAft>
                 <a:spcPts val="200"/>
               </a:spcAft>
@@ -1730,7 +2090,7 @@
             <a:endParaRPr lang="en-US" sz="1700" dirty="0"/>
           </a:p>
           <a:p>
-            <a:pPr marL="1028700" lvl="2" indent="-342900" algn="l">
+            <a:pPr algn="l" lvl="2" marL="1028700" indent="-342900">
               <a:spcAft>
                 <a:spcPts val="200"/>
               </a:spcAft>
@@ -1751,7 +2111,7 @@
             <a:endParaRPr lang="en-US" sz="1700" dirty="0"/>
           </a:p>
           <a:p>
-            <a:pPr marL="1028700" lvl="2" indent="-342900" algn="l">
+            <a:pPr algn="l" lvl="2" marL="1028700" indent="-342900">
               <a:spcAft>
                 <a:spcPts val="200"/>
               </a:spcAft>
@@ -1772,7 +2132,7 @@
             <a:endParaRPr lang="en-US" sz="1700" dirty="0"/>
           </a:p>
           <a:p>
-            <a:pPr marL="342900" indent="-342900" algn="l">
+            <a:pPr algn="l" marL="342900" indent="-342900">
               <a:buSzPct val="100000"/>
               <a:buChar char="•"/>
             </a:pPr>
@@ -1787,6 +2147,9 @@
               </a:rPr>
               <a:t>Motivation: </a:t>
             </a:r>
+            <a:pPr algn="l" indent="0" marL="0">
+              <a:buNone/>
+            </a:pPr>
             <a:r>
               <a:rPr lang="en-US" sz="1700" dirty="0">
                 <a:solidFill>
@@ -1798,6 +2161,9 @@
               </a:rPr>
               <a:t>the </a:t>
             </a:r>
+            <a:pPr algn="l" indent="0" marL="0">
+              <a:buNone/>
+            </a:pPr>
             <a:r>
               <a:rPr lang="en-US" sz="1700" b="1" dirty="0">
                 <a:solidFill>
@@ -1809,6 +2175,12 @@
               </a:rPr>
               <a:t>proliferation of AI-generated software artifacts</a:t>
             </a:r>
+            <a:pPr algn="l" indent="0" marL="0">
+              <a:spcAft>
+                <a:spcPts val="1000"/>
+              </a:spcAft>
+              <a:buNone/>
+            </a:pPr>
             <a:r>
               <a:rPr lang="en-US" sz="1700" dirty="0">
                 <a:solidFill>
@@ -1845,13 +2217,6 @@
           </a:solidFill>
           <a:ln/>
         </p:spPr>
-        <p:txBody>
-          <a:bodyPr/>
-          <a:lstStyle/>
-          <a:p>
-            <a:endParaRPr lang="en-US"/>
-          </a:p>
-        </p:txBody>
       </p:sp>
       <p:sp>
         <p:nvSpPr>
@@ -1874,7 +2239,7 @@
           <a:bodyPr wrap="square" lIns="0" tIns="0" rIns="0" bIns="0" rtlCol="0" anchor="ctr"/>
           <a:lstStyle/>
           <a:p>
-            <a:pPr marL="0" indent="0" algn="ctr">
+            <a:pPr algn="ctr" indent="0" marL="0">
               <a:spcAft>
                 <a:spcPts val="400"/>
               </a:spcAft>
@@ -1894,7 +2259,7 @@
             <a:endParaRPr lang="en-US" sz="2000" dirty="0"/>
           </a:p>
           <a:p>
-            <a:pPr marL="0" indent="0" algn="ctr">
+            <a:pPr algn="ctr" indent="0" marL="0">
               <a:buNone/>
             </a:pPr>
             <a:r>
@@ -1928,7 +2293,6 @@
         <a:solidFill>
           <a:srgbClr val="FFFFFF"/>
         </a:solidFill>
-        <a:effectLst/>
       </p:bgPr>
     </p:bg>
     <p:spTree>
@@ -1966,7 +2330,7 @@
           <a:bodyPr wrap="square" lIns="0" tIns="0" rIns="0" bIns="0" rtlCol="0" anchor="ctr"/>
           <a:lstStyle/>
           <a:p>
-            <a:pPr marL="0" indent="0">
+            <a:pPr indent="0" marL="0">
               <a:buNone/>
             </a:pPr>
             <a:r>
@@ -2005,13 +2369,6 @@
           </a:solidFill>
           <a:ln/>
         </p:spPr>
-        <p:txBody>
-          <a:bodyPr/>
-          <a:lstStyle/>
-          <a:p>
-            <a:endParaRPr lang="en-US"/>
-          </a:p>
-        </p:txBody>
       </p:sp>
       <p:sp>
         <p:nvSpPr>
@@ -2034,7 +2391,7 @@
           <a:bodyPr wrap="square" lIns="254" tIns="254" rIns="254" bIns="254" rtlCol="0" anchor="ctr"/>
           <a:lstStyle/>
           <a:p>
-            <a:pPr marL="0" indent="0" algn="ctr">
+            <a:pPr algn="ctr" indent="0" marL="0">
               <a:buNone/>
             </a:pPr>
             <a:r>
@@ -2073,7 +2430,7 @@
           <a:bodyPr wrap="square" lIns="0" tIns="0" rIns="0" bIns="0" rtlCol="0" anchor="ctr"/>
           <a:lstStyle/>
           <a:p>
-            <a:pPr marL="0" indent="0" algn="ctr">
+            <a:pPr algn="ctr" indent="0" marL="0">
               <a:buNone/>
             </a:pPr>
             <a:r>
@@ -2112,13 +2469,6 @@
           </a:solidFill>
           <a:ln/>
         </p:spPr>
-        <p:txBody>
-          <a:bodyPr/>
-          <a:lstStyle/>
-          <a:p>
-            <a:endParaRPr lang="en-US"/>
-          </a:p>
-        </p:txBody>
       </p:sp>
       <p:sp>
         <p:nvSpPr>
@@ -2141,7 +2491,7 @@
           <a:bodyPr wrap="square" lIns="254" tIns="254" rIns="254" bIns="254" rtlCol="0" anchor="ctr"/>
           <a:lstStyle/>
           <a:p>
-            <a:pPr marL="0" indent="0" algn="ctr">
+            <a:pPr algn="ctr" indent="0" marL="0">
               <a:buNone/>
             </a:pPr>
             <a:r>
@@ -2158,7 +2508,7 @@
             <a:endParaRPr lang="en-US" sz="1350" dirty="0"/>
           </a:p>
           <a:p>
-            <a:pPr marL="0" indent="0" algn="ctr">
+            <a:pPr algn="ctr" indent="0" marL="0">
               <a:buNone/>
             </a:pPr>
             <a:r>
@@ -2197,7 +2547,7 @@
           <a:bodyPr wrap="square" lIns="0" tIns="0" rIns="0" bIns="0" rtlCol="0" anchor="ctr"/>
           <a:lstStyle/>
           <a:p>
-            <a:pPr marL="0" indent="0" algn="ctr">
+            <a:pPr algn="ctr" indent="0" marL="0">
               <a:buNone/>
             </a:pPr>
             <a:r>
@@ -2236,13 +2586,6 @@
           </a:solidFill>
           <a:ln/>
         </p:spPr>
-        <p:txBody>
-          <a:bodyPr/>
-          <a:lstStyle/>
-          <a:p>
-            <a:endParaRPr lang="en-US"/>
-          </a:p>
-        </p:txBody>
       </p:sp>
       <p:sp>
         <p:nvSpPr>
@@ -2265,7 +2608,7 @@
           <a:bodyPr wrap="square" lIns="254" tIns="254" rIns="254" bIns="254" rtlCol="0" anchor="ctr"/>
           <a:lstStyle/>
           <a:p>
-            <a:pPr marL="0" indent="0" algn="ctr">
+            <a:pPr algn="ctr" indent="0" marL="0">
               <a:buNone/>
             </a:pPr>
             <a:r>
@@ -2304,7 +2647,7 @@
           <a:bodyPr wrap="square" lIns="0" tIns="0" rIns="0" bIns="0" rtlCol="0" anchor="ctr"/>
           <a:lstStyle/>
           <a:p>
-            <a:pPr marL="0" indent="0" algn="ctr">
+            <a:pPr algn="ctr" indent="0" marL="0">
               <a:buNone/>
             </a:pPr>
             <a:r>
@@ -2343,13 +2686,6 @@
           </a:solidFill>
           <a:ln/>
         </p:spPr>
-        <p:txBody>
-          <a:bodyPr/>
-          <a:lstStyle/>
-          <a:p>
-            <a:endParaRPr lang="en-US"/>
-          </a:p>
-        </p:txBody>
       </p:sp>
       <p:sp>
         <p:nvSpPr>
@@ -2372,7 +2708,7 @@
           <a:bodyPr wrap="square" lIns="254" tIns="254" rIns="254" bIns="254" rtlCol="0" anchor="ctr"/>
           <a:lstStyle/>
           <a:p>
-            <a:pPr marL="0" indent="0" algn="ctr">
+            <a:pPr algn="ctr" indent="0" marL="0">
               <a:buNone/>
             </a:pPr>
             <a:r>
@@ -2411,7 +2747,7 @@
           <a:bodyPr wrap="square" lIns="0" tIns="0" rIns="0" bIns="0" rtlCol="0" anchor="ctr"/>
           <a:lstStyle/>
           <a:p>
-            <a:pPr marL="0" indent="0" algn="ctr">
+            <a:pPr algn="ctr" indent="0" marL="0">
               <a:buNone/>
             </a:pPr>
             <a:r>
@@ -2450,13 +2786,6 @@
           </a:solidFill>
           <a:ln/>
         </p:spPr>
-        <p:txBody>
-          <a:bodyPr/>
-          <a:lstStyle/>
-          <a:p>
-            <a:endParaRPr lang="en-US"/>
-          </a:p>
-        </p:txBody>
       </p:sp>
       <p:sp>
         <p:nvSpPr>
@@ -2479,7 +2808,7 @@
           <a:bodyPr wrap="square" lIns="254" tIns="254" rIns="254" bIns="254" rtlCol="0" anchor="ctr"/>
           <a:lstStyle/>
           <a:p>
-            <a:pPr marL="0" indent="0" algn="ctr">
+            <a:pPr algn="ctr" indent="0" marL="0">
               <a:buNone/>
             </a:pPr>
             <a:r>
@@ -2518,7 +2847,7 @@
           <a:bodyPr wrap="square" lIns="0" tIns="0" rIns="0" bIns="0" rtlCol="0" anchor="ctr"/>
           <a:lstStyle/>
           <a:p>
-            <a:pPr marL="0" indent="0">
+            <a:pPr indent="0" marL="0">
               <a:buNone/>
             </a:pPr>
             <a:r>
@@ -2552,7 +2881,6 @@
         <a:solidFill>
           <a:srgbClr val="FFFFFF"/>
         </a:solidFill>
-        <a:effectLst/>
       </p:bgPr>
     </p:bg>
     <p:spTree>
@@ -2590,7 +2918,7 @@
           <a:bodyPr wrap="square" lIns="0" tIns="0" rIns="0" bIns="0" rtlCol="0" anchor="ctr"/>
           <a:lstStyle/>
           <a:p>
-            <a:pPr marL="0" indent="0">
+            <a:pPr indent="0" marL="0">
               <a:buNone/>
             </a:pPr>
             <a:r>
@@ -2629,13 +2957,6 @@
           </a:solidFill>
           <a:ln/>
         </p:spPr>
-        <p:txBody>
-          <a:bodyPr/>
-          <a:lstStyle/>
-          <a:p>
-            <a:endParaRPr lang="en-US"/>
-          </a:p>
-        </p:txBody>
       </p:sp>
       <p:sp>
         <p:nvSpPr>
@@ -2658,7 +2979,7 @@
           <a:bodyPr wrap="square" lIns="0" tIns="0" rIns="0" bIns="0" rtlCol="0" anchor="ctr"/>
           <a:lstStyle/>
           <a:p>
-            <a:pPr marL="0" indent="0" algn="l">
+            <a:pPr algn="l" indent="0" marL="0">
               <a:spcAft>
                 <a:spcPts val="200"/>
               </a:spcAft>
@@ -2678,7 +2999,7 @@
             <a:endParaRPr lang="en-US" sz="1700" dirty="0"/>
           </a:p>
           <a:p>
-            <a:pPr marL="0" indent="0" algn="l">
+            <a:pPr algn="l" indent="0" marL="0">
               <a:buNone/>
             </a:pPr>
             <a:r>
@@ -2717,7 +3038,7 @@
           <a:bodyPr wrap="square" lIns="0" tIns="0" rIns="0" bIns="0" rtlCol="0" anchor="ctr"/>
           <a:lstStyle/>
           <a:p>
-            <a:pPr marL="0" indent="0" algn="ctr">
+            <a:pPr algn="ctr" indent="0" marL="0">
               <a:buNone/>
             </a:pPr>
             <a:r>
@@ -2753,13 +3074,6 @@
           </a:solidFill>
           <a:ln/>
         </p:spPr>
-        <p:txBody>
-          <a:bodyPr/>
-          <a:lstStyle/>
-          <a:p>
-            <a:endParaRPr lang="en-US"/>
-          </a:p>
-        </p:txBody>
       </p:sp>
       <p:sp>
         <p:nvSpPr>
@@ -2782,7 +3096,7 @@
           <a:bodyPr wrap="square" lIns="0" tIns="0" rIns="0" bIns="0" rtlCol="0" anchor="ctr"/>
           <a:lstStyle/>
           <a:p>
-            <a:pPr marL="0" indent="0" algn="l">
+            <a:pPr algn="l" indent="0" marL="0">
               <a:spcAft>
                 <a:spcPts val="200"/>
               </a:spcAft>
@@ -2802,7 +3116,7 @@
             <a:endParaRPr lang="en-US" sz="1700" dirty="0"/>
           </a:p>
           <a:p>
-            <a:pPr marL="0" indent="0" algn="l">
+            <a:pPr algn="l" indent="0" marL="0">
               <a:buNone/>
             </a:pPr>
             <a:r>
@@ -2841,7 +3155,7 @@
           <a:bodyPr wrap="square" lIns="0" tIns="0" rIns="0" bIns="0" rtlCol="0" anchor="ctr"/>
           <a:lstStyle/>
           <a:p>
-            <a:pPr marL="0" indent="0" algn="ctr">
+            <a:pPr algn="ctr" indent="0" marL="0">
               <a:buNone/>
             </a:pPr>
             <a:r>
@@ -2877,13 +3191,6 @@
           </a:solidFill>
           <a:ln/>
         </p:spPr>
-        <p:txBody>
-          <a:bodyPr/>
-          <a:lstStyle/>
-          <a:p>
-            <a:endParaRPr lang="en-US"/>
-          </a:p>
-        </p:txBody>
       </p:sp>
       <p:sp>
         <p:nvSpPr>
@@ -2906,7 +3213,7 @@
           <a:bodyPr wrap="square" lIns="0" tIns="0" rIns="0" bIns="0" rtlCol="0" anchor="ctr"/>
           <a:lstStyle/>
           <a:p>
-            <a:pPr marL="0" indent="0" algn="l">
+            <a:pPr algn="l" indent="0" marL="0">
               <a:spcAft>
                 <a:spcPts val="200"/>
               </a:spcAft>
@@ -2926,7 +3233,7 @@
             <a:endParaRPr lang="en-US" sz="1700" dirty="0"/>
           </a:p>
           <a:p>
-            <a:pPr marL="0" indent="0" algn="l">
+            <a:pPr algn="l" indent="0" marL="0">
               <a:buNone/>
             </a:pPr>
             <a:r>
@@ -2965,7 +3272,7 @@
           <a:bodyPr wrap="square" lIns="0" tIns="0" rIns="0" bIns="0" rtlCol="0" anchor="ctr"/>
           <a:lstStyle/>
           <a:p>
-            <a:pPr marL="0" indent="0" algn="ctr">
+            <a:pPr algn="ctr" indent="0" marL="0">
               <a:buNone/>
             </a:pPr>
             <a:r>
@@ -3001,13 +3308,6 @@
           </a:solidFill>
           <a:ln/>
         </p:spPr>
-        <p:txBody>
-          <a:bodyPr/>
-          <a:lstStyle/>
-          <a:p>
-            <a:endParaRPr lang="en-US"/>
-          </a:p>
-        </p:txBody>
       </p:sp>
       <p:sp>
         <p:nvSpPr>
@@ -3030,7 +3330,7 @@
           <a:bodyPr wrap="square" lIns="0" tIns="0" rIns="0" bIns="0" rtlCol="0" anchor="ctr"/>
           <a:lstStyle/>
           <a:p>
-            <a:pPr marL="0" indent="0" algn="l">
+            <a:pPr algn="l" indent="0" marL="0">
               <a:buNone/>
             </a:pPr>
             <a:r>
@@ -3044,6 +3344,9 @@
               </a:rPr>
               <a:t>signed evidence bundles</a:t>
             </a:r>
+            <a:pPr algn="l" indent="0" marL="0">
+              <a:buNone/>
+            </a:pPr>
             <a:r>
               <a:rPr lang="en-US" sz="1500" dirty="0">
                 <a:solidFill>
@@ -3055,6 +3358,9 @@
               </a:rPr>
               <a:t>, appraised against </a:t>
             </a:r>
+            <a:pPr algn="l" indent="0" marL="0">
+              <a:buNone/>
+            </a:pPr>
             <a:r>
               <a:rPr lang="en-US" sz="1500" b="1" dirty="0">
                 <a:solidFill>
@@ -3091,7 +3397,7 @@
           <a:bodyPr wrap="square" lIns="0" tIns="0" rIns="0" bIns="0" rtlCol="0" anchor="ctr"/>
           <a:lstStyle/>
           <a:p>
-            <a:pPr marL="0" indent="0">
+            <a:pPr indent="0" marL="0">
               <a:buNone/>
             </a:pPr>
             <a:r>
@@ -3135,13 +3441,6 @@
             <a:prstDash val="solid"/>
           </a:ln>
         </p:spPr>
-        <p:txBody>
-          <a:bodyPr/>
-          <a:lstStyle/>
-          <a:p>
-            <a:endParaRPr lang="en-US"/>
-          </a:p>
-        </p:txBody>
       </p:sp>
       <p:sp>
         <p:nvSpPr>
@@ -3164,7 +3463,7 @@
           <a:bodyPr wrap="square" lIns="0" tIns="0" rIns="0" bIns="0" rtlCol="0" anchor="ctr"/>
           <a:lstStyle/>
           <a:p>
-            <a:pPr marL="0" indent="0" algn="l">
+            <a:pPr algn="l" indent="0" marL="0">
               <a:buNone/>
             </a:pPr>
             <a:r>
@@ -3181,7 +3480,7 @@
             <a:endParaRPr lang="en-US" sz="1300" dirty="0"/>
           </a:p>
           <a:p>
-            <a:pPr marL="0" indent="0" algn="l">
+            <a:pPr algn="l" indent="0" marL="0">
               <a:buNone/>
             </a:pPr>
             <a:r>
@@ -3198,7 +3497,7 @@
             <a:endParaRPr lang="en-US" sz="1300" dirty="0"/>
           </a:p>
           <a:p>
-            <a:pPr marL="0" indent="0" algn="l">
+            <a:pPr algn="l" indent="0" marL="0">
               <a:buNone/>
             </a:pPr>
             <a:r>
@@ -3215,7 +3514,7 @@
             <a:endParaRPr lang="en-US" sz="1300" dirty="0"/>
           </a:p>
           <a:p>
-            <a:pPr marL="0" indent="0" algn="l">
+            <a:pPr algn="l" indent="0" marL="0">
               <a:buNone/>
             </a:pPr>
             <a:r>
@@ -3232,7 +3531,7 @@
             <a:endParaRPr lang="en-US" sz="1300" dirty="0"/>
           </a:p>
           <a:p>
-            <a:pPr marL="0" indent="0" algn="l">
+            <a:pPr algn="l" indent="0" marL="0">
               <a:buNone/>
             </a:pPr>
             <a:r>
@@ -3249,7 +3548,7 @@
             <a:endParaRPr lang="en-US" sz="1300" dirty="0"/>
           </a:p>
           <a:p>
-            <a:pPr marL="0" indent="0" algn="l">
+            <a:pPr algn="l" indent="0" marL="0">
               <a:buNone/>
             </a:pPr>
             <a:r>
@@ -3288,7 +3587,7 @@
           <a:bodyPr wrap="square" lIns="0" tIns="0" rIns="0" bIns="0" rtlCol="0" anchor="ctr"/>
           <a:lstStyle/>
           <a:p>
-            <a:pPr marL="0" indent="0">
+            <a:pPr indent="0" marL="0">
               <a:buNone/>
             </a:pPr>
             <a:r>
@@ -3305,7 +3604,7 @@
             <a:endParaRPr lang="en-US" sz="2000" dirty="0"/>
           </a:p>
           <a:p>
-            <a:pPr marL="0" indent="0">
+            <a:pPr indent="0" marL="0">
               <a:buNone/>
             </a:pPr>
             <a:r>
@@ -3322,7 +3621,7 @@
             <a:endParaRPr lang="en-US" sz="2000" dirty="0"/>
           </a:p>
           <a:p>
-            <a:pPr marL="0" indent="0">
+            <a:pPr indent="0" marL="0">
               <a:buNone/>
             </a:pPr>
             <a:r>
@@ -3356,7 +3655,6 @@
         <a:solidFill>
           <a:srgbClr val="FFFFFF"/>
         </a:solidFill>
-        <a:effectLst/>
       </p:bgPr>
     </p:bg>
     <p:spTree>
@@ -3394,7 +3692,7 @@
           <a:bodyPr wrap="square" lIns="0" tIns="0" rIns="0" bIns="0" rtlCol="0" anchor="ctr"/>
           <a:lstStyle/>
           <a:p>
-            <a:pPr marL="0" indent="0">
+            <a:pPr indent="0" marL="0">
               <a:buNone/>
             </a:pPr>
             <a:r>
@@ -3438,13 +3736,6 @@
             <a:prstDash val="dash"/>
           </a:ln>
         </p:spPr>
-        <p:txBody>
-          <a:bodyPr/>
-          <a:lstStyle/>
-          <a:p>
-            <a:endParaRPr lang="en-US"/>
-          </a:p>
-        </p:txBody>
       </p:sp>
       <p:sp>
         <p:nvSpPr>
@@ -3467,7 +3758,7 @@
           <a:bodyPr wrap="square" lIns="254" tIns="254" rIns="254" bIns="254" rtlCol="0" anchor="ctr"/>
           <a:lstStyle/>
           <a:p>
-            <a:pPr marL="0" indent="0" algn="ctr">
+            <a:pPr algn="ctr" indent="0" marL="0">
               <a:buNone/>
             </a:pPr>
             <a:r>
@@ -3484,7 +3775,7 @@
             <a:endParaRPr lang="en-US" sz="1150" dirty="0"/>
           </a:p>
           <a:p>
-            <a:pPr marL="0" indent="0" algn="ctr">
+            <a:pPr algn="ctr" indent="0" marL="0">
               <a:buNone/>
             </a:pPr>
             <a:r>
@@ -3525,13 +3816,6 @@
             <a:tailEnd type="triangle"/>
           </a:ln>
         </p:spPr>
-        <p:txBody>
-          <a:bodyPr/>
-          <a:lstStyle/>
-          <a:p>
-            <a:endParaRPr lang="en-US"/>
-          </a:p>
-        </p:txBody>
       </p:sp>
       <p:sp>
         <p:nvSpPr>
@@ -3554,7 +3838,7 @@
           <a:bodyPr wrap="square" lIns="0" tIns="0" rIns="0" bIns="0" rtlCol="0" anchor="ctr"/>
           <a:lstStyle/>
           <a:p>
-            <a:pPr marL="0" indent="0" algn="l">
+            <a:pPr algn="l" indent="0" marL="0">
               <a:buNone/>
             </a:pPr>
             <a:r>
@@ -3593,13 +3877,6 @@
           </a:solidFill>
           <a:ln/>
         </p:spPr>
-        <p:txBody>
-          <a:bodyPr/>
-          <a:lstStyle/>
-          <a:p>
-            <a:endParaRPr lang="en-US"/>
-          </a:p>
-        </p:txBody>
       </p:sp>
       <p:sp>
         <p:nvSpPr>
@@ -3622,7 +3899,7 @@
           <a:bodyPr wrap="square" lIns="381" tIns="381" rIns="381" bIns="381" rtlCol="0" anchor="ctr"/>
           <a:lstStyle/>
           <a:p>
-            <a:pPr marL="0" indent="0" algn="ctr">
+            <a:pPr algn="ctr" indent="0" marL="0">
               <a:buNone/>
             </a:pPr>
             <a:r>
@@ -3663,13 +3940,6 @@
             <a:tailEnd type="triangle"/>
           </a:ln>
         </p:spPr>
-        <p:txBody>
-          <a:bodyPr/>
-          <a:lstStyle/>
-          <a:p>
-            <a:endParaRPr lang="en-US"/>
-          </a:p>
-        </p:txBody>
       </p:sp>
       <p:sp>
         <p:nvSpPr>
@@ -3692,7 +3962,7 @@
           <a:bodyPr wrap="square" lIns="0" tIns="0" rIns="0" bIns="0" rtlCol="0" anchor="ctr"/>
           <a:lstStyle/>
           <a:p>
-            <a:pPr marL="0" indent="0" algn="l">
+            <a:pPr algn="l" indent="0" marL="0">
               <a:buNone/>
             </a:pPr>
             <a:r>
@@ -3731,13 +4001,6 @@
           </a:solidFill>
           <a:ln/>
         </p:spPr>
-        <p:txBody>
-          <a:bodyPr/>
-          <a:lstStyle/>
-          <a:p>
-            <a:endParaRPr lang="en-US"/>
-          </a:p>
-        </p:txBody>
       </p:sp>
       <p:sp>
         <p:nvSpPr>
@@ -3760,7 +4023,7 @@
           <a:bodyPr wrap="square" lIns="381" tIns="381" rIns="381" bIns="381" rtlCol="0" anchor="ctr"/>
           <a:lstStyle/>
           <a:p>
-            <a:pPr marL="0" indent="0" algn="ctr">
+            <a:pPr algn="ctr" indent="0" marL="0">
               <a:buNone/>
             </a:pPr>
             <a:r>
@@ -3799,13 +4062,6 @@
           </a:solidFill>
           <a:ln/>
         </p:spPr>
-        <p:txBody>
-          <a:bodyPr/>
-          <a:lstStyle/>
-          <a:p>
-            <a:endParaRPr lang="en-US"/>
-          </a:p>
-        </p:txBody>
       </p:sp>
       <p:sp>
         <p:nvSpPr>
@@ -3828,7 +4084,7 @@
           <a:bodyPr wrap="square" lIns="381" tIns="381" rIns="381" bIns="381" rtlCol="0" anchor="ctr"/>
           <a:lstStyle/>
           <a:p>
-            <a:pPr marL="0" indent="0" algn="ctr">
+            <a:pPr algn="ctr" indent="0" marL="0">
               <a:buNone/>
             </a:pPr>
             <a:r>
@@ -3867,13 +4123,6 @@
           </a:solidFill>
           <a:ln/>
         </p:spPr>
-        <p:txBody>
-          <a:bodyPr/>
-          <a:lstStyle/>
-          <a:p>
-            <a:endParaRPr lang="en-US"/>
-          </a:p>
-        </p:txBody>
       </p:sp>
       <p:sp>
         <p:nvSpPr>
@@ -3896,7 +4145,7 @@
           <a:bodyPr wrap="square" lIns="381" tIns="381" rIns="381" bIns="381" rtlCol="0" anchor="ctr"/>
           <a:lstStyle/>
           <a:p>
-            <a:pPr marL="0" indent="0" algn="ctr">
+            <a:pPr algn="ctr" indent="0" marL="0">
               <a:buNone/>
             </a:pPr>
             <a:r>
@@ -3937,13 +4186,6 @@
             <a:tailEnd type="triangle"/>
           </a:ln>
         </p:spPr>
-        <p:txBody>
-          <a:bodyPr/>
-          <a:lstStyle/>
-          <a:p>
-            <a:endParaRPr lang="en-US"/>
-          </a:p>
-        </p:txBody>
       </p:sp>
       <p:sp>
         <p:nvSpPr>
@@ -3967,13 +4209,6 @@
             <a:prstDash val="solid"/>
           </a:ln>
         </p:spPr>
-        <p:txBody>
-          <a:bodyPr/>
-          <a:lstStyle/>
-          <a:p>
-            <a:endParaRPr lang="en-US"/>
-          </a:p>
-        </p:txBody>
       </p:sp>
       <p:sp>
         <p:nvSpPr>
@@ -3997,13 +4232,6 @@
             <a:prstDash val="solid"/>
           </a:ln>
         </p:spPr>
-        <p:txBody>
-          <a:bodyPr/>
-          <a:lstStyle/>
-          <a:p>
-            <a:endParaRPr lang="en-US"/>
-          </a:p>
-        </p:txBody>
       </p:sp>
       <p:sp>
         <p:nvSpPr>
@@ -4028,13 +4256,6 @@
             <a:tailEnd type="triangle"/>
           </a:ln>
         </p:spPr>
-        <p:txBody>
-          <a:bodyPr/>
-          <a:lstStyle/>
-          <a:p>
-            <a:endParaRPr lang="en-US"/>
-          </a:p>
-        </p:txBody>
       </p:sp>
       <p:sp>
         <p:nvSpPr>
@@ -4057,7 +4278,7 @@
           <a:bodyPr wrap="square" lIns="0" tIns="0" rIns="0" bIns="0" rtlCol="0" anchor="ctr"/>
           <a:lstStyle/>
           <a:p>
-            <a:pPr marL="0" indent="0" algn="r">
+            <a:pPr algn="r" indent="0" marL="0">
               <a:buNone/>
             </a:pPr>
             <a:r>
@@ -4074,7 +4295,7 @@
             <a:endParaRPr lang="en-US" sz="1000" dirty="0"/>
           </a:p>
           <a:p>
-            <a:pPr marL="0" indent="0" algn="r">
+            <a:pPr algn="r" indent="0" marL="0">
               <a:buNone/>
             </a:pPr>
             <a:r>
@@ -4114,13 +4335,6 @@
             <a:prstDash val="solid"/>
           </a:ln>
         </p:spPr>
-        <p:txBody>
-          <a:bodyPr/>
-          <a:lstStyle/>
-          <a:p>
-            <a:endParaRPr lang="en-US"/>
-          </a:p>
-        </p:txBody>
       </p:sp>
       <p:sp>
         <p:nvSpPr>
@@ -4145,13 +4359,6 @@
             <a:tailEnd type="triangle"/>
           </a:ln>
         </p:spPr>
-        <p:txBody>
-          <a:bodyPr/>
-          <a:lstStyle/>
-          <a:p>
-            <a:endParaRPr lang="en-US"/>
-          </a:p>
-        </p:txBody>
       </p:sp>
       <p:sp>
         <p:nvSpPr>
@@ -4174,7 +4381,7 @@
           <a:bodyPr wrap="square" lIns="0" tIns="0" rIns="0" bIns="0" rtlCol="0" anchor="ctr"/>
           <a:lstStyle/>
           <a:p>
-            <a:pPr marL="0" indent="0" algn="ctr">
+            <a:pPr algn="ctr" indent="0" marL="0">
               <a:buNone/>
             </a:pPr>
             <a:r>
@@ -4213,13 +4420,6 @@
           </a:solidFill>
           <a:ln/>
         </p:spPr>
-        <p:txBody>
-          <a:bodyPr/>
-          <a:lstStyle/>
-          <a:p>
-            <a:endParaRPr lang="en-US"/>
-          </a:p>
-        </p:txBody>
       </p:sp>
       <p:sp>
         <p:nvSpPr>
@@ -4242,7 +4442,7 @@
           <a:bodyPr wrap="square" lIns="381" tIns="381" rIns="381" bIns="381" rtlCol="0" anchor="ctr"/>
           <a:lstStyle/>
           <a:p>
-            <a:pPr marL="0" indent="0" algn="ctr">
+            <a:pPr algn="ctr" indent="0" marL="0">
               <a:buNone/>
             </a:pPr>
             <a:r>
@@ -4259,7 +4459,7 @@
             <a:endParaRPr lang="en-US" sz="1200" dirty="0"/>
           </a:p>
           <a:p>
-            <a:pPr marL="0" indent="0" algn="ctr">
+            <a:pPr algn="ctr" indent="0" marL="0">
               <a:buNone/>
             </a:pPr>
             <a:r>
@@ -4300,13 +4500,6 @@
             <a:tailEnd type="triangle"/>
           </a:ln>
         </p:spPr>
-        <p:txBody>
-          <a:bodyPr/>
-          <a:lstStyle/>
-          <a:p>
-            <a:endParaRPr lang="en-US"/>
-          </a:p>
-        </p:txBody>
       </p:sp>
       <p:sp>
         <p:nvSpPr>
@@ -4329,7 +4522,7 @@
           <a:bodyPr wrap="square" lIns="0" tIns="0" rIns="0" bIns="0" rtlCol="0" anchor="ctr"/>
           <a:lstStyle/>
           <a:p>
-            <a:pPr marL="0" indent="0" algn="ctr">
+            <a:pPr algn="ctr" indent="0" marL="0">
               <a:buNone/>
             </a:pPr>
             <a:r>
@@ -4368,13 +4561,6 @@
           </a:solidFill>
           <a:ln/>
         </p:spPr>
-        <p:txBody>
-          <a:bodyPr/>
-          <a:lstStyle/>
-          <a:p>
-            <a:endParaRPr lang="en-US"/>
-          </a:p>
-        </p:txBody>
       </p:sp>
       <p:sp>
         <p:nvSpPr>
@@ -4397,7 +4583,7 @@
           <a:bodyPr wrap="square" lIns="381" tIns="381" rIns="381" bIns="381" rtlCol="0" anchor="ctr"/>
           <a:lstStyle/>
           <a:p>
-            <a:pPr marL="0" indent="0" algn="ctr">
+            <a:pPr algn="ctr" indent="0" marL="0">
               <a:buNone/>
             </a:pPr>
             <a:r>
@@ -4438,13 +4624,6 @@
             <a:tailEnd type="triangle"/>
           </a:ln>
         </p:spPr>
-        <p:txBody>
-          <a:bodyPr/>
-          <a:lstStyle/>
-          <a:p>
-            <a:endParaRPr lang="en-US"/>
-          </a:p>
-        </p:txBody>
       </p:sp>
       <p:sp>
         <p:nvSpPr>
@@ -4467,13 +4646,6 @@
           </a:solidFill>
           <a:ln/>
         </p:spPr>
-        <p:txBody>
-          <a:bodyPr/>
-          <a:lstStyle/>
-          <a:p>
-            <a:endParaRPr lang="en-US"/>
-          </a:p>
-        </p:txBody>
       </p:sp>
       <p:sp>
         <p:nvSpPr>
@@ -4496,7 +4668,7 @@
           <a:bodyPr wrap="square" lIns="381" tIns="381" rIns="381" bIns="381" rtlCol="0" anchor="ctr"/>
           <a:lstStyle/>
           <a:p>
-            <a:pPr marL="0" indent="0" algn="ctr">
+            <a:pPr algn="ctr" indent="0" marL="0">
               <a:buNone/>
             </a:pPr>
             <a:r>
@@ -4537,13 +4709,6 @@
             <a:tailEnd type="triangle"/>
           </a:ln>
         </p:spPr>
-        <p:txBody>
-          <a:bodyPr/>
-          <a:lstStyle/>
-          <a:p>
-            <a:endParaRPr lang="en-US"/>
-          </a:p>
-        </p:txBody>
       </p:sp>
       <p:sp>
         <p:nvSpPr>
@@ -4566,13 +4731,6 @@
           </a:solidFill>
           <a:ln/>
         </p:spPr>
-        <p:txBody>
-          <a:bodyPr/>
-          <a:lstStyle/>
-          <a:p>
-            <a:endParaRPr lang="en-US"/>
-          </a:p>
-        </p:txBody>
       </p:sp>
       <p:sp>
         <p:nvSpPr>
@@ -4595,7 +4753,7 @@
           <a:bodyPr wrap="square" lIns="381" tIns="381" rIns="381" bIns="381" rtlCol="0" anchor="ctr"/>
           <a:lstStyle/>
           <a:p>
-            <a:pPr marL="0" indent="0" algn="ctr">
+            <a:pPr algn="ctr" indent="0" marL="0">
               <a:buNone/>
             </a:pPr>
             <a:r>
@@ -4634,7 +4792,7 @@
           <a:bodyPr wrap="square" lIns="0" tIns="0" rIns="0" bIns="0" rtlCol="0" anchor="ctr"/>
           <a:lstStyle/>
           <a:p>
-            <a:pPr marL="0" indent="0" algn="ctr">
+            <a:pPr algn="ctr" indent="0" marL="0">
               <a:buNone/>
             </a:pPr>
             <a:r>
@@ -4674,13 +4832,6 @@
             <a:prstDash val="solid"/>
           </a:ln>
         </p:spPr>
-        <p:txBody>
-          <a:bodyPr/>
-          <a:lstStyle/>
-          <a:p>
-            <a:endParaRPr lang="en-US"/>
-          </a:p>
-        </p:txBody>
       </p:sp>
       <p:sp>
         <p:nvSpPr>
@@ -4704,13 +4855,6 @@
             <a:prstDash val="solid"/>
           </a:ln>
         </p:spPr>
-        <p:txBody>
-          <a:bodyPr/>
-          <a:lstStyle/>
-          <a:p>
-            <a:endParaRPr lang="en-US"/>
-          </a:p>
-        </p:txBody>
       </p:sp>
       <p:sp>
         <p:nvSpPr>
@@ -4734,13 +4878,6 @@
             <a:prstDash val="solid"/>
           </a:ln>
         </p:spPr>
-        <p:txBody>
-          <a:bodyPr/>
-          <a:lstStyle/>
-          <a:p>
-            <a:endParaRPr lang="en-US"/>
-          </a:p>
-        </p:txBody>
       </p:sp>
       <p:sp>
         <p:nvSpPr>
@@ -4764,13 +4901,6 @@
             <a:prstDash val="solid"/>
           </a:ln>
         </p:spPr>
-        <p:txBody>
-          <a:bodyPr/>
-          <a:lstStyle/>
-          <a:p>
-            <a:endParaRPr lang="en-US"/>
-          </a:p>
-        </p:txBody>
       </p:sp>
       <p:sp>
         <p:nvSpPr>
@@ -4795,13 +4925,6 @@
             <a:tailEnd type="triangle"/>
           </a:ln>
         </p:spPr>
-        <p:txBody>
-          <a:bodyPr/>
-          <a:lstStyle/>
-          <a:p>
-            <a:endParaRPr lang="en-US"/>
-          </a:p>
-        </p:txBody>
       </p:sp>
       <p:sp>
         <p:nvSpPr>
@@ -4824,7 +4947,7 @@
           <a:bodyPr wrap="square" lIns="0" tIns="0" rIns="0" bIns="0" rtlCol="0" anchor="ctr"/>
           <a:lstStyle/>
           <a:p>
-            <a:pPr marL="0" indent="0" algn="ctr">
+            <a:pPr algn="ctr" indent="0" marL="0">
               <a:buNone/>
             </a:pPr>
             <a:r>
@@ -4864,13 +4987,6 @@
             <a:prstDash val="solid"/>
           </a:ln>
         </p:spPr>
-        <p:txBody>
-          <a:bodyPr/>
-          <a:lstStyle/>
-          <a:p>
-            <a:endParaRPr lang="en-US"/>
-          </a:p>
-        </p:txBody>
       </p:sp>
       <p:sp>
         <p:nvSpPr>
@@ -4894,13 +5010,6 @@
             <a:prstDash val="solid"/>
           </a:ln>
         </p:spPr>
-        <p:txBody>
-          <a:bodyPr/>
-          <a:lstStyle/>
-          <a:p>
-            <a:endParaRPr lang="en-US"/>
-          </a:p>
-        </p:txBody>
       </p:sp>
       <p:sp>
         <p:nvSpPr>
@@ -4925,13 +5034,6 @@
             <a:tailEnd type="triangle"/>
           </a:ln>
         </p:spPr>
-        <p:txBody>
-          <a:bodyPr/>
-          <a:lstStyle/>
-          <a:p>
-            <a:endParaRPr lang="en-US"/>
-          </a:p>
-        </p:txBody>
       </p:sp>
       <p:sp>
         <p:nvSpPr>
@@ -4954,7 +5056,7 @@
           <a:bodyPr wrap="square" lIns="0" tIns="0" rIns="0" bIns="0" rtlCol="0" anchor="ctr"/>
           <a:lstStyle/>
           <a:p>
-            <a:pPr marL="0" indent="0" algn="ctr">
+            <a:pPr algn="ctr" indent="0" marL="0">
               <a:buNone/>
             </a:pPr>
             <a:r>
@@ -4994,13 +5096,6 @@
             <a:prstDash val="solid"/>
           </a:ln>
         </p:spPr>
-        <p:txBody>
-          <a:bodyPr/>
-          <a:lstStyle/>
-          <a:p>
-            <a:endParaRPr lang="en-US"/>
-          </a:p>
-        </p:txBody>
       </p:sp>
       <p:sp>
         <p:nvSpPr>
@@ -5024,13 +5119,6 @@
             <a:prstDash val="solid"/>
           </a:ln>
         </p:spPr>
-        <p:txBody>
-          <a:bodyPr/>
-          <a:lstStyle/>
-          <a:p>
-            <a:endParaRPr lang="en-US"/>
-          </a:p>
-        </p:txBody>
       </p:sp>
       <p:sp>
         <p:nvSpPr>
@@ -5055,13 +5143,6 @@
             <a:tailEnd type="triangle"/>
           </a:ln>
         </p:spPr>
-        <p:txBody>
-          <a:bodyPr/>
-          <a:lstStyle/>
-          <a:p>
-            <a:endParaRPr lang="en-US"/>
-          </a:p>
-        </p:txBody>
       </p:sp>
       <p:sp>
         <p:nvSpPr>
@@ -5084,7 +5165,7 @@
           <a:bodyPr wrap="square" lIns="0" tIns="0" rIns="0" bIns="0" rtlCol="0" anchor="ctr"/>
           <a:lstStyle/>
           <a:p>
-            <a:pPr marL="0" indent="0" algn="ctr">
+            <a:pPr algn="ctr" indent="0" marL="0">
               <a:buNone/>
             </a:pPr>
             <a:r>
@@ -5123,13 +5204,6 @@
           </a:solidFill>
           <a:ln/>
         </p:spPr>
-        <p:txBody>
-          <a:bodyPr/>
-          <a:lstStyle/>
-          <a:p>
-            <a:endParaRPr lang="en-US"/>
-          </a:p>
-        </p:txBody>
       </p:sp>
       <p:sp>
         <p:nvSpPr>
@@ -5152,7 +5226,7 @@
           <a:bodyPr wrap="square" lIns="0" tIns="0" rIns="0" bIns="0" rtlCol="0" anchor="ctr"/>
           <a:lstStyle/>
           <a:p>
-            <a:pPr marL="0" indent="0" algn="l">
+            <a:pPr algn="l" indent="0" marL="0">
               <a:buNone/>
             </a:pPr>
             <a:r>
@@ -5166,6 +5240,9 @@
               </a:rPr>
               <a:t>The repair ladder: </a:t>
             </a:r>
+            <a:pPr algn="l" indent="0" marL="0">
+              <a:buNone/>
+            </a:pPr>
             <a:r>
               <a:rPr lang="en-US" sz="1300" dirty="0">
                 <a:solidFill>
@@ -5177,6 +5254,9 @@
               </a:rPr>
               <a:t>a rung's exhaustion is a </a:t>
             </a:r>
+            <a:pPr algn="l" indent="0" marL="0">
+              <a:buNone/>
+            </a:pPr>
             <a:r>
               <a:rPr lang="en-US" sz="1300" b="1" i="1" dirty="0">
                 <a:solidFill>
@@ -5188,6 +5268,9 @@
               </a:rPr>
               <a:t>local diagnosis </a:t>
             </a:r>
+            <a:pPr algn="l" indent="0" marL="0">
+              <a:buNone/>
+            </a:pPr>
             <a:r>
               <a:rPr lang="en-US" sz="1300" dirty="0">
                 <a:solidFill>
@@ -5202,7 +5285,7 @@
             <a:endParaRPr lang="en-US" sz="1300" dirty="0"/>
           </a:p>
           <a:p>
-            <a:pPr marL="0" indent="0" algn="l">
+            <a:pPr algn="l" indent="0" marL="0">
               <a:buNone/>
             </a:pPr>
             <a:r>
@@ -5216,6 +5299,9 @@
               </a:rPr>
               <a:t>judged only by </a:t>
             </a:r>
+            <a:pPr algn="l" indent="0" marL="0">
+              <a:buNone/>
+            </a:pPr>
             <a:r>
               <a:rPr lang="en-US" sz="1300" b="1" i="1" dirty="0">
                 <a:solidFill>
@@ -5227,6 +5313,9 @@
               </a:rPr>
               <a:t>fresh re-measurement</a:t>
             </a:r>
+            <a:pPr algn="l" indent="0" marL="0">
+              <a:buNone/>
+            </a:pPr>
             <a:r>
               <a:rPr lang="en-US" sz="1300" dirty="0">
                 <a:solidFill>
@@ -5268,13 +5357,6 @@
             <a:prstDash val="solid"/>
           </a:ln>
         </p:spPr>
-        <p:txBody>
-          <a:bodyPr/>
-          <a:lstStyle/>
-          <a:p>
-            <a:endParaRPr lang="en-US"/>
-          </a:p>
-        </p:txBody>
       </p:sp>
       <p:sp>
         <p:nvSpPr>
@@ -5297,7 +5379,7 @@
           <a:bodyPr wrap="square" lIns="0" tIns="0" rIns="0" bIns="0" rtlCol="0" anchor="ctr"/>
           <a:lstStyle/>
           <a:p>
-            <a:pPr marL="0" indent="0" algn="l">
+            <a:pPr algn="l" indent="0" marL="0">
               <a:buNone/>
             </a:pPr>
             <a:r>
@@ -5314,7 +5396,7 @@
             <a:endParaRPr lang="en-US" sz="1100" dirty="0"/>
           </a:p>
           <a:p>
-            <a:pPr marL="0" indent="0" algn="l">
+            <a:pPr algn="l" indent="0" marL="0">
               <a:buNone/>
             </a:pPr>
             <a:r>
@@ -5348,7 +5430,6 @@
         <a:solidFill>
           <a:srgbClr val="FFFFFF"/>
         </a:solidFill>
-        <a:effectLst/>
       </p:bgPr>
     </p:bg>
     <p:spTree>
@@ -5386,7 +5467,7 @@
           <a:bodyPr wrap="square" lIns="0" tIns="0" rIns="0" bIns="0" rtlCol="0" anchor="ctr"/>
           <a:lstStyle/>
           <a:p>
-            <a:pPr marL="0" indent="0">
+            <a:pPr indent="0" marL="0">
               <a:buNone/>
             </a:pPr>
             <a:r>
@@ -5425,7 +5506,7 @@
           <a:bodyPr wrap="square" lIns="0" tIns="0" rIns="0" bIns="0" rtlCol="0" anchor="t"/>
           <a:lstStyle/>
           <a:p>
-            <a:pPr marL="342900" indent="-342900" algn="l">
+            <a:pPr algn="l" marL="342900" indent="-342900">
               <a:buSzPct val="100000"/>
               <a:buChar char="•"/>
             </a:pPr>
@@ -5440,6 +5521,12 @@
               </a:rPr>
               <a:t>Blackboard</a:t>
             </a:r>
+            <a:pPr algn="l" indent="0" marL="0">
+              <a:spcAft>
+                <a:spcPts val="900"/>
+              </a:spcAft>
+              <a:buNone/>
+            </a:pPr>
             <a:r>
               <a:rPr lang="en-US" sz="1600" dirty="0">
                 <a:solidFill>
@@ -5454,7 +5541,7 @@
             <a:endParaRPr lang="en-US" sz="1600" dirty="0"/>
           </a:p>
           <a:p>
-            <a:pPr marL="342900" indent="-342900" algn="l">
+            <a:pPr algn="l" marL="342900" indent="-342900">
               <a:buSzPct val="100000"/>
               <a:buChar char="•"/>
             </a:pPr>
@@ -5469,6 +5556,12 @@
               </a:rPr>
               <a:t>Blackboard Entry (Key)</a:t>
             </a:r>
+            <a:pPr algn="l" indent="0" marL="0">
+              <a:spcAft>
+                <a:spcPts val="900"/>
+              </a:spcAft>
+              <a:buNone/>
+            </a:pPr>
             <a:r>
               <a:rPr lang="en-US" sz="1600" dirty="0">
                 <a:solidFill>
@@ -5483,7 +5576,7 @@
             <a:endParaRPr lang="en-US" sz="1600" dirty="0"/>
           </a:p>
           <a:p>
-            <a:pPr marL="342900" indent="-342900" algn="l">
+            <a:pPr algn="l" marL="342900" indent="-342900">
               <a:buSzPct val="100000"/>
               <a:buChar char="•"/>
             </a:pPr>
@@ -5498,6 +5591,12 @@
               </a:rPr>
               <a:t>Episode</a:t>
             </a:r>
+            <a:pPr algn="l" indent="0" marL="0">
+              <a:spcAft>
+                <a:spcPts val="900"/>
+              </a:spcAft>
+              <a:buNone/>
+            </a:pPr>
             <a:r>
               <a:rPr lang="en-US" sz="1600" dirty="0">
                 <a:solidFill>
@@ -5512,7 +5611,7 @@
             <a:endParaRPr lang="en-US" sz="1600" dirty="0"/>
           </a:p>
           <a:p>
-            <a:pPr marL="342900" indent="-342900" algn="l">
+            <a:pPr algn="l" marL="342900" indent="-342900">
               <a:buSzPct val="100000"/>
               <a:buChar char="•"/>
             </a:pPr>
@@ -5527,6 +5626,12 @@
               </a:rPr>
               <a:t>Partition</a:t>
             </a:r>
+            <a:pPr algn="l" indent="0" marL="0">
+              <a:spcAft>
+                <a:spcPts val="900"/>
+              </a:spcAft>
+              <a:buNone/>
+            </a:pPr>
             <a:r>
               <a:rPr lang="en-US" sz="1600" dirty="0">
                 <a:solidFill>
@@ -5541,7 +5646,7 @@
             <a:endParaRPr lang="en-US" sz="1600" dirty="0"/>
           </a:p>
           <a:p>
-            <a:pPr marL="342900" indent="-342900" algn="l">
+            <a:pPr algn="l" marL="342900" indent="-342900">
               <a:buSzPct val="100000"/>
               <a:buChar char="•"/>
             </a:pPr>
@@ -5556,6 +5661,12 @@
               </a:rPr>
               <a:t>Controller</a:t>
             </a:r>
+            <a:pPr algn="l" indent="0" marL="0">
+              <a:spcAft>
+                <a:spcPts val="900"/>
+              </a:spcAft>
+              <a:buNone/>
+            </a:pPr>
             <a:r>
               <a:rPr lang="en-US" sz="1600" dirty="0">
                 <a:solidFill>
@@ -5570,7 +5681,7 @@
             <a:endParaRPr lang="en-US" sz="1600" dirty="0"/>
           </a:p>
           <a:p>
-            <a:pPr marL="342900" indent="-342900" algn="l">
+            <a:pPr algn="l" marL="342900" indent="-342900">
               <a:buSzPct val="100000"/>
               <a:buChar char="•"/>
             </a:pPr>
@@ -5585,6 +5696,12 @@
               </a:rPr>
               <a:t>Knowledge source (KS)</a:t>
             </a:r>
+            <a:pPr algn="l" indent="0" marL="0">
+              <a:spcAft>
+                <a:spcPts val="900"/>
+              </a:spcAft>
+              <a:buNone/>
+            </a:pPr>
             <a:r>
               <a:rPr lang="en-US" sz="1600" dirty="0">
                 <a:solidFill>
@@ -5599,7 +5716,7 @@
             <a:endParaRPr lang="en-US" sz="1600" dirty="0"/>
           </a:p>
           <a:p>
-            <a:pPr marL="342900" indent="-342900" algn="l">
+            <a:pPr algn="l" marL="342900" indent="-342900">
               <a:buSzPct val="100000"/>
               <a:buChar char="•"/>
             </a:pPr>
@@ -5614,6 +5731,12 @@
               </a:rPr>
               <a:t>Route</a:t>
             </a:r>
+            <a:pPr algn="l" indent="0" marL="0">
+              <a:spcAft>
+                <a:spcPts val="900"/>
+              </a:spcAft>
+              <a:buNone/>
+            </a:pPr>
             <a:r>
               <a:rPr lang="en-US" sz="1600" dirty="0">
                 <a:solidFill>
@@ -5628,7 +5751,7 @@
             <a:endParaRPr lang="en-US" sz="1600" dirty="0"/>
           </a:p>
           <a:p>
-            <a:pPr marL="342900" indent="-342900" algn="l">
+            <a:pPr algn="l" marL="342900" indent="-342900">
               <a:buSzPct val="100000"/>
               <a:buChar char="•"/>
             </a:pPr>
@@ -5643,6 +5766,12 @@
               </a:rPr>
               <a:t>History / Ledger</a:t>
             </a:r>
+            <a:pPr algn="l" indent="0" marL="0">
+              <a:spcAft>
+                <a:spcPts val="900"/>
+              </a:spcAft>
+              <a:buNone/>
+            </a:pPr>
             <a:r>
               <a:rPr lang="en-US" sz="1600" dirty="0">
                 <a:solidFill>
@@ -5674,7 +5803,6 @@
         <a:solidFill>
           <a:srgbClr val="FFFFFF"/>
         </a:solidFill>
-        <a:effectLst/>
       </p:bgPr>
     </p:bg>
     <p:spTree>
@@ -5712,7 +5840,7 @@
           <a:bodyPr wrap="square" lIns="0" tIns="0" rIns="0" bIns="0" rtlCol="0" anchor="ctr"/>
           <a:lstStyle/>
           <a:p>
-            <a:pPr marL="0" indent="0">
+            <a:pPr indent="0" marL="0">
               <a:buNone/>
             </a:pPr>
             <a:r>
@@ -5753,34 +5881,10 @@
             <a:tbl>
               <a:tblPr/>
               <a:tblGrid>
-                <a:gridCol w="2194560">
-                  <a:extLst>
-                    <a:ext uri="{9D8B030D-6E8A-4147-A177-3AD203B41FA5}">
-                      <a16:colId xmlns:a16="http://schemas.microsoft.com/office/drawing/2014/main" val="20000"/>
-                    </a:ext>
-                  </a:extLst>
-                </a:gridCol>
-                <a:gridCol w="2651760">
-                  <a:extLst>
-                    <a:ext uri="{9D8B030D-6E8A-4147-A177-3AD203B41FA5}">
-                      <a16:colId xmlns:a16="http://schemas.microsoft.com/office/drawing/2014/main" val="20001"/>
-                    </a:ext>
-                  </a:extLst>
-                </a:gridCol>
-                <a:gridCol w="3017520">
-                  <a:extLst>
-                    <a:ext uri="{9D8B030D-6E8A-4147-A177-3AD203B41FA5}">
-                      <a16:colId xmlns:a16="http://schemas.microsoft.com/office/drawing/2014/main" val="20002"/>
-                    </a:ext>
-                  </a:extLst>
-                </a:gridCol>
-                <a:gridCol w="3017520">
-                  <a:extLst>
-                    <a:ext uri="{9D8B030D-6E8A-4147-A177-3AD203B41FA5}">
-                      <a16:colId xmlns:a16="http://schemas.microsoft.com/office/drawing/2014/main" val="20003"/>
-                    </a:ext>
-                  </a:extLst>
-                </a:gridCol>
+                <a:gridCol w="2194560"/>
+                <a:gridCol w="2651760"/>
+                <a:gridCol w="3017520"/>
+                <a:gridCol w="3017520"/>
               </a:tblGrid>
               <a:tr h="658368">
                 <a:tc>
@@ -5788,7 +5892,7 @@
                     <a:bodyPr/>
                     <a:lstStyle/>
                     <a:p>
-                      <a:pPr marL="0" indent="0" algn="l">
+                      <a:pPr algn="l" indent="0" marL="0">
                         <a:buNone/>
                       </a:pPr>
                       <a:r>
@@ -5856,7 +5960,7 @@
                     <a:bodyPr/>
                     <a:lstStyle/>
                     <a:p>
-                      <a:pPr marL="0" indent="0" algn="l">
+                      <a:pPr algn="l" indent="0" marL="0">
                         <a:buNone/>
                       </a:pPr>
                       <a:r>
@@ -5924,7 +6028,7 @@
                     <a:bodyPr/>
                     <a:lstStyle/>
                     <a:p>
-                      <a:pPr marL="0" indent="0" algn="l">
+                      <a:pPr algn="l" indent="0" marL="0">
                         <a:buNone/>
                       </a:pPr>
                       <a:r>
@@ -5992,7 +6096,7 @@
                     <a:bodyPr/>
                     <a:lstStyle/>
                     <a:p>
-                      <a:pPr marL="0" indent="0" algn="l">
+                      <a:pPr algn="l" indent="0" marL="0">
                         <a:buNone/>
                       </a:pPr>
                       <a:r>
@@ -6055,11 +6159,6 @@
                     </a:solidFill>
                   </a:tcPr>
                 </a:tc>
-                <a:extLst>
-                  <a:ext uri="{0D108BD9-81ED-4DB2-BD59-A6C34878D82A}">
-                    <a16:rowId xmlns:a16="http://schemas.microsoft.com/office/drawing/2014/main" val="10000"/>
-                  </a:ext>
-                </a:extLst>
               </a:tr>
               <a:tr h="658368">
                 <a:tc>
@@ -6067,7 +6166,7 @@
                     <a:bodyPr/>
                     <a:lstStyle/>
                     <a:p>
-                      <a:pPr marL="0" indent="0" algn="l">
+                      <a:pPr algn="l" indent="0" marL="0">
                         <a:buNone/>
                       </a:pPr>
                       <a:r>
@@ -6135,7 +6234,7 @@
                     <a:bodyPr/>
                     <a:lstStyle/>
                     <a:p>
-                      <a:pPr marL="0" indent="0" algn="l">
+                      <a:pPr algn="l" indent="0" marL="0">
                         <a:buNone/>
                       </a:pPr>
                       <a:r>
@@ -6203,7 +6302,7 @@
                     <a:bodyPr/>
                     <a:lstStyle/>
                     <a:p>
-                      <a:pPr marL="0" indent="0" algn="l">
+                      <a:pPr algn="l" indent="0" marL="0">
                         <a:buNone/>
                       </a:pPr>
                       <a:r>
@@ -6271,7 +6370,7 @@
                     <a:bodyPr/>
                     <a:lstStyle/>
                     <a:p>
-                      <a:pPr marL="0" indent="0" algn="l">
+                      <a:pPr algn="l" indent="0" marL="0">
                         <a:buNone/>
                       </a:pPr>
                       <a:r>
@@ -6285,6 +6384,9 @@
                         </a:rPr>
                         <a:t>restore from golden — or </a:t>
                       </a:r>
+                      <a:pPr algn="l" indent="0" marL="0">
+                        <a:buNone/>
+                      </a:pPr>
                       <a:r>
                         <a:rPr lang="en-US" sz="1250" i="1" dirty="0">
                           <a:solidFill>
@@ -6296,6 +6398,9 @@
                         </a:rPr>
                         <a:t>bless</a:t>
                       </a:r>
+                      <a:pPr algn="l" indent="0" marL="0">
+                        <a:buNone/>
+                      </a:pPr>
                       <a:r>
                         <a:rPr lang="en-US" sz="1250" dirty="0">
                           <a:solidFill>
@@ -6356,11 +6461,6 @@
                     </a:solidFill>
                   </a:tcPr>
                 </a:tc>
-                <a:extLst>
-                  <a:ext uri="{0D108BD9-81ED-4DB2-BD59-A6C34878D82A}">
-                    <a16:rowId xmlns:a16="http://schemas.microsoft.com/office/drawing/2014/main" val="10001"/>
-                  </a:ext>
-                </a:extLst>
               </a:tr>
               <a:tr h="658368">
                 <a:tc>
@@ -6368,7 +6468,7 @@
                     <a:bodyPr/>
                     <a:lstStyle/>
                     <a:p>
-                      <a:pPr marL="0" indent="0" algn="l">
+                      <a:pPr algn="l" indent="0" marL="0">
                         <a:buNone/>
                       </a:pPr>
                       <a:r>
@@ -6436,7 +6536,7 @@
                     <a:bodyPr/>
                     <a:lstStyle/>
                     <a:p>
-                      <a:pPr marL="0" indent="0" algn="l">
+                      <a:pPr algn="l" indent="0" marL="0">
                         <a:buNone/>
                       </a:pPr>
                       <a:r>
@@ -6504,7 +6604,7 @@
                     <a:bodyPr/>
                     <a:lstStyle/>
                     <a:p>
-                      <a:pPr marL="0" indent="0" algn="l">
+                      <a:pPr algn="l" indent="0" marL="0">
                         <a:buNone/>
                       </a:pPr>
                       <a:r>
@@ -6572,7 +6672,7 @@
                     <a:bodyPr/>
                     <a:lstStyle/>
                     <a:p>
-                      <a:pPr marL="0" indent="0" algn="l">
+                      <a:pPr algn="l" indent="0" marL="0">
                         <a:buNone/>
                       </a:pPr>
                       <a:r>
@@ -6635,11 +6735,6 @@
                     </a:solidFill>
                   </a:tcPr>
                 </a:tc>
-                <a:extLst>
-                  <a:ext uri="{0D108BD9-81ED-4DB2-BD59-A6C34878D82A}">
-                    <a16:rowId xmlns:a16="http://schemas.microsoft.com/office/drawing/2014/main" val="10002"/>
-                  </a:ext>
-                </a:extLst>
               </a:tr>
               <a:tr h="658368">
                 <a:tc>
@@ -6647,7 +6742,7 @@
                     <a:bodyPr/>
                     <a:lstStyle/>
                     <a:p>
-                      <a:pPr marL="0" indent="0" algn="l">
+                      <a:pPr algn="l" indent="0" marL="0">
                         <a:buNone/>
                       </a:pPr>
                       <a:r>
@@ -6715,7 +6810,7 @@
                     <a:bodyPr/>
                     <a:lstStyle/>
                     <a:p>
-                      <a:pPr marL="0" indent="0" algn="l">
+                      <a:pPr algn="l" indent="0" marL="0">
                         <a:buNone/>
                       </a:pPr>
                       <a:r>
@@ -6783,7 +6878,7 @@
                     <a:bodyPr/>
                     <a:lstStyle/>
                     <a:p>
-                      <a:pPr marL="0" indent="0" algn="l">
+                      <a:pPr algn="l" indent="0" marL="0">
                         <a:buNone/>
                       </a:pPr>
                       <a:r>
@@ -6851,7 +6946,7 @@
                     <a:bodyPr/>
                     <a:lstStyle/>
                     <a:p>
-                      <a:pPr marL="0" indent="0" algn="l">
+                      <a:pPr algn="l" indent="0" marL="0">
                         <a:buNone/>
                       </a:pPr>
                       <a:r>
@@ -6914,11 +7009,6 @@
                     </a:solidFill>
                   </a:tcPr>
                 </a:tc>
-                <a:extLst>
-                  <a:ext uri="{0D108BD9-81ED-4DB2-BD59-A6C34878D82A}">
-                    <a16:rowId xmlns:a16="http://schemas.microsoft.com/office/drawing/2014/main" val="10003"/>
-                  </a:ext>
-                </a:extLst>
               </a:tr>
               <a:tr h="658368">
                 <a:tc>
@@ -6926,7 +7016,7 @@
                     <a:bodyPr/>
                     <a:lstStyle/>
                     <a:p>
-                      <a:pPr marL="0" indent="0" algn="l">
+                      <a:pPr algn="l" indent="0" marL="0">
                         <a:buNone/>
                       </a:pPr>
                       <a:r>
@@ -6994,7 +7084,7 @@
                     <a:bodyPr/>
                     <a:lstStyle/>
                     <a:p>
-                      <a:pPr marL="0" indent="0" algn="l">
+                      <a:pPr algn="l" indent="0" marL="0">
                         <a:buNone/>
                       </a:pPr>
                       <a:r>
@@ -7062,7 +7152,7 @@
                     <a:bodyPr/>
                     <a:lstStyle/>
                     <a:p>
-                      <a:pPr marL="0" indent="0" algn="l">
+                      <a:pPr algn="l" indent="0" marL="0">
                         <a:buNone/>
                       </a:pPr>
                       <a:r>
@@ -7130,7 +7220,7 @@
                     <a:bodyPr/>
                     <a:lstStyle/>
                     <a:p>
-                      <a:pPr marL="0" indent="0" algn="l">
+                      <a:pPr algn="l" indent="0" marL="0">
                         <a:buNone/>
                       </a:pPr>
                       <a:r>
@@ -7193,11 +7283,6 @@
                     </a:solidFill>
                   </a:tcPr>
                 </a:tc>
-                <a:extLst>
-                  <a:ext uri="{0D108BD9-81ED-4DB2-BD59-A6C34878D82A}">
-                    <a16:rowId xmlns:a16="http://schemas.microsoft.com/office/drawing/2014/main" val="10004"/>
-                  </a:ext>
-                </a:extLst>
               </a:tr>
               <a:tr h="658368">
                 <a:tc>
@@ -7205,7 +7290,7 @@
                     <a:bodyPr/>
                     <a:lstStyle/>
                     <a:p>
-                      <a:pPr marL="0" indent="0" algn="l">
+                      <a:pPr algn="l" indent="0" marL="0">
                         <a:buNone/>
                       </a:pPr>
                       <a:r>
@@ -7219,6 +7304,9 @@
                         </a:rPr>
                         <a:t>Toolchain </a:t>
                       </a:r>
+                      <a:pPr algn="l" indent="0" marL="0">
+                        <a:buNone/>
+                      </a:pPr>
                       <a:r>
                         <a:rPr lang="en-US" sz="1100" i="1" dirty="0">
                           <a:solidFill>
@@ -7284,7 +7372,7 @@
                     <a:bodyPr/>
                     <a:lstStyle/>
                     <a:p>
-                      <a:pPr marL="0" indent="0" algn="l">
+                      <a:pPr algn="l" indent="0" marL="0">
                         <a:buNone/>
                       </a:pPr>
                       <a:r>
@@ -7298,6 +7386,9 @@
                         </a:rPr>
                         <a:t>hashed </a:t>
                       </a:r>
+                      <a:pPr algn="l" indent="0" marL="0">
+                        <a:buNone/>
+                      </a:pPr>
                       <a:r>
                         <a:rPr lang="en-US" sz="1250" b="1" dirty="0">
                           <a:solidFill>
@@ -7363,7 +7454,7 @@
                     <a:bodyPr/>
                     <a:lstStyle/>
                     <a:p>
-                      <a:pPr marL="0" indent="0" algn="l">
+                      <a:pPr algn="l" indent="0" marL="0">
                         <a:buNone/>
                       </a:pPr>
                       <a:r>
@@ -7431,7 +7522,7 @@
                     <a:bodyPr/>
                     <a:lstStyle/>
                     <a:p>
-                      <a:pPr marL="0" indent="0" algn="l">
+                      <a:pPr algn="l" indent="0" marL="0">
                         <a:buNone/>
                       </a:pPr>
                       <a:r>
@@ -7494,11 +7585,6 @@
                     </a:solidFill>
                   </a:tcPr>
                 </a:tc>
-                <a:extLst>
-                  <a:ext uri="{0D108BD9-81ED-4DB2-BD59-A6C34878D82A}">
-                    <a16:rowId xmlns:a16="http://schemas.microsoft.com/office/drawing/2014/main" val="10005"/>
-                  </a:ext>
-                </a:extLst>
               </a:tr>
               <a:tr h="658368">
                 <a:tc>
@@ -7506,7 +7592,7 @@
                     <a:bodyPr/>
                     <a:lstStyle/>
                     <a:p>
-                      <a:pPr marL="0" indent="0" algn="l">
+                      <a:pPr algn="l" indent="0" marL="0">
                         <a:buNone/>
                       </a:pPr>
                       <a:r>
@@ -7520,6 +7606,9 @@
                         </a:rPr>
                         <a:t>Trust state </a:t>
                       </a:r>
+                      <a:pPr algn="l" indent="0" marL="0">
+                        <a:buNone/>
+                      </a:pPr>
                       <a:r>
                         <a:rPr lang="en-US" sz="1100" i="1" dirty="0">
                           <a:solidFill>
@@ -7585,7 +7674,7 @@
                     <a:bodyPr/>
                     <a:lstStyle/>
                     <a:p>
-                      <a:pPr marL="0" indent="0" algn="l">
+                      <a:pPr algn="l" indent="0" marL="0">
                         <a:buNone/>
                       </a:pPr>
                       <a:r>
@@ -7653,7 +7742,7 @@
                     <a:bodyPr/>
                     <a:lstStyle/>
                     <a:p>
-                      <a:pPr marL="0" indent="0" algn="l">
+                      <a:pPr algn="l" indent="0" marL="0">
                         <a:buNone/>
                       </a:pPr>
                       <a:r>
@@ -7721,7 +7810,7 @@
                     <a:bodyPr/>
                     <a:lstStyle/>
                     <a:p>
-                      <a:pPr marL="0" indent="0" algn="l">
+                      <a:pPr algn="l" indent="0" marL="0">
                         <a:buNone/>
                       </a:pPr>
                       <a:r>
@@ -7735,6 +7824,9 @@
                         </a:rPr>
                         <a:t>principled refusal</a:t>
                       </a:r>
+                      <a:pPr algn="l" indent="0" marL="0">
+                        <a:buNone/>
+                      </a:pPr>
                       <a:r>
                         <a:rPr lang="en-US" sz="1250" dirty="0">
                           <a:solidFill>
@@ -7795,11 +7887,6 @@
                     </a:solidFill>
                   </a:tcPr>
                 </a:tc>
-                <a:extLst>
-                  <a:ext uri="{0D108BD9-81ED-4DB2-BD59-A6C34878D82A}">
-                    <a16:rowId xmlns:a16="http://schemas.microsoft.com/office/drawing/2014/main" val="10006"/>
-                  </a:ext>
-                </a:extLst>
               </a:tr>
             </a:tbl>
           </a:graphicData>
@@ -7821,7 +7908,6 @@
         <a:solidFill>
           <a:srgbClr val="FFFFFF"/>
         </a:solidFill>
-        <a:effectLst/>
       </p:bgPr>
     </p:bg>
     <p:spTree>
@@ -7859,13 +7945,6 @@
           </a:solidFill>
           <a:ln/>
         </p:spPr>
-        <p:txBody>
-          <a:bodyPr/>
-          <a:lstStyle/>
-          <a:p>
-            <a:endParaRPr lang="en-US"/>
-          </a:p>
-        </p:txBody>
       </p:sp>
       <p:sp>
         <p:nvSpPr>
@@ -7888,7 +7967,7 @@
           <a:bodyPr wrap="square" lIns="254" tIns="254" rIns="254" bIns="254" rtlCol="0" anchor="ctr"/>
           <a:lstStyle/>
           <a:p>
-            <a:pPr marL="0" indent="0" algn="ctr">
+            <a:pPr algn="ctr" indent="0" marL="0">
               <a:buNone/>
             </a:pPr>
             <a:r>
@@ -7927,13 +8006,6 @@
           </a:solidFill>
           <a:ln/>
         </p:spPr>
-        <p:txBody>
-          <a:bodyPr/>
-          <a:lstStyle/>
-          <a:p>
-            <a:endParaRPr lang="en-US"/>
-          </a:p>
-        </p:txBody>
       </p:sp>
       <p:sp>
         <p:nvSpPr>
@@ -7956,7 +8028,7 @@
           <a:bodyPr wrap="square" lIns="254" tIns="254" rIns="254" bIns="254" rtlCol="0" anchor="ctr"/>
           <a:lstStyle/>
           <a:p>
-            <a:pPr marL="0" indent="0" algn="ctr">
+            <a:pPr algn="ctr" indent="0" marL="0">
               <a:buNone/>
             </a:pPr>
             <a:r>
@@ -7973,7 +8045,7 @@
             <a:endParaRPr lang="en-US" sz="900" dirty="0"/>
           </a:p>
           <a:p>
-            <a:pPr marL="0" indent="0" algn="ctr">
+            <a:pPr algn="ctr" indent="0" marL="0">
               <a:buNone/>
             </a:pPr>
             <a:r>
@@ -8012,13 +8084,6 @@
           </a:solidFill>
           <a:ln/>
         </p:spPr>
-        <p:txBody>
-          <a:bodyPr/>
-          <a:lstStyle/>
-          <a:p>
-            <a:endParaRPr lang="en-US"/>
-          </a:p>
-        </p:txBody>
       </p:sp>
       <p:sp>
         <p:nvSpPr>
@@ -8041,7 +8106,7 @@
           <a:bodyPr wrap="square" lIns="254" tIns="254" rIns="254" bIns="254" rtlCol="0" anchor="ctr"/>
           <a:lstStyle/>
           <a:p>
-            <a:pPr marL="0" indent="0" algn="ctr">
+            <a:pPr algn="ctr" indent="0" marL="0">
               <a:buNone/>
             </a:pPr>
             <a:r>
@@ -8080,13 +8145,6 @@
           </a:solidFill>
           <a:ln/>
         </p:spPr>
-        <p:txBody>
-          <a:bodyPr/>
-          <a:lstStyle/>
-          <a:p>
-            <a:endParaRPr lang="en-US"/>
-          </a:p>
-        </p:txBody>
       </p:sp>
       <p:sp>
         <p:nvSpPr>
@@ -8109,7 +8167,7 @@
           <a:bodyPr wrap="square" lIns="254" tIns="254" rIns="254" bIns="254" rtlCol="0" anchor="ctr"/>
           <a:lstStyle/>
           <a:p>
-            <a:pPr marL="0" indent="0" algn="ctr">
+            <a:pPr algn="ctr" indent="0" marL="0">
               <a:buNone/>
             </a:pPr>
             <a:r>
@@ -8148,13 +8206,6 @@
           </a:solidFill>
           <a:ln/>
         </p:spPr>
-        <p:txBody>
-          <a:bodyPr/>
-          <a:lstStyle/>
-          <a:p>
-            <a:endParaRPr lang="en-US"/>
-          </a:p>
-        </p:txBody>
       </p:sp>
       <p:sp>
         <p:nvSpPr>
@@ -8177,7 +8228,7 @@
           <a:bodyPr wrap="square" lIns="254" tIns="254" rIns="254" bIns="254" rtlCol="0" anchor="ctr"/>
           <a:lstStyle/>
           <a:p>
-            <a:pPr marL="0" indent="0" algn="ctr">
+            <a:pPr algn="ctr" indent="0" marL="0">
               <a:buNone/>
             </a:pPr>
             <a:r>
@@ -8203,7 +8254,7 @@
         </p:nvSpPr>
         <p:spPr>
           <a:xfrm>
-            <a:off x="640080" y="952760"/>
+            <a:off x="640080" y="950976"/>
             <a:ext cx="7315200" cy="640080"/>
           </a:xfrm>
           <a:prstGeom prst="rect">
@@ -8216,7 +8267,7 @@
           <a:bodyPr wrap="square" lIns="0" tIns="0" rIns="0" bIns="0" rtlCol="0" anchor="ctr"/>
           <a:lstStyle/>
           <a:p>
-            <a:pPr marL="0" indent="0">
+            <a:pPr indent="0" marL="0">
               <a:buNone/>
             </a:pPr>
             <a:r>
@@ -8242,7 +8293,7 @@
         </p:nvSpPr>
         <p:spPr>
           <a:xfrm>
-            <a:off x="640080" y="1730000"/>
+            <a:off x="640080" y="1728216"/>
             <a:ext cx="6035040" cy="2286000"/>
           </a:xfrm>
           <a:prstGeom prst="rect">
@@ -8255,7 +8306,7 @@
           <a:bodyPr wrap="square" lIns="0" tIns="0" rIns="0" bIns="0" rtlCol="0" anchor="t"/>
           <a:lstStyle/>
           <a:p>
-            <a:pPr marL="342900" indent="-342900" algn="l">
+            <a:pPr algn="l" marL="342900" indent="-342900">
               <a:buSzPct val="100000"/>
               <a:buChar char="•"/>
             </a:pPr>
@@ -8270,6 +8321,12 @@
               </a:rPr>
               <a:t>The system: </a:t>
             </a:r>
+            <a:pPr algn="l" indent="0" marL="0">
+              <a:spcAft>
+                <a:spcPts val="200"/>
+              </a:spcAft>
+              <a:buNone/>
+            </a:pPr>
             <a:r>
               <a:rPr lang="en-US" sz="1350" dirty="0">
                 <a:solidFill>
@@ -8284,7 +8341,7 @@
             <a:endParaRPr lang="en-US" sz="1350" dirty="0"/>
           </a:p>
           <a:p>
-            <a:pPr marL="0" indent="0" algn="l">
+            <a:pPr algn="l" indent="0" marL="0">
               <a:spcAft>
                 <a:spcPts val="1000"/>
               </a:spcAft>
@@ -8304,7 +8361,7 @@
             <a:endParaRPr lang="en-US" sz="1350" dirty="0"/>
           </a:p>
           <a:p>
-            <a:pPr marL="342900" indent="-342900" algn="l">
+            <a:pPr algn="l" marL="342900" indent="-342900">
               <a:buSzPct val="100000"/>
               <a:buChar char="•"/>
             </a:pPr>
@@ -8319,6 +8376,9 @@
               </a:rPr>
               <a:t>The relevance: </a:t>
             </a:r>
+            <a:pPr algn="l" indent="0" marL="0">
+              <a:buNone/>
+            </a:pPr>
             <a:r>
               <a:rPr lang="en-US" sz="1350" dirty="0">
                 <a:solidFill>
@@ -8328,29 +8388,7 @@
                 <a:ea typeface="Calibri" pitchFamily="34" charset="-122"/>
                 <a:cs typeface="Calibri" pitchFamily="34" charset="-120"/>
               </a:rPr>
-              <a:t>the INSPECTA program's seL4/</a:t>
-            </a:r>
-            <a:r>
-              <a:rPr lang="en-US" sz="1350" dirty="0" err="1">
-                <a:solidFill>
-                  <a:srgbClr val="212121"/>
-                </a:solidFill>
-                <a:latin typeface="Calibri" pitchFamily="34" charset="0"/>
-                <a:ea typeface="Calibri" pitchFamily="34" charset="-122"/>
-                <a:cs typeface="Calibri" pitchFamily="34" charset="-120"/>
-              </a:rPr>
-              <a:t>Microkit</a:t>
-            </a:r>
-            <a:r>
-              <a:rPr lang="en-US" sz="1350" dirty="0">
-                <a:solidFill>
-                  <a:srgbClr val="212121"/>
-                </a:solidFill>
-                <a:latin typeface="Calibri" pitchFamily="34" charset="0"/>
-                <a:ea typeface="Calibri" pitchFamily="34" charset="-122"/>
-                <a:cs typeface="Calibri" pitchFamily="34" charset="-120"/>
-              </a:rPr>
-              <a:t> target — a real, current, safety-critical development artifact, not a toy example</a:t>
+              <a:t>the INSPECTA program's seL4/Microkit exemplar — a real, current, safety-critical development artifact, not a toy built for this talk</a:t>
             </a:r>
             <a:endParaRPr lang="en-US" sz="1350" dirty="0"/>
           </a:p>
@@ -8377,13 +8415,6 @@
           </a:solidFill>
           <a:ln/>
         </p:spPr>
-        <p:txBody>
-          <a:bodyPr/>
-          <a:lstStyle/>
-          <a:p>
-            <a:endParaRPr lang="en-US"/>
-          </a:p>
-        </p:txBody>
       </p:sp>
       <p:sp>
         <p:nvSpPr>
@@ -8406,7 +8437,7 @@
           <a:bodyPr wrap="square" lIns="254" tIns="254" rIns="254" bIns="254" rtlCol="0" anchor="ctr"/>
           <a:lstStyle/>
           <a:p>
-            <a:pPr marL="0" indent="0" algn="ctr">
+            <a:pPr algn="ctr" indent="0" marL="0">
               <a:buNone/>
             </a:pPr>
             <a:r>
@@ -8423,7 +8454,7 @@
             <a:endParaRPr lang="en-US" sz="1050" dirty="0"/>
           </a:p>
           <a:p>
-            <a:pPr marL="0" indent="0" algn="ctr">
+            <a:pPr algn="ctr" indent="0" marL="0">
               <a:buNone/>
             </a:pPr>
             <a:r>
@@ -8462,7 +8493,7 @@
           <a:bodyPr wrap="square" lIns="0" tIns="0" rIns="0" bIns="0" rtlCol="0" anchor="ctr"/>
           <a:lstStyle/>
           <a:p>
-            <a:pPr marL="0" indent="0" algn="ctr">
+            <a:pPr algn="ctr" indent="0" marL="0">
               <a:buNone/>
             </a:pPr>
             <a:r>
@@ -8501,13 +8532,6 @@
           </a:solidFill>
           <a:ln/>
         </p:spPr>
-        <p:txBody>
-          <a:bodyPr/>
-          <a:lstStyle/>
-          <a:p>
-            <a:endParaRPr lang="en-US"/>
-          </a:p>
-        </p:txBody>
       </p:sp>
       <p:sp>
         <p:nvSpPr>
@@ -8530,7 +8554,7 @@
           <a:bodyPr wrap="square" lIns="254" tIns="254" rIns="254" bIns="254" rtlCol="0" anchor="ctr"/>
           <a:lstStyle/>
           <a:p>
-            <a:pPr marL="0" indent="0" algn="ctr">
+            <a:pPr algn="ctr" indent="0" marL="0">
               <a:buNone/>
             </a:pPr>
             <a:r>
@@ -8547,7 +8571,7 @@
             <a:endParaRPr lang="en-US" sz="1050" dirty="0"/>
           </a:p>
           <a:p>
-            <a:pPr marL="0" indent="0" algn="ctr">
+            <a:pPr algn="ctr" indent="0" marL="0">
               <a:buNone/>
             </a:pPr>
             <a:r>
@@ -8586,7 +8610,7 @@
           <a:bodyPr wrap="square" lIns="0" tIns="0" rIns="0" bIns="0" rtlCol="0" anchor="ctr"/>
           <a:lstStyle/>
           <a:p>
-            <a:pPr marL="0" indent="0" algn="ctr">
+            <a:pPr algn="ctr" indent="0" marL="0">
               <a:buNone/>
             </a:pPr>
             <a:r>
@@ -8625,13 +8649,6 @@
           </a:solidFill>
           <a:ln/>
         </p:spPr>
-        <p:txBody>
-          <a:bodyPr/>
-          <a:lstStyle/>
-          <a:p>
-            <a:endParaRPr lang="en-US"/>
-          </a:p>
-        </p:txBody>
       </p:sp>
       <p:sp>
         <p:nvSpPr>
@@ -8654,7 +8671,7 @@
           <a:bodyPr wrap="square" lIns="254" tIns="254" rIns="254" bIns="254" rtlCol="0" anchor="ctr"/>
           <a:lstStyle/>
           <a:p>
-            <a:pPr marL="0" indent="0" algn="ctr">
+            <a:pPr algn="ctr" indent="0" marL="0">
               <a:buNone/>
             </a:pPr>
             <a:r>
@@ -8671,7 +8688,7 @@
             <a:endParaRPr lang="en-US" sz="1050" dirty="0"/>
           </a:p>
           <a:p>
-            <a:pPr marL="0" indent="0" algn="ctr">
+            <a:pPr algn="ctr" indent="0" marL="0">
               <a:buNone/>
             </a:pPr>
             <a:r>
@@ -8710,7 +8727,7 @@
           <a:bodyPr wrap="square" lIns="0" tIns="0" rIns="0" bIns="0" rtlCol="0" anchor="ctr"/>
           <a:lstStyle/>
           <a:p>
-            <a:pPr marL="0" indent="0" algn="ctr">
+            <a:pPr algn="ctr" indent="0" marL="0">
               <a:buNone/>
             </a:pPr>
             <a:r>
@@ -8749,13 +8766,6 @@
           </a:solidFill>
           <a:ln/>
         </p:spPr>
-        <p:txBody>
-          <a:bodyPr/>
-          <a:lstStyle/>
-          <a:p>
-            <a:endParaRPr lang="en-US"/>
-          </a:p>
-        </p:txBody>
       </p:sp>
       <p:sp>
         <p:nvSpPr>
@@ -8778,7 +8788,7 @@
           <a:bodyPr wrap="square" lIns="254" tIns="254" rIns="254" bIns="254" rtlCol="0" anchor="ctr"/>
           <a:lstStyle/>
           <a:p>
-            <a:pPr marL="0" indent="0" algn="ctr">
+            <a:pPr algn="ctr" indent="0" marL="0">
               <a:buNone/>
             </a:pPr>
             <a:r>
@@ -8795,7 +8805,7 @@
             <a:endParaRPr lang="en-US" sz="1050" dirty="0"/>
           </a:p>
           <a:p>
-            <a:pPr marL="0" indent="0" algn="ctr">
+            <a:pPr algn="ctr" indent="0" marL="0">
               <a:buNone/>
             </a:pPr>
             <a:r>
@@ -8822,7 +8832,7 @@
         <p:spPr>
           <a:xfrm>
             <a:off x="640080" y="5029200"/>
-            <a:ext cx="6035040" cy="1371600"/>
+            <a:ext cx="6035040" cy="1097280"/>
           </a:xfrm>
           <a:prstGeom prst="rect">
             <a:avLst/>
@@ -8834,7 +8844,7 @@
           <a:bodyPr wrap="square" lIns="0" tIns="0" rIns="0" bIns="0" rtlCol="0" anchor="t"/>
           <a:lstStyle/>
           <a:p>
-            <a:pPr marL="342900" indent="-342900" algn="l">
+            <a:pPr algn="l" marL="342900" indent="-342900">
               <a:buSzPct val="100000"/>
               <a:buChar char="•"/>
             </a:pPr>
@@ -8849,6 +8859,9 @@
               </a:rPr>
               <a:t>Why this example: </a:t>
             </a:r>
+            <a:pPr algn="l" indent="0" marL="0">
+              <a:buNone/>
+            </a:pPr>
             <a:r>
               <a:rPr lang="en-US" sz="1350" dirty="0">
                 <a:solidFill>
@@ -8867,6 +8880,163 @@
       <p:sp>
         <p:nvSpPr>
           <p:cNvPr id="26" name="Text 24"/>
+          <p:cNvSpPr/>
+          <p:nvPr/>
+        </p:nvSpPr>
+        <p:spPr>
+          <a:xfrm>
+            <a:off x="640080" y="6236208"/>
+            <a:ext cx="10881360" cy="566928"/>
+          </a:xfrm>
+          <a:prstGeom prst="rect">
+            <a:avLst/>
+          </a:prstGeom>
+          <a:noFill/>
+          <a:ln/>
+        </p:spPr>
+        <p:txBody>
+          <a:bodyPr wrap="square" lIns="0" tIns="0" rIns="0" bIns="0" rtlCol="0" anchor="t"/>
+          <a:lstStyle/>
+          <a:p>
+            <a:pPr algn="l" indent="0" marL="0">
+              <a:buNone/>
+            </a:pPr>
+            <a:r>
+              <a:rPr lang="en-US" sz="850" dirty="0">
+                <a:solidFill>
+                  <a:srgbClr val="5A6478"/>
+                </a:solidFill>
+                <a:latin typeface="Calibri" pitchFamily="34" charset="0"/>
+                <a:ea typeface="Calibri" pitchFamily="34" charset="-122"/>
+                <a:cs typeface="Calibri" pitchFamily="34" charset="-120"/>
+              </a:rPr>
+              <a:t>Hatcliff &amp; Belt, </a:t>
+            </a:r>
+            <a:pPr algn="l" indent="0" marL="0">
+              <a:buNone/>
+            </a:pPr>
+            <a:r>
+              <a:rPr lang="en-US" sz="850" i="1" dirty="0">
+                <a:solidFill>
+                  <a:srgbClr val="5A6478"/>
+                </a:solidFill>
+                <a:latin typeface="Calibri" pitchFamily="34" charset="0"/>
+                <a:ea typeface="Calibri" pitchFamily="34" charset="-122"/>
+                <a:cs typeface="Calibri" pitchFamily="34" charset="-120"/>
+              </a:rPr>
+              <a:t>The Isolette System: Illustrating End-to-End Artifacts for Rigorous Model-Based Engineering</a:t>
+            </a:r>
+            <a:pPr algn="l" indent="0" marL="0">
+              <a:buNone/>
+            </a:pPr>
+            <a:r>
+              <a:rPr lang="en-US" sz="850" dirty="0">
+                <a:solidFill>
+                  <a:srgbClr val="5A6478"/>
+                </a:solidFill>
+                <a:latin typeface="Calibri" pitchFamily="34" charset="0"/>
+                <a:ea typeface="Calibri" pitchFamily="34" charset="-122"/>
+                <a:cs typeface="Calibri" pitchFamily="34" charset="-120"/>
+              </a:rPr>
+              <a:t>, Springer LNCS 15240, 2025</a:t>
+            </a:r>
+            <a:endParaRPr lang="en-US" sz="850" dirty="0"/>
+          </a:p>
+          <a:p>
+            <a:pPr algn="l" indent="0" marL="0">
+              <a:buNone/>
+            </a:pPr>
+            <a:r>
+              <a:rPr lang="en-US" sz="850" dirty="0">
+                <a:solidFill>
+                  <a:srgbClr val="5A6478"/>
+                </a:solidFill>
+                <a:latin typeface="Calibri" pitchFamily="34" charset="0"/>
+                <a:ea typeface="Calibri" pitchFamily="34" charset="-122"/>
+                <a:cs typeface="Calibri" pitchFamily="34" charset="-120"/>
+              </a:rPr>
+              <a:t>Hatcliff, Belt, Robby, McKenzie, Liang, </a:t>
+            </a:r>
+            <a:pPr algn="l" indent="0" marL="0">
+              <a:buNone/>
+            </a:pPr>
+            <a:r>
+              <a:rPr lang="en-US" sz="850" i="1" dirty="0">
+                <a:solidFill>
+                  <a:srgbClr val="5A6478"/>
+                </a:solidFill>
+                <a:latin typeface="Calibri" pitchFamily="34" charset="0"/>
+                <a:ea typeface="Calibri" pitchFamily="34" charset="-122"/>
+                <a:cs typeface="Calibri" pitchFamily="34" charset="-120"/>
+              </a:rPr>
+              <a:t>End-to-End Formal Methods Integrated Development with SysMLv2 Using HAMR</a:t>
+            </a:r>
+            <a:pPr algn="l" indent="0" marL="0">
+              <a:buNone/>
+            </a:pPr>
+            <a:r>
+              <a:rPr lang="en-US" sz="850" dirty="0">
+                <a:solidFill>
+                  <a:srgbClr val="5A6478"/>
+                </a:solidFill>
+                <a:latin typeface="Calibri" pitchFamily="34" charset="0"/>
+                <a:ea typeface="Calibri" pitchFamily="34" charset="-122"/>
+                <a:cs typeface="Calibri" pitchFamily="34" charset="-120"/>
+              </a:rPr>
+              <a:t>, Springer, 2025</a:t>
+            </a:r>
+            <a:endParaRPr lang="en-US" sz="850" dirty="0"/>
+          </a:p>
+          <a:p>
+            <a:pPr algn="l" indent="0" marL="0">
+              <a:buNone/>
+            </a:pPr>
+            <a:r>
+              <a:rPr lang="en-US" sz="850" dirty="0">
+                <a:solidFill>
+                  <a:srgbClr val="5A6478"/>
+                </a:solidFill>
+                <a:latin typeface="Calibri" pitchFamily="34" charset="0"/>
+                <a:ea typeface="Calibri" pitchFamily="34" charset="-122"/>
+                <a:cs typeface="Calibri" pitchFamily="34" charset="-120"/>
+              </a:rPr>
+              <a:t>Hatcliff, Belt, Robby, Carpenter, </a:t>
+            </a:r>
+            <a:pPr algn="l" indent="0" marL="0">
+              <a:buNone/>
+            </a:pPr>
+            <a:r>
+              <a:rPr lang="en-US" sz="850" i="1" dirty="0">
+                <a:solidFill>
+                  <a:srgbClr val="5A6478"/>
+                </a:solidFill>
+                <a:latin typeface="Calibri" pitchFamily="34" charset="0"/>
+                <a:ea typeface="Calibri" pitchFamily="34" charset="-122"/>
+                <a:cs typeface="Calibri" pitchFamily="34" charset="-120"/>
+              </a:rPr>
+              <a:t>HAMR: An AADL Multi-platform Code Generation Toolset</a:t>
+            </a:r>
+            <a:pPr algn="l" indent="0" marL="0">
+              <a:buNone/>
+            </a:pPr>
+            <a:r>
+              <a:rPr lang="en-US" sz="850" dirty="0">
+                <a:solidFill>
+                  <a:srgbClr val="5A6478"/>
+                </a:solidFill>
+                <a:latin typeface="Calibri" pitchFamily="34" charset="0"/>
+                <a:ea typeface="Calibri" pitchFamily="34" charset="-122"/>
+                <a:cs typeface="Calibri" pitchFamily="34" charset="-120"/>
+              </a:rPr>
+              <a:t>, ISoLA 2021, LNCS 13036</a:t>
+            </a:r>
+            <a:endParaRPr lang="en-US" sz="850" dirty="0"/>
+          </a:p>
+        </p:txBody>
+      </p:sp>
+      <p:sp>
+        <p:nvSpPr>
+          <p:cNvPr id="27" name="Text 25"/>
           <p:cNvSpPr/>
           <p:nvPr/>
         </p:nvSpPr>
@@ -8885,7 +9055,7 @@
           <a:bodyPr wrap="square" lIns="0" tIns="0" rIns="0" bIns="0" rtlCol="0" anchor="ctr"/>
           <a:lstStyle/>
           <a:p>
-            <a:pPr marL="0" indent="0" algn="l">
+            <a:pPr algn="l" indent="0" marL="0">
               <a:buNone/>
             </a:pPr>
             <a:r>
@@ -8905,7 +9075,7 @@
       </p:sp>
       <p:sp>
         <p:nvSpPr>
-          <p:cNvPr id="27" name="Shape 25"/>
+          <p:cNvPr id="28" name="Shape 26"/>
           <p:cNvSpPr/>
           <p:nvPr/>
         </p:nvSpPr>
@@ -8929,17 +9099,10 @@
             <a:prstDash val="solid"/>
           </a:ln>
         </p:spPr>
-        <p:txBody>
-          <a:bodyPr/>
-          <a:lstStyle/>
-          <a:p>
-            <a:endParaRPr lang="en-US"/>
-          </a:p>
-        </p:txBody>
-      </p:sp>
-      <p:sp>
-        <p:nvSpPr>
-          <p:cNvPr id="28" name="Text 26"/>
+      </p:sp>
+      <p:sp>
+        <p:nvSpPr>
+          <p:cNvPr id="29" name="Text 27"/>
           <p:cNvSpPr/>
           <p:nvPr/>
         </p:nvSpPr>
@@ -8958,7 +9121,7 @@
           <a:bodyPr wrap="square" lIns="0" tIns="0" rIns="0" bIns="0" rtlCol="0" anchor="ctr"/>
           <a:lstStyle/>
           <a:p>
-            <a:pPr marL="0" indent="0" algn="l">
+            <a:pPr algn="l" indent="0" marL="0">
               <a:buNone/>
             </a:pPr>
             <a:r>
@@ -8978,7 +9141,7 @@
       </p:sp>
       <p:sp>
         <p:nvSpPr>
-          <p:cNvPr id="29" name="Text 27"/>
+          <p:cNvPr id="30" name="Text 28"/>
           <p:cNvSpPr/>
           <p:nvPr/>
         </p:nvSpPr>
@@ -8997,7 +9160,7 @@
           <a:bodyPr wrap="square" lIns="0" tIns="0" rIns="0" bIns="0" rtlCol="0" anchor="ctr"/>
           <a:lstStyle/>
           <a:p>
-            <a:pPr marL="0" indent="0" algn="l">
+            <a:pPr algn="l" indent="0" marL="0">
               <a:buNone/>
             </a:pPr>
             <a:r>
@@ -9017,7 +9180,7 @@
       </p:sp>
       <p:sp>
         <p:nvSpPr>
-          <p:cNvPr id="30" name="Shape 28"/>
+          <p:cNvPr id="31" name="Shape 29"/>
           <p:cNvSpPr/>
           <p:nvPr/>
         </p:nvSpPr>
@@ -9041,17 +9204,10 @@
             <a:prstDash val="solid"/>
           </a:ln>
         </p:spPr>
-        <p:txBody>
-          <a:bodyPr/>
-          <a:lstStyle/>
-          <a:p>
-            <a:endParaRPr lang="en-US"/>
-          </a:p>
-        </p:txBody>
-      </p:sp>
-      <p:sp>
-        <p:nvSpPr>
-          <p:cNvPr id="31" name="Text 29"/>
+      </p:sp>
+      <p:sp>
+        <p:nvSpPr>
+          <p:cNvPr id="32" name="Text 30"/>
           <p:cNvSpPr/>
           <p:nvPr/>
         </p:nvSpPr>
@@ -9070,7 +9226,7 @@
           <a:bodyPr wrap="square" lIns="0" tIns="0" rIns="0" bIns="0" rtlCol="0" anchor="ctr"/>
           <a:lstStyle/>
           <a:p>
-            <a:pPr marL="0" indent="0" algn="l">
+            <a:pPr algn="l" indent="0" marL="0">
               <a:buNone/>
             </a:pPr>
             <a:r>
@@ -9090,7 +9246,7 @@
       </p:sp>
       <p:sp>
         <p:nvSpPr>
-          <p:cNvPr id="32" name="Text 30"/>
+          <p:cNvPr id="33" name="Text 31"/>
           <p:cNvSpPr/>
           <p:nvPr/>
         </p:nvSpPr>
@@ -9109,7 +9265,7 @@
           <a:bodyPr wrap="square" lIns="0" tIns="0" rIns="0" bIns="0" rtlCol="0" anchor="ctr"/>
           <a:lstStyle/>
           <a:p>
-            <a:pPr marL="0" indent="0" algn="l">
+            <a:pPr algn="l" indent="0" marL="0">
               <a:buNone/>
             </a:pPr>
             <a:r>
@@ -9129,7 +9285,7 @@
       </p:sp>
       <p:sp>
         <p:nvSpPr>
-          <p:cNvPr id="33" name="Shape 31"/>
+          <p:cNvPr id="34" name="Shape 32"/>
           <p:cNvSpPr/>
           <p:nvPr/>
         </p:nvSpPr>
@@ -9153,17 +9309,10 @@
             <a:prstDash val="solid"/>
           </a:ln>
         </p:spPr>
-        <p:txBody>
-          <a:bodyPr/>
-          <a:lstStyle/>
-          <a:p>
-            <a:endParaRPr lang="en-US"/>
-          </a:p>
-        </p:txBody>
-      </p:sp>
-      <p:sp>
-        <p:nvSpPr>
-          <p:cNvPr id="34" name="Text 32"/>
+      </p:sp>
+      <p:sp>
+        <p:nvSpPr>
+          <p:cNvPr id="35" name="Text 33"/>
           <p:cNvSpPr/>
           <p:nvPr/>
         </p:nvSpPr>
@@ -9182,7 +9331,7 @@
           <a:bodyPr wrap="square" lIns="0" tIns="0" rIns="0" bIns="0" rtlCol="0" anchor="ctr"/>
           <a:lstStyle/>
           <a:p>
-            <a:pPr marL="0" indent="0" algn="l">
+            <a:pPr algn="l" indent="0" marL="0">
               <a:buNone/>
             </a:pPr>
             <a:r>
@@ -9202,7 +9351,7 @@
       </p:sp>
       <p:sp>
         <p:nvSpPr>
-          <p:cNvPr id="35" name="Text 33"/>
+          <p:cNvPr id="36" name="Text 34"/>
           <p:cNvSpPr/>
           <p:nvPr/>
         </p:nvSpPr>
@@ -9221,7 +9370,7 @@
           <a:bodyPr wrap="square" lIns="0" tIns="0" rIns="0" bIns="0" rtlCol="0" anchor="ctr"/>
           <a:lstStyle/>
           <a:p>
-            <a:pPr marL="0" indent="0" algn="l">
+            <a:pPr algn="l" indent="0" marL="0">
               <a:buNone/>
             </a:pPr>
             <a:r>
@@ -9241,7 +9390,7 @@
       </p:sp>
       <p:sp>
         <p:nvSpPr>
-          <p:cNvPr id="36" name="Shape 34"/>
+          <p:cNvPr id="37" name="Shape 35"/>
           <p:cNvSpPr/>
           <p:nvPr/>
         </p:nvSpPr>
@@ -9265,17 +9414,10 @@
             <a:prstDash val="solid"/>
           </a:ln>
         </p:spPr>
-        <p:txBody>
-          <a:bodyPr/>
-          <a:lstStyle/>
-          <a:p>
-            <a:endParaRPr lang="en-US"/>
-          </a:p>
-        </p:txBody>
-      </p:sp>
-      <p:sp>
-        <p:nvSpPr>
-          <p:cNvPr id="37" name="Text 35"/>
+      </p:sp>
+      <p:sp>
+        <p:nvSpPr>
+          <p:cNvPr id="38" name="Text 36"/>
           <p:cNvSpPr/>
           <p:nvPr/>
         </p:nvSpPr>
@@ -9294,7 +9436,7 @@
           <a:bodyPr wrap="square" lIns="0" tIns="0" rIns="0" bIns="0" rtlCol="0" anchor="ctr"/>
           <a:lstStyle/>
           <a:p>
-            <a:pPr marL="0" indent="0" algn="l">
+            <a:pPr algn="l" indent="0" marL="0">
               <a:buNone/>
             </a:pPr>
             <a:r>
@@ -9314,7 +9456,7 @@
       </p:sp>
       <p:sp>
         <p:nvSpPr>
-          <p:cNvPr id="38" name="Text 36"/>
+          <p:cNvPr id="39" name="Text 37"/>
           <p:cNvSpPr/>
           <p:nvPr/>
         </p:nvSpPr>
@@ -9333,7 +9475,7 @@
           <a:bodyPr wrap="square" lIns="0" tIns="0" rIns="0" bIns="0" rtlCol="0" anchor="ctr"/>
           <a:lstStyle/>
           <a:p>
-            <a:pPr marL="0" indent="0" algn="l">
+            <a:pPr algn="l" indent="0" marL="0">
               <a:buNone/>
             </a:pPr>
             <a:r>
@@ -9353,7 +9495,7 @@
       </p:sp>
       <p:sp>
         <p:nvSpPr>
-          <p:cNvPr id="39" name="Shape 37"/>
+          <p:cNvPr id="40" name="Shape 38"/>
           <p:cNvSpPr/>
           <p:nvPr/>
         </p:nvSpPr>
@@ -9377,17 +9519,10 @@
             <a:prstDash val="solid"/>
           </a:ln>
         </p:spPr>
-        <p:txBody>
-          <a:bodyPr/>
-          <a:lstStyle/>
-          <a:p>
-            <a:endParaRPr lang="en-US"/>
-          </a:p>
-        </p:txBody>
-      </p:sp>
-      <p:sp>
-        <p:nvSpPr>
-          <p:cNvPr id="40" name="Text 38"/>
+      </p:sp>
+      <p:sp>
+        <p:nvSpPr>
+          <p:cNvPr id="41" name="Text 39"/>
           <p:cNvSpPr/>
           <p:nvPr/>
         </p:nvSpPr>
@@ -9406,7 +9541,7 @@
           <a:bodyPr wrap="square" lIns="0" tIns="0" rIns="0" bIns="0" rtlCol="0" anchor="ctr"/>
           <a:lstStyle/>
           <a:p>
-            <a:pPr marL="0" indent="0" algn="l">
+            <a:pPr algn="l" indent="0" marL="0">
               <a:buNone/>
             </a:pPr>
             <a:r>
@@ -9426,7 +9561,7 @@
       </p:sp>
       <p:sp>
         <p:nvSpPr>
-          <p:cNvPr id="41" name="Text 39"/>
+          <p:cNvPr id="42" name="Text 40"/>
           <p:cNvSpPr/>
           <p:nvPr/>
         </p:nvSpPr>
@@ -9445,7 +9580,7 @@
           <a:bodyPr wrap="square" lIns="0" tIns="0" rIns="0" bIns="0" rtlCol="0" anchor="ctr"/>
           <a:lstStyle/>
           <a:p>
-            <a:pPr marL="0" indent="0" algn="l">
+            <a:pPr algn="l" indent="0" marL="0">
               <a:buNone/>
             </a:pPr>
             <a:r>
@@ -9462,7 +9597,7 @@
             <a:endParaRPr lang="en-US" sz="1100" dirty="0"/>
           </a:p>
           <a:p>
-            <a:pPr marL="0" indent="0" algn="l">
+            <a:pPr algn="l" indent="0" marL="0">
               <a:buNone/>
             </a:pPr>
             <a:r>
@@ -9477,6 +9612,571 @@
               <a:t>props · l1a · l2 · verus · cheat · sysproof · gensrc · report</a:t>
             </a:r>
             <a:endParaRPr lang="en-US" sz="1100" dirty="0"/>
+          </a:p>
+        </p:txBody>
+      </p:sp>
+    </p:spTree>
+  </p:cSld>
+  <p:clrMapOvr>
+    <a:masterClrMapping/>
+  </p:clrMapOvr>
+</p:sld>
+</file>
+
+<file path=ppt/slides/slide9.xml><?xml version="1.0" encoding="utf-8"?>
+<p:sld xmlns:a="http://schemas.openxmlformats.org/drawingml/2006/main" xmlns:r="http://schemas.openxmlformats.org/officeDocument/2006/relationships" xmlns:p="http://schemas.openxmlformats.org/presentationml/2006/main">
+  <p:cSld name="Slide 9">
+    <p:bg>
+      <p:bgPr>
+        <a:solidFill>
+          <a:srgbClr val="FFFFFF"/>
+        </a:solidFill>
+      </p:bgPr>
+    </p:bg>
+    <p:spTree>
+      <p:nvGrpSpPr>
+        <p:cNvPr id="1" name=""/>
+        <p:cNvGrpSpPr/>
+        <p:nvPr/>
+      </p:nvGrpSpPr>
+      <p:grpSpPr>
+        <a:xfrm>
+          <a:off x="0" y="0"/>
+          <a:ext cx="0" cy="0"/>
+          <a:chOff x="0" y="0"/>
+          <a:chExt cx="0" cy="0"/>
+        </a:xfrm>
+      </p:grpSpPr>
+      <p:sp>
+        <p:nvSpPr>
+          <p:cNvPr id="2" name="Text 0"/>
+          <p:cNvSpPr/>
+          <p:nvPr/>
+        </p:nvSpPr>
+        <p:spPr>
+          <a:xfrm>
+            <a:off x="640080" y="411480"/>
+            <a:ext cx="10972800" cy="731520"/>
+          </a:xfrm>
+          <a:prstGeom prst="rect">
+            <a:avLst/>
+          </a:prstGeom>
+          <a:noFill/>
+          <a:ln/>
+        </p:spPr>
+        <p:txBody>
+          <a:bodyPr wrap="square" lIns="0" tIns="0" rIns="0" bIns="0" rtlCol="0" anchor="ctr"/>
+          <a:lstStyle/>
+          <a:p>
+            <a:pPr indent="0" marL="0">
+              <a:buNone/>
+            </a:pPr>
+            <a:r>
+              <a:rPr lang="en-US" sz="3600" b="1" dirty="0">
+                <a:solidFill>
+                  <a:srgbClr val="1E2761"/>
+                </a:solidFill>
+                <a:latin typeface="Cambria" pitchFamily="34" charset="0"/>
+                <a:ea typeface="Cambria" pitchFamily="34" charset="-122"/>
+                <a:cs typeface="Cambria" pitchFamily="34" charset="-120"/>
+              </a:rPr>
+              <a:t>References</a:t>
+            </a:r>
+            <a:endParaRPr lang="en-US" sz="3600" dirty="0"/>
+          </a:p>
+        </p:txBody>
+      </p:sp>
+      <p:sp>
+        <p:nvSpPr>
+          <p:cNvPr id="3" name="Text 1"/>
+          <p:cNvSpPr/>
+          <p:nvPr/>
+        </p:nvSpPr>
+        <p:spPr>
+          <a:xfrm>
+            <a:off x="640080" y="1371600"/>
+            <a:ext cx="10972800" cy="5120640"/>
+          </a:xfrm>
+          <a:prstGeom prst="rect">
+            <a:avLst/>
+          </a:prstGeom>
+          <a:noFill/>
+          <a:ln/>
+        </p:spPr>
+        <p:txBody>
+          <a:bodyPr wrap="square" lIns="0" tIns="0" rIns="0" bIns="0" rtlCol="0" anchor="t"/>
+          <a:lstStyle/>
+          <a:p>
+            <a:pPr algn="l" indent="0" marL="0">
+              <a:spcAft>
+                <a:spcPts val="400"/>
+              </a:spcAft>
+              <a:buNone/>
+            </a:pPr>
+            <a:r>
+              <a:rPr lang="en-US" sz="1400" b="1" dirty="0">
+                <a:solidFill>
+                  <a:srgbClr val="1E2761"/>
+                </a:solidFill>
+                <a:latin typeface="Calibri" pitchFamily="34" charset="0"/>
+                <a:ea typeface="Calibri" pitchFamily="34" charset="-122"/>
+                <a:cs typeface="Calibri" pitchFamily="34" charset="-120"/>
+              </a:rPr>
+              <a:t>The isolette &amp; HAMR (Kansas State)</a:t>
+            </a:r>
+            <a:endParaRPr lang="en-US" sz="1400" dirty="0"/>
+          </a:p>
+          <a:p>
+            <a:pPr algn="l" marL="342900" indent="-342900">
+              <a:spcAft>
+                <a:spcPts val="300"/>
+              </a:spcAft>
+              <a:buSzPct val="100000"/>
+              <a:buChar char="•"/>
+            </a:pPr>
+            <a:r>
+              <a:rPr lang="en-US" sz="1150" dirty="0">
+                <a:solidFill>
+                  <a:srgbClr val="212121"/>
+                </a:solidFill>
+                <a:latin typeface="Calibri" pitchFamily="34" charset="0"/>
+                <a:ea typeface="Calibri" pitchFamily="34" charset="-122"/>
+                <a:cs typeface="Calibri" pitchFamily="34" charset="-120"/>
+              </a:rPr>
+              <a:t>Hatcliff &amp; Belt, </a:t>
+            </a:r>
+            <a:pPr algn="l" indent="0" marL="0">
+              <a:spcAft>
+                <a:spcPts val="300"/>
+              </a:spcAft>
+              <a:buNone/>
+            </a:pPr>
+            <a:r>
+              <a:rPr lang="en-US" sz="1150" i="1" dirty="0">
+                <a:solidFill>
+                  <a:srgbClr val="212121"/>
+                </a:solidFill>
+                <a:latin typeface="Calibri" pitchFamily="34" charset="0"/>
+                <a:ea typeface="Calibri" pitchFamily="34" charset="-122"/>
+                <a:cs typeface="Calibri" pitchFamily="34" charset="-120"/>
+              </a:rPr>
+              <a:t>The Isolette System: Illustrating End-to-End Artifacts for Rigorous Model-Based Engineering</a:t>
+            </a:r>
+            <a:pPr algn="l" indent="0" marL="0">
+              <a:spcAft>
+                <a:spcPts val="300"/>
+              </a:spcAft>
+              <a:buNone/>
+            </a:pPr>
+            <a:r>
+              <a:rPr lang="en-US" sz="1150" dirty="0">
+                <a:solidFill>
+                  <a:srgbClr val="212121"/>
+                </a:solidFill>
+                <a:latin typeface="Calibri" pitchFamily="34" charset="0"/>
+                <a:ea typeface="Calibri" pitchFamily="34" charset="-122"/>
+                <a:cs typeface="Calibri" pitchFamily="34" charset="-120"/>
+              </a:rPr>
+              <a:t>, Springer LNCS 15240, 2025</a:t>
+            </a:r>
+            <a:endParaRPr lang="en-US" sz="1400" dirty="0"/>
+          </a:p>
+          <a:p>
+            <a:pPr algn="l" marL="342900" indent="-342900">
+              <a:spcAft>
+                <a:spcPts val="300"/>
+              </a:spcAft>
+              <a:buSzPct val="100000"/>
+              <a:buChar char="•"/>
+            </a:pPr>
+            <a:r>
+              <a:rPr lang="en-US" sz="1150" dirty="0">
+                <a:solidFill>
+                  <a:srgbClr val="212121"/>
+                </a:solidFill>
+                <a:latin typeface="Calibri" pitchFamily="34" charset="0"/>
+                <a:ea typeface="Calibri" pitchFamily="34" charset="-122"/>
+                <a:cs typeface="Calibri" pitchFamily="34" charset="-120"/>
+              </a:rPr>
+              <a:t>Hatcliff, Belt, Robby, McKenzie, Liang, </a:t>
+            </a:r>
+            <a:pPr algn="l" indent="0" marL="0">
+              <a:spcAft>
+                <a:spcPts val="300"/>
+              </a:spcAft>
+              <a:buNone/>
+            </a:pPr>
+            <a:r>
+              <a:rPr lang="en-US" sz="1150" i="1" dirty="0">
+                <a:solidFill>
+                  <a:srgbClr val="212121"/>
+                </a:solidFill>
+                <a:latin typeface="Calibri" pitchFamily="34" charset="0"/>
+                <a:ea typeface="Calibri" pitchFamily="34" charset="-122"/>
+                <a:cs typeface="Calibri" pitchFamily="34" charset="-120"/>
+              </a:rPr>
+              <a:t>End-to-End Formal Methods Integrated Development with SysMLv2 Using HAMR</a:t>
+            </a:r>
+            <a:pPr algn="l" indent="0" marL="0">
+              <a:spcAft>
+                <a:spcPts val="300"/>
+              </a:spcAft>
+              <a:buNone/>
+            </a:pPr>
+            <a:r>
+              <a:rPr lang="en-US" sz="1150" dirty="0">
+                <a:solidFill>
+                  <a:srgbClr val="212121"/>
+                </a:solidFill>
+                <a:latin typeface="Calibri" pitchFamily="34" charset="0"/>
+                <a:ea typeface="Calibri" pitchFamily="34" charset="-122"/>
+                <a:cs typeface="Calibri" pitchFamily="34" charset="-120"/>
+              </a:rPr>
+              <a:t>, Springer, 2025</a:t>
+            </a:r>
+            <a:endParaRPr lang="en-US" sz="1400" dirty="0"/>
+          </a:p>
+          <a:p>
+            <a:pPr algn="l" marL="342900" indent="-342900">
+              <a:spcAft>
+                <a:spcPts val="300"/>
+              </a:spcAft>
+              <a:buSzPct val="100000"/>
+              <a:buChar char="•"/>
+            </a:pPr>
+            <a:r>
+              <a:rPr lang="en-US" sz="1150" dirty="0">
+                <a:solidFill>
+                  <a:srgbClr val="212121"/>
+                </a:solidFill>
+                <a:latin typeface="Calibri" pitchFamily="34" charset="0"/>
+                <a:ea typeface="Calibri" pitchFamily="34" charset="-122"/>
+                <a:cs typeface="Calibri" pitchFamily="34" charset="-120"/>
+              </a:rPr>
+              <a:t>Hatcliff, Belt, Robby, Carpenter, </a:t>
+            </a:r>
+            <a:pPr algn="l" indent="0" marL="0">
+              <a:spcAft>
+                <a:spcPts val="300"/>
+              </a:spcAft>
+              <a:buNone/>
+            </a:pPr>
+            <a:r>
+              <a:rPr lang="en-US" sz="1150" i="1" dirty="0">
+                <a:solidFill>
+                  <a:srgbClr val="212121"/>
+                </a:solidFill>
+                <a:latin typeface="Calibri" pitchFamily="34" charset="0"/>
+                <a:ea typeface="Calibri" pitchFamily="34" charset="-122"/>
+                <a:cs typeface="Calibri" pitchFamily="34" charset="-120"/>
+              </a:rPr>
+              <a:t>HAMR: An AADL Multi-platform Code Generation Toolset</a:t>
+            </a:r>
+            <a:pPr algn="l" indent="0" marL="0">
+              <a:spcAft>
+                <a:spcPts val="300"/>
+              </a:spcAft>
+              <a:buNone/>
+            </a:pPr>
+            <a:r>
+              <a:rPr lang="en-US" sz="1150" dirty="0">
+                <a:solidFill>
+                  <a:srgbClr val="212121"/>
+                </a:solidFill>
+                <a:latin typeface="Calibri" pitchFamily="34" charset="0"/>
+                <a:ea typeface="Calibri" pitchFamily="34" charset="-122"/>
+                <a:cs typeface="Calibri" pitchFamily="34" charset="-120"/>
+              </a:rPr>
+              <a:t>, ISoLA 2021, LNCS 13036, pp. 274–295</a:t>
+            </a:r>
+            <a:endParaRPr lang="en-US" sz="1400" dirty="0"/>
+          </a:p>
+          <a:p>
+            <a:pPr algn="l" marL="342900" indent="-342900">
+              <a:spcAft>
+                <a:spcPts val="300"/>
+              </a:spcAft>
+              <a:buSzPct val="100000"/>
+              <a:buChar char="•"/>
+            </a:pPr>
+            <a:r>
+              <a:rPr lang="en-US" sz="1150" dirty="0">
+                <a:solidFill>
+                  <a:srgbClr val="212121"/>
+                </a:solidFill>
+                <a:latin typeface="Calibri" pitchFamily="34" charset="0"/>
+                <a:ea typeface="Calibri" pitchFamily="34" charset="-122"/>
+                <a:cs typeface="Calibri" pitchFamily="34" charset="-120"/>
+              </a:rPr>
+              <a:t>Lempia &amp; Miller, </a:t>
+            </a:r>
+            <a:pPr algn="l" indent="0" marL="0">
+              <a:spcAft>
+                <a:spcPts val="300"/>
+              </a:spcAft>
+              <a:buNone/>
+            </a:pPr>
+            <a:r>
+              <a:rPr lang="en-US" sz="1150" i="1" dirty="0">
+                <a:solidFill>
+                  <a:srgbClr val="212121"/>
+                </a:solidFill>
+                <a:latin typeface="Calibri" pitchFamily="34" charset="0"/>
+                <a:ea typeface="Calibri" pitchFamily="34" charset="-122"/>
+                <a:cs typeface="Calibri" pitchFamily="34" charset="-120"/>
+              </a:rPr>
+              <a:t>Requirements Engineering Management Handbook</a:t>
+            </a:r>
+            <a:pPr algn="l" indent="0" marL="0">
+              <a:spcAft>
+                <a:spcPts val="300"/>
+              </a:spcAft>
+              <a:buNone/>
+            </a:pPr>
+            <a:r>
+              <a:rPr lang="en-US" sz="1150" dirty="0">
+                <a:solidFill>
+                  <a:srgbClr val="212121"/>
+                </a:solidFill>
+                <a:latin typeface="Calibri" pitchFamily="34" charset="0"/>
+                <a:ea typeface="Calibri" pitchFamily="34" charset="-122"/>
+                <a:cs typeface="Calibri" pitchFamily="34" charset="-120"/>
+              </a:rPr>
+              <a:t>, DOT/FAA/AR-08/32, 2009</a:t>
+            </a:r>
+            <a:endParaRPr lang="en-US" sz="1400" dirty="0"/>
+          </a:p>
+          <a:p>
+            <a:pPr algn="l" marL="342900" indent="-342900">
+              <a:spcAft>
+                <a:spcPts val="300"/>
+              </a:spcAft>
+              <a:buSzPct val="100000"/>
+              <a:buChar char="•"/>
+            </a:pPr>
+            <a:r>
+              <a:rPr lang="en-US" sz="1150" dirty="0">
+                <a:solidFill>
+                  <a:srgbClr val="212121"/>
+                </a:solidFill>
+                <a:latin typeface="Calibri" pitchFamily="34" charset="0"/>
+                <a:ea typeface="Calibri" pitchFamily="34" charset="-122"/>
+                <a:cs typeface="Calibri" pitchFamily="34" charset="-120"/>
+              </a:rPr>
+              <a:t>INSPECTA models: github.com/loonwerks/INSPECTA-models</a:t>
+            </a:r>
+            <a:endParaRPr lang="en-US" sz="1400" dirty="0"/>
+          </a:p>
+          <a:p>
+            <a:pPr algn="l" indent="0" marL="0">
+              <a:spcBef>
+                <a:spcPts val="1200"/>
+              </a:spcBef>
+              <a:spcAft>
+                <a:spcPts val="400"/>
+              </a:spcAft>
+              <a:buNone/>
+            </a:pPr>
+            <a:r>
+              <a:rPr lang="en-US" sz="1400" b="1" dirty="0">
+                <a:solidFill>
+                  <a:srgbClr val="1E2761"/>
+                </a:solidFill>
+                <a:latin typeface="Calibri" pitchFamily="34" charset="0"/>
+                <a:ea typeface="Calibri" pitchFamily="34" charset="-122"/>
+                <a:cs typeface="Calibri" pitchFamily="34" charset="-120"/>
+              </a:rPr>
+              <a:t>Attestation foundations</a:t>
+            </a:r>
+            <a:endParaRPr lang="en-US" sz="1400" dirty="0"/>
+          </a:p>
+          <a:p>
+            <a:pPr algn="l" marL="342900" indent="-342900">
+              <a:spcAft>
+                <a:spcPts val="300"/>
+              </a:spcAft>
+              <a:buSzPct val="100000"/>
+              <a:buChar char="•"/>
+            </a:pPr>
+            <a:r>
+              <a:rPr lang="en-US" sz="1150" dirty="0">
+                <a:solidFill>
+                  <a:srgbClr val="212121"/>
+                </a:solidFill>
+                <a:latin typeface="Calibri" pitchFamily="34" charset="0"/>
+                <a:ea typeface="Calibri" pitchFamily="34" charset="-122"/>
+                <a:cs typeface="Calibri" pitchFamily="34" charset="-120"/>
+              </a:rPr>
+              <a:t>Ramsdell, Rowe, Alexander, Helble, Loscocco, Pendergrass, Petz, </a:t>
+            </a:r>
+            <a:pPr algn="l" indent="0" marL="0">
+              <a:spcAft>
+                <a:spcPts val="300"/>
+              </a:spcAft>
+              <a:buNone/>
+            </a:pPr>
+            <a:r>
+              <a:rPr lang="en-US" sz="1150" i="1" dirty="0">
+                <a:solidFill>
+                  <a:srgbClr val="212121"/>
+                </a:solidFill>
+                <a:latin typeface="Calibri" pitchFamily="34" charset="0"/>
+                <a:ea typeface="Calibri" pitchFamily="34" charset="-122"/>
+                <a:cs typeface="Calibri" pitchFamily="34" charset="-120"/>
+              </a:rPr>
+              <a:t>Orchestrating Layered Attestations</a:t>
+            </a:r>
+            <a:pPr algn="l" indent="0" marL="0">
+              <a:spcAft>
+                <a:spcPts val="300"/>
+              </a:spcAft>
+              <a:buNone/>
+            </a:pPr>
+            <a:r>
+              <a:rPr lang="en-US" sz="1150" dirty="0">
+                <a:solidFill>
+                  <a:srgbClr val="212121"/>
+                </a:solidFill>
+                <a:latin typeface="Calibri" pitchFamily="34" charset="0"/>
+                <a:ea typeface="Calibri" pitchFamily="34" charset="-122"/>
+                <a:cs typeface="Calibri" pitchFamily="34" charset="-120"/>
+              </a:rPr>
+              <a:t>, POST 2019, LNCS 11426</a:t>
+            </a:r>
+            <a:endParaRPr lang="en-US" sz="1400" dirty="0"/>
+          </a:p>
+          <a:p>
+            <a:pPr algn="l" indent="0" marL="0">
+              <a:spcBef>
+                <a:spcPts val="1200"/>
+              </a:spcBef>
+              <a:spcAft>
+                <a:spcPts val="400"/>
+              </a:spcAft>
+              <a:buNone/>
+            </a:pPr>
+            <a:r>
+              <a:rPr lang="en-US" sz="1400" b="1" dirty="0">
+                <a:solidFill>
+                  <a:srgbClr val="1E2761"/>
+                </a:solidFill>
+                <a:latin typeface="Calibri" pitchFamily="34" charset="0"/>
+                <a:ea typeface="Calibri" pitchFamily="34" charset="-122"/>
+                <a:cs typeface="Calibri" pitchFamily="34" charset="-120"/>
+              </a:rPr>
+              <a:t>Verification &amp; platform</a:t>
+            </a:r>
+            <a:endParaRPr lang="en-US" sz="1400" dirty="0"/>
+          </a:p>
+          <a:p>
+            <a:pPr algn="l" marL="342900" indent="-342900">
+              <a:spcAft>
+                <a:spcPts val="300"/>
+              </a:spcAft>
+              <a:buSzPct val="100000"/>
+              <a:buChar char="•"/>
+            </a:pPr>
+            <a:r>
+              <a:rPr lang="en-US" sz="1150" dirty="0">
+                <a:solidFill>
+                  <a:srgbClr val="212121"/>
+                </a:solidFill>
+                <a:latin typeface="Calibri" pitchFamily="34" charset="0"/>
+                <a:ea typeface="Calibri" pitchFamily="34" charset="-122"/>
+                <a:cs typeface="Calibri" pitchFamily="34" charset="-120"/>
+              </a:rPr>
+              <a:t>Lattuada, Hance, Cho, Brun, Subasinghe, Zhou, Howell, Parno, Hawblitzel, </a:t>
+            </a:r>
+            <a:pPr algn="l" indent="0" marL="0">
+              <a:spcAft>
+                <a:spcPts val="300"/>
+              </a:spcAft>
+              <a:buNone/>
+            </a:pPr>
+            <a:r>
+              <a:rPr lang="en-US" sz="1150" i="1" dirty="0">
+                <a:solidFill>
+                  <a:srgbClr val="212121"/>
+                </a:solidFill>
+                <a:latin typeface="Calibri" pitchFamily="34" charset="0"/>
+                <a:ea typeface="Calibri" pitchFamily="34" charset="-122"/>
+                <a:cs typeface="Calibri" pitchFamily="34" charset="-120"/>
+              </a:rPr>
+              <a:t>Verus: Verifying Rust Programs using Linear Ghost Types</a:t>
+            </a:r>
+            <a:pPr algn="l" indent="0" marL="0">
+              <a:spcAft>
+                <a:spcPts val="300"/>
+              </a:spcAft>
+              <a:buNone/>
+            </a:pPr>
+            <a:r>
+              <a:rPr lang="en-US" sz="1150" dirty="0">
+                <a:solidFill>
+                  <a:srgbClr val="212121"/>
+                </a:solidFill>
+                <a:latin typeface="Calibri" pitchFamily="34" charset="0"/>
+                <a:ea typeface="Calibri" pitchFamily="34" charset="-122"/>
+                <a:cs typeface="Calibri" pitchFamily="34" charset="-120"/>
+              </a:rPr>
+              <a:t>, PACMPL 7 (OOPSLA1), 2023</a:t>
+            </a:r>
+            <a:endParaRPr lang="en-US" sz="1400" dirty="0"/>
+          </a:p>
+          <a:p>
+            <a:pPr algn="l" marL="342900" indent="-342900">
+              <a:spcAft>
+                <a:spcPts val="300"/>
+              </a:spcAft>
+              <a:buSzPct val="100000"/>
+              <a:buChar char="•"/>
+            </a:pPr>
+            <a:r>
+              <a:rPr lang="en-US" sz="1150" dirty="0">
+                <a:solidFill>
+                  <a:srgbClr val="212121"/>
+                </a:solidFill>
+                <a:latin typeface="Calibri" pitchFamily="34" charset="0"/>
+                <a:ea typeface="Calibri" pitchFamily="34" charset="-122"/>
+                <a:cs typeface="Calibri" pitchFamily="34" charset="-120"/>
+              </a:rPr>
+              <a:t>Klein et al., </a:t>
+            </a:r>
+            <a:pPr algn="l" indent="0" marL="0">
+              <a:spcAft>
+                <a:spcPts val="300"/>
+              </a:spcAft>
+              <a:buNone/>
+            </a:pPr>
+            <a:r>
+              <a:rPr lang="en-US" sz="1150" i="1" dirty="0">
+                <a:solidFill>
+                  <a:srgbClr val="212121"/>
+                </a:solidFill>
+                <a:latin typeface="Calibri" pitchFamily="34" charset="0"/>
+                <a:ea typeface="Calibri" pitchFamily="34" charset="-122"/>
+                <a:cs typeface="Calibri" pitchFamily="34" charset="-120"/>
+              </a:rPr>
+              <a:t>seL4: Formal Verification of an OS Kernel</a:t>
+            </a:r>
+            <a:pPr algn="l" indent="0" marL="0">
+              <a:spcAft>
+                <a:spcPts val="300"/>
+              </a:spcAft>
+              <a:buNone/>
+            </a:pPr>
+            <a:r>
+              <a:rPr lang="en-US" sz="1150" dirty="0">
+                <a:solidFill>
+                  <a:srgbClr val="212121"/>
+                </a:solidFill>
+                <a:latin typeface="Calibri" pitchFamily="34" charset="0"/>
+                <a:ea typeface="Calibri" pitchFamily="34" charset="-122"/>
+                <a:cs typeface="Calibri" pitchFamily="34" charset="-120"/>
+              </a:rPr>
+              <a:t>, SOSP 2009</a:t>
+            </a:r>
+            <a:endParaRPr lang="en-US" sz="1400" dirty="0"/>
           </a:p>
         </p:txBody>
       </p:sp>
@@ -9781,319 +10481,4 @@
     </a:ext>
   </a:extLst>
 </a:theme>
-</file>
-
-<file path=ppt/theme/theme2.xml><?xml version="1.0" encoding="utf-8"?>
-<a:theme xmlns:a="http://schemas.openxmlformats.org/drawingml/2006/main" name="Office Theme">
-  <a:themeElements>
-    <a:clrScheme name="Office">
-      <a:dk1>
-        <a:sysClr val="windowText" lastClr="000000"/>
-      </a:dk1>
-      <a:lt1>
-        <a:sysClr val="window" lastClr="FFFFFF"/>
-      </a:lt1>
-      <a:dk2>
-        <a:srgbClr val="0E2841"/>
-      </a:dk2>
-      <a:lt2>
-        <a:srgbClr val="E8E8E8"/>
-      </a:lt2>
-      <a:accent1>
-        <a:srgbClr val="156082"/>
-      </a:accent1>
-      <a:accent2>
-        <a:srgbClr val="E97132"/>
-      </a:accent2>
-      <a:accent3>
-        <a:srgbClr val="196B24"/>
-      </a:accent3>
-      <a:accent4>
-        <a:srgbClr val="0F9ED5"/>
-      </a:accent4>
-      <a:accent5>
-        <a:srgbClr val="A02B93"/>
-      </a:accent5>
-      <a:accent6>
-        <a:srgbClr val="4EA72E"/>
-      </a:accent6>
-      <a:hlink>
-        <a:srgbClr val="467886"/>
-      </a:hlink>
-      <a:folHlink>
-        <a:srgbClr val="96607D"/>
-      </a:folHlink>
-    </a:clrScheme>
-    <a:fontScheme name="Office">
-      <a:majorFont>
-        <a:latin typeface="Aptos Display" panose="02110004020202020204"/>
-        <a:ea typeface=""/>
-        <a:cs typeface=""/>
-        <a:font script="Jpan" typeface="游ゴシック Light"/>
-        <a:font script="Hang" typeface="맑은 고딕"/>
-        <a:font script="Hans" typeface="等线 Light"/>
-        <a:font script="Hant" typeface="新細明體"/>
-        <a:font script="Arab" typeface="Times New Roman"/>
-        <a:font script="Hebr" typeface="Times New Roman"/>
-        <a:font script="Thai" typeface="Angsana New"/>
-        <a:font script="Ethi" typeface="Nyala"/>
-        <a:font script="Beng" typeface="Vrinda"/>
-        <a:font script="Gujr" typeface="Shruti"/>
-        <a:font script="Khmr" typeface="MoolBoran"/>
-        <a:font script="Knda" typeface="Tunga"/>
-        <a:font script="Guru" typeface="Raavi"/>
-        <a:font script="Cans" typeface="Euphemia"/>
-        <a:font script="Cher" typeface="Plantagenet Cherokee"/>
-        <a:font script="Yiii" typeface="Microsoft Yi Baiti"/>
-        <a:font script="Tibt" typeface="Microsoft Himalaya"/>
-        <a:font script="Thaa" typeface="MV Boli"/>
-        <a:font script="Deva" typeface="Mangal"/>
-        <a:font script="Telu" typeface="Gautami"/>
-        <a:font script="Taml" typeface="Latha"/>
-        <a:font script="Syrc" typeface="Estrangelo Edessa"/>
-        <a:font script="Orya" typeface="Kalinga"/>
-        <a:font script="Mlym" typeface="Kartika"/>
-        <a:font script="Laoo" typeface="DokChampa"/>
-        <a:font script="Sinh" typeface="Iskoola Pota"/>
-        <a:font script="Mong" typeface="Mongolian Baiti"/>
-        <a:font script="Viet" typeface="Times New Roman"/>
-        <a:font script="Uigh" typeface="Microsoft Uighur"/>
-        <a:font script="Geor" typeface="Sylfaen"/>
-        <a:font script="Armn" typeface="Arial"/>
-        <a:font script="Bugi" typeface="Leelawadee UI"/>
-        <a:font script="Bopo" typeface="Microsoft JhengHei"/>
-        <a:font script="Java" typeface="Javanese Text"/>
-        <a:font script="Lisu" typeface="Segoe UI"/>
-        <a:font script="Mymr" typeface="Myanmar Text"/>
-        <a:font script="Nkoo" typeface="Ebrima"/>
-        <a:font script="Olck" typeface="Nirmala UI"/>
-        <a:font script="Osma" typeface="Ebrima"/>
-        <a:font script="Phag" typeface="Phagspa"/>
-        <a:font script="Syrn" typeface="Estrangelo Edessa"/>
-        <a:font script="Syrj" typeface="Estrangelo Edessa"/>
-        <a:font script="Syre" typeface="Estrangelo Edessa"/>
-        <a:font script="Sora" typeface="Nirmala UI"/>
-        <a:font script="Tale" typeface="Microsoft Tai Le"/>
-        <a:font script="Talu" typeface="Microsoft New Tai Lue"/>
-        <a:font script="Tfng" typeface="Ebrima"/>
-      </a:majorFont>
-      <a:minorFont>
-        <a:latin typeface="Aptos" panose="02110004020202020204"/>
-        <a:ea typeface=""/>
-        <a:cs typeface=""/>
-        <a:font script="Jpan" typeface="游ゴシック"/>
-        <a:font script="Hang" typeface="맑은 고딕"/>
-        <a:font script="Hans" typeface="等线"/>
-        <a:font script="Hant" typeface="新細明體"/>
-        <a:font script="Arab" typeface="Arial"/>
-        <a:font script="Hebr" typeface="Arial"/>
-        <a:font script="Thai" typeface="Cordia New"/>
-        <a:font script="Ethi" typeface="Nyala"/>
-        <a:font script="Beng" typeface="Vrinda"/>
-        <a:font script="Gujr" typeface="Shruti"/>
-        <a:font script="Khmr" typeface="DaunPenh"/>
-        <a:font script="Knda" typeface="Tunga"/>
-        <a:font script="Guru" typeface="Raavi"/>
-        <a:font script="Cans" typeface="Euphemia"/>
-        <a:font script="Cher" typeface="Plantagenet Cherokee"/>
-        <a:font script="Yiii" typeface="Microsoft Yi Baiti"/>
-        <a:font script="Tibt" typeface="Microsoft Himalaya"/>
-        <a:font script="Thaa" typeface="MV Boli"/>
-        <a:font script="Deva" typeface="Mangal"/>
-        <a:font script="Telu" typeface="Gautami"/>
-        <a:font script="Taml" typeface="Latha"/>
-        <a:font script="Syrc" typeface="Estrangelo Edessa"/>
-        <a:font script="Orya" typeface="Kalinga"/>
-        <a:font script="Mlym" typeface="Kartika"/>
-        <a:font script="Laoo" typeface="DokChampa"/>
-        <a:font script="Sinh" typeface="Iskoola Pota"/>
-        <a:font script="Mong" typeface="Mongolian Baiti"/>
-        <a:font script="Viet" typeface="Arial"/>
-        <a:font script="Uigh" typeface="Microsoft Uighur"/>
-        <a:font script="Geor" typeface="Sylfaen"/>
-        <a:font script="Armn" typeface="Arial"/>
-        <a:font script="Bugi" typeface="Leelawadee UI"/>
-        <a:font script="Bopo" typeface="Microsoft JhengHei"/>
-        <a:font script="Java" typeface="Javanese Text"/>
-        <a:font script="Lisu" typeface="Segoe UI"/>
-        <a:font script="Mymr" typeface="Myanmar Text"/>
-        <a:font script="Nkoo" typeface="Ebrima"/>
-        <a:font script="Olck" typeface="Nirmala UI"/>
-        <a:font script="Osma" typeface="Ebrima"/>
-        <a:font script="Phag" typeface="Phagspa"/>
-        <a:font script="Syrn" typeface="Estrangelo Edessa"/>
-        <a:font script="Syrj" typeface="Estrangelo Edessa"/>
-        <a:font script="Syre" typeface="Estrangelo Edessa"/>
-        <a:font script="Sora" typeface="Nirmala UI"/>
-        <a:font script="Tale" typeface="Microsoft Tai Le"/>
-        <a:font script="Talu" typeface="Microsoft New Tai Lue"/>
-        <a:font script="Tfng" typeface="Ebrima"/>
-      </a:minorFont>
-    </a:fontScheme>
-    <a:fmtScheme name="Office">
-      <a:fillStyleLst>
-        <a:solidFill>
-          <a:schemeClr val="phClr"/>
-        </a:solidFill>
-        <a:gradFill rotWithShape="1">
-          <a:gsLst>
-            <a:gs pos="0">
-              <a:schemeClr val="phClr">
-                <a:lumMod val="110000"/>
-                <a:satMod val="105000"/>
-                <a:tint val="67000"/>
-              </a:schemeClr>
-            </a:gs>
-            <a:gs pos="50000">
-              <a:schemeClr val="phClr">
-                <a:lumMod val="105000"/>
-                <a:satMod val="103000"/>
-                <a:tint val="73000"/>
-              </a:schemeClr>
-            </a:gs>
-            <a:gs pos="100000">
-              <a:schemeClr val="phClr">
-                <a:lumMod val="105000"/>
-                <a:satMod val="109000"/>
-                <a:tint val="81000"/>
-              </a:schemeClr>
-            </a:gs>
-          </a:gsLst>
-          <a:lin ang="5400000" scaled="0"/>
-        </a:gradFill>
-        <a:gradFill rotWithShape="1">
-          <a:gsLst>
-            <a:gs pos="0">
-              <a:schemeClr val="phClr">
-                <a:satMod val="103000"/>
-                <a:lumMod val="102000"/>
-                <a:tint val="94000"/>
-              </a:schemeClr>
-            </a:gs>
-            <a:gs pos="50000">
-              <a:schemeClr val="phClr">
-                <a:satMod val="110000"/>
-                <a:lumMod val="100000"/>
-                <a:shade val="100000"/>
-              </a:schemeClr>
-            </a:gs>
-            <a:gs pos="100000">
-              <a:schemeClr val="phClr">
-                <a:lumMod val="99000"/>
-                <a:satMod val="120000"/>
-                <a:shade val="78000"/>
-              </a:schemeClr>
-            </a:gs>
-          </a:gsLst>
-          <a:lin ang="5400000" scaled="0"/>
-        </a:gradFill>
-      </a:fillStyleLst>
-      <a:lnStyleLst>
-        <a:ln w="12700" cap="flat" cmpd="sng" algn="ctr">
-          <a:solidFill>
-            <a:schemeClr val="phClr"/>
-          </a:solidFill>
-          <a:prstDash val="solid"/>
-          <a:miter lim="800000"/>
-        </a:ln>
-        <a:ln w="19050" cap="flat" cmpd="sng" algn="ctr">
-          <a:solidFill>
-            <a:schemeClr val="phClr"/>
-          </a:solidFill>
-          <a:prstDash val="solid"/>
-          <a:miter lim="800000"/>
-        </a:ln>
-        <a:ln w="25400" cap="flat" cmpd="sng" algn="ctr">
-          <a:solidFill>
-            <a:schemeClr val="phClr"/>
-          </a:solidFill>
-          <a:prstDash val="solid"/>
-          <a:miter lim="800000"/>
-        </a:ln>
-      </a:lnStyleLst>
-      <a:effectStyleLst>
-        <a:effectStyle>
-          <a:effectLst/>
-        </a:effectStyle>
-        <a:effectStyle>
-          <a:effectLst/>
-        </a:effectStyle>
-        <a:effectStyle>
-          <a:effectLst>
-            <a:outerShdw blurRad="57150" dist="19050" dir="5400000" algn="ctr" rotWithShape="0">
-              <a:srgbClr val="000000">
-                <a:alpha val="63000"/>
-              </a:srgbClr>
-            </a:outerShdw>
-          </a:effectLst>
-        </a:effectStyle>
-      </a:effectStyleLst>
-      <a:bgFillStyleLst>
-        <a:solidFill>
-          <a:schemeClr val="phClr"/>
-        </a:solidFill>
-        <a:solidFill>
-          <a:schemeClr val="phClr">
-            <a:tint val="95000"/>
-            <a:satMod val="170000"/>
-          </a:schemeClr>
-        </a:solidFill>
-        <a:gradFill rotWithShape="1">
-          <a:gsLst>
-            <a:gs pos="0">
-              <a:schemeClr val="phClr">
-                <a:tint val="93000"/>
-                <a:satMod val="150000"/>
-                <a:shade val="98000"/>
-                <a:lumMod val="102000"/>
-              </a:schemeClr>
-            </a:gs>
-            <a:gs pos="50000">
-              <a:schemeClr val="phClr">
-                <a:tint val="98000"/>
-                <a:satMod val="130000"/>
-                <a:shade val="90000"/>
-                <a:lumMod val="103000"/>
-              </a:schemeClr>
-            </a:gs>
-            <a:gs pos="100000">
-              <a:schemeClr val="phClr">
-                <a:shade val="63000"/>
-                <a:satMod val="120000"/>
-              </a:schemeClr>
-            </a:gs>
-          </a:gsLst>
-          <a:lin ang="5400000" scaled="0"/>
-        </a:gradFill>
-      </a:bgFillStyleLst>
-    </a:fmtScheme>
-  </a:themeElements>
-  <a:objectDefaults>
-    <a:lnDef>
-      <a:spPr/>
-      <a:bodyPr/>
-      <a:lstStyle/>
-      <a:style>
-        <a:lnRef idx="2">
-          <a:schemeClr val="accent1"/>
-        </a:lnRef>
-        <a:fillRef idx="0">
-          <a:schemeClr val="accent1"/>
-        </a:fillRef>
-        <a:effectRef idx="1">
-          <a:schemeClr val="accent1"/>
-        </a:effectRef>
-        <a:fontRef idx="minor">
-          <a:schemeClr val="tx1"/>
-        </a:fontRef>
-      </a:style>
-    </a:lnDef>
-  </a:objectDefaults>
-  <a:extraClrSchemeLst/>
-  <a:extLst>
-    <a:ext uri="{05A4C25C-085E-4340-85A3-A5531E510DB2}">
-      <thm15:themeFamily xmlns:thm15="http://schemas.microsoft.com/office/thememl/2012/main" name="Office Theme" id="{2E142A2C-CD16-42D6-873A-C26D2A0506FA}" vid="{1BDDFF52-6CD6-40A5-AB3C-68EB2F1E4D0A}"/>
-    </a:ext>
-  </a:extLst>
-</a:theme>
 </file>
--- a/docs/video_slides_draft.pptx
+++ b/docs/video_slides_draft.pptx
@@ -4,6 +4,9 @@
   <p:sldMasterIdLst>
     <p:sldMasterId id="2147483648" r:id="rId1"/>
   </p:sldMasterIdLst>
+  <p:notesMasterIdLst>
+    <p:notesMasterId r:id="rId11"/>
+  </p:notesMasterIdLst>
   <p:sldIdLst>
     <p:sldId id="256" r:id="rId2"/>
     <p:sldId id="257" r:id="rId3"/>
@@ -15,9 +18,6 @@
     <p:sldId id="263" r:id="rId9"/>
     <p:sldId id="264" r:id="rId10"/>
   </p:sldIdLst>
-  <p:notesMasterIdLst>
-    <p:notesMasterId r:id="rId11"/>
-  </p:notesMasterIdLst>
   <p:sldSz cx="12192000" cy="6858000"/>
   <p:notesSz cx="6858000" cy="12192000"/>
   <p:defaultTextStyle>
@@ -112,6 +112,11 @@
       </a:defRPr>
     </a:lvl9pPr>
   </p:defaultTextStyle>
+  <p:extLst>
+    <p:ext uri="{EFAFB233-063F-42B5-8137-9DF3F51BA10A}">
+      <p15:sldGuideLst xmlns:p15="http://schemas.microsoft.com/office/powerpoint/2012/main"/>
+    </p:ext>
+  </p:extLst>
 </p:presentation>
 </file>
 
@@ -137,234 +142,10 @@
           <a:chExt cx="0" cy="0"/>
         </a:xfrm>
       </p:grpSpPr>
-      <p:sp>
-        <p:nvSpPr>
-          <p:cNvPr id="2" name="Header Placeholder 1"/>
-          <p:cNvSpPr>
-            <a:spLocks noGrp="1"/>
-          </p:cNvSpPr>
-          <p:nvPr>
-            <p:ph type="hdr" sz="quarter"/>
-          </p:nvPr>
-        </p:nvSpPr>
-        <p:spPr>
-          <a:xfrm>
-            <a:off x="0" y="0"/>
-            <a:ext cx="2971800" cy="458788"/>
-          </a:xfrm>
-          <a:prstGeom prst="rect">
-            <a:avLst/>
-          </a:prstGeom>
-        </p:spPr>
-        <p:txBody>
-          <a:bodyPr vert="horz" lIns="91440" tIns="45720" rIns="91440" bIns="45720" rtlCol="0"/>
-          <a:lstStyle>
-            <a:lvl1pPr algn="l">
-              <a:defRPr sz="1200"/>
-            </a:lvl1pPr>
-          </a:lstStyle>
-          <a:p>
-            <a:endParaRPr lang="en-US"/>
-          </a:p>
-        </p:txBody>
-      </p:sp>
-      <p:sp>
-        <p:nvSpPr>
-          <p:cNvPr id="3" name="Date Placeholder 2"/>
-          <p:cNvSpPr>
-            <a:spLocks noGrp="1"/>
-          </p:cNvSpPr>
-          <p:nvPr>
-            <p:ph type="dt" idx="1"/>
-          </p:nvPr>
-        </p:nvSpPr>
-        <p:spPr>
-          <a:xfrm>
-            <a:off x="3884613" y="0"/>
-            <a:ext cx="2971800" cy="458788"/>
-          </a:xfrm>
-          <a:prstGeom prst="rect">
-            <a:avLst/>
-          </a:prstGeom>
-        </p:spPr>
-        <p:txBody>
-          <a:bodyPr vert="horz" lIns="91440" tIns="45720" rIns="91440" bIns="45720" rtlCol="0"/>
-          <a:lstStyle>
-            <a:lvl1pPr algn="r">
-              <a:defRPr sz="1200"/>
-            </a:lvl1pPr>
-          </a:lstStyle>
-          <a:p>
-            <a:fld id="{5282F153-3F37-0F45-9E97-73ACFA13230C}" type="datetimeFigureOut">
-              <a:rPr lang="en-US"/>
-              <a:t>7/23/19</a:t>
-            </a:fld>
-            <a:endParaRPr lang="en-US"/>
-          </a:p>
-        </p:txBody>
-      </p:sp>
-      <p:sp>
-        <p:nvSpPr>
-          <p:cNvPr id="4" name="Slide Image Placeholder 3"/>
-          <p:cNvSpPr>
-            <a:spLocks noGrp="1" noRot="1" noChangeAspect="1"/>
-          </p:cNvSpPr>
-          <p:nvPr>
-            <p:ph type="sldImg" idx="2"/>
-          </p:nvPr>
-        </p:nvSpPr>
-        <p:spPr>
-          <a:xfrm>
-            <a:off x="685800" y="1143000"/>
-            <a:ext cx="5486400" cy="3086100"/>
-          </a:xfrm>
-          <a:prstGeom prst="rect">
-            <a:avLst/>
-          </a:prstGeom>
-          <a:noFill/>
-          <a:ln w="12700">
-            <a:solidFill>
-              <a:prstClr val="black"/>
-            </a:solidFill>
-          </a:ln>
-        </p:spPr>
-        <p:txBody>
-          <a:bodyPr vert="horz" lIns="91440" tIns="45720" rIns="91440" bIns="45720" rtlCol="0" anchor="ctr"/>
-          <a:lstStyle/>
-          <a:p>
-            <a:endParaRPr lang="en-US"/>
-          </a:p>
-        </p:txBody>
-      </p:sp>
-      <p:sp>
-        <p:nvSpPr>
-          <p:cNvPr id="5" name="Notes Placeholder 4"/>
-          <p:cNvSpPr>
-            <a:spLocks noGrp="1"/>
-          </p:cNvSpPr>
-          <p:nvPr>
-            <p:ph type="body" sz="quarter" idx="3"/>
-          </p:nvPr>
-        </p:nvSpPr>
-        <p:spPr>
-          <a:xfrm>
-            <a:off x="685800" y="4400550"/>
-            <a:ext cx="5486400" cy="3600450"/>
-          </a:xfrm>
-          <a:prstGeom prst="rect">
-            <a:avLst/>
-          </a:prstGeom>
-        </p:spPr>
-        <p:txBody>
-          <a:bodyPr vert="horz" lIns="91440" tIns="45720" rIns="91440" bIns="45720" rtlCol="0"/>
-          <a:lstStyle/>
-          <a:p>
-            <a:pPr lvl="0"/>
-            <a:r>
-              <a:rPr lang="en-US"/>
-              <a:t>Click to edit Master text styles</a:t>
-            </a:r>
-          </a:p>
-          <a:p>
-            <a:pPr lvl="1"/>
-            <a:r>
-              <a:rPr lang="en-US"/>
-              <a:t>Second level</a:t>
-            </a:r>
-          </a:p>
-          <a:p>
-            <a:pPr lvl="2"/>
-            <a:r>
-              <a:rPr lang="en-US"/>
-              <a:t>Third level</a:t>
-            </a:r>
-          </a:p>
-          <a:p>
-            <a:pPr lvl="3"/>
-            <a:r>
-              <a:rPr lang="en-US"/>
-              <a:t>Fourth level</a:t>
-            </a:r>
-          </a:p>
-          <a:p>
-            <a:pPr lvl="4"/>
-            <a:r>
-              <a:rPr lang="en-US"/>
-              <a:t>Fifth level</a:t>
-            </a:r>
-          </a:p>
-        </p:txBody>
-      </p:sp>
-      <p:sp>
-        <p:nvSpPr>
-          <p:cNvPr id="6" name="Footer Placeholder 5"/>
-          <p:cNvSpPr>
-            <a:spLocks noGrp="1"/>
-          </p:cNvSpPr>
-          <p:nvPr>
-            <p:ph type="ftr" sz="quarter" idx="4"/>
-          </p:nvPr>
-        </p:nvSpPr>
-        <p:spPr>
-          <a:xfrm>
-            <a:off x="0" y="8685213"/>
-            <a:ext cx="2971800" cy="458787"/>
-          </a:xfrm>
-          <a:prstGeom prst="rect">
-            <a:avLst/>
-          </a:prstGeom>
-        </p:spPr>
-        <p:txBody>
-          <a:bodyPr vert="horz" lIns="91440" tIns="45720" rIns="91440" bIns="45720" rtlCol="0" anchor="b"/>
-          <a:lstStyle>
-            <a:lvl1pPr algn="l">
-              <a:defRPr sz="1200"/>
-            </a:lvl1pPr>
-          </a:lstStyle>
-          <a:p>
-            <a:endParaRPr lang="en-US"/>
-          </a:p>
-        </p:txBody>
-      </p:sp>
-      <p:sp>
-        <p:nvSpPr>
-          <p:cNvPr id="7" name="Slide Number Placeholder 6"/>
-          <p:cNvSpPr>
-            <a:spLocks noGrp="1"/>
-          </p:cNvSpPr>
-          <p:nvPr>
-            <p:ph type="sldNum" sz="quarter" idx="5"/>
-          </p:nvPr>
-        </p:nvSpPr>
-        <p:spPr>
-          <a:xfrm>
-            <a:off x="3884613" y="8685213"/>
-            <a:ext cx="2971800" cy="458787"/>
-          </a:xfrm>
-          <a:prstGeom prst="rect">
-            <a:avLst/>
-          </a:prstGeom>
-        </p:spPr>
-        <p:txBody>
-          <a:bodyPr vert="horz" lIns="91440" tIns="45720" rIns="91440" bIns="45720" rtlCol="0" anchor="b"/>
-          <a:lstStyle>
-            <a:lvl1pPr algn="r">
-              <a:defRPr sz="1200"/>
-            </a:lvl1pPr>
-          </a:lstStyle>
-          <a:p>
-            <a:fld id="{CE5E9CC1-C706-0F49-92D6-E571CC5EEA8F}" type="slidenum">
-              <a:rPr lang="en-US"/>
-              <a:t>‹#›</a:t>
-            </a:fld>
-            <a:endParaRPr lang="en-US"/>
-          </a:p>
-        </p:txBody>
-      </p:sp>
     </p:spTree>
     <p:extLst>
       <p:ext uri="{BB962C8B-B14F-4D97-AF65-F5344CB8AC3E}">
-        <p14:creationId xmlns:p14="http://schemas.microsoft.com/office/powerpoint/2010/main" val="1024086991"/>
+        <p14:creationId xmlns:p14="http://schemas.microsoft.com/office/powerpoint/2010/main" val="2913311002"/>
       </p:ext>
     </p:extLst>
   </p:cSld>
@@ -512,7 +293,6 @@
               <a:rPr lang="en-US" dirty="0"/>
               <a:t>Title card. Subtitle deliberately names the four core artifact classes - the deck's first echo of the artifact-class table (slide 6). Optional footer: INSPECTA program context.</a:t>
             </a:r>
-            <a:endParaRPr lang="en-US" dirty="0"/>
           </a:p>
         </p:txBody>
       </p:sp>
@@ -603,7 +383,6 @@
 Subline payoffs: developer claims -&gt; scenes 5/7; untrusted tools -&gt; scene 7; LLM outputs -&gt; capstone slides A/B; cached verdicts -&gt; scene 11.
 Visual TODO: three-stage widening-scope progression (boot-time -&gt; layered runtime -&gt; lifecycle loop) to replace/join the bullets.</a:t>
             </a:r>
-            <a:endParaRPr lang="en-US" dirty="0"/>
           </a:p>
         </p:txBody>
       </p:sp>
@@ -692,7 +471,6 @@
               <a:t>~15 seconds on first appearance; afterwards it rides on transition slides for free.
 Design decision: one master/layout holds the strip text so a section rename is a single edit. Header titles are provisional.</a:t>
             </a:r>
-            <a:endParaRPr lang="en-US" dirty="0"/>
           </a:p>
         </p:txBody>
       </p:sp>
@@ -783,7 +561,6 @@
 Snippet source: tests/fixtures/isolette_sysmlv2_rust_props/term.json, rendered in concrete syntax (branches flattened, target IDs shortened to file names - cosmetic).
 The verus-tier measure-then-use phrase is deliberately held back for scene 7's reveal.</a:t>
             </a:r>
-            <a:endParaRPr lang="en-US" dirty="0"/>
           </a:p>
         </p:txBody>
       </p:sp>
@@ -875,7 +652,6 @@
 Speaker-note-only details (cut from the slide): on_pass/on_fail dispatch mechanics, success-driven handoff for component-wise entries, max_attempts per rung.
 The legend earns its space: every scene's checklist frames render through these glyphs.</a:t>
             </a:r>
-            <a:endParaRPr lang="en-US" dirty="0"/>
           </a:p>
         </p:txBody>
       </p:sp>
@@ -966,7 +742,6 @@
 Predicate and restart-episode are deliberately OFF this slide (parked; placement TBD - possibly an 'evaluation primitives' strip). If asked: a predicate is the judge (one evaluation = one attestation episode), restart-episode is the freshness primitive (forget memoized verdicts, reset, re-evaluate).
 Also deliberately excluded (README-level detail): partition mechanics, component-wise entries and success handoff, dispatch latching, max_cycles.</a:t>
             </a:r>
-            <a:endParaRPr lang="en-US" dirty="0"/>
           </a:p>
         </p:txBody>
       </p:sp>
@@ -1056,7 +831,6 @@
 Spoken hook (never on-slide text): 'This table is deliberately incomplete - the demo will show why.' The cheat / sysproof / gensrc tiers are capstone slide C's punchline: attacks forced them into existence. Do not pre-introduce them here.
 Same column shape (class -&gt; measured how -&gt; judged by -&gt; repair) as capstone slide B, so the audience recognizes it when it returns.</a:t>
             </a:r>
-            <a:endParaRPr lang="en-US" dirty="0"/>
           </a:p>
         </p:txBody>
       </p:sp>
@@ -1148,7 +922,6 @@
 Held back on purpose (scene 9's reveal): cheat-tier depth stats - 86 blessed external_body sites, 10 scanned crates.
 Numbers verified exact 2026-08-25 (l1a targets, l2 slices, verus term, pub-proof-fn count); provision-dependent - re-verify before recording day.</a:t>
             </a:r>
-            <a:endParaRPr lang="en-US" dirty="0"/>
           </a:p>
         </p:txBody>
       </p:sp>
@@ -1237,7 +1010,6 @@
               <a:t>Collection point for every reference in the deck - keep this slide current as sections are added (isolette slide carries the K-State + AR-08-32 citations inline; Copland/Verus/seL4 seeded here ahead of their sections).
 DOIs on record in docs/video_slide_drafts.md.</a:t>
             </a:r>
-            <a:endParaRPr lang="en-US" dirty="0"/>
           </a:p>
         </p:txBody>
       </p:sp>
@@ -1310,6 +1082,11 @@
 <file path=ppt/slideMasters/slideMaster1.xml><?xml version="1.0" encoding="utf-8"?>
 <p:sldMaster xmlns:a="http://schemas.openxmlformats.org/drawingml/2006/main" xmlns:r="http://schemas.openxmlformats.org/officeDocument/2006/relationships" xmlns:p="http://schemas.openxmlformats.org/presentationml/2006/main">
   <p:cSld>
+    <p:bg>
+      <p:bgRef idx="1001">
+        <a:schemeClr val="bg1"/>
+      </p:bgRef>
+    </p:bg>
     <p:spTree>
       <p:nvGrpSpPr>
         <p:cNvPr id="1" name=""/>
@@ -1592,6 +1369,7 @@
         <a:solidFill>
           <a:srgbClr val="1E2761"/>
         </a:solidFill>
+        <a:effectLst/>
       </p:bgPr>
     </p:bg>
     <p:spTree>
@@ -1629,7 +1407,7 @@
           <a:bodyPr wrap="square" lIns="0" tIns="0" rIns="0" bIns="0" rtlCol="0" anchor="ctr"/>
           <a:lstStyle/>
           <a:p>
-            <a:pPr algn="l" indent="0" marL="0">
+            <a:pPr marL="0" indent="0" algn="l">
               <a:buNone/>
             </a:pPr>
             <a:r>
@@ -1668,7 +1446,7 @@
           <a:bodyPr wrap="square" lIns="0" tIns="0" rIns="0" bIns="0" rtlCol="0" anchor="ctr"/>
           <a:lstStyle/>
           <a:p>
-            <a:pPr algn="l" indent="0" marL="0">
+            <a:pPr marL="0" indent="0" algn="l">
               <a:buNone/>
             </a:pPr>
             <a:r>
@@ -1707,7 +1485,7 @@
           <a:bodyPr wrap="square" lIns="0" tIns="0" rIns="0" bIns="0" rtlCol="0" anchor="ctr"/>
           <a:lstStyle/>
           <a:p>
-            <a:pPr algn="l" indent="0" marL="0">
+            <a:pPr marL="0" indent="0" algn="l">
               <a:buNone/>
             </a:pPr>
             <a:r>
@@ -1741,6 +1519,7 @@
         <a:solidFill>
           <a:srgbClr val="FFFFFF"/>
         </a:solidFill>
+        <a:effectLst/>
       </p:bgPr>
     </p:bg>
     <p:spTree>
@@ -1778,7 +1557,7 @@
           <a:bodyPr wrap="square" lIns="0" tIns="0" rIns="0" bIns="0" rtlCol="0" anchor="ctr"/>
           <a:lstStyle/>
           <a:p>
-            <a:pPr indent="0" marL="0">
+            <a:pPr marL="0" indent="0">
               <a:buNone/>
             </a:pPr>
             <a:r>
@@ -1817,7 +1596,7 @@
           <a:bodyPr wrap="square" lIns="0" tIns="0" rIns="0" bIns="0" rtlCol="0" anchor="t"/>
           <a:lstStyle/>
           <a:p>
-            <a:pPr algn="l" marL="342900" indent="-342900">
+            <a:pPr marL="342900" indent="-342900" algn="l">
               <a:buSzPct val="100000"/>
               <a:buChar char="•"/>
             </a:pPr>
@@ -1830,13 +1609,10 @@
                 <a:ea typeface="Calibri" pitchFamily="34" charset="-122"/>
                 <a:cs typeface="Calibri" pitchFamily="34" charset="-120"/>
               </a:rPr>
-              <a:t>Traditional remote attestation: </a:t>
-            </a:r>
-            <a:pPr algn="l" indent="0" marL="0">
-              <a:buNone/>
-            </a:pPr>
-            <a:r>
-              <a:rPr lang="en-US" sz="1700" b="1" dirty="0">
+              <a:t>Traditional remote attestation: did system components boot into a predictable state?</a:t>
+            </a:r>
+            <a:r>
+              <a:rPr lang="en-US" sz="1700" dirty="0">
                 <a:solidFill>
                   <a:srgbClr val="212121"/>
                 </a:solidFill>
@@ -1844,29 +1620,12 @@
                 <a:ea typeface="Calibri" pitchFamily="34" charset="-122"/>
                 <a:cs typeface="Calibri" pitchFamily="34" charset="-120"/>
               </a:rPr>
-              <a:t>did system components boot into a predictable state?</a:t>
-            </a:r>
-            <a:pPr algn="l" indent="0" marL="0">
-              <a:spcAft>
-                <a:spcPts val="1000"/>
-              </a:spcAft>
-              <a:buNone/>
-            </a:pPr>
-            <a:r>
-              <a:rPr lang="en-US" sz="1700" dirty="0">
-                <a:solidFill>
-                  <a:srgbClr val="212121"/>
-                </a:solidFill>
-                <a:latin typeface="Calibri" pitchFamily="34" charset="0"/>
-                <a:ea typeface="Calibri" pitchFamily="34" charset="-122"/>
-                <a:cs typeface="Calibri" pitchFamily="34" charset="-120"/>
-              </a:rPr>
               <a:t> (boot-time, static runtime)</a:t>
             </a:r>
             <a:endParaRPr lang="en-US" sz="1700" dirty="0"/>
           </a:p>
           <a:p>
-            <a:pPr algn="l" marL="342900" indent="-342900">
+            <a:pPr marL="342900" indent="-342900" algn="l">
               <a:buSzPct val="100000"/>
               <a:buChar char="•"/>
             </a:pPr>
@@ -1881,9 +1640,6 @@
               </a:rPr>
               <a:t>Layered, runtime attestation: </a:t>
             </a:r>
-            <a:pPr algn="l" indent="0" marL="0">
-              <a:buNone/>
-            </a:pPr>
             <a:r>
               <a:rPr lang="en-US" sz="1700" dirty="0">
                 <a:solidFill>
@@ -1895,12 +1651,6 @@
               </a:rPr>
               <a:t>extend boot-time trust via dynamic measurement of system components </a:t>
             </a:r>
-            <a:pPr algn="l" indent="0" marL="0">
-              <a:spcAft>
-                <a:spcPts val="1000"/>
-              </a:spcAft>
-              <a:buNone/>
-            </a:pPr>
             <a:r>
               <a:rPr lang="en-US" sz="1700" b="1" dirty="0">
                 <a:solidFill>
@@ -1915,7 +1665,7 @@
             <a:endParaRPr lang="en-US" sz="1700" dirty="0"/>
           </a:p>
           <a:p>
-            <a:pPr algn="l" marL="342900" indent="-342900">
+            <a:pPr marL="342900" indent="-342900" algn="l">
               <a:buSzPct val="100000"/>
               <a:buChar char="•"/>
             </a:pPr>
@@ -1930,9 +1680,6 @@
               </a:rPr>
               <a:t>Lifecycle attestation: </a:t>
             </a:r>
-            <a:pPr algn="l" indent="0" marL="0">
-              <a:buNone/>
-            </a:pPr>
             <a:r>
               <a:rPr lang="en-US" sz="1700" dirty="0">
                 <a:solidFill>
@@ -1944,9 +1691,6 @@
               </a:rPr>
               <a:t>extends this notion to </a:t>
             </a:r>
-            <a:pPr algn="l" indent="0" marL="0">
-              <a:buNone/>
-            </a:pPr>
             <a:r>
               <a:rPr lang="en-US" sz="1700" b="1" dirty="0">
                 <a:solidFill>
@@ -1958,12 +1702,6 @@
               </a:rPr>
               <a:t>artifacts of the development lifecycle</a:t>
             </a:r>
-            <a:pPr algn="l" indent="0" marL="0">
-              <a:spcAft>
-                <a:spcPts val="1000"/>
-              </a:spcAft>
-              <a:buNone/>
-            </a:pPr>
             <a:r>
               <a:rPr lang="en-US" sz="1700" dirty="0">
                 <a:solidFill>
@@ -1978,7 +1716,7 @@
             <a:endParaRPr lang="en-US" sz="1700" dirty="0"/>
           </a:p>
           <a:p>
-            <a:pPr algn="l" lvl="1" marL="685800" indent="-342900">
+            <a:pPr marL="685800" lvl="1" indent="-342900" algn="l">
               <a:spcAft>
                 <a:spcPts val="1000"/>
               </a:spcAft>
@@ -1999,7 +1737,7 @@
             <a:endParaRPr lang="en-US" sz="1700" dirty="0"/>
           </a:p>
           <a:p>
-            <a:pPr algn="l" lvl="1" marL="685800" indent="-342900">
+            <a:pPr marL="685800" lvl="1" indent="-342900" algn="l">
               <a:buSzPct val="100000"/>
               <a:buChar char="–"/>
             </a:pPr>
@@ -2014,9 +1752,6 @@
               </a:rPr>
               <a:t>…and to lifecycle </a:t>
             </a:r>
-            <a:pPr algn="l" indent="0" marL="0">
-              <a:buNone/>
-            </a:pPr>
             <a:r>
               <a:rPr lang="en-US" sz="1700" b="1" dirty="0">
                 <a:solidFill>
@@ -2028,12 +1763,6 @@
               </a:rPr>
               <a:t>events</a:t>
             </a:r>
-            <a:pPr algn="l" indent="0" marL="0">
-              <a:spcAft>
-                <a:spcPts val="1000"/>
-              </a:spcAft>
-              <a:buNone/>
-            </a:pPr>
             <a:r>
               <a:rPr lang="en-US" sz="1700" dirty="0">
                 <a:solidFill>
@@ -2048,7 +1777,7 @@
             <a:endParaRPr lang="en-US" sz="1700" dirty="0"/>
           </a:p>
           <a:p>
-            <a:pPr algn="l" lvl="2" marL="1028700" indent="-342900">
+            <a:pPr marL="1028700" lvl="2" indent="-342900" algn="l">
               <a:spcAft>
                 <a:spcPts val="200"/>
               </a:spcAft>
@@ -2069,7 +1798,7 @@
             <a:endParaRPr lang="en-US" sz="1700" dirty="0"/>
           </a:p>
           <a:p>
-            <a:pPr algn="l" lvl="2" marL="1028700" indent="-342900">
+            <a:pPr marL="1028700" lvl="2" indent="-342900" algn="l">
               <a:spcAft>
                 <a:spcPts val="200"/>
               </a:spcAft>
@@ -2090,7 +1819,7 @@
             <a:endParaRPr lang="en-US" sz="1700" dirty="0"/>
           </a:p>
           <a:p>
-            <a:pPr algn="l" lvl="2" marL="1028700" indent="-342900">
+            <a:pPr marL="1028700" lvl="2" indent="-342900" algn="l">
               <a:spcAft>
                 <a:spcPts val="200"/>
               </a:spcAft>
@@ -2111,7 +1840,7 @@
             <a:endParaRPr lang="en-US" sz="1700" dirty="0"/>
           </a:p>
           <a:p>
-            <a:pPr algn="l" lvl="2" marL="1028700" indent="-342900">
+            <a:pPr marL="1028700" lvl="2" indent="-342900" algn="l">
               <a:spcAft>
                 <a:spcPts val="200"/>
               </a:spcAft>
@@ -2132,7 +1861,7 @@
             <a:endParaRPr lang="en-US" sz="1700" dirty="0"/>
           </a:p>
           <a:p>
-            <a:pPr algn="l" marL="342900" indent="-342900">
+            <a:pPr marL="342900" indent="-342900" algn="l">
               <a:buSzPct val="100000"/>
               <a:buChar char="•"/>
             </a:pPr>
@@ -2147,9 +1876,6 @@
               </a:rPr>
               <a:t>Motivation: </a:t>
             </a:r>
-            <a:pPr algn="l" indent="0" marL="0">
-              <a:buNone/>
-            </a:pPr>
             <a:r>
               <a:rPr lang="en-US" sz="1700" dirty="0">
                 <a:solidFill>
@@ -2161,9 +1887,6 @@
               </a:rPr>
               <a:t>the </a:t>
             </a:r>
-            <a:pPr algn="l" indent="0" marL="0">
-              <a:buNone/>
-            </a:pPr>
             <a:r>
               <a:rPr lang="en-US" sz="1700" b="1" dirty="0">
                 <a:solidFill>
@@ -2175,12 +1898,6 @@
               </a:rPr>
               <a:t>proliferation of AI-generated software artifacts</a:t>
             </a:r>
-            <a:pPr algn="l" indent="0" marL="0">
-              <a:spcAft>
-                <a:spcPts val="1000"/>
-              </a:spcAft>
-              <a:buNone/>
-            </a:pPr>
             <a:r>
               <a:rPr lang="en-US" sz="1700" dirty="0">
                 <a:solidFill>
@@ -2217,6 +1934,13 @@
           </a:solidFill>
           <a:ln/>
         </p:spPr>
+        <p:txBody>
+          <a:bodyPr/>
+          <a:lstStyle/>
+          <a:p>
+            <a:endParaRPr lang="en-US"/>
+          </a:p>
+        </p:txBody>
       </p:sp>
       <p:sp>
         <p:nvSpPr>
@@ -2239,7 +1963,7 @@
           <a:bodyPr wrap="square" lIns="0" tIns="0" rIns="0" bIns="0" rtlCol="0" anchor="ctr"/>
           <a:lstStyle/>
           <a:p>
-            <a:pPr algn="ctr" indent="0" marL="0">
+            <a:pPr marL="0" indent="0" algn="ctr">
               <a:spcAft>
                 <a:spcPts val="400"/>
               </a:spcAft>
@@ -2259,7 +1983,7 @@
             <a:endParaRPr lang="en-US" sz="2000" dirty="0"/>
           </a:p>
           <a:p>
-            <a:pPr algn="ctr" indent="0" marL="0">
+            <a:pPr marL="0" indent="0" algn="ctr">
               <a:buNone/>
             </a:pPr>
             <a:r>
@@ -2293,6 +2017,7 @@
         <a:solidFill>
           <a:srgbClr val="FFFFFF"/>
         </a:solidFill>
+        <a:effectLst/>
       </p:bgPr>
     </p:bg>
     <p:spTree>
@@ -2330,7 +2055,7 @@
           <a:bodyPr wrap="square" lIns="0" tIns="0" rIns="0" bIns="0" rtlCol="0" anchor="ctr"/>
           <a:lstStyle/>
           <a:p>
-            <a:pPr indent="0" marL="0">
+            <a:pPr marL="0" indent="0">
               <a:buNone/>
             </a:pPr>
             <a:r>
@@ -2369,6 +2094,13 @@
           </a:solidFill>
           <a:ln/>
         </p:spPr>
+        <p:txBody>
+          <a:bodyPr/>
+          <a:lstStyle/>
+          <a:p>
+            <a:endParaRPr lang="en-US"/>
+          </a:p>
+        </p:txBody>
       </p:sp>
       <p:sp>
         <p:nvSpPr>
@@ -2391,7 +2123,7 @@
           <a:bodyPr wrap="square" lIns="254" tIns="254" rIns="254" bIns="254" rtlCol="0" anchor="ctr"/>
           <a:lstStyle/>
           <a:p>
-            <a:pPr algn="ctr" indent="0" marL="0">
+            <a:pPr marL="0" indent="0" algn="ctr">
               <a:buNone/>
             </a:pPr>
             <a:r>
@@ -2430,7 +2162,7 @@
           <a:bodyPr wrap="square" lIns="0" tIns="0" rIns="0" bIns="0" rtlCol="0" anchor="ctr"/>
           <a:lstStyle/>
           <a:p>
-            <a:pPr algn="ctr" indent="0" marL="0">
+            <a:pPr marL="0" indent="0" algn="ctr">
               <a:buNone/>
             </a:pPr>
             <a:r>
@@ -2469,6 +2201,13 @@
           </a:solidFill>
           <a:ln/>
         </p:spPr>
+        <p:txBody>
+          <a:bodyPr/>
+          <a:lstStyle/>
+          <a:p>
+            <a:endParaRPr lang="en-US"/>
+          </a:p>
+        </p:txBody>
       </p:sp>
       <p:sp>
         <p:nvSpPr>
@@ -2491,7 +2230,7 @@
           <a:bodyPr wrap="square" lIns="254" tIns="254" rIns="254" bIns="254" rtlCol="0" anchor="ctr"/>
           <a:lstStyle/>
           <a:p>
-            <a:pPr algn="ctr" indent="0" marL="0">
+            <a:pPr marL="0" indent="0" algn="ctr">
               <a:buNone/>
             </a:pPr>
             <a:r>
@@ -2508,7 +2247,7 @@
             <a:endParaRPr lang="en-US" sz="1350" dirty="0"/>
           </a:p>
           <a:p>
-            <a:pPr algn="ctr" indent="0" marL="0">
+            <a:pPr marL="0" indent="0" algn="ctr">
               <a:buNone/>
             </a:pPr>
             <a:r>
@@ -2547,7 +2286,7 @@
           <a:bodyPr wrap="square" lIns="0" tIns="0" rIns="0" bIns="0" rtlCol="0" anchor="ctr"/>
           <a:lstStyle/>
           <a:p>
-            <a:pPr algn="ctr" indent="0" marL="0">
+            <a:pPr marL="0" indent="0" algn="ctr">
               <a:buNone/>
             </a:pPr>
             <a:r>
@@ -2586,6 +2325,13 @@
           </a:solidFill>
           <a:ln/>
         </p:spPr>
+        <p:txBody>
+          <a:bodyPr/>
+          <a:lstStyle/>
+          <a:p>
+            <a:endParaRPr lang="en-US"/>
+          </a:p>
+        </p:txBody>
       </p:sp>
       <p:sp>
         <p:nvSpPr>
@@ -2608,7 +2354,7 @@
           <a:bodyPr wrap="square" lIns="254" tIns="254" rIns="254" bIns="254" rtlCol="0" anchor="ctr"/>
           <a:lstStyle/>
           <a:p>
-            <a:pPr algn="ctr" indent="0" marL="0">
+            <a:pPr marL="0" indent="0" algn="ctr">
               <a:buNone/>
             </a:pPr>
             <a:r>
@@ -2647,7 +2393,7 @@
           <a:bodyPr wrap="square" lIns="0" tIns="0" rIns="0" bIns="0" rtlCol="0" anchor="ctr"/>
           <a:lstStyle/>
           <a:p>
-            <a:pPr algn="ctr" indent="0" marL="0">
+            <a:pPr marL="0" indent="0" algn="ctr">
               <a:buNone/>
             </a:pPr>
             <a:r>
@@ -2686,6 +2432,13 @@
           </a:solidFill>
           <a:ln/>
         </p:spPr>
+        <p:txBody>
+          <a:bodyPr/>
+          <a:lstStyle/>
+          <a:p>
+            <a:endParaRPr lang="en-US"/>
+          </a:p>
+        </p:txBody>
       </p:sp>
       <p:sp>
         <p:nvSpPr>
@@ -2708,7 +2461,7 @@
           <a:bodyPr wrap="square" lIns="254" tIns="254" rIns="254" bIns="254" rtlCol="0" anchor="ctr"/>
           <a:lstStyle/>
           <a:p>
-            <a:pPr algn="ctr" indent="0" marL="0">
+            <a:pPr marL="0" indent="0" algn="ctr">
               <a:buNone/>
             </a:pPr>
             <a:r>
@@ -2747,7 +2500,7 @@
           <a:bodyPr wrap="square" lIns="0" tIns="0" rIns="0" bIns="0" rtlCol="0" anchor="ctr"/>
           <a:lstStyle/>
           <a:p>
-            <a:pPr algn="ctr" indent="0" marL="0">
+            <a:pPr marL="0" indent="0" algn="ctr">
               <a:buNone/>
             </a:pPr>
             <a:r>
@@ -2786,6 +2539,13 @@
           </a:solidFill>
           <a:ln/>
         </p:spPr>
+        <p:txBody>
+          <a:bodyPr/>
+          <a:lstStyle/>
+          <a:p>
+            <a:endParaRPr lang="en-US"/>
+          </a:p>
+        </p:txBody>
       </p:sp>
       <p:sp>
         <p:nvSpPr>
@@ -2808,7 +2568,7 @@
           <a:bodyPr wrap="square" lIns="254" tIns="254" rIns="254" bIns="254" rtlCol="0" anchor="ctr"/>
           <a:lstStyle/>
           <a:p>
-            <a:pPr algn="ctr" indent="0" marL="0">
+            <a:pPr marL="0" indent="0" algn="ctr">
               <a:buNone/>
             </a:pPr>
             <a:r>
@@ -2847,7 +2607,7 @@
           <a:bodyPr wrap="square" lIns="0" tIns="0" rIns="0" bIns="0" rtlCol="0" anchor="ctr"/>
           <a:lstStyle/>
           <a:p>
-            <a:pPr indent="0" marL="0">
+            <a:pPr marL="0" indent="0">
               <a:buNone/>
             </a:pPr>
             <a:r>
@@ -2881,6 +2641,7 @@
         <a:solidFill>
           <a:srgbClr val="FFFFFF"/>
         </a:solidFill>
+        <a:effectLst/>
       </p:bgPr>
     </p:bg>
     <p:spTree>
@@ -2918,7 +2679,7 @@
           <a:bodyPr wrap="square" lIns="0" tIns="0" rIns="0" bIns="0" rtlCol="0" anchor="ctr"/>
           <a:lstStyle/>
           <a:p>
-            <a:pPr indent="0" marL="0">
+            <a:pPr marL="0" indent="0">
               <a:buNone/>
             </a:pPr>
             <a:r>
@@ -2957,6 +2718,13 @@
           </a:solidFill>
           <a:ln/>
         </p:spPr>
+        <p:txBody>
+          <a:bodyPr/>
+          <a:lstStyle/>
+          <a:p>
+            <a:endParaRPr lang="en-US"/>
+          </a:p>
+        </p:txBody>
       </p:sp>
       <p:sp>
         <p:nvSpPr>
@@ -2979,7 +2747,7 @@
           <a:bodyPr wrap="square" lIns="0" tIns="0" rIns="0" bIns="0" rtlCol="0" anchor="ctr"/>
           <a:lstStyle/>
           <a:p>
-            <a:pPr algn="l" indent="0" marL="0">
+            <a:pPr marL="0" indent="0" algn="l">
               <a:spcAft>
                 <a:spcPts val="200"/>
               </a:spcAft>
@@ -2999,7 +2767,7 @@
             <a:endParaRPr lang="en-US" sz="1700" dirty="0"/>
           </a:p>
           <a:p>
-            <a:pPr algn="l" indent="0" marL="0">
+            <a:pPr marL="0" indent="0" algn="l">
               <a:buNone/>
             </a:pPr>
             <a:r>
@@ -3038,7 +2806,7 @@
           <a:bodyPr wrap="square" lIns="0" tIns="0" rIns="0" bIns="0" rtlCol="0" anchor="ctr"/>
           <a:lstStyle/>
           <a:p>
-            <a:pPr algn="ctr" indent="0" marL="0">
+            <a:pPr marL="0" indent="0" algn="ctr">
               <a:buNone/>
             </a:pPr>
             <a:r>
@@ -3074,6 +2842,13 @@
           </a:solidFill>
           <a:ln/>
         </p:spPr>
+        <p:txBody>
+          <a:bodyPr/>
+          <a:lstStyle/>
+          <a:p>
+            <a:endParaRPr lang="en-US"/>
+          </a:p>
+        </p:txBody>
       </p:sp>
       <p:sp>
         <p:nvSpPr>
@@ -3096,7 +2871,7 @@
           <a:bodyPr wrap="square" lIns="0" tIns="0" rIns="0" bIns="0" rtlCol="0" anchor="ctr"/>
           <a:lstStyle/>
           <a:p>
-            <a:pPr algn="l" indent="0" marL="0">
+            <a:pPr marL="0" indent="0" algn="l">
               <a:spcAft>
                 <a:spcPts val="200"/>
               </a:spcAft>
@@ -3116,7 +2891,7 @@
             <a:endParaRPr lang="en-US" sz="1700" dirty="0"/>
           </a:p>
           <a:p>
-            <a:pPr algn="l" indent="0" marL="0">
+            <a:pPr marL="0" indent="0" algn="l">
               <a:buNone/>
             </a:pPr>
             <a:r>
@@ -3155,7 +2930,7 @@
           <a:bodyPr wrap="square" lIns="0" tIns="0" rIns="0" bIns="0" rtlCol="0" anchor="ctr"/>
           <a:lstStyle/>
           <a:p>
-            <a:pPr algn="ctr" indent="0" marL="0">
+            <a:pPr marL="0" indent="0" algn="ctr">
               <a:buNone/>
             </a:pPr>
             <a:r>
@@ -3191,6 +2966,13 @@
           </a:solidFill>
           <a:ln/>
         </p:spPr>
+        <p:txBody>
+          <a:bodyPr/>
+          <a:lstStyle/>
+          <a:p>
+            <a:endParaRPr lang="en-US"/>
+          </a:p>
+        </p:txBody>
       </p:sp>
       <p:sp>
         <p:nvSpPr>
@@ -3213,7 +2995,7 @@
           <a:bodyPr wrap="square" lIns="0" tIns="0" rIns="0" bIns="0" rtlCol="0" anchor="ctr"/>
           <a:lstStyle/>
           <a:p>
-            <a:pPr algn="l" indent="0" marL="0">
+            <a:pPr marL="0" indent="0" algn="l">
               <a:spcAft>
                 <a:spcPts val="200"/>
               </a:spcAft>
@@ -3233,7 +3015,7 @@
             <a:endParaRPr lang="en-US" sz="1700" dirty="0"/>
           </a:p>
           <a:p>
-            <a:pPr algn="l" indent="0" marL="0">
+            <a:pPr marL="0" indent="0" algn="l">
               <a:buNone/>
             </a:pPr>
             <a:r>
@@ -3272,7 +3054,7 @@
           <a:bodyPr wrap="square" lIns="0" tIns="0" rIns="0" bIns="0" rtlCol="0" anchor="ctr"/>
           <a:lstStyle/>
           <a:p>
-            <a:pPr algn="ctr" indent="0" marL="0">
+            <a:pPr marL="0" indent="0" algn="ctr">
               <a:buNone/>
             </a:pPr>
             <a:r>
@@ -3308,6 +3090,13 @@
           </a:solidFill>
           <a:ln/>
         </p:spPr>
+        <p:txBody>
+          <a:bodyPr/>
+          <a:lstStyle/>
+          <a:p>
+            <a:endParaRPr lang="en-US"/>
+          </a:p>
+        </p:txBody>
       </p:sp>
       <p:sp>
         <p:nvSpPr>
@@ -3330,7 +3119,7 @@
           <a:bodyPr wrap="square" lIns="0" tIns="0" rIns="0" bIns="0" rtlCol="0" anchor="ctr"/>
           <a:lstStyle/>
           <a:p>
-            <a:pPr algn="l" indent="0" marL="0">
+            <a:pPr marL="0" indent="0" algn="l">
               <a:buNone/>
             </a:pPr>
             <a:r>
@@ -3344,9 +3133,6 @@
               </a:rPr>
               <a:t>signed evidence bundles</a:t>
             </a:r>
-            <a:pPr algn="l" indent="0" marL="0">
-              <a:buNone/>
-            </a:pPr>
             <a:r>
               <a:rPr lang="en-US" sz="1500" dirty="0">
                 <a:solidFill>
@@ -3358,9 +3144,6 @@
               </a:rPr>
               <a:t>, appraised against </a:t>
             </a:r>
-            <a:pPr algn="l" indent="0" marL="0">
-              <a:buNone/>
-            </a:pPr>
             <a:r>
               <a:rPr lang="en-US" sz="1500" b="1" dirty="0">
                 <a:solidFill>
@@ -3397,7 +3180,7 @@
           <a:bodyPr wrap="square" lIns="0" tIns="0" rIns="0" bIns="0" rtlCol="0" anchor="ctr"/>
           <a:lstStyle/>
           <a:p>
-            <a:pPr indent="0" marL="0">
+            <a:pPr marL="0" indent="0">
               <a:buNone/>
             </a:pPr>
             <a:r>
@@ -3441,6 +3224,13 @@
             <a:prstDash val="solid"/>
           </a:ln>
         </p:spPr>
+        <p:txBody>
+          <a:bodyPr/>
+          <a:lstStyle/>
+          <a:p>
+            <a:endParaRPr lang="en-US"/>
+          </a:p>
+        </p:txBody>
       </p:sp>
       <p:sp>
         <p:nvSpPr>
@@ -3463,7 +3253,7 @@
           <a:bodyPr wrap="square" lIns="0" tIns="0" rIns="0" bIns="0" rtlCol="0" anchor="ctr"/>
           <a:lstStyle/>
           <a:p>
-            <a:pPr algn="l" indent="0" marL="0">
+            <a:pPr marL="0" indent="0" algn="l">
               <a:buNone/>
             </a:pPr>
             <a:r>
@@ -3480,7 +3270,7 @@
             <a:endParaRPr lang="en-US" sz="1300" dirty="0"/>
           </a:p>
           <a:p>
-            <a:pPr algn="l" indent="0" marL="0">
+            <a:pPr marL="0" indent="0" algn="l">
               <a:buNone/>
             </a:pPr>
             <a:r>
@@ -3497,7 +3287,7 @@
             <a:endParaRPr lang="en-US" sz="1300" dirty="0"/>
           </a:p>
           <a:p>
-            <a:pPr algn="l" indent="0" marL="0">
+            <a:pPr marL="0" indent="0" algn="l">
               <a:buNone/>
             </a:pPr>
             <a:r>
@@ -3514,7 +3304,7 @@
             <a:endParaRPr lang="en-US" sz="1300" dirty="0"/>
           </a:p>
           <a:p>
-            <a:pPr algn="l" indent="0" marL="0">
+            <a:pPr marL="0" indent="0" algn="l">
               <a:buNone/>
             </a:pPr>
             <a:r>
@@ -3531,7 +3321,7 @@
             <a:endParaRPr lang="en-US" sz="1300" dirty="0"/>
           </a:p>
           <a:p>
-            <a:pPr algn="l" indent="0" marL="0">
+            <a:pPr marL="0" indent="0" algn="l">
               <a:buNone/>
             </a:pPr>
             <a:r>
@@ -3548,7 +3338,7 @@
             <a:endParaRPr lang="en-US" sz="1300" dirty="0"/>
           </a:p>
           <a:p>
-            <a:pPr algn="l" indent="0" marL="0">
+            <a:pPr marL="0" indent="0" algn="l">
               <a:buNone/>
             </a:pPr>
             <a:r>
@@ -3587,7 +3377,7 @@
           <a:bodyPr wrap="square" lIns="0" tIns="0" rIns="0" bIns="0" rtlCol="0" anchor="ctr"/>
           <a:lstStyle/>
           <a:p>
-            <a:pPr indent="0" marL="0">
+            <a:pPr marL="0" indent="0">
               <a:buNone/>
             </a:pPr>
             <a:r>
@@ -3604,7 +3394,7 @@
             <a:endParaRPr lang="en-US" sz="2000" dirty="0"/>
           </a:p>
           <a:p>
-            <a:pPr indent="0" marL="0">
+            <a:pPr marL="0" indent="0">
               <a:buNone/>
             </a:pPr>
             <a:r>
@@ -3621,7 +3411,7 @@
             <a:endParaRPr lang="en-US" sz="2000" dirty="0"/>
           </a:p>
           <a:p>
-            <a:pPr indent="0" marL="0">
+            <a:pPr marL="0" indent="0">
               <a:buNone/>
             </a:pPr>
             <a:r>
@@ -3655,6 +3445,7 @@
         <a:solidFill>
           <a:srgbClr val="FFFFFF"/>
         </a:solidFill>
+        <a:effectLst/>
       </p:bgPr>
     </p:bg>
     <p:spTree>
@@ -3692,7 +3483,7 @@
           <a:bodyPr wrap="square" lIns="0" tIns="0" rIns="0" bIns="0" rtlCol="0" anchor="ctr"/>
           <a:lstStyle/>
           <a:p>
-            <a:pPr indent="0" marL="0">
+            <a:pPr marL="0" indent="0">
               <a:buNone/>
             </a:pPr>
             <a:r>
@@ -3736,6 +3527,13 @@
             <a:prstDash val="dash"/>
           </a:ln>
         </p:spPr>
+        <p:txBody>
+          <a:bodyPr/>
+          <a:lstStyle/>
+          <a:p>
+            <a:endParaRPr lang="en-US"/>
+          </a:p>
+        </p:txBody>
       </p:sp>
       <p:sp>
         <p:nvSpPr>
@@ -3758,7 +3556,7 @@
           <a:bodyPr wrap="square" lIns="254" tIns="254" rIns="254" bIns="254" rtlCol="0" anchor="ctr"/>
           <a:lstStyle/>
           <a:p>
-            <a:pPr algn="ctr" indent="0" marL="0">
+            <a:pPr marL="0" indent="0" algn="ctr">
               <a:buNone/>
             </a:pPr>
             <a:r>
@@ -3775,7 +3573,7 @@
             <a:endParaRPr lang="en-US" sz="1150" dirty="0"/>
           </a:p>
           <a:p>
-            <a:pPr algn="ctr" indent="0" marL="0">
+            <a:pPr marL="0" indent="0" algn="ctr">
               <a:buNone/>
             </a:pPr>
             <a:r>
@@ -3816,6 +3614,13 @@
             <a:tailEnd type="triangle"/>
           </a:ln>
         </p:spPr>
+        <p:txBody>
+          <a:bodyPr/>
+          <a:lstStyle/>
+          <a:p>
+            <a:endParaRPr lang="en-US"/>
+          </a:p>
+        </p:txBody>
       </p:sp>
       <p:sp>
         <p:nvSpPr>
@@ -3838,7 +3643,7 @@
           <a:bodyPr wrap="square" lIns="0" tIns="0" rIns="0" bIns="0" rtlCol="0" anchor="ctr"/>
           <a:lstStyle/>
           <a:p>
-            <a:pPr algn="l" indent="0" marL="0">
+            <a:pPr marL="0" indent="0" algn="l">
               <a:buNone/>
             </a:pPr>
             <a:r>
@@ -3877,6 +3682,13 @@
           </a:solidFill>
           <a:ln/>
         </p:spPr>
+        <p:txBody>
+          <a:bodyPr/>
+          <a:lstStyle/>
+          <a:p>
+            <a:endParaRPr lang="en-US"/>
+          </a:p>
+        </p:txBody>
       </p:sp>
       <p:sp>
         <p:nvSpPr>
@@ -3899,7 +3711,7 @@
           <a:bodyPr wrap="square" lIns="381" tIns="381" rIns="381" bIns="381" rtlCol="0" anchor="ctr"/>
           <a:lstStyle/>
           <a:p>
-            <a:pPr algn="ctr" indent="0" marL="0">
+            <a:pPr marL="0" indent="0" algn="ctr">
               <a:buNone/>
             </a:pPr>
             <a:r>
@@ -3940,6 +3752,13 @@
             <a:tailEnd type="triangle"/>
           </a:ln>
         </p:spPr>
+        <p:txBody>
+          <a:bodyPr/>
+          <a:lstStyle/>
+          <a:p>
+            <a:endParaRPr lang="en-US"/>
+          </a:p>
+        </p:txBody>
       </p:sp>
       <p:sp>
         <p:nvSpPr>
@@ -3962,7 +3781,7 @@
           <a:bodyPr wrap="square" lIns="0" tIns="0" rIns="0" bIns="0" rtlCol="0" anchor="ctr"/>
           <a:lstStyle/>
           <a:p>
-            <a:pPr algn="l" indent="0" marL="0">
+            <a:pPr marL="0" indent="0" algn="l">
               <a:buNone/>
             </a:pPr>
             <a:r>
@@ -4001,6 +3820,13 @@
           </a:solidFill>
           <a:ln/>
         </p:spPr>
+        <p:txBody>
+          <a:bodyPr/>
+          <a:lstStyle/>
+          <a:p>
+            <a:endParaRPr lang="en-US"/>
+          </a:p>
+        </p:txBody>
       </p:sp>
       <p:sp>
         <p:nvSpPr>
@@ -4023,7 +3849,7 @@
           <a:bodyPr wrap="square" lIns="381" tIns="381" rIns="381" bIns="381" rtlCol="0" anchor="ctr"/>
           <a:lstStyle/>
           <a:p>
-            <a:pPr algn="ctr" indent="0" marL="0">
+            <a:pPr marL="0" indent="0" algn="ctr">
               <a:buNone/>
             </a:pPr>
             <a:r>
@@ -4062,6 +3888,13 @@
           </a:solidFill>
           <a:ln/>
         </p:spPr>
+        <p:txBody>
+          <a:bodyPr/>
+          <a:lstStyle/>
+          <a:p>
+            <a:endParaRPr lang="en-US"/>
+          </a:p>
+        </p:txBody>
       </p:sp>
       <p:sp>
         <p:nvSpPr>
@@ -4084,7 +3917,7 @@
           <a:bodyPr wrap="square" lIns="381" tIns="381" rIns="381" bIns="381" rtlCol="0" anchor="ctr"/>
           <a:lstStyle/>
           <a:p>
-            <a:pPr algn="ctr" indent="0" marL="0">
+            <a:pPr marL="0" indent="0" algn="ctr">
               <a:buNone/>
             </a:pPr>
             <a:r>
@@ -4123,6 +3956,13 @@
           </a:solidFill>
           <a:ln/>
         </p:spPr>
+        <p:txBody>
+          <a:bodyPr/>
+          <a:lstStyle/>
+          <a:p>
+            <a:endParaRPr lang="en-US"/>
+          </a:p>
+        </p:txBody>
       </p:sp>
       <p:sp>
         <p:nvSpPr>
@@ -4145,7 +3985,7 @@
           <a:bodyPr wrap="square" lIns="381" tIns="381" rIns="381" bIns="381" rtlCol="0" anchor="ctr"/>
           <a:lstStyle/>
           <a:p>
-            <a:pPr algn="ctr" indent="0" marL="0">
+            <a:pPr marL="0" indent="0" algn="ctr">
               <a:buNone/>
             </a:pPr>
             <a:r>
@@ -4186,6 +4026,13 @@
             <a:tailEnd type="triangle"/>
           </a:ln>
         </p:spPr>
+        <p:txBody>
+          <a:bodyPr/>
+          <a:lstStyle/>
+          <a:p>
+            <a:endParaRPr lang="en-US"/>
+          </a:p>
+        </p:txBody>
       </p:sp>
       <p:sp>
         <p:nvSpPr>
@@ -4209,6 +4056,13 @@
             <a:prstDash val="solid"/>
           </a:ln>
         </p:spPr>
+        <p:txBody>
+          <a:bodyPr/>
+          <a:lstStyle/>
+          <a:p>
+            <a:endParaRPr lang="en-US"/>
+          </a:p>
+        </p:txBody>
       </p:sp>
       <p:sp>
         <p:nvSpPr>
@@ -4232,6 +4086,13 @@
             <a:prstDash val="solid"/>
           </a:ln>
         </p:spPr>
+        <p:txBody>
+          <a:bodyPr/>
+          <a:lstStyle/>
+          <a:p>
+            <a:endParaRPr lang="en-US"/>
+          </a:p>
+        </p:txBody>
       </p:sp>
       <p:sp>
         <p:nvSpPr>
@@ -4256,6 +4117,13 @@
             <a:tailEnd type="triangle"/>
           </a:ln>
         </p:spPr>
+        <p:txBody>
+          <a:bodyPr/>
+          <a:lstStyle/>
+          <a:p>
+            <a:endParaRPr lang="en-US"/>
+          </a:p>
+        </p:txBody>
       </p:sp>
       <p:sp>
         <p:nvSpPr>
@@ -4278,7 +4146,7 @@
           <a:bodyPr wrap="square" lIns="0" tIns="0" rIns="0" bIns="0" rtlCol="0" anchor="ctr"/>
           <a:lstStyle/>
           <a:p>
-            <a:pPr algn="r" indent="0" marL="0">
+            <a:pPr marL="0" indent="0" algn="r">
               <a:buNone/>
             </a:pPr>
             <a:r>
@@ -4295,7 +4163,7 @@
             <a:endParaRPr lang="en-US" sz="1000" dirty="0"/>
           </a:p>
           <a:p>
-            <a:pPr algn="r" indent="0" marL="0">
+            <a:pPr marL="0" indent="0" algn="r">
               <a:buNone/>
             </a:pPr>
             <a:r>
@@ -4335,6 +4203,13 @@
             <a:prstDash val="solid"/>
           </a:ln>
         </p:spPr>
+        <p:txBody>
+          <a:bodyPr/>
+          <a:lstStyle/>
+          <a:p>
+            <a:endParaRPr lang="en-US"/>
+          </a:p>
+        </p:txBody>
       </p:sp>
       <p:sp>
         <p:nvSpPr>
@@ -4359,6 +4234,13 @@
             <a:tailEnd type="triangle"/>
           </a:ln>
         </p:spPr>
+        <p:txBody>
+          <a:bodyPr/>
+          <a:lstStyle/>
+          <a:p>
+            <a:endParaRPr lang="en-US"/>
+          </a:p>
+        </p:txBody>
       </p:sp>
       <p:sp>
         <p:nvSpPr>
@@ -4381,7 +4263,7 @@
           <a:bodyPr wrap="square" lIns="0" tIns="0" rIns="0" bIns="0" rtlCol="0" anchor="ctr"/>
           <a:lstStyle/>
           <a:p>
-            <a:pPr algn="ctr" indent="0" marL="0">
+            <a:pPr marL="0" indent="0" algn="ctr">
               <a:buNone/>
             </a:pPr>
             <a:r>
@@ -4420,6 +4302,13 @@
           </a:solidFill>
           <a:ln/>
         </p:spPr>
+        <p:txBody>
+          <a:bodyPr/>
+          <a:lstStyle/>
+          <a:p>
+            <a:endParaRPr lang="en-US"/>
+          </a:p>
+        </p:txBody>
       </p:sp>
       <p:sp>
         <p:nvSpPr>
@@ -4442,7 +4331,7 @@
           <a:bodyPr wrap="square" lIns="381" tIns="381" rIns="381" bIns="381" rtlCol="0" anchor="ctr"/>
           <a:lstStyle/>
           <a:p>
-            <a:pPr algn="ctr" indent="0" marL="0">
+            <a:pPr marL="0" indent="0" algn="ctr">
               <a:buNone/>
             </a:pPr>
             <a:r>
@@ -4459,7 +4348,7 @@
             <a:endParaRPr lang="en-US" sz="1200" dirty="0"/>
           </a:p>
           <a:p>
-            <a:pPr algn="ctr" indent="0" marL="0">
+            <a:pPr marL="0" indent="0" algn="ctr">
               <a:buNone/>
             </a:pPr>
             <a:r>
@@ -4500,6 +4389,13 @@
             <a:tailEnd type="triangle"/>
           </a:ln>
         </p:spPr>
+        <p:txBody>
+          <a:bodyPr/>
+          <a:lstStyle/>
+          <a:p>
+            <a:endParaRPr lang="en-US"/>
+          </a:p>
+        </p:txBody>
       </p:sp>
       <p:sp>
         <p:nvSpPr>
@@ -4522,7 +4418,7 @@
           <a:bodyPr wrap="square" lIns="0" tIns="0" rIns="0" bIns="0" rtlCol="0" anchor="ctr"/>
           <a:lstStyle/>
           <a:p>
-            <a:pPr algn="ctr" indent="0" marL="0">
+            <a:pPr marL="0" indent="0" algn="ctr">
               <a:buNone/>
             </a:pPr>
             <a:r>
@@ -4561,6 +4457,13 @@
           </a:solidFill>
           <a:ln/>
         </p:spPr>
+        <p:txBody>
+          <a:bodyPr/>
+          <a:lstStyle/>
+          <a:p>
+            <a:endParaRPr lang="en-US"/>
+          </a:p>
+        </p:txBody>
       </p:sp>
       <p:sp>
         <p:nvSpPr>
@@ -4583,7 +4486,7 @@
           <a:bodyPr wrap="square" lIns="381" tIns="381" rIns="381" bIns="381" rtlCol="0" anchor="ctr"/>
           <a:lstStyle/>
           <a:p>
-            <a:pPr algn="ctr" indent="0" marL="0">
+            <a:pPr marL="0" indent="0" algn="ctr">
               <a:buNone/>
             </a:pPr>
             <a:r>
@@ -4624,6 +4527,13 @@
             <a:tailEnd type="triangle"/>
           </a:ln>
         </p:spPr>
+        <p:txBody>
+          <a:bodyPr/>
+          <a:lstStyle/>
+          <a:p>
+            <a:endParaRPr lang="en-US"/>
+          </a:p>
+        </p:txBody>
       </p:sp>
       <p:sp>
         <p:nvSpPr>
@@ -4646,6 +4556,13 @@
           </a:solidFill>
           <a:ln/>
         </p:spPr>
+        <p:txBody>
+          <a:bodyPr/>
+          <a:lstStyle/>
+          <a:p>
+            <a:endParaRPr lang="en-US"/>
+          </a:p>
+        </p:txBody>
       </p:sp>
       <p:sp>
         <p:nvSpPr>
@@ -4668,7 +4585,7 @@
           <a:bodyPr wrap="square" lIns="381" tIns="381" rIns="381" bIns="381" rtlCol="0" anchor="ctr"/>
           <a:lstStyle/>
           <a:p>
-            <a:pPr algn="ctr" indent="0" marL="0">
+            <a:pPr marL="0" indent="0" algn="ctr">
               <a:buNone/>
             </a:pPr>
             <a:r>
@@ -4709,6 +4626,13 @@
             <a:tailEnd type="triangle"/>
           </a:ln>
         </p:spPr>
+        <p:txBody>
+          <a:bodyPr/>
+          <a:lstStyle/>
+          <a:p>
+            <a:endParaRPr lang="en-US"/>
+          </a:p>
+        </p:txBody>
       </p:sp>
       <p:sp>
         <p:nvSpPr>
@@ -4731,6 +4655,13 @@
           </a:solidFill>
           <a:ln/>
         </p:spPr>
+        <p:txBody>
+          <a:bodyPr/>
+          <a:lstStyle/>
+          <a:p>
+            <a:endParaRPr lang="en-US"/>
+          </a:p>
+        </p:txBody>
       </p:sp>
       <p:sp>
         <p:nvSpPr>
@@ -4753,7 +4684,7 @@
           <a:bodyPr wrap="square" lIns="381" tIns="381" rIns="381" bIns="381" rtlCol="0" anchor="ctr"/>
           <a:lstStyle/>
           <a:p>
-            <a:pPr algn="ctr" indent="0" marL="0">
+            <a:pPr marL="0" indent="0" algn="ctr">
               <a:buNone/>
             </a:pPr>
             <a:r>
@@ -4792,7 +4723,7 @@
           <a:bodyPr wrap="square" lIns="0" tIns="0" rIns="0" bIns="0" rtlCol="0" anchor="ctr"/>
           <a:lstStyle/>
           <a:p>
-            <a:pPr algn="ctr" indent="0" marL="0">
+            <a:pPr marL="0" indent="0" algn="ctr">
               <a:buNone/>
             </a:pPr>
             <a:r>
@@ -4832,6 +4763,13 @@
             <a:prstDash val="solid"/>
           </a:ln>
         </p:spPr>
+        <p:txBody>
+          <a:bodyPr/>
+          <a:lstStyle/>
+          <a:p>
+            <a:endParaRPr lang="en-US"/>
+          </a:p>
+        </p:txBody>
       </p:sp>
       <p:sp>
         <p:nvSpPr>
@@ -4855,6 +4793,13 @@
             <a:prstDash val="solid"/>
           </a:ln>
         </p:spPr>
+        <p:txBody>
+          <a:bodyPr/>
+          <a:lstStyle/>
+          <a:p>
+            <a:endParaRPr lang="en-US"/>
+          </a:p>
+        </p:txBody>
       </p:sp>
       <p:sp>
         <p:nvSpPr>
@@ -4878,6 +4823,13 @@
             <a:prstDash val="solid"/>
           </a:ln>
         </p:spPr>
+        <p:txBody>
+          <a:bodyPr/>
+          <a:lstStyle/>
+          <a:p>
+            <a:endParaRPr lang="en-US"/>
+          </a:p>
+        </p:txBody>
       </p:sp>
       <p:sp>
         <p:nvSpPr>
@@ -4901,6 +4853,13 @@
             <a:prstDash val="solid"/>
           </a:ln>
         </p:spPr>
+        <p:txBody>
+          <a:bodyPr/>
+          <a:lstStyle/>
+          <a:p>
+            <a:endParaRPr lang="en-US"/>
+          </a:p>
+        </p:txBody>
       </p:sp>
       <p:sp>
         <p:nvSpPr>
@@ -4925,6 +4884,13 @@
             <a:tailEnd type="triangle"/>
           </a:ln>
         </p:spPr>
+        <p:txBody>
+          <a:bodyPr/>
+          <a:lstStyle/>
+          <a:p>
+            <a:endParaRPr lang="en-US"/>
+          </a:p>
+        </p:txBody>
       </p:sp>
       <p:sp>
         <p:nvSpPr>
@@ -4947,7 +4913,7 @@
           <a:bodyPr wrap="square" lIns="0" tIns="0" rIns="0" bIns="0" rtlCol="0" anchor="ctr"/>
           <a:lstStyle/>
           <a:p>
-            <a:pPr algn="ctr" indent="0" marL="0">
+            <a:pPr marL="0" indent="0" algn="ctr">
               <a:buNone/>
             </a:pPr>
             <a:r>
@@ -4987,6 +4953,13 @@
             <a:prstDash val="solid"/>
           </a:ln>
         </p:spPr>
+        <p:txBody>
+          <a:bodyPr/>
+          <a:lstStyle/>
+          <a:p>
+            <a:endParaRPr lang="en-US"/>
+          </a:p>
+        </p:txBody>
       </p:sp>
       <p:sp>
         <p:nvSpPr>
@@ -5010,6 +4983,13 @@
             <a:prstDash val="solid"/>
           </a:ln>
         </p:spPr>
+        <p:txBody>
+          <a:bodyPr/>
+          <a:lstStyle/>
+          <a:p>
+            <a:endParaRPr lang="en-US"/>
+          </a:p>
+        </p:txBody>
       </p:sp>
       <p:sp>
         <p:nvSpPr>
@@ -5034,6 +5014,13 @@
             <a:tailEnd type="triangle"/>
           </a:ln>
         </p:spPr>
+        <p:txBody>
+          <a:bodyPr/>
+          <a:lstStyle/>
+          <a:p>
+            <a:endParaRPr lang="en-US"/>
+          </a:p>
+        </p:txBody>
       </p:sp>
       <p:sp>
         <p:nvSpPr>
@@ -5056,7 +5043,7 @@
           <a:bodyPr wrap="square" lIns="0" tIns="0" rIns="0" bIns="0" rtlCol="0" anchor="ctr"/>
           <a:lstStyle/>
           <a:p>
-            <a:pPr algn="ctr" indent="0" marL="0">
+            <a:pPr marL="0" indent="0" algn="ctr">
               <a:buNone/>
             </a:pPr>
             <a:r>
@@ -5096,6 +5083,13 @@
             <a:prstDash val="solid"/>
           </a:ln>
         </p:spPr>
+        <p:txBody>
+          <a:bodyPr/>
+          <a:lstStyle/>
+          <a:p>
+            <a:endParaRPr lang="en-US"/>
+          </a:p>
+        </p:txBody>
       </p:sp>
       <p:sp>
         <p:nvSpPr>
@@ -5119,6 +5113,13 @@
             <a:prstDash val="solid"/>
           </a:ln>
         </p:spPr>
+        <p:txBody>
+          <a:bodyPr/>
+          <a:lstStyle/>
+          <a:p>
+            <a:endParaRPr lang="en-US"/>
+          </a:p>
+        </p:txBody>
       </p:sp>
       <p:sp>
         <p:nvSpPr>
@@ -5143,6 +5144,13 @@
             <a:tailEnd type="triangle"/>
           </a:ln>
         </p:spPr>
+        <p:txBody>
+          <a:bodyPr/>
+          <a:lstStyle/>
+          <a:p>
+            <a:endParaRPr lang="en-US"/>
+          </a:p>
+        </p:txBody>
       </p:sp>
       <p:sp>
         <p:nvSpPr>
@@ -5165,7 +5173,7 @@
           <a:bodyPr wrap="square" lIns="0" tIns="0" rIns="0" bIns="0" rtlCol="0" anchor="ctr"/>
           <a:lstStyle/>
           <a:p>
-            <a:pPr algn="ctr" indent="0" marL="0">
+            <a:pPr marL="0" indent="0" algn="ctr">
               <a:buNone/>
             </a:pPr>
             <a:r>
@@ -5204,6 +5212,13 @@
           </a:solidFill>
           <a:ln/>
         </p:spPr>
+        <p:txBody>
+          <a:bodyPr/>
+          <a:lstStyle/>
+          <a:p>
+            <a:endParaRPr lang="en-US"/>
+          </a:p>
+        </p:txBody>
       </p:sp>
       <p:sp>
         <p:nvSpPr>
@@ -5226,7 +5241,7 @@
           <a:bodyPr wrap="square" lIns="0" tIns="0" rIns="0" bIns="0" rtlCol="0" anchor="ctr"/>
           <a:lstStyle/>
           <a:p>
-            <a:pPr algn="l" indent="0" marL="0">
+            <a:pPr marL="0" indent="0" algn="l">
               <a:buNone/>
             </a:pPr>
             <a:r>
@@ -5240,7 +5255,43 @@
               </a:rPr>
               <a:t>The repair ladder: </a:t>
             </a:r>
-            <a:pPr algn="l" indent="0" marL="0">
+            <a:r>
+              <a:rPr lang="en-US" sz="1300" dirty="0">
+                <a:solidFill>
+                  <a:srgbClr val="CADCFC"/>
+                </a:solidFill>
+                <a:latin typeface="Calibri" pitchFamily="34" charset="0"/>
+                <a:ea typeface="Calibri" pitchFamily="34" charset="-122"/>
+                <a:cs typeface="Calibri" pitchFamily="34" charset="-120"/>
+              </a:rPr>
+              <a:t>a rung's exhaustion is a </a:t>
+            </a:r>
+            <a:r>
+              <a:rPr lang="en-US" sz="1300" b="1" i="1" dirty="0">
+                <a:solidFill>
+                  <a:srgbClr val="CADCFC"/>
+                </a:solidFill>
+                <a:latin typeface="Calibri" pitchFamily="34" charset="0"/>
+                <a:ea typeface="Calibri" pitchFamily="34" charset="-122"/>
+                <a:cs typeface="Calibri" pitchFamily="34" charset="-120"/>
+              </a:rPr>
+              <a:t>local diagnosis </a:t>
+            </a:r>
+            <a:r>
+              <a:rPr lang="en-US" sz="1300" dirty="0">
+                <a:solidFill>
+                  <a:srgbClr val="CADCFC"/>
+                </a:solidFill>
+                <a:latin typeface="Calibri" pitchFamily="34" charset="0"/>
+                <a:ea typeface="Calibri" pitchFamily="34" charset="-122"/>
+                <a:cs typeface="Calibri" pitchFamily="34" charset="-120"/>
+              </a:rPr>
+              <a:t>of failure— every repair is </a:t>
+            </a:r>
+            <a:endParaRPr lang="en-US" sz="1300" dirty="0"/>
+          </a:p>
+          <a:p>
+            <a:pPr marL="0" indent="0" algn="l">
               <a:buNone/>
             </a:pPr>
             <a:r>
@@ -5252,11 +5303,8 @@
                 <a:ea typeface="Calibri" pitchFamily="34" charset="-122"/>
                 <a:cs typeface="Calibri" pitchFamily="34" charset="-120"/>
               </a:rPr>
-              <a:t>a rung's exhaustion is a </a:t>
-            </a:r>
-            <a:pPr algn="l" indent="0" marL="0">
-              <a:buNone/>
-            </a:pPr>
+              <a:t>judged only by </a:t>
+            </a:r>
             <a:r>
               <a:rPr lang="en-US" sz="1300" b="1" i="1" dirty="0">
                 <a:solidFill>
@@ -5266,56 +5314,8 @@
                 <a:ea typeface="Calibri" pitchFamily="34" charset="-122"/>
                 <a:cs typeface="Calibri" pitchFamily="34" charset="-120"/>
               </a:rPr>
-              <a:t>local diagnosis </a:t>
-            </a:r>
-            <a:pPr algn="l" indent="0" marL="0">
-              <a:buNone/>
-            </a:pPr>
-            <a:r>
-              <a:rPr lang="en-US" sz="1300" dirty="0">
-                <a:solidFill>
-                  <a:srgbClr val="CADCFC"/>
-                </a:solidFill>
-                <a:latin typeface="Calibri" pitchFamily="34" charset="0"/>
-                <a:ea typeface="Calibri" pitchFamily="34" charset="-122"/>
-                <a:cs typeface="Calibri" pitchFamily="34" charset="-120"/>
-              </a:rPr>
-              <a:t>of failure— every repair is </a:t>
-            </a:r>
-            <a:endParaRPr lang="en-US" sz="1300" dirty="0"/>
-          </a:p>
-          <a:p>
-            <a:pPr algn="l" indent="0" marL="0">
-              <a:buNone/>
-            </a:pPr>
-            <a:r>
-              <a:rPr lang="en-US" sz="1300" dirty="0">
-                <a:solidFill>
-                  <a:srgbClr val="CADCFC"/>
-                </a:solidFill>
-                <a:latin typeface="Calibri" pitchFamily="34" charset="0"/>
-                <a:ea typeface="Calibri" pitchFamily="34" charset="-122"/>
-                <a:cs typeface="Calibri" pitchFamily="34" charset="-120"/>
-              </a:rPr>
-              <a:t>judged only by </a:t>
-            </a:r>
-            <a:pPr algn="l" indent="0" marL="0">
-              <a:buNone/>
-            </a:pPr>
-            <a:r>
-              <a:rPr lang="en-US" sz="1300" b="1" i="1" dirty="0">
-                <a:solidFill>
-                  <a:srgbClr val="CADCFC"/>
-                </a:solidFill>
-                <a:latin typeface="Calibri" pitchFamily="34" charset="0"/>
-                <a:ea typeface="Calibri" pitchFamily="34" charset="-122"/>
-                <a:cs typeface="Calibri" pitchFamily="34" charset="-120"/>
-              </a:rPr>
               <a:t>fresh re-measurement</a:t>
             </a:r>
-            <a:pPr algn="l" indent="0" marL="0">
-              <a:buNone/>
-            </a:pPr>
             <a:r>
               <a:rPr lang="en-US" sz="1300" dirty="0">
                 <a:solidFill>
@@ -5357,6 +5357,13 @@
             <a:prstDash val="solid"/>
           </a:ln>
         </p:spPr>
+        <p:txBody>
+          <a:bodyPr/>
+          <a:lstStyle/>
+          <a:p>
+            <a:endParaRPr lang="en-US"/>
+          </a:p>
+        </p:txBody>
       </p:sp>
       <p:sp>
         <p:nvSpPr>
@@ -5379,7 +5386,7 @@
           <a:bodyPr wrap="square" lIns="0" tIns="0" rIns="0" bIns="0" rtlCol="0" anchor="ctr"/>
           <a:lstStyle/>
           <a:p>
-            <a:pPr algn="l" indent="0" marL="0">
+            <a:pPr marL="0" indent="0" algn="l">
               <a:buNone/>
             </a:pPr>
             <a:r>
@@ -5396,7 +5403,7 @@
             <a:endParaRPr lang="en-US" sz="1100" dirty="0"/>
           </a:p>
           <a:p>
-            <a:pPr algn="l" indent="0" marL="0">
+            <a:pPr marL="0" indent="0" algn="l">
               <a:buNone/>
             </a:pPr>
             <a:r>
@@ -5430,6 +5437,7 @@
         <a:solidFill>
           <a:srgbClr val="FFFFFF"/>
         </a:solidFill>
+        <a:effectLst/>
       </p:bgPr>
     </p:bg>
     <p:spTree>
@@ -5467,7 +5475,7 @@
           <a:bodyPr wrap="square" lIns="0" tIns="0" rIns="0" bIns="0" rtlCol="0" anchor="ctr"/>
           <a:lstStyle/>
           <a:p>
-            <a:pPr indent="0" marL="0">
+            <a:pPr marL="0" indent="0">
               <a:buNone/>
             </a:pPr>
             <a:r>
@@ -5506,7 +5514,7 @@
           <a:bodyPr wrap="square" lIns="0" tIns="0" rIns="0" bIns="0" rtlCol="0" anchor="t"/>
           <a:lstStyle/>
           <a:p>
-            <a:pPr algn="l" marL="342900" indent="-342900">
+            <a:pPr marL="342900" indent="-342900" algn="l">
               <a:buSzPct val="100000"/>
               <a:buChar char="•"/>
             </a:pPr>
@@ -5521,12 +5529,6 @@
               </a:rPr>
               <a:t>Blackboard</a:t>
             </a:r>
-            <a:pPr algn="l" indent="0" marL="0">
-              <a:spcAft>
-                <a:spcPts val="900"/>
-              </a:spcAft>
-              <a:buNone/>
-            </a:pPr>
             <a:r>
               <a:rPr lang="en-US" sz="1600" dirty="0">
                 <a:solidFill>
@@ -5541,7 +5543,7 @@
             <a:endParaRPr lang="en-US" sz="1600" dirty="0"/>
           </a:p>
           <a:p>
-            <a:pPr algn="l" marL="342900" indent="-342900">
+            <a:pPr marL="342900" indent="-342900" algn="l">
               <a:buSzPct val="100000"/>
               <a:buChar char="•"/>
             </a:pPr>
@@ -5556,12 +5558,6 @@
               </a:rPr>
               <a:t>Blackboard Entry (Key)</a:t>
             </a:r>
-            <a:pPr algn="l" indent="0" marL="0">
-              <a:spcAft>
-                <a:spcPts val="900"/>
-              </a:spcAft>
-              <a:buNone/>
-            </a:pPr>
             <a:r>
               <a:rPr lang="en-US" sz="1600" dirty="0">
                 <a:solidFill>
@@ -5576,7 +5572,7 @@
             <a:endParaRPr lang="en-US" sz="1600" dirty="0"/>
           </a:p>
           <a:p>
-            <a:pPr algn="l" marL="342900" indent="-342900">
+            <a:pPr marL="342900" indent="-342900" algn="l">
               <a:buSzPct val="100000"/>
               <a:buChar char="•"/>
             </a:pPr>
@@ -5591,12 +5587,6 @@
               </a:rPr>
               <a:t>Episode</a:t>
             </a:r>
-            <a:pPr algn="l" indent="0" marL="0">
-              <a:spcAft>
-                <a:spcPts val="900"/>
-              </a:spcAft>
-              <a:buNone/>
-            </a:pPr>
             <a:r>
               <a:rPr lang="en-US" sz="1600" dirty="0">
                 <a:solidFill>
@@ -5611,7 +5601,7 @@
             <a:endParaRPr lang="en-US" sz="1600" dirty="0"/>
           </a:p>
           <a:p>
-            <a:pPr algn="l" marL="342900" indent="-342900">
+            <a:pPr marL="342900" indent="-342900" algn="l">
               <a:buSzPct val="100000"/>
               <a:buChar char="•"/>
             </a:pPr>
@@ -5626,12 +5616,6 @@
               </a:rPr>
               <a:t>Partition</a:t>
             </a:r>
-            <a:pPr algn="l" indent="0" marL="0">
-              <a:spcAft>
-                <a:spcPts val="900"/>
-              </a:spcAft>
-              <a:buNone/>
-            </a:pPr>
             <a:r>
               <a:rPr lang="en-US" sz="1600" dirty="0">
                 <a:solidFill>
@@ -5646,7 +5630,7 @@
             <a:endParaRPr lang="en-US" sz="1600" dirty="0"/>
           </a:p>
           <a:p>
-            <a:pPr algn="l" marL="342900" indent="-342900">
+            <a:pPr marL="342900" indent="-342900" algn="l">
               <a:buSzPct val="100000"/>
               <a:buChar char="•"/>
             </a:pPr>
@@ -5661,12 +5645,6 @@
               </a:rPr>
               <a:t>Controller</a:t>
             </a:r>
-            <a:pPr algn="l" indent="0" marL="0">
-              <a:spcAft>
-                <a:spcPts val="900"/>
-              </a:spcAft>
-              <a:buNone/>
-            </a:pPr>
             <a:r>
               <a:rPr lang="en-US" sz="1600" dirty="0">
                 <a:solidFill>
@@ -5681,7 +5659,7 @@
             <a:endParaRPr lang="en-US" sz="1600" dirty="0"/>
           </a:p>
           <a:p>
-            <a:pPr algn="l" marL="342900" indent="-342900">
+            <a:pPr marL="342900" indent="-342900" algn="l">
               <a:buSzPct val="100000"/>
               <a:buChar char="•"/>
             </a:pPr>
@@ -5696,12 +5674,6 @@
               </a:rPr>
               <a:t>Knowledge source (KS)</a:t>
             </a:r>
-            <a:pPr algn="l" indent="0" marL="0">
-              <a:spcAft>
-                <a:spcPts val="900"/>
-              </a:spcAft>
-              <a:buNone/>
-            </a:pPr>
             <a:r>
               <a:rPr lang="en-US" sz="1600" dirty="0">
                 <a:solidFill>
@@ -5716,7 +5688,7 @@
             <a:endParaRPr lang="en-US" sz="1600" dirty="0"/>
           </a:p>
           <a:p>
-            <a:pPr algn="l" marL="342900" indent="-342900">
+            <a:pPr marL="342900" indent="-342900" algn="l">
               <a:buSzPct val="100000"/>
               <a:buChar char="•"/>
             </a:pPr>
@@ -5731,12 +5703,6 @@
               </a:rPr>
               <a:t>Route</a:t>
             </a:r>
-            <a:pPr algn="l" indent="0" marL="0">
-              <a:spcAft>
-                <a:spcPts val="900"/>
-              </a:spcAft>
-              <a:buNone/>
-            </a:pPr>
             <a:r>
               <a:rPr lang="en-US" sz="1600" dirty="0">
                 <a:solidFill>
@@ -5751,7 +5717,7 @@
             <a:endParaRPr lang="en-US" sz="1600" dirty="0"/>
           </a:p>
           <a:p>
-            <a:pPr algn="l" marL="342900" indent="-342900">
+            <a:pPr marL="342900" indent="-342900" algn="l">
               <a:buSzPct val="100000"/>
               <a:buChar char="•"/>
             </a:pPr>
@@ -5766,12 +5732,6 @@
               </a:rPr>
               <a:t>History / Ledger</a:t>
             </a:r>
-            <a:pPr algn="l" indent="0" marL="0">
-              <a:spcAft>
-                <a:spcPts val="900"/>
-              </a:spcAft>
-              <a:buNone/>
-            </a:pPr>
             <a:r>
               <a:rPr lang="en-US" sz="1600" dirty="0">
                 <a:solidFill>
@@ -5803,6 +5763,7 @@
         <a:solidFill>
           <a:srgbClr val="FFFFFF"/>
         </a:solidFill>
+        <a:effectLst/>
       </p:bgPr>
     </p:bg>
     <p:spTree>
@@ -5840,7 +5801,7 @@
           <a:bodyPr wrap="square" lIns="0" tIns="0" rIns="0" bIns="0" rtlCol="0" anchor="ctr"/>
           <a:lstStyle/>
           <a:p>
-            <a:pPr indent="0" marL="0">
+            <a:pPr marL="0" indent="0">
               <a:buNone/>
             </a:pPr>
             <a:r>
@@ -5881,10 +5842,34 @@
             <a:tbl>
               <a:tblPr/>
               <a:tblGrid>
-                <a:gridCol w="2194560"/>
-                <a:gridCol w="2651760"/>
-                <a:gridCol w="3017520"/>
-                <a:gridCol w="3017520"/>
+                <a:gridCol w="2194560">
+                  <a:extLst>
+                    <a:ext uri="{9D8B030D-6E8A-4147-A177-3AD203B41FA5}">
+                      <a16:colId xmlns:a16="http://schemas.microsoft.com/office/drawing/2014/main" val="20000"/>
+                    </a:ext>
+                  </a:extLst>
+                </a:gridCol>
+                <a:gridCol w="2651760">
+                  <a:extLst>
+                    <a:ext uri="{9D8B030D-6E8A-4147-A177-3AD203B41FA5}">
+                      <a16:colId xmlns:a16="http://schemas.microsoft.com/office/drawing/2014/main" val="20001"/>
+                    </a:ext>
+                  </a:extLst>
+                </a:gridCol>
+                <a:gridCol w="3017520">
+                  <a:extLst>
+                    <a:ext uri="{9D8B030D-6E8A-4147-A177-3AD203B41FA5}">
+                      <a16:colId xmlns:a16="http://schemas.microsoft.com/office/drawing/2014/main" val="20002"/>
+                    </a:ext>
+                  </a:extLst>
+                </a:gridCol>
+                <a:gridCol w="3017520">
+                  <a:extLst>
+                    <a:ext uri="{9D8B030D-6E8A-4147-A177-3AD203B41FA5}">
+                      <a16:colId xmlns:a16="http://schemas.microsoft.com/office/drawing/2014/main" val="20003"/>
+                    </a:ext>
+                  </a:extLst>
+                </a:gridCol>
               </a:tblGrid>
               <a:tr h="658368">
                 <a:tc>
@@ -5892,7 +5877,7 @@
                     <a:bodyPr/>
                     <a:lstStyle/>
                     <a:p>
-                      <a:pPr algn="l" indent="0" marL="0">
+                      <a:pPr marL="0" indent="0" algn="l">
                         <a:buNone/>
                       </a:pPr>
                       <a:r>
@@ -5960,7 +5945,7 @@
                     <a:bodyPr/>
                     <a:lstStyle/>
                     <a:p>
-                      <a:pPr algn="l" indent="0" marL="0">
+                      <a:pPr marL="0" indent="0" algn="l">
                         <a:buNone/>
                       </a:pPr>
                       <a:r>
@@ -6028,7 +6013,7 @@
                     <a:bodyPr/>
                     <a:lstStyle/>
                     <a:p>
-                      <a:pPr algn="l" indent="0" marL="0">
+                      <a:pPr marL="0" indent="0" algn="l">
                         <a:buNone/>
                       </a:pPr>
                       <a:r>
@@ -6096,7 +6081,7 @@
                     <a:bodyPr/>
                     <a:lstStyle/>
                     <a:p>
-                      <a:pPr algn="l" indent="0" marL="0">
+                      <a:pPr marL="0" indent="0" algn="l">
                         <a:buNone/>
                       </a:pPr>
                       <a:r>
@@ -6159,6 +6144,11 @@
                     </a:solidFill>
                   </a:tcPr>
                 </a:tc>
+                <a:extLst>
+                  <a:ext uri="{0D108BD9-81ED-4DB2-BD59-A6C34878D82A}">
+                    <a16:rowId xmlns:a16="http://schemas.microsoft.com/office/drawing/2014/main" val="10000"/>
+                  </a:ext>
+                </a:extLst>
               </a:tr>
               <a:tr h="658368">
                 <a:tc>
@@ -6166,7 +6156,7 @@
                     <a:bodyPr/>
                     <a:lstStyle/>
                     <a:p>
-                      <a:pPr algn="l" indent="0" marL="0">
+                      <a:pPr marL="0" indent="0" algn="l">
                         <a:buNone/>
                       </a:pPr>
                       <a:r>
@@ -6234,7 +6224,7 @@
                     <a:bodyPr/>
                     <a:lstStyle/>
                     <a:p>
-                      <a:pPr algn="l" indent="0" marL="0">
+                      <a:pPr marL="0" indent="0" algn="l">
                         <a:buNone/>
                       </a:pPr>
                       <a:r>
@@ -6302,7 +6292,7 @@
                     <a:bodyPr/>
                     <a:lstStyle/>
                     <a:p>
-                      <a:pPr algn="l" indent="0" marL="0">
+                      <a:pPr marL="0" indent="0" algn="l">
                         <a:buNone/>
                       </a:pPr>
                       <a:r>
@@ -6370,7 +6360,7 @@
                     <a:bodyPr/>
                     <a:lstStyle/>
                     <a:p>
-                      <a:pPr algn="l" indent="0" marL="0">
+                      <a:pPr marL="0" indent="0" algn="l">
                         <a:buNone/>
                       </a:pPr>
                       <a:r>
@@ -6384,9 +6374,6 @@
                         </a:rPr>
                         <a:t>restore from golden — or </a:t>
                       </a:r>
-                      <a:pPr algn="l" indent="0" marL="0">
-                        <a:buNone/>
-                      </a:pPr>
                       <a:r>
                         <a:rPr lang="en-US" sz="1250" i="1" dirty="0">
                           <a:solidFill>
@@ -6398,9 +6385,6 @@
                         </a:rPr>
                         <a:t>bless</a:t>
                       </a:r>
-                      <a:pPr algn="l" indent="0" marL="0">
-                        <a:buNone/>
-                      </a:pPr>
                       <a:r>
                         <a:rPr lang="en-US" sz="1250" dirty="0">
                           <a:solidFill>
@@ -6461,6 +6445,11 @@
                     </a:solidFill>
                   </a:tcPr>
                 </a:tc>
+                <a:extLst>
+                  <a:ext uri="{0D108BD9-81ED-4DB2-BD59-A6C34878D82A}">
+                    <a16:rowId xmlns:a16="http://schemas.microsoft.com/office/drawing/2014/main" val="10001"/>
+                  </a:ext>
+                </a:extLst>
               </a:tr>
               <a:tr h="658368">
                 <a:tc>
@@ -6468,7 +6457,7 @@
                     <a:bodyPr/>
                     <a:lstStyle/>
                     <a:p>
-                      <a:pPr algn="l" indent="0" marL="0">
+                      <a:pPr marL="0" indent="0" algn="l">
                         <a:buNone/>
                       </a:pPr>
                       <a:r>
@@ -6536,7 +6525,7 @@
                     <a:bodyPr/>
                     <a:lstStyle/>
                     <a:p>
-                      <a:pPr algn="l" indent="0" marL="0">
+                      <a:pPr marL="0" indent="0" algn="l">
                         <a:buNone/>
                       </a:pPr>
                       <a:r>
@@ -6604,7 +6593,7 @@
                     <a:bodyPr/>
                     <a:lstStyle/>
                     <a:p>
-                      <a:pPr algn="l" indent="0" marL="0">
+                      <a:pPr marL="0" indent="0" algn="l">
                         <a:buNone/>
                       </a:pPr>
                       <a:r>
@@ -6672,7 +6661,7 @@
                     <a:bodyPr/>
                     <a:lstStyle/>
                     <a:p>
-                      <a:pPr algn="l" indent="0" marL="0">
+                      <a:pPr marL="0" indent="0" algn="l">
                         <a:buNone/>
                       </a:pPr>
                       <a:r>
@@ -6735,6 +6724,11 @@
                     </a:solidFill>
                   </a:tcPr>
                 </a:tc>
+                <a:extLst>
+                  <a:ext uri="{0D108BD9-81ED-4DB2-BD59-A6C34878D82A}">
+                    <a16:rowId xmlns:a16="http://schemas.microsoft.com/office/drawing/2014/main" val="10002"/>
+                  </a:ext>
+                </a:extLst>
               </a:tr>
               <a:tr h="658368">
                 <a:tc>
@@ -6742,7 +6736,7 @@
                     <a:bodyPr/>
                     <a:lstStyle/>
                     <a:p>
-                      <a:pPr algn="l" indent="0" marL="0">
+                      <a:pPr marL="0" indent="0" algn="l">
                         <a:buNone/>
                       </a:pPr>
                       <a:r>
@@ -6810,7 +6804,7 @@
                     <a:bodyPr/>
                     <a:lstStyle/>
                     <a:p>
-                      <a:pPr algn="l" indent="0" marL="0">
+                      <a:pPr marL="0" indent="0" algn="l">
                         <a:buNone/>
                       </a:pPr>
                       <a:r>
@@ -6878,7 +6872,7 @@
                     <a:bodyPr/>
                     <a:lstStyle/>
                     <a:p>
-                      <a:pPr algn="l" indent="0" marL="0">
+                      <a:pPr marL="0" indent="0" algn="l">
                         <a:buNone/>
                       </a:pPr>
                       <a:r>
@@ -6946,7 +6940,7 @@
                     <a:bodyPr/>
                     <a:lstStyle/>
                     <a:p>
-                      <a:pPr algn="l" indent="0" marL="0">
+                      <a:pPr marL="0" indent="0" algn="l">
                         <a:buNone/>
                       </a:pPr>
                       <a:r>
@@ -7009,6 +7003,11 @@
                     </a:solidFill>
                   </a:tcPr>
                 </a:tc>
+                <a:extLst>
+                  <a:ext uri="{0D108BD9-81ED-4DB2-BD59-A6C34878D82A}">
+                    <a16:rowId xmlns:a16="http://schemas.microsoft.com/office/drawing/2014/main" val="10003"/>
+                  </a:ext>
+                </a:extLst>
               </a:tr>
               <a:tr h="658368">
                 <a:tc>
@@ -7016,7 +7015,7 @@
                     <a:bodyPr/>
                     <a:lstStyle/>
                     <a:p>
-                      <a:pPr algn="l" indent="0" marL="0">
+                      <a:pPr marL="0" indent="0" algn="l">
                         <a:buNone/>
                       </a:pPr>
                       <a:r>
@@ -7084,7 +7083,7 @@
                     <a:bodyPr/>
                     <a:lstStyle/>
                     <a:p>
-                      <a:pPr algn="l" indent="0" marL="0">
+                      <a:pPr marL="0" indent="0" algn="l">
                         <a:buNone/>
                       </a:pPr>
                       <a:r>
@@ -7152,7 +7151,7 @@
                     <a:bodyPr/>
                     <a:lstStyle/>
                     <a:p>
-                      <a:pPr algn="l" indent="0" marL="0">
+                      <a:pPr marL="0" indent="0" algn="l">
                         <a:buNone/>
                       </a:pPr>
                       <a:r>
@@ -7220,7 +7219,7 @@
                     <a:bodyPr/>
                     <a:lstStyle/>
                     <a:p>
-                      <a:pPr algn="l" indent="0" marL="0">
+                      <a:pPr marL="0" indent="0" algn="l">
                         <a:buNone/>
                       </a:pPr>
                       <a:r>
@@ -7283,6 +7282,11 @@
                     </a:solidFill>
                   </a:tcPr>
                 </a:tc>
+                <a:extLst>
+                  <a:ext uri="{0D108BD9-81ED-4DB2-BD59-A6C34878D82A}">
+                    <a16:rowId xmlns:a16="http://schemas.microsoft.com/office/drawing/2014/main" val="10004"/>
+                  </a:ext>
+                </a:extLst>
               </a:tr>
               <a:tr h="658368">
                 <a:tc>
@@ -7290,7 +7294,7 @@
                     <a:bodyPr/>
                     <a:lstStyle/>
                     <a:p>
-                      <a:pPr algn="l" indent="0" marL="0">
+                      <a:pPr marL="0" indent="0" algn="l">
                         <a:buNone/>
                       </a:pPr>
                       <a:r>
@@ -7304,9 +7308,6 @@
                         </a:rPr>
                         <a:t>Toolchain </a:t>
                       </a:r>
-                      <a:pPr algn="l" indent="0" marL="0">
-                        <a:buNone/>
-                      </a:pPr>
                       <a:r>
                         <a:rPr lang="en-US" sz="1100" i="1" dirty="0">
                           <a:solidFill>
@@ -7372,7 +7373,7 @@
                     <a:bodyPr/>
                     <a:lstStyle/>
                     <a:p>
-                      <a:pPr algn="l" indent="0" marL="0">
+                      <a:pPr marL="0" indent="0" algn="l">
                         <a:buNone/>
                       </a:pPr>
                       <a:r>
@@ -7386,9 +7387,6 @@
                         </a:rPr>
                         <a:t>hashed </a:t>
                       </a:r>
-                      <a:pPr algn="l" indent="0" marL="0">
-                        <a:buNone/>
-                      </a:pPr>
                       <a:r>
                         <a:rPr lang="en-US" sz="1250" b="1" dirty="0">
                           <a:solidFill>
@@ -7454,7 +7452,7 @@
                     <a:bodyPr/>
                     <a:lstStyle/>
                     <a:p>
-                      <a:pPr algn="l" indent="0" marL="0">
+                      <a:pPr marL="0" indent="0" algn="l">
                         <a:buNone/>
                       </a:pPr>
                       <a:r>
@@ -7522,7 +7520,7 @@
                     <a:bodyPr/>
                     <a:lstStyle/>
                     <a:p>
-                      <a:pPr algn="l" indent="0" marL="0">
+                      <a:pPr marL="0" indent="0" algn="l">
                         <a:buNone/>
                       </a:pPr>
                       <a:r>
@@ -7585,6 +7583,11 @@
                     </a:solidFill>
                   </a:tcPr>
                 </a:tc>
+                <a:extLst>
+                  <a:ext uri="{0D108BD9-81ED-4DB2-BD59-A6C34878D82A}">
+                    <a16:rowId xmlns:a16="http://schemas.microsoft.com/office/drawing/2014/main" val="10005"/>
+                  </a:ext>
+                </a:extLst>
               </a:tr>
               <a:tr h="658368">
                 <a:tc>
@@ -7592,7 +7595,7 @@
                     <a:bodyPr/>
                     <a:lstStyle/>
                     <a:p>
-                      <a:pPr algn="l" indent="0" marL="0">
+                      <a:pPr marL="0" indent="0" algn="l">
                         <a:buNone/>
                       </a:pPr>
                       <a:r>
@@ -7606,9 +7609,6 @@
                         </a:rPr>
                         <a:t>Trust state </a:t>
                       </a:r>
-                      <a:pPr algn="l" indent="0" marL="0">
-                        <a:buNone/>
-                      </a:pPr>
                       <a:r>
                         <a:rPr lang="en-US" sz="1100" i="1" dirty="0">
                           <a:solidFill>
@@ -7674,7 +7674,7 @@
                     <a:bodyPr/>
                     <a:lstStyle/>
                     <a:p>
-                      <a:pPr algn="l" indent="0" marL="0">
+                      <a:pPr marL="0" indent="0" algn="l">
                         <a:buNone/>
                       </a:pPr>
                       <a:r>
@@ -7742,7 +7742,7 @@
                     <a:bodyPr/>
                     <a:lstStyle/>
                     <a:p>
-                      <a:pPr algn="l" indent="0" marL="0">
+                      <a:pPr marL="0" indent="0" algn="l">
                         <a:buNone/>
                       </a:pPr>
                       <a:r>
@@ -7810,7 +7810,7 @@
                     <a:bodyPr/>
                     <a:lstStyle/>
                     <a:p>
-                      <a:pPr algn="l" indent="0" marL="0">
+                      <a:pPr marL="0" indent="0" algn="l">
                         <a:buNone/>
                       </a:pPr>
                       <a:r>
@@ -7824,9 +7824,6 @@
                         </a:rPr>
                         <a:t>principled refusal</a:t>
                       </a:r>
-                      <a:pPr algn="l" indent="0" marL="0">
-                        <a:buNone/>
-                      </a:pPr>
                       <a:r>
                         <a:rPr lang="en-US" sz="1250" dirty="0">
                           <a:solidFill>
@@ -7887,6 +7884,11 @@
                     </a:solidFill>
                   </a:tcPr>
                 </a:tc>
+                <a:extLst>
+                  <a:ext uri="{0D108BD9-81ED-4DB2-BD59-A6C34878D82A}">
+                    <a16:rowId xmlns:a16="http://schemas.microsoft.com/office/drawing/2014/main" val="10006"/>
+                  </a:ext>
+                </a:extLst>
               </a:tr>
             </a:tbl>
           </a:graphicData>
@@ -7908,6 +7910,7 @@
         <a:solidFill>
           <a:srgbClr val="FFFFFF"/>
         </a:solidFill>
+        <a:effectLst/>
       </p:bgPr>
     </p:bg>
     <p:spTree>
@@ -7945,6 +7948,13 @@
           </a:solidFill>
           <a:ln/>
         </p:spPr>
+        <p:txBody>
+          <a:bodyPr/>
+          <a:lstStyle/>
+          <a:p>
+            <a:endParaRPr lang="en-US"/>
+          </a:p>
+        </p:txBody>
       </p:sp>
       <p:sp>
         <p:nvSpPr>
@@ -7967,7 +7977,7 @@
           <a:bodyPr wrap="square" lIns="254" tIns="254" rIns="254" bIns="254" rtlCol="0" anchor="ctr"/>
           <a:lstStyle/>
           <a:p>
-            <a:pPr algn="ctr" indent="0" marL="0">
+            <a:pPr marL="0" indent="0" algn="ctr">
               <a:buNone/>
             </a:pPr>
             <a:r>
@@ -8006,6 +8016,13 @@
           </a:solidFill>
           <a:ln/>
         </p:spPr>
+        <p:txBody>
+          <a:bodyPr/>
+          <a:lstStyle/>
+          <a:p>
+            <a:endParaRPr lang="en-US"/>
+          </a:p>
+        </p:txBody>
       </p:sp>
       <p:sp>
         <p:nvSpPr>
@@ -8028,7 +8045,7 @@
           <a:bodyPr wrap="square" lIns="254" tIns="254" rIns="254" bIns="254" rtlCol="0" anchor="ctr"/>
           <a:lstStyle/>
           <a:p>
-            <a:pPr algn="ctr" indent="0" marL="0">
+            <a:pPr marL="0" indent="0" algn="ctr">
               <a:buNone/>
             </a:pPr>
             <a:r>
@@ -8045,7 +8062,7 @@
             <a:endParaRPr lang="en-US" sz="900" dirty="0"/>
           </a:p>
           <a:p>
-            <a:pPr algn="ctr" indent="0" marL="0">
+            <a:pPr marL="0" indent="0" algn="ctr">
               <a:buNone/>
             </a:pPr>
             <a:r>
@@ -8084,6 +8101,13 @@
           </a:solidFill>
           <a:ln/>
         </p:spPr>
+        <p:txBody>
+          <a:bodyPr/>
+          <a:lstStyle/>
+          <a:p>
+            <a:endParaRPr lang="en-US"/>
+          </a:p>
+        </p:txBody>
       </p:sp>
       <p:sp>
         <p:nvSpPr>
@@ -8106,7 +8130,7 @@
           <a:bodyPr wrap="square" lIns="254" tIns="254" rIns="254" bIns="254" rtlCol="0" anchor="ctr"/>
           <a:lstStyle/>
           <a:p>
-            <a:pPr algn="ctr" indent="0" marL="0">
+            <a:pPr marL="0" indent="0" algn="ctr">
               <a:buNone/>
             </a:pPr>
             <a:r>
@@ -8145,6 +8169,13 @@
           </a:solidFill>
           <a:ln/>
         </p:spPr>
+        <p:txBody>
+          <a:bodyPr/>
+          <a:lstStyle/>
+          <a:p>
+            <a:endParaRPr lang="en-US"/>
+          </a:p>
+        </p:txBody>
       </p:sp>
       <p:sp>
         <p:nvSpPr>
@@ -8167,7 +8198,7 @@
           <a:bodyPr wrap="square" lIns="254" tIns="254" rIns="254" bIns="254" rtlCol="0" anchor="ctr"/>
           <a:lstStyle/>
           <a:p>
-            <a:pPr algn="ctr" indent="0" marL="0">
+            <a:pPr marL="0" indent="0" algn="ctr">
               <a:buNone/>
             </a:pPr>
             <a:r>
@@ -8206,6 +8237,13 @@
           </a:solidFill>
           <a:ln/>
         </p:spPr>
+        <p:txBody>
+          <a:bodyPr/>
+          <a:lstStyle/>
+          <a:p>
+            <a:endParaRPr lang="en-US"/>
+          </a:p>
+        </p:txBody>
       </p:sp>
       <p:sp>
         <p:nvSpPr>
@@ -8228,7 +8266,7 @@
           <a:bodyPr wrap="square" lIns="254" tIns="254" rIns="254" bIns="254" rtlCol="0" anchor="ctr"/>
           <a:lstStyle/>
           <a:p>
-            <a:pPr algn="ctr" indent="0" marL="0">
+            <a:pPr marL="0" indent="0" algn="ctr">
               <a:buNone/>
             </a:pPr>
             <a:r>
@@ -8267,7 +8305,7 @@
           <a:bodyPr wrap="square" lIns="0" tIns="0" rIns="0" bIns="0" rtlCol="0" anchor="ctr"/>
           <a:lstStyle/>
           <a:p>
-            <a:pPr indent="0" marL="0">
+            <a:pPr marL="0" indent="0">
               <a:buNone/>
             </a:pPr>
             <a:r>
@@ -8293,8 +8331,8 @@
         </p:nvSpPr>
         <p:spPr>
           <a:xfrm>
-            <a:off x="640080" y="1728216"/>
-            <a:ext cx="6035040" cy="2286000"/>
+            <a:off x="567557" y="1812296"/>
+            <a:ext cx="6149603" cy="2286000"/>
           </a:xfrm>
           <a:prstGeom prst="rect">
             <a:avLst/>
@@ -8306,12 +8344,12 @@
           <a:bodyPr wrap="square" lIns="0" tIns="0" rIns="0" bIns="0" rtlCol="0" anchor="t"/>
           <a:lstStyle/>
           <a:p>
-            <a:pPr algn="l" marL="342900" indent="-342900">
+            <a:pPr marL="342900" indent="-342900" algn="l">
               <a:buSzPct val="100000"/>
               <a:buChar char="•"/>
             </a:pPr>
             <a:r>
-              <a:rPr lang="en-US" sz="1350" b="1" dirty="0">
+              <a:rPr lang="en-US" sz="1400" b="1" dirty="0">
                 <a:solidFill>
                   <a:srgbClr val="212121"/>
                 </a:solidFill>
@@ -8321,14 +8359,8 @@
               </a:rPr>
               <a:t>The system: </a:t>
             </a:r>
-            <a:pPr algn="l" indent="0" marL="0">
-              <a:spcAft>
-                <a:spcPts val="200"/>
-              </a:spcAft>
-              <a:buNone/>
-            </a:pPr>
-            <a:r>
-              <a:rPr lang="en-US" sz="1350" dirty="0">
+            <a:r>
+              <a:rPr lang="en-US" sz="1400" dirty="0">
                 <a:solidFill>
                   <a:srgbClr val="212121"/>
                 </a:solidFill>
@@ -8338,17 +8370,17 @@
               </a:rPr>
               <a:t>an infant-incubator thermostat — regulate and monitor functions keep a newborn's environment in a safe temperature range; heat control on/off</a:t>
             </a:r>
-            <a:endParaRPr lang="en-US" sz="1350" dirty="0"/>
-          </a:p>
-          <a:p>
-            <a:pPr algn="l" indent="0" marL="0">
+            <a:endParaRPr lang="en-US" sz="1400" dirty="0"/>
+          </a:p>
+          <a:p>
+            <a:pPr marL="0" indent="0" algn="l">
               <a:spcAft>
                 <a:spcPts val="1000"/>
               </a:spcAft>
               <a:buNone/>
             </a:pPr>
             <a:r>
-              <a:rPr lang="en-US" sz="1100" i="1" dirty="0">
+              <a:rPr lang="en-US" sz="1400" i="1" dirty="0">
                 <a:solidFill>
                   <a:srgbClr val="5A6478"/>
                 </a:solidFill>
@@ -8356,17 +8388,17 @@
                 <a:ea typeface="Calibri" pitchFamily="34" charset="-122"/>
                 <a:cs typeface="Calibri" pitchFamily="34" charset="-120"/>
               </a:rPr>
-              <a:t>requirements traceable to FAA AR-08-32 (the REQ-MHS-* family the scenes will tamper with)</a:t>
-            </a:r>
-            <a:endParaRPr lang="en-US" sz="1350" dirty="0"/>
-          </a:p>
-          <a:p>
-            <a:pPr algn="l" marL="342900" indent="-342900">
+              <a:t>	requirements traceable to FAA AR-08-32 (the REQ-MHS-* family the 	scenes will tamper with)</a:t>
+            </a:r>
+            <a:endParaRPr lang="en-US" sz="1400" dirty="0"/>
+          </a:p>
+          <a:p>
+            <a:pPr marL="342900" indent="-342900" algn="l">
               <a:buSzPct val="100000"/>
               <a:buChar char="•"/>
             </a:pPr>
             <a:r>
-              <a:rPr lang="en-US" sz="1350" b="1" dirty="0">
+              <a:rPr lang="en-US" sz="1400" b="1" dirty="0">
                 <a:solidFill>
                   <a:srgbClr val="212121"/>
                 </a:solidFill>
@@ -8376,11 +8408,8 @@
               </a:rPr>
               <a:t>The relevance: </a:t>
             </a:r>
-            <a:pPr algn="l" indent="0" marL="0">
-              <a:buNone/>
-            </a:pPr>
-            <a:r>
-              <a:rPr lang="en-US" sz="1350" dirty="0">
+            <a:r>
+              <a:rPr lang="en-US" sz="1400" dirty="0">
                 <a:solidFill>
                   <a:srgbClr val="212121"/>
                 </a:solidFill>
@@ -8390,7 +8419,7 @@
               </a:rPr>
               <a:t>the INSPECTA program's seL4/Microkit exemplar — a real, current, safety-critical development artifact, not a toy built for this talk</a:t>
             </a:r>
-            <a:endParaRPr lang="en-US" sz="1350" dirty="0"/>
+            <a:endParaRPr lang="en-US" sz="1400" dirty="0"/>
           </a:p>
         </p:txBody>
       </p:sp>
@@ -8415,6 +8444,13 @@
           </a:solidFill>
           <a:ln/>
         </p:spPr>
+        <p:txBody>
+          <a:bodyPr/>
+          <a:lstStyle/>
+          <a:p>
+            <a:endParaRPr lang="en-US"/>
+          </a:p>
+        </p:txBody>
       </p:sp>
       <p:sp>
         <p:nvSpPr>
@@ -8437,7 +8473,7 @@
           <a:bodyPr wrap="square" lIns="254" tIns="254" rIns="254" bIns="254" rtlCol="0" anchor="ctr"/>
           <a:lstStyle/>
           <a:p>
-            <a:pPr algn="ctr" indent="0" marL="0">
+            <a:pPr marL="0" indent="0" algn="ctr">
               <a:buNone/>
             </a:pPr>
             <a:r>
@@ -8454,7 +8490,7 @@
             <a:endParaRPr lang="en-US" sz="1050" dirty="0"/>
           </a:p>
           <a:p>
-            <a:pPr algn="ctr" indent="0" marL="0">
+            <a:pPr marL="0" indent="0" algn="ctr">
               <a:buNone/>
             </a:pPr>
             <a:r>
@@ -8493,7 +8529,7 @@
           <a:bodyPr wrap="square" lIns="0" tIns="0" rIns="0" bIns="0" rtlCol="0" anchor="ctr"/>
           <a:lstStyle/>
           <a:p>
-            <a:pPr algn="ctr" indent="0" marL="0">
+            <a:pPr marL="0" indent="0" algn="ctr">
               <a:buNone/>
             </a:pPr>
             <a:r>
@@ -8532,6 +8568,13 @@
           </a:solidFill>
           <a:ln/>
         </p:spPr>
+        <p:txBody>
+          <a:bodyPr/>
+          <a:lstStyle/>
+          <a:p>
+            <a:endParaRPr lang="en-US"/>
+          </a:p>
+        </p:txBody>
       </p:sp>
       <p:sp>
         <p:nvSpPr>
@@ -8554,7 +8597,7 @@
           <a:bodyPr wrap="square" lIns="254" tIns="254" rIns="254" bIns="254" rtlCol="0" anchor="ctr"/>
           <a:lstStyle/>
           <a:p>
-            <a:pPr algn="ctr" indent="0" marL="0">
+            <a:pPr marL="0" indent="0" algn="ctr">
               <a:buNone/>
             </a:pPr>
             <a:r>
@@ -8571,7 +8614,7 @@
             <a:endParaRPr lang="en-US" sz="1050" dirty="0"/>
           </a:p>
           <a:p>
-            <a:pPr algn="ctr" indent="0" marL="0">
+            <a:pPr marL="0" indent="0" algn="ctr">
               <a:buNone/>
             </a:pPr>
             <a:r>
@@ -8610,7 +8653,7 @@
           <a:bodyPr wrap="square" lIns="0" tIns="0" rIns="0" bIns="0" rtlCol="0" anchor="ctr"/>
           <a:lstStyle/>
           <a:p>
-            <a:pPr algn="ctr" indent="0" marL="0">
+            <a:pPr marL="0" indent="0" algn="ctr">
               <a:buNone/>
             </a:pPr>
             <a:r>
@@ -8649,6 +8692,13 @@
           </a:solidFill>
           <a:ln/>
         </p:spPr>
+        <p:txBody>
+          <a:bodyPr/>
+          <a:lstStyle/>
+          <a:p>
+            <a:endParaRPr lang="en-US"/>
+          </a:p>
+        </p:txBody>
       </p:sp>
       <p:sp>
         <p:nvSpPr>
@@ -8671,7 +8721,7 @@
           <a:bodyPr wrap="square" lIns="254" tIns="254" rIns="254" bIns="254" rtlCol="0" anchor="ctr"/>
           <a:lstStyle/>
           <a:p>
-            <a:pPr algn="ctr" indent="0" marL="0">
+            <a:pPr marL="0" indent="0" algn="ctr">
               <a:buNone/>
             </a:pPr>
             <a:r>
@@ -8688,7 +8738,7 @@
             <a:endParaRPr lang="en-US" sz="1050" dirty="0"/>
           </a:p>
           <a:p>
-            <a:pPr algn="ctr" indent="0" marL="0">
+            <a:pPr marL="0" indent="0" algn="ctr">
               <a:buNone/>
             </a:pPr>
             <a:r>
@@ -8727,7 +8777,7 @@
           <a:bodyPr wrap="square" lIns="0" tIns="0" rIns="0" bIns="0" rtlCol="0" anchor="ctr"/>
           <a:lstStyle/>
           <a:p>
-            <a:pPr algn="ctr" indent="0" marL="0">
+            <a:pPr marL="0" indent="0" algn="ctr">
               <a:buNone/>
             </a:pPr>
             <a:r>
@@ -8766,6 +8816,13 @@
           </a:solidFill>
           <a:ln/>
         </p:spPr>
+        <p:txBody>
+          <a:bodyPr/>
+          <a:lstStyle/>
+          <a:p>
+            <a:endParaRPr lang="en-US"/>
+          </a:p>
+        </p:txBody>
       </p:sp>
       <p:sp>
         <p:nvSpPr>
@@ -8788,7 +8845,7 @@
           <a:bodyPr wrap="square" lIns="254" tIns="254" rIns="254" bIns="254" rtlCol="0" anchor="ctr"/>
           <a:lstStyle/>
           <a:p>
-            <a:pPr algn="ctr" indent="0" marL="0">
+            <a:pPr marL="0" indent="0" algn="ctr">
               <a:buNone/>
             </a:pPr>
             <a:r>
@@ -8805,7 +8862,7 @@
             <a:endParaRPr lang="en-US" sz="1050" dirty="0"/>
           </a:p>
           <a:p>
-            <a:pPr algn="ctr" indent="0" marL="0">
+            <a:pPr marL="0" indent="0" algn="ctr">
               <a:buNone/>
             </a:pPr>
             <a:r>
@@ -8844,7 +8901,7 @@
           <a:bodyPr wrap="square" lIns="0" tIns="0" rIns="0" bIns="0" rtlCol="0" anchor="t"/>
           <a:lstStyle/>
           <a:p>
-            <a:pPr algn="l" marL="342900" indent="-342900">
+            <a:pPr marL="342900" indent="-342900" algn="l">
               <a:buSzPct val="100000"/>
               <a:buChar char="•"/>
             </a:pPr>
@@ -8859,9 +8916,6 @@
               </a:rPr>
               <a:t>Why this example: </a:t>
             </a:r>
-            <a:pPr algn="l" indent="0" marL="0">
-              <a:buNone/>
-            </a:pPr>
             <a:r>
               <a:rPr lang="en-US" sz="1350" dirty="0">
                 <a:solidFill>
@@ -8898,7 +8952,7 @@
           <a:bodyPr wrap="square" lIns="0" tIns="0" rIns="0" bIns="0" rtlCol="0" anchor="t"/>
           <a:lstStyle/>
           <a:p>
-            <a:pPr algn="l" indent="0" marL="0">
+            <a:pPr marL="0" indent="0" algn="l">
               <a:buNone/>
             </a:pPr>
             <a:r>
@@ -8912,10 +8966,46 @@
               </a:rPr>
               <a:t>Hatcliff &amp; Belt, </a:t>
             </a:r>
-            <a:pPr algn="l" indent="0" marL="0">
+            <a:r>
+              <a:rPr lang="en-US" sz="850" i="1" dirty="0">
+                <a:solidFill>
+                  <a:srgbClr val="5A6478"/>
+                </a:solidFill>
+                <a:latin typeface="Calibri" pitchFamily="34" charset="0"/>
+                <a:ea typeface="Calibri" pitchFamily="34" charset="-122"/>
+                <a:cs typeface="Calibri" pitchFamily="34" charset="-120"/>
+              </a:rPr>
+              <a:t>The Isolette System: Illustrating End-to-End Artifacts for Rigorous Model-Based Engineering</a:t>
+            </a:r>
+            <a:r>
+              <a:rPr lang="en-US" sz="850" dirty="0">
+                <a:solidFill>
+                  <a:srgbClr val="5A6478"/>
+                </a:solidFill>
+                <a:latin typeface="Calibri" pitchFamily="34" charset="0"/>
+                <a:ea typeface="Calibri" pitchFamily="34" charset="-122"/>
+                <a:cs typeface="Calibri" pitchFamily="34" charset="-120"/>
+              </a:rPr>
+              <a:t>, Springer LNCS 15240, 2025</a:t>
+            </a:r>
+            <a:endParaRPr lang="en-US" sz="850" dirty="0"/>
+          </a:p>
+          <a:p>
+            <a:pPr marL="0" indent="0" algn="l">
               <a:buNone/>
             </a:pPr>
             <a:r>
+              <a:rPr lang="en-US" sz="850" dirty="0">
+                <a:solidFill>
+                  <a:srgbClr val="5A6478"/>
+                </a:solidFill>
+                <a:latin typeface="Calibri" pitchFamily="34" charset="0"/>
+                <a:ea typeface="Calibri" pitchFamily="34" charset="-122"/>
+                <a:cs typeface="Calibri" pitchFamily="34" charset="-120"/>
+              </a:rPr>
+              <a:t>Hatcliff, Belt, Robby, McKenzie, Liang, </a:t>
+            </a:r>
+            <a:r>
               <a:rPr lang="en-US" sz="850" i="1" dirty="0">
                 <a:solidFill>
                   <a:srgbClr val="5A6478"/>
@@ -8924,9 +9014,23 @@
                 <a:ea typeface="Calibri" pitchFamily="34" charset="-122"/>
                 <a:cs typeface="Calibri" pitchFamily="34" charset="-120"/>
               </a:rPr>
-              <a:t>The Isolette System: Illustrating End-to-End Artifacts for Rigorous Model-Based Engineering</a:t>
-            </a:r>
-            <a:pPr algn="l" indent="0" marL="0">
+              <a:t>End-to-End Formal Methods Integrated Development with SysMLv2 Using HAMR</a:t>
+            </a:r>
+            <a:r>
+              <a:rPr lang="en-US" sz="850" dirty="0">
+                <a:solidFill>
+                  <a:srgbClr val="5A6478"/>
+                </a:solidFill>
+                <a:latin typeface="Calibri" pitchFamily="34" charset="0"/>
+                <a:ea typeface="Calibri" pitchFamily="34" charset="-122"/>
+                <a:cs typeface="Calibri" pitchFamily="34" charset="-120"/>
+              </a:rPr>
+              <a:t>, Springer, 2025</a:t>
+            </a:r>
+            <a:endParaRPr lang="en-US" sz="850" dirty="0"/>
+          </a:p>
+          <a:p>
+            <a:pPr marL="0" indent="0" algn="l">
               <a:buNone/>
             </a:pPr>
             <a:r>
@@ -8938,16 +9042,10 @@
                 <a:ea typeface="Calibri" pitchFamily="34" charset="-122"/>
                 <a:cs typeface="Calibri" pitchFamily="34" charset="-120"/>
               </a:rPr>
-              <a:t>, Springer LNCS 15240, 2025</a:t>
-            </a:r>
-            <a:endParaRPr lang="en-US" sz="850" dirty="0"/>
-          </a:p>
-          <a:p>
-            <a:pPr algn="l" indent="0" marL="0">
-              <a:buNone/>
-            </a:pPr>
-            <a:r>
-              <a:rPr lang="en-US" sz="850" dirty="0">
+              <a:t>Hatcliff, Belt, Robby, Carpenter, </a:t>
+            </a:r>
+            <a:r>
+              <a:rPr lang="en-US" sz="850" i="1" dirty="0">
                 <a:solidFill>
                   <a:srgbClr val="5A6478"/>
                 </a:solidFill>
@@ -8955,70 +9053,8 @@
                 <a:ea typeface="Calibri" pitchFamily="34" charset="-122"/>
                 <a:cs typeface="Calibri" pitchFamily="34" charset="-120"/>
               </a:rPr>
-              <a:t>Hatcliff, Belt, Robby, McKenzie, Liang, </a:t>
-            </a:r>
-            <a:pPr algn="l" indent="0" marL="0">
-              <a:buNone/>
-            </a:pPr>
-            <a:r>
-              <a:rPr lang="en-US" sz="850" i="1" dirty="0">
-                <a:solidFill>
-                  <a:srgbClr val="5A6478"/>
-                </a:solidFill>
-                <a:latin typeface="Calibri" pitchFamily="34" charset="0"/>
-                <a:ea typeface="Calibri" pitchFamily="34" charset="-122"/>
-                <a:cs typeface="Calibri" pitchFamily="34" charset="-120"/>
-              </a:rPr>
-              <a:t>End-to-End Formal Methods Integrated Development with SysMLv2 Using HAMR</a:t>
-            </a:r>
-            <a:pPr algn="l" indent="0" marL="0">
-              <a:buNone/>
-            </a:pPr>
-            <a:r>
-              <a:rPr lang="en-US" sz="850" dirty="0">
-                <a:solidFill>
-                  <a:srgbClr val="5A6478"/>
-                </a:solidFill>
-                <a:latin typeface="Calibri" pitchFamily="34" charset="0"/>
-                <a:ea typeface="Calibri" pitchFamily="34" charset="-122"/>
-                <a:cs typeface="Calibri" pitchFamily="34" charset="-120"/>
-              </a:rPr>
-              <a:t>, Springer, 2025</a:t>
-            </a:r>
-            <a:endParaRPr lang="en-US" sz="850" dirty="0"/>
-          </a:p>
-          <a:p>
-            <a:pPr algn="l" indent="0" marL="0">
-              <a:buNone/>
-            </a:pPr>
-            <a:r>
-              <a:rPr lang="en-US" sz="850" dirty="0">
-                <a:solidFill>
-                  <a:srgbClr val="5A6478"/>
-                </a:solidFill>
-                <a:latin typeface="Calibri" pitchFamily="34" charset="0"/>
-                <a:ea typeface="Calibri" pitchFamily="34" charset="-122"/>
-                <a:cs typeface="Calibri" pitchFamily="34" charset="-120"/>
-              </a:rPr>
-              <a:t>Hatcliff, Belt, Robby, Carpenter, </a:t>
-            </a:r>
-            <a:pPr algn="l" indent="0" marL="0">
-              <a:buNone/>
-            </a:pPr>
-            <a:r>
-              <a:rPr lang="en-US" sz="850" i="1" dirty="0">
-                <a:solidFill>
-                  <a:srgbClr val="5A6478"/>
-                </a:solidFill>
-                <a:latin typeface="Calibri" pitchFamily="34" charset="0"/>
-                <a:ea typeface="Calibri" pitchFamily="34" charset="-122"/>
-                <a:cs typeface="Calibri" pitchFamily="34" charset="-120"/>
-              </a:rPr>
               <a:t>HAMR: An AADL Multi-platform Code Generation Toolset</a:t>
             </a:r>
-            <a:pPr algn="l" indent="0" marL="0">
-              <a:buNone/>
-            </a:pPr>
             <a:r>
               <a:rPr lang="en-US" sz="850" dirty="0">
                 <a:solidFill>
@@ -9055,7 +9091,7 @@
           <a:bodyPr wrap="square" lIns="0" tIns="0" rIns="0" bIns="0" rtlCol="0" anchor="ctr"/>
           <a:lstStyle/>
           <a:p>
-            <a:pPr algn="l" indent="0" marL="0">
+            <a:pPr marL="0" indent="0" algn="l">
               <a:buNone/>
             </a:pPr>
             <a:r>
@@ -9081,12 +9117,12 @@
         </p:nvSpPr>
         <p:spPr>
           <a:xfrm>
-            <a:off x="7040880" y="1737360"/>
-            <a:ext cx="4480560" cy="822960"/>
+            <a:off x="7040880" y="1627632"/>
+            <a:ext cx="4480560" cy="676656"/>
           </a:xfrm>
           <a:prstGeom prst="roundRect">
             <a:avLst>
-              <a:gd name="adj" fmla="val 6667"/>
+              <a:gd name="adj" fmla="val 8108"/>
             </a:avLst>
           </a:prstGeom>
           <a:solidFill>
@@ -9099,6 +9135,13 @@
             <a:prstDash val="solid"/>
           </a:ln>
         </p:spPr>
+        <p:txBody>
+          <a:bodyPr/>
+          <a:lstStyle/>
+          <a:p>
+            <a:endParaRPr lang="en-US"/>
+          </a:p>
+        </p:txBody>
       </p:sp>
       <p:sp>
         <p:nvSpPr>
@@ -9108,8 +9151,8 @@
         </p:nvSpPr>
         <p:spPr>
           <a:xfrm>
-            <a:off x="7178040" y="1737360"/>
-            <a:ext cx="1234440" cy="822960"/>
+            <a:off x="7178040" y="1627632"/>
+            <a:ext cx="1234440" cy="676656"/>
           </a:xfrm>
           <a:prstGeom prst="rect">
             <a:avLst/>
@@ -9121,11 +9164,11 @@
           <a:bodyPr wrap="square" lIns="0" tIns="0" rIns="0" bIns="0" rtlCol="0" anchor="ctr"/>
           <a:lstStyle/>
           <a:p>
-            <a:pPr algn="l" indent="0" marL="0">
+            <a:pPr marL="0" indent="0" algn="l">
               <a:buNone/>
             </a:pPr>
             <a:r>
-              <a:rPr lang="en-US" sz="3000" b="1" dirty="0">
+              <a:rPr lang="en-US" sz="2600" b="1" dirty="0">
                 <a:solidFill>
                   <a:srgbClr val="1E2761"/>
                 </a:solidFill>
@@ -9135,7 +9178,7 @@
               </a:rPr>
               <a:t>13</a:t>
             </a:r>
-            <a:endParaRPr lang="en-US" sz="3000" dirty="0"/>
+            <a:endParaRPr lang="en-US" sz="2600" dirty="0"/>
           </a:p>
         </p:txBody>
       </p:sp>
@@ -9147,8 +9190,8 @@
         </p:nvSpPr>
         <p:spPr>
           <a:xfrm>
-            <a:off x="8458200" y="1737360"/>
-            <a:ext cx="2971800" cy="822960"/>
+            <a:off x="8198069" y="1627632"/>
+            <a:ext cx="3277651" cy="676656"/>
           </a:xfrm>
           <a:prstGeom prst="rect">
             <a:avLst/>
@@ -9160,11 +9203,11 @@
           <a:bodyPr wrap="square" lIns="0" tIns="0" rIns="0" bIns="0" rtlCol="0" anchor="ctr"/>
           <a:lstStyle/>
           <a:p>
-            <a:pPr algn="l" indent="0" marL="0">
+            <a:pPr marL="0" indent="0" algn="l">
               <a:buNone/>
             </a:pPr>
             <a:r>
-              <a:rPr lang="en-US" sz="1100" dirty="0">
+              <a:rPr lang="en-US" sz="1000" dirty="0">
                 <a:solidFill>
                   <a:srgbClr val="212121"/>
                 </a:solidFill>
@@ -9172,9 +9215,9 @@
                 <a:ea typeface="Calibri" pitchFamily="34" charset="-122"/>
                 <a:cs typeface="Calibri" pitchFamily="34" charset="-120"/>
               </a:rPr>
-              <a:t>measured files (SysML packages + contract-bearing Rust)</a:t>
-            </a:r>
-            <a:endParaRPr lang="en-US" sz="1100" dirty="0"/>
+              <a:t>measured spec files (SysML packages + contract-bearing Rust)</a:t>
+            </a:r>
+            <a:endParaRPr lang="en-US" sz="1000" dirty="0"/>
           </a:p>
         </p:txBody>
       </p:sp>
@@ -9186,12 +9229,12 @@
         </p:nvSpPr>
         <p:spPr>
           <a:xfrm>
-            <a:off x="7040880" y="2651760"/>
-            <a:ext cx="4480560" cy="822960"/>
+            <a:off x="7040880" y="2377440"/>
+            <a:ext cx="4480560" cy="676656"/>
           </a:xfrm>
           <a:prstGeom prst="roundRect">
             <a:avLst>
-              <a:gd name="adj" fmla="val 6667"/>
+              <a:gd name="adj" fmla="val 8108"/>
             </a:avLst>
           </a:prstGeom>
           <a:solidFill>
@@ -9204,6 +9247,13 @@
             <a:prstDash val="solid"/>
           </a:ln>
         </p:spPr>
+        <p:txBody>
+          <a:bodyPr/>
+          <a:lstStyle/>
+          <a:p>
+            <a:endParaRPr lang="en-US"/>
+          </a:p>
+        </p:txBody>
       </p:sp>
       <p:sp>
         <p:nvSpPr>
@@ -9213,8 +9263,8 @@
         </p:nvSpPr>
         <p:spPr>
           <a:xfrm>
-            <a:off x="7178040" y="2651760"/>
-            <a:ext cx="1234440" cy="822960"/>
+            <a:off x="7178040" y="2377440"/>
+            <a:ext cx="1234440" cy="676656"/>
           </a:xfrm>
           <a:prstGeom prst="rect">
             <a:avLst/>
@@ -9226,11 +9276,11 @@
           <a:bodyPr wrap="square" lIns="0" tIns="0" rIns="0" bIns="0" rtlCol="0" anchor="ctr"/>
           <a:lstStyle/>
           <a:p>
-            <a:pPr algn="l" indent="0" marL="0">
+            <a:pPr marL="0" indent="0" algn="l">
               <a:buNone/>
             </a:pPr>
             <a:r>
-              <a:rPr lang="en-US" sz="3000" b="1" dirty="0">
+              <a:rPr lang="en-US" sz="2600" b="1" dirty="0">
                 <a:solidFill>
                   <a:srgbClr val="1E2761"/>
                 </a:solidFill>
@@ -9240,7 +9290,7 @@
               </a:rPr>
               <a:t>67</a:t>
             </a:r>
-            <a:endParaRPr lang="en-US" sz="3000" dirty="0"/>
+            <a:endParaRPr lang="en-US" sz="2600" dirty="0"/>
           </a:p>
         </p:txBody>
       </p:sp>
@@ -9252,8 +9302,8 @@
         </p:nvSpPr>
         <p:spPr>
           <a:xfrm>
-            <a:off x="8458200" y="2651760"/>
-            <a:ext cx="2971800" cy="822960"/>
+            <a:off x="8458200" y="2377440"/>
+            <a:ext cx="3017520" cy="676656"/>
           </a:xfrm>
           <a:prstGeom prst="rect">
             <a:avLst/>
@@ -9265,11 +9315,11 @@
           <a:bodyPr wrap="square" lIns="0" tIns="0" rIns="0" bIns="0" rtlCol="0" anchor="ctr"/>
           <a:lstStyle/>
           <a:p>
-            <a:pPr algn="l" indent="0" marL="0">
+            <a:pPr marL="0" indent="0" algn="l">
               <a:buNone/>
             </a:pPr>
             <a:r>
-              <a:rPr lang="en-US" sz="1100" dirty="0">
+              <a:rPr lang="en-US" sz="1000" dirty="0">
                 <a:solidFill>
                   <a:srgbClr val="212121"/>
                 </a:solidFill>
@@ -9279,7 +9329,7 @@
               </a:rPr>
               <a:t>contract slices</a:t>
             </a:r>
-            <a:endParaRPr lang="en-US" sz="1100" dirty="0"/>
+            <a:endParaRPr lang="en-US" sz="1000" dirty="0"/>
           </a:p>
         </p:txBody>
       </p:sp>
@@ -9291,12 +9341,12 @@
         </p:nvSpPr>
         <p:spPr>
           <a:xfrm>
-            <a:off x="7040880" y="3566160"/>
-            <a:ext cx="4480560" cy="822960"/>
+            <a:off x="7040880" y="3127248"/>
+            <a:ext cx="4480560" cy="676656"/>
           </a:xfrm>
           <a:prstGeom prst="roundRect">
             <a:avLst>
-              <a:gd name="adj" fmla="val 6667"/>
+              <a:gd name="adj" fmla="val 8108"/>
             </a:avLst>
           </a:prstGeom>
           <a:solidFill>
@@ -9309,6 +9359,13 @@
             <a:prstDash val="solid"/>
           </a:ln>
         </p:spPr>
+        <p:txBody>
+          <a:bodyPr/>
+          <a:lstStyle/>
+          <a:p>
+            <a:endParaRPr lang="en-US"/>
+          </a:p>
+        </p:txBody>
       </p:sp>
       <p:sp>
         <p:nvSpPr>
@@ -9318,8 +9375,8 @@
         </p:nvSpPr>
         <p:spPr>
           <a:xfrm>
-            <a:off x="7178040" y="3566160"/>
-            <a:ext cx="1234440" cy="822960"/>
+            <a:off x="7178040" y="3127248"/>
+            <a:ext cx="1234440" cy="676656"/>
           </a:xfrm>
           <a:prstGeom prst="rect">
             <a:avLst/>
@@ -9331,11 +9388,11 @@
           <a:bodyPr wrap="square" lIns="0" tIns="0" rIns="0" bIns="0" rtlCol="0" anchor="ctr"/>
           <a:lstStyle/>
           <a:p>
-            <a:pPr algn="l" indent="0" marL="0">
+            <a:pPr marL="0" indent="0" algn="l">
               <a:buNone/>
             </a:pPr>
             <a:r>
-              <a:rPr lang="en-US" sz="3000" b="1" dirty="0">
+              <a:rPr lang="en-US" sz="2600" b="1" dirty="0">
                 <a:solidFill>
                   <a:srgbClr val="1E2761"/>
                 </a:solidFill>
@@ -9345,7 +9402,7 @@
               </a:rPr>
               <a:t>8</a:t>
             </a:r>
-            <a:endParaRPr lang="en-US" sz="3000" dirty="0"/>
+            <a:endParaRPr lang="en-US" sz="2600" dirty="0"/>
           </a:p>
         </p:txBody>
       </p:sp>
@@ -9357,8 +9414,8 @@
         </p:nvSpPr>
         <p:spPr>
           <a:xfrm>
-            <a:off x="8458200" y="3566160"/>
-            <a:ext cx="2971800" cy="822960"/>
+            <a:off x="8458200" y="3127248"/>
+            <a:ext cx="3017520" cy="676656"/>
           </a:xfrm>
           <a:prstGeom prst="rect">
             <a:avLst/>
@@ -9370,11 +9427,11 @@
           <a:bodyPr wrap="square" lIns="0" tIns="0" rIns="0" bIns="0" rtlCol="0" anchor="ctr"/>
           <a:lstStyle/>
           <a:p>
-            <a:pPr algn="l" indent="0" marL="0">
+            <a:pPr marL="0" indent="0" algn="l">
               <a:buNone/>
             </a:pPr>
             <a:r>
-              <a:rPr lang="en-US" sz="1100" dirty="0">
+              <a:rPr lang="en-US" sz="1000" dirty="0">
                 <a:solidFill>
                   <a:srgbClr val="212121"/>
                 </a:solidFill>
@@ -9382,9 +9439,9 @@
                 <a:ea typeface="Calibri" pitchFamily="34" charset="-122"/>
                 <a:cs typeface="Calibri" pitchFamily="34" charset="-120"/>
               </a:rPr>
-              <a:t>crates re-verified every episode (7 components + the system proof)</a:t>
-            </a:r>
-            <a:endParaRPr lang="en-US" sz="1100" dirty="0"/>
+              <a:t>Rust crates re-verified every episode (7 components + the system proof)</a:t>
+            </a:r>
+            <a:endParaRPr lang="en-US" sz="1000" dirty="0"/>
           </a:p>
         </p:txBody>
       </p:sp>
@@ -9396,12 +9453,12 @@
         </p:nvSpPr>
         <p:spPr>
           <a:xfrm>
-            <a:off x="7040880" y="4480560"/>
-            <a:ext cx="4480560" cy="822960"/>
+            <a:off x="7040880" y="3877056"/>
+            <a:ext cx="4480560" cy="676656"/>
           </a:xfrm>
           <a:prstGeom prst="roundRect">
             <a:avLst>
-              <a:gd name="adj" fmla="val 6667"/>
+              <a:gd name="adj" fmla="val 8108"/>
             </a:avLst>
           </a:prstGeom>
           <a:solidFill>
@@ -9414,6 +9471,13 @@
             <a:prstDash val="solid"/>
           </a:ln>
         </p:spPr>
+        <p:txBody>
+          <a:bodyPr/>
+          <a:lstStyle/>
+          <a:p>
+            <a:endParaRPr lang="en-US"/>
+          </a:p>
+        </p:txBody>
       </p:sp>
       <p:sp>
         <p:nvSpPr>
@@ -9423,8 +9487,8 @@
         </p:nvSpPr>
         <p:spPr>
           <a:xfrm>
-            <a:off x="7178040" y="4480560"/>
-            <a:ext cx="1234440" cy="822960"/>
+            <a:off x="7178040" y="3877056"/>
+            <a:ext cx="1234440" cy="676656"/>
           </a:xfrm>
           <a:prstGeom prst="rect">
             <a:avLst/>
@@ -9436,11 +9500,11 @@
           <a:bodyPr wrap="square" lIns="0" tIns="0" rIns="0" bIns="0" rtlCol="0" anchor="ctr"/>
           <a:lstStyle/>
           <a:p>
-            <a:pPr algn="l" indent="0" marL="0">
+            <a:pPr marL="0" indent="0" algn="l">
               <a:buNone/>
             </a:pPr>
             <a:r>
-              <a:rPr lang="en-US" sz="3000" b="1" dirty="0">
+              <a:rPr lang="en-US" sz="2600" b="1" dirty="0">
                 <a:solidFill>
                   <a:srgbClr val="1E2761"/>
                 </a:solidFill>
@@ -9450,7 +9514,7 @@
               </a:rPr>
               <a:t>1,862</a:t>
             </a:r>
-            <a:endParaRPr lang="en-US" sz="3000" dirty="0"/>
+            <a:endParaRPr lang="en-US" sz="2600" dirty="0"/>
           </a:p>
         </p:txBody>
       </p:sp>
@@ -9462,8 +9526,8 @@
         </p:nvSpPr>
         <p:spPr>
           <a:xfrm>
-            <a:off x="8458200" y="4480560"/>
-            <a:ext cx="2971800" cy="822960"/>
+            <a:off x="8458200" y="3877056"/>
+            <a:ext cx="3017520" cy="676656"/>
           </a:xfrm>
           <a:prstGeom prst="rect">
             <a:avLst/>
@@ -9475,11 +9539,11 @@
           <a:bodyPr wrap="square" lIns="0" tIns="0" rIns="0" bIns="0" rtlCol="0" anchor="ctr"/>
           <a:lstStyle/>
           <a:p>
-            <a:pPr algn="l" indent="0" marL="0">
+            <a:pPr marL="0" indent="0" algn="l">
               <a:buNone/>
             </a:pPr>
             <a:r>
-              <a:rPr lang="en-US" sz="1100" dirty="0">
+              <a:rPr lang="en-US" sz="1000" dirty="0">
                 <a:solidFill>
                   <a:srgbClr val="212121"/>
                 </a:solidFill>
@@ -9489,7 +9553,7 @@
               </a:rPr>
               <a:t>system-proof obligations</a:t>
             </a:r>
-            <a:endParaRPr lang="en-US" sz="1100" dirty="0"/>
+            <a:endParaRPr lang="en-US" sz="1000" dirty="0"/>
           </a:p>
         </p:txBody>
       </p:sp>
@@ -9501,12 +9565,12 @@
         </p:nvSpPr>
         <p:spPr>
           <a:xfrm>
-            <a:off x="7040880" y="5394960"/>
-            <a:ext cx="4480560" cy="822960"/>
+            <a:off x="7040880" y="4626864"/>
+            <a:ext cx="4480560" cy="676656"/>
           </a:xfrm>
           <a:prstGeom prst="roundRect">
             <a:avLst>
-              <a:gd name="adj" fmla="val 6667"/>
+              <a:gd name="adj" fmla="val 8108"/>
             </a:avLst>
           </a:prstGeom>
           <a:solidFill>
@@ -9519,6 +9583,13 @@
             <a:prstDash val="solid"/>
           </a:ln>
         </p:spPr>
+        <p:txBody>
+          <a:bodyPr/>
+          <a:lstStyle/>
+          <a:p>
+            <a:endParaRPr lang="en-US"/>
+          </a:p>
+        </p:txBody>
       </p:sp>
       <p:sp>
         <p:nvSpPr>
@@ -9528,8 +9599,8 @@
         </p:nvSpPr>
         <p:spPr>
           <a:xfrm>
-            <a:off x="7178040" y="5394960"/>
-            <a:ext cx="1234440" cy="822960"/>
+            <a:off x="7178040" y="4626864"/>
+            <a:ext cx="1234440" cy="676656"/>
           </a:xfrm>
           <a:prstGeom prst="rect">
             <a:avLst/>
@@ -9541,11 +9612,11 @@
           <a:bodyPr wrap="square" lIns="0" tIns="0" rIns="0" bIns="0" rtlCol="0" anchor="ctr"/>
           <a:lstStyle/>
           <a:p>
-            <a:pPr algn="l" indent="0" marL="0">
+            <a:pPr marL="0" indent="0" algn="l">
               <a:buNone/>
             </a:pPr>
             <a:r>
-              <a:rPr lang="en-US" sz="3000" b="1" dirty="0">
+              <a:rPr lang="en-US" sz="2600" b="1" dirty="0">
                 <a:solidFill>
                   <a:srgbClr val="1E2761"/>
                 </a:solidFill>
@@ -9553,9 +9624,9 @@
                 <a:ea typeface="Cambria" pitchFamily="34" charset="-122"/>
                 <a:cs typeface="Cambria" pitchFamily="34" charset="-120"/>
               </a:rPr>
-              <a:t>8</a:t>
-            </a:r>
-            <a:endParaRPr lang="en-US" sz="3000" dirty="0"/>
+              <a:t>30</a:t>
+            </a:r>
+            <a:endParaRPr lang="en-US" sz="2600" dirty="0"/>
           </a:p>
         </p:txBody>
       </p:sp>
@@ -9567,8 +9638,8 @@
         </p:nvSpPr>
         <p:spPr>
           <a:xfrm>
-            <a:off x="8458200" y="5394960"/>
-            <a:ext cx="2971800" cy="822960"/>
+            <a:off x="8458200" y="4626864"/>
+            <a:ext cx="3017520" cy="676656"/>
           </a:xfrm>
           <a:prstGeom prst="rect">
             <a:avLst/>
@@ -9580,11 +9651,11 @@
           <a:bodyPr wrap="square" lIns="0" tIns="0" rIns="0" bIns="0" rtlCol="0" anchor="ctr"/>
           <a:lstStyle/>
           <a:p>
-            <a:pPr algn="l" indent="0" marL="0">
+            <a:pPr marL="0" indent="0" algn="l">
               <a:buNone/>
             </a:pPr>
             <a:r>
-              <a:rPr lang="en-US" sz="1100" dirty="0">
+              <a:rPr lang="en-US" sz="1000" dirty="0">
                 <a:solidFill>
                   <a:srgbClr val="212121"/>
                 </a:solidFill>
@@ -9592,16 +9663,111 @@
                 <a:ea typeface="Calibri" pitchFamily="34" charset="-122"/>
                 <a:cs typeface="Calibri" pitchFamily="34" charset="-120"/>
               </a:rPr>
-              <a:t>attestation tiers — the glossary's entry keys:</a:t>
-            </a:r>
-            <a:endParaRPr lang="en-US" sz="1100" dirty="0"/>
-          </a:p>
-          <a:p>
-            <a:pPr algn="l" indent="0" marL="0">
+              <a:t>toolchain + dependency files hashed measure-then-use (4 Verus · 9 HAMR · 17 SysML libs)</a:t>
+            </a:r>
+            <a:endParaRPr lang="en-US" sz="1000" dirty="0"/>
+          </a:p>
+        </p:txBody>
+      </p:sp>
+      <p:sp>
+        <p:nvSpPr>
+          <p:cNvPr id="43" name="Shape 41"/>
+          <p:cNvSpPr/>
+          <p:nvPr/>
+        </p:nvSpPr>
+        <p:spPr>
+          <a:xfrm>
+            <a:off x="7040880" y="5376672"/>
+            <a:ext cx="4480560" cy="676656"/>
+          </a:xfrm>
+          <a:prstGeom prst="roundRect">
+            <a:avLst>
+              <a:gd name="adj" fmla="val 8108"/>
+            </a:avLst>
+          </a:prstGeom>
+          <a:solidFill>
+            <a:srgbClr val="F2F4F8"/>
+          </a:solidFill>
+          <a:ln w="12700">
+            <a:solidFill>
+              <a:srgbClr val="CADCFC"/>
+            </a:solidFill>
+            <a:prstDash val="solid"/>
+          </a:ln>
+        </p:spPr>
+        <p:txBody>
+          <a:bodyPr/>
+          <a:lstStyle/>
+          <a:p>
+            <a:endParaRPr lang="en-US"/>
+          </a:p>
+        </p:txBody>
+      </p:sp>
+      <p:sp>
+        <p:nvSpPr>
+          <p:cNvPr id="44" name="Text 42"/>
+          <p:cNvSpPr/>
+          <p:nvPr/>
+        </p:nvSpPr>
+        <p:spPr>
+          <a:xfrm>
+            <a:off x="7178040" y="5376672"/>
+            <a:ext cx="1234440" cy="676656"/>
+          </a:xfrm>
+          <a:prstGeom prst="rect">
+            <a:avLst/>
+          </a:prstGeom>
+          <a:noFill/>
+          <a:ln/>
+        </p:spPr>
+        <p:txBody>
+          <a:bodyPr wrap="square" lIns="0" tIns="0" rIns="0" bIns="0" rtlCol="0" anchor="ctr"/>
+          <a:lstStyle/>
+          <a:p>
+            <a:pPr marL="0" indent="0" algn="l">
               <a:buNone/>
             </a:pPr>
             <a:r>
-              <a:rPr lang="en-US" sz="1100" dirty="0">
+              <a:rPr lang="en-US" sz="2600" b="1" dirty="0">
+                <a:solidFill>
+                  <a:srgbClr val="1E2761"/>
+                </a:solidFill>
+                <a:latin typeface="Cambria" pitchFamily="34" charset="0"/>
+                <a:ea typeface="Cambria" pitchFamily="34" charset="-122"/>
+                <a:cs typeface="Cambria" pitchFamily="34" charset="-120"/>
+              </a:rPr>
+              <a:t>8</a:t>
+            </a:r>
+            <a:endParaRPr lang="en-US" sz="2600" dirty="0"/>
+          </a:p>
+        </p:txBody>
+      </p:sp>
+      <p:sp>
+        <p:nvSpPr>
+          <p:cNvPr id="45" name="Text 43"/>
+          <p:cNvSpPr/>
+          <p:nvPr/>
+        </p:nvSpPr>
+        <p:spPr>
+          <a:xfrm>
+            <a:off x="8458200" y="5376672"/>
+            <a:ext cx="3017520" cy="676656"/>
+          </a:xfrm>
+          <a:prstGeom prst="rect">
+            <a:avLst/>
+          </a:prstGeom>
+          <a:noFill/>
+          <a:ln/>
+        </p:spPr>
+        <p:txBody>
+          <a:bodyPr wrap="square" lIns="0" tIns="0" rIns="0" bIns="0" rtlCol="0" anchor="ctr"/>
+          <a:lstStyle/>
+          <a:p>
+            <a:pPr marL="0" indent="0" algn="l">
+              <a:buNone/>
+            </a:pPr>
+            <a:r>
+              <a:rPr lang="en-US" sz="1000" dirty="0">
                 <a:solidFill>
                   <a:srgbClr val="212121"/>
                 </a:solidFill>
@@ -9609,9 +9775,26 @@
                 <a:ea typeface="Calibri" pitchFamily="34" charset="-122"/>
                 <a:cs typeface="Calibri" pitchFamily="34" charset="-120"/>
               </a:rPr>
+              <a:t>attestation tiers — the blackboard’s entry keys:</a:t>
+            </a:r>
+            <a:endParaRPr lang="en-US" sz="1000" dirty="0"/>
+          </a:p>
+          <a:p>
+            <a:pPr marL="0" indent="0" algn="l">
+              <a:buNone/>
+            </a:pPr>
+            <a:r>
+              <a:rPr lang="en-US" sz="1000" dirty="0">
+                <a:solidFill>
+                  <a:srgbClr val="212121"/>
+                </a:solidFill>
+                <a:latin typeface="Calibri" pitchFamily="34" charset="0"/>
+                <a:ea typeface="Calibri" pitchFamily="34" charset="-122"/>
+                <a:cs typeface="Calibri" pitchFamily="34" charset="-120"/>
+              </a:rPr>
               <a:t>props · l1a · l2 · verus · cheat · sysproof · gensrc · report</a:t>
             </a:r>
-            <a:endParaRPr lang="en-US" sz="1100" dirty="0"/>
+            <a:endParaRPr lang="en-US" sz="1000" dirty="0"/>
           </a:p>
         </p:txBody>
       </p:sp>
@@ -9631,6 +9814,7 @@
         <a:solidFill>
           <a:srgbClr val="FFFFFF"/>
         </a:solidFill>
+        <a:effectLst/>
       </p:bgPr>
     </p:bg>
     <p:spTree>
@@ -9668,7 +9852,7 @@
           <a:bodyPr wrap="square" lIns="0" tIns="0" rIns="0" bIns="0" rtlCol="0" anchor="ctr"/>
           <a:lstStyle/>
           <a:p>
-            <a:pPr indent="0" marL="0">
+            <a:pPr marL="0" indent="0">
               <a:buNone/>
             </a:pPr>
             <a:r>
@@ -9707,7 +9891,7 @@
           <a:bodyPr wrap="square" lIns="0" tIns="0" rIns="0" bIns="0" rtlCol="0" anchor="t"/>
           <a:lstStyle/>
           <a:p>
-            <a:pPr algn="l" indent="0" marL="0">
+            <a:pPr marL="0" indent="0" algn="l">
               <a:spcAft>
                 <a:spcPts val="400"/>
               </a:spcAft>
@@ -9727,7 +9911,7 @@
             <a:endParaRPr lang="en-US" sz="1400" dirty="0"/>
           </a:p>
           <a:p>
-            <a:pPr algn="l" marL="342900" indent="-342900">
+            <a:pPr marL="342900" indent="-342900" algn="l">
               <a:spcAft>
                 <a:spcPts val="300"/>
               </a:spcAft>
@@ -9745,12 +9929,6 @@
               </a:rPr>
               <a:t>Hatcliff &amp; Belt, </a:t>
             </a:r>
-            <a:pPr algn="l" indent="0" marL="0">
-              <a:spcAft>
-                <a:spcPts val="300"/>
-              </a:spcAft>
-              <a:buNone/>
-            </a:pPr>
             <a:r>
               <a:rPr lang="en-US" sz="1150" i="1" dirty="0">
                 <a:solidFill>
@@ -9762,12 +9940,6 @@
               </a:rPr>
               <a:t>The Isolette System: Illustrating End-to-End Artifacts for Rigorous Model-Based Engineering</a:t>
             </a:r>
-            <a:pPr algn="l" indent="0" marL="0">
-              <a:spcAft>
-                <a:spcPts val="300"/>
-              </a:spcAft>
-              <a:buNone/>
-            </a:pPr>
             <a:r>
               <a:rPr lang="en-US" sz="1150" dirty="0">
                 <a:solidFill>
@@ -9782,7 +9954,7 @@
             <a:endParaRPr lang="en-US" sz="1400" dirty="0"/>
           </a:p>
           <a:p>
-            <a:pPr algn="l" marL="342900" indent="-342900">
+            <a:pPr marL="342900" indent="-342900" algn="l">
               <a:spcAft>
                 <a:spcPts val="300"/>
               </a:spcAft>
@@ -9800,12 +9972,6 @@
               </a:rPr>
               <a:t>Hatcliff, Belt, Robby, McKenzie, Liang, </a:t>
             </a:r>
-            <a:pPr algn="l" indent="0" marL="0">
-              <a:spcAft>
-                <a:spcPts val="300"/>
-              </a:spcAft>
-              <a:buNone/>
-            </a:pPr>
             <a:r>
               <a:rPr lang="en-US" sz="1150" i="1" dirty="0">
                 <a:solidFill>
@@ -9817,12 +9983,6 @@
               </a:rPr>
               <a:t>End-to-End Formal Methods Integrated Development with SysMLv2 Using HAMR</a:t>
             </a:r>
-            <a:pPr algn="l" indent="0" marL="0">
-              <a:spcAft>
-                <a:spcPts val="300"/>
-              </a:spcAft>
-              <a:buNone/>
-            </a:pPr>
             <a:r>
               <a:rPr lang="en-US" sz="1150" dirty="0">
                 <a:solidFill>
@@ -9837,7 +9997,7 @@
             <a:endParaRPr lang="en-US" sz="1400" dirty="0"/>
           </a:p>
           <a:p>
-            <a:pPr algn="l" marL="342900" indent="-342900">
+            <a:pPr marL="342900" indent="-342900" algn="l">
               <a:spcAft>
                 <a:spcPts val="300"/>
               </a:spcAft>
@@ -9855,12 +10015,6 @@
               </a:rPr>
               <a:t>Hatcliff, Belt, Robby, Carpenter, </a:t>
             </a:r>
-            <a:pPr algn="l" indent="0" marL="0">
-              <a:spcAft>
-                <a:spcPts val="300"/>
-              </a:spcAft>
-              <a:buNone/>
-            </a:pPr>
             <a:r>
               <a:rPr lang="en-US" sz="1150" i="1" dirty="0">
                 <a:solidFill>
@@ -9872,12 +10026,6 @@
               </a:rPr>
               <a:t>HAMR: An AADL Multi-platform Code Generation Toolset</a:t>
             </a:r>
-            <a:pPr algn="l" indent="0" marL="0">
-              <a:spcAft>
-                <a:spcPts val="300"/>
-              </a:spcAft>
-              <a:buNone/>
-            </a:pPr>
             <a:r>
               <a:rPr lang="en-US" sz="1150" dirty="0">
                 <a:solidFill>
@@ -9892,7 +10040,7 @@
             <a:endParaRPr lang="en-US" sz="1400" dirty="0"/>
           </a:p>
           <a:p>
-            <a:pPr algn="l" marL="342900" indent="-342900">
+            <a:pPr marL="342900" indent="-342900" algn="l">
               <a:spcAft>
                 <a:spcPts val="300"/>
               </a:spcAft>
@@ -9910,12 +10058,6 @@
               </a:rPr>
               <a:t>Lempia &amp; Miller, </a:t>
             </a:r>
-            <a:pPr algn="l" indent="0" marL="0">
-              <a:spcAft>
-                <a:spcPts val="300"/>
-              </a:spcAft>
-              <a:buNone/>
-            </a:pPr>
             <a:r>
               <a:rPr lang="en-US" sz="1150" i="1" dirty="0">
                 <a:solidFill>
@@ -9927,12 +10069,6 @@
               </a:rPr>
               <a:t>Requirements Engineering Management Handbook</a:t>
             </a:r>
-            <a:pPr algn="l" indent="0" marL="0">
-              <a:spcAft>
-                <a:spcPts val="300"/>
-              </a:spcAft>
-              <a:buNone/>
-            </a:pPr>
             <a:r>
               <a:rPr lang="en-US" sz="1150" dirty="0">
                 <a:solidFill>
@@ -9947,7 +10083,7 @@
             <a:endParaRPr lang="en-US" sz="1400" dirty="0"/>
           </a:p>
           <a:p>
-            <a:pPr algn="l" marL="342900" indent="-342900">
+            <a:pPr marL="342900" indent="-342900" algn="l">
               <a:spcAft>
                 <a:spcPts val="300"/>
               </a:spcAft>
@@ -9968,7 +10104,7 @@
             <a:endParaRPr lang="en-US" sz="1400" dirty="0"/>
           </a:p>
           <a:p>
-            <a:pPr algn="l" indent="0" marL="0">
+            <a:pPr marL="0" indent="0" algn="l">
               <a:spcBef>
                 <a:spcPts val="1200"/>
               </a:spcBef>
@@ -9991,7 +10127,7 @@
             <a:endParaRPr lang="en-US" sz="1400" dirty="0"/>
           </a:p>
           <a:p>
-            <a:pPr algn="l" marL="342900" indent="-342900">
+            <a:pPr marL="342900" indent="-342900" algn="l">
               <a:spcAft>
                 <a:spcPts val="300"/>
               </a:spcAft>
@@ -10009,12 +10145,6 @@
               </a:rPr>
               <a:t>Ramsdell, Rowe, Alexander, Helble, Loscocco, Pendergrass, Petz, </a:t>
             </a:r>
-            <a:pPr algn="l" indent="0" marL="0">
-              <a:spcAft>
-                <a:spcPts val="300"/>
-              </a:spcAft>
-              <a:buNone/>
-            </a:pPr>
             <a:r>
               <a:rPr lang="en-US" sz="1150" i="1" dirty="0">
                 <a:solidFill>
@@ -10026,12 +10156,6 @@
               </a:rPr>
               <a:t>Orchestrating Layered Attestations</a:t>
             </a:r>
-            <a:pPr algn="l" indent="0" marL="0">
-              <a:spcAft>
-                <a:spcPts val="300"/>
-              </a:spcAft>
-              <a:buNone/>
-            </a:pPr>
             <a:r>
               <a:rPr lang="en-US" sz="1150" dirty="0">
                 <a:solidFill>
@@ -10046,7 +10170,7 @@
             <a:endParaRPr lang="en-US" sz="1400" dirty="0"/>
           </a:p>
           <a:p>
-            <a:pPr algn="l" indent="0" marL="0">
+            <a:pPr marL="0" indent="0" algn="l">
               <a:spcBef>
                 <a:spcPts val="1200"/>
               </a:spcBef>
@@ -10069,7 +10193,7 @@
             <a:endParaRPr lang="en-US" sz="1400" dirty="0"/>
           </a:p>
           <a:p>
-            <a:pPr algn="l" marL="342900" indent="-342900">
+            <a:pPr marL="342900" indent="-342900" algn="l">
               <a:spcAft>
                 <a:spcPts val="300"/>
               </a:spcAft>
@@ -10087,12 +10211,6 @@
               </a:rPr>
               <a:t>Lattuada, Hance, Cho, Brun, Subasinghe, Zhou, Howell, Parno, Hawblitzel, </a:t>
             </a:r>
-            <a:pPr algn="l" indent="0" marL="0">
-              <a:spcAft>
-                <a:spcPts val="300"/>
-              </a:spcAft>
-              <a:buNone/>
-            </a:pPr>
             <a:r>
               <a:rPr lang="en-US" sz="1150" i="1" dirty="0">
                 <a:solidFill>
@@ -10104,12 +10222,6 @@
               </a:rPr>
               <a:t>Verus: Verifying Rust Programs using Linear Ghost Types</a:t>
             </a:r>
-            <a:pPr algn="l" indent="0" marL="0">
-              <a:spcAft>
-                <a:spcPts val="300"/>
-              </a:spcAft>
-              <a:buNone/>
-            </a:pPr>
             <a:r>
               <a:rPr lang="en-US" sz="1150" dirty="0">
                 <a:solidFill>
@@ -10124,7 +10236,7 @@
             <a:endParaRPr lang="en-US" sz="1400" dirty="0"/>
           </a:p>
           <a:p>
-            <a:pPr algn="l" marL="342900" indent="-342900">
+            <a:pPr marL="342900" indent="-342900" algn="l">
               <a:spcAft>
                 <a:spcPts val="300"/>
               </a:spcAft>
@@ -10142,12 +10254,6 @@
               </a:rPr>
               <a:t>Klein et al., </a:t>
             </a:r>
-            <a:pPr algn="l" indent="0" marL="0">
-              <a:spcAft>
-                <a:spcPts val="300"/>
-              </a:spcAft>
-              <a:buNone/>
-            </a:pPr>
             <a:r>
               <a:rPr lang="en-US" sz="1150" i="1" dirty="0">
                 <a:solidFill>
@@ -10159,12 +10265,6 @@
               </a:rPr>
               <a:t>seL4: Formal Verification of an OS Kernel</a:t>
             </a:r>
-            <a:pPr algn="l" indent="0" marL="0">
-              <a:spcAft>
-                <a:spcPts val="300"/>
-              </a:spcAft>
-              <a:buNone/>
-            </a:pPr>
             <a:r>
               <a:rPr lang="en-US" sz="1150" dirty="0">
                 <a:solidFill>
@@ -10481,4 +10581,319 @@
     </a:ext>
   </a:extLst>
 </a:theme>
+</file>
+
+<file path=ppt/theme/theme2.xml><?xml version="1.0" encoding="utf-8"?>
+<a:theme xmlns:a="http://schemas.openxmlformats.org/drawingml/2006/main" name="Office Theme">
+  <a:themeElements>
+    <a:clrScheme name="Office">
+      <a:dk1>
+        <a:sysClr val="windowText" lastClr="000000"/>
+      </a:dk1>
+      <a:lt1>
+        <a:sysClr val="window" lastClr="FFFFFF"/>
+      </a:lt1>
+      <a:dk2>
+        <a:srgbClr val="0E2841"/>
+      </a:dk2>
+      <a:lt2>
+        <a:srgbClr val="E8E8E8"/>
+      </a:lt2>
+      <a:accent1>
+        <a:srgbClr val="156082"/>
+      </a:accent1>
+      <a:accent2>
+        <a:srgbClr val="E97132"/>
+      </a:accent2>
+      <a:accent3>
+        <a:srgbClr val="196B24"/>
+      </a:accent3>
+      <a:accent4>
+        <a:srgbClr val="0F9ED5"/>
+      </a:accent4>
+      <a:accent5>
+        <a:srgbClr val="A02B93"/>
+      </a:accent5>
+      <a:accent6>
+        <a:srgbClr val="4EA72E"/>
+      </a:accent6>
+      <a:hlink>
+        <a:srgbClr val="467886"/>
+      </a:hlink>
+      <a:folHlink>
+        <a:srgbClr val="96607D"/>
+      </a:folHlink>
+    </a:clrScheme>
+    <a:fontScheme name="Office">
+      <a:majorFont>
+        <a:latin typeface="Aptos Display" panose="02110004020202020204"/>
+        <a:ea typeface=""/>
+        <a:cs typeface=""/>
+        <a:font script="Jpan" typeface="游ゴシック Light"/>
+        <a:font script="Hang" typeface="맑은 고딕"/>
+        <a:font script="Hans" typeface="等线 Light"/>
+        <a:font script="Hant" typeface="新細明體"/>
+        <a:font script="Arab" typeface="Times New Roman"/>
+        <a:font script="Hebr" typeface="Times New Roman"/>
+        <a:font script="Thai" typeface="Angsana New"/>
+        <a:font script="Ethi" typeface="Nyala"/>
+        <a:font script="Beng" typeface="Vrinda"/>
+        <a:font script="Gujr" typeface="Shruti"/>
+        <a:font script="Khmr" typeface="MoolBoran"/>
+        <a:font script="Knda" typeface="Tunga"/>
+        <a:font script="Guru" typeface="Raavi"/>
+        <a:font script="Cans" typeface="Euphemia"/>
+        <a:font script="Cher" typeface="Plantagenet Cherokee"/>
+        <a:font script="Yiii" typeface="Microsoft Yi Baiti"/>
+        <a:font script="Tibt" typeface="Microsoft Himalaya"/>
+        <a:font script="Thaa" typeface="MV Boli"/>
+        <a:font script="Deva" typeface="Mangal"/>
+        <a:font script="Telu" typeface="Gautami"/>
+        <a:font script="Taml" typeface="Latha"/>
+        <a:font script="Syrc" typeface="Estrangelo Edessa"/>
+        <a:font script="Orya" typeface="Kalinga"/>
+        <a:font script="Mlym" typeface="Kartika"/>
+        <a:font script="Laoo" typeface="DokChampa"/>
+        <a:font script="Sinh" typeface="Iskoola Pota"/>
+        <a:font script="Mong" typeface="Mongolian Baiti"/>
+        <a:font script="Viet" typeface="Times New Roman"/>
+        <a:font script="Uigh" typeface="Microsoft Uighur"/>
+        <a:font script="Geor" typeface="Sylfaen"/>
+        <a:font script="Armn" typeface="Arial"/>
+        <a:font script="Bugi" typeface="Leelawadee UI"/>
+        <a:font script="Bopo" typeface="Microsoft JhengHei"/>
+        <a:font script="Java" typeface="Javanese Text"/>
+        <a:font script="Lisu" typeface="Segoe UI"/>
+        <a:font script="Mymr" typeface="Myanmar Text"/>
+        <a:font script="Nkoo" typeface="Ebrima"/>
+        <a:font script="Olck" typeface="Nirmala UI"/>
+        <a:font script="Osma" typeface="Ebrima"/>
+        <a:font script="Phag" typeface="Phagspa"/>
+        <a:font script="Syrn" typeface="Estrangelo Edessa"/>
+        <a:font script="Syrj" typeface="Estrangelo Edessa"/>
+        <a:font script="Syre" typeface="Estrangelo Edessa"/>
+        <a:font script="Sora" typeface="Nirmala UI"/>
+        <a:font script="Tale" typeface="Microsoft Tai Le"/>
+        <a:font script="Talu" typeface="Microsoft New Tai Lue"/>
+        <a:font script="Tfng" typeface="Ebrima"/>
+      </a:majorFont>
+      <a:minorFont>
+        <a:latin typeface="Aptos" panose="02110004020202020204"/>
+        <a:ea typeface=""/>
+        <a:cs typeface=""/>
+        <a:font script="Jpan" typeface="游ゴシック"/>
+        <a:font script="Hang" typeface="맑은 고딕"/>
+        <a:font script="Hans" typeface="等线"/>
+        <a:font script="Hant" typeface="新細明體"/>
+        <a:font script="Arab" typeface="Arial"/>
+        <a:font script="Hebr" typeface="Arial"/>
+        <a:font script="Thai" typeface="Cordia New"/>
+        <a:font script="Ethi" typeface="Nyala"/>
+        <a:font script="Beng" typeface="Vrinda"/>
+        <a:font script="Gujr" typeface="Shruti"/>
+        <a:font script="Khmr" typeface="DaunPenh"/>
+        <a:font script="Knda" typeface="Tunga"/>
+        <a:font script="Guru" typeface="Raavi"/>
+        <a:font script="Cans" typeface="Euphemia"/>
+        <a:font script="Cher" typeface="Plantagenet Cherokee"/>
+        <a:font script="Yiii" typeface="Microsoft Yi Baiti"/>
+        <a:font script="Tibt" typeface="Microsoft Himalaya"/>
+        <a:font script="Thaa" typeface="MV Boli"/>
+        <a:font script="Deva" typeface="Mangal"/>
+        <a:font script="Telu" typeface="Gautami"/>
+        <a:font script="Taml" typeface="Latha"/>
+        <a:font script="Syrc" typeface="Estrangelo Edessa"/>
+        <a:font script="Orya" typeface="Kalinga"/>
+        <a:font script="Mlym" typeface="Kartika"/>
+        <a:font script="Laoo" typeface="DokChampa"/>
+        <a:font script="Sinh" typeface="Iskoola Pota"/>
+        <a:font script="Mong" typeface="Mongolian Baiti"/>
+        <a:font script="Viet" typeface="Arial"/>
+        <a:font script="Uigh" typeface="Microsoft Uighur"/>
+        <a:font script="Geor" typeface="Sylfaen"/>
+        <a:font script="Armn" typeface="Arial"/>
+        <a:font script="Bugi" typeface="Leelawadee UI"/>
+        <a:font script="Bopo" typeface="Microsoft JhengHei"/>
+        <a:font script="Java" typeface="Javanese Text"/>
+        <a:font script="Lisu" typeface="Segoe UI"/>
+        <a:font script="Mymr" typeface="Myanmar Text"/>
+        <a:font script="Nkoo" typeface="Ebrima"/>
+        <a:font script="Olck" typeface="Nirmala UI"/>
+        <a:font script="Osma" typeface="Ebrima"/>
+        <a:font script="Phag" typeface="Phagspa"/>
+        <a:font script="Syrn" typeface="Estrangelo Edessa"/>
+        <a:font script="Syrj" typeface="Estrangelo Edessa"/>
+        <a:font script="Syre" typeface="Estrangelo Edessa"/>
+        <a:font script="Sora" typeface="Nirmala UI"/>
+        <a:font script="Tale" typeface="Microsoft Tai Le"/>
+        <a:font script="Talu" typeface="Microsoft New Tai Lue"/>
+        <a:font script="Tfng" typeface="Ebrima"/>
+      </a:minorFont>
+    </a:fontScheme>
+    <a:fmtScheme name="Office">
+      <a:fillStyleLst>
+        <a:solidFill>
+          <a:schemeClr val="phClr"/>
+        </a:solidFill>
+        <a:gradFill rotWithShape="1">
+          <a:gsLst>
+            <a:gs pos="0">
+              <a:schemeClr val="phClr">
+                <a:lumMod val="110000"/>
+                <a:satMod val="105000"/>
+                <a:tint val="67000"/>
+              </a:schemeClr>
+            </a:gs>
+            <a:gs pos="50000">
+              <a:schemeClr val="phClr">
+                <a:lumMod val="105000"/>
+                <a:satMod val="103000"/>
+                <a:tint val="73000"/>
+              </a:schemeClr>
+            </a:gs>
+            <a:gs pos="100000">
+              <a:schemeClr val="phClr">
+                <a:lumMod val="105000"/>
+                <a:satMod val="109000"/>
+                <a:tint val="81000"/>
+              </a:schemeClr>
+            </a:gs>
+          </a:gsLst>
+          <a:lin ang="5400000" scaled="0"/>
+        </a:gradFill>
+        <a:gradFill rotWithShape="1">
+          <a:gsLst>
+            <a:gs pos="0">
+              <a:schemeClr val="phClr">
+                <a:satMod val="103000"/>
+                <a:lumMod val="102000"/>
+                <a:tint val="94000"/>
+              </a:schemeClr>
+            </a:gs>
+            <a:gs pos="50000">
+              <a:schemeClr val="phClr">
+                <a:satMod val="110000"/>
+                <a:lumMod val="100000"/>
+                <a:shade val="100000"/>
+              </a:schemeClr>
+            </a:gs>
+            <a:gs pos="100000">
+              <a:schemeClr val="phClr">
+                <a:lumMod val="99000"/>
+                <a:satMod val="120000"/>
+                <a:shade val="78000"/>
+              </a:schemeClr>
+            </a:gs>
+          </a:gsLst>
+          <a:lin ang="5400000" scaled="0"/>
+        </a:gradFill>
+      </a:fillStyleLst>
+      <a:lnStyleLst>
+        <a:ln w="12700" cap="flat" cmpd="sng" algn="ctr">
+          <a:solidFill>
+            <a:schemeClr val="phClr"/>
+          </a:solidFill>
+          <a:prstDash val="solid"/>
+          <a:miter lim="800000"/>
+        </a:ln>
+        <a:ln w="19050" cap="flat" cmpd="sng" algn="ctr">
+          <a:solidFill>
+            <a:schemeClr val="phClr"/>
+          </a:solidFill>
+          <a:prstDash val="solid"/>
+          <a:miter lim="800000"/>
+        </a:ln>
+        <a:ln w="25400" cap="flat" cmpd="sng" algn="ctr">
+          <a:solidFill>
+            <a:schemeClr val="phClr"/>
+          </a:solidFill>
+          <a:prstDash val="solid"/>
+          <a:miter lim="800000"/>
+        </a:ln>
+      </a:lnStyleLst>
+      <a:effectStyleLst>
+        <a:effectStyle>
+          <a:effectLst/>
+        </a:effectStyle>
+        <a:effectStyle>
+          <a:effectLst/>
+        </a:effectStyle>
+        <a:effectStyle>
+          <a:effectLst>
+            <a:outerShdw blurRad="57150" dist="19050" dir="5400000" algn="ctr" rotWithShape="0">
+              <a:srgbClr val="000000">
+                <a:alpha val="63000"/>
+              </a:srgbClr>
+            </a:outerShdw>
+          </a:effectLst>
+        </a:effectStyle>
+      </a:effectStyleLst>
+      <a:bgFillStyleLst>
+        <a:solidFill>
+          <a:schemeClr val="phClr"/>
+        </a:solidFill>
+        <a:solidFill>
+          <a:schemeClr val="phClr">
+            <a:tint val="95000"/>
+            <a:satMod val="170000"/>
+          </a:schemeClr>
+        </a:solidFill>
+        <a:gradFill rotWithShape="1">
+          <a:gsLst>
+            <a:gs pos="0">
+              <a:schemeClr val="phClr">
+                <a:tint val="93000"/>
+                <a:satMod val="150000"/>
+                <a:shade val="98000"/>
+                <a:lumMod val="102000"/>
+              </a:schemeClr>
+            </a:gs>
+            <a:gs pos="50000">
+              <a:schemeClr val="phClr">
+                <a:tint val="98000"/>
+                <a:satMod val="130000"/>
+                <a:shade val="90000"/>
+                <a:lumMod val="103000"/>
+              </a:schemeClr>
+            </a:gs>
+            <a:gs pos="100000">
+              <a:schemeClr val="phClr">
+                <a:shade val="63000"/>
+                <a:satMod val="120000"/>
+              </a:schemeClr>
+            </a:gs>
+          </a:gsLst>
+          <a:lin ang="5400000" scaled="0"/>
+        </a:gradFill>
+      </a:bgFillStyleLst>
+    </a:fmtScheme>
+  </a:themeElements>
+  <a:objectDefaults>
+    <a:lnDef>
+      <a:spPr/>
+      <a:bodyPr/>
+      <a:lstStyle/>
+      <a:style>
+        <a:lnRef idx="2">
+          <a:schemeClr val="accent1"/>
+        </a:lnRef>
+        <a:fillRef idx="0">
+          <a:schemeClr val="accent1"/>
+        </a:fillRef>
+        <a:effectRef idx="1">
+          <a:schemeClr val="accent1"/>
+        </a:effectRef>
+        <a:fontRef idx="minor">
+          <a:schemeClr val="tx1"/>
+        </a:fontRef>
+      </a:style>
+    </a:lnDef>
+  </a:objectDefaults>
+  <a:extraClrSchemeLst/>
+  <a:extLst>
+    <a:ext uri="{05A4C25C-085E-4340-85A3-A5531E510DB2}">
+      <thm15:themeFamily xmlns:thm15="http://schemas.microsoft.com/office/thememl/2012/main" name="Office Theme" id="{2E142A2C-CD16-42D6-873A-C26D2A0506FA}" vid="{1BDDFF52-6CD6-40A5-AB3C-68EB2F1E4D0A}"/>
+    </a:ext>
+  </a:extLst>
+</a:theme>
 </file>
--- a/docs/video_slides_draft.pptx
+++ b/docs/video_slides_draft.pptx
@@ -4,9 +4,6 @@
   <p:sldMasterIdLst>
     <p:sldMasterId id="2147483648" r:id="rId1"/>
   </p:sldMasterIdLst>
-  <p:notesMasterIdLst>
-    <p:notesMasterId r:id="rId11"/>
-  </p:notesMasterIdLst>
   <p:sldIdLst>
     <p:sldId id="256" r:id="rId2"/>
     <p:sldId id="257" r:id="rId3"/>
@@ -17,7 +14,15 @@
     <p:sldId id="262" r:id="rId8"/>
     <p:sldId id="263" r:id="rId9"/>
     <p:sldId id="264" r:id="rId10"/>
+    <p:sldId id="265" r:id="rId11"/>
+    <p:sldId id="266" r:id="rId12"/>
+    <p:sldId id="267" r:id="rId13"/>
+    <p:sldId id="268" r:id="rId14"/>
+    <p:sldId id="269" r:id="rId15"/>
   </p:sldIdLst>
+  <p:notesMasterIdLst>
+    <p:notesMasterId r:id="rId16"/>
+  </p:notesMasterIdLst>
   <p:sldSz cx="12192000" cy="6858000"/>
   <p:notesSz cx="6858000" cy="12192000"/>
   <p:defaultTextStyle>
@@ -112,11 +117,6 @@
       </a:defRPr>
     </a:lvl9pPr>
   </p:defaultTextStyle>
-  <p:extLst>
-    <p:ext uri="{EFAFB233-063F-42B5-8137-9DF3F51BA10A}">
-      <p15:sldGuideLst xmlns:p15="http://schemas.microsoft.com/office/powerpoint/2012/main"/>
-    </p:ext>
-  </p:extLst>
 </p:presentation>
 </file>
 
@@ -142,10 +142,234 @@
           <a:chExt cx="0" cy="0"/>
         </a:xfrm>
       </p:grpSpPr>
+      <p:sp>
+        <p:nvSpPr>
+          <p:cNvPr id="2" name="Header Placeholder 1"/>
+          <p:cNvSpPr>
+            <a:spLocks noGrp="1"/>
+          </p:cNvSpPr>
+          <p:nvPr>
+            <p:ph type="hdr" sz="quarter"/>
+          </p:nvPr>
+        </p:nvSpPr>
+        <p:spPr>
+          <a:xfrm>
+            <a:off x="0" y="0"/>
+            <a:ext cx="2971800" cy="458788"/>
+          </a:xfrm>
+          <a:prstGeom prst="rect">
+            <a:avLst/>
+          </a:prstGeom>
+        </p:spPr>
+        <p:txBody>
+          <a:bodyPr vert="horz" lIns="91440" tIns="45720" rIns="91440" bIns="45720" rtlCol="0"/>
+          <a:lstStyle>
+            <a:lvl1pPr algn="l">
+              <a:defRPr sz="1200"/>
+            </a:lvl1pPr>
+          </a:lstStyle>
+          <a:p>
+            <a:endParaRPr lang="en-US"/>
+          </a:p>
+        </p:txBody>
+      </p:sp>
+      <p:sp>
+        <p:nvSpPr>
+          <p:cNvPr id="3" name="Date Placeholder 2"/>
+          <p:cNvSpPr>
+            <a:spLocks noGrp="1"/>
+          </p:cNvSpPr>
+          <p:nvPr>
+            <p:ph type="dt" idx="1"/>
+          </p:nvPr>
+        </p:nvSpPr>
+        <p:spPr>
+          <a:xfrm>
+            <a:off x="3884613" y="0"/>
+            <a:ext cx="2971800" cy="458788"/>
+          </a:xfrm>
+          <a:prstGeom prst="rect">
+            <a:avLst/>
+          </a:prstGeom>
+        </p:spPr>
+        <p:txBody>
+          <a:bodyPr vert="horz" lIns="91440" tIns="45720" rIns="91440" bIns="45720" rtlCol="0"/>
+          <a:lstStyle>
+            <a:lvl1pPr algn="r">
+              <a:defRPr sz="1200"/>
+            </a:lvl1pPr>
+          </a:lstStyle>
+          <a:p>
+            <a:fld id="{5282F153-3F37-0F45-9E97-73ACFA13230C}" type="datetimeFigureOut">
+              <a:rPr lang="en-US"/>
+              <a:t>7/23/19</a:t>
+            </a:fld>
+            <a:endParaRPr lang="en-US"/>
+          </a:p>
+        </p:txBody>
+      </p:sp>
+      <p:sp>
+        <p:nvSpPr>
+          <p:cNvPr id="4" name="Slide Image Placeholder 3"/>
+          <p:cNvSpPr>
+            <a:spLocks noGrp="1" noRot="1" noChangeAspect="1"/>
+          </p:cNvSpPr>
+          <p:nvPr>
+            <p:ph type="sldImg" idx="2"/>
+          </p:nvPr>
+        </p:nvSpPr>
+        <p:spPr>
+          <a:xfrm>
+            <a:off x="685800" y="1143000"/>
+            <a:ext cx="5486400" cy="3086100"/>
+          </a:xfrm>
+          <a:prstGeom prst="rect">
+            <a:avLst/>
+          </a:prstGeom>
+          <a:noFill/>
+          <a:ln w="12700">
+            <a:solidFill>
+              <a:prstClr val="black"/>
+            </a:solidFill>
+          </a:ln>
+        </p:spPr>
+        <p:txBody>
+          <a:bodyPr vert="horz" lIns="91440" tIns="45720" rIns="91440" bIns="45720" rtlCol="0" anchor="ctr"/>
+          <a:lstStyle/>
+          <a:p>
+            <a:endParaRPr lang="en-US"/>
+          </a:p>
+        </p:txBody>
+      </p:sp>
+      <p:sp>
+        <p:nvSpPr>
+          <p:cNvPr id="5" name="Notes Placeholder 4"/>
+          <p:cNvSpPr>
+            <a:spLocks noGrp="1"/>
+          </p:cNvSpPr>
+          <p:nvPr>
+            <p:ph type="body" sz="quarter" idx="3"/>
+          </p:nvPr>
+        </p:nvSpPr>
+        <p:spPr>
+          <a:xfrm>
+            <a:off x="685800" y="4400550"/>
+            <a:ext cx="5486400" cy="3600450"/>
+          </a:xfrm>
+          <a:prstGeom prst="rect">
+            <a:avLst/>
+          </a:prstGeom>
+        </p:spPr>
+        <p:txBody>
+          <a:bodyPr vert="horz" lIns="91440" tIns="45720" rIns="91440" bIns="45720" rtlCol="0"/>
+          <a:lstStyle/>
+          <a:p>
+            <a:pPr lvl="0"/>
+            <a:r>
+              <a:rPr lang="en-US"/>
+              <a:t>Click to edit Master text styles</a:t>
+            </a:r>
+          </a:p>
+          <a:p>
+            <a:pPr lvl="1"/>
+            <a:r>
+              <a:rPr lang="en-US"/>
+              <a:t>Second level</a:t>
+            </a:r>
+          </a:p>
+          <a:p>
+            <a:pPr lvl="2"/>
+            <a:r>
+              <a:rPr lang="en-US"/>
+              <a:t>Third level</a:t>
+            </a:r>
+          </a:p>
+          <a:p>
+            <a:pPr lvl="3"/>
+            <a:r>
+              <a:rPr lang="en-US"/>
+              <a:t>Fourth level</a:t>
+            </a:r>
+          </a:p>
+          <a:p>
+            <a:pPr lvl="4"/>
+            <a:r>
+              <a:rPr lang="en-US"/>
+              <a:t>Fifth level</a:t>
+            </a:r>
+          </a:p>
+        </p:txBody>
+      </p:sp>
+      <p:sp>
+        <p:nvSpPr>
+          <p:cNvPr id="6" name="Footer Placeholder 5"/>
+          <p:cNvSpPr>
+            <a:spLocks noGrp="1"/>
+          </p:cNvSpPr>
+          <p:nvPr>
+            <p:ph type="ftr" sz="quarter" idx="4"/>
+          </p:nvPr>
+        </p:nvSpPr>
+        <p:spPr>
+          <a:xfrm>
+            <a:off x="0" y="8685213"/>
+            <a:ext cx="2971800" cy="458787"/>
+          </a:xfrm>
+          <a:prstGeom prst="rect">
+            <a:avLst/>
+          </a:prstGeom>
+        </p:spPr>
+        <p:txBody>
+          <a:bodyPr vert="horz" lIns="91440" tIns="45720" rIns="91440" bIns="45720" rtlCol="0" anchor="b"/>
+          <a:lstStyle>
+            <a:lvl1pPr algn="l">
+              <a:defRPr sz="1200"/>
+            </a:lvl1pPr>
+          </a:lstStyle>
+          <a:p>
+            <a:endParaRPr lang="en-US"/>
+          </a:p>
+        </p:txBody>
+      </p:sp>
+      <p:sp>
+        <p:nvSpPr>
+          <p:cNvPr id="7" name="Slide Number Placeholder 6"/>
+          <p:cNvSpPr>
+            <a:spLocks noGrp="1"/>
+          </p:cNvSpPr>
+          <p:nvPr>
+            <p:ph type="sldNum" sz="quarter" idx="5"/>
+          </p:nvPr>
+        </p:nvSpPr>
+        <p:spPr>
+          <a:xfrm>
+            <a:off x="3884613" y="8685213"/>
+            <a:ext cx="2971800" cy="458787"/>
+          </a:xfrm>
+          <a:prstGeom prst="rect">
+            <a:avLst/>
+          </a:prstGeom>
+        </p:spPr>
+        <p:txBody>
+          <a:bodyPr vert="horz" lIns="91440" tIns="45720" rIns="91440" bIns="45720" rtlCol="0" anchor="b"/>
+          <a:lstStyle>
+            <a:lvl1pPr algn="r">
+              <a:defRPr sz="1200"/>
+            </a:lvl1pPr>
+          </a:lstStyle>
+          <a:p>
+            <a:fld id="{CE5E9CC1-C706-0F49-92D6-E571CC5EEA8F}" type="slidenum">
+              <a:rPr lang="en-US"/>
+              <a:t>‹#›</a:t>
+            </a:fld>
+            <a:endParaRPr lang="en-US"/>
+          </a:p>
+        </p:txBody>
+      </p:sp>
     </p:spTree>
     <p:extLst>
       <p:ext uri="{BB962C8B-B14F-4D97-AF65-F5344CB8AC3E}">
-        <p14:creationId xmlns:p14="http://schemas.microsoft.com/office/powerpoint/2010/main" val="2913311002"/>
+        <p14:creationId xmlns:p14="http://schemas.microsoft.com/office/powerpoint/2010/main" val="1024086991"/>
       </p:ext>
     </p:extLst>
   </p:cSld>
@@ -293,6 +517,7 @@
               <a:rPr lang="en-US" dirty="0"/>
               <a:t>Title card. Subtitle deliberately names the four core artifact classes - the deck's first echo of the artifact-class table (slide 6). Optional footer: INSPECTA program context.</a:t>
             </a:r>
+            <a:endParaRPr lang="en-US" dirty="0"/>
           </a:p>
         </p:txBody>
       </p:sp>
@@ -314,6 +539,451 @@
             <a:fld id="{F7021451-1387-4CA6-816F-3879F97B5CBC}" type="slidenum">
               <a:rPr lang="en-US"/>
               <a:t>1</a:t>
+            </a:fld>
+            <a:endParaRPr lang="en-US"/>
+          </a:p>
+        </p:txBody>
+      </p:sp>
+    </p:spTree>
+    <p:extLst>
+      <p:ext uri="{BB962C8B-B14F-4D97-AF65-F5344CB8AC3E}">
+        <p14:creationId xmlns:p14="http://schemas.microsoft.com/office/powerpoint/2010/main" val="1024086991"/>
+      </p:ext>
+    </p:extLst>
+  </p:cSld>
+  <p:clrMapOvr>
+    <a:masterClrMapping/>
+  </p:clrMapOvr>
+</p:notes>
+</file>
+
+<file path=ppt/notesSlides/notesSlide10.xml><?xml version="1.0" encoding="utf-8"?>
+<p:notes xmlns:a="http://schemas.openxmlformats.org/drawingml/2006/main" xmlns:r="http://schemas.openxmlformats.org/officeDocument/2006/relationships" xmlns:p="http://schemas.openxmlformats.org/presentationml/2006/main">
+  <p:cSld>
+    <p:spTree>
+      <p:nvGrpSpPr>
+        <p:cNvPr id="1" name=""/>
+        <p:cNvGrpSpPr/>
+        <p:nvPr/>
+      </p:nvGrpSpPr>
+      <p:grpSpPr>
+        <a:xfrm>
+          <a:off x="0" y="0"/>
+          <a:ext cx="0" cy="0"/>
+          <a:chOff x="0" y="0"/>
+          <a:chExt cx="0" cy="0"/>
+        </a:xfrm>
+      </p:grpSpPr>
+      <p:sp>
+        <p:nvSpPr>
+          <p:cNvPr id="2" name="Slide Image Placeholder 1"/>
+          <p:cNvSpPr>
+            <a:spLocks noGrp="1" noRot="1" noChangeAspect="1"/>
+          </p:cNvSpPr>
+          <p:nvPr>
+            <p:ph type="sldImg"/>
+          </p:nvPr>
+        </p:nvSpPr>
+        <p:spPr/>
+      </p:sp>
+      <p:sp>
+        <p:nvSpPr>
+          <p:cNvPr id="3" name="Notes Placeholder 2"/>
+          <p:cNvSpPr>
+            <a:spLocks noGrp="1"/>
+          </p:cNvSpPr>
+          <p:nvPr>
+            <p:ph type="body" idx="1"/>
+          </p:nvPr>
+        </p:nvSpPr>
+        <p:spPr/>
+        <p:txBody>
+          <a:bodyPr/>
+          <a:lstStyle/>
+          <a:p>
+            <a:r>
+              <a:rPr lang="en-US" dirty="0"/>
+              <a:t>Beats: drifted episode escalates with slice attribution -&gt; ruling diff (always shown; linger) -&gt; bless -&gt; promote (real codegen; speed-ramp stretch, keep rolling) -&gt; gold moves -&gt; Verus tier RED against the new baseline. End on the honest-RED checklist.
+Watch-for line doubles as the VO opener over the terminal cut. Full runbook: docs/video_recording_plan.md.</a:t>
+            </a:r>
+            <a:endParaRPr lang="en-US" dirty="0"/>
+          </a:p>
+        </p:txBody>
+      </p:sp>
+      <p:sp>
+        <p:nvSpPr>
+          <p:cNvPr id="4" name="Slide Number Placeholder 3"/>
+          <p:cNvSpPr>
+            <a:spLocks noGrp="1"/>
+          </p:cNvSpPr>
+          <p:nvPr>
+            <p:ph type="sldNum" sz="quarter" idx="10"/>
+          </p:nvPr>
+        </p:nvSpPr>
+        <p:spPr/>
+        <p:txBody>
+          <a:bodyPr/>
+          <a:lstStyle/>
+          <a:p>
+            <a:fld id="{F7021451-1387-4CA6-816F-3879F97B5CBC}" type="slidenum">
+              <a:rPr lang="en-US"/>
+              <a:t>10</a:t>
+            </a:fld>
+            <a:endParaRPr lang="en-US"/>
+          </a:p>
+        </p:txBody>
+      </p:sp>
+    </p:spTree>
+    <p:extLst>
+      <p:ext uri="{BB962C8B-B14F-4D97-AF65-F5344CB8AC3E}">
+        <p14:creationId xmlns:p14="http://schemas.microsoft.com/office/powerpoint/2010/main" val="1024086991"/>
+      </p:ext>
+    </p:extLst>
+  </p:cSld>
+  <p:clrMapOvr>
+    <a:masterClrMapping/>
+  </p:clrMapOvr>
+</p:notes>
+</file>
+
+<file path=ppt/notesSlides/notesSlide11.xml><?xml version="1.0" encoding="utf-8"?>
+<p:notes xmlns:a="http://schemas.openxmlformats.org/drawingml/2006/main" xmlns:r="http://schemas.openxmlformats.org/officeDocument/2006/relationships" xmlns:p="http://schemas.openxmlformats.org/presentationml/2006/main">
+  <p:cSld>
+    <p:spTree>
+      <p:nvGrpSpPr>
+        <p:cNvPr id="1" name=""/>
+        <p:cNvGrpSpPr/>
+        <p:nvPr/>
+      </p:nvGrpSpPr>
+      <p:grpSpPr>
+        <a:xfrm>
+          <a:off x="0" y="0"/>
+          <a:ext cx="0" cy="0"/>
+          <a:chOff x="0" y="0"/>
+          <a:chExt cx="0" cy="0"/>
+        </a:xfrm>
+      </p:grpSpPr>
+      <p:sp>
+        <p:nvSpPr>
+          <p:cNvPr id="2" name="Slide Image Placeholder 1"/>
+          <p:cNvSpPr>
+            <a:spLocks noGrp="1" noRot="1" noChangeAspect="1"/>
+          </p:cNvSpPr>
+          <p:nvPr>
+            <p:ph type="sldImg"/>
+          </p:nvPr>
+        </p:nvSpPr>
+        <p:spPr/>
+      </p:sp>
+      <p:sp>
+        <p:nvSpPr>
+          <p:cNvPr id="3" name="Notes Placeholder 2"/>
+          <p:cNvSpPr>
+            <a:spLocks noGrp="1"/>
+          </p:cNvSpPr>
+          <p:nvPr>
+            <p:ph type="body" idx="1"/>
+          </p:nvPr>
+        </p:nvSpPr>
+        <p:spPr/>
+        <p:txBody>
+          <a:bodyPr/>
+          <a:lstStyle/>
+          <a:p>
+            <a:r>
+              <a:rPr lang="en-US" dirty="0"/>
+              <a:t>Beats: dummy-bad-impl diff (take the [v]iew - VSCode diff D1 on camera) -&gt; contracts-intact rung exhausts -&gt; impl rung restores crate-scoped -&gt; restart -&gt; re-attested clean.
+Watch-for line doubles as the VO opener over the terminal cut. Full runbook: docs/video_recording_plan.md.</a:t>
+            </a:r>
+            <a:endParaRPr lang="en-US" dirty="0"/>
+          </a:p>
+        </p:txBody>
+      </p:sp>
+      <p:sp>
+        <p:nvSpPr>
+          <p:cNvPr id="4" name="Slide Number Placeholder 3"/>
+          <p:cNvSpPr>
+            <a:spLocks noGrp="1"/>
+          </p:cNvSpPr>
+          <p:nvPr>
+            <p:ph type="sldNum" sz="quarter" idx="10"/>
+          </p:nvPr>
+        </p:nvSpPr>
+        <p:spPr/>
+        <p:txBody>
+          <a:bodyPr/>
+          <a:lstStyle/>
+          <a:p>
+            <a:fld id="{F7021451-1387-4CA6-816F-3879F97B5CBC}" type="slidenum">
+              <a:rPr lang="en-US"/>
+              <a:t>11</a:t>
+            </a:fld>
+            <a:endParaRPr lang="en-US"/>
+          </a:p>
+        </p:txBody>
+      </p:sp>
+    </p:spTree>
+    <p:extLst>
+      <p:ext uri="{BB962C8B-B14F-4D97-AF65-F5344CB8AC3E}">
+        <p14:creationId xmlns:p14="http://schemas.microsoft.com/office/powerpoint/2010/main" val="1024086991"/>
+      </p:ext>
+    </p:extLst>
+  </p:cSld>
+  <p:clrMapOvr>
+    <a:masterClrMapping/>
+  </p:clrMapOvr>
+</p:notes>
+</file>
+
+<file path=ppt/notesSlides/notesSlide12.xml><?xml version="1.0" encoding="utf-8"?>
+<p:notes xmlns:a="http://schemas.openxmlformats.org/drawingml/2006/main" xmlns:r="http://schemas.openxmlformats.org/officeDocument/2006/relationships" xmlns:p="http://schemas.openxmlformats.org/presentationml/2006/main">
+  <p:cSld>
+    <p:spTree>
+      <p:nvGrpSpPr>
+        <p:cNvPr id="1" name=""/>
+        <p:cNvGrpSpPr/>
+        <p:nvPr/>
+      </p:nvGrpSpPr>
+      <p:grpSpPr>
+        <a:xfrm>
+          <a:off x="0" y="0"/>
+          <a:ext cx="0" cy="0"/>
+          <a:chOff x="0" y="0"/>
+          <a:chExt cx="0" cy="0"/>
+        </a:xfrm>
+      </p:grpSpPr>
+      <p:sp>
+        <p:nvSpPr>
+          <p:cNvPr id="2" name="Slide Image Placeholder 1"/>
+          <p:cNvSpPr>
+            <a:spLocks noGrp="1" noRot="1" noChangeAspect="1"/>
+          </p:cNvSpPr>
+          <p:nvPr>
+            <p:ph type="sldImg"/>
+          </p:nvPr>
+        </p:nvSpPr>
+        <p:spPr/>
+      </p:sp>
+      <p:sp>
+        <p:nvSpPr>
+          <p:cNvPr id="3" name="Notes Placeholder 2"/>
+          <p:cNvSpPr>
+            <a:spLocks noGrp="1"/>
+          </p:cNvSpPr>
+          <p:nvPr>
+            <p:ph type="body" idx="1"/>
+          </p:nvPr>
+        </p:nvSpPr>
+        <p:spPr/>
+        <p:txBody>
+          <a:bodyPr/>
+          <a:lstStyle/>
+          <a:p>
+            <a:r>
+              <a:rPr lang="en-US" dirty="0"/>
+              <a:t>Scene 6 beats: three tampers, three attributed refusals (signature -&gt; anchor -&gt; derivability); optionally the flipped-evidence-byte diff on camera. Scene 7 beats: wrapper edit (take the [v]iew, diff D10) -&gt; readiness still passes -&gt; tool hash refutes, every proof cell poisons to ? - dwell, this is the act's money shot. --restore-tools recovery in VO only.
+Watch-for line doubles as the VO opener over the terminal cut. Full runbook: docs/video_recording_plan.md.</a:t>
+            </a:r>
+            <a:endParaRPr lang="en-US" dirty="0"/>
+          </a:p>
+        </p:txBody>
+      </p:sp>
+      <p:sp>
+        <p:nvSpPr>
+          <p:cNvPr id="4" name="Slide Number Placeholder 3"/>
+          <p:cNvSpPr>
+            <a:spLocks noGrp="1"/>
+          </p:cNvSpPr>
+          <p:nvPr>
+            <p:ph type="sldNum" sz="quarter" idx="10"/>
+          </p:nvPr>
+        </p:nvSpPr>
+        <p:spPr/>
+        <p:txBody>
+          <a:bodyPr/>
+          <a:lstStyle/>
+          <a:p>
+            <a:fld id="{F7021451-1387-4CA6-816F-3879F97B5CBC}" type="slidenum">
+              <a:rPr lang="en-US"/>
+              <a:t>12</a:t>
+            </a:fld>
+            <a:endParaRPr lang="en-US"/>
+          </a:p>
+        </p:txBody>
+      </p:sp>
+    </p:spTree>
+    <p:extLst>
+      <p:ext uri="{BB962C8B-B14F-4D97-AF65-F5344CB8AC3E}">
+        <p14:creationId xmlns:p14="http://schemas.microsoft.com/office/powerpoint/2010/main" val="1024086991"/>
+      </p:ext>
+    </p:extLst>
+  </p:cSld>
+  <p:clrMapOvr>
+    <a:masterClrMapping/>
+  </p:clrMapOvr>
+</p:notes>
+</file>
+
+<file path=ppt/notesSlides/notesSlide13.xml><?xml version="1.0" encoding="utf-8"?>
+<p:notes xmlns:a="http://schemas.openxmlformats.org/drawingml/2006/main" xmlns:r="http://schemas.openxmlformats.org/officeDocument/2006/relationships" xmlns:p="http://schemas.openxmlformats.org/presentationml/2006/main">
+  <p:cSld>
+    <p:spTree>
+      <p:nvGrpSpPr>
+        <p:cNvPr id="1" name=""/>
+        <p:cNvGrpSpPr/>
+        <p:nvPr/>
+      </p:nvGrpSpPr>
+      <p:grpSpPr>
+        <a:xfrm>
+          <a:off x="0" y="0"/>
+          <a:ext cx="0" cy="0"/>
+          <a:chOff x="0" y="0"/>
+          <a:chExt cx="0" cy="0"/>
+        </a:xfrm>
+      </p:grpSpPr>
+      <p:sp>
+        <p:nvSpPr>
+          <p:cNvPr id="2" name="Slide Image Placeholder 1"/>
+          <p:cNvSpPr>
+            <a:spLocks noGrp="1" noRot="1" noChangeAspect="1"/>
+          </p:cNvSpPr>
+          <p:nvPr>
+            <p:ph type="sldImg"/>
+          </p:nvPr>
+        </p:nvSpPr>
+        <p:spPr/>
+      </p:sp>
+      <p:sp>
+        <p:nvSpPr>
+          <p:cNvPr id="3" name="Notes Placeholder 2"/>
+          <p:cNvSpPr>
+            <a:spLocks noGrp="1"/>
+          </p:cNvSpPr>
+          <p:nvPr>
+            <p:ph type="body" idx="1"/>
+          </p:nvPr>
+        </p:nvSpPr>
+        <p:spPr/>
+        <p:txBody>
+          <a:bodyPr/>
+          <a:lstStyle/>
+          <a:p>
+            <a:r>
+              <a:rPr lang="en-US" dirty="0"/>
+              <a:t>Beats: inverted-FFI diff (take the [v]iew, diff D18 - 'see how innocent it looks') -&gt; proofs pass, cheat scan silent -&gt; gensrc byte anchor refuses, naming the file -&gt; diagnosis rung classifies -&gt; repair by regeneration (second speed-ramp stretch) -&gt; re-attested clean. Final checklist doubles as the coverage beat's background; close with one sentence naming scenes 9-11 (capstone slide C carries that taxonomy).
+Watch-for line doubles as the VO opener over the terminal cut. Full runbook: docs/video_recording_plan.md.</a:t>
+            </a:r>
+            <a:endParaRPr lang="en-US" dirty="0"/>
+          </a:p>
+        </p:txBody>
+      </p:sp>
+      <p:sp>
+        <p:nvSpPr>
+          <p:cNvPr id="4" name="Slide Number Placeholder 3"/>
+          <p:cNvSpPr>
+            <a:spLocks noGrp="1"/>
+          </p:cNvSpPr>
+          <p:nvPr>
+            <p:ph type="sldNum" sz="quarter" idx="10"/>
+          </p:nvPr>
+        </p:nvSpPr>
+        <p:spPr/>
+        <p:txBody>
+          <a:bodyPr/>
+          <a:lstStyle/>
+          <a:p>
+            <a:fld id="{F7021451-1387-4CA6-816F-3879F97B5CBC}" type="slidenum">
+              <a:rPr lang="en-US"/>
+              <a:t>13</a:t>
+            </a:fld>
+            <a:endParaRPr lang="en-US"/>
+          </a:p>
+        </p:txBody>
+      </p:sp>
+    </p:spTree>
+    <p:extLst>
+      <p:ext uri="{BB962C8B-B14F-4D97-AF65-F5344CB8AC3E}">
+        <p14:creationId xmlns:p14="http://schemas.microsoft.com/office/powerpoint/2010/main" val="1024086991"/>
+      </p:ext>
+    </p:extLst>
+  </p:cSld>
+  <p:clrMapOvr>
+    <a:masterClrMapping/>
+  </p:clrMapOvr>
+</p:notes>
+</file>
+
+<file path=ppt/notesSlides/notesSlide14.xml><?xml version="1.0" encoding="utf-8"?>
+<p:notes xmlns:a="http://schemas.openxmlformats.org/drawingml/2006/main" xmlns:r="http://schemas.openxmlformats.org/officeDocument/2006/relationships" xmlns:p="http://schemas.openxmlformats.org/presentationml/2006/main">
+  <p:cSld>
+    <p:spTree>
+      <p:nvGrpSpPr>
+        <p:cNvPr id="1" name=""/>
+        <p:cNvGrpSpPr/>
+        <p:nvPr/>
+      </p:nvGrpSpPr>
+      <p:grpSpPr>
+        <a:xfrm>
+          <a:off x="0" y="0"/>
+          <a:ext cx="0" cy="0"/>
+          <a:chOff x="0" y="0"/>
+          <a:chExt cx="0" cy="0"/>
+        </a:xfrm>
+      </p:grpSpPr>
+      <p:sp>
+        <p:nvSpPr>
+          <p:cNvPr id="2" name="Slide Image Placeholder 1"/>
+          <p:cNvSpPr>
+            <a:spLocks noGrp="1" noRot="1" noChangeAspect="1"/>
+          </p:cNvSpPr>
+          <p:nvPr>
+            <p:ph type="sldImg"/>
+          </p:nvPr>
+        </p:nvSpPr>
+        <p:spPr/>
+      </p:sp>
+      <p:sp>
+        <p:nvSpPr>
+          <p:cNvPr id="3" name="Notes Placeholder 2"/>
+          <p:cNvSpPr>
+            <a:spLocks noGrp="1"/>
+          </p:cNvSpPr>
+          <p:nvPr>
+            <p:ph type="body" idx="1"/>
+          </p:nvPr>
+        </p:nvSpPr>
+        <p:spPr/>
+        <p:txBody>
+          <a:bodyPr/>
+          <a:lstStyle/>
+          <a:p>
+            <a:r>
+              <a:rPr lang="en-US" dirty="0"/>
+              <a:t>Collection point for every reference in the deck - keep this slide current as sections are added (isolette slide carries the K-State + AR-08-32 citations inline; Copland/Verus/seL4 seeded here ahead of their sections).
+DOIs on record in docs/video_slide_drafts.md.</a:t>
+            </a:r>
+            <a:endParaRPr lang="en-US" dirty="0"/>
+          </a:p>
+        </p:txBody>
+      </p:sp>
+      <p:sp>
+        <p:nvSpPr>
+          <p:cNvPr id="4" name="Slide Number Placeholder 3"/>
+          <p:cNvSpPr>
+            <a:spLocks noGrp="1"/>
+          </p:cNvSpPr>
+          <p:nvPr>
+            <p:ph type="sldNum" sz="quarter" idx="10"/>
+          </p:nvPr>
+        </p:nvSpPr>
+        <p:spPr/>
+        <p:txBody>
+          <a:bodyPr/>
+          <a:lstStyle/>
+          <a:p>
+            <a:fld id="{F7021451-1387-4CA6-816F-3879F97B5CBC}" type="slidenum">
+              <a:rPr lang="en-US"/>
+              <a:t>14</a:t>
             </a:fld>
             <a:endParaRPr lang="en-US"/>
           </a:p>
@@ -383,6 +1053,7 @@
 Subline payoffs: developer claims -&gt; scenes 5/7; untrusted tools -&gt; scene 7; LLM outputs -&gt; capstone slides A/B; cached verdicts -&gt; scene 11.
 Visual TODO: three-stage widening-scope progression (boot-time -&gt; layered runtime -&gt; lifecycle loop) to replace/join the bullets.</a:t>
             </a:r>
+            <a:endParaRPr lang="en-US" dirty="0"/>
           </a:p>
         </p:txBody>
       </p:sp>
@@ -471,6 +1142,7 @@
               <a:t>~15 seconds on first appearance; afterwards it rides on transition slides for free.
 Design decision: one master/layout holds the strip text so a section rename is a single edit. Header titles are provisional.</a:t>
             </a:r>
+            <a:endParaRPr lang="en-US" dirty="0"/>
           </a:p>
         </p:txBody>
       </p:sp>
@@ -561,6 +1233,7 @@
 Snippet source: tests/fixtures/isolette_sysmlv2_rust_props/term.json, rendered in concrete syntax (branches flattened, target IDs shortened to file names - cosmetic).
 The verus-tier measure-then-use phrase is deliberately held back for scene 7's reveal.</a:t>
             </a:r>
+            <a:endParaRPr lang="en-US" dirty="0"/>
           </a:p>
         </p:txBody>
       </p:sp>
@@ -652,6 +1325,7 @@
 Speaker-note-only details (cut from the slide): on_pass/on_fail dispatch mechanics, success-driven handoff for component-wise entries, max_attempts per rung.
 The legend earns its space: every scene's checklist frames render through these glyphs.</a:t>
             </a:r>
+            <a:endParaRPr lang="en-US" dirty="0"/>
           </a:p>
         </p:txBody>
       </p:sp>
@@ -742,6 +1416,7 @@
 Predicate and restart-episode are deliberately OFF this slide (parked; placement TBD - possibly an 'evaluation primitives' strip). If asked: a predicate is the judge (one evaluation = one attestation episode), restart-episode is the freshness primitive (forget memoized verdicts, reset, re-evaluate).
 Also deliberately excluded (README-level detail): partition mechanics, component-wise entries and success handoff, dispatch latching, max_cycles.</a:t>
             </a:r>
+            <a:endParaRPr lang="en-US" dirty="0"/>
           </a:p>
         </p:txBody>
       </p:sp>
@@ -831,6 +1506,7 @@
 Spoken hook (never on-slide text): 'This table is deliberately incomplete - the demo will show why.' The cheat / sysproof / gensrc tiers are capstone slide C's punchline: attacks forced them into existence. Do not pre-introduce them here.
 Same column shape (class -&gt; measured how -&gt; judged by -&gt; repair) as capstone slide B, so the audience recognizes it when it returns.</a:t>
             </a:r>
+            <a:endParaRPr lang="en-US" dirty="0"/>
           </a:p>
         </p:txBody>
       </p:sp>
@@ -922,6 +1598,7 @@
 Held back on purpose (scene 9's reveal): cheat-tier depth stats - 86 blessed external_body sites, 10 scanned crates.
 Numbers verified exact 2026-08-25 (l1a targets, l2 slices, verus term, pub-proof-fn count); provision-dependent - re-verify before recording day.</a:t>
             </a:r>
+            <a:endParaRPr lang="en-US" dirty="0"/>
           </a:p>
         </p:txBody>
       </p:sp>
@@ -1007,9 +1684,10 @@
           <a:p>
             <a:r>
               <a:rPr lang="en-US" dirty="0"/>
-              <a:t>Collection point for every reference in the deck - keep this slide current as sections are added (isolette slide carries the K-State + AR-08-32 citations inline; Copland/Verus/seL4 seeded here ahead of their sections).
-DOIs on record in docs/video_slide_drafts.md.</a:t>
-            </a:r>
+              <a:t>Beats: readiness gate green -&gt; one full episode -&gt; per-crate checklist all green. Dwell on the final checklist - it is the frame every later refusal is compared against.
+Watch-for line doubles as the VO opener over the terminal cut. Full runbook: docs/video_recording_plan.md.</a:t>
+            </a:r>
+            <a:endParaRPr lang="en-US" dirty="0"/>
           </a:p>
         </p:txBody>
       </p:sp>
@@ -1082,11 +1760,6 @@
 <file path=ppt/slideMasters/slideMaster1.xml><?xml version="1.0" encoding="utf-8"?>
 <p:sldMaster xmlns:a="http://schemas.openxmlformats.org/drawingml/2006/main" xmlns:r="http://schemas.openxmlformats.org/officeDocument/2006/relationships" xmlns:p="http://schemas.openxmlformats.org/presentationml/2006/main">
   <p:cSld>
-    <p:bg>
-      <p:bgRef idx="1001">
-        <a:schemeClr val="bg1"/>
-      </p:bgRef>
-    </p:bg>
     <p:spTree>
       <p:nvGrpSpPr>
         <p:cNvPr id="1" name=""/>
@@ -1369,7 +2042,6 @@
         <a:solidFill>
           <a:srgbClr val="1E2761"/>
         </a:solidFill>
-        <a:effectLst/>
       </p:bgPr>
     </p:bg>
     <p:spTree>
@@ -1407,7 +2079,7 @@
           <a:bodyPr wrap="square" lIns="0" tIns="0" rIns="0" bIns="0" rtlCol="0" anchor="ctr"/>
           <a:lstStyle/>
           <a:p>
-            <a:pPr marL="0" indent="0" algn="l">
+            <a:pPr algn="l" indent="0" marL="0">
               <a:buNone/>
             </a:pPr>
             <a:r>
@@ -1446,7 +2118,7 @@
           <a:bodyPr wrap="square" lIns="0" tIns="0" rIns="0" bIns="0" rtlCol="0" anchor="ctr"/>
           <a:lstStyle/>
           <a:p>
-            <a:pPr marL="0" indent="0" algn="l">
+            <a:pPr algn="l" indent="0" marL="0">
               <a:buNone/>
             </a:pPr>
             <a:r>
@@ -1485,7 +2157,7 @@
           <a:bodyPr wrap="square" lIns="0" tIns="0" rIns="0" bIns="0" rtlCol="0" anchor="ctr"/>
           <a:lstStyle/>
           <a:p>
-            <a:pPr marL="0" indent="0" algn="l">
+            <a:pPr algn="l" indent="0" marL="0">
               <a:buNone/>
             </a:pPr>
             <a:r>
@@ -1498,6 +2170,2767 @@
                 <a:cs typeface="Calibri" pitchFamily="34" charset="-120"/>
               </a:rPr>
               <a:t>Presenter name  ·  affiliation  ·  date</a:t>
+            </a:r>
+            <a:endParaRPr lang="en-US" sz="1400" dirty="0"/>
+          </a:p>
+        </p:txBody>
+      </p:sp>
+    </p:spTree>
+  </p:cSld>
+  <p:clrMapOvr>
+    <a:masterClrMapping/>
+  </p:clrMapOvr>
+</p:sld>
+</file>
+
+<file path=ppt/slides/slide10.xml><?xml version="1.0" encoding="utf-8"?>
+<p:sld xmlns:a="http://schemas.openxmlformats.org/drawingml/2006/main" xmlns:r="http://schemas.openxmlformats.org/officeDocument/2006/relationships" xmlns:p="http://schemas.openxmlformats.org/presentationml/2006/main">
+  <p:cSld name="Slide 10">
+    <p:bg>
+      <p:bgPr>
+        <a:solidFill>
+          <a:srgbClr val="FFFFFF"/>
+        </a:solidFill>
+      </p:bgPr>
+    </p:bg>
+    <p:spTree>
+      <p:nvGrpSpPr>
+        <p:cNvPr id="1" name=""/>
+        <p:cNvGrpSpPr/>
+        <p:nvPr/>
+      </p:nvGrpSpPr>
+      <p:grpSpPr>
+        <a:xfrm>
+          <a:off x="0" y="0"/>
+          <a:ext cx="0" cy="0"/>
+          <a:chOff x="0" y="0"/>
+          <a:chExt cx="0" cy="0"/>
+        </a:xfrm>
+      </p:grpSpPr>
+      <p:sp>
+        <p:nvSpPr>
+          <p:cNvPr id="2" name="Shape 0"/>
+          <p:cNvSpPr/>
+          <p:nvPr/>
+        </p:nvSpPr>
+        <p:spPr>
+          <a:xfrm>
+            <a:off x="640080" y="201168"/>
+            <a:ext cx="2073859" cy="502920"/>
+          </a:xfrm>
+          <a:prstGeom prst="roundRect">
+            <a:avLst>
+              <a:gd name="adj" fmla="val 9091"/>
+            </a:avLst>
+          </a:prstGeom>
+          <a:solidFill>
+            <a:srgbClr val="E4EAF4"/>
+          </a:solidFill>
+          <a:ln/>
+        </p:spPr>
+      </p:sp>
+      <p:sp>
+        <p:nvSpPr>
+          <p:cNvPr id="3" name="Text 1"/>
+          <p:cNvSpPr/>
+          <p:nvPr/>
+        </p:nvSpPr>
+        <p:spPr>
+          <a:xfrm>
+            <a:off x="640080" y="201168"/>
+            <a:ext cx="2073859" cy="502920"/>
+          </a:xfrm>
+          <a:prstGeom prst="rect">
+            <a:avLst/>
+          </a:prstGeom>
+          <a:noFill/>
+          <a:ln/>
+        </p:spPr>
+        <p:txBody>
+          <a:bodyPr wrap="square" lIns="254" tIns="254" rIns="254" bIns="254" rtlCol="0" anchor="ctr"/>
+          <a:lstStyle/>
+          <a:p>
+            <a:pPr algn="ctr" indent="0" marL="0">
+              <a:buNone/>
+            </a:pPr>
+            <a:r>
+              <a:rPr lang="en-US" sz="900" dirty="0">
+                <a:solidFill>
+                  <a:srgbClr val="5A6478"/>
+                </a:solidFill>
+                <a:latin typeface="Calibri" pitchFamily="34" charset="0"/>
+                <a:ea typeface="Calibri" pitchFamily="34" charset="-122"/>
+                <a:cs typeface="Calibri" pitchFamily="34" charset="-120"/>
+              </a:rPr>
+              <a:t>Preliminaries</a:t>
+            </a:r>
+            <a:endParaRPr lang="en-US" sz="900" dirty="0"/>
+          </a:p>
+        </p:txBody>
+      </p:sp>
+      <p:sp>
+        <p:nvSpPr>
+          <p:cNvPr id="4" name="Shape 2"/>
+          <p:cNvSpPr/>
+          <p:nvPr/>
+        </p:nvSpPr>
+        <p:spPr>
+          <a:xfrm>
+            <a:off x="2841955" y="201168"/>
+            <a:ext cx="2073859" cy="502920"/>
+          </a:xfrm>
+          <a:prstGeom prst="roundRect">
+            <a:avLst>
+              <a:gd name="adj" fmla="val 9091"/>
+            </a:avLst>
+          </a:prstGeom>
+          <a:solidFill>
+            <a:srgbClr val="1E2761"/>
+          </a:solidFill>
+          <a:ln/>
+        </p:spPr>
+      </p:sp>
+      <p:sp>
+        <p:nvSpPr>
+          <p:cNvPr id="5" name="Text 3"/>
+          <p:cNvSpPr/>
+          <p:nvPr/>
+        </p:nvSpPr>
+        <p:spPr>
+          <a:xfrm>
+            <a:off x="2841955" y="201168"/>
+            <a:ext cx="2073859" cy="502920"/>
+          </a:xfrm>
+          <a:prstGeom prst="rect">
+            <a:avLst/>
+          </a:prstGeom>
+          <a:noFill/>
+          <a:ln/>
+        </p:spPr>
+        <p:txBody>
+          <a:bodyPr wrap="square" lIns="254" tIns="254" rIns="254" bIns="254" rtlCol="0" anchor="ctr"/>
+          <a:lstStyle/>
+          <a:p>
+            <a:pPr algn="ctr" indent="0" marL="0">
+              <a:buNone/>
+            </a:pPr>
+            <a:r>
+              <a:rPr lang="en-US" sz="900" b="1" dirty="0">
+                <a:solidFill>
+                  <a:srgbClr val="FFFFFF"/>
+                </a:solidFill>
+                <a:latin typeface="Calibri" pitchFamily="34" charset="0"/>
+                <a:ea typeface="Calibri" pitchFamily="34" charset="-122"/>
+                <a:cs typeface="Calibri" pitchFamily="34" charset="-120"/>
+              </a:rPr>
+              <a:t>Demo:</a:t>
+            </a:r>
+            <a:endParaRPr lang="en-US" sz="900" dirty="0"/>
+          </a:p>
+          <a:p>
+            <a:pPr algn="ctr" indent="0" marL="0">
+              <a:buNone/>
+            </a:pPr>
+            <a:r>
+              <a:rPr lang="en-US" sz="900" b="1" dirty="0">
+                <a:solidFill>
+                  <a:srgbClr val="FFFFFF"/>
+                </a:solidFill>
+                <a:latin typeface="Calibri" pitchFamily="34" charset="0"/>
+                <a:ea typeface="Calibri" pitchFamily="34" charset="-122"/>
+                <a:cs typeface="Calibri" pitchFamily="34" charset="-120"/>
+              </a:rPr>
+              <a:t>Isolette (SysMLv2 → Rust)</a:t>
+            </a:r>
+            <a:endParaRPr lang="en-US" sz="900" dirty="0"/>
+          </a:p>
+        </p:txBody>
+      </p:sp>
+      <p:sp>
+        <p:nvSpPr>
+          <p:cNvPr id="6" name="Shape 4"/>
+          <p:cNvSpPr/>
+          <p:nvPr/>
+        </p:nvSpPr>
+        <p:spPr>
+          <a:xfrm>
+            <a:off x="5043830" y="201168"/>
+            <a:ext cx="2073859" cy="502920"/>
+          </a:xfrm>
+          <a:prstGeom prst="roundRect">
+            <a:avLst>
+              <a:gd name="adj" fmla="val 9091"/>
+            </a:avLst>
+          </a:prstGeom>
+          <a:solidFill>
+            <a:srgbClr val="E4EAF4"/>
+          </a:solidFill>
+          <a:ln/>
+        </p:spPr>
+      </p:sp>
+      <p:sp>
+        <p:nvSpPr>
+          <p:cNvPr id="7" name="Text 5"/>
+          <p:cNvSpPr/>
+          <p:nvPr/>
+        </p:nvSpPr>
+        <p:spPr>
+          <a:xfrm>
+            <a:off x="5043830" y="201168"/>
+            <a:ext cx="2073859" cy="502920"/>
+          </a:xfrm>
+          <a:prstGeom prst="rect">
+            <a:avLst/>
+          </a:prstGeom>
+          <a:noFill/>
+          <a:ln/>
+        </p:spPr>
+        <p:txBody>
+          <a:bodyPr wrap="square" lIns="254" tIns="254" rIns="254" bIns="254" rtlCol="0" anchor="ctr"/>
+          <a:lstStyle/>
+          <a:p>
+            <a:pPr algn="ctr" indent="0" marL="0">
+              <a:buNone/>
+            </a:pPr>
+            <a:r>
+              <a:rPr lang="en-US" sz="900" dirty="0">
+                <a:solidFill>
+                  <a:srgbClr val="5A6478"/>
+                </a:solidFill>
+                <a:latin typeface="Calibri" pitchFamily="34" charset="0"/>
+                <a:ea typeface="Calibri" pitchFamily="34" charset="-122"/>
+                <a:cs typeface="Calibri" pitchFamily="34" charset="-120"/>
+              </a:rPr>
+              <a:t>Other Ecosystems</a:t>
+            </a:r>
+            <a:endParaRPr lang="en-US" sz="900" dirty="0"/>
+          </a:p>
+        </p:txBody>
+      </p:sp>
+      <p:sp>
+        <p:nvSpPr>
+          <p:cNvPr id="8" name="Shape 6"/>
+          <p:cNvSpPr/>
+          <p:nvPr/>
+        </p:nvSpPr>
+        <p:spPr>
+          <a:xfrm>
+            <a:off x="7245706" y="201168"/>
+            <a:ext cx="2073859" cy="502920"/>
+          </a:xfrm>
+          <a:prstGeom prst="roundRect">
+            <a:avLst>
+              <a:gd name="adj" fmla="val 9091"/>
+            </a:avLst>
+          </a:prstGeom>
+          <a:solidFill>
+            <a:srgbClr val="E4EAF4"/>
+          </a:solidFill>
+          <a:ln/>
+        </p:spPr>
+      </p:sp>
+      <p:sp>
+        <p:nvSpPr>
+          <p:cNvPr id="9" name="Text 7"/>
+          <p:cNvSpPr/>
+          <p:nvPr/>
+        </p:nvSpPr>
+        <p:spPr>
+          <a:xfrm>
+            <a:off x="7245706" y="201168"/>
+            <a:ext cx="2073859" cy="502920"/>
+          </a:xfrm>
+          <a:prstGeom prst="rect">
+            <a:avLst/>
+          </a:prstGeom>
+          <a:noFill/>
+          <a:ln/>
+        </p:spPr>
+        <p:txBody>
+          <a:bodyPr wrap="square" lIns="254" tIns="254" rIns="254" bIns="254" rtlCol="0" anchor="ctr"/>
+          <a:lstStyle/>
+          <a:p>
+            <a:pPr algn="ctr" indent="0" marL="0">
+              <a:buNone/>
+            </a:pPr>
+            <a:r>
+              <a:rPr lang="en-US" sz="900" dirty="0">
+                <a:solidFill>
+                  <a:srgbClr val="5A6478"/>
+                </a:solidFill>
+                <a:latin typeface="Calibri" pitchFamily="34" charset="0"/>
+                <a:ea typeface="Calibri" pitchFamily="34" charset="-122"/>
+                <a:cs typeface="Calibri" pitchFamily="34" charset="-120"/>
+              </a:rPr>
+              <a:t>AI in the Loop</a:t>
+            </a:r>
+            <a:endParaRPr lang="en-US" sz="900" dirty="0"/>
+          </a:p>
+        </p:txBody>
+      </p:sp>
+      <p:sp>
+        <p:nvSpPr>
+          <p:cNvPr id="10" name="Shape 8"/>
+          <p:cNvSpPr/>
+          <p:nvPr/>
+        </p:nvSpPr>
+        <p:spPr>
+          <a:xfrm>
+            <a:off x="9447581" y="201168"/>
+            <a:ext cx="2073859" cy="502920"/>
+          </a:xfrm>
+          <a:prstGeom prst="roundRect">
+            <a:avLst>
+              <a:gd name="adj" fmla="val 9091"/>
+            </a:avLst>
+          </a:prstGeom>
+          <a:solidFill>
+            <a:srgbClr val="E4EAF4"/>
+          </a:solidFill>
+          <a:ln/>
+        </p:spPr>
+      </p:sp>
+      <p:sp>
+        <p:nvSpPr>
+          <p:cNvPr id="11" name="Text 9"/>
+          <p:cNvSpPr/>
+          <p:nvPr/>
+        </p:nvSpPr>
+        <p:spPr>
+          <a:xfrm>
+            <a:off x="9447581" y="201168"/>
+            <a:ext cx="2073859" cy="502920"/>
+          </a:xfrm>
+          <a:prstGeom prst="rect">
+            <a:avLst/>
+          </a:prstGeom>
+          <a:noFill/>
+          <a:ln/>
+        </p:spPr>
+        <p:txBody>
+          <a:bodyPr wrap="square" lIns="254" tIns="254" rIns="254" bIns="254" rtlCol="0" anchor="ctr"/>
+          <a:lstStyle/>
+          <a:p>
+            <a:pPr algn="ctr" indent="0" marL="0">
+              <a:buNone/>
+            </a:pPr>
+            <a:r>
+              <a:rPr lang="en-US" sz="900" dirty="0">
+                <a:solidFill>
+                  <a:srgbClr val="5A6478"/>
+                </a:solidFill>
+                <a:latin typeface="Calibri" pitchFamily="34" charset="0"/>
+                <a:ea typeface="Calibri" pitchFamily="34" charset="-122"/>
+                <a:cs typeface="Calibri" pitchFamily="34" charset="-120"/>
+              </a:rPr>
+              <a:t>Close</a:t>
+            </a:r>
+            <a:endParaRPr lang="en-US" sz="900" dirty="0"/>
+          </a:p>
+        </p:txBody>
+      </p:sp>
+      <p:sp>
+        <p:nvSpPr>
+          <p:cNvPr id="12" name="Text 10"/>
+          <p:cNvSpPr/>
+          <p:nvPr/>
+        </p:nvSpPr>
+        <p:spPr>
+          <a:xfrm>
+            <a:off x="822960" y="1828800"/>
+            <a:ext cx="10515600" cy="457200"/>
+          </a:xfrm>
+          <a:prstGeom prst="rect">
+            <a:avLst/>
+          </a:prstGeom>
+          <a:noFill/>
+          <a:ln/>
+        </p:spPr>
+        <p:txBody>
+          <a:bodyPr wrap="square" lIns="0" tIns="0" rIns="0" bIns="0" rtlCol="0" anchor="ctr"/>
+          <a:lstStyle/>
+          <a:p>
+            <a:pPr indent="0" marL="0">
+              <a:buNone/>
+            </a:pPr>
+            <a:r>
+              <a:rPr lang="en-US" sz="1800" b="1" spc="300" kern="0" dirty="0">
+                <a:solidFill>
+                  <a:srgbClr val="5A6478"/>
+                </a:solidFill>
+                <a:latin typeface="Calibri" pitchFamily="34" charset="0"/>
+                <a:ea typeface="Calibri" pitchFamily="34" charset="-122"/>
+                <a:cs typeface="Calibri" pitchFamily="34" charset="-120"/>
+              </a:rPr>
+              <a:t>ACT II</a:t>
+            </a:r>
+            <a:endParaRPr lang="en-US" sz="1800" dirty="0"/>
+          </a:p>
+        </p:txBody>
+      </p:sp>
+      <p:sp>
+        <p:nvSpPr>
+          <p:cNvPr id="13" name="Text 11"/>
+          <p:cNvSpPr/>
+          <p:nvPr/>
+        </p:nvSpPr>
+        <p:spPr>
+          <a:xfrm>
+            <a:off x="822960" y="2286000"/>
+            <a:ext cx="10515600" cy="822960"/>
+          </a:xfrm>
+          <a:prstGeom prst="rect">
+            <a:avLst/>
+          </a:prstGeom>
+          <a:noFill/>
+          <a:ln/>
+        </p:spPr>
+        <p:txBody>
+          <a:bodyPr wrap="square" lIns="0" tIns="0" rIns="0" bIns="0" rtlCol="0" anchor="ctr"/>
+          <a:lstStyle/>
+          <a:p>
+            <a:pPr indent="0" marL="0">
+              <a:buNone/>
+            </a:pPr>
+            <a:r>
+              <a:rPr lang="en-US" sz="4000" b="1" dirty="0">
+                <a:solidFill>
+                  <a:srgbClr val="1E2761"/>
+                </a:solidFill>
+                <a:latin typeface="Cambria" pitchFamily="34" charset="0"/>
+                <a:ea typeface="Cambria" pitchFamily="34" charset="-122"/>
+                <a:cs typeface="Cambria" pitchFamily="34" charset="-120"/>
+              </a:rPr>
+              <a:t>Sanctioned change</a:t>
+            </a:r>
+            <a:endParaRPr lang="en-US" sz="4000" dirty="0"/>
+          </a:p>
+        </p:txBody>
+      </p:sp>
+      <p:sp>
+        <p:nvSpPr>
+          <p:cNvPr id="14" name="Text 12"/>
+          <p:cNvSpPr/>
+          <p:nvPr/>
+        </p:nvSpPr>
+        <p:spPr>
+          <a:xfrm>
+            <a:off x="822960" y="3154680"/>
+            <a:ext cx="10515600" cy="411480"/>
+          </a:xfrm>
+          <a:prstGeom prst="rect">
+            <a:avLst/>
+          </a:prstGeom>
+          <a:noFill/>
+          <a:ln/>
+        </p:spPr>
+        <p:txBody>
+          <a:bodyPr wrap="square" lIns="0" tIns="0" rIns="0" bIns="0" rtlCol="0" anchor="ctr"/>
+          <a:lstStyle/>
+          <a:p>
+            <a:pPr indent="0" marL="0">
+              <a:buNone/>
+            </a:pPr>
+            <a:r>
+              <a:rPr lang="en-US" sz="1500" i="1" dirty="0">
+                <a:solidFill>
+                  <a:srgbClr val="5A6478"/>
+                </a:solidFill>
+                <a:latin typeface="Calibri" pitchFamily="34" charset="0"/>
+                <a:ea typeface="Calibri" pitchFamily="34" charset="-122"/>
+                <a:cs typeface="Calibri" pitchFamily="34" charset="-120"/>
+              </a:rPr>
+              <a:t>scene 3 (breaking)</a:t>
+            </a:r>
+            <a:endParaRPr lang="en-US" sz="1500" dirty="0"/>
+          </a:p>
+        </p:txBody>
+      </p:sp>
+      <p:sp>
+        <p:nvSpPr>
+          <p:cNvPr id="15" name="Text 13"/>
+          <p:cNvSpPr/>
+          <p:nvPr/>
+        </p:nvSpPr>
+        <p:spPr>
+          <a:xfrm>
+            <a:off x="822960" y="3977640"/>
+            <a:ext cx="10241280" cy="1280160"/>
+          </a:xfrm>
+          <a:prstGeom prst="rect">
+            <a:avLst/>
+          </a:prstGeom>
+          <a:noFill/>
+          <a:ln/>
+        </p:spPr>
+        <p:txBody>
+          <a:bodyPr wrap="square" lIns="0" tIns="0" rIns="0" bIns="0" rtlCol="0" anchor="ctr"/>
+          <a:lstStyle/>
+          <a:p>
+            <a:pPr indent="0" marL="0">
+              <a:buNone/>
+            </a:pPr>
+            <a:r>
+              <a:rPr lang="en-US" sz="2000" i="1" dirty="0">
+                <a:solidFill>
+                  <a:srgbClr val="212121"/>
+                </a:solidFill>
+                <a:latin typeface="Calibri" pitchFamily="34" charset="0"/>
+                <a:ea typeface="Calibri" pitchFamily="34" charset="-122"/>
+                <a:cs typeface="Calibri" pitchFamily="34" charset="-120"/>
+              </a:rPr>
+              <a:t>A spec edit gets caught, examined, and blessed — and the system honestly reports a spec the implementation doesn't yet meet.</a:t>
+            </a:r>
+            <a:endParaRPr lang="en-US" sz="2000" dirty="0"/>
+          </a:p>
+        </p:txBody>
+      </p:sp>
+      <p:sp>
+        <p:nvSpPr>
+          <p:cNvPr id="16" name="Text 14"/>
+          <p:cNvSpPr/>
+          <p:nvPr/>
+        </p:nvSpPr>
+        <p:spPr>
+          <a:xfrm>
+            <a:off x="822960" y="6172200"/>
+            <a:ext cx="10515600" cy="365760"/>
+          </a:xfrm>
+          <a:prstGeom prst="rect">
+            <a:avLst/>
+          </a:prstGeom>
+          <a:noFill/>
+          <a:ln/>
+        </p:spPr>
+        <p:txBody>
+          <a:bodyPr wrap="square" lIns="0" tIns="0" rIns="0" bIns="0" rtlCol="0" anchor="ctr"/>
+          <a:lstStyle/>
+          <a:p>
+            <a:pPr indent="0" marL="0">
+              <a:buNone/>
+            </a:pPr>
+            <a:r>
+              <a:rPr lang="en-US" sz="1100" dirty="0">
+                <a:solidFill>
+                  <a:srgbClr val="5A6478"/>
+                </a:solidFill>
+                <a:latin typeface="Courier New" pitchFamily="34" charset="0"/>
+                <a:ea typeface="Courier New" pitchFamily="34" charset="-122"/>
+                <a:cs typeface="Courier New" pitchFamily="34" charset="-120"/>
+              </a:rPr>
+              <a:t>./examples/demo_isolette.sh --scenes 3 --drift breaking</a:t>
+            </a:r>
+            <a:endParaRPr lang="en-US" sz="1100" dirty="0"/>
+          </a:p>
+        </p:txBody>
+      </p:sp>
+    </p:spTree>
+  </p:cSld>
+  <p:clrMapOvr>
+    <a:masterClrMapping/>
+  </p:clrMapOvr>
+</p:sld>
+</file>
+
+<file path=ppt/slides/slide11.xml><?xml version="1.0" encoding="utf-8"?>
+<p:sld xmlns:a="http://schemas.openxmlformats.org/drawingml/2006/main" xmlns:r="http://schemas.openxmlformats.org/officeDocument/2006/relationships" xmlns:p="http://schemas.openxmlformats.org/presentationml/2006/main">
+  <p:cSld name="Slide 11">
+    <p:bg>
+      <p:bgPr>
+        <a:solidFill>
+          <a:srgbClr val="FFFFFF"/>
+        </a:solidFill>
+      </p:bgPr>
+    </p:bg>
+    <p:spTree>
+      <p:nvGrpSpPr>
+        <p:cNvPr id="1" name=""/>
+        <p:cNvGrpSpPr/>
+        <p:nvPr/>
+      </p:nvGrpSpPr>
+      <p:grpSpPr>
+        <a:xfrm>
+          <a:off x="0" y="0"/>
+          <a:ext cx="0" cy="0"/>
+          <a:chOff x="0" y="0"/>
+          <a:chExt cx="0" cy="0"/>
+        </a:xfrm>
+      </p:grpSpPr>
+      <p:sp>
+        <p:nvSpPr>
+          <p:cNvPr id="2" name="Shape 0"/>
+          <p:cNvSpPr/>
+          <p:nvPr/>
+        </p:nvSpPr>
+        <p:spPr>
+          <a:xfrm>
+            <a:off x="640080" y="201168"/>
+            <a:ext cx="2073859" cy="502920"/>
+          </a:xfrm>
+          <a:prstGeom prst="roundRect">
+            <a:avLst>
+              <a:gd name="adj" fmla="val 9091"/>
+            </a:avLst>
+          </a:prstGeom>
+          <a:solidFill>
+            <a:srgbClr val="E4EAF4"/>
+          </a:solidFill>
+          <a:ln/>
+        </p:spPr>
+      </p:sp>
+      <p:sp>
+        <p:nvSpPr>
+          <p:cNvPr id="3" name="Text 1"/>
+          <p:cNvSpPr/>
+          <p:nvPr/>
+        </p:nvSpPr>
+        <p:spPr>
+          <a:xfrm>
+            <a:off x="640080" y="201168"/>
+            <a:ext cx="2073859" cy="502920"/>
+          </a:xfrm>
+          <a:prstGeom prst="rect">
+            <a:avLst/>
+          </a:prstGeom>
+          <a:noFill/>
+          <a:ln/>
+        </p:spPr>
+        <p:txBody>
+          <a:bodyPr wrap="square" lIns="254" tIns="254" rIns="254" bIns="254" rtlCol="0" anchor="ctr"/>
+          <a:lstStyle/>
+          <a:p>
+            <a:pPr algn="ctr" indent="0" marL="0">
+              <a:buNone/>
+            </a:pPr>
+            <a:r>
+              <a:rPr lang="en-US" sz="900" dirty="0">
+                <a:solidFill>
+                  <a:srgbClr val="5A6478"/>
+                </a:solidFill>
+                <a:latin typeface="Calibri" pitchFamily="34" charset="0"/>
+                <a:ea typeface="Calibri" pitchFamily="34" charset="-122"/>
+                <a:cs typeface="Calibri" pitchFamily="34" charset="-120"/>
+              </a:rPr>
+              <a:t>Preliminaries</a:t>
+            </a:r>
+            <a:endParaRPr lang="en-US" sz="900" dirty="0"/>
+          </a:p>
+        </p:txBody>
+      </p:sp>
+      <p:sp>
+        <p:nvSpPr>
+          <p:cNvPr id="4" name="Shape 2"/>
+          <p:cNvSpPr/>
+          <p:nvPr/>
+        </p:nvSpPr>
+        <p:spPr>
+          <a:xfrm>
+            <a:off x="2841955" y="201168"/>
+            <a:ext cx="2073859" cy="502920"/>
+          </a:xfrm>
+          <a:prstGeom prst="roundRect">
+            <a:avLst>
+              <a:gd name="adj" fmla="val 9091"/>
+            </a:avLst>
+          </a:prstGeom>
+          <a:solidFill>
+            <a:srgbClr val="1E2761"/>
+          </a:solidFill>
+          <a:ln/>
+        </p:spPr>
+      </p:sp>
+      <p:sp>
+        <p:nvSpPr>
+          <p:cNvPr id="5" name="Text 3"/>
+          <p:cNvSpPr/>
+          <p:nvPr/>
+        </p:nvSpPr>
+        <p:spPr>
+          <a:xfrm>
+            <a:off x="2841955" y="201168"/>
+            <a:ext cx="2073859" cy="502920"/>
+          </a:xfrm>
+          <a:prstGeom prst="rect">
+            <a:avLst/>
+          </a:prstGeom>
+          <a:noFill/>
+          <a:ln/>
+        </p:spPr>
+        <p:txBody>
+          <a:bodyPr wrap="square" lIns="254" tIns="254" rIns="254" bIns="254" rtlCol="0" anchor="ctr"/>
+          <a:lstStyle/>
+          <a:p>
+            <a:pPr algn="ctr" indent="0" marL="0">
+              <a:buNone/>
+            </a:pPr>
+            <a:r>
+              <a:rPr lang="en-US" sz="900" b="1" dirty="0">
+                <a:solidFill>
+                  <a:srgbClr val="FFFFFF"/>
+                </a:solidFill>
+                <a:latin typeface="Calibri" pitchFamily="34" charset="0"/>
+                <a:ea typeface="Calibri" pitchFamily="34" charset="-122"/>
+                <a:cs typeface="Calibri" pitchFamily="34" charset="-120"/>
+              </a:rPr>
+              <a:t>Demo:</a:t>
+            </a:r>
+            <a:endParaRPr lang="en-US" sz="900" dirty="0"/>
+          </a:p>
+          <a:p>
+            <a:pPr algn="ctr" indent="0" marL="0">
+              <a:buNone/>
+            </a:pPr>
+            <a:r>
+              <a:rPr lang="en-US" sz="900" b="1" dirty="0">
+                <a:solidFill>
+                  <a:srgbClr val="FFFFFF"/>
+                </a:solidFill>
+                <a:latin typeface="Calibri" pitchFamily="34" charset="0"/>
+                <a:ea typeface="Calibri" pitchFamily="34" charset="-122"/>
+                <a:cs typeface="Calibri" pitchFamily="34" charset="-120"/>
+              </a:rPr>
+              <a:t>Isolette (SysMLv2 → Rust)</a:t>
+            </a:r>
+            <a:endParaRPr lang="en-US" sz="900" dirty="0"/>
+          </a:p>
+        </p:txBody>
+      </p:sp>
+      <p:sp>
+        <p:nvSpPr>
+          <p:cNvPr id="6" name="Shape 4"/>
+          <p:cNvSpPr/>
+          <p:nvPr/>
+        </p:nvSpPr>
+        <p:spPr>
+          <a:xfrm>
+            <a:off x="5043830" y="201168"/>
+            <a:ext cx="2073859" cy="502920"/>
+          </a:xfrm>
+          <a:prstGeom prst="roundRect">
+            <a:avLst>
+              <a:gd name="adj" fmla="val 9091"/>
+            </a:avLst>
+          </a:prstGeom>
+          <a:solidFill>
+            <a:srgbClr val="E4EAF4"/>
+          </a:solidFill>
+          <a:ln/>
+        </p:spPr>
+      </p:sp>
+      <p:sp>
+        <p:nvSpPr>
+          <p:cNvPr id="7" name="Text 5"/>
+          <p:cNvSpPr/>
+          <p:nvPr/>
+        </p:nvSpPr>
+        <p:spPr>
+          <a:xfrm>
+            <a:off x="5043830" y="201168"/>
+            <a:ext cx="2073859" cy="502920"/>
+          </a:xfrm>
+          <a:prstGeom prst="rect">
+            <a:avLst/>
+          </a:prstGeom>
+          <a:noFill/>
+          <a:ln/>
+        </p:spPr>
+        <p:txBody>
+          <a:bodyPr wrap="square" lIns="254" tIns="254" rIns="254" bIns="254" rtlCol="0" anchor="ctr"/>
+          <a:lstStyle/>
+          <a:p>
+            <a:pPr algn="ctr" indent="0" marL="0">
+              <a:buNone/>
+            </a:pPr>
+            <a:r>
+              <a:rPr lang="en-US" sz="900" dirty="0">
+                <a:solidFill>
+                  <a:srgbClr val="5A6478"/>
+                </a:solidFill>
+                <a:latin typeface="Calibri" pitchFamily="34" charset="0"/>
+                <a:ea typeface="Calibri" pitchFamily="34" charset="-122"/>
+                <a:cs typeface="Calibri" pitchFamily="34" charset="-120"/>
+              </a:rPr>
+              <a:t>Other Ecosystems</a:t>
+            </a:r>
+            <a:endParaRPr lang="en-US" sz="900" dirty="0"/>
+          </a:p>
+        </p:txBody>
+      </p:sp>
+      <p:sp>
+        <p:nvSpPr>
+          <p:cNvPr id="8" name="Shape 6"/>
+          <p:cNvSpPr/>
+          <p:nvPr/>
+        </p:nvSpPr>
+        <p:spPr>
+          <a:xfrm>
+            <a:off x="7245706" y="201168"/>
+            <a:ext cx="2073859" cy="502920"/>
+          </a:xfrm>
+          <a:prstGeom prst="roundRect">
+            <a:avLst>
+              <a:gd name="adj" fmla="val 9091"/>
+            </a:avLst>
+          </a:prstGeom>
+          <a:solidFill>
+            <a:srgbClr val="E4EAF4"/>
+          </a:solidFill>
+          <a:ln/>
+        </p:spPr>
+      </p:sp>
+      <p:sp>
+        <p:nvSpPr>
+          <p:cNvPr id="9" name="Text 7"/>
+          <p:cNvSpPr/>
+          <p:nvPr/>
+        </p:nvSpPr>
+        <p:spPr>
+          <a:xfrm>
+            <a:off x="7245706" y="201168"/>
+            <a:ext cx="2073859" cy="502920"/>
+          </a:xfrm>
+          <a:prstGeom prst="rect">
+            <a:avLst/>
+          </a:prstGeom>
+          <a:noFill/>
+          <a:ln/>
+        </p:spPr>
+        <p:txBody>
+          <a:bodyPr wrap="square" lIns="254" tIns="254" rIns="254" bIns="254" rtlCol="0" anchor="ctr"/>
+          <a:lstStyle/>
+          <a:p>
+            <a:pPr algn="ctr" indent="0" marL="0">
+              <a:buNone/>
+            </a:pPr>
+            <a:r>
+              <a:rPr lang="en-US" sz="900" dirty="0">
+                <a:solidFill>
+                  <a:srgbClr val="5A6478"/>
+                </a:solidFill>
+                <a:latin typeface="Calibri" pitchFamily="34" charset="0"/>
+                <a:ea typeface="Calibri" pitchFamily="34" charset="-122"/>
+                <a:cs typeface="Calibri" pitchFamily="34" charset="-120"/>
+              </a:rPr>
+              <a:t>AI in the Loop</a:t>
+            </a:r>
+            <a:endParaRPr lang="en-US" sz="900" dirty="0"/>
+          </a:p>
+        </p:txBody>
+      </p:sp>
+      <p:sp>
+        <p:nvSpPr>
+          <p:cNvPr id="10" name="Shape 8"/>
+          <p:cNvSpPr/>
+          <p:nvPr/>
+        </p:nvSpPr>
+        <p:spPr>
+          <a:xfrm>
+            <a:off x="9447581" y="201168"/>
+            <a:ext cx="2073859" cy="502920"/>
+          </a:xfrm>
+          <a:prstGeom prst="roundRect">
+            <a:avLst>
+              <a:gd name="adj" fmla="val 9091"/>
+            </a:avLst>
+          </a:prstGeom>
+          <a:solidFill>
+            <a:srgbClr val="E4EAF4"/>
+          </a:solidFill>
+          <a:ln/>
+        </p:spPr>
+      </p:sp>
+      <p:sp>
+        <p:nvSpPr>
+          <p:cNvPr id="11" name="Text 9"/>
+          <p:cNvSpPr/>
+          <p:nvPr/>
+        </p:nvSpPr>
+        <p:spPr>
+          <a:xfrm>
+            <a:off x="9447581" y="201168"/>
+            <a:ext cx="2073859" cy="502920"/>
+          </a:xfrm>
+          <a:prstGeom prst="rect">
+            <a:avLst/>
+          </a:prstGeom>
+          <a:noFill/>
+          <a:ln/>
+        </p:spPr>
+        <p:txBody>
+          <a:bodyPr wrap="square" lIns="254" tIns="254" rIns="254" bIns="254" rtlCol="0" anchor="ctr"/>
+          <a:lstStyle/>
+          <a:p>
+            <a:pPr algn="ctr" indent="0" marL="0">
+              <a:buNone/>
+            </a:pPr>
+            <a:r>
+              <a:rPr lang="en-US" sz="900" dirty="0">
+                <a:solidFill>
+                  <a:srgbClr val="5A6478"/>
+                </a:solidFill>
+                <a:latin typeface="Calibri" pitchFamily="34" charset="0"/>
+                <a:ea typeface="Calibri" pitchFamily="34" charset="-122"/>
+                <a:cs typeface="Calibri" pitchFamily="34" charset="-120"/>
+              </a:rPr>
+              <a:t>Close</a:t>
+            </a:r>
+            <a:endParaRPr lang="en-US" sz="900" dirty="0"/>
+          </a:p>
+        </p:txBody>
+      </p:sp>
+      <p:sp>
+        <p:nvSpPr>
+          <p:cNvPr id="12" name="Text 10"/>
+          <p:cNvSpPr/>
+          <p:nvPr/>
+        </p:nvSpPr>
+        <p:spPr>
+          <a:xfrm>
+            <a:off x="822960" y="1828800"/>
+            <a:ext cx="10515600" cy="457200"/>
+          </a:xfrm>
+          <a:prstGeom prst="rect">
+            <a:avLst/>
+          </a:prstGeom>
+          <a:noFill/>
+          <a:ln/>
+        </p:spPr>
+        <p:txBody>
+          <a:bodyPr wrap="square" lIns="0" tIns="0" rIns="0" bIns="0" rtlCol="0" anchor="ctr"/>
+          <a:lstStyle/>
+          <a:p>
+            <a:pPr indent="0" marL="0">
+              <a:buNone/>
+            </a:pPr>
+            <a:r>
+              <a:rPr lang="en-US" sz="1800" b="1" spc="300" kern="0" dirty="0">
+                <a:solidFill>
+                  <a:srgbClr val="5A6478"/>
+                </a:solidFill>
+                <a:latin typeface="Calibri" pitchFamily="34" charset="0"/>
+                <a:ea typeface="Calibri" pitchFamily="34" charset="-122"/>
+                <a:cs typeface="Calibri" pitchFamily="34" charset="-120"/>
+              </a:rPr>
+              <a:t>ACT III</a:t>
+            </a:r>
+            <a:endParaRPr lang="en-US" sz="1800" dirty="0"/>
+          </a:p>
+        </p:txBody>
+      </p:sp>
+      <p:sp>
+        <p:nvSpPr>
+          <p:cNvPr id="13" name="Text 11"/>
+          <p:cNvSpPr/>
+          <p:nvPr/>
+        </p:nvSpPr>
+        <p:spPr>
+          <a:xfrm>
+            <a:off x="822960" y="2286000"/>
+            <a:ext cx="10515600" cy="822960"/>
+          </a:xfrm>
+          <a:prstGeom prst="rect">
+            <a:avLst/>
+          </a:prstGeom>
+          <a:noFill/>
+          <a:ln/>
+        </p:spPr>
+        <p:txBody>
+          <a:bodyPr wrap="square" lIns="0" tIns="0" rIns="0" bIns="0" rtlCol="0" anchor="ctr"/>
+          <a:lstStyle/>
+          <a:p>
+            <a:pPr indent="0" marL="0">
+              <a:buNone/>
+            </a:pPr>
+            <a:r>
+              <a:rPr lang="en-US" sz="4000" b="1" dirty="0">
+                <a:solidFill>
+                  <a:srgbClr val="1E2761"/>
+                </a:solidFill>
+                <a:latin typeface="Cambria" pitchFamily="34" charset="0"/>
+                <a:ea typeface="Cambria" pitchFamily="34" charset="-122"/>
+                <a:cs typeface="Cambria" pitchFamily="34" charset="-120"/>
+              </a:rPr>
+              <a:t>Unsanctioned change, repaired</a:t>
+            </a:r>
+            <a:endParaRPr lang="en-US" sz="4000" dirty="0"/>
+          </a:p>
+        </p:txBody>
+      </p:sp>
+      <p:sp>
+        <p:nvSpPr>
+          <p:cNvPr id="14" name="Text 12"/>
+          <p:cNvSpPr/>
+          <p:nvPr/>
+        </p:nvSpPr>
+        <p:spPr>
+          <a:xfrm>
+            <a:off x="822960" y="3154680"/>
+            <a:ext cx="10515600" cy="411480"/>
+          </a:xfrm>
+          <a:prstGeom prst="rect">
+            <a:avLst/>
+          </a:prstGeom>
+          <a:noFill/>
+          <a:ln/>
+        </p:spPr>
+        <p:txBody>
+          <a:bodyPr wrap="square" lIns="0" tIns="0" rIns="0" bIns="0" rtlCol="0" anchor="ctr"/>
+          <a:lstStyle/>
+          <a:p>
+            <a:pPr indent="0" marL="0">
+              <a:buNone/>
+            </a:pPr>
+            <a:r>
+              <a:rPr lang="en-US" sz="1500" i="1" dirty="0">
+                <a:solidFill>
+                  <a:srgbClr val="5A6478"/>
+                </a:solidFill>
+                <a:latin typeface="Calibri" pitchFamily="34" charset="0"/>
+                <a:ea typeface="Calibri" pitchFamily="34" charset="-122"/>
+                <a:cs typeface="Calibri" pitchFamily="34" charset="-120"/>
+              </a:rPr>
+              <a:t>scene 2</a:t>
+            </a:r>
+            <a:endParaRPr lang="en-US" sz="1500" dirty="0"/>
+          </a:p>
+        </p:txBody>
+      </p:sp>
+      <p:sp>
+        <p:nvSpPr>
+          <p:cNvPr id="15" name="Text 13"/>
+          <p:cNvSpPr/>
+          <p:nvPr/>
+        </p:nvSpPr>
+        <p:spPr>
+          <a:xfrm>
+            <a:off x="822960" y="3977640"/>
+            <a:ext cx="10241280" cy="1280160"/>
+          </a:xfrm>
+          <a:prstGeom prst="rect">
+            <a:avLst/>
+          </a:prstGeom>
+          <a:noFill/>
+          <a:ln/>
+        </p:spPr>
+        <p:txBody>
+          <a:bodyPr wrap="square" lIns="0" tIns="0" rIns="0" bIns="0" rtlCol="0" anchor="ctr"/>
+          <a:lstStyle/>
+          <a:p>
+            <a:pPr indent="0" marL="0">
+              <a:buNone/>
+            </a:pPr>
+            <a:r>
+              <a:rPr lang="en-US" sz="2000" i="1" dirty="0">
+                <a:solidFill>
+                  <a:srgbClr val="212121"/>
+                </a:solidFill>
+                <a:latin typeface="Calibri" pitchFamily="34" charset="0"/>
+                <a:ea typeface="Calibri" pitchFamily="34" charset="-122"/>
+                <a:cs typeface="Calibri" pitchFamily="34" charset="-120"/>
+              </a:rPr>
+              <a:t>The ladder diagnoses by exhaustion — watch it repair the right artifact, and watch standing return only by re-measurement.</a:t>
+            </a:r>
+            <a:endParaRPr lang="en-US" sz="2000" dirty="0"/>
+          </a:p>
+        </p:txBody>
+      </p:sp>
+      <p:sp>
+        <p:nvSpPr>
+          <p:cNvPr id="16" name="Text 14"/>
+          <p:cNvSpPr/>
+          <p:nvPr/>
+        </p:nvSpPr>
+        <p:spPr>
+          <a:xfrm>
+            <a:off x="822960" y="6172200"/>
+            <a:ext cx="10515600" cy="365760"/>
+          </a:xfrm>
+          <a:prstGeom prst="rect">
+            <a:avLst/>
+          </a:prstGeom>
+          <a:noFill/>
+          <a:ln/>
+        </p:spPr>
+        <p:txBody>
+          <a:bodyPr wrap="square" lIns="0" tIns="0" rIns="0" bIns="0" rtlCol="0" anchor="ctr"/>
+          <a:lstStyle/>
+          <a:p>
+            <a:pPr indent="0" marL="0">
+              <a:buNone/>
+            </a:pPr>
+            <a:r>
+              <a:rPr lang="en-US" sz="1100" dirty="0">
+                <a:solidFill>
+                  <a:srgbClr val="5A6478"/>
+                </a:solidFill>
+                <a:latin typeface="Courier New" pitchFamily="34" charset="0"/>
+                <a:ea typeface="Courier New" pitchFamily="34" charset="-122"/>
+                <a:cs typeface="Courier New" pitchFamily="34" charset="-120"/>
+              </a:rPr>
+              <a:t>./examples/demo_isolette.sh --scenes 2</a:t>
+            </a:r>
+            <a:endParaRPr lang="en-US" sz="1100" dirty="0"/>
+          </a:p>
+        </p:txBody>
+      </p:sp>
+    </p:spTree>
+  </p:cSld>
+  <p:clrMapOvr>
+    <a:masterClrMapping/>
+  </p:clrMapOvr>
+</p:sld>
+</file>
+
+<file path=ppt/slides/slide12.xml><?xml version="1.0" encoding="utf-8"?>
+<p:sld xmlns:a="http://schemas.openxmlformats.org/drawingml/2006/main" xmlns:r="http://schemas.openxmlformats.org/officeDocument/2006/relationships" xmlns:p="http://schemas.openxmlformats.org/presentationml/2006/main">
+  <p:cSld name="Slide 12">
+    <p:bg>
+      <p:bgPr>
+        <a:solidFill>
+          <a:srgbClr val="FFFFFF"/>
+        </a:solidFill>
+      </p:bgPr>
+    </p:bg>
+    <p:spTree>
+      <p:nvGrpSpPr>
+        <p:cNvPr id="1" name=""/>
+        <p:cNvGrpSpPr/>
+        <p:nvPr/>
+      </p:nvGrpSpPr>
+      <p:grpSpPr>
+        <a:xfrm>
+          <a:off x="0" y="0"/>
+          <a:ext cx="0" cy="0"/>
+          <a:chOff x="0" y="0"/>
+          <a:chExt cx="0" cy="0"/>
+        </a:xfrm>
+      </p:grpSpPr>
+      <p:sp>
+        <p:nvSpPr>
+          <p:cNvPr id="2" name="Shape 0"/>
+          <p:cNvSpPr/>
+          <p:nvPr/>
+        </p:nvSpPr>
+        <p:spPr>
+          <a:xfrm>
+            <a:off x="640080" y="201168"/>
+            <a:ext cx="2073859" cy="502920"/>
+          </a:xfrm>
+          <a:prstGeom prst="roundRect">
+            <a:avLst>
+              <a:gd name="adj" fmla="val 9091"/>
+            </a:avLst>
+          </a:prstGeom>
+          <a:solidFill>
+            <a:srgbClr val="E4EAF4"/>
+          </a:solidFill>
+          <a:ln/>
+        </p:spPr>
+      </p:sp>
+      <p:sp>
+        <p:nvSpPr>
+          <p:cNvPr id="3" name="Text 1"/>
+          <p:cNvSpPr/>
+          <p:nvPr/>
+        </p:nvSpPr>
+        <p:spPr>
+          <a:xfrm>
+            <a:off x="640080" y="201168"/>
+            <a:ext cx="2073859" cy="502920"/>
+          </a:xfrm>
+          <a:prstGeom prst="rect">
+            <a:avLst/>
+          </a:prstGeom>
+          <a:noFill/>
+          <a:ln/>
+        </p:spPr>
+        <p:txBody>
+          <a:bodyPr wrap="square" lIns="254" tIns="254" rIns="254" bIns="254" rtlCol="0" anchor="ctr"/>
+          <a:lstStyle/>
+          <a:p>
+            <a:pPr algn="ctr" indent="0" marL="0">
+              <a:buNone/>
+            </a:pPr>
+            <a:r>
+              <a:rPr lang="en-US" sz="900" dirty="0">
+                <a:solidFill>
+                  <a:srgbClr val="5A6478"/>
+                </a:solidFill>
+                <a:latin typeface="Calibri" pitchFamily="34" charset="0"/>
+                <a:ea typeface="Calibri" pitchFamily="34" charset="-122"/>
+                <a:cs typeface="Calibri" pitchFamily="34" charset="-120"/>
+              </a:rPr>
+              <a:t>Preliminaries</a:t>
+            </a:r>
+            <a:endParaRPr lang="en-US" sz="900" dirty="0"/>
+          </a:p>
+        </p:txBody>
+      </p:sp>
+      <p:sp>
+        <p:nvSpPr>
+          <p:cNvPr id="4" name="Shape 2"/>
+          <p:cNvSpPr/>
+          <p:nvPr/>
+        </p:nvSpPr>
+        <p:spPr>
+          <a:xfrm>
+            <a:off x="2841955" y="201168"/>
+            <a:ext cx="2073859" cy="502920"/>
+          </a:xfrm>
+          <a:prstGeom prst="roundRect">
+            <a:avLst>
+              <a:gd name="adj" fmla="val 9091"/>
+            </a:avLst>
+          </a:prstGeom>
+          <a:solidFill>
+            <a:srgbClr val="1E2761"/>
+          </a:solidFill>
+          <a:ln/>
+        </p:spPr>
+      </p:sp>
+      <p:sp>
+        <p:nvSpPr>
+          <p:cNvPr id="5" name="Text 3"/>
+          <p:cNvSpPr/>
+          <p:nvPr/>
+        </p:nvSpPr>
+        <p:spPr>
+          <a:xfrm>
+            <a:off x="2841955" y="201168"/>
+            <a:ext cx="2073859" cy="502920"/>
+          </a:xfrm>
+          <a:prstGeom prst="rect">
+            <a:avLst/>
+          </a:prstGeom>
+          <a:noFill/>
+          <a:ln/>
+        </p:spPr>
+        <p:txBody>
+          <a:bodyPr wrap="square" lIns="254" tIns="254" rIns="254" bIns="254" rtlCol="0" anchor="ctr"/>
+          <a:lstStyle/>
+          <a:p>
+            <a:pPr algn="ctr" indent="0" marL="0">
+              <a:buNone/>
+            </a:pPr>
+            <a:r>
+              <a:rPr lang="en-US" sz="900" b="1" dirty="0">
+                <a:solidFill>
+                  <a:srgbClr val="FFFFFF"/>
+                </a:solidFill>
+                <a:latin typeface="Calibri" pitchFamily="34" charset="0"/>
+                <a:ea typeface="Calibri" pitchFamily="34" charset="-122"/>
+                <a:cs typeface="Calibri" pitchFamily="34" charset="-120"/>
+              </a:rPr>
+              <a:t>Demo:</a:t>
+            </a:r>
+            <a:endParaRPr lang="en-US" sz="900" dirty="0"/>
+          </a:p>
+          <a:p>
+            <a:pPr algn="ctr" indent="0" marL="0">
+              <a:buNone/>
+            </a:pPr>
+            <a:r>
+              <a:rPr lang="en-US" sz="900" b="1" dirty="0">
+                <a:solidFill>
+                  <a:srgbClr val="FFFFFF"/>
+                </a:solidFill>
+                <a:latin typeface="Calibri" pitchFamily="34" charset="0"/>
+                <a:ea typeface="Calibri" pitchFamily="34" charset="-122"/>
+                <a:cs typeface="Calibri" pitchFamily="34" charset="-120"/>
+              </a:rPr>
+              <a:t>Isolette (SysMLv2 → Rust)</a:t>
+            </a:r>
+            <a:endParaRPr lang="en-US" sz="900" dirty="0"/>
+          </a:p>
+        </p:txBody>
+      </p:sp>
+      <p:sp>
+        <p:nvSpPr>
+          <p:cNvPr id="6" name="Shape 4"/>
+          <p:cNvSpPr/>
+          <p:nvPr/>
+        </p:nvSpPr>
+        <p:spPr>
+          <a:xfrm>
+            <a:off x="5043830" y="201168"/>
+            <a:ext cx="2073859" cy="502920"/>
+          </a:xfrm>
+          <a:prstGeom prst="roundRect">
+            <a:avLst>
+              <a:gd name="adj" fmla="val 9091"/>
+            </a:avLst>
+          </a:prstGeom>
+          <a:solidFill>
+            <a:srgbClr val="E4EAF4"/>
+          </a:solidFill>
+          <a:ln/>
+        </p:spPr>
+      </p:sp>
+      <p:sp>
+        <p:nvSpPr>
+          <p:cNvPr id="7" name="Text 5"/>
+          <p:cNvSpPr/>
+          <p:nvPr/>
+        </p:nvSpPr>
+        <p:spPr>
+          <a:xfrm>
+            <a:off x="5043830" y="201168"/>
+            <a:ext cx="2073859" cy="502920"/>
+          </a:xfrm>
+          <a:prstGeom prst="rect">
+            <a:avLst/>
+          </a:prstGeom>
+          <a:noFill/>
+          <a:ln/>
+        </p:spPr>
+        <p:txBody>
+          <a:bodyPr wrap="square" lIns="254" tIns="254" rIns="254" bIns="254" rtlCol="0" anchor="ctr"/>
+          <a:lstStyle/>
+          <a:p>
+            <a:pPr algn="ctr" indent="0" marL="0">
+              <a:buNone/>
+            </a:pPr>
+            <a:r>
+              <a:rPr lang="en-US" sz="900" dirty="0">
+                <a:solidFill>
+                  <a:srgbClr val="5A6478"/>
+                </a:solidFill>
+                <a:latin typeface="Calibri" pitchFamily="34" charset="0"/>
+                <a:ea typeface="Calibri" pitchFamily="34" charset="-122"/>
+                <a:cs typeface="Calibri" pitchFamily="34" charset="-120"/>
+              </a:rPr>
+              <a:t>Other Ecosystems</a:t>
+            </a:r>
+            <a:endParaRPr lang="en-US" sz="900" dirty="0"/>
+          </a:p>
+        </p:txBody>
+      </p:sp>
+      <p:sp>
+        <p:nvSpPr>
+          <p:cNvPr id="8" name="Shape 6"/>
+          <p:cNvSpPr/>
+          <p:nvPr/>
+        </p:nvSpPr>
+        <p:spPr>
+          <a:xfrm>
+            <a:off x="7245706" y="201168"/>
+            <a:ext cx="2073859" cy="502920"/>
+          </a:xfrm>
+          <a:prstGeom prst="roundRect">
+            <a:avLst>
+              <a:gd name="adj" fmla="val 9091"/>
+            </a:avLst>
+          </a:prstGeom>
+          <a:solidFill>
+            <a:srgbClr val="E4EAF4"/>
+          </a:solidFill>
+          <a:ln/>
+        </p:spPr>
+      </p:sp>
+      <p:sp>
+        <p:nvSpPr>
+          <p:cNvPr id="9" name="Text 7"/>
+          <p:cNvSpPr/>
+          <p:nvPr/>
+        </p:nvSpPr>
+        <p:spPr>
+          <a:xfrm>
+            <a:off x="7245706" y="201168"/>
+            <a:ext cx="2073859" cy="502920"/>
+          </a:xfrm>
+          <a:prstGeom prst="rect">
+            <a:avLst/>
+          </a:prstGeom>
+          <a:noFill/>
+          <a:ln/>
+        </p:spPr>
+        <p:txBody>
+          <a:bodyPr wrap="square" lIns="254" tIns="254" rIns="254" bIns="254" rtlCol="0" anchor="ctr"/>
+          <a:lstStyle/>
+          <a:p>
+            <a:pPr algn="ctr" indent="0" marL="0">
+              <a:buNone/>
+            </a:pPr>
+            <a:r>
+              <a:rPr lang="en-US" sz="900" dirty="0">
+                <a:solidFill>
+                  <a:srgbClr val="5A6478"/>
+                </a:solidFill>
+                <a:latin typeface="Calibri" pitchFamily="34" charset="0"/>
+                <a:ea typeface="Calibri" pitchFamily="34" charset="-122"/>
+                <a:cs typeface="Calibri" pitchFamily="34" charset="-120"/>
+              </a:rPr>
+              <a:t>AI in the Loop</a:t>
+            </a:r>
+            <a:endParaRPr lang="en-US" sz="900" dirty="0"/>
+          </a:p>
+        </p:txBody>
+      </p:sp>
+      <p:sp>
+        <p:nvSpPr>
+          <p:cNvPr id="10" name="Shape 8"/>
+          <p:cNvSpPr/>
+          <p:nvPr/>
+        </p:nvSpPr>
+        <p:spPr>
+          <a:xfrm>
+            <a:off x="9447581" y="201168"/>
+            <a:ext cx="2073859" cy="502920"/>
+          </a:xfrm>
+          <a:prstGeom prst="roundRect">
+            <a:avLst>
+              <a:gd name="adj" fmla="val 9091"/>
+            </a:avLst>
+          </a:prstGeom>
+          <a:solidFill>
+            <a:srgbClr val="E4EAF4"/>
+          </a:solidFill>
+          <a:ln/>
+        </p:spPr>
+      </p:sp>
+      <p:sp>
+        <p:nvSpPr>
+          <p:cNvPr id="11" name="Text 9"/>
+          <p:cNvSpPr/>
+          <p:nvPr/>
+        </p:nvSpPr>
+        <p:spPr>
+          <a:xfrm>
+            <a:off x="9447581" y="201168"/>
+            <a:ext cx="2073859" cy="502920"/>
+          </a:xfrm>
+          <a:prstGeom prst="rect">
+            <a:avLst/>
+          </a:prstGeom>
+          <a:noFill/>
+          <a:ln/>
+        </p:spPr>
+        <p:txBody>
+          <a:bodyPr wrap="square" lIns="254" tIns="254" rIns="254" bIns="254" rtlCol="0" anchor="ctr"/>
+          <a:lstStyle/>
+          <a:p>
+            <a:pPr algn="ctr" indent="0" marL="0">
+              <a:buNone/>
+            </a:pPr>
+            <a:r>
+              <a:rPr lang="en-US" sz="900" dirty="0">
+                <a:solidFill>
+                  <a:srgbClr val="5A6478"/>
+                </a:solidFill>
+                <a:latin typeface="Calibri" pitchFamily="34" charset="0"/>
+                <a:ea typeface="Calibri" pitchFamily="34" charset="-122"/>
+                <a:cs typeface="Calibri" pitchFamily="34" charset="-120"/>
+              </a:rPr>
+              <a:t>Close</a:t>
+            </a:r>
+            <a:endParaRPr lang="en-US" sz="900" dirty="0"/>
+          </a:p>
+        </p:txBody>
+      </p:sp>
+      <p:sp>
+        <p:nvSpPr>
+          <p:cNvPr id="12" name="Text 10"/>
+          <p:cNvSpPr/>
+          <p:nvPr/>
+        </p:nvSpPr>
+        <p:spPr>
+          <a:xfrm>
+            <a:off x="822960" y="1828800"/>
+            <a:ext cx="10515600" cy="457200"/>
+          </a:xfrm>
+          <a:prstGeom prst="rect">
+            <a:avLst/>
+          </a:prstGeom>
+          <a:noFill/>
+          <a:ln/>
+        </p:spPr>
+        <p:txBody>
+          <a:bodyPr wrap="square" lIns="0" tIns="0" rIns="0" bIns="0" rtlCol="0" anchor="ctr"/>
+          <a:lstStyle/>
+          <a:p>
+            <a:pPr indent="0" marL="0">
+              <a:buNone/>
+            </a:pPr>
+            <a:r>
+              <a:rPr lang="en-US" sz="1800" b="1" spc="300" kern="0" dirty="0">
+                <a:solidFill>
+                  <a:srgbClr val="5A6478"/>
+                </a:solidFill>
+                <a:latin typeface="Calibri" pitchFamily="34" charset="0"/>
+                <a:ea typeface="Calibri" pitchFamily="34" charset="-122"/>
+                <a:cs typeface="Calibri" pitchFamily="34" charset="-120"/>
+              </a:rPr>
+              <a:t>ACT IV</a:t>
+            </a:r>
+            <a:endParaRPr lang="en-US" sz="1800" dirty="0"/>
+          </a:p>
+        </p:txBody>
+      </p:sp>
+      <p:sp>
+        <p:nvSpPr>
+          <p:cNvPr id="13" name="Text 11"/>
+          <p:cNvSpPr/>
+          <p:nvPr/>
+        </p:nvSpPr>
+        <p:spPr>
+          <a:xfrm>
+            <a:off x="822960" y="2286000"/>
+            <a:ext cx="10515600" cy="822960"/>
+          </a:xfrm>
+          <a:prstGeom prst="rect">
+            <a:avLst/>
+          </a:prstGeom>
+          <a:noFill/>
+          <a:ln/>
+        </p:spPr>
+        <p:txBody>
+          <a:bodyPr wrap="square" lIns="0" tIns="0" rIns="0" bIns="0" rtlCol="0" anchor="ctr"/>
+          <a:lstStyle/>
+          <a:p>
+            <a:pPr indent="0" marL="0">
+              <a:buNone/>
+            </a:pPr>
+            <a:r>
+              <a:rPr lang="en-US" sz="4000" b="1" dirty="0">
+                <a:solidFill>
+                  <a:srgbClr val="1E2761"/>
+                </a:solidFill>
+                <a:latin typeface="Cambria" pitchFamily="34" charset="0"/>
+                <a:ea typeface="Cambria" pitchFamily="34" charset="-122"/>
+                <a:cs typeface="Cambria" pitchFamily="34" charset="-120"/>
+              </a:rPr>
+              <a:t>Attacks on trust itself</a:t>
+            </a:r>
+            <a:endParaRPr lang="en-US" sz="4000" dirty="0"/>
+          </a:p>
+        </p:txBody>
+      </p:sp>
+      <p:sp>
+        <p:nvSpPr>
+          <p:cNvPr id="14" name="Text 12"/>
+          <p:cNvSpPr/>
+          <p:nvPr/>
+        </p:nvSpPr>
+        <p:spPr>
+          <a:xfrm>
+            <a:off x="822960" y="3154680"/>
+            <a:ext cx="10515600" cy="411480"/>
+          </a:xfrm>
+          <a:prstGeom prst="rect">
+            <a:avLst/>
+          </a:prstGeom>
+          <a:noFill/>
+          <a:ln/>
+        </p:spPr>
+        <p:txBody>
+          <a:bodyPr wrap="square" lIns="0" tIns="0" rIns="0" bIns="0" rtlCol="0" anchor="ctr"/>
+          <a:lstStyle/>
+          <a:p>
+            <a:pPr indent="0" marL="0">
+              <a:buNone/>
+            </a:pPr>
+            <a:r>
+              <a:rPr lang="en-US" sz="1500" i="1" dirty="0">
+                <a:solidFill>
+                  <a:srgbClr val="5A6478"/>
+                </a:solidFill>
+                <a:latin typeface="Calibri" pitchFamily="34" charset="0"/>
+                <a:ea typeface="Calibri" pitchFamily="34" charset="-122"/>
+                <a:cs typeface="Calibri" pitchFamily="34" charset="-120"/>
+              </a:rPr>
+              <a:t>scenes 6 + 7</a:t>
+            </a:r>
+            <a:endParaRPr lang="en-US" sz="1500" dirty="0"/>
+          </a:p>
+        </p:txBody>
+      </p:sp>
+      <p:sp>
+        <p:nvSpPr>
+          <p:cNvPr id="15" name="Text 13"/>
+          <p:cNvSpPr/>
+          <p:nvPr/>
+        </p:nvSpPr>
+        <p:spPr>
+          <a:xfrm>
+            <a:off x="822960" y="3977640"/>
+            <a:ext cx="10241280" cy="1280160"/>
+          </a:xfrm>
+          <a:prstGeom prst="rect">
+            <a:avLst/>
+          </a:prstGeom>
+          <a:noFill/>
+          <a:ln/>
+        </p:spPr>
+        <p:txBody>
+          <a:bodyPr wrap="square" lIns="0" tIns="0" rIns="0" bIns="0" rtlCol="0" anchor="ctr"/>
+          <a:lstStyle/>
+          <a:p>
+            <a:pPr indent="0" marL="0">
+              <a:buNone/>
+            </a:pPr>
+            <a:r>
+              <a:rPr lang="en-US" sz="2000" i="1" dirty="0">
+                <a:solidFill>
+                  <a:srgbClr val="212121"/>
+                </a:solidFill>
+                <a:latin typeface="Calibri" pitchFamily="34" charset="0"/>
+                <a:ea typeface="Calibri" pitchFamily="34" charset="-122"/>
+                <a:cs typeface="Calibri" pitchFamily="34" charset="-120"/>
+              </a:rPr>
+              <a:t>Three tampers with the trust state, three attributed refusals — then a tampered tool, and every proof cell poisons fail-closed. Nothing repairs a baseline.</a:t>
+            </a:r>
+            <a:endParaRPr lang="en-US" sz="2000" dirty="0"/>
+          </a:p>
+        </p:txBody>
+      </p:sp>
+      <p:sp>
+        <p:nvSpPr>
+          <p:cNvPr id="16" name="Text 14"/>
+          <p:cNvSpPr/>
+          <p:nvPr/>
+        </p:nvSpPr>
+        <p:spPr>
+          <a:xfrm>
+            <a:off x="822960" y="6172200"/>
+            <a:ext cx="10515600" cy="365760"/>
+          </a:xfrm>
+          <a:prstGeom prst="rect">
+            <a:avLst/>
+          </a:prstGeom>
+          <a:noFill/>
+          <a:ln/>
+        </p:spPr>
+        <p:txBody>
+          <a:bodyPr wrap="square" lIns="0" tIns="0" rIns="0" bIns="0" rtlCol="0" anchor="ctr"/>
+          <a:lstStyle/>
+          <a:p>
+            <a:pPr indent="0" marL="0">
+              <a:buNone/>
+            </a:pPr>
+            <a:r>
+              <a:rPr lang="en-US" sz="1100" dirty="0">
+                <a:solidFill>
+                  <a:srgbClr val="5A6478"/>
+                </a:solidFill>
+                <a:latin typeface="Courier New" pitchFamily="34" charset="0"/>
+                <a:ea typeface="Courier New" pitchFamily="34" charset="-122"/>
+                <a:cs typeface="Courier New" pitchFamily="34" charset="-120"/>
+              </a:rPr>
+              <a:t>./examples/demo_isolette.sh --scenes "6 7"</a:t>
+            </a:r>
+            <a:endParaRPr lang="en-US" sz="1100" dirty="0"/>
+          </a:p>
+        </p:txBody>
+      </p:sp>
+    </p:spTree>
+  </p:cSld>
+  <p:clrMapOvr>
+    <a:masterClrMapping/>
+  </p:clrMapOvr>
+</p:sld>
+</file>
+
+<file path=ppt/slides/slide13.xml><?xml version="1.0" encoding="utf-8"?>
+<p:sld xmlns:a="http://schemas.openxmlformats.org/drawingml/2006/main" xmlns:r="http://schemas.openxmlformats.org/officeDocument/2006/relationships" xmlns:p="http://schemas.openxmlformats.org/presentationml/2006/main">
+  <p:cSld name="Slide 13">
+    <p:bg>
+      <p:bgPr>
+        <a:solidFill>
+          <a:srgbClr val="FFFFFF"/>
+        </a:solidFill>
+      </p:bgPr>
+    </p:bg>
+    <p:spTree>
+      <p:nvGrpSpPr>
+        <p:cNvPr id="1" name=""/>
+        <p:cNvGrpSpPr/>
+        <p:nvPr/>
+      </p:nvGrpSpPr>
+      <p:grpSpPr>
+        <a:xfrm>
+          <a:off x="0" y="0"/>
+          <a:ext cx="0" cy="0"/>
+          <a:chOff x="0" y="0"/>
+          <a:chExt cx="0" cy="0"/>
+        </a:xfrm>
+      </p:grpSpPr>
+      <p:sp>
+        <p:nvSpPr>
+          <p:cNvPr id="2" name="Shape 0"/>
+          <p:cNvSpPr/>
+          <p:nvPr/>
+        </p:nvSpPr>
+        <p:spPr>
+          <a:xfrm>
+            <a:off x="640080" y="201168"/>
+            <a:ext cx="2073859" cy="502920"/>
+          </a:xfrm>
+          <a:prstGeom prst="roundRect">
+            <a:avLst>
+              <a:gd name="adj" fmla="val 9091"/>
+            </a:avLst>
+          </a:prstGeom>
+          <a:solidFill>
+            <a:srgbClr val="E4EAF4"/>
+          </a:solidFill>
+          <a:ln/>
+        </p:spPr>
+      </p:sp>
+      <p:sp>
+        <p:nvSpPr>
+          <p:cNvPr id="3" name="Text 1"/>
+          <p:cNvSpPr/>
+          <p:nvPr/>
+        </p:nvSpPr>
+        <p:spPr>
+          <a:xfrm>
+            <a:off x="640080" y="201168"/>
+            <a:ext cx="2073859" cy="502920"/>
+          </a:xfrm>
+          <a:prstGeom prst="rect">
+            <a:avLst/>
+          </a:prstGeom>
+          <a:noFill/>
+          <a:ln/>
+        </p:spPr>
+        <p:txBody>
+          <a:bodyPr wrap="square" lIns="254" tIns="254" rIns="254" bIns="254" rtlCol="0" anchor="ctr"/>
+          <a:lstStyle/>
+          <a:p>
+            <a:pPr algn="ctr" indent="0" marL="0">
+              <a:buNone/>
+            </a:pPr>
+            <a:r>
+              <a:rPr lang="en-US" sz="900" dirty="0">
+                <a:solidFill>
+                  <a:srgbClr val="5A6478"/>
+                </a:solidFill>
+                <a:latin typeface="Calibri" pitchFamily="34" charset="0"/>
+                <a:ea typeface="Calibri" pitchFamily="34" charset="-122"/>
+                <a:cs typeface="Calibri" pitchFamily="34" charset="-120"/>
+              </a:rPr>
+              <a:t>Preliminaries</a:t>
+            </a:r>
+            <a:endParaRPr lang="en-US" sz="900" dirty="0"/>
+          </a:p>
+        </p:txBody>
+      </p:sp>
+      <p:sp>
+        <p:nvSpPr>
+          <p:cNvPr id="4" name="Shape 2"/>
+          <p:cNvSpPr/>
+          <p:nvPr/>
+        </p:nvSpPr>
+        <p:spPr>
+          <a:xfrm>
+            <a:off x="2841955" y="201168"/>
+            <a:ext cx="2073859" cy="502920"/>
+          </a:xfrm>
+          <a:prstGeom prst="roundRect">
+            <a:avLst>
+              <a:gd name="adj" fmla="val 9091"/>
+            </a:avLst>
+          </a:prstGeom>
+          <a:solidFill>
+            <a:srgbClr val="1E2761"/>
+          </a:solidFill>
+          <a:ln/>
+        </p:spPr>
+      </p:sp>
+      <p:sp>
+        <p:nvSpPr>
+          <p:cNvPr id="5" name="Text 3"/>
+          <p:cNvSpPr/>
+          <p:nvPr/>
+        </p:nvSpPr>
+        <p:spPr>
+          <a:xfrm>
+            <a:off x="2841955" y="201168"/>
+            <a:ext cx="2073859" cy="502920"/>
+          </a:xfrm>
+          <a:prstGeom prst="rect">
+            <a:avLst/>
+          </a:prstGeom>
+          <a:noFill/>
+          <a:ln/>
+        </p:spPr>
+        <p:txBody>
+          <a:bodyPr wrap="square" lIns="254" tIns="254" rIns="254" bIns="254" rtlCol="0" anchor="ctr"/>
+          <a:lstStyle/>
+          <a:p>
+            <a:pPr algn="ctr" indent="0" marL="0">
+              <a:buNone/>
+            </a:pPr>
+            <a:r>
+              <a:rPr lang="en-US" sz="900" b="1" dirty="0">
+                <a:solidFill>
+                  <a:srgbClr val="FFFFFF"/>
+                </a:solidFill>
+                <a:latin typeface="Calibri" pitchFamily="34" charset="0"/>
+                <a:ea typeface="Calibri" pitchFamily="34" charset="-122"/>
+                <a:cs typeface="Calibri" pitchFamily="34" charset="-120"/>
+              </a:rPr>
+              <a:t>Demo:</a:t>
+            </a:r>
+            <a:endParaRPr lang="en-US" sz="900" dirty="0"/>
+          </a:p>
+          <a:p>
+            <a:pPr algn="ctr" indent="0" marL="0">
+              <a:buNone/>
+            </a:pPr>
+            <a:r>
+              <a:rPr lang="en-US" sz="900" b="1" dirty="0">
+                <a:solidFill>
+                  <a:srgbClr val="FFFFFF"/>
+                </a:solidFill>
+                <a:latin typeface="Calibri" pitchFamily="34" charset="0"/>
+                <a:ea typeface="Calibri" pitchFamily="34" charset="-122"/>
+                <a:cs typeface="Calibri" pitchFamily="34" charset="-120"/>
+              </a:rPr>
+              <a:t>Isolette (SysMLv2 → Rust)</a:t>
+            </a:r>
+            <a:endParaRPr lang="en-US" sz="900" dirty="0"/>
+          </a:p>
+        </p:txBody>
+      </p:sp>
+      <p:sp>
+        <p:nvSpPr>
+          <p:cNvPr id="6" name="Shape 4"/>
+          <p:cNvSpPr/>
+          <p:nvPr/>
+        </p:nvSpPr>
+        <p:spPr>
+          <a:xfrm>
+            <a:off x="5043830" y="201168"/>
+            <a:ext cx="2073859" cy="502920"/>
+          </a:xfrm>
+          <a:prstGeom prst="roundRect">
+            <a:avLst>
+              <a:gd name="adj" fmla="val 9091"/>
+            </a:avLst>
+          </a:prstGeom>
+          <a:solidFill>
+            <a:srgbClr val="E4EAF4"/>
+          </a:solidFill>
+          <a:ln/>
+        </p:spPr>
+      </p:sp>
+      <p:sp>
+        <p:nvSpPr>
+          <p:cNvPr id="7" name="Text 5"/>
+          <p:cNvSpPr/>
+          <p:nvPr/>
+        </p:nvSpPr>
+        <p:spPr>
+          <a:xfrm>
+            <a:off x="5043830" y="201168"/>
+            <a:ext cx="2073859" cy="502920"/>
+          </a:xfrm>
+          <a:prstGeom prst="rect">
+            <a:avLst/>
+          </a:prstGeom>
+          <a:noFill/>
+          <a:ln/>
+        </p:spPr>
+        <p:txBody>
+          <a:bodyPr wrap="square" lIns="254" tIns="254" rIns="254" bIns="254" rtlCol="0" anchor="ctr"/>
+          <a:lstStyle/>
+          <a:p>
+            <a:pPr algn="ctr" indent="0" marL="0">
+              <a:buNone/>
+            </a:pPr>
+            <a:r>
+              <a:rPr lang="en-US" sz="900" dirty="0">
+                <a:solidFill>
+                  <a:srgbClr val="5A6478"/>
+                </a:solidFill>
+                <a:latin typeface="Calibri" pitchFamily="34" charset="0"/>
+                <a:ea typeface="Calibri" pitchFamily="34" charset="-122"/>
+                <a:cs typeface="Calibri" pitchFamily="34" charset="-120"/>
+              </a:rPr>
+              <a:t>Other Ecosystems</a:t>
+            </a:r>
+            <a:endParaRPr lang="en-US" sz="900" dirty="0"/>
+          </a:p>
+        </p:txBody>
+      </p:sp>
+      <p:sp>
+        <p:nvSpPr>
+          <p:cNvPr id="8" name="Shape 6"/>
+          <p:cNvSpPr/>
+          <p:nvPr/>
+        </p:nvSpPr>
+        <p:spPr>
+          <a:xfrm>
+            <a:off x="7245706" y="201168"/>
+            <a:ext cx="2073859" cy="502920"/>
+          </a:xfrm>
+          <a:prstGeom prst="roundRect">
+            <a:avLst>
+              <a:gd name="adj" fmla="val 9091"/>
+            </a:avLst>
+          </a:prstGeom>
+          <a:solidFill>
+            <a:srgbClr val="E4EAF4"/>
+          </a:solidFill>
+          <a:ln/>
+        </p:spPr>
+      </p:sp>
+      <p:sp>
+        <p:nvSpPr>
+          <p:cNvPr id="9" name="Text 7"/>
+          <p:cNvSpPr/>
+          <p:nvPr/>
+        </p:nvSpPr>
+        <p:spPr>
+          <a:xfrm>
+            <a:off x="7245706" y="201168"/>
+            <a:ext cx="2073859" cy="502920"/>
+          </a:xfrm>
+          <a:prstGeom prst="rect">
+            <a:avLst/>
+          </a:prstGeom>
+          <a:noFill/>
+          <a:ln/>
+        </p:spPr>
+        <p:txBody>
+          <a:bodyPr wrap="square" lIns="254" tIns="254" rIns="254" bIns="254" rtlCol="0" anchor="ctr"/>
+          <a:lstStyle/>
+          <a:p>
+            <a:pPr algn="ctr" indent="0" marL="0">
+              <a:buNone/>
+            </a:pPr>
+            <a:r>
+              <a:rPr lang="en-US" sz="900" dirty="0">
+                <a:solidFill>
+                  <a:srgbClr val="5A6478"/>
+                </a:solidFill>
+                <a:latin typeface="Calibri" pitchFamily="34" charset="0"/>
+                <a:ea typeface="Calibri" pitchFamily="34" charset="-122"/>
+                <a:cs typeface="Calibri" pitchFamily="34" charset="-120"/>
+              </a:rPr>
+              <a:t>AI in the Loop</a:t>
+            </a:r>
+            <a:endParaRPr lang="en-US" sz="900" dirty="0"/>
+          </a:p>
+        </p:txBody>
+      </p:sp>
+      <p:sp>
+        <p:nvSpPr>
+          <p:cNvPr id="10" name="Shape 8"/>
+          <p:cNvSpPr/>
+          <p:nvPr/>
+        </p:nvSpPr>
+        <p:spPr>
+          <a:xfrm>
+            <a:off x="9447581" y="201168"/>
+            <a:ext cx="2073859" cy="502920"/>
+          </a:xfrm>
+          <a:prstGeom prst="roundRect">
+            <a:avLst>
+              <a:gd name="adj" fmla="val 9091"/>
+            </a:avLst>
+          </a:prstGeom>
+          <a:solidFill>
+            <a:srgbClr val="E4EAF4"/>
+          </a:solidFill>
+          <a:ln/>
+        </p:spPr>
+      </p:sp>
+      <p:sp>
+        <p:nvSpPr>
+          <p:cNvPr id="11" name="Text 9"/>
+          <p:cNvSpPr/>
+          <p:nvPr/>
+        </p:nvSpPr>
+        <p:spPr>
+          <a:xfrm>
+            <a:off x="9447581" y="201168"/>
+            <a:ext cx="2073859" cy="502920"/>
+          </a:xfrm>
+          <a:prstGeom prst="rect">
+            <a:avLst/>
+          </a:prstGeom>
+          <a:noFill/>
+          <a:ln/>
+        </p:spPr>
+        <p:txBody>
+          <a:bodyPr wrap="square" lIns="254" tIns="254" rIns="254" bIns="254" rtlCol="0" anchor="ctr"/>
+          <a:lstStyle/>
+          <a:p>
+            <a:pPr algn="ctr" indent="0" marL="0">
+              <a:buNone/>
+            </a:pPr>
+            <a:r>
+              <a:rPr lang="en-US" sz="900" dirty="0">
+                <a:solidFill>
+                  <a:srgbClr val="5A6478"/>
+                </a:solidFill>
+                <a:latin typeface="Calibri" pitchFamily="34" charset="0"/>
+                <a:ea typeface="Calibri" pitchFamily="34" charset="-122"/>
+                <a:cs typeface="Calibri" pitchFamily="34" charset="-120"/>
+              </a:rPr>
+              <a:t>Close</a:t>
+            </a:r>
+            <a:endParaRPr lang="en-US" sz="900" dirty="0"/>
+          </a:p>
+        </p:txBody>
+      </p:sp>
+      <p:sp>
+        <p:nvSpPr>
+          <p:cNvPr id="12" name="Text 10"/>
+          <p:cNvSpPr/>
+          <p:nvPr/>
+        </p:nvSpPr>
+        <p:spPr>
+          <a:xfrm>
+            <a:off x="822960" y="1828800"/>
+            <a:ext cx="10515600" cy="457200"/>
+          </a:xfrm>
+          <a:prstGeom prst="rect">
+            <a:avLst/>
+          </a:prstGeom>
+          <a:noFill/>
+          <a:ln/>
+        </p:spPr>
+        <p:txBody>
+          <a:bodyPr wrap="square" lIns="0" tIns="0" rIns="0" bIns="0" rtlCol="0" anchor="ctr"/>
+          <a:lstStyle/>
+          <a:p>
+            <a:pPr indent="0" marL="0">
+              <a:buNone/>
+            </a:pPr>
+            <a:r>
+              <a:rPr lang="en-US" sz="1800" b="1" spc="300" kern="0" dirty="0">
+                <a:solidFill>
+                  <a:srgbClr val="5A6478"/>
+                </a:solidFill>
+                <a:latin typeface="Calibri" pitchFamily="34" charset="0"/>
+                <a:ea typeface="Calibri" pitchFamily="34" charset="-122"/>
+                <a:cs typeface="Calibri" pitchFamily="34" charset="-120"/>
+              </a:rPr>
+              <a:t>ACT V</a:t>
+            </a:r>
+            <a:endParaRPr lang="en-US" sz="1800" dirty="0"/>
+          </a:p>
+        </p:txBody>
+      </p:sp>
+      <p:sp>
+        <p:nvSpPr>
+          <p:cNvPr id="13" name="Text 11"/>
+          <p:cNvSpPr/>
+          <p:nvPr/>
+        </p:nvSpPr>
+        <p:spPr>
+          <a:xfrm>
+            <a:off x="822960" y="2286000"/>
+            <a:ext cx="10515600" cy="822960"/>
+          </a:xfrm>
+          <a:prstGeom prst="rect">
+            <a:avLst/>
+          </a:prstGeom>
+          <a:noFill/>
+          <a:ln/>
+        </p:spPr>
+        <p:txBody>
+          <a:bodyPr wrap="square" lIns="0" tIns="0" rIns="0" bIns="0" rtlCol="0" anchor="ctr"/>
+          <a:lstStyle/>
+          <a:p>
+            <a:pPr indent="0" marL="0">
+              <a:buNone/>
+            </a:pPr>
+            <a:r>
+              <a:rPr lang="en-US" sz="4000" b="1" dirty="0">
+                <a:solidFill>
+                  <a:srgbClr val="1E2761"/>
+                </a:solidFill>
+                <a:latin typeface="Cambria" pitchFamily="34" charset="0"/>
+                <a:ea typeface="Cambria" pitchFamily="34" charset="-122"/>
+                <a:cs typeface="Cambria" pitchFamily="34" charset="-120"/>
+              </a:rPr>
+              <a:t>“Verification succeeded” is not enough</a:t>
+            </a:r>
+            <a:endParaRPr lang="en-US" sz="4000" dirty="0"/>
+          </a:p>
+        </p:txBody>
+      </p:sp>
+      <p:sp>
+        <p:nvSpPr>
+          <p:cNvPr id="14" name="Text 12"/>
+          <p:cNvSpPr/>
+          <p:nvPr/>
+        </p:nvSpPr>
+        <p:spPr>
+          <a:xfrm>
+            <a:off x="822960" y="3154680"/>
+            <a:ext cx="10515600" cy="411480"/>
+          </a:xfrm>
+          <a:prstGeom prst="rect">
+            <a:avLst/>
+          </a:prstGeom>
+          <a:noFill/>
+          <a:ln/>
+        </p:spPr>
+        <p:txBody>
+          <a:bodyPr wrap="square" lIns="0" tIns="0" rIns="0" bIns="0" rtlCol="0" anchor="ctr"/>
+          <a:lstStyle/>
+          <a:p>
+            <a:pPr indent="0" marL="0">
+              <a:buNone/>
+            </a:pPr>
+            <a:r>
+              <a:rPr lang="en-US" sz="1500" i="1" dirty="0">
+                <a:solidFill>
+                  <a:srgbClr val="5A6478"/>
+                </a:solidFill>
+                <a:latin typeface="Calibri" pitchFamily="34" charset="0"/>
+                <a:ea typeface="Calibri" pitchFamily="34" charset="-122"/>
+                <a:cs typeface="Calibri" pitchFamily="34" charset="-120"/>
+              </a:rPr>
+              <a:t>scene 12</a:t>
+            </a:r>
+            <a:endParaRPr lang="en-US" sz="1500" dirty="0"/>
+          </a:p>
+        </p:txBody>
+      </p:sp>
+      <p:sp>
+        <p:nvSpPr>
+          <p:cNvPr id="15" name="Text 13"/>
+          <p:cNvSpPr/>
+          <p:nvPr/>
+        </p:nvSpPr>
+        <p:spPr>
+          <a:xfrm>
+            <a:off x="822960" y="3977640"/>
+            <a:ext cx="10241280" cy="1280160"/>
+          </a:xfrm>
+          <a:prstGeom prst="rect">
+            <a:avLst/>
+          </a:prstGeom>
+          <a:noFill/>
+          <a:ln/>
+        </p:spPr>
+        <p:txBody>
+          <a:bodyPr wrap="square" lIns="0" tIns="0" rIns="0" bIns="0" rtlCol="0" anchor="ctr"/>
+          <a:lstStyle/>
+          <a:p>
+            <a:pPr indent="0" marL="0">
+              <a:buNone/>
+            </a:pPr>
+            <a:r>
+              <a:rPr lang="en-US" sz="2000" i="1" dirty="0">
+                <a:solidFill>
+                  <a:srgbClr val="212121"/>
+                </a:solidFill>
+                <a:latin typeface="Calibri" pitchFamily="34" charset="0"/>
+                <a:ea typeface="Calibri" pitchFamily="34" charset="-122"/>
+                <a:cs typeface="Calibri" pitchFamily="34" charset="-120"/>
+              </a:rPr>
+              <a:t>Every proof passes, every scan is silent — the heat command is inverted anyway. Only the bytes tell.</a:t>
+            </a:r>
+            <a:endParaRPr lang="en-US" sz="2000" dirty="0"/>
+          </a:p>
+        </p:txBody>
+      </p:sp>
+      <p:sp>
+        <p:nvSpPr>
+          <p:cNvPr id="16" name="Text 14"/>
+          <p:cNvSpPr/>
+          <p:nvPr/>
+        </p:nvSpPr>
+        <p:spPr>
+          <a:xfrm>
+            <a:off x="822960" y="6172200"/>
+            <a:ext cx="10515600" cy="365760"/>
+          </a:xfrm>
+          <a:prstGeom prst="rect">
+            <a:avLst/>
+          </a:prstGeom>
+          <a:noFill/>
+          <a:ln/>
+        </p:spPr>
+        <p:txBody>
+          <a:bodyPr wrap="square" lIns="0" tIns="0" rIns="0" bIns="0" rtlCol="0" anchor="ctr"/>
+          <a:lstStyle/>
+          <a:p>
+            <a:pPr indent="0" marL="0">
+              <a:buNone/>
+            </a:pPr>
+            <a:r>
+              <a:rPr lang="en-US" sz="1100" dirty="0">
+                <a:solidFill>
+                  <a:srgbClr val="5A6478"/>
+                </a:solidFill>
+                <a:latin typeface="Courier New" pitchFamily="34" charset="0"/>
+                <a:ea typeface="Courier New" pitchFamily="34" charset="-122"/>
+                <a:cs typeface="Courier New" pitchFamily="34" charset="-120"/>
+              </a:rPr>
+              <a:t>./examples/demo_isolette.sh --scenes 12</a:t>
+            </a:r>
+            <a:endParaRPr lang="en-US" sz="1100" dirty="0"/>
+          </a:p>
+        </p:txBody>
+      </p:sp>
+    </p:spTree>
+  </p:cSld>
+  <p:clrMapOvr>
+    <a:masterClrMapping/>
+  </p:clrMapOvr>
+</p:sld>
+</file>
+
+<file path=ppt/slides/slide14.xml><?xml version="1.0" encoding="utf-8"?>
+<p:sld xmlns:a="http://schemas.openxmlformats.org/drawingml/2006/main" xmlns:r="http://schemas.openxmlformats.org/officeDocument/2006/relationships" xmlns:p="http://schemas.openxmlformats.org/presentationml/2006/main">
+  <p:cSld name="Slide 14">
+    <p:bg>
+      <p:bgPr>
+        <a:solidFill>
+          <a:srgbClr val="FFFFFF"/>
+        </a:solidFill>
+      </p:bgPr>
+    </p:bg>
+    <p:spTree>
+      <p:nvGrpSpPr>
+        <p:cNvPr id="1" name=""/>
+        <p:cNvGrpSpPr/>
+        <p:nvPr/>
+      </p:nvGrpSpPr>
+      <p:grpSpPr>
+        <a:xfrm>
+          <a:off x="0" y="0"/>
+          <a:ext cx="0" cy="0"/>
+          <a:chOff x="0" y="0"/>
+          <a:chExt cx="0" cy="0"/>
+        </a:xfrm>
+      </p:grpSpPr>
+      <p:sp>
+        <p:nvSpPr>
+          <p:cNvPr id="2" name="Text 0"/>
+          <p:cNvSpPr/>
+          <p:nvPr/>
+        </p:nvSpPr>
+        <p:spPr>
+          <a:xfrm>
+            <a:off x="640080" y="411480"/>
+            <a:ext cx="10972800" cy="731520"/>
+          </a:xfrm>
+          <a:prstGeom prst="rect">
+            <a:avLst/>
+          </a:prstGeom>
+          <a:noFill/>
+          <a:ln/>
+        </p:spPr>
+        <p:txBody>
+          <a:bodyPr wrap="square" lIns="0" tIns="0" rIns="0" bIns="0" rtlCol="0" anchor="ctr"/>
+          <a:lstStyle/>
+          <a:p>
+            <a:pPr indent="0" marL="0">
+              <a:buNone/>
+            </a:pPr>
+            <a:r>
+              <a:rPr lang="en-US" sz="3600" b="1" dirty="0">
+                <a:solidFill>
+                  <a:srgbClr val="1E2761"/>
+                </a:solidFill>
+                <a:latin typeface="Cambria" pitchFamily="34" charset="0"/>
+                <a:ea typeface="Cambria" pitchFamily="34" charset="-122"/>
+                <a:cs typeface="Cambria" pitchFamily="34" charset="-120"/>
+              </a:rPr>
+              <a:t>References</a:t>
+            </a:r>
+            <a:endParaRPr lang="en-US" sz="3600" dirty="0"/>
+          </a:p>
+        </p:txBody>
+      </p:sp>
+      <p:sp>
+        <p:nvSpPr>
+          <p:cNvPr id="3" name="Text 1"/>
+          <p:cNvSpPr/>
+          <p:nvPr/>
+        </p:nvSpPr>
+        <p:spPr>
+          <a:xfrm>
+            <a:off x="640080" y="1371600"/>
+            <a:ext cx="10972800" cy="5120640"/>
+          </a:xfrm>
+          <a:prstGeom prst="rect">
+            <a:avLst/>
+          </a:prstGeom>
+          <a:noFill/>
+          <a:ln/>
+        </p:spPr>
+        <p:txBody>
+          <a:bodyPr wrap="square" lIns="0" tIns="0" rIns="0" bIns="0" rtlCol="0" anchor="t"/>
+          <a:lstStyle/>
+          <a:p>
+            <a:pPr algn="l" indent="0" marL="0">
+              <a:spcAft>
+                <a:spcPts val="400"/>
+              </a:spcAft>
+              <a:buNone/>
+            </a:pPr>
+            <a:r>
+              <a:rPr lang="en-US" sz="1400" b="1" dirty="0">
+                <a:solidFill>
+                  <a:srgbClr val="1E2761"/>
+                </a:solidFill>
+                <a:latin typeface="Calibri" pitchFamily="34" charset="0"/>
+                <a:ea typeface="Calibri" pitchFamily="34" charset="-122"/>
+                <a:cs typeface="Calibri" pitchFamily="34" charset="-120"/>
+              </a:rPr>
+              <a:t>The isolette &amp; HAMR (Kansas State)</a:t>
+            </a:r>
+            <a:endParaRPr lang="en-US" sz="1400" dirty="0"/>
+          </a:p>
+          <a:p>
+            <a:pPr algn="l" marL="342900" indent="-342900">
+              <a:spcAft>
+                <a:spcPts val="300"/>
+              </a:spcAft>
+              <a:buSzPct val="100000"/>
+              <a:buChar char="•"/>
+            </a:pPr>
+            <a:r>
+              <a:rPr lang="en-US" sz="1150" dirty="0">
+                <a:solidFill>
+                  <a:srgbClr val="212121"/>
+                </a:solidFill>
+                <a:latin typeface="Calibri" pitchFamily="34" charset="0"/>
+                <a:ea typeface="Calibri" pitchFamily="34" charset="-122"/>
+                <a:cs typeface="Calibri" pitchFamily="34" charset="-120"/>
+              </a:rPr>
+              <a:t>Hatcliff &amp; Belt, </a:t>
+            </a:r>
+            <a:pPr algn="l" indent="0" marL="0">
+              <a:spcAft>
+                <a:spcPts val="300"/>
+              </a:spcAft>
+              <a:buNone/>
+            </a:pPr>
+            <a:r>
+              <a:rPr lang="en-US" sz="1150" i="1" dirty="0">
+                <a:solidFill>
+                  <a:srgbClr val="212121"/>
+                </a:solidFill>
+                <a:latin typeface="Calibri" pitchFamily="34" charset="0"/>
+                <a:ea typeface="Calibri" pitchFamily="34" charset="-122"/>
+                <a:cs typeface="Calibri" pitchFamily="34" charset="-120"/>
+              </a:rPr>
+              <a:t>The Isolette System: Illustrating End-to-End Artifacts for Rigorous Model-Based Engineering</a:t>
+            </a:r>
+            <a:pPr algn="l" indent="0" marL="0">
+              <a:spcAft>
+                <a:spcPts val="300"/>
+              </a:spcAft>
+              <a:buNone/>
+            </a:pPr>
+            <a:r>
+              <a:rPr lang="en-US" sz="1150" dirty="0">
+                <a:solidFill>
+                  <a:srgbClr val="212121"/>
+                </a:solidFill>
+                <a:latin typeface="Calibri" pitchFamily="34" charset="0"/>
+                <a:ea typeface="Calibri" pitchFamily="34" charset="-122"/>
+                <a:cs typeface="Calibri" pitchFamily="34" charset="-120"/>
+              </a:rPr>
+              <a:t>, Springer LNCS 15240, 2025</a:t>
+            </a:r>
+            <a:endParaRPr lang="en-US" sz="1400" dirty="0"/>
+          </a:p>
+          <a:p>
+            <a:pPr algn="l" marL="342900" indent="-342900">
+              <a:spcAft>
+                <a:spcPts val="300"/>
+              </a:spcAft>
+              <a:buSzPct val="100000"/>
+              <a:buChar char="•"/>
+            </a:pPr>
+            <a:r>
+              <a:rPr lang="en-US" sz="1150" dirty="0">
+                <a:solidFill>
+                  <a:srgbClr val="212121"/>
+                </a:solidFill>
+                <a:latin typeface="Calibri" pitchFamily="34" charset="0"/>
+                <a:ea typeface="Calibri" pitchFamily="34" charset="-122"/>
+                <a:cs typeface="Calibri" pitchFamily="34" charset="-120"/>
+              </a:rPr>
+              <a:t>Hatcliff, Belt, Robby, McKenzie, Liang, </a:t>
+            </a:r>
+            <a:pPr algn="l" indent="0" marL="0">
+              <a:spcAft>
+                <a:spcPts val="300"/>
+              </a:spcAft>
+              <a:buNone/>
+            </a:pPr>
+            <a:r>
+              <a:rPr lang="en-US" sz="1150" i="1" dirty="0">
+                <a:solidFill>
+                  <a:srgbClr val="212121"/>
+                </a:solidFill>
+                <a:latin typeface="Calibri" pitchFamily="34" charset="0"/>
+                <a:ea typeface="Calibri" pitchFamily="34" charset="-122"/>
+                <a:cs typeface="Calibri" pitchFamily="34" charset="-120"/>
+              </a:rPr>
+              <a:t>End-to-End Formal Methods Integrated Development with SysMLv2 Using HAMR</a:t>
+            </a:r>
+            <a:pPr algn="l" indent="0" marL="0">
+              <a:spcAft>
+                <a:spcPts val="300"/>
+              </a:spcAft>
+              <a:buNone/>
+            </a:pPr>
+            <a:r>
+              <a:rPr lang="en-US" sz="1150" dirty="0">
+                <a:solidFill>
+                  <a:srgbClr val="212121"/>
+                </a:solidFill>
+                <a:latin typeface="Calibri" pitchFamily="34" charset="0"/>
+                <a:ea typeface="Calibri" pitchFamily="34" charset="-122"/>
+                <a:cs typeface="Calibri" pitchFamily="34" charset="-120"/>
+              </a:rPr>
+              <a:t>, Springer, 2025</a:t>
+            </a:r>
+            <a:endParaRPr lang="en-US" sz="1400" dirty="0"/>
+          </a:p>
+          <a:p>
+            <a:pPr algn="l" marL="342900" indent="-342900">
+              <a:spcAft>
+                <a:spcPts val="300"/>
+              </a:spcAft>
+              <a:buSzPct val="100000"/>
+              <a:buChar char="•"/>
+            </a:pPr>
+            <a:r>
+              <a:rPr lang="en-US" sz="1150" dirty="0">
+                <a:solidFill>
+                  <a:srgbClr val="212121"/>
+                </a:solidFill>
+                <a:latin typeface="Calibri" pitchFamily="34" charset="0"/>
+                <a:ea typeface="Calibri" pitchFamily="34" charset="-122"/>
+                <a:cs typeface="Calibri" pitchFamily="34" charset="-120"/>
+              </a:rPr>
+              <a:t>Hatcliff, Belt, Robby, Carpenter, </a:t>
+            </a:r>
+            <a:pPr algn="l" indent="0" marL="0">
+              <a:spcAft>
+                <a:spcPts val="300"/>
+              </a:spcAft>
+              <a:buNone/>
+            </a:pPr>
+            <a:r>
+              <a:rPr lang="en-US" sz="1150" i="1" dirty="0">
+                <a:solidFill>
+                  <a:srgbClr val="212121"/>
+                </a:solidFill>
+                <a:latin typeface="Calibri" pitchFamily="34" charset="0"/>
+                <a:ea typeface="Calibri" pitchFamily="34" charset="-122"/>
+                <a:cs typeface="Calibri" pitchFamily="34" charset="-120"/>
+              </a:rPr>
+              <a:t>HAMR: An AADL Multi-platform Code Generation Toolset</a:t>
+            </a:r>
+            <a:pPr algn="l" indent="0" marL="0">
+              <a:spcAft>
+                <a:spcPts val="300"/>
+              </a:spcAft>
+              <a:buNone/>
+            </a:pPr>
+            <a:r>
+              <a:rPr lang="en-US" sz="1150" dirty="0">
+                <a:solidFill>
+                  <a:srgbClr val="212121"/>
+                </a:solidFill>
+                <a:latin typeface="Calibri" pitchFamily="34" charset="0"/>
+                <a:ea typeface="Calibri" pitchFamily="34" charset="-122"/>
+                <a:cs typeface="Calibri" pitchFamily="34" charset="-120"/>
+              </a:rPr>
+              <a:t>, ISoLA 2021, LNCS 13036, pp. 274–295</a:t>
+            </a:r>
+            <a:endParaRPr lang="en-US" sz="1400" dirty="0"/>
+          </a:p>
+          <a:p>
+            <a:pPr algn="l" marL="342900" indent="-342900">
+              <a:spcAft>
+                <a:spcPts val="300"/>
+              </a:spcAft>
+              <a:buSzPct val="100000"/>
+              <a:buChar char="•"/>
+            </a:pPr>
+            <a:r>
+              <a:rPr lang="en-US" sz="1150" dirty="0">
+                <a:solidFill>
+                  <a:srgbClr val="212121"/>
+                </a:solidFill>
+                <a:latin typeface="Calibri" pitchFamily="34" charset="0"/>
+                <a:ea typeface="Calibri" pitchFamily="34" charset="-122"/>
+                <a:cs typeface="Calibri" pitchFamily="34" charset="-120"/>
+              </a:rPr>
+              <a:t>Lempia &amp; Miller, </a:t>
+            </a:r>
+            <a:pPr algn="l" indent="0" marL="0">
+              <a:spcAft>
+                <a:spcPts val="300"/>
+              </a:spcAft>
+              <a:buNone/>
+            </a:pPr>
+            <a:r>
+              <a:rPr lang="en-US" sz="1150" i="1" dirty="0">
+                <a:solidFill>
+                  <a:srgbClr val="212121"/>
+                </a:solidFill>
+                <a:latin typeface="Calibri" pitchFamily="34" charset="0"/>
+                <a:ea typeface="Calibri" pitchFamily="34" charset="-122"/>
+                <a:cs typeface="Calibri" pitchFamily="34" charset="-120"/>
+              </a:rPr>
+              <a:t>Requirements Engineering Management Handbook</a:t>
+            </a:r>
+            <a:pPr algn="l" indent="0" marL="0">
+              <a:spcAft>
+                <a:spcPts val="300"/>
+              </a:spcAft>
+              <a:buNone/>
+            </a:pPr>
+            <a:r>
+              <a:rPr lang="en-US" sz="1150" dirty="0">
+                <a:solidFill>
+                  <a:srgbClr val="212121"/>
+                </a:solidFill>
+                <a:latin typeface="Calibri" pitchFamily="34" charset="0"/>
+                <a:ea typeface="Calibri" pitchFamily="34" charset="-122"/>
+                <a:cs typeface="Calibri" pitchFamily="34" charset="-120"/>
+              </a:rPr>
+              <a:t>, DOT/FAA/AR-08/32, 2009</a:t>
+            </a:r>
+            <a:endParaRPr lang="en-US" sz="1400" dirty="0"/>
+          </a:p>
+          <a:p>
+            <a:pPr algn="l" marL="342900" indent="-342900">
+              <a:spcAft>
+                <a:spcPts val="300"/>
+              </a:spcAft>
+              <a:buSzPct val="100000"/>
+              <a:buChar char="•"/>
+            </a:pPr>
+            <a:r>
+              <a:rPr lang="en-US" sz="1150" dirty="0">
+                <a:solidFill>
+                  <a:srgbClr val="212121"/>
+                </a:solidFill>
+                <a:latin typeface="Calibri" pitchFamily="34" charset="0"/>
+                <a:ea typeface="Calibri" pitchFamily="34" charset="-122"/>
+                <a:cs typeface="Calibri" pitchFamily="34" charset="-120"/>
+              </a:rPr>
+              <a:t>INSPECTA models: github.com/loonwerks/INSPECTA-models</a:t>
+            </a:r>
+            <a:endParaRPr lang="en-US" sz="1400" dirty="0"/>
+          </a:p>
+          <a:p>
+            <a:pPr algn="l" indent="0" marL="0">
+              <a:spcBef>
+                <a:spcPts val="1200"/>
+              </a:spcBef>
+              <a:spcAft>
+                <a:spcPts val="400"/>
+              </a:spcAft>
+              <a:buNone/>
+            </a:pPr>
+            <a:r>
+              <a:rPr lang="en-US" sz="1400" b="1" dirty="0">
+                <a:solidFill>
+                  <a:srgbClr val="1E2761"/>
+                </a:solidFill>
+                <a:latin typeface="Calibri" pitchFamily="34" charset="0"/>
+                <a:ea typeface="Calibri" pitchFamily="34" charset="-122"/>
+                <a:cs typeface="Calibri" pitchFamily="34" charset="-120"/>
+              </a:rPr>
+              <a:t>Attestation foundations</a:t>
+            </a:r>
+            <a:endParaRPr lang="en-US" sz="1400" dirty="0"/>
+          </a:p>
+          <a:p>
+            <a:pPr algn="l" marL="342900" indent="-342900">
+              <a:spcAft>
+                <a:spcPts val="300"/>
+              </a:spcAft>
+              <a:buSzPct val="100000"/>
+              <a:buChar char="•"/>
+            </a:pPr>
+            <a:r>
+              <a:rPr lang="en-US" sz="1150" dirty="0">
+                <a:solidFill>
+                  <a:srgbClr val="212121"/>
+                </a:solidFill>
+                <a:latin typeface="Calibri" pitchFamily="34" charset="0"/>
+                <a:ea typeface="Calibri" pitchFamily="34" charset="-122"/>
+                <a:cs typeface="Calibri" pitchFamily="34" charset="-120"/>
+              </a:rPr>
+              <a:t>Ramsdell, Rowe, Alexander, Helble, Loscocco, Pendergrass, Petz, </a:t>
+            </a:r>
+            <a:pPr algn="l" indent="0" marL="0">
+              <a:spcAft>
+                <a:spcPts val="300"/>
+              </a:spcAft>
+              <a:buNone/>
+            </a:pPr>
+            <a:r>
+              <a:rPr lang="en-US" sz="1150" i="1" dirty="0">
+                <a:solidFill>
+                  <a:srgbClr val="212121"/>
+                </a:solidFill>
+                <a:latin typeface="Calibri" pitchFamily="34" charset="0"/>
+                <a:ea typeface="Calibri" pitchFamily="34" charset="-122"/>
+                <a:cs typeface="Calibri" pitchFamily="34" charset="-120"/>
+              </a:rPr>
+              <a:t>Orchestrating Layered Attestations</a:t>
+            </a:r>
+            <a:pPr algn="l" indent="0" marL="0">
+              <a:spcAft>
+                <a:spcPts val="300"/>
+              </a:spcAft>
+              <a:buNone/>
+            </a:pPr>
+            <a:r>
+              <a:rPr lang="en-US" sz="1150" dirty="0">
+                <a:solidFill>
+                  <a:srgbClr val="212121"/>
+                </a:solidFill>
+                <a:latin typeface="Calibri" pitchFamily="34" charset="0"/>
+                <a:ea typeface="Calibri" pitchFamily="34" charset="-122"/>
+                <a:cs typeface="Calibri" pitchFamily="34" charset="-120"/>
+              </a:rPr>
+              <a:t>, POST 2019, LNCS 11426</a:t>
+            </a:r>
+            <a:endParaRPr lang="en-US" sz="1400" dirty="0"/>
+          </a:p>
+          <a:p>
+            <a:pPr algn="l" indent="0" marL="0">
+              <a:spcBef>
+                <a:spcPts val="1200"/>
+              </a:spcBef>
+              <a:spcAft>
+                <a:spcPts val="400"/>
+              </a:spcAft>
+              <a:buNone/>
+            </a:pPr>
+            <a:r>
+              <a:rPr lang="en-US" sz="1400" b="1" dirty="0">
+                <a:solidFill>
+                  <a:srgbClr val="1E2761"/>
+                </a:solidFill>
+                <a:latin typeface="Calibri" pitchFamily="34" charset="0"/>
+                <a:ea typeface="Calibri" pitchFamily="34" charset="-122"/>
+                <a:cs typeface="Calibri" pitchFamily="34" charset="-120"/>
+              </a:rPr>
+              <a:t>Verification &amp; platform</a:t>
+            </a:r>
+            <a:endParaRPr lang="en-US" sz="1400" dirty="0"/>
+          </a:p>
+          <a:p>
+            <a:pPr algn="l" marL="342900" indent="-342900">
+              <a:spcAft>
+                <a:spcPts val="300"/>
+              </a:spcAft>
+              <a:buSzPct val="100000"/>
+              <a:buChar char="•"/>
+            </a:pPr>
+            <a:r>
+              <a:rPr lang="en-US" sz="1150" dirty="0">
+                <a:solidFill>
+                  <a:srgbClr val="212121"/>
+                </a:solidFill>
+                <a:latin typeface="Calibri" pitchFamily="34" charset="0"/>
+                <a:ea typeface="Calibri" pitchFamily="34" charset="-122"/>
+                <a:cs typeface="Calibri" pitchFamily="34" charset="-120"/>
+              </a:rPr>
+              <a:t>Lattuada, Hance, Cho, Brun, Subasinghe, Zhou, Howell, Parno, Hawblitzel, </a:t>
+            </a:r>
+            <a:pPr algn="l" indent="0" marL="0">
+              <a:spcAft>
+                <a:spcPts val="300"/>
+              </a:spcAft>
+              <a:buNone/>
+            </a:pPr>
+            <a:r>
+              <a:rPr lang="en-US" sz="1150" i="1" dirty="0">
+                <a:solidFill>
+                  <a:srgbClr val="212121"/>
+                </a:solidFill>
+                <a:latin typeface="Calibri" pitchFamily="34" charset="0"/>
+                <a:ea typeface="Calibri" pitchFamily="34" charset="-122"/>
+                <a:cs typeface="Calibri" pitchFamily="34" charset="-120"/>
+              </a:rPr>
+              <a:t>Verus: Verifying Rust Programs using Linear Ghost Types</a:t>
+            </a:r>
+            <a:pPr algn="l" indent="0" marL="0">
+              <a:spcAft>
+                <a:spcPts val="300"/>
+              </a:spcAft>
+              <a:buNone/>
+            </a:pPr>
+            <a:r>
+              <a:rPr lang="en-US" sz="1150" dirty="0">
+                <a:solidFill>
+                  <a:srgbClr val="212121"/>
+                </a:solidFill>
+                <a:latin typeface="Calibri" pitchFamily="34" charset="0"/>
+                <a:ea typeface="Calibri" pitchFamily="34" charset="-122"/>
+                <a:cs typeface="Calibri" pitchFamily="34" charset="-120"/>
+              </a:rPr>
+              <a:t>, PACMPL 7 (OOPSLA1), 2023</a:t>
+            </a:r>
+            <a:endParaRPr lang="en-US" sz="1400" dirty="0"/>
+          </a:p>
+          <a:p>
+            <a:pPr algn="l" marL="342900" indent="-342900">
+              <a:spcAft>
+                <a:spcPts val="300"/>
+              </a:spcAft>
+              <a:buSzPct val="100000"/>
+              <a:buChar char="•"/>
+            </a:pPr>
+            <a:r>
+              <a:rPr lang="en-US" sz="1150" dirty="0">
+                <a:solidFill>
+                  <a:srgbClr val="212121"/>
+                </a:solidFill>
+                <a:latin typeface="Calibri" pitchFamily="34" charset="0"/>
+                <a:ea typeface="Calibri" pitchFamily="34" charset="-122"/>
+                <a:cs typeface="Calibri" pitchFamily="34" charset="-120"/>
+              </a:rPr>
+              <a:t>Klein et al., </a:t>
+            </a:r>
+            <a:pPr algn="l" indent="0" marL="0">
+              <a:spcAft>
+                <a:spcPts val="300"/>
+              </a:spcAft>
+              <a:buNone/>
+            </a:pPr>
+            <a:r>
+              <a:rPr lang="en-US" sz="1150" i="1" dirty="0">
+                <a:solidFill>
+                  <a:srgbClr val="212121"/>
+                </a:solidFill>
+                <a:latin typeface="Calibri" pitchFamily="34" charset="0"/>
+                <a:ea typeface="Calibri" pitchFamily="34" charset="-122"/>
+                <a:cs typeface="Calibri" pitchFamily="34" charset="-120"/>
+              </a:rPr>
+              <a:t>seL4: Formal Verification of an OS Kernel</a:t>
+            </a:r>
+            <a:pPr algn="l" indent="0" marL="0">
+              <a:spcAft>
+                <a:spcPts val="300"/>
+              </a:spcAft>
+              <a:buNone/>
+            </a:pPr>
+            <a:r>
+              <a:rPr lang="en-US" sz="1150" dirty="0">
+                <a:solidFill>
+                  <a:srgbClr val="212121"/>
+                </a:solidFill>
+                <a:latin typeface="Calibri" pitchFamily="34" charset="0"/>
+                <a:ea typeface="Calibri" pitchFamily="34" charset="-122"/>
+                <a:cs typeface="Calibri" pitchFamily="34" charset="-120"/>
+              </a:rPr>
+              <a:t>, SOSP 2009</a:t>
             </a:r>
             <a:endParaRPr lang="en-US" sz="1400" dirty="0"/>
           </a:p>
@@ -1519,7 +4952,6 @@
         <a:solidFill>
           <a:srgbClr val="FFFFFF"/>
         </a:solidFill>
-        <a:effectLst/>
       </p:bgPr>
     </p:bg>
     <p:spTree>
@@ -1557,7 +4989,7 @@
           <a:bodyPr wrap="square" lIns="0" tIns="0" rIns="0" bIns="0" rtlCol="0" anchor="ctr"/>
           <a:lstStyle/>
           <a:p>
-            <a:pPr marL="0" indent="0">
+            <a:pPr indent="0" marL="0">
               <a:buNone/>
             </a:pPr>
             <a:r>
@@ -1596,7 +5028,7 @@
           <a:bodyPr wrap="square" lIns="0" tIns="0" rIns="0" bIns="0" rtlCol="0" anchor="t"/>
           <a:lstStyle/>
           <a:p>
-            <a:pPr marL="342900" indent="-342900" algn="l">
+            <a:pPr algn="l" marL="342900" indent="-342900">
               <a:buSzPct val="100000"/>
               <a:buChar char="•"/>
             </a:pPr>
@@ -1609,8 +5041,28 @@
                 <a:ea typeface="Calibri" pitchFamily="34" charset="-122"/>
                 <a:cs typeface="Calibri" pitchFamily="34" charset="-120"/>
               </a:rPr>
-              <a:t>Traditional remote attestation: did system components boot into a predictable state?</a:t>
-            </a:r>
+              <a:t>Traditional remote attestation: </a:t>
+            </a:r>
+            <a:pPr algn="l" indent="0" marL="0">
+              <a:buNone/>
+            </a:pPr>
+            <a:r>
+              <a:rPr lang="en-US" sz="1700" b="1" dirty="0">
+                <a:solidFill>
+                  <a:srgbClr val="212121"/>
+                </a:solidFill>
+                <a:latin typeface="Calibri" pitchFamily="34" charset="0"/>
+                <a:ea typeface="Calibri" pitchFamily="34" charset="-122"/>
+                <a:cs typeface="Calibri" pitchFamily="34" charset="-120"/>
+              </a:rPr>
+              <a:t>did system components boot into a predictable state?</a:t>
+            </a:r>
+            <a:pPr algn="l" indent="0" marL="0">
+              <a:spcAft>
+                <a:spcPts val="1000"/>
+              </a:spcAft>
+              <a:buNone/>
+            </a:pPr>
             <a:r>
               <a:rPr lang="en-US" sz="1700" dirty="0">
                 <a:solidFill>
@@ -1625,7 +5077,7 @@
             <a:endParaRPr lang="en-US" sz="1700" dirty="0"/>
           </a:p>
           <a:p>
-            <a:pPr marL="342900" indent="-342900" algn="l">
+            <a:pPr algn="l" marL="342900" indent="-342900">
               <a:buSzPct val="100000"/>
               <a:buChar char="•"/>
             </a:pPr>
@@ -1640,6 +5092,9 @@
               </a:rPr>
               <a:t>Layered, runtime attestation: </a:t>
             </a:r>
+            <a:pPr algn="l" indent="0" marL="0">
+              <a:buNone/>
+            </a:pPr>
             <a:r>
               <a:rPr lang="en-US" sz="1700" dirty="0">
                 <a:solidFill>
@@ -1651,6 +5106,12 @@
               </a:rPr>
               <a:t>extend boot-time trust via dynamic measurement of system components </a:t>
             </a:r>
+            <a:pPr algn="l" indent="0" marL="0">
+              <a:spcAft>
+                <a:spcPts val="1000"/>
+              </a:spcAft>
+              <a:buNone/>
+            </a:pPr>
             <a:r>
               <a:rPr lang="en-US" sz="1700" b="1" dirty="0">
                 <a:solidFill>
@@ -1665,7 +5126,7 @@
             <a:endParaRPr lang="en-US" sz="1700" dirty="0"/>
           </a:p>
           <a:p>
-            <a:pPr marL="342900" indent="-342900" algn="l">
+            <a:pPr algn="l" marL="342900" indent="-342900">
               <a:buSzPct val="100000"/>
               <a:buChar char="•"/>
             </a:pPr>
@@ -1680,6 +5141,9 @@
               </a:rPr>
               <a:t>Lifecycle attestation: </a:t>
             </a:r>
+            <a:pPr algn="l" indent="0" marL="0">
+              <a:buNone/>
+            </a:pPr>
             <a:r>
               <a:rPr lang="en-US" sz="1700" dirty="0">
                 <a:solidFill>
@@ -1691,6 +5155,9 @@
               </a:rPr>
               <a:t>extends this notion to </a:t>
             </a:r>
+            <a:pPr algn="l" indent="0" marL="0">
+              <a:buNone/>
+            </a:pPr>
             <a:r>
               <a:rPr lang="en-US" sz="1700" b="1" dirty="0">
                 <a:solidFill>
@@ -1702,6 +5169,12 @@
               </a:rPr>
               <a:t>artifacts of the development lifecycle</a:t>
             </a:r>
+            <a:pPr algn="l" indent="0" marL="0">
+              <a:spcAft>
+                <a:spcPts val="1000"/>
+              </a:spcAft>
+              <a:buNone/>
+            </a:pPr>
             <a:r>
               <a:rPr lang="en-US" sz="1700" dirty="0">
                 <a:solidFill>
@@ -1716,7 +5189,7 @@
             <a:endParaRPr lang="en-US" sz="1700" dirty="0"/>
           </a:p>
           <a:p>
-            <a:pPr marL="685800" lvl="1" indent="-342900" algn="l">
+            <a:pPr algn="l" lvl="1" marL="685800" indent="-342900">
               <a:spcAft>
                 <a:spcPts val="1000"/>
               </a:spcAft>
@@ -1737,7 +5210,7 @@
             <a:endParaRPr lang="en-US" sz="1700" dirty="0"/>
           </a:p>
           <a:p>
-            <a:pPr marL="685800" lvl="1" indent="-342900" algn="l">
+            <a:pPr algn="l" lvl="1" marL="685800" indent="-342900">
               <a:buSzPct val="100000"/>
               <a:buChar char="–"/>
             </a:pPr>
@@ -1752,6 +5225,9 @@
               </a:rPr>
               <a:t>…and to lifecycle </a:t>
             </a:r>
+            <a:pPr algn="l" indent="0" marL="0">
+              <a:buNone/>
+            </a:pPr>
             <a:r>
               <a:rPr lang="en-US" sz="1700" b="1" dirty="0">
                 <a:solidFill>
@@ -1763,6 +5239,12 @@
               </a:rPr>
               <a:t>events</a:t>
             </a:r>
+            <a:pPr algn="l" indent="0" marL="0">
+              <a:spcAft>
+                <a:spcPts val="1000"/>
+              </a:spcAft>
+              <a:buNone/>
+            </a:pPr>
             <a:r>
               <a:rPr lang="en-US" sz="1700" dirty="0">
                 <a:solidFill>
@@ -1777,7 +5259,7 @@
             <a:endParaRPr lang="en-US" sz="1700" dirty="0"/>
           </a:p>
           <a:p>
-            <a:pPr marL="1028700" lvl="2" indent="-342900" algn="l">
+            <a:pPr algn="l" lvl="2" marL="1028700" indent="-342900">
               <a:spcAft>
                 <a:spcPts val="200"/>
               </a:spcAft>
@@ -1798,7 +5280,7 @@
             <a:endParaRPr lang="en-US" sz="1700" dirty="0"/>
           </a:p>
           <a:p>
-            <a:pPr marL="1028700" lvl="2" indent="-342900" algn="l">
+            <a:pPr algn="l" lvl="2" marL="1028700" indent="-342900">
               <a:spcAft>
                 <a:spcPts val="200"/>
               </a:spcAft>
@@ -1819,7 +5301,7 @@
             <a:endParaRPr lang="en-US" sz="1700" dirty="0"/>
           </a:p>
           <a:p>
-            <a:pPr marL="1028700" lvl="2" indent="-342900" algn="l">
+            <a:pPr algn="l" lvl="2" marL="1028700" indent="-342900">
               <a:spcAft>
                 <a:spcPts val="200"/>
               </a:spcAft>
@@ -1840,7 +5322,7 @@
             <a:endParaRPr lang="en-US" sz="1700" dirty="0"/>
           </a:p>
           <a:p>
-            <a:pPr marL="1028700" lvl="2" indent="-342900" algn="l">
+            <a:pPr algn="l" lvl="2" marL="1028700" indent="-342900">
               <a:spcAft>
                 <a:spcPts val="200"/>
               </a:spcAft>
@@ -1861,7 +5343,7 @@
             <a:endParaRPr lang="en-US" sz="1700" dirty="0"/>
           </a:p>
           <a:p>
-            <a:pPr marL="342900" indent="-342900" algn="l">
+            <a:pPr algn="l" marL="342900" indent="-342900">
               <a:buSzPct val="100000"/>
               <a:buChar char="•"/>
             </a:pPr>
@@ -1876,6 +5358,9 @@
               </a:rPr>
               <a:t>Motivation: </a:t>
             </a:r>
+            <a:pPr algn="l" indent="0" marL="0">
+              <a:buNone/>
+            </a:pPr>
             <a:r>
               <a:rPr lang="en-US" sz="1700" dirty="0">
                 <a:solidFill>
@@ -1887,6 +5372,9 @@
               </a:rPr>
               <a:t>the </a:t>
             </a:r>
+            <a:pPr algn="l" indent="0" marL="0">
+              <a:buNone/>
+            </a:pPr>
             <a:r>
               <a:rPr lang="en-US" sz="1700" b="1" dirty="0">
                 <a:solidFill>
@@ -1898,6 +5386,12 @@
               </a:rPr>
               <a:t>proliferation of AI-generated software artifacts</a:t>
             </a:r>
+            <a:pPr algn="l" indent="0" marL="0">
+              <a:spcAft>
+                <a:spcPts val="1000"/>
+              </a:spcAft>
+              <a:buNone/>
+            </a:pPr>
             <a:r>
               <a:rPr lang="en-US" sz="1700" dirty="0">
                 <a:solidFill>
@@ -1934,13 +5428,6 @@
           </a:solidFill>
           <a:ln/>
         </p:spPr>
-        <p:txBody>
-          <a:bodyPr/>
-          <a:lstStyle/>
-          <a:p>
-            <a:endParaRPr lang="en-US"/>
-          </a:p>
-        </p:txBody>
       </p:sp>
       <p:sp>
         <p:nvSpPr>
@@ -1963,7 +5450,7 @@
           <a:bodyPr wrap="square" lIns="0" tIns="0" rIns="0" bIns="0" rtlCol="0" anchor="ctr"/>
           <a:lstStyle/>
           <a:p>
-            <a:pPr marL="0" indent="0" algn="ctr">
+            <a:pPr algn="ctr" indent="0" marL="0">
               <a:spcAft>
                 <a:spcPts val="400"/>
               </a:spcAft>
@@ -1983,7 +5470,7 @@
             <a:endParaRPr lang="en-US" sz="2000" dirty="0"/>
           </a:p>
           <a:p>
-            <a:pPr marL="0" indent="0" algn="ctr">
+            <a:pPr algn="ctr" indent="0" marL="0">
               <a:buNone/>
             </a:pPr>
             <a:r>
@@ -2017,7 +5504,6 @@
         <a:solidFill>
           <a:srgbClr val="FFFFFF"/>
         </a:solidFill>
-        <a:effectLst/>
       </p:bgPr>
     </p:bg>
     <p:spTree>
@@ -2055,7 +5541,7 @@
           <a:bodyPr wrap="square" lIns="0" tIns="0" rIns="0" bIns="0" rtlCol="0" anchor="ctr"/>
           <a:lstStyle/>
           <a:p>
-            <a:pPr marL="0" indent="0">
+            <a:pPr indent="0" marL="0">
               <a:buNone/>
             </a:pPr>
             <a:r>
@@ -2094,13 +5580,6 @@
           </a:solidFill>
           <a:ln/>
         </p:spPr>
-        <p:txBody>
-          <a:bodyPr/>
-          <a:lstStyle/>
-          <a:p>
-            <a:endParaRPr lang="en-US"/>
-          </a:p>
-        </p:txBody>
       </p:sp>
       <p:sp>
         <p:nvSpPr>
@@ -2123,7 +5602,7 @@
           <a:bodyPr wrap="square" lIns="254" tIns="254" rIns="254" bIns="254" rtlCol="0" anchor="ctr"/>
           <a:lstStyle/>
           <a:p>
-            <a:pPr marL="0" indent="0" algn="ctr">
+            <a:pPr algn="ctr" indent="0" marL="0">
               <a:buNone/>
             </a:pPr>
             <a:r>
@@ -2162,7 +5641,7 @@
           <a:bodyPr wrap="square" lIns="0" tIns="0" rIns="0" bIns="0" rtlCol="0" anchor="ctr"/>
           <a:lstStyle/>
           <a:p>
-            <a:pPr marL="0" indent="0" algn="ctr">
+            <a:pPr algn="ctr" indent="0" marL="0">
               <a:buNone/>
             </a:pPr>
             <a:r>
@@ -2201,13 +5680,6 @@
           </a:solidFill>
           <a:ln/>
         </p:spPr>
-        <p:txBody>
-          <a:bodyPr/>
-          <a:lstStyle/>
-          <a:p>
-            <a:endParaRPr lang="en-US"/>
-          </a:p>
-        </p:txBody>
       </p:sp>
       <p:sp>
         <p:nvSpPr>
@@ -2230,7 +5702,7 @@
           <a:bodyPr wrap="square" lIns="254" tIns="254" rIns="254" bIns="254" rtlCol="0" anchor="ctr"/>
           <a:lstStyle/>
           <a:p>
-            <a:pPr marL="0" indent="0" algn="ctr">
+            <a:pPr algn="ctr" indent="0" marL="0">
               <a:buNone/>
             </a:pPr>
             <a:r>
@@ -2247,7 +5719,7 @@
             <a:endParaRPr lang="en-US" sz="1350" dirty="0"/>
           </a:p>
           <a:p>
-            <a:pPr marL="0" indent="0" algn="ctr">
+            <a:pPr algn="ctr" indent="0" marL="0">
               <a:buNone/>
             </a:pPr>
             <a:r>
@@ -2286,7 +5758,7 @@
           <a:bodyPr wrap="square" lIns="0" tIns="0" rIns="0" bIns="0" rtlCol="0" anchor="ctr"/>
           <a:lstStyle/>
           <a:p>
-            <a:pPr marL="0" indent="0" algn="ctr">
+            <a:pPr algn="ctr" indent="0" marL="0">
               <a:buNone/>
             </a:pPr>
             <a:r>
@@ -2325,13 +5797,6 @@
           </a:solidFill>
           <a:ln/>
         </p:spPr>
-        <p:txBody>
-          <a:bodyPr/>
-          <a:lstStyle/>
-          <a:p>
-            <a:endParaRPr lang="en-US"/>
-          </a:p>
-        </p:txBody>
       </p:sp>
       <p:sp>
         <p:nvSpPr>
@@ -2354,7 +5819,7 @@
           <a:bodyPr wrap="square" lIns="254" tIns="254" rIns="254" bIns="254" rtlCol="0" anchor="ctr"/>
           <a:lstStyle/>
           <a:p>
-            <a:pPr marL="0" indent="0" algn="ctr">
+            <a:pPr algn="ctr" indent="0" marL="0">
               <a:buNone/>
             </a:pPr>
             <a:r>
@@ -2393,7 +5858,7 @@
           <a:bodyPr wrap="square" lIns="0" tIns="0" rIns="0" bIns="0" rtlCol="0" anchor="ctr"/>
           <a:lstStyle/>
           <a:p>
-            <a:pPr marL="0" indent="0" algn="ctr">
+            <a:pPr algn="ctr" indent="0" marL="0">
               <a:buNone/>
             </a:pPr>
             <a:r>
@@ -2432,13 +5897,6 @@
           </a:solidFill>
           <a:ln/>
         </p:spPr>
-        <p:txBody>
-          <a:bodyPr/>
-          <a:lstStyle/>
-          <a:p>
-            <a:endParaRPr lang="en-US"/>
-          </a:p>
-        </p:txBody>
       </p:sp>
       <p:sp>
         <p:nvSpPr>
@@ -2461,7 +5919,7 @@
           <a:bodyPr wrap="square" lIns="254" tIns="254" rIns="254" bIns="254" rtlCol="0" anchor="ctr"/>
           <a:lstStyle/>
           <a:p>
-            <a:pPr marL="0" indent="0" algn="ctr">
+            <a:pPr algn="ctr" indent="0" marL="0">
               <a:buNone/>
             </a:pPr>
             <a:r>
@@ -2500,7 +5958,7 @@
           <a:bodyPr wrap="square" lIns="0" tIns="0" rIns="0" bIns="0" rtlCol="0" anchor="ctr"/>
           <a:lstStyle/>
           <a:p>
-            <a:pPr marL="0" indent="0" algn="ctr">
+            <a:pPr algn="ctr" indent="0" marL="0">
               <a:buNone/>
             </a:pPr>
             <a:r>
@@ -2539,13 +5997,6 @@
           </a:solidFill>
           <a:ln/>
         </p:spPr>
-        <p:txBody>
-          <a:bodyPr/>
-          <a:lstStyle/>
-          <a:p>
-            <a:endParaRPr lang="en-US"/>
-          </a:p>
-        </p:txBody>
       </p:sp>
       <p:sp>
         <p:nvSpPr>
@@ -2568,7 +6019,7 @@
           <a:bodyPr wrap="square" lIns="254" tIns="254" rIns="254" bIns="254" rtlCol="0" anchor="ctr"/>
           <a:lstStyle/>
           <a:p>
-            <a:pPr marL="0" indent="0" algn="ctr">
+            <a:pPr algn="ctr" indent="0" marL="0">
               <a:buNone/>
             </a:pPr>
             <a:r>
@@ -2607,7 +6058,7 @@
           <a:bodyPr wrap="square" lIns="0" tIns="0" rIns="0" bIns="0" rtlCol="0" anchor="ctr"/>
           <a:lstStyle/>
           <a:p>
-            <a:pPr marL="0" indent="0">
+            <a:pPr indent="0" marL="0">
               <a:buNone/>
             </a:pPr>
             <a:r>
@@ -2641,7 +6092,6 @@
         <a:solidFill>
           <a:srgbClr val="FFFFFF"/>
         </a:solidFill>
-        <a:effectLst/>
       </p:bgPr>
     </p:bg>
     <p:spTree>
@@ -2679,7 +6129,7 @@
           <a:bodyPr wrap="square" lIns="0" tIns="0" rIns="0" bIns="0" rtlCol="0" anchor="ctr"/>
           <a:lstStyle/>
           <a:p>
-            <a:pPr marL="0" indent="0">
+            <a:pPr indent="0" marL="0">
               <a:buNone/>
             </a:pPr>
             <a:r>
@@ -2718,13 +6168,6 @@
           </a:solidFill>
           <a:ln/>
         </p:spPr>
-        <p:txBody>
-          <a:bodyPr/>
-          <a:lstStyle/>
-          <a:p>
-            <a:endParaRPr lang="en-US"/>
-          </a:p>
-        </p:txBody>
       </p:sp>
       <p:sp>
         <p:nvSpPr>
@@ -2747,7 +6190,7 @@
           <a:bodyPr wrap="square" lIns="0" tIns="0" rIns="0" bIns="0" rtlCol="0" anchor="ctr"/>
           <a:lstStyle/>
           <a:p>
-            <a:pPr marL="0" indent="0" algn="l">
+            <a:pPr algn="l" indent="0" marL="0">
               <a:spcAft>
                 <a:spcPts val="200"/>
               </a:spcAft>
@@ -2767,7 +6210,7 @@
             <a:endParaRPr lang="en-US" sz="1700" dirty="0"/>
           </a:p>
           <a:p>
-            <a:pPr marL="0" indent="0" algn="l">
+            <a:pPr algn="l" indent="0" marL="0">
               <a:buNone/>
             </a:pPr>
             <a:r>
@@ -2806,7 +6249,7 @@
           <a:bodyPr wrap="square" lIns="0" tIns="0" rIns="0" bIns="0" rtlCol="0" anchor="ctr"/>
           <a:lstStyle/>
           <a:p>
-            <a:pPr marL="0" indent="0" algn="ctr">
+            <a:pPr algn="ctr" indent="0" marL="0">
               <a:buNone/>
             </a:pPr>
             <a:r>
@@ -2842,13 +6285,6 @@
           </a:solidFill>
           <a:ln/>
         </p:spPr>
-        <p:txBody>
-          <a:bodyPr/>
-          <a:lstStyle/>
-          <a:p>
-            <a:endParaRPr lang="en-US"/>
-          </a:p>
-        </p:txBody>
       </p:sp>
       <p:sp>
         <p:nvSpPr>
@@ -2871,7 +6307,7 @@
           <a:bodyPr wrap="square" lIns="0" tIns="0" rIns="0" bIns="0" rtlCol="0" anchor="ctr"/>
           <a:lstStyle/>
           <a:p>
-            <a:pPr marL="0" indent="0" algn="l">
+            <a:pPr algn="l" indent="0" marL="0">
               <a:spcAft>
                 <a:spcPts val="200"/>
               </a:spcAft>
@@ -2891,7 +6327,7 @@
             <a:endParaRPr lang="en-US" sz="1700" dirty="0"/>
           </a:p>
           <a:p>
-            <a:pPr marL="0" indent="0" algn="l">
+            <a:pPr algn="l" indent="0" marL="0">
               <a:buNone/>
             </a:pPr>
             <a:r>
@@ -2930,7 +6366,7 @@
           <a:bodyPr wrap="square" lIns="0" tIns="0" rIns="0" bIns="0" rtlCol="0" anchor="ctr"/>
           <a:lstStyle/>
           <a:p>
-            <a:pPr marL="0" indent="0" algn="ctr">
+            <a:pPr algn="ctr" indent="0" marL="0">
               <a:buNone/>
             </a:pPr>
             <a:r>
@@ -2966,13 +6402,6 @@
           </a:solidFill>
           <a:ln/>
         </p:spPr>
-        <p:txBody>
-          <a:bodyPr/>
-          <a:lstStyle/>
-          <a:p>
-            <a:endParaRPr lang="en-US"/>
-          </a:p>
-        </p:txBody>
       </p:sp>
       <p:sp>
         <p:nvSpPr>
@@ -2995,7 +6424,7 @@
           <a:bodyPr wrap="square" lIns="0" tIns="0" rIns="0" bIns="0" rtlCol="0" anchor="ctr"/>
           <a:lstStyle/>
           <a:p>
-            <a:pPr marL="0" indent="0" algn="l">
+            <a:pPr algn="l" indent="0" marL="0">
               <a:spcAft>
                 <a:spcPts val="200"/>
               </a:spcAft>
@@ -3015,7 +6444,7 @@
             <a:endParaRPr lang="en-US" sz="1700" dirty="0"/>
           </a:p>
           <a:p>
-            <a:pPr marL="0" indent="0" algn="l">
+            <a:pPr algn="l" indent="0" marL="0">
               <a:buNone/>
             </a:pPr>
             <a:r>
@@ -3054,7 +6483,7 @@
           <a:bodyPr wrap="square" lIns="0" tIns="0" rIns="0" bIns="0" rtlCol="0" anchor="ctr"/>
           <a:lstStyle/>
           <a:p>
-            <a:pPr marL="0" indent="0" algn="ctr">
+            <a:pPr algn="ctr" indent="0" marL="0">
               <a:buNone/>
             </a:pPr>
             <a:r>
@@ -3090,13 +6519,6 @@
           </a:solidFill>
           <a:ln/>
         </p:spPr>
-        <p:txBody>
-          <a:bodyPr/>
-          <a:lstStyle/>
-          <a:p>
-            <a:endParaRPr lang="en-US"/>
-          </a:p>
-        </p:txBody>
       </p:sp>
       <p:sp>
         <p:nvSpPr>
@@ -3119,7 +6541,7 @@
           <a:bodyPr wrap="square" lIns="0" tIns="0" rIns="0" bIns="0" rtlCol="0" anchor="ctr"/>
           <a:lstStyle/>
           <a:p>
-            <a:pPr marL="0" indent="0" algn="l">
+            <a:pPr algn="l" indent="0" marL="0">
               <a:buNone/>
             </a:pPr>
             <a:r>
@@ -3133,6 +6555,9 @@
               </a:rPr>
               <a:t>signed evidence bundles</a:t>
             </a:r>
+            <a:pPr algn="l" indent="0" marL="0">
+              <a:buNone/>
+            </a:pPr>
             <a:r>
               <a:rPr lang="en-US" sz="1500" dirty="0">
                 <a:solidFill>
@@ -3144,6 +6569,9 @@
               </a:rPr>
               <a:t>, appraised against </a:t>
             </a:r>
+            <a:pPr algn="l" indent="0" marL="0">
+              <a:buNone/>
+            </a:pPr>
             <a:r>
               <a:rPr lang="en-US" sz="1500" b="1" dirty="0">
                 <a:solidFill>
@@ -3180,7 +6608,7 @@
           <a:bodyPr wrap="square" lIns="0" tIns="0" rIns="0" bIns="0" rtlCol="0" anchor="ctr"/>
           <a:lstStyle/>
           <a:p>
-            <a:pPr marL="0" indent="0">
+            <a:pPr indent="0" marL="0">
               <a:buNone/>
             </a:pPr>
             <a:r>
@@ -3224,13 +6652,6 @@
             <a:prstDash val="solid"/>
           </a:ln>
         </p:spPr>
-        <p:txBody>
-          <a:bodyPr/>
-          <a:lstStyle/>
-          <a:p>
-            <a:endParaRPr lang="en-US"/>
-          </a:p>
-        </p:txBody>
       </p:sp>
       <p:sp>
         <p:nvSpPr>
@@ -3253,7 +6674,7 @@
           <a:bodyPr wrap="square" lIns="0" tIns="0" rIns="0" bIns="0" rtlCol="0" anchor="ctr"/>
           <a:lstStyle/>
           <a:p>
-            <a:pPr marL="0" indent="0" algn="l">
+            <a:pPr algn="l" indent="0" marL="0">
               <a:buNone/>
             </a:pPr>
             <a:r>
@@ -3270,7 +6691,7 @@
             <a:endParaRPr lang="en-US" sz="1300" dirty="0"/>
           </a:p>
           <a:p>
-            <a:pPr marL="0" indent="0" algn="l">
+            <a:pPr algn="l" indent="0" marL="0">
               <a:buNone/>
             </a:pPr>
             <a:r>
@@ -3287,7 +6708,7 @@
             <a:endParaRPr lang="en-US" sz="1300" dirty="0"/>
           </a:p>
           <a:p>
-            <a:pPr marL="0" indent="0" algn="l">
+            <a:pPr algn="l" indent="0" marL="0">
               <a:buNone/>
             </a:pPr>
             <a:r>
@@ -3304,7 +6725,7 @@
             <a:endParaRPr lang="en-US" sz="1300" dirty="0"/>
           </a:p>
           <a:p>
-            <a:pPr marL="0" indent="0" algn="l">
+            <a:pPr algn="l" indent="0" marL="0">
               <a:buNone/>
             </a:pPr>
             <a:r>
@@ -3321,7 +6742,7 @@
             <a:endParaRPr lang="en-US" sz="1300" dirty="0"/>
           </a:p>
           <a:p>
-            <a:pPr marL="0" indent="0" algn="l">
+            <a:pPr algn="l" indent="0" marL="0">
               <a:buNone/>
             </a:pPr>
             <a:r>
@@ -3338,7 +6759,7 @@
             <a:endParaRPr lang="en-US" sz="1300" dirty="0"/>
           </a:p>
           <a:p>
-            <a:pPr marL="0" indent="0" algn="l">
+            <a:pPr algn="l" indent="0" marL="0">
               <a:buNone/>
             </a:pPr>
             <a:r>
@@ -3377,7 +6798,7 @@
           <a:bodyPr wrap="square" lIns="0" tIns="0" rIns="0" bIns="0" rtlCol="0" anchor="ctr"/>
           <a:lstStyle/>
           <a:p>
-            <a:pPr marL="0" indent="0">
+            <a:pPr indent="0" marL="0">
               <a:buNone/>
             </a:pPr>
             <a:r>
@@ -3394,7 +6815,7 @@
             <a:endParaRPr lang="en-US" sz="2000" dirty="0"/>
           </a:p>
           <a:p>
-            <a:pPr marL="0" indent="0">
+            <a:pPr indent="0" marL="0">
               <a:buNone/>
             </a:pPr>
             <a:r>
@@ -3411,7 +6832,7 @@
             <a:endParaRPr lang="en-US" sz="2000" dirty="0"/>
           </a:p>
           <a:p>
-            <a:pPr marL="0" indent="0">
+            <a:pPr indent="0" marL="0">
               <a:buNone/>
             </a:pPr>
             <a:r>
@@ -3445,7 +6866,6 @@
         <a:solidFill>
           <a:srgbClr val="FFFFFF"/>
         </a:solidFill>
-        <a:effectLst/>
       </p:bgPr>
     </p:bg>
     <p:spTree>
@@ -3483,7 +6903,7 @@
           <a:bodyPr wrap="square" lIns="0" tIns="0" rIns="0" bIns="0" rtlCol="0" anchor="ctr"/>
           <a:lstStyle/>
           <a:p>
-            <a:pPr marL="0" indent="0">
+            <a:pPr indent="0" marL="0">
               <a:buNone/>
             </a:pPr>
             <a:r>
@@ -3527,13 +6947,6 @@
             <a:prstDash val="dash"/>
           </a:ln>
         </p:spPr>
-        <p:txBody>
-          <a:bodyPr/>
-          <a:lstStyle/>
-          <a:p>
-            <a:endParaRPr lang="en-US"/>
-          </a:p>
-        </p:txBody>
       </p:sp>
       <p:sp>
         <p:nvSpPr>
@@ -3556,7 +6969,7 @@
           <a:bodyPr wrap="square" lIns="254" tIns="254" rIns="254" bIns="254" rtlCol="0" anchor="ctr"/>
           <a:lstStyle/>
           <a:p>
-            <a:pPr marL="0" indent="0" algn="ctr">
+            <a:pPr algn="ctr" indent="0" marL="0">
               <a:buNone/>
             </a:pPr>
             <a:r>
@@ -3573,7 +6986,7 @@
             <a:endParaRPr lang="en-US" sz="1150" dirty="0"/>
           </a:p>
           <a:p>
-            <a:pPr marL="0" indent="0" algn="ctr">
+            <a:pPr algn="ctr" indent="0" marL="0">
               <a:buNone/>
             </a:pPr>
             <a:r>
@@ -3614,13 +7027,6 @@
             <a:tailEnd type="triangle"/>
           </a:ln>
         </p:spPr>
-        <p:txBody>
-          <a:bodyPr/>
-          <a:lstStyle/>
-          <a:p>
-            <a:endParaRPr lang="en-US"/>
-          </a:p>
-        </p:txBody>
       </p:sp>
       <p:sp>
         <p:nvSpPr>
@@ -3643,7 +7049,7 @@
           <a:bodyPr wrap="square" lIns="0" tIns="0" rIns="0" bIns="0" rtlCol="0" anchor="ctr"/>
           <a:lstStyle/>
           <a:p>
-            <a:pPr marL="0" indent="0" algn="l">
+            <a:pPr algn="l" indent="0" marL="0">
               <a:buNone/>
             </a:pPr>
             <a:r>
@@ -3682,13 +7088,6 @@
           </a:solidFill>
           <a:ln/>
         </p:spPr>
-        <p:txBody>
-          <a:bodyPr/>
-          <a:lstStyle/>
-          <a:p>
-            <a:endParaRPr lang="en-US"/>
-          </a:p>
-        </p:txBody>
       </p:sp>
       <p:sp>
         <p:nvSpPr>
@@ -3711,7 +7110,7 @@
           <a:bodyPr wrap="square" lIns="381" tIns="381" rIns="381" bIns="381" rtlCol="0" anchor="ctr"/>
           <a:lstStyle/>
           <a:p>
-            <a:pPr marL="0" indent="0" algn="ctr">
+            <a:pPr algn="ctr" indent="0" marL="0">
               <a:buNone/>
             </a:pPr>
             <a:r>
@@ -3752,13 +7151,6 @@
             <a:tailEnd type="triangle"/>
           </a:ln>
         </p:spPr>
-        <p:txBody>
-          <a:bodyPr/>
-          <a:lstStyle/>
-          <a:p>
-            <a:endParaRPr lang="en-US"/>
-          </a:p>
-        </p:txBody>
       </p:sp>
       <p:sp>
         <p:nvSpPr>
@@ -3781,7 +7173,7 @@
           <a:bodyPr wrap="square" lIns="0" tIns="0" rIns="0" bIns="0" rtlCol="0" anchor="ctr"/>
           <a:lstStyle/>
           <a:p>
-            <a:pPr marL="0" indent="0" algn="l">
+            <a:pPr algn="l" indent="0" marL="0">
               <a:buNone/>
             </a:pPr>
             <a:r>
@@ -3820,13 +7212,6 @@
           </a:solidFill>
           <a:ln/>
         </p:spPr>
-        <p:txBody>
-          <a:bodyPr/>
-          <a:lstStyle/>
-          <a:p>
-            <a:endParaRPr lang="en-US"/>
-          </a:p>
-        </p:txBody>
       </p:sp>
       <p:sp>
         <p:nvSpPr>
@@ -3849,7 +7234,7 @@
           <a:bodyPr wrap="square" lIns="381" tIns="381" rIns="381" bIns="381" rtlCol="0" anchor="ctr"/>
           <a:lstStyle/>
           <a:p>
-            <a:pPr marL="0" indent="0" algn="ctr">
+            <a:pPr algn="ctr" indent="0" marL="0">
               <a:buNone/>
             </a:pPr>
             <a:r>
@@ -3888,13 +7273,6 @@
           </a:solidFill>
           <a:ln/>
         </p:spPr>
-        <p:txBody>
-          <a:bodyPr/>
-          <a:lstStyle/>
-          <a:p>
-            <a:endParaRPr lang="en-US"/>
-          </a:p>
-        </p:txBody>
       </p:sp>
       <p:sp>
         <p:nvSpPr>
@@ -3917,7 +7295,7 @@
           <a:bodyPr wrap="square" lIns="381" tIns="381" rIns="381" bIns="381" rtlCol="0" anchor="ctr"/>
           <a:lstStyle/>
           <a:p>
-            <a:pPr marL="0" indent="0" algn="ctr">
+            <a:pPr algn="ctr" indent="0" marL="0">
               <a:buNone/>
             </a:pPr>
             <a:r>
@@ -3956,13 +7334,6 @@
           </a:solidFill>
           <a:ln/>
         </p:spPr>
-        <p:txBody>
-          <a:bodyPr/>
-          <a:lstStyle/>
-          <a:p>
-            <a:endParaRPr lang="en-US"/>
-          </a:p>
-        </p:txBody>
       </p:sp>
       <p:sp>
         <p:nvSpPr>
@@ -3985,7 +7356,7 @@
           <a:bodyPr wrap="square" lIns="381" tIns="381" rIns="381" bIns="381" rtlCol="0" anchor="ctr"/>
           <a:lstStyle/>
           <a:p>
-            <a:pPr marL="0" indent="0" algn="ctr">
+            <a:pPr algn="ctr" indent="0" marL="0">
               <a:buNone/>
             </a:pPr>
             <a:r>
@@ -4026,13 +7397,6 @@
             <a:tailEnd type="triangle"/>
           </a:ln>
         </p:spPr>
-        <p:txBody>
-          <a:bodyPr/>
-          <a:lstStyle/>
-          <a:p>
-            <a:endParaRPr lang="en-US"/>
-          </a:p>
-        </p:txBody>
       </p:sp>
       <p:sp>
         <p:nvSpPr>
@@ -4056,13 +7420,6 @@
             <a:prstDash val="solid"/>
           </a:ln>
         </p:spPr>
-        <p:txBody>
-          <a:bodyPr/>
-          <a:lstStyle/>
-          <a:p>
-            <a:endParaRPr lang="en-US"/>
-          </a:p>
-        </p:txBody>
       </p:sp>
       <p:sp>
         <p:nvSpPr>
@@ -4086,13 +7443,6 @@
             <a:prstDash val="solid"/>
           </a:ln>
         </p:spPr>
-        <p:txBody>
-          <a:bodyPr/>
-          <a:lstStyle/>
-          <a:p>
-            <a:endParaRPr lang="en-US"/>
-          </a:p>
-        </p:txBody>
       </p:sp>
       <p:sp>
         <p:nvSpPr>
@@ -4117,13 +7467,6 @@
             <a:tailEnd type="triangle"/>
           </a:ln>
         </p:spPr>
-        <p:txBody>
-          <a:bodyPr/>
-          <a:lstStyle/>
-          <a:p>
-            <a:endParaRPr lang="en-US"/>
-          </a:p>
-        </p:txBody>
       </p:sp>
       <p:sp>
         <p:nvSpPr>
@@ -4146,7 +7489,7 @@
           <a:bodyPr wrap="square" lIns="0" tIns="0" rIns="0" bIns="0" rtlCol="0" anchor="ctr"/>
           <a:lstStyle/>
           <a:p>
-            <a:pPr marL="0" indent="0" algn="r">
+            <a:pPr algn="r" indent="0" marL="0">
               <a:buNone/>
             </a:pPr>
             <a:r>
@@ -4163,7 +7506,7 @@
             <a:endParaRPr lang="en-US" sz="1000" dirty="0"/>
           </a:p>
           <a:p>
-            <a:pPr marL="0" indent="0" algn="r">
+            <a:pPr algn="r" indent="0" marL="0">
               <a:buNone/>
             </a:pPr>
             <a:r>
@@ -4203,13 +7546,6 @@
             <a:prstDash val="solid"/>
           </a:ln>
         </p:spPr>
-        <p:txBody>
-          <a:bodyPr/>
-          <a:lstStyle/>
-          <a:p>
-            <a:endParaRPr lang="en-US"/>
-          </a:p>
-        </p:txBody>
       </p:sp>
       <p:sp>
         <p:nvSpPr>
@@ -4234,13 +7570,6 @@
             <a:tailEnd type="triangle"/>
           </a:ln>
         </p:spPr>
-        <p:txBody>
-          <a:bodyPr/>
-          <a:lstStyle/>
-          <a:p>
-            <a:endParaRPr lang="en-US"/>
-          </a:p>
-        </p:txBody>
       </p:sp>
       <p:sp>
         <p:nvSpPr>
@@ -4263,7 +7592,7 @@
           <a:bodyPr wrap="square" lIns="0" tIns="0" rIns="0" bIns="0" rtlCol="0" anchor="ctr"/>
           <a:lstStyle/>
           <a:p>
-            <a:pPr marL="0" indent="0" algn="ctr">
+            <a:pPr algn="ctr" indent="0" marL="0">
               <a:buNone/>
             </a:pPr>
             <a:r>
@@ -4302,13 +7631,6 @@
           </a:solidFill>
           <a:ln/>
         </p:spPr>
-        <p:txBody>
-          <a:bodyPr/>
-          <a:lstStyle/>
-          <a:p>
-            <a:endParaRPr lang="en-US"/>
-          </a:p>
-        </p:txBody>
       </p:sp>
       <p:sp>
         <p:nvSpPr>
@@ -4331,7 +7653,7 @@
           <a:bodyPr wrap="square" lIns="381" tIns="381" rIns="381" bIns="381" rtlCol="0" anchor="ctr"/>
           <a:lstStyle/>
           <a:p>
-            <a:pPr marL="0" indent="0" algn="ctr">
+            <a:pPr algn="ctr" indent="0" marL="0">
               <a:buNone/>
             </a:pPr>
             <a:r>
@@ -4348,7 +7670,7 @@
             <a:endParaRPr lang="en-US" sz="1200" dirty="0"/>
           </a:p>
           <a:p>
-            <a:pPr marL="0" indent="0" algn="ctr">
+            <a:pPr algn="ctr" indent="0" marL="0">
               <a:buNone/>
             </a:pPr>
             <a:r>
@@ -4389,13 +7711,6 @@
             <a:tailEnd type="triangle"/>
           </a:ln>
         </p:spPr>
-        <p:txBody>
-          <a:bodyPr/>
-          <a:lstStyle/>
-          <a:p>
-            <a:endParaRPr lang="en-US"/>
-          </a:p>
-        </p:txBody>
       </p:sp>
       <p:sp>
         <p:nvSpPr>
@@ -4418,7 +7733,7 @@
           <a:bodyPr wrap="square" lIns="0" tIns="0" rIns="0" bIns="0" rtlCol="0" anchor="ctr"/>
           <a:lstStyle/>
           <a:p>
-            <a:pPr marL="0" indent="0" algn="ctr">
+            <a:pPr algn="ctr" indent="0" marL="0">
               <a:buNone/>
             </a:pPr>
             <a:r>
@@ -4457,13 +7772,6 @@
           </a:solidFill>
           <a:ln/>
         </p:spPr>
-        <p:txBody>
-          <a:bodyPr/>
-          <a:lstStyle/>
-          <a:p>
-            <a:endParaRPr lang="en-US"/>
-          </a:p>
-        </p:txBody>
       </p:sp>
       <p:sp>
         <p:nvSpPr>
@@ -4486,7 +7794,7 @@
           <a:bodyPr wrap="square" lIns="381" tIns="381" rIns="381" bIns="381" rtlCol="0" anchor="ctr"/>
           <a:lstStyle/>
           <a:p>
-            <a:pPr marL="0" indent="0" algn="ctr">
+            <a:pPr algn="ctr" indent="0" marL="0">
               <a:buNone/>
             </a:pPr>
             <a:r>
@@ -4527,13 +7835,6 @@
             <a:tailEnd type="triangle"/>
           </a:ln>
         </p:spPr>
-        <p:txBody>
-          <a:bodyPr/>
-          <a:lstStyle/>
-          <a:p>
-            <a:endParaRPr lang="en-US"/>
-          </a:p>
-        </p:txBody>
       </p:sp>
       <p:sp>
         <p:nvSpPr>
@@ -4556,13 +7857,6 @@
           </a:solidFill>
           <a:ln/>
         </p:spPr>
-        <p:txBody>
-          <a:bodyPr/>
-          <a:lstStyle/>
-          <a:p>
-            <a:endParaRPr lang="en-US"/>
-          </a:p>
-        </p:txBody>
       </p:sp>
       <p:sp>
         <p:nvSpPr>
@@ -4585,7 +7879,7 @@
           <a:bodyPr wrap="square" lIns="381" tIns="381" rIns="381" bIns="381" rtlCol="0" anchor="ctr"/>
           <a:lstStyle/>
           <a:p>
-            <a:pPr marL="0" indent="0" algn="ctr">
+            <a:pPr algn="ctr" indent="0" marL="0">
               <a:buNone/>
             </a:pPr>
             <a:r>
@@ -4626,13 +7920,6 @@
             <a:tailEnd type="triangle"/>
           </a:ln>
         </p:spPr>
-        <p:txBody>
-          <a:bodyPr/>
-          <a:lstStyle/>
-          <a:p>
-            <a:endParaRPr lang="en-US"/>
-          </a:p>
-        </p:txBody>
       </p:sp>
       <p:sp>
         <p:nvSpPr>
@@ -4655,13 +7942,6 @@
           </a:solidFill>
           <a:ln/>
         </p:spPr>
-        <p:txBody>
-          <a:bodyPr/>
-          <a:lstStyle/>
-          <a:p>
-            <a:endParaRPr lang="en-US"/>
-          </a:p>
-        </p:txBody>
       </p:sp>
       <p:sp>
         <p:nvSpPr>
@@ -4684,7 +7964,7 @@
           <a:bodyPr wrap="square" lIns="381" tIns="381" rIns="381" bIns="381" rtlCol="0" anchor="ctr"/>
           <a:lstStyle/>
           <a:p>
-            <a:pPr marL="0" indent="0" algn="ctr">
+            <a:pPr algn="ctr" indent="0" marL="0">
               <a:buNone/>
             </a:pPr>
             <a:r>
@@ -4723,7 +8003,7 @@
           <a:bodyPr wrap="square" lIns="0" tIns="0" rIns="0" bIns="0" rtlCol="0" anchor="ctr"/>
           <a:lstStyle/>
           <a:p>
-            <a:pPr marL="0" indent="0" algn="ctr">
+            <a:pPr algn="ctr" indent="0" marL="0">
               <a:buNone/>
             </a:pPr>
             <a:r>
@@ -4763,13 +8043,6 @@
             <a:prstDash val="solid"/>
           </a:ln>
         </p:spPr>
-        <p:txBody>
-          <a:bodyPr/>
-          <a:lstStyle/>
-          <a:p>
-            <a:endParaRPr lang="en-US"/>
-          </a:p>
-        </p:txBody>
       </p:sp>
       <p:sp>
         <p:nvSpPr>
@@ -4793,13 +8066,6 @@
             <a:prstDash val="solid"/>
           </a:ln>
         </p:spPr>
-        <p:txBody>
-          <a:bodyPr/>
-          <a:lstStyle/>
-          <a:p>
-            <a:endParaRPr lang="en-US"/>
-          </a:p>
-        </p:txBody>
       </p:sp>
       <p:sp>
         <p:nvSpPr>
@@ -4823,13 +8089,6 @@
             <a:prstDash val="solid"/>
           </a:ln>
         </p:spPr>
-        <p:txBody>
-          <a:bodyPr/>
-          <a:lstStyle/>
-          <a:p>
-            <a:endParaRPr lang="en-US"/>
-          </a:p>
-        </p:txBody>
       </p:sp>
       <p:sp>
         <p:nvSpPr>
@@ -4853,13 +8112,6 @@
             <a:prstDash val="solid"/>
           </a:ln>
         </p:spPr>
-        <p:txBody>
-          <a:bodyPr/>
-          <a:lstStyle/>
-          <a:p>
-            <a:endParaRPr lang="en-US"/>
-          </a:p>
-        </p:txBody>
       </p:sp>
       <p:sp>
         <p:nvSpPr>
@@ -4884,13 +8136,6 @@
             <a:tailEnd type="triangle"/>
           </a:ln>
         </p:spPr>
-        <p:txBody>
-          <a:bodyPr/>
-          <a:lstStyle/>
-          <a:p>
-            <a:endParaRPr lang="en-US"/>
-          </a:p>
-        </p:txBody>
       </p:sp>
       <p:sp>
         <p:nvSpPr>
@@ -4913,7 +8158,7 @@
           <a:bodyPr wrap="square" lIns="0" tIns="0" rIns="0" bIns="0" rtlCol="0" anchor="ctr"/>
           <a:lstStyle/>
           <a:p>
-            <a:pPr marL="0" indent="0" algn="ctr">
+            <a:pPr algn="ctr" indent="0" marL="0">
               <a:buNone/>
             </a:pPr>
             <a:r>
@@ -4953,13 +8198,6 @@
             <a:prstDash val="solid"/>
           </a:ln>
         </p:spPr>
-        <p:txBody>
-          <a:bodyPr/>
-          <a:lstStyle/>
-          <a:p>
-            <a:endParaRPr lang="en-US"/>
-          </a:p>
-        </p:txBody>
       </p:sp>
       <p:sp>
         <p:nvSpPr>
@@ -4983,13 +8221,6 @@
             <a:prstDash val="solid"/>
           </a:ln>
         </p:spPr>
-        <p:txBody>
-          <a:bodyPr/>
-          <a:lstStyle/>
-          <a:p>
-            <a:endParaRPr lang="en-US"/>
-          </a:p>
-        </p:txBody>
       </p:sp>
       <p:sp>
         <p:nvSpPr>
@@ -5014,13 +8245,6 @@
             <a:tailEnd type="triangle"/>
           </a:ln>
         </p:spPr>
-        <p:txBody>
-          <a:bodyPr/>
-          <a:lstStyle/>
-          <a:p>
-            <a:endParaRPr lang="en-US"/>
-          </a:p>
-        </p:txBody>
       </p:sp>
       <p:sp>
         <p:nvSpPr>
@@ -5043,7 +8267,7 @@
           <a:bodyPr wrap="square" lIns="0" tIns="0" rIns="0" bIns="0" rtlCol="0" anchor="ctr"/>
           <a:lstStyle/>
           <a:p>
-            <a:pPr marL="0" indent="0" algn="ctr">
+            <a:pPr algn="ctr" indent="0" marL="0">
               <a:buNone/>
             </a:pPr>
             <a:r>
@@ -5083,13 +8307,6 @@
             <a:prstDash val="solid"/>
           </a:ln>
         </p:spPr>
-        <p:txBody>
-          <a:bodyPr/>
-          <a:lstStyle/>
-          <a:p>
-            <a:endParaRPr lang="en-US"/>
-          </a:p>
-        </p:txBody>
       </p:sp>
       <p:sp>
         <p:nvSpPr>
@@ -5113,13 +8330,6 @@
             <a:prstDash val="solid"/>
           </a:ln>
         </p:spPr>
-        <p:txBody>
-          <a:bodyPr/>
-          <a:lstStyle/>
-          <a:p>
-            <a:endParaRPr lang="en-US"/>
-          </a:p>
-        </p:txBody>
       </p:sp>
       <p:sp>
         <p:nvSpPr>
@@ -5144,13 +8354,6 @@
             <a:tailEnd type="triangle"/>
           </a:ln>
         </p:spPr>
-        <p:txBody>
-          <a:bodyPr/>
-          <a:lstStyle/>
-          <a:p>
-            <a:endParaRPr lang="en-US"/>
-          </a:p>
-        </p:txBody>
       </p:sp>
       <p:sp>
         <p:nvSpPr>
@@ -5173,7 +8376,7 @@
           <a:bodyPr wrap="square" lIns="0" tIns="0" rIns="0" bIns="0" rtlCol="0" anchor="ctr"/>
           <a:lstStyle/>
           <a:p>
-            <a:pPr marL="0" indent="0" algn="ctr">
+            <a:pPr algn="ctr" indent="0" marL="0">
               <a:buNone/>
             </a:pPr>
             <a:r>
@@ -5212,13 +8415,6 @@
           </a:solidFill>
           <a:ln/>
         </p:spPr>
-        <p:txBody>
-          <a:bodyPr/>
-          <a:lstStyle/>
-          <a:p>
-            <a:endParaRPr lang="en-US"/>
-          </a:p>
-        </p:txBody>
       </p:sp>
       <p:sp>
         <p:nvSpPr>
@@ -5241,7 +8437,7 @@
           <a:bodyPr wrap="square" lIns="0" tIns="0" rIns="0" bIns="0" rtlCol="0" anchor="ctr"/>
           <a:lstStyle/>
           <a:p>
-            <a:pPr marL="0" indent="0" algn="l">
+            <a:pPr algn="l" indent="0" marL="0">
               <a:buNone/>
             </a:pPr>
             <a:r>
@@ -5255,6 +8451,9 @@
               </a:rPr>
               <a:t>The repair ladder: </a:t>
             </a:r>
+            <a:pPr algn="l" indent="0" marL="0">
+              <a:buNone/>
+            </a:pPr>
             <a:r>
               <a:rPr lang="en-US" sz="1300" dirty="0">
                 <a:solidFill>
@@ -5266,6 +8465,9 @@
               </a:rPr>
               <a:t>a rung's exhaustion is a </a:t>
             </a:r>
+            <a:pPr algn="l" indent="0" marL="0">
+              <a:buNone/>
+            </a:pPr>
             <a:r>
               <a:rPr lang="en-US" sz="1300" b="1" i="1" dirty="0">
                 <a:solidFill>
@@ -5277,6 +8479,9 @@
               </a:rPr>
               <a:t>local diagnosis </a:t>
             </a:r>
+            <a:pPr algn="l" indent="0" marL="0">
+              <a:buNone/>
+            </a:pPr>
             <a:r>
               <a:rPr lang="en-US" sz="1300" dirty="0">
                 <a:solidFill>
@@ -5291,7 +8496,7 @@
             <a:endParaRPr lang="en-US" sz="1300" dirty="0"/>
           </a:p>
           <a:p>
-            <a:pPr marL="0" indent="0" algn="l">
+            <a:pPr algn="l" indent="0" marL="0">
               <a:buNone/>
             </a:pPr>
             <a:r>
@@ -5305,6 +8510,9 @@
               </a:rPr>
               <a:t>judged only by </a:t>
             </a:r>
+            <a:pPr algn="l" indent="0" marL="0">
+              <a:buNone/>
+            </a:pPr>
             <a:r>
               <a:rPr lang="en-US" sz="1300" b="1" i="1" dirty="0">
                 <a:solidFill>
@@ -5316,6 +8524,9 @@
               </a:rPr>
               <a:t>fresh re-measurement</a:t>
             </a:r>
+            <a:pPr algn="l" indent="0" marL="0">
+              <a:buNone/>
+            </a:pPr>
             <a:r>
               <a:rPr lang="en-US" sz="1300" dirty="0">
                 <a:solidFill>
@@ -5357,13 +8568,6 @@
             <a:prstDash val="solid"/>
           </a:ln>
         </p:spPr>
-        <p:txBody>
-          <a:bodyPr/>
-          <a:lstStyle/>
-          <a:p>
-            <a:endParaRPr lang="en-US"/>
-          </a:p>
-        </p:txBody>
       </p:sp>
       <p:sp>
         <p:nvSpPr>
@@ -5386,7 +8590,7 @@
           <a:bodyPr wrap="square" lIns="0" tIns="0" rIns="0" bIns="0" rtlCol="0" anchor="ctr"/>
           <a:lstStyle/>
           <a:p>
-            <a:pPr marL="0" indent="0" algn="l">
+            <a:pPr algn="l" indent="0" marL="0">
               <a:buNone/>
             </a:pPr>
             <a:r>
@@ -5403,7 +8607,7 @@
             <a:endParaRPr lang="en-US" sz="1100" dirty="0"/>
           </a:p>
           <a:p>
-            <a:pPr marL="0" indent="0" algn="l">
+            <a:pPr algn="l" indent="0" marL="0">
               <a:buNone/>
             </a:pPr>
             <a:r>
@@ -5437,7 +8641,6 @@
         <a:solidFill>
           <a:srgbClr val="FFFFFF"/>
         </a:solidFill>
-        <a:effectLst/>
       </p:bgPr>
     </p:bg>
     <p:spTree>
@@ -5475,7 +8678,7 @@
           <a:bodyPr wrap="square" lIns="0" tIns="0" rIns="0" bIns="0" rtlCol="0" anchor="ctr"/>
           <a:lstStyle/>
           <a:p>
-            <a:pPr marL="0" indent="0">
+            <a:pPr indent="0" marL="0">
               <a:buNone/>
             </a:pPr>
             <a:r>
@@ -5514,7 +8717,7 @@
           <a:bodyPr wrap="square" lIns="0" tIns="0" rIns="0" bIns="0" rtlCol="0" anchor="t"/>
           <a:lstStyle/>
           <a:p>
-            <a:pPr marL="342900" indent="-342900" algn="l">
+            <a:pPr algn="l" marL="342900" indent="-342900">
               <a:buSzPct val="100000"/>
               <a:buChar char="•"/>
             </a:pPr>
@@ -5529,6 +8732,12 @@
               </a:rPr>
               <a:t>Blackboard</a:t>
             </a:r>
+            <a:pPr algn="l" indent="0" marL="0">
+              <a:spcAft>
+                <a:spcPts val="900"/>
+              </a:spcAft>
+              <a:buNone/>
+            </a:pPr>
             <a:r>
               <a:rPr lang="en-US" sz="1600" dirty="0">
                 <a:solidFill>
@@ -5543,7 +8752,7 @@
             <a:endParaRPr lang="en-US" sz="1600" dirty="0"/>
           </a:p>
           <a:p>
-            <a:pPr marL="342900" indent="-342900" algn="l">
+            <a:pPr algn="l" marL="342900" indent="-342900">
               <a:buSzPct val="100000"/>
               <a:buChar char="•"/>
             </a:pPr>
@@ -5558,6 +8767,12 @@
               </a:rPr>
               <a:t>Blackboard Entry (Key)</a:t>
             </a:r>
+            <a:pPr algn="l" indent="0" marL="0">
+              <a:spcAft>
+                <a:spcPts val="900"/>
+              </a:spcAft>
+              <a:buNone/>
+            </a:pPr>
             <a:r>
               <a:rPr lang="en-US" sz="1600" dirty="0">
                 <a:solidFill>
@@ -5572,7 +8787,7 @@
             <a:endParaRPr lang="en-US" sz="1600" dirty="0"/>
           </a:p>
           <a:p>
-            <a:pPr marL="342900" indent="-342900" algn="l">
+            <a:pPr algn="l" marL="342900" indent="-342900">
               <a:buSzPct val="100000"/>
               <a:buChar char="•"/>
             </a:pPr>
@@ -5587,6 +8802,12 @@
               </a:rPr>
               <a:t>Episode</a:t>
             </a:r>
+            <a:pPr algn="l" indent="0" marL="0">
+              <a:spcAft>
+                <a:spcPts val="900"/>
+              </a:spcAft>
+              <a:buNone/>
+            </a:pPr>
             <a:r>
               <a:rPr lang="en-US" sz="1600" dirty="0">
                 <a:solidFill>
@@ -5601,7 +8822,7 @@
             <a:endParaRPr lang="en-US" sz="1600" dirty="0"/>
           </a:p>
           <a:p>
-            <a:pPr marL="342900" indent="-342900" algn="l">
+            <a:pPr algn="l" marL="342900" indent="-342900">
               <a:buSzPct val="100000"/>
               <a:buChar char="•"/>
             </a:pPr>
@@ -5616,6 +8837,12 @@
               </a:rPr>
               <a:t>Partition</a:t>
             </a:r>
+            <a:pPr algn="l" indent="0" marL="0">
+              <a:spcAft>
+                <a:spcPts val="900"/>
+              </a:spcAft>
+              <a:buNone/>
+            </a:pPr>
             <a:r>
               <a:rPr lang="en-US" sz="1600" dirty="0">
                 <a:solidFill>
@@ -5630,7 +8857,7 @@
             <a:endParaRPr lang="en-US" sz="1600" dirty="0"/>
           </a:p>
           <a:p>
-            <a:pPr marL="342900" indent="-342900" algn="l">
+            <a:pPr algn="l" marL="342900" indent="-342900">
               <a:buSzPct val="100000"/>
               <a:buChar char="•"/>
             </a:pPr>
@@ -5645,6 +8872,12 @@
               </a:rPr>
               <a:t>Controller</a:t>
             </a:r>
+            <a:pPr algn="l" indent="0" marL="0">
+              <a:spcAft>
+                <a:spcPts val="900"/>
+              </a:spcAft>
+              <a:buNone/>
+            </a:pPr>
             <a:r>
               <a:rPr lang="en-US" sz="1600" dirty="0">
                 <a:solidFill>
@@ -5659,7 +8892,7 @@
             <a:endParaRPr lang="en-US" sz="1600" dirty="0"/>
           </a:p>
           <a:p>
-            <a:pPr marL="342900" indent="-342900" algn="l">
+            <a:pPr algn="l" marL="342900" indent="-342900">
               <a:buSzPct val="100000"/>
               <a:buChar char="•"/>
             </a:pPr>
@@ -5674,6 +8907,12 @@
               </a:rPr>
               <a:t>Knowledge source (KS)</a:t>
             </a:r>
+            <a:pPr algn="l" indent="0" marL="0">
+              <a:spcAft>
+                <a:spcPts val="900"/>
+              </a:spcAft>
+              <a:buNone/>
+            </a:pPr>
             <a:r>
               <a:rPr lang="en-US" sz="1600" dirty="0">
                 <a:solidFill>
@@ -5688,7 +8927,7 @@
             <a:endParaRPr lang="en-US" sz="1600" dirty="0"/>
           </a:p>
           <a:p>
-            <a:pPr marL="342900" indent="-342900" algn="l">
+            <a:pPr algn="l" marL="342900" indent="-342900">
               <a:buSzPct val="100000"/>
               <a:buChar char="•"/>
             </a:pPr>
@@ -5703,6 +8942,12 @@
               </a:rPr>
               <a:t>Route</a:t>
             </a:r>
+            <a:pPr algn="l" indent="0" marL="0">
+              <a:spcAft>
+                <a:spcPts val="900"/>
+              </a:spcAft>
+              <a:buNone/>
+            </a:pPr>
             <a:r>
               <a:rPr lang="en-US" sz="1600" dirty="0">
                 <a:solidFill>
@@ -5717,7 +8962,7 @@
             <a:endParaRPr lang="en-US" sz="1600" dirty="0"/>
           </a:p>
           <a:p>
-            <a:pPr marL="342900" indent="-342900" algn="l">
+            <a:pPr algn="l" marL="342900" indent="-342900">
               <a:buSzPct val="100000"/>
               <a:buChar char="•"/>
             </a:pPr>
@@ -5732,6 +8977,12 @@
               </a:rPr>
               <a:t>History / Ledger</a:t>
             </a:r>
+            <a:pPr algn="l" indent="0" marL="0">
+              <a:spcAft>
+                <a:spcPts val="900"/>
+              </a:spcAft>
+              <a:buNone/>
+            </a:pPr>
             <a:r>
               <a:rPr lang="en-US" sz="1600" dirty="0">
                 <a:solidFill>
@@ -5763,7 +9014,6 @@
         <a:solidFill>
           <a:srgbClr val="FFFFFF"/>
         </a:solidFill>
-        <a:effectLst/>
       </p:bgPr>
     </p:bg>
     <p:spTree>
@@ -5801,7 +9051,7 @@
           <a:bodyPr wrap="square" lIns="0" tIns="0" rIns="0" bIns="0" rtlCol="0" anchor="ctr"/>
           <a:lstStyle/>
           <a:p>
-            <a:pPr marL="0" indent="0">
+            <a:pPr indent="0" marL="0">
               <a:buNone/>
             </a:pPr>
             <a:r>
@@ -5842,34 +9092,10 @@
             <a:tbl>
               <a:tblPr/>
               <a:tblGrid>
-                <a:gridCol w="2194560">
-                  <a:extLst>
-                    <a:ext uri="{9D8B030D-6E8A-4147-A177-3AD203B41FA5}">
-                      <a16:colId xmlns:a16="http://schemas.microsoft.com/office/drawing/2014/main" val="20000"/>
-                    </a:ext>
-                  </a:extLst>
-                </a:gridCol>
-                <a:gridCol w="2651760">
-                  <a:extLst>
-                    <a:ext uri="{9D8B030D-6E8A-4147-A177-3AD203B41FA5}">
-                      <a16:colId xmlns:a16="http://schemas.microsoft.com/office/drawing/2014/main" val="20001"/>
-                    </a:ext>
-                  </a:extLst>
-                </a:gridCol>
-                <a:gridCol w="3017520">
-                  <a:extLst>
-                    <a:ext uri="{9D8B030D-6E8A-4147-A177-3AD203B41FA5}">
-                      <a16:colId xmlns:a16="http://schemas.microsoft.com/office/drawing/2014/main" val="20002"/>
-                    </a:ext>
-                  </a:extLst>
-                </a:gridCol>
-                <a:gridCol w="3017520">
-                  <a:extLst>
-                    <a:ext uri="{9D8B030D-6E8A-4147-A177-3AD203B41FA5}">
-                      <a16:colId xmlns:a16="http://schemas.microsoft.com/office/drawing/2014/main" val="20003"/>
-                    </a:ext>
-                  </a:extLst>
-                </a:gridCol>
+                <a:gridCol w="2194560"/>
+                <a:gridCol w="2651760"/>
+                <a:gridCol w="3017520"/>
+                <a:gridCol w="3017520"/>
               </a:tblGrid>
               <a:tr h="658368">
                 <a:tc>
@@ -5877,7 +9103,7 @@
                     <a:bodyPr/>
                     <a:lstStyle/>
                     <a:p>
-                      <a:pPr marL="0" indent="0" algn="l">
+                      <a:pPr algn="l" indent="0" marL="0">
                         <a:buNone/>
                       </a:pPr>
                       <a:r>
@@ -5945,7 +9171,7 @@
                     <a:bodyPr/>
                     <a:lstStyle/>
                     <a:p>
-                      <a:pPr marL="0" indent="0" algn="l">
+                      <a:pPr algn="l" indent="0" marL="0">
                         <a:buNone/>
                       </a:pPr>
                       <a:r>
@@ -6013,7 +9239,7 @@
                     <a:bodyPr/>
                     <a:lstStyle/>
                     <a:p>
-                      <a:pPr marL="0" indent="0" algn="l">
+                      <a:pPr algn="l" indent="0" marL="0">
                         <a:buNone/>
                       </a:pPr>
                       <a:r>
@@ -6081,7 +9307,7 @@
                     <a:bodyPr/>
                     <a:lstStyle/>
                     <a:p>
-                      <a:pPr marL="0" indent="0" algn="l">
+                      <a:pPr algn="l" indent="0" marL="0">
                         <a:buNone/>
                       </a:pPr>
                       <a:r>
@@ -6144,11 +9370,6 @@
                     </a:solidFill>
                   </a:tcPr>
                 </a:tc>
-                <a:extLst>
-                  <a:ext uri="{0D108BD9-81ED-4DB2-BD59-A6C34878D82A}">
-                    <a16:rowId xmlns:a16="http://schemas.microsoft.com/office/drawing/2014/main" val="10000"/>
-                  </a:ext>
-                </a:extLst>
               </a:tr>
               <a:tr h="658368">
                 <a:tc>
@@ -6156,7 +9377,7 @@
                     <a:bodyPr/>
                     <a:lstStyle/>
                     <a:p>
-                      <a:pPr marL="0" indent="0" algn="l">
+                      <a:pPr algn="l" indent="0" marL="0">
                         <a:buNone/>
                       </a:pPr>
                       <a:r>
@@ -6224,7 +9445,7 @@
                     <a:bodyPr/>
                     <a:lstStyle/>
                     <a:p>
-                      <a:pPr marL="0" indent="0" algn="l">
+                      <a:pPr algn="l" indent="0" marL="0">
                         <a:buNone/>
                       </a:pPr>
                       <a:r>
@@ -6292,7 +9513,7 @@
                     <a:bodyPr/>
                     <a:lstStyle/>
                     <a:p>
-                      <a:pPr marL="0" indent="0" algn="l">
+                      <a:pPr algn="l" indent="0" marL="0">
                         <a:buNone/>
                       </a:pPr>
                       <a:r>
@@ -6360,7 +9581,7 @@
                     <a:bodyPr/>
                     <a:lstStyle/>
                     <a:p>
-                      <a:pPr marL="0" indent="0" algn="l">
+                      <a:pPr algn="l" indent="0" marL="0">
                         <a:buNone/>
                       </a:pPr>
                       <a:r>
@@ -6374,6 +9595,9 @@
                         </a:rPr>
                         <a:t>restore from golden — or </a:t>
                       </a:r>
+                      <a:pPr algn="l" indent="0" marL="0">
+                        <a:buNone/>
+                      </a:pPr>
                       <a:r>
                         <a:rPr lang="en-US" sz="1250" i="1" dirty="0">
                           <a:solidFill>
@@ -6385,6 +9609,9 @@
                         </a:rPr>
                         <a:t>bless</a:t>
                       </a:r>
+                      <a:pPr algn="l" indent="0" marL="0">
+                        <a:buNone/>
+                      </a:pPr>
                       <a:r>
                         <a:rPr lang="en-US" sz="1250" dirty="0">
                           <a:solidFill>
@@ -6445,11 +9672,6 @@
                     </a:solidFill>
                   </a:tcPr>
                 </a:tc>
-                <a:extLst>
-                  <a:ext uri="{0D108BD9-81ED-4DB2-BD59-A6C34878D82A}">
-                    <a16:rowId xmlns:a16="http://schemas.microsoft.com/office/drawing/2014/main" val="10001"/>
-                  </a:ext>
-                </a:extLst>
               </a:tr>
               <a:tr h="658368">
                 <a:tc>
@@ -6457,7 +9679,7 @@
                     <a:bodyPr/>
                     <a:lstStyle/>
                     <a:p>
-                      <a:pPr marL="0" indent="0" algn="l">
+                      <a:pPr algn="l" indent="0" marL="0">
                         <a:buNone/>
                       </a:pPr>
                       <a:r>
@@ -6525,7 +9747,7 @@
                     <a:bodyPr/>
                     <a:lstStyle/>
                     <a:p>
-                      <a:pPr marL="0" indent="0" algn="l">
+                      <a:pPr algn="l" indent="0" marL="0">
                         <a:buNone/>
                       </a:pPr>
                       <a:r>
@@ -6593,7 +9815,7 @@
                     <a:bodyPr/>
                     <a:lstStyle/>
                     <a:p>
-                      <a:pPr marL="0" indent="0" algn="l">
+                      <a:pPr algn="l" indent="0" marL="0">
                         <a:buNone/>
                       </a:pPr>
                       <a:r>
@@ -6661,7 +9883,7 @@
                     <a:bodyPr/>
                     <a:lstStyle/>
                     <a:p>
-                      <a:pPr marL="0" indent="0" algn="l">
+                      <a:pPr algn="l" indent="0" marL="0">
                         <a:buNone/>
                       </a:pPr>
                       <a:r>
@@ -6724,11 +9946,6 @@
                     </a:solidFill>
                   </a:tcPr>
                 </a:tc>
-                <a:extLst>
-                  <a:ext uri="{0D108BD9-81ED-4DB2-BD59-A6C34878D82A}">
-                    <a16:rowId xmlns:a16="http://schemas.microsoft.com/office/drawing/2014/main" val="10002"/>
-                  </a:ext>
-                </a:extLst>
               </a:tr>
               <a:tr h="658368">
                 <a:tc>
@@ -6736,7 +9953,7 @@
                     <a:bodyPr/>
                     <a:lstStyle/>
                     <a:p>
-                      <a:pPr marL="0" indent="0" algn="l">
+                      <a:pPr algn="l" indent="0" marL="0">
                         <a:buNone/>
                       </a:pPr>
                       <a:r>
@@ -6804,7 +10021,7 @@
                     <a:bodyPr/>
                     <a:lstStyle/>
                     <a:p>
-                      <a:pPr marL="0" indent="0" algn="l">
+                      <a:pPr algn="l" indent="0" marL="0">
                         <a:buNone/>
                       </a:pPr>
                       <a:r>
@@ -6872,7 +10089,7 @@
                     <a:bodyPr/>
                     <a:lstStyle/>
                     <a:p>
-                      <a:pPr marL="0" indent="0" algn="l">
+                      <a:pPr algn="l" indent="0" marL="0">
                         <a:buNone/>
                       </a:pPr>
                       <a:r>
@@ -6940,7 +10157,7 @@
                     <a:bodyPr/>
                     <a:lstStyle/>
                     <a:p>
-                      <a:pPr marL="0" indent="0" algn="l">
+                      <a:pPr algn="l" indent="0" marL="0">
                         <a:buNone/>
                       </a:pPr>
                       <a:r>
@@ -7003,11 +10220,6 @@
                     </a:solidFill>
                   </a:tcPr>
                 </a:tc>
-                <a:extLst>
-                  <a:ext uri="{0D108BD9-81ED-4DB2-BD59-A6C34878D82A}">
-                    <a16:rowId xmlns:a16="http://schemas.microsoft.com/office/drawing/2014/main" val="10003"/>
-                  </a:ext>
-                </a:extLst>
               </a:tr>
               <a:tr h="658368">
                 <a:tc>
@@ -7015,7 +10227,7 @@
                     <a:bodyPr/>
                     <a:lstStyle/>
                     <a:p>
-                      <a:pPr marL="0" indent="0" algn="l">
+                      <a:pPr algn="l" indent="0" marL="0">
                         <a:buNone/>
                       </a:pPr>
                       <a:r>
@@ -7083,7 +10295,7 @@
                     <a:bodyPr/>
                     <a:lstStyle/>
                     <a:p>
-                      <a:pPr marL="0" indent="0" algn="l">
+                      <a:pPr algn="l" indent="0" marL="0">
                         <a:buNone/>
                       </a:pPr>
                       <a:r>
@@ -7151,7 +10363,7 @@
                     <a:bodyPr/>
                     <a:lstStyle/>
                     <a:p>
-                      <a:pPr marL="0" indent="0" algn="l">
+                      <a:pPr algn="l" indent="0" marL="0">
                         <a:buNone/>
                       </a:pPr>
                       <a:r>
@@ -7219,7 +10431,7 @@
                     <a:bodyPr/>
                     <a:lstStyle/>
                     <a:p>
-                      <a:pPr marL="0" indent="0" algn="l">
+                      <a:pPr algn="l" indent="0" marL="0">
                         <a:buNone/>
                       </a:pPr>
                       <a:r>
@@ -7282,11 +10494,6 @@
                     </a:solidFill>
                   </a:tcPr>
                 </a:tc>
-                <a:extLst>
-                  <a:ext uri="{0D108BD9-81ED-4DB2-BD59-A6C34878D82A}">
-                    <a16:rowId xmlns:a16="http://schemas.microsoft.com/office/drawing/2014/main" val="10004"/>
-                  </a:ext>
-                </a:extLst>
               </a:tr>
               <a:tr h="658368">
                 <a:tc>
@@ -7294,7 +10501,7 @@
                     <a:bodyPr/>
                     <a:lstStyle/>
                     <a:p>
-                      <a:pPr marL="0" indent="0" algn="l">
+                      <a:pPr algn="l" indent="0" marL="0">
                         <a:buNone/>
                       </a:pPr>
                       <a:r>
@@ -7308,6 +10515,9 @@
                         </a:rPr>
                         <a:t>Toolchain </a:t>
                       </a:r>
+                      <a:pPr algn="l" indent="0" marL="0">
+                        <a:buNone/>
+                      </a:pPr>
                       <a:r>
                         <a:rPr lang="en-US" sz="1100" i="1" dirty="0">
                           <a:solidFill>
@@ -7373,7 +10583,7 @@
                     <a:bodyPr/>
                     <a:lstStyle/>
                     <a:p>
-                      <a:pPr marL="0" indent="0" algn="l">
+                      <a:pPr algn="l" indent="0" marL="0">
                         <a:buNone/>
                       </a:pPr>
                       <a:r>
@@ -7387,6 +10597,9 @@
                         </a:rPr>
                         <a:t>hashed </a:t>
                       </a:r>
+                      <a:pPr algn="l" indent="0" marL="0">
+                        <a:buNone/>
+                      </a:pPr>
                       <a:r>
                         <a:rPr lang="en-US" sz="1250" b="1" dirty="0">
                           <a:solidFill>
@@ -7452,7 +10665,7 @@
                     <a:bodyPr/>
                     <a:lstStyle/>
                     <a:p>
-                      <a:pPr marL="0" indent="0" algn="l">
+                      <a:pPr algn="l" indent="0" marL="0">
                         <a:buNone/>
                       </a:pPr>
                       <a:r>
@@ -7520,7 +10733,7 @@
                     <a:bodyPr/>
                     <a:lstStyle/>
                     <a:p>
-                      <a:pPr marL="0" indent="0" algn="l">
+                      <a:pPr algn="l" indent="0" marL="0">
                         <a:buNone/>
                       </a:pPr>
                       <a:r>
@@ -7583,11 +10796,6 @@
                     </a:solidFill>
                   </a:tcPr>
                 </a:tc>
-                <a:extLst>
-                  <a:ext uri="{0D108BD9-81ED-4DB2-BD59-A6C34878D82A}">
-                    <a16:rowId xmlns:a16="http://schemas.microsoft.com/office/drawing/2014/main" val="10005"/>
-                  </a:ext>
-                </a:extLst>
               </a:tr>
               <a:tr h="658368">
                 <a:tc>
@@ -7595,7 +10803,7 @@
                     <a:bodyPr/>
                     <a:lstStyle/>
                     <a:p>
-                      <a:pPr marL="0" indent="0" algn="l">
+                      <a:pPr algn="l" indent="0" marL="0">
                         <a:buNone/>
                       </a:pPr>
                       <a:r>
@@ -7609,6 +10817,9 @@
                         </a:rPr>
                         <a:t>Trust state </a:t>
                       </a:r>
+                      <a:pPr algn="l" indent="0" marL="0">
+                        <a:buNone/>
+                      </a:pPr>
                       <a:r>
                         <a:rPr lang="en-US" sz="1100" i="1" dirty="0">
                           <a:solidFill>
@@ -7674,7 +10885,7 @@
                     <a:bodyPr/>
                     <a:lstStyle/>
                     <a:p>
-                      <a:pPr marL="0" indent="0" algn="l">
+                      <a:pPr algn="l" indent="0" marL="0">
                         <a:buNone/>
                       </a:pPr>
                       <a:r>
@@ -7742,7 +10953,7 @@
                     <a:bodyPr/>
                     <a:lstStyle/>
                     <a:p>
-                      <a:pPr marL="0" indent="0" algn="l">
+                      <a:pPr algn="l" indent="0" marL="0">
                         <a:buNone/>
                       </a:pPr>
                       <a:r>
@@ -7810,7 +11021,7 @@
                     <a:bodyPr/>
                     <a:lstStyle/>
                     <a:p>
-                      <a:pPr marL="0" indent="0" algn="l">
+                      <a:pPr algn="l" indent="0" marL="0">
                         <a:buNone/>
                       </a:pPr>
                       <a:r>
@@ -7824,6 +11035,9 @@
                         </a:rPr>
                         <a:t>principled refusal</a:t>
                       </a:r>
+                      <a:pPr algn="l" indent="0" marL="0">
+                        <a:buNone/>
+                      </a:pPr>
                       <a:r>
                         <a:rPr lang="en-US" sz="1250" dirty="0">
                           <a:solidFill>
@@ -7884,11 +11098,6 @@
                     </a:solidFill>
                   </a:tcPr>
                 </a:tc>
-                <a:extLst>
-                  <a:ext uri="{0D108BD9-81ED-4DB2-BD59-A6C34878D82A}">
-                    <a16:rowId xmlns:a16="http://schemas.microsoft.com/office/drawing/2014/main" val="10006"/>
-                  </a:ext>
-                </a:extLst>
               </a:tr>
             </a:tbl>
           </a:graphicData>
@@ -7910,7 +11119,6 @@
         <a:solidFill>
           <a:srgbClr val="FFFFFF"/>
         </a:solidFill>
-        <a:effectLst/>
       </p:bgPr>
     </p:bg>
     <p:spTree>
@@ -7948,13 +11156,6 @@
           </a:solidFill>
           <a:ln/>
         </p:spPr>
-        <p:txBody>
-          <a:bodyPr/>
-          <a:lstStyle/>
-          <a:p>
-            <a:endParaRPr lang="en-US"/>
-          </a:p>
-        </p:txBody>
       </p:sp>
       <p:sp>
         <p:nvSpPr>
@@ -7977,7 +11178,7 @@
           <a:bodyPr wrap="square" lIns="254" tIns="254" rIns="254" bIns="254" rtlCol="0" anchor="ctr"/>
           <a:lstStyle/>
           <a:p>
-            <a:pPr marL="0" indent="0" algn="ctr">
+            <a:pPr algn="ctr" indent="0" marL="0">
               <a:buNone/>
             </a:pPr>
             <a:r>
@@ -8016,13 +11217,6 @@
           </a:solidFill>
           <a:ln/>
         </p:spPr>
-        <p:txBody>
-          <a:bodyPr/>
-          <a:lstStyle/>
-          <a:p>
-            <a:endParaRPr lang="en-US"/>
-          </a:p>
-        </p:txBody>
       </p:sp>
       <p:sp>
         <p:nvSpPr>
@@ -8045,7 +11239,7 @@
           <a:bodyPr wrap="square" lIns="254" tIns="254" rIns="254" bIns="254" rtlCol="0" anchor="ctr"/>
           <a:lstStyle/>
           <a:p>
-            <a:pPr marL="0" indent="0" algn="ctr">
+            <a:pPr algn="ctr" indent="0" marL="0">
               <a:buNone/>
             </a:pPr>
             <a:r>
@@ -8062,7 +11256,7 @@
             <a:endParaRPr lang="en-US" sz="900" dirty="0"/>
           </a:p>
           <a:p>
-            <a:pPr marL="0" indent="0" algn="ctr">
+            <a:pPr algn="ctr" indent="0" marL="0">
               <a:buNone/>
             </a:pPr>
             <a:r>
@@ -8101,13 +11295,6 @@
           </a:solidFill>
           <a:ln/>
         </p:spPr>
-        <p:txBody>
-          <a:bodyPr/>
-          <a:lstStyle/>
-          <a:p>
-            <a:endParaRPr lang="en-US"/>
-          </a:p>
-        </p:txBody>
       </p:sp>
       <p:sp>
         <p:nvSpPr>
@@ -8130,7 +11317,7 @@
           <a:bodyPr wrap="square" lIns="254" tIns="254" rIns="254" bIns="254" rtlCol="0" anchor="ctr"/>
           <a:lstStyle/>
           <a:p>
-            <a:pPr marL="0" indent="0" algn="ctr">
+            <a:pPr algn="ctr" indent="0" marL="0">
               <a:buNone/>
             </a:pPr>
             <a:r>
@@ -8169,13 +11356,6 @@
           </a:solidFill>
           <a:ln/>
         </p:spPr>
-        <p:txBody>
-          <a:bodyPr/>
-          <a:lstStyle/>
-          <a:p>
-            <a:endParaRPr lang="en-US"/>
-          </a:p>
-        </p:txBody>
       </p:sp>
       <p:sp>
         <p:nvSpPr>
@@ -8198,7 +11378,7 @@
           <a:bodyPr wrap="square" lIns="254" tIns="254" rIns="254" bIns="254" rtlCol="0" anchor="ctr"/>
           <a:lstStyle/>
           <a:p>
-            <a:pPr marL="0" indent="0" algn="ctr">
+            <a:pPr algn="ctr" indent="0" marL="0">
               <a:buNone/>
             </a:pPr>
             <a:r>
@@ -8237,13 +11417,6 @@
           </a:solidFill>
           <a:ln/>
         </p:spPr>
-        <p:txBody>
-          <a:bodyPr/>
-          <a:lstStyle/>
-          <a:p>
-            <a:endParaRPr lang="en-US"/>
-          </a:p>
-        </p:txBody>
       </p:sp>
       <p:sp>
         <p:nvSpPr>
@@ -8266,7 +11439,7 @@
           <a:bodyPr wrap="square" lIns="254" tIns="254" rIns="254" bIns="254" rtlCol="0" anchor="ctr"/>
           <a:lstStyle/>
           <a:p>
-            <a:pPr marL="0" indent="0" algn="ctr">
+            <a:pPr algn="ctr" indent="0" marL="0">
               <a:buNone/>
             </a:pPr>
             <a:r>
@@ -8305,7 +11478,7 @@
           <a:bodyPr wrap="square" lIns="0" tIns="0" rIns="0" bIns="0" rtlCol="0" anchor="ctr"/>
           <a:lstStyle/>
           <a:p>
-            <a:pPr marL="0" indent="0">
+            <a:pPr indent="0" marL="0">
               <a:buNone/>
             </a:pPr>
             <a:r>
@@ -8331,8 +11504,8 @@
         </p:nvSpPr>
         <p:spPr>
           <a:xfrm>
-            <a:off x="567557" y="1812296"/>
-            <a:ext cx="6149603" cy="2286000"/>
+            <a:off x="566928" y="1810512"/>
+            <a:ext cx="6153912" cy="2286000"/>
           </a:xfrm>
           <a:prstGeom prst="rect">
             <a:avLst/>
@@ -8344,12 +11517,12 @@
           <a:bodyPr wrap="square" lIns="0" tIns="0" rIns="0" bIns="0" rtlCol="0" anchor="t"/>
           <a:lstStyle/>
           <a:p>
-            <a:pPr marL="342900" indent="-342900" algn="l">
+            <a:pPr algn="l" marL="342900" indent="-342900">
               <a:buSzPct val="100000"/>
               <a:buChar char="•"/>
             </a:pPr>
             <a:r>
-              <a:rPr lang="en-US" sz="1400" b="1" dirty="0">
+              <a:rPr lang="en-US" sz="1350" b="1" dirty="0">
                 <a:solidFill>
                   <a:srgbClr val="212121"/>
                 </a:solidFill>
@@ -8359,8 +11532,14 @@
               </a:rPr>
               <a:t>The system: </a:t>
             </a:r>
-            <a:r>
-              <a:rPr lang="en-US" sz="1400" dirty="0">
+            <a:pPr algn="l" indent="0" marL="0">
+              <a:spcAft>
+                <a:spcPts val="200"/>
+              </a:spcAft>
+              <a:buNone/>
+            </a:pPr>
+            <a:r>
+              <a:rPr lang="en-US" sz="1350" dirty="0">
                 <a:solidFill>
                   <a:srgbClr val="212121"/>
                 </a:solidFill>
@@ -8370,17 +11549,17 @@
               </a:rPr>
               <a:t>an infant-incubator thermostat — regulate and monitor functions keep a newborn's environment in a safe temperature range; heat control on/off</a:t>
             </a:r>
-            <a:endParaRPr lang="en-US" sz="1400" dirty="0"/>
-          </a:p>
-          <a:p>
-            <a:pPr marL="0" indent="0" algn="l">
+            <a:endParaRPr lang="en-US" sz="1350" dirty="0"/>
+          </a:p>
+          <a:p>
+            <a:pPr algn="l" indent="0" marL="0">
               <a:spcAft>
                 <a:spcPts val="1000"/>
               </a:spcAft>
               <a:buNone/>
             </a:pPr>
             <a:r>
-              <a:rPr lang="en-US" sz="1400" i="1" dirty="0">
+              <a:rPr lang="en-US" sz="1100" i="1" dirty="0">
                 <a:solidFill>
                   <a:srgbClr val="5A6478"/>
                 </a:solidFill>
@@ -8388,17 +11567,17 @@
                 <a:ea typeface="Calibri" pitchFamily="34" charset="-122"/>
                 <a:cs typeface="Calibri" pitchFamily="34" charset="-120"/>
               </a:rPr>
-              <a:t>	requirements traceable to FAA AR-08-32 (the REQ-MHS-* family the 	scenes will tamper with)</a:t>
-            </a:r>
-            <a:endParaRPr lang="en-US" sz="1400" dirty="0"/>
-          </a:p>
-          <a:p>
-            <a:pPr marL="342900" indent="-342900" algn="l">
+              <a:t>requirements traceable to FAA AR-08-32 (the REQ-MHS-* family the scenes will tamper with)</a:t>
+            </a:r>
+            <a:endParaRPr lang="en-US" sz="1350" dirty="0"/>
+          </a:p>
+          <a:p>
+            <a:pPr algn="l" marL="342900" indent="-342900">
               <a:buSzPct val="100000"/>
               <a:buChar char="•"/>
             </a:pPr>
             <a:r>
-              <a:rPr lang="en-US" sz="1400" b="1" dirty="0">
+              <a:rPr lang="en-US" sz="1350" b="1" dirty="0">
                 <a:solidFill>
                   <a:srgbClr val="212121"/>
                 </a:solidFill>
@@ -8408,8 +11587,11 @@
               </a:rPr>
               <a:t>The relevance: </a:t>
             </a:r>
-            <a:r>
-              <a:rPr lang="en-US" sz="1400" dirty="0">
+            <a:pPr algn="l" indent="0" marL="0">
+              <a:buNone/>
+            </a:pPr>
+            <a:r>
+              <a:rPr lang="en-US" sz="1350" dirty="0">
                 <a:solidFill>
                   <a:srgbClr val="212121"/>
                 </a:solidFill>
@@ -8419,7 +11601,7 @@
               </a:rPr>
               <a:t>the INSPECTA program's seL4/Microkit exemplar — a real, current, safety-critical development artifact, not a toy built for this talk</a:t>
             </a:r>
-            <a:endParaRPr lang="en-US" sz="1400" dirty="0"/>
+            <a:endParaRPr lang="en-US" sz="1350" dirty="0"/>
           </a:p>
         </p:txBody>
       </p:sp>
@@ -8444,13 +11626,6 @@
           </a:solidFill>
           <a:ln/>
         </p:spPr>
-        <p:txBody>
-          <a:bodyPr/>
-          <a:lstStyle/>
-          <a:p>
-            <a:endParaRPr lang="en-US"/>
-          </a:p>
-        </p:txBody>
       </p:sp>
       <p:sp>
         <p:nvSpPr>
@@ -8473,7 +11648,7 @@
           <a:bodyPr wrap="square" lIns="254" tIns="254" rIns="254" bIns="254" rtlCol="0" anchor="ctr"/>
           <a:lstStyle/>
           <a:p>
-            <a:pPr marL="0" indent="0" algn="ctr">
+            <a:pPr algn="ctr" indent="0" marL="0">
               <a:buNone/>
             </a:pPr>
             <a:r>
@@ -8490,7 +11665,7 @@
             <a:endParaRPr lang="en-US" sz="1050" dirty="0"/>
           </a:p>
           <a:p>
-            <a:pPr marL="0" indent="0" algn="ctr">
+            <a:pPr algn="ctr" indent="0" marL="0">
               <a:buNone/>
             </a:pPr>
             <a:r>
@@ -8529,7 +11704,7 @@
           <a:bodyPr wrap="square" lIns="0" tIns="0" rIns="0" bIns="0" rtlCol="0" anchor="ctr"/>
           <a:lstStyle/>
           <a:p>
-            <a:pPr marL="0" indent="0" algn="ctr">
+            <a:pPr algn="ctr" indent="0" marL="0">
               <a:buNone/>
             </a:pPr>
             <a:r>
@@ -8568,13 +11743,6 @@
           </a:solidFill>
           <a:ln/>
         </p:spPr>
-        <p:txBody>
-          <a:bodyPr/>
-          <a:lstStyle/>
-          <a:p>
-            <a:endParaRPr lang="en-US"/>
-          </a:p>
-        </p:txBody>
       </p:sp>
       <p:sp>
         <p:nvSpPr>
@@ -8597,7 +11765,7 @@
           <a:bodyPr wrap="square" lIns="254" tIns="254" rIns="254" bIns="254" rtlCol="0" anchor="ctr"/>
           <a:lstStyle/>
           <a:p>
-            <a:pPr marL="0" indent="0" algn="ctr">
+            <a:pPr algn="ctr" indent="0" marL="0">
               <a:buNone/>
             </a:pPr>
             <a:r>
@@ -8614,7 +11782,7 @@
             <a:endParaRPr lang="en-US" sz="1050" dirty="0"/>
           </a:p>
           <a:p>
-            <a:pPr marL="0" indent="0" algn="ctr">
+            <a:pPr algn="ctr" indent="0" marL="0">
               <a:buNone/>
             </a:pPr>
             <a:r>
@@ -8653,7 +11821,7 @@
           <a:bodyPr wrap="square" lIns="0" tIns="0" rIns="0" bIns="0" rtlCol="0" anchor="ctr"/>
           <a:lstStyle/>
           <a:p>
-            <a:pPr marL="0" indent="0" algn="ctr">
+            <a:pPr algn="ctr" indent="0" marL="0">
               <a:buNone/>
             </a:pPr>
             <a:r>
@@ -8692,13 +11860,6 @@
           </a:solidFill>
           <a:ln/>
         </p:spPr>
-        <p:txBody>
-          <a:bodyPr/>
-          <a:lstStyle/>
-          <a:p>
-            <a:endParaRPr lang="en-US"/>
-          </a:p>
-        </p:txBody>
       </p:sp>
       <p:sp>
         <p:nvSpPr>
@@ -8721,7 +11882,7 @@
           <a:bodyPr wrap="square" lIns="254" tIns="254" rIns="254" bIns="254" rtlCol="0" anchor="ctr"/>
           <a:lstStyle/>
           <a:p>
-            <a:pPr marL="0" indent="0" algn="ctr">
+            <a:pPr algn="ctr" indent="0" marL="0">
               <a:buNone/>
             </a:pPr>
             <a:r>
@@ -8738,7 +11899,7 @@
             <a:endParaRPr lang="en-US" sz="1050" dirty="0"/>
           </a:p>
           <a:p>
-            <a:pPr marL="0" indent="0" algn="ctr">
+            <a:pPr algn="ctr" indent="0" marL="0">
               <a:buNone/>
             </a:pPr>
             <a:r>
@@ -8777,7 +11938,7 @@
           <a:bodyPr wrap="square" lIns="0" tIns="0" rIns="0" bIns="0" rtlCol="0" anchor="ctr"/>
           <a:lstStyle/>
           <a:p>
-            <a:pPr marL="0" indent="0" algn="ctr">
+            <a:pPr algn="ctr" indent="0" marL="0">
               <a:buNone/>
             </a:pPr>
             <a:r>
@@ -8816,13 +11977,6 @@
           </a:solidFill>
           <a:ln/>
         </p:spPr>
-        <p:txBody>
-          <a:bodyPr/>
-          <a:lstStyle/>
-          <a:p>
-            <a:endParaRPr lang="en-US"/>
-          </a:p>
-        </p:txBody>
       </p:sp>
       <p:sp>
         <p:nvSpPr>
@@ -8845,7 +11999,7 @@
           <a:bodyPr wrap="square" lIns="254" tIns="254" rIns="254" bIns="254" rtlCol="0" anchor="ctr"/>
           <a:lstStyle/>
           <a:p>
-            <a:pPr marL="0" indent="0" algn="ctr">
+            <a:pPr algn="ctr" indent="0" marL="0">
               <a:buNone/>
             </a:pPr>
             <a:r>
@@ -8862,7 +12016,7 @@
             <a:endParaRPr lang="en-US" sz="1050" dirty="0"/>
           </a:p>
           <a:p>
-            <a:pPr marL="0" indent="0" algn="ctr">
+            <a:pPr algn="ctr" indent="0" marL="0">
               <a:buNone/>
             </a:pPr>
             <a:r>
@@ -8901,7 +12055,7 @@
           <a:bodyPr wrap="square" lIns="0" tIns="0" rIns="0" bIns="0" rtlCol="0" anchor="t"/>
           <a:lstStyle/>
           <a:p>
-            <a:pPr marL="342900" indent="-342900" algn="l">
+            <a:pPr algn="l" marL="342900" indent="-342900">
               <a:buSzPct val="100000"/>
               <a:buChar char="•"/>
             </a:pPr>
@@ -8916,6 +12070,9 @@
               </a:rPr>
               <a:t>Why this example: </a:t>
             </a:r>
+            <a:pPr algn="l" indent="0" marL="0">
+              <a:buNone/>
+            </a:pPr>
             <a:r>
               <a:rPr lang="en-US" sz="1350" dirty="0">
                 <a:solidFill>
@@ -8952,7 +12109,7 @@
           <a:bodyPr wrap="square" lIns="0" tIns="0" rIns="0" bIns="0" rtlCol="0" anchor="t"/>
           <a:lstStyle/>
           <a:p>
-            <a:pPr marL="0" indent="0" algn="l">
+            <a:pPr algn="l" indent="0" marL="0">
               <a:buNone/>
             </a:pPr>
             <a:r>
@@ -8966,6 +12123,9 @@
               </a:rPr>
               <a:t>Hatcliff &amp; Belt, </a:t>
             </a:r>
+            <a:pPr algn="l" indent="0" marL="0">
+              <a:buNone/>
+            </a:pPr>
             <a:r>
               <a:rPr lang="en-US" sz="850" i="1" dirty="0">
                 <a:solidFill>
@@ -8977,6 +12137,9 @@
               </a:rPr>
               <a:t>The Isolette System: Illustrating End-to-End Artifacts for Rigorous Model-Based Engineering</a:t>
             </a:r>
+            <a:pPr algn="l" indent="0" marL="0">
+              <a:buNone/>
+            </a:pPr>
             <a:r>
               <a:rPr lang="en-US" sz="850" dirty="0">
                 <a:solidFill>
@@ -8991,7 +12154,7 @@
             <a:endParaRPr lang="en-US" sz="850" dirty="0"/>
           </a:p>
           <a:p>
-            <a:pPr marL="0" indent="0" algn="l">
+            <a:pPr algn="l" indent="0" marL="0">
               <a:buNone/>
             </a:pPr>
             <a:r>
@@ -9005,6 +12168,9 @@
               </a:rPr>
               <a:t>Hatcliff, Belt, Robby, McKenzie, Liang, </a:t>
             </a:r>
+            <a:pPr algn="l" indent="0" marL="0">
+              <a:buNone/>
+            </a:pPr>
             <a:r>
               <a:rPr lang="en-US" sz="850" i="1" dirty="0">
                 <a:solidFill>
@@ -9016,6 +12182,9 @@
               </a:rPr>
               <a:t>End-to-End Formal Methods Integrated Development with SysMLv2 Using HAMR</a:t>
             </a:r>
+            <a:pPr algn="l" indent="0" marL="0">
+              <a:buNone/>
+            </a:pPr>
             <a:r>
               <a:rPr lang="en-US" sz="850" dirty="0">
                 <a:solidFill>
@@ -9030,7 +12199,7 @@
             <a:endParaRPr lang="en-US" sz="850" dirty="0"/>
           </a:p>
           <a:p>
-            <a:pPr marL="0" indent="0" algn="l">
+            <a:pPr algn="l" indent="0" marL="0">
               <a:buNone/>
             </a:pPr>
             <a:r>
@@ -9044,6 +12213,9 @@
               </a:rPr>
               <a:t>Hatcliff, Belt, Robby, Carpenter, </a:t>
             </a:r>
+            <a:pPr algn="l" indent="0" marL="0">
+              <a:buNone/>
+            </a:pPr>
             <a:r>
               <a:rPr lang="en-US" sz="850" i="1" dirty="0">
                 <a:solidFill>
@@ -9055,6 +12227,9 @@
               </a:rPr>
               <a:t>HAMR: An AADL Multi-platform Code Generation Toolset</a:t>
             </a:r>
+            <a:pPr algn="l" indent="0" marL="0">
+              <a:buNone/>
+            </a:pPr>
             <a:r>
               <a:rPr lang="en-US" sz="850" dirty="0">
                 <a:solidFill>
@@ -9091,7 +12266,7 @@
           <a:bodyPr wrap="square" lIns="0" tIns="0" rIns="0" bIns="0" rtlCol="0" anchor="ctr"/>
           <a:lstStyle/>
           <a:p>
-            <a:pPr marL="0" indent="0" algn="l">
+            <a:pPr algn="l" indent="0" marL="0">
               <a:buNone/>
             </a:pPr>
             <a:r>
@@ -9135,13 +12310,6 @@
             <a:prstDash val="solid"/>
           </a:ln>
         </p:spPr>
-        <p:txBody>
-          <a:bodyPr/>
-          <a:lstStyle/>
-          <a:p>
-            <a:endParaRPr lang="en-US"/>
-          </a:p>
-        </p:txBody>
       </p:sp>
       <p:sp>
         <p:nvSpPr>
@@ -9164,7 +12332,7 @@
           <a:bodyPr wrap="square" lIns="0" tIns="0" rIns="0" bIns="0" rtlCol="0" anchor="ctr"/>
           <a:lstStyle/>
           <a:p>
-            <a:pPr marL="0" indent="0" algn="l">
+            <a:pPr algn="l" indent="0" marL="0">
               <a:buNone/>
             </a:pPr>
             <a:r>
@@ -9190,8 +12358,8 @@
         </p:nvSpPr>
         <p:spPr>
           <a:xfrm>
-            <a:off x="8198069" y="1627632"/>
-            <a:ext cx="3277651" cy="676656"/>
+            <a:off x="8202168" y="1627632"/>
+            <a:ext cx="3273552" cy="676656"/>
           </a:xfrm>
           <a:prstGeom prst="rect">
             <a:avLst/>
@@ -9203,7 +12371,7 @@
           <a:bodyPr wrap="square" lIns="0" tIns="0" rIns="0" bIns="0" rtlCol="0" anchor="ctr"/>
           <a:lstStyle/>
           <a:p>
-            <a:pPr marL="0" indent="0" algn="l">
+            <a:pPr algn="l" indent="0" marL="0">
               <a:buNone/>
             </a:pPr>
             <a:r>
@@ -9215,7 +12383,7 @@
                 <a:ea typeface="Calibri" pitchFamily="34" charset="-122"/>
                 <a:cs typeface="Calibri" pitchFamily="34" charset="-120"/>
               </a:rPr>
-              <a:t>measured spec files (SysML packages + contract-bearing Rust)</a:t>
+              <a:t>measured files (SysML packages + contract-bearing Rust)</a:t>
             </a:r>
             <a:endParaRPr lang="en-US" sz="1000" dirty="0"/>
           </a:p>
@@ -9247,13 +12415,6 @@
             <a:prstDash val="solid"/>
           </a:ln>
         </p:spPr>
-        <p:txBody>
-          <a:bodyPr/>
-          <a:lstStyle/>
-          <a:p>
-            <a:endParaRPr lang="en-US"/>
-          </a:p>
-        </p:txBody>
       </p:sp>
       <p:sp>
         <p:nvSpPr>
@@ -9276,7 +12437,7 @@
           <a:bodyPr wrap="square" lIns="0" tIns="0" rIns="0" bIns="0" rtlCol="0" anchor="ctr"/>
           <a:lstStyle/>
           <a:p>
-            <a:pPr marL="0" indent="0" algn="l">
+            <a:pPr algn="l" indent="0" marL="0">
               <a:buNone/>
             </a:pPr>
             <a:r>
@@ -9315,7 +12476,7 @@
           <a:bodyPr wrap="square" lIns="0" tIns="0" rIns="0" bIns="0" rtlCol="0" anchor="ctr"/>
           <a:lstStyle/>
           <a:p>
-            <a:pPr marL="0" indent="0" algn="l">
+            <a:pPr algn="l" indent="0" marL="0">
               <a:buNone/>
             </a:pPr>
             <a:r>
@@ -9359,13 +12520,6 @@
             <a:prstDash val="solid"/>
           </a:ln>
         </p:spPr>
-        <p:txBody>
-          <a:bodyPr/>
-          <a:lstStyle/>
-          <a:p>
-            <a:endParaRPr lang="en-US"/>
-          </a:p>
-        </p:txBody>
       </p:sp>
       <p:sp>
         <p:nvSpPr>
@@ -9388,7 +12542,7 @@
           <a:bodyPr wrap="square" lIns="0" tIns="0" rIns="0" bIns="0" rtlCol="0" anchor="ctr"/>
           <a:lstStyle/>
           <a:p>
-            <a:pPr marL="0" indent="0" algn="l">
+            <a:pPr algn="l" indent="0" marL="0">
               <a:buNone/>
             </a:pPr>
             <a:r>
@@ -9427,7 +12581,7 @@
           <a:bodyPr wrap="square" lIns="0" tIns="0" rIns="0" bIns="0" rtlCol="0" anchor="ctr"/>
           <a:lstStyle/>
           <a:p>
-            <a:pPr marL="0" indent="0" algn="l">
+            <a:pPr algn="l" indent="0" marL="0">
               <a:buNone/>
             </a:pPr>
             <a:r>
@@ -9439,7 +12593,7 @@
                 <a:ea typeface="Calibri" pitchFamily="34" charset="-122"/>
                 <a:cs typeface="Calibri" pitchFamily="34" charset="-120"/>
               </a:rPr>
-              <a:t>Rust crates re-verified every episode (7 components + the system proof)</a:t>
+              <a:t>crates re-verified every episode (7 components + the system proof)</a:t>
             </a:r>
             <a:endParaRPr lang="en-US" sz="1000" dirty="0"/>
           </a:p>
@@ -9471,13 +12625,6 @@
             <a:prstDash val="solid"/>
           </a:ln>
         </p:spPr>
-        <p:txBody>
-          <a:bodyPr/>
-          <a:lstStyle/>
-          <a:p>
-            <a:endParaRPr lang="en-US"/>
-          </a:p>
-        </p:txBody>
       </p:sp>
       <p:sp>
         <p:nvSpPr>
@@ -9500,7 +12647,7 @@
           <a:bodyPr wrap="square" lIns="0" tIns="0" rIns="0" bIns="0" rtlCol="0" anchor="ctr"/>
           <a:lstStyle/>
           <a:p>
-            <a:pPr marL="0" indent="0" algn="l">
+            <a:pPr algn="l" indent="0" marL="0">
               <a:buNone/>
             </a:pPr>
             <a:r>
@@ -9539,7 +12686,7 @@
           <a:bodyPr wrap="square" lIns="0" tIns="0" rIns="0" bIns="0" rtlCol="0" anchor="ctr"/>
           <a:lstStyle/>
           <a:p>
-            <a:pPr marL="0" indent="0" algn="l">
+            <a:pPr algn="l" indent="0" marL="0">
               <a:buNone/>
             </a:pPr>
             <a:r>
@@ -9583,13 +12730,6 @@
             <a:prstDash val="solid"/>
           </a:ln>
         </p:spPr>
-        <p:txBody>
-          <a:bodyPr/>
-          <a:lstStyle/>
-          <a:p>
-            <a:endParaRPr lang="en-US"/>
-          </a:p>
-        </p:txBody>
       </p:sp>
       <p:sp>
         <p:nvSpPr>
@@ -9612,7 +12752,7 @@
           <a:bodyPr wrap="square" lIns="0" tIns="0" rIns="0" bIns="0" rtlCol="0" anchor="ctr"/>
           <a:lstStyle/>
           <a:p>
-            <a:pPr marL="0" indent="0" algn="l">
+            <a:pPr algn="l" indent="0" marL="0">
               <a:buNone/>
             </a:pPr>
             <a:r>
@@ -9651,7 +12791,7 @@
           <a:bodyPr wrap="square" lIns="0" tIns="0" rIns="0" bIns="0" rtlCol="0" anchor="ctr"/>
           <a:lstStyle/>
           <a:p>
-            <a:pPr marL="0" indent="0" algn="l">
+            <a:pPr algn="l" indent="0" marL="0">
               <a:buNone/>
             </a:pPr>
             <a:r>
@@ -9695,13 +12835,6 @@
             <a:prstDash val="solid"/>
           </a:ln>
         </p:spPr>
-        <p:txBody>
-          <a:bodyPr/>
-          <a:lstStyle/>
-          <a:p>
-            <a:endParaRPr lang="en-US"/>
-          </a:p>
-        </p:txBody>
       </p:sp>
       <p:sp>
         <p:nvSpPr>
@@ -9724,7 +12857,7 @@
           <a:bodyPr wrap="square" lIns="0" tIns="0" rIns="0" bIns="0" rtlCol="0" anchor="ctr"/>
           <a:lstStyle/>
           <a:p>
-            <a:pPr marL="0" indent="0" algn="l">
+            <a:pPr algn="l" indent="0" marL="0">
               <a:buNone/>
             </a:pPr>
             <a:r>
@@ -9763,7 +12896,7 @@
           <a:bodyPr wrap="square" lIns="0" tIns="0" rIns="0" bIns="0" rtlCol="0" anchor="ctr"/>
           <a:lstStyle/>
           <a:p>
-            <a:pPr marL="0" indent="0" algn="l">
+            <a:pPr algn="l" indent="0" marL="0">
               <a:buNone/>
             </a:pPr>
             <a:r>
@@ -9775,12 +12908,12 @@
                 <a:ea typeface="Calibri" pitchFamily="34" charset="-122"/>
                 <a:cs typeface="Calibri" pitchFamily="34" charset="-120"/>
               </a:rPr>
-              <a:t>attestation tiers — the blackboard’s entry keys:</a:t>
+              <a:t>attestation tiers — the glossary's entry keys:</a:t>
             </a:r>
             <a:endParaRPr lang="en-US" sz="1000" dirty="0"/>
           </a:p>
           <a:p>
-            <a:pPr marL="0" indent="0" algn="l">
+            <a:pPr algn="l" indent="0" marL="0">
               <a:buNone/>
             </a:pPr>
             <a:r>
@@ -9814,7 +12947,6 @@
         <a:solidFill>
           <a:srgbClr val="FFFFFF"/>
         </a:solidFill>
-        <a:effectLst/>
       </p:bgPr>
     </p:bg>
     <p:spTree>
@@ -9833,14 +12965,336 @@
       </p:grpSpPr>
       <p:sp>
         <p:nvSpPr>
-          <p:cNvPr id="2" name="Text 0"/>
-          <p:cNvSpPr/>
-          <p:nvPr/>
-        </p:nvSpPr>
-        <p:spPr>
-          <a:xfrm>
-            <a:off x="640080" y="411480"/>
-            <a:ext cx="10972800" cy="731520"/>
+          <p:cNvPr id="2" name="Shape 0"/>
+          <p:cNvSpPr/>
+          <p:nvPr/>
+        </p:nvSpPr>
+        <p:spPr>
+          <a:xfrm>
+            <a:off x="640080" y="201168"/>
+            <a:ext cx="2073859" cy="502920"/>
+          </a:xfrm>
+          <a:prstGeom prst="roundRect">
+            <a:avLst>
+              <a:gd name="adj" fmla="val 9091"/>
+            </a:avLst>
+          </a:prstGeom>
+          <a:solidFill>
+            <a:srgbClr val="E4EAF4"/>
+          </a:solidFill>
+          <a:ln/>
+        </p:spPr>
+      </p:sp>
+      <p:sp>
+        <p:nvSpPr>
+          <p:cNvPr id="3" name="Text 1"/>
+          <p:cNvSpPr/>
+          <p:nvPr/>
+        </p:nvSpPr>
+        <p:spPr>
+          <a:xfrm>
+            <a:off x="640080" y="201168"/>
+            <a:ext cx="2073859" cy="502920"/>
+          </a:xfrm>
+          <a:prstGeom prst="rect">
+            <a:avLst/>
+          </a:prstGeom>
+          <a:noFill/>
+          <a:ln/>
+        </p:spPr>
+        <p:txBody>
+          <a:bodyPr wrap="square" lIns="254" tIns="254" rIns="254" bIns="254" rtlCol="0" anchor="ctr"/>
+          <a:lstStyle/>
+          <a:p>
+            <a:pPr algn="ctr" indent="0" marL="0">
+              <a:buNone/>
+            </a:pPr>
+            <a:r>
+              <a:rPr lang="en-US" sz="900" dirty="0">
+                <a:solidFill>
+                  <a:srgbClr val="5A6478"/>
+                </a:solidFill>
+                <a:latin typeface="Calibri" pitchFamily="34" charset="0"/>
+                <a:ea typeface="Calibri" pitchFamily="34" charset="-122"/>
+                <a:cs typeface="Calibri" pitchFamily="34" charset="-120"/>
+              </a:rPr>
+              <a:t>Preliminaries</a:t>
+            </a:r>
+            <a:endParaRPr lang="en-US" sz="900" dirty="0"/>
+          </a:p>
+        </p:txBody>
+      </p:sp>
+      <p:sp>
+        <p:nvSpPr>
+          <p:cNvPr id="4" name="Shape 2"/>
+          <p:cNvSpPr/>
+          <p:nvPr/>
+        </p:nvSpPr>
+        <p:spPr>
+          <a:xfrm>
+            <a:off x="2841955" y="201168"/>
+            <a:ext cx="2073859" cy="502920"/>
+          </a:xfrm>
+          <a:prstGeom prst="roundRect">
+            <a:avLst>
+              <a:gd name="adj" fmla="val 9091"/>
+            </a:avLst>
+          </a:prstGeom>
+          <a:solidFill>
+            <a:srgbClr val="1E2761"/>
+          </a:solidFill>
+          <a:ln/>
+        </p:spPr>
+      </p:sp>
+      <p:sp>
+        <p:nvSpPr>
+          <p:cNvPr id="5" name="Text 3"/>
+          <p:cNvSpPr/>
+          <p:nvPr/>
+        </p:nvSpPr>
+        <p:spPr>
+          <a:xfrm>
+            <a:off x="2841955" y="201168"/>
+            <a:ext cx="2073859" cy="502920"/>
+          </a:xfrm>
+          <a:prstGeom prst="rect">
+            <a:avLst/>
+          </a:prstGeom>
+          <a:noFill/>
+          <a:ln/>
+        </p:spPr>
+        <p:txBody>
+          <a:bodyPr wrap="square" lIns="254" tIns="254" rIns="254" bIns="254" rtlCol="0" anchor="ctr"/>
+          <a:lstStyle/>
+          <a:p>
+            <a:pPr algn="ctr" indent="0" marL="0">
+              <a:buNone/>
+            </a:pPr>
+            <a:r>
+              <a:rPr lang="en-US" sz="900" b="1" dirty="0">
+                <a:solidFill>
+                  <a:srgbClr val="FFFFFF"/>
+                </a:solidFill>
+                <a:latin typeface="Calibri" pitchFamily="34" charset="0"/>
+                <a:ea typeface="Calibri" pitchFamily="34" charset="-122"/>
+                <a:cs typeface="Calibri" pitchFamily="34" charset="-120"/>
+              </a:rPr>
+              <a:t>Demo:</a:t>
+            </a:r>
+            <a:endParaRPr lang="en-US" sz="900" dirty="0"/>
+          </a:p>
+          <a:p>
+            <a:pPr algn="ctr" indent="0" marL="0">
+              <a:buNone/>
+            </a:pPr>
+            <a:r>
+              <a:rPr lang="en-US" sz="900" b="1" dirty="0">
+                <a:solidFill>
+                  <a:srgbClr val="FFFFFF"/>
+                </a:solidFill>
+                <a:latin typeface="Calibri" pitchFamily="34" charset="0"/>
+                <a:ea typeface="Calibri" pitchFamily="34" charset="-122"/>
+                <a:cs typeface="Calibri" pitchFamily="34" charset="-120"/>
+              </a:rPr>
+              <a:t>Isolette (SysMLv2 → Rust)</a:t>
+            </a:r>
+            <a:endParaRPr lang="en-US" sz="900" dirty="0"/>
+          </a:p>
+        </p:txBody>
+      </p:sp>
+      <p:sp>
+        <p:nvSpPr>
+          <p:cNvPr id="6" name="Shape 4"/>
+          <p:cNvSpPr/>
+          <p:nvPr/>
+        </p:nvSpPr>
+        <p:spPr>
+          <a:xfrm>
+            <a:off x="5043830" y="201168"/>
+            <a:ext cx="2073859" cy="502920"/>
+          </a:xfrm>
+          <a:prstGeom prst="roundRect">
+            <a:avLst>
+              <a:gd name="adj" fmla="val 9091"/>
+            </a:avLst>
+          </a:prstGeom>
+          <a:solidFill>
+            <a:srgbClr val="E4EAF4"/>
+          </a:solidFill>
+          <a:ln/>
+        </p:spPr>
+      </p:sp>
+      <p:sp>
+        <p:nvSpPr>
+          <p:cNvPr id="7" name="Text 5"/>
+          <p:cNvSpPr/>
+          <p:nvPr/>
+        </p:nvSpPr>
+        <p:spPr>
+          <a:xfrm>
+            <a:off x="5043830" y="201168"/>
+            <a:ext cx="2073859" cy="502920"/>
+          </a:xfrm>
+          <a:prstGeom prst="rect">
+            <a:avLst/>
+          </a:prstGeom>
+          <a:noFill/>
+          <a:ln/>
+        </p:spPr>
+        <p:txBody>
+          <a:bodyPr wrap="square" lIns="254" tIns="254" rIns="254" bIns="254" rtlCol="0" anchor="ctr"/>
+          <a:lstStyle/>
+          <a:p>
+            <a:pPr algn="ctr" indent="0" marL="0">
+              <a:buNone/>
+            </a:pPr>
+            <a:r>
+              <a:rPr lang="en-US" sz="900" dirty="0">
+                <a:solidFill>
+                  <a:srgbClr val="5A6478"/>
+                </a:solidFill>
+                <a:latin typeface="Calibri" pitchFamily="34" charset="0"/>
+                <a:ea typeface="Calibri" pitchFamily="34" charset="-122"/>
+                <a:cs typeface="Calibri" pitchFamily="34" charset="-120"/>
+              </a:rPr>
+              <a:t>Other Ecosystems</a:t>
+            </a:r>
+            <a:endParaRPr lang="en-US" sz="900" dirty="0"/>
+          </a:p>
+        </p:txBody>
+      </p:sp>
+      <p:sp>
+        <p:nvSpPr>
+          <p:cNvPr id="8" name="Shape 6"/>
+          <p:cNvSpPr/>
+          <p:nvPr/>
+        </p:nvSpPr>
+        <p:spPr>
+          <a:xfrm>
+            <a:off x="7245706" y="201168"/>
+            <a:ext cx="2073859" cy="502920"/>
+          </a:xfrm>
+          <a:prstGeom prst="roundRect">
+            <a:avLst>
+              <a:gd name="adj" fmla="val 9091"/>
+            </a:avLst>
+          </a:prstGeom>
+          <a:solidFill>
+            <a:srgbClr val="E4EAF4"/>
+          </a:solidFill>
+          <a:ln/>
+        </p:spPr>
+      </p:sp>
+      <p:sp>
+        <p:nvSpPr>
+          <p:cNvPr id="9" name="Text 7"/>
+          <p:cNvSpPr/>
+          <p:nvPr/>
+        </p:nvSpPr>
+        <p:spPr>
+          <a:xfrm>
+            <a:off x="7245706" y="201168"/>
+            <a:ext cx="2073859" cy="502920"/>
+          </a:xfrm>
+          <a:prstGeom prst="rect">
+            <a:avLst/>
+          </a:prstGeom>
+          <a:noFill/>
+          <a:ln/>
+        </p:spPr>
+        <p:txBody>
+          <a:bodyPr wrap="square" lIns="254" tIns="254" rIns="254" bIns="254" rtlCol="0" anchor="ctr"/>
+          <a:lstStyle/>
+          <a:p>
+            <a:pPr algn="ctr" indent="0" marL="0">
+              <a:buNone/>
+            </a:pPr>
+            <a:r>
+              <a:rPr lang="en-US" sz="900" dirty="0">
+                <a:solidFill>
+                  <a:srgbClr val="5A6478"/>
+                </a:solidFill>
+                <a:latin typeface="Calibri" pitchFamily="34" charset="0"/>
+                <a:ea typeface="Calibri" pitchFamily="34" charset="-122"/>
+                <a:cs typeface="Calibri" pitchFamily="34" charset="-120"/>
+              </a:rPr>
+              <a:t>AI in the Loop</a:t>
+            </a:r>
+            <a:endParaRPr lang="en-US" sz="900" dirty="0"/>
+          </a:p>
+        </p:txBody>
+      </p:sp>
+      <p:sp>
+        <p:nvSpPr>
+          <p:cNvPr id="10" name="Shape 8"/>
+          <p:cNvSpPr/>
+          <p:nvPr/>
+        </p:nvSpPr>
+        <p:spPr>
+          <a:xfrm>
+            <a:off x="9447581" y="201168"/>
+            <a:ext cx="2073859" cy="502920"/>
+          </a:xfrm>
+          <a:prstGeom prst="roundRect">
+            <a:avLst>
+              <a:gd name="adj" fmla="val 9091"/>
+            </a:avLst>
+          </a:prstGeom>
+          <a:solidFill>
+            <a:srgbClr val="E4EAF4"/>
+          </a:solidFill>
+          <a:ln/>
+        </p:spPr>
+      </p:sp>
+      <p:sp>
+        <p:nvSpPr>
+          <p:cNvPr id="11" name="Text 9"/>
+          <p:cNvSpPr/>
+          <p:nvPr/>
+        </p:nvSpPr>
+        <p:spPr>
+          <a:xfrm>
+            <a:off x="9447581" y="201168"/>
+            <a:ext cx="2073859" cy="502920"/>
+          </a:xfrm>
+          <a:prstGeom prst="rect">
+            <a:avLst/>
+          </a:prstGeom>
+          <a:noFill/>
+          <a:ln/>
+        </p:spPr>
+        <p:txBody>
+          <a:bodyPr wrap="square" lIns="254" tIns="254" rIns="254" bIns="254" rtlCol="0" anchor="ctr"/>
+          <a:lstStyle/>
+          <a:p>
+            <a:pPr algn="ctr" indent="0" marL="0">
+              <a:buNone/>
+            </a:pPr>
+            <a:r>
+              <a:rPr lang="en-US" sz="900" dirty="0">
+                <a:solidFill>
+                  <a:srgbClr val="5A6478"/>
+                </a:solidFill>
+                <a:latin typeface="Calibri" pitchFamily="34" charset="0"/>
+                <a:ea typeface="Calibri" pitchFamily="34" charset="-122"/>
+                <a:cs typeface="Calibri" pitchFamily="34" charset="-120"/>
+              </a:rPr>
+              <a:t>Close</a:t>
+            </a:r>
+            <a:endParaRPr lang="en-US" sz="900" dirty="0"/>
+          </a:p>
+        </p:txBody>
+      </p:sp>
+      <p:sp>
+        <p:nvSpPr>
+          <p:cNvPr id="12" name="Text 10"/>
+          <p:cNvSpPr/>
+          <p:nvPr/>
+        </p:nvSpPr>
+        <p:spPr>
+          <a:xfrm>
+            <a:off x="822960" y="1828800"/>
+            <a:ext cx="10515600" cy="457200"/>
           </a:xfrm>
           <a:prstGeom prst="rect">
             <a:avLst/>
@@ -9852,11 +13306,50 @@
           <a:bodyPr wrap="square" lIns="0" tIns="0" rIns="0" bIns="0" rtlCol="0" anchor="ctr"/>
           <a:lstStyle/>
           <a:p>
-            <a:pPr marL="0" indent="0">
-              <a:buNone/>
-            </a:pPr>
-            <a:r>
-              <a:rPr lang="en-US" sz="3600" b="1" dirty="0">
+            <a:pPr indent="0" marL="0">
+              <a:buNone/>
+            </a:pPr>
+            <a:r>
+              <a:rPr lang="en-US" sz="1800" b="1" spc="300" kern="0" dirty="0">
+                <a:solidFill>
+                  <a:srgbClr val="5A6478"/>
+                </a:solidFill>
+                <a:latin typeface="Calibri" pitchFamily="34" charset="0"/>
+                <a:ea typeface="Calibri" pitchFamily="34" charset="-122"/>
+                <a:cs typeface="Calibri" pitchFamily="34" charset="-120"/>
+              </a:rPr>
+              <a:t>ACT I</a:t>
+            </a:r>
+            <a:endParaRPr lang="en-US" sz="1800" dirty="0"/>
+          </a:p>
+        </p:txBody>
+      </p:sp>
+      <p:sp>
+        <p:nvSpPr>
+          <p:cNvPr id="13" name="Text 11"/>
+          <p:cNvSpPr/>
+          <p:nvPr/>
+        </p:nvSpPr>
+        <p:spPr>
+          <a:xfrm>
+            <a:off x="822960" y="2286000"/>
+            <a:ext cx="10515600" cy="822960"/>
+          </a:xfrm>
+          <a:prstGeom prst="rect">
+            <a:avLst/>
+          </a:prstGeom>
+          <a:noFill/>
+          <a:ln/>
+        </p:spPr>
+        <p:txBody>
+          <a:bodyPr wrap="square" lIns="0" tIns="0" rIns="0" bIns="0" rtlCol="0" anchor="ctr"/>
+          <a:lstStyle/>
+          <a:p>
+            <a:pPr indent="0" marL="0">
+              <a:buNone/>
+            </a:pPr>
+            <a:r>
+              <a:rPr lang="en-US" sz="4000" b="1" dirty="0">
                 <a:solidFill>
                   <a:srgbClr val="1E2761"/>
                 </a:solidFill>
@@ -9864,62 +13357,77 @@
                 <a:ea typeface="Cambria" pitchFamily="34" charset="-122"/>
                 <a:cs typeface="Cambria" pitchFamily="34" charset="-120"/>
               </a:rPr>
-              <a:t>References</a:t>
-            </a:r>
-            <a:endParaRPr lang="en-US" sz="3600" dirty="0"/>
-          </a:p>
-        </p:txBody>
-      </p:sp>
-      <p:sp>
-        <p:nvSpPr>
-          <p:cNvPr id="3" name="Text 1"/>
-          <p:cNvSpPr/>
-          <p:nvPr/>
-        </p:nvSpPr>
-        <p:spPr>
-          <a:xfrm>
-            <a:off x="640080" y="1371600"/>
-            <a:ext cx="10972800" cy="5120640"/>
-          </a:xfrm>
-          <a:prstGeom prst="rect">
-            <a:avLst/>
-          </a:prstGeom>
-          <a:noFill/>
-          <a:ln/>
-        </p:spPr>
-        <p:txBody>
-          <a:bodyPr wrap="square" lIns="0" tIns="0" rIns="0" bIns="0" rtlCol="0" anchor="t"/>
-          <a:lstStyle/>
-          <a:p>
-            <a:pPr marL="0" indent="0" algn="l">
-              <a:spcAft>
-                <a:spcPts val="400"/>
-              </a:spcAft>
-              <a:buNone/>
-            </a:pPr>
-            <a:r>
-              <a:rPr lang="en-US" sz="1400" b="1" dirty="0">
-                <a:solidFill>
-                  <a:srgbClr val="1E2761"/>
-                </a:solidFill>
-                <a:latin typeface="Calibri" pitchFamily="34" charset="0"/>
-                <a:ea typeface="Calibri" pitchFamily="34" charset="-122"/>
-                <a:cs typeface="Calibri" pitchFamily="34" charset="-120"/>
-              </a:rPr>
-              <a:t>The isolette &amp; HAMR (Kansas State)</a:t>
-            </a:r>
-            <a:endParaRPr lang="en-US" sz="1400" dirty="0"/>
-          </a:p>
-          <a:p>
-            <a:pPr marL="342900" indent="-342900" algn="l">
-              <a:spcAft>
-                <a:spcPts val="300"/>
-              </a:spcAft>
-              <a:buSzPct val="100000"/>
-              <a:buChar char="•"/>
-            </a:pPr>
-            <a:r>
-              <a:rPr lang="en-US" sz="1150" dirty="0">
+              <a:t>The honest baseline</a:t>
+            </a:r>
+            <a:endParaRPr lang="en-US" sz="4000" dirty="0"/>
+          </a:p>
+        </p:txBody>
+      </p:sp>
+      <p:sp>
+        <p:nvSpPr>
+          <p:cNvPr id="14" name="Text 12"/>
+          <p:cNvSpPr/>
+          <p:nvPr/>
+        </p:nvSpPr>
+        <p:spPr>
+          <a:xfrm>
+            <a:off x="822960" y="3154680"/>
+            <a:ext cx="10515600" cy="411480"/>
+          </a:xfrm>
+          <a:prstGeom prst="rect">
+            <a:avLst/>
+          </a:prstGeom>
+          <a:noFill/>
+          <a:ln/>
+        </p:spPr>
+        <p:txBody>
+          <a:bodyPr wrap="square" lIns="0" tIns="0" rIns="0" bIns="0" rtlCol="0" anchor="ctr"/>
+          <a:lstStyle/>
+          <a:p>
+            <a:pPr indent="0" marL="0">
+              <a:buNone/>
+            </a:pPr>
+            <a:r>
+              <a:rPr lang="en-US" sz="1500" i="1" dirty="0">
+                <a:solidFill>
+                  <a:srgbClr val="5A6478"/>
+                </a:solidFill>
+                <a:latin typeface="Calibri" pitchFamily="34" charset="0"/>
+                <a:ea typeface="Calibri" pitchFamily="34" charset="-122"/>
+                <a:cs typeface="Calibri" pitchFamily="34" charset="-120"/>
+              </a:rPr>
+              <a:t>scene 1</a:t>
+            </a:r>
+            <a:endParaRPr lang="en-US" sz="1500" dirty="0"/>
+          </a:p>
+        </p:txBody>
+      </p:sp>
+      <p:sp>
+        <p:nvSpPr>
+          <p:cNvPr id="15" name="Text 13"/>
+          <p:cNvSpPr/>
+          <p:nvPr/>
+        </p:nvSpPr>
+        <p:spPr>
+          <a:xfrm>
+            <a:off x="822960" y="3977640"/>
+            <a:ext cx="10241280" cy="1280160"/>
+          </a:xfrm>
+          <a:prstGeom prst="rect">
+            <a:avLst/>
+          </a:prstGeom>
+          <a:noFill/>
+          <a:ln/>
+        </p:spPr>
+        <p:txBody>
+          <a:bodyPr wrap="square" lIns="0" tIns="0" rIns="0" bIns="0" rtlCol="0" anchor="ctr"/>
+          <a:lstStyle/>
+          <a:p>
+            <a:pPr indent="0" marL="0">
+              <a:buNone/>
+            </a:pPr>
+            <a:r>
+              <a:rPr lang="en-US" sz="2000" i="1" dirty="0">
                 <a:solidFill>
                   <a:srgbClr val="212121"/>
                 </a:solidFill>
@@ -9927,356 +13435,48 @@
                 <a:ea typeface="Calibri" pitchFamily="34" charset="-122"/>
                 <a:cs typeface="Calibri" pitchFamily="34" charset="-120"/>
               </a:rPr>
-              <a:t>Hatcliff &amp; Belt, </a:t>
-            </a:r>
-            <a:r>
-              <a:rPr lang="en-US" sz="1150" i="1" dirty="0">
-                <a:solidFill>
-                  <a:srgbClr val="212121"/>
-                </a:solidFill>
-                <a:latin typeface="Calibri" pitchFamily="34" charset="0"/>
-                <a:ea typeface="Calibri" pitchFamily="34" charset="-122"/>
-                <a:cs typeface="Calibri" pitchFamily="34" charset="-120"/>
-              </a:rPr>
-              <a:t>The Isolette System: Illustrating End-to-End Artifacts for Rigorous Model-Based Engineering</a:t>
-            </a:r>
-            <a:r>
-              <a:rPr lang="en-US" sz="1150" dirty="0">
-                <a:solidFill>
-                  <a:srgbClr val="212121"/>
-                </a:solidFill>
-                <a:latin typeface="Calibri" pitchFamily="34" charset="0"/>
-                <a:ea typeface="Calibri" pitchFamily="34" charset="-122"/>
-                <a:cs typeface="Calibri" pitchFamily="34" charset="-120"/>
-              </a:rPr>
-              <a:t>, Springer LNCS 15240, 2025</a:t>
-            </a:r>
-            <a:endParaRPr lang="en-US" sz="1400" dirty="0"/>
-          </a:p>
-          <a:p>
-            <a:pPr marL="342900" indent="-342900" algn="l">
-              <a:spcAft>
-                <a:spcPts val="300"/>
-              </a:spcAft>
-              <a:buSzPct val="100000"/>
-              <a:buChar char="•"/>
-            </a:pPr>
-            <a:r>
-              <a:rPr lang="en-US" sz="1150" dirty="0">
-                <a:solidFill>
-                  <a:srgbClr val="212121"/>
-                </a:solidFill>
-                <a:latin typeface="Calibri" pitchFamily="34" charset="0"/>
-                <a:ea typeface="Calibri" pitchFamily="34" charset="-122"/>
-                <a:cs typeface="Calibri" pitchFamily="34" charset="-120"/>
-              </a:rPr>
-              <a:t>Hatcliff, Belt, Robby, McKenzie, Liang, </a:t>
-            </a:r>
-            <a:r>
-              <a:rPr lang="en-US" sz="1150" i="1" dirty="0">
-                <a:solidFill>
-                  <a:srgbClr val="212121"/>
-                </a:solidFill>
-                <a:latin typeface="Calibri" pitchFamily="34" charset="0"/>
-                <a:ea typeface="Calibri" pitchFamily="34" charset="-122"/>
-                <a:cs typeface="Calibri" pitchFamily="34" charset="-120"/>
-              </a:rPr>
-              <a:t>End-to-End Formal Methods Integrated Development with SysMLv2 Using HAMR</a:t>
-            </a:r>
-            <a:r>
-              <a:rPr lang="en-US" sz="1150" dirty="0">
-                <a:solidFill>
-                  <a:srgbClr val="212121"/>
-                </a:solidFill>
-                <a:latin typeface="Calibri" pitchFamily="34" charset="0"/>
-                <a:ea typeface="Calibri" pitchFamily="34" charset="-122"/>
-                <a:cs typeface="Calibri" pitchFamily="34" charset="-120"/>
-              </a:rPr>
-              <a:t>, Springer, 2025</a:t>
-            </a:r>
-            <a:endParaRPr lang="en-US" sz="1400" dirty="0"/>
-          </a:p>
-          <a:p>
-            <a:pPr marL="342900" indent="-342900" algn="l">
-              <a:spcAft>
-                <a:spcPts val="300"/>
-              </a:spcAft>
-              <a:buSzPct val="100000"/>
-              <a:buChar char="•"/>
-            </a:pPr>
-            <a:r>
-              <a:rPr lang="en-US" sz="1150" dirty="0">
-                <a:solidFill>
-                  <a:srgbClr val="212121"/>
-                </a:solidFill>
-                <a:latin typeface="Calibri" pitchFamily="34" charset="0"/>
-                <a:ea typeface="Calibri" pitchFamily="34" charset="-122"/>
-                <a:cs typeface="Calibri" pitchFamily="34" charset="-120"/>
-              </a:rPr>
-              <a:t>Hatcliff, Belt, Robby, Carpenter, </a:t>
-            </a:r>
-            <a:r>
-              <a:rPr lang="en-US" sz="1150" i="1" dirty="0">
-                <a:solidFill>
-                  <a:srgbClr val="212121"/>
-                </a:solidFill>
-                <a:latin typeface="Calibri" pitchFamily="34" charset="0"/>
-                <a:ea typeface="Calibri" pitchFamily="34" charset="-122"/>
-                <a:cs typeface="Calibri" pitchFamily="34" charset="-120"/>
-              </a:rPr>
-              <a:t>HAMR: An AADL Multi-platform Code Generation Toolset</a:t>
-            </a:r>
-            <a:r>
-              <a:rPr lang="en-US" sz="1150" dirty="0">
-                <a:solidFill>
-                  <a:srgbClr val="212121"/>
-                </a:solidFill>
-                <a:latin typeface="Calibri" pitchFamily="34" charset="0"/>
-                <a:ea typeface="Calibri" pitchFamily="34" charset="-122"/>
-                <a:cs typeface="Calibri" pitchFamily="34" charset="-120"/>
-              </a:rPr>
-              <a:t>, ISoLA 2021, LNCS 13036, pp. 274–295</a:t>
-            </a:r>
-            <a:endParaRPr lang="en-US" sz="1400" dirty="0"/>
-          </a:p>
-          <a:p>
-            <a:pPr marL="342900" indent="-342900" algn="l">
-              <a:spcAft>
-                <a:spcPts val="300"/>
-              </a:spcAft>
-              <a:buSzPct val="100000"/>
-              <a:buChar char="•"/>
-            </a:pPr>
-            <a:r>
-              <a:rPr lang="en-US" sz="1150" dirty="0">
-                <a:solidFill>
-                  <a:srgbClr val="212121"/>
-                </a:solidFill>
-                <a:latin typeface="Calibri" pitchFamily="34" charset="0"/>
-                <a:ea typeface="Calibri" pitchFamily="34" charset="-122"/>
-                <a:cs typeface="Calibri" pitchFamily="34" charset="-120"/>
-              </a:rPr>
-              <a:t>Lempia &amp; Miller, </a:t>
-            </a:r>
-            <a:r>
-              <a:rPr lang="en-US" sz="1150" i="1" dirty="0">
-                <a:solidFill>
-                  <a:srgbClr val="212121"/>
-                </a:solidFill>
-                <a:latin typeface="Calibri" pitchFamily="34" charset="0"/>
-                <a:ea typeface="Calibri" pitchFamily="34" charset="-122"/>
-                <a:cs typeface="Calibri" pitchFamily="34" charset="-120"/>
-              </a:rPr>
-              <a:t>Requirements Engineering Management Handbook</a:t>
-            </a:r>
-            <a:r>
-              <a:rPr lang="en-US" sz="1150" dirty="0">
-                <a:solidFill>
-                  <a:srgbClr val="212121"/>
-                </a:solidFill>
-                <a:latin typeface="Calibri" pitchFamily="34" charset="0"/>
-                <a:ea typeface="Calibri" pitchFamily="34" charset="-122"/>
-                <a:cs typeface="Calibri" pitchFamily="34" charset="-120"/>
-              </a:rPr>
-              <a:t>, DOT/FAA/AR-08/32, 2009</a:t>
-            </a:r>
-            <a:endParaRPr lang="en-US" sz="1400" dirty="0"/>
-          </a:p>
-          <a:p>
-            <a:pPr marL="342900" indent="-342900" algn="l">
-              <a:spcAft>
-                <a:spcPts val="300"/>
-              </a:spcAft>
-              <a:buSzPct val="100000"/>
-              <a:buChar char="•"/>
-            </a:pPr>
-            <a:r>
-              <a:rPr lang="en-US" sz="1150" dirty="0">
-                <a:solidFill>
-                  <a:srgbClr val="212121"/>
-                </a:solidFill>
-                <a:latin typeface="Calibri" pitchFamily="34" charset="0"/>
-                <a:ea typeface="Calibri" pitchFamily="34" charset="-122"/>
-                <a:cs typeface="Calibri" pitchFamily="34" charset="-120"/>
-              </a:rPr>
-              <a:t>INSPECTA models: github.com/loonwerks/INSPECTA-models</a:t>
-            </a:r>
-            <a:endParaRPr lang="en-US" sz="1400" dirty="0"/>
-          </a:p>
-          <a:p>
-            <a:pPr marL="0" indent="0" algn="l">
-              <a:spcBef>
-                <a:spcPts val="1200"/>
-              </a:spcBef>
-              <a:spcAft>
-                <a:spcPts val="400"/>
-              </a:spcAft>
-              <a:buNone/>
-            </a:pPr>
-            <a:r>
-              <a:rPr lang="en-US" sz="1400" b="1" dirty="0">
-                <a:solidFill>
-                  <a:srgbClr val="1E2761"/>
-                </a:solidFill>
-                <a:latin typeface="Calibri" pitchFamily="34" charset="0"/>
-                <a:ea typeface="Calibri" pitchFamily="34" charset="-122"/>
-                <a:cs typeface="Calibri" pitchFamily="34" charset="-120"/>
-              </a:rPr>
-              <a:t>Attestation foundations</a:t>
-            </a:r>
-            <a:endParaRPr lang="en-US" sz="1400" dirty="0"/>
-          </a:p>
-          <a:p>
-            <a:pPr marL="342900" indent="-342900" algn="l">
-              <a:spcAft>
-                <a:spcPts val="300"/>
-              </a:spcAft>
-              <a:buSzPct val="100000"/>
-              <a:buChar char="•"/>
-            </a:pPr>
-            <a:r>
-              <a:rPr lang="en-US" sz="1150" dirty="0">
-                <a:solidFill>
-                  <a:srgbClr val="212121"/>
-                </a:solidFill>
-                <a:latin typeface="Calibri" pitchFamily="34" charset="0"/>
-                <a:ea typeface="Calibri" pitchFamily="34" charset="-122"/>
-                <a:cs typeface="Calibri" pitchFamily="34" charset="-120"/>
-              </a:rPr>
-              <a:t>Ramsdell, Rowe, Alexander, Helble, Loscocco, Pendergrass, Petz, </a:t>
-            </a:r>
-            <a:r>
-              <a:rPr lang="en-US" sz="1150" i="1" dirty="0">
-                <a:solidFill>
-                  <a:srgbClr val="212121"/>
-                </a:solidFill>
-                <a:latin typeface="Calibri" pitchFamily="34" charset="0"/>
-                <a:ea typeface="Calibri" pitchFamily="34" charset="-122"/>
-                <a:cs typeface="Calibri" pitchFamily="34" charset="-120"/>
-              </a:rPr>
-              <a:t>Orchestrating Layered Attestations</a:t>
-            </a:r>
-            <a:r>
-              <a:rPr lang="en-US" sz="1150" dirty="0">
-                <a:solidFill>
-                  <a:srgbClr val="212121"/>
-                </a:solidFill>
-                <a:latin typeface="Calibri" pitchFamily="34" charset="0"/>
-                <a:ea typeface="Calibri" pitchFamily="34" charset="-122"/>
-                <a:cs typeface="Calibri" pitchFamily="34" charset="-120"/>
-              </a:rPr>
-              <a:t>, POST 2019, LNCS 11426</a:t>
-            </a:r>
-            <a:endParaRPr lang="en-US" sz="1400" dirty="0"/>
-          </a:p>
-          <a:p>
-            <a:pPr marL="0" indent="0" algn="l">
-              <a:spcBef>
-                <a:spcPts val="1200"/>
-              </a:spcBef>
-              <a:spcAft>
-                <a:spcPts val="400"/>
-              </a:spcAft>
-              <a:buNone/>
-            </a:pPr>
-            <a:r>
-              <a:rPr lang="en-US" sz="1400" b="1" dirty="0">
-                <a:solidFill>
-                  <a:srgbClr val="1E2761"/>
-                </a:solidFill>
-                <a:latin typeface="Calibri" pitchFamily="34" charset="0"/>
-                <a:ea typeface="Calibri" pitchFamily="34" charset="-122"/>
-                <a:cs typeface="Calibri" pitchFamily="34" charset="-120"/>
-              </a:rPr>
-              <a:t>Verification &amp; platform</a:t>
-            </a:r>
-            <a:endParaRPr lang="en-US" sz="1400" dirty="0"/>
-          </a:p>
-          <a:p>
-            <a:pPr marL="342900" indent="-342900" algn="l">
-              <a:spcAft>
-                <a:spcPts val="300"/>
-              </a:spcAft>
-              <a:buSzPct val="100000"/>
-              <a:buChar char="•"/>
-            </a:pPr>
-            <a:r>
-              <a:rPr lang="en-US" sz="1150" dirty="0">
-                <a:solidFill>
-                  <a:srgbClr val="212121"/>
-                </a:solidFill>
-                <a:latin typeface="Calibri" pitchFamily="34" charset="0"/>
-                <a:ea typeface="Calibri" pitchFamily="34" charset="-122"/>
-                <a:cs typeface="Calibri" pitchFamily="34" charset="-120"/>
-              </a:rPr>
-              <a:t>Lattuada, Hance, Cho, Brun, Subasinghe, Zhou, Howell, Parno, Hawblitzel, </a:t>
-            </a:r>
-            <a:r>
-              <a:rPr lang="en-US" sz="1150" i="1" dirty="0">
-                <a:solidFill>
-                  <a:srgbClr val="212121"/>
-                </a:solidFill>
-                <a:latin typeface="Calibri" pitchFamily="34" charset="0"/>
-                <a:ea typeface="Calibri" pitchFamily="34" charset="-122"/>
-                <a:cs typeface="Calibri" pitchFamily="34" charset="-120"/>
-              </a:rPr>
-              <a:t>Verus: Verifying Rust Programs using Linear Ghost Types</a:t>
-            </a:r>
-            <a:r>
-              <a:rPr lang="en-US" sz="1150" dirty="0">
-                <a:solidFill>
-                  <a:srgbClr val="212121"/>
-                </a:solidFill>
-                <a:latin typeface="Calibri" pitchFamily="34" charset="0"/>
-                <a:ea typeface="Calibri" pitchFamily="34" charset="-122"/>
-                <a:cs typeface="Calibri" pitchFamily="34" charset="-120"/>
-              </a:rPr>
-              <a:t>, PACMPL 7 (OOPSLA1), 2023</a:t>
-            </a:r>
-            <a:endParaRPr lang="en-US" sz="1400" dirty="0"/>
-          </a:p>
-          <a:p>
-            <a:pPr marL="342900" indent="-342900" algn="l">
-              <a:spcAft>
-                <a:spcPts val="300"/>
-              </a:spcAft>
-              <a:buSzPct val="100000"/>
-              <a:buChar char="•"/>
-            </a:pPr>
-            <a:r>
-              <a:rPr lang="en-US" sz="1150" dirty="0">
-                <a:solidFill>
-                  <a:srgbClr val="212121"/>
-                </a:solidFill>
-                <a:latin typeface="Calibri" pitchFamily="34" charset="0"/>
-                <a:ea typeface="Calibri" pitchFamily="34" charset="-122"/>
-                <a:cs typeface="Calibri" pitchFamily="34" charset="-120"/>
-              </a:rPr>
-              <a:t>Klein et al., </a:t>
-            </a:r>
-            <a:r>
-              <a:rPr lang="en-US" sz="1150" i="1" dirty="0">
-                <a:solidFill>
-                  <a:srgbClr val="212121"/>
-                </a:solidFill>
-                <a:latin typeface="Calibri" pitchFamily="34" charset="0"/>
-                <a:ea typeface="Calibri" pitchFamily="34" charset="-122"/>
-                <a:cs typeface="Calibri" pitchFamily="34" charset="-120"/>
-              </a:rPr>
-              <a:t>seL4: Formal Verification of an OS Kernel</a:t>
-            </a:r>
-            <a:r>
-              <a:rPr lang="en-US" sz="1150" dirty="0">
-                <a:solidFill>
-                  <a:srgbClr val="212121"/>
-                </a:solidFill>
-                <a:latin typeface="Calibri" pitchFamily="34" charset="0"/>
-                <a:ea typeface="Calibri" pitchFamily="34" charset="-122"/>
-                <a:cs typeface="Calibri" pitchFamily="34" charset="-120"/>
-              </a:rPr>
-              <a:t>, SOSP 2009</a:t>
-            </a:r>
-            <a:endParaRPr lang="en-US" sz="1400" dirty="0"/>
+              <a:t>One episode measures every artifact class — watch the checklist go green, and remember what green looks like.</a:t>
+            </a:r>
+            <a:endParaRPr lang="en-US" sz="2000" dirty="0"/>
+          </a:p>
+        </p:txBody>
+      </p:sp>
+      <p:sp>
+        <p:nvSpPr>
+          <p:cNvPr id="16" name="Text 14"/>
+          <p:cNvSpPr/>
+          <p:nvPr/>
+        </p:nvSpPr>
+        <p:spPr>
+          <a:xfrm>
+            <a:off x="822960" y="6172200"/>
+            <a:ext cx="10515600" cy="365760"/>
+          </a:xfrm>
+          <a:prstGeom prst="rect">
+            <a:avLst/>
+          </a:prstGeom>
+          <a:noFill/>
+          <a:ln/>
+        </p:spPr>
+        <p:txBody>
+          <a:bodyPr wrap="square" lIns="0" tIns="0" rIns="0" bIns="0" rtlCol="0" anchor="ctr"/>
+          <a:lstStyle/>
+          <a:p>
+            <a:pPr indent="0" marL="0">
+              <a:buNone/>
+            </a:pPr>
+            <a:r>
+              <a:rPr lang="en-US" sz="1100" dirty="0">
+                <a:solidFill>
+                  <a:srgbClr val="5A6478"/>
+                </a:solidFill>
+                <a:latin typeface="Courier New" pitchFamily="34" charset="0"/>
+                <a:ea typeface="Courier New" pitchFamily="34" charset="-122"/>
+                <a:cs typeface="Courier New" pitchFamily="34" charset="-120"/>
+              </a:rPr>
+              <a:t>./examples/demo_isolette.sh --scenes 1</a:t>
+            </a:r>
+            <a:endParaRPr lang="en-US" sz="1100" dirty="0"/>
           </a:p>
         </p:txBody>
       </p:sp>
@@ -10581,319 +13781,4 @@
     </a:ext>
   </a:extLst>
 </a:theme>
-</file>
-
-<file path=ppt/theme/theme2.xml><?xml version="1.0" encoding="utf-8"?>
-<a:theme xmlns:a="http://schemas.openxmlformats.org/drawingml/2006/main" name="Office Theme">
-  <a:themeElements>
-    <a:clrScheme name="Office">
-      <a:dk1>
-        <a:sysClr val="windowText" lastClr="000000"/>
-      </a:dk1>
-      <a:lt1>
-        <a:sysClr val="window" lastClr="FFFFFF"/>
-      </a:lt1>
-      <a:dk2>
-        <a:srgbClr val="0E2841"/>
-      </a:dk2>
-      <a:lt2>
-        <a:srgbClr val="E8E8E8"/>
-      </a:lt2>
-      <a:accent1>
-        <a:srgbClr val="156082"/>
-      </a:accent1>
-      <a:accent2>
-        <a:srgbClr val="E97132"/>
-      </a:accent2>
-      <a:accent3>
-        <a:srgbClr val="196B24"/>
-      </a:accent3>
-      <a:accent4>
-        <a:srgbClr val="0F9ED5"/>
-      </a:accent4>
-      <a:accent5>
-        <a:srgbClr val="A02B93"/>
-      </a:accent5>
-      <a:accent6>
-        <a:srgbClr val="4EA72E"/>
-      </a:accent6>
-      <a:hlink>
-        <a:srgbClr val="467886"/>
-      </a:hlink>
-      <a:folHlink>
-        <a:srgbClr val="96607D"/>
-      </a:folHlink>
-    </a:clrScheme>
-    <a:fontScheme name="Office">
-      <a:majorFont>
-        <a:latin typeface="Aptos Display" panose="02110004020202020204"/>
-        <a:ea typeface=""/>
-        <a:cs typeface=""/>
-        <a:font script="Jpan" typeface="游ゴシック Light"/>
-        <a:font script="Hang" typeface="맑은 고딕"/>
-        <a:font script="Hans" typeface="等线 Light"/>
-        <a:font script="Hant" typeface="新細明體"/>
-        <a:font script="Arab" typeface="Times New Roman"/>
-        <a:font script="Hebr" typeface="Times New Roman"/>
-        <a:font script="Thai" typeface="Angsana New"/>
-        <a:font script="Ethi" typeface="Nyala"/>
-        <a:font script="Beng" typeface="Vrinda"/>
-        <a:font script="Gujr" typeface="Shruti"/>
-        <a:font script="Khmr" typeface="MoolBoran"/>
-        <a:font script="Knda" typeface="Tunga"/>
-        <a:font script="Guru" typeface="Raavi"/>
-        <a:font script="Cans" typeface="Euphemia"/>
-        <a:font script="Cher" typeface="Plantagenet Cherokee"/>
-        <a:font script="Yiii" typeface="Microsoft Yi Baiti"/>
-        <a:font script="Tibt" typeface="Microsoft Himalaya"/>
-        <a:font script="Thaa" typeface="MV Boli"/>
-        <a:font script="Deva" typeface="Mangal"/>
-        <a:font script="Telu" typeface="Gautami"/>
-        <a:font script="Taml" typeface="Latha"/>
-        <a:font script="Syrc" typeface="Estrangelo Edessa"/>
-        <a:font script="Orya" typeface="Kalinga"/>
-        <a:font script="Mlym" typeface="Kartika"/>
-        <a:font script="Laoo" typeface="DokChampa"/>
-        <a:font script="Sinh" typeface="Iskoola Pota"/>
-        <a:font script="Mong" typeface="Mongolian Baiti"/>
-        <a:font script="Viet" typeface="Times New Roman"/>
-        <a:font script="Uigh" typeface="Microsoft Uighur"/>
-        <a:font script="Geor" typeface="Sylfaen"/>
-        <a:font script="Armn" typeface="Arial"/>
-        <a:font script="Bugi" typeface="Leelawadee UI"/>
-        <a:font script="Bopo" typeface="Microsoft JhengHei"/>
-        <a:font script="Java" typeface="Javanese Text"/>
-        <a:font script="Lisu" typeface="Segoe UI"/>
-        <a:font script="Mymr" typeface="Myanmar Text"/>
-        <a:font script="Nkoo" typeface="Ebrima"/>
-        <a:font script="Olck" typeface="Nirmala UI"/>
-        <a:font script="Osma" typeface="Ebrima"/>
-        <a:font script="Phag" typeface="Phagspa"/>
-        <a:font script="Syrn" typeface="Estrangelo Edessa"/>
-        <a:font script="Syrj" typeface="Estrangelo Edessa"/>
-        <a:font script="Syre" typeface="Estrangelo Edessa"/>
-        <a:font script="Sora" typeface="Nirmala UI"/>
-        <a:font script="Tale" typeface="Microsoft Tai Le"/>
-        <a:font script="Talu" typeface="Microsoft New Tai Lue"/>
-        <a:font script="Tfng" typeface="Ebrima"/>
-      </a:majorFont>
-      <a:minorFont>
-        <a:latin typeface="Aptos" panose="02110004020202020204"/>
-        <a:ea typeface=""/>
-        <a:cs typeface=""/>
-        <a:font script="Jpan" typeface="游ゴシック"/>
-        <a:font script="Hang" typeface="맑은 고딕"/>
-        <a:font script="Hans" typeface="等线"/>
-        <a:font script="Hant" typeface="新細明體"/>
-        <a:font script="Arab" typeface="Arial"/>
-        <a:font script="Hebr" typeface="Arial"/>
-        <a:font script="Thai" typeface="Cordia New"/>
-        <a:font script="Ethi" typeface="Nyala"/>
-        <a:font script="Beng" typeface="Vrinda"/>
-        <a:font script="Gujr" typeface="Shruti"/>
-        <a:font script="Khmr" typeface="DaunPenh"/>
-        <a:font script="Knda" typeface="Tunga"/>
-        <a:font script="Guru" typeface="Raavi"/>
-        <a:font script="Cans" typeface="Euphemia"/>
-        <a:font script="Cher" typeface="Plantagenet Cherokee"/>
-        <a:font script="Yiii" typeface="Microsoft Yi Baiti"/>
-        <a:font script="Tibt" typeface="Microsoft Himalaya"/>
-        <a:font script="Thaa" typeface="MV Boli"/>
-        <a:font script="Deva" typeface="Mangal"/>
-        <a:font script="Telu" typeface="Gautami"/>
-        <a:font script="Taml" typeface="Latha"/>
-        <a:font script="Syrc" typeface="Estrangelo Edessa"/>
-        <a:font script="Orya" typeface="Kalinga"/>
-        <a:font script="Mlym" typeface="Kartika"/>
-        <a:font script="Laoo" typeface="DokChampa"/>
-        <a:font script="Sinh" typeface="Iskoola Pota"/>
-        <a:font script="Mong" typeface="Mongolian Baiti"/>
-        <a:font script="Viet" typeface="Arial"/>
-        <a:font script="Uigh" typeface="Microsoft Uighur"/>
-        <a:font script="Geor" typeface="Sylfaen"/>
-        <a:font script="Armn" typeface="Arial"/>
-        <a:font script="Bugi" typeface="Leelawadee UI"/>
-        <a:font script="Bopo" typeface="Microsoft JhengHei"/>
-        <a:font script="Java" typeface="Javanese Text"/>
-        <a:font script="Lisu" typeface="Segoe UI"/>
-        <a:font script="Mymr" typeface="Myanmar Text"/>
-        <a:font script="Nkoo" typeface="Ebrima"/>
-        <a:font script="Olck" typeface="Nirmala UI"/>
-        <a:font script="Osma" typeface="Ebrima"/>
-        <a:font script="Phag" typeface="Phagspa"/>
-        <a:font script="Syrn" typeface="Estrangelo Edessa"/>
-        <a:font script="Syrj" typeface="Estrangelo Edessa"/>
-        <a:font script="Syre" typeface="Estrangelo Edessa"/>
-        <a:font script="Sora" typeface="Nirmala UI"/>
-        <a:font script="Tale" typeface="Microsoft Tai Le"/>
-        <a:font script="Talu" typeface="Microsoft New Tai Lue"/>
-        <a:font script="Tfng" typeface="Ebrima"/>
-      </a:minorFont>
-    </a:fontScheme>
-    <a:fmtScheme name="Office">
-      <a:fillStyleLst>
-        <a:solidFill>
-          <a:schemeClr val="phClr"/>
-        </a:solidFill>
-        <a:gradFill rotWithShape="1">
-          <a:gsLst>
-            <a:gs pos="0">
-              <a:schemeClr val="phClr">
-                <a:lumMod val="110000"/>
-                <a:satMod val="105000"/>
-                <a:tint val="67000"/>
-              </a:schemeClr>
-            </a:gs>
-            <a:gs pos="50000">
-              <a:schemeClr val="phClr">
-                <a:lumMod val="105000"/>
-                <a:satMod val="103000"/>
-                <a:tint val="73000"/>
-              </a:schemeClr>
-            </a:gs>
-            <a:gs pos="100000">
-              <a:schemeClr val="phClr">
-                <a:lumMod val="105000"/>
-                <a:satMod val="109000"/>
-                <a:tint val="81000"/>
-              </a:schemeClr>
-            </a:gs>
-          </a:gsLst>
-          <a:lin ang="5400000" scaled="0"/>
-        </a:gradFill>
-        <a:gradFill rotWithShape="1">
-          <a:gsLst>
-            <a:gs pos="0">
-              <a:schemeClr val="phClr">
-                <a:satMod val="103000"/>
-                <a:lumMod val="102000"/>
-                <a:tint val="94000"/>
-              </a:schemeClr>
-            </a:gs>
-            <a:gs pos="50000">
-              <a:schemeClr val="phClr">
-                <a:satMod val="110000"/>
-                <a:lumMod val="100000"/>
-                <a:shade val="100000"/>
-              </a:schemeClr>
-            </a:gs>
-            <a:gs pos="100000">
-              <a:schemeClr val="phClr">
-                <a:lumMod val="99000"/>
-                <a:satMod val="120000"/>
-                <a:shade val="78000"/>
-              </a:schemeClr>
-            </a:gs>
-          </a:gsLst>
-          <a:lin ang="5400000" scaled="0"/>
-        </a:gradFill>
-      </a:fillStyleLst>
-      <a:lnStyleLst>
-        <a:ln w="12700" cap="flat" cmpd="sng" algn="ctr">
-          <a:solidFill>
-            <a:schemeClr val="phClr"/>
-          </a:solidFill>
-          <a:prstDash val="solid"/>
-          <a:miter lim="800000"/>
-        </a:ln>
-        <a:ln w="19050" cap="flat" cmpd="sng" algn="ctr">
-          <a:solidFill>
-            <a:schemeClr val="phClr"/>
-          </a:solidFill>
-          <a:prstDash val="solid"/>
-          <a:miter lim="800000"/>
-        </a:ln>
-        <a:ln w="25400" cap="flat" cmpd="sng" algn="ctr">
-          <a:solidFill>
-            <a:schemeClr val="phClr"/>
-          </a:solidFill>
-          <a:prstDash val="solid"/>
-          <a:miter lim="800000"/>
-        </a:ln>
-      </a:lnStyleLst>
-      <a:effectStyleLst>
-        <a:effectStyle>
-          <a:effectLst/>
-        </a:effectStyle>
-        <a:effectStyle>
-          <a:effectLst/>
-        </a:effectStyle>
-        <a:effectStyle>
-          <a:effectLst>
-            <a:outerShdw blurRad="57150" dist="19050" dir="5400000" algn="ctr" rotWithShape="0">
-              <a:srgbClr val="000000">
-                <a:alpha val="63000"/>
-              </a:srgbClr>
-            </a:outerShdw>
-          </a:effectLst>
-        </a:effectStyle>
-      </a:effectStyleLst>
-      <a:bgFillStyleLst>
-        <a:solidFill>
-          <a:schemeClr val="phClr"/>
-        </a:solidFill>
-        <a:solidFill>
-          <a:schemeClr val="phClr">
-            <a:tint val="95000"/>
-            <a:satMod val="170000"/>
-          </a:schemeClr>
-        </a:solidFill>
-        <a:gradFill rotWithShape="1">
-          <a:gsLst>
-            <a:gs pos="0">
-              <a:schemeClr val="phClr">
-                <a:tint val="93000"/>
-                <a:satMod val="150000"/>
-                <a:shade val="98000"/>
-                <a:lumMod val="102000"/>
-              </a:schemeClr>
-            </a:gs>
-            <a:gs pos="50000">
-              <a:schemeClr val="phClr">
-                <a:tint val="98000"/>
-                <a:satMod val="130000"/>
-                <a:shade val="90000"/>
-                <a:lumMod val="103000"/>
-              </a:schemeClr>
-            </a:gs>
-            <a:gs pos="100000">
-              <a:schemeClr val="phClr">
-                <a:shade val="63000"/>
-                <a:satMod val="120000"/>
-              </a:schemeClr>
-            </a:gs>
-          </a:gsLst>
-          <a:lin ang="5400000" scaled="0"/>
-        </a:gradFill>
-      </a:bgFillStyleLst>
-    </a:fmtScheme>
-  </a:themeElements>
-  <a:objectDefaults>
-    <a:lnDef>
-      <a:spPr/>
-      <a:bodyPr/>
-      <a:lstStyle/>
-      <a:style>
-        <a:lnRef idx="2">
-          <a:schemeClr val="accent1"/>
-        </a:lnRef>
-        <a:fillRef idx="0">
-          <a:schemeClr val="accent1"/>
-        </a:fillRef>
-        <a:effectRef idx="1">
-          <a:schemeClr val="accent1"/>
-        </a:effectRef>
-        <a:fontRef idx="minor">
-          <a:schemeClr val="tx1"/>
-        </a:fontRef>
-      </a:style>
-    </a:lnDef>
-  </a:objectDefaults>
-  <a:extraClrSchemeLst/>
-  <a:extLst>
-    <a:ext uri="{05A4C25C-085E-4340-85A3-A5531E510DB2}">
-      <thm15:themeFamily xmlns:thm15="http://schemas.microsoft.com/office/thememl/2012/main" name="Office Theme" id="{2E142A2C-CD16-42D6-873A-C26D2A0506FA}" vid="{1BDDFF52-6CD6-40A5-AB3C-68EB2F1E4D0A}"/>
-    </a:ext>
-  </a:extLst>
-</a:theme>
 </file>
--- a/docs/video_slides_draft.pptx
+++ b/docs/video_slides_draft.pptx
@@ -4,6 +4,9 @@
   <p:sldMasterIdLst>
     <p:sldMasterId id="2147483648" r:id="rId1"/>
   </p:sldMasterIdLst>
+  <p:notesMasterIdLst>
+    <p:notesMasterId r:id="rId16"/>
+  </p:notesMasterIdLst>
   <p:sldIdLst>
     <p:sldId id="256" r:id="rId2"/>
     <p:sldId id="257" r:id="rId3"/>
@@ -20,9 +23,6 @@
     <p:sldId id="268" r:id="rId14"/>
     <p:sldId id="269" r:id="rId15"/>
   </p:sldIdLst>
-  <p:notesMasterIdLst>
-    <p:notesMasterId r:id="rId16"/>
-  </p:notesMasterIdLst>
   <p:sldSz cx="12192000" cy="6858000"/>
   <p:notesSz cx="6858000" cy="12192000"/>
   <p:defaultTextStyle>
@@ -117,6 +117,11 @@
       </a:defRPr>
     </a:lvl9pPr>
   </p:defaultTextStyle>
+  <p:extLst>
+    <p:ext uri="{EFAFB233-063F-42B5-8137-9DF3F51BA10A}">
+      <p15:sldGuideLst xmlns:p15="http://schemas.microsoft.com/office/powerpoint/2012/main"/>
+    </p:ext>
+  </p:extLst>
 </p:presentation>
 </file>
 
@@ -142,234 +147,10 @@
           <a:chExt cx="0" cy="0"/>
         </a:xfrm>
       </p:grpSpPr>
-      <p:sp>
-        <p:nvSpPr>
-          <p:cNvPr id="2" name="Header Placeholder 1"/>
-          <p:cNvSpPr>
-            <a:spLocks noGrp="1"/>
-          </p:cNvSpPr>
-          <p:nvPr>
-            <p:ph type="hdr" sz="quarter"/>
-          </p:nvPr>
-        </p:nvSpPr>
-        <p:spPr>
-          <a:xfrm>
-            <a:off x="0" y="0"/>
-            <a:ext cx="2971800" cy="458788"/>
-          </a:xfrm>
-          <a:prstGeom prst="rect">
-            <a:avLst/>
-          </a:prstGeom>
-        </p:spPr>
-        <p:txBody>
-          <a:bodyPr vert="horz" lIns="91440" tIns="45720" rIns="91440" bIns="45720" rtlCol="0"/>
-          <a:lstStyle>
-            <a:lvl1pPr algn="l">
-              <a:defRPr sz="1200"/>
-            </a:lvl1pPr>
-          </a:lstStyle>
-          <a:p>
-            <a:endParaRPr lang="en-US"/>
-          </a:p>
-        </p:txBody>
-      </p:sp>
-      <p:sp>
-        <p:nvSpPr>
-          <p:cNvPr id="3" name="Date Placeholder 2"/>
-          <p:cNvSpPr>
-            <a:spLocks noGrp="1"/>
-          </p:cNvSpPr>
-          <p:nvPr>
-            <p:ph type="dt" idx="1"/>
-          </p:nvPr>
-        </p:nvSpPr>
-        <p:spPr>
-          <a:xfrm>
-            <a:off x="3884613" y="0"/>
-            <a:ext cx="2971800" cy="458788"/>
-          </a:xfrm>
-          <a:prstGeom prst="rect">
-            <a:avLst/>
-          </a:prstGeom>
-        </p:spPr>
-        <p:txBody>
-          <a:bodyPr vert="horz" lIns="91440" tIns="45720" rIns="91440" bIns="45720" rtlCol="0"/>
-          <a:lstStyle>
-            <a:lvl1pPr algn="r">
-              <a:defRPr sz="1200"/>
-            </a:lvl1pPr>
-          </a:lstStyle>
-          <a:p>
-            <a:fld id="{5282F153-3F37-0F45-9E97-73ACFA13230C}" type="datetimeFigureOut">
-              <a:rPr lang="en-US"/>
-              <a:t>7/23/19</a:t>
-            </a:fld>
-            <a:endParaRPr lang="en-US"/>
-          </a:p>
-        </p:txBody>
-      </p:sp>
-      <p:sp>
-        <p:nvSpPr>
-          <p:cNvPr id="4" name="Slide Image Placeholder 3"/>
-          <p:cNvSpPr>
-            <a:spLocks noGrp="1" noRot="1" noChangeAspect="1"/>
-          </p:cNvSpPr>
-          <p:nvPr>
-            <p:ph type="sldImg" idx="2"/>
-          </p:nvPr>
-        </p:nvSpPr>
-        <p:spPr>
-          <a:xfrm>
-            <a:off x="685800" y="1143000"/>
-            <a:ext cx="5486400" cy="3086100"/>
-          </a:xfrm>
-          <a:prstGeom prst="rect">
-            <a:avLst/>
-          </a:prstGeom>
-          <a:noFill/>
-          <a:ln w="12700">
-            <a:solidFill>
-              <a:prstClr val="black"/>
-            </a:solidFill>
-          </a:ln>
-        </p:spPr>
-        <p:txBody>
-          <a:bodyPr vert="horz" lIns="91440" tIns="45720" rIns="91440" bIns="45720" rtlCol="0" anchor="ctr"/>
-          <a:lstStyle/>
-          <a:p>
-            <a:endParaRPr lang="en-US"/>
-          </a:p>
-        </p:txBody>
-      </p:sp>
-      <p:sp>
-        <p:nvSpPr>
-          <p:cNvPr id="5" name="Notes Placeholder 4"/>
-          <p:cNvSpPr>
-            <a:spLocks noGrp="1"/>
-          </p:cNvSpPr>
-          <p:nvPr>
-            <p:ph type="body" sz="quarter" idx="3"/>
-          </p:nvPr>
-        </p:nvSpPr>
-        <p:spPr>
-          <a:xfrm>
-            <a:off x="685800" y="4400550"/>
-            <a:ext cx="5486400" cy="3600450"/>
-          </a:xfrm>
-          <a:prstGeom prst="rect">
-            <a:avLst/>
-          </a:prstGeom>
-        </p:spPr>
-        <p:txBody>
-          <a:bodyPr vert="horz" lIns="91440" tIns="45720" rIns="91440" bIns="45720" rtlCol="0"/>
-          <a:lstStyle/>
-          <a:p>
-            <a:pPr lvl="0"/>
-            <a:r>
-              <a:rPr lang="en-US"/>
-              <a:t>Click to edit Master text styles</a:t>
-            </a:r>
-          </a:p>
-          <a:p>
-            <a:pPr lvl="1"/>
-            <a:r>
-              <a:rPr lang="en-US"/>
-              <a:t>Second level</a:t>
-            </a:r>
-          </a:p>
-          <a:p>
-            <a:pPr lvl="2"/>
-            <a:r>
-              <a:rPr lang="en-US"/>
-              <a:t>Third level</a:t>
-            </a:r>
-          </a:p>
-          <a:p>
-            <a:pPr lvl="3"/>
-            <a:r>
-              <a:rPr lang="en-US"/>
-              <a:t>Fourth level</a:t>
-            </a:r>
-          </a:p>
-          <a:p>
-            <a:pPr lvl="4"/>
-            <a:r>
-              <a:rPr lang="en-US"/>
-              <a:t>Fifth level</a:t>
-            </a:r>
-          </a:p>
-        </p:txBody>
-      </p:sp>
-      <p:sp>
-        <p:nvSpPr>
-          <p:cNvPr id="6" name="Footer Placeholder 5"/>
-          <p:cNvSpPr>
-            <a:spLocks noGrp="1"/>
-          </p:cNvSpPr>
-          <p:nvPr>
-            <p:ph type="ftr" sz="quarter" idx="4"/>
-          </p:nvPr>
-        </p:nvSpPr>
-        <p:spPr>
-          <a:xfrm>
-            <a:off x="0" y="8685213"/>
-            <a:ext cx="2971800" cy="458787"/>
-          </a:xfrm>
-          <a:prstGeom prst="rect">
-            <a:avLst/>
-          </a:prstGeom>
-        </p:spPr>
-        <p:txBody>
-          <a:bodyPr vert="horz" lIns="91440" tIns="45720" rIns="91440" bIns="45720" rtlCol="0" anchor="b"/>
-          <a:lstStyle>
-            <a:lvl1pPr algn="l">
-              <a:defRPr sz="1200"/>
-            </a:lvl1pPr>
-          </a:lstStyle>
-          <a:p>
-            <a:endParaRPr lang="en-US"/>
-          </a:p>
-        </p:txBody>
-      </p:sp>
-      <p:sp>
-        <p:nvSpPr>
-          <p:cNvPr id="7" name="Slide Number Placeholder 6"/>
-          <p:cNvSpPr>
-            <a:spLocks noGrp="1"/>
-          </p:cNvSpPr>
-          <p:nvPr>
-            <p:ph type="sldNum" sz="quarter" idx="5"/>
-          </p:nvPr>
-        </p:nvSpPr>
-        <p:spPr>
-          <a:xfrm>
-            <a:off x="3884613" y="8685213"/>
-            <a:ext cx="2971800" cy="458787"/>
-          </a:xfrm>
-          <a:prstGeom prst="rect">
-            <a:avLst/>
-          </a:prstGeom>
-        </p:spPr>
-        <p:txBody>
-          <a:bodyPr vert="horz" lIns="91440" tIns="45720" rIns="91440" bIns="45720" rtlCol="0" anchor="b"/>
-          <a:lstStyle>
-            <a:lvl1pPr algn="r">
-              <a:defRPr sz="1200"/>
-            </a:lvl1pPr>
-          </a:lstStyle>
-          <a:p>
-            <a:fld id="{CE5E9CC1-C706-0F49-92D6-E571CC5EEA8F}" type="slidenum">
-              <a:rPr lang="en-US"/>
-              <a:t>‹#›</a:t>
-            </a:fld>
-            <a:endParaRPr lang="en-US"/>
-          </a:p>
-        </p:txBody>
-      </p:sp>
     </p:spTree>
     <p:extLst>
       <p:ext uri="{BB962C8B-B14F-4D97-AF65-F5344CB8AC3E}">
-        <p14:creationId xmlns:p14="http://schemas.microsoft.com/office/powerpoint/2010/main" val="1024086991"/>
+        <p14:creationId xmlns:p14="http://schemas.microsoft.com/office/powerpoint/2010/main" val="2793169109"/>
       </p:ext>
     </p:extLst>
   </p:cSld>
@@ -517,7 +298,6 @@
               <a:rPr lang="en-US" dirty="0"/>
               <a:t>Title card. Subtitle deliberately names the four core artifact classes - the deck's first echo of the artifact-class table (slide 6). Optional footer: INSPECTA program context.</a:t>
             </a:r>
-            <a:endParaRPr lang="en-US" dirty="0"/>
           </a:p>
         </p:txBody>
       </p:sp>
@@ -603,10 +383,9 @@
           <a:p>
             <a:r>
               <a:rPr lang="en-US" dirty="0"/>
-              <a:t>Beats: drifted episode escalates with slice attribution -&gt; ruling diff (always shown; linger) -&gt; bless -&gt; promote (real codegen; speed-ramp stretch, keep rolling) -&gt; gold moves -&gt; Verus tier RED against the new baseline. End on the honest-RED checklist.
+              <a:t>Take A (benign range, --drift range): Table A-12 ceiling 102 -&gt; 103 in the shared library -&gt; appraisal fails, gumbo_library attributed, all else green (dwell: 'sanction, not semantics') -&gt; ruling diff -&gt; bless -&gt; spec-first green -&gt; promote (codegen; speed-ramp) -&gt; re-proves ALL GREEN; offered diff = regenerated shared-library constant. Take B (breaking): escalation with attribution -&gt; ruling diff (linger) -&gt; bless -&gt; promote (speed-ramp) -&gt; gold moves -&gt; Verus tier RED; end on the honest-RED checklist. VO bridge: 'same lifecycle, opposite verdicts - authority chooses the baseline; measurement alone decides whether it holds.'
 Watch-for line doubles as the VO opener over the terminal cut. Full runbook: docs/video_recording_plan.md.</a:t>
             </a:r>
-            <a:endParaRPr lang="en-US" dirty="0"/>
           </a:p>
         </p:txBody>
       </p:sp>
@@ -695,7 +474,6 @@
               <a:t>Beats: dummy-bad-impl diff (take the [v]iew - VSCode diff D1 on camera) -&gt; contracts-intact rung exhausts -&gt; impl rung restores crate-scoped -&gt; restart -&gt; re-attested clean.
 Watch-for line doubles as the VO opener over the terminal cut. Full runbook: docs/video_recording_plan.md.</a:t>
             </a:r>
-            <a:endParaRPr lang="en-US" dirty="0"/>
           </a:p>
         </p:txBody>
       </p:sp>
@@ -784,7 +562,6 @@
               <a:t>Scene 6 beats: three tampers, three attributed refusals (signature -&gt; anchor -&gt; derivability); optionally the flipped-evidence-byte diff on camera. Scene 7 beats: wrapper edit (take the [v]iew, diff D10) -&gt; readiness still passes -&gt; tool hash refutes, every proof cell poisons to ? - dwell, this is the act's money shot. --restore-tools recovery in VO only.
 Watch-for line doubles as the VO opener over the terminal cut. Full runbook: docs/video_recording_plan.md.</a:t>
             </a:r>
-            <a:endParaRPr lang="en-US" dirty="0"/>
           </a:p>
         </p:txBody>
       </p:sp>
@@ -873,7 +650,6 @@
               <a:t>Beats: inverted-FFI diff (take the [v]iew, diff D18 - 'see how innocent it looks') -&gt; proofs pass, cheat scan silent -&gt; gensrc byte anchor refuses, naming the file -&gt; diagnosis rung classifies -&gt; repair by regeneration (second speed-ramp stretch) -&gt; re-attested clean. Final checklist doubles as the coverage beat's background; close with one sentence naming scenes 9-11 (capstone slide C carries that taxonomy).
 Watch-for line doubles as the VO opener over the terminal cut. Full runbook: docs/video_recording_plan.md.</a:t>
             </a:r>
-            <a:endParaRPr lang="en-US" dirty="0"/>
           </a:p>
         </p:txBody>
       </p:sp>
@@ -962,7 +738,6 @@
               <a:t>Collection point for every reference in the deck - keep this slide current as sections are added (isolette slide carries the K-State + AR-08-32 citations inline; Copland/Verus/seL4 seeded here ahead of their sections).
 DOIs on record in docs/video_slide_drafts.md.</a:t>
             </a:r>
-            <a:endParaRPr lang="en-US" dirty="0"/>
           </a:p>
         </p:txBody>
       </p:sp>
@@ -1053,7 +828,6 @@
 Subline payoffs: developer claims -&gt; scenes 5/7; untrusted tools -&gt; scene 7; LLM outputs -&gt; capstone slides A/B; cached verdicts -&gt; scene 11.
 Visual TODO: three-stage widening-scope progression (boot-time -&gt; layered runtime -&gt; lifecycle loop) to replace/join the bullets.</a:t>
             </a:r>
-            <a:endParaRPr lang="en-US" dirty="0"/>
           </a:p>
         </p:txBody>
       </p:sp>
@@ -1142,7 +916,6 @@
               <a:t>~15 seconds on first appearance; afterwards it rides on transition slides for free.
 Design decision: one master/layout holds the strip text so a section rename is a single edit. Header titles are provisional.</a:t>
             </a:r>
-            <a:endParaRPr lang="en-US" dirty="0"/>
           </a:p>
         </p:txBody>
       </p:sp>
@@ -1233,7 +1006,6 @@
 Snippet source: tests/fixtures/isolette_sysmlv2_rust_props/term.json, rendered in concrete syntax (branches flattened, target IDs shortened to file names - cosmetic).
 The verus-tier measure-then-use phrase is deliberately held back for scene 7's reveal.</a:t>
             </a:r>
-            <a:endParaRPr lang="en-US" dirty="0"/>
           </a:p>
         </p:txBody>
       </p:sp>
@@ -1325,7 +1097,6 @@
 Speaker-note-only details (cut from the slide): on_pass/on_fail dispatch mechanics, success-driven handoff for component-wise entries, max_attempts per rung.
 The legend earns its space: every scene's checklist frames render through these glyphs.</a:t>
             </a:r>
-            <a:endParaRPr lang="en-US" dirty="0"/>
           </a:p>
         </p:txBody>
       </p:sp>
@@ -1416,7 +1187,6 @@
 Predicate and restart-episode are deliberately OFF this slide (parked; placement TBD - possibly an 'evaluation primitives' strip). If asked: a predicate is the judge (one evaluation = one attestation episode), restart-episode is the freshness primitive (forget memoized verdicts, reset, re-evaluate).
 Also deliberately excluded (README-level detail): partition mechanics, component-wise entries and success handoff, dispatch latching, max_cycles.</a:t>
             </a:r>
-            <a:endParaRPr lang="en-US" dirty="0"/>
           </a:p>
         </p:txBody>
       </p:sp>
@@ -1506,7 +1276,6 @@
 Spoken hook (never on-slide text): 'This table is deliberately incomplete - the demo will show why.' The cheat / sysproof / gensrc tiers are capstone slide C's punchline: attacks forced them into existence. Do not pre-introduce them here.
 Same column shape (class -&gt; measured how -&gt; judged by -&gt; repair) as capstone slide B, so the audience recognizes it when it returns.</a:t>
             </a:r>
-            <a:endParaRPr lang="en-US" dirty="0"/>
           </a:p>
         </p:txBody>
       </p:sp>
@@ -1598,7 +1367,6 @@
 Held back on purpose (scene 9's reveal): cheat-tier depth stats - 86 blessed external_body sites, 10 scanned crates.
 Numbers verified exact 2026-08-25 (l1a targets, l2 slices, verus term, pub-proof-fn count); provision-dependent - re-verify before recording day.</a:t>
             </a:r>
-            <a:endParaRPr lang="en-US" dirty="0"/>
           </a:p>
         </p:txBody>
       </p:sp>
@@ -1687,7 +1455,6 @@
               <a:t>Beats: readiness gate green -&gt; one full episode -&gt; per-crate checklist all green. Dwell on the final checklist - it is the frame every later refusal is compared against.
 Watch-for line doubles as the VO opener over the terminal cut. Full runbook: docs/video_recording_plan.md.</a:t>
             </a:r>
-            <a:endParaRPr lang="en-US" dirty="0"/>
           </a:p>
         </p:txBody>
       </p:sp>
@@ -1760,6 +1527,11 @@
 <file path=ppt/slideMasters/slideMaster1.xml><?xml version="1.0" encoding="utf-8"?>
 <p:sldMaster xmlns:a="http://schemas.openxmlformats.org/drawingml/2006/main" xmlns:r="http://schemas.openxmlformats.org/officeDocument/2006/relationships" xmlns:p="http://schemas.openxmlformats.org/presentationml/2006/main">
   <p:cSld>
+    <p:bg>
+      <p:bgRef idx="1001">
+        <a:schemeClr val="bg1"/>
+      </p:bgRef>
+    </p:bg>
     <p:spTree>
       <p:nvGrpSpPr>
         <p:cNvPr id="1" name=""/>
@@ -2042,6 +1814,7 @@
         <a:solidFill>
           <a:srgbClr val="1E2761"/>
         </a:solidFill>
+        <a:effectLst/>
       </p:bgPr>
     </p:bg>
     <p:spTree>
@@ -2079,7 +1852,7 @@
           <a:bodyPr wrap="square" lIns="0" tIns="0" rIns="0" bIns="0" rtlCol="0" anchor="ctr"/>
           <a:lstStyle/>
           <a:p>
-            <a:pPr algn="l" indent="0" marL="0">
+            <a:pPr marL="0" indent="0" algn="l">
               <a:buNone/>
             </a:pPr>
             <a:r>
@@ -2118,7 +1891,7 @@
           <a:bodyPr wrap="square" lIns="0" tIns="0" rIns="0" bIns="0" rtlCol="0" anchor="ctr"/>
           <a:lstStyle/>
           <a:p>
-            <a:pPr algn="l" indent="0" marL="0">
+            <a:pPr marL="0" indent="0" algn="l">
               <a:buNone/>
             </a:pPr>
             <a:r>
@@ -2157,7 +1930,7 @@
           <a:bodyPr wrap="square" lIns="0" tIns="0" rIns="0" bIns="0" rtlCol="0" anchor="ctr"/>
           <a:lstStyle/>
           <a:p>
-            <a:pPr algn="l" indent="0" marL="0">
+            <a:pPr marL="0" indent="0" algn="l">
               <a:buNone/>
             </a:pPr>
             <a:r>
@@ -2191,6 +1964,7 @@
         <a:solidFill>
           <a:srgbClr val="FFFFFF"/>
         </a:solidFill>
+        <a:effectLst/>
       </p:bgPr>
     </p:bg>
     <p:spTree>
@@ -2228,6 +2002,13 @@
           </a:solidFill>
           <a:ln/>
         </p:spPr>
+        <p:txBody>
+          <a:bodyPr/>
+          <a:lstStyle/>
+          <a:p>
+            <a:endParaRPr lang="en-US"/>
+          </a:p>
+        </p:txBody>
       </p:sp>
       <p:sp>
         <p:nvSpPr>
@@ -2250,7 +2031,7 @@
           <a:bodyPr wrap="square" lIns="254" tIns="254" rIns="254" bIns="254" rtlCol="0" anchor="ctr"/>
           <a:lstStyle/>
           <a:p>
-            <a:pPr algn="ctr" indent="0" marL="0">
+            <a:pPr marL="0" indent="0" algn="ctr">
               <a:buNone/>
             </a:pPr>
             <a:r>
@@ -2289,6 +2070,13 @@
           </a:solidFill>
           <a:ln/>
         </p:spPr>
+        <p:txBody>
+          <a:bodyPr/>
+          <a:lstStyle/>
+          <a:p>
+            <a:endParaRPr lang="en-US"/>
+          </a:p>
+        </p:txBody>
       </p:sp>
       <p:sp>
         <p:nvSpPr>
@@ -2311,7 +2099,7 @@
           <a:bodyPr wrap="square" lIns="254" tIns="254" rIns="254" bIns="254" rtlCol="0" anchor="ctr"/>
           <a:lstStyle/>
           <a:p>
-            <a:pPr algn="ctr" indent="0" marL="0">
+            <a:pPr marL="0" indent="0" algn="ctr">
               <a:buNone/>
             </a:pPr>
             <a:r>
@@ -2328,7 +2116,7 @@
             <a:endParaRPr lang="en-US" sz="900" dirty="0"/>
           </a:p>
           <a:p>
-            <a:pPr algn="ctr" indent="0" marL="0">
+            <a:pPr marL="0" indent="0" algn="ctr">
               <a:buNone/>
             </a:pPr>
             <a:r>
@@ -2367,6 +2155,13 @@
           </a:solidFill>
           <a:ln/>
         </p:spPr>
+        <p:txBody>
+          <a:bodyPr/>
+          <a:lstStyle/>
+          <a:p>
+            <a:endParaRPr lang="en-US"/>
+          </a:p>
+        </p:txBody>
       </p:sp>
       <p:sp>
         <p:nvSpPr>
@@ -2389,7 +2184,7 @@
           <a:bodyPr wrap="square" lIns="254" tIns="254" rIns="254" bIns="254" rtlCol="0" anchor="ctr"/>
           <a:lstStyle/>
           <a:p>
-            <a:pPr algn="ctr" indent="0" marL="0">
+            <a:pPr marL="0" indent="0" algn="ctr">
               <a:buNone/>
             </a:pPr>
             <a:r>
@@ -2428,6 +2223,13 @@
           </a:solidFill>
           <a:ln/>
         </p:spPr>
+        <p:txBody>
+          <a:bodyPr/>
+          <a:lstStyle/>
+          <a:p>
+            <a:endParaRPr lang="en-US"/>
+          </a:p>
+        </p:txBody>
       </p:sp>
       <p:sp>
         <p:nvSpPr>
@@ -2450,7 +2252,7 @@
           <a:bodyPr wrap="square" lIns="254" tIns="254" rIns="254" bIns="254" rtlCol="0" anchor="ctr"/>
           <a:lstStyle/>
           <a:p>
-            <a:pPr algn="ctr" indent="0" marL="0">
+            <a:pPr marL="0" indent="0" algn="ctr">
               <a:buNone/>
             </a:pPr>
             <a:r>
@@ -2489,6 +2291,13 @@
           </a:solidFill>
           <a:ln/>
         </p:spPr>
+        <p:txBody>
+          <a:bodyPr/>
+          <a:lstStyle/>
+          <a:p>
+            <a:endParaRPr lang="en-US"/>
+          </a:p>
+        </p:txBody>
       </p:sp>
       <p:sp>
         <p:nvSpPr>
@@ -2511,7 +2320,7 @@
           <a:bodyPr wrap="square" lIns="254" tIns="254" rIns="254" bIns="254" rtlCol="0" anchor="ctr"/>
           <a:lstStyle/>
           <a:p>
-            <a:pPr algn="ctr" indent="0" marL="0">
+            <a:pPr marL="0" indent="0" algn="ctr">
               <a:buNone/>
             </a:pPr>
             <a:r>
@@ -2550,11 +2359,11 @@
           <a:bodyPr wrap="square" lIns="0" tIns="0" rIns="0" bIns="0" rtlCol="0" anchor="ctr"/>
           <a:lstStyle/>
           <a:p>
-            <a:pPr indent="0" marL="0">
-              <a:buNone/>
-            </a:pPr>
-            <a:r>
-              <a:rPr lang="en-US" sz="1800" b="1" spc="300" kern="0" dirty="0">
+            <a:pPr marL="0" indent="0">
+              <a:buNone/>
+            </a:pPr>
+            <a:r>
+              <a:rPr lang="en-US" sz="1800" b="1" kern="0" spc="300" dirty="0">
                 <a:solidFill>
                   <a:srgbClr val="5A6478"/>
                 </a:solidFill>
@@ -2589,11 +2398,11 @@
           <a:bodyPr wrap="square" lIns="0" tIns="0" rIns="0" bIns="0" rtlCol="0" anchor="ctr"/>
           <a:lstStyle/>
           <a:p>
-            <a:pPr indent="0" marL="0">
-              <a:buNone/>
-            </a:pPr>
-            <a:r>
-              <a:rPr lang="en-US" sz="4000" b="1" dirty="0">
+            <a:pPr marL="0" indent="0">
+              <a:buNone/>
+            </a:pPr>
+            <a:r>
+              <a:rPr lang="en-US" sz="4000" b="1">
                 <a:solidFill>
                   <a:srgbClr val="1E2761"/>
                 </a:solidFill>
@@ -2601,7 +2410,18 @@
                 <a:ea typeface="Cambria" pitchFamily="34" charset="-122"/>
                 <a:cs typeface="Cambria" pitchFamily="34" charset="-120"/>
               </a:rPr>
-              <a:t>Sanctioned change</a:t>
+              <a:t>Model </a:t>
+            </a:r>
+            <a:r>
+              <a:rPr lang="en-US" sz="4000" b="1" dirty="0">
+                <a:solidFill>
+                  <a:srgbClr val="1E2761"/>
+                </a:solidFill>
+                <a:latin typeface="Cambria" pitchFamily="34" charset="0"/>
+                <a:ea typeface="Cambria" pitchFamily="34" charset="-122"/>
+                <a:cs typeface="Cambria" pitchFamily="34" charset="-120"/>
+              </a:rPr>
+              <a:t>drift: benign, re-blessed</a:t>
             </a:r>
             <a:endParaRPr lang="en-US" sz="4000" dirty="0"/>
           </a:p>
@@ -2628,7 +2448,7 @@
           <a:bodyPr wrap="square" lIns="0" tIns="0" rIns="0" bIns="0" rtlCol="0" anchor="ctr"/>
           <a:lstStyle/>
           <a:p>
-            <a:pPr indent="0" marL="0">
+            <a:pPr marL="0" indent="0">
               <a:buNone/>
             </a:pPr>
             <a:r>
@@ -2640,7 +2460,7 @@
                 <a:ea typeface="Calibri" pitchFamily="34" charset="-122"/>
                 <a:cs typeface="Calibri" pitchFamily="34" charset="-120"/>
               </a:rPr>
-              <a:t>scene 3 (breaking)</a:t>
+              <a:t>Demo scene: 3 (expand allowed temperature range)</a:t>
             </a:r>
             <a:endParaRPr lang="en-US" sz="1500" dirty="0"/>
           </a:p>
@@ -2667,7 +2487,7 @@
           <a:bodyPr wrap="square" lIns="0" tIns="0" rIns="0" bIns="0" rtlCol="0" anchor="ctr"/>
           <a:lstStyle/>
           <a:p>
-            <a:pPr indent="0" marL="0">
+            <a:pPr marL="0" indent="0">
               <a:buNone/>
             </a:pPr>
             <a:r>
@@ -2679,7 +2499,7 @@
                 <a:ea typeface="Calibri" pitchFamily="34" charset="-122"/>
                 <a:cs typeface="Calibri" pitchFamily="34" charset="-120"/>
               </a:rPr>
-              <a:t>A spec edit gets caught, examined, and blessed — and the system honestly reports a spec the implementation doesn't yet meet.</a:t>
+              <a:t>A benign change in requirements — the temperature alarm range widened — model appraisal fails quickly.  Administrator re-blesses and promotes new spec, all contract appraisals again pass.</a:t>
             </a:r>
             <a:endParaRPr lang="en-US" sz="2000" dirty="0"/>
           </a:p>
@@ -2693,8 +2513,8 @@
         </p:nvSpPr>
         <p:spPr>
           <a:xfrm>
-            <a:off x="822960" y="6172200"/>
-            <a:ext cx="10515600" cy="365760"/>
+            <a:off x="822960" y="6053328"/>
+            <a:ext cx="10515600" cy="603504"/>
           </a:xfrm>
           <a:prstGeom prst="rect">
             <a:avLst/>
@@ -2706,9 +2526,6 @@
           <a:bodyPr wrap="square" lIns="0" tIns="0" rIns="0" bIns="0" rtlCol="0" anchor="ctr"/>
           <a:lstStyle/>
           <a:p>
-            <a:pPr indent="0" marL="0">
-              <a:buNone/>
-            </a:pPr>
             <a:r>
               <a:rPr lang="en-US" sz="1100" dirty="0">
                 <a:solidFill>
@@ -2718,7 +2535,7 @@
                 <a:ea typeface="Courier New" pitchFamily="34" charset="-122"/>
                 <a:cs typeface="Courier New" pitchFamily="34" charset="-120"/>
               </a:rPr>
-              <a:t>./examples/demo_isolette.sh --scenes 3 --drift breaking</a:t>
+              <a:t>./examples/demo_isolette.sh --scenes 3 --drift range         (ruling at the prompt: bless)</a:t>
             </a:r>
             <a:endParaRPr lang="en-US" sz="1100" dirty="0"/>
           </a:p>
@@ -2740,6 +2557,7 @@
         <a:solidFill>
           <a:srgbClr val="FFFFFF"/>
         </a:solidFill>
+        <a:effectLst/>
       </p:bgPr>
     </p:bg>
     <p:spTree>
@@ -2777,6 +2595,13 @@
           </a:solidFill>
           <a:ln/>
         </p:spPr>
+        <p:txBody>
+          <a:bodyPr/>
+          <a:lstStyle/>
+          <a:p>
+            <a:endParaRPr lang="en-US"/>
+          </a:p>
+        </p:txBody>
       </p:sp>
       <p:sp>
         <p:nvSpPr>
@@ -2799,7 +2624,7 @@
           <a:bodyPr wrap="square" lIns="254" tIns="254" rIns="254" bIns="254" rtlCol="0" anchor="ctr"/>
           <a:lstStyle/>
           <a:p>
-            <a:pPr algn="ctr" indent="0" marL="0">
+            <a:pPr marL="0" indent="0" algn="ctr">
               <a:buNone/>
             </a:pPr>
             <a:r>
@@ -2838,6 +2663,13 @@
           </a:solidFill>
           <a:ln/>
         </p:spPr>
+        <p:txBody>
+          <a:bodyPr/>
+          <a:lstStyle/>
+          <a:p>
+            <a:endParaRPr lang="en-US"/>
+          </a:p>
+        </p:txBody>
       </p:sp>
       <p:sp>
         <p:nvSpPr>
@@ -2860,7 +2692,7 @@
           <a:bodyPr wrap="square" lIns="254" tIns="254" rIns="254" bIns="254" rtlCol="0" anchor="ctr"/>
           <a:lstStyle/>
           <a:p>
-            <a:pPr algn="ctr" indent="0" marL="0">
+            <a:pPr marL="0" indent="0" algn="ctr">
               <a:buNone/>
             </a:pPr>
             <a:r>
@@ -2877,7 +2709,7 @@
             <a:endParaRPr lang="en-US" sz="900" dirty="0"/>
           </a:p>
           <a:p>
-            <a:pPr algn="ctr" indent="0" marL="0">
+            <a:pPr marL="0" indent="0" algn="ctr">
               <a:buNone/>
             </a:pPr>
             <a:r>
@@ -2916,6 +2748,13 @@
           </a:solidFill>
           <a:ln/>
         </p:spPr>
+        <p:txBody>
+          <a:bodyPr/>
+          <a:lstStyle/>
+          <a:p>
+            <a:endParaRPr lang="en-US"/>
+          </a:p>
+        </p:txBody>
       </p:sp>
       <p:sp>
         <p:nvSpPr>
@@ -2938,7 +2777,7 @@
           <a:bodyPr wrap="square" lIns="254" tIns="254" rIns="254" bIns="254" rtlCol="0" anchor="ctr"/>
           <a:lstStyle/>
           <a:p>
-            <a:pPr algn="ctr" indent="0" marL="0">
+            <a:pPr marL="0" indent="0" algn="ctr">
               <a:buNone/>
             </a:pPr>
             <a:r>
@@ -2977,6 +2816,13 @@
           </a:solidFill>
           <a:ln/>
         </p:spPr>
+        <p:txBody>
+          <a:bodyPr/>
+          <a:lstStyle/>
+          <a:p>
+            <a:endParaRPr lang="en-US"/>
+          </a:p>
+        </p:txBody>
       </p:sp>
       <p:sp>
         <p:nvSpPr>
@@ -2999,7 +2845,7 @@
           <a:bodyPr wrap="square" lIns="254" tIns="254" rIns="254" bIns="254" rtlCol="0" anchor="ctr"/>
           <a:lstStyle/>
           <a:p>
-            <a:pPr algn="ctr" indent="0" marL="0">
+            <a:pPr marL="0" indent="0" algn="ctr">
               <a:buNone/>
             </a:pPr>
             <a:r>
@@ -3038,6 +2884,13 @@
           </a:solidFill>
           <a:ln/>
         </p:spPr>
+        <p:txBody>
+          <a:bodyPr/>
+          <a:lstStyle/>
+          <a:p>
+            <a:endParaRPr lang="en-US"/>
+          </a:p>
+        </p:txBody>
       </p:sp>
       <p:sp>
         <p:nvSpPr>
@@ -3060,7 +2913,7 @@
           <a:bodyPr wrap="square" lIns="254" tIns="254" rIns="254" bIns="254" rtlCol="0" anchor="ctr"/>
           <a:lstStyle/>
           <a:p>
-            <a:pPr algn="ctr" indent="0" marL="0">
+            <a:pPr marL="0" indent="0" algn="ctr">
               <a:buNone/>
             </a:pPr>
             <a:r>
@@ -3099,11 +2952,11 @@
           <a:bodyPr wrap="square" lIns="0" tIns="0" rIns="0" bIns="0" rtlCol="0" anchor="ctr"/>
           <a:lstStyle/>
           <a:p>
-            <a:pPr indent="0" marL="0">
-              <a:buNone/>
-            </a:pPr>
-            <a:r>
-              <a:rPr lang="en-US" sz="1800" b="1" spc="300" kern="0" dirty="0">
+            <a:pPr marL="0" indent="0">
+              <a:buNone/>
+            </a:pPr>
+            <a:r>
+              <a:rPr lang="en-US" sz="1800" b="1" kern="0" spc="300" dirty="0">
                 <a:solidFill>
                   <a:srgbClr val="5A6478"/>
                 </a:solidFill>
@@ -3138,7 +2991,7 @@
           <a:bodyPr wrap="square" lIns="0" tIns="0" rIns="0" bIns="0" rtlCol="0" anchor="ctr"/>
           <a:lstStyle/>
           <a:p>
-            <a:pPr indent="0" marL="0">
+            <a:pPr marL="0" indent="0">
               <a:buNone/>
             </a:pPr>
             <a:r>
@@ -3177,7 +3030,7 @@
           <a:bodyPr wrap="square" lIns="0" tIns="0" rIns="0" bIns="0" rtlCol="0" anchor="ctr"/>
           <a:lstStyle/>
           <a:p>
-            <a:pPr indent="0" marL="0">
+            <a:pPr marL="0" indent="0">
               <a:buNone/>
             </a:pPr>
             <a:r>
@@ -3216,7 +3069,7 @@
           <a:bodyPr wrap="square" lIns="0" tIns="0" rIns="0" bIns="0" rtlCol="0" anchor="ctr"/>
           <a:lstStyle/>
           <a:p>
-            <a:pPr indent="0" marL="0">
+            <a:pPr marL="0" indent="0">
               <a:buNone/>
             </a:pPr>
             <a:r>
@@ -3242,8 +3095,8 @@
         </p:nvSpPr>
         <p:spPr>
           <a:xfrm>
-            <a:off x="822960" y="6172200"/>
-            <a:ext cx="10515600" cy="365760"/>
+            <a:off x="822960" y="6053328"/>
+            <a:ext cx="10515600" cy="603504"/>
           </a:xfrm>
           <a:prstGeom prst="rect">
             <a:avLst/>
@@ -3255,7 +3108,7 @@
           <a:bodyPr wrap="square" lIns="0" tIns="0" rIns="0" bIns="0" rtlCol="0" anchor="ctr"/>
           <a:lstStyle/>
           <a:p>
-            <a:pPr indent="0" marL="0">
+            <a:pPr marL="0" indent="0">
               <a:buNone/>
             </a:pPr>
             <a:r>
@@ -3289,6 +3142,7 @@
         <a:solidFill>
           <a:srgbClr val="FFFFFF"/>
         </a:solidFill>
+        <a:effectLst/>
       </p:bgPr>
     </p:bg>
     <p:spTree>
@@ -3326,6 +3180,13 @@
           </a:solidFill>
           <a:ln/>
         </p:spPr>
+        <p:txBody>
+          <a:bodyPr/>
+          <a:lstStyle/>
+          <a:p>
+            <a:endParaRPr lang="en-US"/>
+          </a:p>
+        </p:txBody>
       </p:sp>
       <p:sp>
         <p:nvSpPr>
@@ -3348,7 +3209,7 @@
           <a:bodyPr wrap="square" lIns="254" tIns="254" rIns="254" bIns="254" rtlCol="0" anchor="ctr"/>
           <a:lstStyle/>
           <a:p>
-            <a:pPr algn="ctr" indent="0" marL="0">
+            <a:pPr marL="0" indent="0" algn="ctr">
               <a:buNone/>
             </a:pPr>
             <a:r>
@@ -3387,6 +3248,13 @@
           </a:solidFill>
           <a:ln/>
         </p:spPr>
+        <p:txBody>
+          <a:bodyPr/>
+          <a:lstStyle/>
+          <a:p>
+            <a:endParaRPr lang="en-US"/>
+          </a:p>
+        </p:txBody>
       </p:sp>
       <p:sp>
         <p:nvSpPr>
@@ -3409,7 +3277,7 @@
           <a:bodyPr wrap="square" lIns="254" tIns="254" rIns="254" bIns="254" rtlCol="0" anchor="ctr"/>
           <a:lstStyle/>
           <a:p>
-            <a:pPr algn="ctr" indent="0" marL="0">
+            <a:pPr marL="0" indent="0" algn="ctr">
               <a:buNone/>
             </a:pPr>
             <a:r>
@@ -3426,7 +3294,7 @@
             <a:endParaRPr lang="en-US" sz="900" dirty="0"/>
           </a:p>
           <a:p>
-            <a:pPr algn="ctr" indent="0" marL="0">
+            <a:pPr marL="0" indent="0" algn="ctr">
               <a:buNone/>
             </a:pPr>
             <a:r>
@@ -3465,6 +3333,13 @@
           </a:solidFill>
           <a:ln/>
         </p:spPr>
+        <p:txBody>
+          <a:bodyPr/>
+          <a:lstStyle/>
+          <a:p>
+            <a:endParaRPr lang="en-US"/>
+          </a:p>
+        </p:txBody>
       </p:sp>
       <p:sp>
         <p:nvSpPr>
@@ -3487,7 +3362,7 @@
           <a:bodyPr wrap="square" lIns="254" tIns="254" rIns="254" bIns="254" rtlCol="0" anchor="ctr"/>
           <a:lstStyle/>
           <a:p>
-            <a:pPr algn="ctr" indent="0" marL="0">
+            <a:pPr marL="0" indent="0" algn="ctr">
               <a:buNone/>
             </a:pPr>
             <a:r>
@@ -3526,6 +3401,13 @@
           </a:solidFill>
           <a:ln/>
         </p:spPr>
+        <p:txBody>
+          <a:bodyPr/>
+          <a:lstStyle/>
+          <a:p>
+            <a:endParaRPr lang="en-US"/>
+          </a:p>
+        </p:txBody>
       </p:sp>
       <p:sp>
         <p:nvSpPr>
@@ -3548,7 +3430,7 @@
           <a:bodyPr wrap="square" lIns="254" tIns="254" rIns="254" bIns="254" rtlCol="0" anchor="ctr"/>
           <a:lstStyle/>
           <a:p>
-            <a:pPr algn="ctr" indent="0" marL="0">
+            <a:pPr marL="0" indent="0" algn="ctr">
               <a:buNone/>
             </a:pPr>
             <a:r>
@@ -3587,6 +3469,13 @@
           </a:solidFill>
           <a:ln/>
         </p:spPr>
+        <p:txBody>
+          <a:bodyPr/>
+          <a:lstStyle/>
+          <a:p>
+            <a:endParaRPr lang="en-US"/>
+          </a:p>
+        </p:txBody>
       </p:sp>
       <p:sp>
         <p:nvSpPr>
@@ -3609,7 +3498,7 @@
           <a:bodyPr wrap="square" lIns="254" tIns="254" rIns="254" bIns="254" rtlCol="0" anchor="ctr"/>
           <a:lstStyle/>
           <a:p>
-            <a:pPr algn="ctr" indent="0" marL="0">
+            <a:pPr marL="0" indent="0" algn="ctr">
               <a:buNone/>
             </a:pPr>
             <a:r>
@@ -3648,11 +3537,11 @@
           <a:bodyPr wrap="square" lIns="0" tIns="0" rIns="0" bIns="0" rtlCol="0" anchor="ctr"/>
           <a:lstStyle/>
           <a:p>
-            <a:pPr indent="0" marL="0">
-              <a:buNone/>
-            </a:pPr>
-            <a:r>
-              <a:rPr lang="en-US" sz="1800" b="1" spc="300" kern="0" dirty="0">
+            <a:pPr marL="0" indent="0">
+              <a:buNone/>
+            </a:pPr>
+            <a:r>
+              <a:rPr lang="en-US" sz="1800" b="1" kern="0" spc="300" dirty="0">
                 <a:solidFill>
                   <a:srgbClr val="5A6478"/>
                 </a:solidFill>
@@ -3687,7 +3576,7 @@
           <a:bodyPr wrap="square" lIns="0" tIns="0" rIns="0" bIns="0" rtlCol="0" anchor="ctr"/>
           <a:lstStyle/>
           <a:p>
-            <a:pPr indent="0" marL="0">
+            <a:pPr marL="0" indent="0">
               <a:buNone/>
             </a:pPr>
             <a:r>
@@ -3726,7 +3615,7 @@
           <a:bodyPr wrap="square" lIns="0" tIns="0" rIns="0" bIns="0" rtlCol="0" anchor="ctr"/>
           <a:lstStyle/>
           <a:p>
-            <a:pPr indent="0" marL="0">
+            <a:pPr marL="0" indent="0">
               <a:buNone/>
             </a:pPr>
             <a:r>
@@ -3765,7 +3654,7 @@
           <a:bodyPr wrap="square" lIns="0" tIns="0" rIns="0" bIns="0" rtlCol="0" anchor="ctr"/>
           <a:lstStyle/>
           <a:p>
-            <a:pPr indent="0" marL="0">
+            <a:pPr marL="0" indent="0">
               <a:buNone/>
             </a:pPr>
             <a:r>
@@ -3791,8 +3680,8 @@
         </p:nvSpPr>
         <p:spPr>
           <a:xfrm>
-            <a:off x="822960" y="6172200"/>
-            <a:ext cx="10515600" cy="365760"/>
+            <a:off x="822960" y="6053328"/>
+            <a:ext cx="10515600" cy="603504"/>
           </a:xfrm>
           <a:prstGeom prst="rect">
             <a:avLst/>
@@ -3804,7 +3693,7 @@
           <a:bodyPr wrap="square" lIns="0" tIns="0" rIns="0" bIns="0" rtlCol="0" anchor="ctr"/>
           <a:lstStyle/>
           <a:p>
-            <a:pPr indent="0" marL="0">
+            <a:pPr marL="0" indent="0">
               <a:buNone/>
             </a:pPr>
             <a:r>
@@ -3838,6 +3727,7 @@
         <a:solidFill>
           <a:srgbClr val="FFFFFF"/>
         </a:solidFill>
+        <a:effectLst/>
       </p:bgPr>
     </p:bg>
     <p:spTree>
@@ -3875,6 +3765,13 @@
           </a:solidFill>
           <a:ln/>
         </p:spPr>
+        <p:txBody>
+          <a:bodyPr/>
+          <a:lstStyle/>
+          <a:p>
+            <a:endParaRPr lang="en-US"/>
+          </a:p>
+        </p:txBody>
       </p:sp>
       <p:sp>
         <p:nvSpPr>
@@ -3897,7 +3794,7 @@
           <a:bodyPr wrap="square" lIns="254" tIns="254" rIns="254" bIns="254" rtlCol="0" anchor="ctr"/>
           <a:lstStyle/>
           <a:p>
-            <a:pPr algn="ctr" indent="0" marL="0">
+            <a:pPr marL="0" indent="0" algn="ctr">
               <a:buNone/>
             </a:pPr>
             <a:r>
@@ -3936,6 +3833,13 @@
           </a:solidFill>
           <a:ln/>
         </p:spPr>
+        <p:txBody>
+          <a:bodyPr/>
+          <a:lstStyle/>
+          <a:p>
+            <a:endParaRPr lang="en-US"/>
+          </a:p>
+        </p:txBody>
       </p:sp>
       <p:sp>
         <p:nvSpPr>
@@ -3958,7 +3862,7 @@
           <a:bodyPr wrap="square" lIns="254" tIns="254" rIns="254" bIns="254" rtlCol="0" anchor="ctr"/>
           <a:lstStyle/>
           <a:p>
-            <a:pPr algn="ctr" indent="0" marL="0">
+            <a:pPr marL="0" indent="0" algn="ctr">
               <a:buNone/>
             </a:pPr>
             <a:r>
@@ -3975,7 +3879,7 @@
             <a:endParaRPr lang="en-US" sz="900" dirty="0"/>
           </a:p>
           <a:p>
-            <a:pPr algn="ctr" indent="0" marL="0">
+            <a:pPr marL="0" indent="0" algn="ctr">
               <a:buNone/>
             </a:pPr>
             <a:r>
@@ -4014,6 +3918,13 @@
           </a:solidFill>
           <a:ln/>
         </p:spPr>
+        <p:txBody>
+          <a:bodyPr/>
+          <a:lstStyle/>
+          <a:p>
+            <a:endParaRPr lang="en-US"/>
+          </a:p>
+        </p:txBody>
       </p:sp>
       <p:sp>
         <p:nvSpPr>
@@ -4036,7 +3947,7 @@
           <a:bodyPr wrap="square" lIns="254" tIns="254" rIns="254" bIns="254" rtlCol="0" anchor="ctr"/>
           <a:lstStyle/>
           <a:p>
-            <a:pPr algn="ctr" indent="0" marL="0">
+            <a:pPr marL="0" indent="0" algn="ctr">
               <a:buNone/>
             </a:pPr>
             <a:r>
@@ -4075,6 +3986,13 @@
           </a:solidFill>
           <a:ln/>
         </p:spPr>
+        <p:txBody>
+          <a:bodyPr/>
+          <a:lstStyle/>
+          <a:p>
+            <a:endParaRPr lang="en-US"/>
+          </a:p>
+        </p:txBody>
       </p:sp>
       <p:sp>
         <p:nvSpPr>
@@ -4097,7 +4015,7 @@
           <a:bodyPr wrap="square" lIns="254" tIns="254" rIns="254" bIns="254" rtlCol="0" anchor="ctr"/>
           <a:lstStyle/>
           <a:p>
-            <a:pPr algn="ctr" indent="0" marL="0">
+            <a:pPr marL="0" indent="0" algn="ctr">
               <a:buNone/>
             </a:pPr>
             <a:r>
@@ -4136,6 +4054,13 @@
           </a:solidFill>
           <a:ln/>
         </p:spPr>
+        <p:txBody>
+          <a:bodyPr/>
+          <a:lstStyle/>
+          <a:p>
+            <a:endParaRPr lang="en-US"/>
+          </a:p>
+        </p:txBody>
       </p:sp>
       <p:sp>
         <p:nvSpPr>
@@ -4158,7 +4083,7 @@
           <a:bodyPr wrap="square" lIns="254" tIns="254" rIns="254" bIns="254" rtlCol="0" anchor="ctr"/>
           <a:lstStyle/>
           <a:p>
-            <a:pPr algn="ctr" indent="0" marL="0">
+            <a:pPr marL="0" indent="0" algn="ctr">
               <a:buNone/>
             </a:pPr>
             <a:r>
@@ -4197,11 +4122,11 @@
           <a:bodyPr wrap="square" lIns="0" tIns="0" rIns="0" bIns="0" rtlCol="0" anchor="ctr"/>
           <a:lstStyle/>
           <a:p>
-            <a:pPr indent="0" marL="0">
-              <a:buNone/>
-            </a:pPr>
-            <a:r>
-              <a:rPr lang="en-US" sz="1800" b="1" spc="300" kern="0" dirty="0">
+            <a:pPr marL="0" indent="0">
+              <a:buNone/>
+            </a:pPr>
+            <a:r>
+              <a:rPr lang="en-US" sz="1800" b="1" kern="0" spc="300" dirty="0">
                 <a:solidFill>
                   <a:srgbClr val="5A6478"/>
                 </a:solidFill>
@@ -4236,7 +4161,7 @@
           <a:bodyPr wrap="square" lIns="0" tIns="0" rIns="0" bIns="0" rtlCol="0" anchor="ctr"/>
           <a:lstStyle/>
           <a:p>
-            <a:pPr indent="0" marL="0">
+            <a:pPr marL="0" indent="0">
               <a:buNone/>
             </a:pPr>
             <a:r>
@@ -4275,7 +4200,7 @@
           <a:bodyPr wrap="square" lIns="0" tIns="0" rIns="0" bIns="0" rtlCol="0" anchor="ctr"/>
           <a:lstStyle/>
           <a:p>
-            <a:pPr indent="0" marL="0">
+            <a:pPr marL="0" indent="0">
               <a:buNone/>
             </a:pPr>
             <a:r>
@@ -4314,7 +4239,7 @@
           <a:bodyPr wrap="square" lIns="0" tIns="0" rIns="0" bIns="0" rtlCol="0" anchor="ctr"/>
           <a:lstStyle/>
           <a:p>
-            <a:pPr indent="0" marL="0">
+            <a:pPr marL="0" indent="0">
               <a:buNone/>
             </a:pPr>
             <a:r>
@@ -4340,8 +4265,8 @@
         </p:nvSpPr>
         <p:spPr>
           <a:xfrm>
-            <a:off x="822960" y="6172200"/>
-            <a:ext cx="10515600" cy="365760"/>
+            <a:off x="822960" y="6053328"/>
+            <a:ext cx="10515600" cy="603504"/>
           </a:xfrm>
           <a:prstGeom prst="rect">
             <a:avLst/>
@@ -4353,7 +4278,7 @@
           <a:bodyPr wrap="square" lIns="0" tIns="0" rIns="0" bIns="0" rtlCol="0" anchor="ctr"/>
           <a:lstStyle/>
           <a:p>
-            <a:pPr indent="0" marL="0">
+            <a:pPr marL="0" indent="0">
               <a:buNone/>
             </a:pPr>
             <a:r>
@@ -4387,6 +4312,7 @@
         <a:solidFill>
           <a:srgbClr val="FFFFFF"/>
         </a:solidFill>
+        <a:effectLst/>
       </p:bgPr>
     </p:bg>
     <p:spTree>
@@ -4424,7 +4350,7 @@
           <a:bodyPr wrap="square" lIns="0" tIns="0" rIns="0" bIns="0" rtlCol="0" anchor="ctr"/>
           <a:lstStyle/>
           <a:p>
-            <a:pPr indent="0" marL="0">
+            <a:pPr marL="0" indent="0">
               <a:buNone/>
             </a:pPr>
             <a:r>
@@ -4463,7 +4389,7 @@
           <a:bodyPr wrap="square" lIns="0" tIns="0" rIns="0" bIns="0" rtlCol="0" anchor="t"/>
           <a:lstStyle/>
           <a:p>
-            <a:pPr algn="l" indent="0" marL="0">
+            <a:pPr marL="0" indent="0" algn="l">
               <a:spcAft>
                 <a:spcPts val="400"/>
               </a:spcAft>
@@ -4483,7 +4409,7 @@
             <a:endParaRPr lang="en-US" sz="1400" dirty="0"/>
           </a:p>
           <a:p>
-            <a:pPr algn="l" marL="342900" indent="-342900">
+            <a:pPr marL="342900" indent="-342900" algn="l">
               <a:spcAft>
                 <a:spcPts val="300"/>
               </a:spcAft>
@@ -4501,12 +4427,6 @@
               </a:rPr>
               <a:t>Hatcliff &amp; Belt, </a:t>
             </a:r>
-            <a:pPr algn="l" indent="0" marL="0">
-              <a:spcAft>
-                <a:spcPts val="300"/>
-              </a:spcAft>
-              <a:buNone/>
-            </a:pPr>
             <a:r>
               <a:rPr lang="en-US" sz="1150" i="1" dirty="0">
                 <a:solidFill>
@@ -4518,12 +4438,6 @@
               </a:rPr>
               <a:t>The Isolette System: Illustrating End-to-End Artifacts for Rigorous Model-Based Engineering</a:t>
             </a:r>
-            <a:pPr algn="l" indent="0" marL="0">
-              <a:spcAft>
-                <a:spcPts val="300"/>
-              </a:spcAft>
-              <a:buNone/>
-            </a:pPr>
             <a:r>
               <a:rPr lang="en-US" sz="1150" dirty="0">
                 <a:solidFill>
@@ -4538,7 +4452,7 @@
             <a:endParaRPr lang="en-US" sz="1400" dirty="0"/>
           </a:p>
           <a:p>
-            <a:pPr algn="l" marL="342900" indent="-342900">
+            <a:pPr marL="342900" indent="-342900" algn="l">
               <a:spcAft>
                 <a:spcPts val="300"/>
               </a:spcAft>
@@ -4556,12 +4470,6 @@
               </a:rPr>
               <a:t>Hatcliff, Belt, Robby, McKenzie, Liang, </a:t>
             </a:r>
-            <a:pPr algn="l" indent="0" marL="0">
-              <a:spcAft>
-                <a:spcPts val="300"/>
-              </a:spcAft>
-              <a:buNone/>
-            </a:pPr>
             <a:r>
               <a:rPr lang="en-US" sz="1150" i="1" dirty="0">
                 <a:solidFill>
@@ -4573,12 +4481,6 @@
               </a:rPr>
               <a:t>End-to-End Formal Methods Integrated Development with SysMLv2 Using HAMR</a:t>
             </a:r>
-            <a:pPr algn="l" indent="0" marL="0">
-              <a:spcAft>
-                <a:spcPts val="300"/>
-              </a:spcAft>
-              <a:buNone/>
-            </a:pPr>
             <a:r>
               <a:rPr lang="en-US" sz="1150" dirty="0">
                 <a:solidFill>
@@ -4593,7 +4495,7 @@
             <a:endParaRPr lang="en-US" sz="1400" dirty="0"/>
           </a:p>
           <a:p>
-            <a:pPr algn="l" marL="342900" indent="-342900">
+            <a:pPr marL="342900" indent="-342900" algn="l">
               <a:spcAft>
                 <a:spcPts val="300"/>
               </a:spcAft>
@@ -4611,12 +4513,6 @@
               </a:rPr>
               <a:t>Hatcliff, Belt, Robby, Carpenter, </a:t>
             </a:r>
-            <a:pPr algn="l" indent="0" marL="0">
-              <a:spcAft>
-                <a:spcPts val="300"/>
-              </a:spcAft>
-              <a:buNone/>
-            </a:pPr>
             <a:r>
               <a:rPr lang="en-US" sz="1150" i="1" dirty="0">
                 <a:solidFill>
@@ -4628,12 +4524,6 @@
               </a:rPr>
               <a:t>HAMR: An AADL Multi-platform Code Generation Toolset</a:t>
             </a:r>
-            <a:pPr algn="l" indent="0" marL="0">
-              <a:spcAft>
-                <a:spcPts val="300"/>
-              </a:spcAft>
-              <a:buNone/>
-            </a:pPr>
             <a:r>
               <a:rPr lang="en-US" sz="1150" dirty="0">
                 <a:solidFill>
@@ -4648,7 +4538,7 @@
             <a:endParaRPr lang="en-US" sz="1400" dirty="0"/>
           </a:p>
           <a:p>
-            <a:pPr algn="l" marL="342900" indent="-342900">
+            <a:pPr marL="342900" indent="-342900" algn="l">
               <a:spcAft>
                 <a:spcPts val="300"/>
               </a:spcAft>
@@ -4666,12 +4556,6 @@
               </a:rPr>
               <a:t>Lempia &amp; Miller, </a:t>
             </a:r>
-            <a:pPr algn="l" indent="0" marL="0">
-              <a:spcAft>
-                <a:spcPts val="300"/>
-              </a:spcAft>
-              <a:buNone/>
-            </a:pPr>
             <a:r>
               <a:rPr lang="en-US" sz="1150" i="1" dirty="0">
                 <a:solidFill>
@@ -4683,12 +4567,6 @@
               </a:rPr>
               <a:t>Requirements Engineering Management Handbook</a:t>
             </a:r>
-            <a:pPr algn="l" indent="0" marL="0">
-              <a:spcAft>
-                <a:spcPts val="300"/>
-              </a:spcAft>
-              <a:buNone/>
-            </a:pPr>
             <a:r>
               <a:rPr lang="en-US" sz="1150" dirty="0">
                 <a:solidFill>
@@ -4703,7 +4581,7 @@
             <a:endParaRPr lang="en-US" sz="1400" dirty="0"/>
           </a:p>
           <a:p>
-            <a:pPr algn="l" marL="342900" indent="-342900">
+            <a:pPr marL="342900" indent="-342900" algn="l">
               <a:spcAft>
                 <a:spcPts val="300"/>
               </a:spcAft>
@@ -4724,7 +4602,7 @@
             <a:endParaRPr lang="en-US" sz="1400" dirty="0"/>
           </a:p>
           <a:p>
-            <a:pPr algn="l" indent="0" marL="0">
+            <a:pPr marL="0" indent="0" algn="l">
               <a:spcBef>
                 <a:spcPts val="1200"/>
               </a:spcBef>
@@ -4747,7 +4625,7 @@
             <a:endParaRPr lang="en-US" sz="1400" dirty="0"/>
           </a:p>
           <a:p>
-            <a:pPr algn="l" marL="342900" indent="-342900">
+            <a:pPr marL="342900" indent="-342900" algn="l">
               <a:spcAft>
                 <a:spcPts val="300"/>
               </a:spcAft>
@@ -4765,12 +4643,6 @@
               </a:rPr>
               <a:t>Ramsdell, Rowe, Alexander, Helble, Loscocco, Pendergrass, Petz, </a:t>
             </a:r>
-            <a:pPr algn="l" indent="0" marL="0">
-              <a:spcAft>
-                <a:spcPts val="300"/>
-              </a:spcAft>
-              <a:buNone/>
-            </a:pPr>
             <a:r>
               <a:rPr lang="en-US" sz="1150" i="1" dirty="0">
                 <a:solidFill>
@@ -4782,12 +4654,6 @@
               </a:rPr>
               <a:t>Orchestrating Layered Attestations</a:t>
             </a:r>
-            <a:pPr algn="l" indent="0" marL="0">
-              <a:spcAft>
-                <a:spcPts val="300"/>
-              </a:spcAft>
-              <a:buNone/>
-            </a:pPr>
             <a:r>
               <a:rPr lang="en-US" sz="1150" dirty="0">
                 <a:solidFill>
@@ -4802,7 +4668,7 @@
             <a:endParaRPr lang="en-US" sz="1400" dirty="0"/>
           </a:p>
           <a:p>
-            <a:pPr algn="l" indent="0" marL="0">
+            <a:pPr marL="0" indent="0" algn="l">
               <a:spcBef>
                 <a:spcPts val="1200"/>
               </a:spcBef>
@@ -4825,7 +4691,7 @@
             <a:endParaRPr lang="en-US" sz="1400" dirty="0"/>
           </a:p>
           <a:p>
-            <a:pPr algn="l" marL="342900" indent="-342900">
+            <a:pPr marL="342900" indent="-342900" algn="l">
               <a:spcAft>
                 <a:spcPts val="300"/>
               </a:spcAft>
@@ -4843,12 +4709,6 @@
               </a:rPr>
               <a:t>Lattuada, Hance, Cho, Brun, Subasinghe, Zhou, Howell, Parno, Hawblitzel, </a:t>
             </a:r>
-            <a:pPr algn="l" indent="0" marL="0">
-              <a:spcAft>
-                <a:spcPts val="300"/>
-              </a:spcAft>
-              <a:buNone/>
-            </a:pPr>
             <a:r>
               <a:rPr lang="en-US" sz="1150" i="1" dirty="0">
                 <a:solidFill>
@@ -4860,12 +4720,6 @@
               </a:rPr>
               <a:t>Verus: Verifying Rust Programs using Linear Ghost Types</a:t>
             </a:r>
-            <a:pPr algn="l" indent="0" marL="0">
-              <a:spcAft>
-                <a:spcPts val="300"/>
-              </a:spcAft>
-              <a:buNone/>
-            </a:pPr>
             <a:r>
               <a:rPr lang="en-US" sz="1150" dirty="0">
                 <a:solidFill>
@@ -4880,7 +4734,7 @@
             <a:endParaRPr lang="en-US" sz="1400" dirty="0"/>
           </a:p>
           <a:p>
-            <a:pPr algn="l" marL="342900" indent="-342900">
+            <a:pPr marL="342900" indent="-342900" algn="l">
               <a:spcAft>
                 <a:spcPts val="300"/>
               </a:spcAft>
@@ -4898,12 +4752,6 @@
               </a:rPr>
               <a:t>Klein et al., </a:t>
             </a:r>
-            <a:pPr algn="l" indent="0" marL="0">
-              <a:spcAft>
-                <a:spcPts val="300"/>
-              </a:spcAft>
-              <a:buNone/>
-            </a:pPr>
             <a:r>
               <a:rPr lang="en-US" sz="1150" i="1" dirty="0">
                 <a:solidFill>
@@ -4915,12 +4763,6 @@
               </a:rPr>
               <a:t>seL4: Formal Verification of an OS Kernel</a:t>
             </a:r>
-            <a:pPr algn="l" indent="0" marL="0">
-              <a:spcAft>
-                <a:spcPts val="300"/>
-              </a:spcAft>
-              <a:buNone/>
-            </a:pPr>
             <a:r>
               <a:rPr lang="en-US" sz="1150" dirty="0">
                 <a:solidFill>
@@ -4952,6 +4794,7 @@
         <a:solidFill>
           <a:srgbClr val="FFFFFF"/>
         </a:solidFill>
+        <a:effectLst/>
       </p:bgPr>
     </p:bg>
     <p:spTree>
@@ -4989,7 +4832,7 @@
           <a:bodyPr wrap="square" lIns="0" tIns="0" rIns="0" bIns="0" rtlCol="0" anchor="ctr"/>
           <a:lstStyle/>
           <a:p>
-            <a:pPr indent="0" marL="0">
+            <a:pPr marL="0" indent="0">
               <a:buNone/>
             </a:pPr>
             <a:r>
@@ -5028,7 +4871,7 @@
           <a:bodyPr wrap="square" lIns="0" tIns="0" rIns="0" bIns="0" rtlCol="0" anchor="t"/>
           <a:lstStyle/>
           <a:p>
-            <a:pPr algn="l" marL="342900" indent="-342900">
+            <a:pPr marL="342900" indent="-342900" algn="l">
               <a:buSzPct val="100000"/>
               <a:buChar char="•"/>
             </a:pPr>
@@ -5041,13 +4884,10 @@
                 <a:ea typeface="Calibri" pitchFamily="34" charset="-122"/>
                 <a:cs typeface="Calibri" pitchFamily="34" charset="-120"/>
               </a:rPr>
-              <a:t>Traditional remote attestation: </a:t>
-            </a:r>
-            <a:pPr algn="l" indent="0" marL="0">
-              <a:buNone/>
-            </a:pPr>
-            <a:r>
-              <a:rPr lang="en-US" sz="1700" b="1" dirty="0">
+              <a:t>Traditional remote attestation: did system components boot into a predictable state?</a:t>
+            </a:r>
+            <a:r>
+              <a:rPr lang="en-US" sz="1700" dirty="0">
                 <a:solidFill>
                   <a:srgbClr val="212121"/>
                 </a:solidFill>
@@ -5055,29 +4895,12 @@
                 <a:ea typeface="Calibri" pitchFamily="34" charset="-122"/>
                 <a:cs typeface="Calibri" pitchFamily="34" charset="-120"/>
               </a:rPr>
-              <a:t>did system components boot into a predictable state?</a:t>
-            </a:r>
-            <a:pPr algn="l" indent="0" marL="0">
-              <a:spcAft>
-                <a:spcPts val="1000"/>
-              </a:spcAft>
-              <a:buNone/>
-            </a:pPr>
-            <a:r>
-              <a:rPr lang="en-US" sz="1700" dirty="0">
-                <a:solidFill>
-                  <a:srgbClr val="212121"/>
-                </a:solidFill>
-                <a:latin typeface="Calibri" pitchFamily="34" charset="0"/>
-                <a:ea typeface="Calibri" pitchFamily="34" charset="-122"/>
-                <a:cs typeface="Calibri" pitchFamily="34" charset="-120"/>
-              </a:rPr>
               <a:t> (boot-time, static runtime)</a:t>
             </a:r>
             <a:endParaRPr lang="en-US" sz="1700" dirty="0"/>
           </a:p>
           <a:p>
-            <a:pPr algn="l" marL="342900" indent="-342900">
+            <a:pPr marL="342900" indent="-342900" algn="l">
               <a:buSzPct val="100000"/>
               <a:buChar char="•"/>
             </a:pPr>
@@ -5092,9 +4915,6 @@
               </a:rPr>
               <a:t>Layered, runtime attestation: </a:t>
             </a:r>
-            <a:pPr algn="l" indent="0" marL="0">
-              <a:buNone/>
-            </a:pPr>
             <a:r>
               <a:rPr lang="en-US" sz="1700" dirty="0">
                 <a:solidFill>
@@ -5106,12 +4926,6 @@
               </a:rPr>
               <a:t>extend boot-time trust via dynamic measurement of system components </a:t>
             </a:r>
-            <a:pPr algn="l" indent="0" marL="0">
-              <a:spcAft>
-                <a:spcPts val="1000"/>
-              </a:spcAft>
-              <a:buNone/>
-            </a:pPr>
             <a:r>
               <a:rPr lang="en-US" sz="1700" b="1" dirty="0">
                 <a:solidFill>
@@ -5126,7 +4940,7 @@
             <a:endParaRPr lang="en-US" sz="1700" dirty="0"/>
           </a:p>
           <a:p>
-            <a:pPr algn="l" marL="342900" indent="-342900">
+            <a:pPr marL="342900" indent="-342900" algn="l">
               <a:buSzPct val="100000"/>
               <a:buChar char="•"/>
             </a:pPr>
@@ -5141,9 +4955,6 @@
               </a:rPr>
               <a:t>Lifecycle attestation: </a:t>
             </a:r>
-            <a:pPr algn="l" indent="0" marL="0">
-              <a:buNone/>
-            </a:pPr>
             <a:r>
               <a:rPr lang="en-US" sz="1700" dirty="0">
                 <a:solidFill>
@@ -5155,9 +4966,6 @@
               </a:rPr>
               <a:t>extends this notion to </a:t>
             </a:r>
-            <a:pPr algn="l" indent="0" marL="0">
-              <a:buNone/>
-            </a:pPr>
             <a:r>
               <a:rPr lang="en-US" sz="1700" b="1" dirty="0">
                 <a:solidFill>
@@ -5169,12 +4977,6 @@
               </a:rPr>
               <a:t>artifacts of the development lifecycle</a:t>
             </a:r>
-            <a:pPr algn="l" indent="0" marL="0">
-              <a:spcAft>
-                <a:spcPts val="1000"/>
-              </a:spcAft>
-              <a:buNone/>
-            </a:pPr>
             <a:r>
               <a:rPr lang="en-US" sz="1700" dirty="0">
                 <a:solidFill>
@@ -5189,7 +4991,7 @@
             <a:endParaRPr lang="en-US" sz="1700" dirty="0"/>
           </a:p>
           <a:p>
-            <a:pPr algn="l" lvl="1" marL="685800" indent="-342900">
+            <a:pPr marL="685800" lvl="1" indent="-342900" algn="l">
               <a:spcAft>
                 <a:spcPts val="1000"/>
               </a:spcAft>
@@ -5210,7 +5012,7 @@
             <a:endParaRPr lang="en-US" sz="1700" dirty="0"/>
           </a:p>
           <a:p>
-            <a:pPr algn="l" lvl="1" marL="685800" indent="-342900">
+            <a:pPr marL="685800" lvl="1" indent="-342900" algn="l">
               <a:buSzPct val="100000"/>
               <a:buChar char="–"/>
             </a:pPr>
@@ -5225,9 +5027,6 @@
               </a:rPr>
               <a:t>…and to lifecycle </a:t>
             </a:r>
-            <a:pPr algn="l" indent="0" marL="0">
-              <a:buNone/>
-            </a:pPr>
             <a:r>
               <a:rPr lang="en-US" sz="1700" b="1" dirty="0">
                 <a:solidFill>
@@ -5239,12 +5038,6 @@
               </a:rPr>
               <a:t>events</a:t>
             </a:r>
-            <a:pPr algn="l" indent="0" marL="0">
-              <a:spcAft>
-                <a:spcPts val="1000"/>
-              </a:spcAft>
-              <a:buNone/>
-            </a:pPr>
             <a:r>
               <a:rPr lang="en-US" sz="1700" dirty="0">
                 <a:solidFill>
@@ -5259,7 +5052,7 @@
             <a:endParaRPr lang="en-US" sz="1700" dirty="0"/>
           </a:p>
           <a:p>
-            <a:pPr algn="l" lvl="2" marL="1028700" indent="-342900">
+            <a:pPr marL="1028700" lvl="2" indent="-342900" algn="l">
               <a:spcAft>
                 <a:spcPts val="200"/>
               </a:spcAft>
@@ -5280,7 +5073,7 @@
             <a:endParaRPr lang="en-US" sz="1700" dirty="0"/>
           </a:p>
           <a:p>
-            <a:pPr algn="l" lvl="2" marL="1028700" indent="-342900">
+            <a:pPr marL="1028700" lvl="2" indent="-342900" algn="l">
               <a:spcAft>
                 <a:spcPts val="200"/>
               </a:spcAft>
@@ -5301,7 +5094,7 @@
             <a:endParaRPr lang="en-US" sz="1700" dirty="0"/>
           </a:p>
           <a:p>
-            <a:pPr algn="l" lvl="2" marL="1028700" indent="-342900">
+            <a:pPr marL="1028700" lvl="2" indent="-342900" algn="l">
               <a:spcAft>
                 <a:spcPts val="200"/>
               </a:spcAft>
@@ -5322,7 +5115,7 @@
             <a:endParaRPr lang="en-US" sz="1700" dirty="0"/>
           </a:p>
           <a:p>
-            <a:pPr algn="l" lvl="2" marL="1028700" indent="-342900">
+            <a:pPr marL="1028700" lvl="2" indent="-342900" algn="l">
               <a:spcAft>
                 <a:spcPts val="200"/>
               </a:spcAft>
@@ -5343,7 +5136,7 @@
             <a:endParaRPr lang="en-US" sz="1700" dirty="0"/>
           </a:p>
           <a:p>
-            <a:pPr algn="l" marL="342900" indent="-342900">
+            <a:pPr marL="342900" indent="-342900" algn="l">
               <a:buSzPct val="100000"/>
               <a:buChar char="•"/>
             </a:pPr>
@@ -5358,9 +5151,6 @@
               </a:rPr>
               <a:t>Motivation: </a:t>
             </a:r>
-            <a:pPr algn="l" indent="0" marL="0">
-              <a:buNone/>
-            </a:pPr>
             <a:r>
               <a:rPr lang="en-US" sz="1700" dirty="0">
                 <a:solidFill>
@@ -5372,9 +5162,6 @@
               </a:rPr>
               <a:t>the </a:t>
             </a:r>
-            <a:pPr algn="l" indent="0" marL="0">
-              <a:buNone/>
-            </a:pPr>
             <a:r>
               <a:rPr lang="en-US" sz="1700" b="1" dirty="0">
                 <a:solidFill>
@@ -5386,12 +5173,6 @@
               </a:rPr>
               <a:t>proliferation of AI-generated software artifacts</a:t>
             </a:r>
-            <a:pPr algn="l" indent="0" marL="0">
-              <a:spcAft>
-                <a:spcPts val="1000"/>
-              </a:spcAft>
-              <a:buNone/>
-            </a:pPr>
             <a:r>
               <a:rPr lang="en-US" sz="1700" dirty="0">
                 <a:solidFill>
@@ -5428,6 +5209,13 @@
           </a:solidFill>
           <a:ln/>
         </p:spPr>
+        <p:txBody>
+          <a:bodyPr/>
+          <a:lstStyle/>
+          <a:p>
+            <a:endParaRPr lang="en-US"/>
+          </a:p>
+        </p:txBody>
       </p:sp>
       <p:sp>
         <p:nvSpPr>
@@ -5450,7 +5238,7 @@
           <a:bodyPr wrap="square" lIns="0" tIns="0" rIns="0" bIns="0" rtlCol="0" anchor="ctr"/>
           <a:lstStyle/>
           <a:p>
-            <a:pPr algn="ctr" indent="0" marL="0">
+            <a:pPr marL="0" indent="0" algn="ctr">
               <a:spcAft>
                 <a:spcPts val="400"/>
               </a:spcAft>
@@ -5470,7 +5258,7 @@
             <a:endParaRPr lang="en-US" sz="2000" dirty="0"/>
           </a:p>
           <a:p>
-            <a:pPr algn="ctr" indent="0" marL="0">
+            <a:pPr marL="0" indent="0" algn="ctr">
               <a:buNone/>
             </a:pPr>
             <a:r>
@@ -5504,6 +5292,7 @@
         <a:solidFill>
           <a:srgbClr val="FFFFFF"/>
         </a:solidFill>
+        <a:effectLst/>
       </p:bgPr>
     </p:bg>
     <p:spTree>
@@ -5541,7 +5330,7 @@
           <a:bodyPr wrap="square" lIns="0" tIns="0" rIns="0" bIns="0" rtlCol="0" anchor="ctr"/>
           <a:lstStyle/>
           <a:p>
-            <a:pPr indent="0" marL="0">
+            <a:pPr marL="0" indent="0">
               <a:buNone/>
             </a:pPr>
             <a:r>
@@ -5580,6 +5369,13 @@
           </a:solidFill>
           <a:ln/>
         </p:spPr>
+        <p:txBody>
+          <a:bodyPr/>
+          <a:lstStyle/>
+          <a:p>
+            <a:endParaRPr lang="en-US"/>
+          </a:p>
+        </p:txBody>
       </p:sp>
       <p:sp>
         <p:nvSpPr>
@@ -5602,7 +5398,7 @@
           <a:bodyPr wrap="square" lIns="254" tIns="254" rIns="254" bIns="254" rtlCol="0" anchor="ctr"/>
           <a:lstStyle/>
           <a:p>
-            <a:pPr algn="ctr" indent="0" marL="0">
+            <a:pPr marL="0" indent="0" algn="ctr">
               <a:buNone/>
             </a:pPr>
             <a:r>
@@ -5641,7 +5437,7 @@
           <a:bodyPr wrap="square" lIns="0" tIns="0" rIns="0" bIns="0" rtlCol="0" anchor="ctr"/>
           <a:lstStyle/>
           <a:p>
-            <a:pPr algn="ctr" indent="0" marL="0">
+            <a:pPr marL="0" indent="0" algn="ctr">
               <a:buNone/>
             </a:pPr>
             <a:r>
@@ -5680,6 +5476,13 @@
           </a:solidFill>
           <a:ln/>
         </p:spPr>
+        <p:txBody>
+          <a:bodyPr/>
+          <a:lstStyle/>
+          <a:p>
+            <a:endParaRPr lang="en-US"/>
+          </a:p>
+        </p:txBody>
       </p:sp>
       <p:sp>
         <p:nvSpPr>
@@ -5702,7 +5505,7 @@
           <a:bodyPr wrap="square" lIns="254" tIns="254" rIns="254" bIns="254" rtlCol="0" anchor="ctr"/>
           <a:lstStyle/>
           <a:p>
-            <a:pPr algn="ctr" indent="0" marL="0">
+            <a:pPr marL="0" indent="0" algn="ctr">
               <a:buNone/>
             </a:pPr>
             <a:r>
@@ -5719,7 +5522,7 @@
             <a:endParaRPr lang="en-US" sz="1350" dirty="0"/>
           </a:p>
           <a:p>
-            <a:pPr algn="ctr" indent="0" marL="0">
+            <a:pPr marL="0" indent="0" algn="ctr">
               <a:buNone/>
             </a:pPr>
             <a:r>
@@ -5758,7 +5561,7 @@
           <a:bodyPr wrap="square" lIns="0" tIns="0" rIns="0" bIns="0" rtlCol="0" anchor="ctr"/>
           <a:lstStyle/>
           <a:p>
-            <a:pPr algn="ctr" indent="0" marL="0">
+            <a:pPr marL="0" indent="0" algn="ctr">
               <a:buNone/>
             </a:pPr>
             <a:r>
@@ -5797,6 +5600,13 @@
           </a:solidFill>
           <a:ln/>
         </p:spPr>
+        <p:txBody>
+          <a:bodyPr/>
+          <a:lstStyle/>
+          <a:p>
+            <a:endParaRPr lang="en-US"/>
+          </a:p>
+        </p:txBody>
       </p:sp>
       <p:sp>
         <p:nvSpPr>
@@ -5819,7 +5629,7 @@
           <a:bodyPr wrap="square" lIns="254" tIns="254" rIns="254" bIns="254" rtlCol="0" anchor="ctr"/>
           <a:lstStyle/>
           <a:p>
-            <a:pPr algn="ctr" indent="0" marL="0">
+            <a:pPr marL="0" indent="0" algn="ctr">
               <a:buNone/>
             </a:pPr>
             <a:r>
@@ -5858,7 +5668,7 @@
           <a:bodyPr wrap="square" lIns="0" tIns="0" rIns="0" bIns="0" rtlCol="0" anchor="ctr"/>
           <a:lstStyle/>
           <a:p>
-            <a:pPr algn="ctr" indent="0" marL="0">
+            <a:pPr marL="0" indent="0" algn="ctr">
               <a:buNone/>
             </a:pPr>
             <a:r>
@@ -5897,6 +5707,13 @@
           </a:solidFill>
           <a:ln/>
         </p:spPr>
+        <p:txBody>
+          <a:bodyPr/>
+          <a:lstStyle/>
+          <a:p>
+            <a:endParaRPr lang="en-US"/>
+          </a:p>
+        </p:txBody>
       </p:sp>
       <p:sp>
         <p:nvSpPr>
@@ -5919,7 +5736,7 @@
           <a:bodyPr wrap="square" lIns="254" tIns="254" rIns="254" bIns="254" rtlCol="0" anchor="ctr"/>
           <a:lstStyle/>
           <a:p>
-            <a:pPr algn="ctr" indent="0" marL="0">
+            <a:pPr marL="0" indent="0" algn="ctr">
               <a:buNone/>
             </a:pPr>
             <a:r>
@@ -5958,7 +5775,7 @@
           <a:bodyPr wrap="square" lIns="0" tIns="0" rIns="0" bIns="0" rtlCol="0" anchor="ctr"/>
           <a:lstStyle/>
           <a:p>
-            <a:pPr algn="ctr" indent="0" marL="0">
+            <a:pPr marL="0" indent="0" algn="ctr">
               <a:buNone/>
             </a:pPr>
             <a:r>
@@ -5997,6 +5814,13 @@
           </a:solidFill>
           <a:ln/>
         </p:spPr>
+        <p:txBody>
+          <a:bodyPr/>
+          <a:lstStyle/>
+          <a:p>
+            <a:endParaRPr lang="en-US"/>
+          </a:p>
+        </p:txBody>
       </p:sp>
       <p:sp>
         <p:nvSpPr>
@@ -6019,7 +5843,7 @@
           <a:bodyPr wrap="square" lIns="254" tIns="254" rIns="254" bIns="254" rtlCol="0" anchor="ctr"/>
           <a:lstStyle/>
           <a:p>
-            <a:pPr algn="ctr" indent="0" marL="0">
+            <a:pPr marL="0" indent="0" algn="ctr">
               <a:buNone/>
             </a:pPr>
             <a:r>
@@ -6058,7 +5882,7 @@
           <a:bodyPr wrap="square" lIns="0" tIns="0" rIns="0" bIns="0" rtlCol="0" anchor="ctr"/>
           <a:lstStyle/>
           <a:p>
-            <a:pPr indent="0" marL="0">
+            <a:pPr marL="0" indent="0">
               <a:buNone/>
             </a:pPr>
             <a:r>
@@ -6092,6 +5916,7 @@
         <a:solidFill>
           <a:srgbClr val="FFFFFF"/>
         </a:solidFill>
+        <a:effectLst/>
       </p:bgPr>
     </p:bg>
     <p:spTree>
@@ -6129,7 +5954,7 @@
           <a:bodyPr wrap="square" lIns="0" tIns="0" rIns="0" bIns="0" rtlCol="0" anchor="ctr"/>
           <a:lstStyle/>
           <a:p>
-            <a:pPr indent="0" marL="0">
+            <a:pPr marL="0" indent="0">
               <a:buNone/>
             </a:pPr>
             <a:r>
@@ -6168,6 +5993,13 @@
           </a:solidFill>
           <a:ln/>
         </p:spPr>
+        <p:txBody>
+          <a:bodyPr/>
+          <a:lstStyle/>
+          <a:p>
+            <a:endParaRPr lang="en-US"/>
+          </a:p>
+        </p:txBody>
       </p:sp>
       <p:sp>
         <p:nvSpPr>
@@ -6190,7 +6022,7 @@
           <a:bodyPr wrap="square" lIns="0" tIns="0" rIns="0" bIns="0" rtlCol="0" anchor="ctr"/>
           <a:lstStyle/>
           <a:p>
-            <a:pPr algn="l" indent="0" marL="0">
+            <a:pPr marL="0" indent="0" algn="l">
               <a:spcAft>
                 <a:spcPts val="200"/>
               </a:spcAft>
@@ -6210,7 +6042,7 @@
             <a:endParaRPr lang="en-US" sz="1700" dirty="0"/>
           </a:p>
           <a:p>
-            <a:pPr algn="l" indent="0" marL="0">
+            <a:pPr marL="0" indent="0" algn="l">
               <a:buNone/>
             </a:pPr>
             <a:r>
@@ -6249,7 +6081,7 @@
           <a:bodyPr wrap="square" lIns="0" tIns="0" rIns="0" bIns="0" rtlCol="0" anchor="ctr"/>
           <a:lstStyle/>
           <a:p>
-            <a:pPr algn="ctr" indent="0" marL="0">
+            <a:pPr marL="0" indent="0" algn="ctr">
               <a:buNone/>
             </a:pPr>
             <a:r>
@@ -6285,6 +6117,13 @@
           </a:solidFill>
           <a:ln/>
         </p:spPr>
+        <p:txBody>
+          <a:bodyPr/>
+          <a:lstStyle/>
+          <a:p>
+            <a:endParaRPr lang="en-US"/>
+          </a:p>
+        </p:txBody>
       </p:sp>
       <p:sp>
         <p:nvSpPr>
@@ -6307,7 +6146,7 @@
           <a:bodyPr wrap="square" lIns="0" tIns="0" rIns="0" bIns="0" rtlCol="0" anchor="ctr"/>
           <a:lstStyle/>
           <a:p>
-            <a:pPr algn="l" indent="0" marL="0">
+            <a:pPr marL="0" indent="0" algn="l">
               <a:spcAft>
                 <a:spcPts val="200"/>
               </a:spcAft>
@@ -6327,7 +6166,7 @@
             <a:endParaRPr lang="en-US" sz="1700" dirty="0"/>
           </a:p>
           <a:p>
-            <a:pPr algn="l" indent="0" marL="0">
+            <a:pPr marL="0" indent="0" algn="l">
               <a:buNone/>
             </a:pPr>
             <a:r>
@@ -6366,7 +6205,7 @@
           <a:bodyPr wrap="square" lIns="0" tIns="0" rIns="0" bIns="0" rtlCol="0" anchor="ctr"/>
           <a:lstStyle/>
           <a:p>
-            <a:pPr algn="ctr" indent="0" marL="0">
+            <a:pPr marL="0" indent="0" algn="ctr">
               <a:buNone/>
             </a:pPr>
             <a:r>
@@ -6402,6 +6241,13 @@
           </a:solidFill>
           <a:ln/>
         </p:spPr>
+        <p:txBody>
+          <a:bodyPr/>
+          <a:lstStyle/>
+          <a:p>
+            <a:endParaRPr lang="en-US"/>
+          </a:p>
+        </p:txBody>
       </p:sp>
       <p:sp>
         <p:nvSpPr>
@@ -6424,7 +6270,7 @@
           <a:bodyPr wrap="square" lIns="0" tIns="0" rIns="0" bIns="0" rtlCol="0" anchor="ctr"/>
           <a:lstStyle/>
           <a:p>
-            <a:pPr algn="l" indent="0" marL="0">
+            <a:pPr marL="0" indent="0" algn="l">
               <a:spcAft>
                 <a:spcPts val="200"/>
               </a:spcAft>
@@ -6444,7 +6290,7 @@
             <a:endParaRPr lang="en-US" sz="1700" dirty="0"/>
           </a:p>
           <a:p>
-            <a:pPr algn="l" indent="0" marL="0">
+            <a:pPr marL="0" indent="0" algn="l">
               <a:buNone/>
             </a:pPr>
             <a:r>
@@ -6483,7 +6329,7 @@
           <a:bodyPr wrap="square" lIns="0" tIns="0" rIns="0" bIns="0" rtlCol="0" anchor="ctr"/>
           <a:lstStyle/>
           <a:p>
-            <a:pPr algn="ctr" indent="0" marL="0">
+            <a:pPr marL="0" indent="0" algn="ctr">
               <a:buNone/>
             </a:pPr>
             <a:r>
@@ -6519,6 +6365,13 @@
           </a:solidFill>
           <a:ln/>
         </p:spPr>
+        <p:txBody>
+          <a:bodyPr/>
+          <a:lstStyle/>
+          <a:p>
+            <a:endParaRPr lang="en-US"/>
+          </a:p>
+        </p:txBody>
       </p:sp>
       <p:sp>
         <p:nvSpPr>
@@ -6541,7 +6394,7 @@
           <a:bodyPr wrap="square" lIns="0" tIns="0" rIns="0" bIns="0" rtlCol="0" anchor="ctr"/>
           <a:lstStyle/>
           <a:p>
-            <a:pPr algn="l" indent="0" marL="0">
+            <a:pPr marL="0" indent="0" algn="l">
               <a:buNone/>
             </a:pPr>
             <a:r>
@@ -6555,9 +6408,6 @@
               </a:rPr>
               <a:t>signed evidence bundles</a:t>
             </a:r>
-            <a:pPr algn="l" indent="0" marL="0">
-              <a:buNone/>
-            </a:pPr>
             <a:r>
               <a:rPr lang="en-US" sz="1500" dirty="0">
                 <a:solidFill>
@@ -6569,9 +6419,6 @@
               </a:rPr>
               <a:t>, appraised against </a:t>
             </a:r>
-            <a:pPr algn="l" indent="0" marL="0">
-              <a:buNone/>
-            </a:pPr>
             <a:r>
               <a:rPr lang="en-US" sz="1500" b="1" dirty="0">
                 <a:solidFill>
@@ -6608,7 +6455,7 @@
           <a:bodyPr wrap="square" lIns="0" tIns="0" rIns="0" bIns="0" rtlCol="0" anchor="ctr"/>
           <a:lstStyle/>
           <a:p>
-            <a:pPr indent="0" marL="0">
+            <a:pPr marL="0" indent="0">
               <a:buNone/>
             </a:pPr>
             <a:r>
@@ -6652,6 +6499,13 @@
             <a:prstDash val="solid"/>
           </a:ln>
         </p:spPr>
+        <p:txBody>
+          <a:bodyPr/>
+          <a:lstStyle/>
+          <a:p>
+            <a:endParaRPr lang="en-US"/>
+          </a:p>
+        </p:txBody>
       </p:sp>
       <p:sp>
         <p:nvSpPr>
@@ -6674,7 +6528,7 @@
           <a:bodyPr wrap="square" lIns="0" tIns="0" rIns="0" bIns="0" rtlCol="0" anchor="ctr"/>
           <a:lstStyle/>
           <a:p>
-            <a:pPr algn="l" indent="0" marL="0">
+            <a:pPr marL="0" indent="0" algn="l">
               <a:buNone/>
             </a:pPr>
             <a:r>
@@ -6691,7 +6545,7 @@
             <a:endParaRPr lang="en-US" sz="1300" dirty="0"/>
           </a:p>
           <a:p>
-            <a:pPr algn="l" indent="0" marL="0">
+            <a:pPr marL="0" indent="0" algn="l">
               <a:buNone/>
             </a:pPr>
             <a:r>
@@ -6708,7 +6562,7 @@
             <a:endParaRPr lang="en-US" sz="1300" dirty="0"/>
           </a:p>
           <a:p>
-            <a:pPr algn="l" indent="0" marL="0">
+            <a:pPr marL="0" indent="0" algn="l">
               <a:buNone/>
             </a:pPr>
             <a:r>
@@ -6725,7 +6579,7 @@
             <a:endParaRPr lang="en-US" sz="1300" dirty="0"/>
           </a:p>
           <a:p>
-            <a:pPr algn="l" indent="0" marL="0">
+            <a:pPr marL="0" indent="0" algn="l">
               <a:buNone/>
             </a:pPr>
             <a:r>
@@ -6742,7 +6596,7 @@
             <a:endParaRPr lang="en-US" sz="1300" dirty="0"/>
           </a:p>
           <a:p>
-            <a:pPr algn="l" indent="0" marL="0">
+            <a:pPr marL="0" indent="0" algn="l">
               <a:buNone/>
             </a:pPr>
             <a:r>
@@ -6759,7 +6613,7 @@
             <a:endParaRPr lang="en-US" sz="1300" dirty="0"/>
           </a:p>
           <a:p>
-            <a:pPr algn="l" indent="0" marL="0">
+            <a:pPr marL="0" indent="0" algn="l">
               <a:buNone/>
             </a:pPr>
             <a:r>
@@ -6798,7 +6652,7 @@
           <a:bodyPr wrap="square" lIns="0" tIns="0" rIns="0" bIns="0" rtlCol="0" anchor="ctr"/>
           <a:lstStyle/>
           <a:p>
-            <a:pPr indent="0" marL="0">
+            <a:pPr marL="0" indent="0">
               <a:buNone/>
             </a:pPr>
             <a:r>
@@ -6815,7 +6669,7 @@
             <a:endParaRPr lang="en-US" sz="2000" dirty="0"/>
           </a:p>
           <a:p>
-            <a:pPr indent="0" marL="0">
+            <a:pPr marL="0" indent="0">
               <a:buNone/>
             </a:pPr>
             <a:r>
@@ -6832,7 +6686,7 @@
             <a:endParaRPr lang="en-US" sz="2000" dirty="0"/>
           </a:p>
           <a:p>
-            <a:pPr indent="0" marL="0">
+            <a:pPr marL="0" indent="0">
               <a:buNone/>
             </a:pPr>
             <a:r>
@@ -6866,6 +6720,7 @@
         <a:solidFill>
           <a:srgbClr val="FFFFFF"/>
         </a:solidFill>
+        <a:effectLst/>
       </p:bgPr>
     </p:bg>
     <p:spTree>
@@ -6903,7 +6758,7 @@
           <a:bodyPr wrap="square" lIns="0" tIns="0" rIns="0" bIns="0" rtlCol="0" anchor="ctr"/>
           <a:lstStyle/>
           <a:p>
-            <a:pPr indent="0" marL="0">
+            <a:pPr marL="0" indent="0">
               <a:buNone/>
             </a:pPr>
             <a:r>
@@ -6947,6 +6802,13 @@
             <a:prstDash val="dash"/>
           </a:ln>
         </p:spPr>
+        <p:txBody>
+          <a:bodyPr/>
+          <a:lstStyle/>
+          <a:p>
+            <a:endParaRPr lang="en-US"/>
+          </a:p>
+        </p:txBody>
       </p:sp>
       <p:sp>
         <p:nvSpPr>
@@ -6969,7 +6831,7 @@
           <a:bodyPr wrap="square" lIns="254" tIns="254" rIns="254" bIns="254" rtlCol="0" anchor="ctr"/>
           <a:lstStyle/>
           <a:p>
-            <a:pPr algn="ctr" indent="0" marL="0">
+            <a:pPr marL="0" indent="0" algn="ctr">
               <a:buNone/>
             </a:pPr>
             <a:r>
@@ -6986,7 +6848,7 @@
             <a:endParaRPr lang="en-US" sz="1150" dirty="0"/>
           </a:p>
           <a:p>
-            <a:pPr algn="ctr" indent="0" marL="0">
+            <a:pPr marL="0" indent="0" algn="ctr">
               <a:buNone/>
             </a:pPr>
             <a:r>
@@ -7027,6 +6889,13 @@
             <a:tailEnd type="triangle"/>
           </a:ln>
         </p:spPr>
+        <p:txBody>
+          <a:bodyPr/>
+          <a:lstStyle/>
+          <a:p>
+            <a:endParaRPr lang="en-US"/>
+          </a:p>
+        </p:txBody>
       </p:sp>
       <p:sp>
         <p:nvSpPr>
@@ -7049,7 +6918,7 @@
           <a:bodyPr wrap="square" lIns="0" tIns="0" rIns="0" bIns="0" rtlCol="0" anchor="ctr"/>
           <a:lstStyle/>
           <a:p>
-            <a:pPr algn="l" indent="0" marL="0">
+            <a:pPr marL="0" indent="0" algn="l">
               <a:buNone/>
             </a:pPr>
             <a:r>
@@ -7088,6 +6957,13 @@
           </a:solidFill>
           <a:ln/>
         </p:spPr>
+        <p:txBody>
+          <a:bodyPr/>
+          <a:lstStyle/>
+          <a:p>
+            <a:endParaRPr lang="en-US"/>
+          </a:p>
+        </p:txBody>
       </p:sp>
       <p:sp>
         <p:nvSpPr>
@@ -7110,7 +6986,7 @@
           <a:bodyPr wrap="square" lIns="381" tIns="381" rIns="381" bIns="381" rtlCol="0" anchor="ctr"/>
           <a:lstStyle/>
           <a:p>
-            <a:pPr algn="ctr" indent="0" marL="0">
+            <a:pPr marL="0" indent="0" algn="ctr">
               <a:buNone/>
             </a:pPr>
             <a:r>
@@ -7151,6 +7027,13 @@
             <a:tailEnd type="triangle"/>
           </a:ln>
         </p:spPr>
+        <p:txBody>
+          <a:bodyPr/>
+          <a:lstStyle/>
+          <a:p>
+            <a:endParaRPr lang="en-US"/>
+          </a:p>
+        </p:txBody>
       </p:sp>
       <p:sp>
         <p:nvSpPr>
@@ -7173,7 +7056,7 @@
           <a:bodyPr wrap="square" lIns="0" tIns="0" rIns="0" bIns="0" rtlCol="0" anchor="ctr"/>
           <a:lstStyle/>
           <a:p>
-            <a:pPr algn="l" indent="0" marL="0">
+            <a:pPr marL="0" indent="0" algn="l">
               <a:buNone/>
             </a:pPr>
             <a:r>
@@ -7212,6 +7095,13 @@
           </a:solidFill>
           <a:ln/>
         </p:spPr>
+        <p:txBody>
+          <a:bodyPr/>
+          <a:lstStyle/>
+          <a:p>
+            <a:endParaRPr lang="en-US"/>
+          </a:p>
+        </p:txBody>
       </p:sp>
       <p:sp>
         <p:nvSpPr>
@@ -7234,7 +7124,7 @@
           <a:bodyPr wrap="square" lIns="381" tIns="381" rIns="381" bIns="381" rtlCol="0" anchor="ctr"/>
           <a:lstStyle/>
           <a:p>
-            <a:pPr algn="ctr" indent="0" marL="0">
+            <a:pPr marL="0" indent="0" algn="ctr">
               <a:buNone/>
             </a:pPr>
             <a:r>
@@ -7273,6 +7163,13 @@
           </a:solidFill>
           <a:ln/>
         </p:spPr>
+        <p:txBody>
+          <a:bodyPr/>
+          <a:lstStyle/>
+          <a:p>
+            <a:endParaRPr lang="en-US"/>
+          </a:p>
+        </p:txBody>
       </p:sp>
       <p:sp>
         <p:nvSpPr>
@@ -7295,7 +7192,7 @@
           <a:bodyPr wrap="square" lIns="381" tIns="381" rIns="381" bIns="381" rtlCol="0" anchor="ctr"/>
           <a:lstStyle/>
           <a:p>
-            <a:pPr algn="ctr" indent="0" marL="0">
+            <a:pPr marL="0" indent="0" algn="ctr">
               <a:buNone/>
             </a:pPr>
             <a:r>
@@ -7334,6 +7231,13 @@
           </a:solidFill>
           <a:ln/>
         </p:spPr>
+        <p:txBody>
+          <a:bodyPr/>
+          <a:lstStyle/>
+          <a:p>
+            <a:endParaRPr lang="en-US"/>
+          </a:p>
+        </p:txBody>
       </p:sp>
       <p:sp>
         <p:nvSpPr>
@@ -7356,7 +7260,7 @@
           <a:bodyPr wrap="square" lIns="381" tIns="381" rIns="381" bIns="381" rtlCol="0" anchor="ctr"/>
           <a:lstStyle/>
           <a:p>
-            <a:pPr algn="ctr" indent="0" marL="0">
+            <a:pPr marL="0" indent="0" algn="ctr">
               <a:buNone/>
             </a:pPr>
             <a:r>
@@ -7397,6 +7301,13 @@
             <a:tailEnd type="triangle"/>
           </a:ln>
         </p:spPr>
+        <p:txBody>
+          <a:bodyPr/>
+          <a:lstStyle/>
+          <a:p>
+            <a:endParaRPr lang="en-US"/>
+          </a:p>
+        </p:txBody>
       </p:sp>
       <p:sp>
         <p:nvSpPr>
@@ -7420,6 +7331,13 @@
             <a:prstDash val="solid"/>
           </a:ln>
         </p:spPr>
+        <p:txBody>
+          <a:bodyPr/>
+          <a:lstStyle/>
+          <a:p>
+            <a:endParaRPr lang="en-US"/>
+          </a:p>
+        </p:txBody>
       </p:sp>
       <p:sp>
         <p:nvSpPr>
@@ -7443,6 +7361,13 @@
             <a:prstDash val="solid"/>
           </a:ln>
         </p:spPr>
+        <p:txBody>
+          <a:bodyPr/>
+          <a:lstStyle/>
+          <a:p>
+            <a:endParaRPr lang="en-US"/>
+          </a:p>
+        </p:txBody>
       </p:sp>
       <p:sp>
         <p:nvSpPr>
@@ -7467,6 +7392,13 @@
             <a:tailEnd type="triangle"/>
           </a:ln>
         </p:spPr>
+        <p:txBody>
+          <a:bodyPr/>
+          <a:lstStyle/>
+          <a:p>
+            <a:endParaRPr lang="en-US"/>
+          </a:p>
+        </p:txBody>
       </p:sp>
       <p:sp>
         <p:nvSpPr>
@@ -7489,7 +7421,7 @@
           <a:bodyPr wrap="square" lIns="0" tIns="0" rIns="0" bIns="0" rtlCol="0" anchor="ctr"/>
           <a:lstStyle/>
           <a:p>
-            <a:pPr algn="r" indent="0" marL="0">
+            <a:pPr marL="0" indent="0" algn="r">
               <a:buNone/>
             </a:pPr>
             <a:r>
@@ -7506,7 +7438,7 @@
             <a:endParaRPr lang="en-US" sz="1000" dirty="0"/>
           </a:p>
           <a:p>
-            <a:pPr algn="r" indent="0" marL="0">
+            <a:pPr marL="0" indent="0" algn="r">
               <a:buNone/>
             </a:pPr>
             <a:r>
@@ -7546,6 +7478,13 @@
             <a:prstDash val="solid"/>
           </a:ln>
         </p:spPr>
+        <p:txBody>
+          <a:bodyPr/>
+          <a:lstStyle/>
+          <a:p>
+            <a:endParaRPr lang="en-US"/>
+          </a:p>
+        </p:txBody>
       </p:sp>
       <p:sp>
         <p:nvSpPr>
@@ -7570,6 +7509,13 @@
             <a:tailEnd type="triangle"/>
           </a:ln>
         </p:spPr>
+        <p:txBody>
+          <a:bodyPr/>
+          <a:lstStyle/>
+          <a:p>
+            <a:endParaRPr lang="en-US"/>
+          </a:p>
+        </p:txBody>
       </p:sp>
       <p:sp>
         <p:nvSpPr>
@@ -7592,7 +7538,7 @@
           <a:bodyPr wrap="square" lIns="0" tIns="0" rIns="0" bIns="0" rtlCol="0" anchor="ctr"/>
           <a:lstStyle/>
           <a:p>
-            <a:pPr algn="ctr" indent="0" marL="0">
+            <a:pPr marL="0" indent="0" algn="ctr">
               <a:buNone/>
             </a:pPr>
             <a:r>
@@ -7631,6 +7577,13 @@
           </a:solidFill>
           <a:ln/>
         </p:spPr>
+        <p:txBody>
+          <a:bodyPr/>
+          <a:lstStyle/>
+          <a:p>
+            <a:endParaRPr lang="en-US"/>
+          </a:p>
+        </p:txBody>
       </p:sp>
       <p:sp>
         <p:nvSpPr>
@@ -7653,7 +7606,7 @@
           <a:bodyPr wrap="square" lIns="381" tIns="381" rIns="381" bIns="381" rtlCol="0" anchor="ctr"/>
           <a:lstStyle/>
           <a:p>
-            <a:pPr algn="ctr" indent="0" marL="0">
+            <a:pPr marL="0" indent="0" algn="ctr">
               <a:buNone/>
             </a:pPr>
             <a:r>
@@ -7670,7 +7623,7 @@
             <a:endParaRPr lang="en-US" sz="1200" dirty="0"/>
           </a:p>
           <a:p>
-            <a:pPr algn="ctr" indent="0" marL="0">
+            <a:pPr marL="0" indent="0" algn="ctr">
               <a:buNone/>
             </a:pPr>
             <a:r>
@@ -7711,6 +7664,13 @@
             <a:tailEnd type="triangle"/>
           </a:ln>
         </p:spPr>
+        <p:txBody>
+          <a:bodyPr/>
+          <a:lstStyle/>
+          <a:p>
+            <a:endParaRPr lang="en-US"/>
+          </a:p>
+        </p:txBody>
       </p:sp>
       <p:sp>
         <p:nvSpPr>
@@ -7733,7 +7693,7 @@
           <a:bodyPr wrap="square" lIns="0" tIns="0" rIns="0" bIns="0" rtlCol="0" anchor="ctr"/>
           <a:lstStyle/>
           <a:p>
-            <a:pPr algn="ctr" indent="0" marL="0">
+            <a:pPr marL="0" indent="0" algn="ctr">
               <a:buNone/>
             </a:pPr>
             <a:r>
@@ -7772,6 +7732,13 @@
           </a:solidFill>
           <a:ln/>
         </p:spPr>
+        <p:txBody>
+          <a:bodyPr/>
+          <a:lstStyle/>
+          <a:p>
+            <a:endParaRPr lang="en-US"/>
+          </a:p>
+        </p:txBody>
       </p:sp>
       <p:sp>
         <p:nvSpPr>
@@ -7794,7 +7761,7 @@
           <a:bodyPr wrap="square" lIns="381" tIns="381" rIns="381" bIns="381" rtlCol="0" anchor="ctr"/>
           <a:lstStyle/>
           <a:p>
-            <a:pPr algn="ctr" indent="0" marL="0">
+            <a:pPr marL="0" indent="0" algn="ctr">
               <a:buNone/>
             </a:pPr>
             <a:r>
@@ -7835,6 +7802,13 @@
             <a:tailEnd type="triangle"/>
           </a:ln>
         </p:spPr>
+        <p:txBody>
+          <a:bodyPr/>
+          <a:lstStyle/>
+          <a:p>
+            <a:endParaRPr lang="en-US"/>
+          </a:p>
+        </p:txBody>
       </p:sp>
       <p:sp>
         <p:nvSpPr>
@@ -7857,6 +7831,13 @@
           </a:solidFill>
           <a:ln/>
         </p:spPr>
+        <p:txBody>
+          <a:bodyPr/>
+          <a:lstStyle/>
+          <a:p>
+            <a:endParaRPr lang="en-US"/>
+          </a:p>
+        </p:txBody>
       </p:sp>
       <p:sp>
         <p:nvSpPr>
@@ -7879,7 +7860,7 @@
           <a:bodyPr wrap="square" lIns="381" tIns="381" rIns="381" bIns="381" rtlCol="0" anchor="ctr"/>
           <a:lstStyle/>
           <a:p>
-            <a:pPr algn="ctr" indent="0" marL="0">
+            <a:pPr marL="0" indent="0" algn="ctr">
               <a:buNone/>
             </a:pPr>
             <a:r>
@@ -7920,6 +7901,13 @@
             <a:tailEnd type="triangle"/>
           </a:ln>
         </p:spPr>
+        <p:txBody>
+          <a:bodyPr/>
+          <a:lstStyle/>
+          <a:p>
+            <a:endParaRPr lang="en-US"/>
+          </a:p>
+        </p:txBody>
       </p:sp>
       <p:sp>
         <p:nvSpPr>
@@ -7942,6 +7930,13 @@
           </a:solidFill>
           <a:ln/>
         </p:spPr>
+        <p:txBody>
+          <a:bodyPr/>
+          <a:lstStyle/>
+          <a:p>
+            <a:endParaRPr lang="en-US"/>
+          </a:p>
+        </p:txBody>
       </p:sp>
       <p:sp>
         <p:nvSpPr>
@@ -7964,7 +7959,7 @@
           <a:bodyPr wrap="square" lIns="381" tIns="381" rIns="381" bIns="381" rtlCol="0" anchor="ctr"/>
           <a:lstStyle/>
           <a:p>
-            <a:pPr algn="ctr" indent="0" marL="0">
+            <a:pPr marL="0" indent="0" algn="ctr">
               <a:buNone/>
             </a:pPr>
             <a:r>
@@ -8003,7 +7998,7 @@
           <a:bodyPr wrap="square" lIns="0" tIns="0" rIns="0" bIns="0" rtlCol="0" anchor="ctr"/>
           <a:lstStyle/>
           <a:p>
-            <a:pPr algn="ctr" indent="0" marL="0">
+            <a:pPr marL="0" indent="0" algn="ctr">
               <a:buNone/>
             </a:pPr>
             <a:r>
@@ -8043,6 +8038,13 @@
             <a:prstDash val="solid"/>
           </a:ln>
         </p:spPr>
+        <p:txBody>
+          <a:bodyPr/>
+          <a:lstStyle/>
+          <a:p>
+            <a:endParaRPr lang="en-US"/>
+          </a:p>
+        </p:txBody>
       </p:sp>
       <p:sp>
         <p:nvSpPr>
@@ -8066,6 +8068,13 @@
             <a:prstDash val="solid"/>
           </a:ln>
         </p:spPr>
+        <p:txBody>
+          <a:bodyPr/>
+          <a:lstStyle/>
+          <a:p>
+            <a:endParaRPr lang="en-US"/>
+          </a:p>
+        </p:txBody>
       </p:sp>
       <p:sp>
         <p:nvSpPr>
@@ -8089,6 +8098,13 @@
             <a:prstDash val="solid"/>
           </a:ln>
         </p:spPr>
+        <p:txBody>
+          <a:bodyPr/>
+          <a:lstStyle/>
+          <a:p>
+            <a:endParaRPr lang="en-US"/>
+          </a:p>
+        </p:txBody>
       </p:sp>
       <p:sp>
         <p:nvSpPr>
@@ -8112,6 +8128,13 @@
             <a:prstDash val="solid"/>
           </a:ln>
         </p:spPr>
+        <p:txBody>
+          <a:bodyPr/>
+          <a:lstStyle/>
+          <a:p>
+            <a:endParaRPr lang="en-US"/>
+          </a:p>
+        </p:txBody>
       </p:sp>
       <p:sp>
         <p:nvSpPr>
@@ -8136,6 +8159,13 @@
             <a:tailEnd type="triangle"/>
           </a:ln>
         </p:spPr>
+        <p:txBody>
+          <a:bodyPr/>
+          <a:lstStyle/>
+          <a:p>
+            <a:endParaRPr lang="en-US"/>
+          </a:p>
+        </p:txBody>
       </p:sp>
       <p:sp>
         <p:nvSpPr>
@@ -8158,7 +8188,7 @@
           <a:bodyPr wrap="square" lIns="0" tIns="0" rIns="0" bIns="0" rtlCol="0" anchor="ctr"/>
           <a:lstStyle/>
           <a:p>
-            <a:pPr algn="ctr" indent="0" marL="0">
+            <a:pPr marL="0" indent="0" algn="ctr">
               <a:buNone/>
             </a:pPr>
             <a:r>
@@ -8198,6 +8228,13 @@
             <a:prstDash val="solid"/>
           </a:ln>
         </p:spPr>
+        <p:txBody>
+          <a:bodyPr/>
+          <a:lstStyle/>
+          <a:p>
+            <a:endParaRPr lang="en-US"/>
+          </a:p>
+        </p:txBody>
       </p:sp>
       <p:sp>
         <p:nvSpPr>
@@ -8221,6 +8258,13 @@
             <a:prstDash val="solid"/>
           </a:ln>
         </p:spPr>
+        <p:txBody>
+          <a:bodyPr/>
+          <a:lstStyle/>
+          <a:p>
+            <a:endParaRPr lang="en-US"/>
+          </a:p>
+        </p:txBody>
       </p:sp>
       <p:sp>
         <p:nvSpPr>
@@ -8245,6 +8289,13 @@
             <a:tailEnd type="triangle"/>
           </a:ln>
         </p:spPr>
+        <p:txBody>
+          <a:bodyPr/>
+          <a:lstStyle/>
+          <a:p>
+            <a:endParaRPr lang="en-US"/>
+          </a:p>
+        </p:txBody>
       </p:sp>
       <p:sp>
         <p:nvSpPr>
@@ -8267,7 +8318,7 @@
           <a:bodyPr wrap="square" lIns="0" tIns="0" rIns="0" bIns="0" rtlCol="0" anchor="ctr"/>
           <a:lstStyle/>
           <a:p>
-            <a:pPr algn="ctr" indent="0" marL="0">
+            <a:pPr marL="0" indent="0" algn="ctr">
               <a:buNone/>
             </a:pPr>
             <a:r>
@@ -8307,6 +8358,13 @@
             <a:prstDash val="solid"/>
           </a:ln>
         </p:spPr>
+        <p:txBody>
+          <a:bodyPr/>
+          <a:lstStyle/>
+          <a:p>
+            <a:endParaRPr lang="en-US"/>
+          </a:p>
+        </p:txBody>
       </p:sp>
       <p:sp>
         <p:nvSpPr>
@@ -8330,6 +8388,13 @@
             <a:prstDash val="solid"/>
           </a:ln>
         </p:spPr>
+        <p:txBody>
+          <a:bodyPr/>
+          <a:lstStyle/>
+          <a:p>
+            <a:endParaRPr lang="en-US"/>
+          </a:p>
+        </p:txBody>
       </p:sp>
       <p:sp>
         <p:nvSpPr>
@@ -8354,6 +8419,13 @@
             <a:tailEnd type="triangle"/>
           </a:ln>
         </p:spPr>
+        <p:txBody>
+          <a:bodyPr/>
+          <a:lstStyle/>
+          <a:p>
+            <a:endParaRPr lang="en-US"/>
+          </a:p>
+        </p:txBody>
       </p:sp>
       <p:sp>
         <p:nvSpPr>
@@ -8376,7 +8448,7 @@
           <a:bodyPr wrap="square" lIns="0" tIns="0" rIns="0" bIns="0" rtlCol="0" anchor="ctr"/>
           <a:lstStyle/>
           <a:p>
-            <a:pPr algn="ctr" indent="0" marL="0">
+            <a:pPr marL="0" indent="0" algn="ctr">
               <a:buNone/>
             </a:pPr>
             <a:r>
@@ -8415,6 +8487,13 @@
           </a:solidFill>
           <a:ln/>
         </p:spPr>
+        <p:txBody>
+          <a:bodyPr/>
+          <a:lstStyle/>
+          <a:p>
+            <a:endParaRPr lang="en-US"/>
+          </a:p>
+        </p:txBody>
       </p:sp>
       <p:sp>
         <p:nvSpPr>
@@ -8437,7 +8516,7 @@
           <a:bodyPr wrap="square" lIns="0" tIns="0" rIns="0" bIns="0" rtlCol="0" anchor="ctr"/>
           <a:lstStyle/>
           <a:p>
-            <a:pPr algn="l" indent="0" marL="0">
+            <a:pPr marL="0" indent="0" algn="l">
               <a:buNone/>
             </a:pPr>
             <a:r>
@@ -8451,9 +8530,6 @@
               </a:rPr>
               <a:t>The repair ladder: </a:t>
             </a:r>
-            <a:pPr algn="l" indent="0" marL="0">
-              <a:buNone/>
-            </a:pPr>
             <a:r>
               <a:rPr lang="en-US" sz="1300" dirty="0">
                 <a:solidFill>
@@ -8465,9 +8541,6 @@
               </a:rPr>
               <a:t>a rung's exhaustion is a </a:t>
             </a:r>
-            <a:pPr algn="l" indent="0" marL="0">
-              <a:buNone/>
-            </a:pPr>
             <a:r>
               <a:rPr lang="en-US" sz="1300" b="1" i="1" dirty="0">
                 <a:solidFill>
@@ -8479,9 +8552,6 @@
               </a:rPr>
               <a:t>local diagnosis </a:t>
             </a:r>
-            <a:pPr algn="l" indent="0" marL="0">
-              <a:buNone/>
-            </a:pPr>
             <a:r>
               <a:rPr lang="en-US" sz="1300" dirty="0">
                 <a:solidFill>
@@ -8496,7 +8566,7 @@
             <a:endParaRPr lang="en-US" sz="1300" dirty="0"/>
           </a:p>
           <a:p>
-            <a:pPr algn="l" indent="0" marL="0">
+            <a:pPr marL="0" indent="0" algn="l">
               <a:buNone/>
             </a:pPr>
             <a:r>
@@ -8510,9 +8580,6 @@
               </a:rPr>
               <a:t>judged only by </a:t>
             </a:r>
-            <a:pPr algn="l" indent="0" marL="0">
-              <a:buNone/>
-            </a:pPr>
             <a:r>
               <a:rPr lang="en-US" sz="1300" b="1" i="1" dirty="0">
                 <a:solidFill>
@@ -8524,9 +8591,6 @@
               </a:rPr>
               <a:t>fresh re-measurement</a:t>
             </a:r>
-            <a:pPr algn="l" indent="0" marL="0">
-              <a:buNone/>
-            </a:pPr>
             <a:r>
               <a:rPr lang="en-US" sz="1300" dirty="0">
                 <a:solidFill>
@@ -8568,6 +8632,13 @@
             <a:prstDash val="solid"/>
           </a:ln>
         </p:spPr>
+        <p:txBody>
+          <a:bodyPr/>
+          <a:lstStyle/>
+          <a:p>
+            <a:endParaRPr lang="en-US"/>
+          </a:p>
+        </p:txBody>
       </p:sp>
       <p:sp>
         <p:nvSpPr>
@@ -8590,7 +8661,7 @@
           <a:bodyPr wrap="square" lIns="0" tIns="0" rIns="0" bIns="0" rtlCol="0" anchor="ctr"/>
           <a:lstStyle/>
           <a:p>
-            <a:pPr algn="l" indent="0" marL="0">
+            <a:pPr marL="0" indent="0" algn="l">
               <a:buNone/>
             </a:pPr>
             <a:r>
@@ -8607,7 +8678,7 @@
             <a:endParaRPr lang="en-US" sz="1100" dirty="0"/>
           </a:p>
           <a:p>
-            <a:pPr algn="l" indent="0" marL="0">
+            <a:pPr marL="0" indent="0" algn="l">
               <a:buNone/>
             </a:pPr>
             <a:r>
@@ -8641,6 +8712,7 @@
         <a:solidFill>
           <a:srgbClr val="FFFFFF"/>
         </a:solidFill>
+        <a:effectLst/>
       </p:bgPr>
     </p:bg>
     <p:spTree>
@@ -8678,7 +8750,7 @@
           <a:bodyPr wrap="square" lIns="0" tIns="0" rIns="0" bIns="0" rtlCol="0" anchor="ctr"/>
           <a:lstStyle/>
           <a:p>
-            <a:pPr indent="0" marL="0">
+            <a:pPr marL="0" indent="0">
               <a:buNone/>
             </a:pPr>
             <a:r>
@@ -8717,7 +8789,7 @@
           <a:bodyPr wrap="square" lIns="0" tIns="0" rIns="0" bIns="0" rtlCol="0" anchor="t"/>
           <a:lstStyle/>
           <a:p>
-            <a:pPr algn="l" marL="342900" indent="-342900">
+            <a:pPr marL="342900" indent="-342900" algn="l">
               <a:buSzPct val="100000"/>
               <a:buChar char="•"/>
             </a:pPr>
@@ -8732,12 +8804,6 @@
               </a:rPr>
               <a:t>Blackboard</a:t>
             </a:r>
-            <a:pPr algn="l" indent="0" marL="0">
-              <a:spcAft>
-                <a:spcPts val="900"/>
-              </a:spcAft>
-              <a:buNone/>
-            </a:pPr>
             <a:r>
               <a:rPr lang="en-US" sz="1600" dirty="0">
                 <a:solidFill>
@@ -8752,7 +8818,7 @@
             <a:endParaRPr lang="en-US" sz="1600" dirty="0"/>
           </a:p>
           <a:p>
-            <a:pPr algn="l" marL="342900" indent="-342900">
+            <a:pPr marL="342900" indent="-342900" algn="l">
               <a:buSzPct val="100000"/>
               <a:buChar char="•"/>
             </a:pPr>
@@ -8767,12 +8833,6 @@
               </a:rPr>
               <a:t>Blackboard Entry (Key)</a:t>
             </a:r>
-            <a:pPr algn="l" indent="0" marL="0">
-              <a:spcAft>
-                <a:spcPts val="900"/>
-              </a:spcAft>
-              <a:buNone/>
-            </a:pPr>
             <a:r>
               <a:rPr lang="en-US" sz="1600" dirty="0">
                 <a:solidFill>
@@ -8787,7 +8847,7 @@
             <a:endParaRPr lang="en-US" sz="1600" dirty="0"/>
           </a:p>
           <a:p>
-            <a:pPr algn="l" marL="342900" indent="-342900">
+            <a:pPr marL="342900" indent="-342900" algn="l">
               <a:buSzPct val="100000"/>
               <a:buChar char="•"/>
             </a:pPr>
@@ -8802,12 +8862,6 @@
               </a:rPr>
               <a:t>Episode</a:t>
             </a:r>
-            <a:pPr algn="l" indent="0" marL="0">
-              <a:spcAft>
-                <a:spcPts val="900"/>
-              </a:spcAft>
-              <a:buNone/>
-            </a:pPr>
             <a:r>
               <a:rPr lang="en-US" sz="1600" dirty="0">
                 <a:solidFill>
@@ -8822,7 +8876,7 @@
             <a:endParaRPr lang="en-US" sz="1600" dirty="0"/>
           </a:p>
           <a:p>
-            <a:pPr algn="l" marL="342900" indent="-342900">
+            <a:pPr marL="342900" indent="-342900" algn="l">
               <a:buSzPct val="100000"/>
               <a:buChar char="•"/>
             </a:pPr>
@@ -8837,12 +8891,6 @@
               </a:rPr>
               <a:t>Partition</a:t>
             </a:r>
-            <a:pPr algn="l" indent="0" marL="0">
-              <a:spcAft>
-                <a:spcPts val="900"/>
-              </a:spcAft>
-              <a:buNone/>
-            </a:pPr>
             <a:r>
               <a:rPr lang="en-US" sz="1600" dirty="0">
                 <a:solidFill>
@@ -8857,7 +8905,7 @@
             <a:endParaRPr lang="en-US" sz="1600" dirty="0"/>
           </a:p>
           <a:p>
-            <a:pPr algn="l" marL="342900" indent="-342900">
+            <a:pPr marL="342900" indent="-342900" algn="l">
               <a:buSzPct val="100000"/>
               <a:buChar char="•"/>
             </a:pPr>
@@ -8872,12 +8920,6 @@
               </a:rPr>
               <a:t>Controller</a:t>
             </a:r>
-            <a:pPr algn="l" indent="0" marL="0">
-              <a:spcAft>
-                <a:spcPts val="900"/>
-              </a:spcAft>
-              <a:buNone/>
-            </a:pPr>
             <a:r>
               <a:rPr lang="en-US" sz="1600" dirty="0">
                 <a:solidFill>
@@ -8892,7 +8934,7 @@
             <a:endParaRPr lang="en-US" sz="1600" dirty="0"/>
           </a:p>
           <a:p>
-            <a:pPr algn="l" marL="342900" indent="-342900">
+            <a:pPr marL="342900" indent="-342900" algn="l">
               <a:buSzPct val="100000"/>
               <a:buChar char="•"/>
             </a:pPr>
@@ -8907,12 +8949,6 @@
               </a:rPr>
               <a:t>Knowledge source (KS)</a:t>
             </a:r>
-            <a:pPr algn="l" indent="0" marL="0">
-              <a:spcAft>
-                <a:spcPts val="900"/>
-              </a:spcAft>
-              <a:buNone/>
-            </a:pPr>
             <a:r>
               <a:rPr lang="en-US" sz="1600" dirty="0">
                 <a:solidFill>
@@ -8927,7 +8963,7 @@
             <a:endParaRPr lang="en-US" sz="1600" dirty="0"/>
           </a:p>
           <a:p>
-            <a:pPr algn="l" marL="342900" indent="-342900">
+            <a:pPr marL="342900" indent="-342900" algn="l">
               <a:buSzPct val="100000"/>
               <a:buChar char="•"/>
             </a:pPr>
@@ -8942,12 +8978,6 @@
               </a:rPr>
               <a:t>Route</a:t>
             </a:r>
-            <a:pPr algn="l" indent="0" marL="0">
-              <a:spcAft>
-                <a:spcPts val="900"/>
-              </a:spcAft>
-              <a:buNone/>
-            </a:pPr>
             <a:r>
               <a:rPr lang="en-US" sz="1600" dirty="0">
                 <a:solidFill>
@@ -8962,7 +8992,7 @@
             <a:endParaRPr lang="en-US" sz="1600" dirty="0"/>
           </a:p>
           <a:p>
-            <a:pPr algn="l" marL="342900" indent="-342900">
+            <a:pPr marL="342900" indent="-342900" algn="l">
               <a:buSzPct val="100000"/>
               <a:buChar char="•"/>
             </a:pPr>
@@ -8977,12 +9007,6 @@
               </a:rPr>
               <a:t>History / Ledger</a:t>
             </a:r>
-            <a:pPr algn="l" indent="0" marL="0">
-              <a:spcAft>
-                <a:spcPts val="900"/>
-              </a:spcAft>
-              <a:buNone/>
-            </a:pPr>
             <a:r>
               <a:rPr lang="en-US" sz="1600" dirty="0">
                 <a:solidFill>
@@ -9014,6 +9038,7 @@
         <a:solidFill>
           <a:srgbClr val="FFFFFF"/>
         </a:solidFill>
+        <a:effectLst/>
       </p:bgPr>
     </p:bg>
     <p:spTree>
@@ -9051,7 +9076,7 @@
           <a:bodyPr wrap="square" lIns="0" tIns="0" rIns="0" bIns="0" rtlCol="0" anchor="ctr"/>
           <a:lstStyle/>
           <a:p>
-            <a:pPr indent="0" marL="0">
+            <a:pPr marL="0" indent="0">
               <a:buNone/>
             </a:pPr>
             <a:r>
@@ -9092,10 +9117,34 @@
             <a:tbl>
               <a:tblPr/>
               <a:tblGrid>
-                <a:gridCol w="2194560"/>
-                <a:gridCol w="2651760"/>
-                <a:gridCol w="3017520"/>
-                <a:gridCol w="3017520"/>
+                <a:gridCol w="2194560">
+                  <a:extLst>
+                    <a:ext uri="{9D8B030D-6E8A-4147-A177-3AD203B41FA5}">
+                      <a16:colId xmlns:a16="http://schemas.microsoft.com/office/drawing/2014/main" val="20000"/>
+                    </a:ext>
+                  </a:extLst>
+                </a:gridCol>
+                <a:gridCol w="2651760">
+                  <a:extLst>
+                    <a:ext uri="{9D8B030D-6E8A-4147-A177-3AD203B41FA5}">
+                      <a16:colId xmlns:a16="http://schemas.microsoft.com/office/drawing/2014/main" val="20001"/>
+                    </a:ext>
+                  </a:extLst>
+                </a:gridCol>
+                <a:gridCol w="3017520">
+                  <a:extLst>
+                    <a:ext uri="{9D8B030D-6E8A-4147-A177-3AD203B41FA5}">
+                      <a16:colId xmlns:a16="http://schemas.microsoft.com/office/drawing/2014/main" val="20002"/>
+                    </a:ext>
+                  </a:extLst>
+                </a:gridCol>
+                <a:gridCol w="3017520">
+                  <a:extLst>
+                    <a:ext uri="{9D8B030D-6E8A-4147-A177-3AD203B41FA5}">
+                      <a16:colId xmlns:a16="http://schemas.microsoft.com/office/drawing/2014/main" val="20003"/>
+                    </a:ext>
+                  </a:extLst>
+                </a:gridCol>
               </a:tblGrid>
               <a:tr h="658368">
                 <a:tc>
@@ -9103,7 +9152,7 @@
                     <a:bodyPr/>
                     <a:lstStyle/>
                     <a:p>
-                      <a:pPr algn="l" indent="0" marL="0">
+                      <a:pPr marL="0" indent="0" algn="l">
                         <a:buNone/>
                       </a:pPr>
                       <a:r>
@@ -9171,7 +9220,7 @@
                     <a:bodyPr/>
                     <a:lstStyle/>
                     <a:p>
-                      <a:pPr algn="l" indent="0" marL="0">
+                      <a:pPr marL="0" indent="0" algn="l">
                         <a:buNone/>
                       </a:pPr>
                       <a:r>
@@ -9239,7 +9288,7 @@
                     <a:bodyPr/>
                     <a:lstStyle/>
                     <a:p>
-                      <a:pPr algn="l" indent="0" marL="0">
+                      <a:pPr marL="0" indent="0" algn="l">
                         <a:buNone/>
                       </a:pPr>
                       <a:r>
@@ -9307,7 +9356,7 @@
                     <a:bodyPr/>
                     <a:lstStyle/>
                     <a:p>
-                      <a:pPr algn="l" indent="0" marL="0">
+                      <a:pPr marL="0" indent="0" algn="l">
                         <a:buNone/>
                       </a:pPr>
                       <a:r>
@@ -9370,6 +9419,11 @@
                     </a:solidFill>
                   </a:tcPr>
                 </a:tc>
+                <a:extLst>
+                  <a:ext uri="{0D108BD9-81ED-4DB2-BD59-A6C34878D82A}">
+                    <a16:rowId xmlns:a16="http://schemas.microsoft.com/office/drawing/2014/main" val="10000"/>
+                  </a:ext>
+                </a:extLst>
               </a:tr>
               <a:tr h="658368">
                 <a:tc>
@@ -9377,7 +9431,7 @@
                     <a:bodyPr/>
                     <a:lstStyle/>
                     <a:p>
-                      <a:pPr algn="l" indent="0" marL="0">
+                      <a:pPr marL="0" indent="0" algn="l">
                         <a:buNone/>
                       </a:pPr>
                       <a:r>
@@ -9445,7 +9499,7 @@
                     <a:bodyPr/>
                     <a:lstStyle/>
                     <a:p>
-                      <a:pPr algn="l" indent="0" marL="0">
+                      <a:pPr marL="0" indent="0" algn="l">
                         <a:buNone/>
                       </a:pPr>
                       <a:r>
@@ -9513,7 +9567,7 @@
                     <a:bodyPr/>
                     <a:lstStyle/>
                     <a:p>
-                      <a:pPr algn="l" indent="0" marL="0">
+                      <a:pPr marL="0" indent="0" algn="l">
                         <a:buNone/>
                       </a:pPr>
                       <a:r>
@@ -9581,7 +9635,7 @@
                     <a:bodyPr/>
                     <a:lstStyle/>
                     <a:p>
-                      <a:pPr algn="l" indent="0" marL="0">
+                      <a:pPr marL="0" indent="0" algn="l">
                         <a:buNone/>
                       </a:pPr>
                       <a:r>
@@ -9595,9 +9649,6 @@
                         </a:rPr>
                         <a:t>restore from golden — or </a:t>
                       </a:r>
-                      <a:pPr algn="l" indent="0" marL="0">
-                        <a:buNone/>
-                      </a:pPr>
                       <a:r>
                         <a:rPr lang="en-US" sz="1250" i="1" dirty="0">
                           <a:solidFill>
@@ -9609,9 +9660,6 @@
                         </a:rPr>
                         <a:t>bless</a:t>
                       </a:r>
-                      <a:pPr algn="l" indent="0" marL="0">
-                        <a:buNone/>
-                      </a:pPr>
                       <a:r>
                         <a:rPr lang="en-US" sz="1250" dirty="0">
                           <a:solidFill>
@@ -9672,6 +9720,11 @@
                     </a:solidFill>
                   </a:tcPr>
                 </a:tc>
+                <a:extLst>
+                  <a:ext uri="{0D108BD9-81ED-4DB2-BD59-A6C34878D82A}">
+                    <a16:rowId xmlns:a16="http://schemas.microsoft.com/office/drawing/2014/main" val="10001"/>
+                  </a:ext>
+                </a:extLst>
               </a:tr>
               <a:tr h="658368">
                 <a:tc>
@@ -9679,7 +9732,7 @@
                     <a:bodyPr/>
                     <a:lstStyle/>
                     <a:p>
-                      <a:pPr algn="l" indent="0" marL="0">
+                      <a:pPr marL="0" indent="0" algn="l">
                         <a:buNone/>
                       </a:pPr>
                       <a:r>
@@ -9747,7 +9800,7 @@
                     <a:bodyPr/>
                     <a:lstStyle/>
                     <a:p>
-                      <a:pPr algn="l" indent="0" marL="0">
+                      <a:pPr marL="0" indent="0" algn="l">
                         <a:buNone/>
                       </a:pPr>
                       <a:r>
@@ -9815,7 +9868,7 @@
                     <a:bodyPr/>
                     <a:lstStyle/>
                     <a:p>
-                      <a:pPr algn="l" indent="0" marL="0">
+                      <a:pPr marL="0" indent="0" algn="l">
                         <a:buNone/>
                       </a:pPr>
                       <a:r>
@@ -9883,7 +9936,7 @@
                     <a:bodyPr/>
                     <a:lstStyle/>
                     <a:p>
-                      <a:pPr algn="l" indent="0" marL="0">
+                      <a:pPr marL="0" indent="0" algn="l">
                         <a:buNone/>
                       </a:pPr>
                       <a:r>
@@ -9946,6 +9999,11 @@
                     </a:solidFill>
                   </a:tcPr>
                 </a:tc>
+                <a:extLst>
+                  <a:ext uri="{0D108BD9-81ED-4DB2-BD59-A6C34878D82A}">
+                    <a16:rowId xmlns:a16="http://schemas.microsoft.com/office/drawing/2014/main" val="10002"/>
+                  </a:ext>
+                </a:extLst>
               </a:tr>
               <a:tr h="658368">
                 <a:tc>
@@ -9953,7 +10011,7 @@
                     <a:bodyPr/>
                     <a:lstStyle/>
                     <a:p>
-                      <a:pPr algn="l" indent="0" marL="0">
+                      <a:pPr marL="0" indent="0" algn="l">
                         <a:buNone/>
                       </a:pPr>
                       <a:r>
@@ -10021,7 +10079,7 @@
                     <a:bodyPr/>
                     <a:lstStyle/>
                     <a:p>
-                      <a:pPr algn="l" indent="0" marL="0">
+                      <a:pPr marL="0" indent="0" algn="l">
                         <a:buNone/>
                       </a:pPr>
                       <a:r>
@@ -10089,7 +10147,7 @@
                     <a:bodyPr/>
                     <a:lstStyle/>
                     <a:p>
-                      <a:pPr algn="l" indent="0" marL="0">
+                      <a:pPr marL="0" indent="0" algn="l">
                         <a:buNone/>
                       </a:pPr>
                       <a:r>
@@ -10157,7 +10215,7 @@
                     <a:bodyPr/>
                     <a:lstStyle/>
                     <a:p>
-                      <a:pPr algn="l" indent="0" marL="0">
+                      <a:pPr marL="0" indent="0" algn="l">
                         <a:buNone/>
                       </a:pPr>
                       <a:r>
@@ -10220,6 +10278,11 @@
                     </a:solidFill>
                   </a:tcPr>
                 </a:tc>
+                <a:extLst>
+                  <a:ext uri="{0D108BD9-81ED-4DB2-BD59-A6C34878D82A}">
+                    <a16:rowId xmlns:a16="http://schemas.microsoft.com/office/drawing/2014/main" val="10003"/>
+                  </a:ext>
+                </a:extLst>
               </a:tr>
               <a:tr h="658368">
                 <a:tc>
@@ -10227,7 +10290,7 @@
                     <a:bodyPr/>
                     <a:lstStyle/>
                     <a:p>
-                      <a:pPr algn="l" indent="0" marL="0">
+                      <a:pPr marL="0" indent="0" algn="l">
                         <a:buNone/>
                       </a:pPr>
                       <a:r>
@@ -10295,7 +10358,7 @@
                     <a:bodyPr/>
                     <a:lstStyle/>
                     <a:p>
-                      <a:pPr algn="l" indent="0" marL="0">
+                      <a:pPr marL="0" indent="0" algn="l">
                         <a:buNone/>
                       </a:pPr>
                       <a:r>
@@ -10363,7 +10426,7 @@
                     <a:bodyPr/>
                     <a:lstStyle/>
                     <a:p>
-                      <a:pPr algn="l" indent="0" marL="0">
+                      <a:pPr marL="0" indent="0" algn="l">
                         <a:buNone/>
                       </a:pPr>
                       <a:r>
@@ -10431,7 +10494,7 @@
                     <a:bodyPr/>
                     <a:lstStyle/>
                     <a:p>
-                      <a:pPr algn="l" indent="0" marL="0">
+                      <a:pPr marL="0" indent="0" algn="l">
                         <a:buNone/>
                       </a:pPr>
                       <a:r>
@@ -10494,6 +10557,11 @@
                     </a:solidFill>
                   </a:tcPr>
                 </a:tc>
+                <a:extLst>
+                  <a:ext uri="{0D108BD9-81ED-4DB2-BD59-A6C34878D82A}">
+                    <a16:rowId xmlns:a16="http://schemas.microsoft.com/office/drawing/2014/main" val="10004"/>
+                  </a:ext>
+                </a:extLst>
               </a:tr>
               <a:tr h="658368">
                 <a:tc>
@@ -10501,7 +10569,7 @@
                     <a:bodyPr/>
                     <a:lstStyle/>
                     <a:p>
-                      <a:pPr algn="l" indent="0" marL="0">
+                      <a:pPr marL="0" indent="0" algn="l">
                         <a:buNone/>
                       </a:pPr>
                       <a:r>
@@ -10515,9 +10583,6 @@
                         </a:rPr>
                         <a:t>Toolchain </a:t>
                       </a:r>
-                      <a:pPr algn="l" indent="0" marL="0">
-                        <a:buNone/>
-                      </a:pPr>
                       <a:r>
                         <a:rPr lang="en-US" sz="1100" i="1" dirty="0">
                           <a:solidFill>
@@ -10583,7 +10648,7 @@
                     <a:bodyPr/>
                     <a:lstStyle/>
                     <a:p>
-                      <a:pPr algn="l" indent="0" marL="0">
+                      <a:pPr marL="0" indent="0" algn="l">
                         <a:buNone/>
                       </a:pPr>
                       <a:r>
@@ -10597,9 +10662,6 @@
                         </a:rPr>
                         <a:t>hashed </a:t>
                       </a:r>
-                      <a:pPr algn="l" indent="0" marL="0">
-                        <a:buNone/>
-                      </a:pPr>
                       <a:r>
                         <a:rPr lang="en-US" sz="1250" b="1" dirty="0">
                           <a:solidFill>
@@ -10665,7 +10727,7 @@
                     <a:bodyPr/>
                     <a:lstStyle/>
                     <a:p>
-                      <a:pPr algn="l" indent="0" marL="0">
+                      <a:pPr marL="0" indent="0" algn="l">
                         <a:buNone/>
                       </a:pPr>
                       <a:r>
@@ -10733,7 +10795,7 @@
                     <a:bodyPr/>
                     <a:lstStyle/>
                     <a:p>
-                      <a:pPr algn="l" indent="0" marL="0">
+                      <a:pPr marL="0" indent="0" algn="l">
                         <a:buNone/>
                       </a:pPr>
                       <a:r>
@@ -10796,6 +10858,11 @@
                     </a:solidFill>
                   </a:tcPr>
                 </a:tc>
+                <a:extLst>
+                  <a:ext uri="{0D108BD9-81ED-4DB2-BD59-A6C34878D82A}">
+                    <a16:rowId xmlns:a16="http://schemas.microsoft.com/office/drawing/2014/main" val="10005"/>
+                  </a:ext>
+                </a:extLst>
               </a:tr>
               <a:tr h="658368">
                 <a:tc>
@@ -10803,7 +10870,7 @@
                     <a:bodyPr/>
                     <a:lstStyle/>
                     <a:p>
-                      <a:pPr algn="l" indent="0" marL="0">
+                      <a:pPr marL="0" indent="0" algn="l">
                         <a:buNone/>
                       </a:pPr>
                       <a:r>
@@ -10817,9 +10884,6 @@
                         </a:rPr>
                         <a:t>Trust state </a:t>
                       </a:r>
-                      <a:pPr algn="l" indent="0" marL="0">
-                        <a:buNone/>
-                      </a:pPr>
                       <a:r>
                         <a:rPr lang="en-US" sz="1100" i="1" dirty="0">
                           <a:solidFill>
@@ -10885,7 +10949,7 @@
                     <a:bodyPr/>
                     <a:lstStyle/>
                     <a:p>
-                      <a:pPr algn="l" indent="0" marL="0">
+                      <a:pPr marL="0" indent="0" algn="l">
                         <a:buNone/>
                       </a:pPr>
                       <a:r>
@@ -10953,7 +11017,7 @@
                     <a:bodyPr/>
                     <a:lstStyle/>
                     <a:p>
-                      <a:pPr algn="l" indent="0" marL="0">
+                      <a:pPr marL="0" indent="0" algn="l">
                         <a:buNone/>
                       </a:pPr>
                       <a:r>
@@ -11021,7 +11085,7 @@
                     <a:bodyPr/>
                     <a:lstStyle/>
                     <a:p>
-                      <a:pPr algn="l" indent="0" marL="0">
+                      <a:pPr marL="0" indent="0" algn="l">
                         <a:buNone/>
                       </a:pPr>
                       <a:r>
@@ -11035,9 +11099,6 @@
                         </a:rPr>
                         <a:t>principled refusal</a:t>
                       </a:r>
-                      <a:pPr algn="l" indent="0" marL="0">
-                        <a:buNone/>
-                      </a:pPr>
                       <a:r>
                         <a:rPr lang="en-US" sz="1250" dirty="0">
                           <a:solidFill>
@@ -11098,6 +11159,11 @@
                     </a:solidFill>
                   </a:tcPr>
                 </a:tc>
+                <a:extLst>
+                  <a:ext uri="{0D108BD9-81ED-4DB2-BD59-A6C34878D82A}">
+                    <a16:rowId xmlns:a16="http://schemas.microsoft.com/office/drawing/2014/main" val="10006"/>
+                  </a:ext>
+                </a:extLst>
               </a:tr>
             </a:tbl>
           </a:graphicData>
@@ -11119,6 +11185,7 @@
         <a:solidFill>
           <a:srgbClr val="FFFFFF"/>
         </a:solidFill>
+        <a:effectLst/>
       </p:bgPr>
     </p:bg>
     <p:spTree>
@@ -11156,6 +11223,13 @@
           </a:solidFill>
           <a:ln/>
         </p:spPr>
+        <p:txBody>
+          <a:bodyPr/>
+          <a:lstStyle/>
+          <a:p>
+            <a:endParaRPr lang="en-US"/>
+          </a:p>
+        </p:txBody>
       </p:sp>
       <p:sp>
         <p:nvSpPr>
@@ -11178,7 +11252,7 @@
           <a:bodyPr wrap="square" lIns="254" tIns="254" rIns="254" bIns="254" rtlCol="0" anchor="ctr"/>
           <a:lstStyle/>
           <a:p>
-            <a:pPr algn="ctr" indent="0" marL="0">
+            <a:pPr marL="0" indent="0" algn="ctr">
               <a:buNone/>
             </a:pPr>
             <a:r>
@@ -11217,6 +11291,13 @@
           </a:solidFill>
           <a:ln/>
         </p:spPr>
+        <p:txBody>
+          <a:bodyPr/>
+          <a:lstStyle/>
+          <a:p>
+            <a:endParaRPr lang="en-US"/>
+          </a:p>
+        </p:txBody>
       </p:sp>
       <p:sp>
         <p:nvSpPr>
@@ -11239,7 +11320,7 @@
           <a:bodyPr wrap="square" lIns="254" tIns="254" rIns="254" bIns="254" rtlCol="0" anchor="ctr"/>
           <a:lstStyle/>
           <a:p>
-            <a:pPr algn="ctr" indent="0" marL="0">
+            <a:pPr marL="0" indent="0" algn="ctr">
               <a:buNone/>
             </a:pPr>
             <a:r>
@@ -11256,7 +11337,7 @@
             <a:endParaRPr lang="en-US" sz="900" dirty="0"/>
           </a:p>
           <a:p>
-            <a:pPr algn="ctr" indent="0" marL="0">
+            <a:pPr marL="0" indent="0" algn="ctr">
               <a:buNone/>
             </a:pPr>
             <a:r>
@@ -11295,6 +11376,13 @@
           </a:solidFill>
           <a:ln/>
         </p:spPr>
+        <p:txBody>
+          <a:bodyPr/>
+          <a:lstStyle/>
+          <a:p>
+            <a:endParaRPr lang="en-US"/>
+          </a:p>
+        </p:txBody>
       </p:sp>
       <p:sp>
         <p:nvSpPr>
@@ -11317,7 +11405,7 @@
           <a:bodyPr wrap="square" lIns="254" tIns="254" rIns="254" bIns="254" rtlCol="0" anchor="ctr"/>
           <a:lstStyle/>
           <a:p>
-            <a:pPr algn="ctr" indent="0" marL="0">
+            <a:pPr marL="0" indent="0" algn="ctr">
               <a:buNone/>
             </a:pPr>
             <a:r>
@@ -11356,6 +11444,13 @@
           </a:solidFill>
           <a:ln/>
         </p:spPr>
+        <p:txBody>
+          <a:bodyPr/>
+          <a:lstStyle/>
+          <a:p>
+            <a:endParaRPr lang="en-US"/>
+          </a:p>
+        </p:txBody>
       </p:sp>
       <p:sp>
         <p:nvSpPr>
@@ -11378,7 +11473,7 @@
           <a:bodyPr wrap="square" lIns="254" tIns="254" rIns="254" bIns="254" rtlCol="0" anchor="ctr"/>
           <a:lstStyle/>
           <a:p>
-            <a:pPr algn="ctr" indent="0" marL="0">
+            <a:pPr marL="0" indent="0" algn="ctr">
               <a:buNone/>
             </a:pPr>
             <a:r>
@@ -11417,6 +11512,13 @@
           </a:solidFill>
           <a:ln/>
         </p:spPr>
+        <p:txBody>
+          <a:bodyPr/>
+          <a:lstStyle/>
+          <a:p>
+            <a:endParaRPr lang="en-US"/>
+          </a:p>
+        </p:txBody>
       </p:sp>
       <p:sp>
         <p:nvSpPr>
@@ -11439,7 +11541,7 @@
           <a:bodyPr wrap="square" lIns="254" tIns="254" rIns="254" bIns="254" rtlCol="0" anchor="ctr"/>
           <a:lstStyle/>
           <a:p>
-            <a:pPr algn="ctr" indent="0" marL="0">
+            <a:pPr marL="0" indent="0" algn="ctr">
               <a:buNone/>
             </a:pPr>
             <a:r>
@@ -11478,7 +11580,7 @@
           <a:bodyPr wrap="square" lIns="0" tIns="0" rIns="0" bIns="0" rtlCol="0" anchor="ctr"/>
           <a:lstStyle/>
           <a:p>
-            <a:pPr indent="0" marL="0">
+            <a:pPr marL="0" indent="0">
               <a:buNone/>
             </a:pPr>
             <a:r>
@@ -11517,7 +11619,7 @@
           <a:bodyPr wrap="square" lIns="0" tIns="0" rIns="0" bIns="0" rtlCol="0" anchor="t"/>
           <a:lstStyle/>
           <a:p>
-            <a:pPr algn="l" marL="342900" indent="-342900">
+            <a:pPr marL="342900" indent="-342900" algn="l">
               <a:buSzPct val="100000"/>
               <a:buChar char="•"/>
             </a:pPr>
@@ -11532,12 +11634,6 @@
               </a:rPr>
               <a:t>The system: </a:t>
             </a:r>
-            <a:pPr algn="l" indent="0" marL="0">
-              <a:spcAft>
-                <a:spcPts val="200"/>
-              </a:spcAft>
-              <a:buNone/>
-            </a:pPr>
             <a:r>
               <a:rPr lang="en-US" sz="1350" dirty="0">
                 <a:solidFill>
@@ -11552,7 +11648,7 @@
             <a:endParaRPr lang="en-US" sz="1350" dirty="0"/>
           </a:p>
           <a:p>
-            <a:pPr algn="l" indent="0" marL="0">
+            <a:pPr marL="0" indent="0" algn="l">
               <a:spcAft>
                 <a:spcPts val="1000"/>
               </a:spcAft>
@@ -11572,7 +11668,7 @@
             <a:endParaRPr lang="en-US" sz="1350" dirty="0"/>
           </a:p>
           <a:p>
-            <a:pPr algn="l" marL="342900" indent="-342900">
+            <a:pPr marL="342900" indent="-342900" algn="l">
               <a:buSzPct val="100000"/>
               <a:buChar char="•"/>
             </a:pPr>
@@ -11587,9 +11683,6 @@
               </a:rPr>
               <a:t>The relevance: </a:t>
             </a:r>
-            <a:pPr algn="l" indent="0" marL="0">
-              <a:buNone/>
-            </a:pPr>
             <a:r>
               <a:rPr lang="en-US" sz="1350" dirty="0">
                 <a:solidFill>
@@ -11626,6 +11719,13 @@
           </a:solidFill>
           <a:ln/>
         </p:spPr>
+        <p:txBody>
+          <a:bodyPr/>
+          <a:lstStyle/>
+          <a:p>
+            <a:endParaRPr lang="en-US"/>
+          </a:p>
+        </p:txBody>
       </p:sp>
       <p:sp>
         <p:nvSpPr>
@@ -11648,7 +11748,7 @@
           <a:bodyPr wrap="square" lIns="254" tIns="254" rIns="254" bIns="254" rtlCol="0" anchor="ctr"/>
           <a:lstStyle/>
           <a:p>
-            <a:pPr algn="ctr" indent="0" marL="0">
+            <a:pPr marL="0" indent="0" algn="ctr">
               <a:buNone/>
             </a:pPr>
             <a:r>
@@ -11665,7 +11765,7 @@
             <a:endParaRPr lang="en-US" sz="1050" dirty="0"/>
           </a:p>
           <a:p>
-            <a:pPr algn="ctr" indent="0" marL="0">
+            <a:pPr marL="0" indent="0" algn="ctr">
               <a:buNone/>
             </a:pPr>
             <a:r>
@@ -11704,7 +11804,7 @@
           <a:bodyPr wrap="square" lIns="0" tIns="0" rIns="0" bIns="0" rtlCol="0" anchor="ctr"/>
           <a:lstStyle/>
           <a:p>
-            <a:pPr algn="ctr" indent="0" marL="0">
+            <a:pPr marL="0" indent="0" algn="ctr">
               <a:buNone/>
             </a:pPr>
             <a:r>
@@ -11743,6 +11843,13 @@
           </a:solidFill>
           <a:ln/>
         </p:spPr>
+        <p:txBody>
+          <a:bodyPr/>
+          <a:lstStyle/>
+          <a:p>
+            <a:endParaRPr lang="en-US"/>
+          </a:p>
+        </p:txBody>
       </p:sp>
       <p:sp>
         <p:nvSpPr>
@@ -11765,7 +11872,7 @@
           <a:bodyPr wrap="square" lIns="254" tIns="254" rIns="254" bIns="254" rtlCol="0" anchor="ctr"/>
           <a:lstStyle/>
           <a:p>
-            <a:pPr algn="ctr" indent="0" marL="0">
+            <a:pPr marL="0" indent="0" algn="ctr">
               <a:buNone/>
             </a:pPr>
             <a:r>
@@ -11782,7 +11889,7 @@
             <a:endParaRPr lang="en-US" sz="1050" dirty="0"/>
           </a:p>
           <a:p>
-            <a:pPr algn="ctr" indent="0" marL="0">
+            <a:pPr marL="0" indent="0" algn="ctr">
               <a:buNone/>
             </a:pPr>
             <a:r>
@@ -11821,7 +11928,7 @@
           <a:bodyPr wrap="square" lIns="0" tIns="0" rIns="0" bIns="0" rtlCol="0" anchor="ctr"/>
           <a:lstStyle/>
           <a:p>
-            <a:pPr algn="ctr" indent="0" marL="0">
+            <a:pPr marL="0" indent="0" algn="ctr">
               <a:buNone/>
             </a:pPr>
             <a:r>
@@ -11860,6 +11967,13 @@
           </a:solidFill>
           <a:ln/>
         </p:spPr>
+        <p:txBody>
+          <a:bodyPr/>
+          <a:lstStyle/>
+          <a:p>
+            <a:endParaRPr lang="en-US"/>
+          </a:p>
+        </p:txBody>
       </p:sp>
       <p:sp>
         <p:nvSpPr>
@@ -11882,7 +11996,7 @@
           <a:bodyPr wrap="square" lIns="254" tIns="254" rIns="254" bIns="254" rtlCol="0" anchor="ctr"/>
           <a:lstStyle/>
           <a:p>
-            <a:pPr algn="ctr" indent="0" marL="0">
+            <a:pPr marL="0" indent="0" algn="ctr">
               <a:buNone/>
             </a:pPr>
             <a:r>
@@ -11899,7 +12013,7 @@
             <a:endParaRPr lang="en-US" sz="1050" dirty="0"/>
           </a:p>
           <a:p>
-            <a:pPr algn="ctr" indent="0" marL="0">
+            <a:pPr marL="0" indent="0" algn="ctr">
               <a:buNone/>
             </a:pPr>
             <a:r>
@@ -11938,7 +12052,7 @@
           <a:bodyPr wrap="square" lIns="0" tIns="0" rIns="0" bIns="0" rtlCol="0" anchor="ctr"/>
           <a:lstStyle/>
           <a:p>
-            <a:pPr algn="ctr" indent="0" marL="0">
+            <a:pPr marL="0" indent="0" algn="ctr">
               <a:buNone/>
             </a:pPr>
             <a:r>
@@ -11977,6 +12091,13 @@
           </a:solidFill>
           <a:ln/>
         </p:spPr>
+        <p:txBody>
+          <a:bodyPr/>
+          <a:lstStyle/>
+          <a:p>
+            <a:endParaRPr lang="en-US"/>
+          </a:p>
+        </p:txBody>
       </p:sp>
       <p:sp>
         <p:nvSpPr>
@@ -11999,7 +12120,7 @@
           <a:bodyPr wrap="square" lIns="254" tIns="254" rIns="254" bIns="254" rtlCol="0" anchor="ctr"/>
           <a:lstStyle/>
           <a:p>
-            <a:pPr algn="ctr" indent="0" marL="0">
+            <a:pPr marL="0" indent="0" algn="ctr">
               <a:buNone/>
             </a:pPr>
             <a:r>
@@ -12016,7 +12137,7 @@
             <a:endParaRPr lang="en-US" sz="1050" dirty="0"/>
           </a:p>
           <a:p>
-            <a:pPr algn="ctr" indent="0" marL="0">
+            <a:pPr marL="0" indent="0" algn="ctr">
               <a:buNone/>
             </a:pPr>
             <a:r>
@@ -12055,7 +12176,7 @@
           <a:bodyPr wrap="square" lIns="0" tIns="0" rIns="0" bIns="0" rtlCol="0" anchor="t"/>
           <a:lstStyle/>
           <a:p>
-            <a:pPr algn="l" marL="342900" indent="-342900">
+            <a:pPr marL="342900" indent="-342900" algn="l">
               <a:buSzPct val="100000"/>
               <a:buChar char="•"/>
             </a:pPr>
@@ -12070,9 +12191,6 @@
               </a:rPr>
               <a:t>Why this example: </a:t>
             </a:r>
-            <a:pPr algn="l" indent="0" marL="0">
-              <a:buNone/>
-            </a:pPr>
             <a:r>
               <a:rPr lang="en-US" sz="1350" dirty="0">
                 <a:solidFill>
@@ -12109,7 +12227,7 @@
           <a:bodyPr wrap="square" lIns="0" tIns="0" rIns="0" bIns="0" rtlCol="0" anchor="t"/>
           <a:lstStyle/>
           <a:p>
-            <a:pPr algn="l" indent="0" marL="0">
+            <a:pPr marL="0" indent="0" algn="l">
               <a:buNone/>
             </a:pPr>
             <a:r>
@@ -12123,9 +12241,6 @@
               </a:rPr>
               <a:t>Hatcliff &amp; Belt, </a:t>
             </a:r>
-            <a:pPr algn="l" indent="0" marL="0">
-              <a:buNone/>
-            </a:pPr>
             <a:r>
               <a:rPr lang="en-US" sz="850" i="1" dirty="0">
                 <a:solidFill>
@@ -12137,9 +12252,6 @@
               </a:rPr>
               <a:t>The Isolette System: Illustrating End-to-End Artifacts for Rigorous Model-Based Engineering</a:t>
             </a:r>
-            <a:pPr algn="l" indent="0" marL="0">
-              <a:buNone/>
-            </a:pPr>
             <a:r>
               <a:rPr lang="en-US" sz="850" dirty="0">
                 <a:solidFill>
@@ -12154,7 +12266,7 @@
             <a:endParaRPr lang="en-US" sz="850" dirty="0"/>
           </a:p>
           <a:p>
-            <a:pPr algn="l" indent="0" marL="0">
+            <a:pPr marL="0" indent="0" algn="l">
               <a:buNone/>
             </a:pPr>
             <a:r>
@@ -12168,9 +12280,6 @@
               </a:rPr>
               <a:t>Hatcliff, Belt, Robby, McKenzie, Liang, </a:t>
             </a:r>
-            <a:pPr algn="l" indent="0" marL="0">
-              <a:buNone/>
-            </a:pPr>
             <a:r>
               <a:rPr lang="en-US" sz="850" i="1" dirty="0">
                 <a:solidFill>
@@ -12182,9 +12291,6 @@
               </a:rPr>
               <a:t>End-to-End Formal Methods Integrated Development with SysMLv2 Using HAMR</a:t>
             </a:r>
-            <a:pPr algn="l" indent="0" marL="0">
-              <a:buNone/>
-            </a:pPr>
             <a:r>
               <a:rPr lang="en-US" sz="850" dirty="0">
                 <a:solidFill>
@@ -12199,7 +12305,7 @@
             <a:endParaRPr lang="en-US" sz="850" dirty="0"/>
           </a:p>
           <a:p>
-            <a:pPr algn="l" indent="0" marL="0">
+            <a:pPr marL="0" indent="0" algn="l">
               <a:buNone/>
             </a:pPr>
             <a:r>
@@ -12213,9 +12319,6 @@
               </a:rPr>
               <a:t>Hatcliff, Belt, Robby, Carpenter, </a:t>
             </a:r>
-            <a:pPr algn="l" indent="0" marL="0">
-              <a:buNone/>
-            </a:pPr>
             <a:r>
               <a:rPr lang="en-US" sz="850" i="1" dirty="0">
                 <a:solidFill>
@@ -12227,9 +12330,6 @@
               </a:rPr>
               <a:t>HAMR: An AADL Multi-platform Code Generation Toolset</a:t>
             </a:r>
-            <a:pPr algn="l" indent="0" marL="0">
-              <a:buNone/>
-            </a:pPr>
             <a:r>
               <a:rPr lang="en-US" sz="850" dirty="0">
                 <a:solidFill>
@@ -12266,7 +12366,7 @@
           <a:bodyPr wrap="square" lIns="0" tIns="0" rIns="0" bIns="0" rtlCol="0" anchor="ctr"/>
           <a:lstStyle/>
           <a:p>
-            <a:pPr algn="l" indent="0" marL="0">
+            <a:pPr marL="0" indent="0" algn="l">
               <a:buNone/>
             </a:pPr>
             <a:r>
@@ -12310,6 +12410,13 @@
             <a:prstDash val="solid"/>
           </a:ln>
         </p:spPr>
+        <p:txBody>
+          <a:bodyPr/>
+          <a:lstStyle/>
+          <a:p>
+            <a:endParaRPr lang="en-US"/>
+          </a:p>
+        </p:txBody>
       </p:sp>
       <p:sp>
         <p:nvSpPr>
@@ -12332,7 +12439,7 @@
           <a:bodyPr wrap="square" lIns="0" tIns="0" rIns="0" bIns="0" rtlCol="0" anchor="ctr"/>
           <a:lstStyle/>
           <a:p>
-            <a:pPr algn="l" indent="0" marL="0">
+            <a:pPr marL="0" indent="0" algn="l">
               <a:buNone/>
             </a:pPr>
             <a:r>
@@ -12371,7 +12478,7 @@
           <a:bodyPr wrap="square" lIns="0" tIns="0" rIns="0" bIns="0" rtlCol="0" anchor="ctr"/>
           <a:lstStyle/>
           <a:p>
-            <a:pPr algn="l" indent="0" marL="0">
+            <a:pPr marL="0" indent="0" algn="l">
               <a:buNone/>
             </a:pPr>
             <a:r>
@@ -12415,6 +12522,13 @@
             <a:prstDash val="solid"/>
           </a:ln>
         </p:spPr>
+        <p:txBody>
+          <a:bodyPr/>
+          <a:lstStyle/>
+          <a:p>
+            <a:endParaRPr lang="en-US"/>
+          </a:p>
+        </p:txBody>
       </p:sp>
       <p:sp>
         <p:nvSpPr>
@@ -12437,7 +12551,7 @@
           <a:bodyPr wrap="square" lIns="0" tIns="0" rIns="0" bIns="0" rtlCol="0" anchor="ctr"/>
           <a:lstStyle/>
           <a:p>
-            <a:pPr algn="l" indent="0" marL="0">
+            <a:pPr marL="0" indent="0" algn="l">
               <a:buNone/>
             </a:pPr>
             <a:r>
@@ -12476,7 +12590,7 @@
           <a:bodyPr wrap="square" lIns="0" tIns="0" rIns="0" bIns="0" rtlCol="0" anchor="ctr"/>
           <a:lstStyle/>
           <a:p>
-            <a:pPr algn="l" indent="0" marL="0">
+            <a:pPr marL="0" indent="0" algn="l">
               <a:buNone/>
             </a:pPr>
             <a:r>
@@ -12520,6 +12634,13 @@
             <a:prstDash val="solid"/>
           </a:ln>
         </p:spPr>
+        <p:txBody>
+          <a:bodyPr/>
+          <a:lstStyle/>
+          <a:p>
+            <a:endParaRPr lang="en-US"/>
+          </a:p>
+        </p:txBody>
       </p:sp>
       <p:sp>
         <p:nvSpPr>
@@ -12542,7 +12663,7 @@
           <a:bodyPr wrap="square" lIns="0" tIns="0" rIns="0" bIns="0" rtlCol="0" anchor="ctr"/>
           <a:lstStyle/>
           <a:p>
-            <a:pPr algn="l" indent="0" marL="0">
+            <a:pPr marL="0" indent="0" algn="l">
               <a:buNone/>
             </a:pPr>
             <a:r>
@@ -12581,7 +12702,7 @@
           <a:bodyPr wrap="square" lIns="0" tIns="0" rIns="0" bIns="0" rtlCol="0" anchor="ctr"/>
           <a:lstStyle/>
           <a:p>
-            <a:pPr algn="l" indent="0" marL="0">
+            <a:pPr marL="0" indent="0" algn="l">
               <a:buNone/>
             </a:pPr>
             <a:r>
@@ -12625,6 +12746,13 @@
             <a:prstDash val="solid"/>
           </a:ln>
         </p:spPr>
+        <p:txBody>
+          <a:bodyPr/>
+          <a:lstStyle/>
+          <a:p>
+            <a:endParaRPr lang="en-US"/>
+          </a:p>
+        </p:txBody>
       </p:sp>
       <p:sp>
         <p:nvSpPr>
@@ -12647,7 +12775,7 @@
           <a:bodyPr wrap="square" lIns="0" tIns="0" rIns="0" bIns="0" rtlCol="0" anchor="ctr"/>
           <a:lstStyle/>
           <a:p>
-            <a:pPr algn="l" indent="0" marL="0">
+            <a:pPr marL="0" indent="0" algn="l">
               <a:buNone/>
             </a:pPr>
             <a:r>
@@ -12686,7 +12814,7 @@
           <a:bodyPr wrap="square" lIns="0" tIns="0" rIns="0" bIns="0" rtlCol="0" anchor="ctr"/>
           <a:lstStyle/>
           <a:p>
-            <a:pPr algn="l" indent="0" marL="0">
+            <a:pPr marL="0" indent="0" algn="l">
               <a:buNone/>
             </a:pPr>
             <a:r>
@@ -12730,6 +12858,13 @@
             <a:prstDash val="solid"/>
           </a:ln>
         </p:spPr>
+        <p:txBody>
+          <a:bodyPr/>
+          <a:lstStyle/>
+          <a:p>
+            <a:endParaRPr lang="en-US"/>
+          </a:p>
+        </p:txBody>
       </p:sp>
       <p:sp>
         <p:nvSpPr>
@@ -12752,7 +12887,7 @@
           <a:bodyPr wrap="square" lIns="0" tIns="0" rIns="0" bIns="0" rtlCol="0" anchor="ctr"/>
           <a:lstStyle/>
           <a:p>
-            <a:pPr algn="l" indent="0" marL="0">
+            <a:pPr marL="0" indent="0" algn="l">
               <a:buNone/>
             </a:pPr>
             <a:r>
@@ -12791,7 +12926,7 @@
           <a:bodyPr wrap="square" lIns="0" tIns="0" rIns="0" bIns="0" rtlCol="0" anchor="ctr"/>
           <a:lstStyle/>
           <a:p>
-            <a:pPr algn="l" indent="0" marL="0">
+            <a:pPr marL="0" indent="0" algn="l">
               <a:buNone/>
             </a:pPr>
             <a:r>
@@ -12835,6 +12970,13 @@
             <a:prstDash val="solid"/>
           </a:ln>
         </p:spPr>
+        <p:txBody>
+          <a:bodyPr/>
+          <a:lstStyle/>
+          <a:p>
+            <a:endParaRPr lang="en-US"/>
+          </a:p>
+        </p:txBody>
       </p:sp>
       <p:sp>
         <p:nvSpPr>
@@ -12857,7 +12999,7 @@
           <a:bodyPr wrap="square" lIns="0" tIns="0" rIns="0" bIns="0" rtlCol="0" anchor="ctr"/>
           <a:lstStyle/>
           <a:p>
-            <a:pPr algn="l" indent="0" marL="0">
+            <a:pPr marL="0" indent="0" algn="l">
               <a:buNone/>
             </a:pPr>
             <a:r>
@@ -12896,7 +13038,7 @@
           <a:bodyPr wrap="square" lIns="0" tIns="0" rIns="0" bIns="0" rtlCol="0" anchor="ctr"/>
           <a:lstStyle/>
           <a:p>
-            <a:pPr algn="l" indent="0" marL="0">
+            <a:pPr marL="0" indent="0" algn="l">
               <a:buNone/>
             </a:pPr>
             <a:r>
@@ -12913,7 +13055,7 @@
             <a:endParaRPr lang="en-US" sz="1000" dirty="0"/>
           </a:p>
           <a:p>
-            <a:pPr algn="l" indent="0" marL="0">
+            <a:pPr marL="0" indent="0" algn="l">
               <a:buNone/>
             </a:pPr>
             <a:r>
@@ -12947,6 +13089,7 @@
         <a:solidFill>
           <a:srgbClr val="FFFFFF"/>
         </a:solidFill>
+        <a:effectLst/>
       </p:bgPr>
     </p:bg>
     <p:spTree>
@@ -12984,6 +13127,13 @@
           </a:solidFill>
           <a:ln/>
         </p:spPr>
+        <p:txBody>
+          <a:bodyPr/>
+          <a:lstStyle/>
+          <a:p>
+            <a:endParaRPr lang="en-US"/>
+          </a:p>
+        </p:txBody>
       </p:sp>
       <p:sp>
         <p:nvSpPr>
@@ -13006,7 +13156,7 @@
           <a:bodyPr wrap="square" lIns="254" tIns="254" rIns="254" bIns="254" rtlCol="0" anchor="ctr"/>
           <a:lstStyle/>
           <a:p>
-            <a:pPr algn="ctr" indent="0" marL="0">
+            <a:pPr marL="0" indent="0" algn="ctr">
               <a:buNone/>
             </a:pPr>
             <a:r>
@@ -13045,6 +13195,13 @@
           </a:solidFill>
           <a:ln/>
         </p:spPr>
+        <p:txBody>
+          <a:bodyPr/>
+          <a:lstStyle/>
+          <a:p>
+            <a:endParaRPr lang="en-US"/>
+          </a:p>
+        </p:txBody>
       </p:sp>
       <p:sp>
         <p:nvSpPr>
@@ -13067,7 +13224,7 @@
           <a:bodyPr wrap="square" lIns="254" tIns="254" rIns="254" bIns="254" rtlCol="0" anchor="ctr"/>
           <a:lstStyle/>
           <a:p>
-            <a:pPr algn="ctr" indent="0" marL="0">
+            <a:pPr marL="0" indent="0" algn="ctr">
               <a:buNone/>
             </a:pPr>
             <a:r>
@@ -13084,7 +13241,7 @@
             <a:endParaRPr lang="en-US" sz="900" dirty="0"/>
           </a:p>
           <a:p>
-            <a:pPr algn="ctr" indent="0" marL="0">
+            <a:pPr marL="0" indent="0" algn="ctr">
               <a:buNone/>
             </a:pPr>
             <a:r>
@@ -13123,6 +13280,13 @@
           </a:solidFill>
           <a:ln/>
         </p:spPr>
+        <p:txBody>
+          <a:bodyPr/>
+          <a:lstStyle/>
+          <a:p>
+            <a:endParaRPr lang="en-US"/>
+          </a:p>
+        </p:txBody>
       </p:sp>
       <p:sp>
         <p:nvSpPr>
@@ -13145,7 +13309,7 @@
           <a:bodyPr wrap="square" lIns="254" tIns="254" rIns="254" bIns="254" rtlCol="0" anchor="ctr"/>
           <a:lstStyle/>
           <a:p>
-            <a:pPr algn="ctr" indent="0" marL="0">
+            <a:pPr marL="0" indent="0" algn="ctr">
               <a:buNone/>
             </a:pPr>
             <a:r>
@@ -13184,6 +13348,13 @@
           </a:solidFill>
           <a:ln/>
         </p:spPr>
+        <p:txBody>
+          <a:bodyPr/>
+          <a:lstStyle/>
+          <a:p>
+            <a:endParaRPr lang="en-US"/>
+          </a:p>
+        </p:txBody>
       </p:sp>
       <p:sp>
         <p:nvSpPr>
@@ -13206,7 +13377,7 @@
           <a:bodyPr wrap="square" lIns="254" tIns="254" rIns="254" bIns="254" rtlCol="0" anchor="ctr"/>
           <a:lstStyle/>
           <a:p>
-            <a:pPr algn="ctr" indent="0" marL="0">
+            <a:pPr marL="0" indent="0" algn="ctr">
               <a:buNone/>
             </a:pPr>
             <a:r>
@@ -13245,6 +13416,13 @@
           </a:solidFill>
           <a:ln/>
         </p:spPr>
+        <p:txBody>
+          <a:bodyPr/>
+          <a:lstStyle/>
+          <a:p>
+            <a:endParaRPr lang="en-US"/>
+          </a:p>
+        </p:txBody>
       </p:sp>
       <p:sp>
         <p:nvSpPr>
@@ -13267,7 +13445,7 @@
           <a:bodyPr wrap="square" lIns="254" tIns="254" rIns="254" bIns="254" rtlCol="0" anchor="ctr"/>
           <a:lstStyle/>
           <a:p>
-            <a:pPr algn="ctr" indent="0" marL="0">
+            <a:pPr marL="0" indent="0" algn="ctr">
               <a:buNone/>
             </a:pPr>
             <a:r>
@@ -13306,11 +13484,11 @@
           <a:bodyPr wrap="square" lIns="0" tIns="0" rIns="0" bIns="0" rtlCol="0" anchor="ctr"/>
           <a:lstStyle/>
           <a:p>
-            <a:pPr indent="0" marL="0">
-              <a:buNone/>
-            </a:pPr>
-            <a:r>
-              <a:rPr lang="en-US" sz="1800" b="1" spc="300" kern="0" dirty="0">
+            <a:pPr marL="0" indent="0">
+              <a:buNone/>
+            </a:pPr>
+            <a:r>
+              <a:rPr lang="en-US" sz="1800" b="1" kern="0" spc="300" dirty="0">
                 <a:solidFill>
                   <a:srgbClr val="5A6478"/>
                 </a:solidFill>
@@ -13345,7 +13523,7 @@
           <a:bodyPr wrap="square" lIns="0" tIns="0" rIns="0" bIns="0" rtlCol="0" anchor="ctr"/>
           <a:lstStyle/>
           <a:p>
-            <a:pPr indent="0" marL="0">
+            <a:pPr marL="0" indent="0">
               <a:buNone/>
             </a:pPr>
             <a:r>
@@ -13357,7 +13535,7 @@
                 <a:ea typeface="Cambria" pitchFamily="34" charset="-122"/>
                 <a:cs typeface="Cambria" pitchFamily="34" charset="-120"/>
               </a:rPr>
-              <a:t>The honest baseline</a:t>
+              <a:t>The consistent baseline</a:t>
             </a:r>
             <a:endParaRPr lang="en-US" sz="4000" dirty="0"/>
           </a:p>
@@ -13384,7 +13562,7 @@
           <a:bodyPr wrap="square" lIns="0" tIns="0" rIns="0" bIns="0" rtlCol="0" anchor="ctr"/>
           <a:lstStyle/>
           <a:p>
-            <a:pPr indent="0" marL="0">
+            <a:pPr marL="0" indent="0">
               <a:buNone/>
             </a:pPr>
             <a:r>
@@ -13396,7 +13574,7 @@
                 <a:ea typeface="Calibri" pitchFamily="34" charset="-122"/>
                 <a:cs typeface="Calibri" pitchFamily="34" charset="-120"/>
               </a:rPr>
-              <a:t>scene 1</a:t>
+              <a:t>Demo scene:  1 (clean appraisal)</a:t>
             </a:r>
             <a:endParaRPr lang="en-US" sz="1500" dirty="0"/>
           </a:p>
@@ -13423,7 +13601,7 @@
           <a:bodyPr wrap="square" lIns="0" tIns="0" rIns="0" bIns="0" rtlCol="0" anchor="ctr"/>
           <a:lstStyle/>
           <a:p>
-            <a:pPr indent="0" marL="0">
+            <a:pPr marL="0" indent="0">
               <a:buNone/>
             </a:pPr>
             <a:r>
@@ -13435,7 +13613,7 @@
                 <a:ea typeface="Calibri" pitchFamily="34" charset="-122"/>
                 <a:cs typeface="Calibri" pitchFamily="34" charset="-120"/>
               </a:rPr>
-              <a:t>One episode measures every artifact class — watch the checklist go green, and remember what green looks like.</a:t>
+              <a:t>All artifacts start in a “pass” state:  all artifacts have integrity against golden values and implementations meet their contracts.</a:t>
             </a:r>
             <a:endParaRPr lang="en-US" sz="2000" dirty="0"/>
           </a:p>
@@ -13449,8 +13627,8 @@
         </p:nvSpPr>
         <p:spPr>
           <a:xfrm>
-            <a:off x="822960" y="6172200"/>
-            <a:ext cx="10515600" cy="365760"/>
+            <a:off x="822960" y="6053328"/>
+            <a:ext cx="10515600" cy="603504"/>
           </a:xfrm>
           <a:prstGeom prst="rect">
             <a:avLst/>
@@ -13462,7 +13640,7 @@
           <a:bodyPr wrap="square" lIns="0" tIns="0" rIns="0" bIns="0" rtlCol="0" anchor="ctr"/>
           <a:lstStyle/>
           <a:p>
-            <a:pPr indent="0" marL="0">
+            <a:pPr marL="0" indent="0">
               <a:buNone/>
             </a:pPr>
             <a:r>
@@ -13781,4 +13959,319 @@
     </a:ext>
   </a:extLst>
 </a:theme>
+</file>
+
+<file path=ppt/theme/theme2.xml><?xml version="1.0" encoding="utf-8"?>
+<a:theme xmlns:a="http://schemas.openxmlformats.org/drawingml/2006/main" name="Office Theme">
+  <a:themeElements>
+    <a:clrScheme name="Office">
+      <a:dk1>
+        <a:sysClr val="windowText" lastClr="000000"/>
+      </a:dk1>
+      <a:lt1>
+        <a:sysClr val="window" lastClr="FFFFFF"/>
+      </a:lt1>
+      <a:dk2>
+        <a:srgbClr val="0E2841"/>
+      </a:dk2>
+      <a:lt2>
+        <a:srgbClr val="E8E8E8"/>
+      </a:lt2>
+      <a:accent1>
+        <a:srgbClr val="156082"/>
+      </a:accent1>
+      <a:accent2>
+        <a:srgbClr val="E97132"/>
+      </a:accent2>
+      <a:accent3>
+        <a:srgbClr val="196B24"/>
+      </a:accent3>
+      <a:accent4>
+        <a:srgbClr val="0F9ED5"/>
+      </a:accent4>
+      <a:accent5>
+        <a:srgbClr val="A02B93"/>
+      </a:accent5>
+      <a:accent6>
+        <a:srgbClr val="4EA72E"/>
+      </a:accent6>
+      <a:hlink>
+        <a:srgbClr val="467886"/>
+      </a:hlink>
+      <a:folHlink>
+        <a:srgbClr val="96607D"/>
+      </a:folHlink>
+    </a:clrScheme>
+    <a:fontScheme name="Office">
+      <a:majorFont>
+        <a:latin typeface="Aptos Display" panose="02110004020202020204"/>
+        <a:ea typeface=""/>
+        <a:cs typeface=""/>
+        <a:font script="Jpan" typeface="游ゴシック Light"/>
+        <a:font script="Hang" typeface="맑은 고딕"/>
+        <a:font script="Hans" typeface="等线 Light"/>
+        <a:font script="Hant" typeface="新細明體"/>
+        <a:font script="Arab" typeface="Times New Roman"/>
+        <a:font script="Hebr" typeface="Times New Roman"/>
+        <a:font script="Thai" typeface="Angsana New"/>
+        <a:font script="Ethi" typeface="Nyala"/>
+        <a:font script="Beng" typeface="Vrinda"/>
+        <a:font script="Gujr" typeface="Shruti"/>
+        <a:font script="Khmr" typeface="MoolBoran"/>
+        <a:font script="Knda" typeface="Tunga"/>
+        <a:font script="Guru" typeface="Raavi"/>
+        <a:font script="Cans" typeface="Euphemia"/>
+        <a:font script="Cher" typeface="Plantagenet Cherokee"/>
+        <a:font script="Yiii" typeface="Microsoft Yi Baiti"/>
+        <a:font script="Tibt" typeface="Microsoft Himalaya"/>
+        <a:font script="Thaa" typeface="MV Boli"/>
+        <a:font script="Deva" typeface="Mangal"/>
+        <a:font script="Telu" typeface="Gautami"/>
+        <a:font script="Taml" typeface="Latha"/>
+        <a:font script="Syrc" typeface="Estrangelo Edessa"/>
+        <a:font script="Orya" typeface="Kalinga"/>
+        <a:font script="Mlym" typeface="Kartika"/>
+        <a:font script="Laoo" typeface="DokChampa"/>
+        <a:font script="Sinh" typeface="Iskoola Pota"/>
+        <a:font script="Mong" typeface="Mongolian Baiti"/>
+        <a:font script="Viet" typeface="Times New Roman"/>
+        <a:font script="Uigh" typeface="Microsoft Uighur"/>
+        <a:font script="Geor" typeface="Sylfaen"/>
+        <a:font script="Armn" typeface="Arial"/>
+        <a:font script="Bugi" typeface="Leelawadee UI"/>
+        <a:font script="Bopo" typeface="Microsoft JhengHei"/>
+        <a:font script="Java" typeface="Javanese Text"/>
+        <a:font script="Lisu" typeface="Segoe UI"/>
+        <a:font script="Mymr" typeface="Myanmar Text"/>
+        <a:font script="Nkoo" typeface="Ebrima"/>
+        <a:font script="Olck" typeface="Nirmala UI"/>
+        <a:font script="Osma" typeface="Ebrima"/>
+        <a:font script="Phag" typeface="Phagspa"/>
+        <a:font script="Syrn" typeface="Estrangelo Edessa"/>
+        <a:font script="Syrj" typeface="Estrangelo Edessa"/>
+        <a:font script="Syre" typeface="Estrangelo Edessa"/>
+        <a:font script="Sora" typeface="Nirmala UI"/>
+        <a:font script="Tale" typeface="Microsoft Tai Le"/>
+        <a:font script="Talu" typeface="Microsoft New Tai Lue"/>
+        <a:font script="Tfng" typeface="Ebrima"/>
+      </a:majorFont>
+      <a:minorFont>
+        <a:latin typeface="Aptos" panose="02110004020202020204"/>
+        <a:ea typeface=""/>
+        <a:cs typeface=""/>
+        <a:font script="Jpan" typeface="游ゴシック"/>
+        <a:font script="Hang" typeface="맑은 고딕"/>
+        <a:font script="Hans" typeface="等线"/>
+        <a:font script="Hant" typeface="新細明體"/>
+        <a:font script="Arab" typeface="Arial"/>
+        <a:font script="Hebr" typeface="Arial"/>
+        <a:font script="Thai" typeface="Cordia New"/>
+        <a:font script="Ethi" typeface="Nyala"/>
+        <a:font script="Beng" typeface="Vrinda"/>
+        <a:font script="Gujr" typeface="Shruti"/>
+        <a:font script="Khmr" typeface="DaunPenh"/>
+        <a:font script="Knda" typeface="Tunga"/>
+        <a:font script="Guru" typeface="Raavi"/>
+        <a:font script="Cans" typeface="Euphemia"/>
+        <a:font script="Cher" typeface="Plantagenet Cherokee"/>
+        <a:font script="Yiii" typeface="Microsoft Yi Baiti"/>
+        <a:font script="Tibt" typeface="Microsoft Himalaya"/>
+        <a:font script="Thaa" typeface="MV Boli"/>
+        <a:font script="Deva" typeface="Mangal"/>
+        <a:font script="Telu" typeface="Gautami"/>
+        <a:font script="Taml" typeface="Latha"/>
+        <a:font script="Syrc" typeface="Estrangelo Edessa"/>
+        <a:font script="Orya" typeface="Kalinga"/>
+        <a:font script="Mlym" typeface="Kartika"/>
+        <a:font script="Laoo" typeface="DokChampa"/>
+        <a:font script="Sinh" typeface="Iskoola Pota"/>
+        <a:font script="Mong" typeface="Mongolian Baiti"/>
+        <a:font script="Viet" typeface="Arial"/>
+        <a:font script="Uigh" typeface="Microsoft Uighur"/>
+        <a:font script="Geor" typeface="Sylfaen"/>
+        <a:font script="Armn" typeface="Arial"/>
+        <a:font script="Bugi" typeface="Leelawadee UI"/>
+        <a:font script="Bopo" typeface="Microsoft JhengHei"/>
+        <a:font script="Java" typeface="Javanese Text"/>
+        <a:font script="Lisu" typeface="Segoe UI"/>
+        <a:font script="Mymr" typeface="Myanmar Text"/>
+        <a:font script="Nkoo" typeface="Ebrima"/>
+        <a:font script="Olck" typeface="Nirmala UI"/>
+        <a:font script="Osma" typeface="Ebrima"/>
+        <a:font script="Phag" typeface="Phagspa"/>
+        <a:font script="Syrn" typeface="Estrangelo Edessa"/>
+        <a:font script="Syrj" typeface="Estrangelo Edessa"/>
+        <a:font script="Syre" typeface="Estrangelo Edessa"/>
+        <a:font script="Sora" typeface="Nirmala UI"/>
+        <a:font script="Tale" typeface="Microsoft Tai Le"/>
+        <a:font script="Talu" typeface="Microsoft New Tai Lue"/>
+        <a:font script="Tfng" typeface="Ebrima"/>
+      </a:minorFont>
+    </a:fontScheme>
+    <a:fmtScheme name="Office">
+      <a:fillStyleLst>
+        <a:solidFill>
+          <a:schemeClr val="phClr"/>
+        </a:solidFill>
+        <a:gradFill rotWithShape="1">
+          <a:gsLst>
+            <a:gs pos="0">
+              <a:schemeClr val="phClr">
+                <a:lumMod val="110000"/>
+                <a:satMod val="105000"/>
+                <a:tint val="67000"/>
+              </a:schemeClr>
+            </a:gs>
+            <a:gs pos="50000">
+              <a:schemeClr val="phClr">
+                <a:lumMod val="105000"/>
+                <a:satMod val="103000"/>
+                <a:tint val="73000"/>
+              </a:schemeClr>
+            </a:gs>
+            <a:gs pos="100000">
+              <a:schemeClr val="phClr">
+                <a:lumMod val="105000"/>
+                <a:satMod val="109000"/>
+                <a:tint val="81000"/>
+              </a:schemeClr>
+            </a:gs>
+          </a:gsLst>
+          <a:lin ang="5400000" scaled="0"/>
+        </a:gradFill>
+        <a:gradFill rotWithShape="1">
+          <a:gsLst>
+            <a:gs pos="0">
+              <a:schemeClr val="phClr">
+                <a:satMod val="103000"/>
+                <a:lumMod val="102000"/>
+                <a:tint val="94000"/>
+              </a:schemeClr>
+            </a:gs>
+            <a:gs pos="50000">
+              <a:schemeClr val="phClr">
+                <a:satMod val="110000"/>
+                <a:lumMod val="100000"/>
+                <a:shade val="100000"/>
+              </a:schemeClr>
+            </a:gs>
+            <a:gs pos="100000">
+              <a:schemeClr val="phClr">
+                <a:lumMod val="99000"/>
+                <a:satMod val="120000"/>
+                <a:shade val="78000"/>
+              </a:schemeClr>
+            </a:gs>
+          </a:gsLst>
+          <a:lin ang="5400000" scaled="0"/>
+        </a:gradFill>
+      </a:fillStyleLst>
+      <a:lnStyleLst>
+        <a:ln w="12700" cap="flat" cmpd="sng" algn="ctr">
+          <a:solidFill>
+            <a:schemeClr val="phClr"/>
+          </a:solidFill>
+          <a:prstDash val="solid"/>
+          <a:miter lim="800000"/>
+        </a:ln>
+        <a:ln w="19050" cap="flat" cmpd="sng" algn="ctr">
+          <a:solidFill>
+            <a:schemeClr val="phClr"/>
+          </a:solidFill>
+          <a:prstDash val="solid"/>
+          <a:miter lim="800000"/>
+        </a:ln>
+        <a:ln w="25400" cap="flat" cmpd="sng" algn="ctr">
+          <a:solidFill>
+            <a:schemeClr val="phClr"/>
+          </a:solidFill>
+          <a:prstDash val="solid"/>
+          <a:miter lim="800000"/>
+        </a:ln>
+      </a:lnStyleLst>
+      <a:effectStyleLst>
+        <a:effectStyle>
+          <a:effectLst/>
+        </a:effectStyle>
+        <a:effectStyle>
+          <a:effectLst/>
+        </a:effectStyle>
+        <a:effectStyle>
+          <a:effectLst>
+            <a:outerShdw blurRad="57150" dist="19050" dir="5400000" algn="ctr" rotWithShape="0">
+              <a:srgbClr val="000000">
+                <a:alpha val="63000"/>
+              </a:srgbClr>
+            </a:outerShdw>
+          </a:effectLst>
+        </a:effectStyle>
+      </a:effectStyleLst>
+      <a:bgFillStyleLst>
+        <a:solidFill>
+          <a:schemeClr val="phClr"/>
+        </a:solidFill>
+        <a:solidFill>
+          <a:schemeClr val="phClr">
+            <a:tint val="95000"/>
+            <a:satMod val="170000"/>
+          </a:schemeClr>
+        </a:solidFill>
+        <a:gradFill rotWithShape="1">
+          <a:gsLst>
+            <a:gs pos="0">
+              <a:schemeClr val="phClr">
+                <a:tint val="93000"/>
+                <a:satMod val="150000"/>
+                <a:shade val="98000"/>
+                <a:lumMod val="102000"/>
+              </a:schemeClr>
+            </a:gs>
+            <a:gs pos="50000">
+              <a:schemeClr val="phClr">
+                <a:tint val="98000"/>
+                <a:satMod val="130000"/>
+                <a:shade val="90000"/>
+                <a:lumMod val="103000"/>
+              </a:schemeClr>
+            </a:gs>
+            <a:gs pos="100000">
+              <a:schemeClr val="phClr">
+                <a:shade val="63000"/>
+                <a:satMod val="120000"/>
+              </a:schemeClr>
+            </a:gs>
+          </a:gsLst>
+          <a:lin ang="5400000" scaled="0"/>
+        </a:gradFill>
+      </a:bgFillStyleLst>
+    </a:fmtScheme>
+  </a:themeElements>
+  <a:objectDefaults>
+    <a:lnDef>
+      <a:spPr/>
+      <a:bodyPr/>
+      <a:lstStyle/>
+      <a:style>
+        <a:lnRef idx="2">
+          <a:schemeClr val="accent1"/>
+        </a:lnRef>
+        <a:fillRef idx="0">
+          <a:schemeClr val="accent1"/>
+        </a:fillRef>
+        <a:effectRef idx="1">
+          <a:schemeClr val="accent1"/>
+        </a:effectRef>
+        <a:fontRef idx="minor">
+          <a:schemeClr val="tx1"/>
+        </a:fontRef>
+      </a:style>
+    </a:lnDef>
+  </a:objectDefaults>
+  <a:extraClrSchemeLst/>
+  <a:extLst>
+    <a:ext uri="{05A4C25C-085E-4340-85A3-A5531E510DB2}">
+      <thm15:themeFamily xmlns:thm15="http://schemas.microsoft.com/office/thememl/2012/main" name="Office Theme" id="{2E142A2C-CD16-42D6-873A-C26D2A0506FA}" vid="{1BDDFF52-6CD6-40A5-AB3C-68EB2F1E4D0A}"/>
+    </a:ext>
+  </a:extLst>
+</a:theme>
 </file>
--- a/docs/video_slides_draft.pptx
+++ b/docs/video_slides_draft.pptx
@@ -4,9 +4,6 @@
   <p:sldMasterIdLst>
     <p:sldMasterId id="2147483648" r:id="rId1"/>
   </p:sldMasterIdLst>
-  <p:notesMasterIdLst>
-    <p:notesMasterId r:id="rId16"/>
-  </p:notesMasterIdLst>
   <p:sldIdLst>
     <p:sldId id="256" r:id="rId2"/>
     <p:sldId id="257" r:id="rId3"/>
@@ -22,7 +19,12 @@
     <p:sldId id="267" r:id="rId13"/>
     <p:sldId id="268" r:id="rId14"/>
     <p:sldId id="269" r:id="rId15"/>
+    <p:sldId id="270" r:id="rId16"/>
+    <p:sldId id="271" r:id="rId17"/>
   </p:sldIdLst>
+  <p:notesMasterIdLst>
+    <p:notesMasterId r:id="rId18"/>
+  </p:notesMasterIdLst>
   <p:sldSz cx="12192000" cy="6858000"/>
   <p:notesSz cx="6858000" cy="12192000"/>
   <p:defaultTextStyle>
@@ -117,11 +119,6 @@
       </a:defRPr>
     </a:lvl9pPr>
   </p:defaultTextStyle>
-  <p:extLst>
-    <p:ext uri="{EFAFB233-063F-42B5-8137-9DF3F51BA10A}">
-      <p15:sldGuideLst xmlns:p15="http://schemas.microsoft.com/office/powerpoint/2012/main"/>
-    </p:ext>
-  </p:extLst>
 </p:presentation>
 </file>
 
@@ -147,10 +144,234 @@
           <a:chExt cx="0" cy="0"/>
         </a:xfrm>
       </p:grpSpPr>
+      <p:sp>
+        <p:nvSpPr>
+          <p:cNvPr id="2" name="Header Placeholder 1"/>
+          <p:cNvSpPr>
+            <a:spLocks noGrp="1"/>
+          </p:cNvSpPr>
+          <p:nvPr>
+            <p:ph type="hdr" sz="quarter"/>
+          </p:nvPr>
+        </p:nvSpPr>
+        <p:spPr>
+          <a:xfrm>
+            <a:off x="0" y="0"/>
+            <a:ext cx="2971800" cy="458788"/>
+          </a:xfrm>
+          <a:prstGeom prst="rect">
+            <a:avLst/>
+          </a:prstGeom>
+        </p:spPr>
+        <p:txBody>
+          <a:bodyPr vert="horz" lIns="91440" tIns="45720" rIns="91440" bIns="45720" rtlCol="0"/>
+          <a:lstStyle>
+            <a:lvl1pPr algn="l">
+              <a:defRPr sz="1200"/>
+            </a:lvl1pPr>
+          </a:lstStyle>
+          <a:p>
+            <a:endParaRPr lang="en-US"/>
+          </a:p>
+        </p:txBody>
+      </p:sp>
+      <p:sp>
+        <p:nvSpPr>
+          <p:cNvPr id="3" name="Date Placeholder 2"/>
+          <p:cNvSpPr>
+            <a:spLocks noGrp="1"/>
+          </p:cNvSpPr>
+          <p:nvPr>
+            <p:ph type="dt" idx="1"/>
+          </p:nvPr>
+        </p:nvSpPr>
+        <p:spPr>
+          <a:xfrm>
+            <a:off x="3884613" y="0"/>
+            <a:ext cx="2971800" cy="458788"/>
+          </a:xfrm>
+          <a:prstGeom prst="rect">
+            <a:avLst/>
+          </a:prstGeom>
+        </p:spPr>
+        <p:txBody>
+          <a:bodyPr vert="horz" lIns="91440" tIns="45720" rIns="91440" bIns="45720" rtlCol="0"/>
+          <a:lstStyle>
+            <a:lvl1pPr algn="r">
+              <a:defRPr sz="1200"/>
+            </a:lvl1pPr>
+          </a:lstStyle>
+          <a:p>
+            <a:fld id="{5282F153-3F37-0F45-9E97-73ACFA13230C}" type="datetimeFigureOut">
+              <a:rPr lang="en-US"/>
+              <a:t>7/23/19</a:t>
+            </a:fld>
+            <a:endParaRPr lang="en-US"/>
+          </a:p>
+        </p:txBody>
+      </p:sp>
+      <p:sp>
+        <p:nvSpPr>
+          <p:cNvPr id="4" name="Slide Image Placeholder 3"/>
+          <p:cNvSpPr>
+            <a:spLocks noGrp="1" noRot="1" noChangeAspect="1"/>
+          </p:cNvSpPr>
+          <p:nvPr>
+            <p:ph type="sldImg" idx="2"/>
+          </p:nvPr>
+        </p:nvSpPr>
+        <p:spPr>
+          <a:xfrm>
+            <a:off x="685800" y="1143000"/>
+            <a:ext cx="5486400" cy="3086100"/>
+          </a:xfrm>
+          <a:prstGeom prst="rect">
+            <a:avLst/>
+          </a:prstGeom>
+          <a:noFill/>
+          <a:ln w="12700">
+            <a:solidFill>
+              <a:prstClr val="black"/>
+            </a:solidFill>
+          </a:ln>
+        </p:spPr>
+        <p:txBody>
+          <a:bodyPr vert="horz" lIns="91440" tIns="45720" rIns="91440" bIns="45720" rtlCol="0" anchor="ctr"/>
+          <a:lstStyle/>
+          <a:p>
+            <a:endParaRPr lang="en-US"/>
+          </a:p>
+        </p:txBody>
+      </p:sp>
+      <p:sp>
+        <p:nvSpPr>
+          <p:cNvPr id="5" name="Notes Placeholder 4"/>
+          <p:cNvSpPr>
+            <a:spLocks noGrp="1"/>
+          </p:cNvSpPr>
+          <p:nvPr>
+            <p:ph type="body" sz="quarter" idx="3"/>
+          </p:nvPr>
+        </p:nvSpPr>
+        <p:spPr>
+          <a:xfrm>
+            <a:off x="685800" y="4400550"/>
+            <a:ext cx="5486400" cy="3600450"/>
+          </a:xfrm>
+          <a:prstGeom prst="rect">
+            <a:avLst/>
+          </a:prstGeom>
+        </p:spPr>
+        <p:txBody>
+          <a:bodyPr vert="horz" lIns="91440" tIns="45720" rIns="91440" bIns="45720" rtlCol="0"/>
+          <a:lstStyle/>
+          <a:p>
+            <a:pPr lvl="0"/>
+            <a:r>
+              <a:rPr lang="en-US"/>
+              <a:t>Click to edit Master text styles</a:t>
+            </a:r>
+          </a:p>
+          <a:p>
+            <a:pPr lvl="1"/>
+            <a:r>
+              <a:rPr lang="en-US"/>
+              <a:t>Second level</a:t>
+            </a:r>
+          </a:p>
+          <a:p>
+            <a:pPr lvl="2"/>
+            <a:r>
+              <a:rPr lang="en-US"/>
+              <a:t>Third level</a:t>
+            </a:r>
+          </a:p>
+          <a:p>
+            <a:pPr lvl="3"/>
+            <a:r>
+              <a:rPr lang="en-US"/>
+              <a:t>Fourth level</a:t>
+            </a:r>
+          </a:p>
+          <a:p>
+            <a:pPr lvl="4"/>
+            <a:r>
+              <a:rPr lang="en-US"/>
+              <a:t>Fifth level</a:t>
+            </a:r>
+          </a:p>
+        </p:txBody>
+      </p:sp>
+      <p:sp>
+        <p:nvSpPr>
+          <p:cNvPr id="6" name="Footer Placeholder 5"/>
+          <p:cNvSpPr>
+            <a:spLocks noGrp="1"/>
+          </p:cNvSpPr>
+          <p:nvPr>
+            <p:ph type="ftr" sz="quarter" idx="4"/>
+          </p:nvPr>
+        </p:nvSpPr>
+        <p:spPr>
+          <a:xfrm>
+            <a:off x="0" y="8685213"/>
+            <a:ext cx="2971800" cy="458787"/>
+          </a:xfrm>
+          <a:prstGeom prst="rect">
+            <a:avLst/>
+          </a:prstGeom>
+        </p:spPr>
+        <p:txBody>
+          <a:bodyPr vert="horz" lIns="91440" tIns="45720" rIns="91440" bIns="45720" rtlCol="0" anchor="b"/>
+          <a:lstStyle>
+            <a:lvl1pPr algn="l">
+              <a:defRPr sz="1200"/>
+            </a:lvl1pPr>
+          </a:lstStyle>
+          <a:p>
+            <a:endParaRPr lang="en-US"/>
+          </a:p>
+        </p:txBody>
+      </p:sp>
+      <p:sp>
+        <p:nvSpPr>
+          <p:cNvPr id="7" name="Slide Number Placeholder 6"/>
+          <p:cNvSpPr>
+            <a:spLocks noGrp="1"/>
+          </p:cNvSpPr>
+          <p:nvPr>
+            <p:ph type="sldNum" sz="quarter" idx="5"/>
+          </p:nvPr>
+        </p:nvSpPr>
+        <p:spPr>
+          <a:xfrm>
+            <a:off x="3884613" y="8685213"/>
+            <a:ext cx="2971800" cy="458787"/>
+          </a:xfrm>
+          <a:prstGeom prst="rect">
+            <a:avLst/>
+          </a:prstGeom>
+        </p:spPr>
+        <p:txBody>
+          <a:bodyPr vert="horz" lIns="91440" tIns="45720" rIns="91440" bIns="45720" rtlCol="0" anchor="b"/>
+          <a:lstStyle>
+            <a:lvl1pPr algn="r">
+              <a:defRPr sz="1200"/>
+            </a:lvl1pPr>
+          </a:lstStyle>
+          <a:p>
+            <a:fld id="{CE5E9CC1-C706-0F49-92D6-E571CC5EEA8F}" type="slidenum">
+              <a:rPr lang="en-US"/>
+              <a:t>‹#›</a:t>
+            </a:fld>
+            <a:endParaRPr lang="en-US"/>
+          </a:p>
+        </p:txBody>
+      </p:sp>
     </p:spTree>
     <p:extLst>
       <p:ext uri="{BB962C8B-B14F-4D97-AF65-F5344CB8AC3E}">
-        <p14:creationId xmlns:p14="http://schemas.microsoft.com/office/powerpoint/2010/main" val="2793169109"/>
+        <p14:creationId xmlns:p14="http://schemas.microsoft.com/office/powerpoint/2010/main" val="1024086991"/>
       </p:ext>
     </p:extLst>
   </p:cSld>
@@ -298,6 +519,7 @@
               <a:rPr lang="en-US" dirty="0"/>
               <a:t>Title card. Subtitle deliberately names the four core artifact classes - the deck's first echo of the artifact-class table (slide 6). Optional footer: INSPECTA program context.</a:t>
             </a:r>
+            <a:endParaRPr lang="en-US" dirty="0"/>
           </a:p>
         </p:txBody>
       </p:sp>
@@ -383,9 +605,10 @@
           <a:p>
             <a:r>
               <a:rPr lang="en-US" dirty="0"/>
-              <a:t>Take A (benign range, --drift range): Table A-12 ceiling 102 -&gt; 103 in the shared library -&gt; appraisal fails, gumbo_library attributed, all else green (dwell: 'sanction, not semantics') -&gt; ruling diff -&gt; bless -&gt; spec-first green -&gt; promote (codegen; speed-ramp) -&gt; re-proves ALL GREEN; offered diff = regenerated shared-library constant. Take B (breaking): escalation with attribution -&gt; ruling diff (linger) -&gt; bless -&gt; promote (speed-ramp) -&gt; gold moves -&gt; Verus tier RED; end on the honest-RED checklist. VO bridge: 'same lifecycle, opposite verdicts - authority chooses the baseline; measurement alone decides whether it holds.'
+              <a:t>Single benign beat (per user deck edit, restored 2026-08-27): the Table A-12 upper-alarm ceiling widened 102 -&gt; 103 in the shared GUMBO library constant. Beats: appraisal fails, gumbo_library attributed, all else green (dwell: 'sanction, not semantics') -&gt; ruling diff -&gt; bless -&gt; spec-first green -&gt; promote (real codegen; speed-ramp) -&gt; re-proves ALL GREEN; offered diff = the regenerated shared-library constant. The breaking spec beat lives elsewhere (breaking-impl is Act V/scene 2, breaking-contract is Act IV/scene 14), so Act II stays the clean benign-model story.
 Watch-for line doubles as the VO opener over the terminal cut. Full runbook: docs/video_recording_plan.md.</a:t>
             </a:r>
+            <a:endParaRPr lang="en-US" dirty="0"/>
           </a:p>
         </p:txBody>
       </p:sp>
@@ -471,9 +694,10 @@
           <a:p>
             <a:r>
               <a:rPr lang="en-US" dirty="0"/>
-              <a:t>Beats: dummy-bad-impl diff (take the [v]iew - VSCode diff D1 on camera) -&gt; contracts-intact rung exhausts -&gt; impl rung restores crate-scoped -&gt; restart -&gt; re-attested clean.
+              <a:t>Beats: equivalent NORMAL-mode guard rewrite (x&gt;y -&gt; y&lt;x), outside every marker block -&gt; l1a hash moves -&gt; files entry passes via l2 refinement (slices intact) -&gt; the l1b contracts entry stays clean -&gt; confirmation chain RE-VERIFIES the rewrite green. The mirror of Act II's benign spec beat, one artifact class down: a developer-owned region has no blessed bytes to match, so its attested properties are contracts (intact) + provability (re-verified live).
 Watch-for line doubles as the VO opener over the terminal cut. Full runbook: docs/video_recording_plan.md.</a:t>
             </a:r>
+            <a:endParaRPr lang="en-US" dirty="0"/>
           </a:p>
         </p:txBody>
       </p:sp>
@@ -559,9 +783,10 @@
           <a:p>
             <a:r>
               <a:rPr lang="en-US" dirty="0"/>
-              <a:t>Scene 6 beats: three tampers, three attributed refusals (signature -&gt; anchor -&gt; derivability); optionally the flipped-evidence-byte diff on camera. Scene 7 beats: wrapper edit (take the [v]iew, diff D10) -&gt; readiness still passes -&gt; tool hash refutes, every proof cell poisons to ? - dwell, this is the act's money shot. --restore-tools recovery in VO only.
+              <a:t>The report emits NO slice for compute_cases realizations, so the weakened REQ_MHS_2 lands between l2 slices. Beats: launder (weaken REQ_MHS_2 ensures + invert impl) -&gt; cargo-verus SUCCEEDS (self-consistent) -&gt; the l1b MARKER tier (a new Copland protocol: readfile_marker_range over every contract-block byte) refuses -&gt; its repair rung splices the golden contract back -&gt; the restored TRUE contract refutes the still-inverted impl: end on the exposed Verus refusal (verus_targ Appraisal was not successful). Discovered while building this demo; the marker-coverage lint now enforces the invariant. Do NOT auto-repair to green - the exposure IS the beat; the impl repair is Act V's ladder. Slide-C candidate row.
 Watch-for line doubles as the VO opener over the terminal cut. Full runbook: docs/video_recording_plan.md.</a:t>
             </a:r>
+            <a:endParaRPr lang="en-US" dirty="0"/>
           </a:p>
         </p:txBody>
       </p:sp>
@@ -647,9 +872,10 @@
           <a:p>
             <a:r>
               <a:rPr lang="en-US" dirty="0"/>
-              <a:t>Beats: inverted-FFI diff (take the [v]iew, diff D18 - 'see how innocent it looks') -&gt; proofs pass, cheat scan silent -&gt; gensrc byte anchor refuses, naming the file -&gt; diagnosis rung classifies -&gt; repair by regeneration (second speed-ramp stretch) -&gt; re-attested clean. Final checklist doubles as the coverage beat's background; close with one sentence naming scenes 9-11 (capstone slide C carries that taxonomy).
+              <a:t>Beats: dummy-bad-impl diff (take the [v]iew - VSCode diff D1 on camera) -&gt; contracts-intact rung exhausts -&gt; impl rung restores crate-scoped -&gt; restart -&gt; re-attested clean.
 Watch-for line doubles as the VO opener over the terminal cut. Full runbook: docs/video_recording_plan.md.</a:t>
             </a:r>
+            <a:endParaRPr lang="en-US" dirty="0"/>
           </a:p>
         </p:txBody>
       </p:sp>
@@ -735,9 +961,10 @@
           <a:p>
             <a:r>
               <a:rPr lang="en-US" dirty="0"/>
-              <a:t>Collection point for every reference in the deck - keep this slide current as sections are added (isolette slide carries the K-State + AR-08-32 citations inline; Copland/Verus/seL4 seeded here ahead of their sections).
-DOIs on record in docs/video_slide_drafts.md.</a:t>
-            </a:r>
+              <a:t>Scene 6 beats: three tampers, three attributed refusals (signature -&gt; anchor -&gt; derivability); optionally the flipped-evidence-byte diff on camera. Scene 7 beats: wrapper edit (take the [v]iew, diff D10) -&gt; readiness still passes -&gt; tool hash refutes, every proof cell poisons to ? - dwell, this is the act's money shot. --restore-tools recovery in VO only.
+Watch-for line doubles as the VO opener over the terminal cut. Full runbook: docs/video_recording_plan.md.</a:t>
+            </a:r>
+            <a:endParaRPr lang="en-US" dirty="0"/>
           </a:p>
         </p:txBody>
       </p:sp>
@@ -759,6 +986,184 @@
             <a:fld id="{F7021451-1387-4CA6-816F-3879F97B5CBC}" type="slidenum">
               <a:rPr lang="en-US"/>
               <a:t>14</a:t>
+            </a:fld>
+            <a:endParaRPr lang="en-US"/>
+          </a:p>
+        </p:txBody>
+      </p:sp>
+    </p:spTree>
+    <p:extLst>
+      <p:ext uri="{BB962C8B-B14F-4D97-AF65-F5344CB8AC3E}">
+        <p14:creationId xmlns:p14="http://schemas.microsoft.com/office/powerpoint/2010/main" val="1024086991"/>
+      </p:ext>
+    </p:extLst>
+  </p:cSld>
+  <p:clrMapOvr>
+    <a:masterClrMapping/>
+  </p:clrMapOvr>
+</p:notes>
+</file>
+
+<file path=ppt/notesSlides/notesSlide15.xml><?xml version="1.0" encoding="utf-8"?>
+<p:notes xmlns:a="http://schemas.openxmlformats.org/drawingml/2006/main" xmlns:r="http://schemas.openxmlformats.org/officeDocument/2006/relationships" xmlns:p="http://schemas.openxmlformats.org/presentationml/2006/main">
+  <p:cSld>
+    <p:spTree>
+      <p:nvGrpSpPr>
+        <p:cNvPr id="1" name=""/>
+        <p:cNvGrpSpPr/>
+        <p:nvPr/>
+      </p:nvGrpSpPr>
+      <p:grpSpPr>
+        <a:xfrm>
+          <a:off x="0" y="0"/>
+          <a:ext cx="0" cy="0"/>
+          <a:chOff x="0" y="0"/>
+          <a:chExt cx="0" cy="0"/>
+        </a:xfrm>
+      </p:grpSpPr>
+      <p:sp>
+        <p:nvSpPr>
+          <p:cNvPr id="2" name="Slide Image Placeholder 1"/>
+          <p:cNvSpPr>
+            <a:spLocks noGrp="1" noRot="1" noChangeAspect="1"/>
+          </p:cNvSpPr>
+          <p:nvPr>
+            <p:ph type="sldImg"/>
+          </p:nvPr>
+        </p:nvSpPr>
+        <p:spPr/>
+      </p:sp>
+      <p:sp>
+        <p:nvSpPr>
+          <p:cNvPr id="3" name="Notes Placeholder 2"/>
+          <p:cNvSpPr>
+            <a:spLocks noGrp="1"/>
+          </p:cNvSpPr>
+          <p:nvPr>
+            <p:ph type="body" idx="1"/>
+          </p:nvPr>
+        </p:nvSpPr>
+        <p:spPr/>
+        <p:txBody>
+          <a:bodyPr/>
+          <a:lstStyle/>
+          <a:p>
+            <a:r>
+              <a:rPr lang="en-US" dirty="0"/>
+              <a:t>Beats: inverted-FFI diff (take the [v]iew, diff D18 - 'see how innocent it looks') -&gt; proofs pass, cheat scan silent -&gt; gensrc byte anchor refuses, naming the file -&gt; diagnosis rung classifies -&gt; repair by regeneration (second speed-ramp stretch) -&gt; re-attested clean. Final checklist doubles as the coverage beat's background; close with one sentence naming scenes 9-11 (capstone slide C carries that taxonomy).
+Watch-for line doubles as the VO opener over the terminal cut. Full runbook: docs/video_recording_plan.md.</a:t>
+            </a:r>
+            <a:endParaRPr lang="en-US" dirty="0"/>
+          </a:p>
+        </p:txBody>
+      </p:sp>
+      <p:sp>
+        <p:nvSpPr>
+          <p:cNvPr id="4" name="Slide Number Placeholder 3"/>
+          <p:cNvSpPr>
+            <a:spLocks noGrp="1"/>
+          </p:cNvSpPr>
+          <p:nvPr>
+            <p:ph type="sldNum" sz="quarter" idx="10"/>
+          </p:nvPr>
+        </p:nvSpPr>
+        <p:spPr/>
+        <p:txBody>
+          <a:bodyPr/>
+          <a:lstStyle/>
+          <a:p>
+            <a:fld id="{F7021451-1387-4CA6-816F-3879F97B5CBC}" type="slidenum">
+              <a:rPr lang="en-US"/>
+              <a:t>15</a:t>
+            </a:fld>
+            <a:endParaRPr lang="en-US"/>
+          </a:p>
+        </p:txBody>
+      </p:sp>
+    </p:spTree>
+    <p:extLst>
+      <p:ext uri="{BB962C8B-B14F-4D97-AF65-F5344CB8AC3E}">
+        <p14:creationId xmlns:p14="http://schemas.microsoft.com/office/powerpoint/2010/main" val="1024086991"/>
+      </p:ext>
+    </p:extLst>
+  </p:cSld>
+  <p:clrMapOvr>
+    <a:masterClrMapping/>
+  </p:clrMapOvr>
+</p:notes>
+</file>
+
+<file path=ppt/notesSlides/notesSlide16.xml><?xml version="1.0" encoding="utf-8"?>
+<p:notes xmlns:a="http://schemas.openxmlformats.org/drawingml/2006/main" xmlns:r="http://schemas.openxmlformats.org/officeDocument/2006/relationships" xmlns:p="http://schemas.openxmlformats.org/presentationml/2006/main">
+  <p:cSld>
+    <p:spTree>
+      <p:nvGrpSpPr>
+        <p:cNvPr id="1" name=""/>
+        <p:cNvGrpSpPr/>
+        <p:nvPr/>
+      </p:nvGrpSpPr>
+      <p:grpSpPr>
+        <a:xfrm>
+          <a:off x="0" y="0"/>
+          <a:ext cx="0" cy="0"/>
+          <a:chOff x="0" y="0"/>
+          <a:chExt cx="0" cy="0"/>
+        </a:xfrm>
+      </p:grpSpPr>
+      <p:sp>
+        <p:nvSpPr>
+          <p:cNvPr id="2" name="Slide Image Placeholder 1"/>
+          <p:cNvSpPr>
+            <a:spLocks noGrp="1" noRot="1" noChangeAspect="1"/>
+          </p:cNvSpPr>
+          <p:nvPr>
+            <p:ph type="sldImg"/>
+          </p:nvPr>
+        </p:nvSpPr>
+        <p:spPr/>
+      </p:sp>
+      <p:sp>
+        <p:nvSpPr>
+          <p:cNvPr id="3" name="Notes Placeholder 2"/>
+          <p:cNvSpPr>
+            <a:spLocks noGrp="1"/>
+          </p:cNvSpPr>
+          <p:nvPr>
+            <p:ph type="body" idx="1"/>
+          </p:nvPr>
+        </p:nvSpPr>
+        <p:spPr/>
+        <p:txBody>
+          <a:bodyPr/>
+          <a:lstStyle/>
+          <a:p>
+            <a:r>
+              <a:rPr lang="en-US" dirty="0"/>
+              <a:t>Collection point for every reference in the deck - keep this slide current as sections are added (isolette slide carries the K-State + AR-08-32 citations inline; Copland/Verus/seL4 seeded here ahead of their sections).
+DOIs on record in docs/video_slide_drafts.md.</a:t>
+            </a:r>
+            <a:endParaRPr lang="en-US" dirty="0"/>
+          </a:p>
+        </p:txBody>
+      </p:sp>
+      <p:sp>
+        <p:nvSpPr>
+          <p:cNvPr id="4" name="Slide Number Placeholder 3"/>
+          <p:cNvSpPr>
+            <a:spLocks noGrp="1"/>
+          </p:cNvSpPr>
+          <p:nvPr>
+            <p:ph type="sldNum" sz="quarter" idx="10"/>
+          </p:nvPr>
+        </p:nvSpPr>
+        <p:spPr/>
+        <p:txBody>
+          <a:bodyPr/>
+          <a:lstStyle/>
+          <a:p>
+            <a:fld id="{F7021451-1387-4CA6-816F-3879F97B5CBC}" type="slidenum">
+              <a:rPr lang="en-US"/>
+              <a:t>16</a:t>
             </a:fld>
             <a:endParaRPr lang="en-US"/>
           </a:p>
@@ -828,6 +1233,7 @@
 Subline payoffs: developer claims -&gt; scenes 5/7; untrusted tools -&gt; scene 7; LLM outputs -&gt; capstone slides A/B; cached verdicts -&gt; scene 11.
 Visual TODO: three-stage widening-scope progression (boot-time -&gt; layered runtime -&gt; lifecycle loop) to replace/join the bullets.</a:t>
             </a:r>
+            <a:endParaRPr lang="en-US" dirty="0"/>
           </a:p>
         </p:txBody>
       </p:sp>
@@ -916,6 +1322,7 @@
               <a:t>~15 seconds on first appearance; afterwards it rides on transition slides for free.
 Design decision: one master/layout holds the strip text so a section rename is a single edit. Header titles are provisional.</a:t>
             </a:r>
+            <a:endParaRPr lang="en-US" dirty="0"/>
           </a:p>
         </p:txBody>
       </p:sp>
@@ -1006,6 +1413,7 @@
 Snippet source: tests/fixtures/isolette_sysmlv2_rust_props/term.json, rendered in concrete syntax (branches flattened, target IDs shortened to file names - cosmetic).
 The verus-tier measure-then-use phrase is deliberately held back for scene 7's reveal.</a:t>
             </a:r>
+            <a:endParaRPr lang="en-US" dirty="0"/>
           </a:p>
         </p:txBody>
       </p:sp>
@@ -1097,6 +1505,7 @@
 Speaker-note-only details (cut from the slide): on_pass/on_fail dispatch mechanics, success-driven handoff for component-wise entries, max_attempts per rung.
 The legend earns its space: every scene's checklist frames render through these glyphs.</a:t>
             </a:r>
+            <a:endParaRPr lang="en-US" dirty="0"/>
           </a:p>
         </p:txBody>
       </p:sp>
@@ -1187,6 +1596,7 @@
 Predicate and restart-episode are deliberately OFF this slide (parked; placement TBD - possibly an 'evaluation primitives' strip). If asked: a predicate is the judge (one evaluation = one attestation episode), restart-episode is the freshness primitive (forget memoized verdicts, reset, re-evaluate).
 Also deliberately excluded (README-level detail): partition mechanics, component-wise entries and success handoff, dispatch latching, max_cycles.</a:t>
             </a:r>
+            <a:endParaRPr lang="en-US" dirty="0"/>
           </a:p>
         </p:txBody>
       </p:sp>
@@ -1276,6 +1686,7 @@
 Spoken hook (never on-slide text): 'This table is deliberately incomplete - the demo will show why.' The cheat / sysproof / gensrc tiers are capstone slide C's punchline: attacks forced them into existence. Do not pre-introduce them here.
 Same column shape (class -&gt; measured how -&gt; judged by -&gt; repair) as capstone slide B, so the audience recognizes it when it returns.</a:t>
             </a:r>
+            <a:endParaRPr lang="en-US" dirty="0"/>
           </a:p>
         </p:txBody>
       </p:sp>
@@ -1367,6 +1778,7 @@
 Held back on purpose (scene 9's reveal): cheat-tier depth stats - 86 blessed external_body sites, 10 scanned crates.
 Numbers verified exact 2026-08-25 (l1a targets, l2 slices, verus term, pub-proof-fn count); provision-dependent - re-verify before recording day.</a:t>
             </a:r>
+            <a:endParaRPr lang="en-US" dirty="0"/>
           </a:p>
         </p:txBody>
       </p:sp>
@@ -1455,6 +1867,7 @@
               <a:t>Beats: readiness gate green -&gt; one full episode -&gt; per-crate checklist all green. Dwell on the final checklist - it is the frame every later refusal is compared against.
 Watch-for line doubles as the VO opener over the terminal cut. Full runbook: docs/video_recording_plan.md.</a:t>
             </a:r>
+            <a:endParaRPr lang="en-US" dirty="0"/>
           </a:p>
         </p:txBody>
       </p:sp>
@@ -1527,11 +1940,6 @@
 <file path=ppt/slideMasters/slideMaster1.xml><?xml version="1.0" encoding="utf-8"?>
 <p:sldMaster xmlns:a="http://schemas.openxmlformats.org/drawingml/2006/main" xmlns:r="http://schemas.openxmlformats.org/officeDocument/2006/relationships" xmlns:p="http://schemas.openxmlformats.org/presentationml/2006/main">
   <p:cSld>
-    <p:bg>
-      <p:bgRef idx="1001">
-        <a:schemeClr val="bg1"/>
-      </p:bgRef>
-    </p:bg>
     <p:spTree>
       <p:nvGrpSpPr>
         <p:cNvPr id="1" name=""/>
@@ -1814,7 +2222,6 @@
         <a:solidFill>
           <a:srgbClr val="1E2761"/>
         </a:solidFill>
-        <a:effectLst/>
       </p:bgPr>
     </p:bg>
     <p:spTree>
@@ -1852,7 +2259,7 @@
           <a:bodyPr wrap="square" lIns="0" tIns="0" rIns="0" bIns="0" rtlCol="0" anchor="ctr"/>
           <a:lstStyle/>
           <a:p>
-            <a:pPr marL="0" indent="0" algn="l">
+            <a:pPr algn="l" indent="0" marL="0">
               <a:buNone/>
             </a:pPr>
             <a:r>
@@ -1891,7 +2298,7 @@
           <a:bodyPr wrap="square" lIns="0" tIns="0" rIns="0" bIns="0" rtlCol="0" anchor="ctr"/>
           <a:lstStyle/>
           <a:p>
-            <a:pPr marL="0" indent="0" algn="l">
+            <a:pPr algn="l" indent="0" marL="0">
               <a:buNone/>
             </a:pPr>
             <a:r>
@@ -1930,7 +2337,7 @@
           <a:bodyPr wrap="square" lIns="0" tIns="0" rIns="0" bIns="0" rtlCol="0" anchor="ctr"/>
           <a:lstStyle/>
           <a:p>
-            <a:pPr marL="0" indent="0" algn="l">
+            <a:pPr algn="l" indent="0" marL="0">
               <a:buNone/>
             </a:pPr>
             <a:r>
@@ -1964,7 +2371,6 @@
         <a:solidFill>
           <a:srgbClr val="FFFFFF"/>
         </a:solidFill>
-        <a:effectLst/>
       </p:bgPr>
     </p:bg>
     <p:spTree>
@@ -2002,13 +2408,6 @@
           </a:solidFill>
           <a:ln/>
         </p:spPr>
-        <p:txBody>
-          <a:bodyPr/>
-          <a:lstStyle/>
-          <a:p>
-            <a:endParaRPr lang="en-US"/>
-          </a:p>
-        </p:txBody>
       </p:sp>
       <p:sp>
         <p:nvSpPr>
@@ -2031,7 +2430,7 @@
           <a:bodyPr wrap="square" lIns="254" tIns="254" rIns="254" bIns="254" rtlCol="0" anchor="ctr"/>
           <a:lstStyle/>
           <a:p>
-            <a:pPr marL="0" indent="0" algn="ctr">
+            <a:pPr algn="ctr" indent="0" marL="0">
               <a:buNone/>
             </a:pPr>
             <a:r>
@@ -2070,13 +2469,6 @@
           </a:solidFill>
           <a:ln/>
         </p:spPr>
-        <p:txBody>
-          <a:bodyPr/>
-          <a:lstStyle/>
-          <a:p>
-            <a:endParaRPr lang="en-US"/>
-          </a:p>
-        </p:txBody>
       </p:sp>
       <p:sp>
         <p:nvSpPr>
@@ -2099,7 +2491,7 @@
           <a:bodyPr wrap="square" lIns="254" tIns="254" rIns="254" bIns="254" rtlCol="0" anchor="ctr"/>
           <a:lstStyle/>
           <a:p>
-            <a:pPr marL="0" indent="0" algn="ctr">
+            <a:pPr algn="ctr" indent="0" marL="0">
               <a:buNone/>
             </a:pPr>
             <a:r>
@@ -2116,7 +2508,7 @@
             <a:endParaRPr lang="en-US" sz="900" dirty="0"/>
           </a:p>
           <a:p>
-            <a:pPr marL="0" indent="0" algn="ctr">
+            <a:pPr algn="ctr" indent="0" marL="0">
               <a:buNone/>
             </a:pPr>
             <a:r>
@@ -2155,13 +2547,6 @@
           </a:solidFill>
           <a:ln/>
         </p:spPr>
-        <p:txBody>
-          <a:bodyPr/>
-          <a:lstStyle/>
-          <a:p>
-            <a:endParaRPr lang="en-US"/>
-          </a:p>
-        </p:txBody>
       </p:sp>
       <p:sp>
         <p:nvSpPr>
@@ -2184,7 +2569,7 @@
           <a:bodyPr wrap="square" lIns="254" tIns="254" rIns="254" bIns="254" rtlCol="0" anchor="ctr"/>
           <a:lstStyle/>
           <a:p>
-            <a:pPr marL="0" indent="0" algn="ctr">
+            <a:pPr algn="ctr" indent="0" marL="0">
               <a:buNone/>
             </a:pPr>
             <a:r>
@@ -2223,13 +2608,6 @@
           </a:solidFill>
           <a:ln/>
         </p:spPr>
-        <p:txBody>
-          <a:bodyPr/>
-          <a:lstStyle/>
-          <a:p>
-            <a:endParaRPr lang="en-US"/>
-          </a:p>
-        </p:txBody>
       </p:sp>
       <p:sp>
         <p:nvSpPr>
@@ -2252,7 +2630,7 @@
           <a:bodyPr wrap="square" lIns="254" tIns="254" rIns="254" bIns="254" rtlCol="0" anchor="ctr"/>
           <a:lstStyle/>
           <a:p>
-            <a:pPr marL="0" indent="0" algn="ctr">
+            <a:pPr algn="ctr" indent="0" marL="0">
               <a:buNone/>
             </a:pPr>
             <a:r>
@@ -2291,13 +2669,6 @@
           </a:solidFill>
           <a:ln/>
         </p:spPr>
-        <p:txBody>
-          <a:bodyPr/>
-          <a:lstStyle/>
-          <a:p>
-            <a:endParaRPr lang="en-US"/>
-          </a:p>
-        </p:txBody>
       </p:sp>
       <p:sp>
         <p:nvSpPr>
@@ -2320,7 +2691,7 @@
           <a:bodyPr wrap="square" lIns="254" tIns="254" rIns="254" bIns="254" rtlCol="0" anchor="ctr"/>
           <a:lstStyle/>
           <a:p>
-            <a:pPr marL="0" indent="0" algn="ctr">
+            <a:pPr algn="ctr" indent="0" marL="0">
               <a:buNone/>
             </a:pPr>
             <a:r>
@@ -2359,11 +2730,11 @@
           <a:bodyPr wrap="square" lIns="0" tIns="0" rIns="0" bIns="0" rtlCol="0" anchor="ctr"/>
           <a:lstStyle/>
           <a:p>
-            <a:pPr marL="0" indent="0">
-              <a:buNone/>
-            </a:pPr>
-            <a:r>
-              <a:rPr lang="en-US" sz="1800" b="1" kern="0" spc="300" dirty="0">
+            <a:pPr indent="0" marL="0">
+              <a:buNone/>
+            </a:pPr>
+            <a:r>
+              <a:rPr lang="en-US" sz="1800" b="1" spc="300" kern="0" dirty="0">
                 <a:solidFill>
                   <a:srgbClr val="5A6478"/>
                 </a:solidFill>
@@ -2398,11 +2769,11 @@
           <a:bodyPr wrap="square" lIns="0" tIns="0" rIns="0" bIns="0" rtlCol="0" anchor="ctr"/>
           <a:lstStyle/>
           <a:p>
-            <a:pPr marL="0" indent="0">
-              <a:buNone/>
-            </a:pPr>
-            <a:r>
-              <a:rPr lang="en-US" sz="4000" b="1">
+            <a:pPr indent="0" marL="0">
+              <a:buNone/>
+            </a:pPr>
+            <a:r>
+              <a:rPr lang="en-US" sz="4000" b="1" dirty="0">
                 <a:solidFill>
                   <a:srgbClr val="1E2761"/>
                 </a:solidFill>
@@ -2410,18 +2781,7 @@
                 <a:ea typeface="Cambria" pitchFamily="34" charset="-122"/>
                 <a:cs typeface="Cambria" pitchFamily="34" charset="-120"/>
               </a:rPr>
-              <a:t>Model </a:t>
-            </a:r>
-            <a:r>
-              <a:rPr lang="en-US" sz="4000" b="1" dirty="0">
-                <a:solidFill>
-                  <a:srgbClr val="1E2761"/>
-                </a:solidFill>
-                <a:latin typeface="Cambria" pitchFamily="34" charset="0"/>
-                <a:ea typeface="Cambria" pitchFamily="34" charset="-122"/>
-                <a:cs typeface="Cambria" pitchFamily="34" charset="-120"/>
-              </a:rPr>
-              <a:t>drift: benign, re-blessed</a:t>
+              <a:t>Spec drift: benign, promote then re-verify</a:t>
             </a:r>
             <a:endParaRPr lang="en-US" sz="4000" dirty="0"/>
           </a:p>
@@ -2448,7 +2808,7 @@
           <a:bodyPr wrap="square" lIns="0" tIns="0" rIns="0" bIns="0" rtlCol="0" anchor="ctr"/>
           <a:lstStyle/>
           <a:p>
-            <a:pPr marL="0" indent="0">
+            <a:pPr indent="0" marL="0">
               <a:buNone/>
             </a:pPr>
             <a:r>
@@ -2460,7 +2820,7 @@
                 <a:ea typeface="Calibri" pitchFamily="34" charset="-122"/>
                 <a:cs typeface="Calibri" pitchFamily="34" charset="-120"/>
               </a:rPr>
-              <a:t>Demo scene: 3 (expand allowed temperature range)</a:t>
+              <a:t>scene 3 (expand allowed temperature range)</a:t>
             </a:r>
             <a:endParaRPr lang="en-US" sz="1500" dirty="0"/>
           </a:p>
@@ -2487,7 +2847,7 @@
           <a:bodyPr wrap="square" lIns="0" tIns="0" rIns="0" bIns="0" rtlCol="0" anchor="ctr"/>
           <a:lstStyle/>
           <a:p>
-            <a:pPr marL="0" indent="0">
+            <a:pPr indent="0" marL="0">
               <a:buNone/>
             </a:pPr>
             <a:r>
@@ -2526,6 +2886,9 @@
           <a:bodyPr wrap="square" lIns="0" tIns="0" rIns="0" bIns="0" rtlCol="0" anchor="ctr"/>
           <a:lstStyle/>
           <a:p>
+            <a:pPr indent="0" marL="0">
+              <a:buNone/>
+            </a:pPr>
             <a:r>
               <a:rPr lang="en-US" sz="1100" dirty="0">
                 <a:solidFill>
@@ -2557,7 +2920,6 @@
         <a:solidFill>
           <a:srgbClr val="FFFFFF"/>
         </a:solidFill>
-        <a:effectLst/>
       </p:bgPr>
     </p:bg>
     <p:spTree>
@@ -2595,13 +2957,6 @@
           </a:solidFill>
           <a:ln/>
         </p:spPr>
-        <p:txBody>
-          <a:bodyPr/>
-          <a:lstStyle/>
-          <a:p>
-            <a:endParaRPr lang="en-US"/>
-          </a:p>
-        </p:txBody>
       </p:sp>
       <p:sp>
         <p:nvSpPr>
@@ -2624,7 +2979,7 @@
           <a:bodyPr wrap="square" lIns="254" tIns="254" rIns="254" bIns="254" rtlCol="0" anchor="ctr"/>
           <a:lstStyle/>
           <a:p>
-            <a:pPr marL="0" indent="0" algn="ctr">
+            <a:pPr algn="ctr" indent="0" marL="0">
               <a:buNone/>
             </a:pPr>
             <a:r>
@@ -2663,13 +3018,6 @@
           </a:solidFill>
           <a:ln/>
         </p:spPr>
-        <p:txBody>
-          <a:bodyPr/>
-          <a:lstStyle/>
-          <a:p>
-            <a:endParaRPr lang="en-US"/>
-          </a:p>
-        </p:txBody>
       </p:sp>
       <p:sp>
         <p:nvSpPr>
@@ -2692,7 +3040,7 @@
           <a:bodyPr wrap="square" lIns="254" tIns="254" rIns="254" bIns="254" rtlCol="0" anchor="ctr"/>
           <a:lstStyle/>
           <a:p>
-            <a:pPr marL="0" indent="0" algn="ctr">
+            <a:pPr algn="ctr" indent="0" marL="0">
               <a:buNone/>
             </a:pPr>
             <a:r>
@@ -2709,7 +3057,7 @@
             <a:endParaRPr lang="en-US" sz="900" dirty="0"/>
           </a:p>
           <a:p>
-            <a:pPr marL="0" indent="0" algn="ctr">
+            <a:pPr algn="ctr" indent="0" marL="0">
               <a:buNone/>
             </a:pPr>
             <a:r>
@@ -2748,13 +3096,6 @@
           </a:solidFill>
           <a:ln/>
         </p:spPr>
-        <p:txBody>
-          <a:bodyPr/>
-          <a:lstStyle/>
-          <a:p>
-            <a:endParaRPr lang="en-US"/>
-          </a:p>
-        </p:txBody>
       </p:sp>
       <p:sp>
         <p:nvSpPr>
@@ -2777,7 +3118,7 @@
           <a:bodyPr wrap="square" lIns="254" tIns="254" rIns="254" bIns="254" rtlCol="0" anchor="ctr"/>
           <a:lstStyle/>
           <a:p>
-            <a:pPr marL="0" indent="0" algn="ctr">
+            <a:pPr algn="ctr" indent="0" marL="0">
               <a:buNone/>
             </a:pPr>
             <a:r>
@@ -2816,13 +3157,6 @@
           </a:solidFill>
           <a:ln/>
         </p:spPr>
-        <p:txBody>
-          <a:bodyPr/>
-          <a:lstStyle/>
-          <a:p>
-            <a:endParaRPr lang="en-US"/>
-          </a:p>
-        </p:txBody>
       </p:sp>
       <p:sp>
         <p:nvSpPr>
@@ -2845,7 +3179,7 @@
           <a:bodyPr wrap="square" lIns="254" tIns="254" rIns="254" bIns="254" rtlCol="0" anchor="ctr"/>
           <a:lstStyle/>
           <a:p>
-            <a:pPr marL="0" indent="0" algn="ctr">
+            <a:pPr algn="ctr" indent="0" marL="0">
               <a:buNone/>
             </a:pPr>
             <a:r>
@@ -2884,13 +3218,6 @@
           </a:solidFill>
           <a:ln/>
         </p:spPr>
-        <p:txBody>
-          <a:bodyPr/>
-          <a:lstStyle/>
-          <a:p>
-            <a:endParaRPr lang="en-US"/>
-          </a:p>
-        </p:txBody>
       </p:sp>
       <p:sp>
         <p:nvSpPr>
@@ -2913,7 +3240,7 @@
           <a:bodyPr wrap="square" lIns="254" tIns="254" rIns="254" bIns="254" rtlCol="0" anchor="ctr"/>
           <a:lstStyle/>
           <a:p>
-            <a:pPr marL="0" indent="0" algn="ctr">
+            <a:pPr algn="ctr" indent="0" marL="0">
               <a:buNone/>
             </a:pPr>
             <a:r>
@@ -2952,11 +3279,11 @@
           <a:bodyPr wrap="square" lIns="0" tIns="0" rIns="0" bIns="0" rtlCol="0" anchor="ctr"/>
           <a:lstStyle/>
           <a:p>
-            <a:pPr marL="0" indent="0">
-              <a:buNone/>
-            </a:pPr>
-            <a:r>
-              <a:rPr lang="en-US" sz="1800" b="1" kern="0" spc="300" dirty="0">
+            <a:pPr indent="0" marL="0">
+              <a:buNone/>
+            </a:pPr>
+            <a:r>
+              <a:rPr lang="en-US" sz="1800" b="1" spc="300" kern="0" dirty="0">
                 <a:solidFill>
                   <a:srgbClr val="5A6478"/>
                 </a:solidFill>
@@ -2991,7 +3318,7 @@
           <a:bodyPr wrap="square" lIns="0" tIns="0" rIns="0" bIns="0" rtlCol="0" anchor="ctr"/>
           <a:lstStyle/>
           <a:p>
-            <a:pPr marL="0" indent="0">
+            <a:pPr indent="0" marL="0">
               <a:buNone/>
             </a:pPr>
             <a:r>
@@ -3003,7 +3330,7 @@
                 <a:ea typeface="Cambria" pitchFamily="34" charset="-122"/>
                 <a:cs typeface="Cambria" pitchFamily="34" charset="-120"/>
               </a:rPr>
-              <a:t>Unsanctioned change, repaired</a:t>
+              <a:t>Implementation drift: benign, re-verify</a:t>
             </a:r>
             <a:endParaRPr lang="en-US" sz="4000" dirty="0"/>
           </a:p>
@@ -3030,7 +3357,7 @@
           <a:bodyPr wrap="square" lIns="0" tIns="0" rIns="0" bIns="0" rtlCol="0" anchor="ctr"/>
           <a:lstStyle/>
           <a:p>
-            <a:pPr marL="0" indent="0">
+            <a:pPr indent="0" marL="0">
               <a:buNone/>
             </a:pPr>
             <a:r>
@@ -3042,7 +3369,7 @@
                 <a:ea typeface="Calibri" pitchFamily="34" charset="-122"/>
                 <a:cs typeface="Calibri" pitchFamily="34" charset="-120"/>
               </a:rPr>
-              <a:t>scene 2</a:t>
+              <a:t>scene 13</a:t>
             </a:r>
             <a:endParaRPr lang="en-US" sz="1500" dirty="0"/>
           </a:p>
@@ -3069,7 +3396,7 @@
           <a:bodyPr wrap="square" lIns="0" tIns="0" rIns="0" bIns="0" rtlCol="0" anchor="ctr"/>
           <a:lstStyle/>
           <a:p>
-            <a:pPr marL="0" indent="0">
+            <a:pPr indent="0" marL="0">
               <a:buNone/>
             </a:pPr>
             <a:r>
@@ -3081,7 +3408,7 @@
                 <a:ea typeface="Calibri" pitchFamily="34" charset="-122"/>
                 <a:cs typeface="Calibri" pitchFamily="34" charset="-120"/>
               </a:rPr>
-              <a:t>The ladder diagnoses by exhaustion — watch it repair the right artifact, and watch standing return only by re-measurement.</a:t>
+              <a:t>A developer rewrites implementation logic — semantically equivalent. The hash moves, but every contract slice maintains integrity, and the proofs re-verify: the benign change survives.</a:t>
             </a:r>
             <a:endParaRPr lang="en-US" sz="2000" dirty="0"/>
           </a:p>
@@ -3108,7 +3435,7 @@
           <a:bodyPr wrap="square" lIns="0" tIns="0" rIns="0" bIns="0" rtlCol="0" anchor="ctr"/>
           <a:lstStyle/>
           <a:p>
-            <a:pPr marL="0" indent="0">
+            <a:pPr indent="0" marL="0">
               <a:buNone/>
             </a:pPr>
             <a:r>
@@ -3120,7 +3447,7 @@
                 <a:ea typeface="Courier New" pitchFamily="34" charset="-122"/>
                 <a:cs typeface="Courier New" pitchFamily="34" charset="-120"/>
               </a:rPr>
-              <a:t>./examples/demo_isolette.sh --scenes 2</a:t>
+              <a:t>./examples/demo_isolette.sh --scenes 13</a:t>
             </a:r>
             <a:endParaRPr lang="en-US" sz="1100" dirty="0"/>
           </a:p>
@@ -3142,7 +3469,6 @@
         <a:solidFill>
           <a:srgbClr val="FFFFFF"/>
         </a:solidFill>
-        <a:effectLst/>
       </p:bgPr>
     </p:bg>
     <p:spTree>
@@ -3180,13 +3506,6 @@
           </a:solidFill>
           <a:ln/>
         </p:spPr>
-        <p:txBody>
-          <a:bodyPr/>
-          <a:lstStyle/>
-          <a:p>
-            <a:endParaRPr lang="en-US"/>
-          </a:p>
-        </p:txBody>
       </p:sp>
       <p:sp>
         <p:nvSpPr>
@@ -3209,7 +3528,7 @@
           <a:bodyPr wrap="square" lIns="254" tIns="254" rIns="254" bIns="254" rtlCol="0" anchor="ctr"/>
           <a:lstStyle/>
           <a:p>
-            <a:pPr marL="0" indent="0" algn="ctr">
+            <a:pPr algn="ctr" indent="0" marL="0">
               <a:buNone/>
             </a:pPr>
             <a:r>
@@ -3248,13 +3567,6 @@
           </a:solidFill>
           <a:ln/>
         </p:spPr>
-        <p:txBody>
-          <a:bodyPr/>
-          <a:lstStyle/>
-          <a:p>
-            <a:endParaRPr lang="en-US"/>
-          </a:p>
-        </p:txBody>
       </p:sp>
       <p:sp>
         <p:nvSpPr>
@@ -3277,7 +3589,7 @@
           <a:bodyPr wrap="square" lIns="254" tIns="254" rIns="254" bIns="254" rtlCol="0" anchor="ctr"/>
           <a:lstStyle/>
           <a:p>
-            <a:pPr marL="0" indent="0" algn="ctr">
+            <a:pPr algn="ctr" indent="0" marL="0">
               <a:buNone/>
             </a:pPr>
             <a:r>
@@ -3294,7 +3606,7 @@
             <a:endParaRPr lang="en-US" sz="900" dirty="0"/>
           </a:p>
           <a:p>
-            <a:pPr marL="0" indent="0" algn="ctr">
+            <a:pPr algn="ctr" indent="0" marL="0">
               <a:buNone/>
             </a:pPr>
             <a:r>
@@ -3333,13 +3645,6 @@
           </a:solidFill>
           <a:ln/>
         </p:spPr>
-        <p:txBody>
-          <a:bodyPr/>
-          <a:lstStyle/>
-          <a:p>
-            <a:endParaRPr lang="en-US"/>
-          </a:p>
-        </p:txBody>
       </p:sp>
       <p:sp>
         <p:nvSpPr>
@@ -3362,7 +3667,7 @@
           <a:bodyPr wrap="square" lIns="254" tIns="254" rIns="254" bIns="254" rtlCol="0" anchor="ctr"/>
           <a:lstStyle/>
           <a:p>
-            <a:pPr marL="0" indent="0" algn="ctr">
+            <a:pPr algn="ctr" indent="0" marL="0">
               <a:buNone/>
             </a:pPr>
             <a:r>
@@ -3401,13 +3706,6 @@
           </a:solidFill>
           <a:ln/>
         </p:spPr>
-        <p:txBody>
-          <a:bodyPr/>
-          <a:lstStyle/>
-          <a:p>
-            <a:endParaRPr lang="en-US"/>
-          </a:p>
-        </p:txBody>
       </p:sp>
       <p:sp>
         <p:nvSpPr>
@@ -3430,7 +3728,7 @@
           <a:bodyPr wrap="square" lIns="254" tIns="254" rIns="254" bIns="254" rtlCol="0" anchor="ctr"/>
           <a:lstStyle/>
           <a:p>
-            <a:pPr marL="0" indent="0" algn="ctr">
+            <a:pPr algn="ctr" indent="0" marL="0">
               <a:buNone/>
             </a:pPr>
             <a:r>
@@ -3469,13 +3767,6 @@
           </a:solidFill>
           <a:ln/>
         </p:spPr>
-        <p:txBody>
-          <a:bodyPr/>
-          <a:lstStyle/>
-          <a:p>
-            <a:endParaRPr lang="en-US"/>
-          </a:p>
-        </p:txBody>
       </p:sp>
       <p:sp>
         <p:nvSpPr>
@@ -3498,7 +3789,7 @@
           <a:bodyPr wrap="square" lIns="254" tIns="254" rIns="254" bIns="254" rtlCol="0" anchor="ctr"/>
           <a:lstStyle/>
           <a:p>
-            <a:pPr marL="0" indent="0" algn="ctr">
+            <a:pPr algn="ctr" indent="0" marL="0">
               <a:buNone/>
             </a:pPr>
             <a:r>
@@ -3537,11 +3828,11 @@
           <a:bodyPr wrap="square" lIns="0" tIns="0" rIns="0" bIns="0" rtlCol="0" anchor="ctr"/>
           <a:lstStyle/>
           <a:p>
-            <a:pPr marL="0" indent="0">
-              <a:buNone/>
-            </a:pPr>
-            <a:r>
-              <a:rPr lang="en-US" sz="1800" b="1" kern="0" spc="300" dirty="0">
+            <a:pPr indent="0" marL="0">
+              <a:buNone/>
+            </a:pPr>
+            <a:r>
+              <a:rPr lang="en-US" sz="1800" b="1" spc="300" kern="0" dirty="0">
                 <a:solidFill>
                   <a:srgbClr val="5A6478"/>
                 </a:solidFill>
@@ -3576,7 +3867,7 @@
           <a:bodyPr wrap="square" lIns="0" tIns="0" rIns="0" bIns="0" rtlCol="0" anchor="ctr"/>
           <a:lstStyle/>
           <a:p>
-            <a:pPr marL="0" indent="0">
+            <a:pPr indent="0" marL="0">
               <a:buNone/>
             </a:pPr>
             <a:r>
@@ -3588,7 +3879,7 @@
                 <a:ea typeface="Cambria" pitchFamily="34" charset="-122"/>
                 <a:cs typeface="Cambria" pitchFamily="34" charset="-120"/>
               </a:rPr>
-              <a:t>Attacks on trust itself</a:t>
+              <a:t>Contract drift: breaking, restore then attempt re-verification</a:t>
             </a:r>
             <a:endParaRPr lang="en-US" sz="4000" dirty="0"/>
           </a:p>
@@ -3615,7 +3906,7 @@
           <a:bodyPr wrap="square" lIns="0" tIns="0" rIns="0" bIns="0" rtlCol="0" anchor="ctr"/>
           <a:lstStyle/>
           <a:p>
-            <a:pPr marL="0" indent="0">
+            <a:pPr indent="0" marL="0">
               <a:buNone/>
             </a:pPr>
             <a:r>
@@ -3627,7 +3918,7 @@
                 <a:ea typeface="Calibri" pitchFamily="34" charset="-122"/>
                 <a:cs typeface="Calibri" pitchFamily="34" charset="-120"/>
               </a:rPr>
-              <a:t>scenes 6 + 7</a:t>
+              <a:t>scene 14</a:t>
             </a:r>
             <a:endParaRPr lang="en-US" sz="1500" dirty="0"/>
           </a:p>
@@ -3654,7 +3945,7 @@
           <a:bodyPr wrap="square" lIns="0" tIns="0" rIns="0" bIns="0" rtlCol="0" anchor="ctr"/>
           <a:lstStyle/>
           <a:p>
-            <a:pPr marL="0" indent="0">
+            <a:pPr indent="0" marL="0">
               <a:buNone/>
             </a:pPr>
             <a:r>
@@ -3666,7 +3957,91 @@
                 <a:ea typeface="Calibri" pitchFamily="34" charset="-122"/>
                 <a:cs typeface="Calibri" pitchFamily="34" charset="-120"/>
               </a:rPr>
-              <a:t>Three tampers with the trust state, three attributed refusals — then a tampered tool, and every proof cell poisons fail-closed. Nothing repairs a baseline.</a:t>
+              <a:t>The model is untouched, but a Verus contract is weakened (</a:t>
+            </a:r>
+            <a:pPr indent="0" marL="0">
+              <a:buNone/>
+            </a:pPr>
+            <a:r>
+              <a:rPr lang="en-US" sz="2000" b="1" i="1" dirty="0">
+                <a:solidFill>
+                  <a:srgbClr val="212121"/>
+                </a:solidFill>
+                <a:latin typeface="Calibri" pitchFamily="34" charset="0"/>
+                <a:ea typeface="Calibri" pitchFamily="34" charset="-122"/>
+                <a:cs typeface="Calibri" pitchFamily="34" charset="-120"/>
+              </a:rPr>
+              <a:t>after </a:t>
+            </a:r>
+            <a:pPr indent="0" marL="0">
+              <a:buNone/>
+            </a:pPr>
+            <a:r>
+              <a:rPr lang="en-US" sz="2000" b="1" i="1" dirty="0">
+                <a:solidFill>
+                  <a:srgbClr val="212121"/>
+                </a:solidFill>
+                <a:latin typeface="Calibri" pitchFamily="34" charset="0"/>
+                <a:ea typeface="Calibri" pitchFamily="34" charset="-122"/>
+                <a:cs typeface="Calibri" pitchFamily="34" charset="-120"/>
+              </a:rPr>
+              <a:t>codegen</a:t>
+            </a:r>
+            <a:pPr indent="0" marL="0">
+              <a:buNone/>
+            </a:pPr>
+            <a:r>
+              <a:rPr lang="en-US" sz="2000" b="1" i="1" dirty="0">
+                <a:solidFill>
+                  <a:srgbClr val="212121"/>
+                </a:solidFill>
+                <a:latin typeface="Calibri" pitchFamily="34" charset="0"/>
+                <a:ea typeface="Calibri" pitchFamily="34" charset="-122"/>
+                <a:cs typeface="Calibri" pitchFamily="34" charset="-120"/>
+              </a:rPr>
+              <a:t>, but before verification</a:t>
+            </a:r>
+            <a:pPr indent="0" marL="0">
+              <a:buNone/>
+            </a:pPr>
+            <a:r>
+              <a:rPr lang="en-US" sz="2000" i="1" dirty="0">
+                <a:solidFill>
+                  <a:srgbClr val="212121"/>
+                </a:solidFill>
+                <a:latin typeface="Calibri" pitchFamily="34" charset="0"/>
+                <a:ea typeface="Calibri" pitchFamily="34" charset="-122"/>
+                <a:cs typeface="Calibri" pitchFamily="34" charset="-120"/>
+              </a:rPr>
+              <a:t>) and the code is inverted to match — </a:t>
+            </a:r>
+            <a:pPr indent="0" marL="0">
+              <a:buNone/>
+            </a:pPr>
+            <a:r>
+              <a:rPr lang="en-US" sz="2000" i="1" dirty="0">
+                <a:solidFill>
+                  <a:srgbClr val="212121"/>
+                </a:solidFill>
+                <a:latin typeface="Calibri" pitchFamily="34" charset="0"/>
+                <a:ea typeface="Calibri" pitchFamily="34" charset="-122"/>
+                <a:cs typeface="Calibri" pitchFamily="34" charset="-120"/>
+              </a:rPr>
+              <a:t>verus</a:t>
+            </a:r>
+            <a:pPr indent="0" marL="0">
+              <a:buNone/>
+            </a:pPr>
+            <a:r>
+              <a:rPr lang="en-US" sz="2000" i="1" dirty="0">
+                <a:solidFill>
+                  <a:srgbClr val="212121"/>
+                </a:solidFill>
+                <a:latin typeface="Calibri" pitchFamily="34" charset="0"/>
+                <a:ea typeface="Calibri" pitchFamily="34" charset="-122"/>
+                <a:cs typeface="Calibri" pitchFamily="34" charset="-120"/>
+              </a:rPr>
+              <a:t> checks pass.  Only the contract tier sees the drift; restoring the true contract exposes the Verus refusal the laundering hid.</a:t>
             </a:r>
             <a:endParaRPr lang="en-US" sz="2000" dirty="0"/>
           </a:p>
@@ -3693,7 +4068,7 @@
           <a:bodyPr wrap="square" lIns="0" tIns="0" rIns="0" bIns="0" rtlCol="0" anchor="ctr"/>
           <a:lstStyle/>
           <a:p>
-            <a:pPr marL="0" indent="0">
+            <a:pPr indent="0" marL="0">
               <a:buNone/>
             </a:pPr>
             <a:r>
@@ -3705,7 +4080,7 @@
                 <a:ea typeface="Courier New" pitchFamily="34" charset="-122"/>
                 <a:cs typeface="Courier New" pitchFamily="34" charset="-120"/>
               </a:rPr>
-              <a:t>./examples/demo_isolette.sh --scenes "6 7"</a:t>
+              <a:t>./examples/demo_isolette.sh --scenes 14</a:t>
             </a:r>
             <a:endParaRPr lang="en-US" sz="1100" dirty="0"/>
           </a:p>
@@ -3727,7 +4102,6 @@
         <a:solidFill>
           <a:srgbClr val="FFFFFF"/>
         </a:solidFill>
-        <a:effectLst/>
       </p:bgPr>
     </p:bg>
     <p:spTree>
@@ -3765,13 +4139,6 @@
           </a:solidFill>
           <a:ln/>
         </p:spPr>
-        <p:txBody>
-          <a:bodyPr/>
-          <a:lstStyle/>
-          <a:p>
-            <a:endParaRPr lang="en-US"/>
-          </a:p>
-        </p:txBody>
       </p:sp>
       <p:sp>
         <p:nvSpPr>
@@ -3794,7 +4161,7 @@
           <a:bodyPr wrap="square" lIns="254" tIns="254" rIns="254" bIns="254" rtlCol="0" anchor="ctr"/>
           <a:lstStyle/>
           <a:p>
-            <a:pPr marL="0" indent="0" algn="ctr">
+            <a:pPr algn="ctr" indent="0" marL="0">
               <a:buNone/>
             </a:pPr>
             <a:r>
@@ -3833,13 +4200,6 @@
           </a:solidFill>
           <a:ln/>
         </p:spPr>
-        <p:txBody>
-          <a:bodyPr/>
-          <a:lstStyle/>
-          <a:p>
-            <a:endParaRPr lang="en-US"/>
-          </a:p>
-        </p:txBody>
       </p:sp>
       <p:sp>
         <p:nvSpPr>
@@ -3862,7 +4222,7 @@
           <a:bodyPr wrap="square" lIns="254" tIns="254" rIns="254" bIns="254" rtlCol="0" anchor="ctr"/>
           <a:lstStyle/>
           <a:p>
-            <a:pPr marL="0" indent="0" algn="ctr">
+            <a:pPr algn="ctr" indent="0" marL="0">
               <a:buNone/>
             </a:pPr>
             <a:r>
@@ -3879,7 +4239,7 @@
             <a:endParaRPr lang="en-US" sz="900" dirty="0"/>
           </a:p>
           <a:p>
-            <a:pPr marL="0" indent="0" algn="ctr">
+            <a:pPr algn="ctr" indent="0" marL="0">
               <a:buNone/>
             </a:pPr>
             <a:r>
@@ -3918,13 +4278,6 @@
           </a:solidFill>
           <a:ln/>
         </p:spPr>
-        <p:txBody>
-          <a:bodyPr/>
-          <a:lstStyle/>
-          <a:p>
-            <a:endParaRPr lang="en-US"/>
-          </a:p>
-        </p:txBody>
       </p:sp>
       <p:sp>
         <p:nvSpPr>
@@ -3947,7 +4300,7 @@
           <a:bodyPr wrap="square" lIns="254" tIns="254" rIns="254" bIns="254" rtlCol="0" anchor="ctr"/>
           <a:lstStyle/>
           <a:p>
-            <a:pPr marL="0" indent="0" algn="ctr">
+            <a:pPr algn="ctr" indent="0" marL="0">
               <a:buNone/>
             </a:pPr>
             <a:r>
@@ -3986,13 +4339,6 @@
           </a:solidFill>
           <a:ln/>
         </p:spPr>
-        <p:txBody>
-          <a:bodyPr/>
-          <a:lstStyle/>
-          <a:p>
-            <a:endParaRPr lang="en-US"/>
-          </a:p>
-        </p:txBody>
       </p:sp>
       <p:sp>
         <p:nvSpPr>
@@ -4015,7 +4361,7 @@
           <a:bodyPr wrap="square" lIns="254" tIns="254" rIns="254" bIns="254" rtlCol="0" anchor="ctr"/>
           <a:lstStyle/>
           <a:p>
-            <a:pPr marL="0" indent="0" algn="ctr">
+            <a:pPr algn="ctr" indent="0" marL="0">
               <a:buNone/>
             </a:pPr>
             <a:r>
@@ -4054,13 +4400,6 @@
           </a:solidFill>
           <a:ln/>
         </p:spPr>
-        <p:txBody>
-          <a:bodyPr/>
-          <a:lstStyle/>
-          <a:p>
-            <a:endParaRPr lang="en-US"/>
-          </a:p>
-        </p:txBody>
       </p:sp>
       <p:sp>
         <p:nvSpPr>
@@ -4083,7 +4422,7 @@
           <a:bodyPr wrap="square" lIns="254" tIns="254" rIns="254" bIns="254" rtlCol="0" anchor="ctr"/>
           <a:lstStyle/>
           <a:p>
-            <a:pPr marL="0" indent="0" algn="ctr">
+            <a:pPr algn="ctr" indent="0" marL="0">
               <a:buNone/>
             </a:pPr>
             <a:r>
@@ -4122,11 +4461,11 @@
           <a:bodyPr wrap="square" lIns="0" tIns="0" rIns="0" bIns="0" rtlCol="0" anchor="ctr"/>
           <a:lstStyle/>
           <a:p>
-            <a:pPr marL="0" indent="0">
-              <a:buNone/>
-            </a:pPr>
-            <a:r>
-              <a:rPr lang="en-US" sz="1800" b="1" kern="0" spc="300" dirty="0">
+            <a:pPr indent="0" marL="0">
+              <a:buNone/>
+            </a:pPr>
+            <a:r>
+              <a:rPr lang="en-US" sz="1800" b="1" spc="300" kern="0" dirty="0">
                 <a:solidFill>
                   <a:srgbClr val="5A6478"/>
                 </a:solidFill>
@@ -4161,7 +4500,7 @@
           <a:bodyPr wrap="square" lIns="0" tIns="0" rIns="0" bIns="0" rtlCol="0" anchor="ctr"/>
           <a:lstStyle/>
           <a:p>
-            <a:pPr marL="0" indent="0">
+            <a:pPr indent="0" marL="0">
               <a:buNone/>
             </a:pPr>
             <a:r>
@@ -4173,7 +4512,7 @@
                 <a:ea typeface="Cambria" pitchFamily="34" charset="-122"/>
                 <a:cs typeface="Cambria" pitchFamily="34" charset="-120"/>
               </a:rPr>
-              <a:t>“Verification succeeded” is not enough</a:t>
+              <a:t>Implementation drift: breaking, diagnose then repair</a:t>
             </a:r>
             <a:endParaRPr lang="en-US" sz="4000" dirty="0"/>
           </a:p>
@@ -4200,7 +4539,7 @@
           <a:bodyPr wrap="square" lIns="0" tIns="0" rIns="0" bIns="0" rtlCol="0" anchor="ctr"/>
           <a:lstStyle/>
           <a:p>
-            <a:pPr marL="0" indent="0">
+            <a:pPr indent="0" marL="0">
               <a:buNone/>
             </a:pPr>
             <a:r>
@@ -4212,7 +4551,7 @@
                 <a:ea typeface="Calibri" pitchFamily="34" charset="-122"/>
                 <a:cs typeface="Calibri" pitchFamily="34" charset="-120"/>
               </a:rPr>
-              <a:t>scene 12</a:t>
+              <a:t>scene 2</a:t>
             </a:r>
             <a:endParaRPr lang="en-US" sz="1500" dirty="0"/>
           </a:p>
@@ -4239,7 +4578,7 @@
           <a:bodyPr wrap="square" lIns="0" tIns="0" rIns="0" bIns="0" rtlCol="0" anchor="ctr"/>
           <a:lstStyle/>
           <a:p>
-            <a:pPr marL="0" indent="0">
+            <a:pPr indent="0" marL="0">
               <a:buNone/>
             </a:pPr>
             <a:r>
@@ -4251,7 +4590,7 @@
                 <a:ea typeface="Calibri" pitchFamily="34" charset="-122"/>
                 <a:cs typeface="Calibri" pitchFamily="34" charset="-120"/>
               </a:rPr>
-              <a:t>Every proof passes, every scan is silent — the heat command is inverted anyway. Only the bytes tell.</a:t>
+              <a:t>The ladder diagnoses by exhaustion — watch it repair the right artifact, and watch standing return only by re-measurement.</a:t>
             </a:r>
             <a:endParaRPr lang="en-US" sz="2000" dirty="0"/>
           </a:p>
@@ -4278,7 +4617,7 @@
           <a:bodyPr wrap="square" lIns="0" tIns="0" rIns="0" bIns="0" rtlCol="0" anchor="ctr"/>
           <a:lstStyle/>
           <a:p>
-            <a:pPr marL="0" indent="0">
+            <a:pPr indent="0" marL="0">
               <a:buNone/>
             </a:pPr>
             <a:r>
@@ -4290,7 +4629,7 @@
                 <a:ea typeface="Courier New" pitchFamily="34" charset="-122"/>
                 <a:cs typeface="Courier New" pitchFamily="34" charset="-120"/>
               </a:rPr>
-              <a:t>./examples/demo_isolette.sh --scenes 12</a:t>
+              <a:t>./examples/demo_isolette.sh --scenes 2</a:t>
             </a:r>
             <a:endParaRPr lang="en-US" sz="1100" dirty="0"/>
           </a:p>
@@ -4312,7 +4651,6 @@
         <a:solidFill>
           <a:srgbClr val="FFFFFF"/>
         </a:solidFill>
-        <a:effectLst/>
       </p:bgPr>
     </p:bg>
     <p:spTree>
@@ -4331,14 +4669,336 @@
       </p:grpSpPr>
       <p:sp>
         <p:nvSpPr>
-          <p:cNvPr id="2" name="Text 0"/>
-          <p:cNvSpPr/>
-          <p:nvPr/>
-        </p:nvSpPr>
-        <p:spPr>
-          <a:xfrm>
-            <a:off x="640080" y="411480"/>
-            <a:ext cx="10972800" cy="731520"/>
+          <p:cNvPr id="2" name="Shape 0"/>
+          <p:cNvSpPr/>
+          <p:nvPr/>
+        </p:nvSpPr>
+        <p:spPr>
+          <a:xfrm>
+            <a:off x="640080" y="201168"/>
+            <a:ext cx="2073859" cy="502920"/>
+          </a:xfrm>
+          <a:prstGeom prst="roundRect">
+            <a:avLst>
+              <a:gd name="adj" fmla="val 9091"/>
+            </a:avLst>
+          </a:prstGeom>
+          <a:solidFill>
+            <a:srgbClr val="E4EAF4"/>
+          </a:solidFill>
+          <a:ln/>
+        </p:spPr>
+      </p:sp>
+      <p:sp>
+        <p:nvSpPr>
+          <p:cNvPr id="3" name="Text 1"/>
+          <p:cNvSpPr/>
+          <p:nvPr/>
+        </p:nvSpPr>
+        <p:spPr>
+          <a:xfrm>
+            <a:off x="640080" y="201168"/>
+            <a:ext cx="2073859" cy="502920"/>
+          </a:xfrm>
+          <a:prstGeom prst="rect">
+            <a:avLst/>
+          </a:prstGeom>
+          <a:noFill/>
+          <a:ln/>
+        </p:spPr>
+        <p:txBody>
+          <a:bodyPr wrap="square" lIns="254" tIns="254" rIns="254" bIns="254" rtlCol="0" anchor="ctr"/>
+          <a:lstStyle/>
+          <a:p>
+            <a:pPr algn="ctr" indent="0" marL="0">
+              <a:buNone/>
+            </a:pPr>
+            <a:r>
+              <a:rPr lang="en-US" sz="900" dirty="0">
+                <a:solidFill>
+                  <a:srgbClr val="5A6478"/>
+                </a:solidFill>
+                <a:latin typeface="Calibri" pitchFamily="34" charset="0"/>
+                <a:ea typeface="Calibri" pitchFamily="34" charset="-122"/>
+                <a:cs typeface="Calibri" pitchFamily="34" charset="-120"/>
+              </a:rPr>
+              <a:t>Preliminaries</a:t>
+            </a:r>
+            <a:endParaRPr lang="en-US" sz="900" dirty="0"/>
+          </a:p>
+        </p:txBody>
+      </p:sp>
+      <p:sp>
+        <p:nvSpPr>
+          <p:cNvPr id="4" name="Shape 2"/>
+          <p:cNvSpPr/>
+          <p:nvPr/>
+        </p:nvSpPr>
+        <p:spPr>
+          <a:xfrm>
+            <a:off x="2841955" y="201168"/>
+            <a:ext cx="2073859" cy="502920"/>
+          </a:xfrm>
+          <a:prstGeom prst="roundRect">
+            <a:avLst>
+              <a:gd name="adj" fmla="val 9091"/>
+            </a:avLst>
+          </a:prstGeom>
+          <a:solidFill>
+            <a:srgbClr val="1E2761"/>
+          </a:solidFill>
+          <a:ln/>
+        </p:spPr>
+      </p:sp>
+      <p:sp>
+        <p:nvSpPr>
+          <p:cNvPr id="5" name="Text 3"/>
+          <p:cNvSpPr/>
+          <p:nvPr/>
+        </p:nvSpPr>
+        <p:spPr>
+          <a:xfrm>
+            <a:off x="2841955" y="201168"/>
+            <a:ext cx="2073859" cy="502920"/>
+          </a:xfrm>
+          <a:prstGeom prst="rect">
+            <a:avLst/>
+          </a:prstGeom>
+          <a:noFill/>
+          <a:ln/>
+        </p:spPr>
+        <p:txBody>
+          <a:bodyPr wrap="square" lIns="254" tIns="254" rIns="254" bIns="254" rtlCol="0" anchor="ctr"/>
+          <a:lstStyle/>
+          <a:p>
+            <a:pPr algn="ctr" indent="0" marL="0">
+              <a:buNone/>
+            </a:pPr>
+            <a:r>
+              <a:rPr lang="en-US" sz="900" b="1" dirty="0">
+                <a:solidFill>
+                  <a:srgbClr val="FFFFFF"/>
+                </a:solidFill>
+                <a:latin typeface="Calibri" pitchFamily="34" charset="0"/>
+                <a:ea typeface="Calibri" pitchFamily="34" charset="-122"/>
+                <a:cs typeface="Calibri" pitchFamily="34" charset="-120"/>
+              </a:rPr>
+              <a:t>Demo:</a:t>
+            </a:r>
+            <a:endParaRPr lang="en-US" sz="900" dirty="0"/>
+          </a:p>
+          <a:p>
+            <a:pPr algn="ctr" indent="0" marL="0">
+              <a:buNone/>
+            </a:pPr>
+            <a:r>
+              <a:rPr lang="en-US" sz="900" b="1" dirty="0">
+                <a:solidFill>
+                  <a:srgbClr val="FFFFFF"/>
+                </a:solidFill>
+                <a:latin typeface="Calibri" pitchFamily="34" charset="0"/>
+                <a:ea typeface="Calibri" pitchFamily="34" charset="-122"/>
+                <a:cs typeface="Calibri" pitchFamily="34" charset="-120"/>
+              </a:rPr>
+              <a:t>Isolette (SysMLv2 → Rust)</a:t>
+            </a:r>
+            <a:endParaRPr lang="en-US" sz="900" dirty="0"/>
+          </a:p>
+        </p:txBody>
+      </p:sp>
+      <p:sp>
+        <p:nvSpPr>
+          <p:cNvPr id="6" name="Shape 4"/>
+          <p:cNvSpPr/>
+          <p:nvPr/>
+        </p:nvSpPr>
+        <p:spPr>
+          <a:xfrm>
+            <a:off x="5043830" y="201168"/>
+            <a:ext cx="2073859" cy="502920"/>
+          </a:xfrm>
+          <a:prstGeom prst="roundRect">
+            <a:avLst>
+              <a:gd name="adj" fmla="val 9091"/>
+            </a:avLst>
+          </a:prstGeom>
+          <a:solidFill>
+            <a:srgbClr val="E4EAF4"/>
+          </a:solidFill>
+          <a:ln/>
+        </p:spPr>
+      </p:sp>
+      <p:sp>
+        <p:nvSpPr>
+          <p:cNvPr id="7" name="Text 5"/>
+          <p:cNvSpPr/>
+          <p:nvPr/>
+        </p:nvSpPr>
+        <p:spPr>
+          <a:xfrm>
+            <a:off x="5043830" y="201168"/>
+            <a:ext cx="2073859" cy="502920"/>
+          </a:xfrm>
+          <a:prstGeom prst="rect">
+            <a:avLst/>
+          </a:prstGeom>
+          <a:noFill/>
+          <a:ln/>
+        </p:spPr>
+        <p:txBody>
+          <a:bodyPr wrap="square" lIns="254" tIns="254" rIns="254" bIns="254" rtlCol="0" anchor="ctr"/>
+          <a:lstStyle/>
+          <a:p>
+            <a:pPr algn="ctr" indent="0" marL="0">
+              <a:buNone/>
+            </a:pPr>
+            <a:r>
+              <a:rPr lang="en-US" sz="900" dirty="0">
+                <a:solidFill>
+                  <a:srgbClr val="5A6478"/>
+                </a:solidFill>
+                <a:latin typeface="Calibri" pitchFamily="34" charset="0"/>
+                <a:ea typeface="Calibri" pitchFamily="34" charset="-122"/>
+                <a:cs typeface="Calibri" pitchFamily="34" charset="-120"/>
+              </a:rPr>
+              <a:t>Other Ecosystems</a:t>
+            </a:r>
+            <a:endParaRPr lang="en-US" sz="900" dirty="0"/>
+          </a:p>
+        </p:txBody>
+      </p:sp>
+      <p:sp>
+        <p:nvSpPr>
+          <p:cNvPr id="8" name="Shape 6"/>
+          <p:cNvSpPr/>
+          <p:nvPr/>
+        </p:nvSpPr>
+        <p:spPr>
+          <a:xfrm>
+            <a:off x="7245706" y="201168"/>
+            <a:ext cx="2073859" cy="502920"/>
+          </a:xfrm>
+          <a:prstGeom prst="roundRect">
+            <a:avLst>
+              <a:gd name="adj" fmla="val 9091"/>
+            </a:avLst>
+          </a:prstGeom>
+          <a:solidFill>
+            <a:srgbClr val="E4EAF4"/>
+          </a:solidFill>
+          <a:ln/>
+        </p:spPr>
+      </p:sp>
+      <p:sp>
+        <p:nvSpPr>
+          <p:cNvPr id="9" name="Text 7"/>
+          <p:cNvSpPr/>
+          <p:nvPr/>
+        </p:nvSpPr>
+        <p:spPr>
+          <a:xfrm>
+            <a:off x="7245706" y="201168"/>
+            <a:ext cx="2073859" cy="502920"/>
+          </a:xfrm>
+          <a:prstGeom prst="rect">
+            <a:avLst/>
+          </a:prstGeom>
+          <a:noFill/>
+          <a:ln/>
+        </p:spPr>
+        <p:txBody>
+          <a:bodyPr wrap="square" lIns="254" tIns="254" rIns="254" bIns="254" rtlCol="0" anchor="ctr"/>
+          <a:lstStyle/>
+          <a:p>
+            <a:pPr algn="ctr" indent="0" marL="0">
+              <a:buNone/>
+            </a:pPr>
+            <a:r>
+              <a:rPr lang="en-US" sz="900" dirty="0">
+                <a:solidFill>
+                  <a:srgbClr val="5A6478"/>
+                </a:solidFill>
+                <a:latin typeface="Calibri" pitchFamily="34" charset="0"/>
+                <a:ea typeface="Calibri" pitchFamily="34" charset="-122"/>
+                <a:cs typeface="Calibri" pitchFamily="34" charset="-120"/>
+              </a:rPr>
+              <a:t>AI in the Loop</a:t>
+            </a:r>
+            <a:endParaRPr lang="en-US" sz="900" dirty="0"/>
+          </a:p>
+        </p:txBody>
+      </p:sp>
+      <p:sp>
+        <p:nvSpPr>
+          <p:cNvPr id="10" name="Shape 8"/>
+          <p:cNvSpPr/>
+          <p:nvPr/>
+        </p:nvSpPr>
+        <p:spPr>
+          <a:xfrm>
+            <a:off x="9447581" y="201168"/>
+            <a:ext cx="2073859" cy="502920"/>
+          </a:xfrm>
+          <a:prstGeom prst="roundRect">
+            <a:avLst>
+              <a:gd name="adj" fmla="val 9091"/>
+            </a:avLst>
+          </a:prstGeom>
+          <a:solidFill>
+            <a:srgbClr val="E4EAF4"/>
+          </a:solidFill>
+          <a:ln/>
+        </p:spPr>
+      </p:sp>
+      <p:sp>
+        <p:nvSpPr>
+          <p:cNvPr id="11" name="Text 9"/>
+          <p:cNvSpPr/>
+          <p:nvPr/>
+        </p:nvSpPr>
+        <p:spPr>
+          <a:xfrm>
+            <a:off x="9447581" y="201168"/>
+            <a:ext cx="2073859" cy="502920"/>
+          </a:xfrm>
+          <a:prstGeom prst="rect">
+            <a:avLst/>
+          </a:prstGeom>
+          <a:noFill/>
+          <a:ln/>
+        </p:spPr>
+        <p:txBody>
+          <a:bodyPr wrap="square" lIns="254" tIns="254" rIns="254" bIns="254" rtlCol="0" anchor="ctr"/>
+          <a:lstStyle/>
+          <a:p>
+            <a:pPr algn="ctr" indent="0" marL="0">
+              <a:buNone/>
+            </a:pPr>
+            <a:r>
+              <a:rPr lang="en-US" sz="900" dirty="0">
+                <a:solidFill>
+                  <a:srgbClr val="5A6478"/>
+                </a:solidFill>
+                <a:latin typeface="Calibri" pitchFamily="34" charset="0"/>
+                <a:ea typeface="Calibri" pitchFamily="34" charset="-122"/>
+                <a:cs typeface="Calibri" pitchFamily="34" charset="-120"/>
+              </a:rPr>
+              <a:t>Close</a:t>
+            </a:r>
+            <a:endParaRPr lang="en-US" sz="900" dirty="0"/>
+          </a:p>
+        </p:txBody>
+      </p:sp>
+      <p:sp>
+        <p:nvSpPr>
+          <p:cNvPr id="12" name="Text 10"/>
+          <p:cNvSpPr/>
+          <p:nvPr/>
+        </p:nvSpPr>
+        <p:spPr>
+          <a:xfrm>
+            <a:off x="822960" y="1828800"/>
+            <a:ext cx="10515600" cy="457200"/>
           </a:xfrm>
           <a:prstGeom prst="rect">
             <a:avLst/>
@@ -4350,11 +5010,50 @@
           <a:bodyPr wrap="square" lIns="0" tIns="0" rIns="0" bIns="0" rtlCol="0" anchor="ctr"/>
           <a:lstStyle/>
           <a:p>
-            <a:pPr marL="0" indent="0">
-              <a:buNone/>
-            </a:pPr>
-            <a:r>
-              <a:rPr lang="en-US" sz="3600" b="1" dirty="0">
+            <a:pPr indent="0" marL="0">
+              <a:buNone/>
+            </a:pPr>
+            <a:r>
+              <a:rPr lang="en-US" sz="1800" b="1" spc="300" kern="0" dirty="0">
+                <a:solidFill>
+                  <a:srgbClr val="5A6478"/>
+                </a:solidFill>
+                <a:latin typeface="Calibri" pitchFamily="34" charset="0"/>
+                <a:ea typeface="Calibri" pitchFamily="34" charset="-122"/>
+                <a:cs typeface="Calibri" pitchFamily="34" charset="-120"/>
+              </a:rPr>
+              <a:t>ACT VI</a:t>
+            </a:r>
+            <a:endParaRPr lang="en-US" sz="1800" dirty="0"/>
+          </a:p>
+        </p:txBody>
+      </p:sp>
+      <p:sp>
+        <p:nvSpPr>
+          <p:cNvPr id="13" name="Text 11"/>
+          <p:cNvSpPr/>
+          <p:nvPr/>
+        </p:nvSpPr>
+        <p:spPr>
+          <a:xfrm>
+            <a:off x="822960" y="2286000"/>
+            <a:ext cx="10515600" cy="822960"/>
+          </a:xfrm>
+          <a:prstGeom prst="rect">
+            <a:avLst/>
+          </a:prstGeom>
+          <a:noFill/>
+          <a:ln/>
+        </p:spPr>
+        <p:txBody>
+          <a:bodyPr wrap="square" lIns="0" tIns="0" rIns="0" bIns="0" rtlCol="0" anchor="ctr"/>
+          <a:lstStyle/>
+          <a:p>
+            <a:pPr indent="0" marL="0">
+              <a:buNone/>
+            </a:pPr>
+            <a:r>
+              <a:rPr lang="en-US" sz="4000" b="1" dirty="0">
                 <a:solidFill>
                   <a:srgbClr val="1E2761"/>
                 </a:solidFill>
@@ -4362,6 +5061,743 @@
                 <a:ea typeface="Cambria" pitchFamily="34" charset="-122"/>
                 <a:cs typeface="Cambria" pitchFamily="34" charset="-120"/>
               </a:rPr>
+              <a:t>Trust-state tamper: refuse</a:t>
+            </a:r>
+            <a:endParaRPr lang="en-US" sz="4000" dirty="0"/>
+          </a:p>
+        </p:txBody>
+      </p:sp>
+      <p:sp>
+        <p:nvSpPr>
+          <p:cNvPr id="14" name="Text 12"/>
+          <p:cNvSpPr/>
+          <p:nvPr/>
+        </p:nvSpPr>
+        <p:spPr>
+          <a:xfrm>
+            <a:off x="822960" y="3154680"/>
+            <a:ext cx="10515600" cy="411480"/>
+          </a:xfrm>
+          <a:prstGeom prst="rect">
+            <a:avLst/>
+          </a:prstGeom>
+          <a:noFill/>
+          <a:ln/>
+        </p:spPr>
+        <p:txBody>
+          <a:bodyPr wrap="square" lIns="0" tIns="0" rIns="0" bIns="0" rtlCol="0" anchor="ctr"/>
+          <a:lstStyle/>
+          <a:p>
+            <a:pPr indent="0" marL="0">
+              <a:buNone/>
+            </a:pPr>
+            <a:r>
+              <a:rPr lang="en-US" sz="1500" i="1" dirty="0">
+                <a:solidFill>
+                  <a:srgbClr val="5A6478"/>
+                </a:solidFill>
+                <a:latin typeface="Calibri" pitchFamily="34" charset="0"/>
+                <a:ea typeface="Calibri" pitchFamily="34" charset="-122"/>
+                <a:cs typeface="Calibri" pitchFamily="34" charset="-120"/>
+              </a:rPr>
+              <a:t>scenes 6 + 7</a:t>
+            </a:r>
+            <a:endParaRPr lang="en-US" sz="1500" dirty="0"/>
+          </a:p>
+        </p:txBody>
+      </p:sp>
+      <p:sp>
+        <p:nvSpPr>
+          <p:cNvPr id="15" name="Text 13"/>
+          <p:cNvSpPr/>
+          <p:nvPr/>
+        </p:nvSpPr>
+        <p:spPr>
+          <a:xfrm>
+            <a:off x="822960" y="3977640"/>
+            <a:ext cx="10241280" cy="1280160"/>
+          </a:xfrm>
+          <a:prstGeom prst="rect">
+            <a:avLst/>
+          </a:prstGeom>
+          <a:noFill/>
+          <a:ln/>
+        </p:spPr>
+        <p:txBody>
+          <a:bodyPr wrap="square" lIns="0" tIns="0" rIns="0" bIns="0" rtlCol="0" anchor="ctr"/>
+          <a:lstStyle/>
+          <a:p>
+            <a:pPr indent="0" marL="0">
+              <a:buNone/>
+            </a:pPr>
+            <a:r>
+              <a:rPr lang="en-US" sz="2000" i="1" dirty="0">
+                <a:solidFill>
+                  <a:srgbClr val="212121"/>
+                </a:solidFill>
+                <a:latin typeface="Calibri" pitchFamily="34" charset="0"/>
+                <a:ea typeface="Calibri" pitchFamily="34" charset="-122"/>
+                <a:cs typeface="Calibri" pitchFamily="34" charset="-120"/>
+              </a:rPr>
+              <a:t>Three tampers with the trust state, three attributed refusals — then a tampered tool, and every proof cell poisons fail-closed. Nothing repairs a baseline.</a:t>
+            </a:r>
+            <a:endParaRPr lang="en-US" sz="2000" dirty="0"/>
+          </a:p>
+        </p:txBody>
+      </p:sp>
+      <p:sp>
+        <p:nvSpPr>
+          <p:cNvPr id="16" name="Text 14"/>
+          <p:cNvSpPr/>
+          <p:nvPr/>
+        </p:nvSpPr>
+        <p:spPr>
+          <a:xfrm>
+            <a:off x="822960" y="6053328"/>
+            <a:ext cx="10515600" cy="603504"/>
+          </a:xfrm>
+          <a:prstGeom prst="rect">
+            <a:avLst/>
+          </a:prstGeom>
+          <a:noFill/>
+          <a:ln/>
+        </p:spPr>
+        <p:txBody>
+          <a:bodyPr wrap="square" lIns="0" tIns="0" rIns="0" bIns="0" rtlCol="0" anchor="ctr"/>
+          <a:lstStyle/>
+          <a:p>
+            <a:pPr indent="0" marL="0">
+              <a:buNone/>
+            </a:pPr>
+            <a:r>
+              <a:rPr lang="en-US" sz="1100" dirty="0">
+                <a:solidFill>
+                  <a:srgbClr val="5A6478"/>
+                </a:solidFill>
+                <a:latin typeface="Courier New" pitchFamily="34" charset="0"/>
+                <a:ea typeface="Courier New" pitchFamily="34" charset="-122"/>
+                <a:cs typeface="Courier New" pitchFamily="34" charset="-120"/>
+              </a:rPr>
+              <a:t>./examples/demo_isolette.sh --scenes "6 7"</a:t>
+            </a:r>
+            <a:endParaRPr lang="en-US" sz="1100" dirty="0"/>
+          </a:p>
+        </p:txBody>
+      </p:sp>
+    </p:spTree>
+  </p:cSld>
+  <p:clrMapOvr>
+    <a:masterClrMapping/>
+  </p:clrMapOvr>
+</p:sld>
+</file>
+
+<file path=ppt/slides/slide15.xml><?xml version="1.0" encoding="utf-8"?>
+<p:sld xmlns:a="http://schemas.openxmlformats.org/drawingml/2006/main" xmlns:r="http://schemas.openxmlformats.org/officeDocument/2006/relationships" xmlns:p="http://schemas.openxmlformats.org/presentationml/2006/main">
+  <p:cSld name="Slide 15">
+    <p:bg>
+      <p:bgPr>
+        <a:solidFill>
+          <a:srgbClr val="FFFFFF"/>
+        </a:solidFill>
+      </p:bgPr>
+    </p:bg>
+    <p:spTree>
+      <p:nvGrpSpPr>
+        <p:cNvPr id="1" name=""/>
+        <p:cNvGrpSpPr/>
+        <p:nvPr/>
+      </p:nvGrpSpPr>
+      <p:grpSpPr>
+        <a:xfrm>
+          <a:off x="0" y="0"/>
+          <a:ext cx="0" cy="0"/>
+          <a:chOff x="0" y="0"/>
+          <a:chExt cx="0" cy="0"/>
+        </a:xfrm>
+      </p:grpSpPr>
+      <p:sp>
+        <p:nvSpPr>
+          <p:cNvPr id="2" name="Shape 0"/>
+          <p:cNvSpPr/>
+          <p:nvPr/>
+        </p:nvSpPr>
+        <p:spPr>
+          <a:xfrm>
+            <a:off x="640080" y="201168"/>
+            <a:ext cx="2073859" cy="502920"/>
+          </a:xfrm>
+          <a:prstGeom prst="roundRect">
+            <a:avLst>
+              <a:gd name="adj" fmla="val 9091"/>
+            </a:avLst>
+          </a:prstGeom>
+          <a:solidFill>
+            <a:srgbClr val="E4EAF4"/>
+          </a:solidFill>
+          <a:ln/>
+        </p:spPr>
+      </p:sp>
+      <p:sp>
+        <p:nvSpPr>
+          <p:cNvPr id="3" name="Text 1"/>
+          <p:cNvSpPr/>
+          <p:nvPr/>
+        </p:nvSpPr>
+        <p:spPr>
+          <a:xfrm>
+            <a:off x="640080" y="201168"/>
+            <a:ext cx="2073859" cy="502920"/>
+          </a:xfrm>
+          <a:prstGeom prst="rect">
+            <a:avLst/>
+          </a:prstGeom>
+          <a:noFill/>
+          <a:ln/>
+        </p:spPr>
+        <p:txBody>
+          <a:bodyPr wrap="square" lIns="254" tIns="254" rIns="254" bIns="254" rtlCol="0" anchor="ctr"/>
+          <a:lstStyle/>
+          <a:p>
+            <a:pPr algn="ctr" indent="0" marL="0">
+              <a:buNone/>
+            </a:pPr>
+            <a:r>
+              <a:rPr lang="en-US" sz="900" dirty="0">
+                <a:solidFill>
+                  <a:srgbClr val="5A6478"/>
+                </a:solidFill>
+                <a:latin typeface="Calibri" pitchFamily="34" charset="0"/>
+                <a:ea typeface="Calibri" pitchFamily="34" charset="-122"/>
+                <a:cs typeface="Calibri" pitchFamily="34" charset="-120"/>
+              </a:rPr>
+              <a:t>Preliminaries</a:t>
+            </a:r>
+            <a:endParaRPr lang="en-US" sz="900" dirty="0"/>
+          </a:p>
+        </p:txBody>
+      </p:sp>
+      <p:sp>
+        <p:nvSpPr>
+          <p:cNvPr id="4" name="Shape 2"/>
+          <p:cNvSpPr/>
+          <p:nvPr/>
+        </p:nvSpPr>
+        <p:spPr>
+          <a:xfrm>
+            <a:off x="2841955" y="201168"/>
+            <a:ext cx="2073859" cy="502920"/>
+          </a:xfrm>
+          <a:prstGeom prst="roundRect">
+            <a:avLst>
+              <a:gd name="adj" fmla="val 9091"/>
+            </a:avLst>
+          </a:prstGeom>
+          <a:solidFill>
+            <a:srgbClr val="1E2761"/>
+          </a:solidFill>
+          <a:ln/>
+        </p:spPr>
+      </p:sp>
+      <p:sp>
+        <p:nvSpPr>
+          <p:cNvPr id="5" name="Text 3"/>
+          <p:cNvSpPr/>
+          <p:nvPr/>
+        </p:nvSpPr>
+        <p:spPr>
+          <a:xfrm>
+            <a:off x="2841955" y="201168"/>
+            <a:ext cx="2073859" cy="502920"/>
+          </a:xfrm>
+          <a:prstGeom prst="rect">
+            <a:avLst/>
+          </a:prstGeom>
+          <a:noFill/>
+          <a:ln/>
+        </p:spPr>
+        <p:txBody>
+          <a:bodyPr wrap="square" lIns="254" tIns="254" rIns="254" bIns="254" rtlCol="0" anchor="ctr"/>
+          <a:lstStyle/>
+          <a:p>
+            <a:pPr algn="ctr" indent="0" marL="0">
+              <a:buNone/>
+            </a:pPr>
+            <a:r>
+              <a:rPr lang="en-US" sz="900" b="1" dirty="0">
+                <a:solidFill>
+                  <a:srgbClr val="FFFFFF"/>
+                </a:solidFill>
+                <a:latin typeface="Calibri" pitchFamily="34" charset="0"/>
+                <a:ea typeface="Calibri" pitchFamily="34" charset="-122"/>
+                <a:cs typeface="Calibri" pitchFamily="34" charset="-120"/>
+              </a:rPr>
+              <a:t>Demo:</a:t>
+            </a:r>
+            <a:endParaRPr lang="en-US" sz="900" dirty="0"/>
+          </a:p>
+          <a:p>
+            <a:pPr algn="ctr" indent="0" marL="0">
+              <a:buNone/>
+            </a:pPr>
+            <a:r>
+              <a:rPr lang="en-US" sz="900" b="1" dirty="0">
+                <a:solidFill>
+                  <a:srgbClr val="FFFFFF"/>
+                </a:solidFill>
+                <a:latin typeface="Calibri" pitchFamily="34" charset="0"/>
+                <a:ea typeface="Calibri" pitchFamily="34" charset="-122"/>
+                <a:cs typeface="Calibri" pitchFamily="34" charset="-120"/>
+              </a:rPr>
+              <a:t>Isolette (SysMLv2 → Rust)</a:t>
+            </a:r>
+            <a:endParaRPr lang="en-US" sz="900" dirty="0"/>
+          </a:p>
+        </p:txBody>
+      </p:sp>
+      <p:sp>
+        <p:nvSpPr>
+          <p:cNvPr id="6" name="Shape 4"/>
+          <p:cNvSpPr/>
+          <p:nvPr/>
+        </p:nvSpPr>
+        <p:spPr>
+          <a:xfrm>
+            <a:off x="5043830" y="201168"/>
+            <a:ext cx="2073859" cy="502920"/>
+          </a:xfrm>
+          <a:prstGeom prst="roundRect">
+            <a:avLst>
+              <a:gd name="adj" fmla="val 9091"/>
+            </a:avLst>
+          </a:prstGeom>
+          <a:solidFill>
+            <a:srgbClr val="E4EAF4"/>
+          </a:solidFill>
+          <a:ln/>
+        </p:spPr>
+      </p:sp>
+      <p:sp>
+        <p:nvSpPr>
+          <p:cNvPr id="7" name="Text 5"/>
+          <p:cNvSpPr/>
+          <p:nvPr/>
+        </p:nvSpPr>
+        <p:spPr>
+          <a:xfrm>
+            <a:off x="5043830" y="201168"/>
+            <a:ext cx="2073859" cy="502920"/>
+          </a:xfrm>
+          <a:prstGeom prst="rect">
+            <a:avLst/>
+          </a:prstGeom>
+          <a:noFill/>
+          <a:ln/>
+        </p:spPr>
+        <p:txBody>
+          <a:bodyPr wrap="square" lIns="254" tIns="254" rIns="254" bIns="254" rtlCol="0" anchor="ctr"/>
+          <a:lstStyle/>
+          <a:p>
+            <a:pPr algn="ctr" indent="0" marL="0">
+              <a:buNone/>
+            </a:pPr>
+            <a:r>
+              <a:rPr lang="en-US" sz="900" dirty="0">
+                <a:solidFill>
+                  <a:srgbClr val="5A6478"/>
+                </a:solidFill>
+                <a:latin typeface="Calibri" pitchFamily="34" charset="0"/>
+                <a:ea typeface="Calibri" pitchFamily="34" charset="-122"/>
+                <a:cs typeface="Calibri" pitchFamily="34" charset="-120"/>
+              </a:rPr>
+              <a:t>Other Ecosystems</a:t>
+            </a:r>
+            <a:endParaRPr lang="en-US" sz="900" dirty="0"/>
+          </a:p>
+        </p:txBody>
+      </p:sp>
+      <p:sp>
+        <p:nvSpPr>
+          <p:cNvPr id="8" name="Shape 6"/>
+          <p:cNvSpPr/>
+          <p:nvPr/>
+        </p:nvSpPr>
+        <p:spPr>
+          <a:xfrm>
+            <a:off x="7245706" y="201168"/>
+            <a:ext cx="2073859" cy="502920"/>
+          </a:xfrm>
+          <a:prstGeom prst="roundRect">
+            <a:avLst>
+              <a:gd name="adj" fmla="val 9091"/>
+            </a:avLst>
+          </a:prstGeom>
+          <a:solidFill>
+            <a:srgbClr val="E4EAF4"/>
+          </a:solidFill>
+          <a:ln/>
+        </p:spPr>
+      </p:sp>
+      <p:sp>
+        <p:nvSpPr>
+          <p:cNvPr id="9" name="Text 7"/>
+          <p:cNvSpPr/>
+          <p:nvPr/>
+        </p:nvSpPr>
+        <p:spPr>
+          <a:xfrm>
+            <a:off x="7245706" y="201168"/>
+            <a:ext cx="2073859" cy="502920"/>
+          </a:xfrm>
+          <a:prstGeom prst="rect">
+            <a:avLst/>
+          </a:prstGeom>
+          <a:noFill/>
+          <a:ln/>
+        </p:spPr>
+        <p:txBody>
+          <a:bodyPr wrap="square" lIns="254" tIns="254" rIns="254" bIns="254" rtlCol="0" anchor="ctr"/>
+          <a:lstStyle/>
+          <a:p>
+            <a:pPr algn="ctr" indent="0" marL="0">
+              <a:buNone/>
+            </a:pPr>
+            <a:r>
+              <a:rPr lang="en-US" sz="900" dirty="0">
+                <a:solidFill>
+                  <a:srgbClr val="5A6478"/>
+                </a:solidFill>
+                <a:latin typeface="Calibri" pitchFamily="34" charset="0"/>
+                <a:ea typeface="Calibri" pitchFamily="34" charset="-122"/>
+                <a:cs typeface="Calibri" pitchFamily="34" charset="-120"/>
+              </a:rPr>
+              <a:t>AI in the Loop</a:t>
+            </a:r>
+            <a:endParaRPr lang="en-US" sz="900" dirty="0"/>
+          </a:p>
+        </p:txBody>
+      </p:sp>
+      <p:sp>
+        <p:nvSpPr>
+          <p:cNvPr id="10" name="Shape 8"/>
+          <p:cNvSpPr/>
+          <p:nvPr/>
+        </p:nvSpPr>
+        <p:spPr>
+          <a:xfrm>
+            <a:off x="9447581" y="201168"/>
+            <a:ext cx="2073859" cy="502920"/>
+          </a:xfrm>
+          <a:prstGeom prst="roundRect">
+            <a:avLst>
+              <a:gd name="adj" fmla="val 9091"/>
+            </a:avLst>
+          </a:prstGeom>
+          <a:solidFill>
+            <a:srgbClr val="E4EAF4"/>
+          </a:solidFill>
+          <a:ln/>
+        </p:spPr>
+      </p:sp>
+      <p:sp>
+        <p:nvSpPr>
+          <p:cNvPr id="11" name="Text 9"/>
+          <p:cNvSpPr/>
+          <p:nvPr/>
+        </p:nvSpPr>
+        <p:spPr>
+          <a:xfrm>
+            <a:off x="9447581" y="201168"/>
+            <a:ext cx="2073859" cy="502920"/>
+          </a:xfrm>
+          <a:prstGeom prst="rect">
+            <a:avLst/>
+          </a:prstGeom>
+          <a:noFill/>
+          <a:ln/>
+        </p:spPr>
+        <p:txBody>
+          <a:bodyPr wrap="square" lIns="254" tIns="254" rIns="254" bIns="254" rtlCol="0" anchor="ctr"/>
+          <a:lstStyle/>
+          <a:p>
+            <a:pPr algn="ctr" indent="0" marL="0">
+              <a:buNone/>
+            </a:pPr>
+            <a:r>
+              <a:rPr lang="en-US" sz="900" dirty="0">
+                <a:solidFill>
+                  <a:srgbClr val="5A6478"/>
+                </a:solidFill>
+                <a:latin typeface="Calibri" pitchFamily="34" charset="0"/>
+                <a:ea typeface="Calibri" pitchFamily="34" charset="-122"/>
+                <a:cs typeface="Calibri" pitchFamily="34" charset="-120"/>
+              </a:rPr>
+              <a:t>Close</a:t>
+            </a:r>
+            <a:endParaRPr lang="en-US" sz="900" dirty="0"/>
+          </a:p>
+        </p:txBody>
+      </p:sp>
+      <p:sp>
+        <p:nvSpPr>
+          <p:cNvPr id="12" name="Text 10"/>
+          <p:cNvSpPr/>
+          <p:nvPr/>
+        </p:nvSpPr>
+        <p:spPr>
+          <a:xfrm>
+            <a:off x="822960" y="1828800"/>
+            <a:ext cx="10515600" cy="457200"/>
+          </a:xfrm>
+          <a:prstGeom prst="rect">
+            <a:avLst/>
+          </a:prstGeom>
+          <a:noFill/>
+          <a:ln/>
+        </p:spPr>
+        <p:txBody>
+          <a:bodyPr wrap="square" lIns="0" tIns="0" rIns="0" bIns="0" rtlCol="0" anchor="ctr"/>
+          <a:lstStyle/>
+          <a:p>
+            <a:pPr indent="0" marL="0">
+              <a:buNone/>
+            </a:pPr>
+            <a:r>
+              <a:rPr lang="en-US" sz="1800" b="1" spc="300" kern="0" dirty="0">
+                <a:solidFill>
+                  <a:srgbClr val="5A6478"/>
+                </a:solidFill>
+                <a:latin typeface="Calibri" pitchFamily="34" charset="0"/>
+                <a:ea typeface="Calibri" pitchFamily="34" charset="-122"/>
+                <a:cs typeface="Calibri" pitchFamily="34" charset="-120"/>
+              </a:rPr>
+              <a:t>ACT VII</a:t>
+            </a:r>
+            <a:endParaRPr lang="en-US" sz="1800" dirty="0"/>
+          </a:p>
+        </p:txBody>
+      </p:sp>
+      <p:sp>
+        <p:nvSpPr>
+          <p:cNvPr id="13" name="Text 11"/>
+          <p:cNvSpPr/>
+          <p:nvPr/>
+        </p:nvSpPr>
+        <p:spPr>
+          <a:xfrm>
+            <a:off x="822960" y="2286000"/>
+            <a:ext cx="10515600" cy="822960"/>
+          </a:xfrm>
+          <a:prstGeom prst="rect">
+            <a:avLst/>
+          </a:prstGeom>
+          <a:noFill/>
+          <a:ln/>
+        </p:spPr>
+        <p:txBody>
+          <a:bodyPr wrap="square" lIns="0" tIns="0" rIns="0" bIns="0" rtlCol="0" anchor="ctr"/>
+          <a:lstStyle/>
+          <a:p>
+            <a:pPr indent="0" marL="0">
+              <a:buNone/>
+            </a:pPr>
+            <a:r>
+              <a:rPr lang="en-US" sz="4000" b="1" dirty="0">
+                <a:solidFill>
+                  <a:srgbClr val="1E2761"/>
+                </a:solidFill>
+                <a:latin typeface="Cambria" pitchFamily="34" charset="0"/>
+                <a:ea typeface="Cambria" pitchFamily="34" charset="-122"/>
+                <a:cs typeface="Cambria" pitchFamily="34" charset="-120"/>
+              </a:rPr>
+              <a:t>“Verification succeeded” is not enough</a:t>
+            </a:r>
+            <a:endParaRPr lang="en-US" sz="4000" dirty="0"/>
+          </a:p>
+        </p:txBody>
+      </p:sp>
+      <p:sp>
+        <p:nvSpPr>
+          <p:cNvPr id="14" name="Text 12"/>
+          <p:cNvSpPr/>
+          <p:nvPr/>
+        </p:nvSpPr>
+        <p:spPr>
+          <a:xfrm>
+            <a:off x="822960" y="3154680"/>
+            <a:ext cx="10515600" cy="411480"/>
+          </a:xfrm>
+          <a:prstGeom prst="rect">
+            <a:avLst/>
+          </a:prstGeom>
+          <a:noFill/>
+          <a:ln/>
+        </p:spPr>
+        <p:txBody>
+          <a:bodyPr wrap="square" lIns="0" tIns="0" rIns="0" bIns="0" rtlCol="0" anchor="ctr"/>
+          <a:lstStyle/>
+          <a:p>
+            <a:pPr indent="0" marL="0">
+              <a:buNone/>
+            </a:pPr>
+            <a:r>
+              <a:rPr lang="en-US" sz="1500" i="1" dirty="0">
+                <a:solidFill>
+                  <a:srgbClr val="5A6478"/>
+                </a:solidFill>
+                <a:latin typeface="Calibri" pitchFamily="34" charset="0"/>
+                <a:ea typeface="Calibri" pitchFamily="34" charset="-122"/>
+                <a:cs typeface="Calibri" pitchFamily="34" charset="-120"/>
+              </a:rPr>
+              <a:t>scene 12</a:t>
+            </a:r>
+            <a:endParaRPr lang="en-US" sz="1500" dirty="0"/>
+          </a:p>
+        </p:txBody>
+      </p:sp>
+      <p:sp>
+        <p:nvSpPr>
+          <p:cNvPr id="15" name="Text 13"/>
+          <p:cNvSpPr/>
+          <p:nvPr/>
+        </p:nvSpPr>
+        <p:spPr>
+          <a:xfrm>
+            <a:off x="822960" y="3977640"/>
+            <a:ext cx="10241280" cy="1280160"/>
+          </a:xfrm>
+          <a:prstGeom prst="rect">
+            <a:avLst/>
+          </a:prstGeom>
+          <a:noFill/>
+          <a:ln/>
+        </p:spPr>
+        <p:txBody>
+          <a:bodyPr wrap="square" lIns="0" tIns="0" rIns="0" bIns="0" rtlCol="0" anchor="ctr"/>
+          <a:lstStyle/>
+          <a:p>
+            <a:pPr indent="0" marL="0">
+              <a:buNone/>
+            </a:pPr>
+            <a:r>
+              <a:rPr lang="en-US" sz="2000" i="1" dirty="0">
+                <a:solidFill>
+                  <a:srgbClr val="212121"/>
+                </a:solidFill>
+                <a:latin typeface="Calibri" pitchFamily="34" charset="0"/>
+                <a:ea typeface="Calibri" pitchFamily="34" charset="-122"/>
+                <a:cs typeface="Calibri" pitchFamily="34" charset="-120"/>
+              </a:rPr>
+              <a:t>Every proof passes, every scan is silent — the heat command is inverted anyway. Only the bytes tell.</a:t>
+            </a:r>
+            <a:endParaRPr lang="en-US" sz="2000" dirty="0"/>
+          </a:p>
+        </p:txBody>
+      </p:sp>
+      <p:sp>
+        <p:nvSpPr>
+          <p:cNvPr id="16" name="Text 14"/>
+          <p:cNvSpPr/>
+          <p:nvPr/>
+        </p:nvSpPr>
+        <p:spPr>
+          <a:xfrm>
+            <a:off x="822960" y="6053328"/>
+            <a:ext cx="10515600" cy="603504"/>
+          </a:xfrm>
+          <a:prstGeom prst="rect">
+            <a:avLst/>
+          </a:prstGeom>
+          <a:noFill/>
+          <a:ln/>
+        </p:spPr>
+        <p:txBody>
+          <a:bodyPr wrap="square" lIns="0" tIns="0" rIns="0" bIns="0" rtlCol="0" anchor="ctr"/>
+          <a:lstStyle/>
+          <a:p>
+            <a:pPr indent="0" marL="0">
+              <a:buNone/>
+            </a:pPr>
+            <a:r>
+              <a:rPr lang="en-US" sz="1100" dirty="0">
+                <a:solidFill>
+                  <a:srgbClr val="5A6478"/>
+                </a:solidFill>
+                <a:latin typeface="Courier New" pitchFamily="34" charset="0"/>
+                <a:ea typeface="Courier New" pitchFamily="34" charset="-122"/>
+                <a:cs typeface="Courier New" pitchFamily="34" charset="-120"/>
+              </a:rPr>
+              <a:t>./examples/demo_isolette.sh --scenes 12</a:t>
+            </a:r>
+            <a:endParaRPr lang="en-US" sz="1100" dirty="0"/>
+          </a:p>
+        </p:txBody>
+      </p:sp>
+    </p:spTree>
+  </p:cSld>
+  <p:clrMapOvr>
+    <a:masterClrMapping/>
+  </p:clrMapOvr>
+</p:sld>
+</file>
+
+<file path=ppt/slides/slide16.xml><?xml version="1.0" encoding="utf-8"?>
+<p:sld xmlns:a="http://schemas.openxmlformats.org/drawingml/2006/main" xmlns:r="http://schemas.openxmlformats.org/officeDocument/2006/relationships" xmlns:p="http://schemas.openxmlformats.org/presentationml/2006/main">
+  <p:cSld name="Slide 16">
+    <p:bg>
+      <p:bgPr>
+        <a:solidFill>
+          <a:srgbClr val="FFFFFF"/>
+        </a:solidFill>
+      </p:bgPr>
+    </p:bg>
+    <p:spTree>
+      <p:nvGrpSpPr>
+        <p:cNvPr id="1" name=""/>
+        <p:cNvGrpSpPr/>
+        <p:nvPr/>
+      </p:nvGrpSpPr>
+      <p:grpSpPr>
+        <a:xfrm>
+          <a:off x="0" y="0"/>
+          <a:ext cx="0" cy="0"/>
+          <a:chOff x="0" y="0"/>
+          <a:chExt cx="0" cy="0"/>
+        </a:xfrm>
+      </p:grpSpPr>
+      <p:sp>
+        <p:nvSpPr>
+          <p:cNvPr id="2" name="Text 0"/>
+          <p:cNvSpPr/>
+          <p:nvPr/>
+        </p:nvSpPr>
+        <p:spPr>
+          <a:xfrm>
+            <a:off x="640080" y="411480"/>
+            <a:ext cx="10972800" cy="731520"/>
+          </a:xfrm>
+          <a:prstGeom prst="rect">
+            <a:avLst/>
+          </a:prstGeom>
+          <a:noFill/>
+          <a:ln/>
+        </p:spPr>
+        <p:txBody>
+          <a:bodyPr wrap="square" lIns="0" tIns="0" rIns="0" bIns="0" rtlCol="0" anchor="ctr"/>
+          <a:lstStyle/>
+          <a:p>
+            <a:pPr indent="0" marL="0">
+              <a:buNone/>
+            </a:pPr>
+            <a:r>
+              <a:rPr lang="en-US" sz="3600" b="1" dirty="0">
+                <a:solidFill>
+                  <a:srgbClr val="1E2761"/>
+                </a:solidFill>
+                <a:latin typeface="Cambria" pitchFamily="34" charset="0"/>
+                <a:ea typeface="Cambria" pitchFamily="34" charset="-122"/>
+                <a:cs typeface="Cambria" pitchFamily="34" charset="-120"/>
+              </a:rPr>
               <a:t>References</a:t>
             </a:r>
             <a:endParaRPr lang="en-US" sz="3600" dirty="0"/>
@@ -4389,7 +5825,7 @@
           <a:bodyPr wrap="square" lIns="0" tIns="0" rIns="0" bIns="0" rtlCol="0" anchor="t"/>
           <a:lstStyle/>
           <a:p>
-            <a:pPr marL="0" indent="0" algn="l">
+            <a:pPr algn="l" indent="0" marL="0">
               <a:spcAft>
                 <a:spcPts val="400"/>
               </a:spcAft>
@@ -4409,7 +5845,7 @@
             <a:endParaRPr lang="en-US" sz="1400" dirty="0"/>
           </a:p>
           <a:p>
-            <a:pPr marL="342900" indent="-342900" algn="l">
+            <a:pPr algn="l" marL="342900" indent="-342900">
               <a:spcAft>
                 <a:spcPts val="300"/>
               </a:spcAft>
@@ -4427,6 +5863,12 @@
               </a:rPr>
               <a:t>Hatcliff &amp; Belt, </a:t>
             </a:r>
+            <a:pPr algn="l" indent="0" marL="0">
+              <a:spcAft>
+                <a:spcPts val="300"/>
+              </a:spcAft>
+              <a:buNone/>
+            </a:pPr>
             <a:r>
               <a:rPr lang="en-US" sz="1150" i="1" dirty="0">
                 <a:solidFill>
@@ -4438,6 +5880,12 @@
               </a:rPr>
               <a:t>The Isolette System: Illustrating End-to-End Artifacts for Rigorous Model-Based Engineering</a:t>
             </a:r>
+            <a:pPr algn="l" indent="0" marL="0">
+              <a:spcAft>
+                <a:spcPts val="300"/>
+              </a:spcAft>
+              <a:buNone/>
+            </a:pPr>
             <a:r>
               <a:rPr lang="en-US" sz="1150" dirty="0">
                 <a:solidFill>
@@ -4452,7 +5900,7 @@
             <a:endParaRPr lang="en-US" sz="1400" dirty="0"/>
           </a:p>
           <a:p>
-            <a:pPr marL="342900" indent="-342900" algn="l">
+            <a:pPr algn="l" marL="342900" indent="-342900">
               <a:spcAft>
                 <a:spcPts val="300"/>
               </a:spcAft>
@@ -4470,6 +5918,12 @@
               </a:rPr>
               <a:t>Hatcliff, Belt, Robby, McKenzie, Liang, </a:t>
             </a:r>
+            <a:pPr algn="l" indent="0" marL="0">
+              <a:spcAft>
+                <a:spcPts val="300"/>
+              </a:spcAft>
+              <a:buNone/>
+            </a:pPr>
             <a:r>
               <a:rPr lang="en-US" sz="1150" i="1" dirty="0">
                 <a:solidFill>
@@ -4481,6 +5935,12 @@
               </a:rPr>
               <a:t>End-to-End Formal Methods Integrated Development with SysMLv2 Using HAMR</a:t>
             </a:r>
+            <a:pPr algn="l" indent="0" marL="0">
+              <a:spcAft>
+                <a:spcPts val="300"/>
+              </a:spcAft>
+              <a:buNone/>
+            </a:pPr>
             <a:r>
               <a:rPr lang="en-US" sz="1150" dirty="0">
                 <a:solidFill>
@@ -4495,7 +5955,7 @@
             <a:endParaRPr lang="en-US" sz="1400" dirty="0"/>
           </a:p>
           <a:p>
-            <a:pPr marL="342900" indent="-342900" algn="l">
+            <a:pPr algn="l" marL="342900" indent="-342900">
               <a:spcAft>
                 <a:spcPts val="300"/>
               </a:spcAft>
@@ -4513,6 +5973,12 @@
               </a:rPr>
               <a:t>Hatcliff, Belt, Robby, Carpenter, </a:t>
             </a:r>
+            <a:pPr algn="l" indent="0" marL="0">
+              <a:spcAft>
+                <a:spcPts val="300"/>
+              </a:spcAft>
+              <a:buNone/>
+            </a:pPr>
             <a:r>
               <a:rPr lang="en-US" sz="1150" i="1" dirty="0">
                 <a:solidFill>
@@ -4524,6 +5990,12 @@
               </a:rPr>
               <a:t>HAMR: An AADL Multi-platform Code Generation Toolset</a:t>
             </a:r>
+            <a:pPr algn="l" indent="0" marL="0">
+              <a:spcAft>
+                <a:spcPts val="300"/>
+              </a:spcAft>
+              <a:buNone/>
+            </a:pPr>
             <a:r>
               <a:rPr lang="en-US" sz="1150" dirty="0">
                 <a:solidFill>
@@ -4538,7 +6010,7 @@
             <a:endParaRPr lang="en-US" sz="1400" dirty="0"/>
           </a:p>
           <a:p>
-            <a:pPr marL="342900" indent="-342900" algn="l">
+            <a:pPr algn="l" marL="342900" indent="-342900">
               <a:spcAft>
                 <a:spcPts val="300"/>
               </a:spcAft>
@@ -4556,6 +6028,12 @@
               </a:rPr>
               <a:t>Lempia &amp; Miller, </a:t>
             </a:r>
+            <a:pPr algn="l" indent="0" marL="0">
+              <a:spcAft>
+                <a:spcPts val="300"/>
+              </a:spcAft>
+              <a:buNone/>
+            </a:pPr>
             <a:r>
               <a:rPr lang="en-US" sz="1150" i="1" dirty="0">
                 <a:solidFill>
@@ -4567,6 +6045,12 @@
               </a:rPr>
               <a:t>Requirements Engineering Management Handbook</a:t>
             </a:r>
+            <a:pPr algn="l" indent="0" marL="0">
+              <a:spcAft>
+                <a:spcPts val="300"/>
+              </a:spcAft>
+              <a:buNone/>
+            </a:pPr>
             <a:r>
               <a:rPr lang="en-US" sz="1150" dirty="0">
                 <a:solidFill>
@@ -4581,7 +6065,7 @@
             <a:endParaRPr lang="en-US" sz="1400" dirty="0"/>
           </a:p>
           <a:p>
-            <a:pPr marL="342900" indent="-342900" algn="l">
+            <a:pPr algn="l" marL="342900" indent="-342900">
               <a:spcAft>
                 <a:spcPts val="300"/>
               </a:spcAft>
@@ -4602,7 +6086,7 @@
             <a:endParaRPr lang="en-US" sz="1400" dirty="0"/>
           </a:p>
           <a:p>
-            <a:pPr marL="0" indent="0" algn="l">
+            <a:pPr algn="l" indent="0" marL="0">
               <a:spcBef>
                 <a:spcPts val="1200"/>
               </a:spcBef>
@@ -4625,7 +6109,7 @@
             <a:endParaRPr lang="en-US" sz="1400" dirty="0"/>
           </a:p>
           <a:p>
-            <a:pPr marL="342900" indent="-342900" algn="l">
+            <a:pPr algn="l" marL="342900" indent="-342900">
               <a:spcAft>
                 <a:spcPts val="300"/>
               </a:spcAft>
@@ -4643,6 +6127,12 @@
               </a:rPr>
               <a:t>Ramsdell, Rowe, Alexander, Helble, Loscocco, Pendergrass, Petz, </a:t>
             </a:r>
+            <a:pPr algn="l" indent="0" marL="0">
+              <a:spcAft>
+                <a:spcPts val="300"/>
+              </a:spcAft>
+              <a:buNone/>
+            </a:pPr>
             <a:r>
               <a:rPr lang="en-US" sz="1150" i="1" dirty="0">
                 <a:solidFill>
@@ -4654,6 +6144,12 @@
               </a:rPr>
               <a:t>Orchestrating Layered Attestations</a:t>
             </a:r>
+            <a:pPr algn="l" indent="0" marL="0">
+              <a:spcAft>
+                <a:spcPts val="300"/>
+              </a:spcAft>
+              <a:buNone/>
+            </a:pPr>
             <a:r>
               <a:rPr lang="en-US" sz="1150" dirty="0">
                 <a:solidFill>
@@ -4668,7 +6164,7 @@
             <a:endParaRPr lang="en-US" sz="1400" dirty="0"/>
           </a:p>
           <a:p>
-            <a:pPr marL="0" indent="0" algn="l">
+            <a:pPr algn="l" indent="0" marL="0">
               <a:spcBef>
                 <a:spcPts val="1200"/>
               </a:spcBef>
@@ -4691,7 +6187,7 @@
             <a:endParaRPr lang="en-US" sz="1400" dirty="0"/>
           </a:p>
           <a:p>
-            <a:pPr marL="342900" indent="-342900" algn="l">
+            <a:pPr algn="l" marL="342900" indent="-342900">
               <a:spcAft>
                 <a:spcPts val="300"/>
               </a:spcAft>
@@ -4709,6 +6205,12 @@
               </a:rPr>
               <a:t>Lattuada, Hance, Cho, Brun, Subasinghe, Zhou, Howell, Parno, Hawblitzel, </a:t>
             </a:r>
+            <a:pPr algn="l" indent="0" marL="0">
+              <a:spcAft>
+                <a:spcPts val="300"/>
+              </a:spcAft>
+              <a:buNone/>
+            </a:pPr>
             <a:r>
               <a:rPr lang="en-US" sz="1150" i="1" dirty="0">
                 <a:solidFill>
@@ -4720,6 +6222,12 @@
               </a:rPr>
               <a:t>Verus: Verifying Rust Programs using Linear Ghost Types</a:t>
             </a:r>
+            <a:pPr algn="l" indent="0" marL="0">
+              <a:spcAft>
+                <a:spcPts val="300"/>
+              </a:spcAft>
+              <a:buNone/>
+            </a:pPr>
             <a:r>
               <a:rPr lang="en-US" sz="1150" dirty="0">
                 <a:solidFill>
@@ -4734,7 +6242,7 @@
             <a:endParaRPr lang="en-US" sz="1400" dirty="0"/>
           </a:p>
           <a:p>
-            <a:pPr marL="342900" indent="-342900" algn="l">
+            <a:pPr algn="l" marL="342900" indent="-342900">
               <a:spcAft>
                 <a:spcPts val="300"/>
               </a:spcAft>
@@ -4752,6 +6260,12 @@
               </a:rPr>
               <a:t>Klein et al., </a:t>
             </a:r>
+            <a:pPr algn="l" indent="0" marL="0">
+              <a:spcAft>
+                <a:spcPts val="300"/>
+              </a:spcAft>
+              <a:buNone/>
+            </a:pPr>
             <a:r>
               <a:rPr lang="en-US" sz="1150" i="1" dirty="0">
                 <a:solidFill>
@@ -4763,6 +6277,12 @@
               </a:rPr>
               <a:t>seL4: Formal Verification of an OS Kernel</a:t>
             </a:r>
+            <a:pPr algn="l" indent="0" marL="0">
+              <a:spcAft>
+                <a:spcPts val="300"/>
+              </a:spcAft>
+              <a:buNone/>
+            </a:pPr>
             <a:r>
               <a:rPr lang="en-US" sz="1150" dirty="0">
                 <a:solidFill>
@@ -4794,7 +6314,6 @@
         <a:solidFill>
           <a:srgbClr val="FFFFFF"/>
         </a:solidFill>
-        <a:effectLst/>
       </p:bgPr>
     </p:bg>
     <p:spTree>
@@ -4832,7 +6351,7 @@
           <a:bodyPr wrap="square" lIns="0" tIns="0" rIns="0" bIns="0" rtlCol="0" anchor="ctr"/>
           <a:lstStyle/>
           <a:p>
-            <a:pPr marL="0" indent="0">
+            <a:pPr indent="0" marL="0">
               <a:buNone/>
             </a:pPr>
             <a:r>
@@ -4871,7 +6390,7 @@
           <a:bodyPr wrap="square" lIns="0" tIns="0" rIns="0" bIns="0" rtlCol="0" anchor="t"/>
           <a:lstStyle/>
           <a:p>
-            <a:pPr marL="342900" indent="-342900" algn="l">
+            <a:pPr algn="l" marL="342900" indent="-342900">
               <a:buSzPct val="100000"/>
               <a:buChar char="•"/>
             </a:pPr>
@@ -4884,8 +6403,28 @@
                 <a:ea typeface="Calibri" pitchFamily="34" charset="-122"/>
                 <a:cs typeface="Calibri" pitchFamily="34" charset="-120"/>
               </a:rPr>
-              <a:t>Traditional remote attestation: did system components boot into a predictable state?</a:t>
-            </a:r>
+              <a:t>Traditional remote attestation: </a:t>
+            </a:r>
+            <a:pPr algn="l" indent="0" marL="0">
+              <a:buNone/>
+            </a:pPr>
+            <a:r>
+              <a:rPr lang="en-US" sz="1700" b="1" dirty="0">
+                <a:solidFill>
+                  <a:srgbClr val="212121"/>
+                </a:solidFill>
+                <a:latin typeface="Calibri" pitchFamily="34" charset="0"/>
+                <a:ea typeface="Calibri" pitchFamily="34" charset="-122"/>
+                <a:cs typeface="Calibri" pitchFamily="34" charset="-120"/>
+              </a:rPr>
+              <a:t>did system components boot into a predictable state?</a:t>
+            </a:r>
+            <a:pPr algn="l" indent="0" marL="0">
+              <a:spcAft>
+                <a:spcPts val="1000"/>
+              </a:spcAft>
+              <a:buNone/>
+            </a:pPr>
             <a:r>
               <a:rPr lang="en-US" sz="1700" dirty="0">
                 <a:solidFill>
@@ -4900,7 +6439,7 @@
             <a:endParaRPr lang="en-US" sz="1700" dirty="0"/>
           </a:p>
           <a:p>
-            <a:pPr marL="342900" indent="-342900" algn="l">
+            <a:pPr algn="l" marL="342900" indent="-342900">
               <a:buSzPct val="100000"/>
               <a:buChar char="•"/>
             </a:pPr>
@@ -4915,6 +6454,9 @@
               </a:rPr>
               <a:t>Layered, runtime attestation: </a:t>
             </a:r>
+            <a:pPr algn="l" indent="0" marL="0">
+              <a:buNone/>
+            </a:pPr>
             <a:r>
               <a:rPr lang="en-US" sz="1700" dirty="0">
                 <a:solidFill>
@@ -4926,6 +6468,12 @@
               </a:rPr>
               <a:t>extend boot-time trust via dynamic measurement of system components </a:t>
             </a:r>
+            <a:pPr algn="l" indent="0" marL="0">
+              <a:spcAft>
+                <a:spcPts val="1000"/>
+              </a:spcAft>
+              <a:buNone/>
+            </a:pPr>
             <a:r>
               <a:rPr lang="en-US" sz="1700" b="1" dirty="0">
                 <a:solidFill>
@@ -4940,7 +6488,7 @@
             <a:endParaRPr lang="en-US" sz="1700" dirty="0"/>
           </a:p>
           <a:p>
-            <a:pPr marL="342900" indent="-342900" algn="l">
+            <a:pPr algn="l" marL="342900" indent="-342900">
               <a:buSzPct val="100000"/>
               <a:buChar char="•"/>
             </a:pPr>
@@ -4955,6 +6503,9 @@
               </a:rPr>
               <a:t>Lifecycle attestation: </a:t>
             </a:r>
+            <a:pPr algn="l" indent="0" marL="0">
+              <a:buNone/>
+            </a:pPr>
             <a:r>
               <a:rPr lang="en-US" sz="1700" dirty="0">
                 <a:solidFill>
@@ -4966,6 +6517,9 @@
               </a:rPr>
               <a:t>extends this notion to </a:t>
             </a:r>
+            <a:pPr algn="l" indent="0" marL="0">
+              <a:buNone/>
+            </a:pPr>
             <a:r>
               <a:rPr lang="en-US" sz="1700" b="1" dirty="0">
                 <a:solidFill>
@@ -4977,6 +6531,12 @@
               </a:rPr>
               <a:t>artifacts of the development lifecycle</a:t>
             </a:r>
+            <a:pPr algn="l" indent="0" marL="0">
+              <a:spcAft>
+                <a:spcPts val="1000"/>
+              </a:spcAft>
+              <a:buNone/>
+            </a:pPr>
             <a:r>
               <a:rPr lang="en-US" sz="1700" dirty="0">
                 <a:solidFill>
@@ -4991,7 +6551,7 @@
             <a:endParaRPr lang="en-US" sz="1700" dirty="0"/>
           </a:p>
           <a:p>
-            <a:pPr marL="685800" lvl="1" indent="-342900" algn="l">
+            <a:pPr algn="l" lvl="1" marL="685800" indent="-342900">
               <a:spcAft>
                 <a:spcPts val="1000"/>
               </a:spcAft>
@@ -5012,7 +6572,7 @@
             <a:endParaRPr lang="en-US" sz="1700" dirty="0"/>
           </a:p>
           <a:p>
-            <a:pPr marL="685800" lvl="1" indent="-342900" algn="l">
+            <a:pPr algn="l" lvl="1" marL="685800" indent="-342900">
               <a:buSzPct val="100000"/>
               <a:buChar char="–"/>
             </a:pPr>
@@ -5027,6 +6587,9 @@
               </a:rPr>
               <a:t>…and to lifecycle </a:t>
             </a:r>
+            <a:pPr algn="l" indent="0" marL="0">
+              <a:buNone/>
+            </a:pPr>
             <a:r>
               <a:rPr lang="en-US" sz="1700" b="1" dirty="0">
                 <a:solidFill>
@@ -5038,6 +6601,12 @@
               </a:rPr>
               <a:t>events</a:t>
             </a:r>
+            <a:pPr algn="l" indent="0" marL="0">
+              <a:spcAft>
+                <a:spcPts val="1000"/>
+              </a:spcAft>
+              <a:buNone/>
+            </a:pPr>
             <a:r>
               <a:rPr lang="en-US" sz="1700" dirty="0">
                 <a:solidFill>
@@ -5052,7 +6621,7 @@
             <a:endParaRPr lang="en-US" sz="1700" dirty="0"/>
           </a:p>
           <a:p>
-            <a:pPr marL="1028700" lvl="2" indent="-342900" algn="l">
+            <a:pPr algn="l" lvl="2" marL="1028700" indent="-342900">
               <a:spcAft>
                 <a:spcPts val="200"/>
               </a:spcAft>
@@ -5073,7 +6642,7 @@
             <a:endParaRPr lang="en-US" sz="1700" dirty="0"/>
           </a:p>
           <a:p>
-            <a:pPr marL="1028700" lvl="2" indent="-342900" algn="l">
+            <a:pPr algn="l" lvl="2" marL="1028700" indent="-342900">
               <a:spcAft>
                 <a:spcPts val="200"/>
               </a:spcAft>
@@ -5094,7 +6663,7 @@
             <a:endParaRPr lang="en-US" sz="1700" dirty="0"/>
           </a:p>
           <a:p>
-            <a:pPr marL="1028700" lvl="2" indent="-342900" algn="l">
+            <a:pPr algn="l" lvl="2" marL="1028700" indent="-342900">
               <a:spcAft>
                 <a:spcPts val="200"/>
               </a:spcAft>
@@ -5115,7 +6684,7 @@
             <a:endParaRPr lang="en-US" sz="1700" dirty="0"/>
           </a:p>
           <a:p>
-            <a:pPr marL="1028700" lvl="2" indent="-342900" algn="l">
+            <a:pPr algn="l" lvl="2" marL="1028700" indent="-342900">
               <a:spcAft>
                 <a:spcPts val="200"/>
               </a:spcAft>
@@ -5136,7 +6705,7 @@
             <a:endParaRPr lang="en-US" sz="1700" dirty="0"/>
           </a:p>
           <a:p>
-            <a:pPr marL="342900" indent="-342900" algn="l">
+            <a:pPr algn="l" marL="342900" indent="-342900">
               <a:buSzPct val="100000"/>
               <a:buChar char="•"/>
             </a:pPr>
@@ -5151,6 +6720,9 @@
               </a:rPr>
               <a:t>Motivation: </a:t>
             </a:r>
+            <a:pPr algn="l" indent="0" marL="0">
+              <a:buNone/>
+            </a:pPr>
             <a:r>
               <a:rPr lang="en-US" sz="1700" dirty="0">
                 <a:solidFill>
@@ -5162,6 +6734,9 @@
               </a:rPr>
               <a:t>the </a:t>
             </a:r>
+            <a:pPr algn="l" indent="0" marL="0">
+              <a:buNone/>
+            </a:pPr>
             <a:r>
               <a:rPr lang="en-US" sz="1700" b="1" dirty="0">
                 <a:solidFill>
@@ -5173,6 +6748,12 @@
               </a:rPr>
               <a:t>proliferation of AI-generated software artifacts</a:t>
             </a:r>
+            <a:pPr algn="l" indent="0" marL="0">
+              <a:spcAft>
+                <a:spcPts val="1000"/>
+              </a:spcAft>
+              <a:buNone/>
+            </a:pPr>
             <a:r>
               <a:rPr lang="en-US" sz="1700" dirty="0">
                 <a:solidFill>
@@ -5209,13 +6790,6 @@
           </a:solidFill>
           <a:ln/>
         </p:spPr>
-        <p:txBody>
-          <a:bodyPr/>
-          <a:lstStyle/>
-          <a:p>
-            <a:endParaRPr lang="en-US"/>
-          </a:p>
-        </p:txBody>
       </p:sp>
       <p:sp>
         <p:nvSpPr>
@@ -5238,7 +6812,7 @@
           <a:bodyPr wrap="square" lIns="0" tIns="0" rIns="0" bIns="0" rtlCol="0" anchor="ctr"/>
           <a:lstStyle/>
           <a:p>
-            <a:pPr marL="0" indent="0" algn="ctr">
+            <a:pPr algn="ctr" indent="0" marL="0">
               <a:spcAft>
                 <a:spcPts val="400"/>
               </a:spcAft>
@@ -5258,7 +6832,7 @@
             <a:endParaRPr lang="en-US" sz="2000" dirty="0"/>
           </a:p>
           <a:p>
-            <a:pPr marL="0" indent="0" algn="ctr">
+            <a:pPr algn="ctr" indent="0" marL="0">
               <a:buNone/>
             </a:pPr>
             <a:r>
@@ -5292,7 +6866,6 @@
         <a:solidFill>
           <a:srgbClr val="FFFFFF"/>
         </a:solidFill>
-        <a:effectLst/>
       </p:bgPr>
     </p:bg>
     <p:spTree>
@@ -5330,7 +6903,7 @@
           <a:bodyPr wrap="square" lIns="0" tIns="0" rIns="0" bIns="0" rtlCol="0" anchor="ctr"/>
           <a:lstStyle/>
           <a:p>
-            <a:pPr marL="0" indent="0">
+            <a:pPr indent="0" marL="0">
               <a:buNone/>
             </a:pPr>
             <a:r>
@@ -5369,13 +6942,6 @@
           </a:solidFill>
           <a:ln/>
         </p:spPr>
-        <p:txBody>
-          <a:bodyPr/>
-          <a:lstStyle/>
-          <a:p>
-            <a:endParaRPr lang="en-US"/>
-          </a:p>
-        </p:txBody>
       </p:sp>
       <p:sp>
         <p:nvSpPr>
@@ -5398,7 +6964,7 @@
           <a:bodyPr wrap="square" lIns="254" tIns="254" rIns="254" bIns="254" rtlCol="0" anchor="ctr"/>
           <a:lstStyle/>
           <a:p>
-            <a:pPr marL="0" indent="0" algn="ctr">
+            <a:pPr algn="ctr" indent="0" marL="0">
               <a:buNone/>
             </a:pPr>
             <a:r>
@@ -5437,7 +7003,7 @@
           <a:bodyPr wrap="square" lIns="0" tIns="0" rIns="0" bIns="0" rtlCol="0" anchor="ctr"/>
           <a:lstStyle/>
           <a:p>
-            <a:pPr marL="0" indent="0" algn="ctr">
+            <a:pPr algn="ctr" indent="0" marL="0">
               <a:buNone/>
             </a:pPr>
             <a:r>
@@ -5476,13 +7042,6 @@
           </a:solidFill>
           <a:ln/>
         </p:spPr>
-        <p:txBody>
-          <a:bodyPr/>
-          <a:lstStyle/>
-          <a:p>
-            <a:endParaRPr lang="en-US"/>
-          </a:p>
-        </p:txBody>
       </p:sp>
       <p:sp>
         <p:nvSpPr>
@@ -5505,7 +7064,7 @@
           <a:bodyPr wrap="square" lIns="254" tIns="254" rIns="254" bIns="254" rtlCol="0" anchor="ctr"/>
           <a:lstStyle/>
           <a:p>
-            <a:pPr marL="0" indent="0" algn="ctr">
+            <a:pPr algn="ctr" indent="0" marL="0">
               <a:buNone/>
             </a:pPr>
             <a:r>
@@ -5522,7 +7081,7 @@
             <a:endParaRPr lang="en-US" sz="1350" dirty="0"/>
           </a:p>
           <a:p>
-            <a:pPr marL="0" indent="0" algn="ctr">
+            <a:pPr algn="ctr" indent="0" marL="0">
               <a:buNone/>
             </a:pPr>
             <a:r>
@@ -5561,7 +7120,7 @@
           <a:bodyPr wrap="square" lIns="0" tIns="0" rIns="0" bIns="0" rtlCol="0" anchor="ctr"/>
           <a:lstStyle/>
           <a:p>
-            <a:pPr marL="0" indent="0" algn="ctr">
+            <a:pPr algn="ctr" indent="0" marL="0">
               <a:buNone/>
             </a:pPr>
             <a:r>
@@ -5600,13 +7159,6 @@
           </a:solidFill>
           <a:ln/>
         </p:spPr>
-        <p:txBody>
-          <a:bodyPr/>
-          <a:lstStyle/>
-          <a:p>
-            <a:endParaRPr lang="en-US"/>
-          </a:p>
-        </p:txBody>
       </p:sp>
       <p:sp>
         <p:nvSpPr>
@@ -5629,7 +7181,7 @@
           <a:bodyPr wrap="square" lIns="254" tIns="254" rIns="254" bIns="254" rtlCol="0" anchor="ctr"/>
           <a:lstStyle/>
           <a:p>
-            <a:pPr marL="0" indent="0" algn="ctr">
+            <a:pPr algn="ctr" indent="0" marL="0">
               <a:buNone/>
             </a:pPr>
             <a:r>
@@ -5668,7 +7220,7 @@
           <a:bodyPr wrap="square" lIns="0" tIns="0" rIns="0" bIns="0" rtlCol="0" anchor="ctr"/>
           <a:lstStyle/>
           <a:p>
-            <a:pPr marL="0" indent="0" algn="ctr">
+            <a:pPr algn="ctr" indent="0" marL="0">
               <a:buNone/>
             </a:pPr>
             <a:r>
@@ -5707,13 +7259,6 @@
           </a:solidFill>
           <a:ln/>
         </p:spPr>
-        <p:txBody>
-          <a:bodyPr/>
-          <a:lstStyle/>
-          <a:p>
-            <a:endParaRPr lang="en-US"/>
-          </a:p>
-        </p:txBody>
       </p:sp>
       <p:sp>
         <p:nvSpPr>
@@ -5736,7 +7281,7 @@
           <a:bodyPr wrap="square" lIns="254" tIns="254" rIns="254" bIns="254" rtlCol="0" anchor="ctr"/>
           <a:lstStyle/>
           <a:p>
-            <a:pPr marL="0" indent="0" algn="ctr">
+            <a:pPr algn="ctr" indent="0" marL="0">
               <a:buNone/>
             </a:pPr>
             <a:r>
@@ -5775,7 +7320,7 @@
           <a:bodyPr wrap="square" lIns="0" tIns="0" rIns="0" bIns="0" rtlCol="0" anchor="ctr"/>
           <a:lstStyle/>
           <a:p>
-            <a:pPr marL="0" indent="0" algn="ctr">
+            <a:pPr algn="ctr" indent="0" marL="0">
               <a:buNone/>
             </a:pPr>
             <a:r>
@@ -5814,13 +7359,6 @@
           </a:solidFill>
           <a:ln/>
         </p:spPr>
-        <p:txBody>
-          <a:bodyPr/>
-          <a:lstStyle/>
-          <a:p>
-            <a:endParaRPr lang="en-US"/>
-          </a:p>
-        </p:txBody>
       </p:sp>
       <p:sp>
         <p:nvSpPr>
@@ -5843,7 +7381,7 @@
           <a:bodyPr wrap="square" lIns="254" tIns="254" rIns="254" bIns="254" rtlCol="0" anchor="ctr"/>
           <a:lstStyle/>
           <a:p>
-            <a:pPr marL="0" indent="0" algn="ctr">
+            <a:pPr algn="ctr" indent="0" marL="0">
               <a:buNone/>
             </a:pPr>
             <a:r>
@@ -5882,7 +7420,7 @@
           <a:bodyPr wrap="square" lIns="0" tIns="0" rIns="0" bIns="0" rtlCol="0" anchor="ctr"/>
           <a:lstStyle/>
           <a:p>
-            <a:pPr marL="0" indent="0">
+            <a:pPr indent="0" marL="0">
               <a:buNone/>
             </a:pPr>
             <a:r>
@@ -5916,7 +7454,6 @@
         <a:solidFill>
           <a:srgbClr val="FFFFFF"/>
         </a:solidFill>
-        <a:effectLst/>
       </p:bgPr>
     </p:bg>
     <p:spTree>
@@ -5954,7 +7491,7 @@
           <a:bodyPr wrap="square" lIns="0" tIns="0" rIns="0" bIns="0" rtlCol="0" anchor="ctr"/>
           <a:lstStyle/>
           <a:p>
-            <a:pPr marL="0" indent="0">
+            <a:pPr indent="0" marL="0">
               <a:buNone/>
             </a:pPr>
             <a:r>
@@ -5993,13 +7530,6 @@
           </a:solidFill>
           <a:ln/>
         </p:spPr>
-        <p:txBody>
-          <a:bodyPr/>
-          <a:lstStyle/>
-          <a:p>
-            <a:endParaRPr lang="en-US"/>
-          </a:p>
-        </p:txBody>
       </p:sp>
       <p:sp>
         <p:nvSpPr>
@@ -6022,7 +7552,7 @@
           <a:bodyPr wrap="square" lIns="0" tIns="0" rIns="0" bIns="0" rtlCol="0" anchor="ctr"/>
           <a:lstStyle/>
           <a:p>
-            <a:pPr marL="0" indent="0" algn="l">
+            <a:pPr algn="l" indent="0" marL="0">
               <a:spcAft>
                 <a:spcPts val="200"/>
               </a:spcAft>
@@ -6042,7 +7572,7 @@
             <a:endParaRPr lang="en-US" sz="1700" dirty="0"/>
           </a:p>
           <a:p>
-            <a:pPr marL="0" indent="0" algn="l">
+            <a:pPr algn="l" indent="0" marL="0">
               <a:buNone/>
             </a:pPr>
             <a:r>
@@ -6081,7 +7611,7 @@
           <a:bodyPr wrap="square" lIns="0" tIns="0" rIns="0" bIns="0" rtlCol="0" anchor="ctr"/>
           <a:lstStyle/>
           <a:p>
-            <a:pPr marL="0" indent="0" algn="ctr">
+            <a:pPr algn="ctr" indent="0" marL="0">
               <a:buNone/>
             </a:pPr>
             <a:r>
@@ -6117,13 +7647,6 @@
           </a:solidFill>
           <a:ln/>
         </p:spPr>
-        <p:txBody>
-          <a:bodyPr/>
-          <a:lstStyle/>
-          <a:p>
-            <a:endParaRPr lang="en-US"/>
-          </a:p>
-        </p:txBody>
       </p:sp>
       <p:sp>
         <p:nvSpPr>
@@ -6146,7 +7669,7 @@
           <a:bodyPr wrap="square" lIns="0" tIns="0" rIns="0" bIns="0" rtlCol="0" anchor="ctr"/>
           <a:lstStyle/>
           <a:p>
-            <a:pPr marL="0" indent="0" algn="l">
+            <a:pPr algn="l" indent="0" marL="0">
               <a:spcAft>
                 <a:spcPts val="200"/>
               </a:spcAft>
@@ -6166,7 +7689,7 @@
             <a:endParaRPr lang="en-US" sz="1700" dirty="0"/>
           </a:p>
           <a:p>
-            <a:pPr marL="0" indent="0" algn="l">
+            <a:pPr algn="l" indent="0" marL="0">
               <a:buNone/>
             </a:pPr>
             <a:r>
@@ -6205,7 +7728,7 @@
           <a:bodyPr wrap="square" lIns="0" tIns="0" rIns="0" bIns="0" rtlCol="0" anchor="ctr"/>
           <a:lstStyle/>
           <a:p>
-            <a:pPr marL="0" indent="0" algn="ctr">
+            <a:pPr algn="ctr" indent="0" marL="0">
               <a:buNone/>
             </a:pPr>
             <a:r>
@@ -6241,13 +7764,6 @@
           </a:solidFill>
           <a:ln/>
         </p:spPr>
-        <p:txBody>
-          <a:bodyPr/>
-          <a:lstStyle/>
-          <a:p>
-            <a:endParaRPr lang="en-US"/>
-          </a:p>
-        </p:txBody>
       </p:sp>
       <p:sp>
         <p:nvSpPr>
@@ -6270,7 +7786,7 @@
           <a:bodyPr wrap="square" lIns="0" tIns="0" rIns="0" bIns="0" rtlCol="0" anchor="ctr"/>
           <a:lstStyle/>
           <a:p>
-            <a:pPr marL="0" indent="0" algn="l">
+            <a:pPr algn="l" indent="0" marL="0">
               <a:spcAft>
                 <a:spcPts val="200"/>
               </a:spcAft>
@@ -6290,7 +7806,7 @@
             <a:endParaRPr lang="en-US" sz="1700" dirty="0"/>
           </a:p>
           <a:p>
-            <a:pPr marL="0" indent="0" algn="l">
+            <a:pPr algn="l" indent="0" marL="0">
               <a:buNone/>
             </a:pPr>
             <a:r>
@@ -6329,7 +7845,7 @@
           <a:bodyPr wrap="square" lIns="0" tIns="0" rIns="0" bIns="0" rtlCol="0" anchor="ctr"/>
           <a:lstStyle/>
           <a:p>
-            <a:pPr marL="0" indent="0" algn="ctr">
+            <a:pPr algn="ctr" indent="0" marL="0">
               <a:buNone/>
             </a:pPr>
             <a:r>
@@ -6365,13 +7881,6 @@
           </a:solidFill>
           <a:ln/>
         </p:spPr>
-        <p:txBody>
-          <a:bodyPr/>
-          <a:lstStyle/>
-          <a:p>
-            <a:endParaRPr lang="en-US"/>
-          </a:p>
-        </p:txBody>
       </p:sp>
       <p:sp>
         <p:nvSpPr>
@@ -6394,7 +7903,7 @@
           <a:bodyPr wrap="square" lIns="0" tIns="0" rIns="0" bIns="0" rtlCol="0" anchor="ctr"/>
           <a:lstStyle/>
           <a:p>
-            <a:pPr marL="0" indent="0" algn="l">
+            <a:pPr algn="l" indent="0" marL="0">
               <a:buNone/>
             </a:pPr>
             <a:r>
@@ -6408,6 +7917,9 @@
               </a:rPr>
               <a:t>signed evidence bundles</a:t>
             </a:r>
+            <a:pPr algn="l" indent="0" marL="0">
+              <a:buNone/>
+            </a:pPr>
             <a:r>
               <a:rPr lang="en-US" sz="1500" dirty="0">
                 <a:solidFill>
@@ -6419,6 +7931,9 @@
               </a:rPr>
               <a:t>, appraised against </a:t>
             </a:r>
+            <a:pPr algn="l" indent="0" marL="0">
+              <a:buNone/>
+            </a:pPr>
             <a:r>
               <a:rPr lang="en-US" sz="1500" b="1" dirty="0">
                 <a:solidFill>
@@ -6455,7 +7970,7 @@
           <a:bodyPr wrap="square" lIns="0" tIns="0" rIns="0" bIns="0" rtlCol="0" anchor="ctr"/>
           <a:lstStyle/>
           <a:p>
-            <a:pPr marL="0" indent="0">
+            <a:pPr indent="0" marL="0">
               <a:buNone/>
             </a:pPr>
             <a:r>
@@ -6499,13 +8014,6 @@
             <a:prstDash val="solid"/>
           </a:ln>
         </p:spPr>
-        <p:txBody>
-          <a:bodyPr/>
-          <a:lstStyle/>
-          <a:p>
-            <a:endParaRPr lang="en-US"/>
-          </a:p>
-        </p:txBody>
       </p:sp>
       <p:sp>
         <p:nvSpPr>
@@ -6528,7 +8036,7 @@
           <a:bodyPr wrap="square" lIns="0" tIns="0" rIns="0" bIns="0" rtlCol="0" anchor="ctr"/>
           <a:lstStyle/>
           <a:p>
-            <a:pPr marL="0" indent="0" algn="l">
+            <a:pPr algn="l" indent="0" marL="0">
               <a:buNone/>
             </a:pPr>
             <a:r>
@@ -6545,7 +8053,7 @@
             <a:endParaRPr lang="en-US" sz="1300" dirty="0"/>
           </a:p>
           <a:p>
-            <a:pPr marL="0" indent="0" algn="l">
+            <a:pPr algn="l" indent="0" marL="0">
               <a:buNone/>
             </a:pPr>
             <a:r>
@@ -6562,7 +8070,7 @@
             <a:endParaRPr lang="en-US" sz="1300" dirty="0"/>
           </a:p>
           <a:p>
-            <a:pPr marL="0" indent="0" algn="l">
+            <a:pPr algn="l" indent="0" marL="0">
               <a:buNone/>
             </a:pPr>
             <a:r>
@@ -6579,7 +8087,7 @@
             <a:endParaRPr lang="en-US" sz="1300" dirty="0"/>
           </a:p>
           <a:p>
-            <a:pPr marL="0" indent="0" algn="l">
+            <a:pPr algn="l" indent="0" marL="0">
               <a:buNone/>
             </a:pPr>
             <a:r>
@@ -6596,7 +8104,7 @@
             <a:endParaRPr lang="en-US" sz="1300" dirty="0"/>
           </a:p>
           <a:p>
-            <a:pPr marL="0" indent="0" algn="l">
+            <a:pPr algn="l" indent="0" marL="0">
               <a:buNone/>
             </a:pPr>
             <a:r>
@@ -6613,7 +8121,7 @@
             <a:endParaRPr lang="en-US" sz="1300" dirty="0"/>
           </a:p>
           <a:p>
-            <a:pPr marL="0" indent="0" algn="l">
+            <a:pPr algn="l" indent="0" marL="0">
               <a:buNone/>
             </a:pPr>
             <a:r>
@@ -6652,7 +8160,7 @@
           <a:bodyPr wrap="square" lIns="0" tIns="0" rIns="0" bIns="0" rtlCol="0" anchor="ctr"/>
           <a:lstStyle/>
           <a:p>
-            <a:pPr marL="0" indent="0">
+            <a:pPr indent="0" marL="0">
               <a:buNone/>
             </a:pPr>
             <a:r>
@@ -6669,7 +8177,7 @@
             <a:endParaRPr lang="en-US" sz="2000" dirty="0"/>
           </a:p>
           <a:p>
-            <a:pPr marL="0" indent="0">
+            <a:pPr indent="0" marL="0">
               <a:buNone/>
             </a:pPr>
             <a:r>
@@ -6686,7 +8194,7 @@
             <a:endParaRPr lang="en-US" sz="2000" dirty="0"/>
           </a:p>
           <a:p>
-            <a:pPr marL="0" indent="0">
+            <a:pPr indent="0" marL="0">
               <a:buNone/>
             </a:pPr>
             <a:r>
@@ -6720,7 +8228,6 @@
         <a:solidFill>
           <a:srgbClr val="FFFFFF"/>
         </a:solidFill>
-        <a:effectLst/>
       </p:bgPr>
     </p:bg>
     <p:spTree>
@@ -6758,7 +8265,7 @@
           <a:bodyPr wrap="square" lIns="0" tIns="0" rIns="0" bIns="0" rtlCol="0" anchor="ctr"/>
           <a:lstStyle/>
           <a:p>
-            <a:pPr marL="0" indent="0">
+            <a:pPr indent="0" marL="0">
               <a:buNone/>
             </a:pPr>
             <a:r>
@@ -6802,13 +8309,6 @@
             <a:prstDash val="dash"/>
           </a:ln>
         </p:spPr>
-        <p:txBody>
-          <a:bodyPr/>
-          <a:lstStyle/>
-          <a:p>
-            <a:endParaRPr lang="en-US"/>
-          </a:p>
-        </p:txBody>
       </p:sp>
       <p:sp>
         <p:nvSpPr>
@@ -6831,7 +8331,7 @@
           <a:bodyPr wrap="square" lIns="254" tIns="254" rIns="254" bIns="254" rtlCol="0" anchor="ctr"/>
           <a:lstStyle/>
           <a:p>
-            <a:pPr marL="0" indent="0" algn="ctr">
+            <a:pPr algn="ctr" indent="0" marL="0">
               <a:buNone/>
             </a:pPr>
             <a:r>
@@ -6848,7 +8348,7 @@
             <a:endParaRPr lang="en-US" sz="1150" dirty="0"/>
           </a:p>
           <a:p>
-            <a:pPr marL="0" indent="0" algn="ctr">
+            <a:pPr algn="ctr" indent="0" marL="0">
               <a:buNone/>
             </a:pPr>
             <a:r>
@@ -6889,13 +8389,6 @@
             <a:tailEnd type="triangle"/>
           </a:ln>
         </p:spPr>
-        <p:txBody>
-          <a:bodyPr/>
-          <a:lstStyle/>
-          <a:p>
-            <a:endParaRPr lang="en-US"/>
-          </a:p>
-        </p:txBody>
       </p:sp>
       <p:sp>
         <p:nvSpPr>
@@ -6918,7 +8411,7 @@
           <a:bodyPr wrap="square" lIns="0" tIns="0" rIns="0" bIns="0" rtlCol="0" anchor="ctr"/>
           <a:lstStyle/>
           <a:p>
-            <a:pPr marL="0" indent="0" algn="l">
+            <a:pPr algn="l" indent="0" marL="0">
               <a:buNone/>
             </a:pPr>
             <a:r>
@@ -6957,13 +8450,6 @@
           </a:solidFill>
           <a:ln/>
         </p:spPr>
-        <p:txBody>
-          <a:bodyPr/>
-          <a:lstStyle/>
-          <a:p>
-            <a:endParaRPr lang="en-US"/>
-          </a:p>
-        </p:txBody>
       </p:sp>
       <p:sp>
         <p:nvSpPr>
@@ -6986,7 +8472,7 @@
           <a:bodyPr wrap="square" lIns="381" tIns="381" rIns="381" bIns="381" rtlCol="0" anchor="ctr"/>
           <a:lstStyle/>
           <a:p>
-            <a:pPr marL="0" indent="0" algn="ctr">
+            <a:pPr algn="ctr" indent="0" marL="0">
               <a:buNone/>
             </a:pPr>
             <a:r>
@@ -7027,13 +8513,6 @@
             <a:tailEnd type="triangle"/>
           </a:ln>
         </p:spPr>
-        <p:txBody>
-          <a:bodyPr/>
-          <a:lstStyle/>
-          <a:p>
-            <a:endParaRPr lang="en-US"/>
-          </a:p>
-        </p:txBody>
       </p:sp>
       <p:sp>
         <p:nvSpPr>
@@ -7056,7 +8535,7 @@
           <a:bodyPr wrap="square" lIns="0" tIns="0" rIns="0" bIns="0" rtlCol="0" anchor="ctr"/>
           <a:lstStyle/>
           <a:p>
-            <a:pPr marL="0" indent="0" algn="l">
+            <a:pPr algn="l" indent="0" marL="0">
               <a:buNone/>
             </a:pPr>
             <a:r>
@@ -7095,13 +8574,6 @@
           </a:solidFill>
           <a:ln/>
         </p:spPr>
-        <p:txBody>
-          <a:bodyPr/>
-          <a:lstStyle/>
-          <a:p>
-            <a:endParaRPr lang="en-US"/>
-          </a:p>
-        </p:txBody>
       </p:sp>
       <p:sp>
         <p:nvSpPr>
@@ -7124,7 +8596,7 @@
           <a:bodyPr wrap="square" lIns="381" tIns="381" rIns="381" bIns="381" rtlCol="0" anchor="ctr"/>
           <a:lstStyle/>
           <a:p>
-            <a:pPr marL="0" indent="0" algn="ctr">
+            <a:pPr algn="ctr" indent="0" marL="0">
               <a:buNone/>
             </a:pPr>
             <a:r>
@@ -7163,13 +8635,6 @@
           </a:solidFill>
           <a:ln/>
         </p:spPr>
-        <p:txBody>
-          <a:bodyPr/>
-          <a:lstStyle/>
-          <a:p>
-            <a:endParaRPr lang="en-US"/>
-          </a:p>
-        </p:txBody>
       </p:sp>
       <p:sp>
         <p:nvSpPr>
@@ -7192,7 +8657,7 @@
           <a:bodyPr wrap="square" lIns="381" tIns="381" rIns="381" bIns="381" rtlCol="0" anchor="ctr"/>
           <a:lstStyle/>
           <a:p>
-            <a:pPr marL="0" indent="0" algn="ctr">
+            <a:pPr algn="ctr" indent="0" marL="0">
               <a:buNone/>
             </a:pPr>
             <a:r>
@@ -7231,13 +8696,6 @@
           </a:solidFill>
           <a:ln/>
         </p:spPr>
-        <p:txBody>
-          <a:bodyPr/>
-          <a:lstStyle/>
-          <a:p>
-            <a:endParaRPr lang="en-US"/>
-          </a:p>
-        </p:txBody>
       </p:sp>
       <p:sp>
         <p:nvSpPr>
@@ -7260,7 +8718,7 @@
           <a:bodyPr wrap="square" lIns="381" tIns="381" rIns="381" bIns="381" rtlCol="0" anchor="ctr"/>
           <a:lstStyle/>
           <a:p>
-            <a:pPr marL="0" indent="0" algn="ctr">
+            <a:pPr algn="ctr" indent="0" marL="0">
               <a:buNone/>
             </a:pPr>
             <a:r>
@@ -7301,13 +8759,6 @@
             <a:tailEnd type="triangle"/>
           </a:ln>
         </p:spPr>
-        <p:txBody>
-          <a:bodyPr/>
-          <a:lstStyle/>
-          <a:p>
-            <a:endParaRPr lang="en-US"/>
-          </a:p>
-        </p:txBody>
       </p:sp>
       <p:sp>
         <p:nvSpPr>
@@ -7331,13 +8782,6 @@
             <a:prstDash val="solid"/>
           </a:ln>
         </p:spPr>
-        <p:txBody>
-          <a:bodyPr/>
-          <a:lstStyle/>
-          <a:p>
-            <a:endParaRPr lang="en-US"/>
-          </a:p>
-        </p:txBody>
       </p:sp>
       <p:sp>
         <p:nvSpPr>
@@ -7361,13 +8805,6 @@
             <a:prstDash val="solid"/>
           </a:ln>
         </p:spPr>
-        <p:txBody>
-          <a:bodyPr/>
-          <a:lstStyle/>
-          <a:p>
-            <a:endParaRPr lang="en-US"/>
-          </a:p>
-        </p:txBody>
       </p:sp>
       <p:sp>
         <p:nvSpPr>
@@ -7392,13 +8829,6 @@
             <a:tailEnd type="triangle"/>
           </a:ln>
         </p:spPr>
-        <p:txBody>
-          <a:bodyPr/>
-          <a:lstStyle/>
-          <a:p>
-            <a:endParaRPr lang="en-US"/>
-          </a:p>
-        </p:txBody>
       </p:sp>
       <p:sp>
         <p:nvSpPr>
@@ -7421,7 +8851,7 @@
           <a:bodyPr wrap="square" lIns="0" tIns="0" rIns="0" bIns="0" rtlCol="0" anchor="ctr"/>
           <a:lstStyle/>
           <a:p>
-            <a:pPr marL="0" indent="0" algn="r">
+            <a:pPr algn="r" indent="0" marL="0">
               <a:buNone/>
             </a:pPr>
             <a:r>
@@ -7438,7 +8868,7 @@
             <a:endParaRPr lang="en-US" sz="1000" dirty="0"/>
           </a:p>
           <a:p>
-            <a:pPr marL="0" indent="0" algn="r">
+            <a:pPr algn="r" indent="0" marL="0">
               <a:buNone/>
             </a:pPr>
             <a:r>
@@ -7478,13 +8908,6 @@
             <a:prstDash val="solid"/>
           </a:ln>
         </p:spPr>
-        <p:txBody>
-          <a:bodyPr/>
-          <a:lstStyle/>
-          <a:p>
-            <a:endParaRPr lang="en-US"/>
-          </a:p>
-        </p:txBody>
       </p:sp>
       <p:sp>
         <p:nvSpPr>
@@ -7509,13 +8932,6 @@
             <a:tailEnd type="triangle"/>
           </a:ln>
         </p:spPr>
-        <p:txBody>
-          <a:bodyPr/>
-          <a:lstStyle/>
-          <a:p>
-            <a:endParaRPr lang="en-US"/>
-          </a:p>
-        </p:txBody>
       </p:sp>
       <p:sp>
         <p:nvSpPr>
@@ -7538,7 +8954,7 @@
           <a:bodyPr wrap="square" lIns="0" tIns="0" rIns="0" bIns="0" rtlCol="0" anchor="ctr"/>
           <a:lstStyle/>
           <a:p>
-            <a:pPr marL="0" indent="0" algn="ctr">
+            <a:pPr algn="ctr" indent="0" marL="0">
               <a:buNone/>
             </a:pPr>
             <a:r>
@@ -7577,13 +8993,6 @@
           </a:solidFill>
           <a:ln/>
         </p:spPr>
-        <p:txBody>
-          <a:bodyPr/>
-          <a:lstStyle/>
-          <a:p>
-            <a:endParaRPr lang="en-US"/>
-          </a:p>
-        </p:txBody>
       </p:sp>
       <p:sp>
         <p:nvSpPr>
@@ -7606,7 +9015,7 @@
           <a:bodyPr wrap="square" lIns="381" tIns="381" rIns="381" bIns="381" rtlCol="0" anchor="ctr"/>
           <a:lstStyle/>
           <a:p>
-            <a:pPr marL="0" indent="0" algn="ctr">
+            <a:pPr algn="ctr" indent="0" marL="0">
               <a:buNone/>
             </a:pPr>
             <a:r>
@@ -7623,7 +9032,7 @@
             <a:endParaRPr lang="en-US" sz="1200" dirty="0"/>
           </a:p>
           <a:p>
-            <a:pPr marL="0" indent="0" algn="ctr">
+            <a:pPr algn="ctr" indent="0" marL="0">
               <a:buNone/>
             </a:pPr>
             <a:r>
@@ -7664,13 +9073,6 @@
             <a:tailEnd type="triangle"/>
           </a:ln>
         </p:spPr>
-        <p:txBody>
-          <a:bodyPr/>
-          <a:lstStyle/>
-          <a:p>
-            <a:endParaRPr lang="en-US"/>
-          </a:p>
-        </p:txBody>
       </p:sp>
       <p:sp>
         <p:nvSpPr>
@@ -7693,7 +9095,7 @@
           <a:bodyPr wrap="square" lIns="0" tIns="0" rIns="0" bIns="0" rtlCol="0" anchor="ctr"/>
           <a:lstStyle/>
           <a:p>
-            <a:pPr marL="0" indent="0" algn="ctr">
+            <a:pPr algn="ctr" indent="0" marL="0">
               <a:buNone/>
             </a:pPr>
             <a:r>
@@ -7732,13 +9134,6 @@
           </a:solidFill>
           <a:ln/>
         </p:spPr>
-        <p:txBody>
-          <a:bodyPr/>
-          <a:lstStyle/>
-          <a:p>
-            <a:endParaRPr lang="en-US"/>
-          </a:p>
-        </p:txBody>
       </p:sp>
       <p:sp>
         <p:nvSpPr>
@@ -7761,7 +9156,7 @@
           <a:bodyPr wrap="square" lIns="381" tIns="381" rIns="381" bIns="381" rtlCol="0" anchor="ctr"/>
           <a:lstStyle/>
           <a:p>
-            <a:pPr marL="0" indent="0" algn="ctr">
+            <a:pPr algn="ctr" indent="0" marL="0">
               <a:buNone/>
             </a:pPr>
             <a:r>
@@ -7802,13 +9197,6 @@
             <a:tailEnd type="triangle"/>
           </a:ln>
         </p:spPr>
-        <p:txBody>
-          <a:bodyPr/>
-          <a:lstStyle/>
-          <a:p>
-            <a:endParaRPr lang="en-US"/>
-          </a:p>
-        </p:txBody>
       </p:sp>
       <p:sp>
         <p:nvSpPr>
@@ -7831,13 +9219,6 @@
           </a:solidFill>
           <a:ln/>
         </p:spPr>
-        <p:txBody>
-          <a:bodyPr/>
-          <a:lstStyle/>
-          <a:p>
-            <a:endParaRPr lang="en-US"/>
-          </a:p>
-        </p:txBody>
       </p:sp>
       <p:sp>
         <p:nvSpPr>
@@ -7860,7 +9241,7 @@
           <a:bodyPr wrap="square" lIns="381" tIns="381" rIns="381" bIns="381" rtlCol="0" anchor="ctr"/>
           <a:lstStyle/>
           <a:p>
-            <a:pPr marL="0" indent="0" algn="ctr">
+            <a:pPr algn="ctr" indent="0" marL="0">
               <a:buNone/>
             </a:pPr>
             <a:r>
@@ -7901,13 +9282,6 @@
             <a:tailEnd type="triangle"/>
           </a:ln>
         </p:spPr>
-        <p:txBody>
-          <a:bodyPr/>
-          <a:lstStyle/>
-          <a:p>
-            <a:endParaRPr lang="en-US"/>
-          </a:p>
-        </p:txBody>
       </p:sp>
       <p:sp>
         <p:nvSpPr>
@@ -7930,13 +9304,6 @@
           </a:solidFill>
           <a:ln/>
         </p:spPr>
-        <p:txBody>
-          <a:bodyPr/>
-          <a:lstStyle/>
-          <a:p>
-            <a:endParaRPr lang="en-US"/>
-          </a:p>
-        </p:txBody>
       </p:sp>
       <p:sp>
         <p:nvSpPr>
@@ -7959,7 +9326,7 @@
           <a:bodyPr wrap="square" lIns="381" tIns="381" rIns="381" bIns="381" rtlCol="0" anchor="ctr"/>
           <a:lstStyle/>
           <a:p>
-            <a:pPr marL="0" indent="0" algn="ctr">
+            <a:pPr algn="ctr" indent="0" marL="0">
               <a:buNone/>
             </a:pPr>
             <a:r>
@@ -7998,7 +9365,7 @@
           <a:bodyPr wrap="square" lIns="0" tIns="0" rIns="0" bIns="0" rtlCol="0" anchor="ctr"/>
           <a:lstStyle/>
           <a:p>
-            <a:pPr marL="0" indent="0" algn="ctr">
+            <a:pPr algn="ctr" indent="0" marL="0">
               <a:buNone/>
             </a:pPr>
             <a:r>
@@ -8038,13 +9405,6 @@
             <a:prstDash val="solid"/>
           </a:ln>
         </p:spPr>
-        <p:txBody>
-          <a:bodyPr/>
-          <a:lstStyle/>
-          <a:p>
-            <a:endParaRPr lang="en-US"/>
-          </a:p>
-        </p:txBody>
       </p:sp>
       <p:sp>
         <p:nvSpPr>
@@ -8068,13 +9428,6 @@
             <a:prstDash val="solid"/>
           </a:ln>
         </p:spPr>
-        <p:txBody>
-          <a:bodyPr/>
-          <a:lstStyle/>
-          <a:p>
-            <a:endParaRPr lang="en-US"/>
-          </a:p>
-        </p:txBody>
       </p:sp>
       <p:sp>
         <p:nvSpPr>
@@ -8098,13 +9451,6 @@
             <a:prstDash val="solid"/>
           </a:ln>
         </p:spPr>
-        <p:txBody>
-          <a:bodyPr/>
-          <a:lstStyle/>
-          <a:p>
-            <a:endParaRPr lang="en-US"/>
-          </a:p>
-        </p:txBody>
       </p:sp>
       <p:sp>
         <p:nvSpPr>
@@ -8128,13 +9474,6 @@
             <a:prstDash val="solid"/>
           </a:ln>
         </p:spPr>
-        <p:txBody>
-          <a:bodyPr/>
-          <a:lstStyle/>
-          <a:p>
-            <a:endParaRPr lang="en-US"/>
-          </a:p>
-        </p:txBody>
       </p:sp>
       <p:sp>
         <p:nvSpPr>
@@ -8159,13 +9498,6 @@
             <a:tailEnd type="triangle"/>
           </a:ln>
         </p:spPr>
-        <p:txBody>
-          <a:bodyPr/>
-          <a:lstStyle/>
-          <a:p>
-            <a:endParaRPr lang="en-US"/>
-          </a:p>
-        </p:txBody>
       </p:sp>
       <p:sp>
         <p:nvSpPr>
@@ -8188,7 +9520,7 @@
           <a:bodyPr wrap="square" lIns="0" tIns="0" rIns="0" bIns="0" rtlCol="0" anchor="ctr"/>
           <a:lstStyle/>
           <a:p>
-            <a:pPr marL="0" indent="0" algn="ctr">
+            <a:pPr algn="ctr" indent="0" marL="0">
               <a:buNone/>
             </a:pPr>
             <a:r>
@@ -8228,13 +9560,6 @@
             <a:prstDash val="solid"/>
           </a:ln>
         </p:spPr>
-        <p:txBody>
-          <a:bodyPr/>
-          <a:lstStyle/>
-          <a:p>
-            <a:endParaRPr lang="en-US"/>
-          </a:p>
-        </p:txBody>
       </p:sp>
       <p:sp>
         <p:nvSpPr>
@@ -8258,13 +9583,6 @@
             <a:prstDash val="solid"/>
           </a:ln>
         </p:spPr>
-        <p:txBody>
-          <a:bodyPr/>
-          <a:lstStyle/>
-          <a:p>
-            <a:endParaRPr lang="en-US"/>
-          </a:p>
-        </p:txBody>
       </p:sp>
       <p:sp>
         <p:nvSpPr>
@@ -8289,13 +9607,6 @@
             <a:tailEnd type="triangle"/>
           </a:ln>
         </p:spPr>
-        <p:txBody>
-          <a:bodyPr/>
-          <a:lstStyle/>
-          <a:p>
-            <a:endParaRPr lang="en-US"/>
-          </a:p>
-        </p:txBody>
       </p:sp>
       <p:sp>
         <p:nvSpPr>
@@ -8318,7 +9629,7 @@
           <a:bodyPr wrap="square" lIns="0" tIns="0" rIns="0" bIns="0" rtlCol="0" anchor="ctr"/>
           <a:lstStyle/>
           <a:p>
-            <a:pPr marL="0" indent="0" algn="ctr">
+            <a:pPr algn="ctr" indent="0" marL="0">
               <a:buNone/>
             </a:pPr>
             <a:r>
@@ -8358,13 +9669,6 @@
             <a:prstDash val="solid"/>
           </a:ln>
         </p:spPr>
-        <p:txBody>
-          <a:bodyPr/>
-          <a:lstStyle/>
-          <a:p>
-            <a:endParaRPr lang="en-US"/>
-          </a:p>
-        </p:txBody>
       </p:sp>
       <p:sp>
         <p:nvSpPr>
@@ -8388,13 +9692,6 @@
             <a:prstDash val="solid"/>
           </a:ln>
         </p:spPr>
-        <p:txBody>
-          <a:bodyPr/>
-          <a:lstStyle/>
-          <a:p>
-            <a:endParaRPr lang="en-US"/>
-          </a:p>
-        </p:txBody>
       </p:sp>
       <p:sp>
         <p:nvSpPr>
@@ -8419,13 +9716,6 @@
             <a:tailEnd type="triangle"/>
           </a:ln>
         </p:spPr>
-        <p:txBody>
-          <a:bodyPr/>
-          <a:lstStyle/>
-          <a:p>
-            <a:endParaRPr lang="en-US"/>
-          </a:p>
-        </p:txBody>
       </p:sp>
       <p:sp>
         <p:nvSpPr>
@@ -8448,7 +9738,7 @@
           <a:bodyPr wrap="square" lIns="0" tIns="0" rIns="0" bIns="0" rtlCol="0" anchor="ctr"/>
           <a:lstStyle/>
           <a:p>
-            <a:pPr marL="0" indent="0" algn="ctr">
+            <a:pPr algn="ctr" indent="0" marL="0">
               <a:buNone/>
             </a:pPr>
             <a:r>
@@ -8487,13 +9777,6 @@
           </a:solidFill>
           <a:ln/>
         </p:spPr>
-        <p:txBody>
-          <a:bodyPr/>
-          <a:lstStyle/>
-          <a:p>
-            <a:endParaRPr lang="en-US"/>
-          </a:p>
-        </p:txBody>
       </p:sp>
       <p:sp>
         <p:nvSpPr>
@@ -8516,7 +9799,7 @@
           <a:bodyPr wrap="square" lIns="0" tIns="0" rIns="0" bIns="0" rtlCol="0" anchor="ctr"/>
           <a:lstStyle/>
           <a:p>
-            <a:pPr marL="0" indent="0" algn="l">
+            <a:pPr algn="l" indent="0" marL="0">
               <a:buNone/>
             </a:pPr>
             <a:r>
@@ -8530,6 +9813,9 @@
               </a:rPr>
               <a:t>The repair ladder: </a:t>
             </a:r>
+            <a:pPr algn="l" indent="0" marL="0">
+              <a:buNone/>
+            </a:pPr>
             <a:r>
               <a:rPr lang="en-US" sz="1300" dirty="0">
                 <a:solidFill>
@@ -8541,6 +9827,9 @@
               </a:rPr>
               <a:t>a rung's exhaustion is a </a:t>
             </a:r>
+            <a:pPr algn="l" indent="0" marL="0">
+              <a:buNone/>
+            </a:pPr>
             <a:r>
               <a:rPr lang="en-US" sz="1300" b="1" i="1" dirty="0">
                 <a:solidFill>
@@ -8552,6 +9841,9 @@
               </a:rPr>
               <a:t>local diagnosis </a:t>
             </a:r>
+            <a:pPr algn="l" indent="0" marL="0">
+              <a:buNone/>
+            </a:pPr>
             <a:r>
               <a:rPr lang="en-US" sz="1300" dirty="0">
                 <a:solidFill>
@@ -8566,7 +9858,7 @@
             <a:endParaRPr lang="en-US" sz="1300" dirty="0"/>
           </a:p>
           <a:p>
-            <a:pPr marL="0" indent="0" algn="l">
+            <a:pPr algn="l" indent="0" marL="0">
               <a:buNone/>
             </a:pPr>
             <a:r>
@@ -8580,6 +9872,9 @@
               </a:rPr>
               <a:t>judged only by </a:t>
             </a:r>
+            <a:pPr algn="l" indent="0" marL="0">
+              <a:buNone/>
+            </a:pPr>
             <a:r>
               <a:rPr lang="en-US" sz="1300" b="1" i="1" dirty="0">
                 <a:solidFill>
@@ -8591,6 +9886,9 @@
               </a:rPr>
               <a:t>fresh re-measurement</a:t>
             </a:r>
+            <a:pPr algn="l" indent="0" marL="0">
+              <a:buNone/>
+            </a:pPr>
             <a:r>
               <a:rPr lang="en-US" sz="1300" dirty="0">
                 <a:solidFill>
@@ -8632,13 +9930,6 @@
             <a:prstDash val="solid"/>
           </a:ln>
         </p:spPr>
-        <p:txBody>
-          <a:bodyPr/>
-          <a:lstStyle/>
-          <a:p>
-            <a:endParaRPr lang="en-US"/>
-          </a:p>
-        </p:txBody>
       </p:sp>
       <p:sp>
         <p:nvSpPr>
@@ -8661,7 +9952,7 @@
           <a:bodyPr wrap="square" lIns="0" tIns="0" rIns="0" bIns="0" rtlCol="0" anchor="ctr"/>
           <a:lstStyle/>
           <a:p>
-            <a:pPr marL="0" indent="0" algn="l">
+            <a:pPr algn="l" indent="0" marL="0">
               <a:buNone/>
             </a:pPr>
             <a:r>
@@ -8678,7 +9969,7 @@
             <a:endParaRPr lang="en-US" sz="1100" dirty="0"/>
           </a:p>
           <a:p>
-            <a:pPr marL="0" indent="0" algn="l">
+            <a:pPr algn="l" indent="0" marL="0">
               <a:buNone/>
             </a:pPr>
             <a:r>
@@ -8712,7 +10003,6 @@
         <a:solidFill>
           <a:srgbClr val="FFFFFF"/>
         </a:solidFill>
-        <a:effectLst/>
       </p:bgPr>
     </p:bg>
     <p:spTree>
@@ -8750,7 +10040,7 @@
           <a:bodyPr wrap="square" lIns="0" tIns="0" rIns="0" bIns="0" rtlCol="0" anchor="ctr"/>
           <a:lstStyle/>
           <a:p>
-            <a:pPr marL="0" indent="0">
+            <a:pPr indent="0" marL="0">
               <a:buNone/>
             </a:pPr>
             <a:r>
@@ -8789,7 +10079,7 @@
           <a:bodyPr wrap="square" lIns="0" tIns="0" rIns="0" bIns="0" rtlCol="0" anchor="t"/>
           <a:lstStyle/>
           <a:p>
-            <a:pPr marL="342900" indent="-342900" algn="l">
+            <a:pPr algn="l" marL="342900" indent="-342900">
               <a:buSzPct val="100000"/>
               <a:buChar char="•"/>
             </a:pPr>
@@ -8804,6 +10094,12 @@
               </a:rPr>
               <a:t>Blackboard</a:t>
             </a:r>
+            <a:pPr algn="l" indent="0" marL="0">
+              <a:spcAft>
+                <a:spcPts val="900"/>
+              </a:spcAft>
+              <a:buNone/>
+            </a:pPr>
             <a:r>
               <a:rPr lang="en-US" sz="1600" dirty="0">
                 <a:solidFill>
@@ -8818,7 +10114,7 @@
             <a:endParaRPr lang="en-US" sz="1600" dirty="0"/>
           </a:p>
           <a:p>
-            <a:pPr marL="342900" indent="-342900" algn="l">
+            <a:pPr algn="l" marL="342900" indent="-342900">
               <a:buSzPct val="100000"/>
               <a:buChar char="•"/>
             </a:pPr>
@@ -8833,6 +10129,12 @@
               </a:rPr>
               <a:t>Blackboard Entry (Key)</a:t>
             </a:r>
+            <a:pPr algn="l" indent="0" marL="0">
+              <a:spcAft>
+                <a:spcPts val="900"/>
+              </a:spcAft>
+              <a:buNone/>
+            </a:pPr>
             <a:r>
               <a:rPr lang="en-US" sz="1600" dirty="0">
                 <a:solidFill>
@@ -8847,7 +10149,7 @@
             <a:endParaRPr lang="en-US" sz="1600" dirty="0"/>
           </a:p>
           <a:p>
-            <a:pPr marL="342900" indent="-342900" algn="l">
+            <a:pPr algn="l" marL="342900" indent="-342900">
               <a:buSzPct val="100000"/>
               <a:buChar char="•"/>
             </a:pPr>
@@ -8862,6 +10164,12 @@
               </a:rPr>
               <a:t>Episode</a:t>
             </a:r>
+            <a:pPr algn="l" indent="0" marL="0">
+              <a:spcAft>
+                <a:spcPts val="900"/>
+              </a:spcAft>
+              <a:buNone/>
+            </a:pPr>
             <a:r>
               <a:rPr lang="en-US" sz="1600" dirty="0">
                 <a:solidFill>
@@ -8876,7 +10184,7 @@
             <a:endParaRPr lang="en-US" sz="1600" dirty="0"/>
           </a:p>
           <a:p>
-            <a:pPr marL="342900" indent="-342900" algn="l">
+            <a:pPr algn="l" marL="342900" indent="-342900">
               <a:buSzPct val="100000"/>
               <a:buChar char="•"/>
             </a:pPr>
@@ -8891,6 +10199,12 @@
               </a:rPr>
               <a:t>Partition</a:t>
             </a:r>
+            <a:pPr algn="l" indent="0" marL="0">
+              <a:spcAft>
+                <a:spcPts val="900"/>
+              </a:spcAft>
+              <a:buNone/>
+            </a:pPr>
             <a:r>
               <a:rPr lang="en-US" sz="1600" dirty="0">
                 <a:solidFill>
@@ -8905,7 +10219,7 @@
             <a:endParaRPr lang="en-US" sz="1600" dirty="0"/>
           </a:p>
           <a:p>
-            <a:pPr marL="342900" indent="-342900" algn="l">
+            <a:pPr algn="l" marL="342900" indent="-342900">
               <a:buSzPct val="100000"/>
               <a:buChar char="•"/>
             </a:pPr>
@@ -8920,6 +10234,12 @@
               </a:rPr>
               <a:t>Controller</a:t>
             </a:r>
+            <a:pPr algn="l" indent="0" marL="0">
+              <a:spcAft>
+                <a:spcPts val="900"/>
+              </a:spcAft>
+              <a:buNone/>
+            </a:pPr>
             <a:r>
               <a:rPr lang="en-US" sz="1600" dirty="0">
                 <a:solidFill>
@@ -8934,7 +10254,7 @@
             <a:endParaRPr lang="en-US" sz="1600" dirty="0"/>
           </a:p>
           <a:p>
-            <a:pPr marL="342900" indent="-342900" algn="l">
+            <a:pPr algn="l" marL="342900" indent="-342900">
               <a:buSzPct val="100000"/>
               <a:buChar char="•"/>
             </a:pPr>
@@ -8949,6 +10269,12 @@
               </a:rPr>
               <a:t>Knowledge source (KS)</a:t>
             </a:r>
+            <a:pPr algn="l" indent="0" marL="0">
+              <a:spcAft>
+                <a:spcPts val="900"/>
+              </a:spcAft>
+              <a:buNone/>
+            </a:pPr>
             <a:r>
               <a:rPr lang="en-US" sz="1600" dirty="0">
                 <a:solidFill>
@@ -8963,7 +10289,7 @@
             <a:endParaRPr lang="en-US" sz="1600" dirty="0"/>
           </a:p>
           <a:p>
-            <a:pPr marL="342900" indent="-342900" algn="l">
+            <a:pPr algn="l" marL="342900" indent="-342900">
               <a:buSzPct val="100000"/>
               <a:buChar char="•"/>
             </a:pPr>
@@ -8978,6 +10304,12 @@
               </a:rPr>
               <a:t>Route</a:t>
             </a:r>
+            <a:pPr algn="l" indent="0" marL="0">
+              <a:spcAft>
+                <a:spcPts val="900"/>
+              </a:spcAft>
+              <a:buNone/>
+            </a:pPr>
             <a:r>
               <a:rPr lang="en-US" sz="1600" dirty="0">
                 <a:solidFill>
@@ -8992,7 +10324,7 @@
             <a:endParaRPr lang="en-US" sz="1600" dirty="0"/>
           </a:p>
           <a:p>
-            <a:pPr marL="342900" indent="-342900" algn="l">
+            <a:pPr algn="l" marL="342900" indent="-342900">
               <a:buSzPct val="100000"/>
               <a:buChar char="•"/>
             </a:pPr>
@@ -9007,6 +10339,12 @@
               </a:rPr>
               <a:t>History / Ledger</a:t>
             </a:r>
+            <a:pPr algn="l" indent="0" marL="0">
+              <a:spcAft>
+                <a:spcPts val="900"/>
+              </a:spcAft>
+              <a:buNone/>
+            </a:pPr>
             <a:r>
               <a:rPr lang="en-US" sz="1600" dirty="0">
                 <a:solidFill>
@@ -9038,7 +10376,6 @@
         <a:solidFill>
           <a:srgbClr val="FFFFFF"/>
         </a:solidFill>
-        <a:effectLst/>
       </p:bgPr>
     </p:bg>
     <p:spTree>
@@ -9076,7 +10413,7 @@
           <a:bodyPr wrap="square" lIns="0" tIns="0" rIns="0" bIns="0" rtlCol="0" anchor="ctr"/>
           <a:lstStyle/>
           <a:p>
-            <a:pPr marL="0" indent="0">
+            <a:pPr indent="0" marL="0">
               <a:buNone/>
             </a:pPr>
             <a:r>
@@ -9117,34 +10454,10 @@
             <a:tbl>
               <a:tblPr/>
               <a:tblGrid>
-                <a:gridCol w="2194560">
-                  <a:extLst>
-                    <a:ext uri="{9D8B030D-6E8A-4147-A177-3AD203B41FA5}">
-                      <a16:colId xmlns:a16="http://schemas.microsoft.com/office/drawing/2014/main" val="20000"/>
-                    </a:ext>
-                  </a:extLst>
-                </a:gridCol>
-                <a:gridCol w="2651760">
-                  <a:extLst>
-                    <a:ext uri="{9D8B030D-6E8A-4147-A177-3AD203B41FA5}">
-                      <a16:colId xmlns:a16="http://schemas.microsoft.com/office/drawing/2014/main" val="20001"/>
-                    </a:ext>
-                  </a:extLst>
-                </a:gridCol>
-                <a:gridCol w="3017520">
-                  <a:extLst>
-                    <a:ext uri="{9D8B030D-6E8A-4147-A177-3AD203B41FA5}">
-                      <a16:colId xmlns:a16="http://schemas.microsoft.com/office/drawing/2014/main" val="20002"/>
-                    </a:ext>
-                  </a:extLst>
-                </a:gridCol>
-                <a:gridCol w="3017520">
-                  <a:extLst>
-                    <a:ext uri="{9D8B030D-6E8A-4147-A177-3AD203B41FA5}">
-                      <a16:colId xmlns:a16="http://schemas.microsoft.com/office/drawing/2014/main" val="20003"/>
-                    </a:ext>
-                  </a:extLst>
-                </a:gridCol>
+                <a:gridCol w="2194560"/>
+                <a:gridCol w="2651760"/>
+                <a:gridCol w="3017520"/>
+                <a:gridCol w="3017520"/>
               </a:tblGrid>
               <a:tr h="658368">
                 <a:tc>
@@ -9152,7 +10465,7 @@
                     <a:bodyPr/>
                     <a:lstStyle/>
                     <a:p>
-                      <a:pPr marL="0" indent="0" algn="l">
+                      <a:pPr algn="l" indent="0" marL="0">
                         <a:buNone/>
                       </a:pPr>
                       <a:r>
@@ -9220,7 +10533,7 @@
                     <a:bodyPr/>
                     <a:lstStyle/>
                     <a:p>
-                      <a:pPr marL="0" indent="0" algn="l">
+                      <a:pPr algn="l" indent="0" marL="0">
                         <a:buNone/>
                       </a:pPr>
                       <a:r>
@@ -9288,7 +10601,7 @@
                     <a:bodyPr/>
                     <a:lstStyle/>
                     <a:p>
-                      <a:pPr marL="0" indent="0" algn="l">
+                      <a:pPr algn="l" indent="0" marL="0">
                         <a:buNone/>
                       </a:pPr>
                       <a:r>
@@ -9356,7 +10669,7 @@
                     <a:bodyPr/>
                     <a:lstStyle/>
                     <a:p>
-                      <a:pPr marL="0" indent="0" algn="l">
+                      <a:pPr algn="l" indent="0" marL="0">
                         <a:buNone/>
                       </a:pPr>
                       <a:r>
@@ -9419,11 +10732,6 @@
                     </a:solidFill>
                   </a:tcPr>
                 </a:tc>
-                <a:extLst>
-                  <a:ext uri="{0D108BD9-81ED-4DB2-BD59-A6C34878D82A}">
-                    <a16:rowId xmlns:a16="http://schemas.microsoft.com/office/drawing/2014/main" val="10000"/>
-                  </a:ext>
-                </a:extLst>
               </a:tr>
               <a:tr h="658368">
                 <a:tc>
@@ -9431,7 +10739,7 @@
                     <a:bodyPr/>
                     <a:lstStyle/>
                     <a:p>
-                      <a:pPr marL="0" indent="0" algn="l">
+                      <a:pPr algn="l" indent="0" marL="0">
                         <a:buNone/>
                       </a:pPr>
                       <a:r>
@@ -9499,7 +10807,7 @@
                     <a:bodyPr/>
                     <a:lstStyle/>
                     <a:p>
-                      <a:pPr marL="0" indent="0" algn="l">
+                      <a:pPr algn="l" indent="0" marL="0">
                         <a:buNone/>
                       </a:pPr>
                       <a:r>
@@ -9567,7 +10875,7 @@
                     <a:bodyPr/>
                     <a:lstStyle/>
                     <a:p>
-                      <a:pPr marL="0" indent="0" algn="l">
+                      <a:pPr algn="l" indent="0" marL="0">
                         <a:buNone/>
                       </a:pPr>
                       <a:r>
@@ -9635,7 +10943,7 @@
                     <a:bodyPr/>
                     <a:lstStyle/>
                     <a:p>
-                      <a:pPr marL="0" indent="0" algn="l">
+                      <a:pPr algn="l" indent="0" marL="0">
                         <a:buNone/>
                       </a:pPr>
                       <a:r>
@@ -9649,6 +10957,9 @@
                         </a:rPr>
                         <a:t>restore from golden — or </a:t>
                       </a:r>
+                      <a:pPr algn="l" indent="0" marL="0">
+                        <a:buNone/>
+                      </a:pPr>
                       <a:r>
                         <a:rPr lang="en-US" sz="1250" i="1" dirty="0">
                           <a:solidFill>
@@ -9660,6 +10971,9 @@
                         </a:rPr>
                         <a:t>bless</a:t>
                       </a:r>
+                      <a:pPr algn="l" indent="0" marL="0">
+                        <a:buNone/>
+                      </a:pPr>
                       <a:r>
                         <a:rPr lang="en-US" sz="1250" dirty="0">
                           <a:solidFill>
@@ -9720,11 +11034,6 @@
                     </a:solidFill>
                   </a:tcPr>
                 </a:tc>
-                <a:extLst>
-                  <a:ext uri="{0D108BD9-81ED-4DB2-BD59-A6C34878D82A}">
-                    <a16:rowId xmlns:a16="http://schemas.microsoft.com/office/drawing/2014/main" val="10001"/>
-                  </a:ext>
-                </a:extLst>
               </a:tr>
               <a:tr h="658368">
                 <a:tc>
@@ -9732,7 +11041,7 @@
                     <a:bodyPr/>
                     <a:lstStyle/>
                     <a:p>
-                      <a:pPr marL="0" indent="0" algn="l">
+                      <a:pPr algn="l" indent="0" marL="0">
                         <a:buNone/>
                       </a:pPr>
                       <a:r>
@@ -9800,7 +11109,7 @@
                     <a:bodyPr/>
                     <a:lstStyle/>
                     <a:p>
-                      <a:pPr marL="0" indent="0" algn="l">
+                      <a:pPr algn="l" indent="0" marL="0">
                         <a:buNone/>
                       </a:pPr>
                       <a:r>
@@ -9868,7 +11177,7 @@
                     <a:bodyPr/>
                     <a:lstStyle/>
                     <a:p>
-                      <a:pPr marL="0" indent="0" algn="l">
+                      <a:pPr algn="l" indent="0" marL="0">
                         <a:buNone/>
                       </a:pPr>
                       <a:r>
@@ -9936,7 +11245,7 @@
                     <a:bodyPr/>
                     <a:lstStyle/>
                     <a:p>
-                      <a:pPr marL="0" indent="0" algn="l">
+                      <a:pPr algn="l" indent="0" marL="0">
                         <a:buNone/>
                       </a:pPr>
                       <a:r>
@@ -9999,11 +11308,6 @@
                     </a:solidFill>
                   </a:tcPr>
                 </a:tc>
-                <a:extLst>
-                  <a:ext uri="{0D108BD9-81ED-4DB2-BD59-A6C34878D82A}">
-                    <a16:rowId xmlns:a16="http://schemas.microsoft.com/office/drawing/2014/main" val="10002"/>
-                  </a:ext>
-                </a:extLst>
               </a:tr>
               <a:tr h="658368">
                 <a:tc>
@@ -10011,7 +11315,7 @@
                     <a:bodyPr/>
                     <a:lstStyle/>
                     <a:p>
-                      <a:pPr marL="0" indent="0" algn="l">
+                      <a:pPr algn="l" indent="0" marL="0">
                         <a:buNone/>
                       </a:pPr>
                       <a:r>
@@ -10079,7 +11383,7 @@
                     <a:bodyPr/>
                     <a:lstStyle/>
                     <a:p>
-                      <a:pPr marL="0" indent="0" algn="l">
+                      <a:pPr algn="l" indent="0" marL="0">
                         <a:buNone/>
                       </a:pPr>
                       <a:r>
@@ -10147,7 +11451,7 @@
                     <a:bodyPr/>
                     <a:lstStyle/>
                     <a:p>
-                      <a:pPr marL="0" indent="0" algn="l">
+                      <a:pPr algn="l" indent="0" marL="0">
                         <a:buNone/>
                       </a:pPr>
                       <a:r>
@@ -10215,7 +11519,7 @@
                     <a:bodyPr/>
                     <a:lstStyle/>
                     <a:p>
-                      <a:pPr marL="0" indent="0" algn="l">
+                      <a:pPr algn="l" indent="0" marL="0">
                         <a:buNone/>
                       </a:pPr>
                       <a:r>
@@ -10278,11 +11582,6 @@
                     </a:solidFill>
                   </a:tcPr>
                 </a:tc>
-                <a:extLst>
-                  <a:ext uri="{0D108BD9-81ED-4DB2-BD59-A6C34878D82A}">
-                    <a16:rowId xmlns:a16="http://schemas.microsoft.com/office/drawing/2014/main" val="10003"/>
-                  </a:ext>
-                </a:extLst>
               </a:tr>
               <a:tr h="658368">
                 <a:tc>
@@ -10290,7 +11589,7 @@
                     <a:bodyPr/>
                     <a:lstStyle/>
                     <a:p>
-                      <a:pPr marL="0" indent="0" algn="l">
+                      <a:pPr algn="l" indent="0" marL="0">
                         <a:buNone/>
                       </a:pPr>
                       <a:r>
@@ -10358,7 +11657,7 @@
                     <a:bodyPr/>
                     <a:lstStyle/>
                     <a:p>
-                      <a:pPr marL="0" indent="0" algn="l">
+                      <a:pPr algn="l" indent="0" marL="0">
                         <a:buNone/>
                       </a:pPr>
                       <a:r>
@@ -10426,7 +11725,7 @@
                     <a:bodyPr/>
                     <a:lstStyle/>
                     <a:p>
-                      <a:pPr marL="0" indent="0" algn="l">
+                      <a:pPr algn="l" indent="0" marL="0">
                         <a:buNone/>
                       </a:pPr>
                       <a:r>
@@ -10494,7 +11793,7 @@
                     <a:bodyPr/>
                     <a:lstStyle/>
                     <a:p>
-                      <a:pPr marL="0" indent="0" algn="l">
+                      <a:pPr algn="l" indent="0" marL="0">
                         <a:buNone/>
                       </a:pPr>
                       <a:r>
@@ -10557,11 +11856,6 @@
                     </a:solidFill>
                   </a:tcPr>
                 </a:tc>
-                <a:extLst>
-                  <a:ext uri="{0D108BD9-81ED-4DB2-BD59-A6C34878D82A}">
-                    <a16:rowId xmlns:a16="http://schemas.microsoft.com/office/drawing/2014/main" val="10004"/>
-                  </a:ext>
-                </a:extLst>
               </a:tr>
               <a:tr h="658368">
                 <a:tc>
@@ -10569,7 +11863,7 @@
                     <a:bodyPr/>
                     <a:lstStyle/>
                     <a:p>
-                      <a:pPr marL="0" indent="0" algn="l">
+                      <a:pPr algn="l" indent="0" marL="0">
                         <a:buNone/>
                       </a:pPr>
                       <a:r>
@@ -10583,6 +11877,9 @@
                         </a:rPr>
                         <a:t>Toolchain </a:t>
                       </a:r>
+                      <a:pPr algn="l" indent="0" marL="0">
+                        <a:buNone/>
+                      </a:pPr>
                       <a:r>
                         <a:rPr lang="en-US" sz="1100" i="1" dirty="0">
                           <a:solidFill>
@@ -10648,7 +11945,7 @@
                     <a:bodyPr/>
                     <a:lstStyle/>
                     <a:p>
-                      <a:pPr marL="0" indent="0" algn="l">
+                      <a:pPr algn="l" indent="0" marL="0">
                         <a:buNone/>
                       </a:pPr>
                       <a:r>
@@ -10662,6 +11959,9 @@
                         </a:rPr>
                         <a:t>hashed </a:t>
                       </a:r>
+                      <a:pPr algn="l" indent="0" marL="0">
+                        <a:buNone/>
+                      </a:pPr>
                       <a:r>
                         <a:rPr lang="en-US" sz="1250" b="1" dirty="0">
                           <a:solidFill>
@@ -10727,7 +12027,7 @@
                     <a:bodyPr/>
                     <a:lstStyle/>
                     <a:p>
-                      <a:pPr marL="0" indent="0" algn="l">
+                      <a:pPr algn="l" indent="0" marL="0">
                         <a:buNone/>
                       </a:pPr>
                       <a:r>
@@ -10795,7 +12095,7 @@
                     <a:bodyPr/>
                     <a:lstStyle/>
                     <a:p>
-                      <a:pPr marL="0" indent="0" algn="l">
+                      <a:pPr algn="l" indent="0" marL="0">
                         <a:buNone/>
                       </a:pPr>
                       <a:r>
@@ -10858,11 +12158,6 @@
                     </a:solidFill>
                   </a:tcPr>
                 </a:tc>
-                <a:extLst>
-                  <a:ext uri="{0D108BD9-81ED-4DB2-BD59-A6C34878D82A}">
-                    <a16:rowId xmlns:a16="http://schemas.microsoft.com/office/drawing/2014/main" val="10005"/>
-                  </a:ext>
-                </a:extLst>
               </a:tr>
               <a:tr h="658368">
                 <a:tc>
@@ -10870,7 +12165,7 @@
                     <a:bodyPr/>
                     <a:lstStyle/>
                     <a:p>
-                      <a:pPr marL="0" indent="0" algn="l">
+                      <a:pPr algn="l" indent="0" marL="0">
                         <a:buNone/>
                       </a:pPr>
                       <a:r>
@@ -10884,6 +12179,9 @@
                         </a:rPr>
                         <a:t>Trust state </a:t>
                       </a:r>
+                      <a:pPr algn="l" indent="0" marL="0">
+                        <a:buNone/>
+                      </a:pPr>
                       <a:r>
                         <a:rPr lang="en-US" sz="1100" i="1" dirty="0">
                           <a:solidFill>
@@ -10949,7 +12247,7 @@
                     <a:bodyPr/>
                     <a:lstStyle/>
                     <a:p>
-                      <a:pPr marL="0" indent="0" algn="l">
+                      <a:pPr algn="l" indent="0" marL="0">
                         <a:buNone/>
                       </a:pPr>
                       <a:r>
@@ -11017,7 +12315,7 @@
                     <a:bodyPr/>
                     <a:lstStyle/>
                     <a:p>
-                      <a:pPr marL="0" indent="0" algn="l">
+                      <a:pPr algn="l" indent="0" marL="0">
                         <a:buNone/>
                       </a:pPr>
                       <a:r>
@@ -11085,7 +12383,7 @@
                     <a:bodyPr/>
                     <a:lstStyle/>
                     <a:p>
-                      <a:pPr marL="0" indent="0" algn="l">
+                      <a:pPr algn="l" indent="0" marL="0">
                         <a:buNone/>
                       </a:pPr>
                       <a:r>
@@ -11099,6 +12397,9 @@
                         </a:rPr>
                         <a:t>principled refusal</a:t>
                       </a:r>
+                      <a:pPr algn="l" indent="0" marL="0">
+                        <a:buNone/>
+                      </a:pPr>
                       <a:r>
                         <a:rPr lang="en-US" sz="1250" dirty="0">
                           <a:solidFill>
@@ -11159,11 +12460,6 @@
                     </a:solidFill>
                   </a:tcPr>
                 </a:tc>
-                <a:extLst>
-                  <a:ext uri="{0D108BD9-81ED-4DB2-BD59-A6C34878D82A}">
-                    <a16:rowId xmlns:a16="http://schemas.microsoft.com/office/drawing/2014/main" val="10006"/>
-                  </a:ext>
-                </a:extLst>
               </a:tr>
             </a:tbl>
           </a:graphicData>
@@ -11185,7 +12481,6 @@
         <a:solidFill>
           <a:srgbClr val="FFFFFF"/>
         </a:solidFill>
-        <a:effectLst/>
       </p:bgPr>
     </p:bg>
     <p:spTree>
@@ -11223,13 +12518,6 @@
           </a:solidFill>
           <a:ln/>
         </p:spPr>
-        <p:txBody>
-          <a:bodyPr/>
-          <a:lstStyle/>
-          <a:p>
-            <a:endParaRPr lang="en-US"/>
-          </a:p>
-        </p:txBody>
       </p:sp>
       <p:sp>
         <p:nvSpPr>
@@ -11252,7 +12540,7 @@
           <a:bodyPr wrap="square" lIns="254" tIns="254" rIns="254" bIns="254" rtlCol="0" anchor="ctr"/>
           <a:lstStyle/>
           <a:p>
-            <a:pPr marL="0" indent="0" algn="ctr">
+            <a:pPr algn="ctr" indent="0" marL="0">
               <a:buNone/>
             </a:pPr>
             <a:r>
@@ -11291,13 +12579,6 @@
           </a:solidFill>
           <a:ln/>
         </p:spPr>
-        <p:txBody>
-          <a:bodyPr/>
-          <a:lstStyle/>
-          <a:p>
-            <a:endParaRPr lang="en-US"/>
-          </a:p>
-        </p:txBody>
       </p:sp>
       <p:sp>
         <p:nvSpPr>
@@ -11320,7 +12601,7 @@
           <a:bodyPr wrap="square" lIns="254" tIns="254" rIns="254" bIns="254" rtlCol="0" anchor="ctr"/>
           <a:lstStyle/>
           <a:p>
-            <a:pPr marL="0" indent="0" algn="ctr">
+            <a:pPr algn="ctr" indent="0" marL="0">
               <a:buNone/>
             </a:pPr>
             <a:r>
@@ -11337,7 +12618,7 @@
             <a:endParaRPr lang="en-US" sz="900" dirty="0"/>
           </a:p>
           <a:p>
-            <a:pPr marL="0" indent="0" algn="ctr">
+            <a:pPr algn="ctr" indent="0" marL="0">
               <a:buNone/>
             </a:pPr>
             <a:r>
@@ -11376,13 +12657,6 @@
           </a:solidFill>
           <a:ln/>
         </p:spPr>
-        <p:txBody>
-          <a:bodyPr/>
-          <a:lstStyle/>
-          <a:p>
-            <a:endParaRPr lang="en-US"/>
-          </a:p>
-        </p:txBody>
       </p:sp>
       <p:sp>
         <p:nvSpPr>
@@ -11405,7 +12679,7 @@
           <a:bodyPr wrap="square" lIns="254" tIns="254" rIns="254" bIns="254" rtlCol="0" anchor="ctr"/>
           <a:lstStyle/>
           <a:p>
-            <a:pPr marL="0" indent="0" algn="ctr">
+            <a:pPr algn="ctr" indent="0" marL="0">
               <a:buNone/>
             </a:pPr>
             <a:r>
@@ -11444,13 +12718,6 @@
           </a:solidFill>
           <a:ln/>
         </p:spPr>
-        <p:txBody>
-          <a:bodyPr/>
-          <a:lstStyle/>
-          <a:p>
-            <a:endParaRPr lang="en-US"/>
-          </a:p>
-        </p:txBody>
       </p:sp>
       <p:sp>
         <p:nvSpPr>
@@ -11473,7 +12740,7 @@
           <a:bodyPr wrap="square" lIns="254" tIns="254" rIns="254" bIns="254" rtlCol="0" anchor="ctr"/>
           <a:lstStyle/>
           <a:p>
-            <a:pPr marL="0" indent="0" algn="ctr">
+            <a:pPr algn="ctr" indent="0" marL="0">
               <a:buNone/>
             </a:pPr>
             <a:r>
@@ -11512,13 +12779,6 @@
           </a:solidFill>
           <a:ln/>
         </p:spPr>
-        <p:txBody>
-          <a:bodyPr/>
-          <a:lstStyle/>
-          <a:p>
-            <a:endParaRPr lang="en-US"/>
-          </a:p>
-        </p:txBody>
       </p:sp>
       <p:sp>
         <p:nvSpPr>
@@ -11541,7 +12801,7 @@
           <a:bodyPr wrap="square" lIns="254" tIns="254" rIns="254" bIns="254" rtlCol="0" anchor="ctr"/>
           <a:lstStyle/>
           <a:p>
-            <a:pPr marL="0" indent="0" algn="ctr">
+            <a:pPr algn="ctr" indent="0" marL="0">
               <a:buNone/>
             </a:pPr>
             <a:r>
@@ -11580,7 +12840,7 @@
           <a:bodyPr wrap="square" lIns="0" tIns="0" rIns="0" bIns="0" rtlCol="0" anchor="ctr"/>
           <a:lstStyle/>
           <a:p>
-            <a:pPr marL="0" indent="0">
+            <a:pPr indent="0" marL="0">
               <a:buNone/>
             </a:pPr>
             <a:r>
@@ -11619,7 +12879,7 @@
           <a:bodyPr wrap="square" lIns="0" tIns="0" rIns="0" bIns="0" rtlCol="0" anchor="t"/>
           <a:lstStyle/>
           <a:p>
-            <a:pPr marL="342900" indent="-342900" algn="l">
+            <a:pPr algn="l" marL="342900" indent="-342900">
               <a:buSzPct val="100000"/>
               <a:buChar char="•"/>
             </a:pPr>
@@ -11634,6 +12894,12 @@
               </a:rPr>
               <a:t>The system: </a:t>
             </a:r>
+            <a:pPr algn="l" indent="0" marL="0">
+              <a:spcAft>
+                <a:spcPts val="200"/>
+              </a:spcAft>
+              <a:buNone/>
+            </a:pPr>
             <a:r>
               <a:rPr lang="en-US" sz="1350" dirty="0">
                 <a:solidFill>
@@ -11648,7 +12914,7 @@
             <a:endParaRPr lang="en-US" sz="1350" dirty="0"/>
           </a:p>
           <a:p>
-            <a:pPr marL="0" indent="0" algn="l">
+            <a:pPr algn="l" indent="0" marL="0">
               <a:spcAft>
                 <a:spcPts val="1000"/>
               </a:spcAft>
@@ -11668,7 +12934,7 @@
             <a:endParaRPr lang="en-US" sz="1350" dirty="0"/>
           </a:p>
           <a:p>
-            <a:pPr marL="342900" indent="-342900" algn="l">
+            <a:pPr algn="l" marL="342900" indent="-342900">
               <a:buSzPct val="100000"/>
               <a:buChar char="•"/>
             </a:pPr>
@@ -11683,6 +12949,9 @@
               </a:rPr>
               <a:t>The relevance: </a:t>
             </a:r>
+            <a:pPr algn="l" indent="0" marL="0">
+              <a:buNone/>
+            </a:pPr>
             <a:r>
               <a:rPr lang="en-US" sz="1350" dirty="0">
                 <a:solidFill>
@@ -11719,13 +12988,6 @@
           </a:solidFill>
           <a:ln/>
         </p:spPr>
-        <p:txBody>
-          <a:bodyPr/>
-          <a:lstStyle/>
-          <a:p>
-            <a:endParaRPr lang="en-US"/>
-          </a:p>
-        </p:txBody>
       </p:sp>
       <p:sp>
         <p:nvSpPr>
@@ -11748,7 +13010,7 @@
           <a:bodyPr wrap="square" lIns="254" tIns="254" rIns="254" bIns="254" rtlCol="0" anchor="ctr"/>
           <a:lstStyle/>
           <a:p>
-            <a:pPr marL="0" indent="0" algn="ctr">
+            <a:pPr algn="ctr" indent="0" marL="0">
               <a:buNone/>
             </a:pPr>
             <a:r>
@@ -11765,7 +13027,7 @@
             <a:endParaRPr lang="en-US" sz="1050" dirty="0"/>
           </a:p>
           <a:p>
-            <a:pPr marL="0" indent="0" algn="ctr">
+            <a:pPr algn="ctr" indent="0" marL="0">
               <a:buNone/>
             </a:pPr>
             <a:r>
@@ -11804,7 +13066,7 @@
           <a:bodyPr wrap="square" lIns="0" tIns="0" rIns="0" bIns="0" rtlCol="0" anchor="ctr"/>
           <a:lstStyle/>
           <a:p>
-            <a:pPr marL="0" indent="0" algn="ctr">
+            <a:pPr algn="ctr" indent="0" marL="0">
               <a:buNone/>
             </a:pPr>
             <a:r>
@@ -11843,13 +13105,6 @@
           </a:solidFill>
           <a:ln/>
         </p:spPr>
-        <p:txBody>
-          <a:bodyPr/>
-          <a:lstStyle/>
-          <a:p>
-            <a:endParaRPr lang="en-US"/>
-          </a:p>
-        </p:txBody>
       </p:sp>
       <p:sp>
         <p:nvSpPr>
@@ -11872,7 +13127,7 @@
           <a:bodyPr wrap="square" lIns="254" tIns="254" rIns="254" bIns="254" rtlCol="0" anchor="ctr"/>
           <a:lstStyle/>
           <a:p>
-            <a:pPr marL="0" indent="0" algn="ctr">
+            <a:pPr algn="ctr" indent="0" marL="0">
               <a:buNone/>
             </a:pPr>
             <a:r>
@@ -11889,7 +13144,7 @@
             <a:endParaRPr lang="en-US" sz="1050" dirty="0"/>
           </a:p>
           <a:p>
-            <a:pPr marL="0" indent="0" algn="ctr">
+            <a:pPr algn="ctr" indent="0" marL="0">
               <a:buNone/>
             </a:pPr>
             <a:r>
@@ -11928,7 +13183,7 @@
           <a:bodyPr wrap="square" lIns="0" tIns="0" rIns="0" bIns="0" rtlCol="0" anchor="ctr"/>
           <a:lstStyle/>
           <a:p>
-            <a:pPr marL="0" indent="0" algn="ctr">
+            <a:pPr algn="ctr" indent="0" marL="0">
               <a:buNone/>
             </a:pPr>
             <a:r>
@@ -11967,13 +13222,6 @@
           </a:solidFill>
           <a:ln/>
         </p:spPr>
-        <p:txBody>
-          <a:bodyPr/>
-          <a:lstStyle/>
-          <a:p>
-            <a:endParaRPr lang="en-US"/>
-          </a:p>
-        </p:txBody>
       </p:sp>
       <p:sp>
         <p:nvSpPr>
@@ -11996,7 +13244,7 @@
           <a:bodyPr wrap="square" lIns="254" tIns="254" rIns="254" bIns="254" rtlCol="0" anchor="ctr"/>
           <a:lstStyle/>
           <a:p>
-            <a:pPr marL="0" indent="0" algn="ctr">
+            <a:pPr algn="ctr" indent="0" marL="0">
               <a:buNone/>
             </a:pPr>
             <a:r>
@@ -12013,7 +13261,7 @@
             <a:endParaRPr lang="en-US" sz="1050" dirty="0"/>
           </a:p>
           <a:p>
-            <a:pPr marL="0" indent="0" algn="ctr">
+            <a:pPr algn="ctr" indent="0" marL="0">
               <a:buNone/>
             </a:pPr>
             <a:r>
@@ -12052,7 +13300,7 @@
           <a:bodyPr wrap="square" lIns="0" tIns="0" rIns="0" bIns="0" rtlCol="0" anchor="ctr"/>
           <a:lstStyle/>
           <a:p>
-            <a:pPr marL="0" indent="0" algn="ctr">
+            <a:pPr algn="ctr" indent="0" marL="0">
               <a:buNone/>
             </a:pPr>
             <a:r>
@@ -12091,13 +13339,6 @@
           </a:solidFill>
           <a:ln/>
         </p:spPr>
-        <p:txBody>
-          <a:bodyPr/>
-          <a:lstStyle/>
-          <a:p>
-            <a:endParaRPr lang="en-US"/>
-          </a:p>
-        </p:txBody>
       </p:sp>
       <p:sp>
         <p:nvSpPr>
@@ -12120,7 +13361,7 @@
           <a:bodyPr wrap="square" lIns="254" tIns="254" rIns="254" bIns="254" rtlCol="0" anchor="ctr"/>
           <a:lstStyle/>
           <a:p>
-            <a:pPr marL="0" indent="0" algn="ctr">
+            <a:pPr algn="ctr" indent="0" marL="0">
               <a:buNone/>
             </a:pPr>
             <a:r>
@@ -12137,7 +13378,7 @@
             <a:endParaRPr lang="en-US" sz="1050" dirty="0"/>
           </a:p>
           <a:p>
-            <a:pPr marL="0" indent="0" algn="ctr">
+            <a:pPr algn="ctr" indent="0" marL="0">
               <a:buNone/>
             </a:pPr>
             <a:r>
@@ -12176,7 +13417,7 @@
           <a:bodyPr wrap="square" lIns="0" tIns="0" rIns="0" bIns="0" rtlCol="0" anchor="t"/>
           <a:lstStyle/>
           <a:p>
-            <a:pPr marL="342900" indent="-342900" algn="l">
+            <a:pPr algn="l" marL="342900" indent="-342900">
               <a:buSzPct val="100000"/>
               <a:buChar char="•"/>
             </a:pPr>
@@ -12191,6 +13432,9 @@
               </a:rPr>
               <a:t>Why this example: </a:t>
             </a:r>
+            <a:pPr algn="l" indent="0" marL="0">
+              <a:buNone/>
+            </a:pPr>
             <a:r>
               <a:rPr lang="en-US" sz="1350" dirty="0">
                 <a:solidFill>
@@ -12227,7 +13471,7 @@
           <a:bodyPr wrap="square" lIns="0" tIns="0" rIns="0" bIns="0" rtlCol="0" anchor="t"/>
           <a:lstStyle/>
           <a:p>
-            <a:pPr marL="0" indent="0" algn="l">
+            <a:pPr algn="l" indent="0" marL="0">
               <a:buNone/>
             </a:pPr>
             <a:r>
@@ -12241,6 +13485,9 @@
               </a:rPr>
               <a:t>Hatcliff &amp; Belt, </a:t>
             </a:r>
+            <a:pPr algn="l" indent="0" marL="0">
+              <a:buNone/>
+            </a:pPr>
             <a:r>
               <a:rPr lang="en-US" sz="850" i="1" dirty="0">
                 <a:solidFill>
@@ -12252,6 +13499,9 @@
               </a:rPr>
               <a:t>The Isolette System: Illustrating End-to-End Artifacts for Rigorous Model-Based Engineering</a:t>
             </a:r>
+            <a:pPr algn="l" indent="0" marL="0">
+              <a:buNone/>
+            </a:pPr>
             <a:r>
               <a:rPr lang="en-US" sz="850" dirty="0">
                 <a:solidFill>
@@ -12266,7 +13516,7 @@
             <a:endParaRPr lang="en-US" sz="850" dirty="0"/>
           </a:p>
           <a:p>
-            <a:pPr marL="0" indent="0" algn="l">
+            <a:pPr algn="l" indent="0" marL="0">
               <a:buNone/>
             </a:pPr>
             <a:r>
@@ -12280,6 +13530,9 @@
               </a:rPr>
               <a:t>Hatcliff, Belt, Robby, McKenzie, Liang, </a:t>
             </a:r>
+            <a:pPr algn="l" indent="0" marL="0">
+              <a:buNone/>
+            </a:pPr>
             <a:r>
               <a:rPr lang="en-US" sz="850" i="1" dirty="0">
                 <a:solidFill>
@@ -12291,6 +13544,9 @@
               </a:rPr>
               <a:t>End-to-End Formal Methods Integrated Development with SysMLv2 Using HAMR</a:t>
             </a:r>
+            <a:pPr algn="l" indent="0" marL="0">
+              <a:buNone/>
+            </a:pPr>
             <a:r>
               <a:rPr lang="en-US" sz="850" dirty="0">
                 <a:solidFill>
@@ -12305,7 +13561,7 @@
             <a:endParaRPr lang="en-US" sz="850" dirty="0"/>
           </a:p>
           <a:p>
-            <a:pPr marL="0" indent="0" algn="l">
+            <a:pPr algn="l" indent="0" marL="0">
               <a:buNone/>
             </a:pPr>
             <a:r>
@@ -12319,6 +13575,9 @@
               </a:rPr>
               <a:t>Hatcliff, Belt, Robby, Carpenter, </a:t>
             </a:r>
+            <a:pPr algn="l" indent="0" marL="0">
+              <a:buNone/>
+            </a:pPr>
             <a:r>
               <a:rPr lang="en-US" sz="850" i="1" dirty="0">
                 <a:solidFill>
@@ -12330,6 +13589,9 @@
               </a:rPr>
               <a:t>HAMR: An AADL Multi-platform Code Generation Toolset</a:t>
             </a:r>
+            <a:pPr algn="l" indent="0" marL="0">
+              <a:buNone/>
+            </a:pPr>
             <a:r>
               <a:rPr lang="en-US" sz="850" dirty="0">
                 <a:solidFill>
@@ -12366,7 +13628,7 @@
           <a:bodyPr wrap="square" lIns="0" tIns="0" rIns="0" bIns="0" rtlCol="0" anchor="ctr"/>
           <a:lstStyle/>
           <a:p>
-            <a:pPr marL="0" indent="0" algn="l">
+            <a:pPr algn="l" indent="0" marL="0">
               <a:buNone/>
             </a:pPr>
             <a:r>
@@ -12410,13 +13672,6 @@
             <a:prstDash val="solid"/>
           </a:ln>
         </p:spPr>
-        <p:txBody>
-          <a:bodyPr/>
-          <a:lstStyle/>
-          <a:p>
-            <a:endParaRPr lang="en-US"/>
-          </a:p>
-        </p:txBody>
       </p:sp>
       <p:sp>
         <p:nvSpPr>
@@ -12439,7 +13694,7 @@
           <a:bodyPr wrap="square" lIns="0" tIns="0" rIns="0" bIns="0" rtlCol="0" anchor="ctr"/>
           <a:lstStyle/>
           <a:p>
-            <a:pPr marL="0" indent="0" algn="l">
+            <a:pPr algn="l" indent="0" marL="0">
               <a:buNone/>
             </a:pPr>
             <a:r>
@@ -12478,7 +13733,7 @@
           <a:bodyPr wrap="square" lIns="0" tIns="0" rIns="0" bIns="0" rtlCol="0" anchor="ctr"/>
           <a:lstStyle/>
           <a:p>
-            <a:pPr marL="0" indent="0" algn="l">
+            <a:pPr algn="l" indent="0" marL="0">
               <a:buNone/>
             </a:pPr>
             <a:r>
@@ -12522,13 +13777,6 @@
             <a:prstDash val="solid"/>
           </a:ln>
         </p:spPr>
-        <p:txBody>
-          <a:bodyPr/>
-          <a:lstStyle/>
-          <a:p>
-            <a:endParaRPr lang="en-US"/>
-          </a:p>
-        </p:txBody>
       </p:sp>
       <p:sp>
         <p:nvSpPr>
@@ -12551,7 +13799,7 @@
           <a:bodyPr wrap="square" lIns="0" tIns="0" rIns="0" bIns="0" rtlCol="0" anchor="ctr"/>
           <a:lstStyle/>
           <a:p>
-            <a:pPr marL="0" indent="0" algn="l">
+            <a:pPr algn="l" indent="0" marL="0">
               <a:buNone/>
             </a:pPr>
             <a:r>
@@ -12590,7 +13838,7 @@
           <a:bodyPr wrap="square" lIns="0" tIns="0" rIns="0" bIns="0" rtlCol="0" anchor="ctr"/>
           <a:lstStyle/>
           <a:p>
-            <a:pPr marL="0" indent="0" algn="l">
+            <a:pPr algn="l" indent="0" marL="0">
               <a:buNone/>
             </a:pPr>
             <a:r>
@@ -12634,13 +13882,6 @@
             <a:prstDash val="solid"/>
           </a:ln>
         </p:spPr>
-        <p:txBody>
-          <a:bodyPr/>
-          <a:lstStyle/>
-          <a:p>
-            <a:endParaRPr lang="en-US"/>
-          </a:p>
-        </p:txBody>
       </p:sp>
       <p:sp>
         <p:nvSpPr>
@@ -12663,7 +13904,7 @@
           <a:bodyPr wrap="square" lIns="0" tIns="0" rIns="0" bIns="0" rtlCol="0" anchor="ctr"/>
           <a:lstStyle/>
           <a:p>
-            <a:pPr marL="0" indent="0" algn="l">
+            <a:pPr algn="l" indent="0" marL="0">
               <a:buNone/>
             </a:pPr>
             <a:r>
@@ -12702,7 +13943,7 @@
           <a:bodyPr wrap="square" lIns="0" tIns="0" rIns="0" bIns="0" rtlCol="0" anchor="ctr"/>
           <a:lstStyle/>
           <a:p>
-            <a:pPr marL="0" indent="0" algn="l">
+            <a:pPr algn="l" indent="0" marL="0">
               <a:buNone/>
             </a:pPr>
             <a:r>
@@ -12746,13 +13987,6 @@
             <a:prstDash val="solid"/>
           </a:ln>
         </p:spPr>
-        <p:txBody>
-          <a:bodyPr/>
-          <a:lstStyle/>
-          <a:p>
-            <a:endParaRPr lang="en-US"/>
-          </a:p>
-        </p:txBody>
       </p:sp>
       <p:sp>
         <p:nvSpPr>
@@ -12775,7 +14009,7 @@
           <a:bodyPr wrap="square" lIns="0" tIns="0" rIns="0" bIns="0" rtlCol="0" anchor="ctr"/>
           <a:lstStyle/>
           <a:p>
-            <a:pPr marL="0" indent="0" algn="l">
+            <a:pPr algn="l" indent="0" marL="0">
               <a:buNone/>
             </a:pPr>
             <a:r>
@@ -12814,7 +14048,7 @@
           <a:bodyPr wrap="square" lIns="0" tIns="0" rIns="0" bIns="0" rtlCol="0" anchor="ctr"/>
           <a:lstStyle/>
           <a:p>
-            <a:pPr marL="0" indent="0" algn="l">
+            <a:pPr algn="l" indent="0" marL="0">
               <a:buNone/>
             </a:pPr>
             <a:r>
@@ -12858,13 +14092,6 @@
             <a:prstDash val="solid"/>
           </a:ln>
         </p:spPr>
-        <p:txBody>
-          <a:bodyPr/>
-          <a:lstStyle/>
-          <a:p>
-            <a:endParaRPr lang="en-US"/>
-          </a:p>
-        </p:txBody>
       </p:sp>
       <p:sp>
         <p:nvSpPr>
@@ -12887,7 +14114,7 @@
           <a:bodyPr wrap="square" lIns="0" tIns="0" rIns="0" bIns="0" rtlCol="0" anchor="ctr"/>
           <a:lstStyle/>
           <a:p>
-            <a:pPr marL="0" indent="0" algn="l">
+            <a:pPr algn="l" indent="0" marL="0">
               <a:buNone/>
             </a:pPr>
             <a:r>
@@ -12926,7 +14153,7 @@
           <a:bodyPr wrap="square" lIns="0" tIns="0" rIns="0" bIns="0" rtlCol="0" anchor="ctr"/>
           <a:lstStyle/>
           <a:p>
-            <a:pPr marL="0" indent="0" algn="l">
+            <a:pPr algn="l" indent="0" marL="0">
               <a:buNone/>
             </a:pPr>
             <a:r>
@@ -12970,13 +14197,6 @@
             <a:prstDash val="solid"/>
           </a:ln>
         </p:spPr>
-        <p:txBody>
-          <a:bodyPr/>
-          <a:lstStyle/>
-          <a:p>
-            <a:endParaRPr lang="en-US"/>
-          </a:p>
-        </p:txBody>
       </p:sp>
       <p:sp>
         <p:nvSpPr>
@@ -12999,7 +14219,7 @@
           <a:bodyPr wrap="square" lIns="0" tIns="0" rIns="0" bIns="0" rtlCol="0" anchor="ctr"/>
           <a:lstStyle/>
           <a:p>
-            <a:pPr marL="0" indent="0" algn="l">
+            <a:pPr algn="l" indent="0" marL="0">
               <a:buNone/>
             </a:pPr>
             <a:r>
@@ -13038,7 +14258,7 @@
           <a:bodyPr wrap="square" lIns="0" tIns="0" rIns="0" bIns="0" rtlCol="0" anchor="ctr"/>
           <a:lstStyle/>
           <a:p>
-            <a:pPr marL="0" indent="0" algn="l">
+            <a:pPr algn="l" indent="0" marL="0">
               <a:buNone/>
             </a:pPr>
             <a:r>
@@ -13055,7 +14275,7 @@
             <a:endParaRPr lang="en-US" sz="1000" dirty="0"/>
           </a:p>
           <a:p>
-            <a:pPr marL="0" indent="0" algn="l">
+            <a:pPr algn="l" indent="0" marL="0">
               <a:buNone/>
             </a:pPr>
             <a:r>
@@ -13089,7 +14309,6 @@
         <a:solidFill>
           <a:srgbClr val="FFFFFF"/>
         </a:solidFill>
-        <a:effectLst/>
       </p:bgPr>
     </p:bg>
     <p:spTree>
@@ -13127,13 +14346,6 @@
           </a:solidFill>
           <a:ln/>
         </p:spPr>
-        <p:txBody>
-          <a:bodyPr/>
-          <a:lstStyle/>
-          <a:p>
-            <a:endParaRPr lang="en-US"/>
-          </a:p>
-        </p:txBody>
       </p:sp>
       <p:sp>
         <p:nvSpPr>
@@ -13156,7 +14368,7 @@
           <a:bodyPr wrap="square" lIns="254" tIns="254" rIns="254" bIns="254" rtlCol="0" anchor="ctr"/>
           <a:lstStyle/>
           <a:p>
-            <a:pPr marL="0" indent="0" algn="ctr">
+            <a:pPr algn="ctr" indent="0" marL="0">
               <a:buNone/>
             </a:pPr>
             <a:r>
@@ -13195,13 +14407,6 @@
           </a:solidFill>
           <a:ln/>
         </p:spPr>
-        <p:txBody>
-          <a:bodyPr/>
-          <a:lstStyle/>
-          <a:p>
-            <a:endParaRPr lang="en-US"/>
-          </a:p>
-        </p:txBody>
       </p:sp>
       <p:sp>
         <p:nvSpPr>
@@ -13224,7 +14429,7 @@
           <a:bodyPr wrap="square" lIns="254" tIns="254" rIns="254" bIns="254" rtlCol="0" anchor="ctr"/>
           <a:lstStyle/>
           <a:p>
-            <a:pPr marL="0" indent="0" algn="ctr">
+            <a:pPr algn="ctr" indent="0" marL="0">
               <a:buNone/>
             </a:pPr>
             <a:r>
@@ -13241,7 +14446,7 @@
             <a:endParaRPr lang="en-US" sz="900" dirty="0"/>
           </a:p>
           <a:p>
-            <a:pPr marL="0" indent="0" algn="ctr">
+            <a:pPr algn="ctr" indent="0" marL="0">
               <a:buNone/>
             </a:pPr>
             <a:r>
@@ -13280,13 +14485,6 @@
           </a:solidFill>
           <a:ln/>
         </p:spPr>
-        <p:txBody>
-          <a:bodyPr/>
-          <a:lstStyle/>
-          <a:p>
-            <a:endParaRPr lang="en-US"/>
-          </a:p>
-        </p:txBody>
       </p:sp>
       <p:sp>
         <p:nvSpPr>
@@ -13309,7 +14507,7 @@
           <a:bodyPr wrap="square" lIns="254" tIns="254" rIns="254" bIns="254" rtlCol="0" anchor="ctr"/>
           <a:lstStyle/>
           <a:p>
-            <a:pPr marL="0" indent="0" algn="ctr">
+            <a:pPr algn="ctr" indent="0" marL="0">
               <a:buNone/>
             </a:pPr>
             <a:r>
@@ -13348,13 +14546,6 @@
           </a:solidFill>
           <a:ln/>
         </p:spPr>
-        <p:txBody>
-          <a:bodyPr/>
-          <a:lstStyle/>
-          <a:p>
-            <a:endParaRPr lang="en-US"/>
-          </a:p>
-        </p:txBody>
       </p:sp>
       <p:sp>
         <p:nvSpPr>
@@ -13377,7 +14568,7 @@
           <a:bodyPr wrap="square" lIns="254" tIns="254" rIns="254" bIns="254" rtlCol="0" anchor="ctr"/>
           <a:lstStyle/>
           <a:p>
-            <a:pPr marL="0" indent="0" algn="ctr">
+            <a:pPr algn="ctr" indent="0" marL="0">
               <a:buNone/>
             </a:pPr>
             <a:r>
@@ -13416,13 +14607,6 @@
           </a:solidFill>
           <a:ln/>
         </p:spPr>
-        <p:txBody>
-          <a:bodyPr/>
-          <a:lstStyle/>
-          <a:p>
-            <a:endParaRPr lang="en-US"/>
-          </a:p>
-        </p:txBody>
       </p:sp>
       <p:sp>
         <p:nvSpPr>
@@ -13445,7 +14629,7 @@
           <a:bodyPr wrap="square" lIns="254" tIns="254" rIns="254" bIns="254" rtlCol="0" anchor="ctr"/>
           <a:lstStyle/>
           <a:p>
-            <a:pPr marL="0" indent="0" algn="ctr">
+            <a:pPr algn="ctr" indent="0" marL="0">
               <a:buNone/>
             </a:pPr>
             <a:r>
@@ -13484,11 +14668,11 @@
           <a:bodyPr wrap="square" lIns="0" tIns="0" rIns="0" bIns="0" rtlCol="0" anchor="ctr"/>
           <a:lstStyle/>
           <a:p>
-            <a:pPr marL="0" indent="0">
-              <a:buNone/>
-            </a:pPr>
-            <a:r>
-              <a:rPr lang="en-US" sz="1800" b="1" kern="0" spc="300" dirty="0">
+            <a:pPr indent="0" marL="0">
+              <a:buNone/>
+            </a:pPr>
+            <a:r>
+              <a:rPr lang="en-US" sz="1800" b="1" spc="300" kern="0" dirty="0">
                 <a:solidFill>
                   <a:srgbClr val="5A6478"/>
                 </a:solidFill>
@@ -13523,7 +14707,7 @@
           <a:bodyPr wrap="square" lIns="0" tIns="0" rIns="0" bIns="0" rtlCol="0" anchor="ctr"/>
           <a:lstStyle/>
           <a:p>
-            <a:pPr marL="0" indent="0">
+            <a:pPr indent="0" marL="0">
               <a:buNone/>
             </a:pPr>
             <a:r>
@@ -13562,7 +14746,7 @@
           <a:bodyPr wrap="square" lIns="0" tIns="0" rIns="0" bIns="0" rtlCol="0" anchor="ctr"/>
           <a:lstStyle/>
           <a:p>
-            <a:pPr marL="0" indent="0">
+            <a:pPr indent="0" marL="0">
               <a:buNone/>
             </a:pPr>
             <a:r>
@@ -13574,7 +14758,7 @@
                 <a:ea typeface="Calibri" pitchFamily="34" charset="-122"/>
                 <a:cs typeface="Calibri" pitchFamily="34" charset="-120"/>
               </a:rPr>
-              <a:t>Demo scene:  1 (clean appraisal)</a:t>
+              <a:t>scene 1</a:t>
             </a:r>
             <a:endParaRPr lang="en-US" sz="1500" dirty="0"/>
           </a:p>
@@ -13601,7 +14785,7 @@
           <a:bodyPr wrap="square" lIns="0" tIns="0" rIns="0" bIns="0" rtlCol="0" anchor="ctr"/>
           <a:lstStyle/>
           <a:p>
-            <a:pPr marL="0" indent="0">
+            <a:pPr indent="0" marL="0">
               <a:buNone/>
             </a:pPr>
             <a:r>
@@ -13640,7 +14824,7 @@
           <a:bodyPr wrap="square" lIns="0" tIns="0" rIns="0" bIns="0" rtlCol="0" anchor="ctr"/>
           <a:lstStyle/>
           <a:p>
-            <a:pPr marL="0" indent="0">
+            <a:pPr indent="0" marL="0">
               <a:buNone/>
             </a:pPr>
             <a:r>
@@ -13959,319 +15143,4 @@
     </a:ext>
   </a:extLst>
 </a:theme>
-</file>
-
-<file path=ppt/theme/theme2.xml><?xml version="1.0" encoding="utf-8"?>
-<a:theme xmlns:a="http://schemas.openxmlformats.org/drawingml/2006/main" name="Office Theme">
-  <a:themeElements>
-    <a:clrScheme name="Office">
-      <a:dk1>
-        <a:sysClr val="windowText" lastClr="000000"/>
-      </a:dk1>
-      <a:lt1>
-        <a:sysClr val="window" lastClr="FFFFFF"/>
-      </a:lt1>
-      <a:dk2>
-        <a:srgbClr val="0E2841"/>
-      </a:dk2>
-      <a:lt2>
-        <a:srgbClr val="E8E8E8"/>
-      </a:lt2>
-      <a:accent1>
-        <a:srgbClr val="156082"/>
-      </a:accent1>
-      <a:accent2>
-        <a:srgbClr val="E97132"/>
-      </a:accent2>
-      <a:accent3>
-        <a:srgbClr val="196B24"/>
-      </a:accent3>
-      <a:accent4>
-        <a:srgbClr val="0F9ED5"/>
-      </a:accent4>
-      <a:accent5>
-        <a:srgbClr val="A02B93"/>
-      </a:accent5>
-      <a:accent6>
-        <a:srgbClr val="4EA72E"/>
-      </a:accent6>
-      <a:hlink>
-        <a:srgbClr val="467886"/>
-      </a:hlink>
-      <a:folHlink>
-        <a:srgbClr val="96607D"/>
-      </a:folHlink>
-    </a:clrScheme>
-    <a:fontScheme name="Office">
-      <a:majorFont>
-        <a:latin typeface="Aptos Display" panose="02110004020202020204"/>
-        <a:ea typeface=""/>
-        <a:cs typeface=""/>
-        <a:font script="Jpan" typeface="游ゴシック Light"/>
-        <a:font script="Hang" typeface="맑은 고딕"/>
-        <a:font script="Hans" typeface="等线 Light"/>
-        <a:font script="Hant" typeface="新細明體"/>
-        <a:font script="Arab" typeface="Times New Roman"/>
-        <a:font script="Hebr" typeface="Times New Roman"/>
-        <a:font script="Thai" typeface="Angsana New"/>
-        <a:font script="Ethi" typeface="Nyala"/>
-        <a:font script="Beng" typeface="Vrinda"/>
-        <a:font script="Gujr" typeface="Shruti"/>
-        <a:font script="Khmr" typeface="MoolBoran"/>
-        <a:font script="Knda" typeface="Tunga"/>
-        <a:font script="Guru" typeface="Raavi"/>
-        <a:font script="Cans" typeface="Euphemia"/>
-        <a:font script="Cher" typeface="Plantagenet Cherokee"/>
-        <a:font script="Yiii" typeface="Microsoft Yi Baiti"/>
-        <a:font script="Tibt" typeface="Microsoft Himalaya"/>
-        <a:font script="Thaa" typeface="MV Boli"/>
-        <a:font script="Deva" typeface="Mangal"/>
-        <a:font script="Telu" typeface="Gautami"/>
-        <a:font script="Taml" typeface="Latha"/>
-        <a:font script="Syrc" typeface="Estrangelo Edessa"/>
-        <a:font script="Orya" typeface="Kalinga"/>
-        <a:font script="Mlym" typeface="Kartika"/>
-        <a:font script="Laoo" typeface="DokChampa"/>
-        <a:font script="Sinh" typeface="Iskoola Pota"/>
-        <a:font script="Mong" typeface="Mongolian Baiti"/>
-        <a:font script="Viet" typeface="Times New Roman"/>
-        <a:font script="Uigh" typeface="Microsoft Uighur"/>
-        <a:font script="Geor" typeface="Sylfaen"/>
-        <a:font script="Armn" typeface="Arial"/>
-        <a:font script="Bugi" typeface="Leelawadee UI"/>
-        <a:font script="Bopo" typeface="Microsoft JhengHei"/>
-        <a:font script="Java" typeface="Javanese Text"/>
-        <a:font script="Lisu" typeface="Segoe UI"/>
-        <a:font script="Mymr" typeface="Myanmar Text"/>
-        <a:font script="Nkoo" typeface="Ebrima"/>
-        <a:font script="Olck" typeface="Nirmala UI"/>
-        <a:font script="Osma" typeface="Ebrima"/>
-        <a:font script="Phag" typeface="Phagspa"/>
-        <a:font script="Syrn" typeface="Estrangelo Edessa"/>
-        <a:font script="Syrj" typeface="Estrangelo Edessa"/>
-        <a:font script="Syre" typeface="Estrangelo Edessa"/>
-        <a:font script="Sora" typeface="Nirmala UI"/>
-        <a:font script="Tale" typeface="Microsoft Tai Le"/>
-        <a:font script="Talu" typeface="Microsoft New Tai Lue"/>
-        <a:font script="Tfng" typeface="Ebrima"/>
-      </a:majorFont>
-      <a:minorFont>
-        <a:latin typeface="Aptos" panose="02110004020202020204"/>
-        <a:ea typeface=""/>
-        <a:cs typeface=""/>
-        <a:font script="Jpan" typeface="游ゴシック"/>
-        <a:font script="Hang" typeface="맑은 고딕"/>
-        <a:font script="Hans" typeface="等线"/>
-        <a:font script="Hant" typeface="新細明體"/>
-        <a:font script="Arab" typeface="Arial"/>
-        <a:font script="Hebr" typeface="Arial"/>
-        <a:font script="Thai" typeface="Cordia New"/>
-        <a:font script="Ethi" typeface="Nyala"/>
-        <a:font script="Beng" typeface="Vrinda"/>
-        <a:font script="Gujr" typeface="Shruti"/>
-        <a:font script="Khmr" typeface="DaunPenh"/>
-        <a:font script="Knda" typeface="Tunga"/>
-        <a:font script="Guru" typeface="Raavi"/>
-        <a:font script="Cans" typeface="Euphemia"/>
-        <a:font script="Cher" typeface="Plantagenet Cherokee"/>
-        <a:font script="Yiii" typeface="Microsoft Yi Baiti"/>
-        <a:font script="Tibt" typeface="Microsoft Himalaya"/>
-        <a:font script="Thaa" typeface="MV Boli"/>
-        <a:font script="Deva" typeface="Mangal"/>
-        <a:font script="Telu" typeface="Gautami"/>
-        <a:font script="Taml" typeface="Latha"/>
-        <a:font script="Syrc" typeface="Estrangelo Edessa"/>
-        <a:font script="Orya" typeface="Kalinga"/>
-        <a:font script="Mlym" typeface="Kartika"/>
-        <a:font script="Laoo" typeface="DokChampa"/>
-        <a:font script="Sinh" typeface="Iskoola Pota"/>
-        <a:font script="Mong" typeface="Mongolian Baiti"/>
-        <a:font script="Viet" typeface="Arial"/>
-        <a:font script="Uigh" typeface="Microsoft Uighur"/>
-        <a:font script="Geor" typeface="Sylfaen"/>
-        <a:font script="Armn" typeface="Arial"/>
-        <a:font script="Bugi" typeface="Leelawadee UI"/>
-        <a:font script="Bopo" typeface="Microsoft JhengHei"/>
-        <a:font script="Java" typeface="Javanese Text"/>
-        <a:font script="Lisu" typeface="Segoe UI"/>
-        <a:font script="Mymr" typeface="Myanmar Text"/>
-        <a:font script="Nkoo" typeface="Ebrima"/>
-        <a:font script="Olck" typeface="Nirmala UI"/>
-        <a:font script="Osma" typeface="Ebrima"/>
-        <a:font script="Phag" typeface="Phagspa"/>
-        <a:font script="Syrn" typeface="Estrangelo Edessa"/>
-        <a:font script="Syrj" typeface="Estrangelo Edessa"/>
-        <a:font script="Syre" typeface="Estrangelo Edessa"/>
-        <a:font script="Sora" typeface="Nirmala UI"/>
-        <a:font script="Tale" typeface="Microsoft Tai Le"/>
-        <a:font script="Talu" typeface="Microsoft New Tai Lue"/>
-        <a:font script="Tfng" typeface="Ebrima"/>
-      </a:minorFont>
-    </a:fontScheme>
-    <a:fmtScheme name="Office">
-      <a:fillStyleLst>
-        <a:solidFill>
-          <a:schemeClr val="phClr"/>
-        </a:solidFill>
-        <a:gradFill rotWithShape="1">
-          <a:gsLst>
-            <a:gs pos="0">
-              <a:schemeClr val="phClr">
-                <a:lumMod val="110000"/>
-                <a:satMod val="105000"/>
-                <a:tint val="67000"/>
-              </a:schemeClr>
-            </a:gs>
-            <a:gs pos="50000">
-              <a:schemeClr val="phClr">
-                <a:lumMod val="105000"/>
-                <a:satMod val="103000"/>
-                <a:tint val="73000"/>
-              </a:schemeClr>
-            </a:gs>
-            <a:gs pos="100000">
-              <a:schemeClr val="phClr">
-                <a:lumMod val="105000"/>
-                <a:satMod val="109000"/>
-                <a:tint val="81000"/>
-              </a:schemeClr>
-            </a:gs>
-          </a:gsLst>
-          <a:lin ang="5400000" scaled="0"/>
-        </a:gradFill>
-        <a:gradFill rotWithShape="1">
-          <a:gsLst>
-            <a:gs pos="0">
-              <a:schemeClr val="phClr">
-                <a:satMod val="103000"/>
-                <a:lumMod val="102000"/>
-                <a:tint val="94000"/>
-              </a:schemeClr>
-            </a:gs>
-            <a:gs pos="50000">
-              <a:schemeClr val="phClr">
-                <a:satMod val="110000"/>
-                <a:lumMod val="100000"/>
-                <a:shade val="100000"/>
-              </a:schemeClr>
-            </a:gs>
-            <a:gs pos="100000">
-              <a:schemeClr val="phClr">
-                <a:lumMod val="99000"/>
-                <a:satMod val="120000"/>
-                <a:shade val="78000"/>
-              </a:schemeClr>
-            </a:gs>
-          </a:gsLst>
-          <a:lin ang="5400000" scaled="0"/>
-        </a:gradFill>
-      </a:fillStyleLst>
-      <a:lnStyleLst>
-        <a:ln w="12700" cap="flat" cmpd="sng" algn="ctr">
-          <a:solidFill>
-            <a:schemeClr val="phClr"/>
-          </a:solidFill>
-          <a:prstDash val="solid"/>
-          <a:miter lim="800000"/>
-        </a:ln>
-        <a:ln w="19050" cap="flat" cmpd="sng" algn="ctr">
-          <a:solidFill>
-            <a:schemeClr val="phClr"/>
-          </a:solidFill>
-          <a:prstDash val="solid"/>
-          <a:miter lim="800000"/>
-        </a:ln>
-        <a:ln w="25400" cap="flat" cmpd="sng" algn="ctr">
-          <a:solidFill>
-            <a:schemeClr val="phClr"/>
-          </a:solidFill>
-          <a:prstDash val="solid"/>
-          <a:miter lim="800000"/>
-        </a:ln>
-      </a:lnStyleLst>
-      <a:effectStyleLst>
-        <a:effectStyle>
-          <a:effectLst/>
-        </a:effectStyle>
-        <a:effectStyle>
-          <a:effectLst/>
-        </a:effectStyle>
-        <a:effectStyle>
-          <a:effectLst>
-            <a:outerShdw blurRad="57150" dist="19050" dir="5400000" algn="ctr" rotWithShape="0">
-              <a:srgbClr val="000000">
-                <a:alpha val="63000"/>
-              </a:srgbClr>
-            </a:outerShdw>
-          </a:effectLst>
-        </a:effectStyle>
-      </a:effectStyleLst>
-      <a:bgFillStyleLst>
-        <a:solidFill>
-          <a:schemeClr val="phClr"/>
-        </a:solidFill>
-        <a:solidFill>
-          <a:schemeClr val="phClr">
-            <a:tint val="95000"/>
-            <a:satMod val="170000"/>
-          </a:schemeClr>
-        </a:solidFill>
-        <a:gradFill rotWithShape="1">
-          <a:gsLst>
-            <a:gs pos="0">
-              <a:schemeClr val="phClr">
-                <a:tint val="93000"/>
-                <a:satMod val="150000"/>
-                <a:shade val="98000"/>
-                <a:lumMod val="102000"/>
-              </a:schemeClr>
-            </a:gs>
-            <a:gs pos="50000">
-              <a:schemeClr val="phClr">
-                <a:tint val="98000"/>
-                <a:satMod val="130000"/>
-                <a:shade val="90000"/>
-                <a:lumMod val="103000"/>
-              </a:schemeClr>
-            </a:gs>
-            <a:gs pos="100000">
-              <a:schemeClr val="phClr">
-                <a:shade val="63000"/>
-                <a:satMod val="120000"/>
-              </a:schemeClr>
-            </a:gs>
-          </a:gsLst>
-          <a:lin ang="5400000" scaled="0"/>
-        </a:gradFill>
-      </a:bgFillStyleLst>
-    </a:fmtScheme>
-  </a:themeElements>
-  <a:objectDefaults>
-    <a:lnDef>
-      <a:spPr/>
-      <a:bodyPr/>
-      <a:lstStyle/>
-      <a:style>
-        <a:lnRef idx="2">
-          <a:schemeClr val="accent1"/>
-        </a:lnRef>
-        <a:fillRef idx="0">
-          <a:schemeClr val="accent1"/>
-        </a:fillRef>
-        <a:effectRef idx="1">
-          <a:schemeClr val="accent1"/>
-        </a:effectRef>
-        <a:fontRef idx="minor">
-          <a:schemeClr val="tx1"/>
-        </a:fontRef>
-      </a:style>
-    </a:lnDef>
-  </a:objectDefaults>
-  <a:extraClrSchemeLst/>
-  <a:extLst>
-    <a:ext uri="{05A4C25C-085E-4340-85A3-A5531E510DB2}">
-      <thm15:themeFamily xmlns:thm15="http://schemas.microsoft.com/office/thememl/2012/main" name="Office Theme" id="{2E142A2C-CD16-42D6-873A-C26D2A0506FA}" vid="{1BDDFF52-6CD6-40A5-AB3C-68EB2F1E4D0A}"/>
-    </a:ext>
-  </a:extLst>
-</a:theme>
 </file>
--- a/docs/video_slides_draft.pptx
+++ b/docs/video_slides_draft.pptx
@@ -1050,7 +1050,7 @@
           <a:p>
             <a:r>
               <a:rPr lang="en-US" dirty="0"/>
-              <a:t>Beats: inverted-FFI diff (take the [v]iew, diff D18 - 'see how innocent it looks') -&gt; proofs pass, cheat scan silent -&gt; gensrc byte anchor refuses, naming the file -&gt; diagnosis rung classifies -&gt; repair by regeneration (second speed-ramp stretch) -&gt; re-attested clean. Final checklist doubles as the coverage beat's background; close with one sentence naming scenes 9-11 (capstone slide C carries that taxonomy).
+              <a:t>The detector escalation that closes the demo. BEAT 1 (scene 9, axioms): two-grid view - the verus grid all green (cargo-verus succeeds) beside the proof-escape grid refusing the exact crate and naming the construct (ADMIT: assume 0-&gt;1; SMUGGLE: broadcast 0-&gt;1, external_body 0-&gt;1). The CHEAT SCAN catches what the outcome cannot - a construct appeared. BEAT 2 (scene 12, FFI): the heat command inverted behind external_body (diff D18) -&gt; every proof passes AND the cheat scan is SILENT (no construct) -&gt; only the GENSRC byte anchor refuses, naming the file -&gt; diagnosis rung classifies -&gt; repair by regeneration (speed-ramp). Three detectors, three blind spots: outcome (blind to both), construct scan (catches beat 1), byte anchor (catches beat 2). Close naming scenes 10-11 (slide C carries the rest).
 Watch-for line doubles as the VO opener over the terminal cut. Full runbook: docs/video_recording_plan.md.</a:t>
             </a:r>
             <a:endParaRPr lang="en-US" dirty="0"/>
@@ -5649,7 +5649,7 @@
                 <a:ea typeface="Calibri" pitchFamily="34" charset="-122"/>
                 <a:cs typeface="Calibri" pitchFamily="34" charset="-120"/>
               </a:rPr>
-              <a:t>scene 12</a:t>
+              <a:t>scenes 9 + 12</a:t>
             </a:r>
             <a:endParaRPr lang="en-US" sz="1500" dirty="0"/>
           </a:p>
@@ -5688,7 +5688,7 @@
                 <a:ea typeface="Calibri" pitchFamily="34" charset="-122"/>
                 <a:cs typeface="Calibri" pitchFamily="34" charset="-120"/>
               </a:rPr>
-              <a:t>Every proof passes, every scan is silent — the heat command is inverted anyway. Only the bytes tell.</a:t>
+              <a:t>Two proofs that pass. First an axiom the cheat scan catches by its construct; then an FFI inversion that adds no construct at all — only the byte anchor sees it. Verification succeeded both times.</a:t>
             </a:r>
             <a:endParaRPr lang="en-US" sz="2000" dirty="0"/>
           </a:p>
@@ -5727,7 +5727,7 @@
                 <a:ea typeface="Courier New" pitchFamily="34" charset="-122"/>
                 <a:cs typeface="Courier New" pitchFamily="34" charset="-120"/>
               </a:rPr>
-              <a:t>./examples/demo_isolette.sh --scenes 12</a:t>
+              <a:t>./examples/demo_isolette.sh --scenes "9 12"</a:t>
             </a:r>
             <a:endParaRPr lang="en-US" sz="1100" dirty="0"/>
           </a:p>

--- a/docs/video_slides_draft.pptx
+++ b/docs/video_slides_draft.pptx
@@ -5061,7 +5061,7 @@
                 <a:ea typeface="Cambria" pitchFamily="34" charset="-122"/>
                 <a:cs typeface="Cambria" pitchFamily="34" charset="-120"/>
               </a:rPr>
-              <a:t>Trust-state tamper: refuse</a:t>
+              <a:t>Trust-anchor tamper: attribute then refuse</a:t>
             </a:r>
             <a:endParaRPr lang="en-US" sz="4000" dirty="0"/>
           </a:p>
@@ -5139,7 +5139,7 @@
                 <a:ea typeface="Calibri" pitchFamily="34" charset="-122"/>
                 <a:cs typeface="Calibri" pitchFamily="34" charset="-120"/>
               </a:rPr>
-              <a:t>Three tampers with the trust state, three attributed refusals — then a tampered tool, and every proof cell poisons fail-closed. Nothing repairs a baseline.</a:t>
+              <a:t>The signed evidence, an installed golden, then the verifier itself — each tamper attributed, each refused. No knowledge source repairs a trust anchor.</a:t>
             </a:r>
             <a:endParaRPr lang="en-US" sz="2000" dirty="0"/>
           </a:p>
@@ -5610,7 +5610,7 @@
                 <a:ea typeface="Cambria" pitchFamily="34" charset="-122"/>
                 <a:cs typeface="Cambria" pitchFamily="34" charset="-120"/>
               </a:rPr>
-              <a:t>“Verification succeeded” is not enough</a:t>
+              <a:t>Verification soundness</a:t>
             </a:r>
             <a:endParaRPr lang="en-US" sz="4000" dirty="0"/>
           </a:p>
@@ -5688,7 +5688,7 @@
                 <a:ea typeface="Calibri" pitchFamily="34" charset="-122"/>
                 <a:cs typeface="Calibri" pitchFamily="34" charset="-120"/>
               </a:rPr>
-              <a:t>Two proofs that pass. First an axiom the cheat scan catches by its construct; then an FFI inversion that adds no construct at all — only the byte anchor sees it. Verification succeeded both times.</a:t>
+              <a:t>Proofs verify, but measurement detects unsound axioms.</a:t>
             </a:r>
             <a:endParaRPr lang="en-US" sz="2000" dirty="0"/>
           </a:p>

--- a/docs/video_slides_draft.pptx
+++ b/docs/video_slides_draft.pptx
@@ -2859,7 +2859,7 @@
                 <a:ea typeface="Calibri" pitchFamily="34" charset="-122"/>
                 <a:cs typeface="Calibri" pitchFamily="34" charset="-120"/>
               </a:rPr>
-              <a:t>A benign change in requirements — the temperature alarm range widened — model appraisal fails quickly.  Administrator re-blesses and promotes new spec, all contract appraisals again pass.</a:t>
+              <a:t>A benign change in requirements — the temperature alarm range widened — model appraisal fails quickly.  Administrator re-blesses new spec, all contract appraisals again pass.</a:t>
             </a:r>
             <a:endParaRPr lang="en-US" sz="2000" dirty="0"/>
           </a:p>
@@ -3408,7 +3408,35 @@
                 <a:ea typeface="Calibri" pitchFamily="34" charset="-122"/>
                 <a:cs typeface="Calibri" pitchFamily="34" charset="-120"/>
               </a:rPr>
-              <a:t>A developer rewrites implementation logic — semantically equivalent. The hash moves, but every contract slice maintains integrity, and the proofs re-verify: the benign change survives.</a:t>
+              <a:t>A developer rewrites implementation logic — semantically equivalent. The hash moves, but </a:t>
+            </a:r>
+            <a:pPr indent="0" marL="0">
+              <a:buNone/>
+            </a:pPr>
+            <a:r>
+              <a:rPr lang="en-US" sz="2000" b="1" i="1" dirty="0">
+                <a:solidFill>
+                  <a:srgbClr val="212121"/>
+                </a:solidFill>
+                <a:latin typeface="Calibri" pitchFamily="34" charset="0"/>
+                <a:ea typeface="Calibri" pitchFamily="34" charset="-122"/>
+                <a:cs typeface="Calibri" pitchFamily="34" charset="-120"/>
+              </a:rPr>
+              <a:t>every contract slice maintains integrity</a:t>
+            </a:r>
+            <a:pPr indent="0" marL="0">
+              <a:buNone/>
+            </a:pPr>
+            <a:r>
+              <a:rPr lang="en-US" sz="2000" i="1" dirty="0">
+                <a:solidFill>
+                  <a:srgbClr val="212121"/>
+                </a:solidFill>
+                <a:latin typeface="Calibri" pitchFamily="34" charset="0"/>
+                <a:ea typeface="Calibri" pitchFamily="34" charset="-122"/>
+                <a:cs typeface="Calibri" pitchFamily="34" charset="-120"/>
+              </a:rPr>
+              <a:t>, and the proofs re-verify: the benign change survives.</a:t>
             </a:r>
             <a:endParaRPr lang="en-US" sz="2000" dirty="0"/>
           </a:p>
@@ -3971,13 +3999,13 @@
                 <a:ea typeface="Calibri" pitchFamily="34" charset="-122"/>
                 <a:cs typeface="Calibri" pitchFamily="34" charset="-120"/>
               </a:rPr>
-              <a:t>after </a:t>
+              <a:t>after codegen, but before verification</a:t>
             </a:r>
             <a:pPr indent="0" marL="0">
               <a:buNone/>
             </a:pPr>
             <a:r>
-              <a:rPr lang="en-US" sz="2000" b="1" i="1" dirty="0">
+              <a:rPr lang="en-US" sz="2000" i="1" dirty="0">
                 <a:solidFill>
                   <a:srgbClr val="212121"/>
                 </a:solidFill>
@@ -3985,63 +4013,7 @@
                 <a:ea typeface="Calibri" pitchFamily="34" charset="-122"/>
                 <a:cs typeface="Calibri" pitchFamily="34" charset="-120"/>
               </a:rPr>
-              <a:t>codegen</a:t>
-            </a:r>
-            <a:pPr indent="0" marL="0">
-              <a:buNone/>
-            </a:pPr>
-            <a:r>
-              <a:rPr lang="en-US" sz="2000" b="1" i="1" dirty="0">
-                <a:solidFill>
-                  <a:srgbClr val="212121"/>
-                </a:solidFill>
-                <a:latin typeface="Calibri" pitchFamily="34" charset="0"/>
-                <a:ea typeface="Calibri" pitchFamily="34" charset="-122"/>
-                <a:cs typeface="Calibri" pitchFamily="34" charset="-120"/>
-              </a:rPr>
-              <a:t>, but before verification</a:t>
-            </a:r>
-            <a:pPr indent="0" marL="0">
-              <a:buNone/>
-            </a:pPr>
-            <a:r>
-              <a:rPr lang="en-US" sz="2000" i="1" dirty="0">
-                <a:solidFill>
-                  <a:srgbClr val="212121"/>
-                </a:solidFill>
-                <a:latin typeface="Calibri" pitchFamily="34" charset="0"/>
-                <a:ea typeface="Calibri" pitchFamily="34" charset="-122"/>
-                <a:cs typeface="Calibri" pitchFamily="34" charset="-120"/>
-              </a:rPr>
-              <a:t>) and the code is inverted to match — </a:t>
-            </a:r>
-            <a:pPr indent="0" marL="0">
-              <a:buNone/>
-            </a:pPr>
-            <a:r>
-              <a:rPr lang="en-US" sz="2000" i="1" dirty="0">
-                <a:solidFill>
-                  <a:srgbClr val="212121"/>
-                </a:solidFill>
-                <a:latin typeface="Calibri" pitchFamily="34" charset="0"/>
-                <a:ea typeface="Calibri" pitchFamily="34" charset="-122"/>
-                <a:cs typeface="Calibri" pitchFamily="34" charset="-120"/>
-              </a:rPr>
-              <a:t>verus</a:t>
-            </a:r>
-            <a:pPr indent="0" marL="0">
-              <a:buNone/>
-            </a:pPr>
-            <a:r>
-              <a:rPr lang="en-US" sz="2000" i="1" dirty="0">
-                <a:solidFill>
-                  <a:srgbClr val="212121"/>
-                </a:solidFill>
-                <a:latin typeface="Calibri" pitchFamily="34" charset="0"/>
-                <a:ea typeface="Calibri" pitchFamily="34" charset="-122"/>
-                <a:cs typeface="Calibri" pitchFamily="34" charset="-120"/>
-              </a:rPr>
-              <a:t> checks pass.  Only the contract tier sees the drift; restoring the true contract exposes the Verus refusal the laundering hid.</a:t>
+              <a:t>) and the code is inverted to match — verus checks pass.  Contract repair (restoring the true Verus contract) exposes the verification failure.</a:t>
             </a:r>
             <a:endParaRPr lang="en-US" sz="2000" dirty="0"/>
           </a:p>
@@ -4590,7 +4562,35 @@
                 <a:ea typeface="Calibri" pitchFamily="34" charset="-122"/>
                 <a:cs typeface="Calibri" pitchFamily="34" charset="-120"/>
               </a:rPr>
-              <a:t>The ladder diagnoses by exhaustion — watch it repair the right artifact, and watch standing return only by re-measurement.</a:t>
+              <a:t>Implementation code (developer-owned) changes, breaking a Verus contract.  Blackboard loop diagnoses, repairs (simulated for demo), then </a:t>
+            </a:r>
+            <a:pPr indent="0" marL="0">
+              <a:buNone/>
+            </a:pPr>
+            <a:r>
+              <a:rPr lang="en-US" sz="2000" b="1" i="1" dirty="0">
+                <a:solidFill>
+                  <a:srgbClr val="212121"/>
+                </a:solidFill>
+                <a:latin typeface="Calibri" pitchFamily="34" charset="0"/>
+                <a:ea typeface="Calibri" pitchFamily="34" charset="-122"/>
+                <a:cs typeface="Calibri" pitchFamily="34" charset="-120"/>
+              </a:rPr>
+              <a:t>returns the artifact to good standing only by re-measurement</a:t>
+            </a:r>
+            <a:pPr indent="0" marL="0">
+              <a:buNone/>
+            </a:pPr>
+            <a:r>
+              <a:rPr lang="en-US" sz="2000" i="1" dirty="0">
+                <a:solidFill>
+                  <a:srgbClr val="212121"/>
+                </a:solidFill>
+                <a:latin typeface="Calibri" pitchFamily="34" charset="0"/>
+                <a:ea typeface="Calibri" pitchFamily="34" charset="-122"/>
+                <a:cs typeface="Calibri" pitchFamily="34" charset="-120"/>
+              </a:rPr>
+              <a:t>.</a:t>
             </a:r>
             <a:endParaRPr lang="en-US" sz="2000" dirty="0"/>
           </a:p>
@@ -5061,7 +5061,7 @@
                 <a:ea typeface="Cambria" pitchFamily="34" charset="-122"/>
                 <a:cs typeface="Cambria" pitchFamily="34" charset="-120"/>
               </a:rPr>
-              <a:t>Trust-anchor tamper: attribute then refuse</a:t>
+              <a:t>Baseline drift:  tampered evidence bundle, protocol, tooling</a:t>
             </a:r>
             <a:endParaRPr lang="en-US" sz="4000" dirty="0"/>
           </a:p>
@@ -5139,7 +5139,7 @@
                 <a:ea typeface="Calibri" pitchFamily="34" charset="-122"/>
                 <a:cs typeface="Calibri" pitchFamily="34" charset="-120"/>
               </a:rPr>
-              <a:t>The signed evidence, an installed golden, then the verifier itself — each tamper attributed, each refused. No knowledge source repairs a trust anchor.</a:t>
+              <a:t>The signed golden evidence bundle, an installed golden value in the protocol ASP ARGS, then the verifier itself — each tamper attributed, each refused by cryptographic checks.</a:t>
             </a:r>
             <a:endParaRPr lang="en-US" sz="2000" dirty="0"/>
           </a:p>
@@ -5610,7 +5610,7 @@
                 <a:ea typeface="Cambria" pitchFamily="34" charset="-122"/>
                 <a:cs typeface="Cambria" pitchFamily="34" charset="-120"/>
               </a:rPr>
-              <a:t>Verification soundness</a:t>
+              <a:t>Axiom drift:  semantic measurement detects axioms and unsound proof techniques</a:t>
             </a:r>
             <a:endParaRPr lang="en-US" sz="4000" dirty="0"/>
           </a:p>
@@ -5688,7 +5688,35 @@
                 <a:ea typeface="Calibri" pitchFamily="34" charset="-122"/>
                 <a:cs typeface="Calibri" pitchFamily="34" charset="-120"/>
               </a:rPr>
-              <a:t>Proofs verify, but measurement detects unsound axioms.</a:t>
+              <a:t>Proofs verify, but measurement detects </a:t>
+            </a:r>
+            <a:pPr indent="0" marL="0">
+              <a:buNone/>
+            </a:pPr>
+            <a:r>
+              <a:rPr lang="en-US" sz="2000" b="1" i="1" dirty="0">
+                <a:solidFill>
+                  <a:srgbClr val="212121"/>
+                </a:solidFill>
+                <a:latin typeface="Calibri" pitchFamily="34" charset="0"/>
+                <a:ea typeface="Calibri" pitchFamily="34" charset="-122"/>
+                <a:cs typeface="Calibri" pitchFamily="34" charset="-120"/>
+              </a:rPr>
+              <a:t>subtle ways that proof attempts cheat </a:t>
+            </a:r>
+            <a:pPr indent="0" marL="0">
+              <a:buNone/>
+            </a:pPr>
+            <a:r>
+              <a:rPr lang="en-US" sz="2000" i="1" dirty="0">
+                <a:solidFill>
+                  <a:srgbClr val="212121"/>
+                </a:solidFill>
+                <a:latin typeface="Calibri" pitchFamily="34" charset="0"/>
+                <a:ea typeface="Calibri" pitchFamily="34" charset="-122"/>
+                <a:cs typeface="Calibri" pitchFamily="34" charset="-120"/>
+              </a:rPr>
+              <a:t>to undermine verification soundness.</a:t>
             </a:r>
             <a:endParaRPr lang="en-US" sz="2000" dirty="0"/>
           </a:p>

--- a/docs/video_slides_draft.pptx
+++ b/docs/video_slides_draft.pptx
@@ -21,9 +21,10 @@
     <p:sldId id="269" r:id="rId15"/>
     <p:sldId id="270" r:id="rId16"/>
     <p:sldId id="271" r:id="rId17"/>
+    <p:sldId id="272" r:id="rId18"/>
   </p:sldIdLst>
   <p:notesMasterIdLst>
-    <p:notesMasterId r:id="rId18"/>
+    <p:notesMasterId r:id="rId19"/>
   </p:notesMasterIdLst>
   <p:sldSz cx="12192000" cy="6858000"/>
   <p:notesSz cx="6858000" cy="12192000"/>
@@ -1139,8 +1140,9 @@
           <a:p>
             <a:r>
               <a:rPr lang="en-US" dirty="0"/>
-              <a:t>Collection point for every reference in the deck - keep this slide current as sections are added (isolette slide carries the K-State + AR-08-32 citations inline; Copland/Verus/seL4 seeded here ahead of their sections).
-DOIs on record in docs/video_slide_drafts.md.</a:t>
+              <a:t>High-level breadth slide (section 3 opener). The point: the blackboard workflow is invariant; the pipeline swaps - two frontends (SysML, AADL), four prover/target stacks (Verus/Rust, Slang/JVM, Lean, Rocq), example systems beyond the isolette (landing-gear, temp-control), all real in the repo.
+Repair-strategy diversity deliberately CUT from this slide - it lands in the capstone section instead.
+Each row is a pipeline; varying chip counts are intentional (Lean/Rocq are prover-centric, no separate HAMR codegen chain).</a:t>
             </a:r>
             <a:endParaRPr lang="en-US" dirty="0"/>
           </a:p>
@@ -1164,6 +1166,95 @@
             <a:fld id="{F7021451-1387-4CA6-816F-3879F97B5CBC}" type="slidenum">
               <a:rPr lang="en-US"/>
               <a:t>16</a:t>
+            </a:fld>
+            <a:endParaRPr lang="en-US"/>
+          </a:p>
+        </p:txBody>
+      </p:sp>
+    </p:spTree>
+    <p:extLst>
+      <p:ext uri="{BB962C8B-B14F-4D97-AF65-F5344CB8AC3E}">
+        <p14:creationId xmlns:p14="http://schemas.microsoft.com/office/powerpoint/2010/main" val="1024086991"/>
+      </p:ext>
+    </p:extLst>
+  </p:cSld>
+  <p:clrMapOvr>
+    <a:masterClrMapping/>
+  </p:clrMapOvr>
+</p:notes>
+</file>
+
+<file path=ppt/notesSlides/notesSlide17.xml><?xml version="1.0" encoding="utf-8"?>
+<p:notes xmlns:a="http://schemas.openxmlformats.org/drawingml/2006/main" xmlns:r="http://schemas.openxmlformats.org/officeDocument/2006/relationships" xmlns:p="http://schemas.openxmlformats.org/presentationml/2006/main">
+  <p:cSld>
+    <p:spTree>
+      <p:nvGrpSpPr>
+        <p:cNvPr id="1" name=""/>
+        <p:cNvGrpSpPr/>
+        <p:nvPr/>
+      </p:nvGrpSpPr>
+      <p:grpSpPr>
+        <a:xfrm>
+          <a:off x="0" y="0"/>
+          <a:ext cx="0" cy="0"/>
+          <a:chOff x="0" y="0"/>
+          <a:chExt cx="0" cy="0"/>
+        </a:xfrm>
+      </p:grpSpPr>
+      <p:sp>
+        <p:nvSpPr>
+          <p:cNvPr id="2" name="Slide Image Placeholder 1"/>
+          <p:cNvSpPr>
+            <a:spLocks noGrp="1" noRot="1" noChangeAspect="1"/>
+          </p:cNvSpPr>
+          <p:nvPr>
+            <p:ph type="sldImg"/>
+          </p:nvPr>
+        </p:nvSpPr>
+        <p:spPr/>
+      </p:sp>
+      <p:sp>
+        <p:nvSpPr>
+          <p:cNvPr id="3" name="Notes Placeholder 2"/>
+          <p:cNvSpPr>
+            <a:spLocks noGrp="1"/>
+          </p:cNvSpPr>
+          <p:nvPr>
+            <p:ph type="body" idx="1"/>
+          </p:nvPr>
+        </p:nvSpPr>
+        <p:spPr/>
+        <p:txBody>
+          <a:bodyPr/>
+          <a:lstStyle/>
+          <a:p>
+            <a:r>
+              <a:rPr lang="en-US" dirty="0"/>
+              <a:t>Collection point for every reference in the deck - keep this slide current as sections are added (isolette slide carries the K-State + AR-08-32 citations inline; Copland/Verus/seL4 seeded here ahead of their sections).
+DOIs on record in docs/video_slide_drafts.md.</a:t>
+            </a:r>
+            <a:endParaRPr lang="en-US" dirty="0"/>
+          </a:p>
+        </p:txBody>
+      </p:sp>
+      <p:sp>
+        <p:nvSpPr>
+          <p:cNvPr id="4" name="Slide Number Placeholder 3"/>
+          <p:cNvSpPr>
+            <a:spLocks noGrp="1"/>
+          </p:cNvSpPr>
+          <p:nvPr>
+            <p:ph type="sldNum" sz="quarter" idx="10"/>
+          </p:nvPr>
+        </p:nvSpPr>
+        <p:spPr/>
+        <p:txBody>
+          <a:bodyPr/>
+          <a:lstStyle/>
+          <a:p>
+            <a:fld id="{F7021451-1387-4CA6-816F-3879F97B5CBC}" type="slidenum">
+              <a:rPr lang="en-US"/>
+              <a:t>17</a:t>
             </a:fld>
             <a:endParaRPr lang="en-US"/>
           </a:p>
@@ -5772,6 +5863,1283 @@
 <file path=ppt/slides/slide16.xml><?xml version="1.0" encoding="utf-8"?>
 <p:sld xmlns:a="http://schemas.openxmlformats.org/drawingml/2006/main" xmlns:r="http://schemas.openxmlformats.org/officeDocument/2006/relationships" xmlns:p="http://schemas.openxmlformats.org/presentationml/2006/main">
   <p:cSld name="Slide 16">
+    <p:bg>
+      <p:bgPr>
+        <a:solidFill>
+          <a:srgbClr val="FFFFFF"/>
+        </a:solidFill>
+      </p:bgPr>
+    </p:bg>
+    <p:spTree>
+      <p:nvGrpSpPr>
+        <p:cNvPr id="1" name=""/>
+        <p:cNvGrpSpPr/>
+        <p:nvPr/>
+      </p:nvGrpSpPr>
+      <p:grpSpPr>
+        <a:xfrm>
+          <a:off x="0" y="0"/>
+          <a:ext cx="0" cy="0"/>
+          <a:chOff x="0" y="0"/>
+          <a:chExt cx="0" cy="0"/>
+        </a:xfrm>
+      </p:grpSpPr>
+      <p:sp>
+        <p:nvSpPr>
+          <p:cNvPr id="2" name="Text 0"/>
+          <p:cNvSpPr/>
+          <p:nvPr/>
+        </p:nvSpPr>
+        <p:spPr>
+          <a:xfrm>
+            <a:off x="640080" y="365760"/>
+            <a:ext cx="10972800" cy="640080"/>
+          </a:xfrm>
+          <a:prstGeom prst="rect">
+            <a:avLst/>
+          </a:prstGeom>
+          <a:noFill/>
+          <a:ln/>
+        </p:spPr>
+        <p:txBody>
+          <a:bodyPr wrap="square" lIns="0" tIns="0" rIns="0" bIns="0" rtlCol="0" anchor="ctr"/>
+          <a:lstStyle/>
+          <a:p>
+            <a:pPr indent="0" marL="0">
+              <a:buNone/>
+            </a:pPr>
+            <a:r>
+              <a:rPr lang="en-US" sz="3400" b="1" dirty="0">
+                <a:solidFill>
+                  <a:srgbClr val="1E2761"/>
+                </a:solidFill>
+                <a:latin typeface="Cambria" pitchFamily="34" charset="0"/>
+                <a:ea typeface="Cambria" pitchFamily="34" charset="-122"/>
+                <a:cs typeface="Cambria" pitchFamily="34" charset="-120"/>
+              </a:rPr>
+              <a:t>One blackboard, many artifact pipelines</a:t>
+            </a:r>
+            <a:endParaRPr lang="en-US" sz="3400" dirty="0"/>
+          </a:p>
+        </p:txBody>
+      </p:sp>
+      <p:sp>
+        <p:nvSpPr>
+          <p:cNvPr id="3" name="Text 1"/>
+          <p:cNvSpPr/>
+          <p:nvPr/>
+        </p:nvSpPr>
+        <p:spPr>
+          <a:xfrm>
+            <a:off x="640080" y="1051560"/>
+            <a:ext cx="10972800" cy="457200"/>
+          </a:xfrm>
+          <a:prstGeom prst="rect">
+            <a:avLst/>
+          </a:prstGeom>
+          <a:noFill/>
+          <a:ln/>
+        </p:spPr>
+        <p:txBody>
+          <a:bodyPr wrap="square" lIns="0" tIns="0" rIns="0" bIns="0" rtlCol="0" anchor="ctr"/>
+          <a:lstStyle/>
+          <a:p>
+            <a:pPr indent="0" marL="0">
+              <a:buNone/>
+            </a:pPr>
+            <a:r>
+              <a:rPr lang="en-US" sz="1500" i="1" dirty="0">
+                <a:solidFill>
+                  <a:srgbClr val="212121"/>
+                </a:solidFill>
+                <a:latin typeface="Calibri" pitchFamily="34" charset="0"/>
+                <a:ea typeface="Calibri" pitchFamily="34" charset="-122"/>
+                <a:cs typeface="Calibri" pitchFamily="34" charset="-120"/>
+              </a:rPr>
+              <a:t>The blackboard, controller, repair ladder, and artifact classes don’t change — only the </a:t>
+            </a:r>
+            <a:pPr indent="0" marL="0">
+              <a:buNone/>
+            </a:pPr>
+            <a:r>
+              <a:rPr lang="en-US" sz="1500" b="1" i="1" dirty="0">
+                <a:solidFill>
+                  <a:srgbClr val="212121"/>
+                </a:solidFill>
+                <a:latin typeface="Calibri" pitchFamily="34" charset="0"/>
+                <a:ea typeface="Calibri" pitchFamily="34" charset="-122"/>
+                <a:cs typeface="Calibri" pitchFamily="34" charset="-120"/>
+              </a:rPr>
+              <a:t>pipeline around them does</a:t>
+            </a:r>
+            <a:pPr indent="0" marL="0">
+              <a:buNone/>
+            </a:pPr>
+            <a:r>
+              <a:rPr lang="en-US" sz="1500" i="1" dirty="0">
+                <a:solidFill>
+                  <a:srgbClr val="212121"/>
+                </a:solidFill>
+                <a:latin typeface="Calibri" pitchFamily="34" charset="0"/>
+                <a:ea typeface="Calibri" pitchFamily="34" charset="-122"/>
+                <a:cs typeface="Calibri" pitchFamily="34" charset="-120"/>
+              </a:rPr>
+              <a:t>: the modeling language, the prover, and the target runtime.</a:t>
+            </a:r>
+            <a:endParaRPr lang="en-US" sz="1500" dirty="0"/>
+          </a:p>
+        </p:txBody>
+      </p:sp>
+      <p:sp>
+        <p:nvSpPr>
+          <p:cNvPr id="4" name="Shape 2"/>
+          <p:cNvSpPr/>
+          <p:nvPr/>
+        </p:nvSpPr>
+        <p:spPr>
+          <a:xfrm>
+            <a:off x="640080" y="1920240"/>
+            <a:ext cx="1298448" cy="566928"/>
+          </a:xfrm>
+          <a:prstGeom prst="roundRect">
+            <a:avLst>
+              <a:gd name="adj" fmla="val 9677"/>
+            </a:avLst>
+          </a:prstGeom>
+          <a:solidFill>
+            <a:srgbClr val="1E2761"/>
+          </a:solidFill>
+          <a:ln/>
+        </p:spPr>
+      </p:sp>
+      <p:sp>
+        <p:nvSpPr>
+          <p:cNvPr id="5" name="Text 3"/>
+          <p:cNvSpPr/>
+          <p:nvPr/>
+        </p:nvSpPr>
+        <p:spPr>
+          <a:xfrm>
+            <a:off x="640080" y="1920240"/>
+            <a:ext cx="1298448" cy="566928"/>
+          </a:xfrm>
+          <a:prstGeom prst="rect">
+            <a:avLst/>
+          </a:prstGeom>
+          <a:noFill/>
+          <a:ln/>
+        </p:spPr>
+        <p:txBody>
+          <a:bodyPr wrap="square" lIns="254" tIns="254" rIns="254" bIns="254" rtlCol="0" anchor="ctr"/>
+          <a:lstStyle/>
+          <a:p>
+            <a:pPr algn="ctr" indent="0" marL="0">
+              <a:buNone/>
+            </a:pPr>
+            <a:r>
+              <a:rPr lang="en-US" sz="1300" b="1" dirty="0">
+                <a:solidFill>
+                  <a:srgbClr val="FFFFFF"/>
+                </a:solidFill>
+                <a:latin typeface="Calibri" pitchFamily="34" charset="0"/>
+                <a:ea typeface="Calibri" pitchFamily="34" charset="-122"/>
+                <a:cs typeface="Calibri" pitchFamily="34" charset="-120"/>
+              </a:rPr>
+              <a:t>SysML v2</a:t>
+            </a:r>
+            <a:endParaRPr lang="en-US" sz="1300" dirty="0"/>
+          </a:p>
+        </p:txBody>
+      </p:sp>
+      <p:sp>
+        <p:nvSpPr>
+          <p:cNvPr id="6" name="Text 4"/>
+          <p:cNvSpPr/>
+          <p:nvPr/>
+        </p:nvSpPr>
+        <p:spPr>
+          <a:xfrm>
+            <a:off x="1920240" y="1920240"/>
+            <a:ext cx="365760" cy="566928"/>
+          </a:xfrm>
+          <a:prstGeom prst="rect">
+            <a:avLst/>
+          </a:prstGeom>
+          <a:noFill/>
+          <a:ln/>
+        </p:spPr>
+        <p:txBody>
+          <a:bodyPr wrap="square" lIns="0" tIns="0" rIns="0" bIns="0" rtlCol="0" anchor="ctr"/>
+          <a:lstStyle/>
+          <a:p>
+            <a:pPr algn="ctr" indent="0" marL="0">
+              <a:buNone/>
+            </a:pPr>
+            <a:r>
+              <a:rPr lang="en-US" sz="1500" dirty="0">
+                <a:solidFill>
+                  <a:srgbClr val="5A6478"/>
+                </a:solidFill>
+                <a:latin typeface="Calibri" pitchFamily="34" charset="0"/>
+                <a:ea typeface="Calibri" pitchFamily="34" charset="-122"/>
+                <a:cs typeface="Calibri" pitchFamily="34" charset="-120"/>
+              </a:rPr>
+              <a:t>→</a:t>
+            </a:r>
+            <a:endParaRPr lang="en-US" sz="1500" dirty="0"/>
+          </a:p>
+        </p:txBody>
+      </p:sp>
+      <p:sp>
+        <p:nvSpPr>
+          <p:cNvPr id="7" name="Shape 5"/>
+          <p:cNvSpPr/>
+          <p:nvPr/>
+        </p:nvSpPr>
+        <p:spPr>
+          <a:xfrm>
+            <a:off x="2286000" y="1920240"/>
+            <a:ext cx="1234440" cy="566928"/>
+          </a:xfrm>
+          <a:prstGeom prst="roundRect">
+            <a:avLst>
+              <a:gd name="adj" fmla="val 9677"/>
+            </a:avLst>
+          </a:prstGeom>
+          <a:solidFill>
+            <a:srgbClr val="1E2761"/>
+          </a:solidFill>
+          <a:ln/>
+        </p:spPr>
+      </p:sp>
+      <p:sp>
+        <p:nvSpPr>
+          <p:cNvPr id="8" name="Text 6"/>
+          <p:cNvSpPr/>
+          <p:nvPr/>
+        </p:nvSpPr>
+        <p:spPr>
+          <a:xfrm>
+            <a:off x="2286000" y="1920240"/>
+            <a:ext cx="1234440" cy="566928"/>
+          </a:xfrm>
+          <a:prstGeom prst="rect">
+            <a:avLst/>
+          </a:prstGeom>
+          <a:noFill/>
+          <a:ln/>
+        </p:spPr>
+        <p:txBody>
+          <a:bodyPr wrap="square" lIns="254" tIns="254" rIns="254" bIns="254" rtlCol="0" anchor="ctr"/>
+          <a:lstStyle/>
+          <a:p>
+            <a:pPr algn="ctr" indent="0" marL="0">
+              <a:buNone/>
+            </a:pPr>
+            <a:r>
+              <a:rPr lang="en-US" sz="1300" b="1" dirty="0">
+                <a:solidFill>
+                  <a:srgbClr val="FFFFFF"/>
+                </a:solidFill>
+                <a:latin typeface="Calibri" pitchFamily="34" charset="0"/>
+                <a:ea typeface="Calibri" pitchFamily="34" charset="-122"/>
+                <a:cs typeface="Calibri" pitchFamily="34" charset="-120"/>
+              </a:rPr>
+              <a:t>HAMR</a:t>
+            </a:r>
+            <a:endParaRPr lang="en-US" sz="1300" dirty="0"/>
+          </a:p>
+        </p:txBody>
+      </p:sp>
+      <p:sp>
+        <p:nvSpPr>
+          <p:cNvPr id="9" name="Text 7"/>
+          <p:cNvSpPr/>
+          <p:nvPr/>
+        </p:nvSpPr>
+        <p:spPr>
+          <a:xfrm>
+            <a:off x="3502152" y="1920240"/>
+            <a:ext cx="365760" cy="566928"/>
+          </a:xfrm>
+          <a:prstGeom prst="rect">
+            <a:avLst/>
+          </a:prstGeom>
+          <a:noFill/>
+          <a:ln/>
+        </p:spPr>
+        <p:txBody>
+          <a:bodyPr wrap="square" lIns="0" tIns="0" rIns="0" bIns="0" rtlCol="0" anchor="ctr"/>
+          <a:lstStyle/>
+          <a:p>
+            <a:pPr algn="ctr" indent="0" marL="0">
+              <a:buNone/>
+            </a:pPr>
+            <a:r>
+              <a:rPr lang="en-US" sz="1500" dirty="0">
+                <a:solidFill>
+                  <a:srgbClr val="5A6478"/>
+                </a:solidFill>
+                <a:latin typeface="Calibri" pitchFamily="34" charset="0"/>
+                <a:ea typeface="Calibri" pitchFamily="34" charset="-122"/>
+                <a:cs typeface="Calibri" pitchFamily="34" charset="-120"/>
+              </a:rPr>
+              <a:t>→</a:t>
+            </a:r>
+            <a:endParaRPr lang="en-US" sz="1500" dirty="0"/>
+          </a:p>
+        </p:txBody>
+      </p:sp>
+      <p:sp>
+        <p:nvSpPr>
+          <p:cNvPr id="10" name="Shape 8"/>
+          <p:cNvSpPr/>
+          <p:nvPr/>
+        </p:nvSpPr>
+        <p:spPr>
+          <a:xfrm>
+            <a:off x="3867912" y="1920240"/>
+            <a:ext cx="1719072" cy="566928"/>
+          </a:xfrm>
+          <a:prstGeom prst="roundRect">
+            <a:avLst>
+              <a:gd name="adj" fmla="val 9677"/>
+            </a:avLst>
+          </a:prstGeom>
+          <a:solidFill>
+            <a:srgbClr val="1E2761"/>
+          </a:solidFill>
+          <a:ln/>
+        </p:spPr>
+      </p:sp>
+      <p:sp>
+        <p:nvSpPr>
+          <p:cNvPr id="11" name="Text 9"/>
+          <p:cNvSpPr/>
+          <p:nvPr/>
+        </p:nvSpPr>
+        <p:spPr>
+          <a:xfrm>
+            <a:off x="3867912" y="1920240"/>
+            <a:ext cx="1719072" cy="566928"/>
+          </a:xfrm>
+          <a:prstGeom prst="rect">
+            <a:avLst/>
+          </a:prstGeom>
+          <a:noFill/>
+          <a:ln/>
+        </p:spPr>
+        <p:txBody>
+          <a:bodyPr wrap="square" lIns="254" tIns="254" rIns="254" bIns="254" rtlCol="0" anchor="ctr"/>
+          <a:lstStyle/>
+          <a:p>
+            <a:pPr algn="ctr" indent="0" marL="0">
+              <a:buNone/>
+            </a:pPr>
+            <a:r>
+              <a:rPr lang="en-US" sz="1300" b="1" dirty="0">
+                <a:solidFill>
+                  <a:srgbClr val="FFFFFF"/>
+                </a:solidFill>
+                <a:latin typeface="Calibri" pitchFamily="34" charset="0"/>
+                <a:ea typeface="Calibri" pitchFamily="34" charset="-122"/>
+                <a:cs typeface="Calibri" pitchFamily="34" charset="-120"/>
+              </a:rPr>
+              <a:t>Verus · Rust</a:t>
+            </a:r>
+            <a:endParaRPr lang="en-US" sz="1300" dirty="0"/>
+          </a:p>
+        </p:txBody>
+      </p:sp>
+      <p:sp>
+        <p:nvSpPr>
+          <p:cNvPr id="12" name="Text 10"/>
+          <p:cNvSpPr/>
+          <p:nvPr/>
+        </p:nvSpPr>
+        <p:spPr>
+          <a:xfrm>
+            <a:off x="5568696" y="1920240"/>
+            <a:ext cx="365760" cy="566928"/>
+          </a:xfrm>
+          <a:prstGeom prst="rect">
+            <a:avLst/>
+          </a:prstGeom>
+          <a:noFill/>
+          <a:ln/>
+        </p:spPr>
+        <p:txBody>
+          <a:bodyPr wrap="square" lIns="0" tIns="0" rIns="0" bIns="0" rtlCol="0" anchor="ctr"/>
+          <a:lstStyle/>
+          <a:p>
+            <a:pPr algn="ctr" indent="0" marL="0">
+              <a:buNone/>
+            </a:pPr>
+            <a:r>
+              <a:rPr lang="en-US" sz="1500" dirty="0">
+                <a:solidFill>
+                  <a:srgbClr val="5A6478"/>
+                </a:solidFill>
+                <a:latin typeface="Calibri" pitchFamily="34" charset="0"/>
+                <a:ea typeface="Calibri" pitchFamily="34" charset="-122"/>
+                <a:cs typeface="Calibri" pitchFamily="34" charset="-120"/>
+              </a:rPr>
+              <a:t>→</a:t>
+            </a:r>
+            <a:endParaRPr lang="en-US" sz="1500" dirty="0"/>
+          </a:p>
+        </p:txBody>
+      </p:sp>
+      <p:sp>
+        <p:nvSpPr>
+          <p:cNvPr id="13" name="Shape 11"/>
+          <p:cNvSpPr/>
+          <p:nvPr/>
+        </p:nvSpPr>
+        <p:spPr>
+          <a:xfrm>
+            <a:off x="5934456" y="1920240"/>
+            <a:ext cx="2034540" cy="566928"/>
+          </a:xfrm>
+          <a:prstGeom prst="roundRect">
+            <a:avLst>
+              <a:gd name="adj" fmla="val 9677"/>
+            </a:avLst>
+          </a:prstGeom>
+          <a:solidFill>
+            <a:srgbClr val="1E2761"/>
+          </a:solidFill>
+          <a:ln/>
+        </p:spPr>
+      </p:sp>
+      <p:sp>
+        <p:nvSpPr>
+          <p:cNvPr id="14" name="Text 12"/>
+          <p:cNvSpPr/>
+          <p:nvPr/>
+        </p:nvSpPr>
+        <p:spPr>
+          <a:xfrm>
+            <a:off x="5934456" y="1920240"/>
+            <a:ext cx="2034540" cy="566928"/>
+          </a:xfrm>
+          <a:prstGeom prst="rect">
+            <a:avLst/>
+          </a:prstGeom>
+          <a:noFill/>
+          <a:ln/>
+        </p:spPr>
+        <p:txBody>
+          <a:bodyPr wrap="square" lIns="254" tIns="254" rIns="254" bIns="254" rtlCol="0" anchor="ctr"/>
+          <a:lstStyle/>
+          <a:p>
+            <a:pPr algn="ctr" indent="0" marL="0">
+              <a:buNone/>
+            </a:pPr>
+            <a:r>
+              <a:rPr lang="en-US" sz="1300" b="1" dirty="0">
+                <a:solidFill>
+                  <a:srgbClr val="FFFFFF"/>
+                </a:solidFill>
+                <a:latin typeface="Calibri" pitchFamily="34" charset="0"/>
+                <a:ea typeface="Calibri" pitchFamily="34" charset="-122"/>
+                <a:cs typeface="Calibri" pitchFamily="34" charset="-120"/>
+              </a:rPr>
+              <a:t>seL4 · Microkit</a:t>
+            </a:r>
+            <a:endParaRPr lang="en-US" sz="1300" dirty="0"/>
+          </a:p>
+        </p:txBody>
+      </p:sp>
+      <p:sp>
+        <p:nvSpPr>
+          <p:cNvPr id="15" name="Text 13"/>
+          <p:cNvSpPr/>
+          <p:nvPr/>
+        </p:nvSpPr>
+        <p:spPr>
+          <a:xfrm>
+            <a:off x="8362188" y="1920240"/>
+            <a:ext cx="2194560" cy="566928"/>
+          </a:xfrm>
+          <a:prstGeom prst="rect">
+            <a:avLst/>
+          </a:prstGeom>
+          <a:noFill/>
+          <a:ln/>
+        </p:spPr>
+        <p:txBody>
+          <a:bodyPr wrap="square" lIns="0" tIns="0" rIns="0" bIns="0" rtlCol="0" anchor="ctr"/>
+          <a:lstStyle/>
+          <a:p>
+            <a:pPr algn="l" indent="0" marL="0">
+              <a:buNone/>
+            </a:pPr>
+            <a:r>
+              <a:rPr lang="en-US" sz="1200" b="1" i="1" dirty="0">
+                <a:solidFill>
+                  <a:srgbClr val="1E2761"/>
+                </a:solidFill>
+                <a:latin typeface="Calibri" pitchFamily="34" charset="0"/>
+                <a:ea typeface="Calibri" pitchFamily="34" charset="-122"/>
+                <a:cs typeface="Calibri" pitchFamily="34" charset="-120"/>
+              </a:rPr>
+              <a:t>◀ demo</a:t>
+            </a:r>
+            <a:endParaRPr lang="en-US" sz="1200" dirty="0"/>
+          </a:p>
+        </p:txBody>
+      </p:sp>
+      <p:sp>
+        <p:nvSpPr>
+          <p:cNvPr id="16" name="Text 14"/>
+          <p:cNvSpPr/>
+          <p:nvPr/>
+        </p:nvSpPr>
+        <p:spPr>
+          <a:xfrm>
+            <a:off x="658368" y="2468880"/>
+            <a:ext cx="10515600" cy="274320"/>
+          </a:xfrm>
+          <a:prstGeom prst="rect">
+            <a:avLst/>
+          </a:prstGeom>
+          <a:noFill/>
+          <a:ln/>
+        </p:spPr>
+        <p:txBody>
+          <a:bodyPr wrap="square" lIns="0" tIns="0" rIns="0" bIns="0" rtlCol="0" anchor="ctr"/>
+          <a:lstStyle/>
+          <a:p>
+            <a:pPr algn="l" indent="0" marL="0">
+              <a:buNone/>
+            </a:pPr>
+            <a:r>
+              <a:rPr lang="en-US" sz="1100" i="1" dirty="0">
+                <a:solidFill>
+                  <a:srgbClr val="5A6478"/>
+                </a:solidFill>
+                <a:latin typeface="Calibri" pitchFamily="34" charset="0"/>
+                <a:ea typeface="Calibri" pitchFamily="34" charset="-122"/>
+                <a:cs typeface="Calibri" pitchFamily="34" charset="-120"/>
+              </a:rPr>
+              <a:t>the isolette — the demo you just saw</a:t>
+            </a:r>
+            <a:endParaRPr lang="en-US" sz="1100" dirty="0"/>
+          </a:p>
+        </p:txBody>
+      </p:sp>
+      <p:sp>
+        <p:nvSpPr>
+          <p:cNvPr id="17" name="Shape 15"/>
+          <p:cNvSpPr/>
+          <p:nvPr/>
+        </p:nvSpPr>
+        <p:spPr>
+          <a:xfrm>
+            <a:off x="640080" y="3063240"/>
+            <a:ext cx="1234440" cy="566928"/>
+          </a:xfrm>
+          <a:prstGeom prst="roundRect">
+            <a:avLst>
+              <a:gd name="adj" fmla="val 9677"/>
+            </a:avLst>
+          </a:prstGeom>
+          <a:solidFill>
+            <a:srgbClr val="3A4A8C"/>
+          </a:solidFill>
+          <a:ln/>
+        </p:spPr>
+      </p:sp>
+      <p:sp>
+        <p:nvSpPr>
+          <p:cNvPr id="18" name="Text 16"/>
+          <p:cNvSpPr/>
+          <p:nvPr/>
+        </p:nvSpPr>
+        <p:spPr>
+          <a:xfrm>
+            <a:off x="640080" y="3063240"/>
+            <a:ext cx="1234440" cy="566928"/>
+          </a:xfrm>
+          <a:prstGeom prst="rect">
+            <a:avLst/>
+          </a:prstGeom>
+          <a:noFill/>
+          <a:ln/>
+        </p:spPr>
+        <p:txBody>
+          <a:bodyPr wrap="square" lIns="254" tIns="254" rIns="254" bIns="254" rtlCol="0" anchor="ctr"/>
+          <a:lstStyle/>
+          <a:p>
+            <a:pPr algn="ctr" indent="0" marL="0">
+              <a:buNone/>
+            </a:pPr>
+            <a:r>
+              <a:rPr lang="en-US" sz="1300" b="1" dirty="0">
+                <a:solidFill>
+                  <a:srgbClr val="FFFFFF"/>
+                </a:solidFill>
+                <a:latin typeface="Calibri" pitchFamily="34" charset="0"/>
+                <a:ea typeface="Calibri" pitchFamily="34" charset="-122"/>
+                <a:cs typeface="Calibri" pitchFamily="34" charset="-120"/>
+              </a:rPr>
+              <a:t>AADL</a:t>
+            </a:r>
+            <a:endParaRPr lang="en-US" sz="1300" dirty="0"/>
+          </a:p>
+        </p:txBody>
+      </p:sp>
+      <p:sp>
+        <p:nvSpPr>
+          <p:cNvPr id="19" name="Text 17"/>
+          <p:cNvSpPr/>
+          <p:nvPr/>
+        </p:nvSpPr>
+        <p:spPr>
+          <a:xfrm>
+            <a:off x="1856232" y="3063240"/>
+            <a:ext cx="365760" cy="566928"/>
+          </a:xfrm>
+          <a:prstGeom prst="rect">
+            <a:avLst/>
+          </a:prstGeom>
+          <a:noFill/>
+          <a:ln/>
+        </p:spPr>
+        <p:txBody>
+          <a:bodyPr wrap="square" lIns="0" tIns="0" rIns="0" bIns="0" rtlCol="0" anchor="ctr"/>
+          <a:lstStyle/>
+          <a:p>
+            <a:pPr algn="ctr" indent="0" marL="0">
+              <a:buNone/>
+            </a:pPr>
+            <a:r>
+              <a:rPr lang="en-US" sz="1500" dirty="0">
+                <a:solidFill>
+                  <a:srgbClr val="5A6478"/>
+                </a:solidFill>
+                <a:latin typeface="Calibri" pitchFamily="34" charset="0"/>
+                <a:ea typeface="Calibri" pitchFamily="34" charset="-122"/>
+                <a:cs typeface="Calibri" pitchFamily="34" charset="-120"/>
+              </a:rPr>
+              <a:t>→</a:t>
+            </a:r>
+            <a:endParaRPr lang="en-US" sz="1500" dirty="0"/>
+          </a:p>
+        </p:txBody>
+      </p:sp>
+      <p:sp>
+        <p:nvSpPr>
+          <p:cNvPr id="20" name="Shape 18"/>
+          <p:cNvSpPr/>
+          <p:nvPr/>
+        </p:nvSpPr>
+        <p:spPr>
+          <a:xfrm>
+            <a:off x="2221992" y="3063240"/>
+            <a:ext cx="1234440" cy="566928"/>
+          </a:xfrm>
+          <a:prstGeom prst="roundRect">
+            <a:avLst>
+              <a:gd name="adj" fmla="val 9677"/>
+            </a:avLst>
+          </a:prstGeom>
+          <a:solidFill>
+            <a:srgbClr val="3A4A8C"/>
+          </a:solidFill>
+          <a:ln/>
+        </p:spPr>
+      </p:sp>
+      <p:sp>
+        <p:nvSpPr>
+          <p:cNvPr id="21" name="Text 19"/>
+          <p:cNvSpPr/>
+          <p:nvPr/>
+        </p:nvSpPr>
+        <p:spPr>
+          <a:xfrm>
+            <a:off x="2221992" y="3063240"/>
+            <a:ext cx="1234440" cy="566928"/>
+          </a:xfrm>
+          <a:prstGeom prst="rect">
+            <a:avLst/>
+          </a:prstGeom>
+          <a:noFill/>
+          <a:ln/>
+        </p:spPr>
+        <p:txBody>
+          <a:bodyPr wrap="square" lIns="254" tIns="254" rIns="254" bIns="254" rtlCol="0" anchor="ctr"/>
+          <a:lstStyle/>
+          <a:p>
+            <a:pPr algn="ctr" indent="0" marL="0">
+              <a:buNone/>
+            </a:pPr>
+            <a:r>
+              <a:rPr lang="en-US" sz="1300" b="1" dirty="0">
+                <a:solidFill>
+                  <a:srgbClr val="FFFFFF"/>
+                </a:solidFill>
+                <a:latin typeface="Calibri" pitchFamily="34" charset="0"/>
+                <a:ea typeface="Calibri" pitchFamily="34" charset="-122"/>
+                <a:cs typeface="Calibri" pitchFamily="34" charset="-120"/>
+              </a:rPr>
+              <a:t>HAMR</a:t>
+            </a:r>
+            <a:endParaRPr lang="en-US" sz="1300" dirty="0"/>
+          </a:p>
+        </p:txBody>
+      </p:sp>
+      <p:sp>
+        <p:nvSpPr>
+          <p:cNvPr id="22" name="Text 20"/>
+          <p:cNvSpPr/>
+          <p:nvPr/>
+        </p:nvSpPr>
+        <p:spPr>
+          <a:xfrm>
+            <a:off x="3438144" y="3063240"/>
+            <a:ext cx="365760" cy="566928"/>
+          </a:xfrm>
+          <a:prstGeom prst="rect">
+            <a:avLst/>
+          </a:prstGeom>
+          <a:noFill/>
+          <a:ln/>
+        </p:spPr>
+        <p:txBody>
+          <a:bodyPr wrap="square" lIns="0" tIns="0" rIns="0" bIns="0" rtlCol="0" anchor="ctr"/>
+          <a:lstStyle/>
+          <a:p>
+            <a:pPr algn="ctr" indent="0" marL="0">
+              <a:buNone/>
+            </a:pPr>
+            <a:r>
+              <a:rPr lang="en-US" sz="1500" dirty="0">
+                <a:solidFill>
+                  <a:srgbClr val="5A6478"/>
+                </a:solidFill>
+                <a:latin typeface="Calibri" pitchFamily="34" charset="0"/>
+                <a:ea typeface="Calibri" pitchFamily="34" charset="-122"/>
+                <a:cs typeface="Calibri" pitchFamily="34" charset="-120"/>
+              </a:rPr>
+              <a:t>→</a:t>
+            </a:r>
+            <a:endParaRPr lang="en-US" sz="1500" dirty="0"/>
+          </a:p>
+        </p:txBody>
+      </p:sp>
+      <p:sp>
+        <p:nvSpPr>
+          <p:cNvPr id="23" name="Shape 21"/>
+          <p:cNvSpPr/>
+          <p:nvPr/>
+        </p:nvSpPr>
+        <p:spPr>
+          <a:xfrm>
+            <a:off x="3803904" y="3063240"/>
+            <a:ext cx="1613916" cy="566928"/>
+          </a:xfrm>
+          <a:prstGeom prst="roundRect">
+            <a:avLst>
+              <a:gd name="adj" fmla="val 9677"/>
+            </a:avLst>
+          </a:prstGeom>
+          <a:solidFill>
+            <a:srgbClr val="3A4A8C"/>
+          </a:solidFill>
+          <a:ln/>
+        </p:spPr>
+      </p:sp>
+      <p:sp>
+        <p:nvSpPr>
+          <p:cNvPr id="24" name="Text 22"/>
+          <p:cNvSpPr/>
+          <p:nvPr/>
+        </p:nvSpPr>
+        <p:spPr>
+          <a:xfrm>
+            <a:off x="3803904" y="3063240"/>
+            <a:ext cx="1613916" cy="566928"/>
+          </a:xfrm>
+          <a:prstGeom prst="rect">
+            <a:avLst/>
+          </a:prstGeom>
+          <a:noFill/>
+          <a:ln/>
+        </p:spPr>
+        <p:txBody>
+          <a:bodyPr wrap="square" lIns="254" tIns="254" rIns="254" bIns="254" rtlCol="0" anchor="ctr"/>
+          <a:lstStyle/>
+          <a:p>
+            <a:pPr algn="ctr" indent="0" marL="0">
+              <a:buNone/>
+            </a:pPr>
+            <a:r>
+              <a:rPr lang="en-US" sz="1300" b="1" dirty="0">
+                <a:solidFill>
+                  <a:srgbClr val="FFFFFF"/>
+                </a:solidFill>
+                <a:latin typeface="Calibri" pitchFamily="34" charset="0"/>
+                <a:ea typeface="Calibri" pitchFamily="34" charset="-122"/>
+                <a:cs typeface="Calibri" pitchFamily="34" charset="-120"/>
+              </a:rPr>
+              <a:t>Slang · JVM</a:t>
+            </a:r>
+            <a:endParaRPr lang="en-US" sz="1300" dirty="0"/>
+          </a:p>
+        </p:txBody>
+      </p:sp>
+      <p:sp>
+        <p:nvSpPr>
+          <p:cNvPr id="25" name="Text 23"/>
+          <p:cNvSpPr/>
+          <p:nvPr/>
+        </p:nvSpPr>
+        <p:spPr>
+          <a:xfrm>
+            <a:off x="658368" y="3611880"/>
+            <a:ext cx="10515600" cy="274320"/>
+          </a:xfrm>
+          <a:prstGeom prst="rect">
+            <a:avLst/>
+          </a:prstGeom>
+          <a:noFill/>
+          <a:ln/>
+        </p:spPr>
+        <p:txBody>
+          <a:bodyPr wrap="square" lIns="0" tIns="0" rIns="0" bIns="0" rtlCol="0" anchor="ctr"/>
+          <a:lstStyle/>
+          <a:p>
+            <a:pPr algn="l" indent="0" marL="0">
+              <a:buNone/>
+            </a:pPr>
+            <a:r>
+              <a:rPr lang="en-US" sz="1100" i="1" dirty="0">
+                <a:solidFill>
+                  <a:srgbClr val="5A6478"/>
+                </a:solidFill>
+                <a:latin typeface="Calibri" pitchFamily="34" charset="0"/>
+                <a:ea typeface="Calibri" pitchFamily="34" charset="-122"/>
+                <a:cs typeface="Calibri" pitchFamily="34" charset="-120"/>
+              </a:rPr>
+              <a:t>a different modeling language and target runtime, same artifact classes and Copland protocols  (temp-control)</a:t>
+            </a:r>
+            <a:endParaRPr lang="en-US" sz="1100" dirty="0"/>
+          </a:p>
+        </p:txBody>
+      </p:sp>
+      <p:sp>
+        <p:nvSpPr>
+          <p:cNvPr id="26" name="Shape 24"/>
+          <p:cNvSpPr/>
+          <p:nvPr/>
+        </p:nvSpPr>
+        <p:spPr>
+          <a:xfrm>
+            <a:off x="640080" y="4206240"/>
+            <a:ext cx="1234440" cy="566928"/>
+          </a:xfrm>
+          <a:prstGeom prst="roundRect">
+            <a:avLst>
+              <a:gd name="adj" fmla="val 9677"/>
+            </a:avLst>
+          </a:prstGeom>
+          <a:solidFill>
+            <a:srgbClr val="3A4A8C"/>
+          </a:solidFill>
+          <a:ln/>
+        </p:spPr>
+      </p:sp>
+      <p:sp>
+        <p:nvSpPr>
+          <p:cNvPr id="27" name="Text 25"/>
+          <p:cNvSpPr/>
+          <p:nvPr/>
+        </p:nvSpPr>
+        <p:spPr>
+          <a:xfrm>
+            <a:off x="640080" y="4206240"/>
+            <a:ext cx="1234440" cy="566928"/>
+          </a:xfrm>
+          <a:prstGeom prst="rect">
+            <a:avLst/>
+          </a:prstGeom>
+          <a:noFill/>
+          <a:ln/>
+        </p:spPr>
+        <p:txBody>
+          <a:bodyPr wrap="square" lIns="254" tIns="254" rIns="254" bIns="254" rtlCol="0" anchor="ctr"/>
+          <a:lstStyle/>
+          <a:p>
+            <a:pPr algn="ctr" indent="0" marL="0">
+              <a:buNone/>
+            </a:pPr>
+            <a:r>
+              <a:rPr lang="en-US" sz="1300" b="1" dirty="0">
+                <a:solidFill>
+                  <a:srgbClr val="FFFFFF"/>
+                </a:solidFill>
+                <a:latin typeface="Calibri" pitchFamily="34" charset="0"/>
+                <a:ea typeface="Calibri" pitchFamily="34" charset="-122"/>
+                <a:cs typeface="Calibri" pitchFamily="34" charset="-120"/>
+              </a:rPr>
+              <a:t>Lean</a:t>
+            </a:r>
+            <a:endParaRPr lang="en-US" sz="1300" dirty="0"/>
+          </a:p>
+        </p:txBody>
+      </p:sp>
+      <p:sp>
+        <p:nvSpPr>
+          <p:cNvPr id="28" name="Text 26"/>
+          <p:cNvSpPr/>
+          <p:nvPr/>
+        </p:nvSpPr>
+        <p:spPr>
+          <a:xfrm>
+            <a:off x="1856232" y="4206240"/>
+            <a:ext cx="365760" cy="566928"/>
+          </a:xfrm>
+          <a:prstGeom prst="rect">
+            <a:avLst/>
+          </a:prstGeom>
+          <a:noFill/>
+          <a:ln/>
+        </p:spPr>
+        <p:txBody>
+          <a:bodyPr wrap="square" lIns="0" tIns="0" rIns="0" bIns="0" rtlCol="0" anchor="ctr"/>
+          <a:lstStyle/>
+          <a:p>
+            <a:pPr algn="ctr" indent="0" marL="0">
+              <a:buNone/>
+            </a:pPr>
+            <a:r>
+              <a:rPr lang="en-US" sz="1500" dirty="0">
+                <a:solidFill>
+                  <a:srgbClr val="5A6478"/>
+                </a:solidFill>
+                <a:latin typeface="Calibri" pitchFamily="34" charset="0"/>
+                <a:ea typeface="Calibri" pitchFamily="34" charset="-122"/>
+                <a:cs typeface="Calibri" pitchFamily="34" charset="-120"/>
+              </a:rPr>
+              <a:t>→</a:t>
+            </a:r>
+            <a:endParaRPr lang="en-US" sz="1500" dirty="0"/>
+          </a:p>
+        </p:txBody>
+      </p:sp>
+      <p:sp>
+        <p:nvSpPr>
+          <p:cNvPr id="29" name="Shape 27"/>
+          <p:cNvSpPr/>
+          <p:nvPr/>
+        </p:nvSpPr>
+        <p:spPr>
+          <a:xfrm>
+            <a:off x="2221992" y="4206240"/>
+            <a:ext cx="4873752" cy="566928"/>
+          </a:xfrm>
+          <a:prstGeom prst="roundRect">
+            <a:avLst>
+              <a:gd name="adj" fmla="val 9677"/>
+            </a:avLst>
+          </a:prstGeom>
+          <a:solidFill>
+            <a:srgbClr val="3A4A8C"/>
+          </a:solidFill>
+          <a:ln/>
+        </p:spPr>
+      </p:sp>
+      <p:sp>
+        <p:nvSpPr>
+          <p:cNvPr id="30" name="Text 28"/>
+          <p:cNvSpPr/>
+          <p:nvPr/>
+        </p:nvSpPr>
+        <p:spPr>
+          <a:xfrm>
+            <a:off x="2221992" y="4206240"/>
+            <a:ext cx="4873752" cy="566928"/>
+          </a:xfrm>
+          <a:prstGeom prst="rect">
+            <a:avLst/>
+          </a:prstGeom>
+          <a:noFill/>
+          <a:ln/>
+        </p:spPr>
+        <p:txBody>
+          <a:bodyPr wrap="square" lIns="254" tIns="254" rIns="254" bIns="254" rtlCol="0" anchor="ctr"/>
+          <a:lstStyle/>
+          <a:p>
+            <a:pPr algn="ctr" indent="0" marL="0">
+              <a:buNone/>
+            </a:pPr>
+            <a:r>
+              <a:rPr lang="en-US" sz="1300" b="1" dirty="0">
+                <a:solidFill>
+                  <a:srgbClr val="FFFFFF"/>
+                </a:solidFill>
+                <a:latin typeface="Calibri" pitchFamily="34" charset="0"/>
+                <a:ea typeface="Calibri" pitchFamily="34" charset="-122"/>
+                <a:cs typeface="Calibri" pitchFamily="34" charset="-120"/>
+              </a:rPr>
+              <a:t>blessed statements + workflow-owned proofs</a:t>
+            </a:r>
+            <a:endParaRPr lang="en-US" sz="1300" dirty="0"/>
+          </a:p>
+        </p:txBody>
+      </p:sp>
+      <p:sp>
+        <p:nvSpPr>
+          <p:cNvPr id="31" name="Text 29"/>
+          <p:cNvSpPr/>
+          <p:nvPr/>
+        </p:nvSpPr>
+        <p:spPr>
+          <a:xfrm>
+            <a:off x="658368" y="4754880"/>
+            <a:ext cx="10515600" cy="274320"/>
+          </a:xfrm>
+          <a:prstGeom prst="rect">
+            <a:avLst/>
+          </a:prstGeom>
+          <a:noFill/>
+          <a:ln/>
+        </p:spPr>
+        <p:txBody>
+          <a:bodyPr wrap="square" lIns="0" tIns="0" rIns="0" bIns="0" rtlCol="0" anchor="ctr"/>
+          <a:lstStyle/>
+          <a:p>
+            <a:pPr algn="l" indent="0" marL="0">
+              <a:buNone/>
+            </a:pPr>
+            <a:r>
+              <a:rPr lang="en-US" sz="1100" i="1" dirty="0">
+                <a:solidFill>
+                  <a:srgbClr val="5A6478"/>
+                </a:solidFill>
+                <a:latin typeface="Calibri" pitchFamily="34" charset="0"/>
+                <a:ea typeface="Calibri" pitchFamily="34" charset="-122"/>
+                <a:cs typeface="Calibri" pitchFamily="34" charset="-120"/>
+              </a:rPr>
+              <a:t>the goal-directed encoding: attestation enforces one invariant while synthesis iterates  (landing-gear, temp-control)</a:t>
+            </a:r>
+            <a:endParaRPr lang="en-US" sz="1100" dirty="0"/>
+          </a:p>
+        </p:txBody>
+      </p:sp>
+      <p:sp>
+        <p:nvSpPr>
+          <p:cNvPr id="32" name="Shape 30"/>
+          <p:cNvSpPr/>
+          <p:nvPr/>
+        </p:nvSpPr>
+        <p:spPr>
+          <a:xfrm>
+            <a:off x="640080" y="5349240"/>
+            <a:ext cx="1234440" cy="566928"/>
+          </a:xfrm>
+          <a:prstGeom prst="roundRect">
+            <a:avLst>
+              <a:gd name="adj" fmla="val 9677"/>
+            </a:avLst>
+          </a:prstGeom>
+          <a:solidFill>
+            <a:srgbClr val="3A4A8C"/>
+          </a:solidFill>
+          <a:ln/>
+        </p:spPr>
+      </p:sp>
+      <p:sp>
+        <p:nvSpPr>
+          <p:cNvPr id="33" name="Text 31"/>
+          <p:cNvSpPr/>
+          <p:nvPr/>
+        </p:nvSpPr>
+        <p:spPr>
+          <a:xfrm>
+            <a:off x="640080" y="5349240"/>
+            <a:ext cx="1234440" cy="566928"/>
+          </a:xfrm>
+          <a:prstGeom prst="rect">
+            <a:avLst/>
+          </a:prstGeom>
+          <a:noFill/>
+          <a:ln/>
+        </p:spPr>
+        <p:txBody>
+          <a:bodyPr wrap="square" lIns="254" tIns="254" rIns="254" bIns="254" rtlCol="0" anchor="ctr"/>
+          <a:lstStyle/>
+          <a:p>
+            <a:pPr algn="ctr" indent="0" marL="0">
+              <a:buNone/>
+            </a:pPr>
+            <a:r>
+              <a:rPr lang="en-US" sz="1300" b="1" dirty="0">
+                <a:solidFill>
+                  <a:srgbClr val="FFFFFF"/>
+                </a:solidFill>
+                <a:latin typeface="Calibri" pitchFamily="34" charset="0"/>
+                <a:ea typeface="Calibri" pitchFamily="34" charset="-122"/>
+                <a:cs typeface="Calibri" pitchFamily="34" charset="-120"/>
+              </a:rPr>
+              <a:t>Rocq</a:t>
+            </a:r>
+            <a:endParaRPr lang="en-US" sz="1300" dirty="0"/>
+          </a:p>
+        </p:txBody>
+      </p:sp>
+      <p:sp>
+        <p:nvSpPr>
+          <p:cNvPr id="34" name="Text 32"/>
+          <p:cNvSpPr/>
+          <p:nvPr/>
+        </p:nvSpPr>
+        <p:spPr>
+          <a:xfrm>
+            <a:off x="1856232" y="5349240"/>
+            <a:ext cx="365760" cy="566928"/>
+          </a:xfrm>
+          <a:prstGeom prst="rect">
+            <a:avLst/>
+          </a:prstGeom>
+          <a:noFill/>
+          <a:ln/>
+        </p:spPr>
+        <p:txBody>
+          <a:bodyPr wrap="square" lIns="0" tIns="0" rIns="0" bIns="0" rtlCol="0" anchor="ctr"/>
+          <a:lstStyle/>
+          <a:p>
+            <a:pPr algn="ctr" indent="0" marL="0">
+              <a:buNone/>
+            </a:pPr>
+            <a:r>
+              <a:rPr lang="en-US" sz="1500" dirty="0">
+                <a:solidFill>
+                  <a:srgbClr val="5A6478"/>
+                </a:solidFill>
+                <a:latin typeface="Calibri" pitchFamily="34" charset="0"/>
+                <a:ea typeface="Calibri" pitchFamily="34" charset="-122"/>
+                <a:cs typeface="Calibri" pitchFamily="34" charset="-120"/>
+              </a:rPr>
+              <a:t>→</a:t>
+            </a:r>
+            <a:endParaRPr lang="en-US" sz="1500" dirty="0"/>
+          </a:p>
+        </p:txBody>
+      </p:sp>
+      <p:sp>
+        <p:nvSpPr>
+          <p:cNvPr id="35" name="Shape 33"/>
+          <p:cNvSpPr/>
+          <p:nvPr/>
+        </p:nvSpPr>
+        <p:spPr>
+          <a:xfrm>
+            <a:off x="2221992" y="5349240"/>
+            <a:ext cx="4873752" cy="566928"/>
+          </a:xfrm>
+          <a:prstGeom prst="roundRect">
+            <a:avLst>
+              <a:gd name="adj" fmla="val 9677"/>
+            </a:avLst>
+          </a:prstGeom>
+          <a:solidFill>
+            <a:srgbClr val="3A4A8C"/>
+          </a:solidFill>
+          <a:ln/>
+        </p:spPr>
+      </p:sp>
+      <p:sp>
+        <p:nvSpPr>
+          <p:cNvPr id="36" name="Text 34"/>
+          <p:cNvSpPr/>
+          <p:nvPr/>
+        </p:nvSpPr>
+        <p:spPr>
+          <a:xfrm>
+            <a:off x="2221992" y="5349240"/>
+            <a:ext cx="4873752" cy="566928"/>
+          </a:xfrm>
+          <a:prstGeom prst="rect">
+            <a:avLst/>
+          </a:prstGeom>
+          <a:noFill/>
+          <a:ln/>
+        </p:spPr>
+        <p:txBody>
+          <a:bodyPr wrap="square" lIns="254" tIns="254" rIns="254" bIns="254" rtlCol="0" anchor="ctr"/>
+          <a:lstStyle/>
+          <a:p>
+            <a:pPr algn="ctr" indent="0" marL="0">
+              <a:buNone/>
+            </a:pPr>
+            <a:r>
+              <a:rPr lang="en-US" sz="1300" b="1" dirty="0">
+                <a:solidFill>
+                  <a:srgbClr val="FFFFFF"/>
+                </a:solidFill>
+                <a:latin typeface="Calibri" pitchFamily="34" charset="0"/>
+                <a:ea typeface="Calibri" pitchFamily="34" charset="-122"/>
+                <a:cs typeface="Calibri" pitchFamily="34" charset="-120"/>
+              </a:rPr>
+              <a:t>proofs + synthesis (tactic portfolio, LLM)</a:t>
+            </a:r>
+            <a:endParaRPr lang="en-US" sz="1300" dirty="0"/>
+          </a:p>
+        </p:txBody>
+      </p:sp>
+      <p:sp>
+        <p:nvSpPr>
+          <p:cNvPr id="37" name="Text 35"/>
+          <p:cNvSpPr/>
+          <p:nvPr/>
+        </p:nvSpPr>
+        <p:spPr>
+          <a:xfrm>
+            <a:off x="658368" y="5897880"/>
+            <a:ext cx="10515600" cy="274320"/>
+          </a:xfrm>
+          <a:prstGeom prst="rect">
+            <a:avLst/>
+          </a:prstGeom>
+          <a:noFill/>
+          <a:ln/>
+        </p:spPr>
+        <p:txBody>
+          <a:bodyPr wrap="square" lIns="0" tIns="0" rIns="0" bIns="0" rtlCol="0" anchor="ctr"/>
+          <a:lstStyle/>
+          <a:p>
+            <a:pPr algn="l" indent="0" marL="0">
+              <a:buNone/>
+            </a:pPr>
+            <a:r>
+              <a:rPr lang="en-US" sz="1100" i="1" dirty="0">
+                <a:solidFill>
+                  <a:srgbClr val="5A6478"/>
+                </a:solidFill>
+                <a:latin typeface="Calibri" pitchFamily="34" charset="0"/>
+                <a:ea typeface="Calibri" pitchFamily="34" charset="-122"/>
+                <a:cs typeface="Calibri" pitchFamily="34" charset="-120"/>
+              </a:rPr>
+              <a:t>proof synthesis as a repair strategy  (temp-control)</a:t>
+            </a:r>
+            <a:endParaRPr lang="en-US" sz="1100" dirty="0"/>
+          </a:p>
+        </p:txBody>
+      </p:sp>
+    </p:spTree>
+  </p:cSld>
+  <p:clrMapOvr>
+    <a:masterClrMapping/>
+  </p:clrMapOvr>
+</p:sld>
+</file>
+
+<file path=ppt/slides/slide17.xml><?xml version="1.0" encoding="utf-8"?>
+<p:sld xmlns:a="http://schemas.openxmlformats.org/drawingml/2006/main" xmlns:r="http://schemas.openxmlformats.org/officeDocument/2006/relationships" xmlns:p="http://schemas.openxmlformats.org/presentationml/2006/main">
+  <p:cSld name="Slide 17">
     <p:bg>
       <p:bgPr>
         <a:solidFill>

--- a/docs/video_slides_draft.pptx
+++ b/docs/video_slides_draft.pptx
@@ -1140,9 +1140,7 @@
           <a:p>
             <a:r>
               <a:rPr lang="en-US" dirty="0"/>
-              <a:t>High-level breadth slide (section 3 opener). The point: the blackboard workflow is invariant; the pipeline swaps - two frontends (SysML, AADL), four prover/target stacks (Verus/Rust, Slang/JVM, Lean, Rocq), example systems beyond the isolette (landing-gear, temp-control), all real in the repo.
-Repair-strategy diversity deliberately CUT from this slide - it lands in the capstone section instead.
-Each row is a pipeline; varying chip counts are intentional (Lean/Rocq are prover-centric, no separate HAMR codegen chain).</a:t>
+              <a:t>High-level breadth slide (section 3 opener) - card grid, per user edits 2026-08-30. Four artifact pipelines: the isolette (SysML-&gt;HAMR-&gt;Rust/Verus, the demo, highlighted), AADL-&gt;HAMR-&gt;Slang/Logika (temp-control), standalone Rust/Verus (find-max-verus; AutoVerus + KU Dogtreat repair experiments), and the interactive theorem provers Lean &amp; Rocq (blessed statements, tactic/LLM repair). Title = the artifact pipeline; caption = example system(s). Repair-strategy breadth lands per-card where it defines the ecosystem.</a:t>
             </a:r>
             <a:endParaRPr lang="en-US" dirty="0"/>
           </a:p>
@@ -5931,7 +5929,7 @@
         </p:nvSpPr>
         <p:spPr>
           <a:xfrm>
-            <a:off x="640080" y="1051560"/>
+            <a:off x="640080" y="1024128"/>
             <a:ext cx="10972800" cy="457200"/>
           </a:xfrm>
           <a:prstGeom prst="rect">
@@ -5984,7 +5982,7 @@
                 <a:ea typeface="Calibri" pitchFamily="34" charset="-122"/>
                 <a:cs typeface="Calibri" pitchFamily="34" charset="-120"/>
               </a:rPr>
-              <a:t>: the modeling language, the prover, and the target runtime.</a:t>
+              <a:t>: the modeling language, the prover, the target runtime, and the attestation primitives.</a:t>
             </a:r>
             <a:endParaRPr lang="en-US" sz="1500" dirty="0"/>
           </a:p>
@@ -5998,12 +5996,12 @@
         </p:nvSpPr>
         <p:spPr>
           <a:xfrm>
-            <a:off x="640080" y="1920240"/>
-            <a:ext cx="1298448" cy="566928"/>
+            <a:off x="640080" y="1645920"/>
+            <a:ext cx="5349240" cy="2148840"/>
           </a:xfrm>
           <a:prstGeom prst="roundRect">
             <a:avLst>
-              <a:gd name="adj" fmla="val 9677"/>
+              <a:gd name="adj" fmla="val 2553"/>
             </a:avLst>
           </a:prstGeom>
           <a:solidFill>
@@ -6020,24 +6018,24 @@
         </p:nvSpPr>
         <p:spPr>
           <a:xfrm>
-            <a:off x="640080" y="1920240"/>
-            <a:ext cx="1298448" cy="566928"/>
-          </a:xfrm>
-          <a:prstGeom prst="rect">
-            <a:avLst/>
-          </a:prstGeom>
-          <a:noFill/>
-          <a:ln/>
-        </p:spPr>
-        <p:txBody>
-          <a:bodyPr wrap="square" lIns="254" tIns="254" rIns="254" bIns="254" rtlCol="0" anchor="ctr"/>
-          <a:lstStyle/>
-          <a:p>
-            <a:pPr algn="ctr" indent="0" marL="0">
-              <a:buNone/>
-            </a:pPr>
-            <a:r>
-              <a:rPr lang="en-US" sz="1300" b="1" dirty="0">
+            <a:off x="868680" y="1755648"/>
+            <a:ext cx="4892040" cy="329184"/>
+          </a:xfrm>
+          <a:prstGeom prst="rect">
+            <a:avLst/>
+          </a:prstGeom>
+          <a:noFill/>
+          <a:ln/>
+        </p:spPr>
+        <p:txBody>
+          <a:bodyPr wrap="square" lIns="0" tIns="0" rIns="0" bIns="0" rtlCol="0" anchor="ctr"/>
+          <a:lstStyle/>
+          <a:p>
+            <a:pPr algn="l" indent="0" marL="0">
+              <a:buNone/>
+            </a:pPr>
+            <a:r>
+              <a:rPr lang="en-US" sz="1550" b="1" dirty="0">
                 <a:solidFill>
                   <a:srgbClr val="FFFFFF"/>
                 </a:solidFill>
@@ -6045,9 +6043,9 @@
                 <a:ea typeface="Calibri" pitchFamily="34" charset="-122"/>
                 <a:cs typeface="Calibri" pitchFamily="34" charset="-120"/>
               </a:rPr>
-              <a:t>SysML v2</a:t>
-            </a:r>
-            <a:endParaRPr lang="en-US" sz="1300" dirty="0"/>
+              <a:t>SysML v2 → HAMR → Rust / Verus</a:t>
+            </a:r>
+            <a:endParaRPr lang="en-US" sz="1550" dirty="0"/>
           </a:p>
         </p:txBody>
       </p:sp>
@@ -6059,8 +6057,8 @@
         </p:nvSpPr>
         <p:spPr>
           <a:xfrm>
-            <a:off x="1920240" y="1920240"/>
-            <a:ext cx="365760" cy="566928"/>
+            <a:off x="877824" y="2103120"/>
+            <a:ext cx="4892040" cy="256032"/>
           </a:xfrm>
           <a:prstGeom prst="rect">
             <a:avLst/>
@@ -6072,84 +6070,149 @@
           <a:bodyPr wrap="square" lIns="0" tIns="0" rIns="0" bIns="0" rtlCol="0" anchor="ctr"/>
           <a:lstStyle/>
           <a:p>
-            <a:pPr algn="ctr" indent="0" marL="0">
-              <a:buNone/>
-            </a:pPr>
-            <a:r>
-              <a:rPr lang="en-US" sz="1500" dirty="0">
-                <a:solidFill>
-                  <a:srgbClr val="5A6478"/>
-                </a:solidFill>
-                <a:latin typeface="Calibri" pitchFamily="34" charset="0"/>
-                <a:ea typeface="Calibri" pitchFamily="34" charset="-122"/>
-                <a:cs typeface="Calibri" pitchFamily="34" charset="-120"/>
-              </a:rPr>
-              <a:t>→</a:t>
-            </a:r>
-            <a:endParaRPr lang="en-US" sz="1500" dirty="0"/>
-          </a:p>
-        </p:txBody>
-      </p:sp>
-      <p:sp>
-        <p:nvSpPr>
-          <p:cNvPr id="7" name="Shape 5"/>
-          <p:cNvSpPr/>
-          <p:nvPr/>
-        </p:nvSpPr>
-        <p:spPr>
-          <a:xfrm>
-            <a:off x="2286000" y="1920240"/>
-            <a:ext cx="1234440" cy="566928"/>
+            <a:pPr algn="l" indent="0" marL="0">
+              <a:buNone/>
+            </a:pPr>
+            <a:r>
+              <a:rPr lang="en-US" sz="1050" i="1" dirty="0">
+                <a:solidFill>
+                  <a:srgbClr val="CADCFC"/>
+                </a:solidFill>
+                <a:latin typeface="Calibri" pitchFamily="34" charset="0"/>
+                <a:ea typeface="Calibri" pitchFamily="34" charset="-122"/>
+                <a:cs typeface="Calibri" pitchFamily="34" charset="-120"/>
+              </a:rPr>
+              <a:t>isolette</a:t>
+            </a:r>
+            <a:pPr algn="l" indent="0" marL="0">
+              <a:buNone/>
+            </a:pPr>
+            <a:r>
+              <a:rPr lang="en-US" sz="1050" b="1" i="1" dirty="0">
+                <a:solidFill>
+                  <a:srgbClr val="CADCFC"/>
+                </a:solidFill>
+                <a:latin typeface="Calibri" pitchFamily="34" charset="0"/>
+                <a:ea typeface="Calibri" pitchFamily="34" charset="-122"/>
+                <a:cs typeface="Calibri" pitchFamily="34" charset="-120"/>
+              </a:rPr>
+              <a:t>   ◀ the demo</a:t>
+            </a:r>
+            <a:endParaRPr lang="en-US" sz="1050" dirty="0"/>
+          </a:p>
+        </p:txBody>
+      </p:sp>
+      <p:sp>
+        <p:nvSpPr>
+          <p:cNvPr id="7" name="Text 5"/>
+          <p:cNvSpPr/>
+          <p:nvPr/>
+        </p:nvSpPr>
+        <p:spPr>
+          <a:xfrm>
+            <a:off x="914400" y="2423160"/>
+            <a:ext cx="4846320" cy="1252728"/>
+          </a:xfrm>
+          <a:prstGeom prst="rect">
+            <a:avLst/>
+          </a:prstGeom>
+          <a:noFill/>
+          <a:ln/>
+        </p:spPr>
+        <p:txBody>
+          <a:bodyPr wrap="square" lIns="0" tIns="0" rIns="0" bIns="0" rtlCol="0" anchor="t"/>
+          <a:lstStyle/>
+          <a:p>
+            <a:pPr algn="l" marL="342900" indent="-342900">
+              <a:spcAft>
+                <a:spcPts val="400"/>
+              </a:spcAft>
+              <a:buSzPct val="100000"/>
+              <a:buChar char="•"/>
+            </a:pPr>
+            <a:r>
+              <a:rPr lang="en-US" sz="1200" dirty="0">
+                <a:solidFill>
+                  <a:srgbClr val="CADCFC"/>
+                </a:solidFill>
+                <a:latin typeface="Calibri" pitchFamily="34" charset="0"/>
+                <a:ea typeface="Calibri" pitchFamily="34" charset="-122"/>
+                <a:cs typeface="Calibri" pitchFamily="34" charset="-120"/>
+              </a:rPr>
+              <a:t>SysMLv2 GUMBO component contracts</a:t>
+            </a:r>
+            <a:endParaRPr lang="en-US" sz="1200" dirty="0"/>
+          </a:p>
+          <a:p>
+            <a:pPr algn="l" marL="342900" indent="-342900">
+              <a:spcAft>
+                <a:spcPts val="400"/>
+              </a:spcAft>
+              <a:buSzPct val="100000"/>
+              <a:buChar char="•"/>
+            </a:pPr>
+            <a:r>
+              <a:rPr lang="en-US" sz="1200" dirty="0">
+                <a:solidFill>
+                  <a:srgbClr val="CADCFC"/>
+                </a:solidFill>
+                <a:latin typeface="Calibri" pitchFamily="34" charset="0"/>
+                <a:ea typeface="Calibri" pitchFamily="34" charset="-122"/>
+                <a:cs typeface="Calibri" pitchFamily="34" charset="-120"/>
+              </a:rPr>
+              <a:t>seL4 / Microkit runtime target</a:t>
+            </a:r>
+            <a:endParaRPr lang="en-US" sz="1200" dirty="0"/>
+          </a:p>
+          <a:p>
+            <a:pPr algn="l" marL="342900" indent="-342900">
+              <a:spcAft>
+                <a:spcPts val="400"/>
+              </a:spcAft>
+              <a:buSzPct val="100000"/>
+              <a:buChar char="•"/>
+            </a:pPr>
+            <a:r>
+              <a:rPr lang="en-US" sz="1200" dirty="0">
+                <a:solidFill>
+                  <a:srgbClr val="CADCFC"/>
+                </a:solidFill>
+                <a:latin typeface="Calibri" pitchFamily="34" charset="0"/>
+                <a:ea typeface="Calibri" pitchFamily="34" charset="-122"/>
+                <a:cs typeface="Calibri" pitchFamily="34" charset="-120"/>
+              </a:rPr>
+              <a:t>Every artifact class measured — the full demo</a:t>
+            </a:r>
+            <a:endParaRPr lang="en-US" sz="1200" dirty="0"/>
+          </a:p>
+        </p:txBody>
+      </p:sp>
+      <p:sp>
+        <p:nvSpPr>
+          <p:cNvPr id="8" name="Shape 6"/>
+          <p:cNvSpPr/>
+          <p:nvPr/>
+        </p:nvSpPr>
+        <p:spPr>
+          <a:xfrm>
+            <a:off x="6263640" y="1645920"/>
+            <a:ext cx="5349240" cy="2148840"/>
           </a:xfrm>
           <a:prstGeom prst="roundRect">
             <a:avLst>
-              <a:gd name="adj" fmla="val 9677"/>
+              <a:gd name="adj" fmla="val 2553"/>
             </a:avLst>
           </a:prstGeom>
           <a:solidFill>
-            <a:srgbClr val="1E2761"/>
+            <a:srgbClr val="F2F4F8"/>
           </a:solidFill>
-          <a:ln/>
-        </p:spPr>
-      </p:sp>
-      <p:sp>
-        <p:nvSpPr>
-          <p:cNvPr id="8" name="Text 6"/>
-          <p:cNvSpPr/>
-          <p:nvPr/>
-        </p:nvSpPr>
-        <p:spPr>
-          <a:xfrm>
-            <a:off x="2286000" y="1920240"/>
-            <a:ext cx="1234440" cy="566928"/>
-          </a:xfrm>
-          <a:prstGeom prst="rect">
-            <a:avLst/>
-          </a:prstGeom>
-          <a:noFill/>
-          <a:ln/>
-        </p:spPr>
-        <p:txBody>
-          <a:bodyPr wrap="square" lIns="254" tIns="254" rIns="254" bIns="254" rtlCol="0" anchor="ctr"/>
-          <a:lstStyle/>
-          <a:p>
-            <a:pPr algn="ctr" indent="0" marL="0">
-              <a:buNone/>
-            </a:pPr>
-            <a:r>
-              <a:rPr lang="en-US" sz="1300" b="1" dirty="0">
-                <a:solidFill>
-                  <a:srgbClr val="FFFFFF"/>
-                </a:solidFill>
-                <a:latin typeface="Calibri" pitchFamily="34" charset="0"/>
-                <a:ea typeface="Calibri" pitchFamily="34" charset="-122"/>
-                <a:cs typeface="Calibri" pitchFamily="34" charset="-120"/>
-              </a:rPr>
-              <a:t>HAMR</a:t>
-            </a:r>
-            <a:endParaRPr lang="en-US" sz="1300" dirty="0"/>
-          </a:p>
-        </p:txBody>
+          <a:ln w="12700">
+            <a:solidFill>
+              <a:srgbClr val="CADCFC"/>
+            </a:solidFill>
+            <a:prstDash val="solid"/>
+          </a:ln>
+        </p:spPr>
       </p:sp>
       <p:sp>
         <p:nvSpPr>
@@ -6159,8 +6222,8 @@
         </p:nvSpPr>
         <p:spPr>
           <a:xfrm>
-            <a:off x="3502152" y="1920240"/>
-            <a:ext cx="365760" cy="566928"/>
+            <a:off x="6492240" y="1755648"/>
+            <a:ext cx="4892040" cy="329184"/>
           </a:xfrm>
           <a:prstGeom prst="rect">
             <a:avLst/>
@@ -6172,11 +6235,50 @@
           <a:bodyPr wrap="square" lIns="0" tIns="0" rIns="0" bIns="0" rtlCol="0" anchor="ctr"/>
           <a:lstStyle/>
           <a:p>
-            <a:pPr algn="ctr" indent="0" marL="0">
-              <a:buNone/>
-            </a:pPr>
-            <a:r>
-              <a:rPr lang="en-US" sz="1500" dirty="0">
+            <a:pPr algn="l" indent="0" marL="0">
+              <a:buNone/>
+            </a:pPr>
+            <a:r>
+              <a:rPr lang="en-US" sz="1550" b="1" dirty="0">
+                <a:solidFill>
+                  <a:srgbClr val="1E2761"/>
+                </a:solidFill>
+                <a:latin typeface="Calibri" pitchFamily="34" charset="0"/>
+                <a:ea typeface="Calibri" pitchFamily="34" charset="-122"/>
+                <a:cs typeface="Calibri" pitchFamily="34" charset="-120"/>
+              </a:rPr>
+              <a:t>AADL → HAMR → Slang / Logika</a:t>
+            </a:r>
+            <a:endParaRPr lang="en-US" sz="1550" dirty="0"/>
+          </a:p>
+        </p:txBody>
+      </p:sp>
+      <p:sp>
+        <p:nvSpPr>
+          <p:cNvPr id="10" name="Text 8"/>
+          <p:cNvSpPr/>
+          <p:nvPr/>
+        </p:nvSpPr>
+        <p:spPr>
+          <a:xfrm>
+            <a:off x="6501384" y="2103120"/>
+            <a:ext cx="4892040" cy="256032"/>
+          </a:xfrm>
+          <a:prstGeom prst="rect">
+            <a:avLst/>
+          </a:prstGeom>
+          <a:noFill/>
+          <a:ln/>
+        </p:spPr>
+        <p:txBody>
+          <a:bodyPr wrap="square" lIns="0" tIns="0" rIns="0" bIns="0" rtlCol="0" anchor="ctr"/>
+          <a:lstStyle/>
+          <a:p>
+            <a:pPr algn="l" indent="0" marL="0">
+              <a:buNone/>
+            </a:pPr>
+            <a:r>
+              <a:rPr lang="en-US" sz="1050" i="1" dirty="0">
                 <a:solidFill>
                   <a:srgbClr val="5A6478"/>
                 </a:solidFill>
@@ -6184,83 +6286,134 @@
                 <a:ea typeface="Calibri" pitchFamily="34" charset="-122"/>
                 <a:cs typeface="Calibri" pitchFamily="34" charset="-120"/>
               </a:rPr>
-              <a:t>→</a:t>
-            </a:r>
-            <a:endParaRPr lang="en-US" sz="1500" dirty="0"/>
-          </a:p>
-        </p:txBody>
-      </p:sp>
-      <p:sp>
-        <p:nvSpPr>
-          <p:cNvPr id="10" name="Shape 8"/>
-          <p:cNvSpPr/>
-          <p:nvPr/>
-        </p:nvSpPr>
-        <p:spPr>
-          <a:xfrm>
-            <a:off x="3867912" y="1920240"/>
-            <a:ext cx="1719072" cy="566928"/>
+              <a:t>temp-control</a:t>
+            </a:r>
+            <a:endParaRPr lang="en-US" sz="1050" dirty="0"/>
+          </a:p>
+        </p:txBody>
+      </p:sp>
+      <p:sp>
+        <p:nvSpPr>
+          <p:cNvPr id="11" name="Text 9"/>
+          <p:cNvSpPr/>
+          <p:nvPr/>
+        </p:nvSpPr>
+        <p:spPr>
+          <a:xfrm>
+            <a:off x="6537960" y="2423160"/>
+            <a:ext cx="4846320" cy="1252728"/>
+          </a:xfrm>
+          <a:prstGeom prst="rect">
+            <a:avLst/>
+          </a:prstGeom>
+          <a:noFill/>
+          <a:ln/>
+        </p:spPr>
+        <p:txBody>
+          <a:bodyPr wrap="square" lIns="0" tIns="0" rIns="0" bIns="0" rtlCol="0" anchor="t"/>
+          <a:lstStyle/>
+          <a:p>
+            <a:pPr algn="l" marL="342900" indent="-342900">
+              <a:spcAft>
+                <a:spcPts val="400"/>
+              </a:spcAft>
+              <a:buSzPct val="100000"/>
+              <a:buChar char="•"/>
+            </a:pPr>
+            <a:r>
+              <a:rPr lang="en-US" sz="1200" dirty="0">
+                <a:solidFill>
+                  <a:srgbClr val="212121"/>
+                </a:solidFill>
+                <a:latin typeface="Calibri" pitchFamily="34" charset="0"/>
+                <a:ea typeface="Calibri" pitchFamily="34" charset="-122"/>
+                <a:cs typeface="Calibri" pitchFamily="34" charset="-120"/>
+              </a:rPr>
+              <a:t>AADL GUMBO component contracts</a:t>
+            </a:r>
+            <a:endParaRPr lang="en-US" sz="1200" dirty="0"/>
+          </a:p>
+          <a:p>
+            <a:pPr algn="l" marL="342900" indent="-342900">
+              <a:spcAft>
+                <a:spcPts val="400"/>
+              </a:spcAft>
+              <a:buSzPct val="100000"/>
+              <a:buChar char="•"/>
+            </a:pPr>
+            <a:r>
+              <a:rPr lang="en-US" sz="1200" dirty="0">
+                <a:solidFill>
+                  <a:srgbClr val="212121"/>
+                </a:solidFill>
+                <a:latin typeface="Calibri" pitchFamily="34" charset="0"/>
+                <a:ea typeface="Calibri" pitchFamily="34" charset="-122"/>
+                <a:cs typeface="Calibri" pitchFamily="34" charset="-120"/>
+              </a:rPr>
+              <a:t>JVM runtime target</a:t>
+            </a:r>
+            <a:endParaRPr lang="en-US" sz="1200" dirty="0"/>
+          </a:p>
+          <a:p>
+            <a:pPr algn="l" marL="342900" indent="-342900">
+              <a:spcAft>
+                <a:spcPts val="400"/>
+              </a:spcAft>
+              <a:buSzPct val="100000"/>
+              <a:buChar char="•"/>
+            </a:pPr>
+            <a:r>
+              <a:rPr lang="en-US" sz="1200" dirty="0">
+                <a:solidFill>
+                  <a:srgbClr val="212121"/>
+                </a:solidFill>
+                <a:latin typeface="Calibri" pitchFamily="34" charset="0"/>
+                <a:ea typeface="Calibri" pitchFamily="34" charset="-122"/>
+                <a:cs typeface="Calibri" pitchFamily="34" charset="-120"/>
+              </a:rPr>
+              <a:t>Same blackboard, similar Copland protocols</a:t>
+            </a:r>
+            <a:endParaRPr lang="en-US" sz="1200" dirty="0"/>
+          </a:p>
+        </p:txBody>
+      </p:sp>
+      <p:sp>
+        <p:nvSpPr>
+          <p:cNvPr id="12" name="Shape 10"/>
+          <p:cNvSpPr/>
+          <p:nvPr/>
+        </p:nvSpPr>
+        <p:spPr>
+          <a:xfrm>
+            <a:off x="640080" y="4069080"/>
+            <a:ext cx="5349240" cy="2148840"/>
           </a:xfrm>
           <a:prstGeom prst="roundRect">
             <a:avLst>
-              <a:gd name="adj" fmla="val 9677"/>
+              <a:gd name="adj" fmla="val 2553"/>
             </a:avLst>
           </a:prstGeom>
           <a:solidFill>
-            <a:srgbClr val="1E2761"/>
+            <a:srgbClr val="F2F4F8"/>
           </a:solidFill>
-          <a:ln/>
-        </p:spPr>
-      </p:sp>
-      <p:sp>
-        <p:nvSpPr>
-          <p:cNvPr id="11" name="Text 9"/>
-          <p:cNvSpPr/>
-          <p:nvPr/>
-        </p:nvSpPr>
-        <p:spPr>
-          <a:xfrm>
-            <a:off x="3867912" y="1920240"/>
-            <a:ext cx="1719072" cy="566928"/>
-          </a:xfrm>
-          <a:prstGeom prst="rect">
-            <a:avLst/>
-          </a:prstGeom>
-          <a:noFill/>
-          <a:ln/>
-        </p:spPr>
-        <p:txBody>
-          <a:bodyPr wrap="square" lIns="254" tIns="254" rIns="254" bIns="254" rtlCol="0" anchor="ctr"/>
-          <a:lstStyle/>
-          <a:p>
-            <a:pPr algn="ctr" indent="0" marL="0">
-              <a:buNone/>
-            </a:pPr>
-            <a:r>
-              <a:rPr lang="en-US" sz="1300" b="1" dirty="0">
-                <a:solidFill>
-                  <a:srgbClr val="FFFFFF"/>
-                </a:solidFill>
-                <a:latin typeface="Calibri" pitchFamily="34" charset="0"/>
-                <a:ea typeface="Calibri" pitchFamily="34" charset="-122"/>
-                <a:cs typeface="Calibri" pitchFamily="34" charset="-120"/>
-              </a:rPr>
-              <a:t>Verus · Rust</a:t>
-            </a:r>
-            <a:endParaRPr lang="en-US" sz="1300" dirty="0"/>
-          </a:p>
-        </p:txBody>
-      </p:sp>
-      <p:sp>
-        <p:nvSpPr>
-          <p:cNvPr id="12" name="Text 10"/>
-          <p:cNvSpPr/>
-          <p:nvPr/>
-        </p:nvSpPr>
-        <p:spPr>
-          <a:xfrm>
-            <a:off x="5568696" y="1920240"/>
-            <a:ext cx="365760" cy="566928"/>
+          <a:ln w="12700">
+            <a:solidFill>
+              <a:srgbClr val="CADCFC"/>
+            </a:solidFill>
+            <a:prstDash val="solid"/>
+          </a:ln>
+        </p:spPr>
+      </p:sp>
+      <p:sp>
+        <p:nvSpPr>
+          <p:cNvPr id="13" name="Text 11"/>
+          <p:cNvSpPr/>
+          <p:nvPr/>
+        </p:nvSpPr>
+        <p:spPr>
+          <a:xfrm>
+            <a:off x="868680" y="4178808"/>
+            <a:ext cx="4892040" cy="329184"/>
           </a:xfrm>
           <a:prstGeom prst="rect">
             <a:avLst/>
@@ -6272,11 +6425,50 @@
           <a:bodyPr wrap="square" lIns="0" tIns="0" rIns="0" bIns="0" rtlCol="0" anchor="ctr"/>
           <a:lstStyle/>
           <a:p>
-            <a:pPr algn="ctr" indent="0" marL="0">
-              <a:buNone/>
-            </a:pPr>
-            <a:r>
-              <a:rPr lang="en-US" sz="1500" dirty="0">
+            <a:pPr algn="l" indent="0" marL="0">
+              <a:buNone/>
+            </a:pPr>
+            <a:r>
+              <a:rPr lang="en-US" sz="1550" b="1" dirty="0">
+                <a:solidFill>
+                  <a:srgbClr val="1E2761"/>
+                </a:solidFill>
+                <a:latin typeface="Calibri" pitchFamily="34" charset="0"/>
+                <a:ea typeface="Calibri" pitchFamily="34" charset="-122"/>
+                <a:cs typeface="Calibri" pitchFamily="34" charset="-120"/>
+              </a:rPr>
+              <a:t>Standalone Rust / Verus</a:t>
+            </a:r>
+            <a:endParaRPr lang="en-US" sz="1550" dirty="0"/>
+          </a:p>
+        </p:txBody>
+      </p:sp>
+      <p:sp>
+        <p:nvSpPr>
+          <p:cNvPr id="14" name="Text 12"/>
+          <p:cNvSpPr/>
+          <p:nvPr/>
+        </p:nvSpPr>
+        <p:spPr>
+          <a:xfrm>
+            <a:off x="877824" y="4526280"/>
+            <a:ext cx="4892040" cy="256032"/>
+          </a:xfrm>
+          <a:prstGeom prst="rect">
+            <a:avLst/>
+          </a:prstGeom>
+          <a:noFill/>
+          <a:ln/>
+        </p:spPr>
+        <p:txBody>
+          <a:bodyPr wrap="square" lIns="0" tIns="0" rIns="0" bIns="0" rtlCol="0" anchor="ctr"/>
+          <a:lstStyle/>
+          <a:p>
+            <a:pPr algn="l" indent="0" marL="0">
+              <a:buNone/>
+            </a:pPr>
+            <a:r>
+              <a:rPr lang="en-US" sz="1050" i="1" dirty="0">
                 <a:solidFill>
                   <a:srgbClr val="5A6478"/>
                 </a:solidFill>
@@ -6284,83 +6476,134 @@
                 <a:ea typeface="Calibri" pitchFamily="34" charset="-122"/>
                 <a:cs typeface="Calibri" pitchFamily="34" charset="-120"/>
               </a:rPr>
-              <a:t>→</a:t>
-            </a:r>
-            <a:endParaRPr lang="en-US" sz="1500" dirty="0"/>
-          </a:p>
-        </p:txBody>
-      </p:sp>
-      <p:sp>
-        <p:nvSpPr>
-          <p:cNvPr id="13" name="Shape 11"/>
-          <p:cNvSpPr/>
-          <p:nvPr/>
-        </p:nvSpPr>
-        <p:spPr>
-          <a:xfrm>
-            <a:off x="5934456" y="1920240"/>
-            <a:ext cx="2034540" cy="566928"/>
+              <a:t>find-max-verus</a:t>
+            </a:r>
+            <a:endParaRPr lang="en-US" sz="1050" dirty="0"/>
+          </a:p>
+        </p:txBody>
+      </p:sp>
+      <p:sp>
+        <p:nvSpPr>
+          <p:cNvPr id="15" name="Text 13"/>
+          <p:cNvSpPr/>
+          <p:nvPr/>
+        </p:nvSpPr>
+        <p:spPr>
+          <a:xfrm>
+            <a:off x="914400" y="4846320"/>
+            <a:ext cx="4846320" cy="1252728"/>
+          </a:xfrm>
+          <a:prstGeom prst="rect">
+            <a:avLst/>
+          </a:prstGeom>
+          <a:noFill/>
+          <a:ln/>
+        </p:spPr>
+        <p:txBody>
+          <a:bodyPr wrap="square" lIns="0" tIns="0" rIns="0" bIns="0" rtlCol="0" anchor="t"/>
+          <a:lstStyle/>
+          <a:p>
+            <a:pPr algn="l" marL="342900" indent="-342900">
+              <a:spcAft>
+                <a:spcPts val="400"/>
+              </a:spcAft>
+              <a:buSzPct val="100000"/>
+              <a:buChar char="•"/>
+            </a:pPr>
+            <a:r>
+              <a:rPr lang="en-US" sz="1200" dirty="0">
+                <a:solidFill>
+                  <a:srgbClr val="212121"/>
+                </a:solidFill>
+                <a:latin typeface="Calibri" pitchFamily="34" charset="0"/>
+                <a:ea typeface="Calibri" pitchFamily="34" charset="-122"/>
+                <a:cs typeface="Calibri" pitchFamily="34" charset="-120"/>
+              </a:rPr>
+              <a:t>Contracts + proofs written directly in Verus</a:t>
+            </a:r>
+            <a:endParaRPr lang="en-US" sz="1200" dirty="0"/>
+          </a:p>
+          <a:p>
+            <a:pPr algn="l" marL="342900" indent="-342900">
+              <a:spcAft>
+                <a:spcPts val="400"/>
+              </a:spcAft>
+              <a:buSzPct val="100000"/>
+              <a:buChar char="•"/>
+            </a:pPr>
+            <a:r>
+              <a:rPr lang="en-US" sz="1200" dirty="0">
+                <a:solidFill>
+                  <a:srgbClr val="212121"/>
+                </a:solidFill>
+                <a:latin typeface="Calibri" pitchFamily="34" charset="0"/>
+                <a:ea typeface="Calibri" pitchFamily="34" charset="-122"/>
+                <a:cs typeface="Calibri" pitchFamily="34" charset="-120"/>
+              </a:rPr>
+              <a:t>No model, no codegen — implementation + proof classes only</a:t>
+            </a:r>
+            <a:endParaRPr lang="en-US" sz="1200" dirty="0"/>
+          </a:p>
+          <a:p>
+            <a:pPr algn="l" marL="342900" indent="-342900">
+              <a:spcAft>
+                <a:spcPts val="400"/>
+              </a:spcAft>
+              <a:buSzPct val="100000"/>
+              <a:buChar char="•"/>
+            </a:pPr>
+            <a:r>
+              <a:rPr lang="en-US" sz="1200" dirty="0">
+                <a:solidFill>
+                  <a:srgbClr val="212121"/>
+                </a:solidFill>
+                <a:latin typeface="Calibri" pitchFamily="34" charset="0"/>
+                <a:ea typeface="Calibri" pitchFamily="34" charset="-122"/>
+                <a:cs typeface="Calibri" pitchFamily="34" charset="-120"/>
+              </a:rPr>
+              <a:t>Proof-repair experiments: AutoVerus, KU Dogtreat linear planner</a:t>
+            </a:r>
+            <a:endParaRPr lang="en-US" sz="1200" dirty="0"/>
+          </a:p>
+        </p:txBody>
+      </p:sp>
+      <p:sp>
+        <p:nvSpPr>
+          <p:cNvPr id="16" name="Shape 14"/>
+          <p:cNvSpPr/>
+          <p:nvPr/>
+        </p:nvSpPr>
+        <p:spPr>
+          <a:xfrm>
+            <a:off x="6263640" y="4069080"/>
+            <a:ext cx="5349240" cy="2148840"/>
           </a:xfrm>
           <a:prstGeom prst="roundRect">
             <a:avLst>
-              <a:gd name="adj" fmla="val 9677"/>
+              <a:gd name="adj" fmla="val 2553"/>
             </a:avLst>
           </a:prstGeom>
           <a:solidFill>
-            <a:srgbClr val="1E2761"/>
+            <a:srgbClr val="F2F4F8"/>
           </a:solidFill>
-          <a:ln/>
-        </p:spPr>
-      </p:sp>
-      <p:sp>
-        <p:nvSpPr>
-          <p:cNvPr id="14" name="Text 12"/>
-          <p:cNvSpPr/>
-          <p:nvPr/>
-        </p:nvSpPr>
-        <p:spPr>
-          <a:xfrm>
-            <a:off x="5934456" y="1920240"/>
-            <a:ext cx="2034540" cy="566928"/>
-          </a:xfrm>
-          <a:prstGeom prst="rect">
-            <a:avLst/>
-          </a:prstGeom>
-          <a:noFill/>
-          <a:ln/>
-        </p:spPr>
-        <p:txBody>
-          <a:bodyPr wrap="square" lIns="254" tIns="254" rIns="254" bIns="254" rtlCol="0" anchor="ctr"/>
-          <a:lstStyle/>
-          <a:p>
-            <a:pPr algn="ctr" indent="0" marL="0">
-              <a:buNone/>
-            </a:pPr>
-            <a:r>
-              <a:rPr lang="en-US" sz="1300" b="1" dirty="0">
-                <a:solidFill>
-                  <a:srgbClr val="FFFFFF"/>
-                </a:solidFill>
-                <a:latin typeface="Calibri" pitchFamily="34" charset="0"/>
-                <a:ea typeface="Calibri" pitchFamily="34" charset="-122"/>
-                <a:cs typeface="Calibri" pitchFamily="34" charset="-120"/>
-              </a:rPr>
-              <a:t>seL4 · Microkit</a:t>
-            </a:r>
-            <a:endParaRPr lang="en-US" sz="1300" dirty="0"/>
-          </a:p>
-        </p:txBody>
-      </p:sp>
-      <p:sp>
-        <p:nvSpPr>
-          <p:cNvPr id="15" name="Text 13"/>
-          <p:cNvSpPr/>
-          <p:nvPr/>
-        </p:nvSpPr>
-        <p:spPr>
-          <a:xfrm>
-            <a:off x="8362188" y="1920240"/>
-            <a:ext cx="2194560" cy="566928"/>
+          <a:ln w="12700">
+            <a:solidFill>
+              <a:srgbClr val="CADCFC"/>
+            </a:solidFill>
+            <a:prstDash val="solid"/>
+          </a:ln>
+        </p:spPr>
+      </p:sp>
+      <p:sp>
+        <p:nvSpPr>
+          <p:cNvPr id="17" name="Text 15"/>
+          <p:cNvSpPr/>
+          <p:nvPr/>
+        </p:nvSpPr>
+        <p:spPr>
+          <a:xfrm>
+            <a:off x="6492240" y="4178808"/>
+            <a:ext cx="4892040" cy="329184"/>
           </a:xfrm>
           <a:prstGeom prst="rect">
             <a:avLst/>
@@ -6376,7 +6619,7 @@
               <a:buNone/>
             </a:pPr>
             <a:r>
-              <a:rPr lang="en-US" sz="1200" b="1" i="1" dirty="0">
+              <a:rPr lang="en-US" sz="1550" b="1" dirty="0">
                 <a:solidFill>
                   <a:srgbClr val="1E2761"/>
                 </a:solidFill>
@@ -6384,748 +6627,154 @@
                 <a:ea typeface="Calibri" pitchFamily="34" charset="-122"/>
                 <a:cs typeface="Calibri" pitchFamily="34" charset="-120"/>
               </a:rPr>
-              <a:t>◀ demo</a:t>
+              <a:t>Interactive Theorem Provers:  Lean / Rocq</a:t>
+            </a:r>
+            <a:endParaRPr lang="en-US" sz="1550" dirty="0"/>
+          </a:p>
+        </p:txBody>
+      </p:sp>
+      <p:sp>
+        <p:nvSpPr>
+          <p:cNvPr id="18" name="Text 16"/>
+          <p:cNvSpPr/>
+          <p:nvPr/>
+        </p:nvSpPr>
+        <p:spPr>
+          <a:xfrm>
+            <a:off x="6501384" y="4526280"/>
+            <a:ext cx="4892040" cy="256032"/>
+          </a:xfrm>
+          <a:prstGeom prst="rect">
+            <a:avLst/>
+          </a:prstGeom>
+          <a:noFill/>
+          <a:ln/>
+        </p:spPr>
+        <p:txBody>
+          <a:bodyPr wrap="square" lIns="0" tIns="0" rIns="0" bIns="0" rtlCol="0" anchor="ctr"/>
+          <a:lstStyle/>
+          <a:p>
+            <a:pPr algn="l" indent="0" marL="0">
+              <a:buNone/>
+            </a:pPr>
+            <a:r>
+              <a:rPr lang="en-US" sz="1050" i="1" dirty="0">
+                <a:solidFill>
+                  <a:srgbClr val="5A6478"/>
+                </a:solidFill>
+                <a:latin typeface="Calibri" pitchFamily="34" charset="0"/>
+                <a:ea typeface="Calibri" pitchFamily="34" charset="-122"/>
+                <a:cs typeface="Calibri" pitchFamily="34" charset="-120"/>
+              </a:rPr>
+              <a:t>landing-gear, temp-control</a:t>
+            </a:r>
+            <a:endParaRPr lang="en-US" sz="1050" dirty="0"/>
+          </a:p>
+        </p:txBody>
+      </p:sp>
+      <p:sp>
+        <p:nvSpPr>
+          <p:cNvPr id="19" name="Text 17"/>
+          <p:cNvSpPr/>
+          <p:nvPr/>
+        </p:nvSpPr>
+        <p:spPr>
+          <a:xfrm>
+            <a:off x="6537960" y="4846320"/>
+            <a:ext cx="4846320" cy="1252728"/>
+          </a:xfrm>
+          <a:prstGeom prst="rect">
+            <a:avLst/>
+          </a:prstGeom>
+          <a:noFill/>
+          <a:ln/>
+        </p:spPr>
+        <p:txBody>
+          <a:bodyPr wrap="square" lIns="0" tIns="0" rIns="0" bIns="0" rtlCol="0" anchor="t"/>
+          <a:lstStyle/>
+          <a:p>
+            <a:pPr algn="l" marL="342900" indent="-342900">
+              <a:spcAft>
+                <a:spcPts val="400"/>
+              </a:spcAft>
+              <a:buSzPct val="100000"/>
+              <a:buChar char="•"/>
+            </a:pPr>
+            <a:r>
+              <a:rPr lang="en-US" sz="1200" dirty="0">
+                <a:solidFill>
+                  <a:srgbClr val="212121"/>
+                </a:solidFill>
+                <a:latin typeface="Calibri" pitchFamily="34" charset="0"/>
+                <a:ea typeface="Calibri" pitchFamily="34" charset="-122"/>
+                <a:cs typeface="Calibri" pitchFamily="34" charset="-120"/>
+              </a:rPr>
+              <a:t>Blessed theorem statements, workflow-owned implementations, proofs</a:t>
             </a:r>
             <a:endParaRPr lang="en-US" sz="1200" dirty="0"/>
           </a:p>
-        </p:txBody>
-      </p:sp>
-      <p:sp>
-        <p:nvSpPr>
-          <p:cNvPr id="16" name="Text 14"/>
-          <p:cNvSpPr/>
-          <p:nvPr/>
-        </p:nvSpPr>
-        <p:spPr>
-          <a:xfrm>
-            <a:off x="658368" y="2468880"/>
-            <a:ext cx="10515600" cy="274320"/>
-          </a:xfrm>
-          <a:prstGeom prst="rect">
-            <a:avLst/>
-          </a:prstGeom>
-          <a:noFill/>
-          <a:ln/>
-        </p:spPr>
-        <p:txBody>
-          <a:bodyPr wrap="square" lIns="0" tIns="0" rIns="0" bIns="0" rtlCol="0" anchor="ctr"/>
-          <a:lstStyle/>
-          <a:p>
-            <a:pPr algn="l" indent="0" marL="0">
-              <a:buNone/>
-            </a:pPr>
-            <a:r>
-              <a:rPr lang="en-US" sz="1100" i="1" dirty="0">
-                <a:solidFill>
-                  <a:srgbClr val="5A6478"/>
-                </a:solidFill>
-                <a:latin typeface="Calibri" pitchFamily="34" charset="0"/>
-                <a:ea typeface="Calibri" pitchFamily="34" charset="-122"/>
-                <a:cs typeface="Calibri" pitchFamily="34" charset="-120"/>
-              </a:rPr>
-              <a:t>the isolette — the demo you just saw</a:t>
-            </a:r>
-            <a:endParaRPr lang="en-US" sz="1100" dirty="0"/>
-          </a:p>
-        </p:txBody>
-      </p:sp>
-      <p:sp>
-        <p:nvSpPr>
-          <p:cNvPr id="17" name="Shape 15"/>
-          <p:cNvSpPr/>
-          <p:nvPr/>
-        </p:nvSpPr>
-        <p:spPr>
-          <a:xfrm>
-            <a:off x="640080" y="3063240"/>
-            <a:ext cx="1234440" cy="566928"/>
-          </a:xfrm>
-          <a:prstGeom prst="roundRect">
-            <a:avLst>
-              <a:gd name="adj" fmla="val 9677"/>
-            </a:avLst>
-          </a:prstGeom>
-          <a:solidFill>
-            <a:srgbClr val="3A4A8C"/>
-          </a:solidFill>
-          <a:ln/>
-        </p:spPr>
-      </p:sp>
-      <p:sp>
-        <p:nvSpPr>
-          <p:cNvPr id="18" name="Text 16"/>
-          <p:cNvSpPr/>
-          <p:nvPr/>
-        </p:nvSpPr>
-        <p:spPr>
-          <a:xfrm>
-            <a:off x="640080" y="3063240"/>
-            <a:ext cx="1234440" cy="566928"/>
-          </a:xfrm>
-          <a:prstGeom prst="rect">
-            <a:avLst/>
-          </a:prstGeom>
-          <a:noFill/>
-          <a:ln/>
-        </p:spPr>
-        <p:txBody>
-          <a:bodyPr wrap="square" lIns="254" tIns="254" rIns="254" bIns="254" rtlCol="0" anchor="ctr"/>
-          <a:lstStyle/>
-          <a:p>
-            <a:pPr algn="ctr" indent="0" marL="0">
-              <a:buNone/>
-            </a:pPr>
-            <a:r>
-              <a:rPr lang="en-US" sz="1300" b="1" dirty="0">
-                <a:solidFill>
-                  <a:srgbClr val="FFFFFF"/>
-                </a:solidFill>
-                <a:latin typeface="Calibri" pitchFamily="34" charset="0"/>
-                <a:ea typeface="Calibri" pitchFamily="34" charset="-122"/>
-                <a:cs typeface="Calibri" pitchFamily="34" charset="-120"/>
-              </a:rPr>
-              <a:t>AADL</a:t>
-            </a:r>
-            <a:endParaRPr lang="en-US" sz="1300" dirty="0"/>
-          </a:p>
-        </p:txBody>
-      </p:sp>
-      <p:sp>
-        <p:nvSpPr>
-          <p:cNvPr id="19" name="Text 17"/>
-          <p:cNvSpPr/>
-          <p:nvPr/>
-        </p:nvSpPr>
-        <p:spPr>
-          <a:xfrm>
-            <a:off x="1856232" y="3063240"/>
-            <a:ext cx="365760" cy="566928"/>
-          </a:xfrm>
-          <a:prstGeom prst="rect">
-            <a:avLst/>
-          </a:prstGeom>
-          <a:noFill/>
-          <a:ln/>
-        </p:spPr>
-        <p:txBody>
-          <a:bodyPr wrap="square" lIns="0" tIns="0" rIns="0" bIns="0" rtlCol="0" anchor="ctr"/>
-          <a:lstStyle/>
-          <a:p>
-            <a:pPr algn="ctr" indent="0" marL="0">
-              <a:buNone/>
-            </a:pPr>
-            <a:r>
-              <a:rPr lang="en-US" sz="1500" dirty="0">
-                <a:solidFill>
-                  <a:srgbClr val="5A6478"/>
-                </a:solidFill>
-                <a:latin typeface="Calibri" pitchFamily="34" charset="0"/>
-                <a:ea typeface="Calibri" pitchFamily="34" charset="-122"/>
-                <a:cs typeface="Calibri" pitchFamily="34" charset="-120"/>
-              </a:rPr>
-              <a:t>→</a:t>
-            </a:r>
-            <a:endParaRPr lang="en-US" sz="1500" dirty="0"/>
-          </a:p>
-        </p:txBody>
-      </p:sp>
-      <p:sp>
-        <p:nvSpPr>
-          <p:cNvPr id="20" name="Shape 18"/>
-          <p:cNvSpPr/>
-          <p:nvPr/>
-        </p:nvSpPr>
-        <p:spPr>
-          <a:xfrm>
-            <a:off x="2221992" y="3063240"/>
-            <a:ext cx="1234440" cy="566928"/>
-          </a:xfrm>
-          <a:prstGeom prst="roundRect">
-            <a:avLst>
-              <a:gd name="adj" fmla="val 9677"/>
-            </a:avLst>
-          </a:prstGeom>
-          <a:solidFill>
-            <a:srgbClr val="3A4A8C"/>
-          </a:solidFill>
-          <a:ln/>
-        </p:spPr>
-      </p:sp>
-      <p:sp>
-        <p:nvSpPr>
-          <p:cNvPr id="21" name="Text 19"/>
-          <p:cNvSpPr/>
-          <p:nvPr/>
-        </p:nvSpPr>
-        <p:spPr>
-          <a:xfrm>
-            <a:off x="2221992" y="3063240"/>
-            <a:ext cx="1234440" cy="566928"/>
-          </a:xfrm>
-          <a:prstGeom prst="rect">
-            <a:avLst/>
-          </a:prstGeom>
-          <a:noFill/>
-          <a:ln/>
-        </p:spPr>
-        <p:txBody>
-          <a:bodyPr wrap="square" lIns="254" tIns="254" rIns="254" bIns="254" rtlCol="0" anchor="ctr"/>
-          <a:lstStyle/>
-          <a:p>
-            <a:pPr algn="ctr" indent="0" marL="0">
-              <a:buNone/>
-            </a:pPr>
-            <a:r>
-              <a:rPr lang="en-US" sz="1300" b="1" dirty="0">
-                <a:solidFill>
-                  <a:srgbClr val="FFFFFF"/>
-                </a:solidFill>
-                <a:latin typeface="Calibri" pitchFamily="34" charset="0"/>
-                <a:ea typeface="Calibri" pitchFamily="34" charset="-122"/>
-                <a:cs typeface="Calibri" pitchFamily="34" charset="-120"/>
-              </a:rPr>
-              <a:t>HAMR</a:t>
-            </a:r>
-            <a:endParaRPr lang="en-US" sz="1300" dirty="0"/>
-          </a:p>
-        </p:txBody>
-      </p:sp>
-      <p:sp>
-        <p:nvSpPr>
-          <p:cNvPr id="22" name="Text 20"/>
-          <p:cNvSpPr/>
-          <p:nvPr/>
-        </p:nvSpPr>
-        <p:spPr>
-          <a:xfrm>
-            <a:off x="3438144" y="3063240"/>
-            <a:ext cx="365760" cy="566928"/>
-          </a:xfrm>
-          <a:prstGeom prst="rect">
-            <a:avLst/>
-          </a:prstGeom>
-          <a:noFill/>
-          <a:ln/>
-        </p:spPr>
-        <p:txBody>
-          <a:bodyPr wrap="square" lIns="0" tIns="0" rIns="0" bIns="0" rtlCol="0" anchor="ctr"/>
-          <a:lstStyle/>
-          <a:p>
-            <a:pPr algn="ctr" indent="0" marL="0">
-              <a:buNone/>
-            </a:pPr>
-            <a:r>
-              <a:rPr lang="en-US" sz="1500" dirty="0">
-                <a:solidFill>
-                  <a:srgbClr val="5A6478"/>
-                </a:solidFill>
-                <a:latin typeface="Calibri" pitchFamily="34" charset="0"/>
-                <a:ea typeface="Calibri" pitchFamily="34" charset="-122"/>
-                <a:cs typeface="Calibri" pitchFamily="34" charset="-120"/>
-              </a:rPr>
-              <a:t>→</a:t>
-            </a:r>
-            <a:endParaRPr lang="en-US" sz="1500" dirty="0"/>
-          </a:p>
-        </p:txBody>
-      </p:sp>
-      <p:sp>
-        <p:nvSpPr>
-          <p:cNvPr id="23" name="Shape 21"/>
-          <p:cNvSpPr/>
-          <p:nvPr/>
-        </p:nvSpPr>
-        <p:spPr>
-          <a:xfrm>
-            <a:off x="3803904" y="3063240"/>
-            <a:ext cx="1613916" cy="566928"/>
-          </a:xfrm>
-          <a:prstGeom prst="roundRect">
-            <a:avLst>
-              <a:gd name="adj" fmla="val 9677"/>
-            </a:avLst>
-          </a:prstGeom>
-          <a:solidFill>
-            <a:srgbClr val="3A4A8C"/>
-          </a:solidFill>
-          <a:ln/>
-        </p:spPr>
-      </p:sp>
-      <p:sp>
-        <p:nvSpPr>
-          <p:cNvPr id="24" name="Text 22"/>
-          <p:cNvSpPr/>
-          <p:nvPr/>
-        </p:nvSpPr>
-        <p:spPr>
-          <a:xfrm>
-            <a:off x="3803904" y="3063240"/>
-            <a:ext cx="1613916" cy="566928"/>
-          </a:xfrm>
-          <a:prstGeom prst="rect">
-            <a:avLst/>
-          </a:prstGeom>
-          <a:noFill/>
-          <a:ln/>
-        </p:spPr>
-        <p:txBody>
-          <a:bodyPr wrap="square" lIns="254" tIns="254" rIns="254" bIns="254" rtlCol="0" anchor="ctr"/>
-          <a:lstStyle/>
-          <a:p>
-            <a:pPr algn="ctr" indent="0" marL="0">
-              <a:buNone/>
-            </a:pPr>
-            <a:r>
-              <a:rPr lang="en-US" sz="1300" b="1" dirty="0">
-                <a:solidFill>
-                  <a:srgbClr val="FFFFFF"/>
-                </a:solidFill>
-                <a:latin typeface="Calibri" pitchFamily="34" charset="0"/>
-                <a:ea typeface="Calibri" pitchFamily="34" charset="-122"/>
-                <a:cs typeface="Calibri" pitchFamily="34" charset="-120"/>
-              </a:rPr>
-              <a:t>Slang · JVM</a:t>
-            </a:r>
-            <a:endParaRPr lang="en-US" sz="1300" dirty="0"/>
-          </a:p>
-        </p:txBody>
-      </p:sp>
-      <p:sp>
-        <p:nvSpPr>
-          <p:cNvPr id="25" name="Text 23"/>
-          <p:cNvSpPr/>
-          <p:nvPr/>
-        </p:nvSpPr>
-        <p:spPr>
-          <a:xfrm>
-            <a:off x="658368" y="3611880"/>
-            <a:ext cx="10515600" cy="274320"/>
-          </a:xfrm>
-          <a:prstGeom prst="rect">
-            <a:avLst/>
-          </a:prstGeom>
-          <a:noFill/>
-          <a:ln/>
-        </p:spPr>
-        <p:txBody>
-          <a:bodyPr wrap="square" lIns="0" tIns="0" rIns="0" bIns="0" rtlCol="0" anchor="ctr"/>
-          <a:lstStyle/>
-          <a:p>
-            <a:pPr algn="l" indent="0" marL="0">
-              <a:buNone/>
-            </a:pPr>
-            <a:r>
-              <a:rPr lang="en-US" sz="1100" i="1" dirty="0">
-                <a:solidFill>
-                  <a:srgbClr val="5A6478"/>
-                </a:solidFill>
-                <a:latin typeface="Calibri" pitchFamily="34" charset="0"/>
-                <a:ea typeface="Calibri" pitchFamily="34" charset="-122"/>
-                <a:cs typeface="Calibri" pitchFamily="34" charset="-120"/>
-              </a:rPr>
-              <a:t>a different modeling language and target runtime, same artifact classes and Copland protocols  (temp-control)</a:t>
-            </a:r>
-            <a:endParaRPr lang="en-US" sz="1100" dirty="0"/>
-          </a:p>
-        </p:txBody>
-      </p:sp>
-      <p:sp>
-        <p:nvSpPr>
-          <p:cNvPr id="26" name="Shape 24"/>
-          <p:cNvSpPr/>
-          <p:nvPr/>
-        </p:nvSpPr>
-        <p:spPr>
-          <a:xfrm>
-            <a:off x="640080" y="4206240"/>
-            <a:ext cx="1234440" cy="566928"/>
-          </a:xfrm>
-          <a:prstGeom prst="roundRect">
-            <a:avLst>
-              <a:gd name="adj" fmla="val 9677"/>
-            </a:avLst>
-          </a:prstGeom>
-          <a:solidFill>
-            <a:srgbClr val="3A4A8C"/>
-          </a:solidFill>
-          <a:ln/>
-        </p:spPr>
-      </p:sp>
-      <p:sp>
-        <p:nvSpPr>
-          <p:cNvPr id="27" name="Text 25"/>
-          <p:cNvSpPr/>
-          <p:nvPr/>
-        </p:nvSpPr>
-        <p:spPr>
-          <a:xfrm>
-            <a:off x="640080" y="4206240"/>
-            <a:ext cx="1234440" cy="566928"/>
-          </a:xfrm>
-          <a:prstGeom prst="rect">
-            <a:avLst/>
-          </a:prstGeom>
-          <a:noFill/>
-          <a:ln/>
-        </p:spPr>
-        <p:txBody>
-          <a:bodyPr wrap="square" lIns="254" tIns="254" rIns="254" bIns="254" rtlCol="0" anchor="ctr"/>
-          <a:lstStyle/>
-          <a:p>
-            <a:pPr algn="ctr" indent="0" marL="0">
-              <a:buNone/>
-            </a:pPr>
-            <a:r>
-              <a:rPr lang="en-US" sz="1300" b="1" dirty="0">
-                <a:solidFill>
-                  <a:srgbClr val="FFFFFF"/>
-                </a:solidFill>
-                <a:latin typeface="Calibri" pitchFamily="34" charset="0"/>
-                <a:ea typeface="Calibri" pitchFamily="34" charset="-122"/>
-                <a:cs typeface="Calibri" pitchFamily="34" charset="-120"/>
-              </a:rPr>
-              <a:t>Lean</a:t>
-            </a:r>
-            <a:endParaRPr lang="en-US" sz="1300" dirty="0"/>
-          </a:p>
-        </p:txBody>
-      </p:sp>
-      <p:sp>
-        <p:nvSpPr>
-          <p:cNvPr id="28" name="Text 26"/>
-          <p:cNvSpPr/>
-          <p:nvPr/>
-        </p:nvSpPr>
-        <p:spPr>
-          <a:xfrm>
-            <a:off x="1856232" y="4206240"/>
-            <a:ext cx="365760" cy="566928"/>
-          </a:xfrm>
-          <a:prstGeom prst="rect">
-            <a:avLst/>
-          </a:prstGeom>
-          <a:noFill/>
-          <a:ln/>
-        </p:spPr>
-        <p:txBody>
-          <a:bodyPr wrap="square" lIns="0" tIns="0" rIns="0" bIns="0" rtlCol="0" anchor="ctr"/>
-          <a:lstStyle/>
-          <a:p>
-            <a:pPr algn="ctr" indent="0" marL="0">
-              <a:buNone/>
-            </a:pPr>
-            <a:r>
-              <a:rPr lang="en-US" sz="1500" dirty="0">
-                <a:solidFill>
-                  <a:srgbClr val="5A6478"/>
-                </a:solidFill>
-                <a:latin typeface="Calibri" pitchFamily="34" charset="0"/>
-                <a:ea typeface="Calibri" pitchFamily="34" charset="-122"/>
-                <a:cs typeface="Calibri" pitchFamily="34" charset="-120"/>
-              </a:rPr>
-              <a:t>→</a:t>
-            </a:r>
-            <a:endParaRPr lang="en-US" sz="1500" dirty="0"/>
-          </a:p>
-        </p:txBody>
-      </p:sp>
-      <p:sp>
-        <p:nvSpPr>
-          <p:cNvPr id="29" name="Shape 27"/>
-          <p:cNvSpPr/>
-          <p:nvPr/>
-        </p:nvSpPr>
-        <p:spPr>
-          <a:xfrm>
-            <a:off x="2221992" y="4206240"/>
-            <a:ext cx="4873752" cy="566928"/>
-          </a:xfrm>
-          <a:prstGeom prst="roundRect">
-            <a:avLst>
-              <a:gd name="adj" fmla="val 9677"/>
-            </a:avLst>
-          </a:prstGeom>
-          <a:solidFill>
-            <a:srgbClr val="3A4A8C"/>
-          </a:solidFill>
-          <a:ln/>
-        </p:spPr>
-      </p:sp>
-      <p:sp>
-        <p:nvSpPr>
-          <p:cNvPr id="30" name="Text 28"/>
-          <p:cNvSpPr/>
-          <p:nvPr/>
-        </p:nvSpPr>
-        <p:spPr>
-          <a:xfrm>
-            <a:off x="2221992" y="4206240"/>
-            <a:ext cx="4873752" cy="566928"/>
-          </a:xfrm>
-          <a:prstGeom prst="rect">
-            <a:avLst/>
-          </a:prstGeom>
-          <a:noFill/>
-          <a:ln/>
-        </p:spPr>
-        <p:txBody>
-          <a:bodyPr wrap="square" lIns="254" tIns="254" rIns="254" bIns="254" rtlCol="0" anchor="ctr"/>
-          <a:lstStyle/>
-          <a:p>
-            <a:pPr algn="ctr" indent="0" marL="0">
-              <a:buNone/>
-            </a:pPr>
-            <a:r>
-              <a:rPr lang="en-US" sz="1300" b="1" dirty="0">
-                <a:solidFill>
-                  <a:srgbClr val="FFFFFF"/>
-                </a:solidFill>
-                <a:latin typeface="Calibri" pitchFamily="34" charset="0"/>
-                <a:ea typeface="Calibri" pitchFamily="34" charset="-122"/>
-                <a:cs typeface="Calibri" pitchFamily="34" charset="-120"/>
-              </a:rPr>
-              <a:t>blessed statements + workflow-owned proofs</a:t>
-            </a:r>
-            <a:endParaRPr lang="en-US" sz="1300" dirty="0"/>
-          </a:p>
-        </p:txBody>
-      </p:sp>
-      <p:sp>
-        <p:nvSpPr>
-          <p:cNvPr id="31" name="Text 29"/>
-          <p:cNvSpPr/>
-          <p:nvPr/>
-        </p:nvSpPr>
-        <p:spPr>
-          <a:xfrm>
-            <a:off x="658368" y="4754880"/>
-            <a:ext cx="10515600" cy="274320"/>
-          </a:xfrm>
-          <a:prstGeom prst="rect">
-            <a:avLst/>
-          </a:prstGeom>
-          <a:noFill/>
-          <a:ln/>
-        </p:spPr>
-        <p:txBody>
-          <a:bodyPr wrap="square" lIns="0" tIns="0" rIns="0" bIns="0" rtlCol="0" anchor="ctr"/>
-          <a:lstStyle/>
-          <a:p>
-            <a:pPr algn="l" indent="0" marL="0">
-              <a:buNone/>
-            </a:pPr>
-            <a:r>
-              <a:rPr lang="en-US" sz="1100" i="1" dirty="0">
-                <a:solidFill>
-                  <a:srgbClr val="5A6478"/>
-                </a:solidFill>
-                <a:latin typeface="Calibri" pitchFamily="34" charset="0"/>
-                <a:ea typeface="Calibri" pitchFamily="34" charset="-122"/>
-                <a:cs typeface="Calibri" pitchFamily="34" charset="-120"/>
-              </a:rPr>
-              <a:t>the goal-directed encoding: attestation enforces one invariant while synthesis iterates  (landing-gear, temp-control)</a:t>
-            </a:r>
-            <a:endParaRPr lang="en-US" sz="1100" dirty="0"/>
-          </a:p>
-        </p:txBody>
-      </p:sp>
-      <p:sp>
-        <p:nvSpPr>
-          <p:cNvPr id="32" name="Shape 30"/>
-          <p:cNvSpPr/>
-          <p:nvPr/>
-        </p:nvSpPr>
-        <p:spPr>
-          <a:xfrm>
-            <a:off x="640080" y="5349240"/>
-            <a:ext cx="1234440" cy="566928"/>
-          </a:xfrm>
-          <a:prstGeom prst="roundRect">
-            <a:avLst>
-              <a:gd name="adj" fmla="val 9677"/>
-            </a:avLst>
-          </a:prstGeom>
-          <a:solidFill>
-            <a:srgbClr val="3A4A8C"/>
-          </a:solidFill>
-          <a:ln/>
-        </p:spPr>
-      </p:sp>
-      <p:sp>
-        <p:nvSpPr>
-          <p:cNvPr id="33" name="Text 31"/>
-          <p:cNvSpPr/>
-          <p:nvPr/>
-        </p:nvSpPr>
-        <p:spPr>
-          <a:xfrm>
-            <a:off x="640080" y="5349240"/>
-            <a:ext cx="1234440" cy="566928"/>
-          </a:xfrm>
-          <a:prstGeom prst="rect">
-            <a:avLst/>
-          </a:prstGeom>
-          <a:noFill/>
-          <a:ln/>
-        </p:spPr>
-        <p:txBody>
-          <a:bodyPr wrap="square" lIns="254" tIns="254" rIns="254" bIns="254" rtlCol="0" anchor="ctr"/>
-          <a:lstStyle/>
-          <a:p>
-            <a:pPr algn="ctr" indent="0" marL="0">
-              <a:buNone/>
-            </a:pPr>
-            <a:r>
-              <a:rPr lang="en-US" sz="1300" b="1" dirty="0">
-                <a:solidFill>
-                  <a:srgbClr val="FFFFFF"/>
-                </a:solidFill>
-                <a:latin typeface="Calibri" pitchFamily="34" charset="0"/>
-                <a:ea typeface="Calibri" pitchFamily="34" charset="-122"/>
-                <a:cs typeface="Calibri" pitchFamily="34" charset="-120"/>
-              </a:rPr>
-              <a:t>Rocq</a:t>
-            </a:r>
-            <a:endParaRPr lang="en-US" sz="1300" dirty="0"/>
-          </a:p>
-        </p:txBody>
-      </p:sp>
-      <p:sp>
-        <p:nvSpPr>
-          <p:cNvPr id="34" name="Text 32"/>
-          <p:cNvSpPr/>
-          <p:nvPr/>
-        </p:nvSpPr>
-        <p:spPr>
-          <a:xfrm>
-            <a:off x="1856232" y="5349240"/>
-            <a:ext cx="365760" cy="566928"/>
-          </a:xfrm>
-          <a:prstGeom prst="rect">
-            <a:avLst/>
-          </a:prstGeom>
-          <a:noFill/>
-          <a:ln/>
-        </p:spPr>
-        <p:txBody>
-          <a:bodyPr wrap="square" lIns="0" tIns="0" rIns="0" bIns="0" rtlCol="0" anchor="ctr"/>
-          <a:lstStyle/>
-          <a:p>
-            <a:pPr algn="ctr" indent="0" marL="0">
-              <a:buNone/>
-            </a:pPr>
-            <a:r>
-              <a:rPr lang="en-US" sz="1500" dirty="0">
-                <a:solidFill>
-                  <a:srgbClr val="5A6478"/>
-                </a:solidFill>
-                <a:latin typeface="Calibri" pitchFamily="34" charset="0"/>
-                <a:ea typeface="Calibri" pitchFamily="34" charset="-122"/>
-                <a:cs typeface="Calibri" pitchFamily="34" charset="-120"/>
-              </a:rPr>
-              <a:t>→</a:t>
-            </a:r>
-            <a:endParaRPr lang="en-US" sz="1500" dirty="0"/>
-          </a:p>
-        </p:txBody>
-      </p:sp>
-      <p:sp>
-        <p:nvSpPr>
-          <p:cNvPr id="35" name="Shape 33"/>
-          <p:cNvSpPr/>
-          <p:nvPr/>
-        </p:nvSpPr>
-        <p:spPr>
-          <a:xfrm>
-            <a:off x="2221992" y="5349240"/>
-            <a:ext cx="4873752" cy="566928"/>
-          </a:xfrm>
-          <a:prstGeom prst="roundRect">
-            <a:avLst>
-              <a:gd name="adj" fmla="val 9677"/>
-            </a:avLst>
-          </a:prstGeom>
-          <a:solidFill>
-            <a:srgbClr val="3A4A8C"/>
-          </a:solidFill>
-          <a:ln/>
-        </p:spPr>
-      </p:sp>
-      <p:sp>
-        <p:nvSpPr>
-          <p:cNvPr id="36" name="Text 34"/>
-          <p:cNvSpPr/>
-          <p:nvPr/>
-        </p:nvSpPr>
-        <p:spPr>
-          <a:xfrm>
-            <a:off x="2221992" y="5349240"/>
-            <a:ext cx="4873752" cy="566928"/>
-          </a:xfrm>
-          <a:prstGeom prst="rect">
-            <a:avLst/>
-          </a:prstGeom>
-          <a:noFill/>
-          <a:ln/>
-        </p:spPr>
-        <p:txBody>
-          <a:bodyPr wrap="square" lIns="254" tIns="254" rIns="254" bIns="254" rtlCol="0" anchor="ctr"/>
-          <a:lstStyle/>
-          <a:p>
-            <a:pPr algn="ctr" indent="0" marL="0">
-              <a:buNone/>
-            </a:pPr>
-            <a:r>
-              <a:rPr lang="en-US" sz="1300" b="1" dirty="0">
-                <a:solidFill>
-                  <a:srgbClr val="FFFFFF"/>
-                </a:solidFill>
-                <a:latin typeface="Calibri" pitchFamily="34" charset="0"/>
-                <a:ea typeface="Calibri" pitchFamily="34" charset="-122"/>
-                <a:cs typeface="Calibri" pitchFamily="34" charset="-120"/>
-              </a:rPr>
-              <a:t>proofs + synthesis (tactic portfolio, LLM)</a:t>
-            </a:r>
-            <a:endParaRPr lang="en-US" sz="1300" dirty="0"/>
-          </a:p>
-        </p:txBody>
-      </p:sp>
-      <p:sp>
-        <p:nvSpPr>
-          <p:cNvPr id="37" name="Text 35"/>
-          <p:cNvSpPr/>
-          <p:nvPr/>
-        </p:nvSpPr>
-        <p:spPr>
-          <a:xfrm>
-            <a:off x="658368" y="5897880"/>
-            <a:ext cx="10515600" cy="274320"/>
-          </a:xfrm>
-          <a:prstGeom prst="rect">
-            <a:avLst/>
-          </a:prstGeom>
-          <a:noFill/>
-          <a:ln/>
-        </p:spPr>
-        <p:txBody>
-          <a:bodyPr wrap="square" lIns="0" tIns="0" rIns="0" bIns="0" rtlCol="0" anchor="ctr"/>
-          <a:lstStyle/>
-          <a:p>
-            <a:pPr algn="l" indent="0" marL="0">
-              <a:buNone/>
-            </a:pPr>
-            <a:r>
-              <a:rPr lang="en-US" sz="1100" i="1" dirty="0">
-                <a:solidFill>
-                  <a:srgbClr val="5A6478"/>
-                </a:solidFill>
-                <a:latin typeface="Calibri" pitchFamily="34" charset="0"/>
-                <a:ea typeface="Calibri" pitchFamily="34" charset="-122"/>
-                <a:cs typeface="Calibri" pitchFamily="34" charset="-120"/>
-              </a:rPr>
-              <a:t>proof synthesis as a repair strategy  (temp-control)</a:t>
-            </a:r>
-            <a:endParaRPr lang="en-US" sz="1100" dirty="0"/>
+          <a:p>
+            <a:pPr algn="l" marL="342900" indent="-342900">
+              <a:spcAft>
+                <a:spcPts val="400"/>
+              </a:spcAft>
+              <a:buSzPct val="100000"/>
+              <a:buChar char="•"/>
+            </a:pPr>
+            <a:r>
+              <a:rPr lang="en-US" sz="1200" dirty="0">
+                <a:solidFill>
+                  <a:srgbClr val="212121"/>
+                </a:solidFill>
+                <a:latin typeface="Calibri" pitchFamily="34" charset="0"/>
+                <a:ea typeface="Calibri" pitchFamily="34" charset="-122"/>
+                <a:cs typeface="Calibri" pitchFamily="34" charset="-120"/>
+              </a:rPr>
+              <a:t>Tactic-driven and LLM-driven proof repair</a:t>
+            </a:r>
+            <a:endParaRPr lang="en-US" sz="1200" dirty="0"/>
+          </a:p>
+          <a:p>
+            <a:pPr algn="l" marL="342900" indent="-342900">
+              <a:spcAft>
+                <a:spcPts val="400"/>
+              </a:spcAft>
+              <a:buSzPct val="100000"/>
+              <a:buChar char="•"/>
+            </a:pPr>
+            <a:r>
+              <a:rPr lang="en-US" sz="1200" dirty="0">
+                <a:solidFill>
+                  <a:srgbClr val="212121"/>
+                </a:solidFill>
+                <a:latin typeface="Calibri" pitchFamily="34" charset="0"/>
+                <a:ea typeface="Calibri" pitchFamily="34" charset="-122"/>
+                <a:cs typeface="Calibri" pitchFamily="34" charset="-120"/>
+              </a:rPr>
+              <a:t>Goal-directed: attestation enforces one invariant while synthesis iterates</a:t>
+            </a:r>
+            <a:endParaRPr lang="en-US" sz="1200" dirty="0"/>
+          </a:p>
+          <a:p>
+            <a:pPr algn="l" marL="342900" indent="-342900">
+              <a:spcAft>
+                <a:spcPts val="400"/>
+              </a:spcAft>
+              <a:buSzPct val="100000"/>
+              <a:buChar char="•"/>
+            </a:pPr>
+            <a:r>
+              <a:rPr lang="en-US" sz="1200" dirty="0">
+                <a:solidFill>
+                  <a:srgbClr val="212121"/>
+                </a:solidFill>
+                <a:latin typeface="Calibri" pitchFamily="34" charset="0"/>
+                <a:ea typeface="Calibri" pitchFamily="34" charset="-122"/>
+                <a:cs typeface="Calibri" pitchFamily="34" charset="-120"/>
+              </a:rPr>
+              <a:t>ITP-specific axiom checks</a:t>
+            </a:r>
+            <a:endParaRPr lang="en-US" sz="1200" dirty="0"/>
           </a:p>
         </p:txBody>
       </p:sp>

--- a/docs/video_slides_draft.pptx
+++ b/docs/video_slides_draft.pptx
@@ -22,9 +22,10 @@
     <p:sldId id="270" r:id="rId16"/>
     <p:sldId id="271" r:id="rId17"/>
     <p:sldId id="272" r:id="rId18"/>
+    <p:sldId id="273" r:id="rId19"/>
   </p:sldIdLst>
   <p:notesMasterIdLst>
-    <p:notesMasterId r:id="rId19"/>
+    <p:notesMasterId r:id="rId20"/>
   </p:notesMasterIdLst>
   <p:sldSz cx="12192000" cy="6858000"/>
   <p:notesSz cx="6858000" cy="12192000"/>
@@ -1228,8 +1229,10 @@
           <a:p>
             <a:r>
               <a:rPr lang="en-US" dirty="0"/>
-              <a:t>Collection point for every reference in the deck - keep this slide current as sections are added (isolette slide carries the K-State + AR-08-32 citations inline; Copland/Verus/seL4 seeded here ahead of their sections).
-DOIs on record in docs/video_slide_drafts.md.</a:t>
+              <a:t>Capstone slide 1 of 3 (theme: 'AI in the loop' as the big title, a descriptive caption beneath - B and C reuse the header).
+One idea: AI helps everywhere EXCEPT the judges. The top three stages (model, implementation, proofs) are AI-assisted; the bottom two (verification/appraisal, evidence/trust state) are AI-free by design - the shaded band.
+The Proofs row is where the repair-strategy breadth lands (deferred from the ecosystems slide): tactic portfolio, LLM (API + desktop sessions), AutoVerus, KU Dogtreat linear planner.
+Motivation flip (speaker, sets up the close): as more lifecycle artifacts ARE AI-generated, lifecycle attestation is what makes them trustworthy - provenance and evidence, not provider assurances.</a:t>
             </a:r>
             <a:endParaRPr lang="en-US" dirty="0"/>
           </a:p>
@@ -1253,6 +1256,95 @@
             <a:fld id="{F7021451-1387-4CA6-816F-3879F97B5CBC}" type="slidenum">
               <a:rPr lang="en-US"/>
               <a:t>17</a:t>
+            </a:fld>
+            <a:endParaRPr lang="en-US"/>
+          </a:p>
+        </p:txBody>
+      </p:sp>
+    </p:spTree>
+    <p:extLst>
+      <p:ext uri="{BB962C8B-B14F-4D97-AF65-F5344CB8AC3E}">
+        <p14:creationId xmlns:p14="http://schemas.microsoft.com/office/powerpoint/2010/main" val="1024086991"/>
+      </p:ext>
+    </p:extLst>
+  </p:cSld>
+  <p:clrMapOvr>
+    <a:masterClrMapping/>
+  </p:clrMapOvr>
+</p:notes>
+</file>
+
+<file path=ppt/notesSlides/notesSlide18.xml><?xml version="1.0" encoding="utf-8"?>
+<p:notes xmlns:a="http://schemas.openxmlformats.org/drawingml/2006/main" xmlns:r="http://schemas.openxmlformats.org/officeDocument/2006/relationships" xmlns:p="http://schemas.openxmlformats.org/presentationml/2006/main">
+  <p:cSld>
+    <p:spTree>
+      <p:nvGrpSpPr>
+        <p:cNvPr id="1" name=""/>
+        <p:cNvGrpSpPr/>
+        <p:nvPr/>
+      </p:nvGrpSpPr>
+      <p:grpSpPr>
+        <a:xfrm>
+          <a:off x="0" y="0"/>
+          <a:ext cx="0" cy="0"/>
+          <a:chOff x="0" y="0"/>
+          <a:chExt cx="0" cy="0"/>
+        </a:xfrm>
+      </p:grpSpPr>
+      <p:sp>
+        <p:nvSpPr>
+          <p:cNvPr id="2" name="Slide Image Placeholder 1"/>
+          <p:cNvSpPr>
+            <a:spLocks noGrp="1" noRot="1" noChangeAspect="1"/>
+          </p:cNvSpPr>
+          <p:nvPr>
+            <p:ph type="sldImg"/>
+          </p:nvPr>
+        </p:nvSpPr>
+        <p:spPr/>
+      </p:sp>
+      <p:sp>
+        <p:nvSpPr>
+          <p:cNvPr id="3" name="Notes Placeholder 2"/>
+          <p:cNvSpPr>
+            <a:spLocks noGrp="1"/>
+          </p:cNvSpPr>
+          <p:nvPr>
+            <p:ph type="body" idx="1"/>
+          </p:nvPr>
+        </p:nvSpPr>
+        <p:spPr/>
+        <p:txBody>
+          <a:bodyPr/>
+          <a:lstStyle/>
+          <a:p>
+            <a:r>
+              <a:rPr lang="en-US" dirty="0"/>
+              <a:t>Collection point for every reference in the deck - keep this slide current as sections are added (isolette slide carries the K-State + AR-08-32 citations inline; Copland/Verus/seL4 seeded here ahead of their sections).
+DOIs on record in docs/video_slide_drafts.md.</a:t>
+            </a:r>
+            <a:endParaRPr lang="en-US" dirty="0"/>
+          </a:p>
+        </p:txBody>
+      </p:sp>
+      <p:sp>
+        <p:nvSpPr>
+          <p:cNvPr id="4" name="Slide Number Placeholder 3"/>
+          <p:cNvSpPr>
+            <a:spLocks noGrp="1"/>
+          </p:cNvSpPr>
+          <p:nvPr>
+            <p:ph type="sldNum" sz="quarter" idx="10"/>
+          </p:nvPr>
+        </p:nvSpPr>
+        <p:spPr/>
+        <p:txBody>
+          <a:bodyPr/>
+          <a:lstStyle/>
+          <a:p>
+            <a:fld id="{F7021451-1387-4CA6-816F-3879F97B5CBC}" type="slidenum">
+              <a:rPr lang="en-US"/>
+              <a:t>18</a:t>
             </a:fld>
             <a:endParaRPr lang="en-US"/>
           </a:p>
@@ -6818,6 +6910,1464 @@
         </p:nvSpPr>
         <p:spPr>
           <a:xfrm>
+            <a:off x="640080" y="347472"/>
+            <a:ext cx="10972800" cy="640080"/>
+          </a:xfrm>
+          <a:prstGeom prst="rect">
+            <a:avLst/>
+          </a:prstGeom>
+          <a:noFill/>
+          <a:ln/>
+        </p:spPr>
+        <p:txBody>
+          <a:bodyPr wrap="square" lIns="0" tIns="0" rIns="0" bIns="0" rtlCol="0" anchor="ctr"/>
+          <a:lstStyle/>
+          <a:p>
+            <a:pPr indent="0" marL="0">
+              <a:buNone/>
+            </a:pPr>
+            <a:r>
+              <a:rPr lang="en-US" sz="4000" b="1" dirty="0">
+                <a:solidFill>
+                  <a:srgbClr val="1E2761"/>
+                </a:solidFill>
+                <a:latin typeface="Cambria" pitchFamily="34" charset="0"/>
+                <a:ea typeface="Cambria" pitchFamily="34" charset="-122"/>
+                <a:cs typeface="Cambria" pitchFamily="34" charset="-120"/>
+              </a:rPr>
+              <a:t>AI in the loop</a:t>
+            </a:r>
+            <a:endParaRPr lang="en-US" sz="4000" dirty="0"/>
+          </a:p>
+        </p:txBody>
+      </p:sp>
+      <p:sp>
+        <p:nvSpPr>
+          <p:cNvPr id="3" name="Text 1"/>
+          <p:cNvSpPr/>
+          <p:nvPr/>
+        </p:nvSpPr>
+        <p:spPr>
+          <a:xfrm>
+            <a:off x="658368" y="1024128"/>
+            <a:ext cx="10972800" cy="411480"/>
+          </a:xfrm>
+          <a:prstGeom prst="rect">
+            <a:avLst/>
+          </a:prstGeom>
+          <a:noFill/>
+          <a:ln/>
+        </p:spPr>
+        <p:txBody>
+          <a:bodyPr wrap="square" lIns="0" tIns="0" rIns="0" bIns="0" rtlCol="0" anchor="ctr"/>
+          <a:lstStyle/>
+          <a:p>
+            <a:pPr indent="0" marL="0">
+              <a:buNone/>
+            </a:pPr>
+            <a:r>
+              <a:rPr lang="en-US" sz="1600" i="1" dirty="0">
+                <a:solidFill>
+                  <a:srgbClr val="5A6478"/>
+                </a:solidFill>
+                <a:latin typeface="Calibri" pitchFamily="34" charset="0"/>
+                <a:ea typeface="Calibri" pitchFamily="34" charset="-122"/>
+                <a:cs typeface="Calibri" pitchFamily="34" charset="-120"/>
+              </a:rPr>
+              <a:t>untrusted artifact synthesis and repair;  verified audit and deterministic appraisal</a:t>
+            </a:r>
+            <a:endParaRPr lang="en-US" sz="1600" dirty="0"/>
+          </a:p>
+        </p:txBody>
+      </p:sp>
+      <p:graphicFrame>
+        <p:nvGraphicFramePr>
+          <p:cNvPr id="18" name="Table 0"/>
+          <p:cNvGraphicFramePr>
+            <a:graphicFrameLocks noGrp="1"/>
+          </p:cNvGraphicFramePr>
+          <p:nvPr>
+            <p:extLst>
+              <p:ext uri="{D42A27DB-BD31-4B8C-83A1-F6EECF244321}">
+                <p14:modId xmlns:p14="http://schemas.microsoft.com/office/powerpoint/2010/main" val="1579011935"/>
+              </p:ext>
+            </p:extLst>
+          </p:nvPr>
+        </p:nvGraphicFramePr>
+        <p:xfrm>
+          <a:off x="640080" y="1600200"/>
+          <a:ext cx="10881360" cy="914400"/>
+        </p:xfrm>
+        <a:graphic>
+          <a:graphicData uri="http://schemas.openxmlformats.org/drawingml/2006/table">
+            <a:tbl>
+              <a:tblPr/>
+              <a:tblGrid>
+                <a:gridCol w="2286000"/>
+                <a:gridCol w="4480560"/>
+                <a:gridCol w="4114800"/>
+              </a:tblGrid>
+              <a:tr h="365760">
+                <a:tc>
+                  <a:txBody>
+                    <a:bodyPr/>
+                    <a:lstStyle/>
+                    <a:p>
+                      <a:pPr algn="l" indent="0" marL="0">
+                        <a:buNone/>
+                      </a:pPr>
+                      <a:r>
+                        <a:rPr lang="en-US" sz="1350" b="1" dirty="0">
+                          <a:solidFill>
+                            <a:srgbClr val="FFFFFF"/>
+                          </a:solidFill>
+                          <a:latin typeface="Calibri" pitchFamily="34" charset="0"/>
+                          <a:ea typeface="Calibri" pitchFamily="34" charset="-122"/>
+                          <a:cs typeface="Calibri" pitchFamily="34" charset="-120"/>
+                        </a:rPr>
+                        <a:t>Workflow stage</a:t>
+                      </a:r>
+                      <a:endParaRPr lang="en-US" sz="1350" dirty="0">
+                        <a:latin typeface="Calibri" charset="0"/>
+                        <a:ea typeface="Calibri" charset="0"/>
+                        <a:cs typeface="Calibri" charset="0"/>
+                      </a:endParaRPr>
+                    </a:p>
+                  </a:txBody>
+                  <a:tcPr marL="82296" marR="82296" marT="82296" marB="82296" anchor="ctr">
+                    <a:lnL w="12700" cap="flat" cmpd="sng" algn="ctr">
+                      <a:solidFill>
+                        <a:srgbClr val="D8DEEA"/>
+                      </a:solidFill>
+                      <a:prstDash val="solid"/>
+                      <a:round/>
+                      <a:headEnd type="none" w="med" len="med"/>
+                      <a:tailEnd type="none" w="med" len="med"/>
+                    </a:lnL>
+                    <a:lnR w="12700" cap="flat" cmpd="sng" algn="ctr">
+                      <a:solidFill>
+                        <a:srgbClr val="D8DEEA"/>
+                      </a:solidFill>
+                      <a:prstDash val="solid"/>
+                      <a:round/>
+                      <a:headEnd type="none" w="med" len="med"/>
+                      <a:tailEnd type="none" w="med" len="med"/>
+                    </a:lnR>
+                    <a:lnT w="12700" cap="flat" cmpd="sng" algn="ctr">
+                      <a:solidFill>
+                        <a:srgbClr val="D8DEEA"/>
+                      </a:solidFill>
+                      <a:prstDash val="solid"/>
+                      <a:round/>
+                      <a:headEnd type="none" w="med" len="med"/>
+                      <a:tailEnd type="none" w="med" len="med"/>
+                    </a:lnT>
+                    <a:lnB w="12700" cap="flat" cmpd="sng" algn="ctr">
+                      <a:solidFill>
+                        <a:srgbClr val="D8DEEA"/>
+                      </a:solidFill>
+                      <a:prstDash val="solid"/>
+                      <a:round/>
+                      <a:headEnd type="none" w="med" len="med"/>
+                      <a:tailEnd type="none" w="med" len="med"/>
+                    </a:lnB>
+                    <a:solidFill>
+                      <a:srgbClr val="1E2761"/>
+                    </a:solidFill>
+                  </a:tcPr>
+                </a:tc>
+                <a:tc>
+                  <a:txBody>
+                    <a:bodyPr/>
+                    <a:lstStyle/>
+                    <a:p>
+                      <a:pPr algn="l" indent="0" marL="0">
+                        <a:buNone/>
+                      </a:pPr>
+                      <a:r>
+                        <a:rPr lang="en-US" sz="1350" b="1" dirty="0">
+                          <a:solidFill>
+                            <a:srgbClr val="FFFFFF"/>
+                          </a:solidFill>
+                          <a:latin typeface="Calibri" pitchFamily="34" charset="0"/>
+                          <a:ea typeface="Calibri" pitchFamily="34" charset="-122"/>
+                          <a:cs typeface="Calibri" pitchFamily="34" charset="-120"/>
+                        </a:rPr>
+                        <a:t>Where AI participates</a:t>
+                      </a:r>
+                      <a:endParaRPr lang="en-US" sz="1350" dirty="0">
+                        <a:latin typeface="Calibri" charset="0"/>
+                        <a:ea typeface="Calibri" charset="0"/>
+                        <a:cs typeface="Calibri" charset="0"/>
+                      </a:endParaRPr>
+                    </a:p>
+                  </a:txBody>
+                  <a:tcPr marL="82296" marR="82296" marT="82296" marB="82296" anchor="ctr">
+                    <a:lnL w="12700" cap="flat" cmpd="sng" algn="ctr">
+                      <a:solidFill>
+                        <a:srgbClr val="D8DEEA"/>
+                      </a:solidFill>
+                      <a:prstDash val="solid"/>
+                      <a:round/>
+                      <a:headEnd type="none" w="med" len="med"/>
+                      <a:tailEnd type="none" w="med" len="med"/>
+                    </a:lnL>
+                    <a:lnR w="12700" cap="flat" cmpd="sng" algn="ctr">
+                      <a:solidFill>
+                        <a:srgbClr val="D8DEEA"/>
+                      </a:solidFill>
+                      <a:prstDash val="solid"/>
+                      <a:round/>
+                      <a:headEnd type="none" w="med" len="med"/>
+                      <a:tailEnd type="none" w="med" len="med"/>
+                    </a:lnR>
+                    <a:lnT w="12700" cap="flat" cmpd="sng" algn="ctr">
+                      <a:solidFill>
+                        <a:srgbClr val="D8DEEA"/>
+                      </a:solidFill>
+                      <a:prstDash val="solid"/>
+                      <a:round/>
+                      <a:headEnd type="none" w="med" len="med"/>
+                      <a:tailEnd type="none" w="med" len="med"/>
+                    </a:lnT>
+                    <a:lnB w="12700" cap="flat" cmpd="sng" algn="ctr">
+                      <a:solidFill>
+                        <a:srgbClr val="D8DEEA"/>
+                      </a:solidFill>
+                      <a:prstDash val="solid"/>
+                      <a:round/>
+                      <a:headEnd type="none" w="med" len="med"/>
+                      <a:tailEnd type="none" w="med" len="med"/>
+                    </a:lnB>
+                    <a:solidFill>
+                      <a:srgbClr val="1E2761"/>
+                    </a:solidFill>
+                  </a:tcPr>
+                </a:tc>
+                <a:tc>
+                  <a:txBody>
+                    <a:bodyPr/>
+                    <a:lstStyle/>
+                    <a:p>
+                      <a:pPr algn="l" indent="0" marL="0">
+                        <a:buNone/>
+                      </a:pPr>
+                      <a:r>
+                        <a:rPr lang="en-US" sz="1350" b="1" dirty="0">
+                          <a:solidFill>
+                            <a:srgbClr val="FFFFFF"/>
+                          </a:solidFill>
+                          <a:latin typeface="Calibri" pitchFamily="34" charset="0"/>
+                          <a:ea typeface="Calibri" pitchFamily="34" charset="-122"/>
+                          <a:cs typeface="Calibri" pitchFamily="34" charset="-120"/>
+                        </a:rPr>
+                        <a:t>The rule</a:t>
+                      </a:r>
+                      <a:endParaRPr lang="en-US" sz="1350" dirty="0">
+                        <a:latin typeface="Calibri" charset="0"/>
+                        <a:ea typeface="Calibri" charset="0"/>
+                        <a:cs typeface="Calibri" charset="0"/>
+                      </a:endParaRPr>
+                    </a:p>
+                  </a:txBody>
+                  <a:tcPr marL="82296" marR="82296" marT="82296" marB="82296" anchor="ctr">
+                    <a:lnL w="12700" cap="flat" cmpd="sng" algn="ctr">
+                      <a:solidFill>
+                        <a:srgbClr val="D8DEEA"/>
+                      </a:solidFill>
+                      <a:prstDash val="solid"/>
+                      <a:round/>
+                      <a:headEnd type="none" w="med" len="med"/>
+                      <a:tailEnd type="none" w="med" len="med"/>
+                    </a:lnL>
+                    <a:lnR w="12700" cap="flat" cmpd="sng" algn="ctr">
+                      <a:solidFill>
+                        <a:srgbClr val="D8DEEA"/>
+                      </a:solidFill>
+                      <a:prstDash val="solid"/>
+                      <a:round/>
+                      <a:headEnd type="none" w="med" len="med"/>
+                      <a:tailEnd type="none" w="med" len="med"/>
+                    </a:lnR>
+                    <a:lnT w="12700" cap="flat" cmpd="sng" algn="ctr">
+                      <a:solidFill>
+                        <a:srgbClr val="D8DEEA"/>
+                      </a:solidFill>
+                      <a:prstDash val="solid"/>
+                      <a:round/>
+                      <a:headEnd type="none" w="med" len="med"/>
+                      <a:tailEnd type="none" w="med" len="med"/>
+                    </a:lnT>
+                    <a:lnB w="12700" cap="flat" cmpd="sng" algn="ctr">
+                      <a:solidFill>
+                        <a:srgbClr val="D8DEEA"/>
+                      </a:solidFill>
+                      <a:prstDash val="solid"/>
+                      <a:round/>
+                      <a:headEnd type="none" w="med" len="med"/>
+                      <a:tailEnd type="none" w="med" len="med"/>
+                    </a:lnB>
+                    <a:solidFill>
+                      <a:srgbClr val="1E2761"/>
+                    </a:solidFill>
+                  </a:tcPr>
+                </a:tc>
+              </a:tr>
+              <a:tr h="566928">
+                <a:tc>
+                  <a:txBody>
+                    <a:bodyPr/>
+                    <a:lstStyle/>
+                    <a:p>
+                      <a:pPr algn="l" indent="0" marL="0">
+                        <a:buNone/>
+                      </a:pPr>
+                      <a:r>
+                        <a:rPr lang="en-US" sz="1200" b="1" dirty="0">
+                          <a:solidFill>
+                            <a:srgbClr val="212121"/>
+                          </a:solidFill>
+                          <a:latin typeface="Calibri" pitchFamily="34" charset="0"/>
+                          <a:ea typeface="Calibri" pitchFamily="34" charset="-122"/>
+                          <a:cs typeface="Calibri" pitchFamily="34" charset="-120"/>
+                        </a:rPr>
+                        <a:t>Model / spec</a:t>
+                      </a:r>
+                      <a:endParaRPr lang="en-US" sz="1200" dirty="0">
+                        <a:latin typeface="Calibri" charset="0"/>
+                        <a:ea typeface="Calibri" charset="0"/>
+                        <a:cs typeface="Calibri" charset="0"/>
+                      </a:endParaRPr>
+                    </a:p>
+                  </a:txBody>
+                  <a:tcPr marL="82296" marR="82296" marT="82296" marB="82296" anchor="ctr">
+                    <a:lnL w="12700" cap="flat" cmpd="sng" algn="ctr">
+                      <a:solidFill>
+                        <a:srgbClr val="D8DEEA"/>
+                      </a:solidFill>
+                      <a:prstDash val="solid"/>
+                      <a:round/>
+                      <a:headEnd type="none" w="med" len="med"/>
+                      <a:tailEnd type="none" w="med" len="med"/>
+                    </a:lnL>
+                    <a:lnR w="12700" cap="flat" cmpd="sng" algn="ctr">
+                      <a:solidFill>
+                        <a:srgbClr val="D8DEEA"/>
+                      </a:solidFill>
+                      <a:prstDash val="solid"/>
+                      <a:round/>
+                      <a:headEnd type="none" w="med" len="med"/>
+                      <a:tailEnd type="none" w="med" len="med"/>
+                    </a:lnR>
+                    <a:lnT w="12700" cap="flat" cmpd="sng" algn="ctr">
+                      <a:solidFill>
+                        <a:srgbClr val="D8DEEA"/>
+                      </a:solidFill>
+                      <a:prstDash val="solid"/>
+                      <a:round/>
+                      <a:headEnd type="none" w="med" len="med"/>
+                      <a:tailEnd type="none" w="med" len="med"/>
+                    </a:lnT>
+                    <a:lnB w="12700" cap="flat" cmpd="sng" algn="ctr">
+                      <a:solidFill>
+                        <a:srgbClr val="D8DEEA"/>
+                      </a:solidFill>
+                      <a:prstDash val="solid"/>
+                      <a:round/>
+                      <a:headEnd type="none" w="med" len="med"/>
+                      <a:tailEnd type="none" w="med" len="med"/>
+                    </a:lnB>
+                    <a:solidFill>
+                      <a:srgbClr val="FFFFFF"/>
+                    </a:solidFill>
+                  </a:tcPr>
+                </a:tc>
+                <a:tc>
+                  <a:txBody>
+                    <a:bodyPr/>
+                    <a:lstStyle/>
+                    <a:p>
+                      <a:pPr algn="l" indent="0" marL="0">
+                        <a:buNone/>
+                      </a:pPr>
+                      <a:r>
+                        <a:rPr lang="en-US" sz="1200" dirty="0">
+                          <a:solidFill>
+                            <a:srgbClr val="212121"/>
+                          </a:solidFill>
+                          <a:latin typeface="Calibri" pitchFamily="34" charset="0"/>
+                          <a:ea typeface="Calibri" pitchFamily="34" charset="-122"/>
+                          <a:cs typeface="Calibri" pitchFamily="34" charset="-120"/>
+                        </a:rPr>
+                        <a:t>LLMs may draft or restate specs</a:t>
+                      </a:r>
+                      <a:endParaRPr lang="en-US" sz="1200" dirty="0">
+                        <a:latin typeface="Calibri" charset="0"/>
+                        <a:ea typeface="Calibri" charset="0"/>
+                        <a:cs typeface="Calibri" charset="0"/>
+                      </a:endParaRPr>
+                    </a:p>
+                  </a:txBody>
+                  <a:tcPr marL="82296" marR="82296" marT="82296" marB="82296" anchor="ctr">
+                    <a:lnL w="12700" cap="flat" cmpd="sng" algn="ctr">
+                      <a:solidFill>
+                        <a:srgbClr val="D8DEEA"/>
+                      </a:solidFill>
+                      <a:prstDash val="solid"/>
+                      <a:round/>
+                      <a:headEnd type="none" w="med" len="med"/>
+                      <a:tailEnd type="none" w="med" len="med"/>
+                    </a:lnL>
+                    <a:lnR w="12700" cap="flat" cmpd="sng" algn="ctr">
+                      <a:solidFill>
+                        <a:srgbClr val="D8DEEA"/>
+                      </a:solidFill>
+                      <a:prstDash val="solid"/>
+                      <a:round/>
+                      <a:headEnd type="none" w="med" len="med"/>
+                      <a:tailEnd type="none" w="med" len="med"/>
+                    </a:lnR>
+                    <a:lnT w="12700" cap="flat" cmpd="sng" algn="ctr">
+                      <a:solidFill>
+                        <a:srgbClr val="D8DEEA"/>
+                      </a:solidFill>
+                      <a:prstDash val="solid"/>
+                      <a:round/>
+                      <a:headEnd type="none" w="med" len="med"/>
+                      <a:tailEnd type="none" w="med" len="med"/>
+                    </a:lnT>
+                    <a:lnB w="12700" cap="flat" cmpd="sng" algn="ctr">
+                      <a:solidFill>
+                        <a:srgbClr val="D8DEEA"/>
+                      </a:solidFill>
+                      <a:prstDash val="solid"/>
+                      <a:round/>
+                      <a:headEnd type="none" w="med" len="med"/>
+                      <a:tailEnd type="none" w="med" len="med"/>
+                    </a:lnB>
+                    <a:solidFill>
+                      <a:srgbClr val="FFFFFF"/>
+                    </a:solidFill>
+                  </a:tcPr>
+                </a:tc>
+                <a:tc>
+                  <a:txBody>
+                    <a:bodyPr/>
+                    <a:lstStyle/>
+                    <a:p>
+                      <a:pPr algn="l" indent="0" marL="0">
+                        <a:buNone/>
+                      </a:pPr>
+                      <a:r>
+                        <a:rPr lang="en-US" sz="1200" dirty="0">
+                          <a:solidFill>
+                            <a:srgbClr val="212121"/>
+                          </a:solidFill>
+                          <a:latin typeface="Calibri" pitchFamily="34" charset="0"/>
+                          <a:ea typeface="Calibri" pitchFamily="34" charset="-122"/>
+                          <a:cs typeface="Calibri" pitchFamily="34" charset="-120"/>
+                        </a:rPr>
+                        <a:t>only the administrator </a:t>
+                      </a:r>
+                      <a:pPr algn="l" indent="0" marL="0">
+                        <a:buNone/>
+                      </a:pPr>
+                      <a:r>
+                        <a:rPr lang="en-US" sz="1200" b="1" dirty="0">
+                          <a:solidFill>
+                            <a:srgbClr val="212121"/>
+                          </a:solidFill>
+                          <a:latin typeface="Calibri" pitchFamily="34" charset="0"/>
+                          <a:ea typeface="Calibri" pitchFamily="34" charset="-122"/>
+                          <a:cs typeface="Calibri" pitchFamily="34" charset="-120"/>
+                        </a:rPr>
+                        <a:t>blesses</a:t>
+                      </a:r>
+                      <a:pPr algn="l" indent="0" marL="0">
+                        <a:buNone/>
+                      </a:pPr>
+                      <a:r>
+                        <a:rPr lang="en-US" sz="1200" dirty="0">
+                          <a:solidFill>
+                            <a:srgbClr val="212121"/>
+                          </a:solidFill>
+                          <a:latin typeface="Calibri" pitchFamily="34" charset="0"/>
+                          <a:ea typeface="Calibri" pitchFamily="34" charset="-122"/>
+                          <a:cs typeface="Calibri" pitchFamily="34" charset="-120"/>
+                        </a:rPr>
+                        <a:t> — authority is human</a:t>
+                      </a:r>
+                      <a:endParaRPr lang="en-US" sz="1200" dirty="0">
+                        <a:latin typeface="Calibri" charset="0"/>
+                        <a:ea typeface="Calibri" charset="0"/>
+                        <a:cs typeface="Calibri" charset="0"/>
+                      </a:endParaRPr>
+                    </a:p>
+                  </a:txBody>
+                  <a:tcPr marL="82296" marR="82296" marT="82296" marB="82296" anchor="ctr">
+                    <a:lnL w="12700" cap="flat" cmpd="sng" algn="ctr">
+                      <a:solidFill>
+                        <a:srgbClr val="D8DEEA"/>
+                      </a:solidFill>
+                      <a:prstDash val="solid"/>
+                      <a:round/>
+                      <a:headEnd type="none" w="med" len="med"/>
+                      <a:tailEnd type="none" w="med" len="med"/>
+                    </a:lnL>
+                    <a:lnR w="12700" cap="flat" cmpd="sng" algn="ctr">
+                      <a:solidFill>
+                        <a:srgbClr val="D8DEEA"/>
+                      </a:solidFill>
+                      <a:prstDash val="solid"/>
+                      <a:round/>
+                      <a:headEnd type="none" w="med" len="med"/>
+                      <a:tailEnd type="none" w="med" len="med"/>
+                    </a:lnR>
+                    <a:lnT w="12700" cap="flat" cmpd="sng" algn="ctr">
+                      <a:solidFill>
+                        <a:srgbClr val="D8DEEA"/>
+                      </a:solidFill>
+                      <a:prstDash val="solid"/>
+                      <a:round/>
+                      <a:headEnd type="none" w="med" len="med"/>
+                      <a:tailEnd type="none" w="med" len="med"/>
+                    </a:lnT>
+                    <a:lnB w="12700" cap="flat" cmpd="sng" algn="ctr">
+                      <a:solidFill>
+                        <a:srgbClr val="D8DEEA"/>
+                      </a:solidFill>
+                      <a:prstDash val="solid"/>
+                      <a:round/>
+                      <a:headEnd type="none" w="med" len="med"/>
+                      <a:tailEnd type="none" w="med" len="med"/>
+                    </a:lnB>
+                    <a:solidFill>
+                      <a:srgbClr val="FFFFFF"/>
+                    </a:solidFill>
+                  </a:tcPr>
+                </a:tc>
+              </a:tr>
+              <a:tr h="566928">
+                <a:tc>
+                  <a:txBody>
+                    <a:bodyPr/>
+                    <a:lstStyle/>
+                    <a:p>
+                      <a:pPr algn="l" indent="0" marL="0">
+                        <a:buNone/>
+                      </a:pPr>
+                      <a:r>
+                        <a:rPr lang="en-US" sz="1200" b="1" dirty="0">
+                          <a:solidFill>
+                            <a:srgbClr val="212121"/>
+                          </a:solidFill>
+                          <a:latin typeface="Calibri" pitchFamily="34" charset="0"/>
+                          <a:ea typeface="Calibri" pitchFamily="34" charset="-122"/>
+                          <a:cs typeface="Calibri" pitchFamily="34" charset="-120"/>
+                        </a:rPr>
+                        <a:t>Implementation</a:t>
+                      </a:r>
+                      <a:endParaRPr lang="en-US" sz="1200" dirty="0">
+                        <a:latin typeface="Calibri" charset="0"/>
+                        <a:ea typeface="Calibri" charset="0"/>
+                        <a:cs typeface="Calibri" charset="0"/>
+                      </a:endParaRPr>
+                    </a:p>
+                  </a:txBody>
+                  <a:tcPr marL="82296" marR="82296" marT="82296" marB="82296" anchor="ctr">
+                    <a:lnL w="12700" cap="flat" cmpd="sng" algn="ctr">
+                      <a:solidFill>
+                        <a:srgbClr val="D8DEEA"/>
+                      </a:solidFill>
+                      <a:prstDash val="solid"/>
+                      <a:round/>
+                      <a:headEnd type="none" w="med" len="med"/>
+                      <a:tailEnd type="none" w="med" len="med"/>
+                    </a:lnL>
+                    <a:lnR w="12700" cap="flat" cmpd="sng" algn="ctr">
+                      <a:solidFill>
+                        <a:srgbClr val="D8DEEA"/>
+                      </a:solidFill>
+                      <a:prstDash val="solid"/>
+                      <a:round/>
+                      <a:headEnd type="none" w="med" len="med"/>
+                      <a:tailEnd type="none" w="med" len="med"/>
+                    </a:lnR>
+                    <a:lnT w="12700" cap="flat" cmpd="sng" algn="ctr">
+                      <a:solidFill>
+                        <a:srgbClr val="D8DEEA"/>
+                      </a:solidFill>
+                      <a:prstDash val="solid"/>
+                      <a:round/>
+                      <a:headEnd type="none" w="med" len="med"/>
+                      <a:tailEnd type="none" w="med" len="med"/>
+                    </a:lnT>
+                    <a:lnB w="12700" cap="flat" cmpd="sng" algn="ctr">
+                      <a:solidFill>
+                        <a:srgbClr val="D8DEEA"/>
+                      </a:solidFill>
+                      <a:prstDash val="solid"/>
+                      <a:round/>
+                      <a:headEnd type="none" w="med" len="med"/>
+                      <a:tailEnd type="none" w="med" len="med"/>
+                    </a:lnB>
+                    <a:solidFill>
+                      <a:srgbClr val="FFFFFF"/>
+                    </a:solidFill>
+                  </a:tcPr>
+                </a:tc>
+                <a:tc>
+                  <a:txBody>
+                    <a:bodyPr/>
+                    <a:lstStyle/>
+                    <a:p>
+                      <a:pPr algn="l" indent="0" marL="0">
+                        <a:buNone/>
+                      </a:pPr>
+                      <a:r>
+                        <a:rPr lang="en-US" sz="1200" dirty="0">
+                          <a:solidFill>
+                            <a:srgbClr val="212121"/>
+                          </a:solidFill>
+                          <a:latin typeface="Calibri" pitchFamily="34" charset="0"/>
+                          <a:ea typeface="Calibri" pitchFamily="34" charset="-122"/>
+                          <a:cs typeface="Calibri" pitchFamily="34" charset="-120"/>
+                        </a:rPr>
+                        <a:t>spec-guided synthesis / re-derivation with LLM engines</a:t>
+                      </a:r>
+                      <a:endParaRPr lang="en-US" sz="1200" dirty="0">
+                        <a:latin typeface="Calibri" charset="0"/>
+                        <a:ea typeface="Calibri" charset="0"/>
+                        <a:cs typeface="Calibri" charset="0"/>
+                      </a:endParaRPr>
+                    </a:p>
+                  </a:txBody>
+                  <a:tcPr marL="82296" marR="82296" marT="82296" marB="82296" anchor="ctr">
+                    <a:lnL w="12700" cap="flat" cmpd="sng" algn="ctr">
+                      <a:solidFill>
+                        <a:srgbClr val="D8DEEA"/>
+                      </a:solidFill>
+                      <a:prstDash val="solid"/>
+                      <a:round/>
+                      <a:headEnd type="none" w="med" len="med"/>
+                      <a:tailEnd type="none" w="med" len="med"/>
+                    </a:lnL>
+                    <a:lnR w="12700" cap="flat" cmpd="sng" algn="ctr">
+                      <a:solidFill>
+                        <a:srgbClr val="D8DEEA"/>
+                      </a:solidFill>
+                      <a:prstDash val="solid"/>
+                      <a:round/>
+                      <a:headEnd type="none" w="med" len="med"/>
+                      <a:tailEnd type="none" w="med" len="med"/>
+                    </a:lnR>
+                    <a:lnT w="12700" cap="flat" cmpd="sng" algn="ctr">
+                      <a:solidFill>
+                        <a:srgbClr val="D8DEEA"/>
+                      </a:solidFill>
+                      <a:prstDash val="solid"/>
+                      <a:round/>
+                      <a:headEnd type="none" w="med" len="med"/>
+                      <a:tailEnd type="none" w="med" len="med"/>
+                    </a:lnT>
+                    <a:lnB w="12700" cap="flat" cmpd="sng" algn="ctr">
+                      <a:solidFill>
+                        <a:srgbClr val="D8DEEA"/>
+                      </a:solidFill>
+                      <a:prstDash val="solid"/>
+                      <a:round/>
+                      <a:headEnd type="none" w="med" len="med"/>
+                      <a:tailEnd type="none" w="med" len="med"/>
+                    </a:lnB>
+                    <a:solidFill>
+                      <a:srgbClr val="FFFFFF"/>
+                    </a:solidFill>
+                  </a:tcPr>
+                </a:tc>
+                <a:tc>
+                  <a:txBody>
+                    <a:bodyPr/>
+                    <a:lstStyle/>
+                    <a:p>
+                      <a:pPr algn="l" indent="0" marL="0">
+                        <a:buNone/>
+                      </a:pPr>
+                      <a:r>
+                        <a:rPr lang="en-US" sz="1200" dirty="0">
+                          <a:solidFill>
+                            <a:srgbClr val="212121"/>
+                          </a:solidFill>
+                          <a:latin typeface="Calibri" pitchFamily="34" charset="0"/>
+                          <a:ea typeface="Calibri" pitchFamily="34" charset="-122"/>
+                          <a:cs typeface="Calibri" pitchFamily="34" charset="-120"/>
+                        </a:rPr>
+                        <a:t>the seed proofs must prove again against the blessed statements</a:t>
+                      </a:r>
+                      <a:endParaRPr lang="en-US" sz="1200" dirty="0">
+                        <a:latin typeface="Calibri" charset="0"/>
+                        <a:ea typeface="Calibri" charset="0"/>
+                        <a:cs typeface="Calibri" charset="0"/>
+                      </a:endParaRPr>
+                    </a:p>
+                  </a:txBody>
+                  <a:tcPr marL="82296" marR="82296" marT="82296" marB="82296" anchor="ctr">
+                    <a:lnL w="12700" cap="flat" cmpd="sng" algn="ctr">
+                      <a:solidFill>
+                        <a:srgbClr val="D8DEEA"/>
+                      </a:solidFill>
+                      <a:prstDash val="solid"/>
+                      <a:round/>
+                      <a:headEnd type="none" w="med" len="med"/>
+                      <a:tailEnd type="none" w="med" len="med"/>
+                    </a:lnL>
+                    <a:lnR w="12700" cap="flat" cmpd="sng" algn="ctr">
+                      <a:solidFill>
+                        <a:srgbClr val="D8DEEA"/>
+                      </a:solidFill>
+                      <a:prstDash val="solid"/>
+                      <a:round/>
+                      <a:headEnd type="none" w="med" len="med"/>
+                      <a:tailEnd type="none" w="med" len="med"/>
+                    </a:lnR>
+                    <a:lnT w="12700" cap="flat" cmpd="sng" algn="ctr">
+                      <a:solidFill>
+                        <a:srgbClr val="D8DEEA"/>
+                      </a:solidFill>
+                      <a:prstDash val="solid"/>
+                      <a:round/>
+                      <a:headEnd type="none" w="med" len="med"/>
+                      <a:tailEnd type="none" w="med" len="med"/>
+                    </a:lnT>
+                    <a:lnB w="12700" cap="flat" cmpd="sng" algn="ctr">
+                      <a:solidFill>
+                        <a:srgbClr val="D8DEEA"/>
+                      </a:solidFill>
+                      <a:prstDash val="solid"/>
+                      <a:round/>
+                      <a:headEnd type="none" w="med" len="med"/>
+                      <a:tailEnd type="none" w="med" len="med"/>
+                    </a:lnB>
+                    <a:solidFill>
+                      <a:srgbClr val="FFFFFF"/>
+                    </a:solidFill>
+                  </a:tcPr>
+                </a:tc>
+              </a:tr>
+              <a:tr h="914400">
+                <a:tc>
+                  <a:txBody>
+                    <a:bodyPr/>
+                    <a:lstStyle/>
+                    <a:p>
+                      <a:pPr algn="l" indent="0" marL="0">
+                        <a:buNone/>
+                      </a:pPr>
+                      <a:r>
+                        <a:rPr lang="en-US" sz="1200" b="1" dirty="0">
+                          <a:solidFill>
+                            <a:srgbClr val="212121"/>
+                          </a:solidFill>
+                          <a:latin typeface="Calibri" pitchFamily="34" charset="0"/>
+                          <a:ea typeface="Calibri" pitchFamily="34" charset="-122"/>
+                          <a:cs typeface="Calibri" pitchFamily="34" charset="-120"/>
+                        </a:rPr>
+                        <a:t>Proofs</a:t>
+                      </a:r>
+                      <a:endParaRPr lang="en-US" sz="1200" dirty="0">
+                        <a:latin typeface="Calibri" charset="0"/>
+                        <a:ea typeface="Calibri" charset="0"/>
+                        <a:cs typeface="Calibri" charset="0"/>
+                      </a:endParaRPr>
+                    </a:p>
+                  </a:txBody>
+                  <a:tcPr marL="82296" marR="82296" marT="82296" marB="82296" anchor="ctr">
+                    <a:lnL w="12700" cap="flat" cmpd="sng" algn="ctr">
+                      <a:solidFill>
+                        <a:srgbClr val="D8DEEA"/>
+                      </a:solidFill>
+                      <a:prstDash val="solid"/>
+                      <a:round/>
+                      <a:headEnd type="none" w="med" len="med"/>
+                      <a:tailEnd type="none" w="med" len="med"/>
+                    </a:lnL>
+                    <a:lnR w="12700" cap="flat" cmpd="sng" algn="ctr">
+                      <a:solidFill>
+                        <a:srgbClr val="D8DEEA"/>
+                      </a:solidFill>
+                      <a:prstDash val="solid"/>
+                      <a:round/>
+                      <a:headEnd type="none" w="med" len="med"/>
+                      <a:tailEnd type="none" w="med" len="med"/>
+                    </a:lnR>
+                    <a:lnT w="12700" cap="flat" cmpd="sng" algn="ctr">
+                      <a:solidFill>
+                        <a:srgbClr val="D8DEEA"/>
+                      </a:solidFill>
+                      <a:prstDash val="solid"/>
+                      <a:round/>
+                      <a:headEnd type="none" w="med" len="med"/>
+                      <a:tailEnd type="none" w="med" len="med"/>
+                    </a:lnT>
+                    <a:lnB w="12700" cap="flat" cmpd="sng" algn="ctr">
+                      <a:solidFill>
+                        <a:srgbClr val="D8DEEA"/>
+                      </a:solidFill>
+                      <a:prstDash val="solid"/>
+                      <a:round/>
+                      <a:headEnd type="none" w="med" len="med"/>
+                      <a:tailEnd type="none" w="med" len="med"/>
+                    </a:lnB>
+                    <a:solidFill>
+                      <a:srgbClr val="FFFFFF"/>
+                    </a:solidFill>
+                  </a:tcPr>
+                </a:tc>
+                <a:tc>
+                  <a:txBody>
+                    <a:bodyPr/>
+                    <a:lstStyle/>
+                    <a:p>
+                      <a:pPr algn="l" indent="0" marL="0">
+                        <a:buNone/>
+                      </a:pPr>
+                      <a:r>
+                        <a:rPr lang="en-US" sz="1200" dirty="0">
+                          <a:solidFill>
+                            <a:srgbClr val="212121"/>
+                          </a:solidFill>
+                          <a:latin typeface="Calibri" pitchFamily="34" charset="0"/>
+                          <a:ea typeface="Calibri" pitchFamily="34" charset="-122"/>
+                          <a:cs typeface="Calibri" pitchFamily="34" charset="-120"/>
+                        </a:rPr>
+                        <a:t>LLM-suggested tactic portfolio (deterministic at runtime) · LLM API calls + LLM-assisted desktop sessions (loop is paused) · Custom proof repair agents (AutoVerus · KU Dogtreat linear planner)</a:t>
+                      </a:r>
+                      <a:endParaRPr lang="en-US" sz="1200" dirty="0">
+                        <a:latin typeface="Calibri" charset="0"/>
+                        <a:ea typeface="Calibri" charset="0"/>
+                        <a:cs typeface="Calibri" charset="0"/>
+                      </a:endParaRPr>
+                    </a:p>
+                  </a:txBody>
+                  <a:tcPr marL="82296" marR="82296" marT="82296" marB="82296" anchor="ctr">
+                    <a:lnL w="12700" cap="flat" cmpd="sng" algn="ctr">
+                      <a:solidFill>
+                        <a:srgbClr val="D8DEEA"/>
+                      </a:solidFill>
+                      <a:prstDash val="solid"/>
+                      <a:round/>
+                      <a:headEnd type="none" w="med" len="med"/>
+                      <a:tailEnd type="none" w="med" len="med"/>
+                    </a:lnL>
+                    <a:lnR w="12700" cap="flat" cmpd="sng" algn="ctr">
+                      <a:solidFill>
+                        <a:srgbClr val="D8DEEA"/>
+                      </a:solidFill>
+                      <a:prstDash val="solid"/>
+                      <a:round/>
+                      <a:headEnd type="none" w="med" len="med"/>
+                      <a:tailEnd type="none" w="med" len="med"/>
+                    </a:lnR>
+                    <a:lnT w="12700" cap="flat" cmpd="sng" algn="ctr">
+                      <a:solidFill>
+                        <a:srgbClr val="D8DEEA"/>
+                      </a:solidFill>
+                      <a:prstDash val="solid"/>
+                      <a:round/>
+                      <a:headEnd type="none" w="med" len="med"/>
+                      <a:tailEnd type="none" w="med" len="med"/>
+                    </a:lnT>
+                    <a:lnB w="12700" cap="flat" cmpd="sng" algn="ctr">
+                      <a:solidFill>
+                        <a:srgbClr val="D8DEEA"/>
+                      </a:solidFill>
+                      <a:prstDash val="solid"/>
+                      <a:round/>
+                      <a:headEnd type="none" w="med" len="med"/>
+                      <a:tailEnd type="none" w="med" len="med"/>
+                    </a:lnB>
+                    <a:solidFill>
+                      <a:srgbClr val="FFFFFF"/>
+                    </a:solidFill>
+                  </a:tcPr>
+                </a:tc>
+                <a:tc>
+                  <a:txBody>
+                    <a:bodyPr/>
+                    <a:lstStyle/>
+                    <a:p>
+                      <a:pPr algn="l" indent="0" marL="0">
+                        <a:buNone/>
+                      </a:pPr>
+                      <a:r>
+                        <a:rPr lang="en-US" sz="1200" dirty="0">
+                          <a:solidFill>
+                            <a:srgbClr val="212121"/>
+                          </a:solidFill>
+                          <a:latin typeface="Calibri" pitchFamily="34" charset="0"/>
+                          <a:ea typeface="Calibri" pitchFamily="34" charset="-122"/>
+                          <a:cs typeface="Calibri" pitchFamily="34" charset="-120"/>
+                        </a:rPr>
+                        <a:t>a repair claim is worthless without evidence; only fresh measurement re-establishes good standing</a:t>
+                      </a:r>
+                      <a:endParaRPr lang="en-US" sz="1200" dirty="0">
+                        <a:latin typeface="Calibri" charset="0"/>
+                        <a:ea typeface="Calibri" charset="0"/>
+                        <a:cs typeface="Calibri" charset="0"/>
+                      </a:endParaRPr>
+                    </a:p>
+                  </a:txBody>
+                  <a:tcPr marL="82296" marR="82296" marT="82296" marB="82296" anchor="ctr">
+                    <a:lnL w="12700" cap="flat" cmpd="sng" algn="ctr">
+                      <a:solidFill>
+                        <a:srgbClr val="D8DEEA"/>
+                      </a:solidFill>
+                      <a:prstDash val="solid"/>
+                      <a:round/>
+                      <a:headEnd type="none" w="med" len="med"/>
+                      <a:tailEnd type="none" w="med" len="med"/>
+                    </a:lnL>
+                    <a:lnR w="12700" cap="flat" cmpd="sng" algn="ctr">
+                      <a:solidFill>
+                        <a:srgbClr val="D8DEEA"/>
+                      </a:solidFill>
+                      <a:prstDash val="solid"/>
+                      <a:round/>
+                      <a:headEnd type="none" w="med" len="med"/>
+                      <a:tailEnd type="none" w="med" len="med"/>
+                    </a:lnR>
+                    <a:lnT w="12700" cap="flat" cmpd="sng" algn="ctr">
+                      <a:solidFill>
+                        <a:srgbClr val="D8DEEA"/>
+                      </a:solidFill>
+                      <a:prstDash val="solid"/>
+                      <a:round/>
+                      <a:headEnd type="none" w="med" len="med"/>
+                      <a:tailEnd type="none" w="med" len="med"/>
+                    </a:lnT>
+                    <a:lnB w="12700" cap="flat" cmpd="sng" algn="ctr">
+                      <a:solidFill>
+                        <a:srgbClr val="D8DEEA"/>
+                      </a:solidFill>
+                      <a:prstDash val="solid"/>
+                      <a:round/>
+                      <a:headEnd type="none" w="med" len="med"/>
+                      <a:tailEnd type="none" w="med" len="med"/>
+                    </a:lnB>
+                    <a:solidFill>
+                      <a:srgbClr val="FFFFFF"/>
+                    </a:solidFill>
+                  </a:tcPr>
+                </a:tc>
+              </a:tr>
+              <a:tr h="658368">
+                <a:tc>
+                  <a:txBody>
+                    <a:bodyPr/>
+                    <a:lstStyle/>
+                    <a:p>
+                      <a:pPr algn="l" indent="0" marL="0">
+                        <a:buNone/>
+                      </a:pPr>
+                      <a:r>
+                        <a:rPr lang="en-US" sz="1200" b="1" dirty="0">
+                          <a:solidFill>
+                            <a:srgbClr val="212121"/>
+                          </a:solidFill>
+                          <a:latin typeface="Calibri" pitchFamily="34" charset="0"/>
+                          <a:ea typeface="Calibri" pitchFamily="34" charset="-122"/>
+                          <a:cs typeface="Calibri" pitchFamily="34" charset="-120"/>
+                        </a:rPr>
+                        <a:t>Verification &amp; appraisal</a:t>
+                      </a:r>
+                      <a:endParaRPr lang="en-US" sz="1200" dirty="0">
+                        <a:latin typeface="Calibri" charset="0"/>
+                        <a:ea typeface="Calibri" charset="0"/>
+                        <a:cs typeface="Calibri" charset="0"/>
+                      </a:endParaRPr>
+                    </a:p>
+                  </a:txBody>
+                  <a:tcPr marL="82296" marR="82296" marT="82296" marB="82296" anchor="ctr">
+                    <a:lnL w="12700" cap="flat" cmpd="sng" algn="ctr">
+                      <a:solidFill>
+                        <a:srgbClr val="D8DEEA"/>
+                      </a:solidFill>
+                      <a:prstDash val="solid"/>
+                      <a:round/>
+                      <a:headEnd type="none" w="med" len="med"/>
+                      <a:tailEnd type="none" w="med" len="med"/>
+                    </a:lnL>
+                    <a:lnR w="12700" cap="flat" cmpd="sng" algn="ctr">
+                      <a:solidFill>
+                        <a:srgbClr val="D8DEEA"/>
+                      </a:solidFill>
+                      <a:prstDash val="solid"/>
+                      <a:round/>
+                      <a:headEnd type="none" w="med" len="med"/>
+                      <a:tailEnd type="none" w="med" len="med"/>
+                    </a:lnR>
+                    <a:lnT w="12700" cap="flat" cmpd="sng" algn="ctr">
+                      <a:solidFill>
+                        <a:srgbClr val="D8DEEA"/>
+                      </a:solidFill>
+                      <a:prstDash val="solid"/>
+                      <a:round/>
+                      <a:headEnd type="none" w="med" len="med"/>
+                      <a:tailEnd type="none" w="med" len="med"/>
+                    </a:lnT>
+                    <a:lnB w="12700" cap="flat" cmpd="sng" algn="ctr">
+                      <a:solidFill>
+                        <a:srgbClr val="D8DEEA"/>
+                      </a:solidFill>
+                      <a:prstDash val="solid"/>
+                      <a:round/>
+                      <a:headEnd type="none" w="med" len="med"/>
+                      <a:tailEnd type="none" w="med" len="med"/>
+                    </a:lnB>
+                    <a:solidFill>
+                      <a:srgbClr val="E4E7EF"/>
+                    </a:solidFill>
+                  </a:tcPr>
+                </a:tc>
+                <a:tc>
+                  <a:txBody>
+                    <a:bodyPr/>
+                    <a:lstStyle/>
+                    <a:p>
+                      <a:pPr algn="l" indent="0" marL="0">
+                        <a:buNone/>
+                      </a:pPr>
+                      <a:r>
+                        <a:rPr lang="en-US" sz="1200" b="1" dirty="0">
+                          <a:solidFill>
+                            <a:srgbClr val="212121"/>
+                          </a:solidFill>
+                          <a:latin typeface="Calibri" pitchFamily="34" charset="0"/>
+                          <a:ea typeface="Calibri" pitchFamily="34" charset="-122"/>
+                          <a:cs typeface="Calibri" pitchFamily="34" charset="-120"/>
+                        </a:rPr>
+                        <a:t>none — by design</a:t>
+                      </a:r>
+                      <a:endParaRPr lang="en-US" sz="1200" dirty="0">
+                        <a:latin typeface="Calibri" charset="0"/>
+                        <a:ea typeface="Calibri" charset="0"/>
+                        <a:cs typeface="Calibri" charset="0"/>
+                      </a:endParaRPr>
+                    </a:p>
+                  </a:txBody>
+                  <a:tcPr marL="82296" marR="82296" marT="82296" marB="82296" anchor="ctr">
+                    <a:lnL w="12700" cap="flat" cmpd="sng" algn="ctr">
+                      <a:solidFill>
+                        <a:srgbClr val="D8DEEA"/>
+                      </a:solidFill>
+                      <a:prstDash val="solid"/>
+                      <a:round/>
+                      <a:headEnd type="none" w="med" len="med"/>
+                      <a:tailEnd type="none" w="med" len="med"/>
+                    </a:lnL>
+                    <a:lnR w="12700" cap="flat" cmpd="sng" algn="ctr">
+                      <a:solidFill>
+                        <a:srgbClr val="D8DEEA"/>
+                      </a:solidFill>
+                      <a:prstDash val="solid"/>
+                      <a:round/>
+                      <a:headEnd type="none" w="med" len="med"/>
+                      <a:tailEnd type="none" w="med" len="med"/>
+                    </a:lnR>
+                    <a:lnT w="12700" cap="flat" cmpd="sng" algn="ctr">
+                      <a:solidFill>
+                        <a:srgbClr val="D8DEEA"/>
+                      </a:solidFill>
+                      <a:prstDash val="solid"/>
+                      <a:round/>
+                      <a:headEnd type="none" w="med" len="med"/>
+                      <a:tailEnd type="none" w="med" len="med"/>
+                    </a:lnT>
+                    <a:lnB w="12700" cap="flat" cmpd="sng" algn="ctr">
+                      <a:solidFill>
+                        <a:srgbClr val="D8DEEA"/>
+                      </a:solidFill>
+                      <a:prstDash val="solid"/>
+                      <a:round/>
+                      <a:headEnd type="none" w="med" len="med"/>
+                      <a:tailEnd type="none" w="med" len="med"/>
+                    </a:lnB>
+                    <a:solidFill>
+                      <a:srgbClr val="E4E7EF"/>
+                    </a:solidFill>
+                  </a:tcPr>
+                </a:tc>
+                <a:tc>
+                  <a:txBody>
+                    <a:bodyPr/>
+                    <a:lstStyle/>
+                    <a:p>
+                      <a:pPr algn="l" indent="0" marL="0">
+                        <a:buNone/>
+                      </a:pPr>
+                      <a:r>
+                        <a:rPr lang="en-US" sz="1200" dirty="0">
+                          <a:solidFill>
+                            <a:srgbClr val="212121"/>
+                          </a:solidFill>
+                          <a:latin typeface="Calibri" pitchFamily="34" charset="0"/>
+                          <a:ea typeface="Calibri" pitchFamily="34" charset="-122"/>
+                          <a:cs typeface="Calibri" pitchFamily="34" charset="-120"/>
+                        </a:rPr>
+                        <a:t>deterministic judges: proof kernels (Rocq, Lean, Verus), hash appraisal vs signed goldens, semantic analysis of source code</a:t>
+                      </a:r>
+                      <a:endParaRPr lang="en-US" sz="1200" dirty="0">
+                        <a:latin typeface="Calibri" charset="0"/>
+                        <a:ea typeface="Calibri" charset="0"/>
+                        <a:cs typeface="Calibri" charset="0"/>
+                      </a:endParaRPr>
+                    </a:p>
+                  </a:txBody>
+                  <a:tcPr marL="82296" marR="82296" marT="82296" marB="82296" anchor="ctr">
+                    <a:lnL w="12700" cap="flat" cmpd="sng" algn="ctr">
+                      <a:solidFill>
+                        <a:srgbClr val="D8DEEA"/>
+                      </a:solidFill>
+                      <a:prstDash val="solid"/>
+                      <a:round/>
+                      <a:headEnd type="none" w="med" len="med"/>
+                      <a:tailEnd type="none" w="med" len="med"/>
+                    </a:lnL>
+                    <a:lnR w="12700" cap="flat" cmpd="sng" algn="ctr">
+                      <a:solidFill>
+                        <a:srgbClr val="D8DEEA"/>
+                      </a:solidFill>
+                      <a:prstDash val="solid"/>
+                      <a:round/>
+                      <a:headEnd type="none" w="med" len="med"/>
+                      <a:tailEnd type="none" w="med" len="med"/>
+                    </a:lnR>
+                    <a:lnT w="12700" cap="flat" cmpd="sng" algn="ctr">
+                      <a:solidFill>
+                        <a:srgbClr val="D8DEEA"/>
+                      </a:solidFill>
+                      <a:prstDash val="solid"/>
+                      <a:round/>
+                      <a:headEnd type="none" w="med" len="med"/>
+                      <a:tailEnd type="none" w="med" len="med"/>
+                    </a:lnT>
+                    <a:lnB w="12700" cap="flat" cmpd="sng" algn="ctr">
+                      <a:solidFill>
+                        <a:srgbClr val="D8DEEA"/>
+                      </a:solidFill>
+                      <a:prstDash val="solid"/>
+                      <a:round/>
+                      <a:headEnd type="none" w="med" len="med"/>
+                      <a:tailEnd type="none" w="med" len="med"/>
+                    </a:lnB>
+                    <a:solidFill>
+                      <a:srgbClr val="E4E7EF"/>
+                    </a:solidFill>
+                  </a:tcPr>
+                </a:tc>
+              </a:tr>
+              <a:tr h="658368">
+                <a:tc>
+                  <a:txBody>
+                    <a:bodyPr/>
+                    <a:lstStyle/>
+                    <a:p>
+                      <a:pPr algn="l" indent="0" marL="0">
+                        <a:buNone/>
+                      </a:pPr>
+                      <a:r>
+                        <a:rPr lang="en-US" sz="1200" b="1" dirty="0">
+                          <a:solidFill>
+                            <a:srgbClr val="212121"/>
+                          </a:solidFill>
+                          <a:latin typeface="Calibri" pitchFamily="34" charset="0"/>
+                          <a:ea typeface="Calibri" pitchFamily="34" charset="-122"/>
+                          <a:cs typeface="Calibri" pitchFamily="34" charset="-120"/>
+                        </a:rPr>
+                        <a:t>Evidence / trust state</a:t>
+                      </a:r>
+                      <a:endParaRPr lang="en-US" sz="1200" dirty="0">
+                        <a:latin typeface="Calibri" charset="0"/>
+                        <a:ea typeface="Calibri" charset="0"/>
+                        <a:cs typeface="Calibri" charset="0"/>
+                      </a:endParaRPr>
+                    </a:p>
+                  </a:txBody>
+                  <a:tcPr marL="82296" marR="82296" marT="82296" marB="82296" anchor="ctr">
+                    <a:lnL w="12700" cap="flat" cmpd="sng" algn="ctr">
+                      <a:solidFill>
+                        <a:srgbClr val="D8DEEA"/>
+                      </a:solidFill>
+                      <a:prstDash val="solid"/>
+                      <a:round/>
+                      <a:headEnd type="none" w="med" len="med"/>
+                      <a:tailEnd type="none" w="med" len="med"/>
+                    </a:lnL>
+                    <a:lnR w="12700" cap="flat" cmpd="sng" algn="ctr">
+                      <a:solidFill>
+                        <a:srgbClr val="D8DEEA"/>
+                      </a:solidFill>
+                      <a:prstDash val="solid"/>
+                      <a:round/>
+                      <a:headEnd type="none" w="med" len="med"/>
+                      <a:tailEnd type="none" w="med" len="med"/>
+                    </a:lnR>
+                    <a:lnT w="12700" cap="flat" cmpd="sng" algn="ctr">
+                      <a:solidFill>
+                        <a:srgbClr val="D8DEEA"/>
+                      </a:solidFill>
+                      <a:prstDash val="solid"/>
+                      <a:round/>
+                      <a:headEnd type="none" w="med" len="med"/>
+                      <a:tailEnd type="none" w="med" len="med"/>
+                    </a:lnT>
+                    <a:lnB w="12700" cap="flat" cmpd="sng" algn="ctr">
+                      <a:solidFill>
+                        <a:srgbClr val="D8DEEA"/>
+                      </a:solidFill>
+                      <a:prstDash val="solid"/>
+                      <a:round/>
+                      <a:headEnd type="none" w="med" len="med"/>
+                      <a:tailEnd type="none" w="med" len="med"/>
+                    </a:lnB>
+                    <a:solidFill>
+                      <a:srgbClr val="E4E7EF"/>
+                    </a:solidFill>
+                  </a:tcPr>
+                </a:tc>
+                <a:tc>
+                  <a:txBody>
+                    <a:bodyPr/>
+                    <a:lstStyle/>
+                    <a:p>
+                      <a:pPr algn="l" indent="0" marL="0">
+                        <a:buNone/>
+                      </a:pPr>
+                      <a:r>
+                        <a:rPr lang="en-US" sz="1200" b="1" dirty="0">
+                          <a:solidFill>
+                            <a:srgbClr val="212121"/>
+                          </a:solidFill>
+                          <a:latin typeface="Calibri" pitchFamily="34" charset="0"/>
+                          <a:ea typeface="Calibri" pitchFamily="34" charset="-122"/>
+                          <a:cs typeface="Calibri" pitchFamily="34" charset="-120"/>
+                        </a:rPr>
+                        <a:t>none — by design</a:t>
+                      </a:r>
+                      <a:endParaRPr lang="en-US" sz="1200" dirty="0">
+                        <a:latin typeface="Calibri" charset="0"/>
+                        <a:ea typeface="Calibri" charset="0"/>
+                        <a:cs typeface="Calibri" charset="0"/>
+                      </a:endParaRPr>
+                    </a:p>
+                  </a:txBody>
+                  <a:tcPr marL="82296" marR="82296" marT="82296" marB="82296" anchor="ctr">
+                    <a:lnL w="12700" cap="flat" cmpd="sng" algn="ctr">
+                      <a:solidFill>
+                        <a:srgbClr val="D8DEEA"/>
+                      </a:solidFill>
+                      <a:prstDash val="solid"/>
+                      <a:round/>
+                      <a:headEnd type="none" w="med" len="med"/>
+                      <a:tailEnd type="none" w="med" len="med"/>
+                    </a:lnL>
+                    <a:lnR w="12700" cap="flat" cmpd="sng" algn="ctr">
+                      <a:solidFill>
+                        <a:srgbClr val="D8DEEA"/>
+                      </a:solidFill>
+                      <a:prstDash val="solid"/>
+                      <a:round/>
+                      <a:headEnd type="none" w="med" len="med"/>
+                      <a:tailEnd type="none" w="med" len="med"/>
+                    </a:lnR>
+                    <a:lnT w="12700" cap="flat" cmpd="sng" algn="ctr">
+                      <a:solidFill>
+                        <a:srgbClr val="D8DEEA"/>
+                      </a:solidFill>
+                      <a:prstDash val="solid"/>
+                      <a:round/>
+                      <a:headEnd type="none" w="med" len="med"/>
+                      <a:tailEnd type="none" w="med" len="med"/>
+                    </a:lnT>
+                    <a:lnB w="12700" cap="flat" cmpd="sng" algn="ctr">
+                      <a:solidFill>
+                        <a:srgbClr val="D8DEEA"/>
+                      </a:solidFill>
+                      <a:prstDash val="solid"/>
+                      <a:round/>
+                      <a:headEnd type="none" w="med" len="med"/>
+                      <a:tailEnd type="none" w="med" len="med"/>
+                    </a:lnB>
+                    <a:solidFill>
+                      <a:srgbClr val="E4E7EF"/>
+                    </a:solidFill>
+                  </a:tcPr>
+                </a:tc>
+                <a:tc>
+                  <a:txBody>
+                    <a:bodyPr/>
+                    <a:lstStyle/>
+                    <a:p>
+                      <a:pPr algn="l" indent="0" marL="0">
+                        <a:buNone/>
+                      </a:pPr>
+                      <a:r>
+                        <a:rPr lang="en-US" sz="1200" dirty="0">
+                          <a:solidFill>
+                            <a:srgbClr val="212121"/>
+                          </a:solidFill>
+                          <a:latin typeface="Calibri" pitchFamily="34" charset="0"/>
+                          <a:ea typeface="Calibri" pitchFamily="34" charset="-122"/>
+                          <a:cs typeface="Calibri" pitchFamily="34" charset="-120"/>
+                        </a:rPr>
+                        <a:t>cryptographic anchor · non-derivability; no one (human or AI) may repair a baseline without fresh administrator blessing</a:t>
+                      </a:r>
+                      <a:endParaRPr lang="en-US" sz="1200" dirty="0">
+                        <a:latin typeface="Calibri" charset="0"/>
+                        <a:ea typeface="Calibri" charset="0"/>
+                        <a:cs typeface="Calibri" charset="0"/>
+                      </a:endParaRPr>
+                    </a:p>
+                  </a:txBody>
+                  <a:tcPr marL="82296" marR="82296" marT="82296" marB="82296" anchor="ctr">
+                    <a:lnL w="12700" cap="flat" cmpd="sng" algn="ctr">
+                      <a:solidFill>
+                        <a:srgbClr val="D8DEEA"/>
+                      </a:solidFill>
+                      <a:prstDash val="solid"/>
+                      <a:round/>
+                      <a:headEnd type="none" w="med" len="med"/>
+                      <a:tailEnd type="none" w="med" len="med"/>
+                    </a:lnL>
+                    <a:lnR w="12700" cap="flat" cmpd="sng" algn="ctr">
+                      <a:solidFill>
+                        <a:srgbClr val="D8DEEA"/>
+                      </a:solidFill>
+                      <a:prstDash val="solid"/>
+                      <a:round/>
+                      <a:headEnd type="none" w="med" len="med"/>
+                      <a:tailEnd type="none" w="med" len="med"/>
+                    </a:lnR>
+                    <a:lnT w="12700" cap="flat" cmpd="sng" algn="ctr">
+                      <a:solidFill>
+                        <a:srgbClr val="D8DEEA"/>
+                      </a:solidFill>
+                      <a:prstDash val="solid"/>
+                      <a:round/>
+                      <a:headEnd type="none" w="med" len="med"/>
+                      <a:tailEnd type="none" w="med" len="med"/>
+                    </a:lnT>
+                    <a:lnB w="12700" cap="flat" cmpd="sng" algn="ctr">
+                      <a:solidFill>
+                        <a:srgbClr val="D8DEEA"/>
+                      </a:solidFill>
+                      <a:prstDash val="solid"/>
+                      <a:round/>
+                      <a:headEnd type="none" w="med" len="med"/>
+                      <a:tailEnd type="none" w="med" len="med"/>
+                    </a:lnB>
+                    <a:solidFill>
+                      <a:srgbClr val="E4E7EF"/>
+                    </a:solidFill>
+                  </a:tcPr>
+                </a:tc>
+              </a:tr>
+            </a:tbl>
+          </a:graphicData>
+        </a:graphic>
+      </p:graphicFrame>
+      <p:sp>
+        <p:nvSpPr>
+          <p:cNvPr id="5" name="Text 2"/>
+          <p:cNvSpPr/>
+          <p:nvPr/>
+        </p:nvSpPr>
+        <p:spPr>
+          <a:xfrm>
+            <a:off x="640080" y="5989320"/>
+            <a:ext cx="10881360" cy="685800"/>
+          </a:xfrm>
+          <a:prstGeom prst="rect">
+            <a:avLst/>
+          </a:prstGeom>
+          <a:noFill/>
+          <a:ln/>
+        </p:spPr>
+        <p:txBody>
+          <a:bodyPr wrap="square" lIns="0" tIns="0" rIns="0" bIns="0" rtlCol="0" anchor="t"/>
+          <a:lstStyle/>
+          <a:p>
+            <a:pPr algn="l" indent="0" marL="0">
+              <a:buNone/>
+            </a:pPr>
+            <a:r>
+              <a:rPr lang="en-US" sz="1250" b="1" i="1" dirty="0">
+                <a:solidFill>
+                  <a:srgbClr val="1E2761"/>
+                </a:solidFill>
+                <a:latin typeface="Calibri" pitchFamily="34" charset="0"/>
+                <a:ea typeface="Calibri" pitchFamily="34" charset="-122"/>
+                <a:cs typeface="Calibri" pitchFamily="34" charset="-120"/>
+              </a:rPr>
+              <a:t>🔒  the bottom two — the judges — are AI-free by design</a:t>
+            </a:r>
+            <a:pPr algn="l" indent="0" marL="0">
+              <a:buNone/>
+            </a:pPr>
+            <a:r>
+              <a:rPr lang="en-US" sz="1250" i="1" dirty="0">
+                <a:solidFill>
+                  <a:srgbClr val="212121"/>
+                </a:solidFill>
+                <a:latin typeface="Calibri" pitchFamily="34" charset="0"/>
+                <a:ea typeface="Calibri" pitchFamily="34" charset="-122"/>
+                <a:cs typeface="Calibri" pitchFamily="34" charset="-120"/>
+              </a:rPr>
+              <a:t>:  an LLM’s output is just another untrusted artifact, facing the same episode and appraisal as a human edit or a tamper. Guarantees never depend on LLM engines being good, honest, or even present.</a:t>
+            </a:r>
+            <a:endParaRPr lang="en-US" sz="1250" dirty="0"/>
+          </a:p>
+        </p:txBody>
+      </p:sp>
+    </p:spTree>
+  </p:cSld>
+  <p:clrMapOvr>
+    <a:masterClrMapping/>
+  </p:clrMapOvr>
+</p:sld>
+</file>
+
+<file path=ppt/slides/slide18.xml><?xml version="1.0" encoding="utf-8"?>
+<p:sld xmlns:a="http://schemas.openxmlformats.org/drawingml/2006/main" xmlns:r="http://schemas.openxmlformats.org/officeDocument/2006/relationships" xmlns:p="http://schemas.openxmlformats.org/presentationml/2006/main">
+  <p:cSld name="Slide 18">
+    <p:bg>
+      <p:bgPr>
+        <a:solidFill>
+          <a:srgbClr val="FFFFFF"/>
+        </a:solidFill>
+      </p:bgPr>
+    </p:bg>
+    <p:spTree>
+      <p:nvGrpSpPr>
+        <p:cNvPr id="1" name=""/>
+        <p:cNvGrpSpPr/>
+        <p:nvPr/>
+      </p:nvGrpSpPr>
+      <p:grpSpPr>
+        <a:xfrm>
+          <a:off x="0" y="0"/>
+          <a:ext cx="0" cy="0"/>
+          <a:chOff x="0" y="0"/>
+          <a:chExt cx="0" cy="0"/>
+        </a:xfrm>
+      </p:grpSpPr>
+      <p:sp>
+        <p:nvSpPr>
+          <p:cNvPr id="2" name="Text 0"/>
+          <p:cNvSpPr/>
+          <p:nvPr/>
+        </p:nvSpPr>
+        <p:spPr>
+          <a:xfrm>
             <a:off x="640080" y="411480"/>
             <a:ext cx="10972800" cy="731520"/>
           </a:xfrm>

--- a/docs/video_slides_draft.pptx
+++ b/docs/video_slides_draft.pptx
@@ -23,9 +23,10 @@
     <p:sldId id="271" r:id="rId17"/>
     <p:sldId id="272" r:id="rId18"/>
     <p:sldId id="273" r:id="rId19"/>
+    <p:sldId id="274" r:id="rId20"/>
   </p:sldIdLst>
   <p:notesMasterIdLst>
-    <p:notesMasterId r:id="rId20"/>
+    <p:notesMasterId r:id="rId21"/>
   </p:notesMasterIdLst>
   <p:sldSz cx="12192000" cy="6858000"/>
   <p:notesSz cx="6858000" cy="12192000"/>
@@ -1320,8 +1321,10 @@
           <a:p>
             <a:r>
               <a:rPr lang="en-US" dirty="0"/>
-              <a:t>Collection point for every reference in the deck - keep this slide current as sections are added (isolette slide carries the K-State + AR-08-32 citations inline; Copland/Verus/seL4 seeded here ahead of their sections).
-DOIs on record in docs/video_slide_drafts.md.</a:t>
+              <a:t>Capstone slide 2 of 3 (theme: 'AI in the loop' big title + caption). The one idea: AI built the entire attestation stack, and that stack is held to the same measured discipline it enforces.
+Counts current 2026-08-30: 12 new + 7 upgraded asp-libs binaries (git-attested, separate repo); 42 provisioned Copland protocol dirs (the newest, the l1b marker tier, was built in this very session - a callback available if wanted); 7 red-team attack classes.
+cvm-mcp aside (15 s): an AI-built MCP interface so AI agents can drive attestation - AI both built the loop and can drive it.
+Git provenance deliberately de-emphasized per user; the point is the self-application (the reflexive footer), not the Co-Authored-By trailers.</a:t>
             </a:r>
             <a:endParaRPr lang="en-US" dirty="0"/>
           </a:p>
@@ -1345,6 +1348,95 @@
             <a:fld id="{F7021451-1387-4CA6-816F-3879F97B5CBC}" type="slidenum">
               <a:rPr lang="en-US"/>
               <a:t>18</a:t>
+            </a:fld>
+            <a:endParaRPr lang="en-US"/>
+          </a:p>
+        </p:txBody>
+      </p:sp>
+    </p:spTree>
+    <p:extLst>
+      <p:ext uri="{BB962C8B-B14F-4D97-AF65-F5344CB8AC3E}">
+        <p14:creationId xmlns:p14="http://schemas.microsoft.com/office/powerpoint/2010/main" val="1024086991"/>
+      </p:ext>
+    </p:extLst>
+  </p:cSld>
+  <p:clrMapOvr>
+    <a:masterClrMapping/>
+  </p:clrMapOvr>
+</p:notes>
+</file>
+
+<file path=ppt/notesSlides/notesSlide19.xml><?xml version="1.0" encoding="utf-8"?>
+<p:notes xmlns:a="http://schemas.openxmlformats.org/drawingml/2006/main" xmlns:r="http://schemas.openxmlformats.org/officeDocument/2006/relationships" xmlns:p="http://schemas.openxmlformats.org/presentationml/2006/main">
+  <p:cSld>
+    <p:spTree>
+      <p:nvGrpSpPr>
+        <p:cNvPr id="1" name=""/>
+        <p:cNvGrpSpPr/>
+        <p:nvPr/>
+      </p:nvGrpSpPr>
+      <p:grpSpPr>
+        <a:xfrm>
+          <a:off x="0" y="0"/>
+          <a:ext cx="0" cy="0"/>
+          <a:chOff x="0" y="0"/>
+          <a:chExt cx="0" cy="0"/>
+        </a:xfrm>
+      </p:grpSpPr>
+      <p:sp>
+        <p:nvSpPr>
+          <p:cNvPr id="2" name="Slide Image Placeholder 1"/>
+          <p:cNvSpPr>
+            <a:spLocks noGrp="1" noRot="1" noChangeAspect="1"/>
+          </p:cNvSpPr>
+          <p:nvPr>
+            <p:ph type="sldImg"/>
+          </p:nvPr>
+        </p:nvSpPr>
+        <p:spPr/>
+      </p:sp>
+      <p:sp>
+        <p:nvSpPr>
+          <p:cNvPr id="3" name="Notes Placeholder 2"/>
+          <p:cNvSpPr>
+            <a:spLocks noGrp="1"/>
+          </p:cNvSpPr>
+          <p:nvPr>
+            <p:ph type="body" idx="1"/>
+          </p:nvPr>
+        </p:nvSpPr>
+        <p:spPr/>
+        <p:txBody>
+          <a:bodyPr/>
+          <a:lstStyle/>
+          <a:p>
+            <a:r>
+              <a:rPr lang="en-US" dirty="0"/>
+              <a:t>Collection point for every reference in the deck - keep this slide current as sections are added (isolette slide carries the K-State + AR-08-32 citations inline; Copland/Verus/seL4 seeded here ahead of their sections).
+DOIs on record in docs/video_slide_drafts.md.</a:t>
+            </a:r>
+            <a:endParaRPr lang="en-US" dirty="0"/>
+          </a:p>
+        </p:txBody>
+      </p:sp>
+      <p:sp>
+        <p:nvSpPr>
+          <p:cNvPr id="4" name="Slide Number Placeholder 3"/>
+          <p:cNvSpPr>
+            <a:spLocks noGrp="1"/>
+          </p:cNvSpPr>
+          <p:nvPr>
+            <p:ph type="sldNum" sz="quarter" idx="10"/>
+          </p:nvPr>
+        </p:nvSpPr>
+        <p:spPr/>
+        <p:txBody>
+          <a:bodyPr/>
+          <a:lstStyle/>
+          <a:p>
+            <a:fld id="{F7021451-1387-4CA6-816F-3879F97B5CBC}" type="slidenum">
+              <a:rPr lang="en-US"/>
+              <a:t>19</a:t>
             </a:fld>
             <a:endParaRPr lang="en-US"/>
           </a:p>
@@ -6974,7 +7066,7 @@
                 <a:ea typeface="Calibri" pitchFamily="34" charset="-122"/>
                 <a:cs typeface="Calibri" pitchFamily="34" charset="-120"/>
               </a:rPr>
-              <a:t>untrusted artifact synthesis and repair;  verified audit and deterministic appraisal</a:t>
+              <a:t>untrusted artifact synthesis/repair;  verified, deterministic appraisal</a:t>
             </a:r>
             <a:endParaRPr lang="en-US" sz="1600" dirty="0"/>
           </a:p>
@@ -8339,6 +8431,1551 @@
 <file path=ppt/slides/slide18.xml><?xml version="1.0" encoding="utf-8"?>
 <p:sld xmlns:a="http://schemas.openxmlformats.org/drawingml/2006/main" xmlns:r="http://schemas.openxmlformats.org/officeDocument/2006/relationships" xmlns:p="http://schemas.openxmlformats.org/presentationml/2006/main">
   <p:cSld name="Slide 18">
+    <p:bg>
+      <p:bgPr>
+        <a:solidFill>
+          <a:srgbClr val="FFFFFF"/>
+        </a:solidFill>
+      </p:bgPr>
+    </p:bg>
+    <p:spTree>
+      <p:nvGrpSpPr>
+        <p:cNvPr id="1" name=""/>
+        <p:cNvGrpSpPr/>
+        <p:nvPr/>
+      </p:nvGrpSpPr>
+      <p:grpSpPr>
+        <a:xfrm>
+          <a:off x="0" y="0"/>
+          <a:ext cx="0" cy="0"/>
+          <a:chOff x="0" y="0"/>
+          <a:chExt cx="0" cy="0"/>
+        </a:xfrm>
+      </p:grpSpPr>
+      <p:sp>
+        <p:nvSpPr>
+          <p:cNvPr id="2" name="Text 0"/>
+          <p:cNvSpPr/>
+          <p:nvPr/>
+        </p:nvSpPr>
+        <p:spPr>
+          <a:xfrm>
+            <a:off x="640080" y="347472"/>
+            <a:ext cx="10972800" cy="640080"/>
+          </a:xfrm>
+          <a:prstGeom prst="rect">
+            <a:avLst/>
+          </a:prstGeom>
+          <a:noFill/>
+          <a:ln/>
+        </p:spPr>
+        <p:txBody>
+          <a:bodyPr wrap="square" lIns="0" tIns="0" rIns="0" bIns="0" rtlCol="0" anchor="ctr"/>
+          <a:lstStyle/>
+          <a:p>
+            <a:pPr indent="0" marL="0">
+              <a:buNone/>
+            </a:pPr>
+            <a:r>
+              <a:rPr lang="en-US" sz="4000" b="1" dirty="0">
+                <a:solidFill>
+                  <a:srgbClr val="1E2761"/>
+                </a:solidFill>
+                <a:latin typeface="Cambria" pitchFamily="34" charset="0"/>
+                <a:ea typeface="Cambria" pitchFamily="34" charset="-122"/>
+                <a:cs typeface="Cambria" pitchFamily="34" charset="-120"/>
+              </a:rPr>
+              <a:t>AI built the loop</a:t>
+            </a:r>
+            <a:endParaRPr lang="en-US" sz="4000" dirty="0"/>
+          </a:p>
+        </p:txBody>
+      </p:sp>
+      <p:sp>
+        <p:nvSpPr>
+          <p:cNvPr id="3" name="Text 1"/>
+          <p:cNvSpPr/>
+          <p:nvPr/>
+        </p:nvSpPr>
+        <p:spPr>
+          <a:xfrm>
+            <a:off x="658368" y="1024128"/>
+            <a:ext cx="10972800" cy="411480"/>
+          </a:xfrm>
+          <a:prstGeom prst="rect">
+            <a:avLst/>
+          </a:prstGeom>
+          <a:noFill/>
+          <a:ln/>
+        </p:spPr>
+        <p:txBody>
+          <a:bodyPr wrap="square" lIns="0" tIns="0" rIns="0" bIns="0" rtlCol="0" anchor="ctr"/>
+          <a:lstStyle/>
+          <a:p>
+            <a:pPr indent="0" marL="0">
+              <a:buNone/>
+            </a:pPr>
+            <a:r>
+              <a:rPr lang="en-US" sz="1600" i="1" dirty="0">
+                <a:solidFill>
+                  <a:srgbClr val="5A6478"/>
+                </a:solidFill>
+                <a:latin typeface="Calibri" pitchFamily="34" charset="0"/>
+                <a:ea typeface="Calibri" pitchFamily="34" charset="-122"/>
+                <a:cs typeface="Calibri" pitchFamily="34" charset="-120"/>
+              </a:rPr>
+              <a:t>blackboard and attestation infrastructure, artifact measurements, attestation protocols, attacks</a:t>
+            </a:r>
+            <a:endParaRPr lang="en-US" sz="1600" dirty="0"/>
+          </a:p>
+        </p:txBody>
+      </p:sp>
+      <p:graphicFrame>
+        <p:nvGraphicFramePr>
+          <p:cNvPr id="19" name="Table 0"/>
+          <p:cNvGraphicFramePr>
+            <a:graphicFrameLocks noGrp="1"/>
+          </p:cNvGraphicFramePr>
+          <p:nvPr>
+            <p:extLst>
+              <p:ext uri="{D42A27DB-BD31-4B8C-83A1-F6EECF244321}">
+                <p14:modId xmlns:p14="http://schemas.microsoft.com/office/powerpoint/2010/main" val="1579011935"/>
+              </p:ext>
+            </p:extLst>
+          </p:nvPr>
+        </p:nvGraphicFramePr>
+        <p:xfrm>
+          <a:off x="640080" y="1600200"/>
+          <a:ext cx="10881360" cy="914400"/>
+        </p:xfrm>
+        <a:graphic>
+          <a:graphicData uri="http://schemas.openxmlformats.org/drawingml/2006/table">
+            <a:tbl>
+              <a:tblPr/>
+              <a:tblGrid>
+                <a:gridCol w="2377440"/>
+                <a:gridCol w="5120640"/>
+                <a:gridCol w="3383280"/>
+              </a:tblGrid>
+              <a:tr h="365760">
+                <a:tc>
+                  <a:txBody>
+                    <a:bodyPr/>
+                    <a:lstStyle/>
+                    <a:p>
+                      <a:pPr algn="l" indent="0" marL="0">
+                        <a:buNone/>
+                      </a:pPr>
+                      <a:r>
+                        <a:rPr lang="en-US" sz="1350" b="1" dirty="0">
+                          <a:solidFill>
+                            <a:srgbClr val="FFFFFF"/>
+                          </a:solidFill>
+                          <a:latin typeface="Calibri" pitchFamily="34" charset="0"/>
+                          <a:ea typeface="Calibri" pitchFamily="34" charset="-122"/>
+                          <a:cs typeface="Calibri" pitchFamily="34" charset="-120"/>
+                        </a:rPr>
+                        <a:t>What AI built</a:t>
+                      </a:r>
+                      <a:endParaRPr lang="en-US" sz="1350" dirty="0">
+                        <a:latin typeface="Calibri" charset="0"/>
+                        <a:ea typeface="Calibri" charset="0"/>
+                        <a:cs typeface="Calibri" charset="0"/>
+                      </a:endParaRPr>
+                    </a:p>
+                  </a:txBody>
+                  <a:tcPr marL="82296" marR="82296" marT="82296" marB="82296" anchor="ctr">
+                    <a:lnL w="12700" cap="flat" cmpd="sng" algn="ctr">
+                      <a:solidFill>
+                        <a:srgbClr val="D8DEEA"/>
+                      </a:solidFill>
+                      <a:prstDash val="solid"/>
+                      <a:round/>
+                      <a:headEnd type="none" w="med" len="med"/>
+                      <a:tailEnd type="none" w="med" len="med"/>
+                    </a:lnL>
+                    <a:lnR w="12700" cap="flat" cmpd="sng" algn="ctr">
+                      <a:solidFill>
+                        <a:srgbClr val="D8DEEA"/>
+                      </a:solidFill>
+                      <a:prstDash val="solid"/>
+                      <a:round/>
+                      <a:headEnd type="none" w="med" len="med"/>
+                      <a:tailEnd type="none" w="med" len="med"/>
+                    </a:lnR>
+                    <a:lnT w="12700" cap="flat" cmpd="sng" algn="ctr">
+                      <a:solidFill>
+                        <a:srgbClr val="D8DEEA"/>
+                      </a:solidFill>
+                      <a:prstDash val="solid"/>
+                      <a:round/>
+                      <a:headEnd type="none" w="med" len="med"/>
+                      <a:tailEnd type="none" w="med" len="med"/>
+                    </a:lnT>
+                    <a:lnB w="12700" cap="flat" cmpd="sng" algn="ctr">
+                      <a:solidFill>
+                        <a:srgbClr val="D8DEEA"/>
+                      </a:solidFill>
+                      <a:prstDash val="solid"/>
+                      <a:round/>
+                      <a:headEnd type="none" w="med" len="med"/>
+                      <a:tailEnd type="none" w="med" len="med"/>
+                    </a:lnB>
+                    <a:solidFill>
+                      <a:srgbClr val="1E2761"/>
+                    </a:solidFill>
+                  </a:tcPr>
+                </a:tc>
+                <a:tc>
+                  <a:txBody>
+                    <a:bodyPr/>
+                    <a:lstStyle/>
+                    <a:p>
+                      <a:pPr algn="l" indent="0" marL="0">
+                        <a:buNone/>
+                      </a:pPr>
+                      <a:endParaRPr lang="en-US" sz="1350" dirty="0">
+                        <a:latin typeface="Calibri" charset="0"/>
+                        <a:ea typeface="Calibri" charset="0"/>
+                        <a:cs typeface="Calibri" charset="0"/>
+                      </a:endParaRPr>
+                    </a:p>
+                  </a:txBody>
+                  <a:tcPr marL="82296" marR="82296" marT="82296" marB="82296" anchor="ctr">
+                    <a:lnL w="12700" cap="flat" cmpd="sng" algn="ctr">
+                      <a:solidFill>
+                        <a:srgbClr val="D8DEEA"/>
+                      </a:solidFill>
+                      <a:prstDash val="solid"/>
+                      <a:round/>
+                      <a:headEnd type="none" w="med" len="med"/>
+                      <a:tailEnd type="none" w="med" len="med"/>
+                    </a:lnL>
+                    <a:lnR w="12700" cap="flat" cmpd="sng" algn="ctr">
+                      <a:solidFill>
+                        <a:srgbClr val="D8DEEA"/>
+                      </a:solidFill>
+                      <a:prstDash val="solid"/>
+                      <a:round/>
+                      <a:headEnd type="none" w="med" len="med"/>
+                      <a:tailEnd type="none" w="med" len="med"/>
+                    </a:lnR>
+                    <a:lnT w="12700" cap="flat" cmpd="sng" algn="ctr">
+                      <a:solidFill>
+                        <a:srgbClr val="D8DEEA"/>
+                      </a:solidFill>
+                      <a:prstDash val="solid"/>
+                      <a:round/>
+                      <a:headEnd type="none" w="med" len="med"/>
+                      <a:tailEnd type="none" w="med" len="med"/>
+                    </a:lnT>
+                    <a:lnB w="12700" cap="flat" cmpd="sng" algn="ctr">
+                      <a:solidFill>
+                        <a:srgbClr val="D8DEEA"/>
+                      </a:solidFill>
+                      <a:prstDash val="solid"/>
+                      <a:round/>
+                      <a:headEnd type="none" w="med" len="med"/>
+                      <a:tailEnd type="none" w="med" len="med"/>
+                    </a:lnB>
+                    <a:solidFill>
+                      <a:srgbClr val="1E2761"/>
+                    </a:solidFill>
+                  </a:tcPr>
+                </a:tc>
+                <a:tc>
+                  <a:txBody>
+                    <a:bodyPr/>
+                    <a:lstStyle/>
+                    <a:p>
+                      <a:pPr algn="l" indent="0" marL="0">
+                        <a:buNone/>
+                      </a:pPr>
+                      <a:r>
+                        <a:rPr lang="en-US" sz="1350" b="1" dirty="0">
+                          <a:solidFill>
+                            <a:srgbClr val="FFFFFF"/>
+                          </a:solidFill>
+                          <a:latin typeface="Calibri" pitchFamily="34" charset="0"/>
+                          <a:ea typeface="Calibri" pitchFamily="34" charset="-122"/>
+                          <a:cs typeface="Calibri" pitchFamily="34" charset="-120"/>
+                        </a:rPr>
+                        <a:t>Judged by</a:t>
+                      </a:r>
+                      <a:endParaRPr lang="en-US" sz="1350" dirty="0">
+                        <a:latin typeface="Calibri" charset="0"/>
+                        <a:ea typeface="Calibri" charset="0"/>
+                        <a:cs typeface="Calibri" charset="0"/>
+                      </a:endParaRPr>
+                    </a:p>
+                  </a:txBody>
+                  <a:tcPr marL="82296" marR="82296" marT="82296" marB="82296" anchor="ctr">
+                    <a:lnL w="12700" cap="flat" cmpd="sng" algn="ctr">
+                      <a:solidFill>
+                        <a:srgbClr val="D8DEEA"/>
+                      </a:solidFill>
+                      <a:prstDash val="solid"/>
+                      <a:round/>
+                      <a:headEnd type="none" w="med" len="med"/>
+                      <a:tailEnd type="none" w="med" len="med"/>
+                    </a:lnL>
+                    <a:lnR w="12700" cap="flat" cmpd="sng" algn="ctr">
+                      <a:solidFill>
+                        <a:srgbClr val="D8DEEA"/>
+                      </a:solidFill>
+                      <a:prstDash val="solid"/>
+                      <a:round/>
+                      <a:headEnd type="none" w="med" len="med"/>
+                      <a:tailEnd type="none" w="med" len="med"/>
+                    </a:lnR>
+                    <a:lnT w="12700" cap="flat" cmpd="sng" algn="ctr">
+                      <a:solidFill>
+                        <a:srgbClr val="D8DEEA"/>
+                      </a:solidFill>
+                      <a:prstDash val="solid"/>
+                      <a:round/>
+                      <a:headEnd type="none" w="med" len="med"/>
+                      <a:tailEnd type="none" w="med" len="med"/>
+                    </a:lnT>
+                    <a:lnB w="12700" cap="flat" cmpd="sng" algn="ctr">
+                      <a:solidFill>
+                        <a:srgbClr val="D8DEEA"/>
+                      </a:solidFill>
+                      <a:prstDash val="solid"/>
+                      <a:round/>
+                      <a:headEnd type="none" w="med" len="med"/>
+                      <a:tailEnd type="none" w="med" len="med"/>
+                    </a:lnB>
+                    <a:solidFill>
+                      <a:srgbClr val="1E2761"/>
+                    </a:solidFill>
+                  </a:tcPr>
+                </a:tc>
+              </a:tr>
+              <a:tr h="640080">
+                <a:tc>
+                  <a:txBody>
+                    <a:bodyPr/>
+                    <a:lstStyle/>
+                    <a:p>
+                      <a:pPr algn="l" indent="0" marL="0">
+                        <a:buNone/>
+                      </a:pPr>
+                      <a:r>
+                        <a:rPr lang="en-US" sz="1200" b="1" dirty="0">
+                          <a:solidFill>
+                            <a:srgbClr val="212121"/>
+                          </a:solidFill>
+                          <a:latin typeface="Calibri" pitchFamily="34" charset="0"/>
+                          <a:ea typeface="Calibri" pitchFamily="34" charset="-122"/>
+                          <a:cs typeface="Calibri" pitchFamily="34" charset="-120"/>
+                        </a:rPr>
+                        <a:t>Blackboard infrastructure</a:t>
+                      </a:r>
+                      <a:endParaRPr lang="en-US" sz="1200" dirty="0">
+                        <a:latin typeface="Calibri" charset="0"/>
+                        <a:ea typeface="Calibri" charset="0"/>
+                        <a:cs typeface="Calibri" charset="0"/>
+                      </a:endParaRPr>
+                    </a:p>
+                  </a:txBody>
+                  <a:tcPr marL="82296" marR="82296" marT="82296" marB="82296" anchor="ctr">
+                    <a:lnL w="12700" cap="flat" cmpd="sng" algn="ctr">
+                      <a:solidFill>
+                        <a:srgbClr val="D8DEEA"/>
+                      </a:solidFill>
+                      <a:prstDash val="solid"/>
+                      <a:round/>
+                      <a:headEnd type="none" w="med" len="med"/>
+                      <a:tailEnd type="none" w="med" len="med"/>
+                    </a:lnL>
+                    <a:lnR w="12700" cap="flat" cmpd="sng" algn="ctr">
+                      <a:solidFill>
+                        <a:srgbClr val="D8DEEA"/>
+                      </a:solidFill>
+                      <a:prstDash val="solid"/>
+                      <a:round/>
+                      <a:headEnd type="none" w="med" len="med"/>
+                      <a:tailEnd type="none" w="med" len="med"/>
+                    </a:lnR>
+                    <a:lnT w="12700" cap="flat" cmpd="sng" algn="ctr">
+                      <a:solidFill>
+                        <a:srgbClr val="D8DEEA"/>
+                      </a:solidFill>
+                      <a:prstDash val="solid"/>
+                      <a:round/>
+                      <a:headEnd type="none" w="med" len="med"/>
+                      <a:tailEnd type="none" w="med" len="med"/>
+                    </a:lnT>
+                    <a:lnB w="12700" cap="flat" cmpd="sng" algn="ctr">
+                      <a:solidFill>
+                        <a:srgbClr val="D8DEEA"/>
+                      </a:solidFill>
+                      <a:prstDash val="solid"/>
+                      <a:round/>
+                      <a:headEnd type="none" w="med" len="med"/>
+                      <a:tailEnd type="none" w="med" len="med"/>
+                    </a:lnB>
+                    <a:solidFill>
+                      <a:srgbClr val="FFFFFF"/>
+                    </a:solidFill>
+                  </a:tcPr>
+                </a:tc>
+                <a:tc>
+                  <a:txBody>
+                    <a:bodyPr/>
+                    <a:lstStyle/>
+                    <a:p>
+                      <a:pPr algn="l" indent="0" marL="0">
+                        <a:buNone/>
+                      </a:pPr>
+                      <a:r>
+                        <a:rPr lang="en-US" sz="1200" dirty="0">
+                          <a:solidFill>
+                            <a:srgbClr val="212121"/>
+                          </a:solidFill>
+                          <a:latin typeface="Calibri" pitchFamily="34" charset="0"/>
+                          <a:ea typeface="Calibri" pitchFamily="34" charset="-122"/>
+                          <a:cs typeface="Calibri" pitchFamily="34" charset="-120"/>
+                        </a:rPr>
+                        <a:t>pybb framework (blackboard / controller / knowledge sources), demo arcs, install script, CI suite, detailed documentation</a:t>
+                      </a:r>
+                      <a:endParaRPr lang="en-US" sz="1200" dirty="0">
+                        <a:latin typeface="Calibri" charset="0"/>
+                        <a:ea typeface="Calibri" charset="0"/>
+                        <a:cs typeface="Calibri" charset="0"/>
+                      </a:endParaRPr>
+                    </a:p>
+                  </a:txBody>
+                  <a:tcPr marL="82296" marR="82296" marT="82296" marB="82296" anchor="ctr">
+                    <a:lnL w="12700" cap="flat" cmpd="sng" algn="ctr">
+                      <a:solidFill>
+                        <a:srgbClr val="D8DEEA"/>
+                      </a:solidFill>
+                      <a:prstDash val="solid"/>
+                      <a:round/>
+                      <a:headEnd type="none" w="med" len="med"/>
+                      <a:tailEnd type="none" w="med" len="med"/>
+                    </a:lnL>
+                    <a:lnR w="12700" cap="flat" cmpd="sng" algn="ctr">
+                      <a:solidFill>
+                        <a:srgbClr val="D8DEEA"/>
+                      </a:solidFill>
+                      <a:prstDash val="solid"/>
+                      <a:round/>
+                      <a:headEnd type="none" w="med" len="med"/>
+                      <a:tailEnd type="none" w="med" len="med"/>
+                    </a:lnR>
+                    <a:lnT w="12700" cap="flat" cmpd="sng" algn="ctr">
+                      <a:solidFill>
+                        <a:srgbClr val="D8DEEA"/>
+                      </a:solidFill>
+                      <a:prstDash val="solid"/>
+                      <a:round/>
+                      <a:headEnd type="none" w="med" len="med"/>
+                      <a:tailEnd type="none" w="med" len="med"/>
+                    </a:lnT>
+                    <a:lnB w="12700" cap="flat" cmpd="sng" algn="ctr">
+                      <a:solidFill>
+                        <a:srgbClr val="D8DEEA"/>
+                      </a:solidFill>
+                      <a:prstDash val="solid"/>
+                      <a:round/>
+                      <a:headEnd type="none" w="med" len="med"/>
+                      <a:tailEnd type="none" w="med" len="med"/>
+                    </a:lnB>
+                    <a:solidFill>
+                      <a:srgbClr val="FFFFFF"/>
+                    </a:solidFill>
+                  </a:tcPr>
+                </a:tc>
+                <a:tc>
+                  <a:txBody>
+                    <a:bodyPr/>
+                    <a:lstStyle/>
+                    <a:p>
+                      <a:pPr algn="l" indent="0" marL="0">
+                        <a:buNone/>
+                      </a:pPr>
+                      <a:r>
+                        <a:rPr lang="en-US" sz="1200" dirty="0">
+                          <a:solidFill>
+                            <a:srgbClr val="212121"/>
+                          </a:solidFill>
+                          <a:latin typeface="Calibri" pitchFamily="34" charset="0"/>
+                          <a:ea typeface="Calibri" pitchFamily="34" charset="-122"/>
+                          <a:cs typeface="Calibri" pitchFamily="34" charset="-120"/>
+                        </a:rPr>
+                        <a:t>Untrusted orchestration (evidence bundles are independently-verifiable)</a:t>
+                      </a:r>
+                      <a:endParaRPr lang="en-US" sz="1200" dirty="0">
+                        <a:latin typeface="Calibri" charset="0"/>
+                        <a:ea typeface="Calibri" charset="0"/>
+                        <a:cs typeface="Calibri" charset="0"/>
+                      </a:endParaRPr>
+                    </a:p>
+                  </a:txBody>
+                  <a:tcPr marL="82296" marR="82296" marT="82296" marB="82296" anchor="ctr">
+                    <a:lnL w="12700" cap="flat" cmpd="sng" algn="ctr">
+                      <a:solidFill>
+                        <a:srgbClr val="D8DEEA"/>
+                      </a:solidFill>
+                      <a:prstDash val="solid"/>
+                      <a:round/>
+                      <a:headEnd type="none" w="med" len="med"/>
+                      <a:tailEnd type="none" w="med" len="med"/>
+                    </a:lnL>
+                    <a:lnR w="12700" cap="flat" cmpd="sng" algn="ctr">
+                      <a:solidFill>
+                        <a:srgbClr val="D8DEEA"/>
+                      </a:solidFill>
+                      <a:prstDash val="solid"/>
+                      <a:round/>
+                      <a:headEnd type="none" w="med" len="med"/>
+                      <a:tailEnd type="none" w="med" len="med"/>
+                    </a:lnR>
+                    <a:lnT w="12700" cap="flat" cmpd="sng" algn="ctr">
+                      <a:solidFill>
+                        <a:srgbClr val="D8DEEA"/>
+                      </a:solidFill>
+                      <a:prstDash val="solid"/>
+                      <a:round/>
+                      <a:headEnd type="none" w="med" len="med"/>
+                      <a:tailEnd type="none" w="med" len="med"/>
+                    </a:lnT>
+                    <a:lnB w="12700" cap="flat" cmpd="sng" algn="ctr">
+                      <a:solidFill>
+                        <a:srgbClr val="D8DEEA"/>
+                      </a:solidFill>
+                      <a:prstDash val="solid"/>
+                      <a:round/>
+                      <a:headEnd type="none" w="med" len="med"/>
+                      <a:tailEnd type="none" w="med" len="med"/>
+                    </a:lnB>
+                    <a:solidFill>
+                      <a:srgbClr val="FFFFFF"/>
+                    </a:solidFill>
+                  </a:tcPr>
+                </a:tc>
+              </a:tr>
+              <a:tr h="658368">
+                <a:tc>
+                  <a:txBody>
+                    <a:bodyPr/>
+                    <a:lstStyle/>
+                    <a:p>
+                      <a:pPr algn="l" indent="0" marL="0">
+                        <a:buNone/>
+                      </a:pPr>
+                      <a:r>
+                        <a:rPr lang="en-US" sz="1200" b="1" dirty="0">
+                          <a:solidFill>
+                            <a:srgbClr val="212121"/>
+                          </a:solidFill>
+                          <a:latin typeface="Calibri" pitchFamily="34" charset="0"/>
+                          <a:ea typeface="Calibri" pitchFamily="34" charset="-122"/>
+                          <a:cs typeface="Calibri" pitchFamily="34" charset="-120"/>
+                        </a:rPr>
+                        <a:t>CVM core &amp; frontends</a:t>
+                      </a:r>
+                      <a:endParaRPr lang="en-US" sz="1200" dirty="0">
+                        <a:latin typeface="Calibri" charset="0"/>
+                        <a:ea typeface="Calibri" charset="0"/>
+                        <a:cs typeface="Calibri" charset="0"/>
+                      </a:endParaRPr>
+                    </a:p>
+                  </a:txBody>
+                  <a:tcPr marL="82296" marR="82296" marT="82296" marB="82296" anchor="ctr">
+                    <a:lnL w="12700" cap="flat" cmpd="sng" algn="ctr">
+                      <a:solidFill>
+                        <a:srgbClr val="D8DEEA"/>
+                      </a:solidFill>
+                      <a:prstDash val="solid"/>
+                      <a:round/>
+                      <a:headEnd type="none" w="med" len="med"/>
+                      <a:tailEnd type="none" w="med" len="med"/>
+                    </a:lnL>
+                    <a:lnR w="12700" cap="flat" cmpd="sng" algn="ctr">
+                      <a:solidFill>
+                        <a:srgbClr val="D8DEEA"/>
+                      </a:solidFill>
+                      <a:prstDash val="solid"/>
+                      <a:round/>
+                      <a:headEnd type="none" w="med" len="med"/>
+                      <a:tailEnd type="none" w="med" len="med"/>
+                    </a:lnR>
+                    <a:lnT w="12700" cap="flat" cmpd="sng" algn="ctr">
+                      <a:solidFill>
+                        <a:srgbClr val="D8DEEA"/>
+                      </a:solidFill>
+                      <a:prstDash val="solid"/>
+                      <a:round/>
+                      <a:headEnd type="none" w="med" len="med"/>
+                      <a:tailEnd type="none" w="med" len="med"/>
+                    </a:lnT>
+                    <a:lnB w="12700" cap="flat" cmpd="sng" algn="ctr">
+                      <a:solidFill>
+                        <a:srgbClr val="D8DEEA"/>
+                      </a:solidFill>
+                      <a:prstDash val="solid"/>
+                      <a:round/>
+                      <a:headEnd type="none" w="med" len="med"/>
+                      <a:tailEnd type="none" w="med" len="med"/>
+                    </a:lnB>
+                    <a:solidFill>
+                      <a:srgbClr val="FFFFFF"/>
+                    </a:solidFill>
+                  </a:tcPr>
+                </a:tc>
+                <a:tc>
+                  <a:txBody>
+                    <a:bodyPr/>
+                    <a:lstStyle/>
+                    <a:p>
+                      <a:pPr algn="l" indent="0" marL="0">
+                        <a:buNone/>
+                      </a:pPr>
+                      <a:r>
+                        <a:rPr lang="en-US" sz="1200" dirty="0">
+                          <a:solidFill>
+                            <a:srgbClr val="212121"/>
+                          </a:solidFill>
+                          <a:latin typeface="Calibri" pitchFamily="34" charset="0"/>
+                          <a:ea typeface="Calibri" pitchFamily="34" charset="-122"/>
+                          <a:cs typeface="Calibri" pitchFamily="34" charset="-120"/>
+                        </a:rPr>
+                        <a:t>bpar (parallel Copland term) </a:t>
+                      </a:r>
+                      <a:pPr algn="l" indent="0" marL="0">
+                        <a:buNone/>
+                      </a:pPr>
+                      <a:r>
+                        <a:rPr lang="en-US" sz="1200" i="1" dirty="0">
+                          <a:solidFill>
+                            <a:srgbClr val="212121"/>
+                          </a:solidFill>
+                          <a:latin typeface="Calibri" pitchFamily="34" charset="0"/>
+                          <a:ea typeface="Calibri" pitchFamily="34" charset="-122"/>
+                          <a:cs typeface="Calibri" pitchFamily="34" charset="-120"/>
+                        </a:rPr>
+                        <a:t>in the verified CVM</a:t>
+                      </a:r>
+                      <a:pPr algn="l" indent="0" marL="0">
+                        <a:buNone/>
+                      </a:pPr>
+                      <a:r>
+                        <a:rPr lang="en-US" sz="1200" dirty="0">
+                          <a:solidFill>
+                            <a:srgbClr val="212121"/>
+                          </a:solidFill>
+                          <a:latin typeface="Calibri" pitchFamily="34" charset="0"/>
+                          <a:ea typeface="Calibri" pitchFamily="34" charset="-122"/>
+                          <a:cs typeface="Calibri" pitchFamily="34" charset="-120"/>
+                        </a:rPr>
+                        <a:t>; --stdin / --req_file frontend fixes</a:t>
+                      </a:r>
+                      <a:endParaRPr lang="en-US" sz="1200" dirty="0">
+                        <a:latin typeface="Calibri" charset="0"/>
+                        <a:ea typeface="Calibri" charset="0"/>
+                        <a:cs typeface="Calibri" charset="0"/>
+                      </a:endParaRPr>
+                    </a:p>
+                  </a:txBody>
+                  <a:tcPr marL="82296" marR="82296" marT="82296" marB="82296" anchor="ctr">
+                    <a:lnL w="12700" cap="flat" cmpd="sng" algn="ctr">
+                      <a:solidFill>
+                        <a:srgbClr val="D8DEEA"/>
+                      </a:solidFill>
+                      <a:prstDash val="solid"/>
+                      <a:round/>
+                      <a:headEnd type="none" w="med" len="med"/>
+                      <a:tailEnd type="none" w="med" len="med"/>
+                    </a:lnL>
+                    <a:lnR w="12700" cap="flat" cmpd="sng" algn="ctr">
+                      <a:solidFill>
+                        <a:srgbClr val="D8DEEA"/>
+                      </a:solidFill>
+                      <a:prstDash val="solid"/>
+                      <a:round/>
+                      <a:headEnd type="none" w="med" len="med"/>
+                      <a:tailEnd type="none" w="med" len="med"/>
+                    </a:lnR>
+                    <a:lnT w="12700" cap="flat" cmpd="sng" algn="ctr">
+                      <a:solidFill>
+                        <a:srgbClr val="D8DEEA"/>
+                      </a:solidFill>
+                      <a:prstDash val="solid"/>
+                      <a:round/>
+                      <a:headEnd type="none" w="med" len="med"/>
+                      <a:tailEnd type="none" w="med" len="med"/>
+                    </a:lnT>
+                    <a:lnB w="12700" cap="flat" cmpd="sng" algn="ctr">
+                      <a:solidFill>
+                        <a:srgbClr val="D8DEEA"/>
+                      </a:solidFill>
+                      <a:prstDash val="solid"/>
+                      <a:round/>
+                      <a:headEnd type="none" w="med" len="med"/>
+                      <a:tailEnd type="none" w="med" len="med"/>
+                    </a:lnB>
+                    <a:solidFill>
+                      <a:srgbClr val="FFFFFF"/>
+                    </a:solidFill>
+                  </a:tcPr>
+                </a:tc>
+                <a:tc>
+                  <a:txBody>
+                    <a:bodyPr/>
+                    <a:lstStyle/>
+                    <a:p>
+                      <a:pPr algn="l" indent="0" marL="0">
+                        <a:buNone/>
+                      </a:pPr>
+                      <a:r>
+                        <a:rPr lang="en-US" sz="1200" b="1" dirty="0">
+                          <a:solidFill>
+                            <a:srgbClr val="212121"/>
+                          </a:solidFill>
+                          <a:latin typeface="Calibri" pitchFamily="34" charset="0"/>
+                          <a:ea typeface="Calibri" pitchFamily="34" charset="-122"/>
+                          <a:cs typeface="Calibri" pitchFamily="34" charset="-120"/>
+                        </a:rPr>
+                        <a:t>Rocq proofs w.r.t. CVM reference semantics --</a:t>
+                      </a:r>
+                      <a:pPr algn="l" indent="0" marL="0">
+                        <a:buNone/>
+                      </a:pPr>
+                      <a:r>
+                        <a:rPr lang="en-US" sz="1200" dirty="0">
+                          <a:solidFill>
+                            <a:srgbClr val="212121"/>
+                          </a:solidFill>
+                          <a:latin typeface="Calibri" pitchFamily="34" charset="0"/>
+                          <a:ea typeface="Calibri" pitchFamily="34" charset="-122"/>
+                          <a:cs typeface="Calibri" pitchFamily="34" charset="-120"/>
+                        </a:rPr>
+                        <a:t>Claude couldn’t update existing proofs automatically, but assisted an expert Rocq developer</a:t>
+                      </a:r>
+                      <a:endParaRPr lang="en-US" sz="1200" dirty="0">
+                        <a:latin typeface="Calibri" charset="0"/>
+                        <a:ea typeface="Calibri" charset="0"/>
+                        <a:cs typeface="Calibri" charset="0"/>
+                      </a:endParaRPr>
+                    </a:p>
+                  </a:txBody>
+                  <a:tcPr marL="82296" marR="82296" marT="82296" marB="82296" anchor="ctr">
+                    <a:lnL w="12700" cap="flat" cmpd="sng" algn="ctr">
+                      <a:solidFill>
+                        <a:srgbClr val="D8DEEA"/>
+                      </a:solidFill>
+                      <a:prstDash val="solid"/>
+                      <a:round/>
+                      <a:headEnd type="none" w="med" len="med"/>
+                      <a:tailEnd type="none" w="med" len="med"/>
+                    </a:lnL>
+                    <a:lnR w="12700" cap="flat" cmpd="sng" algn="ctr">
+                      <a:solidFill>
+                        <a:srgbClr val="D8DEEA"/>
+                      </a:solidFill>
+                      <a:prstDash val="solid"/>
+                      <a:round/>
+                      <a:headEnd type="none" w="med" len="med"/>
+                      <a:tailEnd type="none" w="med" len="med"/>
+                    </a:lnR>
+                    <a:lnT w="12700" cap="flat" cmpd="sng" algn="ctr">
+                      <a:solidFill>
+                        <a:srgbClr val="D8DEEA"/>
+                      </a:solidFill>
+                      <a:prstDash val="solid"/>
+                      <a:round/>
+                      <a:headEnd type="none" w="med" len="med"/>
+                      <a:tailEnd type="none" w="med" len="med"/>
+                    </a:lnT>
+                    <a:lnB w="12700" cap="flat" cmpd="sng" algn="ctr">
+                      <a:solidFill>
+                        <a:srgbClr val="D8DEEA"/>
+                      </a:solidFill>
+                      <a:prstDash val="solid"/>
+                      <a:round/>
+                      <a:headEnd type="none" w="med" len="med"/>
+                      <a:tailEnd type="none" w="med" len="med"/>
+                    </a:lnB>
+                    <a:solidFill>
+                      <a:srgbClr val="FFFFFF"/>
+                    </a:solidFill>
+                  </a:tcPr>
+                </a:tc>
+              </a:tr>
+              <a:tr h="841248">
+                <a:tc>
+                  <a:txBody>
+                    <a:bodyPr/>
+                    <a:lstStyle/>
+                    <a:p>
+                      <a:pPr algn="l" indent="0" marL="0">
+                        <a:buNone/>
+                      </a:pPr>
+                      <a:r>
+                        <a:rPr lang="en-US" sz="1200" b="1" dirty="0">
+                          <a:solidFill>
+                            <a:srgbClr val="212121"/>
+                          </a:solidFill>
+                          <a:latin typeface="Calibri" pitchFamily="34" charset="0"/>
+                          <a:ea typeface="Calibri" pitchFamily="34" charset="-122"/>
+                          <a:cs typeface="Calibri" pitchFamily="34" charset="-120"/>
+                        </a:rPr>
+                        <a:t>Measurement primitives</a:t>
+                      </a:r>
+                      <a:endParaRPr lang="en-US" sz="1200" dirty="0">
+                        <a:latin typeface="Calibri" charset="0"/>
+                        <a:ea typeface="Calibri" charset="0"/>
+                        <a:cs typeface="Calibri" charset="0"/>
+                      </a:endParaRPr>
+                    </a:p>
+                  </a:txBody>
+                  <a:tcPr marL="82296" marR="82296" marT="82296" marB="82296" anchor="ctr">
+                    <a:lnL w="12700" cap="flat" cmpd="sng" algn="ctr">
+                      <a:solidFill>
+                        <a:srgbClr val="D8DEEA"/>
+                      </a:solidFill>
+                      <a:prstDash val="solid"/>
+                      <a:round/>
+                      <a:headEnd type="none" w="med" len="med"/>
+                      <a:tailEnd type="none" w="med" len="med"/>
+                    </a:lnL>
+                    <a:lnR w="12700" cap="flat" cmpd="sng" algn="ctr">
+                      <a:solidFill>
+                        <a:srgbClr val="D8DEEA"/>
+                      </a:solidFill>
+                      <a:prstDash val="solid"/>
+                      <a:round/>
+                      <a:headEnd type="none" w="med" len="med"/>
+                      <a:tailEnd type="none" w="med" len="med"/>
+                    </a:lnR>
+                    <a:lnT w="12700" cap="flat" cmpd="sng" algn="ctr">
+                      <a:solidFill>
+                        <a:srgbClr val="D8DEEA"/>
+                      </a:solidFill>
+                      <a:prstDash val="solid"/>
+                      <a:round/>
+                      <a:headEnd type="none" w="med" len="med"/>
+                      <a:tailEnd type="none" w="med" len="med"/>
+                    </a:lnT>
+                    <a:lnB w="12700" cap="flat" cmpd="sng" algn="ctr">
+                      <a:solidFill>
+                        <a:srgbClr val="D8DEEA"/>
+                      </a:solidFill>
+                      <a:prstDash val="solid"/>
+                      <a:round/>
+                      <a:headEnd type="none" w="med" len="med"/>
+                      <a:tailEnd type="none" w="med" len="med"/>
+                    </a:lnB>
+                    <a:solidFill>
+                      <a:srgbClr val="FFFFFF"/>
+                    </a:solidFill>
+                  </a:tcPr>
+                </a:tc>
+                <a:tc>
+                  <a:txBody>
+                    <a:bodyPr/>
+                    <a:lstStyle/>
+                    <a:p>
+                      <a:pPr algn="l" indent="0" marL="0">
+                        <a:buNone/>
+                      </a:pPr>
+                      <a:r>
+                        <a:rPr lang="en-US" sz="1200" b="1" dirty="0">
+                          <a:solidFill>
+                            <a:srgbClr val="212121"/>
+                          </a:solidFill>
+                          <a:latin typeface="Calibri" pitchFamily="34" charset="0"/>
+                          <a:ea typeface="Calibri" pitchFamily="34" charset="-122"/>
+                          <a:cs typeface="Calibri" pitchFamily="34" charset="-120"/>
+                        </a:rPr>
+                        <a:t>12 new + 7 upgraded</a:t>
+                      </a:r>
+                      <a:pPr algn="l" indent="0" marL="0">
+                        <a:buNone/>
+                      </a:pPr>
+                      <a:r>
+                        <a:rPr lang="en-US" sz="1200" dirty="0">
+                          <a:solidFill>
+                            <a:srgbClr val="212121"/>
+                          </a:solidFill>
+                          <a:latin typeface="Calibri" pitchFamily="34" charset="0"/>
+                          <a:ea typeface="Calibri" pitchFamily="34" charset="-122"/>
+                          <a:cs typeface="Calibri" pitchFamily="34" charset="-120"/>
+                        </a:rPr>
+                        <a:t> asp-libs binaries — hashing, the Lean/Rocq/HAMR runners &amp; appraisers, the cheat scan, golden-slice extraction</a:t>
+                      </a:r>
+                      <a:endParaRPr lang="en-US" sz="1200" dirty="0">
+                        <a:latin typeface="Calibri" charset="0"/>
+                        <a:ea typeface="Calibri" charset="0"/>
+                        <a:cs typeface="Calibri" charset="0"/>
+                      </a:endParaRPr>
+                    </a:p>
+                  </a:txBody>
+                  <a:tcPr marL="82296" marR="82296" marT="82296" marB="82296" anchor="ctr">
+                    <a:lnL w="12700" cap="flat" cmpd="sng" algn="ctr">
+                      <a:solidFill>
+                        <a:srgbClr val="D8DEEA"/>
+                      </a:solidFill>
+                      <a:prstDash val="solid"/>
+                      <a:round/>
+                      <a:headEnd type="none" w="med" len="med"/>
+                      <a:tailEnd type="none" w="med" len="med"/>
+                    </a:lnL>
+                    <a:lnR w="12700" cap="flat" cmpd="sng" algn="ctr">
+                      <a:solidFill>
+                        <a:srgbClr val="D8DEEA"/>
+                      </a:solidFill>
+                      <a:prstDash val="solid"/>
+                      <a:round/>
+                      <a:headEnd type="none" w="med" len="med"/>
+                      <a:tailEnd type="none" w="med" len="med"/>
+                    </a:lnR>
+                    <a:lnT w="12700" cap="flat" cmpd="sng" algn="ctr">
+                      <a:solidFill>
+                        <a:srgbClr val="D8DEEA"/>
+                      </a:solidFill>
+                      <a:prstDash val="solid"/>
+                      <a:round/>
+                      <a:headEnd type="none" w="med" len="med"/>
+                      <a:tailEnd type="none" w="med" len="med"/>
+                    </a:lnT>
+                    <a:lnB w="12700" cap="flat" cmpd="sng" algn="ctr">
+                      <a:solidFill>
+                        <a:srgbClr val="D8DEEA"/>
+                      </a:solidFill>
+                      <a:prstDash val="solid"/>
+                      <a:round/>
+                      <a:headEnd type="none" w="med" len="med"/>
+                      <a:tailEnd type="none" w="med" len="med"/>
+                    </a:lnB>
+                    <a:solidFill>
+                      <a:srgbClr val="FFFFFF"/>
+                    </a:solidFill>
+                  </a:tcPr>
+                </a:tc>
+                <a:tc>
+                  <a:txBody>
+                    <a:bodyPr/>
+                    <a:lstStyle/>
+                    <a:p>
+                      <a:pPr algn="l" indent="0" marL="0">
+                        <a:buNone/>
+                      </a:pPr>
+                      <a:r>
+                        <a:rPr lang="en-US" sz="1200" dirty="0">
+                          <a:solidFill>
+                            <a:srgbClr val="212121"/>
+                          </a:solidFill>
+                          <a:latin typeface="Calibri" pitchFamily="34" charset="0"/>
+                          <a:ea typeface="Calibri" pitchFamily="34" charset="-122"/>
+                          <a:cs typeface="Calibri" pitchFamily="34" charset="-120"/>
+                        </a:rPr>
+                        <a:t>tool hashes measure-then-use; syntax-guided analysis of source files, appraisal vs signed goldens</a:t>
+                      </a:r>
+                      <a:endParaRPr lang="en-US" sz="1200" dirty="0">
+                        <a:latin typeface="Calibri" charset="0"/>
+                        <a:ea typeface="Calibri" charset="0"/>
+                        <a:cs typeface="Calibri" charset="0"/>
+                      </a:endParaRPr>
+                    </a:p>
+                  </a:txBody>
+                  <a:tcPr marL="82296" marR="82296" marT="82296" marB="82296" anchor="ctr">
+                    <a:lnL w="12700" cap="flat" cmpd="sng" algn="ctr">
+                      <a:solidFill>
+                        <a:srgbClr val="D8DEEA"/>
+                      </a:solidFill>
+                      <a:prstDash val="solid"/>
+                      <a:round/>
+                      <a:headEnd type="none" w="med" len="med"/>
+                      <a:tailEnd type="none" w="med" len="med"/>
+                    </a:lnL>
+                    <a:lnR w="12700" cap="flat" cmpd="sng" algn="ctr">
+                      <a:solidFill>
+                        <a:srgbClr val="D8DEEA"/>
+                      </a:solidFill>
+                      <a:prstDash val="solid"/>
+                      <a:round/>
+                      <a:headEnd type="none" w="med" len="med"/>
+                      <a:tailEnd type="none" w="med" len="med"/>
+                    </a:lnR>
+                    <a:lnT w="12700" cap="flat" cmpd="sng" algn="ctr">
+                      <a:solidFill>
+                        <a:srgbClr val="D8DEEA"/>
+                      </a:solidFill>
+                      <a:prstDash val="solid"/>
+                      <a:round/>
+                      <a:headEnd type="none" w="med" len="med"/>
+                      <a:tailEnd type="none" w="med" len="med"/>
+                    </a:lnT>
+                    <a:lnB w="12700" cap="flat" cmpd="sng" algn="ctr">
+                      <a:solidFill>
+                        <a:srgbClr val="D8DEEA"/>
+                      </a:solidFill>
+                      <a:prstDash val="solid"/>
+                      <a:round/>
+                      <a:headEnd type="none" w="med" len="med"/>
+                      <a:tailEnd type="none" w="med" len="med"/>
+                    </a:lnB>
+                    <a:solidFill>
+                      <a:srgbClr val="FFFFFF"/>
+                    </a:solidFill>
+                  </a:tcPr>
+                </a:tc>
+              </a:tr>
+              <a:tr h="566928">
+                <a:tc>
+                  <a:txBody>
+                    <a:bodyPr/>
+                    <a:lstStyle/>
+                    <a:p>
+                      <a:pPr algn="l" indent="0" marL="0">
+                        <a:buNone/>
+                      </a:pPr>
+                      <a:r>
+                        <a:rPr lang="en-US" sz="1200" b="1" dirty="0">
+                          <a:solidFill>
+                            <a:srgbClr val="212121"/>
+                          </a:solidFill>
+                          <a:latin typeface="Calibri" pitchFamily="34" charset="0"/>
+                          <a:ea typeface="Calibri" pitchFamily="34" charset="-122"/>
+                          <a:cs typeface="Calibri" pitchFamily="34" charset="-120"/>
+                        </a:rPr>
+                        <a:t>Attestation protocols</a:t>
+                      </a:r>
+                      <a:endParaRPr lang="en-US" sz="1200" dirty="0">
+                        <a:latin typeface="Calibri" charset="0"/>
+                        <a:ea typeface="Calibri" charset="0"/>
+                        <a:cs typeface="Calibri" charset="0"/>
+                      </a:endParaRPr>
+                    </a:p>
+                  </a:txBody>
+                  <a:tcPr marL="82296" marR="82296" marT="82296" marB="82296" anchor="ctr">
+                    <a:lnL w="12700" cap="flat" cmpd="sng" algn="ctr">
+                      <a:solidFill>
+                        <a:srgbClr val="D8DEEA"/>
+                      </a:solidFill>
+                      <a:prstDash val="solid"/>
+                      <a:round/>
+                      <a:headEnd type="none" w="med" len="med"/>
+                      <a:tailEnd type="none" w="med" len="med"/>
+                    </a:lnL>
+                    <a:lnR w="12700" cap="flat" cmpd="sng" algn="ctr">
+                      <a:solidFill>
+                        <a:srgbClr val="D8DEEA"/>
+                      </a:solidFill>
+                      <a:prstDash val="solid"/>
+                      <a:round/>
+                      <a:headEnd type="none" w="med" len="med"/>
+                      <a:tailEnd type="none" w="med" len="med"/>
+                    </a:lnR>
+                    <a:lnT w="12700" cap="flat" cmpd="sng" algn="ctr">
+                      <a:solidFill>
+                        <a:srgbClr val="D8DEEA"/>
+                      </a:solidFill>
+                      <a:prstDash val="solid"/>
+                      <a:round/>
+                      <a:headEnd type="none" w="med" len="med"/>
+                      <a:tailEnd type="none" w="med" len="med"/>
+                    </a:lnT>
+                    <a:lnB w="12700" cap="flat" cmpd="sng" algn="ctr">
+                      <a:solidFill>
+                        <a:srgbClr val="D8DEEA"/>
+                      </a:solidFill>
+                      <a:prstDash val="solid"/>
+                      <a:round/>
+                      <a:headEnd type="none" w="med" len="med"/>
+                      <a:tailEnd type="none" w="med" len="med"/>
+                    </a:lnB>
+                    <a:solidFill>
+                      <a:srgbClr val="FFFFFF"/>
+                    </a:solidFill>
+                  </a:tcPr>
+                </a:tc>
+                <a:tc>
+                  <a:txBody>
+                    <a:bodyPr/>
+                    <a:lstStyle/>
+                    <a:p>
+                      <a:pPr algn="l" indent="0" marL="0">
+                        <a:buNone/>
+                      </a:pPr>
+                      <a:r>
+                        <a:rPr lang="en-US" sz="1200" b="1" dirty="0">
+                          <a:solidFill>
+                            <a:srgbClr val="212121"/>
+                          </a:solidFill>
+                          <a:latin typeface="Calibri" pitchFamily="34" charset="0"/>
+                          <a:ea typeface="Calibri" pitchFamily="34" charset="-122"/>
+                          <a:cs typeface="Calibri" pitchFamily="34" charset="-120"/>
+                        </a:rPr>
+                        <a:t>42 provisioned</a:t>
+                      </a:r>
+                      <a:pPr algn="l" indent="0" marL="0">
+                        <a:buNone/>
+                      </a:pPr>
+                      <a:r>
+                        <a:rPr lang="en-US" sz="1200" dirty="0">
+                          <a:solidFill>
+                            <a:srgbClr val="212121"/>
+                          </a:solidFill>
+                          <a:latin typeface="Calibri" pitchFamily="34" charset="0"/>
+                          <a:ea typeface="Calibri" pitchFamily="34" charset="-122"/>
+                          <a:cs typeface="Calibri" pitchFamily="34" charset="-120"/>
+                        </a:rPr>
+                        <a:t> Copland protocol directories across the ecosystems</a:t>
+                      </a:r>
+                      <a:endParaRPr lang="en-US" sz="1200" dirty="0">
+                        <a:latin typeface="Calibri" charset="0"/>
+                        <a:ea typeface="Calibri" charset="0"/>
+                        <a:cs typeface="Calibri" charset="0"/>
+                      </a:endParaRPr>
+                    </a:p>
+                  </a:txBody>
+                  <a:tcPr marL="82296" marR="82296" marT="82296" marB="82296" anchor="ctr">
+                    <a:lnL w="12700" cap="flat" cmpd="sng" algn="ctr">
+                      <a:solidFill>
+                        <a:srgbClr val="D8DEEA"/>
+                      </a:solidFill>
+                      <a:prstDash val="solid"/>
+                      <a:round/>
+                      <a:headEnd type="none" w="med" len="med"/>
+                      <a:tailEnd type="none" w="med" len="med"/>
+                    </a:lnL>
+                    <a:lnR w="12700" cap="flat" cmpd="sng" algn="ctr">
+                      <a:solidFill>
+                        <a:srgbClr val="D8DEEA"/>
+                      </a:solidFill>
+                      <a:prstDash val="solid"/>
+                      <a:round/>
+                      <a:headEnd type="none" w="med" len="med"/>
+                      <a:tailEnd type="none" w="med" len="med"/>
+                    </a:lnR>
+                    <a:lnT w="12700" cap="flat" cmpd="sng" algn="ctr">
+                      <a:solidFill>
+                        <a:srgbClr val="D8DEEA"/>
+                      </a:solidFill>
+                      <a:prstDash val="solid"/>
+                      <a:round/>
+                      <a:headEnd type="none" w="med" len="med"/>
+                      <a:tailEnd type="none" w="med" len="med"/>
+                    </a:lnT>
+                    <a:lnB w="12700" cap="flat" cmpd="sng" algn="ctr">
+                      <a:solidFill>
+                        <a:srgbClr val="D8DEEA"/>
+                      </a:solidFill>
+                      <a:prstDash val="solid"/>
+                      <a:round/>
+                      <a:headEnd type="none" w="med" len="med"/>
+                      <a:tailEnd type="none" w="med" len="med"/>
+                    </a:lnB>
+                    <a:solidFill>
+                      <a:srgbClr val="FFFFFF"/>
+                    </a:solidFill>
+                  </a:tcPr>
+                </a:tc>
+                <a:tc>
+                  <a:txBody>
+                    <a:bodyPr/>
+                    <a:lstStyle/>
+                    <a:p>
+                      <a:pPr algn="l" indent="0" marL="0">
+                        <a:buNone/>
+                      </a:pPr>
+                      <a:r>
+                        <a:rPr lang="en-US" sz="1200" dirty="0">
+                          <a:solidFill>
+                            <a:srgbClr val="212121"/>
+                          </a:solidFill>
+                          <a:latin typeface="Calibri" pitchFamily="34" charset="0"/>
+                          <a:ea typeface="Calibri" pitchFamily="34" charset="-122"/>
+                          <a:cs typeface="Calibri" pitchFamily="34" charset="-120"/>
+                        </a:rPr>
+                        <a:t>readiness-gate config checks; blessed baselines</a:t>
+                      </a:r>
+                      <a:endParaRPr lang="en-US" sz="1200" dirty="0">
+                        <a:latin typeface="Calibri" charset="0"/>
+                        <a:ea typeface="Calibri" charset="0"/>
+                        <a:cs typeface="Calibri" charset="0"/>
+                      </a:endParaRPr>
+                    </a:p>
+                  </a:txBody>
+                  <a:tcPr marL="82296" marR="82296" marT="82296" marB="82296" anchor="ctr">
+                    <a:lnL w="12700" cap="flat" cmpd="sng" algn="ctr">
+                      <a:solidFill>
+                        <a:srgbClr val="D8DEEA"/>
+                      </a:solidFill>
+                      <a:prstDash val="solid"/>
+                      <a:round/>
+                      <a:headEnd type="none" w="med" len="med"/>
+                      <a:tailEnd type="none" w="med" len="med"/>
+                    </a:lnL>
+                    <a:lnR w="12700" cap="flat" cmpd="sng" algn="ctr">
+                      <a:solidFill>
+                        <a:srgbClr val="D8DEEA"/>
+                      </a:solidFill>
+                      <a:prstDash val="solid"/>
+                      <a:round/>
+                      <a:headEnd type="none" w="med" len="med"/>
+                      <a:tailEnd type="none" w="med" len="med"/>
+                    </a:lnR>
+                    <a:lnT w="12700" cap="flat" cmpd="sng" algn="ctr">
+                      <a:solidFill>
+                        <a:srgbClr val="D8DEEA"/>
+                      </a:solidFill>
+                      <a:prstDash val="solid"/>
+                      <a:round/>
+                      <a:headEnd type="none" w="med" len="med"/>
+                      <a:tailEnd type="none" w="med" len="med"/>
+                    </a:lnT>
+                    <a:lnB w="12700" cap="flat" cmpd="sng" algn="ctr">
+                      <a:solidFill>
+                        <a:srgbClr val="D8DEEA"/>
+                      </a:solidFill>
+                      <a:prstDash val="solid"/>
+                      <a:round/>
+                      <a:headEnd type="none" w="med" len="med"/>
+                      <a:tailEnd type="none" w="med" len="med"/>
+                    </a:lnB>
+                    <a:solidFill>
+                      <a:srgbClr val="FFFFFF"/>
+                    </a:solidFill>
+                  </a:tcPr>
+                </a:tc>
+              </a:tr>
+              <a:tr h="749808">
+                <a:tc>
+                  <a:txBody>
+                    <a:bodyPr/>
+                    <a:lstStyle/>
+                    <a:p>
+                      <a:pPr algn="l" indent="0" marL="0">
+                        <a:buNone/>
+                      </a:pPr>
+                      <a:r>
+                        <a:rPr lang="en-US" sz="1200" b="1" dirty="0">
+                          <a:solidFill>
+                            <a:srgbClr val="212121"/>
+                          </a:solidFill>
+                          <a:latin typeface="Calibri" pitchFamily="34" charset="0"/>
+                          <a:ea typeface="Calibri" pitchFamily="34" charset="-122"/>
+                          <a:cs typeface="Calibri" pitchFamily="34" charset="-120"/>
+                        </a:rPr>
+                        <a:t>Attacks</a:t>
+                      </a:r>
+                      <a:endParaRPr lang="en-US" sz="1200" dirty="0">
+                        <a:latin typeface="Calibri" charset="0"/>
+                        <a:ea typeface="Calibri" charset="0"/>
+                        <a:cs typeface="Calibri" charset="0"/>
+                      </a:endParaRPr>
+                    </a:p>
+                  </a:txBody>
+                  <a:tcPr marL="82296" marR="82296" marT="82296" marB="82296" anchor="ctr">
+                    <a:lnL w="12700" cap="flat" cmpd="sng" algn="ctr">
+                      <a:solidFill>
+                        <a:srgbClr val="D8DEEA"/>
+                      </a:solidFill>
+                      <a:prstDash val="solid"/>
+                      <a:round/>
+                      <a:headEnd type="none" w="med" len="med"/>
+                      <a:tailEnd type="none" w="med" len="med"/>
+                    </a:lnL>
+                    <a:lnR w="12700" cap="flat" cmpd="sng" algn="ctr">
+                      <a:solidFill>
+                        <a:srgbClr val="D8DEEA"/>
+                      </a:solidFill>
+                      <a:prstDash val="solid"/>
+                      <a:round/>
+                      <a:headEnd type="none" w="med" len="med"/>
+                      <a:tailEnd type="none" w="med" len="med"/>
+                    </a:lnR>
+                    <a:lnT w="12700" cap="flat" cmpd="sng" algn="ctr">
+                      <a:solidFill>
+                        <a:srgbClr val="D8DEEA"/>
+                      </a:solidFill>
+                      <a:prstDash val="solid"/>
+                      <a:round/>
+                      <a:headEnd type="none" w="med" len="med"/>
+                      <a:tailEnd type="none" w="med" len="med"/>
+                    </a:lnT>
+                    <a:lnB w="12700" cap="flat" cmpd="sng" algn="ctr">
+                      <a:solidFill>
+                        <a:srgbClr val="D8DEEA"/>
+                      </a:solidFill>
+                      <a:prstDash val="solid"/>
+                      <a:round/>
+                      <a:headEnd type="none" w="med" len="med"/>
+                      <a:tailEnd type="none" w="med" len="med"/>
+                    </a:lnB>
+                    <a:solidFill>
+                      <a:srgbClr val="FFFFFF"/>
+                    </a:solidFill>
+                  </a:tcPr>
+                </a:tc>
+                <a:tc>
+                  <a:txBody>
+                    <a:bodyPr/>
+                    <a:lstStyle/>
+                    <a:p>
+                      <a:pPr algn="l" indent="0" marL="0">
+                        <a:buNone/>
+                      </a:pPr>
+                      <a:r>
+                        <a:rPr lang="en-US" sz="1200" dirty="0">
+                          <a:solidFill>
+                            <a:srgbClr val="212121"/>
+                          </a:solidFill>
+                          <a:latin typeface="Calibri" pitchFamily="34" charset="0"/>
+                          <a:ea typeface="Calibri" pitchFamily="34" charset="-122"/>
+                          <a:cs typeface="Calibri" pitchFamily="34" charset="-120"/>
+                        </a:rPr>
+                        <a:t>scripted demo tampers (scenes 1–8) + </a:t>
+                      </a:r>
+                      <a:pPr algn="l" indent="0" marL="0">
+                        <a:buNone/>
+                      </a:pPr>
+                      <a:r>
+                        <a:rPr lang="en-US" sz="1200" b="1" dirty="0">
+                          <a:solidFill>
+                            <a:srgbClr val="212121"/>
+                          </a:solidFill>
+                          <a:latin typeface="Calibri" pitchFamily="34" charset="0"/>
+                          <a:ea typeface="Calibri" pitchFamily="34" charset="-122"/>
+                          <a:cs typeface="Calibri" pitchFamily="34" charset="-120"/>
+                        </a:rPr>
+                        <a:t>7 red-team attack classes</a:t>
+                      </a:r>
+                      <a:pPr algn="l" indent="0" marL="0">
+                        <a:buNone/>
+                      </a:pPr>
+                      <a:r>
+                        <a:rPr lang="en-US" sz="1200" dirty="0">
+                          <a:solidFill>
+                            <a:srgbClr val="212121"/>
+                          </a:solidFill>
+                          <a:latin typeface="Calibri" pitchFamily="34" charset="0"/>
+                          <a:ea typeface="Calibri" pitchFamily="34" charset="-122"/>
+                          <a:cs typeface="Calibri" pitchFamily="34" charset="-120"/>
+                        </a:rPr>
+                        <a:t> (scenes 9–12, 14)</a:t>
+                      </a:r>
+                      <a:endParaRPr lang="en-US" sz="1200" dirty="0">
+                        <a:latin typeface="Calibri" charset="0"/>
+                        <a:ea typeface="Calibri" charset="0"/>
+                        <a:cs typeface="Calibri" charset="0"/>
+                      </a:endParaRPr>
+                    </a:p>
+                  </a:txBody>
+                  <a:tcPr marL="82296" marR="82296" marT="82296" marB="82296" anchor="ctr">
+                    <a:lnL w="12700" cap="flat" cmpd="sng" algn="ctr">
+                      <a:solidFill>
+                        <a:srgbClr val="D8DEEA"/>
+                      </a:solidFill>
+                      <a:prstDash val="solid"/>
+                      <a:round/>
+                      <a:headEnd type="none" w="med" len="med"/>
+                      <a:tailEnd type="none" w="med" len="med"/>
+                    </a:lnL>
+                    <a:lnR w="12700" cap="flat" cmpd="sng" algn="ctr">
+                      <a:solidFill>
+                        <a:srgbClr val="D8DEEA"/>
+                      </a:solidFill>
+                      <a:prstDash val="solid"/>
+                      <a:round/>
+                      <a:headEnd type="none" w="med" len="med"/>
+                      <a:tailEnd type="none" w="med" len="med"/>
+                    </a:lnR>
+                    <a:lnT w="12700" cap="flat" cmpd="sng" algn="ctr">
+                      <a:solidFill>
+                        <a:srgbClr val="D8DEEA"/>
+                      </a:solidFill>
+                      <a:prstDash val="solid"/>
+                      <a:round/>
+                      <a:headEnd type="none" w="med" len="med"/>
+                      <a:tailEnd type="none" w="med" len="med"/>
+                    </a:lnT>
+                    <a:lnB w="12700" cap="flat" cmpd="sng" algn="ctr">
+                      <a:solidFill>
+                        <a:srgbClr val="D8DEEA"/>
+                      </a:solidFill>
+                      <a:prstDash val="solid"/>
+                      <a:round/>
+                      <a:headEnd type="none" w="med" len="med"/>
+                      <a:tailEnd type="none" w="med" len="med"/>
+                    </a:lnB>
+                    <a:solidFill>
+                      <a:srgbClr val="FFFFFF"/>
+                    </a:solidFill>
+                  </a:tcPr>
+                </a:tc>
+                <a:tc>
+                  <a:txBody>
+                    <a:bodyPr/>
+                    <a:lstStyle/>
+                    <a:p>
+                      <a:pPr algn="l" indent="0" marL="0">
+                        <a:buNone/>
+                      </a:pPr>
+                      <a:r>
+                        <a:rPr lang="en-US" sz="1200" dirty="0">
+                          <a:solidFill>
+                            <a:srgbClr val="212121"/>
+                          </a:solidFill>
+                          <a:latin typeface="Calibri" pitchFamily="34" charset="0"/>
+                          <a:ea typeface="Calibri" pitchFamily="34" charset="-122"/>
+                          <a:cs typeface="Calibri" pitchFamily="34" charset="-120"/>
+                        </a:rPr>
+                        <a:t>every scene gates on detection / attribution; each forced a new tier (</a:t>
+                      </a:r>
+                      <a:pPr algn="l" indent="0" marL="0">
+                        <a:buNone/>
+                      </a:pPr>
+                      <a:r>
+                        <a:rPr lang="en-US" sz="1200" i="1" dirty="0">
+                          <a:solidFill>
+                            <a:srgbClr val="212121"/>
+                          </a:solidFill>
+                          <a:latin typeface="Calibri" pitchFamily="34" charset="0"/>
+                          <a:ea typeface="Calibri" pitchFamily="34" charset="-122"/>
+                          <a:cs typeface="Calibri" pitchFamily="34" charset="-120"/>
+                        </a:rPr>
+                        <a:t>→ next slide</a:t>
+                      </a:r>
+                      <a:pPr algn="l" indent="0" marL="0">
+                        <a:buNone/>
+                      </a:pPr>
+                      <a:r>
+                        <a:rPr lang="en-US" sz="1200" dirty="0">
+                          <a:solidFill>
+                            <a:srgbClr val="212121"/>
+                          </a:solidFill>
+                          <a:latin typeface="Calibri" pitchFamily="34" charset="0"/>
+                          <a:ea typeface="Calibri" pitchFamily="34" charset="-122"/>
+                          <a:cs typeface="Calibri" pitchFamily="34" charset="-120"/>
+                        </a:rPr>
+                        <a:t>)</a:t>
+                      </a:r>
+                      <a:endParaRPr lang="en-US" sz="1200" dirty="0">
+                        <a:latin typeface="Calibri" charset="0"/>
+                        <a:ea typeface="Calibri" charset="0"/>
+                        <a:cs typeface="Calibri" charset="0"/>
+                      </a:endParaRPr>
+                    </a:p>
+                  </a:txBody>
+                  <a:tcPr marL="82296" marR="82296" marT="82296" marB="82296" anchor="ctr">
+                    <a:lnL w="12700" cap="flat" cmpd="sng" algn="ctr">
+                      <a:solidFill>
+                        <a:srgbClr val="D8DEEA"/>
+                      </a:solidFill>
+                      <a:prstDash val="solid"/>
+                      <a:round/>
+                      <a:headEnd type="none" w="med" len="med"/>
+                      <a:tailEnd type="none" w="med" len="med"/>
+                    </a:lnL>
+                    <a:lnR w="12700" cap="flat" cmpd="sng" algn="ctr">
+                      <a:solidFill>
+                        <a:srgbClr val="D8DEEA"/>
+                      </a:solidFill>
+                      <a:prstDash val="solid"/>
+                      <a:round/>
+                      <a:headEnd type="none" w="med" len="med"/>
+                      <a:tailEnd type="none" w="med" len="med"/>
+                    </a:lnR>
+                    <a:lnT w="12700" cap="flat" cmpd="sng" algn="ctr">
+                      <a:solidFill>
+                        <a:srgbClr val="D8DEEA"/>
+                      </a:solidFill>
+                      <a:prstDash val="solid"/>
+                      <a:round/>
+                      <a:headEnd type="none" w="med" len="med"/>
+                      <a:tailEnd type="none" w="med" len="med"/>
+                    </a:lnT>
+                    <a:lnB w="12700" cap="flat" cmpd="sng" algn="ctr">
+                      <a:solidFill>
+                        <a:srgbClr val="D8DEEA"/>
+                      </a:solidFill>
+                      <a:prstDash val="solid"/>
+                      <a:round/>
+                      <a:headEnd type="none" w="med" len="med"/>
+                      <a:tailEnd type="none" w="med" len="med"/>
+                    </a:lnB>
+                    <a:solidFill>
+                      <a:srgbClr val="FFFFFF"/>
+                    </a:solidFill>
+                  </a:tcPr>
+                </a:tc>
+              </a:tr>
+            </a:tbl>
+          </a:graphicData>
+        </a:graphic>
+      </p:graphicFrame>
+      <p:sp>
+        <p:nvSpPr>
+          <p:cNvPr id="5" name="Text 2"/>
+          <p:cNvSpPr/>
+          <p:nvPr/>
+        </p:nvSpPr>
+        <p:spPr>
+          <a:xfrm>
+            <a:off x="640080" y="6126480"/>
+            <a:ext cx="10881360" cy="365760"/>
+          </a:xfrm>
+          <a:prstGeom prst="rect">
+            <a:avLst/>
+          </a:prstGeom>
+          <a:noFill/>
+          <a:ln/>
+        </p:spPr>
+        <p:txBody>
+          <a:bodyPr wrap="square" lIns="0" tIns="0" rIns="0" bIns="0" rtlCol="0" anchor="ctr"/>
+          <a:lstStyle/>
+          <a:p>
+            <a:pPr algn="l" indent="0" marL="0">
+              <a:buNone/>
+            </a:pPr>
+            <a:r>
+              <a:rPr lang="en-US" sz="1350" b="1" i="1" dirty="0">
+                <a:solidFill>
+                  <a:srgbClr val="1E2761"/>
+                </a:solidFill>
+                <a:latin typeface="Calibri" pitchFamily="34" charset="0"/>
+                <a:ea typeface="Calibri" pitchFamily="34" charset="-122"/>
+                <a:cs typeface="Calibri" pitchFamily="34" charset="-120"/>
+              </a:rPr>
+              <a:t>A virtuous cycle – </a:t>
+            </a:r>
+            <a:pPr algn="l" indent="0" marL="0">
+              <a:buNone/>
+            </a:pPr>
+            <a:r>
+              <a:rPr lang="en-US" sz="1350" i="1" dirty="0">
+                <a:solidFill>
+                  <a:srgbClr val="1E2761"/>
+                </a:solidFill>
+                <a:latin typeface="Calibri" pitchFamily="34" charset="0"/>
+                <a:ea typeface="Calibri" pitchFamily="34" charset="-122"/>
+                <a:cs typeface="Calibri" pitchFamily="34" charset="-120"/>
+              </a:rPr>
+              <a:t>AI-assisted workflow to add (deterministic) tools and domain-specific measurement capabilities.  </a:t>
+            </a:r>
+            <a:endParaRPr lang="en-US" sz="1350" dirty="0"/>
+          </a:p>
+        </p:txBody>
+      </p:sp>
+    </p:spTree>
+  </p:cSld>
+  <p:clrMapOvr>
+    <a:masterClrMapping/>
+  </p:clrMapOvr>
+</p:sld>
+</file>
+
+<file path=ppt/slides/slide19.xml><?xml version="1.0" encoding="utf-8"?>
+<p:sld xmlns:a="http://schemas.openxmlformats.org/drawingml/2006/main" xmlns:r="http://schemas.openxmlformats.org/officeDocument/2006/relationships" xmlns:p="http://schemas.openxmlformats.org/presentationml/2006/main">
+  <p:cSld name="Slide 19">
     <p:bg>
       <p:bgPr>
         <a:solidFill>

--- a/docs/video_slides_draft.pptx
+++ b/docs/video_slides_draft.pptx
@@ -24,9 +24,10 @@
     <p:sldId id="272" r:id="rId18"/>
     <p:sldId id="273" r:id="rId19"/>
     <p:sldId id="274" r:id="rId20"/>
+    <p:sldId id="275" r:id="rId21"/>
   </p:sldIdLst>
   <p:notesMasterIdLst>
-    <p:notesMasterId r:id="rId21"/>
+    <p:notesMasterId r:id="rId22"/>
   </p:notesMasterIdLst>
   <p:sldSz cx="12192000" cy="6858000"/>
   <p:notesSz cx="6858000" cy="12192000"/>
@@ -1412,8 +1413,11 @@
           <a:p>
             <a:r>
               <a:rPr lang="en-US" dirty="0"/>
-              <a:t>Collection point for every reference in the deck - keep this slide current as sections are added (isolette slide carries the K-State + AR-08-32 citations inline; Copland/Verus/seL4 seeded here ahead of their sections).
-DOIs on record in docs/video_slide_drafts.md.</a:t>
+              <a:t>Capstone slide 3 of 3 (title 'AI attacked the loop'). The same sessions red-teamed the stack they built; every attack was green across every EXISTING tier when found, and each forced a new measurement capability - defense-in-depth measured into existence.
+7 attacks -&gt; 4 measurement capabilities: cheat scan (ADMIT, SMUGGLE), sysproof file hashes (SHRINK, SWAP), gensrc measurement (STALE, INVERT), and the l1b marker tier + coverage lint (LAUNDER, highlighted - found this session).
+STALE vs INVERT are two different blind spots of 'verification succeeded': STALE = a stale cached verdict (verified over old bytes); INVERT = unverified code out of the proof's scope. Same detector (gensrc bytes), different evasion.
+LAUNDER is the reflexive one: it exposed a COVERAGE gap in the measurement itself (the report emits no compute_cases slice), so it forced a detector PLUS a provisioning invariant. Root cause is upstream (HAMR report emission) - see draft_hamr_report_contract_coverage.md.
+Speaker: the escalating lesson of 9-&gt;12 is that 'verification succeeded' and 'no cheats present' are both weaker claims than 'these are the blessed bytes.'</a:t>
             </a:r>
             <a:endParaRPr lang="en-US" dirty="0"/>
           </a:p>
@@ -1528,6 +1532,95 @@
             <a:fld id="{F7021451-1387-4CA6-816F-3879F97B5CBC}" type="slidenum">
               <a:rPr lang="en-US"/>
               <a:t>2</a:t>
+            </a:fld>
+            <a:endParaRPr lang="en-US"/>
+          </a:p>
+        </p:txBody>
+      </p:sp>
+    </p:spTree>
+    <p:extLst>
+      <p:ext uri="{BB962C8B-B14F-4D97-AF65-F5344CB8AC3E}">
+        <p14:creationId xmlns:p14="http://schemas.microsoft.com/office/powerpoint/2010/main" val="1024086991"/>
+      </p:ext>
+    </p:extLst>
+  </p:cSld>
+  <p:clrMapOvr>
+    <a:masterClrMapping/>
+  </p:clrMapOvr>
+</p:notes>
+</file>
+
+<file path=ppt/notesSlides/notesSlide20.xml><?xml version="1.0" encoding="utf-8"?>
+<p:notes xmlns:a="http://schemas.openxmlformats.org/drawingml/2006/main" xmlns:r="http://schemas.openxmlformats.org/officeDocument/2006/relationships" xmlns:p="http://schemas.openxmlformats.org/presentationml/2006/main">
+  <p:cSld>
+    <p:spTree>
+      <p:nvGrpSpPr>
+        <p:cNvPr id="1" name=""/>
+        <p:cNvGrpSpPr/>
+        <p:nvPr/>
+      </p:nvGrpSpPr>
+      <p:grpSpPr>
+        <a:xfrm>
+          <a:off x="0" y="0"/>
+          <a:ext cx="0" cy="0"/>
+          <a:chOff x="0" y="0"/>
+          <a:chExt cx="0" cy="0"/>
+        </a:xfrm>
+      </p:grpSpPr>
+      <p:sp>
+        <p:nvSpPr>
+          <p:cNvPr id="2" name="Slide Image Placeholder 1"/>
+          <p:cNvSpPr>
+            <a:spLocks noGrp="1" noRot="1" noChangeAspect="1"/>
+          </p:cNvSpPr>
+          <p:nvPr>
+            <p:ph type="sldImg"/>
+          </p:nvPr>
+        </p:nvSpPr>
+        <p:spPr/>
+      </p:sp>
+      <p:sp>
+        <p:nvSpPr>
+          <p:cNvPr id="3" name="Notes Placeholder 2"/>
+          <p:cNvSpPr>
+            <a:spLocks noGrp="1"/>
+          </p:cNvSpPr>
+          <p:nvPr>
+            <p:ph type="body" idx="1"/>
+          </p:nvPr>
+        </p:nvSpPr>
+        <p:spPr/>
+        <p:txBody>
+          <a:bodyPr/>
+          <a:lstStyle/>
+          <a:p>
+            <a:r>
+              <a:rPr lang="en-US" dirty="0"/>
+              <a:t>Collection point for every reference in the deck - keep this slide current as sections are added (isolette slide carries the K-State + AR-08-32 citations inline; Copland/Verus/seL4 seeded here ahead of their sections).
+DOIs on record in docs/video_slide_drafts.md.</a:t>
+            </a:r>
+            <a:endParaRPr lang="en-US" dirty="0"/>
+          </a:p>
+        </p:txBody>
+      </p:sp>
+      <p:sp>
+        <p:nvSpPr>
+          <p:cNvPr id="4" name="Slide Number Placeholder 3"/>
+          <p:cNvSpPr>
+            <a:spLocks noGrp="1"/>
+          </p:cNvSpPr>
+          <p:nvPr>
+            <p:ph type="sldNum" sz="quarter" idx="10"/>
+          </p:nvPr>
+        </p:nvSpPr>
+        <p:spPr/>
+        <p:txBody>
+          <a:bodyPr/>
+          <a:lstStyle/>
+          <a:p>
+            <a:fld id="{F7021451-1387-4CA6-816F-3879F97B5CBC}" type="slidenum">
+              <a:rPr lang="en-US"/>
+              <a:t>20</a:t>
             </a:fld>
             <a:endParaRPr lang="en-US"/>
           </a:p>
@@ -7027,7 +7120,35 @@
                 <a:ea typeface="Cambria" pitchFamily="34" charset="-122"/>
                 <a:cs typeface="Cambria" pitchFamily="34" charset="-120"/>
               </a:rPr>
-              <a:t>AI in the loop</a:t>
+              <a:t>AI </a:t>
+            </a:r>
+            <a:pPr indent="0" marL="0">
+              <a:buNone/>
+            </a:pPr>
+            <a:r>
+              <a:rPr lang="en-US" sz="4000" b="1" i="1" dirty="0">
+                <a:solidFill>
+                  <a:srgbClr val="1E2761"/>
+                </a:solidFill>
+                <a:latin typeface="Cambria" pitchFamily="34" charset="0"/>
+                <a:ea typeface="Cambria" pitchFamily="34" charset="-122"/>
+                <a:cs typeface="Cambria" pitchFamily="34" charset="-120"/>
+              </a:rPr>
+              <a:t>in</a:t>
+            </a:r>
+            <a:pPr indent="0" marL="0">
+              <a:buNone/>
+            </a:pPr>
+            <a:r>
+              <a:rPr lang="en-US" sz="4000" b="1" dirty="0">
+                <a:solidFill>
+                  <a:srgbClr val="1E2761"/>
+                </a:solidFill>
+                <a:latin typeface="Cambria" pitchFamily="34" charset="0"/>
+                <a:ea typeface="Cambria" pitchFamily="34" charset="-122"/>
+                <a:cs typeface="Cambria" pitchFamily="34" charset="-120"/>
+              </a:rPr>
+              <a:t> the loop</a:t>
             </a:r>
             <a:endParaRPr lang="en-US" sz="4000" dirty="0"/>
           </a:p>
@@ -8485,7 +8606,35 @@
                 <a:ea typeface="Cambria" pitchFamily="34" charset="-122"/>
                 <a:cs typeface="Cambria" pitchFamily="34" charset="-120"/>
               </a:rPr>
-              <a:t>AI built the loop</a:t>
+              <a:t>AI </a:t>
+            </a:r>
+            <a:pPr indent="0" marL="0">
+              <a:buNone/>
+            </a:pPr>
+            <a:r>
+              <a:rPr lang="en-US" sz="4000" b="1" i="1" dirty="0">
+                <a:solidFill>
+                  <a:srgbClr val="1E2761"/>
+                </a:solidFill>
+                <a:latin typeface="Cambria" pitchFamily="34" charset="0"/>
+                <a:ea typeface="Cambria" pitchFamily="34" charset="-122"/>
+                <a:cs typeface="Cambria" pitchFamily="34" charset="-120"/>
+              </a:rPr>
+              <a:t>built</a:t>
+            </a:r>
+            <a:pPr indent="0" marL="0">
+              <a:buNone/>
+            </a:pPr>
+            <a:r>
+              <a:rPr lang="en-US" sz="4000" b="1" dirty="0">
+                <a:solidFill>
+                  <a:srgbClr val="1E2761"/>
+                </a:solidFill>
+                <a:latin typeface="Cambria" pitchFamily="34" charset="0"/>
+                <a:ea typeface="Cambria" pitchFamily="34" charset="-122"/>
+                <a:cs typeface="Cambria" pitchFamily="34" charset="-120"/>
+              </a:rPr>
+              <a:t> the loop</a:t>
             </a:r>
             <a:endParaRPr lang="en-US" sz="4000" dirty="0"/>
           </a:p>
@@ -10005,8 +10154,8 @@
         </p:nvSpPr>
         <p:spPr>
           <a:xfrm>
-            <a:off x="640080" y="411480"/>
-            <a:ext cx="10972800" cy="731520"/>
+            <a:off x="640080" y="347472"/>
+            <a:ext cx="10972800" cy="640080"/>
           </a:xfrm>
           <a:prstGeom prst="rect">
             <a:avLst/>
@@ -10022,7 +10171,7 @@
               <a:buNone/>
             </a:pPr>
             <a:r>
-              <a:rPr lang="en-US" sz="3600" b="1" dirty="0">
+              <a:rPr lang="en-US" sz="4000" b="1" dirty="0">
                 <a:solidFill>
                   <a:srgbClr val="1E2761"/>
                 </a:solidFill>
@@ -10030,9 +10179,37 @@
                 <a:ea typeface="Cambria" pitchFamily="34" charset="-122"/>
                 <a:cs typeface="Cambria" pitchFamily="34" charset="-120"/>
               </a:rPr>
-              <a:t>References</a:t>
-            </a:r>
-            <a:endParaRPr lang="en-US" sz="3600" dirty="0"/>
+              <a:t>AI </a:t>
+            </a:r>
+            <a:pPr indent="0" marL="0">
+              <a:buNone/>
+            </a:pPr>
+            <a:r>
+              <a:rPr lang="en-US" sz="4000" b="1" i="1" dirty="0">
+                <a:solidFill>
+                  <a:srgbClr val="1E2761"/>
+                </a:solidFill>
+                <a:latin typeface="Cambria" pitchFamily="34" charset="0"/>
+                <a:ea typeface="Cambria" pitchFamily="34" charset="-122"/>
+                <a:cs typeface="Cambria" pitchFamily="34" charset="-120"/>
+              </a:rPr>
+              <a:t>attacked</a:t>
+            </a:r>
+            <a:pPr indent="0" marL="0">
+              <a:buNone/>
+            </a:pPr>
+            <a:r>
+              <a:rPr lang="en-US" sz="4000" b="1" dirty="0">
+                <a:solidFill>
+                  <a:srgbClr val="1E2761"/>
+                </a:solidFill>
+                <a:latin typeface="Cambria" pitchFamily="34" charset="0"/>
+                <a:ea typeface="Cambria" pitchFamily="34" charset="-122"/>
+                <a:cs typeface="Cambria" pitchFamily="34" charset="-120"/>
+              </a:rPr>
+              <a:t> the loop</a:t>
+            </a:r>
+            <a:endParaRPr lang="en-US" sz="4000" dirty="0"/>
           </a:p>
         </p:txBody>
       </p:sp>
@@ -10044,8 +10221,8 @@
         </p:nvSpPr>
         <p:spPr>
           <a:xfrm>
-            <a:off x="640080" y="1371600"/>
-            <a:ext cx="10972800" cy="5120640"/>
+            <a:off x="658368" y="1024128"/>
+            <a:ext cx="10972800" cy="411480"/>
           </a:xfrm>
           <a:prstGeom prst="rect">
             <a:avLst/>
@@ -10054,17 +10231,1830 @@
           <a:ln/>
         </p:spPr>
         <p:txBody>
-          <a:bodyPr wrap="square" lIns="0" tIns="0" rIns="0" bIns="0" rtlCol="0" anchor="t"/>
+          <a:bodyPr wrap="square" lIns="0" tIns="0" rIns="0" bIns="0" rtlCol="0" anchor="ctr"/>
+          <a:lstStyle/>
+          <a:p>
+            <a:pPr indent="0" marL="0">
+              <a:buNone/>
+            </a:pPr>
+            <a:r>
+              <a:rPr lang="en-US" sz="1600" i="1" dirty="0">
+                <a:solidFill>
+                  <a:srgbClr val="5A6478"/>
+                </a:solidFill>
+                <a:latin typeface="Calibri" pitchFamily="34" charset="0"/>
+                <a:ea typeface="Calibri" pitchFamily="34" charset="-122"/>
+                <a:cs typeface="Calibri" pitchFamily="34" charset="-120"/>
+              </a:rPr>
+              <a:t>seven attack types, each undetected at discovery time — each forced a new measurement capability</a:t>
+            </a:r>
+            <a:endParaRPr lang="en-US" sz="1600" dirty="0"/>
+          </a:p>
+        </p:txBody>
+      </p:sp>
+      <p:graphicFrame>
+        <p:nvGraphicFramePr>
+          <p:cNvPr id="20" name="Table 0"/>
+          <p:cNvGraphicFramePr>
+            <a:graphicFrameLocks noGrp="1"/>
+          </p:cNvGraphicFramePr>
+          <p:nvPr>
+            <p:extLst>
+              <p:ext uri="{D42A27DB-BD31-4B8C-83A1-F6EECF244321}">
+                <p14:modId xmlns:p14="http://schemas.microsoft.com/office/powerpoint/2010/main" val="1579011935"/>
+              </p:ext>
+            </p:extLst>
+          </p:nvPr>
+        </p:nvGraphicFramePr>
+        <p:xfrm>
+          <a:off x="640080" y="1554480"/>
+          <a:ext cx="10881360" cy="914400"/>
+        </p:xfrm>
+        <a:graphic>
+          <a:graphicData uri="http://schemas.openxmlformats.org/drawingml/2006/table">
+            <a:tbl>
+              <a:tblPr/>
+              <a:tblGrid>
+                <a:gridCol w="3611880"/>
+                <a:gridCol w="4069080"/>
+                <a:gridCol w="3200400"/>
+              </a:tblGrid>
+              <a:tr h="329184">
+                <a:tc>
+                  <a:txBody>
+                    <a:bodyPr/>
+                    <a:lstStyle/>
+                    <a:p>
+                      <a:pPr algn="l" indent="0" marL="0">
+                        <a:buNone/>
+                      </a:pPr>
+                      <a:r>
+                        <a:rPr lang="en-US" sz="1250" b="1" dirty="0">
+                          <a:solidFill>
+                            <a:srgbClr val="FFFFFF"/>
+                          </a:solidFill>
+                          <a:latin typeface="Calibri" pitchFamily="34" charset="0"/>
+                          <a:ea typeface="Calibri" pitchFamily="34" charset="-122"/>
+                          <a:cs typeface="Calibri" pitchFamily="34" charset="-120"/>
+                        </a:rPr>
+                        <a:t>Attack</a:t>
+                      </a:r>
+                      <a:endParaRPr lang="en-US" sz="1250" dirty="0">
+                        <a:latin typeface="Calibri" charset="0"/>
+                        <a:ea typeface="Calibri" charset="0"/>
+                        <a:cs typeface="Calibri" charset="0"/>
+                      </a:endParaRPr>
+                    </a:p>
+                  </a:txBody>
+                  <a:tcPr marL="73152" marR="73152" marT="73152" marB="73152" anchor="ctr">
+                    <a:lnL w="12700" cap="flat" cmpd="sng" algn="ctr">
+                      <a:solidFill>
+                        <a:srgbClr val="D8DEEA"/>
+                      </a:solidFill>
+                      <a:prstDash val="solid"/>
+                      <a:round/>
+                      <a:headEnd type="none" w="med" len="med"/>
+                      <a:tailEnd type="none" w="med" len="med"/>
+                    </a:lnL>
+                    <a:lnR w="12700" cap="flat" cmpd="sng" algn="ctr">
+                      <a:solidFill>
+                        <a:srgbClr val="D8DEEA"/>
+                      </a:solidFill>
+                      <a:prstDash val="solid"/>
+                      <a:round/>
+                      <a:headEnd type="none" w="med" len="med"/>
+                      <a:tailEnd type="none" w="med" len="med"/>
+                    </a:lnR>
+                    <a:lnT w="12700" cap="flat" cmpd="sng" algn="ctr">
+                      <a:solidFill>
+                        <a:srgbClr val="D8DEEA"/>
+                      </a:solidFill>
+                      <a:prstDash val="solid"/>
+                      <a:round/>
+                      <a:headEnd type="none" w="med" len="med"/>
+                      <a:tailEnd type="none" w="med" len="med"/>
+                    </a:lnT>
+                    <a:lnB w="12700" cap="flat" cmpd="sng" algn="ctr">
+                      <a:solidFill>
+                        <a:srgbClr val="D8DEEA"/>
+                      </a:solidFill>
+                      <a:prstDash val="solid"/>
+                      <a:round/>
+                      <a:headEnd type="none" w="med" len="med"/>
+                      <a:tailEnd type="none" w="med" len="med"/>
+                    </a:lnB>
+                    <a:solidFill>
+                      <a:srgbClr val="1E2761"/>
+                    </a:solidFill>
+                  </a:tcPr>
+                </a:tc>
+                <a:tc>
+                  <a:txBody>
+                    <a:bodyPr/>
+                    <a:lstStyle/>
+                    <a:p>
+                      <a:pPr algn="l" indent="0" marL="0">
+                        <a:buNone/>
+                      </a:pPr>
+                      <a:r>
+                        <a:rPr lang="en-US" sz="1250" b="1" dirty="0">
+                          <a:solidFill>
+                            <a:srgbClr val="FFFFFF"/>
+                          </a:solidFill>
+                          <a:latin typeface="Calibri" pitchFamily="34" charset="0"/>
+                          <a:ea typeface="Calibri" pitchFamily="34" charset="-122"/>
+                          <a:cs typeface="Calibri" pitchFamily="34" charset="-120"/>
+                        </a:rPr>
+                        <a:t>Avoided detection by…</a:t>
+                      </a:r>
+                      <a:endParaRPr lang="en-US" sz="1250" dirty="0">
+                        <a:latin typeface="Calibri" charset="0"/>
+                        <a:ea typeface="Calibri" charset="0"/>
+                        <a:cs typeface="Calibri" charset="0"/>
+                      </a:endParaRPr>
+                    </a:p>
+                  </a:txBody>
+                  <a:tcPr marL="73152" marR="73152" marT="73152" marB="73152" anchor="ctr">
+                    <a:lnL w="12700" cap="flat" cmpd="sng" algn="ctr">
+                      <a:solidFill>
+                        <a:srgbClr val="D8DEEA"/>
+                      </a:solidFill>
+                      <a:prstDash val="solid"/>
+                      <a:round/>
+                      <a:headEnd type="none" w="med" len="med"/>
+                      <a:tailEnd type="none" w="med" len="med"/>
+                    </a:lnL>
+                    <a:lnR w="12700" cap="flat" cmpd="sng" algn="ctr">
+                      <a:solidFill>
+                        <a:srgbClr val="D8DEEA"/>
+                      </a:solidFill>
+                      <a:prstDash val="solid"/>
+                      <a:round/>
+                      <a:headEnd type="none" w="med" len="med"/>
+                      <a:tailEnd type="none" w="med" len="med"/>
+                    </a:lnR>
+                    <a:lnT w="12700" cap="flat" cmpd="sng" algn="ctr">
+                      <a:solidFill>
+                        <a:srgbClr val="D8DEEA"/>
+                      </a:solidFill>
+                      <a:prstDash val="solid"/>
+                      <a:round/>
+                      <a:headEnd type="none" w="med" len="med"/>
+                      <a:tailEnd type="none" w="med" len="med"/>
+                    </a:lnT>
+                    <a:lnB w="12700" cap="flat" cmpd="sng" algn="ctr">
+                      <a:solidFill>
+                        <a:srgbClr val="D8DEEA"/>
+                      </a:solidFill>
+                      <a:prstDash val="solid"/>
+                      <a:round/>
+                      <a:headEnd type="none" w="med" len="med"/>
+                      <a:tailEnd type="none" w="med" len="med"/>
+                    </a:lnB>
+                    <a:solidFill>
+                      <a:srgbClr val="1E2761"/>
+                    </a:solidFill>
+                  </a:tcPr>
+                </a:tc>
+                <a:tc>
+                  <a:txBody>
+                    <a:bodyPr/>
+                    <a:lstStyle/>
+                    <a:p>
+                      <a:pPr algn="l" indent="0" marL="0">
+                        <a:buNone/>
+                      </a:pPr>
+                      <a:r>
+                        <a:rPr lang="en-US" sz="1250" b="1" dirty="0">
+                          <a:solidFill>
+                            <a:srgbClr val="FFFFFF"/>
+                          </a:solidFill>
+                          <a:latin typeface="Calibri" pitchFamily="34" charset="0"/>
+                          <a:ea typeface="Calibri" pitchFamily="34" charset="-122"/>
+                          <a:cs typeface="Calibri" pitchFamily="34" charset="-120"/>
+                        </a:rPr>
+                        <a:t>New measurement forced</a:t>
+                      </a:r>
+                      <a:endParaRPr lang="en-US" sz="1250" dirty="0">
+                        <a:latin typeface="Calibri" charset="0"/>
+                        <a:ea typeface="Calibri" charset="0"/>
+                        <a:cs typeface="Calibri" charset="0"/>
+                      </a:endParaRPr>
+                    </a:p>
+                  </a:txBody>
+                  <a:tcPr marL="73152" marR="73152" marT="73152" marB="73152" anchor="ctr">
+                    <a:lnL w="12700" cap="flat" cmpd="sng" algn="ctr">
+                      <a:solidFill>
+                        <a:srgbClr val="D8DEEA"/>
+                      </a:solidFill>
+                      <a:prstDash val="solid"/>
+                      <a:round/>
+                      <a:headEnd type="none" w="med" len="med"/>
+                      <a:tailEnd type="none" w="med" len="med"/>
+                    </a:lnL>
+                    <a:lnR w="12700" cap="flat" cmpd="sng" algn="ctr">
+                      <a:solidFill>
+                        <a:srgbClr val="D8DEEA"/>
+                      </a:solidFill>
+                      <a:prstDash val="solid"/>
+                      <a:round/>
+                      <a:headEnd type="none" w="med" len="med"/>
+                      <a:tailEnd type="none" w="med" len="med"/>
+                    </a:lnR>
+                    <a:lnT w="12700" cap="flat" cmpd="sng" algn="ctr">
+                      <a:solidFill>
+                        <a:srgbClr val="D8DEEA"/>
+                      </a:solidFill>
+                      <a:prstDash val="solid"/>
+                      <a:round/>
+                      <a:headEnd type="none" w="med" len="med"/>
+                      <a:tailEnd type="none" w="med" len="med"/>
+                    </a:lnT>
+                    <a:lnB w="12700" cap="flat" cmpd="sng" algn="ctr">
+                      <a:solidFill>
+                        <a:srgbClr val="D8DEEA"/>
+                      </a:solidFill>
+                      <a:prstDash val="solid"/>
+                      <a:round/>
+                      <a:headEnd type="none" w="med" len="med"/>
+                      <a:tailEnd type="none" w="med" len="med"/>
+                    </a:lnB>
+                    <a:solidFill>
+                      <a:srgbClr val="1E2761"/>
+                    </a:solidFill>
+                  </a:tcPr>
+                </a:tc>
+              </a:tr>
+              <a:tr h="502920">
+                <a:tc>
+                  <a:txBody>
+                    <a:bodyPr/>
+                    <a:lstStyle/>
+                    <a:p>
+                      <a:pPr algn="l" indent="0" marL="0">
+                        <a:buNone/>
+                      </a:pPr>
+                      <a:r>
+                        <a:rPr lang="en-US" sz="1100" b="1" dirty="0">
+                          <a:solidFill>
+                            <a:srgbClr val="212121"/>
+                          </a:solidFill>
+                          <a:latin typeface="Calibri" pitchFamily="34" charset="0"/>
+                          <a:ea typeface="Calibri" pitchFamily="34" charset="-122"/>
+                          <a:cs typeface="Calibri" pitchFamily="34" charset="-120"/>
+                        </a:rPr>
+                        <a:t>ADMIT</a:t>
+                      </a:r>
+                      <a:pPr algn="l" indent="0" marL="0">
+                        <a:buNone/>
+                      </a:pPr>
+                      <a:r>
+                        <a:rPr lang="en-US" sz="1100" dirty="0">
+                          <a:solidFill>
+                            <a:srgbClr val="212121"/>
+                          </a:solidFill>
+                          <a:latin typeface="Calibri" pitchFamily="34" charset="0"/>
+                          <a:ea typeface="Calibri" pitchFamily="34" charset="-122"/>
+                          <a:cs typeface="Calibri" pitchFamily="34" charset="-120"/>
+                        </a:rPr>
+                        <a:t> — assume(false) in an unmeasured bridge file</a:t>
+                      </a:r>
+                      <a:endParaRPr lang="en-US" sz="1100" dirty="0">
+                        <a:latin typeface="Calibri" charset="0"/>
+                        <a:ea typeface="Calibri" charset="0"/>
+                        <a:cs typeface="Calibri" charset="0"/>
+                      </a:endParaRPr>
+                    </a:p>
+                  </a:txBody>
+                  <a:tcPr marL="73152" marR="73152" marT="73152" marB="73152" anchor="ctr">
+                    <a:lnL w="12700" cap="flat" cmpd="sng" algn="ctr">
+                      <a:solidFill>
+                        <a:srgbClr val="D8DEEA"/>
+                      </a:solidFill>
+                      <a:prstDash val="solid"/>
+                      <a:round/>
+                      <a:headEnd type="none" w="med" len="med"/>
+                      <a:tailEnd type="none" w="med" len="med"/>
+                    </a:lnL>
+                    <a:lnR w="12700" cap="flat" cmpd="sng" algn="ctr">
+                      <a:solidFill>
+                        <a:srgbClr val="D8DEEA"/>
+                      </a:solidFill>
+                      <a:prstDash val="solid"/>
+                      <a:round/>
+                      <a:headEnd type="none" w="med" len="med"/>
+                      <a:tailEnd type="none" w="med" len="med"/>
+                    </a:lnR>
+                    <a:lnT w="12700" cap="flat" cmpd="sng" algn="ctr">
+                      <a:solidFill>
+                        <a:srgbClr val="D8DEEA"/>
+                      </a:solidFill>
+                      <a:prstDash val="solid"/>
+                      <a:round/>
+                      <a:headEnd type="none" w="med" len="med"/>
+                      <a:tailEnd type="none" w="med" len="med"/>
+                    </a:lnT>
+                    <a:lnB w="12700" cap="flat" cmpd="sng" algn="ctr">
+                      <a:solidFill>
+                        <a:srgbClr val="D8DEEA"/>
+                      </a:solidFill>
+                      <a:prstDash val="solid"/>
+                      <a:round/>
+                      <a:headEnd type="none" w="med" len="med"/>
+                      <a:tailEnd type="none" w="med" len="med"/>
+                    </a:lnB>
+                    <a:solidFill>
+                      <a:srgbClr val="FFFFFF"/>
+                    </a:solidFill>
+                  </a:tcPr>
+                </a:tc>
+                <a:tc>
+                  <a:txBody>
+                    <a:bodyPr/>
+                    <a:lstStyle/>
+                    <a:p>
+                      <a:pPr algn="l" indent="0" marL="0">
+                        <a:buNone/>
+                      </a:pPr>
+                      <a:r>
+                        <a:rPr lang="en-US" sz="1100" dirty="0">
+                          <a:solidFill>
+                            <a:srgbClr val="212121"/>
+                          </a:solidFill>
+                          <a:latin typeface="Calibri" pitchFamily="34" charset="0"/>
+                          <a:ea typeface="Calibri" pitchFamily="34" charset="-122"/>
+                          <a:cs typeface="Calibri" pitchFamily="34" charset="-120"/>
+                        </a:rPr>
+                        <a:t>cargo-verus reports the same success over the hollow proof</a:t>
+                      </a:r>
+                      <a:endParaRPr lang="en-US" sz="1100" dirty="0">
+                        <a:latin typeface="Calibri" charset="0"/>
+                        <a:ea typeface="Calibri" charset="0"/>
+                        <a:cs typeface="Calibri" charset="0"/>
+                      </a:endParaRPr>
+                    </a:p>
+                  </a:txBody>
+                  <a:tcPr marL="73152" marR="73152" marT="73152" marB="73152" anchor="ctr">
+                    <a:lnL w="12700" cap="flat" cmpd="sng" algn="ctr">
+                      <a:solidFill>
+                        <a:srgbClr val="D8DEEA"/>
+                      </a:solidFill>
+                      <a:prstDash val="solid"/>
+                      <a:round/>
+                      <a:headEnd type="none" w="med" len="med"/>
+                      <a:tailEnd type="none" w="med" len="med"/>
+                    </a:lnL>
+                    <a:lnR w="12700" cap="flat" cmpd="sng" algn="ctr">
+                      <a:solidFill>
+                        <a:srgbClr val="D8DEEA"/>
+                      </a:solidFill>
+                      <a:prstDash val="solid"/>
+                      <a:round/>
+                      <a:headEnd type="none" w="med" len="med"/>
+                      <a:tailEnd type="none" w="med" len="med"/>
+                    </a:lnR>
+                    <a:lnT w="12700" cap="flat" cmpd="sng" algn="ctr">
+                      <a:solidFill>
+                        <a:srgbClr val="D8DEEA"/>
+                      </a:solidFill>
+                      <a:prstDash val="solid"/>
+                      <a:round/>
+                      <a:headEnd type="none" w="med" len="med"/>
+                      <a:tailEnd type="none" w="med" len="med"/>
+                    </a:lnT>
+                    <a:lnB w="12700" cap="flat" cmpd="sng" algn="ctr">
+                      <a:solidFill>
+                        <a:srgbClr val="D8DEEA"/>
+                      </a:solidFill>
+                      <a:prstDash val="solid"/>
+                      <a:round/>
+                      <a:headEnd type="none" w="med" len="med"/>
+                      <a:tailEnd type="none" w="med" len="med"/>
+                    </a:lnB>
+                    <a:solidFill>
+                      <a:srgbClr val="FFFFFF"/>
+                    </a:solidFill>
+                  </a:tcPr>
+                </a:tc>
+                <a:tc>
+                  <a:txBody>
+                    <a:bodyPr/>
+                    <a:lstStyle/>
+                    <a:p>
+                      <a:pPr algn="l" indent="0" marL="0">
+                        <a:buNone/>
+                      </a:pPr>
+                      <a:r>
+                        <a:rPr lang="en-US" sz="1100" dirty="0">
+                          <a:solidFill>
+                            <a:srgbClr val="212121"/>
+                          </a:solidFill>
+                          <a:latin typeface="Calibri" pitchFamily="34" charset="0"/>
+                          <a:ea typeface="Calibri" pitchFamily="34" charset="-122"/>
+                          <a:cs typeface="Calibri" pitchFamily="34" charset="-120"/>
+                        </a:rPr>
+                        <a:t>cheat scan (cheat_scan_verus)</a:t>
+                      </a:r>
+                      <a:endParaRPr lang="en-US" sz="1100" dirty="0">
+                        <a:latin typeface="Calibri" charset="0"/>
+                        <a:ea typeface="Calibri" charset="0"/>
+                        <a:cs typeface="Calibri" charset="0"/>
+                      </a:endParaRPr>
+                    </a:p>
+                  </a:txBody>
+                  <a:tcPr marL="73152" marR="73152" marT="73152" marB="73152" anchor="ctr">
+                    <a:lnL w="12700" cap="flat" cmpd="sng" algn="ctr">
+                      <a:solidFill>
+                        <a:srgbClr val="D8DEEA"/>
+                      </a:solidFill>
+                      <a:prstDash val="solid"/>
+                      <a:round/>
+                      <a:headEnd type="none" w="med" len="med"/>
+                      <a:tailEnd type="none" w="med" len="med"/>
+                    </a:lnL>
+                    <a:lnR w="12700" cap="flat" cmpd="sng" algn="ctr">
+                      <a:solidFill>
+                        <a:srgbClr val="D8DEEA"/>
+                      </a:solidFill>
+                      <a:prstDash val="solid"/>
+                      <a:round/>
+                      <a:headEnd type="none" w="med" len="med"/>
+                      <a:tailEnd type="none" w="med" len="med"/>
+                    </a:lnR>
+                    <a:lnT w="12700" cap="flat" cmpd="sng" algn="ctr">
+                      <a:solidFill>
+                        <a:srgbClr val="D8DEEA"/>
+                      </a:solidFill>
+                      <a:prstDash val="solid"/>
+                      <a:round/>
+                      <a:headEnd type="none" w="med" len="med"/>
+                      <a:tailEnd type="none" w="med" len="med"/>
+                    </a:lnT>
+                    <a:lnB w="12700" cap="flat" cmpd="sng" algn="ctr">
+                      <a:solidFill>
+                        <a:srgbClr val="D8DEEA"/>
+                      </a:solidFill>
+                      <a:prstDash val="solid"/>
+                      <a:round/>
+                      <a:headEnd type="none" w="med" len="med"/>
+                      <a:tailEnd type="none" w="med" len="med"/>
+                    </a:lnB>
+                    <a:solidFill>
+                      <a:srgbClr val="FFFFFF"/>
+                    </a:solidFill>
+                  </a:tcPr>
+                </a:tc>
+              </a:tr>
+              <a:tr h="502920">
+                <a:tc>
+                  <a:txBody>
+                    <a:bodyPr/>
+                    <a:lstStyle/>
+                    <a:p>
+                      <a:pPr algn="l" indent="0" marL="0">
+                        <a:buNone/>
+                      </a:pPr>
+                      <a:r>
+                        <a:rPr lang="en-US" sz="1100" b="1" dirty="0">
+                          <a:solidFill>
+                            <a:srgbClr val="212121"/>
+                          </a:solidFill>
+                          <a:latin typeface="Calibri" pitchFamily="34" charset="0"/>
+                          <a:ea typeface="Calibri" pitchFamily="34" charset="-122"/>
+                          <a:cs typeface="Calibri" pitchFamily="34" charset="-120"/>
+                        </a:rPr>
+                        <a:t>SMUGGLE</a:t>
+                      </a:r>
+                      <a:pPr algn="l" indent="0" marL="0">
+                        <a:buNone/>
+                      </a:pPr>
+                      <a:r>
+                        <a:rPr lang="en-US" sz="1100" dirty="0">
+                          <a:solidFill>
+                            <a:srgbClr val="212121"/>
+                          </a:solidFill>
+                          <a:latin typeface="Calibri" pitchFamily="34" charset="0"/>
+                          <a:ea typeface="Calibri" pitchFamily="34" charset="-122"/>
+                          <a:cs typeface="Calibri" pitchFamily="34" charset="-120"/>
+                        </a:rPr>
+                        <a:t> — external_body broadcast axiom, ensures false</a:t>
+                      </a:r>
+                      <a:endParaRPr lang="en-US" sz="1100" dirty="0">
+                        <a:latin typeface="Calibri" charset="0"/>
+                        <a:ea typeface="Calibri" charset="0"/>
+                        <a:cs typeface="Calibri" charset="0"/>
+                      </a:endParaRPr>
+                    </a:p>
+                  </a:txBody>
+                  <a:tcPr marL="73152" marR="73152" marT="73152" marB="73152" anchor="ctr">
+                    <a:lnL w="12700" cap="flat" cmpd="sng" algn="ctr">
+                      <a:solidFill>
+                        <a:srgbClr val="D8DEEA"/>
+                      </a:solidFill>
+                      <a:prstDash val="solid"/>
+                      <a:round/>
+                      <a:headEnd type="none" w="med" len="med"/>
+                      <a:tailEnd type="none" w="med" len="med"/>
+                    </a:lnL>
+                    <a:lnR w="12700" cap="flat" cmpd="sng" algn="ctr">
+                      <a:solidFill>
+                        <a:srgbClr val="D8DEEA"/>
+                      </a:solidFill>
+                      <a:prstDash val="solid"/>
+                      <a:round/>
+                      <a:headEnd type="none" w="med" len="med"/>
+                      <a:tailEnd type="none" w="med" len="med"/>
+                    </a:lnR>
+                    <a:lnT w="12700" cap="flat" cmpd="sng" algn="ctr">
+                      <a:solidFill>
+                        <a:srgbClr val="D8DEEA"/>
+                      </a:solidFill>
+                      <a:prstDash val="solid"/>
+                      <a:round/>
+                      <a:headEnd type="none" w="med" len="med"/>
+                      <a:tailEnd type="none" w="med" len="med"/>
+                    </a:lnT>
+                    <a:lnB w="12700" cap="flat" cmpd="sng" algn="ctr">
+                      <a:solidFill>
+                        <a:srgbClr val="D8DEEA"/>
+                      </a:solidFill>
+                      <a:prstDash val="solid"/>
+                      <a:round/>
+                      <a:headEnd type="none" w="med" len="med"/>
+                      <a:tailEnd type="none" w="med" len="med"/>
+                    </a:lnB>
+                    <a:solidFill>
+                      <a:srgbClr val="FFFFFF"/>
+                    </a:solidFill>
+                  </a:tcPr>
+                </a:tc>
+                <a:tc>
+                  <a:txBody>
+                    <a:bodyPr/>
+                    <a:lstStyle/>
+                    <a:p>
+                      <a:pPr algn="l" indent="0" marL="0">
+                        <a:buNone/>
+                      </a:pPr>
+                      <a:r>
+                        <a:rPr lang="en-US" sz="1100" dirty="0">
+                          <a:solidFill>
+                            <a:srgbClr val="212121"/>
+                          </a:solidFill>
+                          <a:latin typeface="Calibri" pitchFamily="34" charset="0"/>
+                          <a:ea typeface="Calibri" pitchFamily="34" charset="-122"/>
+                          <a:cs typeface="Calibri" pitchFamily="34" charset="-120"/>
+                        </a:rPr>
+                        <a:t>cargo-verus reports the same success over the hollow proof</a:t>
+                      </a:r>
+                      <a:endParaRPr lang="en-US" sz="1100" dirty="0">
+                        <a:latin typeface="Calibri" charset="0"/>
+                        <a:ea typeface="Calibri" charset="0"/>
+                        <a:cs typeface="Calibri" charset="0"/>
+                      </a:endParaRPr>
+                    </a:p>
+                  </a:txBody>
+                  <a:tcPr marL="73152" marR="73152" marT="73152" marB="73152" anchor="ctr">
+                    <a:lnL w="12700" cap="flat" cmpd="sng" algn="ctr">
+                      <a:solidFill>
+                        <a:srgbClr val="D8DEEA"/>
+                      </a:solidFill>
+                      <a:prstDash val="solid"/>
+                      <a:round/>
+                      <a:headEnd type="none" w="med" len="med"/>
+                      <a:tailEnd type="none" w="med" len="med"/>
+                    </a:lnL>
+                    <a:lnR w="12700" cap="flat" cmpd="sng" algn="ctr">
+                      <a:solidFill>
+                        <a:srgbClr val="D8DEEA"/>
+                      </a:solidFill>
+                      <a:prstDash val="solid"/>
+                      <a:round/>
+                      <a:headEnd type="none" w="med" len="med"/>
+                      <a:tailEnd type="none" w="med" len="med"/>
+                    </a:lnR>
+                    <a:lnT w="12700" cap="flat" cmpd="sng" algn="ctr">
+                      <a:solidFill>
+                        <a:srgbClr val="D8DEEA"/>
+                      </a:solidFill>
+                      <a:prstDash val="solid"/>
+                      <a:round/>
+                      <a:headEnd type="none" w="med" len="med"/>
+                      <a:tailEnd type="none" w="med" len="med"/>
+                    </a:lnT>
+                    <a:lnB w="12700" cap="flat" cmpd="sng" algn="ctr">
+                      <a:solidFill>
+                        <a:srgbClr val="D8DEEA"/>
+                      </a:solidFill>
+                      <a:prstDash val="solid"/>
+                      <a:round/>
+                      <a:headEnd type="none" w="med" len="med"/>
+                      <a:tailEnd type="none" w="med" len="med"/>
+                    </a:lnB>
+                    <a:solidFill>
+                      <a:srgbClr val="FFFFFF"/>
+                    </a:solidFill>
+                  </a:tcPr>
+                </a:tc>
+                <a:tc>
+                  <a:txBody>
+                    <a:bodyPr/>
+                    <a:lstStyle/>
+                    <a:p>
+                      <a:pPr algn="l" indent="0" marL="0">
+                        <a:buNone/>
+                      </a:pPr>
+                      <a:r>
+                        <a:rPr lang="en-US" sz="1100" dirty="0">
+                          <a:solidFill>
+                            <a:srgbClr val="212121"/>
+                          </a:solidFill>
+                          <a:latin typeface="Calibri" pitchFamily="34" charset="0"/>
+                          <a:ea typeface="Calibri" pitchFamily="34" charset="-122"/>
+                          <a:cs typeface="Calibri" pitchFamily="34" charset="-120"/>
+                        </a:rPr>
+                        <a:t>cheat scan (cheat_scan_verus)</a:t>
+                      </a:r>
+                      <a:endParaRPr lang="en-US" sz="1100" dirty="0">
+                        <a:latin typeface="Calibri" charset="0"/>
+                        <a:ea typeface="Calibri" charset="0"/>
+                        <a:cs typeface="Calibri" charset="0"/>
+                      </a:endParaRPr>
+                    </a:p>
+                  </a:txBody>
+                  <a:tcPr marL="73152" marR="73152" marT="73152" marB="73152" anchor="ctr">
+                    <a:lnL w="12700" cap="flat" cmpd="sng" algn="ctr">
+                      <a:solidFill>
+                        <a:srgbClr val="D8DEEA"/>
+                      </a:solidFill>
+                      <a:prstDash val="solid"/>
+                      <a:round/>
+                      <a:headEnd type="none" w="med" len="med"/>
+                      <a:tailEnd type="none" w="med" len="med"/>
+                    </a:lnL>
+                    <a:lnR w="12700" cap="flat" cmpd="sng" algn="ctr">
+                      <a:solidFill>
+                        <a:srgbClr val="D8DEEA"/>
+                      </a:solidFill>
+                      <a:prstDash val="solid"/>
+                      <a:round/>
+                      <a:headEnd type="none" w="med" len="med"/>
+                      <a:tailEnd type="none" w="med" len="med"/>
+                    </a:lnR>
+                    <a:lnT w="12700" cap="flat" cmpd="sng" algn="ctr">
+                      <a:solidFill>
+                        <a:srgbClr val="D8DEEA"/>
+                      </a:solidFill>
+                      <a:prstDash val="solid"/>
+                      <a:round/>
+                      <a:headEnd type="none" w="med" len="med"/>
+                      <a:tailEnd type="none" w="med" len="med"/>
+                    </a:lnT>
+                    <a:lnB w="12700" cap="flat" cmpd="sng" algn="ctr">
+                      <a:solidFill>
+                        <a:srgbClr val="D8DEEA"/>
+                      </a:solidFill>
+                      <a:prstDash val="solid"/>
+                      <a:round/>
+                      <a:headEnd type="none" w="med" len="med"/>
+                      <a:tailEnd type="none" w="med" len="med"/>
+                    </a:lnB>
+                    <a:solidFill>
+                      <a:srgbClr val="FFFFFF"/>
+                    </a:solidFill>
+                  </a:tcPr>
+                </a:tc>
+              </a:tr>
+              <a:tr h="457200">
+                <a:tc>
+                  <a:txBody>
+                    <a:bodyPr/>
+                    <a:lstStyle/>
+                    <a:p>
+                      <a:pPr algn="l" indent="0" marL="0">
+                        <a:buNone/>
+                      </a:pPr>
+                      <a:r>
+                        <a:rPr lang="en-US" sz="1100" b="1" dirty="0">
+                          <a:solidFill>
+                            <a:srgbClr val="212121"/>
+                          </a:solidFill>
+                          <a:latin typeface="Calibri" pitchFamily="34" charset="0"/>
+                          <a:ea typeface="Calibri" pitchFamily="34" charset="-122"/>
+                          <a:cs typeface="Calibri" pitchFamily="34" charset="-120"/>
+                        </a:rPr>
+                        <a:t>SHRINK</a:t>
+                      </a:r>
+                      <a:pPr algn="l" indent="0" marL="0">
+                        <a:buNone/>
+                      </a:pPr>
+                      <a:r>
+                        <a:rPr lang="en-US" sz="1100" dirty="0">
+                          <a:solidFill>
+                            <a:srgbClr val="212121"/>
+                          </a:solidFill>
+                          <a:latin typeface="Calibri" pitchFamily="34" charset="0"/>
+                          <a:ea typeface="Calibri" pitchFamily="34" charset="-122"/>
+                          <a:cs typeface="Calibri" pitchFamily="34" charset="-120"/>
+                        </a:rPr>
+                        <a:t> — a system-proof module commented out</a:t>
+                      </a:r>
+                      <a:endParaRPr lang="en-US" sz="1100" dirty="0">
+                        <a:latin typeface="Calibri" charset="0"/>
+                        <a:ea typeface="Calibri" charset="0"/>
+                        <a:cs typeface="Calibri" charset="0"/>
+                      </a:endParaRPr>
+                    </a:p>
+                  </a:txBody>
+                  <a:tcPr marL="73152" marR="73152" marT="73152" marB="73152" anchor="ctr">
+                    <a:lnL w="12700" cap="flat" cmpd="sng" algn="ctr">
+                      <a:solidFill>
+                        <a:srgbClr val="D8DEEA"/>
+                      </a:solidFill>
+                      <a:prstDash val="solid"/>
+                      <a:round/>
+                      <a:headEnd type="none" w="med" len="med"/>
+                      <a:tailEnd type="none" w="med" len="med"/>
+                    </a:lnL>
+                    <a:lnR w="12700" cap="flat" cmpd="sng" algn="ctr">
+                      <a:solidFill>
+                        <a:srgbClr val="D8DEEA"/>
+                      </a:solidFill>
+                      <a:prstDash val="solid"/>
+                      <a:round/>
+                      <a:headEnd type="none" w="med" len="med"/>
+                      <a:tailEnd type="none" w="med" len="med"/>
+                    </a:lnR>
+                    <a:lnT w="12700" cap="flat" cmpd="sng" algn="ctr">
+                      <a:solidFill>
+                        <a:srgbClr val="D8DEEA"/>
+                      </a:solidFill>
+                      <a:prstDash val="solid"/>
+                      <a:round/>
+                      <a:headEnd type="none" w="med" len="med"/>
+                      <a:tailEnd type="none" w="med" len="med"/>
+                    </a:lnT>
+                    <a:lnB w="12700" cap="flat" cmpd="sng" algn="ctr">
+                      <a:solidFill>
+                        <a:srgbClr val="D8DEEA"/>
+                      </a:solidFill>
+                      <a:prstDash val="solid"/>
+                      <a:round/>
+                      <a:headEnd type="none" w="med" len="med"/>
+                      <a:tailEnd type="none" w="med" len="med"/>
+                    </a:lnB>
+                    <a:solidFill>
+                      <a:srgbClr val="FFFFFF"/>
+                    </a:solidFill>
+                  </a:tcPr>
+                </a:tc>
+                <a:tc>
+                  <a:txBody>
+                    <a:bodyPr/>
+                    <a:lstStyle/>
+                    <a:p>
+                      <a:pPr algn="l" indent="0" marL="0">
+                        <a:buNone/>
+                      </a:pPr>
+                      <a:r>
+                        <a:rPr lang="en-US" sz="1100" dirty="0">
+                          <a:solidFill>
+                            <a:srgbClr val="212121"/>
+                          </a:solidFill>
+                          <a:latin typeface="Calibri" pitchFamily="34" charset="0"/>
+                          <a:ea typeface="Calibri" pitchFamily="34" charset="-122"/>
+                          <a:cs typeface="Calibri" pitchFamily="34" charset="-120"/>
+                        </a:rPr>
+                        <a:t>smaller crate still verifies, 0 errors</a:t>
+                      </a:r>
+                      <a:endParaRPr lang="en-US" sz="1100" dirty="0">
+                        <a:latin typeface="Calibri" charset="0"/>
+                        <a:ea typeface="Calibri" charset="0"/>
+                        <a:cs typeface="Calibri" charset="0"/>
+                      </a:endParaRPr>
+                    </a:p>
+                  </a:txBody>
+                  <a:tcPr marL="73152" marR="73152" marT="73152" marB="73152" anchor="ctr">
+                    <a:lnL w="12700" cap="flat" cmpd="sng" algn="ctr">
+                      <a:solidFill>
+                        <a:srgbClr val="D8DEEA"/>
+                      </a:solidFill>
+                      <a:prstDash val="solid"/>
+                      <a:round/>
+                      <a:headEnd type="none" w="med" len="med"/>
+                      <a:tailEnd type="none" w="med" len="med"/>
+                    </a:lnL>
+                    <a:lnR w="12700" cap="flat" cmpd="sng" algn="ctr">
+                      <a:solidFill>
+                        <a:srgbClr val="D8DEEA"/>
+                      </a:solidFill>
+                      <a:prstDash val="solid"/>
+                      <a:round/>
+                      <a:headEnd type="none" w="med" len="med"/>
+                      <a:tailEnd type="none" w="med" len="med"/>
+                    </a:lnR>
+                    <a:lnT w="12700" cap="flat" cmpd="sng" algn="ctr">
+                      <a:solidFill>
+                        <a:srgbClr val="D8DEEA"/>
+                      </a:solidFill>
+                      <a:prstDash val="solid"/>
+                      <a:round/>
+                      <a:headEnd type="none" w="med" len="med"/>
+                      <a:tailEnd type="none" w="med" len="med"/>
+                    </a:lnT>
+                    <a:lnB w="12700" cap="flat" cmpd="sng" algn="ctr">
+                      <a:solidFill>
+                        <a:srgbClr val="D8DEEA"/>
+                      </a:solidFill>
+                      <a:prstDash val="solid"/>
+                      <a:round/>
+                      <a:headEnd type="none" w="med" len="med"/>
+                      <a:tailEnd type="none" w="med" len="med"/>
+                    </a:lnB>
+                    <a:solidFill>
+                      <a:srgbClr val="FFFFFF"/>
+                    </a:solidFill>
+                  </a:tcPr>
+                </a:tc>
+                <a:tc>
+                  <a:txBody>
+                    <a:bodyPr/>
+                    <a:lstStyle/>
+                    <a:p>
+                      <a:pPr algn="l" indent="0" marL="0">
+                        <a:buNone/>
+                      </a:pPr>
+                      <a:r>
+                        <a:rPr lang="en-US" sz="1100" dirty="0">
+                          <a:solidFill>
+                            <a:srgbClr val="212121"/>
+                          </a:solidFill>
+                          <a:latin typeface="Calibri" pitchFamily="34" charset="0"/>
+                          <a:ea typeface="Calibri" pitchFamily="34" charset="-122"/>
+                          <a:cs typeface="Calibri" pitchFamily="34" charset="-120"/>
+                        </a:rPr>
+                        <a:t>sysproof file hashes</a:t>
+                      </a:r>
+                      <a:endParaRPr lang="en-US" sz="1100" dirty="0">
+                        <a:latin typeface="Calibri" charset="0"/>
+                        <a:ea typeface="Calibri" charset="0"/>
+                        <a:cs typeface="Calibri" charset="0"/>
+                      </a:endParaRPr>
+                    </a:p>
+                  </a:txBody>
+                  <a:tcPr marL="73152" marR="73152" marT="73152" marB="73152" anchor="ctr">
+                    <a:lnL w="12700" cap="flat" cmpd="sng" algn="ctr">
+                      <a:solidFill>
+                        <a:srgbClr val="D8DEEA"/>
+                      </a:solidFill>
+                      <a:prstDash val="solid"/>
+                      <a:round/>
+                      <a:headEnd type="none" w="med" len="med"/>
+                      <a:tailEnd type="none" w="med" len="med"/>
+                    </a:lnL>
+                    <a:lnR w="12700" cap="flat" cmpd="sng" algn="ctr">
+                      <a:solidFill>
+                        <a:srgbClr val="D8DEEA"/>
+                      </a:solidFill>
+                      <a:prstDash val="solid"/>
+                      <a:round/>
+                      <a:headEnd type="none" w="med" len="med"/>
+                      <a:tailEnd type="none" w="med" len="med"/>
+                    </a:lnR>
+                    <a:lnT w="12700" cap="flat" cmpd="sng" algn="ctr">
+                      <a:solidFill>
+                        <a:srgbClr val="D8DEEA"/>
+                      </a:solidFill>
+                      <a:prstDash val="solid"/>
+                      <a:round/>
+                      <a:headEnd type="none" w="med" len="med"/>
+                      <a:tailEnd type="none" w="med" len="med"/>
+                    </a:lnT>
+                    <a:lnB w="12700" cap="flat" cmpd="sng" algn="ctr">
+                      <a:solidFill>
+                        <a:srgbClr val="D8DEEA"/>
+                      </a:solidFill>
+                      <a:prstDash val="solid"/>
+                      <a:round/>
+                      <a:headEnd type="none" w="med" len="med"/>
+                      <a:tailEnd type="none" w="med" len="med"/>
+                    </a:lnB>
+                    <a:solidFill>
+                      <a:srgbClr val="FFFFFF"/>
+                    </a:solidFill>
+                  </a:tcPr>
+                </a:tc>
+              </a:tr>
+              <a:tr h="548640">
+                <a:tc>
+                  <a:txBody>
+                    <a:bodyPr/>
+                    <a:lstStyle/>
+                    <a:p>
+                      <a:pPr algn="l" indent="0" marL="0">
+                        <a:buNone/>
+                      </a:pPr>
+                      <a:r>
+                        <a:rPr lang="en-US" sz="1100" b="1" dirty="0">
+                          <a:solidFill>
+                            <a:srgbClr val="212121"/>
+                          </a:solidFill>
+                          <a:latin typeface="Calibri" pitchFamily="34" charset="0"/>
+                          <a:ea typeface="Calibri" pitchFamily="34" charset="-122"/>
+                          <a:cs typeface="Calibri" pitchFamily="34" charset="-120"/>
+                        </a:rPr>
+                        <a:t>SWAP</a:t>
+                      </a:r>
+                      <a:pPr algn="l" indent="0" marL="0">
+                        <a:buNone/>
+                      </a:pPr>
+                      <a:r>
+                        <a:rPr lang="en-US" sz="1100" dirty="0">
+                          <a:solidFill>
+                            <a:srgbClr val="212121"/>
+                          </a:solidFill>
+                          <a:latin typeface="Calibri" pitchFamily="34" charset="0"/>
+                          <a:ea typeface="Calibri" pitchFamily="34" charset="-122"/>
+                          <a:cs typeface="Calibri" pitchFamily="34" charset="-120"/>
+                        </a:rPr>
+                        <a:t> — real VC dropped, trivial one added, constant count</a:t>
+                      </a:r>
+                      <a:endParaRPr lang="en-US" sz="1100" dirty="0">
+                        <a:latin typeface="Calibri" charset="0"/>
+                        <a:ea typeface="Calibri" charset="0"/>
+                        <a:cs typeface="Calibri" charset="0"/>
+                      </a:endParaRPr>
+                    </a:p>
+                  </a:txBody>
+                  <a:tcPr marL="73152" marR="73152" marT="73152" marB="73152" anchor="ctr">
+                    <a:lnL w="12700" cap="flat" cmpd="sng" algn="ctr">
+                      <a:solidFill>
+                        <a:srgbClr val="D8DEEA"/>
+                      </a:solidFill>
+                      <a:prstDash val="solid"/>
+                      <a:round/>
+                      <a:headEnd type="none" w="med" len="med"/>
+                      <a:tailEnd type="none" w="med" len="med"/>
+                    </a:lnL>
+                    <a:lnR w="12700" cap="flat" cmpd="sng" algn="ctr">
+                      <a:solidFill>
+                        <a:srgbClr val="D8DEEA"/>
+                      </a:solidFill>
+                      <a:prstDash val="solid"/>
+                      <a:round/>
+                      <a:headEnd type="none" w="med" len="med"/>
+                      <a:tailEnd type="none" w="med" len="med"/>
+                    </a:lnR>
+                    <a:lnT w="12700" cap="flat" cmpd="sng" algn="ctr">
+                      <a:solidFill>
+                        <a:srgbClr val="D8DEEA"/>
+                      </a:solidFill>
+                      <a:prstDash val="solid"/>
+                      <a:round/>
+                      <a:headEnd type="none" w="med" len="med"/>
+                      <a:tailEnd type="none" w="med" len="med"/>
+                    </a:lnT>
+                    <a:lnB w="12700" cap="flat" cmpd="sng" algn="ctr">
+                      <a:solidFill>
+                        <a:srgbClr val="D8DEEA"/>
+                      </a:solidFill>
+                      <a:prstDash val="solid"/>
+                      <a:round/>
+                      <a:headEnd type="none" w="med" len="med"/>
+                      <a:tailEnd type="none" w="med" len="med"/>
+                    </a:lnB>
+                    <a:solidFill>
+                      <a:srgbClr val="FFFFFF"/>
+                    </a:solidFill>
+                  </a:tcPr>
+                </a:tc>
+                <a:tc>
+                  <a:txBody>
+                    <a:bodyPr/>
+                    <a:lstStyle/>
+                    <a:p>
+                      <a:pPr algn="l" indent="0" marL="0">
+                        <a:buNone/>
+                      </a:pPr>
+                      <a:r>
+                        <a:rPr lang="en-US" sz="1100" dirty="0">
+                          <a:solidFill>
+                            <a:srgbClr val="212121"/>
+                          </a:solidFill>
+                          <a:latin typeface="Calibri" pitchFamily="34" charset="0"/>
+                          <a:ea typeface="Calibri" pitchFamily="34" charset="-122"/>
+                          <a:cs typeface="Calibri" pitchFamily="34" charset="-120"/>
+                        </a:rPr>
+                        <a:t>outcome, count, escape surface all unchanged</a:t>
+                      </a:r>
+                      <a:endParaRPr lang="en-US" sz="1100" dirty="0">
+                        <a:latin typeface="Calibri" charset="0"/>
+                        <a:ea typeface="Calibri" charset="0"/>
+                        <a:cs typeface="Calibri" charset="0"/>
+                      </a:endParaRPr>
+                    </a:p>
+                  </a:txBody>
+                  <a:tcPr marL="73152" marR="73152" marT="73152" marB="73152" anchor="ctr">
+                    <a:lnL w="12700" cap="flat" cmpd="sng" algn="ctr">
+                      <a:solidFill>
+                        <a:srgbClr val="D8DEEA"/>
+                      </a:solidFill>
+                      <a:prstDash val="solid"/>
+                      <a:round/>
+                      <a:headEnd type="none" w="med" len="med"/>
+                      <a:tailEnd type="none" w="med" len="med"/>
+                    </a:lnL>
+                    <a:lnR w="12700" cap="flat" cmpd="sng" algn="ctr">
+                      <a:solidFill>
+                        <a:srgbClr val="D8DEEA"/>
+                      </a:solidFill>
+                      <a:prstDash val="solid"/>
+                      <a:round/>
+                      <a:headEnd type="none" w="med" len="med"/>
+                      <a:tailEnd type="none" w="med" len="med"/>
+                    </a:lnR>
+                    <a:lnT w="12700" cap="flat" cmpd="sng" algn="ctr">
+                      <a:solidFill>
+                        <a:srgbClr val="D8DEEA"/>
+                      </a:solidFill>
+                      <a:prstDash val="solid"/>
+                      <a:round/>
+                      <a:headEnd type="none" w="med" len="med"/>
+                      <a:tailEnd type="none" w="med" len="med"/>
+                    </a:lnT>
+                    <a:lnB w="12700" cap="flat" cmpd="sng" algn="ctr">
+                      <a:solidFill>
+                        <a:srgbClr val="D8DEEA"/>
+                      </a:solidFill>
+                      <a:prstDash val="solid"/>
+                      <a:round/>
+                      <a:headEnd type="none" w="med" len="med"/>
+                      <a:tailEnd type="none" w="med" len="med"/>
+                    </a:lnB>
+                    <a:solidFill>
+                      <a:srgbClr val="FFFFFF"/>
+                    </a:solidFill>
+                  </a:tcPr>
+                </a:tc>
+                <a:tc>
+                  <a:txBody>
+                    <a:bodyPr/>
+                    <a:lstStyle/>
+                    <a:p>
+                      <a:pPr algn="l" indent="0" marL="0">
+                        <a:buNone/>
+                      </a:pPr>
+                      <a:r>
+                        <a:rPr lang="en-US" sz="1100" dirty="0">
+                          <a:solidFill>
+                            <a:srgbClr val="212121"/>
+                          </a:solidFill>
+                          <a:latin typeface="Calibri" pitchFamily="34" charset="0"/>
+                          <a:ea typeface="Calibri" pitchFamily="34" charset="-122"/>
+                          <a:cs typeface="Calibri" pitchFamily="34" charset="-120"/>
+                        </a:rPr>
+                        <a:t>sysproof file hashes</a:t>
+                      </a:r>
+                      <a:endParaRPr lang="en-US" sz="1100" dirty="0">
+                        <a:latin typeface="Calibri" charset="0"/>
+                        <a:ea typeface="Calibri" charset="0"/>
+                        <a:cs typeface="Calibri" charset="0"/>
+                      </a:endParaRPr>
+                    </a:p>
+                  </a:txBody>
+                  <a:tcPr marL="73152" marR="73152" marT="73152" marB="73152" anchor="ctr">
+                    <a:lnL w="12700" cap="flat" cmpd="sng" algn="ctr">
+                      <a:solidFill>
+                        <a:srgbClr val="D8DEEA"/>
+                      </a:solidFill>
+                      <a:prstDash val="solid"/>
+                      <a:round/>
+                      <a:headEnd type="none" w="med" len="med"/>
+                      <a:tailEnd type="none" w="med" len="med"/>
+                    </a:lnL>
+                    <a:lnR w="12700" cap="flat" cmpd="sng" algn="ctr">
+                      <a:solidFill>
+                        <a:srgbClr val="D8DEEA"/>
+                      </a:solidFill>
+                      <a:prstDash val="solid"/>
+                      <a:round/>
+                      <a:headEnd type="none" w="med" len="med"/>
+                      <a:tailEnd type="none" w="med" len="med"/>
+                    </a:lnR>
+                    <a:lnT w="12700" cap="flat" cmpd="sng" algn="ctr">
+                      <a:solidFill>
+                        <a:srgbClr val="D8DEEA"/>
+                      </a:solidFill>
+                      <a:prstDash val="solid"/>
+                      <a:round/>
+                      <a:headEnd type="none" w="med" len="med"/>
+                      <a:tailEnd type="none" w="med" len="med"/>
+                    </a:lnT>
+                    <a:lnB w="12700" cap="flat" cmpd="sng" algn="ctr">
+                      <a:solidFill>
+                        <a:srgbClr val="D8DEEA"/>
+                      </a:solidFill>
+                      <a:prstDash val="solid"/>
+                      <a:round/>
+                      <a:headEnd type="none" w="med" len="med"/>
+                      <a:tailEnd type="none" w="med" len="med"/>
+                    </a:lnB>
+                    <a:solidFill>
+                      <a:srgbClr val="FFFFFF"/>
+                    </a:solidFill>
+                  </a:tcPr>
+                </a:tc>
+              </a:tr>
+              <a:tr h="566928">
+                <a:tc>
+                  <a:txBody>
+                    <a:bodyPr/>
+                    <a:lstStyle/>
+                    <a:p>
+                      <a:pPr algn="l" indent="0" marL="0">
+                        <a:buNone/>
+                      </a:pPr>
+                      <a:r>
+                        <a:rPr lang="en-US" sz="1100" b="1" dirty="0">
+                          <a:solidFill>
+                            <a:srgbClr val="212121"/>
+                          </a:solidFill>
+                          <a:latin typeface="Calibri" pitchFamily="34" charset="0"/>
+                          <a:ea typeface="Calibri" pitchFamily="34" charset="-122"/>
+                          <a:cs typeface="Calibri" pitchFamily="34" charset="-120"/>
+                        </a:rPr>
+                        <a:t>STALE</a:t>
+                      </a:r>
+                      <a:pPr algn="l" indent="0" marL="0">
+                        <a:buNone/>
+                      </a:pPr>
+                      <a:r>
+                        <a:rPr lang="en-US" sz="1100" dirty="0">
+                          <a:solidFill>
+                            <a:srgbClr val="212121"/>
+                          </a:solidFill>
+                          <a:latin typeface="Calibri" pitchFamily="34" charset="0"/>
+                          <a:ea typeface="Calibri" pitchFamily="34" charset="-122"/>
+                          <a:cs typeface="Calibri" pitchFamily="34" charset="-120"/>
+                        </a:rPr>
+                        <a:t> — semantic flip in a cached dep, mtime preserved</a:t>
+                      </a:r>
+                      <a:endParaRPr lang="en-US" sz="1100" dirty="0">
+                        <a:latin typeface="Calibri" charset="0"/>
+                        <a:ea typeface="Calibri" charset="0"/>
+                        <a:cs typeface="Calibri" charset="0"/>
+                      </a:endParaRPr>
+                    </a:p>
+                  </a:txBody>
+                  <a:tcPr marL="73152" marR="73152" marT="73152" marB="73152" anchor="ctr">
+                    <a:lnL w="12700" cap="flat" cmpd="sng" algn="ctr">
+                      <a:solidFill>
+                        <a:srgbClr val="D8DEEA"/>
+                      </a:solidFill>
+                      <a:prstDash val="solid"/>
+                      <a:round/>
+                      <a:headEnd type="none" w="med" len="med"/>
+                      <a:tailEnd type="none" w="med" len="med"/>
+                    </a:lnL>
+                    <a:lnR w="12700" cap="flat" cmpd="sng" algn="ctr">
+                      <a:solidFill>
+                        <a:srgbClr val="D8DEEA"/>
+                      </a:solidFill>
+                      <a:prstDash val="solid"/>
+                      <a:round/>
+                      <a:headEnd type="none" w="med" len="med"/>
+                      <a:tailEnd type="none" w="med" len="med"/>
+                    </a:lnR>
+                    <a:lnT w="12700" cap="flat" cmpd="sng" algn="ctr">
+                      <a:solidFill>
+                        <a:srgbClr val="D8DEEA"/>
+                      </a:solidFill>
+                      <a:prstDash val="solid"/>
+                      <a:round/>
+                      <a:headEnd type="none" w="med" len="med"/>
+                      <a:tailEnd type="none" w="med" len="med"/>
+                    </a:lnT>
+                    <a:lnB w="12700" cap="flat" cmpd="sng" algn="ctr">
+                      <a:solidFill>
+                        <a:srgbClr val="D8DEEA"/>
+                      </a:solidFill>
+                      <a:prstDash val="solid"/>
+                      <a:round/>
+                      <a:headEnd type="none" w="med" len="med"/>
+                      <a:tailEnd type="none" w="med" len="med"/>
+                    </a:lnB>
+                    <a:solidFill>
+                      <a:srgbClr val="FFFFFF"/>
+                    </a:solidFill>
+                  </a:tcPr>
+                </a:tc>
+                <a:tc>
+                  <a:txBody>
+                    <a:bodyPr/>
+                    <a:lstStyle/>
+                    <a:p>
+                      <a:pPr algn="l" indent="0" marL="0">
+                        <a:buNone/>
+                      </a:pPr>
+                      <a:r>
+                        <a:rPr lang="en-US" sz="1100" dirty="0">
+                          <a:solidFill>
+                            <a:srgbClr val="212121"/>
+                          </a:solidFill>
+                          <a:latin typeface="Calibri" pitchFamily="34" charset="0"/>
+                          <a:ea typeface="Calibri" pitchFamily="34" charset="-122"/>
+                          <a:cs typeface="Calibri" pitchFamily="34" charset="-120"/>
+                        </a:rPr>
+                        <a:t>mtime-gated cache serves the stale verdict; green over false bytes</a:t>
+                      </a:r>
+                      <a:endParaRPr lang="en-US" sz="1100" dirty="0">
+                        <a:latin typeface="Calibri" charset="0"/>
+                        <a:ea typeface="Calibri" charset="0"/>
+                        <a:cs typeface="Calibri" charset="0"/>
+                      </a:endParaRPr>
+                    </a:p>
+                  </a:txBody>
+                  <a:tcPr marL="73152" marR="73152" marT="73152" marB="73152" anchor="ctr">
+                    <a:lnL w="12700" cap="flat" cmpd="sng" algn="ctr">
+                      <a:solidFill>
+                        <a:srgbClr val="D8DEEA"/>
+                      </a:solidFill>
+                      <a:prstDash val="solid"/>
+                      <a:round/>
+                      <a:headEnd type="none" w="med" len="med"/>
+                      <a:tailEnd type="none" w="med" len="med"/>
+                    </a:lnL>
+                    <a:lnR w="12700" cap="flat" cmpd="sng" algn="ctr">
+                      <a:solidFill>
+                        <a:srgbClr val="D8DEEA"/>
+                      </a:solidFill>
+                      <a:prstDash val="solid"/>
+                      <a:round/>
+                      <a:headEnd type="none" w="med" len="med"/>
+                      <a:tailEnd type="none" w="med" len="med"/>
+                    </a:lnR>
+                    <a:lnT w="12700" cap="flat" cmpd="sng" algn="ctr">
+                      <a:solidFill>
+                        <a:srgbClr val="D8DEEA"/>
+                      </a:solidFill>
+                      <a:prstDash val="solid"/>
+                      <a:round/>
+                      <a:headEnd type="none" w="med" len="med"/>
+                      <a:tailEnd type="none" w="med" len="med"/>
+                    </a:lnT>
+                    <a:lnB w="12700" cap="flat" cmpd="sng" algn="ctr">
+                      <a:solidFill>
+                        <a:srgbClr val="D8DEEA"/>
+                      </a:solidFill>
+                      <a:prstDash val="solid"/>
+                      <a:round/>
+                      <a:headEnd type="none" w="med" len="med"/>
+                      <a:tailEnd type="none" w="med" len="med"/>
+                    </a:lnB>
+                    <a:solidFill>
+                      <a:srgbClr val="FFFFFF"/>
+                    </a:solidFill>
+                  </a:tcPr>
+                </a:tc>
+                <a:tc>
+                  <a:txBody>
+                    <a:bodyPr/>
+                    <a:lstStyle/>
+                    <a:p>
+                      <a:pPr algn="l" indent="0" marL="0">
+                        <a:buNone/>
+                      </a:pPr>
+                      <a:r>
+                        <a:rPr lang="en-US" sz="1100" dirty="0">
+                          <a:solidFill>
+                            <a:srgbClr val="212121"/>
+                          </a:solidFill>
+                          <a:latin typeface="Calibri" pitchFamily="34" charset="0"/>
+                          <a:ea typeface="Calibri" pitchFamily="34" charset="-122"/>
+                          <a:cs typeface="Calibri" pitchFamily="34" charset="-120"/>
+                        </a:rPr>
+                        <a:t>gensrc measurement</a:t>
+                      </a:r>
+                      <a:endParaRPr lang="en-US" sz="1100" dirty="0">
+                        <a:latin typeface="Calibri" charset="0"/>
+                        <a:ea typeface="Calibri" charset="0"/>
+                        <a:cs typeface="Calibri" charset="0"/>
+                      </a:endParaRPr>
+                    </a:p>
+                  </a:txBody>
+                  <a:tcPr marL="73152" marR="73152" marT="73152" marB="73152" anchor="ctr">
+                    <a:lnL w="12700" cap="flat" cmpd="sng" algn="ctr">
+                      <a:solidFill>
+                        <a:srgbClr val="D8DEEA"/>
+                      </a:solidFill>
+                      <a:prstDash val="solid"/>
+                      <a:round/>
+                      <a:headEnd type="none" w="med" len="med"/>
+                      <a:tailEnd type="none" w="med" len="med"/>
+                    </a:lnL>
+                    <a:lnR w="12700" cap="flat" cmpd="sng" algn="ctr">
+                      <a:solidFill>
+                        <a:srgbClr val="D8DEEA"/>
+                      </a:solidFill>
+                      <a:prstDash val="solid"/>
+                      <a:round/>
+                      <a:headEnd type="none" w="med" len="med"/>
+                      <a:tailEnd type="none" w="med" len="med"/>
+                    </a:lnR>
+                    <a:lnT w="12700" cap="flat" cmpd="sng" algn="ctr">
+                      <a:solidFill>
+                        <a:srgbClr val="D8DEEA"/>
+                      </a:solidFill>
+                      <a:prstDash val="solid"/>
+                      <a:round/>
+                      <a:headEnd type="none" w="med" len="med"/>
+                      <a:tailEnd type="none" w="med" len="med"/>
+                    </a:lnT>
+                    <a:lnB w="12700" cap="flat" cmpd="sng" algn="ctr">
+                      <a:solidFill>
+                        <a:srgbClr val="D8DEEA"/>
+                      </a:solidFill>
+                      <a:prstDash val="solid"/>
+                      <a:round/>
+                      <a:headEnd type="none" w="med" len="med"/>
+                      <a:tailEnd type="none" w="med" len="med"/>
+                    </a:lnB>
+                    <a:solidFill>
+                      <a:srgbClr val="FFFFFF"/>
+                    </a:solidFill>
+                  </a:tcPr>
+                </a:tc>
+              </a:tr>
+              <a:tr h="566928">
+                <a:tc>
+                  <a:txBody>
+                    <a:bodyPr/>
+                    <a:lstStyle/>
+                    <a:p>
+                      <a:pPr algn="l" indent="0" marL="0">
+                        <a:buNone/>
+                      </a:pPr>
+                      <a:r>
+                        <a:rPr lang="en-US" sz="1100" b="1" dirty="0">
+                          <a:solidFill>
+                            <a:srgbClr val="212121"/>
+                          </a:solidFill>
+                          <a:latin typeface="Calibri" pitchFamily="34" charset="0"/>
+                          <a:ea typeface="Calibri" pitchFamily="34" charset="-122"/>
+                          <a:cs typeface="Calibri" pitchFamily="34" charset="-120"/>
+                        </a:rPr>
+                        <a:t>INVERT</a:t>
+                      </a:r>
+                      <a:pPr algn="l" indent="0" marL="0">
+                        <a:buNone/>
+                      </a:pPr>
+                      <a:r>
+                        <a:rPr lang="en-US" sz="1100" dirty="0">
+                          <a:solidFill>
+                            <a:srgbClr val="212121"/>
+                          </a:solidFill>
+                          <a:latin typeface="Calibri" pitchFamily="34" charset="0"/>
+                          <a:ea typeface="Calibri" pitchFamily="34" charset="-122"/>
+                          <a:cs typeface="Calibri" pitchFamily="34" charset="-120"/>
+                        </a:rPr>
+                        <a:t> — heat command flipped in unverified FFI glue</a:t>
+                      </a:r>
+                      <a:endParaRPr lang="en-US" sz="1100" dirty="0">
+                        <a:latin typeface="Calibri" charset="0"/>
+                        <a:ea typeface="Calibri" charset="0"/>
+                        <a:cs typeface="Calibri" charset="0"/>
+                      </a:endParaRPr>
+                    </a:p>
+                  </a:txBody>
+                  <a:tcPr marL="73152" marR="73152" marT="73152" marB="73152" anchor="ctr">
+                    <a:lnL w="12700" cap="flat" cmpd="sng" algn="ctr">
+                      <a:solidFill>
+                        <a:srgbClr val="D8DEEA"/>
+                      </a:solidFill>
+                      <a:prstDash val="solid"/>
+                      <a:round/>
+                      <a:headEnd type="none" w="med" len="med"/>
+                      <a:tailEnd type="none" w="med" len="med"/>
+                    </a:lnL>
+                    <a:lnR w="12700" cap="flat" cmpd="sng" algn="ctr">
+                      <a:solidFill>
+                        <a:srgbClr val="D8DEEA"/>
+                      </a:solidFill>
+                      <a:prstDash val="solid"/>
+                      <a:round/>
+                      <a:headEnd type="none" w="med" len="med"/>
+                      <a:tailEnd type="none" w="med" len="med"/>
+                    </a:lnR>
+                    <a:lnT w="12700" cap="flat" cmpd="sng" algn="ctr">
+                      <a:solidFill>
+                        <a:srgbClr val="D8DEEA"/>
+                      </a:solidFill>
+                      <a:prstDash val="solid"/>
+                      <a:round/>
+                      <a:headEnd type="none" w="med" len="med"/>
+                      <a:tailEnd type="none" w="med" len="med"/>
+                    </a:lnT>
+                    <a:lnB w="12700" cap="flat" cmpd="sng" algn="ctr">
+                      <a:solidFill>
+                        <a:srgbClr val="D8DEEA"/>
+                      </a:solidFill>
+                      <a:prstDash val="solid"/>
+                      <a:round/>
+                      <a:headEnd type="none" w="med" len="med"/>
+                      <a:tailEnd type="none" w="med" len="med"/>
+                    </a:lnB>
+                    <a:solidFill>
+                      <a:srgbClr val="FFFFFF"/>
+                    </a:solidFill>
+                  </a:tcPr>
+                </a:tc>
+                <a:tc>
+                  <a:txBody>
+                    <a:bodyPr/>
+                    <a:lstStyle/>
+                    <a:p>
+                      <a:pPr algn="l" indent="0" marL="0">
+                        <a:buNone/>
+                      </a:pPr>
+                      <a:r>
+                        <a:rPr lang="en-US" sz="1100" dirty="0">
+                          <a:solidFill>
+                            <a:srgbClr val="212121"/>
+                          </a:solidFill>
+                          <a:latin typeface="Calibri" pitchFamily="34" charset="0"/>
+                          <a:ea typeface="Calibri" pitchFamily="34" charset="-122"/>
+                          <a:cs typeface="Calibri" pitchFamily="34" charset="-120"/>
+                        </a:rPr>
+                        <a:t>Verus never reads the body — unverified code, out of scope</a:t>
+                      </a:r>
+                      <a:endParaRPr lang="en-US" sz="1100" dirty="0">
+                        <a:latin typeface="Calibri" charset="0"/>
+                        <a:ea typeface="Calibri" charset="0"/>
+                        <a:cs typeface="Calibri" charset="0"/>
+                      </a:endParaRPr>
+                    </a:p>
+                  </a:txBody>
+                  <a:tcPr marL="73152" marR="73152" marT="73152" marB="73152" anchor="ctr">
+                    <a:lnL w="12700" cap="flat" cmpd="sng" algn="ctr">
+                      <a:solidFill>
+                        <a:srgbClr val="D8DEEA"/>
+                      </a:solidFill>
+                      <a:prstDash val="solid"/>
+                      <a:round/>
+                      <a:headEnd type="none" w="med" len="med"/>
+                      <a:tailEnd type="none" w="med" len="med"/>
+                    </a:lnL>
+                    <a:lnR w="12700" cap="flat" cmpd="sng" algn="ctr">
+                      <a:solidFill>
+                        <a:srgbClr val="D8DEEA"/>
+                      </a:solidFill>
+                      <a:prstDash val="solid"/>
+                      <a:round/>
+                      <a:headEnd type="none" w="med" len="med"/>
+                      <a:tailEnd type="none" w="med" len="med"/>
+                    </a:lnR>
+                    <a:lnT w="12700" cap="flat" cmpd="sng" algn="ctr">
+                      <a:solidFill>
+                        <a:srgbClr val="D8DEEA"/>
+                      </a:solidFill>
+                      <a:prstDash val="solid"/>
+                      <a:round/>
+                      <a:headEnd type="none" w="med" len="med"/>
+                      <a:tailEnd type="none" w="med" len="med"/>
+                    </a:lnT>
+                    <a:lnB w="12700" cap="flat" cmpd="sng" algn="ctr">
+                      <a:solidFill>
+                        <a:srgbClr val="D8DEEA"/>
+                      </a:solidFill>
+                      <a:prstDash val="solid"/>
+                      <a:round/>
+                      <a:headEnd type="none" w="med" len="med"/>
+                      <a:tailEnd type="none" w="med" len="med"/>
+                    </a:lnB>
+                    <a:solidFill>
+                      <a:srgbClr val="FFFFFF"/>
+                    </a:solidFill>
+                  </a:tcPr>
+                </a:tc>
+                <a:tc>
+                  <a:txBody>
+                    <a:bodyPr/>
+                    <a:lstStyle/>
+                    <a:p>
+                      <a:pPr algn="l" indent="0" marL="0">
+                        <a:buNone/>
+                      </a:pPr>
+                      <a:r>
+                        <a:rPr lang="en-US" sz="1100" dirty="0">
+                          <a:solidFill>
+                            <a:srgbClr val="212121"/>
+                          </a:solidFill>
+                          <a:latin typeface="Calibri" pitchFamily="34" charset="0"/>
+                          <a:ea typeface="Calibri" pitchFamily="34" charset="-122"/>
+                          <a:cs typeface="Calibri" pitchFamily="34" charset="-120"/>
+                        </a:rPr>
+                        <a:t>gensrc measurement</a:t>
+                      </a:r>
+                      <a:endParaRPr lang="en-US" sz="1100" dirty="0">
+                        <a:latin typeface="Calibri" charset="0"/>
+                        <a:ea typeface="Calibri" charset="0"/>
+                        <a:cs typeface="Calibri" charset="0"/>
+                      </a:endParaRPr>
+                    </a:p>
+                  </a:txBody>
+                  <a:tcPr marL="73152" marR="73152" marT="73152" marB="73152" anchor="ctr">
+                    <a:lnL w="12700" cap="flat" cmpd="sng" algn="ctr">
+                      <a:solidFill>
+                        <a:srgbClr val="D8DEEA"/>
+                      </a:solidFill>
+                      <a:prstDash val="solid"/>
+                      <a:round/>
+                      <a:headEnd type="none" w="med" len="med"/>
+                      <a:tailEnd type="none" w="med" len="med"/>
+                    </a:lnL>
+                    <a:lnR w="12700" cap="flat" cmpd="sng" algn="ctr">
+                      <a:solidFill>
+                        <a:srgbClr val="D8DEEA"/>
+                      </a:solidFill>
+                      <a:prstDash val="solid"/>
+                      <a:round/>
+                      <a:headEnd type="none" w="med" len="med"/>
+                      <a:tailEnd type="none" w="med" len="med"/>
+                    </a:lnR>
+                    <a:lnT w="12700" cap="flat" cmpd="sng" algn="ctr">
+                      <a:solidFill>
+                        <a:srgbClr val="D8DEEA"/>
+                      </a:solidFill>
+                      <a:prstDash val="solid"/>
+                      <a:round/>
+                      <a:headEnd type="none" w="med" len="med"/>
+                      <a:tailEnd type="none" w="med" len="med"/>
+                    </a:lnT>
+                    <a:lnB w="12700" cap="flat" cmpd="sng" algn="ctr">
+                      <a:solidFill>
+                        <a:srgbClr val="D8DEEA"/>
+                      </a:solidFill>
+                      <a:prstDash val="solid"/>
+                      <a:round/>
+                      <a:headEnd type="none" w="med" len="med"/>
+                      <a:tailEnd type="none" w="med" len="med"/>
+                    </a:lnB>
+                    <a:solidFill>
+                      <a:srgbClr val="FFFFFF"/>
+                    </a:solidFill>
+                  </a:tcPr>
+                </a:tc>
+              </a:tr>
+              <a:tr h="786384">
+                <a:tc>
+                  <a:txBody>
+                    <a:bodyPr/>
+                    <a:lstStyle/>
+                    <a:p>
+                      <a:pPr algn="l" indent="0" marL="0">
+                        <a:buNone/>
+                      </a:pPr>
+                      <a:r>
+                        <a:rPr lang="en-US" sz="1100" b="1" dirty="0">
+                          <a:solidFill>
+                            <a:srgbClr val="212121"/>
+                          </a:solidFill>
+                          <a:latin typeface="Calibri" pitchFamily="34" charset="0"/>
+                          <a:ea typeface="Calibri" pitchFamily="34" charset="-122"/>
+                          <a:cs typeface="Calibri" pitchFamily="34" charset="-120"/>
+                        </a:rPr>
+                        <a:t>LAUNDER</a:t>
+                      </a:r>
+                      <a:pPr algn="l" indent="0" marL="0">
+                        <a:buNone/>
+                      </a:pPr>
+                      <a:r>
+                        <a:rPr lang="en-US" sz="1100" dirty="0">
+                          <a:solidFill>
+                            <a:srgbClr val="212121"/>
+                          </a:solidFill>
+                          <a:latin typeface="Calibri" pitchFamily="34" charset="0"/>
+                          <a:ea typeface="Calibri" pitchFamily="34" charset="-122"/>
+                          <a:cs typeface="Calibri" pitchFamily="34" charset="-120"/>
+                        </a:rPr>
+                        <a:t> — contract weakened + impl inverted to match</a:t>
+                      </a:r>
+                      <a:endParaRPr lang="en-US" sz="1100" dirty="0">
+                        <a:latin typeface="Calibri" charset="0"/>
+                        <a:ea typeface="Calibri" charset="0"/>
+                        <a:cs typeface="Calibri" charset="0"/>
+                      </a:endParaRPr>
+                    </a:p>
+                  </a:txBody>
+                  <a:tcPr marL="73152" marR="73152" marT="73152" marB="73152" anchor="ctr">
+                    <a:lnL w="12700" cap="flat" cmpd="sng" algn="ctr">
+                      <a:solidFill>
+                        <a:srgbClr val="D8DEEA"/>
+                      </a:solidFill>
+                      <a:prstDash val="solid"/>
+                      <a:round/>
+                      <a:headEnd type="none" w="med" len="med"/>
+                      <a:tailEnd type="none" w="med" len="med"/>
+                    </a:lnL>
+                    <a:lnR w="12700" cap="flat" cmpd="sng" algn="ctr">
+                      <a:solidFill>
+                        <a:srgbClr val="D8DEEA"/>
+                      </a:solidFill>
+                      <a:prstDash val="solid"/>
+                      <a:round/>
+                      <a:headEnd type="none" w="med" len="med"/>
+                      <a:tailEnd type="none" w="med" len="med"/>
+                    </a:lnR>
+                    <a:lnT w="12700" cap="flat" cmpd="sng" algn="ctr">
+                      <a:solidFill>
+                        <a:srgbClr val="D8DEEA"/>
+                      </a:solidFill>
+                      <a:prstDash val="solid"/>
+                      <a:round/>
+                      <a:headEnd type="none" w="med" len="med"/>
+                      <a:tailEnd type="none" w="med" len="med"/>
+                    </a:lnT>
+                    <a:lnB w="12700" cap="flat" cmpd="sng" algn="ctr">
+                      <a:solidFill>
+                        <a:srgbClr val="D8DEEA"/>
+                      </a:solidFill>
+                      <a:prstDash val="solid"/>
+                      <a:round/>
+                      <a:headEnd type="none" w="med" len="med"/>
+                      <a:tailEnd type="none" w="med" len="med"/>
+                    </a:lnB>
+                    <a:solidFill>
+                      <a:srgbClr val="EDEFF4"/>
+                    </a:solidFill>
+                  </a:tcPr>
+                </a:tc>
+                <a:tc>
+                  <a:txBody>
+                    <a:bodyPr/>
+                    <a:lstStyle/>
+                    <a:p>
+                      <a:pPr algn="l" indent="0" marL="0">
+                        <a:buNone/>
+                      </a:pPr>
+                      <a:r>
+                        <a:rPr lang="en-US" sz="1100" dirty="0">
+                          <a:solidFill>
+                            <a:srgbClr val="212121"/>
+                          </a:solidFill>
+                          <a:latin typeface="Calibri" pitchFamily="34" charset="0"/>
+                          <a:ea typeface="Calibri" pitchFamily="34" charset="-122"/>
+                          <a:cs typeface="Calibri" pitchFamily="34" charset="-120"/>
+                        </a:rPr>
+                        <a:t>self-consistent; gap in contract coverage for attestation report’s compute_cases construct</a:t>
+                      </a:r>
+                      <a:endParaRPr lang="en-US" sz="1100" dirty="0">
+                        <a:latin typeface="Calibri" charset="0"/>
+                        <a:ea typeface="Calibri" charset="0"/>
+                        <a:cs typeface="Calibri" charset="0"/>
+                      </a:endParaRPr>
+                    </a:p>
+                  </a:txBody>
+                  <a:tcPr marL="73152" marR="73152" marT="73152" marB="73152" anchor="ctr">
+                    <a:lnL w="12700" cap="flat" cmpd="sng" algn="ctr">
+                      <a:solidFill>
+                        <a:srgbClr val="D8DEEA"/>
+                      </a:solidFill>
+                      <a:prstDash val="solid"/>
+                      <a:round/>
+                      <a:headEnd type="none" w="med" len="med"/>
+                      <a:tailEnd type="none" w="med" len="med"/>
+                    </a:lnL>
+                    <a:lnR w="12700" cap="flat" cmpd="sng" algn="ctr">
+                      <a:solidFill>
+                        <a:srgbClr val="D8DEEA"/>
+                      </a:solidFill>
+                      <a:prstDash val="solid"/>
+                      <a:round/>
+                      <a:headEnd type="none" w="med" len="med"/>
+                      <a:tailEnd type="none" w="med" len="med"/>
+                    </a:lnR>
+                    <a:lnT w="12700" cap="flat" cmpd="sng" algn="ctr">
+                      <a:solidFill>
+                        <a:srgbClr val="D8DEEA"/>
+                      </a:solidFill>
+                      <a:prstDash val="solid"/>
+                      <a:round/>
+                      <a:headEnd type="none" w="med" len="med"/>
+                      <a:tailEnd type="none" w="med" len="med"/>
+                    </a:lnT>
+                    <a:lnB w="12700" cap="flat" cmpd="sng" algn="ctr">
+                      <a:solidFill>
+                        <a:srgbClr val="D8DEEA"/>
+                      </a:solidFill>
+                      <a:prstDash val="solid"/>
+                      <a:round/>
+                      <a:headEnd type="none" w="med" len="med"/>
+                      <a:tailEnd type="none" w="med" len="med"/>
+                    </a:lnB>
+                    <a:solidFill>
+                      <a:srgbClr val="EDEFF4"/>
+                    </a:solidFill>
+                  </a:tcPr>
+                </a:tc>
+                <a:tc>
+                  <a:txBody>
+                    <a:bodyPr/>
+                    <a:lstStyle/>
+                    <a:p>
+                      <a:pPr algn="l" indent="0" marL="0">
+                        <a:buNone/>
+                      </a:pPr>
+                      <a:r>
+                        <a:rPr lang="en-US" sz="1100" dirty="0">
+                          <a:solidFill>
+                            <a:srgbClr val="212121"/>
+                          </a:solidFill>
+                          <a:latin typeface="Calibri" pitchFamily="34" charset="0"/>
+                          <a:ea typeface="Calibri" pitchFamily="34" charset="-122"/>
+                          <a:cs typeface="Calibri" pitchFamily="34" charset="-120"/>
+                        </a:rPr>
+                        <a:t>stopgap contract measurement, contract coverage check at provisioning</a:t>
+                      </a:r>
+                      <a:endParaRPr lang="en-US" sz="1100" dirty="0">
+                        <a:latin typeface="Calibri" charset="0"/>
+                        <a:ea typeface="Calibri" charset="0"/>
+                        <a:cs typeface="Calibri" charset="0"/>
+                      </a:endParaRPr>
+                    </a:p>
+                  </a:txBody>
+                  <a:tcPr marL="73152" marR="73152" marT="73152" marB="73152" anchor="ctr">
+                    <a:lnL w="12700" cap="flat" cmpd="sng" algn="ctr">
+                      <a:solidFill>
+                        <a:srgbClr val="D8DEEA"/>
+                      </a:solidFill>
+                      <a:prstDash val="solid"/>
+                      <a:round/>
+                      <a:headEnd type="none" w="med" len="med"/>
+                      <a:tailEnd type="none" w="med" len="med"/>
+                    </a:lnL>
+                    <a:lnR w="12700" cap="flat" cmpd="sng" algn="ctr">
+                      <a:solidFill>
+                        <a:srgbClr val="D8DEEA"/>
+                      </a:solidFill>
+                      <a:prstDash val="solid"/>
+                      <a:round/>
+                      <a:headEnd type="none" w="med" len="med"/>
+                      <a:tailEnd type="none" w="med" len="med"/>
+                    </a:lnR>
+                    <a:lnT w="12700" cap="flat" cmpd="sng" algn="ctr">
+                      <a:solidFill>
+                        <a:srgbClr val="D8DEEA"/>
+                      </a:solidFill>
+                      <a:prstDash val="solid"/>
+                      <a:round/>
+                      <a:headEnd type="none" w="med" len="med"/>
+                      <a:tailEnd type="none" w="med" len="med"/>
+                    </a:lnT>
+                    <a:lnB w="12700" cap="flat" cmpd="sng" algn="ctr">
+                      <a:solidFill>
+                        <a:srgbClr val="D8DEEA"/>
+                      </a:solidFill>
+                      <a:prstDash val="solid"/>
+                      <a:round/>
+                      <a:headEnd type="none" w="med" len="med"/>
+                      <a:tailEnd type="none" w="med" len="med"/>
+                    </a:lnB>
+                    <a:solidFill>
+                      <a:srgbClr val="EDEFF4"/>
+                    </a:solidFill>
+                  </a:tcPr>
+                </a:tc>
+              </a:tr>
+            </a:tbl>
+          </a:graphicData>
+        </a:graphic>
+      </p:graphicFrame>
+      <p:sp>
+        <p:nvSpPr>
+          <p:cNvPr id="5" name="Text 2"/>
+          <p:cNvSpPr/>
+          <p:nvPr/>
+        </p:nvSpPr>
+        <p:spPr>
+          <a:xfrm>
+            <a:off x="640080" y="6144768"/>
+            <a:ext cx="10881360" cy="365760"/>
+          </a:xfrm>
+          <a:prstGeom prst="rect">
+            <a:avLst/>
+          </a:prstGeom>
+          <a:noFill/>
+          <a:ln/>
+        </p:spPr>
+        <p:txBody>
+          <a:bodyPr wrap="square" lIns="0" tIns="0" rIns="0" bIns="0" rtlCol="0" anchor="ctr"/>
           <a:lstStyle/>
           <a:p>
             <a:pPr algn="l" indent="0" marL="0">
-              <a:spcAft>
-                <a:spcPts val="400"/>
-              </a:spcAft>
-              <a:buNone/>
-            </a:pPr>
-            <a:r>
-              <a:rPr lang="en-US" sz="1400" b="1" dirty="0">
+              <a:buNone/>
+            </a:pPr>
+            <a:r>
+              <a:rPr lang="en-US" sz="1350" b="1" i="1" dirty="0">
                 <a:solidFill>
                   <a:srgbClr val="1E2761"/>
                 </a:solidFill>
@@ -10072,263 +12062,13 @@
                 <a:ea typeface="Calibri" pitchFamily="34" charset="-122"/>
                 <a:cs typeface="Calibri" pitchFamily="34" charset="-120"/>
               </a:rPr>
-              <a:t>The isolette &amp; HAMR (Kansas State)</a:t>
-            </a:r>
-            <a:endParaRPr lang="en-US" sz="1400" dirty="0"/>
-          </a:p>
-          <a:p>
-            <a:pPr algn="l" marL="342900" indent="-342900">
-              <a:spcAft>
-                <a:spcPts val="300"/>
-              </a:spcAft>
-              <a:buSzPct val="100000"/>
-              <a:buChar char="•"/>
-            </a:pPr>
-            <a:r>
-              <a:rPr lang="en-US" sz="1150" dirty="0">
-                <a:solidFill>
-                  <a:srgbClr val="212121"/>
-                </a:solidFill>
-                <a:latin typeface="Calibri" pitchFamily="34" charset="0"/>
-                <a:ea typeface="Calibri" pitchFamily="34" charset="-122"/>
-                <a:cs typeface="Calibri" pitchFamily="34" charset="-120"/>
-              </a:rPr>
-              <a:t>Hatcliff &amp; Belt, </a:t>
+              <a:t>Adversarial co-development</a:t>
             </a:r>
             <a:pPr algn="l" indent="0" marL="0">
-              <a:spcAft>
-                <a:spcPts val="300"/>
-              </a:spcAft>
-              <a:buNone/>
-            </a:pPr>
-            <a:r>
-              <a:rPr lang="en-US" sz="1150" i="1" dirty="0">
-                <a:solidFill>
-                  <a:srgbClr val="212121"/>
-                </a:solidFill>
-                <a:latin typeface="Calibri" pitchFamily="34" charset="0"/>
-                <a:ea typeface="Calibri" pitchFamily="34" charset="-122"/>
-                <a:cs typeface="Calibri" pitchFamily="34" charset="-120"/>
-              </a:rPr>
-              <a:t>The Isolette System: Illustrating End-to-End Artifacts for Rigorous Model-Based Engineering</a:t>
-            </a:r>
-            <a:pPr algn="l" indent="0" marL="0">
-              <a:spcAft>
-                <a:spcPts val="300"/>
-              </a:spcAft>
-              <a:buNone/>
-            </a:pPr>
-            <a:r>
-              <a:rPr lang="en-US" sz="1150" dirty="0">
-                <a:solidFill>
-                  <a:srgbClr val="212121"/>
-                </a:solidFill>
-                <a:latin typeface="Calibri" pitchFamily="34" charset="0"/>
-                <a:ea typeface="Calibri" pitchFamily="34" charset="-122"/>
-                <a:cs typeface="Calibri" pitchFamily="34" charset="-120"/>
-              </a:rPr>
-              <a:t>, Springer LNCS 15240, 2025</a:t>
-            </a:r>
-            <a:endParaRPr lang="en-US" sz="1400" dirty="0"/>
-          </a:p>
-          <a:p>
-            <a:pPr algn="l" marL="342900" indent="-342900">
-              <a:spcAft>
-                <a:spcPts val="300"/>
-              </a:spcAft>
-              <a:buSzPct val="100000"/>
-              <a:buChar char="•"/>
-            </a:pPr>
-            <a:r>
-              <a:rPr lang="en-US" sz="1150" dirty="0">
-                <a:solidFill>
-                  <a:srgbClr val="212121"/>
-                </a:solidFill>
-                <a:latin typeface="Calibri" pitchFamily="34" charset="0"/>
-                <a:ea typeface="Calibri" pitchFamily="34" charset="-122"/>
-                <a:cs typeface="Calibri" pitchFamily="34" charset="-120"/>
-              </a:rPr>
-              <a:t>Hatcliff, Belt, Robby, McKenzie, Liang, </a:t>
-            </a:r>
-            <a:pPr algn="l" indent="0" marL="0">
-              <a:spcAft>
-                <a:spcPts val="300"/>
-              </a:spcAft>
-              <a:buNone/>
-            </a:pPr>
-            <a:r>
-              <a:rPr lang="en-US" sz="1150" i="1" dirty="0">
-                <a:solidFill>
-                  <a:srgbClr val="212121"/>
-                </a:solidFill>
-                <a:latin typeface="Calibri" pitchFamily="34" charset="0"/>
-                <a:ea typeface="Calibri" pitchFamily="34" charset="-122"/>
-                <a:cs typeface="Calibri" pitchFamily="34" charset="-120"/>
-              </a:rPr>
-              <a:t>End-to-End Formal Methods Integrated Development with SysMLv2 Using HAMR</a:t>
-            </a:r>
-            <a:pPr algn="l" indent="0" marL="0">
-              <a:spcAft>
-                <a:spcPts val="300"/>
-              </a:spcAft>
-              <a:buNone/>
-            </a:pPr>
-            <a:r>
-              <a:rPr lang="en-US" sz="1150" dirty="0">
-                <a:solidFill>
-                  <a:srgbClr val="212121"/>
-                </a:solidFill>
-                <a:latin typeface="Calibri" pitchFamily="34" charset="0"/>
-                <a:ea typeface="Calibri" pitchFamily="34" charset="-122"/>
-                <a:cs typeface="Calibri" pitchFamily="34" charset="-120"/>
-              </a:rPr>
-              <a:t>, Springer, 2025</a:t>
-            </a:r>
-            <a:endParaRPr lang="en-US" sz="1400" dirty="0"/>
-          </a:p>
-          <a:p>
-            <a:pPr algn="l" marL="342900" indent="-342900">
-              <a:spcAft>
-                <a:spcPts val="300"/>
-              </a:spcAft>
-              <a:buSzPct val="100000"/>
-              <a:buChar char="•"/>
-            </a:pPr>
-            <a:r>
-              <a:rPr lang="en-US" sz="1150" dirty="0">
-                <a:solidFill>
-                  <a:srgbClr val="212121"/>
-                </a:solidFill>
-                <a:latin typeface="Calibri" pitchFamily="34" charset="0"/>
-                <a:ea typeface="Calibri" pitchFamily="34" charset="-122"/>
-                <a:cs typeface="Calibri" pitchFamily="34" charset="-120"/>
-              </a:rPr>
-              <a:t>Hatcliff, Belt, Robby, Carpenter, </a:t>
-            </a:r>
-            <a:pPr algn="l" indent="0" marL="0">
-              <a:spcAft>
-                <a:spcPts val="300"/>
-              </a:spcAft>
-              <a:buNone/>
-            </a:pPr>
-            <a:r>
-              <a:rPr lang="en-US" sz="1150" i="1" dirty="0">
-                <a:solidFill>
-                  <a:srgbClr val="212121"/>
-                </a:solidFill>
-                <a:latin typeface="Calibri" pitchFamily="34" charset="0"/>
-                <a:ea typeface="Calibri" pitchFamily="34" charset="-122"/>
-                <a:cs typeface="Calibri" pitchFamily="34" charset="-120"/>
-              </a:rPr>
-              <a:t>HAMR: An AADL Multi-platform Code Generation Toolset</a:t>
-            </a:r>
-            <a:pPr algn="l" indent="0" marL="0">
-              <a:spcAft>
-                <a:spcPts val="300"/>
-              </a:spcAft>
-              <a:buNone/>
-            </a:pPr>
-            <a:r>
-              <a:rPr lang="en-US" sz="1150" dirty="0">
-                <a:solidFill>
-                  <a:srgbClr val="212121"/>
-                </a:solidFill>
-                <a:latin typeface="Calibri" pitchFamily="34" charset="0"/>
-                <a:ea typeface="Calibri" pitchFamily="34" charset="-122"/>
-                <a:cs typeface="Calibri" pitchFamily="34" charset="-120"/>
-              </a:rPr>
-              <a:t>, ISoLA 2021, LNCS 13036, pp. 274–295</a:t>
-            </a:r>
-            <a:endParaRPr lang="en-US" sz="1400" dirty="0"/>
-          </a:p>
-          <a:p>
-            <a:pPr algn="l" marL="342900" indent="-342900">
-              <a:spcAft>
-                <a:spcPts val="300"/>
-              </a:spcAft>
-              <a:buSzPct val="100000"/>
-              <a:buChar char="•"/>
-            </a:pPr>
-            <a:r>
-              <a:rPr lang="en-US" sz="1150" dirty="0">
-                <a:solidFill>
-                  <a:srgbClr val="212121"/>
-                </a:solidFill>
-                <a:latin typeface="Calibri" pitchFamily="34" charset="0"/>
-                <a:ea typeface="Calibri" pitchFamily="34" charset="-122"/>
-                <a:cs typeface="Calibri" pitchFamily="34" charset="-120"/>
-              </a:rPr>
-              <a:t>Lempia &amp; Miller, </a:t>
-            </a:r>
-            <a:pPr algn="l" indent="0" marL="0">
-              <a:spcAft>
-                <a:spcPts val="300"/>
-              </a:spcAft>
-              <a:buNone/>
-            </a:pPr>
-            <a:r>
-              <a:rPr lang="en-US" sz="1150" i="1" dirty="0">
-                <a:solidFill>
-                  <a:srgbClr val="212121"/>
-                </a:solidFill>
-                <a:latin typeface="Calibri" pitchFamily="34" charset="0"/>
-                <a:ea typeface="Calibri" pitchFamily="34" charset="-122"/>
-                <a:cs typeface="Calibri" pitchFamily="34" charset="-120"/>
-              </a:rPr>
-              <a:t>Requirements Engineering Management Handbook</a:t>
-            </a:r>
-            <a:pPr algn="l" indent="0" marL="0">
-              <a:spcAft>
-                <a:spcPts val="300"/>
-              </a:spcAft>
-              <a:buNone/>
-            </a:pPr>
-            <a:r>
-              <a:rPr lang="en-US" sz="1150" dirty="0">
-                <a:solidFill>
-                  <a:srgbClr val="212121"/>
-                </a:solidFill>
-                <a:latin typeface="Calibri" pitchFamily="34" charset="0"/>
-                <a:ea typeface="Calibri" pitchFamily="34" charset="-122"/>
-                <a:cs typeface="Calibri" pitchFamily="34" charset="-120"/>
-              </a:rPr>
-              <a:t>, DOT/FAA/AR-08/32, 2009</a:t>
-            </a:r>
-            <a:endParaRPr lang="en-US" sz="1400" dirty="0"/>
-          </a:p>
-          <a:p>
-            <a:pPr algn="l" marL="342900" indent="-342900">
-              <a:spcAft>
-                <a:spcPts val="300"/>
-              </a:spcAft>
-              <a:buSzPct val="100000"/>
-              <a:buChar char="•"/>
-            </a:pPr>
-            <a:r>
-              <a:rPr lang="en-US" sz="1150" dirty="0">
-                <a:solidFill>
-                  <a:srgbClr val="212121"/>
-                </a:solidFill>
-                <a:latin typeface="Calibri" pitchFamily="34" charset="0"/>
-                <a:ea typeface="Calibri" pitchFamily="34" charset="-122"/>
-                <a:cs typeface="Calibri" pitchFamily="34" charset="-120"/>
-              </a:rPr>
-              <a:t>INSPECTA models: github.com/loonwerks/INSPECTA-models</a:t>
-            </a:r>
-            <a:endParaRPr lang="en-US" sz="1400" dirty="0"/>
-          </a:p>
-          <a:p>
-            <a:pPr algn="l" indent="0" marL="0">
-              <a:spcBef>
-                <a:spcPts val="1200"/>
-              </a:spcBef>
-              <a:spcAft>
-                <a:spcPts val="400"/>
-              </a:spcAft>
-              <a:buNone/>
-            </a:pPr>
-            <a:r>
-              <a:rPr lang="en-US" sz="1400" b="1" dirty="0">
+              <a:buNone/>
+            </a:pPr>
+            <a:r>
+              <a:rPr lang="en-US" sz="1350" i="1" dirty="0">
                 <a:solidFill>
                   <a:srgbClr val="1E2761"/>
                 </a:solidFill>
@@ -10336,197 +12076,9 @@
                 <a:ea typeface="Calibri" pitchFamily="34" charset="-122"/>
                 <a:cs typeface="Calibri" pitchFamily="34" charset="-120"/>
               </a:rPr>
-              <a:t>Attestation foundations</a:t>
-            </a:r>
-            <a:endParaRPr lang="en-US" sz="1400" dirty="0"/>
-          </a:p>
-          <a:p>
-            <a:pPr algn="l" marL="342900" indent="-342900">
-              <a:spcAft>
-                <a:spcPts val="300"/>
-              </a:spcAft>
-              <a:buSzPct val="100000"/>
-              <a:buChar char="•"/>
-            </a:pPr>
-            <a:r>
-              <a:rPr lang="en-US" sz="1150" dirty="0">
-                <a:solidFill>
-                  <a:srgbClr val="212121"/>
-                </a:solidFill>
-                <a:latin typeface="Calibri" pitchFamily="34" charset="0"/>
-                <a:ea typeface="Calibri" pitchFamily="34" charset="-122"/>
-                <a:cs typeface="Calibri" pitchFamily="34" charset="-120"/>
-              </a:rPr>
-              <a:t>Ramsdell, Rowe, Alexander, Helble, Loscocco, Pendergrass, Petz, </a:t>
-            </a:r>
-            <a:pPr algn="l" indent="0" marL="0">
-              <a:spcAft>
-                <a:spcPts val="300"/>
-              </a:spcAft>
-              <a:buNone/>
-            </a:pPr>
-            <a:r>
-              <a:rPr lang="en-US" sz="1150" i="1" dirty="0">
-                <a:solidFill>
-                  <a:srgbClr val="212121"/>
-                </a:solidFill>
-                <a:latin typeface="Calibri" pitchFamily="34" charset="0"/>
-                <a:ea typeface="Calibri" pitchFamily="34" charset="-122"/>
-                <a:cs typeface="Calibri" pitchFamily="34" charset="-120"/>
-              </a:rPr>
-              <a:t>Orchestrating Layered Attestations</a:t>
-            </a:r>
-            <a:pPr algn="l" indent="0" marL="0">
-              <a:spcAft>
-                <a:spcPts val="300"/>
-              </a:spcAft>
-              <a:buNone/>
-            </a:pPr>
-            <a:r>
-              <a:rPr lang="en-US" sz="1150" dirty="0">
-                <a:solidFill>
-                  <a:srgbClr val="212121"/>
-                </a:solidFill>
-                <a:latin typeface="Calibri" pitchFamily="34" charset="0"/>
-                <a:ea typeface="Calibri" pitchFamily="34" charset="-122"/>
-                <a:cs typeface="Calibri" pitchFamily="34" charset="-120"/>
-              </a:rPr>
-              <a:t>, POST 2019, LNCS 11426</a:t>
-            </a:r>
-            <a:endParaRPr lang="en-US" sz="1400" dirty="0"/>
-          </a:p>
-          <a:p>
-            <a:pPr algn="l" indent="0" marL="0">
-              <a:spcBef>
-                <a:spcPts val="1200"/>
-              </a:spcBef>
-              <a:spcAft>
-                <a:spcPts val="400"/>
-              </a:spcAft>
-              <a:buNone/>
-            </a:pPr>
-            <a:r>
-              <a:rPr lang="en-US" sz="1400" b="1" dirty="0">
-                <a:solidFill>
-                  <a:srgbClr val="1E2761"/>
-                </a:solidFill>
-                <a:latin typeface="Calibri" pitchFamily="34" charset="0"/>
-                <a:ea typeface="Calibri" pitchFamily="34" charset="-122"/>
-                <a:cs typeface="Calibri" pitchFamily="34" charset="-120"/>
-              </a:rPr>
-              <a:t>Verification &amp; platform</a:t>
-            </a:r>
-            <a:endParaRPr lang="en-US" sz="1400" dirty="0"/>
-          </a:p>
-          <a:p>
-            <a:pPr algn="l" marL="342900" indent="-342900">
-              <a:spcAft>
-                <a:spcPts val="300"/>
-              </a:spcAft>
-              <a:buSzPct val="100000"/>
-              <a:buChar char="•"/>
-            </a:pPr>
-            <a:r>
-              <a:rPr lang="en-US" sz="1150" dirty="0">
-                <a:solidFill>
-                  <a:srgbClr val="212121"/>
-                </a:solidFill>
-                <a:latin typeface="Calibri" pitchFamily="34" charset="0"/>
-                <a:ea typeface="Calibri" pitchFamily="34" charset="-122"/>
-                <a:cs typeface="Calibri" pitchFamily="34" charset="-120"/>
-              </a:rPr>
-              <a:t>Lattuada, Hance, Cho, Brun, Subasinghe, Zhou, Howell, Parno, Hawblitzel, </a:t>
-            </a:r>
-            <a:pPr algn="l" indent="0" marL="0">
-              <a:spcAft>
-                <a:spcPts val="300"/>
-              </a:spcAft>
-              <a:buNone/>
-            </a:pPr>
-            <a:r>
-              <a:rPr lang="en-US" sz="1150" i="1" dirty="0">
-                <a:solidFill>
-                  <a:srgbClr val="212121"/>
-                </a:solidFill>
-                <a:latin typeface="Calibri" pitchFamily="34" charset="0"/>
-                <a:ea typeface="Calibri" pitchFamily="34" charset="-122"/>
-                <a:cs typeface="Calibri" pitchFamily="34" charset="-120"/>
-              </a:rPr>
-              <a:t>Verus: Verifying Rust Programs using Linear Ghost Types</a:t>
-            </a:r>
-            <a:pPr algn="l" indent="0" marL="0">
-              <a:spcAft>
-                <a:spcPts val="300"/>
-              </a:spcAft>
-              <a:buNone/>
-            </a:pPr>
-            <a:r>
-              <a:rPr lang="en-US" sz="1150" dirty="0">
-                <a:solidFill>
-                  <a:srgbClr val="212121"/>
-                </a:solidFill>
-                <a:latin typeface="Calibri" pitchFamily="34" charset="0"/>
-                <a:ea typeface="Calibri" pitchFamily="34" charset="-122"/>
-                <a:cs typeface="Calibri" pitchFamily="34" charset="-120"/>
-              </a:rPr>
-              <a:t>, PACMPL 7 (OOPSLA1), 2023</a:t>
-            </a:r>
-            <a:endParaRPr lang="en-US" sz="1400" dirty="0"/>
-          </a:p>
-          <a:p>
-            <a:pPr algn="l" marL="342900" indent="-342900">
-              <a:spcAft>
-                <a:spcPts val="300"/>
-              </a:spcAft>
-              <a:buSzPct val="100000"/>
-              <a:buChar char="•"/>
-            </a:pPr>
-            <a:r>
-              <a:rPr lang="en-US" sz="1150" dirty="0">
-                <a:solidFill>
-                  <a:srgbClr val="212121"/>
-                </a:solidFill>
-                <a:latin typeface="Calibri" pitchFamily="34" charset="0"/>
-                <a:ea typeface="Calibri" pitchFamily="34" charset="-122"/>
-                <a:cs typeface="Calibri" pitchFamily="34" charset="-120"/>
-              </a:rPr>
-              <a:t>Klein et al., </a:t>
-            </a:r>
-            <a:pPr algn="l" indent="0" marL="0">
-              <a:spcAft>
-                <a:spcPts val="300"/>
-              </a:spcAft>
-              <a:buNone/>
-            </a:pPr>
-            <a:r>
-              <a:rPr lang="en-US" sz="1150" i="1" dirty="0">
-                <a:solidFill>
-                  <a:srgbClr val="212121"/>
-                </a:solidFill>
-                <a:latin typeface="Calibri" pitchFamily="34" charset="0"/>
-                <a:ea typeface="Calibri" pitchFamily="34" charset="-122"/>
-                <a:cs typeface="Calibri" pitchFamily="34" charset="-120"/>
-              </a:rPr>
-              <a:t>seL4: Formal Verification of an OS Kernel</a:t>
-            </a:r>
-            <a:pPr algn="l" indent="0" marL="0">
-              <a:spcAft>
-                <a:spcPts val="300"/>
-              </a:spcAft>
-              <a:buNone/>
-            </a:pPr>
-            <a:r>
-              <a:rPr lang="en-US" sz="1150" dirty="0">
-                <a:solidFill>
-                  <a:srgbClr val="212121"/>
-                </a:solidFill>
-                <a:latin typeface="Calibri" pitchFamily="34" charset="0"/>
-                <a:ea typeface="Calibri" pitchFamily="34" charset="-122"/>
-                <a:cs typeface="Calibri" pitchFamily="34" charset="-120"/>
-              </a:rPr>
-              <a:t>, SOSP 2009</a:t>
-            </a:r>
-            <a:endParaRPr lang="en-US" sz="1400" dirty="0"/>
+              <a:t> — defense-in-depth, anomaly detection, mitigation.</a:t>
+            </a:r>
+            <a:endParaRPr lang="en-US" sz="1350" dirty="0"/>
           </a:p>
         </p:txBody>
       </p:sp>
@@ -11079,6 +12631,571 @@
               <a:t>trust is NOT anchored in the following:  developer claims, untrusted tools, LLM outputs, cached verdicts</a:t>
             </a:r>
             <a:endParaRPr lang="en-US" sz="2000" dirty="0"/>
+          </a:p>
+        </p:txBody>
+      </p:sp>
+    </p:spTree>
+  </p:cSld>
+  <p:clrMapOvr>
+    <a:masterClrMapping/>
+  </p:clrMapOvr>
+</p:sld>
+</file>
+
+<file path=ppt/slides/slide20.xml><?xml version="1.0" encoding="utf-8"?>
+<p:sld xmlns:a="http://schemas.openxmlformats.org/drawingml/2006/main" xmlns:r="http://schemas.openxmlformats.org/officeDocument/2006/relationships" xmlns:p="http://schemas.openxmlformats.org/presentationml/2006/main">
+  <p:cSld name="Slide 20">
+    <p:bg>
+      <p:bgPr>
+        <a:solidFill>
+          <a:srgbClr val="FFFFFF"/>
+        </a:solidFill>
+      </p:bgPr>
+    </p:bg>
+    <p:spTree>
+      <p:nvGrpSpPr>
+        <p:cNvPr id="1" name=""/>
+        <p:cNvGrpSpPr/>
+        <p:nvPr/>
+      </p:nvGrpSpPr>
+      <p:grpSpPr>
+        <a:xfrm>
+          <a:off x="0" y="0"/>
+          <a:ext cx="0" cy="0"/>
+          <a:chOff x="0" y="0"/>
+          <a:chExt cx="0" cy="0"/>
+        </a:xfrm>
+      </p:grpSpPr>
+      <p:sp>
+        <p:nvSpPr>
+          <p:cNvPr id="2" name="Text 0"/>
+          <p:cNvSpPr/>
+          <p:nvPr/>
+        </p:nvSpPr>
+        <p:spPr>
+          <a:xfrm>
+            <a:off x="640080" y="411480"/>
+            <a:ext cx="10972800" cy="731520"/>
+          </a:xfrm>
+          <a:prstGeom prst="rect">
+            <a:avLst/>
+          </a:prstGeom>
+          <a:noFill/>
+          <a:ln/>
+        </p:spPr>
+        <p:txBody>
+          <a:bodyPr wrap="square" lIns="0" tIns="0" rIns="0" bIns="0" rtlCol="0" anchor="ctr"/>
+          <a:lstStyle/>
+          <a:p>
+            <a:pPr indent="0" marL="0">
+              <a:buNone/>
+            </a:pPr>
+            <a:r>
+              <a:rPr lang="en-US" sz="3600" b="1" dirty="0">
+                <a:solidFill>
+                  <a:srgbClr val="1E2761"/>
+                </a:solidFill>
+                <a:latin typeface="Cambria" pitchFamily="34" charset="0"/>
+                <a:ea typeface="Cambria" pitchFamily="34" charset="-122"/>
+                <a:cs typeface="Cambria" pitchFamily="34" charset="-120"/>
+              </a:rPr>
+              <a:t>References</a:t>
+            </a:r>
+            <a:endParaRPr lang="en-US" sz="3600" dirty="0"/>
+          </a:p>
+        </p:txBody>
+      </p:sp>
+      <p:sp>
+        <p:nvSpPr>
+          <p:cNvPr id="3" name="Text 1"/>
+          <p:cNvSpPr/>
+          <p:nvPr/>
+        </p:nvSpPr>
+        <p:spPr>
+          <a:xfrm>
+            <a:off x="640080" y="1371600"/>
+            <a:ext cx="10972800" cy="5120640"/>
+          </a:xfrm>
+          <a:prstGeom prst="rect">
+            <a:avLst/>
+          </a:prstGeom>
+          <a:noFill/>
+          <a:ln/>
+        </p:spPr>
+        <p:txBody>
+          <a:bodyPr wrap="square" lIns="0" tIns="0" rIns="0" bIns="0" rtlCol="0" anchor="t"/>
+          <a:lstStyle/>
+          <a:p>
+            <a:pPr algn="l" indent="0" marL="0">
+              <a:spcAft>
+                <a:spcPts val="400"/>
+              </a:spcAft>
+              <a:buNone/>
+            </a:pPr>
+            <a:r>
+              <a:rPr lang="en-US" sz="1400" b="1" dirty="0">
+                <a:solidFill>
+                  <a:srgbClr val="1E2761"/>
+                </a:solidFill>
+                <a:latin typeface="Calibri" pitchFamily="34" charset="0"/>
+                <a:ea typeface="Calibri" pitchFamily="34" charset="-122"/>
+                <a:cs typeface="Calibri" pitchFamily="34" charset="-120"/>
+              </a:rPr>
+              <a:t>The isolette &amp; HAMR (Kansas State)</a:t>
+            </a:r>
+            <a:endParaRPr lang="en-US" sz="1400" dirty="0"/>
+          </a:p>
+          <a:p>
+            <a:pPr algn="l" marL="342900" indent="-342900">
+              <a:spcAft>
+                <a:spcPts val="300"/>
+              </a:spcAft>
+              <a:buSzPct val="100000"/>
+              <a:buChar char="•"/>
+            </a:pPr>
+            <a:r>
+              <a:rPr lang="en-US" sz="1150" dirty="0">
+                <a:solidFill>
+                  <a:srgbClr val="212121"/>
+                </a:solidFill>
+                <a:latin typeface="Calibri" pitchFamily="34" charset="0"/>
+                <a:ea typeface="Calibri" pitchFamily="34" charset="-122"/>
+                <a:cs typeface="Calibri" pitchFamily="34" charset="-120"/>
+              </a:rPr>
+              <a:t>Hatcliff &amp; Belt, </a:t>
+            </a:r>
+            <a:pPr algn="l" indent="0" marL="0">
+              <a:spcAft>
+                <a:spcPts val="300"/>
+              </a:spcAft>
+              <a:buNone/>
+            </a:pPr>
+            <a:r>
+              <a:rPr lang="en-US" sz="1150" i="1" dirty="0">
+                <a:solidFill>
+                  <a:srgbClr val="212121"/>
+                </a:solidFill>
+                <a:latin typeface="Calibri" pitchFamily="34" charset="0"/>
+                <a:ea typeface="Calibri" pitchFamily="34" charset="-122"/>
+                <a:cs typeface="Calibri" pitchFamily="34" charset="-120"/>
+              </a:rPr>
+              <a:t>The Isolette System: Illustrating End-to-End Artifacts for Rigorous Model-Based Engineering</a:t>
+            </a:r>
+            <a:pPr algn="l" indent="0" marL="0">
+              <a:spcAft>
+                <a:spcPts val="300"/>
+              </a:spcAft>
+              <a:buNone/>
+            </a:pPr>
+            <a:r>
+              <a:rPr lang="en-US" sz="1150" dirty="0">
+                <a:solidFill>
+                  <a:srgbClr val="212121"/>
+                </a:solidFill>
+                <a:latin typeface="Calibri" pitchFamily="34" charset="0"/>
+                <a:ea typeface="Calibri" pitchFamily="34" charset="-122"/>
+                <a:cs typeface="Calibri" pitchFamily="34" charset="-120"/>
+              </a:rPr>
+              <a:t>, Springer LNCS 15240, 2025</a:t>
+            </a:r>
+            <a:endParaRPr lang="en-US" sz="1400" dirty="0"/>
+          </a:p>
+          <a:p>
+            <a:pPr algn="l" marL="342900" indent="-342900">
+              <a:spcAft>
+                <a:spcPts val="300"/>
+              </a:spcAft>
+              <a:buSzPct val="100000"/>
+              <a:buChar char="•"/>
+            </a:pPr>
+            <a:r>
+              <a:rPr lang="en-US" sz="1150" dirty="0">
+                <a:solidFill>
+                  <a:srgbClr val="212121"/>
+                </a:solidFill>
+                <a:latin typeface="Calibri" pitchFamily="34" charset="0"/>
+                <a:ea typeface="Calibri" pitchFamily="34" charset="-122"/>
+                <a:cs typeface="Calibri" pitchFamily="34" charset="-120"/>
+              </a:rPr>
+              <a:t>Hatcliff, Belt, Robby, McKenzie, Liang, </a:t>
+            </a:r>
+            <a:pPr algn="l" indent="0" marL="0">
+              <a:spcAft>
+                <a:spcPts val="300"/>
+              </a:spcAft>
+              <a:buNone/>
+            </a:pPr>
+            <a:r>
+              <a:rPr lang="en-US" sz="1150" i="1" dirty="0">
+                <a:solidFill>
+                  <a:srgbClr val="212121"/>
+                </a:solidFill>
+                <a:latin typeface="Calibri" pitchFamily="34" charset="0"/>
+                <a:ea typeface="Calibri" pitchFamily="34" charset="-122"/>
+                <a:cs typeface="Calibri" pitchFamily="34" charset="-120"/>
+              </a:rPr>
+              <a:t>End-to-End Formal Methods Integrated Development with SysMLv2 Using HAMR</a:t>
+            </a:r>
+            <a:pPr algn="l" indent="0" marL="0">
+              <a:spcAft>
+                <a:spcPts val="300"/>
+              </a:spcAft>
+              <a:buNone/>
+            </a:pPr>
+            <a:r>
+              <a:rPr lang="en-US" sz="1150" dirty="0">
+                <a:solidFill>
+                  <a:srgbClr val="212121"/>
+                </a:solidFill>
+                <a:latin typeface="Calibri" pitchFamily="34" charset="0"/>
+                <a:ea typeface="Calibri" pitchFamily="34" charset="-122"/>
+                <a:cs typeface="Calibri" pitchFamily="34" charset="-120"/>
+              </a:rPr>
+              <a:t>, Springer, 2025</a:t>
+            </a:r>
+            <a:endParaRPr lang="en-US" sz="1400" dirty="0"/>
+          </a:p>
+          <a:p>
+            <a:pPr algn="l" marL="342900" indent="-342900">
+              <a:spcAft>
+                <a:spcPts val="300"/>
+              </a:spcAft>
+              <a:buSzPct val="100000"/>
+              <a:buChar char="•"/>
+            </a:pPr>
+            <a:r>
+              <a:rPr lang="en-US" sz="1150" dirty="0">
+                <a:solidFill>
+                  <a:srgbClr val="212121"/>
+                </a:solidFill>
+                <a:latin typeface="Calibri" pitchFamily="34" charset="0"/>
+                <a:ea typeface="Calibri" pitchFamily="34" charset="-122"/>
+                <a:cs typeface="Calibri" pitchFamily="34" charset="-120"/>
+              </a:rPr>
+              <a:t>Hatcliff, Belt, Robby, Carpenter, </a:t>
+            </a:r>
+            <a:pPr algn="l" indent="0" marL="0">
+              <a:spcAft>
+                <a:spcPts val="300"/>
+              </a:spcAft>
+              <a:buNone/>
+            </a:pPr>
+            <a:r>
+              <a:rPr lang="en-US" sz="1150" i="1" dirty="0">
+                <a:solidFill>
+                  <a:srgbClr val="212121"/>
+                </a:solidFill>
+                <a:latin typeface="Calibri" pitchFamily="34" charset="0"/>
+                <a:ea typeface="Calibri" pitchFamily="34" charset="-122"/>
+                <a:cs typeface="Calibri" pitchFamily="34" charset="-120"/>
+              </a:rPr>
+              <a:t>HAMR: An AADL Multi-platform Code Generation Toolset</a:t>
+            </a:r>
+            <a:pPr algn="l" indent="0" marL="0">
+              <a:spcAft>
+                <a:spcPts val="300"/>
+              </a:spcAft>
+              <a:buNone/>
+            </a:pPr>
+            <a:r>
+              <a:rPr lang="en-US" sz="1150" dirty="0">
+                <a:solidFill>
+                  <a:srgbClr val="212121"/>
+                </a:solidFill>
+                <a:latin typeface="Calibri" pitchFamily="34" charset="0"/>
+                <a:ea typeface="Calibri" pitchFamily="34" charset="-122"/>
+                <a:cs typeface="Calibri" pitchFamily="34" charset="-120"/>
+              </a:rPr>
+              <a:t>, ISoLA 2021, LNCS 13036, pp. 274–295</a:t>
+            </a:r>
+            <a:endParaRPr lang="en-US" sz="1400" dirty="0"/>
+          </a:p>
+          <a:p>
+            <a:pPr algn="l" marL="342900" indent="-342900">
+              <a:spcAft>
+                <a:spcPts val="300"/>
+              </a:spcAft>
+              <a:buSzPct val="100000"/>
+              <a:buChar char="•"/>
+            </a:pPr>
+            <a:r>
+              <a:rPr lang="en-US" sz="1150" dirty="0">
+                <a:solidFill>
+                  <a:srgbClr val="212121"/>
+                </a:solidFill>
+                <a:latin typeface="Calibri" pitchFamily="34" charset="0"/>
+                <a:ea typeface="Calibri" pitchFamily="34" charset="-122"/>
+                <a:cs typeface="Calibri" pitchFamily="34" charset="-120"/>
+              </a:rPr>
+              <a:t>Lempia &amp; Miller, </a:t>
+            </a:r>
+            <a:pPr algn="l" indent="0" marL="0">
+              <a:spcAft>
+                <a:spcPts val="300"/>
+              </a:spcAft>
+              <a:buNone/>
+            </a:pPr>
+            <a:r>
+              <a:rPr lang="en-US" sz="1150" i="1" dirty="0">
+                <a:solidFill>
+                  <a:srgbClr val="212121"/>
+                </a:solidFill>
+                <a:latin typeface="Calibri" pitchFamily="34" charset="0"/>
+                <a:ea typeface="Calibri" pitchFamily="34" charset="-122"/>
+                <a:cs typeface="Calibri" pitchFamily="34" charset="-120"/>
+              </a:rPr>
+              <a:t>Requirements Engineering Management Handbook</a:t>
+            </a:r>
+            <a:pPr algn="l" indent="0" marL="0">
+              <a:spcAft>
+                <a:spcPts val="300"/>
+              </a:spcAft>
+              <a:buNone/>
+            </a:pPr>
+            <a:r>
+              <a:rPr lang="en-US" sz="1150" dirty="0">
+                <a:solidFill>
+                  <a:srgbClr val="212121"/>
+                </a:solidFill>
+                <a:latin typeface="Calibri" pitchFamily="34" charset="0"/>
+                <a:ea typeface="Calibri" pitchFamily="34" charset="-122"/>
+                <a:cs typeface="Calibri" pitchFamily="34" charset="-120"/>
+              </a:rPr>
+              <a:t>, DOT/FAA/AR-08/32, 2009</a:t>
+            </a:r>
+            <a:endParaRPr lang="en-US" sz="1400" dirty="0"/>
+          </a:p>
+          <a:p>
+            <a:pPr algn="l" marL="342900" indent="-342900">
+              <a:spcAft>
+                <a:spcPts val="300"/>
+              </a:spcAft>
+              <a:buSzPct val="100000"/>
+              <a:buChar char="•"/>
+            </a:pPr>
+            <a:r>
+              <a:rPr lang="en-US" sz="1150" dirty="0">
+                <a:solidFill>
+                  <a:srgbClr val="212121"/>
+                </a:solidFill>
+                <a:latin typeface="Calibri" pitchFamily="34" charset="0"/>
+                <a:ea typeface="Calibri" pitchFamily="34" charset="-122"/>
+                <a:cs typeface="Calibri" pitchFamily="34" charset="-120"/>
+              </a:rPr>
+              <a:t>INSPECTA models: github.com/loonwerks/INSPECTA-models</a:t>
+            </a:r>
+            <a:endParaRPr lang="en-US" sz="1400" dirty="0"/>
+          </a:p>
+          <a:p>
+            <a:pPr algn="l" indent="0" marL="0">
+              <a:spcBef>
+                <a:spcPts val="1200"/>
+              </a:spcBef>
+              <a:spcAft>
+                <a:spcPts val="400"/>
+              </a:spcAft>
+              <a:buNone/>
+            </a:pPr>
+            <a:r>
+              <a:rPr lang="en-US" sz="1400" b="1" dirty="0">
+                <a:solidFill>
+                  <a:srgbClr val="1E2761"/>
+                </a:solidFill>
+                <a:latin typeface="Calibri" pitchFamily="34" charset="0"/>
+                <a:ea typeface="Calibri" pitchFamily="34" charset="-122"/>
+                <a:cs typeface="Calibri" pitchFamily="34" charset="-120"/>
+              </a:rPr>
+              <a:t>Attestation foundations</a:t>
+            </a:r>
+            <a:endParaRPr lang="en-US" sz="1400" dirty="0"/>
+          </a:p>
+          <a:p>
+            <a:pPr algn="l" marL="342900" indent="-342900">
+              <a:spcAft>
+                <a:spcPts val="300"/>
+              </a:spcAft>
+              <a:buSzPct val="100000"/>
+              <a:buChar char="•"/>
+            </a:pPr>
+            <a:r>
+              <a:rPr lang="en-US" sz="1150" dirty="0">
+                <a:solidFill>
+                  <a:srgbClr val="212121"/>
+                </a:solidFill>
+                <a:latin typeface="Calibri" pitchFamily="34" charset="0"/>
+                <a:ea typeface="Calibri" pitchFamily="34" charset="-122"/>
+                <a:cs typeface="Calibri" pitchFamily="34" charset="-120"/>
+              </a:rPr>
+              <a:t>Ramsdell, Rowe, Alexander, Helble, Loscocco, Pendergrass, Petz, </a:t>
+            </a:r>
+            <a:pPr algn="l" indent="0" marL="0">
+              <a:spcAft>
+                <a:spcPts val="300"/>
+              </a:spcAft>
+              <a:buNone/>
+            </a:pPr>
+            <a:r>
+              <a:rPr lang="en-US" sz="1150" i="1" dirty="0">
+                <a:solidFill>
+                  <a:srgbClr val="212121"/>
+                </a:solidFill>
+                <a:latin typeface="Calibri" pitchFamily="34" charset="0"/>
+                <a:ea typeface="Calibri" pitchFamily="34" charset="-122"/>
+                <a:cs typeface="Calibri" pitchFamily="34" charset="-120"/>
+              </a:rPr>
+              <a:t>Orchestrating Layered Attestations</a:t>
+            </a:r>
+            <a:pPr algn="l" indent="0" marL="0">
+              <a:spcAft>
+                <a:spcPts val="300"/>
+              </a:spcAft>
+              <a:buNone/>
+            </a:pPr>
+            <a:r>
+              <a:rPr lang="en-US" sz="1150" dirty="0">
+                <a:solidFill>
+                  <a:srgbClr val="212121"/>
+                </a:solidFill>
+                <a:latin typeface="Calibri" pitchFamily="34" charset="0"/>
+                <a:ea typeface="Calibri" pitchFamily="34" charset="-122"/>
+                <a:cs typeface="Calibri" pitchFamily="34" charset="-120"/>
+              </a:rPr>
+              <a:t>, POST 2019, LNCS 11426</a:t>
+            </a:r>
+            <a:endParaRPr lang="en-US" sz="1400" dirty="0"/>
+          </a:p>
+          <a:p>
+            <a:pPr algn="l" indent="0" marL="0">
+              <a:spcBef>
+                <a:spcPts val="1200"/>
+              </a:spcBef>
+              <a:spcAft>
+                <a:spcPts val="400"/>
+              </a:spcAft>
+              <a:buNone/>
+            </a:pPr>
+            <a:r>
+              <a:rPr lang="en-US" sz="1400" b="1" dirty="0">
+                <a:solidFill>
+                  <a:srgbClr val="1E2761"/>
+                </a:solidFill>
+                <a:latin typeface="Calibri" pitchFamily="34" charset="0"/>
+                <a:ea typeface="Calibri" pitchFamily="34" charset="-122"/>
+                <a:cs typeface="Calibri" pitchFamily="34" charset="-120"/>
+              </a:rPr>
+              <a:t>Verification &amp; platform</a:t>
+            </a:r>
+            <a:endParaRPr lang="en-US" sz="1400" dirty="0"/>
+          </a:p>
+          <a:p>
+            <a:pPr algn="l" marL="342900" indent="-342900">
+              <a:spcAft>
+                <a:spcPts val="300"/>
+              </a:spcAft>
+              <a:buSzPct val="100000"/>
+              <a:buChar char="•"/>
+            </a:pPr>
+            <a:r>
+              <a:rPr lang="en-US" sz="1150" dirty="0">
+                <a:solidFill>
+                  <a:srgbClr val="212121"/>
+                </a:solidFill>
+                <a:latin typeface="Calibri" pitchFamily="34" charset="0"/>
+                <a:ea typeface="Calibri" pitchFamily="34" charset="-122"/>
+                <a:cs typeface="Calibri" pitchFamily="34" charset="-120"/>
+              </a:rPr>
+              <a:t>Lattuada, Hance, Cho, Brun, Subasinghe, Zhou, Howell, Parno, Hawblitzel, </a:t>
+            </a:r>
+            <a:pPr algn="l" indent="0" marL="0">
+              <a:spcAft>
+                <a:spcPts val="300"/>
+              </a:spcAft>
+              <a:buNone/>
+            </a:pPr>
+            <a:r>
+              <a:rPr lang="en-US" sz="1150" i="1" dirty="0">
+                <a:solidFill>
+                  <a:srgbClr val="212121"/>
+                </a:solidFill>
+                <a:latin typeface="Calibri" pitchFamily="34" charset="0"/>
+                <a:ea typeface="Calibri" pitchFamily="34" charset="-122"/>
+                <a:cs typeface="Calibri" pitchFamily="34" charset="-120"/>
+              </a:rPr>
+              <a:t>Verus: Verifying Rust Programs using Linear Ghost Types</a:t>
+            </a:r>
+            <a:pPr algn="l" indent="0" marL="0">
+              <a:spcAft>
+                <a:spcPts val="300"/>
+              </a:spcAft>
+              <a:buNone/>
+            </a:pPr>
+            <a:r>
+              <a:rPr lang="en-US" sz="1150" dirty="0">
+                <a:solidFill>
+                  <a:srgbClr val="212121"/>
+                </a:solidFill>
+                <a:latin typeface="Calibri" pitchFamily="34" charset="0"/>
+                <a:ea typeface="Calibri" pitchFamily="34" charset="-122"/>
+                <a:cs typeface="Calibri" pitchFamily="34" charset="-120"/>
+              </a:rPr>
+              <a:t>, PACMPL 7 (OOPSLA1), 2023</a:t>
+            </a:r>
+            <a:endParaRPr lang="en-US" sz="1400" dirty="0"/>
+          </a:p>
+          <a:p>
+            <a:pPr algn="l" marL="342900" indent="-342900">
+              <a:spcAft>
+                <a:spcPts val="300"/>
+              </a:spcAft>
+              <a:buSzPct val="100000"/>
+              <a:buChar char="•"/>
+            </a:pPr>
+            <a:r>
+              <a:rPr lang="en-US" sz="1150" dirty="0">
+                <a:solidFill>
+                  <a:srgbClr val="212121"/>
+                </a:solidFill>
+                <a:latin typeface="Calibri" pitchFamily="34" charset="0"/>
+                <a:ea typeface="Calibri" pitchFamily="34" charset="-122"/>
+                <a:cs typeface="Calibri" pitchFamily="34" charset="-120"/>
+              </a:rPr>
+              <a:t>Klein et al., </a:t>
+            </a:r>
+            <a:pPr algn="l" indent="0" marL="0">
+              <a:spcAft>
+                <a:spcPts val="300"/>
+              </a:spcAft>
+              <a:buNone/>
+            </a:pPr>
+            <a:r>
+              <a:rPr lang="en-US" sz="1150" i="1" dirty="0">
+                <a:solidFill>
+                  <a:srgbClr val="212121"/>
+                </a:solidFill>
+                <a:latin typeface="Calibri" pitchFamily="34" charset="0"/>
+                <a:ea typeface="Calibri" pitchFamily="34" charset="-122"/>
+                <a:cs typeface="Calibri" pitchFamily="34" charset="-120"/>
+              </a:rPr>
+              <a:t>seL4: Formal Verification of an OS Kernel</a:t>
+            </a:r>
+            <a:pPr algn="l" indent="0" marL="0">
+              <a:spcAft>
+                <a:spcPts val="300"/>
+              </a:spcAft>
+              <a:buNone/>
+            </a:pPr>
+            <a:r>
+              <a:rPr lang="en-US" sz="1150" dirty="0">
+                <a:solidFill>
+                  <a:srgbClr val="212121"/>
+                </a:solidFill>
+                <a:latin typeface="Calibri" pitchFamily="34" charset="0"/>
+                <a:ea typeface="Calibri" pitchFamily="34" charset="-122"/>
+                <a:cs typeface="Calibri" pitchFamily="34" charset="-120"/>
+              </a:rPr>
+              <a:t>, SOSP 2009</a:t>
+            </a:r>
+            <a:endParaRPr lang="en-US" sz="1400" dirty="0"/>
           </a:p>
         </p:txBody>
       </p:sp>

--- a/docs/video_slides_draft.pptx
+++ b/docs/video_slides_draft.pptx
@@ -521,7 +521,7 @@
           <a:p>
             <a:r>
               <a:rPr lang="en-US" dirty="0"/>
-              <a:t>Title card. Subtitle deliberately names the four core artifact classes - the deck's first echo of the artifact-class table (slide 6). Optional footer: INSPECTA program context.</a:t>
+              <a:t>Title card. Subtitle deliberately names the four core artifact classes - the deck's first echo of the artifact-class table (slide 6). Footer: DARPA PROVERS sponsor acknowledgment with contract number (INSPECTA is the team's project under PROVERS).</a:t>
             </a:r>
             <a:endParaRPr lang="en-US" dirty="0"/>
           </a:p>
@@ -2613,7 +2613,7 @@
         <p:spPr>
           <a:xfrm>
             <a:off x="822960" y="2194560"/>
-            <a:ext cx="10515600" cy="1097280"/>
+            <a:ext cx="10972800" cy="1097280"/>
           </a:xfrm>
           <a:prstGeom prst="rect">
             <a:avLst/>
@@ -2639,6 +2639,104 @@
               </a:rPr>
               <a:t>Lifecycle Attestation with pybb</a:t>
             </a:r>
+            <a:pPr algn="l" indent="0" marL="0">
+              <a:buNone/>
+            </a:pPr>
+            <a:r>
+              <a:rPr lang="en-US" sz="2200" i="1" dirty="0">
+                <a:solidFill>
+                  <a:srgbClr val="CADCFC"/>
+                </a:solidFill>
+                <a:latin typeface="Calibri" pitchFamily="34" charset="0"/>
+                <a:ea typeface="Calibri" pitchFamily="34" charset="-122"/>
+                <a:cs typeface="Calibri" pitchFamily="34" charset="-120"/>
+              </a:rPr>
+              <a:t> (</a:t>
+            </a:r>
+            <a:pPr algn="l" indent="0" marL="0">
+              <a:buNone/>
+            </a:pPr>
+            <a:r>
+              <a:rPr lang="en-US" sz="3600" b="1" i="1" dirty="0">
+                <a:solidFill>
+                  <a:srgbClr val="CADCFC"/>
+                </a:solidFill>
+                <a:latin typeface="Calibri" pitchFamily="34" charset="0"/>
+                <a:ea typeface="Calibri" pitchFamily="34" charset="-122"/>
+                <a:cs typeface="Calibri" pitchFamily="34" charset="-120"/>
+              </a:rPr>
+              <a:t>py</a:t>
+            </a:r>
+            <a:pPr algn="l" indent="0" marL="0">
+              <a:buNone/>
+            </a:pPr>
+            <a:r>
+              <a:rPr lang="en-US" sz="2200" i="1" dirty="0">
+                <a:solidFill>
+                  <a:srgbClr val="CADCFC"/>
+                </a:solidFill>
+                <a:latin typeface="Calibri" pitchFamily="34" charset="0"/>
+                <a:ea typeface="Calibri" pitchFamily="34" charset="-122"/>
+                <a:cs typeface="Calibri" pitchFamily="34" charset="-120"/>
+              </a:rPr>
+              <a:t>thon </a:t>
+            </a:r>
+            <a:pPr algn="l" indent="0" marL="0">
+              <a:buNone/>
+            </a:pPr>
+            <a:r>
+              <a:rPr lang="en-US" sz="3600" b="1" i="1" dirty="0">
+                <a:solidFill>
+                  <a:srgbClr val="CADCFC"/>
+                </a:solidFill>
+                <a:latin typeface="Calibri" pitchFamily="34" charset="0"/>
+                <a:ea typeface="Calibri" pitchFamily="34" charset="-122"/>
+                <a:cs typeface="Calibri" pitchFamily="34" charset="-120"/>
+              </a:rPr>
+              <a:t>b</a:t>
+            </a:r>
+            <a:pPr algn="l" indent="0" marL="0">
+              <a:buNone/>
+            </a:pPr>
+            <a:r>
+              <a:rPr lang="en-US" sz="2200" i="1" dirty="0">
+                <a:solidFill>
+                  <a:srgbClr val="CADCFC"/>
+                </a:solidFill>
+                <a:latin typeface="Calibri" pitchFamily="34" charset="0"/>
+                <a:ea typeface="Calibri" pitchFamily="34" charset="-122"/>
+                <a:cs typeface="Calibri" pitchFamily="34" charset="-120"/>
+              </a:rPr>
+              <a:t>lack</a:t>
+            </a:r>
+            <a:pPr algn="l" indent="0" marL="0">
+              <a:buNone/>
+            </a:pPr>
+            <a:r>
+              <a:rPr lang="en-US" sz="3600" b="1" i="1" dirty="0">
+                <a:solidFill>
+                  <a:srgbClr val="CADCFC"/>
+                </a:solidFill>
+                <a:latin typeface="Calibri" pitchFamily="34" charset="0"/>
+                <a:ea typeface="Calibri" pitchFamily="34" charset="-122"/>
+                <a:cs typeface="Calibri" pitchFamily="34" charset="-120"/>
+              </a:rPr>
+              <a:t>b</a:t>
+            </a:r>
+            <a:pPr algn="l" indent="0" marL="0">
+              <a:buNone/>
+            </a:pPr>
+            <a:r>
+              <a:rPr lang="en-US" sz="2200" i="1" dirty="0">
+                <a:solidFill>
+                  <a:srgbClr val="CADCFC"/>
+                </a:solidFill>
+                <a:latin typeface="Calibri" pitchFamily="34" charset="0"/>
+                <a:ea typeface="Calibri" pitchFamily="34" charset="-122"/>
+                <a:cs typeface="Calibri" pitchFamily="34" charset="-120"/>
+              </a:rPr>
+              <a:t>oard)</a:t>
+            </a:r>
             <a:endParaRPr lang="en-US" sz="4400" dirty="0"/>
           </a:p>
         </p:txBody>
@@ -2664,7 +2762,7 @@
           <a:bodyPr wrap="square" lIns="0" tIns="0" rIns="0" bIns="0" rtlCol="0" anchor="ctr"/>
           <a:lstStyle/>
           <a:p>
-            <a:pPr algn="l" indent="0" marL="0">
+            <a:pPr algn="ctr" indent="0" marL="0">
               <a:buNone/>
             </a:pPr>
             <a:r>
@@ -2676,10 +2774,27 @@
                 <a:ea typeface="Calibri" pitchFamily="34" charset="-122"/>
                 <a:cs typeface="Calibri" pitchFamily="34" charset="-120"/>
               </a:rPr>
-              <a:t>Measured trust across models, contracts, implementations, and proofs</a:t>
+              <a:t>Measured trust across models, contracts, code, and proofs in </a:t>
             </a:r>
             <a:endParaRPr lang="en-US" sz="2000" dirty="0"/>
           </a:p>
+          <a:p>
+            <a:pPr algn="ctr" indent="0" marL="0">
+              <a:buNone/>
+            </a:pPr>
+            <a:r>
+              <a:rPr lang="en-US" sz="2000" i="1" dirty="0">
+                <a:solidFill>
+                  <a:srgbClr val="CADCFC"/>
+                </a:solidFill>
+                <a:latin typeface="Calibri" pitchFamily="34" charset="0"/>
+                <a:ea typeface="Calibri" pitchFamily="34" charset="-122"/>
+                <a:cs typeface="Calibri" pitchFamily="34" charset="-120"/>
+              </a:rPr>
+              <a:t>high assurance, LLM-assisted development pipelines</a:t>
+            </a:r>
+            <a:endParaRPr lang="en-US" sz="2000" dirty="0"/>
+          </a:p>
         </p:txBody>
       </p:sp>
       <p:sp>
@@ -2690,8 +2805,8 @@
         </p:nvSpPr>
         <p:spPr>
           <a:xfrm>
-            <a:off x="822960" y="5760720"/>
-            <a:ext cx="10515600" cy="365760"/>
+            <a:off x="822960" y="4754880"/>
+            <a:ext cx="10515600" cy="868680"/>
           </a:xfrm>
           <a:prstGeom prst="rect">
             <a:avLst/>
@@ -2700,6 +2815,300 @@
           <a:ln/>
         </p:spPr>
         <p:txBody>
+          <a:bodyPr wrap="square" lIns="0" tIns="0" rIns="0" bIns="0" rtlCol="0" anchor="b"/>
+          <a:lstStyle/>
+          <a:p>
+            <a:pPr algn="l" indent="0" marL="0">
+              <a:buNone/>
+            </a:pPr>
+            <a:r>
+              <a:rPr lang="en-US" sz="1600" dirty="0">
+                <a:solidFill>
+                  <a:srgbClr val="CADCFC"/>
+                </a:solidFill>
+                <a:latin typeface="Calibri" pitchFamily="34" charset="0"/>
+                <a:ea typeface="Calibri" pitchFamily="34" charset="-122"/>
+                <a:cs typeface="Calibri" pitchFamily="34" charset="-120"/>
+              </a:rPr>
+              <a:t>Adam Petz</a:t>
+            </a:r>
+            <a:pPr algn="l" indent="0" marL="0">
+              <a:buNone/>
+            </a:pPr>
+            <a:r>
+              <a:rPr lang="en-US" sz="1600" baseline="30000" dirty="0">
+                <a:solidFill>
+                  <a:srgbClr val="CADCFC"/>
+                </a:solidFill>
+                <a:latin typeface="Calibri" pitchFamily="34" charset="0"/>
+                <a:ea typeface="Calibri" pitchFamily="34" charset="-122"/>
+                <a:cs typeface="Calibri" pitchFamily="34" charset="-120"/>
+              </a:rPr>
+              <a:t>1</a:t>
+            </a:r>
+            <a:pPr algn="l" indent="0" marL="0">
+              <a:buNone/>
+            </a:pPr>
+            <a:r>
+              <a:rPr lang="en-US" sz="1600" dirty="0">
+                <a:solidFill>
+                  <a:srgbClr val="CADCFC"/>
+                </a:solidFill>
+                <a:latin typeface="Calibri" pitchFamily="34" charset="0"/>
+                <a:ea typeface="Calibri" pitchFamily="34" charset="-122"/>
+                <a:cs typeface="Calibri" pitchFamily="34" charset="-120"/>
+              </a:rPr>
+              <a:t>, Isaac Amundson</a:t>
+            </a:r>
+            <a:pPr algn="l" indent="0" marL="0">
+              <a:buNone/>
+            </a:pPr>
+            <a:r>
+              <a:rPr lang="en-US" sz="1600" baseline="30000" dirty="0">
+                <a:solidFill>
+                  <a:srgbClr val="CADCFC"/>
+                </a:solidFill>
+                <a:latin typeface="Calibri" pitchFamily="34" charset="0"/>
+                <a:ea typeface="Calibri" pitchFamily="34" charset="-122"/>
+                <a:cs typeface="Calibri" pitchFamily="34" charset="-120"/>
+              </a:rPr>
+              <a:t>2</a:t>
+            </a:r>
+            <a:pPr algn="l" indent="0" marL="0">
+              <a:buNone/>
+            </a:pPr>
+            <a:r>
+              <a:rPr lang="en-US" sz="1600" dirty="0">
+                <a:solidFill>
+                  <a:srgbClr val="CADCFC"/>
+                </a:solidFill>
+                <a:latin typeface="Calibri" pitchFamily="34" charset="0"/>
+                <a:ea typeface="Calibri" pitchFamily="34" charset="-122"/>
+                <a:cs typeface="Calibri" pitchFamily="34" charset="-120"/>
+              </a:rPr>
+              <a:t>, Timothy Barclay</a:t>
+            </a:r>
+            <a:pPr algn="l" indent="0" marL="0">
+              <a:buNone/>
+            </a:pPr>
+            <a:r>
+              <a:rPr lang="en-US" sz="1600" baseline="30000" dirty="0">
+                <a:solidFill>
+                  <a:srgbClr val="CADCFC"/>
+                </a:solidFill>
+                <a:latin typeface="Calibri" pitchFamily="34" charset="0"/>
+                <a:ea typeface="Calibri" pitchFamily="34" charset="-122"/>
+                <a:cs typeface="Calibri" pitchFamily="34" charset="-120"/>
+              </a:rPr>
+              <a:t>2</a:t>
+            </a:r>
+            <a:pPr algn="l" indent="0" marL="0">
+              <a:buNone/>
+            </a:pPr>
+            <a:r>
+              <a:rPr lang="en-US" sz="1600" dirty="0">
+                <a:solidFill>
+                  <a:srgbClr val="CADCFC"/>
+                </a:solidFill>
+                <a:latin typeface="Calibri" pitchFamily="34" charset="0"/>
+                <a:ea typeface="Calibri" pitchFamily="34" charset="-122"/>
+                <a:cs typeface="Calibri" pitchFamily="34" charset="-120"/>
+              </a:rPr>
+              <a:t>, David Hardin</a:t>
+            </a:r>
+            <a:pPr algn="l" indent="0" marL="0">
+              <a:buNone/>
+            </a:pPr>
+            <a:r>
+              <a:rPr lang="en-US" sz="1600" baseline="30000" dirty="0">
+                <a:solidFill>
+                  <a:srgbClr val="CADCFC"/>
+                </a:solidFill>
+                <a:latin typeface="Calibri" pitchFamily="34" charset="0"/>
+                <a:ea typeface="Calibri" pitchFamily="34" charset="-122"/>
+                <a:cs typeface="Calibri" pitchFamily="34" charset="-120"/>
+              </a:rPr>
+              <a:t>2</a:t>
+            </a:r>
+            <a:pPr algn="l" indent="0" marL="0">
+              <a:buNone/>
+            </a:pPr>
+            <a:r>
+              <a:rPr lang="en-US" sz="1600" dirty="0">
+                <a:solidFill>
+                  <a:srgbClr val="CADCFC"/>
+                </a:solidFill>
+                <a:latin typeface="Calibri" pitchFamily="34" charset="0"/>
+                <a:ea typeface="Calibri" pitchFamily="34" charset="-122"/>
+                <a:cs typeface="Calibri" pitchFamily="34" charset="-120"/>
+              </a:rPr>
+              <a:t>, Jason Belt</a:t>
+            </a:r>
+            <a:pPr algn="l" indent="0" marL="0">
+              <a:buNone/>
+            </a:pPr>
+            <a:r>
+              <a:rPr lang="en-US" sz="1600" baseline="30000" dirty="0">
+                <a:solidFill>
+                  <a:srgbClr val="CADCFC"/>
+                </a:solidFill>
+                <a:latin typeface="Calibri" pitchFamily="34" charset="0"/>
+                <a:ea typeface="Calibri" pitchFamily="34" charset="-122"/>
+                <a:cs typeface="Calibri" pitchFamily="34" charset="-120"/>
+              </a:rPr>
+              <a:t>3</a:t>
+            </a:r>
+            <a:pPr algn="l" indent="0" marL="0">
+              <a:buNone/>
+            </a:pPr>
+            <a:r>
+              <a:rPr lang="en-US" sz="1600" dirty="0">
+                <a:solidFill>
+                  <a:srgbClr val="CADCFC"/>
+                </a:solidFill>
+                <a:latin typeface="Calibri" pitchFamily="34" charset="0"/>
+                <a:ea typeface="Calibri" pitchFamily="34" charset="-122"/>
+                <a:cs typeface="Calibri" pitchFamily="34" charset="-120"/>
+              </a:rPr>
+              <a:t>, John Hatcliff</a:t>
+            </a:r>
+            <a:pPr algn="l" indent="0" marL="0">
+              <a:buNone/>
+            </a:pPr>
+            <a:r>
+              <a:rPr lang="en-US" sz="1600" baseline="30000" dirty="0">
+                <a:solidFill>
+                  <a:srgbClr val="CADCFC"/>
+                </a:solidFill>
+                <a:latin typeface="Calibri" pitchFamily="34" charset="0"/>
+                <a:ea typeface="Calibri" pitchFamily="34" charset="-122"/>
+                <a:cs typeface="Calibri" pitchFamily="34" charset="-120"/>
+              </a:rPr>
+              <a:t>3</a:t>
+            </a:r>
+            <a:pPr algn="l" indent="0" marL="0">
+              <a:buNone/>
+            </a:pPr>
+            <a:r>
+              <a:rPr lang="en-US" sz="1600" dirty="0">
+                <a:solidFill>
+                  <a:srgbClr val="CADCFC"/>
+                </a:solidFill>
+                <a:latin typeface="Calibri" pitchFamily="34" charset="0"/>
+                <a:ea typeface="Calibri" pitchFamily="34" charset="-122"/>
+                <a:cs typeface="Calibri" pitchFamily="34" charset="-120"/>
+              </a:rPr>
+              <a:t>,</a:t>
+            </a:r>
+            <a:endParaRPr lang="en-US" sz="1600" dirty="0"/>
+          </a:p>
+          <a:p>
+            <a:pPr algn="l" indent="0" marL="0">
+              <a:buNone/>
+            </a:pPr>
+            <a:r>
+              <a:rPr lang="en-US" sz="1600" dirty="0">
+                <a:solidFill>
+                  <a:srgbClr val="CADCFC"/>
+                </a:solidFill>
+                <a:latin typeface="Calibri" pitchFamily="34" charset="0"/>
+                <a:ea typeface="Calibri" pitchFamily="34" charset="-122"/>
+                <a:cs typeface="Calibri" pitchFamily="34" charset="-120"/>
+              </a:rPr>
+              <a:t>Anakha Krishna</a:t>
+            </a:r>
+            <a:pPr algn="l" indent="0" marL="0">
+              <a:buNone/>
+            </a:pPr>
+            <a:r>
+              <a:rPr lang="en-US" sz="1600" baseline="30000" dirty="0">
+                <a:solidFill>
+                  <a:srgbClr val="CADCFC"/>
+                </a:solidFill>
+                <a:latin typeface="Calibri" pitchFamily="34" charset="0"/>
+                <a:ea typeface="Calibri" pitchFamily="34" charset="-122"/>
+                <a:cs typeface="Calibri" pitchFamily="34" charset="-120"/>
+              </a:rPr>
+              <a:t>1</a:t>
+            </a:r>
+            <a:pPr algn="l" indent="0" marL="0">
+              <a:buNone/>
+            </a:pPr>
+            <a:r>
+              <a:rPr lang="en-US" sz="1600" dirty="0">
+                <a:solidFill>
+                  <a:srgbClr val="CADCFC"/>
+                </a:solidFill>
+                <a:latin typeface="Calibri" pitchFamily="34" charset="0"/>
+                <a:ea typeface="Calibri" pitchFamily="34" charset="-122"/>
+                <a:cs typeface="Calibri" pitchFamily="34" charset="-120"/>
+              </a:rPr>
+              <a:t>, Ina Harris</a:t>
+            </a:r>
+            <a:pPr algn="l" indent="0" marL="0">
+              <a:buNone/>
+            </a:pPr>
+            <a:r>
+              <a:rPr lang="en-US" sz="1600" baseline="30000" dirty="0">
+                <a:solidFill>
+                  <a:srgbClr val="CADCFC"/>
+                </a:solidFill>
+                <a:latin typeface="Calibri" pitchFamily="34" charset="0"/>
+                <a:ea typeface="Calibri" pitchFamily="34" charset="-122"/>
+                <a:cs typeface="Calibri" pitchFamily="34" charset="-120"/>
+              </a:rPr>
+              <a:t>1</a:t>
+            </a:r>
+            <a:pPr algn="l" indent="0" marL="0">
+              <a:buNone/>
+            </a:pPr>
+            <a:r>
+              <a:rPr lang="en-US" sz="1600" dirty="0">
+                <a:solidFill>
+                  <a:srgbClr val="CADCFC"/>
+                </a:solidFill>
+                <a:latin typeface="Calibri" pitchFamily="34" charset="0"/>
+                <a:ea typeface="Calibri" pitchFamily="34" charset="-122"/>
+                <a:cs typeface="Calibri" pitchFamily="34" charset="-120"/>
+              </a:rPr>
+              <a:t>, Perry Alexander</a:t>
+            </a:r>
+            <a:pPr algn="l" indent="0" marL="0">
+              <a:buNone/>
+            </a:pPr>
+            <a:r>
+              <a:rPr lang="en-US" sz="1600" baseline="30000" dirty="0">
+                <a:solidFill>
+                  <a:srgbClr val="CADCFC"/>
+                </a:solidFill>
+                <a:latin typeface="Calibri" pitchFamily="34" charset="0"/>
+                <a:ea typeface="Calibri" pitchFamily="34" charset="-122"/>
+                <a:cs typeface="Calibri" pitchFamily="34" charset="-120"/>
+              </a:rPr>
+              <a:t>1</a:t>
+            </a:r>
+            <a:endParaRPr lang="en-US" sz="1600" dirty="0"/>
+          </a:p>
+        </p:txBody>
+      </p:sp>
+      <p:sp>
+        <p:nvSpPr>
+          <p:cNvPr id="5" name="Text 3"/>
+          <p:cNvSpPr/>
+          <p:nvPr/>
+        </p:nvSpPr>
+        <p:spPr>
+          <a:xfrm>
+            <a:off x="822960" y="5669280"/>
+            <a:ext cx="10515600" cy="320040"/>
+          </a:xfrm>
+          <a:prstGeom prst="rect">
+            <a:avLst/>
+          </a:prstGeom>
+          <a:noFill/>
+          <a:ln/>
+        </p:spPr>
+        <p:txBody>
           <a:bodyPr wrap="square" lIns="0" tIns="0" rIns="0" bIns="0" rtlCol="0" anchor="ctr"/>
           <a:lstStyle/>
           <a:p>
@@ -2707,7 +3116,7 @@
               <a:buNone/>
             </a:pPr>
             <a:r>
-              <a:rPr lang="en-US" sz="1400" dirty="0">
+              <a:rPr lang="en-US" sz="1300" baseline="30000" dirty="0">
                 <a:solidFill>
                   <a:srgbClr val="CADCFC"/>
                 </a:solidFill>
@@ -2715,9 +3124,157 @@
                 <a:ea typeface="Calibri" pitchFamily="34" charset="-122"/>
                 <a:cs typeface="Calibri" pitchFamily="34" charset="-120"/>
               </a:rPr>
-              <a:t>Presenter name  ·  affiliation  ·  date</a:t>
-            </a:r>
-            <a:endParaRPr lang="en-US" sz="1400" dirty="0"/>
+              <a:t>1</a:t>
+            </a:r>
+            <a:pPr algn="l" indent="0" marL="0">
+              <a:buNone/>
+            </a:pPr>
+            <a:r>
+              <a:rPr lang="en-US" sz="1300" dirty="0">
+                <a:solidFill>
+                  <a:srgbClr val="CADCFC"/>
+                </a:solidFill>
+                <a:latin typeface="Calibri" pitchFamily="34" charset="0"/>
+                <a:ea typeface="Calibri" pitchFamily="34" charset="-122"/>
+                <a:cs typeface="Calibri" pitchFamily="34" charset="-120"/>
+              </a:rPr>
+              <a:t>University of Kansas</a:t>
+            </a:r>
+            <a:pPr algn="l" indent="0" marL="0">
+              <a:buNone/>
+            </a:pPr>
+            <a:r>
+              <a:rPr lang="en-US" sz="1300" baseline="30000" dirty="0">
+                <a:solidFill>
+                  <a:srgbClr val="CADCFC"/>
+                </a:solidFill>
+                <a:latin typeface="Calibri" pitchFamily="34" charset="0"/>
+                <a:ea typeface="Calibri" pitchFamily="34" charset="-122"/>
+                <a:cs typeface="Calibri" pitchFamily="34" charset="-120"/>
+              </a:rPr>
+              <a:t>    2</a:t>
+            </a:r>
+            <a:pPr algn="l" indent="0" marL="0">
+              <a:buNone/>
+            </a:pPr>
+            <a:r>
+              <a:rPr lang="en-US" sz="1300" dirty="0">
+                <a:solidFill>
+                  <a:srgbClr val="CADCFC"/>
+                </a:solidFill>
+                <a:latin typeface="Calibri" pitchFamily="34" charset="0"/>
+                <a:ea typeface="Calibri" pitchFamily="34" charset="-122"/>
+                <a:cs typeface="Calibri" pitchFamily="34" charset="-120"/>
+              </a:rPr>
+              <a:t>Collins Aerospace</a:t>
+            </a:r>
+            <a:pPr algn="l" indent="0" marL="0">
+              <a:buNone/>
+            </a:pPr>
+            <a:r>
+              <a:rPr lang="en-US" sz="1300" baseline="30000" dirty="0">
+                <a:solidFill>
+                  <a:srgbClr val="CADCFC"/>
+                </a:solidFill>
+                <a:latin typeface="Calibri" pitchFamily="34" charset="0"/>
+                <a:ea typeface="Calibri" pitchFamily="34" charset="-122"/>
+                <a:cs typeface="Calibri" pitchFamily="34" charset="-120"/>
+              </a:rPr>
+              <a:t>    3</a:t>
+            </a:r>
+            <a:pPr algn="l" indent="0" marL="0">
+              <a:buNone/>
+            </a:pPr>
+            <a:r>
+              <a:rPr lang="en-US" sz="1300" dirty="0">
+                <a:solidFill>
+                  <a:srgbClr val="CADCFC"/>
+                </a:solidFill>
+                <a:latin typeface="Calibri" pitchFamily="34" charset="0"/>
+                <a:ea typeface="Calibri" pitchFamily="34" charset="-122"/>
+                <a:cs typeface="Calibri" pitchFamily="34" charset="-120"/>
+              </a:rPr>
+              <a:t>Kansas State University</a:t>
+            </a:r>
+            <a:endParaRPr lang="en-US" sz="1300" dirty="0"/>
+          </a:p>
+        </p:txBody>
+      </p:sp>
+      <p:sp>
+        <p:nvSpPr>
+          <p:cNvPr id="6" name="Text 4"/>
+          <p:cNvSpPr/>
+          <p:nvPr/>
+        </p:nvSpPr>
+        <p:spPr>
+          <a:xfrm>
+            <a:off x="822960" y="6035040"/>
+            <a:ext cx="4572000" cy="320040"/>
+          </a:xfrm>
+          <a:prstGeom prst="rect">
+            <a:avLst/>
+          </a:prstGeom>
+          <a:noFill/>
+          <a:ln/>
+        </p:spPr>
+        <p:txBody>
+          <a:bodyPr wrap="square" lIns="0" tIns="0" rIns="0" bIns="0" rtlCol="0" anchor="ctr"/>
+          <a:lstStyle/>
+          <a:p>
+            <a:pPr algn="l" indent="0" marL="0">
+              <a:buNone/>
+            </a:pPr>
+            <a:r>
+              <a:rPr lang="en-US" sz="1300" dirty="0">
+                <a:solidFill>
+                  <a:srgbClr val="CADCFC"/>
+                </a:solidFill>
+                <a:latin typeface="Calibri" pitchFamily="34" charset="0"/>
+                <a:ea typeface="Calibri" pitchFamily="34" charset="-122"/>
+                <a:cs typeface="Calibri" pitchFamily="34" charset="-120"/>
+              </a:rPr>
+              <a:t>September 2026</a:t>
+            </a:r>
+            <a:endParaRPr lang="en-US" sz="1300" dirty="0"/>
+          </a:p>
+        </p:txBody>
+      </p:sp>
+      <p:sp>
+        <p:nvSpPr>
+          <p:cNvPr id="7" name="Text 5"/>
+          <p:cNvSpPr/>
+          <p:nvPr/>
+        </p:nvSpPr>
+        <p:spPr>
+          <a:xfrm>
+            <a:off x="5394960" y="6035040"/>
+            <a:ext cx="5943600" cy="320040"/>
+          </a:xfrm>
+          <a:prstGeom prst="rect">
+            <a:avLst/>
+          </a:prstGeom>
+          <a:noFill/>
+          <a:ln/>
+        </p:spPr>
+        <p:txBody>
+          <a:bodyPr wrap="square" lIns="0" tIns="0" rIns="0" bIns="0" rtlCol="0" anchor="ctr"/>
+          <a:lstStyle/>
+          <a:p>
+            <a:pPr algn="r" indent="0" marL="0">
+              <a:buNone/>
+            </a:pPr>
+            <a:r>
+              <a:rPr lang="en-US" sz="1200" dirty="0">
+                <a:solidFill>
+                  <a:srgbClr val="CADCFC"/>
+                </a:solidFill>
+                <a:latin typeface="Calibri" pitchFamily="34" charset="0"/>
+                <a:ea typeface="Calibri" pitchFamily="34" charset="-122"/>
+                <a:cs typeface="Calibri" pitchFamily="34" charset="-120"/>
+              </a:rPr>
+              <a:t>Supported by the DARPA PROVERS effort (contract FA8750-24-9-1000)</a:t>
+            </a:r>
+            <a:endParaRPr lang="en-US" sz="1200" dirty="0"/>
           </a:p>
         </p:txBody>
       </p:sp>

--- a/docs/video_slides_draft.pptx
+++ b/docs/video_slides_draft.pptx
@@ -1505,10 +1505,8 @@
           <a:p>
             <a:r>
               <a:rPr lang="en-US" dirty="0"/>
-              <a:t>Promise the audience every demo scene echoes the banner.
-The administrator's bless survives 'every': authority enters the system only AS signed evidence (the blessed baseline), never by assertion - scene 6's laundering beat proves exactly that.
-Subline payoffs: developer claims -&gt; scenes 5/7; untrusted tools -&gt; scene 7; LLM outputs -&gt; capstone slides A/B; cached verdicts -&gt; scene 11.
-Visual TODO: three-stage widening-scope progression (boot-time -&gt; layered runtime -&gt; lifecycle loop) to replace/join the bullets.</a:t>
+              <a:t>~15 seconds on first appearance; afterwards it rides on transition slides for free.
+Design decision: one master/layout holds the strip text so a section rename is a single edit. Header titles are provisional.</a:t>
             </a:r>
             <a:endParaRPr lang="en-US" dirty="0"/>
           </a:p>
@@ -1685,8 +1683,10 @@
           <a:p>
             <a:r>
               <a:rPr lang="en-US" dirty="0"/>
-              <a:t>~15 seconds on first appearance; afterwards it rides on transition slides for free.
-Design decision: one master/layout holds the strip text so a section rename is a single edit. Header titles are provisional.</a:t>
+              <a:t>Promise the audience every demo scene echoes the banner.
+The administrator's bless survives 'every': authority enters the system only AS signed evidence (the blessed baseline), never by assertion - scene 6's laundering beat proves exactly that.
+Subline payoffs: developer claims -&gt; scenes 5/7; untrusted tools -&gt; scene 7; LLM outputs -&gt; capstone slides A/B; cached verdicts -&gt; scene 11.
+Visual TODO: three-stage widening-scope progression (boot-time -&gt; layered runtime -&gt; lifecycle loop) to replace/join the bullets.</a:t>
             </a:r>
             <a:endParaRPr lang="en-US" dirty="0"/>
           </a:p>
@@ -12704,7 +12704,7 @@
                 <a:ea typeface="Cambria" pitchFamily="34" charset="-122"/>
                 <a:cs typeface="Cambria" pitchFamily="34" charset="-120"/>
               </a:rPr>
-              <a:t>What is lifecycle attestation?</a:t>
+              <a:t>Roadmap</a:t>
             </a:r>
             <a:endParaRPr lang="en-US" sz="3600" dirty="0"/>
           </a:p>
@@ -12712,418 +12712,18 @@
       </p:sp>
       <p:sp>
         <p:nvSpPr>
-          <p:cNvPr id="3" name="Text 1"/>
-          <p:cNvSpPr/>
-          <p:nvPr/>
-        </p:nvSpPr>
-        <p:spPr>
-          <a:xfrm>
-            <a:off x="640080" y="1325880"/>
-            <a:ext cx="10972800" cy="3566160"/>
-          </a:xfrm>
-          <a:prstGeom prst="rect">
-            <a:avLst/>
-          </a:prstGeom>
-          <a:noFill/>
-          <a:ln/>
-        </p:spPr>
-        <p:txBody>
-          <a:bodyPr wrap="square" lIns="0" tIns="0" rIns="0" bIns="0" rtlCol="0" anchor="t"/>
-          <a:lstStyle/>
-          <a:p>
-            <a:pPr algn="l" marL="342900" indent="-342900">
-              <a:buSzPct val="100000"/>
-              <a:buChar char="•"/>
-            </a:pPr>
-            <a:r>
-              <a:rPr lang="en-US" sz="1700" b="1" dirty="0">
-                <a:solidFill>
-                  <a:srgbClr val="212121"/>
-                </a:solidFill>
-                <a:latin typeface="Calibri" pitchFamily="34" charset="0"/>
-                <a:ea typeface="Calibri" pitchFamily="34" charset="-122"/>
-                <a:cs typeface="Calibri" pitchFamily="34" charset="-120"/>
-              </a:rPr>
-              <a:t>Traditional remote attestation: </a:t>
-            </a:r>
-            <a:pPr algn="l" indent="0" marL="0">
-              <a:buNone/>
-            </a:pPr>
-            <a:r>
-              <a:rPr lang="en-US" sz="1700" b="1" dirty="0">
-                <a:solidFill>
-                  <a:srgbClr val="212121"/>
-                </a:solidFill>
-                <a:latin typeface="Calibri" pitchFamily="34" charset="0"/>
-                <a:ea typeface="Calibri" pitchFamily="34" charset="-122"/>
-                <a:cs typeface="Calibri" pitchFamily="34" charset="-120"/>
-              </a:rPr>
-              <a:t>did system components boot into a predictable state?</a:t>
-            </a:r>
-            <a:pPr algn="l" indent="0" marL="0">
-              <a:spcAft>
-                <a:spcPts val="1000"/>
-              </a:spcAft>
-              <a:buNone/>
-            </a:pPr>
-            <a:r>
-              <a:rPr lang="en-US" sz="1700" dirty="0">
-                <a:solidFill>
-                  <a:srgbClr val="212121"/>
-                </a:solidFill>
-                <a:latin typeface="Calibri" pitchFamily="34" charset="0"/>
-                <a:ea typeface="Calibri" pitchFamily="34" charset="-122"/>
-                <a:cs typeface="Calibri" pitchFamily="34" charset="-120"/>
-              </a:rPr>
-              <a:t> (boot-time, static runtime)</a:t>
-            </a:r>
-            <a:endParaRPr lang="en-US" sz="1700" dirty="0"/>
-          </a:p>
-          <a:p>
-            <a:pPr algn="l" marL="342900" indent="-342900">
-              <a:buSzPct val="100000"/>
-              <a:buChar char="•"/>
-            </a:pPr>
-            <a:r>
-              <a:rPr lang="en-US" sz="1700" b="1" dirty="0">
-                <a:solidFill>
-                  <a:srgbClr val="212121"/>
-                </a:solidFill>
-                <a:latin typeface="Calibri" pitchFamily="34" charset="0"/>
-                <a:ea typeface="Calibri" pitchFamily="34" charset="-122"/>
-                <a:cs typeface="Calibri" pitchFamily="34" charset="-120"/>
-              </a:rPr>
-              <a:t>Layered, runtime attestation: </a:t>
-            </a:r>
-            <a:pPr algn="l" indent="0" marL="0">
-              <a:buNone/>
-            </a:pPr>
-            <a:r>
-              <a:rPr lang="en-US" sz="1700" dirty="0">
-                <a:solidFill>
-                  <a:srgbClr val="212121"/>
-                </a:solidFill>
-                <a:latin typeface="Calibri" pitchFamily="34" charset="0"/>
-                <a:ea typeface="Calibri" pitchFamily="34" charset="-122"/>
-                <a:cs typeface="Calibri" pitchFamily="34" charset="-120"/>
-              </a:rPr>
-              <a:t>extend boot-time trust via dynamic measurement of system components </a:t>
-            </a:r>
-            <a:pPr algn="l" indent="0" marL="0">
-              <a:spcAft>
-                <a:spcPts val="1000"/>
-              </a:spcAft>
-              <a:buNone/>
-            </a:pPr>
-            <a:r>
-              <a:rPr lang="en-US" sz="1700" b="1" dirty="0">
-                <a:solidFill>
-                  <a:srgbClr val="212121"/>
-                </a:solidFill>
-                <a:latin typeface="Calibri" pitchFamily="34" charset="0"/>
-                <a:ea typeface="Calibri" pitchFamily="34" charset="-122"/>
-                <a:cs typeface="Calibri" pitchFamily="34" charset="-120"/>
-              </a:rPr>
-              <a:t>and their context/dependencies</a:t>
-            </a:r>
-            <a:endParaRPr lang="en-US" sz="1700" dirty="0"/>
-          </a:p>
-          <a:p>
-            <a:pPr algn="l" marL="342900" indent="-342900">
-              <a:buSzPct val="100000"/>
-              <a:buChar char="•"/>
-            </a:pPr>
-            <a:r>
-              <a:rPr lang="en-US" sz="1700" b="1" dirty="0">
-                <a:solidFill>
-                  <a:srgbClr val="212121"/>
-                </a:solidFill>
-                <a:latin typeface="Calibri" pitchFamily="34" charset="0"/>
-                <a:ea typeface="Calibri" pitchFamily="34" charset="-122"/>
-                <a:cs typeface="Calibri" pitchFamily="34" charset="-120"/>
-              </a:rPr>
-              <a:t>Lifecycle attestation: </a:t>
-            </a:r>
-            <a:pPr algn="l" indent="0" marL="0">
-              <a:buNone/>
-            </a:pPr>
-            <a:r>
-              <a:rPr lang="en-US" sz="1700" dirty="0">
-                <a:solidFill>
-                  <a:srgbClr val="212121"/>
-                </a:solidFill>
-                <a:latin typeface="Calibri" pitchFamily="34" charset="0"/>
-                <a:ea typeface="Calibri" pitchFamily="34" charset="-122"/>
-                <a:cs typeface="Calibri" pitchFamily="34" charset="-120"/>
-              </a:rPr>
-              <a:t>extends this notion to </a:t>
-            </a:r>
-            <a:pPr algn="l" indent="0" marL="0">
-              <a:buNone/>
-            </a:pPr>
-            <a:r>
-              <a:rPr lang="en-US" sz="1700" b="1" dirty="0">
-                <a:solidFill>
-                  <a:srgbClr val="212121"/>
-                </a:solidFill>
-                <a:latin typeface="Calibri" pitchFamily="34" charset="0"/>
-                <a:ea typeface="Calibri" pitchFamily="34" charset="-122"/>
-                <a:cs typeface="Calibri" pitchFamily="34" charset="-120"/>
-              </a:rPr>
-              <a:t>artifacts of the development lifecycle</a:t>
-            </a:r>
-            <a:pPr algn="l" indent="0" marL="0">
-              <a:spcAft>
-                <a:spcPts val="1000"/>
-              </a:spcAft>
-              <a:buNone/>
-            </a:pPr>
-            <a:r>
-              <a:rPr lang="en-US" sz="1700" dirty="0">
-                <a:solidFill>
-                  <a:srgbClr val="212121"/>
-                </a:solidFill>
-                <a:latin typeface="Calibri" pitchFamily="34" charset="0"/>
-                <a:ea typeface="Calibri" pitchFamily="34" charset="-122"/>
-                <a:cs typeface="Calibri" pitchFamily="34" charset="-120"/>
-              </a:rPr>
-              <a:t>: models, contracts, implementations, proofs, toolchains</a:t>
-            </a:r>
-            <a:endParaRPr lang="en-US" sz="1700" dirty="0"/>
-          </a:p>
-          <a:p>
-            <a:pPr algn="l" lvl="1" marL="685800" indent="-342900">
-              <a:spcAft>
-                <a:spcPts val="1000"/>
-              </a:spcAft>
-              <a:buSzPct val="100000"/>
-              <a:buChar char="–"/>
-            </a:pPr>
-            <a:r>
-              <a:rPr lang="en-US" sz="1700" dirty="0">
-                <a:solidFill>
-                  <a:srgbClr val="212121"/>
-                </a:solidFill>
-                <a:latin typeface="Calibri" pitchFamily="34" charset="0"/>
-                <a:ea typeface="Calibri" pitchFamily="34" charset="-122"/>
-                <a:cs typeface="Calibri" pitchFamily="34" charset="-120"/>
-              </a:rPr>
-              <a:t>…including the attestation infrastructure and evidence itself</a:t>
-            </a:r>
-            <a:endParaRPr lang="en-US" sz="1700" dirty="0"/>
-          </a:p>
-          <a:p>
-            <a:pPr algn="l" lvl="1" marL="685800" indent="-342900">
-              <a:buSzPct val="100000"/>
-              <a:buChar char="–"/>
-            </a:pPr>
-            <a:r>
-              <a:rPr lang="en-US" sz="1700" dirty="0">
-                <a:solidFill>
-                  <a:srgbClr val="212121"/>
-                </a:solidFill>
-                <a:latin typeface="Calibri" pitchFamily="34" charset="0"/>
-                <a:ea typeface="Calibri" pitchFamily="34" charset="-122"/>
-                <a:cs typeface="Calibri" pitchFamily="34" charset="-120"/>
-              </a:rPr>
-              <a:t>…and to lifecycle </a:t>
-            </a:r>
-            <a:pPr algn="l" indent="0" marL="0">
-              <a:buNone/>
-            </a:pPr>
-            <a:r>
-              <a:rPr lang="en-US" sz="1700" b="1" dirty="0">
-                <a:solidFill>
-                  <a:srgbClr val="212121"/>
-                </a:solidFill>
-                <a:latin typeface="Calibri" pitchFamily="34" charset="0"/>
-                <a:ea typeface="Calibri" pitchFamily="34" charset="-122"/>
-                <a:cs typeface="Calibri" pitchFamily="34" charset="-120"/>
-              </a:rPr>
-              <a:t>events</a:t>
-            </a:r>
-            <a:pPr algn="l" indent="0" marL="0">
-              <a:spcAft>
-                <a:spcPts val="1000"/>
-              </a:spcAft>
-              <a:buNone/>
-            </a:pPr>
-            <a:r>
-              <a:rPr lang="en-US" sz="1700" dirty="0">
-                <a:solidFill>
-                  <a:srgbClr val="212121"/>
-                </a:solidFill>
-                <a:latin typeface="Calibri" pitchFamily="34" charset="0"/>
-                <a:ea typeface="Calibri" pitchFamily="34" charset="-122"/>
-                <a:cs typeface="Calibri" pitchFamily="34" charset="-120"/>
-              </a:rPr>
-              <a:t>:</a:t>
-            </a:r>
-            <a:endParaRPr lang="en-US" sz="1700" dirty="0"/>
-          </a:p>
-          <a:p>
-            <a:pPr algn="l" lvl="2" marL="1028700" indent="-342900">
-              <a:spcAft>
-                <a:spcPts val="200"/>
-              </a:spcAft>
-              <a:buSzPct val="100000"/>
-              <a:buChar char="▪"/>
-            </a:pPr>
-            <a:r>
-              <a:rPr lang="en-US" sz="1700" dirty="0">
-                <a:solidFill>
-                  <a:srgbClr val="212121"/>
-                </a:solidFill>
-                <a:latin typeface="Calibri" pitchFamily="34" charset="0"/>
-                <a:ea typeface="Calibri" pitchFamily="34" charset="-122"/>
-                <a:cs typeface="Calibri" pitchFamily="34" charset="-120"/>
-              </a:rPr>
-              <a:t>specification drift (sanctioned or not)</a:t>
-            </a:r>
-            <a:endParaRPr lang="en-US" sz="1700" dirty="0"/>
-          </a:p>
-          <a:p>
-            <a:pPr algn="l" lvl="2" marL="1028700" indent="-342900">
-              <a:spcAft>
-                <a:spcPts val="200"/>
-              </a:spcAft>
-              <a:buSzPct val="100000"/>
-              <a:buChar char="▪"/>
-            </a:pPr>
-            <a:r>
-              <a:rPr lang="en-US" sz="1700" dirty="0">
-                <a:solidFill>
-                  <a:srgbClr val="212121"/>
-                </a:solidFill>
-                <a:latin typeface="Calibri" pitchFamily="34" charset="0"/>
-                <a:ea typeface="Calibri" pitchFamily="34" charset="-122"/>
-                <a:cs typeface="Calibri" pitchFamily="34" charset="-120"/>
-              </a:rPr>
-              <a:t>artifact tampering</a:t>
-            </a:r>
-            <a:endParaRPr lang="en-US" sz="1700" dirty="0"/>
-          </a:p>
-          <a:p>
-            <a:pPr algn="l" lvl="2" marL="1028700" indent="-342900">
-              <a:spcAft>
-                <a:spcPts val="200"/>
-              </a:spcAft>
-              <a:buSzPct val="100000"/>
-              <a:buChar char="▪"/>
-            </a:pPr>
-            <a:r>
-              <a:rPr lang="en-US" sz="1700" dirty="0">
-                <a:solidFill>
-                  <a:srgbClr val="212121"/>
-                </a:solidFill>
-                <a:latin typeface="Calibri" pitchFamily="34" charset="0"/>
-                <a:ea typeface="Calibri" pitchFamily="34" charset="-122"/>
-                <a:cs typeface="Calibri" pitchFamily="34" charset="-120"/>
-              </a:rPr>
-              <a:t>artifact synthesis</a:t>
-            </a:r>
-            <a:endParaRPr lang="en-US" sz="1700" dirty="0"/>
-          </a:p>
-          <a:p>
-            <a:pPr algn="l" lvl="2" marL="1028700" indent="-342900">
-              <a:spcAft>
-                <a:spcPts val="200"/>
-              </a:spcAft>
-              <a:buSzPct val="100000"/>
-              <a:buChar char="▪"/>
-            </a:pPr>
-            <a:r>
-              <a:rPr lang="en-US" sz="1700" dirty="0">
-                <a:solidFill>
-                  <a:srgbClr val="212121"/>
-                </a:solidFill>
-                <a:latin typeface="Calibri" pitchFamily="34" charset="0"/>
-                <a:ea typeface="Calibri" pitchFamily="34" charset="-122"/>
-                <a:cs typeface="Calibri" pitchFamily="34" charset="-120"/>
-              </a:rPr>
-              <a:t>artifact repair</a:t>
-            </a:r>
-            <a:endParaRPr lang="en-US" sz="1700" dirty="0"/>
-          </a:p>
-          <a:p>
-            <a:pPr algn="l" marL="342900" indent="-342900">
-              <a:buSzPct val="100000"/>
-              <a:buChar char="•"/>
-            </a:pPr>
-            <a:r>
-              <a:rPr lang="en-US" sz="1700" b="1" dirty="0">
-                <a:solidFill>
-                  <a:srgbClr val="212121"/>
-                </a:solidFill>
-                <a:latin typeface="Calibri" pitchFamily="34" charset="0"/>
-                <a:ea typeface="Calibri" pitchFamily="34" charset="-122"/>
-                <a:cs typeface="Calibri" pitchFamily="34" charset="-120"/>
-              </a:rPr>
-              <a:t>Motivation: </a:t>
-            </a:r>
-            <a:pPr algn="l" indent="0" marL="0">
-              <a:buNone/>
-            </a:pPr>
-            <a:r>
-              <a:rPr lang="en-US" sz="1700" dirty="0">
-                <a:solidFill>
-                  <a:srgbClr val="212121"/>
-                </a:solidFill>
-                <a:latin typeface="Calibri" pitchFamily="34" charset="0"/>
-                <a:ea typeface="Calibri" pitchFamily="34" charset="-122"/>
-                <a:cs typeface="Calibri" pitchFamily="34" charset="-120"/>
-              </a:rPr>
-              <a:t>the </a:t>
-            </a:r>
-            <a:pPr algn="l" indent="0" marL="0">
-              <a:buNone/>
-            </a:pPr>
-            <a:r>
-              <a:rPr lang="en-US" sz="1700" b="1" dirty="0">
-                <a:solidFill>
-                  <a:srgbClr val="212121"/>
-                </a:solidFill>
-                <a:latin typeface="Calibri" pitchFamily="34" charset="0"/>
-                <a:ea typeface="Calibri" pitchFamily="34" charset="-122"/>
-                <a:cs typeface="Calibri" pitchFamily="34" charset="-120"/>
-              </a:rPr>
-              <a:t>proliferation of AI-generated software artifacts</a:t>
-            </a:r>
-            <a:pPr algn="l" indent="0" marL="0">
-              <a:spcAft>
-                <a:spcPts val="1000"/>
-              </a:spcAft>
-              <a:buNone/>
-            </a:pPr>
-            <a:r>
-              <a:rPr lang="en-US" sz="1700" dirty="0">
-                <a:solidFill>
-                  <a:srgbClr val="212121"/>
-                </a:solidFill>
-                <a:latin typeface="Calibri" pitchFamily="34" charset="0"/>
-                <a:ea typeface="Calibri" pitchFamily="34" charset="-122"/>
-                <a:cs typeface="Calibri" pitchFamily="34" charset="-120"/>
-              </a:rPr>
-              <a:t>, amid the need for rapid re-certification of systems</a:t>
-            </a:r>
-            <a:endParaRPr lang="en-US" sz="1700" dirty="0"/>
-          </a:p>
-        </p:txBody>
-      </p:sp>
-      <p:sp>
-        <p:nvSpPr>
-          <p:cNvPr id="4" name="Shape 2"/>
-          <p:cNvSpPr/>
-          <p:nvPr/>
-        </p:nvSpPr>
-        <p:spPr>
-          <a:xfrm>
-            <a:off x="640080" y="5074920"/>
-            <a:ext cx="10881360" cy="1234440"/>
+          <p:cNvPr id="3" name="Shape 1"/>
+          <p:cNvSpPr/>
+          <p:nvPr/>
+        </p:nvSpPr>
+        <p:spPr>
+          <a:xfrm>
+            <a:off x="640080" y="2834640"/>
+            <a:ext cx="2044598" cy="777240"/>
           </a:xfrm>
           <a:prstGeom prst="roundRect">
             <a:avLst>
-              <a:gd name="adj" fmla="val 5926"/>
+              <a:gd name="adj" fmla="val 8235"/>
             </a:avLst>
           </a:prstGeom>
           <a:solidFill>
@@ -13134,14 +12734,14 @@
       </p:sp>
       <p:sp>
         <p:nvSpPr>
-          <p:cNvPr id="5" name="Text 3"/>
-          <p:cNvSpPr/>
-          <p:nvPr/>
-        </p:nvSpPr>
-        <p:spPr>
-          <a:xfrm>
-            <a:off x="914400" y="5074920"/>
-            <a:ext cx="10332720" cy="1234440"/>
+          <p:cNvPr id="4" name="Text 2"/>
+          <p:cNvSpPr/>
+          <p:nvPr/>
+        </p:nvSpPr>
+        <p:spPr>
+          <a:xfrm>
+            <a:off x="640080" y="2834640"/>
+            <a:ext cx="2044598" cy="777240"/>
           </a:xfrm>
           <a:prstGeom prst="rect">
             <a:avLst/>
@@ -13150,44 +12750,441 @@
           <a:ln/>
         </p:spPr>
         <p:txBody>
+          <a:bodyPr wrap="square" lIns="254" tIns="254" rIns="254" bIns="254" rtlCol="0" anchor="ctr"/>
+          <a:lstStyle/>
+          <a:p>
+            <a:pPr algn="ctr" indent="0" marL="0">
+              <a:buNone/>
+            </a:pPr>
+            <a:r>
+              <a:rPr lang="en-US" sz="1350" b="1" dirty="0">
+                <a:solidFill>
+                  <a:srgbClr val="FFFFFF"/>
+                </a:solidFill>
+                <a:latin typeface="Calibri" pitchFamily="34" charset="0"/>
+                <a:ea typeface="Calibri" pitchFamily="34" charset="-122"/>
+                <a:cs typeface="Calibri" pitchFamily="34" charset="-120"/>
+              </a:rPr>
+              <a:t>Preliminaries</a:t>
+            </a:r>
+            <a:endParaRPr lang="en-US" sz="1350" dirty="0"/>
+          </a:p>
+        </p:txBody>
+      </p:sp>
+      <p:sp>
+        <p:nvSpPr>
+          <p:cNvPr id="5" name="Text 3"/>
+          <p:cNvSpPr/>
+          <p:nvPr/>
+        </p:nvSpPr>
+        <p:spPr>
+          <a:xfrm>
+            <a:off x="2629814" y="2834640"/>
+            <a:ext cx="274320" cy="777240"/>
+          </a:xfrm>
+          <a:prstGeom prst="rect">
+            <a:avLst/>
+          </a:prstGeom>
+          <a:noFill/>
+          <a:ln/>
+        </p:spPr>
+        <p:txBody>
           <a:bodyPr wrap="square" lIns="0" tIns="0" rIns="0" bIns="0" rtlCol="0" anchor="ctr"/>
           <a:lstStyle/>
           <a:p>
             <a:pPr algn="ctr" indent="0" marL="0">
-              <a:spcAft>
-                <a:spcPts val="400"/>
-              </a:spcAft>
-              <a:buNone/>
-            </a:pPr>
-            <a:r>
-              <a:rPr lang="en-US" sz="2000" b="1" dirty="0">
-                <a:solidFill>
-                  <a:srgbClr val="FFFFFF"/>
-                </a:solidFill>
-                <a:latin typeface="Calibri" pitchFamily="34" charset="0"/>
-                <a:ea typeface="Calibri" pitchFamily="34" charset="-122"/>
-                <a:cs typeface="Calibri" pitchFamily="34" charset="-120"/>
-              </a:rPr>
-              <a:t>Every trust decision is grounded in cryptographic attestation evidence.</a:t>
-            </a:r>
-            <a:endParaRPr lang="en-US" sz="2000" dirty="0"/>
-          </a:p>
+              <a:buNone/>
+            </a:pPr>
+            <a:r>
+              <a:rPr lang="en-US" sz="1400" dirty="0">
+                <a:solidFill>
+                  <a:srgbClr val="5A6478"/>
+                </a:solidFill>
+                <a:latin typeface="Calibri" pitchFamily="34" charset="0"/>
+                <a:ea typeface="Calibri" pitchFamily="34" charset="-122"/>
+                <a:cs typeface="Calibri" pitchFamily="34" charset="-120"/>
+              </a:rPr>
+              <a:t>→</a:t>
+            </a:r>
+            <a:endParaRPr lang="en-US" sz="1400" dirty="0"/>
+          </a:p>
+        </p:txBody>
+      </p:sp>
+      <p:sp>
+        <p:nvSpPr>
+          <p:cNvPr id="6" name="Shape 4"/>
+          <p:cNvSpPr/>
+          <p:nvPr/>
+        </p:nvSpPr>
+        <p:spPr>
+          <a:xfrm>
+            <a:off x="2849270" y="2834640"/>
+            <a:ext cx="2044598" cy="777240"/>
+          </a:xfrm>
+          <a:prstGeom prst="roundRect">
+            <a:avLst>
+              <a:gd name="adj" fmla="val 8235"/>
+            </a:avLst>
+          </a:prstGeom>
+          <a:solidFill>
+            <a:srgbClr val="CADCFC"/>
+          </a:solidFill>
+          <a:ln/>
+        </p:spPr>
+      </p:sp>
+      <p:sp>
+        <p:nvSpPr>
+          <p:cNvPr id="7" name="Text 5"/>
+          <p:cNvSpPr/>
+          <p:nvPr/>
+        </p:nvSpPr>
+        <p:spPr>
+          <a:xfrm>
+            <a:off x="2849270" y="2834640"/>
+            <a:ext cx="2044598" cy="777240"/>
+          </a:xfrm>
+          <a:prstGeom prst="rect">
+            <a:avLst/>
+          </a:prstGeom>
+          <a:noFill/>
+          <a:ln/>
+        </p:spPr>
+        <p:txBody>
+          <a:bodyPr wrap="square" lIns="254" tIns="254" rIns="254" bIns="254" rtlCol="0" anchor="ctr"/>
+          <a:lstStyle/>
           <a:p>
             <a:pPr algn="ctr" indent="0" marL="0">
               <a:buNone/>
             </a:pPr>
             <a:r>
-              <a:rPr lang="en-US" sz="1400" i="1" dirty="0">
-                <a:solidFill>
-                  <a:srgbClr val="CADCFC"/>
-                </a:solidFill>
-                <a:latin typeface="Calibri" pitchFamily="34" charset="0"/>
-                <a:ea typeface="Calibri" pitchFamily="34" charset="-122"/>
-                <a:cs typeface="Calibri" pitchFamily="34" charset="-120"/>
-              </a:rPr>
-              <a:t>trust is NOT anchored in the following:  developer claims, untrusted tools, LLM outputs, cached verdicts</a:t>
-            </a:r>
-            <a:endParaRPr lang="en-US" sz="2000" dirty="0"/>
+              <a:rPr lang="en-US" sz="1350" dirty="0">
+                <a:solidFill>
+                  <a:srgbClr val="1E2761"/>
+                </a:solidFill>
+                <a:latin typeface="Calibri" pitchFamily="34" charset="0"/>
+                <a:ea typeface="Calibri" pitchFamily="34" charset="-122"/>
+                <a:cs typeface="Calibri" pitchFamily="34" charset="-120"/>
+              </a:rPr>
+              <a:t>Demo:</a:t>
+            </a:r>
+            <a:endParaRPr lang="en-US" sz="1350" dirty="0"/>
+          </a:p>
+          <a:p>
+            <a:pPr algn="ctr" indent="0" marL="0">
+              <a:buNone/>
+            </a:pPr>
+            <a:r>
+              <a:rPr lang="en-US" sz="1350" dirty="0">
+                <a:solidFill>
+                  <a:srgbClr val="1E2761"/>
+                </a:solidFill>
+                <a:latin typeface="Calibri" pitchFamily="34" charset="0"/>
+                <a:ea typeface="Calibri" pitchFamily="34" charset="-122"/>
+                <a:cs typeface="Calibri" pitchFamily="34" charset="-120"/>
+              </a:rPr>
+              <a:t>Isolette (SysMLv2 → Rust)</a:t>
+            </a:r>
+            <a:endParaRPr lang="en-US" sz="1350" dirty="0"/>
+          </a:p>
+        </p:txBody>
+      </p:sp>
+      <p:sp>
+        <p:nvSpPr>
+          <p:cNvPr id="8" name="Text 6"/>
+          <p:cNvSpPr/>
+          <p:nvPr/>
+        </p:nvSpPr>
+        <p:spPr>
+          <a:xfrm>
+            <a:off x="4839005" y="2834640"/>
+            <a:ext cx="274320" cy="777240"/>
+          </a:xfrm>
+          <a:prstGeom prst="rect">
+            <a:avLst/>
+          </a:prstGeom>
+          <a:noFill/>
+          <a:ln/>
+        </p:spPr>
+        <p:txBody>
+          <a:bodyPr wrap="square" lIns="0" tIns="0" rIns="0" bIns="0" rtlCol="0" anchor="ctr"/>
+          <a:lstStyle/>
+          <a:p>
+            <a:pPr algn="ctr" indent="0" marL="0">
+              <a:buNone/>
+            </a:pPr>
+            <a:r>
+              <a:rPr lang="en-US" sz="1400" dirty="0">
+                <a:solidFill>
+                  <a:srgbClr val="5A6478"/>
+                </a:solidFill>
+                <a:latin typeface="Calibri" pitchFamily="34" charset="0"/>
+                <a:ea typeface="Calibri" pitchFamily="34" charset="-122"/>
+                <a:cs typeface="Calibri" pitchFamily="34" charset="-120"/>
+              </a:rPr>
+              <a:t>→</a:t>
+            </a:r>
+            <a:endParaRPr lang="en-US" sz="1400" dirty="0"/>
+          </a:p>
+        </p:txBody>
+      </p:sp>
+      <p:sp>
+        <p:nvSpPr>
+          <p:cNvPr id="9" name="Shape 7"/>
+          <p:cNvSpPr/>
+          <p:nvPr/>
+        </p:nvSpPr>
+        <p:spPr>
+          <a:xfrm>
+            <a:off x="5058461" y="2834640"/>
+            <a:ext cx="2044598" cy="777240"/>
+          </a:xfrm>
+          <a:prstGeom prst="roundRect">
+            <a:avLst>
+              <a:gd name="adj" fmla="val 8235"/>
+            </a:avLst>
+          </a:prstGeom>
+          <a:solidFill>
+            <a:srgbClr val="CADCFC"/>
+          </a:solidFill>
+          <a:ln/>
+        </p:spPr>
+      </p:sp>
+      <p:sp>
+        <p:nvSpPr>
+          <p:cNvPr id="10" name="Text 8"/>
+          <p:cNvSpPr/>
+          <p:nvPr/>
+        </p:nvSpPr>
+        <p:spPr>
+          <a:xfrm>
+            <a:off x="5058461" y="2834640"/>
+            <a:ext cx="2044598" cy="777240"/>
+          </a:xfrm>
+          <a:prstGeom prst="rect">
+            <a:avLst/>
+          </a:prstGeom>
+          <a:noFill/>
+          <a:ln/>
+        </p:spPr>
+        <p:txBody>
+          <a:bodyPr wrap="square" lIns="254" tIns="254" rIns="254" bIns="254" rtlCol="0" anchor="ctr"/>
+          <a:lstStyle/>
+          <a:p>
+            <a:pPr algn="ctr" indent="0" marL="0">
+              <a:buNone/>
+            </a:pPr>
+            <a:r>
+              <a:rPr lang="en-US" sz="1350" dirty="0">
+                <a:solidFill>
+                  <a:srgbClr val="1E2761"/>
+                </a:solidFill>
+                <a:latin typeface="Calibri" pitchFamily="34" charset="0"/>
+                <a:ea typeface="Calibri" pitchFamily="34" charset="-122"/>
+                <a:cs typeface="Calibri" pitchFamily="34" charset="-120"/>
+              </a:rPr>
+              <a:t>Other Ecosystems</a:t>
+            </a:r>
+            <a:endParaRPr lang="en-US" sz="1350" dirty="0"/>
+          </a:p>
+        </p:txBody>
+      </p:sp>
+      <p:sp>
+        <p:nvSpPr>
+          <p:cNvPr id="11" name="Text 9"/>
+          <p:cNvSpPr/>
+          <p:nvPr/>
+        </p:nvSpPr>
+        <p:spPr>
+          <a:xfrm>
+            <a:off x="7048195" y="2834640"/>
+            <a:ext cx="274320" cy="777240"/>
+          </a:xfrm>
+          <a:prstGeom prst="rect">
+            <a:avLst/>
+          </a:prstGeom>
+          <a:noFill/>
+          <a:ln/>
+        </p:spPr>
+        <p:txBody>
+          <a:bodyPr wrap="square" lIns="0" tIns="0" rIns="0" bIns="0" rtlCol="0" anchor="ctr"/>
+          <a:lstStyle/>
+          <a:p>
+            <a:pPr algn="ctr" indent="0" marL="0">
+              <a:buNone/>
+            </a:pPr>
+            <a:r>
+              <a:rPr lang="en-US" sz="1400" dirty="0">
+                <a:solidFill>
+                  <a:srgbClr val="5A6478"/>
+                </a:solidFill>
+                <a:latin typeface="Calibri" pitchFamily="34" charset="0"/>
+                <a:ea typeface="Calibri" pitchFamily="34" charset="-122"/>
+                <a:cs typeface="Calibri" pitchFamily="34" charset="-120"/>
+              </a:rPr>
+              <a:t>→</a:t>
+            </a:r>
+            <a:endParaRPr lang="en-US" sz="1400" dirty="0"/>
+          </a:p>
+        </p:txBody>
+      </p:sp>
+      <p:sp>
+        <p:nvSpPr>
+          <p:cNvPr id="12" name="Shape 10"/>
+          <p:cNvSpPr/>
+          <p:nvPr/>
+        </p:nvSpPr>
+        <p:spPr>
+          <a:xfrm>
+            <a:off x="7267651" y="2834640"/>
+            <a:ext cx="2044598" cy="777240"/>
+          </a:xfrm>
+          <a:prstGeom prst="roundRect">
+            <a:avLst>
+              <a:gd name="adj" fmla="val 8235"/>
+            </a:avLst>
+          </a:prstGeom>
+          <a:solidFill>
+            <a:srgbClr val="CADCFC"/>
+          </a:solidFill>
+          <a:ln/>
+        </p:spPr>
+      </p:sp>
+      <p:sp>
+        <p:nvSpPr>
+          <p:cNvPr id="13" name="Text 11"/>
+          <p:cNvSpPr/>
+          <p:nvPr/>
+        </p:nvSpPr>
+        <p:spPr>
+          <a:xfrm>
+            <a:off x="7267651" y="2834640"/>
+            <a:ext cx="2044598" cy="777240"/>
+          </a:xfrm>
+          <a:prstGeom prst="rect">
+            <a:avLst/>
+          </a:prstGeom>
+          <a:noFill/>
+          <a:ln/>
+        </p:spPr>
+        <p:txBody>
+          <a:bodyPr wrap="square" lIns="254" tIns="254" rIns="254" bIns="254" rtlCol="0" anchor="ctr"/>
+          <a:lstStyle/>
+          <a:p>
+            <a:pPr algn="ctr" indent="0" marL="0">
+              <a:buNone/>
+            </a:pPr>
+            <a:r>
+              <a:rPr lang="en-US" sz="1350" dirty="0">
+                <a:solidFill>
+                  <a:srgbClr val="1E2761"/>
+                </a:solidFill>
+                <a:latin typeface="Calibri" pitchFamily="34" charset="0"/>
+                <a:ea typeface="Calibri" pitchFamily="34" charset="-122"/>
+                <a:cs typeface="Calibri" pitchFamily="34" charset="-120"/>
+              </a:rPr>
+              <a:t>AI in the Loop</a:t>
+            </a:r>
+            <a:endParaRPr lang="en-US" sz="1350" dirty="0"/>
+          </a:p>
+        </p:txBody>
+      </p:sp>
+      <p:sp>
+        <p:nvSpPr>
+          <p:cNvPr id="14" name="Text 12"/>
+          <p:cNvSpPr/>
+          <p:nvPr/>
+        </p:nvSpPr>
+        <p:spPr>
+          <a:xfrm>
+            <a:off x="9257386" y="2834640"/>
+            <a:ext cx="274320" cy="777240"/>
+          </a:xfrm>
+          <a:prstGeom prst="rect">
+            <a:avLst/>
+          </a:prstGeom>
+          <a:noFill/>
+          <a:ln/>
+        </p:spPr>
+        <p:txBody>
+          <a:bodyPr wrap="square" lIns="0" tIns="0" rIns="0" bIns="0" rtlCol="0" anchor="ctr"/>
+          <a:lstStyle/>
+          <a:p>
+            <a:pPr algn="ctr" indent="0" marL="0">
+              <a:buNone/>
+            </a:pPr>
+            <a:r>
+              <a:rPr lang="en-US" sz="1400" dirty="0">
+                <a:solidFill>
+                  <a:srgbClr val="5A6478"/>
+                </a:solidFill>
+                <a:latin typeface="Calibri" pitchFamily="34" charset="0"/>
+                <a:ea typeface="Calibri" pitchFamily="34" charset="-122"/>
+                <a:cs typeface="Calibri" pitchFamily="34" charset="-120"/>
+              </a:rPr>
+              <a:t>→</a:t>
+            </a:r>
+            <a:endParaRPr lang="en-US" sz="1400" dirty="0"/>
+          </a:p>
+        </p:txBody>
+      </p:sp>
+      <p:sp>
+        <p:nvSpPr>
+          <p:cNvPr id="15" name="Shape 13"/>
+          <p:cNvSpPr/>
+          <p:nvPr/>
+        </p:nvSpPr>
+        <p:spPr>
+          <a:xfrm>
+            <a:off x="9476842" y="2834640"/>
+            <a:ext cx="2044598" cy="777240"/>
+          </a:xfrm>
+          <a:prstGeom prst="roundRect">
+            <a:avLst>
+              <a:gd name="adj" fmla="val 8235"/>
+            </a:avLst>
+          </a:prstGeom>
+          <a:solidFill>
+            <a:srgbClr val="CADCFC"/>
+          </a:solidFill>
+          <a:ln/>
+        </p:spPr>
+      </p:sp>
+      <p:sp>
+        <p:nvSpPr>
+          <p:cNvPr id="16" name="Text 14"/>
+          <p:cNvSpPr/>
+          <p:nvPr/>
+        </p:nvSpPr>
+        <p:spPr>
+          <a:xfrm>
+            <a:off x="9476842" y="2834640"/>
+            <a:ext cx="2044598" cy="777240"/>
+          </a:xfrm>
+          <a:prstGeom prst="rect">
+            <a:avLst/>
+          </a:prstGeom>
+          <a:noFill/>
+          <a:ln/>
+        </p:spPr>
+        <p:txBody>
+          <a:bodyPr wrap="square" lIns="254" tIns="254" rIns="254" bIns="254" rtlCol="0" anchor="ctr"/>
+          <a:lstStyle/>
+          <a:p>
+            <a:pPr algn="ctr" indent="0" marL="0">
+              <a:buNone/>
+            </a:pPr>
+            <a:r>
+              <a:rPr lang="en-US" sz="1350" dirty="0">
+                <a:solidFill>
+                  <a:srgbClr val="1E2761"/>
+                </a:solidFill>
+                <a:latin typeface="Calibri" pitchFamily="34" charset="0"/>
+                <a:ea typeface="Calibri" pitchFamily="34" charset="-122"/>
+                <a:cs typeface="Calibri" pitchFamily="34" charset="-120"/>
+              </a:rPr>
+              <a:t>Close</a:t>
+            </a:r>
+            <a:endParaRPr lang="en-US" sz="1350" dirty="0"/>
           </a:p>
         </p:txBody>
       </p:sp>
@@ -13821,7 +13818,7 @@
                 <a:ea typeface="Cambria" pitchFamily="34" charset="-122"/>
                 <a:cs typeface="Cambria" pitchFamily="34" charset="-120"/>
               </a:rPr>
-              <a:t>Roadmap</a:t>
+              <a:t>What is Lifecycle Attestation?</a:t>
             </a:r>
             <a:endParaRPr lang="en-US" sz="3600" dirty="0"/>
           </a:p>
@@ -13829,18 +13826,369 @@
       </p:sp>
       <p:sp>
         <p:nvSpPr>
-          <p:cNvPr id="3" name="Shape 1"/>
-          <p:cNvSpPr/>
-          <p:nvPr/>
-        </p:nvSpPr>
-        <p:spPr>
-          <a:xfrm>
-            <a:off x="640080" y="2834640"/>
-            <a:ext cx="2044598" cy="777240"/>
+          <p:cNvPr id="3" name="Text 1"/>
+          <p:cNvSpPr/>
+          <p:nvPr/>
+        </p:nvSpPr>
+        <p:spPr>
+          <a:xfrm>
+            <a:off x="640080" y="1325880"/>
+            <a:ext cx="10972800" cy="3566160"/>
+          </a:xfrm>
+          <a:prstGeom prst="rect">
+            <a:avLst/>
+          </a:prstGeom>
+          <a:noFill/>
+          <a:ln/>
+        </p:spPr>
+        <p:txBody>
+          <a:bodyPr wrap="square" lIns="0" tIns="0" rIns="0" bIns="0" rtlCol="0" anchor="t"/>
+          <a:lstStyle/>
+          <a:p>
+            <a:pPr algn="l" marL="342900" indent="-342900">
+              <a:buSzPct val="100000"/>
+              <a:buChar char="•"/>
+            </a:pPr>
+            <a:r>
+              <a:rPr lang="en-US" sz="1700" b="1" dirty="0">
+                <a:solidFill>
+                  <a:srgbClr val="212121"/>
+                </a:solidFill>
+                <a:latin typeface="Calibri" pitchFamily="34" charset="0"/>
+                <a:ea typeface="Calibri" pitchFamily="34" charset="-122"/>
+                <a:cs typeface="Calibri" pitchFamily="34" charset="-120"/>
+              </a:rPr>
+              <a:t>Traditional remote attestation: </a:t>
+            </a:r>
+            <a:pPr algn="l" indent="0" marL="0">
+              <a:buNone/>
+            </a:pPr>
+            <a:r>
+              <a:rPr lang="en-US" sz="1700" b="1" dirty="0">
+                <a:solidFill>
+                  <a:srgbClr val="212121"/>
+                </a:solidFill>
+                <a:latin typeface="Calibri" pitchFamily="34" charset="0"/>
+                <a:ea typeface="Calibri" pitchFamily="34" charset="-122"/>
+                <a:cs typeface="Calibri" pitchFamily="34" charset="-120"/>
+              </a:rPr>
+              <a:t>did system components boot into a predictable state?</a:t>
+            </a:r>
+            <a:pPr algn="l" indent="0" marL="0">
+              <a:spcAft>
+                <a:spcPts val="1000"/>
+              </a:spcAft>
+              <a:buNone/>
+            </a:pPr>
+            <a:r>
+              <a:rPr lang="en-US" sz="1700" dirty="0">
+                <a:solidFill>
+                  <a:srgbClr val="212121"/>
+                </a:solidFill>
+                <a:latin typeface="Calibri" pitchFamily="34" charset="0"/>
+                <a:ea typeface="Calibri" pitchFamily="34" charset="-122"/>
+                <a:cs typeface="Calibri" pitchFamily="34" charset="-120"/>
+              </a:rPr>
+              <a:t> (boot-time, static runtime)</a:t>
+            </a:r>
+            <a:endParaRPr lang="en-US" sz="1700" dirty="0"/>
+          </a:p>
+          <a:p>
+            <a:pPr algn="l" marL="342900" indent="-342900">
+              <a:buSzPct val="100000"/>
+              <a:buChar char="•"/>
+            </a:pPr>
+            <a:r>
+              <a:rPr lang="en-US" sz="1700" b="1" dirty="0">
+                <a:solidFill>
+                  <a:srgbClr val="212121"/>
+                </a:solidFill>
+                <a:latin typeface="Calibri" pitchFamily="34" charset="0"/>
+                <a:ea typeface="Calibri" pitchFamily="34" charset="-122"/>
+                <a:cs typeface="Calibri" pitchFamily="34" charset="-120"/>
+              </a:rPr>
+              <a:t>Layered, runtime attestation: </a:t>
+            </a:r>
+            <a:pPr algn="l" indent="0" marL="0">
+              <a:buNone/>
+            </a:pPr>
+            <a:r>
+              <a:rPr lang="en-US" sz="1700" dirty="0">
+                <a:solidFill>
+                  <a:srgbClr val="212121"/>
+                </a:solidFill>
+                <a:latin typeface="Calibri" pitchFamily="34" charset="0"/>
+                <a:ea typeface="Calibri" pitchFamily="34" charset="-122"/>
+                <a:cs typeface="Calibri" pitchFamily="34" charset="-120"/>
+              </a:rPr>
+              <a:t>extend boot-time trust via dynamic measurement of system components </a:t>
+            </a:r>
+            <a:pPr algn="l" indent="0" marL="0">
+              <a:spcAft>
+                <a:spcPts val="1000"/>
+              </a:spcAft>
+              <a:buNone/>
+            </a:pPr>
+            <a:r>
+              <a:rPr lang="en-US" sz="1700" b="1" dirty="0">
+                <a:solidFill>
+                  <a:srgbClr val="212121"/>
+                </a:solidFill>
+                <a:latin typeface="Calibri" pitchFamily="34" charset="0"/>
+                <a:ea typeface="Calibri" pitchFamily="34" charset="-122"/>
+                <a:cs typeface="Calibri" pitchFamily="34" charset="-120"/>
+              </a:rPr>
+              <a:t>and their context/dependencies</a:t>
+            </a:r>
+            <a:endParaRPr lang="en-US" sz="1700" dirty="0"/>
+          </a:p>
+          <a:p>
+            <a:pPr algn="l" marL="342900" indent="-342900">
+              <a:buSzPct val="100000"/>
+              <a:buChar char="•"/>
+            </a:pPr>
+            <a:r>
+              <a:rPr lang="en-US" sz="1700" b="1" dirty="0">
+                <a:solidFill>
+                  <a:srgbClr val="212121"/>
+                </a:solidFill>
+                <a:latin typeface="Calibri" pitchFamily="34" charset="0"/>
+                <a:ea typeface="Calibri" pitchFamily="34" charset="-122"/>
+                <a:cs typeface="Calibri" pitchFamily="34" charset="-120"/>
+              </a:rPr>
+              <a:t>Lifecycle attestation: </a:t>
+            </a:r>
+            <a:pPr algn="l" indent="0" marL="0">
+              <a:buNone/>
+            </a:pPr>
+            <a:r>
+              <a:rPr lang="en-US" sz="1700" dirty="0">
+                <a:solidFill>
+                  <a:srgbClr val="212121"/>
+                </a:solidFill>
+                <a:latin typeface="Calibri" pitchFamily="34" charset="0"/>
+                <a:ea typeface="Calibri" pitchFamily="34" charset="-122"/>
+                <a:cs typeface="Calibri" pitchFamily="34" charset="-120"/>
+              </a:rPr>
+              <a:t>extends this notion to </a:t>
+            </a:r>
+            <a:pPr algn="l" indent="0" marL="0">
+              <a:buNone/>
+            </a:pPr>
+            <a:r>
+              <a:rPr lang="en-US" sz="1700" b="1" dirty="0">
+                <a:solidFill>
+                  <a:srgbClr val="212121"/>
+                </a:solidFill>
+                <a:latin typeface="Calibri" pitchFamily="34" charset="0"/>
+                <a:ea typeface="Calibri" pitchFamily="34" charset="-122"/>
+                <a:cs typeface="Calibri" pitchFamily="34" charset="-120"/>
+              </a:rPr>
+              <a:t>artifacts of the development lifecycle</a:t>
+            </a:r>
+            <a:pPr algn="l" indent="0" marL="0">
+              <a:spcAft>
+                <a:spcPts val="1000"/>
+              </a:spcAft>
+              <a:buNone/>
+            </a:pPr>
+            <a:r>
+              <a:rPr lang="en-US" sz="1700" dirty="0">
+                <a:solidFill>
+                  <a:srgbClr val="212121"/>
+                </a:solidFill>
+                <a:latin typeface="Calibri" pitchFamily="34" charset="0"/>
+                <a:ea typeface="Calibri" pitchFamily="34" charset="-122"/>
+                <a:cs typeface="Calibri" pitchFamily="34" charset="-120"/>
+              </a:rPr>
+              <a:t>: models, contracts, implementations, proofs, toolchains</a:t>
+            </a:r>
+            <a:endParaRPr lang="en-US" sz="1700" dirty="0"/>
+          </a:p>
+          <a:p>
+            <a:pPr algn="l" lvl="1" marL="685800" indent="-342900">
+              <a:spcAft>
+                <a:spcPts val="1000"/>
+              </a:spcAft>
+              <a:buSzPct val="100000"/>
+              <a:buChar char="–"/>
+            </a:pPr>
+            <a:r>
+              <a:rPr lang="en-US" sz="1700" dirty="0">
+                <a:solidFill>
+                  <a:srgbClr val="212121"/>
+                </a:solidFill>
+                <a:latin typeface="Calibri" pitchFamily="34" charset="0"/>
+                <a:ea typeface="Calibri" pitchFamily="34" charset="-122"/>
+                <a:cs typeface="Calibri" pitchFamily="34" charset="-120"/>
+              </a:rPr>
+              <a:t>…including the attestation infrastructure and evidence itself</a:t>
+            </a:r>
+            <a:endParaRPr lang="en-US" sz="1700" dirty="0"/>
+          </a:p>
+          <a:p>
+            <a:pPr algn="l" lvl="1" marL="685800" indent="-342900">
+              <a:spcAft>
+                <a:spcPts val="1000"/>
+              </a:spcAft>
+              <a:buSzPct val="100000"/>
+              <a:buChar char="–"/>
+            </a:pPr>
+            <a:r>
+              <a:rPr lang="en-US" sz="1700" dirty="0">
+                <a:solidFill>
+                  <a:srgbClr val="212121"/>
+                </a:solidFill>
+                <a:latin typeface="Calibri" pitchFamily="34" charset="0"/>
+                <a:ea typeface="Calibri" pitchFamily="34" charset="-122"/>
+                <a:cs typeface="Calibri" pitchFamily="34" charset="-120"/>
+              </a:rPr>
+              <a:t>…and to natural lifecycle events:</a:t>
+            </a:r>
+            <a:endParaRPr lang="en-US" sz="1700" dirty="0"/>
+          </a:p>
+          <a:p>
+            <a:pPr algn="l" lvl="2" marL="1028700" indent="-342900">
+              <a:spcAft>
+                <a:spcPts val="200"/>
+              </a:spcAft>
+              <a:buSzPct val="100000"/>
+              <a:buChar char="▪"/>
+            </a:pPr>
+            <a:r>
+              <a:rPr lang="en-US" sz="1700" dirty="0">
+                <a:solidFill>
+                  <a:srgbClr val="212121"/>
+                </a:solidFill>
+                <a:latin typeface="Calibri" pitchFamily="34" charset="0"/>
+                <a:ea typeface="Calibri" pitchFamily="34" charset="-122"/>
+                <a:cs typeface="Calibri" pitchFamily="34" charset="-120"/>
+              </a:rPr>
+              <a:t>specification drift </a:t>
+            </a:r>
+            <a:endParaRPr lang="en-US" sz="1700" dirty="0"/>
+          </a:p>
+          <a:p>
+            <a:pPr algn="l" lvl="2" marL="1028700" indent="-342900">
+              <a:spcAft>
+                <a:spcPts val="200"/>
+              </a:spcAft>
+              <a:buSzPct val="100000"/>
+              <a:buChar char="▪"/>
+            </a:pPr>
+            <a:r>
+              <a:rPr lang="en-US" sz="1700" dirty="0">
+                <a:solidFill>
+                  <a:srgbClr val="212121"/>
+                </a:solidFill>
+                <a:latin typeface="Calibri" pitchFamily="34" charset="0"/>
+                <a:ea typeface="Calibri" pitchFamily="34" charset="-122"/>
+                <a:cs typeface="Calibri" pitchFamily="34" charset="-120"/>
+              </a:rPr>
+              <a:t>toolchain updates</a:t>
+            </a:r>
+            <a:endParaRPr lang="en-US" sz="1700" dirty="0"/>
+          </a:p>
+          <a:p>
+            <a:pPr algn="l" lvl="2" marL="1028700" indent="-342900">
+              <a:spcAft>
+                <a:spcPts val="200"/>
+              </a:spcAft>
+              <a:buSzPct val="100000"/>
+              <a:buChar char="▪"/>
+            </a:pPr>
+            <a:r>
+              <a:rPr lang="en-US" sz="1700" dirty="0">
+                <a:solidFill>
+                  <a:srgbClr val="212121"/>
+                </a:solidFill>
+                <a:latin typeface="Calibri" pitchFamily="34" charset="0"/>
+                <a:ea typeface="Calibri" pitchFamily="34" charset="-122"/>
+                <a:cs typeface="Calibri" pitchFamily="34" charset="-120"/>
+              </a:rPr>
+              <a:t>artifact updates, synthesis, repair</a:t>
+            </a:r>
+            <a:endParaRPr lang="en-US" sz="1700" dirty="0"/>
+          </a:p>
+          <a:p>
+            <a:pPr algn="l" marL="342900" indent="-342900">
+              <a:buSzPct val="100000"/>
+              <a:buChar char="•"/>
+            </a:pPr>
+            <a:r>
+              <a:rPr lang="en-US" sz="1700" b="1" dirty="0">
+                <a:solidFill>
+                  <a:srgbClr val="212121"/>
+                </a:solidFill>
+                <a:latin typeface="Calibri" pitchFamily="34" charset="0"/>
+                <a:ea typeface="Calibri" pitchFamily="34" charset="-122"/>
+                <a:cs typeface="Calibri" pitchFamily="34" charset="-120"/>
+              </a:rPr>
+              <a:t>Motivation: </a:t>
+            </a:r>
+            <a:pPr algn="l" indent="0" marL="0">
+              <a:buNone/>
+            </a:pPr>
+            <a:r>
+              <a:rPr lang="en-US" sz="1700" dirty="0">
+                <a:solidFill>
+                  <a:srgbClr val="212121"/>
+                </a:solidFill>
+                <a:latin typeface="Calibri" pitchFamily="34" charset="0"/>
+                <a:ea typeface="Calibri" pitchFamily="34" charset="-122"/>
+                <a:cs typeface="Calibri" pitchFamily="34" charset="-120"/>
+              </a:rPr>
+              <a:t>the </a:t>
+            </a:r>
+            <a:pPr algn="l" indent="0" marL="0">
+              <a:buNone/>
+            </a:pPr>
+            <a:r>
+              <a:rPr lang="en-US" sz="1700" b="1" dirty="0">
+                <a:solidFill>
+                  <a:srgbClr val="212121"/>
+                </a:solidFill>
+                <a:latin typeface="Calibri" pitchFamily="34" charset="0"/>
+                <a:ea typeface="Calibri" pitchFamily="34" charset="-122"/>
+                <a:cs typeface="Calibri" pitchFamily="34" charset="-120"/>
+              </a:rPr>
+              <a:t>proliferation of AI-generated software artifacts</a:t>
+            </a:r>
+            <a:pPr algn="l" indent="0" marL="0">
+              <a:spcAft>
+                <a:spcPts val="1000"/>
+              </a:spcAft>
+              <a:buNone/>
+            </a:pPr>
+            <a:r>
+              <a:rPr lang="en-US" sz="1700" dirty="0">
+                <a:solidFill>
+                  <a:srgbClr val="212121"/>
+                </a:solidFill>
+                <a:latin typeface="Calibri" pitchFamily="34" charset="0"/>
+                <a:ea typeface="Calibri" pitchFamily="34" charset="-122"/>
+                <a:cs typeface="Calibri" pitchFamily="34" charset="-120"/>
+              </a:rPr>
+              <a:t>, amid the need for rapid re-certification of systems</a:t>
+            </a:r>
+            <a:endParaRPr lang="en-US" sz="1700" dirty="0"/>
+          </a:p>
+        </p:txBody>
+      </p:sp>
+      <p:sp>
+        <p:nvSpPr>
+          <p:cNvPr id="4" name="Shape 2"/>
+          <p:cNvSpPr/>
+          <p:nvPr/>
+        </p:nvSpPr>
+        <p:spPr>
+          <a:xfrm>
+            <a:off x="640080" y="4901184"/>
+            <a:ext cx="10881360" cy="1234440"/>
           </a:xfrm>
           <a:prstGeom prst="roundRect">
             <a:avLst>
-              <a:gd name="adj" fmla="val 8235"/>
+              <a:gd name="adj" fmla="val 5926"/>
             </a:avLst>
           </a:prstGeom>
           <a:solidFill>
@@ -13851,14 +14199,14 @@
       </p:sp>
       <p:sp>
         <p:nvSpPr>
-          <p:cNvPr id="4" name="Text 2"/>
-          <p:cNvSpPr/>
-          <p:nvPr/>
-        </p:nvSpPr>
-        <p:spPr>
-          <a:xfrm>
-            <a:off x="640080" y="2834640"/>
-            <a:ext cx="2044598" cy="777240"/>
+          <p:cNvPr id="5" name="Text 3"/>
+          <p:cNvSpPr/>
+          <p:nvPr/>
+        </p:nvSpPr>
+        <p:spPr>
+          <a:xfrm>
+            <a:off x="914400" y="4901184"/>
+            <a:ext cx="10332720" cy="1234440"/>
           </a:xfrm>
           <a:prstGeom prst="rect">
             <a:avLst/>
@@ -13867,480 +14215,44 @@
           <a:ln/>
         </p:spPr>
         <p:txBody>
-          <a:bodyPr wrap="square" lIns="254" tIns="254" rIns="254" bIns="254" rtlCol="0" anchor="ctr"/>
-          <a:lstStyle/>
-          <a:p>
-            <a:pPr algn="ctr" indent="0" marL="0">
-              <a:buNone/>
-            </a:pPr>
-            <a:r>
-              <a:rPr lang="en-US" sz="1350" b="1" dirty="0">
-                <a:solidFill>
-                  <a:srgbClr val="FFFFFF"/>
-                </a:solidFill>
-                <a:latin typeface="Calibri" pitchFamily="34" charset="0"/>
-                <a:ea typeface="Calibri" pitchFamily="34" charset="-122"/>
-                <a:cs typeface="Calibri" pitchFamily="34" charset="-120"/>
-              </a:rPr>
-              <a:t>Preliminaries</a:t>
-            </a:r>
-            <a:endParaRPr lang="en-US" sz="1350" dirty="0"/>
-          </a:p>
-        </p:txBody>
-      </p:sp>
-      <p:sp>
-        <p:nvSpPr>
-          <p:cNvPr id="5" name="Text 3"/>
-          <p:cNvSpPr/>
-          <p:nvPr/>
-        </p:nvSpPr>
-        <p:spPr>
-          <a:xfrm>
-            <a:off x="2629814" y="2834640"/>
-            <a:ext cx="274320" cy="777240"/>
-          </a:xfrm>
-          <a:prstGeom prst="rect">
-            <a:avLst/>
-          </a:prstGeom>
-          <a:noFill/>
-          <a:ln/>
-        </p:spPr>
-        <p:txBody>
           <a:bodyPr wrap="square" lIns="0" tIns="0" rIns="0" bIns="0" rtlCol="0" anchor="ctr"/>
           <a:lstStyle/>
           <a:p>
             <a:pPr algn="ctr" indent="0" marL="0">
-              <a:buNone/>
-            </a:pPr>
-            <a:r>
-              <a:rPr lang="en-US" sz="1400" dirty="0">
-                <a:solidFill>
-                  <a:srgbClr val="5A6478"/>
-                </a:solidFill>
-                <a:latin typeface="Calibri" pitchFamily="34" charset="0"/>
-                <a:ea typeface="Calibri" pitchFamily="34" charset="-122"/>
-                <a:cs typeface="Calibri" pitchFamily="34" charset="-120"/>
-              </a:rPr>
-              <a:t>→</a:t>
-            </a:r>
-            <a:endParaRPr lang="en-US" sz="1400" dirty="0"/>
-          </a:p>
-        </p:txBody>
-      </p:sp>
-      <p:sp>
-        <p:nvSpPr>
-          <p:cNvPr id="6" name="Shape 4"/>
-          <p:cNvSpPr/>
-          <p:nvPr/>
-        </p:nvSpPr>
-        <p:spPr>
-          <a:xfrm>
-            <a:off x="2849270" y="2834640"/>
-            <a:ext cx="2044598" cy="777240"/>
-          </a:xfrm>
-          <a:prstGeom prst="roundRect">
-            <a:avLst>
-              <a:gd name="adj" fmla="val 8235"/>
-            </a:avLst>
-          </a:prstGeom>
-          <a:solidFill>
-            <a:srgbClr val="CADCFC"/>
-          </a:solidFill>
-          <a:ln/>
-        </p:spPr>
-      </p:sp>
-      <p:sp>
-        <p:nvSpPr>
-          <p:cNvPr id="7" name="Text 5"/>
-          <p:cNvSpPr/>
-          <p:nvPr/>
-        </p:nvSpPr>
-        <p:spPr>
-          <a:xfrm>
-            <a:off x="2849270" y="2834640"/>
-            <a:ext cx="2044598" cy="777240"/>
-          </a:xfrm>
-          <a:prstGeom prst="rect">
-            <a:avLst/>
-          </a:prstGeom>
-          <a:noFill/>
-          <a:ln/>
-        </p:spPr>
-        <p:txBody>
-          <a:bodyPr wrap="square" lIns="254" tIns="254" rIns="254" bIns="254" rtlCol="0" anchor="ctr"/>
-          <a:lstStyle/>
+              <a:spcAft>
+                <a:spcPts val="400"/>
+              </a:spcAft>
+              <a:buNone/>
+            </a:pPr>
+            <a:r>
+              <a:rPr lang="en-US" sz="2000" b="1" dirty="0">
+                <a:solidFill>
+                  <a:srgbClr val="FFFFFF"/>
+                </a:solidFill>
+                <a:latin typeface="Calibri" pitchFamily="34" charset="0"/>
+                <a:ea typeface="Calibri" pitchFamily="34" charset="-122"/>
+                <a:cs typeface="Calibri" pitchFamily="34" charset="-120"/>
+              </a:rPr>
+              <a:t>Every trust decision is grounded in cryptographic attestation evidence.</a:t>
+            </a:r>
+            <a:endParaRPr lang="en-US" sz="2000" dirty="0"/>
+          </a:p>
           <a:p>
             <a:pPr algn="ctr" indent="0" marL="0">
               <a:buNone/>
             </a:pPr>
             <a:r>
-              <a:rPr lang="en-US" sz="1350" dirty="0">
-                <a:solidFill>
-                  <a:srgbClr val="1E2761"/>
-                </a:solidFill>
-                <a:latin typeface="Calibri" pitchFamily="34" charset="0"/>
-                <a:ea typeface="Calibri" pitchFamily="34" charset="-122"/>
-                <a:cs typeface="Calibri" pitchFamily="34" charset="-120"/>
-              </a:rPr>
-              <a:t>Demo:</a:t>
-            </a:r>
-            <a:endParaRPr lang="en-US" sz="1350" dirty="0"/>
-          </a:p>
-          <a:p>
-            <a:pPr algn="ctr" indent="0" marL="0">
-              <a:buNone/>
-            </a:pPr>
-            <a:r>
-              <a:rPr lang="en-US" sz="1350" dirty="0">
-                <a:solidFill>
-                  <a:srgbClr val="1E2761"/>
-                </a:solidFill>
-                <a:latin typeface="Calibri" pitchFamily="34" charset="0"/>
-                <a:ea typeface="Calibri" pitchFamily="34" charset="-122"/>
-                <a:cs typeface="Calibri" pitchFamily="34" charset="-120"/>
-              </a:rPr>
-              <a:t>Isolette (SysMLv2 → Rust)</a:t>
-            </a:r>
-            <a:endParaRPr lang="en-US" sz="1350" dirty="0"/>
-          </a:p>
-        </p:txBody>
-      </p:sp>
-      <p:sp>
-        <p:nvSpPr>
-          <p:cNvPr id="8" name="Text 6"/>
-          <p:cNvSpPr/>
-          <p:nvPr/>
-        </p:nvSpPr>
-        <p:spPr>
-          <a:xfrm>
-            <a:off x="4839005" y="2834640"/>
-            <a:ext cx="274320" cy="777240"/>
-          </a:xfrm>
-          <a:prstGeom prst="rect">
-            <a:avLst/>
-          </a:prstGeom>
-          <a:noFill/>
-          <a:ln/>
-        </p:spPr>
-        <p:txBody>
-          <a:bodyPr wrap="square" lIns="0" tIns="0" rIns="0" bIns="0" rtlCol="0" anchor="ctr"/>
-          <a:lstStyle/>
-          <a:p>
-            <a:pPr algn="ctr" indent="0" marL="0">
-              <a:buNone/>
-            </a:pPr>
-            <a:r>
-              <a:rPr lang="en-US" sz="1400" dirty="0">
-                <a:solidFill>
-                  <a:srgbClr val="5A6478"/>
-                </a:solidFill>
-                <a:latin typeface="Calibri" pitchFamily="34" charset="0"/>
-                <a:ea typeface="Calibri" pitchFamily="34" charset="-122"/>
-                <a:cs typeface="Calibri" pitchFamily="34" charset="-120"/>
-              </a:rPr>
-              <a:t>→</a:t>
-            </a:r>
-            <a:endParaRPr lang="en-US" sz="1400" dirty="0"/>
-          </a:p>
-        </p:txBody>
-      </p:sp>
-      <p:sp>
-        <p:nvSpPr>
-          <p:cNvPr id="9" name="Shape 7"/>
-          <p:cNvSpPr/>
-          <p:nvPr/>
-        </p:nvSpPr>
-        <p:spPr>
-          <a:xfrm>
-            <a:off x="5058461" y="2834640"/>
-            <a:ext cx="2044598" cy="777240"/>
-          </a:xfrm>
-          <a:prstGeom prst="roundRect">
-            <a:avLst>
-              <a:gd name="adj" fmla="val 8235"/>
-            </a:avLst>
-          </a:prstGeom>
-          <a:solidFill>
-            <a:srgbClr val="CADCFC"/>
-          </a:solidFill>
-          <a:ln/>
-        </p:spPr>
-      </p:sp>
-      <p:sp>
-        <p:nvSpPr>
-          <p:cNvPr id="10" name="Text 8"/>
-          <p:cNvSpPr/>
-          <p:nvPr/>
-        </p:nvSpPr>
-        <p:spPr>
-          <a:xfrm>
-            <a:off x="5058461" y="2834640"/>
-            <a:ext cx="2044598" cy="777240"/>
-          </a:xfrm>
-          <a:prstGeom prst="rect">
-            <a:avLst/>
-          </a:prstGeom>
-          <a:noFill/>
-          <a:ln/>
-        </p:spPr>
-        <p:txBody>
-          <a:bodyPr wrap="square" lIns="254" tIns="254" rIns="254" bIns="254" rtlCol="0" anchor="ctr"/>
-          <a:lstStyle/>
-          <a:p>
-            <a:pPr algn="ctr" indent="0" marL="0">
-              <a:buNone/>
-            </a:pPr>
-            <a:r>
-              <a:rPr lang="en-US" sz="1350" dirty="0">
-                <a:solidFill>
-                  <a:srgbClr val="1E2761"/>
-                </a:solidFill>
-                <a:latin typeface="Calibri" pitchFamily="34" charset="0"/>
-                <a:ea typeface="Calibri" pitchFamily="34" charset="-122"/>
-                <a:cs typeface="Calibri" pitchFamily="34" charset="-120"/>
-              </a:rPr>
-              <a:t>Other Ecosystems</a:t>
-            </a:r>
-            <a:endParaRPr lang="en-US" sz="1350" dirty="0"/>
-          </a:p>
-        </p:txBody>
-      </p:sp>
-      <p:sp>
-        <p:nvSpPr>
-          <p:cNvPr id="11" name="Text 9"/>
-          <p:cNvSpPr/>
-          <p:nvPr/>
-        </p:nvSpPr>
-        <p:spPr>
-          <a:xfrm>
-            <a:off x="7048195" y="2834640"/>
-            <a:ext cx="274320" cy="777240"/>
-          </a:xfrm>
-          <a:prstGeom prst="rect">
-            <a:avLst/>
-          </a:prstGeom>
-          <a:noFill/>
-          <a:ln/>
-        </p:spPr>
-        <p:txBody>
-          <a:bodyPr wrap="square" lIns="0" tIns="0" rIns="0" bIns="0" rtlCol="0" anchor="ctr"/>
-          <a:lstStyle/>
-          <a:p>
-            <a:pPr algn="ctr" indent="0" marL="0">
-              <a:buNone/>
-            </a:pPr>
-            <a:r>
-              <a:rPr lang="en-US" sz="1400" dirty="0">
-                <a:solidFill>
-                  <a:srgbClr val="5A6478"/>
-                </a:solidFill>
-                <a:latin typeface="Calibri" pitchFamily="34" charset="0"/>
-                <a:ea typeface="Calibri" pitchFamily="34" charset="-122"/>
-                <a:cs typeface="Calibri" pitchFamily="34" charset="-120"/>
-              </a:rPr>
-              <a:t>→</a:t>
-            </a:r>
-            <a:endParaRPr lang="en-US" sz="1400" dirty="0"/>
-          </a:p>
-        </p:txBody>
-      </p:sp>
-      <p:sp>
-        <p:nvSpPr>
-          <p:cNvPr id="12" name="Shape 10"/>
-          <p:cNvSpPr/>
-          <p:nvPr/>
-        </p:nvSpPr>
-        <p:spPr>
-          <a:xfrm>
-            <a:off x="7267651" y="2834640"/>
-            <a:ext cx="2044598" cy="777240"/>
-          </a:xfrm>
-          <a:prstGeom prst="roundRect">
-            <a:avLst>
-              <a:gd name="adj" fmla="val 8235"/>
-            </a:avLst>
-          </a:prstGeom>
-          <a:solidFill>
-            <a:srgbClr val="CADCFC"/>
-          </a:solidFill>
-          <a:ln/>
-        </p:spPr>
-      </p:sp>
-      <p:sp>
-        <p:nvSpPr>
-          <p:cNvPr id="13" name="Text 11"/>
-          <p:cNvSpPr/>
-          <p:nvPr/>
-        </p:nvSpPr>
-        <p:spPr>
-          <a:xfrm>
-            <a:off x="7267651" y="2834640"/>
-            <a:ext cx="2044598" cy="777240"/>
-          </a:xfrm>
-          <a:prstGeom prst="rect">
-            <a:avLst/>
-          </a:prstGeom>
-          <a:noFill/>
-          <a:ln/>
-        </p:spPr>
-        <p:txBody>
-          <a:bodyPr wrap="square" lIns="254" tIns="254" rIns="254" bIns="254" rtlCol="0" anchor="ctr"/>
-          <a:lstStyle/>
-          <a:p>
-            <a:pPr algn="ctr" indent="0" marL="0">
-              <a:buNone/>
-            </a:pPr>
-            <a:r>
-              <a:rPr lang="en-US" sz="1350" dirty="0">
-                <a:solidFill>
-                  <a:srgbClr val="1E2761"/>
-                </a:solidFill>
-                <a:latin typeface="Calibri" pitchFamily="34" charset="0"/>
-                <a:ea typeface="Calibri" pitchFamily="34" charset="-122"/>
-                <a:cs typeface="Calibri" pitchFamily="34" charset="-120"/>
-              </a:rPr>
-              <a:t>AI in the Loop</a:t>
-            </a:r>
-            <a:endParaRPr lang="en-US" sz="1350" dirty="0"/>
-          </a:p>
-        </p:txBody>
-      </p:sp>
-      <p:sp>
-        <p:nvSpPr>
-          <p:cNvPr id="14" name="Text 12"/>
-          <p:cNvSpPr/>
-          <p:nvPr/>
-        </p:nvSpPr>
-        <p:spPr>
-          <a:xfrm>
-            <a:off x="9257386" y="2834640"/>
-            <a:ext cx="274320" cy="777240"/>
-          </a:xfrm>
-          <a:prstGeom prst="rect">
-            <a:avLst/>
-          </a:prstGeom>
-          <a:noFill/>
-          <a:ln/>
-        </p:spPr>
-        <p:txBody>
-          <a:bodyPr wrap="square" lIns="0" tIns="0" rIns="0" bIns="0" rtlCol="0" anchor="ctr"/>
-          <a:lstStyle/>
-          <a:p>
-            <a:pPr algn="ctr" indent="0" marL="0">
-              <a:buNone/>
-            </a:pPr>
-            <a:r>
-              <a:rPr lang="en-US" sz="1400" dirty="0">
-                <a:solidFill>
-                  <a:srgbClr val="5A6478"/>
-                </a:solidFill>
-                <a:latin typeface="Calibri" pitchFamily="34" charset="0"/>
-                <a:ea typeface="Calibri" pitchFamily="34" charset="-122"/>
-                <a:cs typeface="Calibri" pitchFamily="34" charset="-120"/>
-              </a:rPr>
-              <a:t>→</a:t>
-            </a:r>
-            <a:endParaRPr lang="en-US" sz="1400" dirty="0"/>
-          </a:p>
-        </p:txBody>
-      </p:sp>
-      <p:sp>
-        <p:nvSpPr>
-          <p:cNvPr id="15" name="Shape 13"/>
-          <p:cNvSpPr/>
-          <p:nvPr/>
-        </p:nvSpPr>
-        <p:spPr>
-          <a:xfrm>
-            <a:off x="9476842" y="2834640"/>
-            <a:ext cx="2044598" cy="777240"/>
-          </a:xfrm>
-          <a:prstGeom prst="roundRect">
-            <a:avLst>
-              <a:gd name="adj" fmla="val 8235"/>
-            </a:avLst>
-          </a:prstGeom>
-          <a:solidFill>
-            <a:srgbClr val="CADCFC"/>
-          </a:solidFill>
-          <a:ln/>
-        </p:spPr>
-      </p:sp>
-      <p:sp>
-        <p:nvSpPr>
-          <p:cNvPr id="16" name="Text 14"/>
-          <p:cNvSpPr/>
-          <p:nvPr/>
-        </p:nvSpPr>
-        <p:spPr>
-          <a:xfrm>
-            <a:off x="9476842" y="2834640"/>
-            <a:ext cx="2044598" cy="777240"/>
-          </a:xfrm>
-          <a:prstGeom prst="rect">
-            <a:avLst/>
-          </a:prstGeom>
-          <a:noFill/>
-          <a:ln/>
-        </p:spPr>
-        <p:txBody>
-          <a:bodyPr wrap="square" lIns="254" tIns="254" rIns="254" bIns="254" rtlCol="0" anchor="ctr"/>
-          <a:lstStyle/>
-          <a:p>
-            <a:pPr algn="ctr" indent="0" marL="0">
-              <a:buNone/>
-            </a:pPr>
-            <a:r>
-              <a:rPr lang="en-US" sz="1350" dirty="0">
-                <a:solidFill>
-                  <a:srgbClr val="1E2761"/>
-                </a:solidFill>
-                <a:latin typeface="Calibri" pitchFamily="34" charset="0"/>
-                <a:ea typeface="Calibri" pitchFamily="34" charset="-122"/>
-                <a:cs typeface="Calibri" pitchFamily="34" charset="-120"/>
-              </a:rPr>
-              <a:t>Close</a:t>
-            </a:r>
-            <a:endParaRPr lang="en-US" sz="1350" dirty="0"/>
-          </a:p>
-        </p:txBody>
-      </p:sp>
-      <p:sp>
-        <p:nvSpPr>
-          <p:cNvPr id="17" name="Text 15"/>
-          <p:cNvSpPr/>
-          <p:nvPr/>
-        </p:nvSpPr>
-        <p:spPr>
-          <a:xfrm>
-            <a:off x="640080" y="3977640"/>
-            <a:ext cx="10881360" cy="365760"/>
-          </a:xfrm>
-          <a:prstGeom prst="rect">
-            <a:avLst/>
-          </a:prstGeom>
-          <a:noFill/>
-          <a:ln/>
-        </p:spPr>
-        <p:txBody>
-          <a:bodyPr wrap="square" lIns="0" tIns="0" rIns="0" bIns="0" rtlCol="0" anchor="ctr"/>
-          <a:lstStyle/>
-          <a:p>
-            <a:pPr indent="0" marL="0">
-              <a:buNone/>
-            </a:pPr>
-            <a:r>
-              <a:rPr lang="en-US" sz="1300" i="1" dirty="0">
-                <a:solidFill>
-                  <a:srgbClr val="5A6478"/>
-                </a:solidFill>
-                <a:latin typeface="Calibri" pitchFamily="34" charset="0"/>
-                <a:ea typeface="Calibri" pitchFamily="34" charset="-122"/>
-                <a:cs typeface="Calibri" pitchFamily="34" charset="-120"/>
-              </a:rPr>
-              <a:t>Section headers provisional — the strip returns at every act transition with the current section highlighted.</a:t>
-            </a:r>
-            <a:endParaRPr lang="en-US" sz="1300" dirty="0"/>
+              <a:rPr lang="en-US" sz="1400" i="1" dirty="0">
+                <a:solidFill>
+                  <a:srgbClr val="CADCFC"/>
+                </a:solidFill>
+                <a:latin typeface="Calibri" pitchFamily="34" charset="0"/>
+                <a:ea typeface="Calibri" pitchFamily="34" charset="-122"/>
+                <a:cs typeface="Calibri" pitchFamily="34" charset="-120"/>
+              </a:rPr>
+              <a:t>Trust is NOT anchored in the following:  developer claims, untrusted tools, LLM outputs, cached verdicts</a:t>
+            </a:r>
+            <a:endParaRPr lang="en-US" sz="2000" dirty="0"/>
           </a:p>
         </p:txBody>
       </p:sp>
@@ -14490,7 +14402,7 @@
                 <a:ea typeface="Calibri" pitchFamily="34" charset="-122"/>
                 <a:cs typeface="Calibri" pitchFamily="34" charset="-120"/>
               </a:rPr>
-              <a:t>attestation protocols as formal terms with an evidence semantics: what was measured, in what order, signed by whom</a:t>
+              <a:t>attestation protocols as formal terms with an evidence semantics</a:t>
             </a:r>
             <a:endParaRPr lang="en-US" sz="1700" dirty="0"/>
           </a:p>
@@ -14590,7 +14502,7 @@
                 <a:ea typeface="Calibri" pitchFamily="34" charset="-122"/>
                 <a:cs typeface="Calibri" pitchFamily="34" charset="-120"/>
               </a:rPr>
-              <a:t>CVM — Copland Virtual Machine</a:t>
+              <a:t>Copland Virtual Machine (CVM)</a:t>
             </a:r>
             <a:endParaRPr lang="en-US" sz="1700" dirty="0"/>
           </a:p>
@@ -14888,7 +14800,7 @@
                 <a:ea typeface="Calibri" pitchFamily="34" charset="-122"/>
                 <a:cs typeface="Calibri" pitchFamily="34" charset="-120"/>
               </a:rPr>
-              <a:t>A real protocol from the demo — the isolette model class:</a:t>
+              <a:t>Copland protocol from the demo — the Isolette model class:</a:t>
             </a:r>
             <a:endParaRPr lang="en-US" sz="1300" dirty="0"/>
           </a:p>
@@ -15078,7 +14990,7 @@
                 <a:ea typeface="Calibri" pitchFamily="34" charset="-122"/>
                 <a:cs typeface="Calibri" pitchFamily="34" charset="-120"/>
               </a:rPr>
-              <a:t>measure the five blessed model files → </a:t>
+              <a:t>measure five blessed model files → </a:t>
             </a:r>
             <a:endParaRPr lang="en-US" sz="2000" dirty="0"/>
           </a:p>

--- a/docs/video_slides_draft.pptx
+++ b/docs/video_slides_draft.pptx
@@ -13846,10 +13846,45 @@
           <a:lstStyle/>
           <a:p>
             <a:pPr algn="l" marL="342900" indent="-342900">
+              <a:spcAft>
+                <a:spcPts val="1000"/>
+              </a:spcAft>
               <a:buSzPct val="100000"/>
               <a:buChar char="•"/>
             </a:pPr>
             <a:r>
+              <a:rPr lang="en-US" sz="1700" dirty="0">
+                <a:solidFill>
+                  <a:srgbClr val="212121"/>
+                </a:solidFill>
+                <a:latin typeface="Calibri" pitchFamily="34" charset="0"/>
+                <a:ea typeface="Calibri" pitchFamily="34" charset="-122"/>
+                <a:cs typeface="Calibri" pitchFamily="34" charset="-120"/>
+              </a:rPr>
+              <a:t>Traditional remote attestation: did system components boot into a predictable state? (boot-time, static runtime)</a:t>
+            </a:r>
+            <a:endParaRPr lang="en-US" sz="1700" dirty="0"/>
+          </a:p>
+          <a:p>
+            <a:pPr algn="l" marL="342900" indent="-342900">
+              <a:buSzPct val="100000"/>
+              <a:buChar char="•"/>
+            </a:pPr>
+            <a:r>
+              <a:rPr lang="en-US" sz="1700" dirty="0">
+                <a:solidFill>
+                  <a:srgbClr val="212121"/>
+                </a:solidFill>
+                <a:latin typeface="Calibri" pitchFamily="34" charset="0"/>
+                <a:ea typeface="Calibri" pitchFamily="34" charset="-122"/>
+                <a:cs typeface="Calibri" pitchFamily="34" charset="-120"/>
+              </a:rPr>
+              <a:t>Layered, runtime attestation</a:t>
+            </a:r>
+            <a:pPr algn="l" indent="0" marL="0">
+              <a:buNone/>
+            </a:pPr>
+            <a:r>
               <a:rPr lang="en-US" sz="1700" b="1" dirty="0">
                 <a:solidFill>
                   <a:srgbClr val="212121"/>
@@ -13858,21 +13893,7 @@
                 <a:ea typeface="Calibri" pitchFamily="34" charset="-122"/>
                 <a:cs typeface="Calibri" pitchFamily="34" charset="-120"/>
               </a:rPr>
-              <a:t>Traditional remote attestation: </a:t>
-            </a:r>
-            <a:pPr algn="l" indent="0" marL="0">
-              <a:buNone/>
-            </a:pPr>
-            <a:r>
-              <a:rPr lang="en-US" sz="1700" b="1" dirty="0">
-                <a:solidFill>
-                  <a:srgbClr val="212121"/>
-                </a:solidFill>
-                <a:latin typeface="Calibri" pitchFamily="34" charset="0"/>
-                <a:ea typeface="Calibri" pitchFamily="34" charset="-122"/>
-                <a:cs typeface="Calibri" pitchFamily="34" charset="-120"/>
-              </a:rPr>
-              <a:t>did system components boot into a predictable state?</a:t>
+              <a:t>: </a:t>
             </a:r>
             <a:pPr algn="l" indent="0" marL="0">
               <a:spcAft>
@@ -13889,7 +13910,7 @@
                 <a:ea typeface="Calibri" pitchFamily="34" charset="-122"/>
                 <a:cs typeface="Calibri" pitchFamily="34" charset="-120"/>
               </a:rPr>
-              <a:t> (boot-time, static runtime)</a:t>
+              <a:t>extend boot-time trust via dynamic measurement of system components and their context/dependencies</a:t>
             </a:r>
             <a:endParaRPr lang="en-US" sz="1700" dirty="0"/>
           </a:p>
@@ -13899,6 +13920,20 @@
               <a:buChar char="•"/>
             </a:pPr>
             <a:r>
+              <a:rPr lang="en-US" sz="1700" dirty="0">
+                <a:solidFill>
+                  <a:srgbClr val="212121"/>
+                </a:solidFill>
+                <a:latin typeface="Calibri" pitchFamily="34" charset="0"/>
+                <a:ea typeface="Calibri" pitchFamily="34" charset="-122"/>
+                <a:cs typeface="Calibri" pitchFamily="34" charset="-120"/>
+              </a:rPr>
+              <a:t>Lifecycle attestation</a:t>
+            </a:r>
+            <a:pPr algn="l" indent="0" marL="0">
+              <a:buNone/>
+            </a:pPr>
+            <a:r>
               <a:rPr lang="en-US" sz="1700" b="1" dirty="0">
                 <a:solidFill>
                   <a:srgbClr val="212121"/>
@@ -13907,56 +13942,7 @@
                 <a:ea typeface="Calibri" pitchFamily="34" charset="-122"/>
                 <a:cs typeface="Calibri" pitchFamily="34" charset="-120"/>
               </a:rPr>
-              <a:t>Layered, runtime attestation: </a:t>
-            </a:r>
-            <a:pPr algn="l" indent="0" marL="0">
-              <a:buNone/>
-            </a:pPr>
-            <a:r>
-              <a:rPr lang="en-US" sz="1700" dirty="0">
-                <a:solidFill>
-                  <a:srgbClr val="212121"/>
-                </a:solidFill>
-                <a:latin typeface="Calibri" pitchFamily="34" charset="0"/>
-                <a:ea typeface="Calibri" pitchFamily="34" charset="-122"/>
-                <a:cs typeface="Calibri" pitchFamily="34" charset="-120"/>
-              </a:rPr>
-              <a:t>extend boot-time trust via dynamic measurement of system components </a:t>
-            </a:r>
-            <a:pPr algn="l" indent="0" marL="0">
-              <a:spcAft>
-                <a:spcPts val="1000"/>
-              </a:spcAft>
-              <a:buNone/>
-            </a:pPr>
-            <a:r>
-              <a:rPr lang="en-US" sz="1700" b="1" dirty="0">
-                <a:solidFill>
-                  <a:srgbClr val="212121"/>
-                </a:solidFill>
-                <a:latin typeface="Calibri" pitchFamily="34" charset="0"/>
-                <a:ea typeface="Calibri" pitchFamily="34" charset="-122"/>
-                <a:cs typeface="Calibri" pitchFamily="34" charset="-120"/>
-              </a:rPr>
-              <a:t>and their context/dependencies</a:t>
-            </a:r>
-            <a:endParaRPr lang="en-US" sz="1700" dirty="0"/>
-          </a:p>
-          <a:p>
-            <a:pPr algn="l" marL="342900" indent="-342900">
-              <a:buSzPct val="100000"/>
-              <a:buChar char="•"/>
-            </a:pPr>
-            <a:r>
-              <a:rPr lang="en-US" sz="1700" b="1" dirty="0">
-                <a:solidFill>
-                  <a:srgbClr val="212121"/>
-                </a:solidFill>
-                <a:latin typeface="Calibri" pitchFamily="34" charset="0"/>
-                <a:ea typeface="Calibri" pitchFamily="34" charset="-122"/>
-                <a:cs typeface="Calibri" pitchFamily="34" charset="-120"/>
-              </a:rPr>
-              <a:t>Lifecycle attestation: </a:t>
+              <a:t>: </a:t>
             </a:r>
             <a:pPr algn="l" indent="0" marL="0">
               <a:buNone/>
@@ -14116,6 +14102,20 @@
               <a:buChar char="•"/>
             </a:pPr>
             <a:r>
+              <a:rPr lang="en-US" sz="1700" dirty="0">
+                <a:solidFill>
+                  <a:srgbClr val="212121"/>
+                </a:solidFill>
+                <a:latin typeface="Calibri" pitchFamily="34" charset="0"/>
+                <a:ea typeface="Calibri" pitchFamily="34" charset="-122"/>
+                <a:cs typeface="Calibri" pitchFamily="34" charset="-120"/>
+              </a:rPr>
+              <a:t>Motivation</a:t>
+            </a:r>
+            <a:pPr algn="l" indent="0" marL="0">
+              <a:buNone/>
+            </a:pPr>
+            <a:r>
               <a:rPr lang="en-US" sz="1700" b="1" dirty="0">
                 <a:solidFill>
                   <a:srgbClr val="212121"/>
@@ -14124,7 +14124,7 @@
                 <a:ea typeface="Calibri" pitchFamily="34" charset="-122"/>
                 <a:cs typeface="Calibri" pitchFamily="34" charset="-120"/>
               </a:rPr>
-              <a:t>Motivation: </a:t>
+              <a:t>: </a:t>
             </a:r>
             <a:pPr algn="l" indent="0" marL="0">
               <a:buNone/>
@@ -14153,6 +14153,20 @@
                 <a:cs typeface="Calibri" pitchFamily="34" charset="-120"/>
               </a:rPr>
               <a:t>proliferation of AI-generated software artifacts</a:t>
+            </a:r>
+            <a:pPr algn="l" indent="0" marL="0">
+              <a:buNone/>
+            </a:pPr>
+            <a:r>
+              <a:rPr lang="en-US" sz="1700" dirty="0">
+                <a:solidFill>
+                  <a:srgbClr val="212121"/>
+                </a:solidFill>
+                <a:latin typeface="Calibri" pitchFamily="34" charset="0"/>
+                <a:ea typeface="Calibri" pitchFamily="34" charset="-122"/>
+                <a:cs typeface="Calibri" pitchFamily="34" charset="-120"/>
+              </a:rPr>
+              <a:t>, amid the need for </a:t>
             </a:r>
             <a:pPr algn="l" indent="0" marL="0">
               <a:spcAft>
@@ -14161,7 +14175,7 @@
               <a:buNone/>
             </a:pPr>
             <a:r>
-              <a:rPr lang="en-US" sz="1700" dirty="0">
+              <a:rPr lang="en-US" sz="1700" b="1" dirty="0">
                 <a:solidFill>
                   <a:srgbClr val="212121"/>
                 </a:solidFill>
@@ -14169,7 +14183,7 @@
                 <a:ea typeface="Calibri" pitchFamily="34" charset="-122"/>
                 <a:cs typeface="Calibri" pitchFamily="34" charset="-120"/>
               </a:rPr>
-              <a:t>, amid the need for rapid re-certification of systems</a:t>
+              <a:t>rapid re-certification of systems</a:t>
             </a:r>
             <a:endParaRPr lang="en-US" sz="1700" dirty="0"/>
           </a:p>

--- a/docs/video_slides_draft.pptx
+++ b/docs/video_slides_draft.pptx
@@ -15224,46 +15224,7 @@
       </p:sp>
       <p:sp>
         <p:nvSpPr>
-          <p:cNvPr id="6" name="Text 4"/>
-          <p:cNvSpPr/>
-          <p:nvPr/>
-        </p:nvSpPr>
-        <p:spPr>
-          <a:xfrm>
-            <a:off x="4041648" y="1609344"/>
-            <a:ext cx="1737360" cy="256032"/>
-          </a:xfrm>
-          <a:prstGeom prst="rect">
-            <a:avLst/>
-          </a:prstGeom>
-          <a:noFill/>
-          <a:ln/>
-        </p:spPr>
-        <p:txBody>
-          <a:bodyPr wrap="square" lIns="0" tIns="0" rIns="0" bIns="0" rtlCol="0" anchor="ctr"/>
-          <a:lstStyle/>
-          <a:p>
-            <a:pPr algn="l" indent="0" marL="0">
-              <a:buNone/>
-            </a:pPr>
-            <a:r>
-              <a:rPr lang="en-US" sz="1000" i="1" dirty="0">
-                <a:solidFill>
-                  <a:srgbClr val="1E2761"/>
-                </a:solidFill>
-                <a:latin typeface="Calibri" pitchFamily="34" charset="0"/>
-                <a:ea typeface="Calibri" pitchFamily="34" charset="-122"/>
-                <a:cs typeface="Calibri" pitchFamily="34" charset="-120"/>
-              </a:rPr>
-              <a:t>bless ⇒ provision</a:t>
-            </a:r>
-            <a:endParaRPr lang="en-US" sz="1000" dirty="0"/>
-          </a:p>
-        </p:txBody>
-      </p:sp>
-      <p:sp>
-        <p:nvSpPr>
-          <p:cNvPr id="7" name="Shape 5"/>
+          <p:cNvPr id="6" name="Shape 4"/>
           <p:cNvSpPr/>
           <p:nvPr/>
         </p:nvSpPr>
@@ -15285,7 +15246,7 @@
       </p:sp>
       <p:sp>
         <p:nvSpPr>
-          <p:cNvPr id="8" name="Text 6"/>
+          <p:cNvPr id="7" name="Text 5"/>
           <p:cNvSpPr/>
           <p:nvPr/>
         </p:nvSpPr>
@@ -15324,7 +15285,7 @@
       </p:sp>
       <p:sp>
         <p:nvSpPr>
-          <p:cNvPr id="9" name="Shape 7"/>
+          <p:cNvPr id="8" name="Shape 6"/>
           <p:cNvSpPr/>
           <p:nvPr/>
         </p:nvSpPr>
@@ -15348,7 +15309,7 @@
       </p:sp>
       <p:sp>
         <p:nvSpPr>
-          <p:cNvPr id="10" name="Text 8"/>
+          <p:cNvPr id="9" name="Text 7"/>
           <p:cNvSpPr/>
           <p:nvPr/>
         </p:nvSpPr>
@@ -15387,7 +15348,7 @@
       </p:sp>
       <p:sp>
         <p:nvSpPr>
-          <p:cNvPr id="11" name="Shape 9"/>
+          <p:cNvPr id="10" name="Shape 8"/>
           <p:cNvSpPr/>
           <p:nvPr/>
         </p:nvSpPr>
@@ -15409,7 +15370,7 @@
       </p:sp>
       <p:sp>
         <p:nvSpPr>
-          <p:cNvPr id="12" name="Text 10"/>
+          <p:cNvPr id="11" name="Text 9"/>
           <p:cNvSpPr/>
           <p:nvPr/>
         </p:nvSpPr>
@@ -15448,7 +15409,7 @@
       </p:sp>
       <p:sp>
         <p:nvSpPr>
-          <p:cNvPr id="13" name="Shape 11"/>
+          <p:cNvPr id="12" name="Shape 10"/>
           <p:cNvSpPr/>
           <p:nvPr/>
         </p:nvSpPr>
@@ -15470,7 +15431,7 @@
       </p:sp>
       <p:sp>
         <p:nvSpPr>
-          <p:cNvPr id="14" name="Text 12"/>
+          <p:cNvPr id="13" name="Text 11"/>
           <p:cNvSpPr/>
           <p:nvPr/>
         </p:nvSpPr>
@@ -15509,7 +15470,7 @@
       </p:sp>
       <p:sp>
         <p:nvSpPr>
-          <p:cNvPr id="15" name="Shape 13"/>
+          <p:cNvPr id="14" name="Shape 12"/>
           <p:cNvSpPr/>
           <p:nvPr/>
         </p:nvSpPr>
@@ -15531,7 +15492,7 @@
       </p:sp>
       <p:sp>
         <p:nvSpPr>
-          <p:cNvPr id="16" name="Text 14"/>
+          <p:cNvPr id="15" name="Text 13"/>
           <p:cNvSpPr/>
           <p:nvPr/>
         </p:nvSpPr>
@@ -15570,7 +15531,7 @@
       </p:sp>
       <p:sp>
         <p:nvSpPr>
-          <p:cNvPr id="17" name="Shape 15"/>
+          <p:cNvPr id="16" name="Shape 14"/>
           <p:cNvSpPr/>
           <p:nvPr/>
         </p:nvSpPr>
@@ -15594,7 +15555,7 @@
       </p:sp>
       <p:sp>
         <p:nvSpPr>
-          <p:cNvPr id="18" name="Shape 16"/>
+          <p:cNvPr id="17" name="Shape 15"/>
           <p:cNvSpPr/>
           <p:nvPr/>
         </p:nvSpPr>
@@ -15617,7 +15578,7 @@
       </p:sp>
       <p:sp>
         <p:nvSpPr>
-          <p:cNvPr id="19" name="Shape 17"/>
+          <p:cNvPr id="18" name="Shape 16"/>
           <p:cNvSpPr/>
           <p:nvPr/>
         </p:nvSpPr>
@@ -15640,7 +15601,7 @@
       </p:sp>
       <p:sp>
         <p:nvSpPr>
-          <p:cNvPr id="20" name="Shape 18"/>
+          <p:cNvPr id="19" name="Shape 17"/>
           <p:cNvSpPr/>
           <p:nvPr/>
         </p:nvSpPr>
@@ -15664,14 +15625,14 @@
       </p:sp>
       <p:sp>
         <p:nvSpPr>
-          <p:cNvPr id="21" name="Text 19"/>
-          <p:cNvSpPr/>
-          <p:nvPr/>
-        </p:nvSpPr>
-        <p:spPr>
-          <a:xfrm>
-            <a:off x="228600" y="3977640"/>
-            <a:ext cx="1097280" cy="822960"/>
+          <p:cNvPr id="20" name="Text 18"/>
+          <p:cNvSpPr/>
+          <p:nvPr/>
+        </p:nvSpPr>
+        <p:spPr>
+          <a:xfrm>
+            <a:off x="1389888" y="3931920"/>
+            <a:ext cx="1088136" cy="822960"/>
           </a:xfrm>
           <a:prstGeom prst="rect">
             <a:avLst/>
@@ -15687,7 +15648,7 @@
               <a:buNone/>
             </a:pPr>
             <a:r>
-              <a:rPr lang="en-US" sz="1000" i="1" dirty="0">
+              <a:rPr lang="en-US" sz="1000" dirty="0">
                 <a:solidFill>
                   <a:srgbClr val="A33327"/>
                 </a:solidFill>
@@ -15695,32 +15656,15 @@
                 <a:ea typeface="Calibri" pitchFamily="34" charset="-122"/>
                 <a:cs typeface="Calibri" pitchFamily="34" charset="-120"/>
               </a:rPr>
-              <a:t>no repair chain:</a:t>
+              <a:t>on fail:  no repair chain =&gt; escalate</a:t>
             </a:r>
             <a:endParaRPr lang="en-US" sz="1000" dirty="0"/>
           </a:p>
-          <a:p>
-            <a:pPr algn="r" indent="0" marL="0">
-              <a:buNone/>
-            </a:pPr>
-            <a:r>
-              <a:rPr lang="en-US" sz="1000" i="1" dirty="0">
-                <a:solidFill>
-                  <a:srgbClr val="A33327"/>
-                </a:solidFill>
-                <a:latin typeface="Calibri" pitchFamily="34" charset="0"/>
-                <a:ea typeface="Calibri" pitchFamily="34" charset="-122"/>
-                <a:cs typeface="Calibri" pitchFamily="34" charset="-120"/>
-              </a:rPr>
-              <a:t>fail ⇒ escalate</a:t>
-            </a:r>
-            <a:endParaRPr lang="en-US" sz="1000" dirty="0"/>
-          </a:p>
-        </p:txBody>
-      </p:sp>
-      <p:sp>
-        <p:nvSpPr>
-          <p:cNvPr id="22" name="Shape 20"/>
+        </p:txBody>
+      </p:sp>
+      <p:sp>
+        <p:nvSpPr>
+          <p:cNvPr id="21" name="Shape 19"/>
           <p:cNvSpPr/>
           <p:nvPr/>
         </p:nvSpPr>
@@ -15743,7 +15687,7 @@
       </p:sp>
       <p:sp>
         <p:nvSpPr>
-          <p:cNvPr id="23" name="Shape 21"/>
+          <p:cNvPr id="22" name="Shape 20"/>
           <p:cNvSpPr/>
           <p:nvPr/>
         </p:nvSpPr>
@@ -15767,7 +15711,7 @@
       </p:sp>
       <p:sp>
         <p:nvSpPr>
-          <p:cNvPr id="24" name="Text 22"/>
+          <p:cNvPr id="23" name="Text 21"/>
           <p:cNvSpPr/>
           <p:nvPr/>
         </p:nvSpPr>
@@ -15790,7 +15734,7 @@
               <a:buNone/>
             </a:pPr>
             <a:r>
-              <a:rPr lang="en-US" sz="1050" i="1" dirty="0">
+              <a:rPr lang="en-US" sz="1050" dirty="0">
                 <a:solidFill>
                   <a:srgbClr val="2C7A3F"/>
                 </a:solidFill>
@@ -15806,7 +15750,7 @@
       </p:sp>
       <p:sp>
         <p:nvSpPr>
-          <p:cNvPr id="25" name="Shape 23"/>
+          <p:cNvPr id="24" name="Shape 22"/>
           <p:cNvSpPr/>
           <p:nvPr/>
         </p:nvSpPr>
@@ -15828,7 +15772,7 @@
       </p:sp>
       <p:sp>
         <p:nvSpPr>
-          <p:cNvPr id="26" name="Text 24"/>
+          <p:cNvPr id="25" name="Text 23"/>
           <p:cNvSpPr/>
           <p:nvPr/>
         </p:nvSpPr>
@@ -15884,7 +15828,7 @@
       </p:sp>
       <p:sp>
         <p:nvSpPr>
-          <p:cNvPr id="27" name="Shape 25"/>
+          <p:cNvPr id="26" name="Shape 24"/>
           <p:cNvSpPr/>
           <p:nvPr/>
         </p:nvSpPr>
@@ -15908,7 +15852,7 @@
       </p:sp>
       <p:sp>
         <p:nvSpPr>
-          <p:cNvPr id="28" name="Text 26"/>
+          <p:cNvPr id="27" name="Text 25"/>
           <p:cNvSpPr/>
           <p:nvPr/>
         </p:nvSpPr>
@@ -15947,7 +15891,7 @@
       </p:sp>
       <p:sp>
         <p:nvSpPr>
-          <p:cNvPr id="29" name="Shape 27"/>
+          <p:cNvPr id="28" name="Shape 26"/>
           <p:cNvSpPr/>
           <p:nvPr/>
         </p:nvSpPr>
@@ -15969,7 +15913,7 @@
       </p:sp>
       <p:sp>
         <p:nvSpPr>
-          <p:cNvPr id="30" name="Text 28"/>
+          <p:cNvPr id="29" name="Text 27"/>
           <p:cNvSpPr/>
           <p:nvPr/>
         </p:nvSpPr>
@@ -16008,7 +15952,7 @@
       </p:sp>
       <p:sp>
         <p:nvSpPr>
-          <p:cNvPr id="31" name="Shape 29"/>
+          <p:cNvPr id="30" name="Shape 28"/>
           <p:cNvSpPr/>
           <p:nvPr/>
         </p:nvSpPr>
@@ -16032,7 +15976,7 @@
       </p:sp>
       <p:sp>
         <p:nvSpPr>
-          <p:cNvPr id="32" name="Shape 30"/>
+          <p:cNvPr id="31" name="Shape 29"/>
           <p:cNvSpPr/>
           <p:nvPr/>
         </p:nvSpPr>
@@ -16054,7 +15998,7 @@
       </p:sp>
       <p:sp>
         <p:nvSpPr>
-          <p:cNvPr id="33" name="Text 31"/>
+          <p:cNvPr id="32" name="Text 30"/>
           <p:cNvSpPr/>
           <p:nvPr/>
         </p:nvSpPr>
@@ -16093,7 +16037,7 @@
       </p:sp>
       <p:sp>
         <p:nvSpPr>
-          <p:cNvPr id="34" name="Shape 32"/>
+          <p:cNvPr id="33" name="Shape 31"/>
           <p:cNvSpPr/>
           <p:nvPr/>
         </p:nvSpPr>
@@ -16117,7 +16061,7 @@
       </p:sp>
       <p:sp>
         <p:nvSpPr>
-          <p:cNvPr id="35" name="Shape 33"/>
+          <p:cNvPr id="34" name="Shape 32"/>
           <p:cNvSpPr/>
           <p:nvPr/>
         </p:nvSpPr>
@@ -16139,7 +16083,7 @@
       </p:sp>
       <p:sp>
         <p:nvSpPr>
-          <p:cNvPr id="36" name="Text 34"/>
+          <p:cNvPr id="35" name="Text 33"/>
           <p:cNvSpPr/>
           <p:nvPr/>
         </p:nvSpPr>
@@ -16178,13 +16122,13 @@
       </p:sp>
       <p:sp>
         <p:nvSpPr>
-          <p:cNvPr id="37" name="Text 35"/>
-          <p:cNvSpPr/>
-          <p:nvPr/>
-        </p:nvSpPr>
-        <p:spPr>
-          <a:xfrm>
-            <a:off x="8046720" y="3767328"/>
+          <p:cNvPr id="36" name="Text 34"/>
+          <p:cNvSpPr/>
+          <p:nvPr/>
+        </p:nvSpPr>
+        <p:spPr>
+          <a:xfrm>
+            <a:off x="7763256" y="3767328"/>
             <a:ext cx="4023360" cy="274320"/>
           </a:xfrm>
           <a:prstGeom prst="rect">
@@ -16201,7 +16145,7 @@
               <a:buNone/>
             </a:pPr>
             <a:r>
-              <a:rPr lang="en-US" sz="1050" i="1" dirty="0">
+              <a:rPr lang="en-US" sz="1050" dirty="0">
                 <a:solidFill>
                   <a:srgbClr val="A33327"/>
                 </a:solidFill>
@@ -16209,15 +16153,32 @@
                 <a:ea typeface="Calibri" pitchFamily="34" charset="-122"/>
                 <a:cs typeface="Calibri" pitchFamily="34" charset="-120"/>
               </a:rPr>
-              <a:t>red → = on-fail handoff (attempts spent, changes restored)</a:t>
+              <a:t>on-fail: handoff to next repair KS </a:t>
             </a:r>
             <a:endParaRPr lang="en-US" sz="1050" dirty="0"/>
           </a:p>
-        </p:txBody>
-      </p:sp>
-      <p:sp>
-        <p:nvSpPr>
-          <p:cNvPr id="38" name="Shape 36"/>
+          <a:p>
+            <a:pPr algn="ctr" indent="0" marL="0">
+              <a:buNone/>
+            </a:pPr>
+            <a:r>
+              <a:rPr lang="en-US" sz="1050" dirty="0">
+                <a:solidFill>
+                  <a:srgbClr val="A33327"/>
+                </a:solidFill>
+                <a:latin typeface="Calibri" pitchFamily="34" charset="0"/>
+                <a:ea typeface="Calibri" pitchFamily="34" charset="-122"/>
+                <a:cs typeface="Calibri" pitchFamily="34" charset="-120"/>
+              </a:rPr>
+              <a:t>(attempts spent, changes restored)</a:t>
+            </a:r>
+            <a:endParaRPr lang="en-US" sz="1050" dirty="0"/>
+          </a:p>
+        </p:txBody>
+      </p:sp>
+      <p:sp>
+        <p:nvSpPr>
+          <p:cNvPr id="37" name="Shape 35"/>
           <p:cNvSpPr/>
           <p:nvPr/>
         </p:nvSpPr>
@@ -16240,7 +16201,7 @@
       </p:sp>
       <p:sp>
         <p:nvSpPr>
-          <p:cNvPr id="39" name="Shape 37"/>
+          <p:cNvPr id="38" name="Shape 36"/>
           <p:cNvSpPr/>
           <p:nvPr/>
         </p:nvSpPr>
@@ -16263,7 +16224,7 @@
       </p:sp>
       <p:sp>
         <p:nvSpPr>
-          <p:cNvPr id="40" name="Shape 38"/>
+          <p:cNvPr id="39" name="Shape 37"/>
           <p:cNvSpPr/>
           <p:nvPr/>
         </p:nvSpPr>
@@ -16286,7 +16247,7 @@
       </p:sp>
       <p:sp>
         <p:nvSpPr>
-          <p:cNvPr id="41" name="Shape 39"/>
+          <p:cNvPr id="40" name="Shape 38"/>
           <p:cNvSpPr/>
           <p:nvPr/>
         </p:nvSpPr>
@@ -16309,7 +16270,7 @@
       </p:sp>
       <p:sp>
         <p:nvSpPr>
-          <p:cNvPr id="42" name="Shape 40"/>
+          <p:cNvPr id="41" name="Shape 39"/>
           <p:cNvSpPr/>
           <p:nvPr/>
         </p:nvSpPr>
@@ -16333,13 +16294,13 @@
       </p:sp>
       <p:sp>
         <p:nvSpPr>
-          <p:cNvPr id="43" name="Text 41"/>
-          <p:cNvSpPr/>
-          <p:nvPr/>
-        </p:nvSpPr>
-        <p:spPr>
-          <a:xfrm>
-            <a:off x="5852160" y="1755648"/>
+          <p:cNvPr id="42" name="Text 40"/>
+          <p:cNvSpPr/>
+          <p:nvPr/>
+        </p:nvSpPr>
+        <p:spPr>
+          <a:xfrm>
+            <a:off x="6025896" y="1755648"/>
             <a:ext cx="4937760" cy="274320"/>
           </a:xfrm>
           <a:prstGeom prst="rect">
@@ -16364,7 +16325,7 @@
                 <a:ea typeface="Calibri" pitchFamily="34" charset="-122"/>
                 <a:cs typeface="Calibri" pitchFamily="34" charset="-120"/>
               </a:rPr>
-              <a:t>on-pass: re-verify · restart-episode ⇒ fresh measurement</a:t>
+              <a:t>on-pass: restart-episode ⇒ fresh measurement</a:t>
             </a:r>
             <a:endParaRPr lang="en-US" sz="1100" dirty="0"/>
           </a:p>
@@ -16372,7 +16333,7 @@
       </p:sp>
       <p:sp>
         <p:nvSpPr>
-          <p:cNvPr id="44" name="Shape 42"/>
+          <p:cNvPr id="43" name="Shape 41"/>
           <p:cNvSpPr/>
           <p:nvPr/>
         </p:nvSpPr>
@@ -16395,7 +16356,7 @@
       </p:sp>
       <p:sp>
         <p:nvSpPr>
-          <p:cNvPr id="45" name="Shape 43"/>
+          <p:cNvPr id="44" name="Shape 42"/>
           <p:cNvSpPr/>
           <p:nvPr/>
         </p:nvSpPr>
@@ -16418,7 +16379,7 @@
       </p:sp>
       <p:sp>
         <p:nvSpPr>
-          <p:cNvPr id="46" name="Shape 44"/>
+          <p:cNvPr id="45" name="Shape 43"/>
           <p:cNvSpPr/>
           <p:nvPr/>
         </p:nvSpPr>
@@ -16442,13 +16403,13 @@
       </p:sp>
       <p:sp>
         <p:nvSpPr>
-          <p:cNvPr id="47" name="Text 45"/>
-          <p:cNvSpPr/>
-          <p:nvPr/>
-        </p:nvSpPr>
-        <p:spPr>
-          <a:xfrm>
-            <a:off x="6583680" y="4773168"/>
+          <p:cNvPr id="46" name="Text 44"/>
+          <p:cNvSpPr/>
+          <p:nvPr/>
+        </p:nvSpPr>
+        <p:spPr>
+          <a:xfrm>
+            <a:off x="6766560" y="4773168"/>
             <a:ext cx="3291840" cy="274320"/>
           </a:xfrm>
           <a:prstGeom prst="rect">
@@ -16481,7 +16442,7 @@
       </p:sp>
       <p:sp>
         <p:nvSpPr>
-          <p:cNvPr id="48" name="Shape 46"/>
+          <p:cNvPr id="47" name="Shape 45"/>
           <p:cNvSpPr/>
           <p:nvPr/>
         </p:nvSpPr>
@@ -16504,7 +16465,7 @@
       </p:sp>
       <p:sp>
         <p:nvSpPr>
-          <p:cNvPr id="49" name="Shape 47"/>
+          <p:cNvPr id="48" name="Shape 46"/>
           <p:cNvSpPr/>
           <p:nvPr/>
         </p:nvSpPr>
@@ -16527,7 +16488,7 @@
       </p:sp>
       <p:sp>
         <p:nvSpPr>
-          <p:cNvPr id="50" name="Shape 48"/>
+          <p:cNvPr id="49" name="Shape 47"/>
           <p:cNvSpPr/>
           <p:nvPr/>
         </p:nvSpPr>
@@ -16551,7 +16512,7 @@
       </p:sp>
       <p:sp>
         <p:nvSpPr>
-          <p:cNvPr id="51" name="Text 49"/>
+          <p:cNvPr id="50" name="Text 48"/>
           <p:cNvSpPr/>
           <p:nvPr/>
         </p:nvSpPr>
@@ -16590,7 +16551,7 @@
       </p:sp>
       <p:sp>
         <p:nvSpPr>
-          <p:cNvPr id="52" name="Shape 50"/>
+          <p:cNvPr id="51" name="Shape 49"/>
           <p:cNvSpPr/>
           <p:nvPr/>
         </p:nvSpPr>
@@ -16612,7 +16573,7 @@
       </p:sp>
       <p:sp>
         <p:nvSpPr>
-          <p:cNvPr id="53" name="Text 51"/>
+          <p:cNvPr id="52" name="Text 50"/>
           <p:cNvSpPr/>
           <p:nvPr/>
         </p:nvSpPr>
@@ -16733,89 +16694,6 @@
               <a:t>.</a:t>
             </a:r>
             <a:endParaRPr lang="en-US" sz="1300" dirty="0"/>
-          </a:p>
-        </p:txBody>
-      </p:sp>
-      <p:sp>
-        <p:nvSpPr>
-          <p:cNvPr id="54" name="Shape 52"/>
-          <p:cNvSpPr/>
-          <p:nvPr/>
-        </p:nvSpPr>
-        <p:spPr>
-          <a:xfrm>
-            <a:off x="8961120" y="5989320"/>
-            <a:ext cx="2560320" cy="731520"/>
-          </a:xfrm>
-          <a:prstGeom prst="roundRect">
-            <a:avLst>
-              <a:gd name="adj" fmla="val 8750"/>
-            </a:avLst>
-          </a:prstGeom>
-          <a:solidFill>
-            <a:srgbClr val="F2F4F8"/>
-          </a:solidFill>
-          <a:ln w="12700">
-            <a:solidFill>
-              <a:srgbClr val="CADCFC"/>
-            </a:solidFill>
-            <a:prstDash val="solid"/>
-          </a:ln>
-        </p:spPr>
-      </p:sp>
-      <p:sp>
-        <p:nvSpPr>
-          <p:cNvPr id="55" name="Text 53"/>
-          <p:cNvSpPr/>
-          <p:nvPr/>
-        </p:nvSpPr>
-        <p:spPr>
-          <a:xfrm>
-            <a:off x="9098280" y="5989320"/>
-            <a:ext cx="2331720" cy="731520"/>
-          </a:xfrm>
-          <a:prstGeom prst="rect">
-            <a:avLst/>
-          </a:prstGeom>
-          <a:noFill/>
-          <a:ln/>
-        </p:spPr>
-        <p:txBody>
-          <a:bodyPr wrap="square" lIns="0" tIns="0" rIns="0" bIns="0" rtlCol="0" anchor="ctr"/>
-          <a:lstStyle/>
-          <a:p>
-            <a:pPr algn="l" indent="0" marL="0">
-              <a:buNone/>
-            </a:pPr>
-            <a:r>
-              <a:rPr lang="en-US" sz="1100" dirty="0">
-                <a:solidFill>
-                  <a:srgbClr val="212121"/>
-                </a:solidFill>
-                <a:latin typeface="Courier New" pitchFamily="34" charset="0"/>
-                <a:ea typeface="Courier New" pitchFamily="34" charset="-122"/>
-                <a:cs typeface="Courier New" pitchFamily="34" charset="-120"/>
-              </a:rPr>
-              <a:t>✓ attested   ✗ refuted</a:t>
-            </a:r>
-            <a:endParaRPr lang="en-US" sz="1100" dirty="0"/>
-          </a:p>
-          <a:p>
-            <a:pPr algn="l" indent="0" marL="0">
-              <a:buNone/>
-            </a:pPr>
-            <a:r>
-              <a:rPr lang="en-US" sz="1100" dirty="0">
-                <a:solidFill>
-                  <a:srgbClr val="212121"/>
-                </a:solidFill>
-                <a:latin typeface="Courier New" pitchFamily="34" charset="0"/>
-                <a:ea typeface="Courier New" pitchFamily="34" charset="-122"/>
-                <a:cs typeface="Courier New" pitchFamily="34" charset="-120"/>
-              </a:rPr>
-              <a:t>?  poisoned (fail-closed)</a:t>
-            </a:r>
-            <a:endParaRPr lang="en-US" sz="1100" dirty="0"/>
           </a:p>
         </p:txBody>
       </p:sp>
@@ -21669,6 +21547,106 @@
                 <a:cs typeface="Courier New" pitchFamily="34" charset="-120"/>
               </a:rPr>
               <a:t>./examples/demo_isolette.sh --scenes 1</a:t>
+            </a:r>
+            <a:endParaRPr lang="en-US" sz="1100" dirty="0"/>
+          </a:p>
+        </p:txBody>
+      </p:sp>
+      <p:sp>
+        <p:nvSpPr>
+          <p:cNvPr id="17" name="Shape 15"/>
+          <p:cNvSpPr/>
+          <p:nvPr/>
+        </p:nvSpPr>
+        <p:spPr>
+          <a:xfrm>
+            <a:off x="6172200" y="5660136"/>
+            <a:ext cx="2734056" cy="731520"/>
+          </a:xfrm>
+          <a:prstGeom prst="roundRect">
+            <a:avLst>
+              <a:gd name="adj" fmla="val 8750"/>
+            </a:avLst>
+          </a:prstGeom>
+          <a:solidFill>
+            <a:srgbClr val="F2F4F8"/>
+          </a:solidFill>
+          <a:ln w="12700">
+            <a:solidFill>
+              <a:srgbClr val="CADCFC"/>
+            </a:solidFill>
+            <a:prstDash val="solid"/>
+          </a:ln>
+        </p:spPr>
+      </p:sp>
+      <p:sp>
+        <p:nvSpPr>
+          <p:cNvPr id="18" name="Text 16"/>
+          <p:cNvSpPr/>
+          <p:nvPr/>
+        </p:nvSpPr>
+        <p:spPr>
+          <a:xfrm>
+            <a:off x="6309360" y="5660136"/>
+            <a:ext cx="2587752" cy="731520"/>
+          </a:xfrm>
+          <a:prstGeom prst="rect">
+            <a:avLst/>
+          </a:prstGeom>
+          <a:noFill/>
+          <a:ln/>
+        </p:spPr>
+        <p:txBody>
+          <a:bodyPr wrap="square" lIns="0" tIns="0" rIns="0" bIns="0" rtlCol="0" anchor="ctr"/>
+          <a:lstStyle/>
+          <a:p>
+            <a:pPr algn="l" indent="0" marL="0">
+              <a:buNone/>
+            </a:pPr>
+            <a:r>
+              <a:rPr lang="en-US" sz="1100" dirty="0">
+                <a:solidFill>
+                  <a:srgbClr val="212121"/>
+                </a:solidFill>
+                <a:latin typeface="Courier New" pitchFamily="34" charset="0"/>
+                <a:ea typeface="Courier New" pitchFamily="34" charset="-122"/>
+                <a:cs typeface="Courier New" pitchFamily="34" charset="-120"/>
+              </a:rPr>
+              <a:t>✓ attested   </a:t>
+            </a:r>
+            <a:endParaRPr lang="en-US" sz="1100" dirty="0"/>
+          </a:p>
+          <a:p>
+            <a:pPr algn="l" indent="0" marL="0">
+              <a:buNone/>
+            </a:pPr>
+            <a:r>
+              <a:rPr lang="en-US" sz="1100" dirty="0">
+                <a:solidFill>
+                  <a:srgbClr val="212121"/>
+                </a:solidFill>
+                <a:latin typeface="Courier New" pitchFamily="34" charset="0"/>
+                <a:ea typeface="Courier New" pitchFamily="34" charset="-122"/>
+                <a:cs typeface="Courier New" pitchFamily="34" charset="-120"/>
+              </a:rPr>
+              <a:t>✗ refuted</a:t>
+            </a:r>
+            <a:endParaRPr lang="en-US" sz="1100" dirty="0"/>
+          </a:p>
+          <a:p>
+            <a:pPr algn="l" indent="0" marL="0">
+              <a:buNone/>
+            </a:pPr>
+            <a:r>
+              <a:rPr lang="en-US" sz="1100" dirty="0">
+                <a:solidFill>
+                  <a:srgbClr val="212121"/>
+                </a:solidFill>
+                <a:latin typeface="Courier New" pitchFamily="34" charset="0"/>
+                <a:ea typeface="Courier New" pitchFamily="34" charset="-122"/>
+                <a:cs typeface="Courier New" pitchFamily="34" charset="-120"/>
+              </a:rPr>
+              <a:t>? poisoned (untrustworthy)</a:t>
             </a:r>
             <a:endParaRPr lang="en-US" sz="1100" dirty="0"/>
           </a:p>

--- a/docs/video_slides_draft.pptx
+++ b/docs/video_slides_draft.pptx
@@ -16819,7 +16819,7 @@
                 <a:ea typeface="Calibri" pitchFamily="34" charset="-122"/>
                 <a:cs typeface="Calibri" pitchFamily="34" charset="-120"/>
               </a:rPr>
-              <a:t> — the shared store: every measurement lands as an entry with its condition and standing; three segments (provision · certify · escalate) plus a full history of every change</a:t>
+              <a:t> — a collection of entries:  the shared measurement store updated cooperatively by blackboard components</a:t>
             </a:r>
             <a:endParaRPr lang="en-US" sz="1600" dirty="0"/>
           </a:p>
@@ -16854,7 +16854,7 @@
                 <a:ea typeface="Calibri" pitchFamily="34" charset="-122"/>
                 <a:cs typeface="Calibri" pitchFamily="34" charset="-120"/>
               </a:rPr>
-              <a:t> — one measurement under judgment, identified by its key: the measurement, its condition, its standing, its repair history</a:t>
+              <a:t> — a measurement under judgment:  its measurement content, current standing, repair history</a:t>
             </a:r>
             <a:endParaRPr lang="en-US" sz="1600" dirty="0"/>
           </a:p>
@@ -16889,7 +16889,7 @@
                 <a:ea typeface="Calibri" pitchFamily="34" charset="-122"/>
                 <a:cs typeface="Calibri" pitchFamily="34" charset="-120"/>
               </a:rPr>
-              <a:t> — one full judgment of an entry: the attestation runs once and its verdicts are memoized until the episode ends — or is restarted for genuinely fresh measurement</a:t>
+              <a:t> — one full judgment of an entry: attestation records verdicts, must be restarted for fresh measurement</a:t>
             </a:r>
             <a:endParaRPr lang="en-US" sz="1600" dirty="0"/>
           </a:p>
@@ -16924,7 +16924,7 @@
                 <a:ea typeface="Calibri" pitchFamily="34" charset="-122"/>
                 <a:cs typeface="Calibri" pitchFamily="34" charset="-120"/>
               </a:rPr>
-              <a:t> — the division of blackboard entries among different workflow stages: each knowledge source watches its own collection of keys, and an entry sits in the partition of whichever rung currently owns it</a:t>
+              <a:t> — the division of blackboard entries among different workflow stages (i.e. provision, certify, escalate) </a:t>
             </a:r>
             <a:endParaRPr lang="en-US" sz="1600" dirty="0"/>
           </a:p>
@@ -16959,7 +16959,7 @@
                 <a:ea typeface="Calibri" pitchFamily="34" charset="-122"/>
                 <a:cs typeface="Calibri" pitchFamily="34" charset="-120"/>
               </a:rPr>
-              <a:t> — the cycle: evaluates every entry (provision first), dispatches keys onto outcome-routed chains, advances or hands off, escalates; halts only when everything is in good standing</a:t>
+              <a:t> — evaluates every entry (once provisioned), dispatches keys onto outcome-routed chains, advances or hands off, escalates, halts only when entries are in good standing</a:t>
             </a:r>
             <a:endParaRPr lang="en-US" sz="1600" dirty="0"/>
           </a:p>
@@ -16994,7 +16994,7 @@
                 <a:ea typeface="Calibri" pitchFamily="34" charset="-122"/>
                 <a:cs typeface="Calibri" pitchFamily="34" charset="-120"/>
               </a:rPr>
-              <a:t> — a repair rung: operates only on entries in its partition (optionally a single component), bounded by max_attempts; its work is always re-judged, never trusted</a:t>
+              <a:t> — operates only on entries in its partition (optionally a single component), bounded by max attempts; its work is always re-judged, never trusted</a:t>
             </a:r>
             <a:endParaRPr lang="en-US" sz="1600" dirty="0"/>
           </a:p>
@@ -17013,6 +17013,62 @@
                 <a:cs typeface="Calibri" pitchFamily="34" charset="-120"/>
               </a:rPr>
               <a:t>Route</a:t>
+            </a:r>
+            <a:pPr algn="l" indent="0" marL="0">
+              <a:buNone/>
+            </a:pPr>
+            <a:r>
+              <a:rPr lang="en-US" sz="1600" dirty="0">
+                <a:solidFill>
+                  <a:srgbClr val="212121"/>
+                </a:solidFill>
+                <a:latin typeface="Calibri" pitchFamily="34" charset="0"/>
+                <a:ea typeface="Calibri" pitchFamily="34" charset="-122"/>
+                <a:cs typeface="Calibri" pitchFamily="34" charset="-120"/>
+              </a:rPr>
+              <a:t> — the per-key control flow chains: </a:t>
+            </a:r>
+            <a:pPr algn="l" indent="0" marL="0">
+              <a:buNone/>
+            </a:pPr>
+            <a:r>
+              <a:rPr lang="en-US" sz="1600" dirty="0">
+                <a:solidFill>
+                  <a:srgbClr val="212121"/>
+                </a:solidFill>
+                <a:latin typeface="Courier New" pitchFamily="34" charset="0"/>
+                <a:ea typeface="Courier New" pitchFamily="34" charset="-122"/>
+                <a:cs typeface="Courier New" pitchFamily="34" charset="-120"/>
+              </a:rPr>
+              <a:t>on_fail </a:t>
+            </a:r>
+            <a:pPr algn="l" indent="0" marL="0">
+              <a:buNone/>
+            </a:pPr>
+            <a:r>
+              <a:rPr lang="en-US" sz="1600" dirty="0">
+                <a:solidFill>
+                  <a:srgbClr val="212121"/>
+                </a:solidFill>
+                <a:latin typeface="Calibri" pitchFamily="34" charset="0"/>
+                <a:ea typeface="Calibri" pitchFamily="34" charset="-122"/>
+                <a:cs typeface="Calibri" pitchFamily="34" charset="-120"/>
+              </a:rPr>
+              <a:t>= the repair ladder, </a:t>
+            </a:r>
+            <a:pPr algn="l" indent="0" marL="0">
+              <a:buNone/>
+            </a:pPr>
+            <a:r>
+              <a:rPr lang="en-US" sz="1600" dirty="0">
+                <a:solidFill>
+                  <a:srgbClr val="212121"/>
+                </a:solidFill>
+                <a:latin typeface="Courier New" pitchFamily="34" charset="0"/>
+                <a:ea typeface="Courier New" pitchFamily="34" charset="-122"/>
+                <a:cs typeface="Courier New" pitchFamily="34" charset="-120"/>
+              </a:rPr>
+              <a:t>on_pass </a:t>
             </a:r>
             <a:pPr algn="l" indent="0" marL="0">
               <a:spcAft>
@@ -17029,7 +17085,7 @@
                 <a:ea typeface="Calibri" pitchFamily="34" charset="-122"/>
                 <a:cs typeface="Calibri" pitchFamily="34" charset="-120"/>
               </a:rPr>
-              <a:t> — the per-key chains: on_fail = the repair ladder, on_pass = a confirmation chain before an entry may rest in good standing</a:t>
+              <a:t>= a confirmation chain before good standing</a:t>
             </a:r>
             <a:endParaRPr lang="en-US" sz="1600" dirty="0"/>
           </a:p>
@@ -17064,7 +17120,7 @@
                 <a:ea typeface="Calibri" pitchFamily="34" charset="-122"/>
                 <a:cs typeface="Calibri" pitchFamily="34" charset="-120"/>
               </a:rPr>
-              <a:t> — the blackboard's running record of every change across all segments — measurements, repairs, verdicts — the audit trail of the repair lifecycle</a:t>
+              <a:t> — the blackboard's running record of every change across all partitions (measurements, repairs, verdicts), documenting the audit trail of the repair lifecycle</a:t>
             </a:r>
             <a:endParaRPr lang="en-US" sz="1600" dirty="0"/>
           </a:p>
@@ -19562,7 +19618,7 @@
                 <a:ea typeface="Cambria" pitchFamily="34" charset="-122"/>
                 <a:cs typeface="Cambria" pitchFamily="34" charset="-120"/>
               </a:rPr>
-              <a:t>The isolette</a:t>
+              <a:t>The Isolette Example</a:t>
             </a:r>
             <a:endParaRPr lang="en-US" sz="3400" dirty="0"/>
           </a:p>
@@ -19619,16 +19675,17 @@
                 <a:ea typeface="Calibri" pitchFamily="34" charset="-122"/>
                 <a:cs typeface="Calibri" pitchFamily="34" charset="-120"/>
               </a:rPr>
-              <a:t>an infant-incubator thermostat — regulate and monitor functions keep a newborn's environment in a safe temperature range; heat control on/off</a:t>
+              <a:t>infant-incubator thermostat that regulates and monitors a newborn's environment to maintain a safe temperature range (heat control on/off)</a:t>
             </a:r>
             <a:endParaRPr lang="en-US" sz="1350" dirty="0"/>
           </a:p>
           <a:p>
-            <a:pPr algn="l" indent="0" marL="0">
+            <a:pPr marL="628650" lvl="1" indent="-171450">
               <a:spcAft>
                 <a:spcPts val="1000"/>
               </a:spcAft>
-              <a:buNone/>
+              <a:buFont typeface="Courier New" panose="02070309020205020404" pitchFamily="49" charset="0"/>
+              <a:buChar char="o"/>
             </a:pPr>
             <a:r>
               <a:rPr lang="en-US" sz="1100" i="1" dirty="0">
@@ -19660,6 +19717,9 @@
               <a:t>The relevance: </a:t>
             </a:r>
             <a:pPr algn="l" indent="0" marL="0">
+              <a:spcAft>
+                <a:spcPts val="200"/>
+              </a:spcAft>
               <a:buNone/>
             </a:pPr>
             <a:r>
@@ -19671,10 +19731,29 @@
                 <a:ea typeface="Calibri" pitchFamily="34" charset="-122"/>
                 <a:cs typeface="Calibri" pitchFamily="34" charset="-120"/>
               </a:rPr>
-              <a:t>the INSPECTA program's seL4/Microkit exemplar — a real, current, safety-critical development artifact, not a toy built for this talk</a:t>
+              <a:t>the INSPECTA program's seL4/Microkit HAMR-based pipeline</a:t>
             </a:r>
             <a:endParaRPr lang="en-US" sz="1350" dirty="0"/>
           </a:p>
+          <a:p>
+            <a:pPr marL="800100" lvl="1" indent="-342900">
+              <a:buSzPct val="100000"/>
+              <a:buFont typeface="Courier New" panose="02070309020205020404" pitchFamily="49" charset="0"/>
+              <a:buChar char="o"/>
+            </a:pPr>
+            <a:r>
+              <a:rPr lang="en-US" sz="1350" dirty="0">
+                <a:solidFill>
+                  <a:srgbClr val="212121"/>
+                </a:solidFill>
+                <a:latin typeface="Calibri" pitchFamily="34" charset="0"/>
+                <a:ea typeface="Calibri" pitchFamily="34" charset="-122"/>
+                <a:cs typeface="Calibri" pitchFamily="34" charset="-120"/>
+              </a:rPr>
+              <a:t>current, safety-critical development artifact, not a toy example</a:t>
+            </a:r>
+            <a:endParaRPr lang="en-US" sz="1350" dirty="0"/>
+          </a:p>
         </p:txBody>
       </p:sp>
       <p:sp>
@@ -19685,7 +19764,7 @@
         </p:nvSpPr>
         <p:spPr>
           <a:xfrm>
-            <a:off x="640080" y="3977640"/>
+            <a:off x="640080" y="3630168"/>
             <a:ext cx="1275588" cy="777240"/>
           </a:xfrm>
           <a:prstGeom prst="roundRect">
@@ -19707,7 +19786,7 @@
         </p:nvSpPr>
         <p:spPr>
           <a:xfrm>
-            <a:off x="640080" y="3977640"/>
+            <a:off x="640080" y="3630168"/>
             <a:ext cx="1275588" cy="777240"/>
           </a:xfrm>
           <a:prstGeom prst="rect">
@@ -19763,7 +19842,7 @@
         </p:nvSpPr>
         <p:spPr>
           <a:xfrm>
-            <a:off x="1879092" y="3977640"/>
+            <a:off x="1879092" y="3630168"/>
             <a:ext cx="384048" cy="777240"/>
           </a:xfrm>
           <a:prstGeom prst="rect">
@@ -19802,7 +19881,7 @@
         </p:nvSpPr>
         <p:spPr>
           <a:xfrm>
-            <a:off x="2226564" y="3977640"/>
+            <a:off x="2226564" y="3630168"/>
             <a:ext cx="1275588" cy="777240"/>
           </a:xfrm>
           <a:prstGeom prst="roundRect">
@@ -19824,7 +19903,7 @@
         </p:nvSpPr>
         <p:spPr>
           <a:xfrm>
-            <a:off x="2226564" y="3977640"/>
+            <a:off x="2226564" y="3630168"/>
             <a:ext cx="1275588" cy="777240"/>
           </a:xfrm>
           <a:prstGeom prst="rect">
@@ -19880,7 +19959,7 @@
         </p:nvSpPr>
         <p:spPr>
           <a:xfrm>
-            <a:off x="3465576" y="3977640"/>
+            <a:off x="3465576" y="3630168"/>
             <a:ext cx="384048" cy="777240"/>
           </a:xfrm>
           <a:prstGeom prst="rect">
@@ -19919,7 +19998,7 @@
         </p:nvSpPr>
         <p:spPr>
           <a:xfrm>
-            <a:off x="3813048" y="3977640"/>
+            <a:off x="3813048" y="3630168"/>
             <a:ext cx="1275588" cy="777240"/>
           </a:xfrm>
           <a:prstGeom prst="roundRect">
@@ -19941,7 +20020,7 @@
         </p:nvSpPr>
         <p:spPr>
           <a:xfrm>
-            <a:off x="3813048" y="3977640"/>
+            <a:off x="3813048" y="3630168"/>
             <a:ext cx="1275588" cy="777240"/>
           </a:xfrm>
           <a:prstGeom prst="rect">
@@ -19997,7 +20076,7 @@
         </p:nvSpPr>
         <p:spPr>
           <a:xfrm>
-            <a:off x="5052060" y="3977640"/>
+            <a:off x="5052060" y="3630168"/>
             <a:ext cx="384048" cy="777240"/>
           </a:xfrm>
           <a:prstGeom prst="rect">
@@ -20036,7 +20115,7 @@
         </p:nvSpPr>
         <p:spPr>
           <a:xfrm>
-            <a:off x="5399532" y="3977640"/>
+            <a:off x="5399532" y="3630168"/>
             <a:ext cx="1275588" cy="777240"/>
           </a:xfrm>
           <a:prstGeom prst="roundRect">
@@ -20058,7 +20137,7 @@
         </p:nvSpPr>
         <p:spPr>
           <a:xfrm>
-            <a:off x="5399532" y="3977640"/>
+            <a:off x="5399532" y="3630168"/>
             <a:ext cx="1275588" cy="777240"/>
           </a:xfrm>
           <a:prstGeom prst="rect">
@@ -20083,7 +20162,7 @@
                 <a:ea typeface="Calibri" pitchFamily="34" charset="-122"/>
                 <a:cs typeface="Calibri" pitchFamily="34" charset="-120"/>
               </a:rPr>
-              <a:t>seL4 / Microkit</a:t>
+              <a:t>seL4 + Microkit</a:t>
             </a:r>
             <a:endParaRPr lang="en-US" sz="1050" dirty="0"/>
           </a:p>
@@ -20319,46 +20398,7 @@
       </p:sp>
       <p:sp>
         <p:nvSpPr>
-          <p:cNvPr id="27" name="Text 25"/>
-          <p:cNvSpPr/>
-          <p:nvPr/>
-        </p:nvSpPr>
-        <p:spPr>
-          <a:xfrm>
-            <a:off x="7040880" y="1325880"/>
-            <a:ext cx="4480560" cy="320040"/>
-          </a:xfrm>
-          <a:prstGeom prst="rect">
-            <a:avLst/>
-          </a:prstGeom>
-          <a:noFill/>
-          <a:ln/>
-        </p:spPr>
-        <p:txBody>
-          <a:bodyPr wrap="square" lIns="0" tIns="0" rIns="0" bIns="0" rtlCol="0" anchor="ctr"/>
-          <a:lstStyle/>
-          <a:p>
-            <a:pPr algn="l" indent="0" marL="0">
-              <a:buNone/>
-            </a:pPr>
-            <a:r>
-              <a:rPr lang="en-US" sz="1300" i="1" dirty="0">
-                <a:solidFill>
-                  <a:srgbClr val="5A6478"/>
-                </a:solidFill>
-                <a:latin typeface="Calibri" pitchFamily="34" charset="0"/>
-                <a:ea typeface="Calibri" pitchFamily="34" charset="-122"/>
-                <a:cs typeface="Calibri" pitchFamily="34" charset="-120"/>
-              </a:rPr>
-              <a:t>the measured surface</a:t>
-            </a:r>
-            <a:endParaRPr lang="en-US" sz="1300" dirty="0"/>
-          </a:p>
-        </p:txBody>
-      </p:sp>
-      <p:sp>
-        <p:nvSpPr>
-          <p:cNvPr id="28" name="Shape 26"/>
+          <p:cNvPr id="27" name="Shape 25"/>
           <p:cNvSpPr/>
           <p:nvPr/>
         </p:nvSpPr>
@@ -20385,7 +20425,7 @@
       </p:sp>
       <p:sp>
         <p:nvSpPr>
-          <p:cNvPr id="29" name="Text 27"/>
+          <p:cNvPr id="28" name="Text 26"/>
           <p:cNvSpPr/>
           <p:nvPr/>
         </p:nvSpPr>
@@ -20424,14 +20464,14 @@
       </p:sp>
       <p:sp>
         <p:nvSpPr>
-          <p:cNvPr id="30" name="Text 28"/>
-          <p:cNvSpPr/>
-          <p:nvPr/>
-        </p:nvSpPr>
-        <p:spPr>
-          <a:xfrm>
-            <a:off x="8202168" y="1627632"/>
-            <a:ext cx="3273552" cy="676656"/>
+          <p:cNvPr id="29" name="Text 27"/>
+          <p:cNvSpPr/>
+          <p:nvPr/>
+        </p:nvSpPr>
+        <p:spPr>
+          <a:xfrm>
+            <a:off x="8119872" y="1627632"/>
+            <a:ext cx="3355848" cy="676656"/>
           </a:xfrm>
           <a:prstGeom prst="rect">
             <a:avLst/>
@@ -20455,7 +20495,7 @@
                 <a:ea typeface="Calibri" pitchFamily="34" charset="-122"/>
                 <a:cs typeface="Calibri" pitchFamily="34" charset="-120"/>
               </a:rPr>
-              <a:t>measured files (SysML packages + contract-bearing Rust)</a:t>
+              <a:t>measured files (SysMLv2 packages, Verus-contract-bearing Rust)</a:t>
             </a:r>
             <a:endParaRPr lang="en-US" sz="1000" dirty="0"/>
           </a:p>
@@ -20463,7 +20503,7 @@
       </p:sp>
       <p:sp>
         <p:nvSpPr>
-          <p:cNvPr id="31" name="Shape 29"/>
+          <p:cNvPr id="30" name="Shape 28"/>
           <p:cNvSpPr/>
           <p:nvPr/>
         </p:nvSpPr>
@@ -20490,7 +20530,7 @@
       </p:sp>
       <p:sp>
         <p:nvSpPr>
-          <p:cNvPr id="32" name="Text 30"/>
+          <p:cNvPr id="31" name="Text 29"/>
           <p:cNvSpPr/>
           <p:nvPr/>
         </p:nvSpPr>
@@ -20529,7 +20569,7 @@
       </p:sp>
       <p:sp>
         <p:nvSpPr>
-          <p:cNvPr id="33" name="Text 31"/>
+          <p:cNvPr id="32" name="Text 30"/>
           <p:cNvSpPr/>
           <p:nvPr/>
         </p:nvSpPr>
@@ -20568,7 +20608,7 @@
       </p:sp>
       <p:sp>
         <p:nvSpPr>
-          <p:cNvPr id="34" name="Shape 32"/>
+          <p:cNvPr id="33" name="Shape 31"/>
           <p:cNvSpPr/>
           <p:nvPr/>
         </p:nvSpPr>
@@ -20595,7 +20635,7 @@
       </p:sp>
       <p:sp>
         <p:nvSpPr>
-          <p:cNvPr id="35" name="Text 33"/>
+          <p:cNvPr id="34" name="Text 32"/>
           <p:cNvSpPr/>
           <p:nvPr/>
         </p:nvSpPr>
@@ -20634,7 +20674,7 @@
       </p:sp>
       <p:sp>
         <p:nvSpPr>
-          <p:cNvPr id="36" name="Text 34"/>
+          <p:cNvPr id="35" name="Text 33"/>
           <p:cNvSpPr/>
           <p:nvPr/>
         </p:nvSpPr>
@@ -20665,7 +20705,7 @@
                 <a:ea typeface="Calibri" pitchFamily="34" charset="-122"/>
                 <a:cs typeface="Calibri" pitchFamily="34" charset="-120"/>
               </a:rPr>
-              <a:t>crates re-verified every episode (7 components + the system proof)</a:t>
+              <a:t>crates re-verified every episode (7 components and the system-level proof)</a:t>
             </a:r>
             <a:endParaRPr lang="en-US" sz="1000" dirty="0"/>
           </a:p>
@@ -20673,7 +20713,7 @@
       </p:sp>
       <p:sp>
         <p:nvSpPr>
-          <p:cNvPr id="37" name="Shape 35"/>
+          <p:cNvPr id="36" name="Shape 34"/>
           <p:cNvSpPr/>
           <p:nvPr/>
         </p:nvSpPr>
@@ -20700,7 +20740,7 @@
       </p:sp>
       <p:sp>
         <p:nvSpPr>
-          <p:cNvPr id="38" name="Text 36"/>
+          <p:cNvPr id="37" name="Text 35"/>
           <p:cNvSpPr/>
           <p:nvPr/>
         </p:nvSpPr>
@@ -20739,7 +20779,7 @@
       </p:sp>
       <p:sp>
         <p:nvSpPr>
-          <p:cNvPr id="39" name="Text 37"/>
+          <p:cNvPr id="38" name="Text 36"/>
           <p:cNvSpPr/>
           <p:nvPr/>
         </p:nvSpPr>
@@ -20778,7 +20818,7 @@
       </p:sp>
       <p:sp>
         <p:nvSpPr>
-          <p:cNvPr id="40" name="Shape 38"/>
+          <p:cNvPr id="39" name="Shape 37"/>
           <p:cNvSpPr/>
           <p:nvPr/>
         </p:nvSpPr>
@@ -20805,7 +20845,7 @@
       </p:sp>
       <p:sp>
         <p:nvSpPr>
-          <p:cNvPr id="41" name="Text 39"/>
+          <p:cNvPr id="40" name="Text 38"/>
           <p:cNvSpPr/>
           <p:nvPr/>
         </p:nvSpPr>
@@ -20844,7 +20884,7 @@
       </p:sp>
       <p:sp>
         <p:nvSpPr>
-          <p:cNvPr id="42" name="Text 40"/>
+          <p:cNvPr id="41" name="Text 39"/>
           <p:cNvSpPr/>
           <p:nvPr/>
         </p:nvSpPr>
@@ -20883,7 +20923,7 @@
       </p:sp>
       <p:sp>
         <p:nvSpPr>
-          <p:cNvPr id="43" name="Shape 41"/>
+          <p:cNvPr id="42" name="Shape 40"/>
           <p:cNvSpPr/>
           <p:nvPr/>
         </p:nvSpPr>
@@ -20910,7 +20950,7 @@
       </p:sp>
       <p:sp>
         <p:nvSpPr>
-          <p:cNvPr id="44" name="Text 42"/>
+          <p:cNvPr id="43" name="Text 41"/>
           <p:cNvSpPr/>
           <p:nvPr/>
         </p:nvSpPr>
@@ -20949,7 +20989,7 @@
       </p:sp>
       <p:sp>
         <p:nvSpPr>
-          <p:cNvPr id="45" name="Text 43"/>
+          <p:cNvPr id="44" name="Text 42"/>
           <p:cNvSpPr/>
           <p:nvPr/>
         </p:nvSpPr>
@@ -20980,7 +21020,7 @@
                 <a:ea typeface="Calibri" pitchFamily="34" charset="-122"/>
                 <a:cs typeface="Calibri" pitchFamily="34" charset="-120"/>
               </a:rPr>
-              <a:t>attestation tiers — the glossary's entry keys:</a:t>
+              <a:t>attestation tiers — the blackboard's entry keys:</a:t>
             </a:r>
             <a:endParaRPr lang="en-US" sz="1000" dirty="0"/>
           </a:p>

--- a/docs/video_slides_draft.pptx
+++ b/docs/video_slides_draft.pptx
@@ -3743,7 +3743,7 @@
                 <a:ea typeface="Calibri" pitchFamily="34" charset="-122"/>
                 <a:cs typeface="Calibri" pitchFamily="34" charset="-120"/>
               </a:rPr>
-              <a:t>scene 3 (expand allowed temperature range)</a:t>
+              <a:t>Demo scene 3</a:t>
             </a:r>
             <a:endParaRPr lang="en-US" sz="1500" dirty="0"/>
           </a:p>
@@ -4292,7 +4292,7 @@
                 <a:ea typeface="Calibri" pitchFamily="34" charset="-122"/>
                 <a:cs typeface="Calibri" pitchFamily="34" charset="-120"/>
               </a:rPr>
-              <a:t>scene 13</a:t>
+              <a:t>Demo scene 13</a:t>
             </a:r>
             <a:endParaRPr lang="en-US" sz="1500" dirty="0"/>
           </a:p>
@@ -4331,8 +4331,11 @@
                 <a:ea typeface="Calibri" pitchFamily="34" charset="-122"/>
                 <a:cs typeface="Calibri" pitchFamily="34" charset="-120"/>
               </a:rPr>
-              <a:t>A developer rewrites implementation logic — semantically equivalent. The hash moves, but </a:t>
-            </a:r>
+              <a:t>A developer rewrites semantically equivalent implementation logic.  The hash moves, but </a:t>
+            </a:r>
+            <a:endParaRPr lang="en-US" sz="2000" dirty="0"/>
+          </a:p>
+          <a:p>
             <a:pPr indent="0" marL="0">
               <a:buNone/>
             </a:pPr>
@@ -4844,7 +4847,7 @@
         </p:nvSpPr>
         <p:spPr>
           <a:xfrm>
-            <a:off x="822960" y="3154680"/>
+            <a:off x="822960" y="3236976"/>
             <a:ext cx="10515600" cy="411480"/>
           </a:xfrm>
           <a:prstGeom prst="rect">
@@ -4869,7 +4872,7 @@
                 <a:ea typeface="Calibri" pitchFamily="34" charset="-122"/>
                 <a:cs typeface="Calibri" pitchFamily="34" charset="-120"/>
               </a:rPr>
-              <a:t>scene 14</a:t>
+              <a:t>Demo scene 14</a:t>
             </a:r>
             <a:endParaRPr lang="en-US" sz="1500" dirty="0"/>
           </a:p>
@@ -4908,7 +4911,7 @@
                 <a:ea typeface="Calibri" pitchFamily="34" charset="-122"/>
                 <a:cs typeface="Calibri" pitchFamily="34" charset="-120"/>
               </a:rPr>
-              <a:t>The model is untouched, but a Verus contract is weakened (</a:t>
+              <a:t>The model is untouched, but a live Verus contract is weakened (</a:t>
             </a:r>
             <a:pPr indent="0" marL="0">
               <a:buNone/>
@@ -5421,7 +5424,7 @@
         </p:nvSpPr>
         <p:spPr>
           <a:xfrm>
-            <a:off x="822960" y="3154680"/>
+            <a:off x="822960" y="3236976"/>
             <a:ext cx="10515600" cy="411480"/>
           </a:xfrm>
           <a:prstGeom prst="rect">
@@ -5446,7 +5449,7 @@
                 <a:ea typeface="Calibri" pitchFamily="34" charset="-122"/>
                 <a:cs typeface="Calibri" pitchFamily="34" charset="-120"/>
               </a:rPr>
-              <a:t>scene 2</a:t>
+              <a:t>Demo scene 2</a:t>
             </a:r>
             <a:endParaRPr lang="en-US" sz="1500" dirty="0"/>
           </a:p>
@@ -5485,7 +5488,7 @@
                 <a:ea typeface="Calibri" pitchFamily="34" charset="-122"/>
                 <a:cs typeface="Calibri" pitchFamily="34" charset="-120"/>
               </a:rPr>
-              <a:t>Implementation code (developer-owned) changes, breaking a Verus contract.  Blackboard loop diagnoses, repairs (simulated for demo), then </a:t>
+              <a:t>Implementation code (developer-owned) changes, breaking a Verus contract.  Blackboard loop diagnoses, repairs, then </a:t>
             </a:r>
             <a:pPr indent="0" marL="0">
               <a:buNone/>
@@ -5998,7 +6001,7 @@
         </p:nvSpPr>
         <p:spPr>
           <a:xfrm>
-            <a:off x="822960" y="3154680"/>
+            <a:off x="822960" y="3236976"/>
             <a:ext cx="10515600" cy="411480"/>
           </a:xfrm>
           <a:prstGeom prst="rect">
@@ -6023,7 +6026,7 @@
                 <a:ea typeface="Calibri" pitchFamily="34" charset="-122"/>
                 <a:cs typeface="Calibri" pitchFamily="34" charset="-120"/>
               </a:rPr>
-              <a:t>scenes 6 + 7</a:t>
+              <a:t>Demo scenes 6 + 7</a:t>
             </a:r>
             <a:endParaRPr lang="en-US" sz="1500" dirty="0"/>
           </a:p>
@@ -6062,7 +6065,35 @@
                 <a:ea typeface="Calibri" pitchFamily="34" charset="-122"/>
                 <a:cs typeface="Calibri" pitchFamily="34" charset="-120"/>
               </a:rPr>
-              <a:t>The signed golden evidence bundle, an installed golden value in the protocol ASP ARGS, then the verifier itself — each tamper attributed, each refused by cryptographic checks.</a:t>
+              <a:t>The signed golden evidence bundle, an installed (live) golden value in the appraisal protocol, then the verification tool itself — each tamper attributed, </a:t>
+            </a:r>
+            <a:pPr indent="0" marL="0">
+              <a:buNone/>
+            </a:pPr>
+            <a:r>
+              <a:rPr lang="en-US" sz="2000" b="1" i="1" dirty="0">
+                <a:solidFill>
+                  <a:srgbClr val="212121"/>
+                </a:solidFill>
+                <a:latin typeface="Calibri" pitchFamily="34" charset="0"/>
+                <a:ea typeface="Calibri" pitchFamily="34" charset="-122"/>
+                <a:cs typeface="Calibri" pitchFamily="34" charset="-120"/>
+              </a:rPr>
+              <a:t>each refused by cryptographic checks</a:t>
+            </a:r>
+            <a:pPr indent="0" marL="0">
+              <a:buNone/>
+            </a:pPr>
+            <a:r>
+              <a:rPr lang="en-US" sz="2000" i="1" dirty="0">
+                <a:solidFill>
+                  <a:srgbClr val="212121"/>
+                </a:solidFill>
+                <a:latin typeface="Calibri" pitchFamily="34" charset="0"/>
+                <a:ea typeface="Calibri" pitchFamily="34" charset="-122"/>
+                <a:cs typeface="Calibri" pitchFamily="34" charset="-120"/>
+              </a:rPr>
+              <a:t>.</a:t>
             </a:r>
             <a:endParaRPr lang="en-US" sz="2000" dirty="0"/>
           </a:p>
@@ -6547,7 +6578,7 @@
         </p:nvSpPr>
         <p:spPr>
           <a:xfrm>
-            <a:off x="822960" y="3154680"/>
+            <a:off x="822960" y="3236976"/>
             <a:ext cx="10515600" cy="411480"/>
           </a:xfrm>
           <a:prstGeom prst="rect">
@@ -6572,7 +6603,7 @@
                 <a:ea typeface="Calibri" pitchFamily="34" charset="-122"/>
                 <a:cs typeface="Calibri" pitchFamily="34" charset="-120"/>
               </a:rPr>
-              <a:t>scenes 9 + 12</a:t>
+              <a:t>Demo scenes 9 + 12</a:t>
             </a:r>
             <a:endParaRPr lang="en-US" sz="1500" dirty="0"/>
           </a:p>
@@ -6625,8 +6656,11 @@
                 <a:ea typeface="Calibri" pitchFamily="34" charset="-122"/>
                 <a:cs typeface="Calibri" pitchFamily="34" charset="-120"/>
               </a:rPr>
-              <a:t>subtle ways that proof attempts cheat </a:t>
-            </a:r>
+              <a:t>subtle cheating in proof attempts, </a:t>
+            </a:r>
+            <a:endParaRPr lang="en-US" sz="2000" dirty="0"/>
+          </a:p>
+          <a:p>
             <a:pPr indent="0" marL="0">
               <a:buNone/>
             </a:pPr>
@@ -6639,7 +6673,7 @@
                 <a:ea typeface="Calibri" pitchFamily="34" charset="-122"/>
                 <a:cs typeface="Calibri" pitchFamily="34" charset="-120"/>
               </a:rPr>
-              <a:t>to undermine verification soundness.</a:t>
+              <a:t>that would otherwise undermine verification soundness.</a:t>
             </a:r>
             <a:endParaRPr lang="en-US" sz="2000" dirty="0"/>
           </a:p>
@@ -6788,7 +6822,7 @@
                 <a:ea typeface="Calibri" pitchFamily="34" charset="-122"/>
                 <a:cs typeface="Calibri" pitchFamily="34" charset="-120"/>
               </a:rPr>
-              <a:t>The blackboard, controller, repair ladder, and artifact classes don’t change — only the </a:t>
+              <a:t>The blackboard infrastructure and artifact classes don’t change — only the </a:t>
             </a:r>
             <a:pPr indent="0" marL="0">
               <a:buNone/>
@@ -6816,7 +6850,24 @@
                 <a:ea typeface="Calibri" pitchFamily="34" charset="-122"/>
                 <a:cs typeface="Calibri" pitchFamily="34" charset="-120"/>
               </a:rPr>
-              <a:t>: the modeling language, the prover, the target runtime, and the attestation primitives.</a:t>
+              <a:t>: modeling language, prover, </a:t>
+            </a:r>
+            <a:endParaRPr lang="en-US" sz="1500" dirty="0"/>
+          </a:p>
+          <a:p>
+            <a:pPr indent="0" marL="0">
+              <a:buNone/>
+            </a:pPr>
+            <a:r>
+              <a:rPr lang="en-US" sz="1500" i="1" dirty="0">
+                <a:solidFill>
+                  <a:srgbClr val="212121"/>
+                </a:solidFill>
+                <a:latin typeface="Calibri" pitchFamily="34" charset="0"/>
+                <a:ea typeface="Calibri" pitchFamily="34" charset="-122"/>
+                <a:cs typeface="Calibri" pitchFamily="34" charset="-120"/>
+              </a:rPr>
+              <a:t>target runtime, and attestation primitives.</a:t>
             </a:r>
             <a:endParaRPr lang="en-US" sz="1500" dirty="0"/>
           </a:p>
@@ -7015,7 +7066,7 @@
                 <a:ea typeface="Calibri" pitchFamily="34" charset="-122"/>
                 <a:cs typeface="Calibri" pitchFamily="34" charset="-120"/>
               </a:rPr>
-              <a:t>Every artifact class measured — the full demo</a:t>
+              <a:t>Every artifact class measured</a:t>
             </a:r>
             <a:endParaRPr lang="en-US" sz="1200" dirty="0"/>
           </a:p>
@@ -7205,7 +7256,7 @@
                 <a:ea typeface="Calibri" pitchFamily="34" charset="-122"/>
                 <a:cs typeface="Calibri" pitchFamily="34" charset="-120"/>
               </a:rPr>
-              <a:t>Same blackboard, similar Copland protocols</a:t>
+              <a:t>Same blackboard, similar Copland protocols to SysMLv2 pipeline</a:t>
             </a:r>
             <a:endParaRPr lang="en-US" sz="1200" dirty="0"/>
           </a:p>
@@ -7395,7 +7446,51 @@
                 <a:ea typeface="Calibri" pitchFamily="34" charset="-122"/>
                 <a:cs typeface="Calibri" pitchFamily="34" charset="-120"/>
               </a:rPr>
-              <a:t>Proof-repair experiments: AutoVerus, KU Dogtreat linear planner</a:t>
+              <a:t>Proof-repair experiments</a:t>
+            </a:r>
+            <a:endParaRPr lang="en-US" sz="1200" dirty="0"/>
+          </a:p>
+          <a:p>
+            <a:pPr marL="800100" lvl="1" indent="-342900">
+              <a:spcAft>
+                <a:spcPts val="400"/>
+              </a:spcAft>
+              <a:buSzPct val="100000"/>
+              <a:buFont typeface="Courier New" panose="02070309020205020404" pitchFamily="49" charset="0"/>
+              <a:buChar char="o"/>
+            </a:pPr>
+            <a:r>
+              <a:rPr lang="en-US" sz="1200" dirty="0">
+                <a:solidFill>
+                  <a:srgbClr val="212121"/>
+                </a:solidFill>
+                <a:latin typeface="Calibri" pitchFamily="34" charset="0"/>
+                <a:ea typeface="Calibri" pitchFamily="34" charset="-122"/>
+                <a:cs typeface="Calibri" pitchFamily="34" charset="-120"/>
+              </a:rPr>
+              <a:t>AutoVerus</a:t>
+            </a:r>
+            <a:endParaRPr lang="en-US" sz="1200" dirty="0"/>
+          </a:p>
+          <a:p>
+            <a:pPr marL="800100" lvl="1" indent="-342900">
+              <a:spcAft>
+                <a:spcPts val="400"/>
+              </a:spcAft>
+              <a:buSzPct val="100000"/>
+              <a:buFont typeface="Courier New" panose="02070309020205020404" pitchFamily="49" charset="0"/>
+              <a:buChar char="o"/>
+            </a:pPr>
+            <a:r>
+              <a:rPr lang="en-US" sz="1200" dirty="0">
+                <a:solidFill>
+                  <a:srgbClr val="212121"/>
+                </a:solidFill>
+                <a:latin typeface="Calibri" pitchFamily="34" charset="0"/>
+                <a:ea typeface="Calibri" pitchFamily="34" charset="-122"/>
+                <a:cs typeface="Calibri" pitchFamily="34" charset="-120"/>
+              </a:rPr>
+              <a:t>KU Dogtreat linear planner</a:t>
             </a:r>
             <a:endParaRPr lang="en-US" sz="1200" dirty="0"/>
           </a:p>
@@ -9045,59 +9140,6 @@
           </a:graphicData>
         </a:graphic>
       </p:graphicFrame>
-      <p:sp>
-        <p:nvSpPr>
-          <p:cNvPr id="5" name="Text 2"/>
-          <p:cNvSpPr/>
-          <p:nvPr/>
-        </p:nvSpPr>
-        <p:spPr>
-          <a:xfrm>
-            <a:off x="640080" y="5989320"/>
-            <a:ext cx="10881360" cy="685800"/>
-          </a:xfrm>
-          <a:prstGeom prst="rect">
-            <a:avLst/>
-          </a:prstGeom>
-          <a:noFill/>
-          <a:ln/>
-        </p:spPr>
-        <p:txBody>
-          <a:bodyPr wrap="square" lIns="0" tIns="0" rIns="0" bIns="0" rtlCol="0" anchor="t"/>
-          <a:lstStyle/>
-          <a:p>
-            <a:pPr algn="l" indent="0" marL="0">
-              <a:buNone/>
-            </a:pPr>
-            <a:r>
-              <a:rPr lang="en-US" sz="1250" b="1" i="1" dirty="0">
-                <a:solidFill>
-                  <a:srgbClr val="1E2761"/>
-                </a:solidFill>
-                <a:latin typeface="Calibri" pitchFamily="34" charset="0"/>
-                <a:ea typeface="Calibri" pitchFamily="34" charset="-122"/>
-                <a:cs typeface="Calibri" pitchFamily="34" charset="-120"/>
-              </a:rPr>
-              <a:t>🔒  the bottom two — the judges — are AI-free by design</a:t>
-            </a:r>
-            <a:pPr algn="l" indent="0" marL="0">
-              <a:buNone/>
-            </a:pPr>
-            <a:r>
-              <a:rPr lang="en-US" sz="1250" i="1" dirty="0">
-                <a:solidFill>
-                  <a:srgbClr val="212121"/>
-                </a:solidFill>
-                <a:latin typeface="Calibri" pitchFamily="34" charset="0"/>
-                <a:ea typeface="Calibri" pitchFamily="34" charset="-122"/>
-                <a:cs typeface="Calibri" pitchFamily="34" charset="-120"/>
-              </a:rPr>
-              <a:t>:  an LLM’s output is just another untrusted artifact, facing the same episode and appraisal as a human edit or a tamper. Guarantees never depend on LLM engines being good, honest, or even present.</a:t>
-            </a:r>
-            <a:endParaRPr lang="en-US" sz="1250" dirty="0"/>
-          </a:p>
-        </p:txBody>
-      </p:sp>
     </p:spTree>
   </p:cSld>
   <p:clrMapOvr>
@@ -10626,7 +10668,7 @@
         </p:nvSpPr>
         <p:spPr>
           <a:xfrm>
-            <a:off x="640080" y="6126480"/>
+            <a:off x="640080" y="6044184"/>
             <a:ext cx="10881360" cy="365760"/>
           </a:xfrm>
           <a:prstGeom prst="rect">
@@ -12633,7 +12675,7 @@
                 <a:ea typeface="Calibri" pitchFamily="34" charset="-122"/>
                 <a:cs typeface="Calibri" pitchFamily="34" charset="-120"/>
               </a:rPr>
-              <a:t> — defense-in-depth, anomaly detection, mitigation.</a:t>
+              <a:t> — defense-in-depth, anomaly detection, proposed mitigation.</a:t>
             </a:r>
             <a:endParaRPr lang="en-US" sz="1350" dirty="0"/>
           </a:p>
@@ -21508,7 +21550,7 @@
                 <a:ea typeface="Calibri" pitchFamily="34" charset="-122"/>
                 <a:cs typeface="Calibri" pitchFamily="34" charset="-120"/>
               </a:rPr>
-              <a:t>scene 1</a:t>
+              <a:t>Demo scene 1</a:t>
             </a:r>
             <a:endParaRPr lang="en-US" sz="1500" dirty="0"/>
           </a:p>
@@ -21547,7 +21589,24 @@
                 <a:ea typeface="Calibri" pitchFamily="34" charset="-122"/>
                 <a:cs typeface="Calibri" pitchFamily="34" charset="-120"/>
               </a:rPr>
-              <a:t>All artifacts start in a “pass” state:  all artifacts have integrity against golden values and implementations meet their contracts.</a:t>
+              <a:t>All artifacts start in a “pass” state with integrity against golden values and </a:t>
+            </a:r>
+            <a:endParaRPr lang="en-US" sz="2000" dirty="0"/>
+          </a:p>
+          <a:p>
+            <a:pPr indent="0" marL="0">
+              <a:buNone/>
+            </a:pPr>
+            <a:r>
+              <a:rPr lang="en-US" sz="2000" i="1" dirty="0">
+                <a:solidFill>
+                  <a:srgbClr val="212121"/>
+                </a:solidFill>
+                <a:latin typeface="Calibri" pitchFamily="34" charset="0"/>
+                <a:ea typeface="Calibri" pitchFamily="34" charset="-122"/>
+                <a:cs typeface="Calibri" pitchFamily="34" charset="-120"/>
+              </a:rPr>
+              <a:t>implementations meet their contracts.</a:t>
             </a:r>
             <a:endParaRPr lang="en-US" sz="2000" dirty="0"/>
           </a:p>

--- a/docs/video_slides_draft.pptx
+++ b/docs/video_slides_draft.pptx
@@ -7860,7 +7860,7 @@
           </p:nvPr>
         </p:nvGraphicFramePr>
         <p:xfrm>
-          <a:off x="640080" y="1600200"/>
+          <a:off x="640080" y="1682496"/>
           <a:ext cx="10881360" cy="914400"/>
         </p:xfrm>
         <a:graphic>
@@ -7958,7 +7958,7 @@
                           <a:ea typeface="Calibri" pitchFamily="34" charset="-122"/>
                           <a:cs typeface="Calibri" pitchFamily="34" charset="-120"/>
                         </a:rPr>
-                        <a:t>Where AI participates</a:t>
+                        <a:t>Where LLMs participate</a:t>
                       </a:r>
                       <a:endParaRPr lang="en-US" sz="1350" dirty="0">
                         <a:latin typeface="Calibri" charset="0"/>
@@ -8026,7 +8026,7 @@
                           <a:ea typeface="Calibri" pitchFamily="34" charset="-122"/>
                           <a:cs typeface="Calibri" pitchFamily="34" charset="-120"/>
                         </a:rPr>
-                        <a:t>The rule</a:t>
+                        <a:t>The Guardrail</a:t>
                       </a:r>
                       <a:endParaRPr lang="en-US" sz="1350" dirty="0">
                         <a:latin typeface="Calibri" charset="0"/>
@@ -8164,7 +8164,7 @@
                           <a:ea typeface="Calibri" pitchFamily="34" charset="-122"/>
                           <a:cs typeface="Calibri" pitchFamily="34" charset="-120"/>
                         </a:rPr>
-                        <a:t>LLMs may draft or restate specs</a:t>
+                        <a:t>May draft or restate specs</a:t>
                       </a:r>
                       <a:endParaRPr lang="en-US" sz="1200" dirty="0">
                         <a:latin typeface="Calibri" charset="0"/>
@@ -8232,35 +8232,7 @@
                           <a:ea typeface="Calibri" pitchFamily="34" charset="-122"/>
                           <a:cs typeface="Calibri" pitchFamily="34" charset="-120"/>
                         </a:rPr>
-                        <a:t>only the administrator </a:t>
-                      </a:r>
-                      <a:pPr algn="l" indent="0" marL="0">
-                        <a:buNone/>
-                      </a:pPr>
-                      <a:r>
-                        <a:rPr lang="en-US" sz="1200" b="1" dirty="0">
-                          <a:solidFill>
-                            <a:srgbClr val="212121"/>
-                          </a:solidFill>
-                          <a:latin typeface="Calibri" pitchFamily="34" charset="0"/>
-                          <a:ea typeface="Calibri" pitchFamily="34" charset="-122"/>
-                          <a:cs typeface="Calibri" pitchFamily="34" charset="-120"/>
-                        </a:rPr>
-                        <a:t>blesses</a:t>
-                      </a:r>
-                      <a:pPr algn="l" indent="0" marL="0">
-                        <a:buNone/>
-                      </a:pPr>
-                      <a:r>
-                        <a:rPr lang="en-US" sz="1200" dirty="0">
-                          <a:solidFill>
-                            <a:srgbClr val="212121"/>
-                          </a:solidFill>
-                          <a:latin typeface="Calibri" pitchFamily="34" charset="0"/>
-                          <a:ea typeface="Calibri" pitchFamily="34" charset="-122"/>
-                          <a:cs typeface="Calibri" pitchFamily="34" charset="-120"/>
-                        </a:rPr>
-                        <a:t> — authority is human</a:t>
+                        <a:t>Only a human administrator may authenticate a new spec</a:t>
                       </a:r>
                       <a:endParaRPr lang="en-US" sz="1200" dirty="0">
                         <a:latin typeface="Calibri" charset="0"/>
@@ -8398,7 +8370,7 @@
                           <a:ea typeface="Calibri" pitchFamily="34" charset="-122"/>
                           <a:cs typeface="Calibri" pitchFamily="34" charset="-120"/>
                         </a:rPr>
-                        <a:t>spec-guided synthesis / re-derivation with LLM engines</a:t>
+                        <a:t>spec-guided synthesis / re-derivation</a:t>
                       </a:r>
                       <a:endParaRPr lang="en-US" sz="1200" dirty="0">
                         <a:latin typeface="Calibri" charset="0"/>
@@ -8466,7 +8438,7 @@
                           <a:ea typeface="Calibri" pitchFamily="34" charset="-122"/>
                           <a:cs typeface="Calibri" pitchFamily="34" charset="-120"/>
                         </a:rPr>
-                        <a:t>the seed proofs must prove again against the blessed statements</a:t>
+                        <a:t>Code must meet its formal contracts, checked by legitimate toolchain, derived from human-blessed spec</a:t>
                       </a:r>
                       <a:endParaRPr lang="en-US" sz="1200" dirty="0">
                         <a:latin typeface="Calibri" charset="0"/>
@@ -8604,7 +8576,7 @@
                           <a:ea typeface="Calibri" pitchFamily="34" charset="-122"/>
                           <a:cs typeface="Calibri" pitchFamily="34" charset="-120"/>
                         </a:rPr>
-                        <a:t>LLM-suggested tactic portfolio (deterministic at runtime) · LLM API calls + LLM-assisted desktop sessions (loop is paused) · Custom proof repair agents (AutoVerus · KU Dogtreat linear planner)</a:t>
+                        <a:t>Suggests tactic portfolio (deterministic at runtime) · API calls + LLM-assisted desktop sessions (loop is paused) · Proof repair agents (AutoVerus · KU Dogtreat linear planner)</a:t>
                       </a:r>
                       <a:endParaRPr lang="en-US" sz="1200" dirty="0">
                         <a:latin typeface="Calibri" charset="0"/>
@@ -8672,7 +8644,7 @@
                           <a:ea typeface="Calibri" pitchFamily="34" charset="-122"/>
                           <a:cs typeface="Calibri" pitchFamily="34" charset="-120"/>
                         </a:rPr>
-                        <a:t>a repair claim is worthless without evidence; only fresh measurement re-establishes good standing</a:t>
+                        <a:t>Only fresh measurement re-establishes good standing</a:t>
                       </a:r>
                       <a:endParaRPr lang="en-US" sz="1200" dirty="0">
                         <a:latin typeface="Calibri" charset="0"/>
@@ -8878,7 +8850,7 @@
                           <a:ea typeface="Calibri" pitchFamily="34" charset="-122"/>
                           <a:cs typeface="Calibri" pitchFamily="34" charset="-120"/>
                         </a:rPr>
-                        <a:t>deterministic judges: proof kernels (Rocq, Lean, Verus), hash appraisal vs signed goldens, semantic analysis of source code</a:t>
+                        <a:t>Verification kernels (Rocq, Lean, Verus), formally-verified attestation managers (evidence unbundling), trusted attestation primitives (hash checks, semantic analysis of source code, etc.)</a:t>
                       </a:r>
                       <a:endParaRPr lang="en-US" sz="1200" dirty="0">
                         <a:latin typeface="Calibri" charset="0"/>
@@ -9084,7 +9056,7 @@
                           <a:ea typeface="Calibri" pitchFamily="34" charset="-122"/>
                           <a:cs typeface="Calibri" pitchFamily="34" charset="-120"/>
                         </a:rPr>
-                        <a:t>cryptographic anchor · non-derivability; no one (human or AI) may repair a baseline without fresh administrator blessing</a:t>
+                        <a:t>Cryptographic immutability</a:t>
                       </a:r>
                       <a:endParaRPr lang="en-US" sz="1200" dirty="0">
                         <a:latin typeface="Calibri" charset="0"/>
@@ -9448,7 +9420,7 @@
                           <a:ea typeface="Calibri" pitchFamily="34" charset="-122"/>
                           <a:cs typeface="Calibri" pitchFamily="34" charset="-120"/>
                         </a:rPr>
-                        <a:t>Judged by</a:t>
+                        <a:t>How we trust it (or not)</a:t>
                       </a:r>
                       <a:endParaRPr lang="en-US" sz="1350" dirty="0">
                         <a:latin typeface="Calibri" charset="0"/>
@@ -9586,7 +9558,7 @@
                           <a:ea typeface="Calibri" pitchFamily="34" charset="-122"/>
                           <a:cs typeface="Calibri" pitchFamily="34" charset="-120"/>
                         </a:rPr>
-                        <a:t>pybb framework (blackboard / controller / knowledge sources), demo arcs, install script, CI suite, detailed documentation</a:t>
+                        <a:t>pybb framework (blackboard, controller, knowledge sources), demo arcs, install script, CI suite, detailed documentation</a:t>
                       </a:r>
                       <a:endParaRPr lang="en-US" sz="1200" dirty="0">
                         <a:latin typeface="Calibri" charset="0"/>
@@ -9654,7 +9626,21 @@
                           <a:ea typeface="Calibri" pitchFamily="34" charset="-122"/>
                           <a:cs typeface="Calibri" pitchFamily="34" charset="-120"/>
                         </a:rPr>
-                        <a:t>Untrusted orchestration (evidence bundles are independently-verifiable)</a:t>
+                        <a:t>Orchestration in python is untrusted,</a:t>
+                      </a:r>
+                      <a:pPr algn="l" indent="0" marL="0">
+                        <a:buNone/>
+                      </a:pPr>
+                      <a:r>
+                        <a:rPr lang="en-US" sz="1200" b="1" dirty="0">
+                          <a:solidFill>
+                            <a:srgbClr val="212121"/>
+                          </a:solidFill>
+                          <a:latin typeface="Calibri" pitchFamily="34" charset="0"/>
+                          <a:ea typeface="Calibri" pitchFamily="34" charset="-122"/>
+                          <a:cs typeface="Calibri" pitchFamily="34" charset="-120"/>
+                        </a:rPr>
+                        <a:t> but evidence bundles are independently-verifiable</a:t>
                       </a:r>
                       <a:endParaRPr lang="en-US" sz="1200" dirty="0">
                         <a:latin typeface="Calibri" charset="0"/>
@@ -9788,11 +9774,25 @@
                           <a:solidFill>
                             <a:srgbClr val="212121"/>
                           </a:solidFill>
+                          <a:latin typeface="Courier New" pitchFamily="34" charset="0"/>
+                          <a:ea typeface="Courier New" pitchFamily="34" charset="-122"/>
+                          <a:cs typeface="Courier New" pitchFamily="34" charset="-120"/>
+                        </a:rPr>
+                        <a:t>bpar</a:t>
+                      </a:r>
+                      <a:pPr algn="l" indent="0" marL="0">
+                        <a:buNone/>
+                      </a:pPr>
+                      <a:r>
+                        <a:rPr lang="en-US" sz="1200" dirty="0">
+                          <a:solidFill>
+                            <a:srgbClr val="212121"/>
+                          </a:solidFill>
                           <a:latin typeface="Calibri" pitchFamily="34" charset="0"/>
                           <a:ea typeface="Calibri" pitchFamily="34" charset="-122"/>
                           <a:cs typeface="Calibri" pitchFamily="34" charset="-120"/>
                         </a:rPr>
-                        <a:t>bpar (parallel Copland term) </a:t>
+                        <a:t> (parallel Copland term) </a:t>
                       </a:r>
                       <a:pPr algn="l" indent="0" marL="0">
                         <a:buNone/>
@@ -9806,7 +9806,42 @@
                           <a:ea typeface="Calibri" pitchFamily="34" charset="-122"/>
                           <a:cs typeface="Calibri" pitchFamily="34" charset="-120"/>
                         </a:rPr>
-                        <a:t>in the verified CVM</a:t>
+                        <a:t>in the verified CVM core,</a:t>
+                      </a:r>
+                      <a:endParaRPr lang="en-US" sz="1200" dirty="0">
+                        <a:latin typeface="Calibri" charset="0"/>
+                        <a:ea typeface="Calibri" charset="0"/>
+                        <a:cs typeface="Calibri" charset="0"/>
+                      </a:endParaRPr>
+                    </a:p>
+                    <a:p>
+                      <a:pPr algn="l" indent="0" marL="0">
+                        <a:buNone/>
+                      </a:pPr>
+                      <a:r>
+                        <a:rPr lang="en-US" sz="1200" dirty="0">
+                          <a:solidFill>
+                            <a:srgbClr val="212121"/>
+                          </a:solidFill>
+                          <a:latin typeface="Calibri" pitchFamily="34" charset="0"/>
+                          <a:ea typeface="Calibri" pitchFamily="34" charset="-122"/>
+                          <a:cs typeface="Calibri" pitchFamily="34" charset="-120"/>
+                        </a:rPr>
+                        <a:t>CVM frontend fixes (</a:t>
+                      </a:r>
+                      <a:pPr algn="l" indent="0" marL="0">
+                        <a:buNone/>
+                      </a:pPr>
+                      <a:r>
+                        <a:rPr lang="en-US" sz="1200" dirty="0">
+                          <a:solidFill>
+                            <a:srgbClr val="212121"/>
+                          </a:solidFill>
+                          <a:latin typeface="Courier New" pitchFamily="34" charset="0"/>
+                          <a:ea typeface="Courier New" pitchFamily="34" charset="-122"/>
+                          <a:cs typeface="Courier New" pitchFamily="34" charset="-120"/>
+                        </a:rPr>
+                        <a:t>--stdin, --req_file </a:t>
                       </a:r>
                       <a:pPr algn="l" indent="0" marL="0">
                         <a:buNone/>
@@ -9820,7 +9855,7 @@
                           <a:ea typeface="Calibri" pitchFamily="34" charset="-122"/>
                           <a:cs typeface="Calibri" pitchFamily="34" charset="-120"/>
                         </a:rPr>
-                        <a:t>; --stdin / --req_file frontend fixes</a:t>
+                        <a:t>interfaces)</a:t>
                       </a:r>
                       <a:endParaRPr lang="en-US" sz="1200" dirty="0">
                         <a:latin typeface="Calibri" charset="0"/>
@@ -10054,7 +10089,7 @@
                           <a:ea typeface="Calibri" pitchFamily="34" charset="-122"/>
                           <a:cs typeface="Calibri" pitchFamily="34" charset="-120"/>
                         </a:rPr>
-                        <a:t> asp-libs binaries — hashing, the Lean/Rocq/HAMR runners &amp; appraisers, the cheat scan, golden-slice extraction</a:t>
+                        <a:t> asp-libs binaries (hashing, the Lean/Rocq/HAMR runners &amp; appraisers, cheat scan, golden-slice extraction)</a:t>
                       </a:r>
                       <a:endParaRPr lang="en-US" sz="1200" dirty="0">
                         <a:latin typeface="Calibri" charset="0"/>
@@ -10122,7 +10157,7 @@
                           <a:ea typeface="Calibri" pitchFamily="34" charset="-122"/>
                           <a:cs typeface="Calibri" pitchFamily="34" charset="-120"/>
                         </a:rPr>
-                        <a:t>tool hashes measure-then-use; syntax-guided analysis of source files, appraisal vs signed goldens</a:t>
+                        <a:t>New attestation primitives are untrusted, require manual inspection (or formal analysis)</a:t>
                       </a:r>
                       <a:endParaRPr lang="en-US" sz="1200" dirty="0">
                         <a:latin typeface="Calibri" charset="0"/>
@@ -10342,7 +10377,7 @@
                           <a:ea typeface="Calibri" pitchFamily="34" charset="-122"/>
                           <a:cs typeface="Calibri" pitchFamily="34" charset="-120"/>
                         </a:rPr>
-                        <a:t>readiness-gate config checks; blessed baselines</a:t>
+                        <a:t>Copland protocol analysis bolsters trust</a:t>
                       </a:r>
                       <a:endParaRPr lang="en-US" sz="1200" dirty="0">
                         <a:latin typeface="Calibri" charset="0"/>
@@ -10480,7 +10515,7 @@
                           <a:ea typeface="Calibri" pitchFamily="34" charset="-122"/>
                           <a:cs typeface="Calibri" pitchFamily="34" charset="-120"/>
                         </a:rPr>
-                        <a:t>scripted demo tampers (scenes 1–8) + </a:t>
+                        <a:t>demo tampers + </a:t>
                       </a:r>
                       <a:pPr algn="l" indent="0" marL="0">
                         <a:buNone/>
@@ -10494,7 +10529,7 @@
                           <a:ea typeface="Calibri" pitchFamily="34" charset="-122"/>
                           <a:cs typeface="Calibri" pitchFamily="34" charset="-120"/>
                         </a:rPr>
-                        <a:t>7 red-team attack classes</a:t>
+                        <a:t>7 red-team attack classes </a:t>
                       </a:r>
                       <a:pPr algn="l" indent="0" marL="0">
                         <a:buNone/>
@@ -10508,7 +10543,7 @@
                           <a:ea typeface="Calibri" pitchFamily="34" charset="-122"/>
                           <a:cs typeface="Calibri" pitchFamily="34" charset="-120"/>
                         </a:rPr>
-                        <a:t> (scenes 9–12, 14)</a:t>
+                        <a:t>(see next slide)</a:t>
                       </a:r>
                       <a:endParaRPr lang="en-US" sz="1200" dirty="0">
                         <a:latin typeface="Calibri" charset="0"/>
@@ -10576,13 +10611,13 @@
                           <a:ea typeface="Calibri" pitchFamily="34" charset="-122"/>
                           <a:cs typeface="Calibri" pitchFamily="34" charset="-120"/>
                         </a:rPr>
-                        <a:t>every scene gates on detection / attribution; each forced a new tier (</a:t>
+                        <a:t>Concrete “counter-examples” show attacks succeeding, </a:t>
                       </a:r>
                       <a:pPr algn="l" indent="0" marL="0">
                         <a:buNone/>
                       </a:pPr>
                       <a:r>
-                        <a:rPr lang="en-US" sz="1200" i="1" dirty="0">
+                        <a:rPr lang="en-US" sz="1200" b="1" dirty="0">
                           <a:solidFill>
                             <a:srgbClr val="212121"/>
                           </a:solidFill>
@@ -10590,21 +10625,7 @@
                           <a:ea typeface="Calibri" pitchFamily="34" charset="-122"/>
                           <a:cs typeface="Calibri" pitchFamily="34" charset="-120"/>
                         </a:rPr>
-                        <a:t>→ next slide</a:t>
-                      </a:r>
-                      <a:pPr algn="l" indent="0" marL="0">
-                        <a:buNone/>
-                      </a:pPr>
-                      <a:r>
-                        <a:rPr lang="en-US" sz="1200" dirty="0">
-                          <a:solidFill>
-                            <a:srgbClr val="212121"/>
-                          </a:solidFill>
-                          <a:latin typeface="Calibri" pitchFamily="34" charset="0"/>
-                          <a:ea typeface="Calibri" pitchFamily="34" charset="-122"/>
-                          <a:cs typeface="Calibri" pitchFamily="34" charset="-120"/>
-                        </a:rPr>
-                        <a:t>)</a:t>
+                        <a:t>undetected by existing measurement</a:t>
                       </a:r>
                       <a:endParaRPr lang="en-US" sz="1200" dirty="0">
                         <a:latin typeface="Calibri" charset="0"/>
@@ -10964,7 +10985,7 @@
                           <a:ea typeface="Calibri" pitchFamily="34" charset="-122"/>
                           <a:cs typeface="Calibri" pitchFamily="34" charset="-120"/>
                         </a:rPr>
-                        <a:t>Avoided detection by…</a:t>
+                        <a:t>Avoided detection by</a:t>
                       </a:r>
                       <a:endParaRPr lang="en-US" sz="1250" dirty="0">
                         <a:latin typeface="Calibri" charset="0"/>
@@ -11116,7 +11137,35 @@
                           <a:ea typeface="Calibri" pitchFamily="34" charset="-122"/>
                           <a:cs typeface="Calibri" pitchFamily="34" charset="-120"/>
                         </a:rPr>
-                        <a:t> — assume(false) in an unmeasured bridge file</a:t>
+                        <a:t> — </a:t>
+                      </a:r>
+                      <a:pPr algn="l" indent="0" marL="0">
+                        <a:buNone/>
+                      </a:pPr>
+                      <a:r>
+                        <a:rPr lang="en-US" sz="1100" dirty="0">
+                          <a:solidFill>
+                            <a:srgbClr val="212121"/>
+                          </a:solidFill>
+                          <a:latin typeface="Courier New" pitchFamily="34" charset="0"/>
+                          <a:ea typeface="Courier New" pitchFamily="34" charset="-122"/>
+                          <a:cs typeface="Courier New" pitchFamily="34" charset="-120"/>
+                        </a:rPr>
+                        <a:t>assume(false) </a:t>
+                      </a:r>
+                      <a:pPr algn="l" indent="0" marL="0">
+                        <a:buNone/>
+                      </a:pPr>
+                      <a:r>
+                        <a:rPr lang="en-US" sz="1100" dirty="0">
+                          <a:solidFill>
+                            <a:srgbClr val="212121"/>
+                          </a:solidFill>
+                          <a:latin typeface="Calibri" pitchFamily="34" charset="0"/>
+                          <a:ea typeface="Calibri" pitchFamily="34" charset="-122"/>
+                          <a:cs typeface="Calibri" pitchFamily="34" charset="-120"/>
+                        </a:rPr>
+                        <a:t>in an unmeasured bridge file</a:t>
                       </a:r>
                       <a:endParaRPr lang="en-US" sz="1100" dirty="0">
                         <a:latin typeface="Calibri" charset="0"/>
@@ -11252,7 +11301,35 @@
                           <a:ea typeface="Calibri" pitchFamily="34" charset="-122"/>
                           <a:cs typeface="Calibri" pitchFamily="34" charset="-120"/>
                         </a:rPr>
-                        <a:t>cheat scan (cheat_scan_verus)</a:t>
+                        <a:t>cheat scan (</a:t>
+                      </a:r>
+                      <a:pPr algn="l" indent="0" marL="0">
+                        <a:buNone/>
+                      </a:pPr>
+                      <a:r>
+                        <a:rPr lang="en-US" sz="1100" dirty="0">
+                          <a:solidFill>
+                            <a:srgbClr val="212121"/>
+                          </a:solidFill>
+                          <a:latin typeface="Courier New" pitchFamily="34" charset="0"/>
+                          <a:ea typeface="Courier New" pitchFamily="34" charset="-122"/>
+                          <a:cs typeface="Courier New" pitchFamily="34" charset="-120"/>
+                        </a:rPr>
+                        <a:t>cheat_scan_verus</a:t>
+                      </a:r>
+                      <a:pPr algn="l" indent="0" marL="0">
+                        <a:buNone/>
+                      </a:pPr>
+                      <a:r>
+                        <a:rPr lang="en-US" sz="1100" dirty="0">
+                          <a:solidFill>
+                            <a:srgbClr val="212121"/>
+                          </a:solidFill>
+                          <a:latin typeface="Calibri" pitchFamily="34" charset="0"/>
+                          <a:ea typeface="Calibri" pitchFamily="34" charset="-122"/>
+                          <a:cs typeface="Calibri" pitchFamily="34" charset="-120"/>
+                        </a:rPr>
+                        <a:t>)</a:t>
                       </a:r>
                       <a:endParaRPr lang="en-US" sz="1100" dirty="0">
                         <a:latin typeface="Calibri" charset="0"/>
@@ -11336,7 +11413,35 @@
                           <a:ea typeface="Calibri" pitchFamily="34" charset="-122"/>
                           <a:cs typeface="Calibri" pitchFamily="34" charset="-120"/>
                         </a:rPr>
-                        <a:t> — external_body broadcast axiom, ensures false</a:t>
+                        <a:t> — </a:t>
+                      </a:r>
+                      <a:pPr algn="l" indent="0" marL="0">
+                        <a:buNone/>
+                      </a:pPr>
+                      <a:r>
+                        <a:rPr lang="en-US" sz="1100" dirty="0">
+                          <a:solidFill>
+                            <a:srgbClr val="212121"/>
+                          </a:solidFill>
+                          <a:latin typeface="Courier New" pitchFamily="34" charset="0"/>
+                          <a:ea typeface="Courier New" pitchFamily="34" charset="-122"/>
+                          <a:cs typeface="Courier New" pitchFamily="34" charset="-120"/>
+                        </a:rPr>
+                        <a:t>external_body </a:t>
+                      </a:r>
+                      <a:pPr algn="l" indent="0" marL="0">
+                        <a:buNone/>
+                      </a:pPr>
+                      <a:r>
+                        <a:rPr lang="en-US" sz="1100" dirty="0">
+                          <a:solidFill>
+                            <a:srgbClr val="212121"/>
+                          </a:solidFill>
+                          <a:latin typeface="Calibri" pitchFamily="34" charset="0"/>
+                          <a:ea typeface="Calibri" pitchFamily="34" charset="-122"/>
+                          <a:cs typeface="Calibri" pitchFamily="34" charset="-120"/>
+                        </a:rPr>
+                        <a:t>broadcast axiom, ensures false</a:t>
                       </a:r>
                       <a:endParaRPr lang="en-US" sz="1100" dirty="0">
                         <a:latin typeface="Calibri" charset="0"/>
@@ -11472,7 +11577,35 @@
                           <a:ea typeface="Calibri" pitchFamily="34" charset="-122"/>
                           <a:cs typeface="Calibri" pitchFamily="34" charset="-120"/>
                         </a:rPr>
-                        <a:t>cheat scan (cheat_scan_verus)</a:t>
+                        <a:t>cheat scan (</a:t>
+                      </a:r>
+                      <a:pPr algn="l" indent="0" marL="0">
+                        <a:buNone/>
+                      </a:pPr>
+                      <a:r>
+                        <a:rPr lang="en-US" sz="1100" dirty="0">
+                          <a:solidFill>
+                            <a:srgbClr val="212121"/>
+                          </a:solidFill>
+                          <a:latin typeface="Courier New" pitchFamily="34" charset="0"/>
+                          <a:ea typeface="Courier New" pitchFamily="34" charset="-122"/>
+                          <a:cs typeface="Courier New" pitchFamily="34" charset="-120"/>
+                        </a:rPr>
+                        <a:t>cheat_scan_verus</a:t>
+                      </a:r>
+                      <a:pPr algn="l" indent="0" marL="0">
+                        <a:buNone/>
+                      </a:pPr>
+                      <a:r>
+                        <a:rPr lang="en-US" sz="1100" dirty="0">
+                          <a:solidFill>
+                            <a:srgbClr val="212121"/>
+                          </a:solidFill>
+                          <a:latin typeface="Calibri" pitchFamily="34" charset="0"/>
+                          <a:ea typeface="Calibri" pitchFamily="34" charset="-122"/>
+                          <a:cs typeface="Calibri" pitchFamily="34" charset="-120"/>
+                        </a:rPr>
+                        <a:t>)</a:t>
                       </a:r>
                       <a:endParaRPr lang="en-US" sz="1100" dirty="0">
                         <a:latin typeface="Calibri" charset="0"/>
@@ -11556,7 +11689,7 @@
                           <a:ea typeface="Calibri" pitchFamily="34" charset="-122"/>
                           <a:cs typeface="Calibri" pitchFamily="34" charset="-120"/>
                         </a:rPr>
-                        <a:t> — a system-proof module commented out</a:t>
+                        <a:t> — system-proof module commented out</a:t>
                       </a:r>
                       <a:endParaRPr lang="en-US" sz="1100" dirty="0">
                         <a:latin typeface="Calibri" charset="0"/>
@@ -11776,7 +11909,7 @@
                           <a:ea typeface="Calibri" pitchFamily="34" charset="-122"/>
                           <a:cs typeface="Calibri" pitchFamily="34" charset="-120"/>
                         </a:rPr>
-                        <a:t> — real VC dropped, trivial one added, constant count</a:t>
+                        <a:t> — contract dropped, trivial one added, same count</a:t>
                       </a:r>
                       <a:endParaRPr lang="en-US" sz="1100" dirty="0">
                         <a:latin typeface="Calibri" charset="0"/>
@@ -11996,7 +12129,35 @@
                           <a:ea typeface="Calibri" pitchFamily="34" charset="-122"/>
                           <a:cs typeface="Calibri" pitchFamily="34" charset="-120"/>
                         </a:rPr>
-                        <a:t> — semantic flip in a cached dep, mtime preserved</a:t>
+                        <a:t> — semantic flip in a cached dep, </a:t>
+                      </a:r>
+                      <a:pPr algn="l" indent="0" marL="0">
+                        <a:buNone/>
+                      </a:pPr>
+                      <a:r>
+                        <a:rPr lang="en-US" sz="1100" dirty="0">
+                          <a:solidFill>
+                            <a:srgbClr val="212121"/>
+                          </a:solidFill>
+                          <a:latin typeface="Courier New" pitchFamily="34" charset="0"/>
+                          <a:ea typeface="Courier New" pitchFamily="34" charset="-122"/>
+                          <a:cs typeface="Courier New" pitchFamily="34" charset="-120"/>
+                        </a:rPr>
+                        <a:t>mtime</a:t>
+                      </a:r>
+                      <a:pPr algn="l" indent="0" marL="0">
+                        <a:buNone/>
+                      </a:pPr>
+                      <a:r>
+                        <a:rPr lang="en-US" sz="1100" dirty="0">
+                          <a:solidFill>
+                            <a:srgbClr val="212121"/>
+                          </a:solidFill>
+                          <a:latin typeface="Calibri" pitchFamily="34" charset="0"/>
+                          <a:ea typeface="Calibri" pitchFamily="34" charset="-122"/>
+                          <a:cs typeface="Calibri" pitchFamily="34" charset="-120"/>
+                        </a:rPr>
+                        <a:t> preserved</a:t>
                       </a:r>
                       <a:endParaRPr lang="en-US" sz="1100" dirty="0">
                         <a:latin typeface="Calibri" charset="0"/>
@@ -12064,7 +12225,7 @@
                           <a:ea typeface="Calibri" pitchFamily="34" charset="-122"/>
                           <a:cs typeface="Calibri" pitchFamily="34" charset="-120"/>
                         </a:rPr>
-                        <a:t>mtime-gated cache serves the stale verdict; green over false bytes</a:t>
+                        <a:t>mtime-gated cache serves the stale verdict</a:t>
                       </a:r>
                       <a:endParaRPr lang="en-US" sz="1100" dirty="0">
                         <a:latin typeface="Calibri" charset="0"/>
@@ -12128,11 +12289,25 @@
                           <a:solidFill>
                             <a:srgbClr val="212121"/>
                           </a:solidFill>
+                          <a:latin typeface="Courier New" pitchFamily="34" charset="0"/>
+                          <a:ea typeface="Courier New" pitchFamily="34" charset="-122"/>
+                          <a:cs typeface="Courier New" pitchFamily="34" charset="-120"/>
+                        </a:rPr>
+                        <a:t>gensrc</a:t>
+                      </a:r>
+                      <a:pPr algn="l" indent="0" marL="0">
+                        <a:buNone/>
+                      </a:pPr>
+                      <a:r>
+                        <a:rPr lang="en-US" sz="1100" dirty="0">
+                          <a:solidFill>
+                            <a:srgbClr val="212121"/>
+                          </a:solidFill>
                           <a:latin typeface="Calibri" pitchFamily="34" charset="0"/>
                           <a:ea typeface="Calibri" pitchFamily="34" charset="-122"/>
                           <a:cs typeface="Calibri" pitchFamily="34" charset="-120"/>
                         </a:rPr>
-                        <a:t>gensrc measurement</a:t>
+                        <a:t> measurement</a:t>
                       </a:r>
                       <a:endParaRPr lang="en-US" sz="1100" dirty="0">
                         <a:latin typeface="Calibri" charset="0"/>
@@ -12284,7 +12459,7 @@
                           <a:ea typeface="Calibri" pitchFamily="34" charset="-122"/>
                           <a:cs typeface="Calibri" pitchFamily="34" charset="-120"/>
                         </a:rPr>
-                        <a:t>Verus never reads the body — unverified code, out of scope</a:t>
+                        <a:t>Verus never reads the body (unverified code, out of scope)</a:t>
                       </a:r>
                       <a:endParaRPr lang="en-US" sz="1100" dirty="0">
                         <a:latin typeface="Calibri" charset="0"/>
@@ -12348,11 +12523,25 @@
                           <a:solidFill>
                             <a:srgbClr val="212121"/>
                           </a:solidFill>
+                          <a:latin typeface="Courier New" pitchFamily="34" charset="0"/>
+                          <a:ea typeface="Courier New" pitchFamily="34" charset="-122"/>
+                          <a:cs typeface="Courier New" pitchFamily="34" charset="-120"/>
+                        </a:rPr>
+                        <a:t>gensrc</a:t>
+                      </a:r>
+                      <a:pPr algn="l" indent="0" marL="0">
+                        <a:buNone/>
+                      </a:pPr>
+                      <a:r>
+                        <a:rPr lang="en-US" sz="1100" dirty="0">
+                          <a:solidFill>
+                            <a:srgbClr val="212121"/>
+                          </a:solidFill>
                           <a:latin typeface="Calibri" pitchFamily="34" charset="0"/>
                           <a:ea typeface="Calibri" pitchFamily="34" charset="-122"/>
                           <a:cs typeface="Calibri" pitchFamily="34" charset="-120"/>
                         </a:rPr>
-                        <a:t>gensrc measurement</a:t>
+                        <a:t> measurement</a:t>
                       </a:r>
                       <a:endParaRPr lang="en-US" sz="1100" dirty="0">
                         <a:latin typeface="Calibri" charset="0"/>
@@ -12504,7 +12693,7 @@
                           <a:ea typeface="Calibri" pitchFamily="34" charset="-122"/>
                           <a:cs typeface="Calibri" pitchFamily="34" charset="-120"/>
                         </a:rPr>
-                        <a:t>self-consistent; gap in contract coverage for attestation report’s compute_cases construct</a:t>
+                        <a:t>gap in contract coverage for attestation report’s compute_cases construct</a:t>
                       </a:r>
                       <a:endParaRPr lang="en-US" sz="1100" dirty="0">
                         <a:latin typeface="Calibri" charset="0"/>

--- a/docs/video_slides_draft.pptx
+++ b/docs/video_slides_draft.pptx
@@ -1594,7 +1594,7 @@
           <a:p>
             <a:r>
               <a:rPr lang="en-US" dirty="0"/>
-              <a:t>Collection point for every reference in the deck - keep this slide current as sections are added (isolette slide carries the K-State + AR-08-32 citations inline; Copland/Verus/seL4 seeded here ahead of their sections).
+              <a:t>Collection point for every reference in the deck - keep this slide current as sections are added. Numbers follow first on-slide citation ([1] on the lifecycle slide; [2]-[6] on the core-stack slide; [7]-[13] on the isolette slide); groupings kept, so numbers read out of order here on purpose.
 DOIs on record in docs/video_slide_drafts.md.</a:t>
             </a:r>
             <a:endParaRPr lang="en-US" dirty="0"/>
@@ -3312,329 +3312,7 @@
       </p:grpSpPr>
       <p:sp>
         <p:nvSpPr>
-          <p:cNvPr id="2" name="Shape 0"/>
-          <p:cNvSpPr/>
-          <p:nvPr/>
-        </p:nvSpPr>
-        <p:spPr>
-          <a:xfrm>
-            <a:off x="640080" y="201168"/>
-            <a:ext cx="2073859" cy="502920"/>
-          </a:xfrm>
-          <a:prstGeom prst="roundRect">
-            <a:avLst>
-              <a:gd name="adj" fmla="val 9091"/>
-            </a:avLst>
-          </a:prstGeom>
-          <a:solidFill>
-            <a:srgbClr val="E4EAF4"/>
-          </a:solidFill>
-          <a:ln/>
-        </p:spPr>
-      </p:sp>
-      <p:sp>
-        <p:nvSpPr>
-          <p:cNvPr id="3" name="Text 1"/>
-          <p:cNvSpPr/>
-          <p:nvPr/>
-        </p:nvSpPr>
-        <p:spPr>
-          <a:xfrm>
-            <a:off x="640080" y="201168"/>
-            <a:ext cx="2073859" cy="502920"/>
-          </a:xfrm>
-          <a:prstGeom prst="rect">
-            <a:avLst/>
-          </a:prstGeom>
-          <a:noFill/>
-          <a:ln/>
-        </p:spPr>
-        <p:txBody>
-          <a:bodyPr wrap="square" lIns="254" tIns="254" rIns="254" bIns="254" rtlCol="0" anchor="ctr"/>
-          <a:lstStyle/>
-          <a:p>
-            <a:pPr algn="ctr" indent="0" marL="0">
-              <a:buNone/>
-            </a:pPr>
-            <a:r>
-              <a:rPr lang="en-US" sz="900" dirty="0">
-                <a:solidFill>
-                  <a:srgbClr val="5A6478"/>
-                </a:solidFill>
-                <a:latin typeface="Calibri" pitchFamily="34" charset="0"/>
-                <a:ea typeface="Calibri" pitchFamily="34" charset="-122"/>
-                <a:cs typeface="Calibri" pitchFamily="34" charset="-120"/>
-              </a:rPr>
-              <a:t>Preliminaries</a:t>
-            </a:r>
-            <a:endParaRPr lang="en-US" sz="900" dirty="0"/>
-          </a:p>
-        </p:txBody>
-      </p:sp>
-      <p:sp>
-        <p:nvSpPr>
-          <p:cNvPr id="4" name="Shape 2"/>
-          <p:cNvSpPr/>
-          <p:nvPr/>
-        </p:nvSpPr>
-        <p:spPr>
-          <a:xfrm>
-            <a:off x="2841955" y="201168"/>
-            <a:ext cx="2073859" cy="502920"/>
-          </a:xfrm>
-          <a:prstGeom prst="roundRect">
-            <a:avLst>
-              <a:gd name="adj" fmla="val 9091"/>
-            </a:avLst>
-          </a:prstGeom>
-          <a:solidFill>
-            <a:srgbClr val="1E2761"/>
-          </a:solidFill>
-          <a:ln/>
-        </p:spPr>
-      </p:sp>
-      <p:sp>
-        <p:nvSpPr>
-          <p:cNvPr id="5" name="Text 3"/>
-          <p:cNvSpPr/>
-          <p:nvPr/>
-        </p:nvSpPr>
-        <p:spPr>
-          <a:xfrm>
-            <a:off x="2841955" y="201168"/>
-            <a:ext cx="2073859" cy="502920"/>
-          </a:xfrm>
-          <a:prstGeom prst="rect">
-            <a:avLst/>
-          </a:prstGeom>
-          <a:noFill/>
-          <a:ln/>
-        </p:spPr>
-        <p:txBody>
-          <a:bodyPr wrap="square" lIns="254" tIns="254" rIns="254" bIns="254" rtlCol="0" anchor="ctr"/>
-          <a:lstStyle/>
-          <a:p>
-            <a:pPr algn="ctr" indent="0" marL="0">
-              <a:buNone/>
-            </a:pPr>
-            <a:r>
-              <a:rPr lang="en-US" sz="900" b="1" dirty="0">
-                <a:solidFill>
-                  <a:srgbClr val="FFFFFF"/>
-                </a:solidFill>
-                <a:latin typeface="Calibri" pitchFamily="34" charset="0"/>
-                <a:ea typeface="Calibri" pitchFamily="34" charset="-122"/>
-                <a:cs typeface="Calibri" pitchFamily="34" charset="-120"/>
-              </a:rPr>
-              <a:t>Demo:</a:t>
-            </a:r>
-            <a:endParaRPr lang="en-US" sz="900" dirty="0"/>
-          </a:p>
-          <a:p>
-            <a:pPr algn="ctr" indent="0" marL="0">
-              <a:buNone/>
-            </a:pPr>
-            <a:r>
-              <a:rPr lang="en-US" sz="900" b="1" dirty="0">
-                <a:solidFill>
-                  <a:srgbClr val="FFFFFF"/>
-                </a:solidFill>
-                <a:latin typeface="Calibri" pitchFamily="34" charset="0"/>
-                <a:ea typeface="Calibri" pitchFamily="34" charset="-122"/>
-                <a:cs typeface="Calibri" pitchFamily="34" charset="-120"/>
-              </a:rPr>
-              <a:t>Isolette (SysMLv2 → Rust)</a:t>
-            </a:r>
-            <a:endParaRPr lang="en-US" sz="900" dirty="0"/>
-          </a:p>
-        </p:txBody>
-      </p:sp>
-      <p:sp>
-        <p:nvSpPr>
-          <p:cNvPr id="6" name="Shape 4"/>
-          <p:cNvSpPr/>
-          <p:nvPr/>
-        </p:nvSpPr>
-        <p:spPr>
-          <a:xfrm>
-            <a:off x="5043830" y="201168"/>
-            <a:ext cx="2073859" cy="502920"/>
-          </a:xfrm>
-          <a:prstGeom prst="roundRect">
-            <a:avLst>
-              <a:gd name="adj" fmla="val 9091"/>
-            </a:avLst>
-          </a:prstGeom>
-          <a:solidFill>
-            <a:srgbClr val="E4EAF4"/>
-          </a:solidFill>
-          <a:ln/>
-        </p:spPr>
-      </p:sp>
-      <p:sp>
-        <p:nvSpPr>
-          <p:cNvPr id="7" name="Text 5"/>
-          <p:cNvSpPr/>
-          <p:nvPr/>
-        </p:nvSpPr>
-        <p:spPr>
-          <a:xfrm>
-            <a:off x="5043830" y="201168"/>
-            <a:ext cx="2073859" cy="502920"/>
-          </a:xfrm>
-          <a:prstGeom prst="rect">
-            <a:avLst/>
-          </a:prstGeom>
-          <a:noFill/>
-          <a:ln/>
-        </p:spPr>
-        <p:txBody>
-          <a:bodyPr wrap="square" lIns="254" tIns="254" rIns="254" bIns="254" rtlCol="0" anchor="ctr"/>
-          <a:lstStyle/>
-          <a:p>
-            <a:pPr algn="ctr" indent="0" marL="0">
-              <a:buNone/>
-            </a:pPr>
-            <a:r>
-              <a:rPr lang="en-US" sz="900" dirty="0">
-                <a:solidFill>
-                  <a:srgbClr val="5A6478"/>
-                </a:solidFill>
-                <a:latin typeface="Calibri" pitchFamily="34" charset="0"/>
-                <a:ea typeface="Calibri" pitchFamily="34" charset="-122"/>
-                <a:cs typeface="Calibri" pitchFamily="34" charset="-120"/>
-              </a:rPr>
-              <a:t>Other Ecosystems</a:t>
-            </a:r>
-            <a:endParaRPr lang="en-US" sz="900" dirty="0"/>
-          </a:p>
-        </p:txBody>
-      </p:sp>
-      <p:sp>
-        <p:nvSpPr>
-          <p:cNvPr id="8" name="Shape 6"/>
-          <p:cNvSpPr/>
-          <p:nvPr/>
-        </p:nvSpPr>
-        <p:spPr>
-          <a:xfrm>
-            <a:off x="7245706" y="201168"/>
-            <a:ext cx="2073859" cy="502920"/>
-          </a:xfrm>
-          <a:prstGeom prst="roundRect">
-            <a:avLst>
-              <a:gd name="adj" fmla="val 9091"/>
-            </a:avLst>
-          </a:prstGeom>
-          <a:solidFill>
-            <a:srgbClr val="E4EAF4"/>
-          </a:solidFill>
-          <a:ln/>
-        </p:spPr>
-      </p:sp>
-      <p:sp>
-        <p:nvSpPr>
-          <p:cNvPr id="9" name="Text 7"/>
-          <p:cNvSpPr/>
-          <p:nvPr/>
-        </p:nvSpPr>
-        <p:spPr>
-          <a:xfrm>
-            <a:off x="7245706" y="201168"/>
-            <a:ext cx="2073859" cy="502920"/>
-          </a:xfrm>
-          <a:prstGeom prst="rect">
-            <a:avLst/>
-          </a:prstGeom>
-          <a:noFill/>
-          <a:ln/>
-        </p:spPr>
-        <p:txBody>
-          <a:bodyPr wrap="square" lIns="254" tIns="254" rIns="254" bIns="254" rtlCol="0" anchor="ctr"/>
-          <a:lstStyle/>
-          <a:p>
-            <a:pPr algn="ctr" indent="0" marL="0">
-              <a:buNone/>
-            </a:pPr>
-            <a:r>
-              <a:rPr lang="en-US" sz="900" dirty="0">
-                <a:solidFill>
-                  <a:srgbClr val="5A6478"/>
-                </a:solidFill>
-                <a:latin typeface="Calibri" pitchFamily="34" charset="0"/>
-                <a:ea typeface="Calibri" pitchFamily="34" charset="-122"/>
-                <a:cs typeface="Calibri" pitchFamily="34" charset="-120"/>
-              </a:rPr>
-              <a:t>AI in the Loop</a:t>
-            </a:r>
-            <a:endParaRPr lang="en-US" sz="900" dirty="0"/>
-          </a:p>
-        </p:txBody>
-      </p:sp>
-      <p:sp>
-        <p:nvSpPr>
-          <p:cNvPr id="10" name="Shape 8"/>
-          <p:cNvSpPr/>
-          <p:nvPr/>
-        </p:nvSpPr>
-        <p:spPr>
-          <a:xfrm>
-            <a:off x="9447581" y="201168"/>
-            <a:ext cx="2073859" cy="502920"/>
-          </a:xfrm>
-          <a:prstGeom prst="roundRect">
-            <a:avLst>
-              <a:gd name="adj" fmla="val 9091"/>
-            </a:avLst>
-          </a:prstGeom>
-          <a:solidFill>
-            <a:srgbClr val="E4EAF4"/>
-          </a:solidFill>
-          <a:ln/>
-        </p:spPr>
-      </p:sp>
-      <p:sp>
-        <p:nvSpPr>
-          <p:cNvPr id="11" name="Text 9"/>
-          <p:cNvSpPr/>
-          <p:nvPr/>
-        </p:nvSpPr>
-        <p:spPr>
-          <a:xfrm>
-            <a:off x="9447581" y="201168"/>
-            <a:ext cx="2073859" cy="502920"/>
-          </a:xfrm>
-          <a:prstGeom prst="rect">
-            <a:avLst/>
-          </a:prstGeom>
-          <a:noFill/>
-          <a:ln/>
-        </p:spPr>
-        <p:txBody>
-          <a:bodyPr wrap="square" lIns="254" tIns="254" rIns="254" bIns="254" rtlCol="0" anchor="ctr"/>
-          <a:lstStyle/>
-          <a:p>
-            <a:pPr algn="ctr" indent="0" marL="0">
-              <a:buNone/>
-            </a:pPr>
-            <a:r>
-              <a:rPr lang="en-US" sz="900" dirty="0">
-                <a:solidFill>
-                  <a:srgbClr val="5A6478"/>
-                </a:solidFill>
-                <a:latin typeface="Calibri" pitchFamily="34" charset="0"/>
-                <a:ea typeface="Calibri" pitchFamily="34" charset="-122"/>
-                <a:cs typeface="Calibri" pitchFamily="34" charset="-120"/>
-              </a:rPr>
-              <a:t>Close</a:t>
-            </a:r>
-            <a:endParaRPr lang="en-US" sz="900" dirty="0"/>
-          </a:p>
-        </p:txBody>
-      </p:sp>
-      <p:sp>
-        <p:nvSpPr>
-          <p:cNvPr id="12" name="Text 10"/>
+          <p:cNvPr id="2" name="Text 0"/>
           <p:cNvSpPr/>
           <p:nvPr/>
         </p:nvSpPr>
@@ -3673,7 +3351,7 @@
       </p:sp>
       <p:sp>
         <p:nvSpPr>
-          <p:cNvPr id="13" name="Text 11"/>
+          <p:cNvPr id="3" name="Text 1"/>
           <p:cNvSpPr/>
           <p:nvPr/>
         </p:nvSpPr>
@@ -3712,7 +3390,7 @@
       </p:sp>
       <p:sp>
         <p:nvSpPr>
-          <p:cNvPr id="14" name="Text 12"/>
+          <p:cNvPr id="4" name="Text 2"/>
           <p:cNvSpPr/>
           <p:nvPr/>
         </p:nvSpPr>
@@ -3751,7 +3429,7 @@
       </p:sp>
       <p:sp>
         <p:nvSpPr>
-          <p:cNvPr id="15" name="Text 13"/>
+          <p:cNvPr id="5" name="Text 3"/>
           <p:cNvSpPr/>
           <p:nvPr/>
         </p:nvSpPr>
@@ -3790,7 +3468,7 @@
       </p:sp>
       <p:sp>
         <p:nvSpPr>
-          <p:cNvPr id="16" name="Text 14"/>
+          <p:cNvPr id="6" name="Text 4"/>
           <p:cNvSpPr/>
           <p:nvPr/>
         </p:nvSpPr>
@@ -3861,329 +3539,7 @@
       </p:grpSpPr>
       <p:sp>
         <p:nvSpPr>
-          <p:cNvPr id="2" name="Shape 0"/>
-          <p:cNvSpPr/>
-          <p:nvPr/>
-        </p:nvSpPr>
-        <p:spPr>
-          <a:xfrm>
-            <a:off x="640080" y="201168"/>
-            <a:ext cx="2073859" cy="502920"/>
-          </a:xfrm>
-          <a:prstGeom prst="roundRect">
-            <a:avLst>
-              <a:gd name="adj" fmla="val 9091"/>
-            </a:avLst>
-          </a:prstGeom>
-          <a:solidFill>
-            <a:srgbClr val="E4EAF4"/>
-          </a:solidFill>
-          <a:ln/>
-        </p:spPr>
-      </p:sp>
-      <p:sp>
-        <p:nvSpPr>
-          <p:cNvPr id="3" name="Text 1"/>
-          <p:cNvSpPr/>
-          <p:nvPr/>
-        </p:nvSpPr>
-        <p:spPr>
-          <a:xfrm>
-            <a:off x="640080" y="201168"/>
-            <a:ext cx="2073859" cy="502920"/>
-          </a:xfrm>
-          <a:prstGeom prst="rect">
-            <a:avLst/>
-          </a:prstGeom>
-          <a:noFill/>
-          <a:ln/>
-        </p:spPr>
-        <p:txBody>
-          <a:bodyPr wrap="square" lIns="254" tIns="254" rIns="254" bIns="254" rtlCol="0" anchor="ctr"/>
-          <a:lstStyle/>
-          <a:p>
-            <a:pPr algn="ctr" indent="0" marL="0">
-              <a:buNone/>
-            </a:pPr>
-            <a:r>
-              <a:rPr lang="en-US" sz="900" dirty="0">
-                <a:solidFill>
-                  <a:srgbClr val="5A6478"/>
-                </a:solidFill>
-                <a:latin typeface="Calibri" pitchFamily="34" charset="0"/>
-                <a:ea typeface="Calibri" pitchFamily="34" charset="-122"/>
-                <a:cs typeface="Calibri" pitchFamily="34" charset="-120"/>
-              </a:rPr>
-              <a:t>Preliminaries</a:t>
-            </a:r>
-            <a:endParaRPr lang="en-US" sz="900" dirty="0"/>
-          </a:p>
-        </p:txBody>
-      </p:sp>
-      <p:sp>
-        <p:nvSpPr>
-          <p:cNvPr id="4" name="Shape 2"/>
-          <p:cNvSpPr/>
-          <p:nvPr/>
-        </p:nvSpPr>
-        <p:spPr>
-          <a:xfrm>
-            <a:off x="2841955" y="201168"/>
-            <a:ext cx="2073859" cy="502920"/>
-          </a:xfrm>
-          <a:prstGeom prst="roundRect">
-            <a:avLst>
-              <a:gd name="adj" fmla="val 9091"/>
-            </a:avLst>
-          </a:prstGeom>
-          <a:solidFill>
-            <a:srgbClr val="1E2761"/>
-          </a:solidFill>
-          <a:ln/>
-        </p:spPr>
-      </p:sp>
-      <p:sp>
-        <p:nvSpPr>
-          <p:cNvPr id="5" name="Text 3"/>
-          <p:cNvSpPr/>
-          <p:nvPr/>
-        </p:nvSpPr>
-        <p:spPr>
-          <a:xfrm>
-            <a:off x="2841955" y="201168"/>
-            <a:ext cx="2073859" cy="502920"/>
-          </a:xfrm>
-          <a:prstGeom prst="rect">
-            <a:avLst/>
-          </a:prstGeom>
-          <a:noFill/>
-          <a:ln/>
-        </p:spPr>
-        <p:txBody>
-          <a:bodyPr wrap="square" lIns="254" tIns="254" rIns="254" bIns="254" rtlCol="0" anchor="ctr"/>
-          <a:lstStyle/>
-          <a:p>
-            <a:pPr algn="ctr" indent="0" marL="0">
-              <a:buNone/>
-            </a:pPr>
-            <a:r>
-              <a:rPr lang="en-US" sz="900" b="1" dirty="0">
-                <a:solidFill>
-                  <a:srgbClr val="FFFFFF"/>
-                </a:solidFill>
-                <a:latin typeface="Calibri" pitchFamily="34" charset="0"/>
-                <a:ea typeface="Calibri" pitchFamily="34" charset="-122"/>
-                <a:cs typeface="Calibri" pitchFamily="34" charset="-120"/>
-              </a:rPr>
-              <a:t>Demo:</a:t>
-            </a:r>
-            <a:endParaRPr lang="en-US" sz="900" dirty="0"/>
-          </a:p>
-          <a:p>
-            <a:pPr algn="ctr" indent="0" marL="0">
-              <a:buNone/>
-            </a:pPr>
-            <a:r>
-              <a:rPr lang="en-US" sz="900" b="1" dirty="0">
-                <a:solidFill>
-                  <a:srgbClr val="FFFFFF"/>
-                </a:solidFill>
-                <a:latin typeface="Calibri" pitchFamily="34" charset="0"/>
-                <a:ea typeface="Calibri" pitchFamily="34" charset="-122"/>
-                <a:cs typeface="Calibri" pitchFamily="34" charset="-120"/>
-              </a:rPr>
-              <a:t>Isolette (SysMLv2 → Rust)</a:t>
-            </a:r>
-            <a:endParaRPr lang="en-US" sz="900" dirty="0"/>
-          </a:p>
-        </p:txBody>
-      </p:sp>
-      <p:sp>
-        <p:nvSpPr>
-          <p:cNvPr id="6" name="Shape 4"/>
-          <p:cNvSpPr/>
-          <p:nvPr/>
-        </p:nvSpPr>
-        <p:spPr>
-          <a:xfrm>
-            <a:off x="5043830" y="201168"/>
-            <a:ext cx="2073859" cy="502920"/>
-          </a:xfrm>
-          <a:prstGeom prst="roundRect">
-            <a:avLst>
-              <a:gd name="adj" fmla="val 9091"/>
-            </a:avLst>
-          </a:prstGeom>
-          <a:solidFill>
-            <a:srgbClr val="E4EAF4"/>
-          </a:solidFill>
-          <a:ln/>
-        </p:spPr>
-      </p:sp>
-      <p:sp>
-        <p:nvSpPr>
-          <p:cNvPr id="7" name="Text 5"/>
-          <p:cNvSpPr/>
-          <p:nvPr/>
-        </p:nvSpPr>
-        <p:spPr>
-          <a:xfrm>
-            <a:off x="5043830" y="201168"/>
-            <a:ext cx="2073859" cy="502920"/>
-          </a:xfrm>
-          <a:prstGeom prst="rect">
-            <a:avLst/>
-          </a:prstGeom>
-          <a:noFill/>
-          <a:ln/>
-        </p:spPr>
-        <p:txBody>
-          <a:bodyPr wrap="square" lIns="254" tIns="254" rIns="254" bIns="254" rtlCol="0" anchor="ctr"/>
-          <a:lstStyle/>
-          <a:p>
-            <a:pPr algn="ctr" indent="0" marL="0">
-              <a:buNone/>
-            </a:pPr>
-            <a:r>
-              <a:rPr lang="en-US" sz="900" dirty="0">
-                <a:solidFill>
-                  <a:srgbClr val="5A6478"/>
-                </a:solidFill>
-                <a:latin typeface="Calibri" pitchFamily="34" charset="0"/>
-                <a:ea typeface="Calibri" pitchFamily="34" charset="-122"/>
-                <a:cs typeface="Calibri" pitchFamily="34" charset="-120"/>
-              </a:rPr>
-              <a:t>Other Ecosystems</a:t>
-            </a:r>
-            <a:endParaRPr lang="en-US" sz="900" dirty="0"/>
-          </a:p>
-        </p:txBody>
-      </p:sp>
-      <p:sp>
-        <p:nvSpPr>
-          <p:cNvPr id="8" name="Shape 6"/>
-          <p:cNvSpPr/>
-          <p:nvPr/>
-        </p:nvSpPr>
-        <p:spPr>
-          <a:xfrm>
-            <a:off x="7245706" y="201168"/>
-            <a:ext cx="2073859" cy="502920"/>
-          </a:xfrm>
-          <a:prstGeom prst="roundRect">
-            <a:avLst>
-              <a:gd name="adj" fmla="val 9091"/>
-            </a:avLst>
-          </a:prstGeom>
-          <a:solidFill>
-            <a:srgbClr val="E4EAF4"/>
-          </a:solidFill>
-          <a:ln/>
-        </p:spPr>
-      </p:sp>
-      <p:sp>
-        <p:nvSpPr>
-          <p:cNvPr id="9" name="Text 7"/>
-          <p:cNvSpPr/>
-          <p:nvPr/>
-        </p:nvSpPr>
-        <p:spPr>
-          <a:xfrm>
-            <a:off x="7245706" y="201168"/>
-            <a:ext cx="2073859" cy="502920"/>
-          </a:xfrm>
-          <a:prstGeom prst="rect">
-            <a:avLst/>
-          </a:prstGeom>
-          <a:noFill/>
-          <a:ln/>
-        </p:spPr>
-        <p:txBody>
-          <a:bodyPr wrap="square" lIns="254" tIns="254" rIns="254" bIns="254" rtlCol="0" anchor="ctr"/>
-          <a:lstStyle/>
-          <a:p>
-            <a:pPr algn="ctr" indent="0" marL="0">
-              <a:buNone/>
-            </a:pPr>
-            <a:r>
-              <a:rPr lang="en-US" sz="900" dirty="0">
-                <a:solidFill>
-                  <a:srgbClr val="5A6478"/>
-                </a:solidFill>
-                <a:latin typeface="Calibri" pitchFamily="34" charset="0"/>
-                <a:ea typeface="Calibri" pitchFamily="34" charset="-122"/>
-                <a:cs typeface="Calibri" pitchFamily="34" charset="-120"/>
-              </a:rPr>
-              <a:t>AI in the Loop</a:t>
-            </a:r>
-            <a:endParaRPr lang="en-US" sz="900" dirty="0"/>
-          </a:p>
-        </p:txBody>
-      </p:sp>
-      <p:sp>
-        <p:nvSpPr>
-          <p:cNvPr id="10" name="Shape 8"/>
-          <p:cNvSpPr/>
-          <p:nvPr/>
-        </p:nvSpPr>
-        <p:spPr>
-          <a:xfrm>
-            <a:off x="9447581" y="201168"/>
-            <a:ext cx="2073859" cy="502920"/>
-          </a:xfrm>
-          <a:prstGeom prst="roundRect">
-            <a:avLst>
-              <a:gd name="adj" fmla="val 9091"/>
-            </a:avLst>
-          </a:prstGeom>
-          <a:solidFill>
-            <a:srgbClr val="E4EAF4"/>
-          </a:solidFill>
-          <a:ln/>
-        </p:spPr>
-      </p:sp>
-      <p:sp>
-        <p:nvSpPr>
-          <p:cNvPr id="11" name="Text 9"/>
-          <p:cNvSpPr/>
-          <p:nvPr/>
-        </p:nvSpPr>
-        <p:spPr>
-          <a:xfrm>
-            <a:off x="9447581" y="201168"/>
-            <a:ext cx="2073859" cy="502920"/>
-          </a:xfrm>
-          <a:prstGeom prst="rect">
-            <a:avLst/>
-          </a:prstGeom>
-          <a:noFill/>
-          <a:ln/>
-        </p:spPr>
-        <p:txBody>
-          <a:bodyPr wrap="square" lIns="254" tIns="254" rIns="254" bIns="254" rtlCol="0" anchor="ctr"/>
-          <a:lstStyle/>
-          <a:p>
-            <a:pPr algn="ctr" indent="0" marL="0">
-              <a:buNone/>
-            </a:pPr>
-            <a:r>
-              <a:rPr lang="en-US" sz="900" dirty="0">
-                <a:solidFill>
-                  <a:srgbClr val="5A6478"/>
-                </a:solidFill>
-                <a:latin typeface="Calibri" pitchFamily="34" charset="0"/>
-                <a:ea typeface="Calibri" pitchFamily="34" charset="-122"/>
-                <a:cs typeface="Calibri" pitchFamily="34" charset="-120"/>
-              </a:rPr>
-              <a:t>Close</a:t>
-            </a:r>
-            <a:endParaRPr lang="en-US" sz="900" dirty="0"/>
-          </a:p>
-        </p:txBody>
-      </p:sp>
-      <p:sp>
-        <p:nvSpPr>
-          <p:cNvPr id="12" name="Text 10"/>
+          <p:cNvPr id="2" name="Text 0"/>
           <p:cNvSpPr/>
           <p:nvPr/>
         </p:nvSpPr>
@@ -4222,7 +3578,7 @@
       </p:sp>
       <p:sp>
         <p:nvSpPr>
-          <p:cNvPr id="13" name="Text 11"/>
+          <p:cNvPr id="3" name="Text 1"/>
           <p:cNvSpPr/>
           <p:nvPr/>
         </p:nvSpPr>
@@ -4261,7 +3617,7 @@
       </p:sp>
       <p:sp>
         <p:nvSpPr>
-          <p:cNvPr id="14" name="Text 12"/>
+          <p:cNvPr id="4" name="Text 2"/>
           <p:cNvSpPr/>
           <p:nvPr/>
         </p:nvSpPr>
@@ -4300,7 +3656,7 @@
       </p:sp>
       <p:sp>
         <p:nvSpPr>
-          <p:cNvPr id="15" name="Text 13"/>
+          <p:cNvPr id="5" name="Text 3"/>
           <p:cNvSpPr/>
           <p:nvPr/>
         </p:nvSpPr>
@@ -4370,7 +3726,7 @@
       </p:sp>
       <p:sp>
         <p:nvSpPr>
-          <p:cNvPr id="16" name="Text 14"/>
+          <p:cNvPr id="6" name="Text 4"/>
           <p:cNvSpPr/>
           <p:nvPr/>
         </p:nvSpPr>
@@ -4441,329 +3797,7 @@
       </p:grpSpPr>
       <p:sp>
         <p:nvSpPr>
-          <p:cNvPr id="2" name="Shape 0"/>
-          <p:cNvSpPr/>
-          <p:nvPr/>
-        </p:nvSpPr>
-        <p:spPr>
-          <a:xfrm>
-            <a:off x="640080" y="201168"/>
-            <a:ext cx="2073859" cy="502920"/>
-          </a:xfrm>
-          <a:prstGeom prst="roundRect">
-            <a:avLst>
-              <a:gd name="adj" fmla="val 9091"/>
-            </a:avLst>
-          </a:prstGeom>
-          <a:solidFill>
-            <a:srgbClr val="E4EAF4"/>
-          </a:solidFill>
-          <a:ln/>
-        </p:spPr>
-      </p:sp>
-      <p:sp>
-        <p:nvSpPr>
-          <p:cNvPr id="3" name="Text 1"/>
-          <p:cNvSpPr/>
-          <p:nvPr/>
-        </p:nvSpPr>
-        <p:spPr>
-          <a:xfrm>
-            <a:off x="640080" y="201168"/>
-            <a:ext cx="2073859" cy="502920"/>
-          </a:xfrm>
-          <a:prstGeom prst="rect">
-            <a:avLst/>
-          </a:prstGeom>
-          <a:noFill/>
-          <a:ln/>
-        </p:spPr>
-        <p:txBody>
-          <a:bodyPr wrap="square" lIns="254" tIns="254" rIns="254" bIns="254" rtlCol="0" anchor="ctr"/>
-          <a:lstStyle/>
-          <a:p>
-            <a:pPr algn="ctr" indent="0" marL="0">
-              <a:buNone/>
-            </a:pPr>
-            <a:r>
-              <a:rPr lang="en-US" sz="900" dirty="0">
-                <a:solidFill>
-                  <a:srgbClr val="5A6478"/>
-                </a:solidFill>
-                <a:latin typeface="Calibri" pitchFamily="34" charset="0"/>
-                <a:ea typeface="Calibri" pitchFamily="34" charset="-122"/>
-                <a:cs typeface="Calibri" pitchFamily="34" charset="-120"/>
-              </a:rPr>
-              <a:t>Preliminaries</a:t>
-            </a:r>
-            <a:endParaRPr lang="en-US" sz="900" dirty="0"/>
-          </a:p>
-        </p:txBody>
-      </p:sp>
-      <p:sp>
-        <p:nvSpPr>
-          <p:cNvPr id="4" name="Shape 2"/>
-          <p:cNvSpPr/>
-          <p:nvPr/>
-        </p:nvSpPr>
-        <p:spPr>
-          <a:xfrm>
-            <a:off x="2841955" y="201168"/>
-            <a:ext cx="2073859" cy="502920"/>
-          </a:xfrm>
-          <a:prstGeom prst="roundRect">
-            <a:avLst>
-              <a:gd name="adj" fmla="val 9091"/>
-            </a:avLst>
-          </a:prstGeom>
-          <a:solidFill>
-            <a:srgbClr val="1E2761"/>
-          </a:solidFill>
-          <a:ln/>
-        </p:spPr>
-      </p:sp>
-      <p:sp>
-        <p:nvSpPr>
-          <p:cNvPr id="5" name="Text 3"/>
-          <p:cNvSpPr/>
-          <p:nvPr/>
-        </p:nvSpPr>
-        <p:spPr>
-          <a:xfrm>
-            <a:off x="2841955" y="201168"/>
-            <a:ext cx="2073859" cy="502920"/>
-          </a:xfrm>
-          <a:prstGeom prst="rect">
-            <a:avLst/>
-          </a:prstGeom>
-          <a:noFill/>
-          <a:ln/>
-        </p:spPr>
-        <p:txBody>
-          <a:bodyPr wrap="square" lIns="254" tIns="254" rIns="254" bIns="254" rtlCol="0" anchor="ctr"/>
-          <a:lstStyle/>
-          <a:p>
-            <a:pPr algn="ctr" indent="0" marL="0">
-              <a:buNone/>
-            </a:pPr>
-            <a:r>
-              <a:rPr lang="en-US" sz="900" b="1" dirty="0">
-                <a:solidFill>
-                  <a:srgbClr val="FFFFFF"/>
-                </a:solidFill>
-                <a:latin typeface="Calibri" pitchFamily="34" charset="0"/>
-                <a:ea typeface="Calibri" pitchFamily="34" charset="-122"/>
-                <a:cs typeface="Calibri" pitchFamily="34" charset="-120"/>
-              </a:rPr>
-              <a:t>Demo:</a:t>
-            </a:r>
-            <a:endParaRPr lang="en-US" sz="900" dirty="0"/>
-          </a:p>
-          <a:p>
-            <a:pPr algn="ctr" indent="0" marL="0">
-              <a:buNone/>
-            </a:pPr>
-            <a:r>
-              <a:rPr lang="en-US" sz="900" b="1" dirty="0">
-                <a:solidFill>
-                  <a:srgbClr val="FFFFFF"/>
-                </a:solidFill>
-                <a:latin typeface="Calibri" pitchFamily="34" charset="0"/>
-                <a:ea typeface="Calibri" pitchFamily="34" charset="-122"/>
-                <a:cs typeface="Calibri" pitchFamily="34" charset="-120"/>
-              </a:rPr>
-              <a:t>Isolette (SysMLv2 → Rust)</a:t>
-            </a:r>
-            <a:endParaRPr lang="en-US" sz="900" dirty="0"/>
-          </a:p>
-        </p:txBody>
-      </p:sp>
-      <p:sp>
-        <p:nvSpPr>
-          <p:cNvPr id="6" name="Shape 4"/>
-          <p:cNvSpPr/>
-          <p:nvPr/>
-        </p:nvSpPr>
-        <p:spPr>
-          <a:xfrm>
-            <a:off x="5043830" y="201168"/>
-            <a:ext cx="2073859" cy="502920"/>
-          </a:xfrm>
-          <a:prstGeom prst="roundRect">
-            <a:avLst>
-              <a:gd name="adj" fmla="val 9091"/>
-            </a:avLst>
-          </a:prstGeom>
-          <a:solidFill>
-            <a:srgbClr val="E4EAF4"/>
-          </a:solidFill>
-          <a:ln/>
-        </p:spPr>
-      </p:sp>
-      <p:sp>
-        <p:nvSpPr>
-          <p:cNvPr id="7" name="Text 5"/>
-          <p:cNvSpPr/>
-          <p:nvPr/>
-        </p:nvSpPr>
-        <p:spPr>
-          <a:xfrm>
-            <a:off x="5043830" y="201168"/>
-            <a:ext cx="2073859" cy="502920"/>
-          </a:xfrm>
-          <a:prstGeom prst="rect">
-            <a:avLst/>
-          </a:prstGeom>
-          <a:noFill/>
-          <a:ln/>
-        </p:spPr>
-        <p:txBody>
-          <a:bodyPr wrap="square" lIns="254" tIns="254" rIns="254" bIns="254" rtlCol="0" anchor="ctr"/>
-          <a:lstStyle/>
-          <a:p>
-            <a:pPr algn="ctr" indent="0" marL="0">
-              <a:buNone/>
-            </a:pPr>
-            <a:r>
-              <a:rPr lang="en-US" sz="900" dirty="0">
-                <a:solidFill>
-                  <a:srgbClr val="5A6478"/>
-                </a:solidFill>
-                <a:latin typeface="Calibri" pitchFamily="34" charset="0"/>
-                <a:ea typeface="Calibri" pitchFamily="34" charset="-122"/>
-                <a:cs typeface="Calibri" pitchFamily="34" charset="-120"/>
-              </a:rPr>
-              <a:t>Other Ecosystems</a:t>
-            </a:r>
-            <a:endParaRPr lang="en-US" sz="900" dirty="0"/>
-          </a:p>
-        </p:txBody>
-      </p:sp>
-      <p:sp>
-        <p:nvSpPr>
-          <p:cNvPr id="8" name="Shape 6"/>
-          <p:cNvSpPr/>
-          <p:nvPr/>
-        </p:nvSpPr>
-        <p:spPr>
-          <a:xfrm>
-            <a:off x="7245706" y="201168"/>
-            <a:ext cx="2073859" cy="502920"/>
-          </a:xfrm>
-          <a:prstGeom prst="roundRect">
-            <a:avLst>
-              <a:gd name="adj" fmla="val 9091"/>
-            </a:avLst>
-          </a:prstGeom>
-          <a:solidFill>
-            <a:srgbClr val="E4EAF4"/>
-          </a:solidFill>
-          <a:ln/>
-        </p:spPr>
-      </p:sp>
-      <p:sp>
-        <p:nvSpPr>
-          <p:cNvPr id="9" name="Text 7"/>
-          <p:cNvSpPr/>
-          <p:nvPr/>
-        </p:nvSpPr>
-        <p:spPr>
-          <a:xfrm>
-            <a:off x="7245706" y="201168"/>
-            <a:ext cx="2073859" cy="502920"/>
-          </a:xfrm>
-          <a:prstGeom prst="rect">
-            <a:avLst/>
-          </a:prstGeom>
-          <a:noFill/>
-          <a:ln/>
-        </p:spPr>
-        <p:txBody>
-          <a:bodyPr wrap="square" lIns="254" tIns="254" rIns="254" bIns="254" rtlCol="0" anchor="ctr"/>
-          <a:lstStyle/>
-          <a:p>
-            <a:pPr algn="ctr" indent="0" marL="0">
-              <a:buNone/>
-            </a:pPr>
-            <a:r>
-              <a:rPr lang="en-US" sz="900" dirty="0">
-                <a:solidFill>
-                  <a:srgbClr val="5A6478"/>
-                </a:solidFill>
-                <a:latin typeface="Calibri" pitchFamily="34" charset="0"/>
-                <a:ea typeface="Calibri" pitchFamily="34" charset="-122"/>
-                <a:cs typeface="Calibri" pitchFamily="34" charset="-120"/>
-              </a:rPr>
-              <a:t>AI in the Loop</a:t>
-            </a:r>
-            <a:endParaRPr lang="en-US" sz="900" dirty="0"/>
-          </a:p>
-        </p:txBody>
-      </p:sp>
-      <p:sp>
-        <p:nvSpPr>
-          <p:cNvPr id="10" name="Shape 8"/>
-          <p:cNvSpPr/>
-          <p:nvPr/>
-        </p:nvSpPr>
-        <p:spPr>
-          <a:xfrm>
-            <a:off x="9447581" y="201168"/>
-            <a:ext cx="2073859" cy="502920"/>
-          </a:xfrm>
-          <a:prstGeom prst="roundRect">
-            <a:avLst>
-              <a:gd name="adj" fmla="val 9091"/>
-            </a:avLst>
-          </a:prstGeom>
-          <a:solidFill>
-            <a:srgbClr val="E4EAF4"/>
-          </a:solidFill>
-          <a:ln/>
-        </p:spPr>
-      </p:sp>
-      <p:sp>
-        <p:nvSpPr>
-          <p:cNvPr id="11" name="Text 9"/>
-          <p:cNvSpPr/>
-          <p:nvPr/>
-        </p:nvSpPr>
-        <p:spPr>
-          <a:xfrm>
-            <a:off x="9447581" y="201168"/>
-            <a:ext cx="2073859" cy="502920"/>
-          </a:xfrm>
-          <a:prstGeom prst="rect">
-            <a:avLst/>
-          </a:prstGeom>
-          <a:noFill/>
-          <a:ln/>
-        </p:spPr>
-        <p:txBody>
-          <a:bodyPr wrap="square" lIns="254" tIns="254" rIns="254" bIns="254" rtlCol="0" anchor="ctr"/>
-          <a:lstStyle/>
-          <a:p>
-            <a:pPr algn="ctr" indent="0" marL="0">
-              <a:buNone/>
-            </a:pPr>
-            <a:r>
-              <a:rPr lang="en-US" sz="900" dirty="0">
-                <a:solidFill>
-                  <a:srgbClr val="5A6478"/>
-                </a:solidFill>
-                <a:latin typeface="Calibri" pitchFamily="34" charset="0"/>
-                <a:ea typeface="Calibri" pitchFamily="34" charset="-122"/>
-                <a:cs typeface="Calibri" pitchFamily="34" charset="-120"/>
-              </a:rPr>
-              <a:t>Close</a:t>
-            </a:r>
-            <a:endParaRPr lang="en-US" sz="900" dirty="0"/>
-          </a:p>
-        </p:txBody>
-      </p:sp>
-      <p:sp>
-        <p:nvSpPr>
-          <p:cNvPr id="12" name="Text 10"/>
+          <p:cNvPr id="2" name="Text 0"/>
           <p:cNvSpPr/>
           <p:nvPr/>
         </p:nvSpPr>
@@ -4802,7 +3836,7 @@
       </p:sp>
       <p:sp>
         <p:nvSpPr>
-          <p:cNvPr id="13" name="Text 11"/>
+          <p:cNvPr id="3" name="Text 1"/>
           <p:cNvSpPr/>
           <p:nvPr/>
         </p:nvSpPr>
@@ -4841,7 +3875,7 @@
       </p:sp>
       <p:sp>
         <p:nvSpPr>
-          <p:cNvPr id="14" name="Text 12"/>
+          <p:cNvPr id="4" name="Text 2"/>
           <p:cNvSpPr/>
           <p:nvPr/>
         </p:nvSpPr>
@@ -4880,7 +3914,7 @@
       </p:sp>
       <p:sp>
         <p:nvSpPr>
-          <p:cNvPr id="15" name="Text 13"/>
+          <p:cNvPr id="5" name="Text 3"/>
           <p:cNvSpPr/>
           <p:nvPr/>
         </p:nvSpPr>
@@ -4947,7 +3981,7 @@
       </p:sp>
       <p:sp>
         <p:nvSpPr>
-          <p:cNvPr id="16" name="Text 14"/>
+          <p:cNvPr id="6" name="Text 4"/>
           <p:cNvSpPr/>
           <p:nvPr/>
         </p:nvSpPr>
@@ -5018,329 +4052,7 @@
       </p:grpSpPr>
       <p:sp>
         <p:nvSpPr>
-          <p:cNvPr id="2" name="Shape 0"/>
-          <p:cNvSpPr/>
-          <p:nvPr/>
-        </p:nvSpPr>
-        <p:spPr>
-          <a:xfrm>
-            <a:off x="640080" y="201168"/>
-            <a:ext cx="2073859" cy="502920"/>
-          </a:xfrm>
-          <a:prstGeom prst="roundRect">
-            <a:avLst>
-              <a:gd name="adj" fmla="val 9091"/>
-            </a:avLst>
-          </a:prstGeom>
-          <a:solidFill>
-            <a:srgbClr val="E4EAF4"/>
-          </a:solidFill>
-          <a:ln/>
-        </p:spPr>
-      </p:sp>
-      <p:sp>
-        <p:nvSpPr>
-          <p:cNvPr id="3" name="Text 1"/>
-          <p:cNvSpPr/>
-          <p:nvPr/>
-        </p:nvSpPr>
-        <p:spPr>
-          <a:xfrm>
-            <a:off x="640080" y="201168"/>
-            <a:ext cx="2073859" cy="502920"/>
-          </a:xfrm>
-          <a:prstGeom prst="rect">
-            <a:avLst/>
-          </a:prstGeom>
-          <a:noFill/>
-          <a:ln/>
-        </p:spPr>
-        <p:txBody>
-          <a:bodyPr wrap="square" lIns="254" tIns="254" rIns="254" bIns="254" rtlCol="0" anchor="ctr"/>
-          <a:lstStyle/>
-          <a:p>
-            <a:pPr algn="ctr" indent="0" marL="0">
-              <a:buNone/>
-            </a:pPr>
-            <a:r>
-              <a:rPr lang="en-US" sz="900" dirty="0">
-                <a:solidFill>
-                  <a:srgbClr val="5A6478"/>
-                </a:solidFill>
-                <a:latin typeface="Calibri" pitchFamily="34" charset="0"/>
-                <a:ea typeface="Calibri" pitchFamily="34" charset="-122"/>
-                <a:cs typeface="Calibri" pitchFamily="34" charset="-120"/>
-              </a:rPr>
-              <a:t>Preliminaries</a:t>
-            </a:r>
-            <a:endParaRPr lang="en-US" sz="900" dirty="0"/>
-          </a:p>
-        </p:txBody>
-      </p:sp>
-      <p:sp>
-        <p:nvSpPr>
-          <p:cNvPr id="4" name="Shape 2"/>
-          <p:cNvSpPr/>
-          <p:nvPr/>
-        </p:nvSpPr>
-        <p:spPr>
-          <a:xfrm>
-            <a:off x="2841955" y="201168"/>
-            <a:ext cx="2073859" cy="502920"/>
-          </a:xfrm>
-          <a:prstGeom prst="roundRect">
-            <a:avLst>
-              <a:gd name="adj" fmla="val 9091"/>
-            </a:avLst>
-          </a:prstGeom>
-          <a:solidFill>
-            <a:srgbClr val="1E2761"/>
-          </a:solidFill>
-          <a:ln/>
-        </p:spPr>
-      </p:sp>
-      <p:sp>
-        <p:nvSpPr>
-          <p:cNvPr id="5" name="Text 3"/>
-          <p:cNvSpPr/>
-          <p:nvPr/>
-        </p:nvSpPr>
-        <p:spPr>
-          <a:xfrm>
-            <a:off x="2841955" y="201168"/>
-            <a:ext cx="2073859" cy="502920"/>
-          </a:xfrm>
-          <a:prstGeom prst="rect">
-            <a:avLst/>
-          </a:prstGeom>
-          <a:noFill/>
-          <a:ln/>
-        </p:spPr>
-        <p:txBody>
-          <a:bodyPr wrap="square" lIns="254" tIns="254" rIns="254" bIns="254" rtlCol="0" anchor="ctr"/>
-          <a:lstStyle/>
-          <a:p>
-            <a:pPr algn="ctr" indent="0" marL="0">
-              <a:buNone/>
-            </a:pPr>
-            <a:r>
-              <a:rPr lang="en-US" sz="900" b="1" dirty="0">
-                <a:solidFill>
-                  <a:srgbClr val="FFFFFF"/>
-                </a:solidFill>
-                <a:latin typeface="Calibri" pitchFamily="34" charset="0"/>
-                <a:ea typeface="Calibri" pitchFamily="34" charset="-122"/>
-                <a:cs typeface="Calibri" pitchFamily="34" charset="-120"/>
-              </a:rPr>
-              <a:t>Demo:</a:t>
-            </a:r>
-            <a:endParaRPr lang="en-US" sz="900" dirty="0"/>
-          </a:p>
-          <a:p>
-            <a:pPr algn="ctr" indent="0" marL="0">
-              <a:buNone/>
-            </a:pPr>
-            <a:r>
-              <a:rPr lang="en-US" sz="900" b="1" dirty="0">
-                <a:solidFill>
-                  <a:srgbClr val="FFFFFF"/>
-                </a:solidFill>
-                <a:latin typeface="Calibri" pitchFamily="34" charset="0"/>
-                <a:ea typeface="Calibri" pitchFamily="34" charset="-122"/>
-                <a:cs typeface="Calibri" pitchFamily="34" charset="-120"/>
-              </a:rPr>
-              <a:t>Isolette (SysMLv2 → Rust)</a:t>
-            </a:r>
-            <a:endParaRPr lang="en-US" sz="900" dirty="0"/>
-          </a:p>
-        </p:txBody>
-      </p:sp>
-      <p:sp>
-        <p:nvSpPr>
-          <p:cNvPr id="6" name="Shape 4"/>
-          <p:cNvSpPr/>
-          <p:nvPr/>
-        </p:nvSpPr>
-        <p:spPr>
-          <a:xfrm>
-            <a:off x="5043830" y="201168"/>
-            <a:ext cx="2073859" cy="502920"/>
-          </a:xfrm>
-          <a:prstGeom prst="roundRect">
-            <a:avLst>
-              <a:gd name="adj" fmla="val 9091"/>
-            </a:avLst>
-          </a:prstGeom>
-          <a:solidFill>
-            <a:srgbClr val="E4EAF4"/>
-          </a:solidFill>
-          <a:ln/>
-        </p:spPr>
-      </p:sp>
-      <p:sp>
-        <p:nvSpPr>
-          <p:cNvPr id="7" name="Text 5"/>
-          <p:cNvSpPr/>
-          <p:nvPr/>
-        </p:nvSpPr>
-        <p:spPr>
-          <a:xfrm>
-            <a:off x="5043830" y="201168"/>
-            <a:ext cx="2073859" cy="502920"/>
-          </a:xfrm>
-          <a:prstGeom prst="rect">
-            <a:avLst/>
-          </a:prstGeom>
-          <a:noFill/>
-          <a:ln/>
-        </p:spPr>
-        <p:txBody>
-          <a:bodyPr wrap="square" lIns="254" tIns="254" rIns="254" bIns="254" rtlCol="0" anchor="ctr"/>
-          <a:lstStyle/>
-          <a:p>
-            <a:pPr algn="ctr" indent="0" marL="0">
-              <a:buNone/>
-            </a:pPr>
-            <a:r>
-              <a:rPr lang="en-US" sz="900" dirty="0">
-                <a:solidFill>
-                  <a:srgbClr val="5A6478"/>
-                </a:solidFill>
-                <a:latin typeface="Calibri" pitchFamily="34" charset="0"/>
-                <a:ea typeface="Calibri" pitchFamily="34" charset="-122"/>
-                <a:cs typeface="Calibri" pitchFamily="34" charset="-120"/>
-              </a:rPr>
-              <a:t>Other Ecosystems</a:t>
-            </a:r>
-            <a:endParaRPr lang="en-US" sz="900" dirty="0"/>
-          </a:p>
-        </p:txBody>
-      </p:sp>
-      <p:sp>
-        <p:nvSpPr>
-          <p:cNvPr id="8" name="Shape 6"/>
-          <p:cNvSpPr/>
-          <p:nvPr/>
-        </p:nvSpPr>
-        <p:spPr>
-          <a:xfrm>
-            <a:off x="7245706" y="201168"/>
-            <a:ext cx="2073859" cy="502920"/>
-          </a:xfrm>
-          <a:prstGeom prst="roundRect">
-            <a:avLst>
-              <a:gd name="adj" fmla="val 9091"/>
-            </a:avLst>
-          </a:prstGeom>
-          <a:solidFill>
-            <a:srgbClr val="E4EAF4"/>
-          </a:solidFill>
-          <a:ln/>
-        </p:spPr>
-      </p:sp>
-      <p:sp>
-        <p:nvSpPr>
-          <p:cNvPr id="9" name="Text 7"/>
-          <p:cNvSpPr/>
-          <p:nvPr/>
-        </p:nvSpPr>
-        <p:spPr>
-          <a:xfrm>
-            <a:off x="7245706" y="201168"/>
-            <a:ext cx="2073859" cy="502920"/>
-          </a:xfrm>
-          <a:prstGeom prst="rect">
-            <a:avLst/>
-          </a:prstGeom>
-          <a:noFill/>
-          <a:ln/>
-        </p:spPr>
-        <p:txBody>
-          <a:bodyPr wrap="square" lIns="254" tIns="254" rIns="254" bIns="254" rtlCol="0" anchor="ctr"/>
-          <a:lstStyle/>
-          <a:p>
-            <a:pPr algn="ctr" indent="0" marL="0">
-              <a:buNone/>
-            </a:pPr>
-            <a:r>
-              <a:rPr lang="en-US" sz="900" dirty="0">
-                <a:solidFill>
-                  <a:srgbClr val="5A6478"/>
-                </a:solidFill>
-                <a:latin typeface="Calibri" pitchFamily="34" charset="0"/>
-                <a:ea typeface="Calibri" pitchFamily="34" charset="-122"/>
-                <a:cs typeface="Calibri" pitchFamily="34" charset="-120"/>
-              </a:rPr>
-              <a:t>AI in the Loop</a:t>
-            </a:r>
-            <a:endParaRPr lang="en-US" sz="900" dirty="0"/>
-          </a:p>
-        </p:txBody>
-      </p:sp>
-      <p:sp>
-        <p:nvSpPr>
-          <p:cNvPr id="10" name="Shape 8"/>
-          <p:cNvSpPr/>
-          <p:nvPr/>
-        </p:nvSpPr>
-        <p:spPr>
-          <a:xfrm>
-            <a:off x="9447581" y="201168"/>
-            <a:ext cx="2073859" cy="502920"/>
-          </a:xfrm>
-          <a:prstGeom prst="roundRect">
-            <a:avLst>
-              <a:gd name="adj" fmla="val 9091"/>
-            </a:avLst>
-          </a:prstGeom>
-          <a:solidFill>
-            <a:srgbClr val="E4EAF4"/>
-          </a:solidFill>
-          <a:ln/>
-        </p:spPr>
-      </p:sp>
-      <p:sp>
-        <p:nvSpPr>
-          <p:cNvPr id="11" name="Text 9"/>
-          <p:cNvSpPr/>
-          <p:nvPr/>
-        </p:nvSpPr>
-        <p:spPr>
-          <a:xfrm>
-            <a:off x="9447581" y="201168"/>
-            <a:ext cx="2073859" cy="502920"/>
-          </a:xfrm>
-          <a:prstGeom prst="rect">
-            <a:avLst/>
-          </a:prstGeom>
-          <a:noFill/>
-          <a:ln/>
-        </p:spPr>
-        <p:txBody>
-          <a:bodyPr wrap="square" lIns="254" tIns="254" rIns="254" bIns="254" rtlCol="0" anchor="ctr"/>
-          <a:lstStyle/>
-          <a:p>
-            <a:pPr algn="ctr" indent="0" marL="0">
-              <a:buNone/>
-            </a:pPr>
-            <a:r>
-              <a:rPr lang="en-US" sz="900" dirty="0">
-                <a:solidFill>
-                  <a:srgbClr val="5A6478"/>
-                </a:solidFill>
-                <a:latin typeface="Calibri" pitchFamily="34" charset="0"/>
-                <a:ea typeface="Calibri" pitchFamily="34" charset="-122"/>
-                <a:cs typeface="Calibri" pitchFamily="34" charset="-120"/>
-              </a:rPr>
-              <a:t>Close</a:t>
-            </a:r>
-            <a:endParaRPr lang="en-US" sz="900" dirty="0"/>
-          </a:p>
-        </p:txBody>
-      </p:sp>
-      <p:sp>
-        <p:nvSpPr>
-          <p:cNvPr id="12" name="Text 10"/>
+          <p:cNvPr id="2" name="Text 0"/>
           <p:cNvSpPr/>
           <p:nvPr/>
         </p:nvSpPr>
@@ -5379,7 +4091,7 @@
       </p:sp>
       <p:sp>
         <p:nvSpPr>
-          <p:cNvPr id="13" name="Text 11"/>
+          <p:cNvPr id="3" name="Text 1"/>
           <p:cNvSpPr/>
           <p:nvPr/>
         </p:nvSpPr>
@@ -5418,7 +4130,7 @@
       </p:sp>
       <p:sp>
         <p:nvSpPr>
-          <p:cNvPr id="14" name="Text 12"/>
+          <p:cNvPr id="4" name="Text 2"/>
           <p:cNvSpPr/>
           <p:nvPr/>
         </p:nvSpPr>
@@ -5457,7 +4169,7 @@
       </p:sp>
       <p:sp>
         <p:nvSpPr>
-          <p:cNvPr id="15" name="Text 13"/>
+          <p:cNvPr id="5" name="Text 3"/>
           <p:cNvSpPr/>
           <p:nvPr/>
         </p:nvSpPr>
@@ -5524,7 +4236,7 @@
       </p:sp>
       <p:sp>
         <p:nvSpPr>
-          <p:cNvPr id="16" name="Text 14"/>
+          <p:cNvPr id="6" name="Text 4"/>
           <p:cNvSpPr/>
           <p:nvPr/>
         </p:nvSpPr>
@@ -5595,329 +4307,7 @@
       </p:grpSpPr>
       <p:sp>
         <p:nvSpPr>
-          <p:cNvPr id="2" name="Shape 0"/>
-          <p:cNvSpPr/>
-          <p:nvPr/>
-        </p:nvSpPr>
-        <p:spPr>
-          <a:xfrm>
-            <a:off x="640080" y="201168"/>
-            <a:ext cx="2073859" cy="502920"/>
-          </a:xfrm>
-          <a:prstGeom prst="roundRect">
-            <a:avLst>
-              <a:gd name="adj" fmla="val 9091"/>
-            </a:avLst>
-          </a:prstGeom>
-          <a:solidFill>
-            <a:srgbClr val="E4EAF4"/>
-          </a:solidFill>
-          <a:ln/>
-        </p:spPr>
-      </p:sp>
-      <p:sp>
-        <p:nvSpPr>
-          <p:cNvPr id="3" name="Text 1"/>
-          <p:cNvSpPr/>
-          <p:nvPr/>
-        </p:nvSpPr>
-        <p:spPr>
-          <a:xfrm>
-            <a:off x="640080" y="201168"/>
-            <a:ext cx="2073859" cy="502920"/>
-          </a:xfrm>
-          <a:prstGeom prst="rect">
-            <a:avLst/>
-          </a:prstGeom>
-          <a:noFill/>
-          <a:ln/>
-        </p:spPr>
-        <p:txBody>
-          <a:bodyPr wrap="square" lIns="254" tIns="254" rIns="254" bIns="254" rtlCol="0" anchor="ctr"/>
-          <a:lstStyle/>
-          <a:p>
-            <a:pPr algn="ctr" indent="0" marL="0">
-              <a:buNone/>
-            </a:pPr>
-            <a:r>
-              <a:rPr lang="en-US" sz="900" dirty="0">
-                <a:solidFill>
-                  <a:srgbClr val="5A6478"/>
-                </a:solidFill>
-                <a:latin typeface="Calibri" pitchFamily="34" charset="0"/>
-                <a:ea typeface="Calibri" pitchFamily="34" charset="-122"/>
-                <a:cs typeface="Calibri" pitchFamily="34" charset="-120"/>
-              </a:rPr>
-              <a:t>Preliminaries</a:t>
-            </a:r>
-            <a:endParaRPr lang="en-US" sz="900" dirty="0"/>
-          </a:p>
-        </p:txBody>
-      </p:sp>
-      <p:sp>
-        <p:nvSpPr>
-          <p:cNvPr id="4" name="Shape 2"/>
-          <p:cNvSpPr/>
-          <p:nvPr/>
-        </p:nvSpPr>
-        <p:spPr>
-          <a:xfrm>
-            <a:off x="2841955" y="201168"/>
-            <a:ext cx="2073859" cy="502920"/>
-          </a:xfrm>
-          <a:prstGeom prst="roundRect">
-            <a:avLst>
-              <a:gd name="adj" fmla="val 9091"/>
-            </a:avLst>
-          </a:prstGeom>
-          <a:solidFill>
-            <a:srgbClr val="1E2761"/>
-          </a:solidFill>
-          <a:ln/>
-        </p:spPr>
-      </p:sp>
-      <p:sp>
-        <p:nvSpPr>
-          <p:cNvPr id="5" name="Text 3"/>
-          <p:cNvSpPr/>
-          <p:nvPr/>
-        </p:nvSpPr>
-        <p:spPr>
-          <a:xfrm>
-            <a:off x="2841955" y="201168"/>
-            <a:ext cx="2073859" cy="502920"/>
-          </a:xfrm>
-          <a:prstGeom prst="rect">
-            <a:avLst/>
-          </a:prstGeom>
-          <a:noFill/>
-          <a:ln/>
-        </p:spPr>
-        <p:txBody>
-          <a:bodyPr wrap="square" lIns="254" tIns="254" rIns="254" bIns="254" rtlCol="0" anchor="ctr"/>
-          <a:lstStyle/>
-          <a:p>
-            <a:pPr algn="ctr" indent="0" marL="0">
-              <a:buNone/>
-            </a:pPr>
-            <a:r>
-              <a:rPr lang="en-US" sz="900" b="1" dirty="0">
-                <a:solidFill>
-                  <a:srgbClr val="FFFFFF"/>
-                </a:solidFill>
-                <a:latin typeface="Calibri" pitchFamily="34" charset="0"/>
-                <a:ea typeface="Calibri" pitchFamily="34" charset="-122"/>
-                <a:cs typeface="Calibri" pitchFamily="34" charset="-120"/>
-              </a:rPr>
-              <a:t>Demo:</a:t>
-            </a:r>
-            <a:endParaRPr lang="en-US" sz="900" dirty="0"/>
-          </a:p>
-          <a:p>
-            <a:pPr algn="ctr" indent="0" marL="0">
-              <a:buNone/>
-            </a:pPr>
-            <a:r>
-              <a:rPr lang="en-US" sz="900" b="1" dirty="0">
-                <a:solidFill>
-                  <a:srgbClr val="FFFFFF"/>
-                </a:solidFill>
-                <a:latin typeface="Calibri" pitchFamily="34" charset="0"/>
-                <a:ea typeface="Calibri" pitchFamily="34" charset="-122"/>
-                <a:cs typeface="Calibri" pitchFamily="34" charset="-120"/>
-              </a:rPr>
-              <a:t>Isolette (SysMLv2 → Rust)</a:t>
-            </a:r>
-            <a:endParaRPr lang="en-US" sz="900" dirty="0"/>
-          </a:p>
-        </p:txBody>
-      </p:sp>
-      <p:sp>
-        <p:nvSpPr>
-          <p:cNvPr id="6" name="Shape 4"/>
-          <p:cNvSpPr/>
-          <p:nvPr/>
-        </p:nvSpPr>
-        <p:spPr>
-          <a:xfrm>
-            <a:off x="5043830" y="201168"/>
-            <a:ext cx="2073859" cy="502920"/>
-          </a:xfrm>
-          <a:prstGeom prst="roundRect">
-            <a:avLst>
-              <a:gd name="adj" fmla="val 9091"/>
-            </a:avLst>
-          </a:prstGeom>
-          <a:solidFill>
-            <a:srgbClr val="E4EAF4"/>
-          </a:solidFill>
-          <a:ln/>
-        </p:spPr>
-      </p:sp>
-      <p:sp>
-        <p:nvSpPr>
-          <p:cNvPr id="7" name="Text 5"/>
-          <p:cNvSpPr/>
-          <p:nvPr/>
-        </p:nvSpPr>
-        <p:spPr>
-          <a:xfrm>
-            <a:off x="5043830" y="201168"/>
-            <a:ext cx="2073859" cy="502920"/>
-          </a:xfrm>
-          <a:prstGeom prst="rect">
-            <a:avLst/>
-          </a:prstGeom>
-          <a:noFill/>
-          <a:ln/>
-        </p:spPr>
-        <p:txBody>
-          <a:bodyPr wrap="square" lIns="254" tIns="254" rIns="254" bIns="254" rtlCol="0" anchor="ctr"/>
-          <a:lstStyle/>
-          <a:p>
-            <a:pPr algn="ctr" indent="0" marL="0">
-              <a:buNone/>
-            </a:pPr>
-            <a:r>
-              <a:rPr lang="en-US" sz="900" dirty="0">
-                <a:solidFill>
-                  <a:srgbClr val="5A6478"/>
-                </a:solidFill>
-                <a:latin typeface="Calibri" pitchFamily="34" charset="0"/>
-                <a:ea typeface="Calibri" pitchFamily="34" charset="-122"/>
-                <a:cs typeface="Calibri" pitchFamily="34" charset="-120"/>
-              </a:rPr>
-              <a:t>Other Ecosystems</a:t>
-            </a:r>
-            <a:endParaRPr lang="en-US" sz="900" dirty="0"/>
-          </a:p>
-        </p:txBody>
-      </p:sp>
-      <p:sp>
-        <p:nvSpPr>
-          <p:cNvPr id="8" name="Shape 6"/>
-          <p:cNvSpPr/>
-          <p:nvPr/>
-        </p:nvSpPr>
-        <p:spPr>
-          <a:xfrm>
-            <a:off x="7245706" y="201168"/>
-            <a:ext cx="2073859" cy="502920"/>
-          </a:xfrm>
-          <a:prstGeom prst="roundRect">
-            <a:avLst>
-              <a:gd name="adj" fmla="val 9091"/>
-            </a:avLst>
-          </a:prstGeom>
-          <a:solidFill>
-            <a:srgbClr val="E4EAF4"/>
-          </a:solidFill>
-          <a:ln/>
-        </p:spPr>
-      </p:sp>
-      <p:sp>
-        <p:nvSpPr>
-          <p:cNvPr id="9" name="Text 7"/>
-          <p:cNvSpPr/>
-          <p:nvPr/>
-        </p:nvSpPr>
-        <p:spPr>
-          <a:xfrm>
-            <a:off x="7245706" y="201168"/>
-            <a:ext cx="2073859" cy="502920"/>
-          </a:xfrm>
-          <a:prstGeom prst="rect">
-            <a:avLst/>
-          </a:prstGeom>
-          <a:noFill/>
-          <a:ln/>
-        </p:spPr>
-        <p:txBody>
-          <a:bodyPr wrap="square" lIns="254" tIns="254" rIns="254" bIns="254" rtlCol="0" anchor="ctr"/>
-          <a:lstStyle/>
-          <a:p>
-            <a:pPr algn="ctr" indent="0" marL="0">
-              <a:buNone/>
-            </a:pPr>
-            <a:r>
-              <a:rPr lang="en-US" sz="900" dirty="0">
-                <a:solidFill>
-                  <a:srgbClr val="5A6478"/>
-                </a:solidFill>
-                <a:latin typeface="Calibri" pitchFamily="34" charset="0"/>
-                <a:ea typeface="Calibri" pitchFamily="34" charset="-122"/>
-                <a:cs typeface="Calibri" pitchFamily="34" charset="-120"/>
-              </a:rPr>
-              <a:t>AI in the Loop</a:t>
-            </a:r>
-            <a:endParaRPr lang="en-US" sz="900" dirty="0"/>
-          </a:p>
-        </p:txBody>
-      </p:sp>
-      <p:sp>
-        <p:nvSpPr>
-          <p:cNvPr id="10" name="Shape 8"/>
-          <p:cNvSpPr/>
-          <p:nvPr/>
-        </p:nvSpPr>
-        <p:spPr>
-          <a:xfrm>
-            <a:off x="9447581" y="201168"/>
-            <a:ext cx="2073859" cy="502920"/>
-          </a:xfrm>
-          <a:prstGeom prst="roundRect">
-            <a:avLst>
-              <a:gd name="adj" fmla="val 9091"/>
-            </a:avLst>
-          </a:prstGeom>
-          <a:solidFill>
-            <a:srgbClr val="E4EAF4"/>
-          </a:solidFill>
-          <a:ln/>
-        </p:spPr>
-      </p:sp>
-      <p:sp>
-        <p:nvSpPr>
-          <p:cNvPr id="11" name="Text 9"/>
-          <p:cNvSpPr/>
-          <p:nvPr/>
-        </p:nvSpPr>
-        <p:spPr>
-          <a:xfrm>
-            <a:off x="9447581" y="201168"/>
-            <a:ext cx="2073859" cy="502920"/>
-          </a:xfrm>
-          <a:prstGeom prst="rect">
-            <a:avLst/>
-          </a:prstGeom>
-          <a:noFill/>
-          <a:ln/>
-        </p:spPr>
-        <p:txBody>
-          <a:bodyPr wrap="square" lIns="254" tIns="254" rIns="254" bIns="254" rtlCol="0" anchor="ctr"/>
-          <a:lstStyle/>
-          <a:p>
-            <a:pPr algn="ctr" indent="0" marL="0">
-              <a:buNone/>
-            </a:pPr>
-            <a:r>
-              <a:rPr lang="en-US" sz="900" dirty="0">
-                <a:solidFill>
-                  <a:srgbClr val="5A6478"/>
-                </a:solidFill>
-                <a:latin typeface="Calibri" pitchFamily="34" charset="0"/>
-                <a:ea typeface="Calibri" pitchFamily="34" charset="-122"/>
-                <a:cs typeface="Calibri" pitchFamily="34" charset="-120"/>
-              </a:rPr>
-              <a:t>Close</a:t>
-            </a:r>
-            <a:endParaRPr lang="en-US" sz="900" dirty="0"/>
-          </a:p>
-        </p:txBody>
-      </p:sp>
-      <p:sp>
-        <p:nvSpPr>
-          <p:cNvPr id="12" name="Text 10"/>
+          <p:cNvPr id="2" name="Text 0"/>
           <p:cNvSpPr/>
           <p:nvPr/>
         </p:nvSpPr>
@@ -5956,7 +4346,7 @@
       </p:sp>
       <p:sp>
         <p:nvSpPr>
-          <p:cNvPr id="13" name="Text 11"/>
+          <p:cNvPr id="3" name="Text 1"/>
           <p:cNvSpPr/>
           <p:nvPr/>
         </p:nvSpPr>
@@ -5995,7 +4385,7 @@
       </p:sp>
       <p:sp>
         <p:nvSpPr>
-          <p:cNvPr id="14" name="Text 12"/>
+          <p:cNvPr id="4" name="Text 2"/>
           <p:cNvSpPr/>
           <p:nvPr/>
         </p:nvSpPr>
@@ -6034,7 +4424,7 @@
       </p:sp>
       <p:sp>
         <p:nvSpPr>
-          <p:cNvPr id="15" name="Text 13"/>
+          <p:cNvPr id="5" name="Text 3"/>
           <p:cNvSpPr/>
           <p:nvPr/>
         </p:nvSpPr>
@@ -6101,7 +4491,7 @@
       </p:sp>
       <p:sp>
         <p:nvSpPr>
-          <p:cNvPr id="16" name="Text 14"/>
+          <p:cNvPr id="6" name="Text 4"/>
           <p:cNvSpPr/>
           <p:nvPr/>
         </p:nvSpPr>
@@ -6172,329 +4562,7 @@
       </p:grpSpPr>
       <p:sp>
         <p:nvSpPr>
-          <p:cNvPr id="2" name="Shape 0"/>
-          <p:cNvSpPr/>
-          <p:nvPr/>
-        </p:nvSpPr>
-        <p:spPr>
-          <a:xfrm>
-            <a:off x="640080" y="201168"/>
-            <a:ext cx="2073859" cy="502920"/>
-          </a:xfrm>
-          <a:prstGeom prst="roundRect">
-            <a:avLst>
-              <a:gd name="adj" fmla="val 9091"/>
-            </a:avLst>
-          </a:prstGeom>
-          <a:solidFill>
-            <a:srgbClr val="E4EAF4"/>
-          </a:solidFill>
-          <a:ln/>
-        </p:spPr>
-      </p:sp>
-      <p:sp>
-        <p:nvSpPr>
-          <p:cNvPr id="3" name="Text 1"/>
-          <p:cNvSpPr/>
-          <p:nvPr/>
-        </p:nvSpPr>
-        <p:spPr>
-          <a:xfrm>
-            <a:off x="640080" y="201168"/>
-            <a:ext cx="2073859" cy="502920"/>
-          </a:xfrm>
-          <a:prstGeom prst="rect">
-            <a:avLst/>
-          </a:prstGeom>
-          <a:noFill/>
-          <a:ln/>
-        </p:spPr>
-        <p:txBody>
-          <a:bodyPr wrap="square" lIns="254" tIns="254" rIns="254" bIns="254" rtlCol="0" anchor="ctr"/>
-          <a:lstStyle/>
-          <a:p>
-            <a:pPr algn="ctr" indent="0" marL="0">
-              <a:buNone/>
-            </a:pPr>
-            <a:r>
-              <a:rPr lang="en-US" sz="900" dirty="0">
-                <a:solidFill>
-                  <a:srgbClr val="5A6478"/>
-                </a:solidFill>
-                <a:latin typeface="Calibri" pitchFamily="34" charset="0"/>
-                <a:ea typeface="Calibri" pitchFamily="34" charset="-122"/>
-                <a:cs typeface="Calibri" pitchFamily="34" charset="-120"/>
-              </a:rPr>
-              <a:t>Preliminaries</a:t>
-            </a:r>
-            <a:endParaRPr lang="en-US" sz="900" dirty="0"/>
-          </a:p>
-        </p:txBody>
-      </p:sp>
-      <p:sp>
-        <p:nvSpPr>
-          <p:cNvPr id="4" name="Shape 2"/>
-          <p:cNvSpPr/>
-          <p:nvPr/>
-        </p:nvSpPr>
-        <p:spPr>
-          <a:xfrm>
-            <a:off x="2841955" y="201168"/>
-            <a:ext cx="2073859" cy="502920"/>
-          </a:xfrm>
-          <a:prstGeom prst="roundRect">
-            <a:avLst>
-              <a:gd name="adj" fmla="val 9091"/>
-            </a:avLst>
-          </a:prstGeom>
-          <a:solidFill>
-            <a:srgbClr val="1E2761"/>
-          </a:solidFill>
-          <a:ln/>
-        </p:spPr>
-      </p:sp>
-      <p:sp>
-        <p:nvSpPr>
-          <p:cNvPr id="5" name="Text 3"/>
-          <p:cNvSpPr/>
-          <p:nvPr/>
-        </p:nvSpPr>
-        <p:spPr>
-          <a:xfrm>
-            <a:off x="2841955" y="201168"/>
-            <a:ext cx="2073859" cy="502920"/>
-          </a:xfrm>
-          <a:prstGeom prst="rect">
-            <a:avLst/>
-          </a:prstGeom>
-          <a:noFill/>
-          <a:ln/>
-        </p:spPr>
-        <p:txBody>
-          <a:bodyPr wrap="square" lIns="254" tIns="254" rIns="254" bIns="254" rtlCol="0" anchor="ctr"/>
-          <a:lstStyle/>
-          <a:p>
-            <a:pPr algn="ctr" indent="0" marL="0">
-              <a:buNone/>
-            </a:pPr>
-            <a:r>
-              <a:rPr lang="en-US" sz="900" b="1" dirty="0">
-                <a:solidFill>
-                  <a:srgbClr val="FFFFFF"/>
-                </a:solidFill>
-                <a:latin typeface="Calibri" pitchFamily="34" charset="0"/>
-                <a:ea typeface="Calibri" pitchFamily="34" charset="-122"/>
-                <a:cs typeface="Calibri" pitchFamily="34" charset="-120"/>
-              </a:rPr>
-              <a:t>Demo:</a:t>
-            </a:r>
-            <a:endParaRPr lang="en-US" sz="900" dirty="0"/>
-          </a:p>
-          <a:p>
-            <a:pPr algn="ctr" indent="0" marL="0">
-              <a:buNone/>
-            </a:pPr>
-            <a:r>
-              <a:rPr lang="en-US" sz="900" b="1" dirty="0">
-                <a:solidFill>
-                  <a:srgbClr val="FFFFFF"/>
-                </a:solidFill>
-                <a:latin typeface="Calibri" pitchFamily="34" charset="0"/>
-                <a:ea typeface="Calibri" pitchFamily="34" charset="-122"/>
-                <a:cs typeface="Calibri" pitchFamily="34" charset="-120"/>
-              </a:rPr>
-              <a:t>Isolette (SysMLv2 → Rust)</a:t>
-            </a:r>
-            <a:endParaRPr lang="en-US" sz="900" dirty="0"/>
-          </a:p>
-        </p:txBody>
-      </p:sp>
-      <p:sp>
-        <p:nvSpPr>
-          <p:cNvPr id="6" name="Shape 4"/>
-          <p:cNvSpPr/>
-          <p:nvPr/>
-        </p:nvSpPr>
-        <p:spPr>
-          <a:xfrm>
-            <a:off x="5043830" y="201168"/>
-            <a:ext cx="2073859" cy="502920"/>
-          </a:xfrm>
-          <a:prstGeom prst="roundRect">
-            <a:avLst>
-              <a:gd name="adj" fmla="val 9091"/>
-            </a:avLst>
-          </a:prstGeom>
-          <a:solidFill>
-            <a:srgbClr val="E4EAF4"/>
-          </a:solidFill>
-          <a:ln/>
-        </p:spPr>
-      </p:sp>
-      <p:sp>
-        <p:nvSpPr>
-          <p:cNvPr id="7" name="Text 5"/>
-          <p:cNvSpPr/>
-          <p:nvPr/>
-        </p:nvSpPr>
-        <p:spPr>
-          <a:xfrm>
-            <a:off x="5043830" y="201168"/>
-            <a:ext cx="2073859" cy="502920"/>
-          </a:xfrm>
-          <a:prstGeom prst="rect">
-            <a:avLst/>
-          </a:prstGeom>
-          <a:noFill/>
-          <a:ln/>
-        </p:spPr>
-        <p:txBody>
-          <a:bodyPr wrap="square" lIns="254" tIns="254" rIns="254" bIns="254" rtlCol="0" anchor="ctr"/>
-          <a:lstStyle/>
-          <a:p>
-            <a:pPr algn="ctr" indent="0" marL="0">
-              <a:buNone/>
-            </a:pPr>
-            <a:r>
-              <a:rPr lang="en-US" sz="900" dirty="0">
-                <a:solidFill>
-                  <a:srgbClr val="5A6478"/>
-                </a:solidFill>
-                <a:latin typeface="Calibri" pitchFamily="34" charset="0"/>
-                <a:ea typeface="Calibri" pitchFamily="34" charset="-122"/>
-                <a:cs typeface="Calibri" pitchFamily="34" charset="-120"/>
-              </a:rPr>
-              <a:t>Other Ecosystems</a:t>
-            </a:r>
-            <a:endParaRPr lang="en-US" sz="900" dirty="0"/>
-          </a:p>
-        </p:txBody>
-      </p:sp>
-      <p:sp>
-        <p:nvSpPr>
-          <p:cNvPr id="8" name="Shape 6"/>
-          <p:cNvSpPr/>
-          <p:nvPr/>
-        </p:nvSpPr>
-        <p:spPr>
-          <a:xfrm>
-            <a:off x="7245706" y="201168"/>
-            <a:ext cx="2073859" cy="502920"/>
-          </a:xfrm>
-          <a:prstGeom prst="roundRect">
-            <a:avLst>
-              <a:gd name="adj" fmla="val 9091"/>
-            </a:avLst>
-          </a:prstGeom>
-          <a:solidFill>
-            <a:srgbClr val="E4EAF4"/>
-          </a:solidFill>
-          <a:ln/>
-        </p:spPr>
-      </p:sp>
-      <p:sp>
-        <p:nvSpPr>
-          <p:cNvPr id="9" name="Text 7"/>
-          <p:cNvSpPr/>
-          <p:nvPr/>
-        </p:nvSpPr>
-        <p:spPr>
-          <a:xfrm>
-            <a:off x="7245706" y="201168"/>
-            <a:ext cx="2073859" cy="502920"/>
-          </a:xfrm>
-          <a:prstGeom prst="rect">
-            <a:avLst/>
-          </a:prstGeom>
-          <a:noFill/>
-          <a:ln/>
-        </p:spPr>
-        <p:txBody>
-          <a:bodyPr wrap="square" lIns="254" tIns="254" rIns="254" bIns="254" rtlCol="0" anchor="ctr"/>
-          <a:lstStyle/>
-          <a:p>
-            <a:pPr algn="ctr" indent="0" marL="0">
-              <a:buNone/>
-            </a:pPr>
-            <a:r>
-              <a:rPr lang="en-US" sz="900" dirty="0">
-                <a:solidFill>
-                  <a:srgbClr val="5A6478"/>
-                </a:solidFill>
-                <a:latin typeface="Calibri" pitchFamily="34" charset="0"/>
-                <a:ea typeface="Calibri" pitchFamily="34" charset="-122"/>
-                <a:cs typeface="Calibri" pitchFamily="34" charset="-120"/>
-              </a:rPr>
-              <a:t>AI in the Loop</a:t>
-            </a:r>
-            <a:endParaRPr lang="en-US" sz="900" dirty="0"/>
-          </a:p>
-        </p:txBody>
-      </p:sp>
-      <p:sp>
-        <p:nvSpPr>
-          <p:cNvPr id="10" name="Shape 8"/>
-          <p:cNvSpPr/>
-          <p:nvPr/>
-        </p:nvSpPr>
-        <p:spPr>
-          <a:xfrm>
-            <a:off x="9447581" y="201168"/>
-            <a:ext cx="2073859" cy="502920"/>
-          </a:xfrm>
-          <a:prstGeom prst="roundRect">
-            <a:avLst>
-              <a:gd name="adj" fmla="val 9091"/>
-            </a:avLst>
-          </a:prstGeom>
-          <a:solidFill>
-            <a:srgbClr val="E4EAF4"/>
-          </a:solidFill>
-          <a:ln/>
-        </p:spPr>
-      </p:sp>
-      <p:sp>
-        <p:nvSpPr>
-          <p:cNvPr id="11" name="Text 9"/>
-          <p:cNvSpPr/>
-          <p:nvPr/>
-        </p:nvSpPr>
-        <p:spPr>
-          <a:xfrm>
-            <a:off x="9447581" y="201168"/>
-            <a:ext cx="2073859" cy="502920"/>
-          </a:xfrm>
-          <a:prstGeom prst="rect">
-            <a:avLst/>
-          </a:prstGeom>
-          <a:noFill/>
-          <a:ln/>
-        </p:spPr>
-        <p:txBody>
-          <a:bodyPr wrap="square" lIns="254" tIns="254" rIns="254" bIns="254" rtlCol="0" anchor="ctr"/>
-          <a:lstStyle/>
-          <a:p>
-            <a:pPr algn="ctr" indent="0" marL="0">
-              <a:buNone/>
-            </a:pPr>
-            <a:r>
-              <a:rPr lang="en-US" sz="900" dirty="0">
-                <a:solidFill>
-                  <a:srgbClr val="5A6478"/>
-                </a:solidFill>
-                <a:latin typeface="Calibri" pitchFamily="34" charset="0"/>
-                <a:ea typeface="Calibri" pitchFamily="34" charset="-122"/>
-                <a:cs typeface="Calibri" pitchFamily="34" charset="-120"/>
-              </a:rPr>
-              <a:t>Close</a:t>
-            </a:r>
-            <a:endParaRPr lang="en-US" sz="900" dirty="0"/>
-          </a:p>
-        </p:txBody>
-      </p:sp>
-      <p:sp>
-        <p:nvSpPr>
-          <p:cNvPr id="12" name="Text 10"/>
+          <p:cNvPr id="2" name="Text 0"/>
           <p:cNvSpPr/>
           <p:nvPr/>
         </p:nvSpPr>
@@ -6533,7 +4601,7 @@
       </p:sp>
       <p:sp>
         <p:nvSpPr>
-          <p:cNvPr id="13" name="Text 11"/>
+          <p:cNvPr id="3" name="Text 1"/>
           <p:cNvSpPr/>
           <p:nvPr/>
         </p:nvSpPr>
@@ -6572,7 +4640,7 @@
       </p:sp>
       <p:sp>
         <p:nvSpPr>
-          <p:cNvPr id="14" name="Text 12"/>
+          <p:cNvPr id="4" name="Text 2"/>
           <p:cNvSpPr/>
           <p:nvPr/>
         </p:nvSpPr>
@@ -6611,7 +4679,7 @@
       </p:sp>
       <p:sp>
         <p:nvSpPr>
-          <p:cNvPr id="15" name="Text 13"/>
+          <p:cNvPr id="5" name="Text 3"/>
           <p:cNvSpPr/>
           <p:nvPr/>
         </p:nvSpPr>
@@ -6681,7 +4749,7 @@
       </p:sp>
       <p:sp>
         <p:nvSpPr>
-          <p:cNvPr id="16" name="Text 14"/>
+          <p:cNvPr id="6" name="Text 4"/>
           <p:cNvSpPr/>
           <p:nvPr/>
         </p:nvSpPr>
@@ -13526,28 +11594,24 @@
                 <a:ea typeface="Calibri" pitchFamily="34" charset="-122"/>
                 <a:cs typeface="Calibri" pitchFamily="34" charset="-120"/>
               </a:rPr>
-              <a:t>The isolette &amp; HAMR (Kansas State)</a:t>
+              <a:t>Attestation foundations</a:t>
             </a:r>
             <a:endParaRPr lang="en-US" sz="1400" dirty="0"/>
           </a:p>
           <a:p>
-            <a:pPr algn="l" marL="342900" indent="-342900">
-              <a:spcAft>
-                <a:spcPts val="300"/>
-              </a:spcAft>
-              <a:buSzPct val="100000"/>
-              <a:buChar char="•"/>
-            </a:pPr>
-            <a:r>
-              <a:rPr lang="en-US" sz="1150" dirty="0">
-                <a:solidFill>
-                  <a:srgbClr val="212121"/>
-                </a:solidFill>
-                <a:latin typeface="Calibri" pitchFamily="34" charset="0"/>
-                <a:ea typeface="Calibri" pitchFamily="34" charset="-122"/>
-                <a:cs typeface="Calibri" pitchFamily="34" charset="-120"/>
-              </a:rPr>
-              <a:t>Hatcliff &amp; Belt, </a:t>
+            <a:pPr algn="l" indent="0" marL="0">
+              <a:buNone/>
+            </a:pPr>
+            <a:r>
+              <a:rPr lang="en-US" sz="1150" b="1" dirty="0">
+                <a:solidFill>
+                  <a:srgbClr val="1E2761"/>
+                </a:solidFill>
+                <a:latin typeface="Calibri" pitchFamily="34" charset="0"/>
+                <a:ea typeface="Calibri" pitchFamily="34" charset="-122"/>
+                <a:cs typeface="Calibri" pitchFamily="34" charset="-120"/>
+              </a:rPr>
+              <a:t>[1]  </a:t>
             </a:r>
             <a:pPr algn="l" indent="0" marL="0">
               <a:spcAft>
@@ -13556,7 +11620,7 @@
               <a:buNone/>
             </a:pPr>
             <a:r>
-              <a:rPr lang="en-US" sz="1150" i="1" dirty="0">
+              <a:rPr lang="en-US" sz="1150" dirty="0">
                 <a:solidFill>
                   <a:srgbClr val="212121"/>
                 </a:solidFill>
@@ -13564,7 +11628,7 @@
                 <a:ea typeface="Calibri" pitchFamily="34" charset="-122"/>
                 <a:cs typeface="Calibri" pitchFamily="34" charset="-120"/>
               </a:rPr>
-              <a:t>The Isolette System: Illustrating End-to-End Artifacts for Rigorous Model-Based Engineering</a:t>
+              <a:t>Thomas, Schmalz, Petz, Alexander, Guttman, Rowe, Carter, </a:t>
             </a:r>
             <a:pPr algn="l" indent="0" marL="0">
               <a:spcAft>
@@ -13573,7 +11637,7 @@
               <a:buNone/>
             </a:pPr>
             <a:r>
-              <a:rPr lang="en-US" sz="1150" dirty="0">
+              <a:rPr lang="en-US" sz="1150" i="1" dirty="0">
                 <a:solidFill>
                   <a:srgbClr val="212121"/>
                 </a:solidFill>
@@ -13581,28 +11645,7 @@
                 <a:ea typeface="Calibri" pitchFamily="34" charset="-122"/>
                 <a:cs typeface="Calibri" pitchFamily="34" charset="-120"/>
               </a:rPr>
-              <a:t>, Springer LNCS 15240, 2025</a:t>
-            </a:r>
-            <a:endParaRPr lang="en-US" sz="1400" dirty="0"/>
-          </a:p>
-          <a:p>
-            <a:pPr algn="l" marL="342900" indent="-342900">
-              <a:spcAft>
-                <a:spcPts val="300"/>
-              </a:spcAft>
-              <a:buSzPct val="100000"/>
-              <a:buChar char="•"/>
-            </a:pPr>
-            <a:r>
-              <a:rPr lang="en-US" sz="1150" dirty="0">
-                <a:solidFill>
-                  <a:srgbClr val="212121"/>
-                </a:solidFill>
-                <a:latin typeface="Calibri" pitchFamily="34" charset="0"/>
-                <a:ea typeface="Calibri" pitchFamily="34" charset="-122"/>
-                <a:cs typeface="Calibri" pitchFamily="34" charset="-120"/>
-              </a:rPr>
-              <a:t>Hatcliff, Belt, Robby, McKenzie, Liang, </a:t>
+              <a:t>Designing Trustworthy Layered Attestations</a:t>
             </a:r>
             <a:pPr algn="l" indent="0" marL="0">
               <a:spcAft>
@@ -13611,7 +11654,7 @@
               <a:buNone/>
             </a:pPr>
             <a:r>
-              <a:rPr lang="en-US" sz="1150" i="1" dirty="0">
+              <a:rPr lang="en-US" sz="1150" dirty="0">
                 <a:solidFill>
                   <a:srgbClr val="212121"/>
                 </a:solidFill>
@@ -13619,7 +11662,24 @@
                 <a:ea typeface="Calibri" pitchFamily="34" charset="-122"/>
                 <a:cs typeface="Calibri" pitchFamily="34" charset="-120"/>
               </a:rPr>
-              <a:t>End-to-End Formal Methods Integrated Development with SysMLv2 Using HAMR</a:t>
+              <a:t>, arXiv:2603.06326, 2026</a:t>
+            </a:r>
+            <a:endParaRPr lang="en-US" sz="1400" dirty="0"/>
+          </a:p>
+          <a:p>
+            <a:pPr algn="l" indent="0" marL="0">
+              <a:buNone/>
+            </a:pPr>
+            <a:r>
+              <a:rPr lang="en-US" sz="1150" b="1" dirty="0">
+                <a:solidFill>
+                  <a:srgbClr val="1E2761"/>
+                </a:solidFill>
+                <a:latin typeface="Calibri" pitchFamily="34" charset="0"/>
+                <a:ea typeface="Calibri" pitchFamily="34" charset="-122"/>
+                <a:cs typeface="Calibri" pitchFamily="34" charset="-120"/>
+              </a:rPr>
+              <a:t>[2]  </a:t>
             </a:r>
             <a:pPr algn="l" indent="0" marL="0">
               <a:spcAft>
@@ -13636,28 +11696,7 @@
                 <a:ea typeface="Calibri" pitchFamily="34" charset="-122"/>
                 <a:cs typeface="Calibri" pitchFamily="34" charset="-120"/>
               </a:rPr>
-              <a:t>, Springer, 2025</a:t>
-            </a:r>
-            <a:endParaRPr lang="en-US" sz="1400" dirty="0"/>
-          </a:p>
-          <a:p>
-            <a:pPr algn="l" marL="342900" indent="-342900">
-              <a:spcAft>
-                <a:spcPts val="300"/>
-              </a:spcAft>
-              <a:buSzPct val="100000"/>
-              <a:buChar char="•"/>
-            </a:pPr>
-            <a:r>
-              <a:rPr lang="en-US" sz="1150" dirty="0">
-                <a:solidFill>
-                  <a:srgbClr val="212121"/>
-                </a:solidFill>
-                <a:latin typeface="Calibri" pitchFamily="34" charset="0"/>
-                <a:ea typeface="Calibri" pitchFamily="34" charset="-122"/>
-                <a:cs typeface="Calibri" pitchFamily="34" charset="-120"/>
-              </a:rPr>
-              <a:t>Hatcliff, Belt, Robby, Carpenter, </a:t>
+              <a:t>Ramsdell, Rowe, Alexander, Helble, Loscocco, Pendergrass, Petz, </a:t>
             </a:r>
             <a:pPr algn="l" indent="0" marL="0">
               <a:spcAft>
@@ -13674,7 +11713,7 @@
                 <a:ea typeface="Calibri" pitchFamily="34" charset="-122"/>
                 <a:cs typeface="Calibri" pitchFamily="34" charset="-120"/>
               </a:rPr>
-              <a:t>HAMR: An AADL Multi-platform Code Generation Toolset</a:t>
+              <a:t>Orchestrating Layered Attestations</a:t>
             </a:r>
             <a:pPr algn="l" indent="0" marL="0">
               <a:spcAft>
@@ -13691,28 +11730,24 @@
                 <a:ea typeface="Calibri" pitchFamily="34" charset="-122"/>
                 <a:cs typeface="Calibri" pitchFamily="34" charset="-120"/>
               </a:rPr>
-              <a:t>, ISoLA 2021, LNCS 13036, pp. 274–295</a:t>
+              <a:t>, POST 2019, LNCS 11426, pp. 197–221</a:t>
             </a:r>
             <a:endParaRPr lang="en-US" sz="1400" dirty="0"/>
           </a:p>
           <a:p>
-            <a:pPr algn="l" marL="342900" indent="-342900">
-              <a:spcAft>
-                <a:spcPts val="300"/>
-              </a:spcAft>
-              <a:buSzPct val="100000"/>
-              <a:buChar char="•"/>
-            </a:pPr>
-            <a:r>
-              <a:rPr lang="en-US" sz="1150" dirty="0">
-                <a:solidFill>
-                  <a:srgbClr val="212121"/>
-                </a:solidFill>
-                <a:latin typeface="Calibri" pitchFamily="34" charset="0"/>
-                <a:ea typeface="Calibri" pitchFamily="34" charset="-122"/>
-                <a:cs typeface="Calibri" pitchFamily="34" charset="-120"/>
-              </a:rPr>
-              <a:t>Lempia &amp; Miller, </a:t>
+            <a:pPr algn="l" indent="0" marL="0">
+              <a:buNone/>
+            </a:pPr>
+            <a:r>
+              <a:rPr lang="en-US" sz="1150" b="1" dirty="0">
+                <a:solidFill>
+                  <a:srgbClr val="1E2761"/>
+                </a:solidFill>
+                <a:latin typeface="Calibri" pitchFamily="34" charset="0"/>
+                <a:ea typeface="Calibri" pitchFamily="34" charset="-122"/>
+                <a:cs typeface="Calibri" pitchFamily="34" charset="-120"/>
+              </a:rPr>
+              <a:t>[3]  </a:t>
             </a:r>
             <a:pPr algn="l" indent="0" marL="0">
               <a:spcAft>
@@ -13721,7 +11756,7 @@
               <a:buNone/>
             </a:pPr>
             <a:r>
-              <a:rPr lang="en-US" sz="1150" i="1" dirty="0">
+              <a:rPr lang="en-US" sz="1150" dirty="0">
                 <a:solidFill>
                   <a:srgbClr val="212121"/>
                 </a:solidFill>
@@ -13729,7 +11764,24 @@
                 <a:ea typeface="Calibri" pitchFamily="34" charset="-122"/>
                 <a:cs typeface="Calibri" pitchFamily="34" charset="-120"/>
               </a:rPr>
-              <a:t>Requirements Engineering Management Handbook</a:t>
+              <a:t>Copland Virtual Machine (CVM), KU SLDG: github.com/ku-sldg/cvm</a:t>
+            </a:r>
+            <a:endParaRPr lang="en-US" sz="1400" dirty="0"/>
+          </a:p>
+          <a:p>
+            <a:pPr algn="l" indent="0" marL="0">
+              <a:buNone/>
+            </a:pPr>
+            <a:r>
+              <a:rPr lang="en-US" sz="1150" b="1" dirty="0">
+                <a:solidFill>
+                  <a:srgbClr val="1E2761"/>
+                </a:solidFill>
+                <a:latin typeface="Calibri" pitchFamily="34" charset="0"/>
+                <a:ea typeface="Calibri" pitchFamily="34" charset="-122"/>
+                <a:cs typeface="Calibri" pitchFamily="34" charset="-120"/>
+              </a:rPr>
+              <a:t>[4]  </a:t>
             </a:r>
             <a:pPr algn="l" indent="0" marL="0">
               <a:spcAft>
@@ -13746,17 +11798,30 @@
                 <a:ea typeface="Calibri" pitchFamily="34" charset="-122"/>
                 <a:cs typeface="Calibri" pitchFamily="34" charset="-120"/>
               </a:rPr>
-              <a:t>, DOT/FAA/AR-08/32, 2009</a:t>
-            </a:r>
-            <a:endParaRPr lang="en-US" sz="1400" dirty="0"/>
-          </a:p>
-          <a:p>
-            <a:pPr algn="l" marL="342900" indent="-342900">
+              <a:t>Petz, Thomas, Fritz, Barclay, Schmalz, Alexander, </a:t>
+            </a:r>
+            <a:pPr algn="l" indent="0" marL="0">
               <a:spcAft>
                 <a:spcPts val="300"/>
               </a:spcAft>
-              <a:buSzPct val="100000"/>
-              <a:buChar char="•"/>
+              <a:buNone/>
+            </a:pPr>
+            <a:r>
+              <a:rPr lang="en-US" sz="1150" i="1" dirty="0">
+                <a:solidFill>
+                  <a:srgbClr val="212121"/>
+                </a:solidFill>
+                <a:latin typeface="Calibri" pitchFamily="34" charset="0"/>
+                <a:ea typeface="Calibri" pitchFamily="34" charset="-122"/>
+                <a:cs typeface="Calibri" pitchFamily="34" charset="-120"/>
+              </a:rPr>
+              <a:t>Verified Configuration and Deployment of Layered Attestation Managers</a:t>
+            </a:r>
+            <a:pPr algn="l" indent="0" marL="0">
+              <a:spcAft>
+                <a:spcPts val="300"/>
+              </a:spcAft>
+              <a:buNone/>
             </a:pPr>
             <a:r>
               <a:rPr lang="en-US" sz="1150" dirty="0">
@@ -13767,7 +11832,109 @@
                 <a:ea typeface="Calibri" pitchFamily="34" charset="-122"/>
                 <a:cs typeface="Calibri" pitchFamily="34" charset="-120"/>
               </a:rPr>
-              <a:t>INSPECTA models: github.com/loonwerks/INSPECTA-models</a:t>
+              <a:t>, SEFM 2024, LNCS 15280, pp. 290–308</a:t>
+            </a:r>
+            <a:endParaRPr lang="en-US" sz="1400" dirty="0"/>
+          </a:p>
+          <a:p>
+            <a:pPr algn="l" indent="0" marL="0">
+              <a:buNone/>
+            </a:pPr>
+            <a:r>
+              <a:rPr lang="en-US" sz="1150" b="1" dirty="0">
+                <a:solidFill>
+                  <a:srgbClr val="1E2761"/>
+                </a:solidFill>
+                <a:latin typeface="Calibri" pitchFamily="34" charset="0"/>
+                <a:ea typeface="Calibri" pitchFamily="34" charset="-122"/>
+                <a:cs typeface="Calibri" pitchFamily="34" charset="-120"/>
+              </a:rPr>
+              <a:t>[5]  </a:t>
+            </a:r>
+            <a:pPr algn="l" indent="0" marL="0">
+              <a:spcAft>
+                <a:spcPts val="300"/>
+              </a:spcAft>
+              <a:buNone/>
+            </a:pPr>
+            <a:r>
+              <a:rPr lang="en-US" sz="1150" dirty="0">
+                <a:solidFill>
+                  <a:srgbClr val="212121"/>
+                </a:solidFill>
+                <a:latin typeface="Calibri" pitchFamily="34" charset="0"/>
+                <a:ea typeface="Calibri" pitchFamily="34" charset="-122"/>
+                <a:cs typeface="Calibri" pitchFamily="34" charset="-120"/>
+              </a:rPr>
+              <a:t>asp-libs (attestation service provider libraries), KU SLDG: github.com/ku-sldg/asp-libs</a:t>
+            </a:r>
+            <a:endParaRPr lang="en-US" sz="1400" dirty="0"/>
+          </a:p>
+          <a:p>
+            <a:pPr algn="l" indent="0" marL="0">
+              <a:buNone/>
+            </a:pPr>
+            <a:r>
+              <a:rPr lang="en-US" sz="1150" b="1" dirty="0">
+                <a:solidFill>
+                  <a:srgbClr val="1E2761"/>
+                </a:solidFill>
+                <a:latin typeface="Calibri" pitchFamily="34" charset="0"/>
+                <a:ea typeface="Calibri" pitchFamily="34" charset="-122"/>
+                <a:cs typeface="Calibri" pitchFamily="34" charset="-120"/>
+              </a:rPr>
+              <a:t>[6]  </a:t>
+            </a:r>
+            <a:pPr algn="l" indent="0" marL="0">
+              <a:spcAft>
+                <a:spcPts val="300"/>
+              </a:spcAft>
+              <a:buNone/>
+            </a:pPr>
+            <a:r>
+              <a:rPr lang="en-US" sz="1150" dirty="0">
+                <a:solidFill>
+                  <a:srgbClr val="212121"/>
+                </a:solidFill>
+                <a:latin typeface="Calibri" pitchFamily="34" charset="0"/>
+                <a:ea typeface="Calibri" pitchFamily="34" charset="-122"/>
+                <a:cs typeface="Calibri" pitchFamily="34" charset="-120"/>
+              </a:rPr>
+              <a:t>Petz &amp; Alexander, </a:t>
+            </a:r>
+            <a:pPr algn="l" indent="0" marL="0">
+              <a:spcAft>
+                <a:spcPts val="300"/>
+              </a:spcAft>
+              <a:buNone/>
+            </a:pPr>
+            <a:r>
+              <a:rPr lang="en-US" sz="1150" i="1" dirty="0">
+                <a:solidFill>
+                  <a:srgbClr val="212121"/>
+                </a:solidFill>
+                <a:latin typeface="Calibri" pitchFamily="34" charset="0"/>
+                <a:ea typeface="Calibri" pitchFamily="34" charset="-122"/>
+                <a:cs typeface="Calibri" pitchFamily="34" charset="-120"/>
+              </a:rPr>
+              <a:t>Formally Verified Bundling and Appraisal of Evidence for Layered Attestations</a:t>
+            </a:r>
+            <a:pPr algn="l" indent="0" marL="0">
+              <a:spcAft>
+                <a:spcPts val="300"/>
+              </a:spcAft>
+              <a:buNone/>
+            </a:pPr>
+            <a:r>
+              <a:rPr lang="en-US" sz="1150" dirty="0">
+                <a:solidFill>
+                  <a:srgbClr val="212121"/>
+                </a:solidFill>
+                <a:latin typeface="Calibri" pitchFamily="34" charset="0"/>
+                <a:ea typeface="Calibri" pitchFamily="34" charset="-122"/>
+                <a:cs typeface="Calibri" pitchFamily="34" charset="-120"/>
+              </a:rPr>
+              <a:t>, Innovations in Systems and Software Engineering 19(4), 2023, pp. 411–426</a:t>
             </a:r>
             <a:endParaRPr lang="en-US" sz="1400" dirty="0"/>
           </a:p>
@@ -13790,28 +11957,24 @@
                 <a:ea typeface="Calibri" pitchFamily="34" charset="-122"/>
                 <a:cs typeface="Calibri" pitchFamily="34" charset="-120"/>
               </a:rPr>
-              <a:t>Attestation foundations</a:t>
+              <a:t>The isolette &amp; HAMR (Kansas State)</a:t>
             </a:r>
             <a:endParaRPr lang="en-US" sz="1400" dirty="0"/>
           </a:p>
           <a:p>
-            <a:pPr algn="l" marL="342900" indent="-342900">
-              <a:spcAft>
-                <a:spcPts val="300"/>
-              </a:spcAft>
-              <a:buSzPct val="100000"/>
-              <a:buChar char="•"/>
-            </a:pPr>
-            <a:r>
-              <a:rPr lang="en-US" sz="1150" dirty="0">
-                <a:solidFill>
-                  <a:srgbClr val="212121"/>
-                </a:solidFill>
-                <a:latin typeface="Calibri" pitchFamily="34" charset="0"/>
-                <a:ea typeface="Calibri" pitchFamily="34" charset="-122"/>
-                <a:cs typeface="Calibri" pitchFamily="34" charset="-120"/>
-              </a:rPr>
-              <a:t>Ramsdell, Rowe, Alexander, Helble, Loscocco, Pendergrass, Petz, </a:t>
+            <a:pPr algn="l" indent="0" marL="0">
+              <a:buNone/>
+            </a:pPr>
+            <a:r>
+              <a:rPr lang="en-US" sz="1150" b="1" dirty="0">
+                <a:solidFill>
+                  <a:srgbClr val="1E2761"/>
+                </a:solidFill>
+                <a:latin typeface="Calibri" pitchFamily="34" charset="0"/>
+                <a:ea typeface="Calibri" pitchFamily="34" charset="-122"/>
+                <a:cs typeface="Calibri" pitchFamily="34" charset="-120"/>
+              </a:rPr>
+              <a:t>[7]  </a:t>
             </a:r>
             <a:pPr algn="l" indent="0" marL="0">
               <a:spcAft>
@@ -13820,7 +11983,7 @@
               <a:buNone/>
             </a:pPr>
             <a:r>
-              <a:rPr lang="en-US" sz="1150" i="1" dirty="0">
+              <a:rPr lang="en-US" sz="1150" dirty="0">
                 <a:solidFill>
                   <a:srgbClr val="212121"/>
                 </a:solidFill>
@@ -13828,7 +11991,7 @@
                 <a:ea typeface="Calibri" pitchFamily="34" charset="-122"/>
                 <a:cs typeface="Calibri" pitchFamily="34" charset="-120"/>
               </a:rPr>
-              <a:t>Orchestrating Layered Attestations</a:t>
+              <a:t>Hatcliff &amp; Belt, </a:t>
             </a:r>
             <a:pPr algn="l" indent="0" marL="0">
               <a:spcAft>
@@ -13837,6 +12000,23 @@
               <a:buNone/>
             </a:pPr>
             <a:r>
+              <a:rPr lang="en-US" sz="1150" i="1" dirty="0">
+                <a:solidFill>
+                  <a:srgbClr val="212121"/>
+                </a:solidFill>
+                <a:latin typeface="Calibri" pitchFamily="34" charset="0"/>
+                <a:ea typeface="Calibri" pitchFamily="34" charset="-122"/>
+                <a:cs typeface="Calibri" pitchFamily="34" charset="-120"/>
+              </a:rPr>
+              <a:t>The Isolette System: Illustrating End-to-End Artifacts for Rigorous Model-Based Engineering</a:t>
+            </a:r>
+            <a:pPr algn="l" indent="0" marL="0">
+              <a:spcAft>
+                <a:spcPts val="300"/>
+              </a:spcAft>
+              <a:buNone/>
+            </a:pPr>
+            <a:r>
               <a:rPr lang="en-US" sz="1150" dirty="0">
                 <a:solidFill>
                   <a:srgbClr val="212121"/>
@@ -13845,7 +12025,245 @@
                 <a:ea typeface="Calibri" pitchFamily="34" charset="-122"/>
                 <a:cs typeface="Calibri" pitchFamily="34" charset="-120"/>
               </a:rPr>
-              <a:t>, POST 2019, LNCS 11426</a:t>
+              <a:t>, Springer LNCS 15240, 2025, pp. 93–117</a:t>
+            </a:r>
+            <a:endParaRPr lang="en-US" sz="1400" dirty="0"/>
+          </a:p>
+          <a:p>
+            <a:pPr algn="l" indent="0" marL="0">
+              <a:buNone/>
+            </a:pPr>
+            <a:r>
+              <a:rPr lang="en-US" sz="1150" b="1" dirty="0">
+                <a:solidFill>
+                  <a:srgbClr val="1E2761"/>
+                </a:solidFill>
+                <a:latin typeface="Calibri" pitchFamily="34" charset="0"/>
+                <a:ea typeface="Calibri" pitchFamily="34" charset="-122"/>
+                <a:cs typeface="Calibri" pitchFamily="34" charset="-120"/>
+              </a:rPr>
+              <a:t>[8]  </a:t>
+            </a:r>
+            <a:pPr algn="l" indent="0" marL="0">
+              <a:spcAft>
+                <a:spcPts val="300"/>
+              </a:spcAft>
+              <a:buNone/>
+            </a:pPr>
+            <a:r>
+              <a:rPr lang="en-US" sz="1150" dirty="0">
+                <a:solidFill>
+                  <a:srgbClr val="212121"/>
+                </a:solidFill>
+                <a:latin typeface="Calibri" pitchFamily="34" charset="0"/>
+                <a:ea typeface="Calibri" pitchFamily="34" charset="-122"/>
+                <a:cs typeface="Calibri" pitchFamily="34" charset="-120"/>
+              </a:rPr>
+              <a:t>Hatcliff, Belt, Robby, McKenzie, Liang, </a:t>
+            </a:r>
+            <a:pPr algn="l" indent="0" marL="0">
+              <a:spcAft>
+                <a:spcPts val="300"/>
+              </a:spcAft>
+              <a:buNone/>
+            </a:pPr>
+            <a:r>
+              <a:rPr lang="en-US" sz="1150" i="1" dirty="0">
+                <a:solidFill>
+                  <a:srgbClr val="212121"/>
+                </a:solidFill>
+                <a:latin typeface="Calibri" pitchFamily="34" charset="0"/>
+                <a:ea typeface="Calibri" pitchFamily="34" charset="-122"/>
+                <a:cs typeface="Calibri" pitchFamily="34" charset="-120"/>
+              </a:rPr>
+              <a:t>End-to-End Formal Methods Integrated Development with SysMLv2 Using HAMR</a:t>
+            </a:r>
+            <a:pPr algn="l" indent="0" marL="0">
+              <a:spcAft>
+                <a:spcPts val="300"/>
+              </a:spcAft>
+              <a:buNone/>
+            </a:pPr>
+            <a:r>
+              <a:rPr lang="en-US" sz="1150" dirty="0">
+                <a:solidFill>
+                  <a:srgbClr val="212121"/>
+                </a:solidFill>
+                <a:latin typeface="Calibri" pitchFamily="34" charset="0"/>
+                <a:ea typeface="Calibri" pitchFamily="34" charset="-122"/>
+                <a:cs typeface="Calibri" pitchFamily="34" charset="-120"/>
+              </a:rPr>
+              <a:t>, FMICS 2025, Springer LNCS 16040, pp. 241–260</a:t>
+            </a:r>
+            <a:endParaRPr lang="en-US" sz="1400" dirty="0"/>
+          </a:p>
+          <a:p>
+            <a:pPr algn="l" indent="0" marL="0">
+              <a:buNone/>
+            </a:pPr>
+            <a:r>
+              <a:rPr lang="en-US" sz="1150" b="1" dirty="0">
+                <a:solidFill>
+                  <a:srgbClr val="1E2761"/>
+                </a:solidFill>
+                <a:latin typeface="Calibri" pitchFamily="34" charset="0"/>
+                <a:ea typeface="Calibri" pitchFamily="34" charset="-122"/>
+                <a:cs typeface="Calibri" pitchFamily="34" charset="-120"/>
+              </a:rPr>
+              <a:t>[9]  </a:t>
+            </a:r>
+            <a:pPr algn="l" indent="0" marL="0">
+              <a:spcAft>
+                <a:spcPts val="300"/>
+              </a:spcAft>
+              <a:buNone/>
+            </a:pPr>
+            <a:r>
+              <a:rPr lang="en-US" sz="1150" dirty="0">
+                <a:solidFill>
+                  <a:srgbClr val="212121"/>
+                </a:solidFill>
+                <a:latin typeface="Calibri" pitchFamily="34" charset="0"/>
+                <a:ea typeface="Calibri" pitchFamily="34" charset="-122"/>
+                <a:cs typeface="Calibri" pitchFamily="34" charset="-120"/>
+              </a:rPr>
+              <a:t>Hatcliff, Belt, Robby, Carpenter, </a:t>
+            </a:r>
+            <a:pPr algn="l" indent="0" marL="0">
+              <a:spcAft>
+                <a:spcPts val="300"/>
+              </a:spcAft>
+              <a:buNone/>
+            </a:pPr>
+            <a:r>
+              <a:rPr lang="en-US" sz="1150" i="1" dirty="0">
+                <a:solidFill>
+                  <a:srgbClr val="212121"/>
+                </a:solidFill>
+                <a:latin typeface="Calibri" pitchFamily="34" charset="0"/>
+                <a:ea typeface="Calibri" pitchFamily="34" charset="-122"/>
+                <a:cs typeface="Calibri" pitchFamily="34" charset="-120"/>
+              </a:rPr>
+              <a:t>HAMR: An AADL Multi-platform Code Generation Toolset</a:t>
+            </a:r>
+            <a:pPr algn="l" indent="0" marL="0">
+              <a:spcAft>
+                <a:spcPts val="300"/>
+              </a:spcAft>
+              <a:buNone/>
+            </a:pPr>
+            <a:r>
+              <a:rPr lang="en-US" sz="1150" dirty="0">
+                <a:solidFill>
+                  <a:srgbClr val="212121"/>
+                </a:solidFill>
+                <a:latin typeface="Calibri" pitchFamily="34" charset="0"/>
+                <a:ea typeface="Calibri" pitchFamily="34" charset="-122"/>
+                <a:cs typeface="Calibri" pitchFamily="34" charset="-120"/>
+              </a:rPr>
+              <a:t>, ISoLA 2021, LNCS 13036, pp. 274–295</a:t>
+            </a:r>
+            <a:endParaRPr lang="en-US" sz="1400" dirty="0"/>
+          </a:p>
+          <a:p>
+            <a:pPr algn="l" indent="0" marL="0">
+              <a:buNone/>
+            </a:pPr>
+            <a:r>
+              <a:rPr lang="en-US" sz="1150" b="1" dirty="0">
+                <a:solidFill>
+                  <a:srgbClr val="1E2761"/>
+                </a:solidFill>
+                <a:latin typeface="Calibri" pitchFamily="34" charset="0"/>
+                <a:ea typeface="Calibri" pitchFamily="34" charset="-122"/>
+                <a:cs typeface="Calibri" pitchFamily="34" charset="-120"/>
+              </a:rPr>
+              <a:t>[10]  </a:t>
+            </a:r>
+            <a:pPr algn="l" indent="0" marL="0">
+              <a:spcAft>
+                <a:spcPts val="300"/>
+              </a:spcAft>
+              <a:buNone/>
+            </a:pPr>
+            <a:r>
+              <a:rPr lang="en-US" sz="1150" dirty="0">
+                <a:solidFill>
+                  <a:srgbClr val="212121"/>
+                </a:solidFill>
+                <a:latin typeface="Calibri" pitchFamily="34" charset="0"/>
+                <a:ea typeface="Calibri" pitchFamily="34" charset="-122"/>
+                <a:cs typeface="Calibri" pitchFamily="34" charset="-120"/>
+              </a:rPr>
+              <a:t>Lempia &amp; Miller, </a:t>
+            </a:r>
+            <a:pPr algn="l" indent="0" marL="0">
+              <a:spcAft>
+                <a:spcPts val="300"/>
+              </a:spcAft>
+              <a:buNone/>
+            </a:pPr>
+            <a:r>
+              <a:rPr lang="en-US" sz="1150" i="1" dirty="0">
+                <a:solidFill>
+                  <a:srgbClr val="212121"/>
+                </a:solidFill>
+                <a:latin typeface="Calibri" pitchFamily="34" charset="0"/>
+                <a:ea typeface="Calibri" pitchFamily="34" charset="-122"/>
+                <a:cs typeface="Calibri" pitchFamily="34" charset="-120"/>
+              </a:rPr>
+              <a:t>Requirements Engineering Management Handbook</a:t>
+            </a:r>
+            <a:pPr algn="l" indent="0" marL="0">
+              <a:spcAft>
+                <a:spcPts val="300"/>
+              </a:spcAft>
+              <a:buNone/>
+            </a:pPr>
+            <a:r>
+              <a:rPr lang="en-US" sz="1150" dirty="0">
+                <a:solidFill>
+                  <a:srgbClr val="212121"/>
+                </a:solidFill>
+                <a:latin typeface="Calibri" pitchFamily="34" charset="0"/>
+                <a:ea typeface="Calibri" pitchFamily="34" charset="-122"/>
+                <a:cs typeface="Calibri" pitchFamily="34" charset="-120"/>
+              </a:rPr>
+              <a:t>, DOT/FAA/AR-08/32, 2009</a:t>
+            </a:r>
+            <a:endParaRPr lang="en-US" sz="1400" dirty="0"/>
+          </a:p>
+          <a:p>
+            <a:pPr algn="l" indent="0" marL="0">
+              <a:buNone/>
+            </a:pPr>
+            <a:r>
+              <a:rPr lang="en-US" sz="1150" b="1" dirty="0">
+                <a:solidFill>
+                  <a:srgbClr val="1E2761"/>
+                </a:solidFill>
+                <a:latin typeface="Calibri" pitchFamily="34" charset="0"/>
+                <a:ea typeface="Calibri" pitchFamily="34" charset="-122"/>
+                <a:cs typeface="Calibri" pitchFamily="34" charset="-120"/>
+              </a:rPr>
+              <a:t>[11]  </a:t>
+            </a:r>
+            <a:pPr algn="l" indent="0" marL="0">
+              <a:spcAft>
+                <a:spcPts val="300"/>
+              </a:spcAft>
+              <a:buNone/>
+            </a:pPr>
+            <a:r>
+              <a:rPr lang="en-US" sz="1150" dirty="0">
+                <a:solidFill>
+                  <a:srgbClr val="212121"/>
+                </a:solidFill>
+                <a:latin typeface="Calibri" pitchFamily="34" charset="0"/>
+                <a:ea typeface="Calibri" pitchFamily="34" charset="-122"/>
+                <a:cs typeface="Calibri" pitchFamily="34" charset="-120"/>
+              </a:rPr>
+              <a:t>INSPECTA models: github.com/loonwerks/INSPECTA-models</a:t>
             </a:r>
             <a:endParaRPr lang="en-US" sz="1400" dirty="0"/>
           </a:p>
@@ -13873,23 +12291,19 @@
             <a:endParaRPr lang="en-US" sz="1400" dirty="0"/>
           </a:p>
           <a:p>
-            <a:pPr algn="l" marL="342900" indent="-342900">
-              <a:spcAft>
-                <a:spcPts val="300"/>
-              </a:spcAft>
-              <a:buSzPct val="100000"/>
-              <a:buChar char="•"/>
-            </a:pPr>
-            <a:r>
-              <a:rPr lang="en-US" sz="1150" dirty="0">
-                <a:solidFill>
-                  <a:srgbClr val="212121"/>
-                </a:solidFill>
-                <a:latin typeface="Calibri" pitchFamily="34" charset="0"/>
-                <a:ea typeface="Calibri" pitchFamily="34" charset="-122"/>
-                <a:cs typeface="Calibri" pitchFamily="34" charset="-120"/>
-              </a:rPr>
-              <a:t>Lattuada, Hance, Cho, Brun, Subasinghe, Zhou, Howell, Parno, Hawblitzel, </a:t>
+            <a:pPr algn="l" indent="0" marL="0">
+              <a:buNone/>
+            </a:pPr>
+            <a:r>
+              <a:rPr lang="en-US" sz="1150" b="1" dirty="0">
+                <a:solidFill>
+                  <a:srgbClr val="1E2761"/>
+                </a:solidFill>
+                <a:latin typeface="Calibri" pitchFamily="34" charset="0"/>
+                <a:ea typeface="Calibri" pitchFamily="34" charset="-122"/>
+                <a:cs typeface="Calibri" pitchFamily="34" charset="-120"/>
+              </a:rPr>
+              <a:t>[12]  </a:t>
             </a:r>
             <a:pPr algn="l" indent="0" marL="0">
               <a:spcAft>
@@ -13898,7 +12312,7 @@
               <a:buNone/>
             </a:pPr>
             <a:r>
-              <a:rPr lang="en-US" sz="1150" i="1" dirty="0">
+              <a:rPr lang="en-US" sz="1150" dirty="0">
                 <a:solidFill>
                   <a:srgbClr val="212121"/>
                 </a:solidFill>
@@ -13906,7 +12320,7 @@
                 <a:ea typeface="Calibri" pitchFamily="34" charset="-122"/>
                 <a:cs typeface="Calibri" pitchFamily="34" charset="-120"/>
               </a:rPr>
-              <a:t>Verus: Verifying Rust Programs using Linear Ghost Types</a:t>
+              <a:t>Lattuada, Hance, Cho, Brun, Subasinghe, Zhou, Howell, Parno, Hawblitzel, </a:t>
             </a:r>
             <a:pPr algn="l" indent="0" marL="0">
               <a:spcAft>
@@ -13915,7 +12329,7 @@
               <a:buNone/>
             </a:pPr>
             <a:r>
-              <a:rPr lang="en-US" sz="1150" dirty="0">
+              <a:rPr lang="en-US" sz="1150" i="1" dirty="0">
                 <a:solidFill>
                   <a:srgbClr val="212121"/>
                 </a:solidFill>
@@ -13923,28 +12337,7 @@
                 <a:ea typeface="Calibri" pitchFamily="34" charset="-122"/>
                 <a:cs typeface="Calibri" pitchFamily="34" charset="-120"/>
               </a:rPr>
-              <a:t>, PACMPL 7 (OOPSLA1), 2023</a:t>
-            </a:r>
-            <a:endParaRPr lang="en-US" sz="1400" dirty="0"/>
-          </a:p>
-          <a:p>
-            <a:pPr algn="l" marL="342900" indent="-342900">
-              <a:spcAft>
-                <a:spcPts val="300"/>
-              </a:spcAft>
-              <a:buSzPct val="100000"/>
-              <a:buChar char="•"/>
-            </a:pPr>
-            <a:r>
-              <a:rPr lang="en-US" sz="1150" dirty="0">
-                <a:solidFill>
-                  <a:srgbClr val="212121"/>
-                </a:solidFill>
-                <a:latin typeface="Calibri" pitchFamily="34" charset="0"/>
-                <a:ea typeface="Calibri" pitchFamily="34" charset="-122"/>
-                <a:cs typeface="Calibri" pitchFamily="34" charset="-120"/>
-              </a:rPr>
-              <a:t>Klein et al., </a:t>
+              <a:t>Verus: Verifying Rust Programs using Linear Ghost Types</a:t>
             </a:r>
             <a:pPr algn="l" indent="0" marL="0">
               <a:spcAft>
@@ -13953,7 +12346,7 @@
               <a:buNone/>
             </a:pPr>
             <a:r>
-              <a:rPr lang="en-US" sz="1150" i="1" dirty="0">
+              <a:rPr lang="en-US" sz="1150" dirty="0">
                 <a:solidFill>
                   <a:srgbClr val="212121"/>
                 </a:solidFill>
@@ -13961,7 +12354,24 @@
                 <a:ea typeface="Calibri" pitchFamily="34" charset="-122"/>
                 <a:cs typeface="Calibri" pitchFamily="34" charset="-120"/>
               </a:rPr>
-              <a:t>seL4: Formal Verification of an OS Kernel</a:t>
+              <a:t>, PACMPL 7 (OOPSLA1), 2023</a:t>
+            </a:r>
+            <a:endParaRPr lang="en-US" sz="1400" dirty="0"/>
+          </a:p>
+          <a:p>
+            <a:pPr algn="l" indent="0" marL="0">
+              <a:buNone/>
+            </a:pPr>
+            <a:r>
+              <a:rPr lang="en-US" sz="1150" b="1" dirty="0">
+                <a:solidFill>
+                  <a:srgbClr val="1E2761"/>
+                </a:solidFill>
+                <a:latin typeface="Calibri" pitchFamily="34" charset="0"/>
+                <a:ea typeface="Calibri" pitchFamily="34" charset="-122"/>
+                <a:cs typeface="Calibri" pitchFamily="34" charset="-120"/>
+              </a:rPr>
+              <a:t>[13]  </a:t>
             </a:r>
             <a:pPr algn="l" indent="0" marL="0">
               <a:spcAft>
@@ -13978,7 +12388,41 @@
                 <a:ea typeface="Calibri" pitchFamily="34" charset="-122"/>
                 <a:cs typeface="Calibri" pitchFamily="34" charset="-120"/>
               </a:rPr>
-              <a:t>, SOSP 2009</a:t>
+              <a:t>Klein et al., </a:t>
+            </a:r>
+            <a:pPr algn="l" indent="0" marL="0">
+              <a:spcAft>
+                <a:spcPts val="300"/>
+              </a:spcAft>
+              <a:buNone/>
+            </a:pPr>
+            <a:r>
+              <a:rPr lang="en-US" sz="1150" i="1" dirty="0">
+                <a:solidFill>
+                  <a:srgbClr val="212121"/>
+                </a:solidFill>
+                <a:latin typeface="Calibri" pitchFamily="34" charset="0"/>
+                <a:ea typeface="Calibri" pitchFamily="34" charset="-122"/>
+                <a:cs typeface="Calibri" pitchFamily="34" charset="-120"/>
+              </a:rPr>
+              <a:t>seL4: Formal Verification of an OS Kernel</a:t>
+            </a:r>
+            <a:pPr algn="l" indent="0" marL="0">
+              <a:spcAft>
+                <a:spcPts val="300"/>
+              </a:spcAft>
+              <a:buNone/>
+            </a:pPr>
+            <a:r>
+              <a:rPr lang="en-US" sz="1150" dirty="0">
+                <a:solidFill>
+                  <a:srgbClr val="212121"/>
+                </a:solidFill>
+                <a:latin typeface="Calibri" pitchFamily="34" charset="0"/>
+                <a:ea typeface="Calibri" pitchFamily="34" charset="-122"/>
+                <a:cs typeface="Calibri" pitchFamily="34" charset="-120"/>
+              </a:rPr>
+              <a:t>, SOSP 2009, pp. 207–220</a:t>
             </a:r>
             <a:endParaRPr lang="en-US" sz="1400" dirty="0"/>
           </a:p>
@@ -14127,6 +12571,20 @@
               <a:t>: </a:t>
             </a:r>
             <a:pPr algn="l" indent="0" marL="0">
+              <a:buNone/>
+            </a:pPr>
+            <a:r>
+              <a:rPr lang="en-US" sz="1700" dirty="0">
+                <a:solidFill>
+                  <a:srgbClr val="212121"/>
+                </a:solidFill>
+                <a:latin typeface="Calibri" pitchFamily="34" charset="0"/>
+                <a:ea typeface="Calibri" pitchFamily="34" charset="-122"/>
+                <a:cs typeface="Calibri" pitchFamily="34" charset="-120"/>
+              </a:rPr>
+              <a:t>extend boot-time trust via dynamic measurement of system components and their context/dependencies</a:t>
+            </a:r>
+            <a:pPr algn="l" indent="0" marL="0">
               <a:spcAft>
                 <a:spcPts val="1000"/>
               </a:spcAft>
@@ -14135,13 +12593,13 @@
             <a:r>
               <a:rPr lang="en-US" sz="1700" dirty="0">
                 <a:solidFill>
-                  <a:srgbClr val="212121"/>
-                </a:solidFill>
-                <a:latin typeface="Calibri" pitchFamily="34" charset="0"/>
-                <a:ea typeface="Calibri" pitchFamily="34" charset="-122"/>
-                <a:cs typeface="Calibri" pitchFamily="34" charset="-120"/>
-              </a:rPr>
-              <a:t>extend boot-time trust via dynamic measurement of system components and their context/dependencies</a:t>
+                  <a:srgbClr val="5A6478"/>
+                </a:solidFill>
+                <a:latin typeface="Calibri" pitchFamily="34" charset="0"/>
+                <a:ea typeface="Calibri" pitchFamily="34" charset="-122"/>
+                <a:cs typeface="Calibri" pitchFamily="34" charset="-120"/>
+              </a:rPr>
+              <a:t> [1]</a:t>
             </a:r>
             <a:endParaRPr lang="en-US" sz="1700" dirty="0"/>
           </a:p>
@@ -14616,21 +13074,35 @@
           <a:lstStyle/>
           <a:p>
             <a:pPr algn="l" indent="0" marL="0">
+              <a:buNone/>
+            </a:pPr>
+            <a:r>
+              <a:rPr lang="en-US" sz="1700" b="1" dirty="0">
+                <a:solidFill>
+                  <a:srgbClr val="FFFFFF"/>
+                </a:solidFill>
+                <a:latin typeface="Calibri" pitchFamily="34" charset="0"/>
+                <a:ea typeface="Calibri" pitchFamily="34" charset="-122"/>
+                <a:cs typeface="Calibri" pitchFamily="34" charset="-120"/>
+              </a:rPr>
+              <a:t>Copland</a:t>
+            </a:r>
+            <a:pPr algn="l" indent="0" marL="0">
               <a:spcAft>
                 <a:spcPts val="200"/>
               </a:spcAft>
               <a:buNone/>
             </a:pPr>
             <a:r>
-              <a:rPr lang="en-US" sz="1700" b="1" dirty="0">
-                <a:solidFill>
-                  <a:srgbClr val="FFFFFF"/>
-                </a:solidFill>
-                <a:latin typeface="Calibri" pitchFamily="34" charset="0"/>
-                <a:ea typeface="Calibri" pitchFamily="34" charset="-122"/>
-                <a:cs typeface="Calibri" pitchFamily="34" charset="-120"/>
-              </a:rPr>
-              <a:t>Copland</a:t>
+              <a:rPr lang="en-US" sz="1700" dirty="0">
+                <a:solidFill>
+                  <a:srgbClr val="CADCFC"/>
+                </a:solidFill>
+                <a:latin typeface="Calibri" pitchFamily="34" charset="0"/>
+                <a:ea typeface="Calibri" pitchFamily="34" charset="-122"/>
+                <a:cs typeface="Calibri" pitchFamily="34" charset="-120"/>
+              </a:rPr>
+              <a:t> [2]</a:t>
             </a:r>
             <a:endParaRPr lang="en-US" sz="1700" dirty="0"/>
           </a:p>
@@ -14733,21 +13205,35 @@
           <a:lstStyle/>
           <a:p>
             <a:pPr algn="l" indent="0" marL="0">
+              <a:buNone/>
+            </a:pPr>
+            <a:r>
+              <a:rPr lang="en-US" sz="1700" b="1" dirty="0">
+                <a:solidFill>
+                  <a:srgbClr val="FFFFFF"/>
+                </a:solidFill>
+                <a:latin typeface="Calibri" pitchFamily="34" charset="0"/>
+                <a:ea typeface="Calibri" pitchFamily="34" charset="-122"/>
+                <a:cs typeface="Calibri" pitchFamily="34" charset="-120"/>
+              </a:rPr>
+              <a:t>Copland Virtual Machine (CVM)</a:t>
+            </a:r>
+            <a:pPr algn="l" indent="0" marL="0">
               <a:spcAft>
                 <a:spcPts val="200"/>
               </a:spcAft>
               <a:buNone/>
             </a:pPr>
             <a:r>
-              <a:rPr lang="en-US" sz="1700" b="1" dirty="0">
-                <a:solidFill>
-                  <a:srgbClr val="FFFFFF"/>
-                </a:solidFill>
-                <a:latin typeface="Calibri" pitchFamily="34" charset="0"/>
-                <a:ea typeface="Calibri" pitchFamily="34" charset="-122"/>
-                <a:cs typeface="Calibri" pitchFamily="34" charset="-120"/>
-              </a:rPr>
-              <a:t>Copland Virtual Machine (CVM)</a:t>
+              <a:rPr lang="en-US" sz="1700" dirty="0">
+                <a:solidFill>
+                  <a:srgbClr val="CADCFC"/>
+                </a:solidFill>
+                <a:latin typeface="Calibri" pitchFamily="34" charset="0"/>
+                <a:ea typeface="Calibri" pitchFamily="34" charset="-122"/>
+                <a:cs typeface="Calibri" pitchFamily="34" charset="-120"/>
+              </a:rPr>
+              <a:t> [3,4]</a:t>
             </a:r>
             <a:endParaRPr lang="en-US" sz="1700" dirty="0"/>
           </a:p>
@@ -14850,21 +13336,35 @@
           <a:lstStyle/>
           <a:p>
             <a:pPr algn="l" indent="0" marL="0">
+              <a:buNone/>
+            </a:pPr>
+            <a:r>
+              <a:rPr lang="en-US" sz="1700" b="1" dirty="0">
+                <a:solidFill>
+                  <a:srgbClr val="FFFFFF"/>
+                </a:solidFill>
+                <a:latin typeface="Calibri" pitchFamily="34" charset="0"/>
+                <a:ea typeface="Calibri" pitchFamily="34" charset="-122"/>
+                <a:cs typeface="Calibri" pitchFamily="34" charset="-120"/>
+              </a:rPr>
+              <a:t>asp-libs</a:t>
+            </a:r>
+            <a:pPr algn="l" indent="0" marL="0">
               <a:spcAft>
                 <a:spcPts val="200"/>
               </a:spcAft>
               <a:buNone/>
             </a:pPr>
             <a:r>
-              <a:rPr lang="en-US" sz="1700" b="1" dirty="0">
-                <a:solidFill>
-                  <a:srgbClr val="FFFFFF"/>
-                </a:solidFill>
-                <a:latin typeface="Calibri" pitchFamily="34" charset="0"/>
-                <a:ea typeface="Calibri" pitchFamily="34" charset="-122"/>
-                <a:cs typeface="Calibri" pitchFamily="34" charset="-120"/>
-              </a:rPr>
-              <a:t>asp-libs</a:t>
+              <a:rPr lang="en-US" sz="1700" dirty="0">
+                <a:solidFill>
+                  <a:srgbClr val="CADCFC"/>
+                </a:solidFill>
+                <a:latin typeface="Calibri" pitchFamily="34" charset="0"/>
+                <a:ea typeface="Calibri" pitchFamily="34" charset="-122"/>
+                <a:cs typeface="Calibri" pitchFamily="34" charset="-120"/>
+              </a:rPr>
+              <a:t> [5]</a:t>
             </a:r>
             <a:endParaRPr lang="en-US" sz="1700" dirty="0"/>
           </a:p>
@@ -15007,6 +13507,20 @@
                 <a:cs typeface="Calibri" pitchFamily="34" charset="-120"/>
               </a:rPr>
               <a:t>golden baselines</a:t>
+            </a:r>
+            <a:pPr algn="l" indent="0" marL="0">
+              <a:buNone/>
+            </a:pPr>
+            <a:r>
+              <a:rPr lang="en-US" sz="1500" dirty="0">
+                <a:solidFill>
+                  <a:srgbClr val="5A6478"/>
+                </a:solidFill>
+                <a:latin typeface="Calibri" pitchFamily="34" charset="0"/>
+                <a:ea typeface="Calibri" pitchFamily="34" charset="-122"/>
+                <a:cs typeface="Calibri" pitchFamily="34" charset="-120"/>
+              </a:rPr>
+              <a:t> [6]</a:t>
             </a:r>
             <a:endParaRPr lang="en-US" sz="1500" dirty="0"/>
           </a:p>
@@ -19496,329 +18010,7 @@
       </p:grpSpPr>
       <p:sp>
         <p:nvSpPr>
-          <p:cNvPr id="2" name="Shape 0"/>
-          <p:cNvSpPr/>
-          <p:nvPr/>
-        </p:nvSpPr>
-        <p:spPr>
-          <a:xfrm>
-            <a:off x="640080" y="201168"/>
-            <a:ext cx="2073859" cy="502920"/>
-          </a:xfrm>
-          <a:prstGeom prst="roundRect">
-            <a:avLst>
-              <a:gd name="adj" fmla="val 9091"/>
-            </a:avLst>
-          </a:prstGeom>
-          <a:solidFill>
-            <a:srgbClr val="E4EAF4"/>
-          </a:solidFill>
-          <a:ln/>
-        </p:spPr>
-      </p:sp>
-      <p:sp>
-        <p:nvSpPr>
-          <p:cNvPr id="3" name="Text 1"/>
-          <p:cNvSpPr/>
-          <p:nvPr/>
-        </p:nvSpPr>
-        <p:spPr>
-          <a:xfrm>
-            <a:off x="640080" y="201168"/>
-            <a:ext cx="2073859" cy="502920"/>
-          </a:xfrm>
-          <a:prstGeom prst="rect">
-            <a:avLst/>
-          </a:prstGeom>
-          <a:noFill/>
-          <a:ln/>
-        </p:spPr>
-        <p:txBody>
-          <a:bodyPr wrap="square" lIns="254" tIns="254" rIns="254" bIns="254" rtlCol="0" anchor="ctr"/>
-          <a:lstStyle/>
-          <a:p>
-            <a:pPr algn="ctr" indent="0" marL="0">
-              <a:buNone/>
-            </a:pPr>
-            <a:r>
-              <a:rPr lang="en-US" sz="900" dirty="0">
-                <a:solidFill>
-                  <a:srgbClr val="5A6478"/>
-                </a:solidFill>
-                <a:latin typeface="Calibri" pitchFamily="34" charset="0"/>
-                <a:ea typeface="Calibri" pitchFamily="34" charset="-122"/>
-                <a:cs typeface="Calibri" pitchFamily="34" charset="-120"/>
-              </a:rPr>
-              <a:t>Preliminaries</a:t>
-            </a:r>
-            <a:endParaRPr lang="en-US" sz="900" dirty="0"/>
-          </a:p>
-        </p:txBody>
-      </p:sp>
-      <p:sp>
-        <p:nvSpPr>
-          <p:cNvPr id="4" name="Shape 2"/>
-          <p:cNvSpPr/>
-          <p:nvPr/>
-        </p:nvSpPr>
-        <p:spPr>
-          <a:xfrm>
-            <a:off x="2841955" y="201168"/>
-            <a:ext cx="2073859" cy="502920"/>
-          </a:xfrm>
-          <a:prstGeom prst="roundRect">
-            <a:avLst>
-              <a:gd name="adj" fmla="val 9091"/>
-            </a:avLst>
-          </a:prstGeom>
-          <a:solidFill>
-            <a:srgbClr val="1E2761"/>
-          </a:solidFill>
-          <a:ln/>
-        </p:spPr>
-      </p:sp>
-      <p:sp>
-        <p:nvSpPr>
-          <p:cNvPr id="5" name="Text 3"/>
-          <p:cNvSpPr/>
-          <p:nvPr/>
-        </p:nvSpPr>
-        <p:spPr>
-          <a:xfrm>
-            <a:off x="2841955" y="201168"/>
-            <a:ext cx="2073859" cy="502920"/>
-          </a:xfrm>
-          <a:prstGeom prst="rect">
-            <a:avLst/>
-          </a:prstGeom>
-          <a:noFill/>
-          <a:ln/>
-        </p:spPr>
-        <p:txBody>
-          <a:bodyPr wrap="square" lIns="254" tIns="254" rIns="254" bIns="254" rtlCol="0" anchor="ctr"/>
-          <a:lstStyle/>
-          <a:p>
-            <a:pPr algn="ctr" indent="0" marL="0">
-              <a:buNone/>
-            </a:pPr>
-            <a:r>
-              <a:rPr lang="en-US" sz="900" b="1" dirty="0">
-                <a:solidFill>
-                  <a:srgbClr val="FFFFFF"/>
-                </a:solidFill>
-                <a:latin typeface="Calibri" pitchFamily="34" charset="0"/>
-                <a:ea typeface="Calibri" pitchFamily="34" charset="-122"/>
-                <a:cs typeface="Calibri" pitchFamily="34" charset="-120"/>
-              </a:rPr>
-              <a:t>Demo:</a:t>
-            </a:r>
-            <a:endParaRPr lang="en-US" sz="900" dirty="0"/>
-          </a:p>
-          <a:p>
-            <a:pPr algn="ctr" indent="0" marL="0">
-              <a:buNone/>
-            </a:pPr>
-            <a:r>
-              <a:rPr lang="en-US" sz="900" b="1" dirty="0">
-                <a:solidFill>
-                  <a:srgbClr val="FFFFFF"/>
-                </a:solidFill>
-                <a:latin typeface="Calibri" pitchFamily="34" charset="0"/>
-                <a:ea typeface="Calibri" pitchFamily="34" charset="-122"/>
-                <a:cs typeface="Calibri" pitchFamily="34" charset="-120"/>
-              </a:rPr>
-              <a:t>Isolette (SysMLv2 → Rust)</a:t>
-            </a:r>
-            <a:endParaRPr lang="en-US" sz="900" dirty="0"/>
-          </a:p>
-        </p:txBody>
-      </p:sp>
-      <p:sp>
-        <p:nvSpPr>
-          <p:cNvPr id="6" name="Shape 4"/>
-          <p:cNvSpPr/>
-          <p:nvPr/>
-        </p:nvSpPr>
-        <p:spPr>
-          <a:xfrm>
-            <a:off x="5043830" y="201168"/>
-            <a:ext cx="2073859" cy="502920"/>
-          </a:xfrm>
-          <a:prstGeom prst="roundRect">
-            <a:avLst>
-              <a:gd name="adj" fmla="val 9091"/>
-            </a:avLst>
-          </a:prstGeom>
-          <a:solidFill>
-            <a:srgbClr val="E4EAF4"/>
-          </a:solidFill>
-          <a:ln/>
-        </p:spPr>
-      </p:sp>
-      <p:sp>
-        <p:nvSpPr>
-          <p:cNvPr id="7" name="Text 5"/>
-          <p:cNvSpPr/>
-          <p:nvPr/>
-        </p:nvSpPr>
-        <p:spPr>
-          <a:xfrm>
-            <a:off x="5043830" y="201168"/>
-            <a:ext cx="2073859" cy="502920"/>
-          </a:xfrm>
-          <a:prstGeom prst="rect">
-            <a:avLst/>
-          </a:prstGeom>
-          <a:noFill/>
-          <a:ln/>
-        </p:spPr>
-        <p:txBody>
-          <a:bodyPr wrap="square" lIns="254" tIns="254" rIns="254" bIns="254" rtlCol="0" anchor="ctr"/>
-          <a:lstStyle/>
-          <a:p>
-            <a:pPr algn="ctr" indent="0" marL="0">
-              <a:buNone/>
-            </a:pPr>
-            <a:r>
-              <a:rPr lang="en-US" sz="900" dirty="0">
-                <a:solidFill>
-                  <a:srgbClr val="5A6478"/>
-                </a:solidFill>
-                <a:latin typeface="Calibri" pitchFamily="34" charset="0"/>
-                <a:ea typeface="Calibri" pitchFamily="34" charset="-122"/>
-                <a:cs typeface="Calibri" pitchFamily="34" charset="-120"/>
-              </a:rPr>
-              <a:t>Other Ecosystems</a:t>
-            </a:r>
-            <a:endParaRPr lang="en-US" sz="900" dirty="0"/>
-          </a:p>
-        </p:txBody>
-      </p:sp>
-      <p:sp>
-        <p:nvSpPr>
-          <p:cNvPr id="8" name="Shape 6"/>
-          <p:cNvSpPr/>
-          <p:nvPr/>
-        </p:nvSpPr>
-        <p:spPr>
-          <a:xfrm>
-            <a:off x="7245706" y="201168"/>
-            <a:ext cx="2073859" cy="502920"/>
-          </a:xfrm>
-          <a:prstGeom prst="roundRect">
-            <a:avLst>
-              <a:gd name="adj" fmla="val 9091"/>
-            </a:avLst>
-          </a:prstGeom>
-          <a:solidFill>
-            <a:srgbClr val="E4EAF4"/>
-          </a:solidFill>
-          <a:ln/>
-        </p:spPr>
-      </p:sp>
-      <p:sp>
-        <p:nvSpPr>
-          <p:cNvPr id="9" name="Text 7"/>
-          <p:cNvSpPr/>
-          <p:nvPr/>
-        </p:nvSpPr>
-        <p:spPr>
-          <a:xfrm>
-            <a:off x="7245706" y="201168"/>
-            <a:ext cx="2073859" cy="502920"/>
-          </a:xfrm>
-          <a:prstGeom prst="rect">
-            <a:avLst/>
-          </a:prstGeom>
-          <a:noFill/>
-          <a:ln/>
-        </p:spPr>
-        <p:txBody>
-          <a:bodyPr wrap="square" lIns="254" tIns="254" rIns="254" bIns="254" rtlCol="0" anchor="ctr"/>
-          <a:lstStyle/>
-          <a:p>
-            <a:pPr algn="ctr" indent="0" marL="0">
-              <a:buNone/>
-            </a:pPr>
-            <a:r>
-              <a:rPr lang="en-US" sz="900" dirty="0">
-                <a:solidFill>
-                  <a:srgbClr val="5A6478"/>
-                </a:solidFill>
-                <a:latin typeface="Calibri" pitchFamily="34" charset="0"/>
-                <a:ea typeface="Calibri" pitchFamily="34" charset="-122"/>
-                <a:cs typeface="Calibri" pitchFamily="34" charset="-120"/>
-              </a:rPr>
-              <a:t>AI in the Loop</a:t>
-            </a:r>
-            <a:endParaRPr lang="en-US" sz="900" dirty="0"/>
-          </a:p>
-        </p:txBody>
-      </p:sp>
-      <p:sp>
-        <p:nvSpPr>
-          <p:cNvPr id="10" name="Shape 8"/>
-          <p:cNvSpPr/>
-          <p:nvPr/>
-        </p:nvSpPr>
-        <p:spPr>
-          <a:xfrm>
-            <a:off x="9447581" y="201168"/>
-            <a:ext cx="2073859" cy="502920"/>
-          </a:xfrm>
-          <a:prstGeom prst="roundRect">
-            <a:avLst>
-              <a:gd name="adj" fmla="val 9091"/>
-            </a:avLst>
-          </a:prstGeom>
-          <a:solidFill>
-            <a:srgbClr val="E4EAF4"/>
-          </a:solidFill>
-          <a:ln/>
-        </p:spPr>
-      </p:sp>
-      <p:sp>
-        <p:nvSpPr>
-          <p:cNvPr id="11" name="Text 9"/>
-          <p:cNvSpPr/>
-          <p:nvPr/>
-        </p:nvSpPr>
-        <p:spPr>
-          <a:xfrm>
-            <a:off x="9447581" y="201168"/>
-            <a:ext cx="2073859" cy="502920"/>
-          </a:xfrm>
-          <a:prstGeom prst="rect">
-            <a:avLst/>
-          </a:prstGeom>
-          <a:noFill/>
-          <a:ln/>
-        </p:spPr>
-        <p:txBody>
-          <a:bodyPr wrap="square" lIns="254" tIns="254" rIns="254" bIns="254" rtlCol="0" anchor="ctr"/>
-          <a:lstStyle/>
-          <a:p>
-            <a:pPr algn="ctr" indent="0" marL="0">
-              <a:buNone/>
-            </a:pPr>
-            <a:r>
-              <a:rPr lang="en-US" sz="900" dirty="0">
-                <a:solidFill>
-                  <a:srgbClr val="5A6478"/>
-                </a:solidFill>
-                <a:latin typeface="Calibri" pitchFamily="34" charset="0"/>
-                <a:ea typeface="Calibri" pitchFamily="34" charset="-122"/>
-                <a:cs typeface="Calibri" pitchFamily="34" charset="-120"/>
-              </a:rPr>
-              <a:t>Close</a:t>
-            </a:r>
-            <a:endParaRPr lang="en-US" sz="900" dirty="0"/>
-          </a:p>
-        </p:txBody>
-      </p:sp>
-      <p:sp>
-        <p:nvSpPr>
-          <p:cNvPr id="12" name="Text 10"/>
+          <p:cNvPr id="2" name="Text 0"/>
           <p:cNvSpPr/>
           <p:nvPr/>
         </p:nvSpPr>
@@ -19857,7 +18049,7 @@
       </p:sp>
       <p:sp>
         <p:nvSpPr>
-          <p:cNvPr id="13" name="Text 11"/>
+          <p:cNvPr id="3" name="Text 1"/>
           <p:cNvSpPr/>
           <p:nvPr/>
         </p:nvSpPr>
@@ -19892,6 +18084,20 @@
               <a:t>The system: </a:t>
             </a:r>
             <a:pPr algn="l" indent="0" marL="0">
+              <a:buNone/>
+            </a:pPr>
+            <a:r>
+              <a:rPr lang="en-US" sz="1350" dirty="0">
+                <a:solidFill>
+                  <a:srgbClr val="212121"/>
+                </a:solidFill>
+                <a:latin typeface="Calibri" pitchFamily="34" charset="0"/>
+                <a:ea typeface="Calibri" pitchFamily="34" charset="-122"/>
+                <a:cs typeface="Calibri" pitchFamily="34" charset="-120"/>
+              </a:rPr>
+              <a:t>infant-incubator thermostat that regulates and monitors a newborn's environment to maintain a safe temperature range (heat control on/off)</a:t>
+            </a:r>
+            <a:pPr algn="l" indent="0" marL="0">
               <a:spcAft>
                 <a:spcPts val="200"/>
               </a:spcAft>
@@ -19900,13 +18106,13 @@
             <a:r>
               <a:rPr lang="en-US" sz="1350" dirty="0">
                 <a:solidFill>
-                  <a:srgbClr val="212121"/>
-                </a:solidFill>
-                <a:latin typeface="Calibri" pitchFamily="34" charset="0"/>
-                <a:ea typeface="Calibri" pitchFamily="34" charset="-122"/>
-                <a:cs typeface="Calibri" pitchFamily="34" charset="-120"/>
-              </a:rPr>
-              <a:t>infant-incubator thermostat that regulates and monitors a newborn's environment to maintain a safe temperature range (heat control on/off)</a:t>
+                  <a:srgbClr val="5A6478"/>
+                </a:solidFill>
+                <a:latin typeface="Calibri" pitchFamily="34" charset="0"/>
+                <a:ea typeface="Calibri" pitchFamily="34" charset="-122"/>
+                <a:cs typeface="Calibri" pitchFamily="34" charset="-120"/>
+              </a:rPr>
+              <a:t> [7]</a:t>
             </a:r>
             <a:endParaRPr lang="en-US" sz="1350" dirty="0"/>
           </a:p>
@@ -19927,7 +18133,7 @@
                 <a:ea typeface="Calibri" pitchFamily="34" charset="-122"/>
                 <a:cs typeface="Calibri" pitchFamily="34" charset="-120"/>
               </a:rPr>
-              <a:t>requirements traceable to FAA AR-08-32 (the REQ-MHS-* family the scenes will tamper with)</a:t>
+              <a:t>requirements traceable to FAA AR-08-32 [10] (the REQ-MHS-* family the scenes will tamper with)</a:t>
             </a:r>
             <a:endParaRPr lang="en-US" sz="1350" dirty="0"/>
           </a:p>
@@ -19946,6 +18152,20 @@
                 <a:cs typeface="Calibri" pitchFamily="34" charset="-120"/>
               </a:rPr>
               <a:t>The relevance: </a:t>
+            </a:r>
+            <a:pPr algn="l" indent="0" marL="0">
+              <a:buNone/>
+            </a:pPr>
+            <a:r>
+              <a:rPr lang="en-US" sz="1350" dirty="0">
+                <a:solidFill>
+                  <a:srgbClr val="212121"/>
+                </a:solidFill>
+                <a:latin typeface="Calibri" pitchFamily="34" charset="0"/>
+                <a:ea typeface="Calibri" pitchFamily="34" charset="-122"/>
+                <a:cs typeface="Calibri" pitchFamily="34" charset="-120"/>
+              </a:rPr>
+              <a:t>the INSPECTA program's seL4/Microkit HAMR-based pipeline</a:t>
             </a:r>
             <a:pPr algn="l" indent="0" marL="0">
               <a:spcAft>
@@ -19956,13 +18176,13 @@
             <a:r>
               <a:rPr lang="en-US" sz="1350" dirty="0">
                 <a:solidFill>
-                  <a:srgbClr val="212121"/>
-                </a:solidFill>
-                <a:latin typeface="Calibri" pitchFamily="34" charset="0"/>
-                <a:ea typeface="Calibri" pitchFamily="34" charset="-122"/>
-                <a:cs typeface="Calibri" pitchFamily="34" charset="-120"/>
-              </a:rPr>
-              <a:t>the INSPECTA program's seL4/Microkit HAMR-based pipeline</a:t>
+                  <a:srgbClr val="5A6478"/>
+                </a:solidFill>
+                <a:latin typeface="Calibri" pitchFamily="34" charset="0"/>
+                <a:ea typeface="Calibri" pitchFamily="34" charset="-122"/>
+                <a:cs typeface="Calibri" pitchFamily="34" charset="-120"/>
+              </a:rPr>
+              <a:t> [11]</a:t>
             </a:r>
             <a:endParaRPr lang="en-US" sz="1350" dirty="0"/>
           </a:p>
@@ -19989,7 +18209,7 @@
       </p:sp>
       <p:sp>
         <p:nvSpPr>
-          <p:cNvPr id="14" name="Shape 12"/>
+          <p:cNvPr id="4" name="Shape 2"/>
           <p:cNvSpPr/>
           <p:nvPr/>
         </p:nvSpPr>
@@ -20011,7 +18231,7 @@
       </p:sp>
       <p:sp>
         <p:nvSpPr>
-          <p:cNvPr id="15" name="Text 13"/>
+          <p:cNvPr id="5" name="Text 3"/>
           <p:cNvSpPr/>
           <p:nvPr/>
         </p:nvSpPr>
@@ -20067,7 +18287,7 @@
       </p:sp>
       <p:sp>
         <p:nvSpPr>
-          <p:cNvPr id="16" name="Text 14"/>
+          <p:cNvPr id="6" name="Text 4"/>
           <p:cNvSpPr/>
           <p:nvPr/>
         </p:nvSpPr>
@@ -20106,7 +18326,7 @@
       </p:sp>
       <p:sp>
         <p:nvSpPr>
-          <p:cNvPr id="17" name="Shape 15"/>
+          <p:cNvPr id="7" name="Shape 5"/>
           <p:cNvSpPr/>
           <p:nvPr/>
         </p:nvSpPr>
@@ -20128,7 +18348,7 @@
       </p:sp>
       <p:sp>
         <p:nvSpPr>
-          <p:cNvPr id="18" name="Text 16"/>
+          <p:cNvPr id="8" name="Text 6"/>
           <p:cNvSpPr/>
           <p:nvPr/>
         </p:nvSpPr>
@@ -20178,13 +18398,27 @@
               </a:rPr>
               <a:t>codegen</a:t>
             </a:r>
+            <a:pPr algn="ctr" indent="0" marL="0">
+              <a:buNone/>
+            </a:pPr>
+            <a:r>
+              <a:rPr lang="en-US" sz="1050" dirty="0">
+                <a:solidFill>
+                  <a:srgbClr val="CADCFC"/>
+                </a:solidFill>
+                <a:latin typeface="Calibri" pitchFamily="34" charset="0"/>
+                <a:ea typeface="Calibri" pitchFamily="34" charset="-122"/>
+                <a:cs typeface="Calibri" pitchFamily="34" charset="-120"/>
+              </a:rPr>
+              <a:t> [8,9]</a:t>
+            </a:r>
             <a:endParaRPr lang="en-US" sz="1050" dirty="0"/>
           </a:p>
         </p:txBody>
       </p:sp>
       <p:sp>
         <p:nvSpPr>
-          <p:cNvPr id="19" name="Text 17"/>
+          <p:cNvPr id="9" name="Text 7"/>
           <p:cNvSpPr/>
           <p:nvPr/>
         </p:nvSpPr>
@@ -20223,7 +18457,7 @@
       </p:sp>
       <p:sp>
         <p:nvSpPr>
-          <p:cNvPr id="20" name="Shape 18"/>
+          <p:cNvPr id="10" name="Shape 8"/>
           <p:cNvSpPr/>
           <p:nvPr/>
         </p:nvSpPr>
@@ -20245,7 +18479,7 @@
       </p:sp>
       <p:sp>
         <p:nvSpPr>
-          <p:cNvPr id="21" name="Text 19"/>
+          <p:cNvPr id="11" name="Text 9"/>
           <p:cNvSpPr/>
           <p:nvPr/>
         </p:nvSpPr>
@@ -20295,13 +18529,27 @@
               </a:rPr>
               <a:t>Rust</a:t>
             </a:r>
+            <a:pPr algn="ctr" indent="0" marL="0">
+              <a:buNone/>
+            </a:pPr>
+            <a:r>
+              <a:rPr lang="en-US" sz="1050" dirty="0">
+                <a:solidFill>
+                  <a:srgbClr val="CADCFC"/>
+                </a:solidFill>
+                <a:latin typeface="Calibri" pitchFamily="34" charset="0"/>
+                <a:ea typeface="Calibri" pitchFamily="34" charset="-122"/>
+                <a:cs typeface="Calibri" pitchFamily="34" charset="-120"/>
+              </a:rPr>
+              <a:t> [12]</a:t>
+            </a:r>
             <a:endParaRPr lang="en-US" sz="1050" dirty="0"/>
           </a:p>
         </p:txBody>
       </p:sp>
       <p:sp>
         <p:nvSpPr>
-          <p:cNvPr id="22" name="Text 20"/>
+          <p:cNvPr id="12" name="Text 10"/>
           <p:cNvSpPr/>
           <p:nvPr/>
         </p:nvSpPr>
@@ -20340,7 +18588,7 @@
       </p:sp>
       <p:sp>
         <p:nvSpPr>
-          <p:cNvPr id="23" name="Shape 21"/>
+          <p:cNvPr id="13" name="Shape 11"/>
           <p:cNvSpPr/>
           <p:nvPr/>
         </p:nvSpPr>
@@ -20362,7 +18610,7 @@
       </p:sp>
       <p:sp>
         <p:nvSpPr>
-          <p:cNvPr id="24" name="Text 22"/>
+          <p:cNvPr id="14" name="Text 12"/>
           <p:cNvSpPr/>
           <p:nvPr/>
         </p:nvSpPr>
@@ -20412,13 +18660,27 @@
               </a:rPr>
               <a:t>target</a:t>
             </a:r>
+            <a:pPr algn="ctr" indent="0" marL="0">
+              <a:buNone/>
+            </a:pPr>
+            <a:r>
+              <a:rPr lang="en-US" sz="1050" dirty="0">
+                <a:solidFill>
+                  <a:srgbClr val="CADCFC"/>
+                </a:solidFill>
+                <a:latin typeface="Calibri" pitchFamily="34" charset="0"/>
+                <a:ea typeface="Calibri" pitchFamily="34" charset="-122"/>
+                <a:cs typeface="Calibri" pitchFamily="34" charset="-120"/>
+              </a:rPr>
+              <a:t> [13]</a:t>
+            </a:r>
             <a:endParaRPr lang="en-US" sz="1050" dirty="0"/>
           </a:p>
         </p:txBody>
       </p:sp>
       <p:sp>
         <p:nvSpPr>
-          <p:cNvPr id="25" name="Text 23"/>
+          <p:cNvPr id="15" name="Text 13"/>
           <p:cNvSpPr/>
           <p:nvPr/>
         </p:nvSpPr>
@@ -20472,164 +18734,7 @@
       </p:sp>
       <p:sp>
         <p:nvSpPr>
-          <p:cNvPr id="26" name="Text 24"/>
-          <p:cNvSpPr/>
-          <p:nvPr/>
-        </p:nvSpPr>
-        <p:spPr>
-          <a:xfrm>
-            <a:off x="640080" y="6236208"/>
-            <a:ext cx="10881360" cy="566928"/>
-          </a:xfrm>
-          <a:prstGeom prst="rect">
-            <a:avLst/>
-          </a:prstGeom>
-          <a:noFill/>
-          <a:ln/>
-        </p:spPr>
-        <p:txBody>
-          <a:bodyPr wrap="square" lIns="0" tIns="0" rIns="0" bIns="0" rtlCol="0" anchor="t"/>
-          <a:lstStyle/>
-          <a:p>
-            <a:pPr algn="l" indent="0" marL="0">
-              <a:buNone/>
-            </a:pPr>
-            <a:r>
-              <a:rPr lang="en-US" sz="850" dirty="0">
-                <a:solidFill>
-                  <a:srgbClr val="5A6478"/>
-                </a:solidFill>
-                <a:latin typeface="Calibri" pitchFamily="34" charset="0"/>
-                <a:ea typeface="Calibri" pitchFamily="34" charset="-122"/>
-                <a:cs typeface="Calibri" pitchFamily="34" charset="-120"/>
-              </a:rPr>
-              <a:t>Hatcliff &amp; Belt, </a:t>
-            </a:r>
-            <a:pPr algn="l" indent="0" marL="0">
-              <a:buNone/>
-            </a:pPr>
-            <a:r>
-              <a:rPr lang="en-US" sz="850" i="1" dirty="0">
-                <a:solidFill>
-                  <a:srgbClr val="5A6478"/>
-                </a:solidFill>
-                <a:latin typeface="Calibri" pitchFamily="34" charset="0"/>
-                <a:ea typeface="Calibri" pitchFamily="34" charset="-122"/>
-                <a:cs typeface="Calibri" pitchFamily="34" charset="-120"/>
-              </a:rPr>
-              <a:t>The Isolette System: Illustrating End-to-End Artifacts for Rigorous Model-Based Engineering</a:t>
-            </a:r>
-            <a:pPr algn="l" indent="0" marL="0">
-              <a:buNone/>
-            </a:pPr>
-            <a:r>
-              <a:rPr lang="en-US" sz="850" dirty="0">
-                <a:solidFill>
-                  <a:srgbClr val="5A6478"/>
-                </a:solidFill>
-                <a:latin typeface="Calibri" pitchFamily="34" charset="0"/>
-                <a:ea typeface="Calibri" pitchFamily="34" charset="-122"/>
-                <a:cs typeface="Calibri" pitchFamily="34" charset="-120"/>
-              </a:rPr>
-              <a:t>, Springer LNCS 15240, 2025</a:t>
-            </a:r>
-            <a:endParaRPr lang="en-US" sz="850" dirty="0"/>
-          </a:p>
-          <a:p>
-            <a:pPr algn="l" indent="0" marL="0">
-              <a:buNone/>
-            </a:pPr>
-            <a:r>
-              <a:rPr lang="en-US" sz="850" dirty="0">
-                <a:solidFill>
-                  <a:srgbClr val="5A6478"/>
-                </a:solidFill>
-                <a:latin typeface="Calibri" pitchFamily="34" charset="0"/>
-                <a:ea typeface="Calibri" pitchFamily="34" charset="-122"/>
-                <a:cs typeface="Calibri" pitchFamily="34" charset="-120"/>
-              </a:rPr>
-              <a:t>Hatcliff, Belt, Robby, McKenzie, Liang, </a:t>
-            </a:r>
-            <a:pPr algn="l" indent="0" marL="0">
-              <a:buNone/>
-            </a:pPr>
-            <a:r>
-              <a:rPr lang="en-US" sz="850" i="1" dirty="0">
-                <a:solidFill>
-                  <a:srgbClr val="5A6478"/>
-                </a:solidFill>
-                <a:latin typeface="Calibri" pitchFamily="34" charset="0"/>
-                <a:ea typeface="Calibri" pitchFamily="34" charset="-122"/>
-                <a:cs typeface="Calibri" pitchFamily="34" charset="-120"/>
-              </a:rPr>
-              <a:t>End-to-End Formal Methods Integrated Development with SysMLv2 Using HAMR</a:t>
-            </a:r>
-            <a:pPr algn="l" indent="0" marL="0">
-              <a:buNone/>
-            </a:pPr>
-            <a:r>
-              <a:rPr lang="en-US" sz="850" dirty="0">
-                <a:solidFill>
-                  <a:srgbClr val="5A6478"/>
-                </a:solidFill>
-                <a:latin typeface="Calibri" pitchFamily="34" charset="0"/>
-                <a:ea typeface="Calibri" pitchFamily="34" charset="-122"/>
-                <a:cs typeface="Calibri" pitchFamily="34" charset="-120"/>
-              </a:rPr>
-              <a:t>, Springer, 2025</a:t>
-            </a:r>
-            <a:endParaRPr lang="en-US" sz="850" dirty="0"/>
-          </a:p>
-          <a:p>
-            <a:pPr algn="l" indent="0" marL="0">
-              <a:buNone/>
-            </a:pPr>
-            <a:r>
-              <a:rPr lang="en-US" sz="850" dirty="0">
-                <a:solidFill>
-                  <a:srgbClr val="5A6478"/>
-                </a:solidFill>
-                <a:latin typeface="Calibri" pitchFamily="34" charset="0"/>
-                <a:ea typeface="Calibri" pitchFamily="34" charset="-122"/>
-                <a:cs typeface="Calibri" pitchFamily="34" charset="-120"/>
-              </a:rPr>
-              <a:t>Hatcliff, Belt, Robby, Carpenter, </a:t>
-            </a:r>
-            <a:pPr algn="l" indent="0" marL="0">
-              <a:buNone/>
-            </a:pPr>
-            <a:r>
-              <a:rPr lang="en-US" sz="850" i="1" dirty="0">
-                <a:solidFill>
-                  <a:srgbClr val="5A6478"/>
-                </a:solidFill>
-                <a:latin typeface="Calibri" pitchFamily="34" charset="0"/>
-                <a:ea typeface="Calibri" pitchFamily="34" charset="-122"/>
-                <a:cs typeface="Calibri" pitchFamily="34" charset="-120"/>
-              </a:rPr>
-              <a:t>HAMR: An AADL Multi-platform Code Generation Toolset</a:t>
-            </a:r>
-            <a:pPr algn="l" indent="0" marL="0">
-              <a:buNone/>
-            </a:pPr>
-            <a:r>
-              <a:rPr lang="en-US" sz="850" dirty="0">
-                <a:solidFill>
-                  <a:srgbClr val="5A6478"/>
-                </a:solidFill>
-                <a:latin typeface="Calibri" pitchFamily="34" charset="0"/>
-                <a:ea typeface="Calibri" pitchFamily="34" charset="-122"/>
-                <a:cs typeface="Calibri" pitchFamily="34" charset="-120"/>
-              </a:rPr>
-              <a:t>, ISoLA 2021, LNCS 13036</a:t>
-            </a:r>
-            <a:endParaRPr lang="en-US" sz="850" dirty="0"/>
-          </a:p>
-        </p:txBody>
-      </p:sp>
-      <p:sp>
-        <p:nvSpPr>
-          <p:cNvPr id="27" name="Shape 25"/>
+          <p:cNvPr id="16" name="Shape 14"/>
           <p:cNvSpPr/>
           <p:nvPr/>
         </p:nvSpPr>
@@ -20656,7 +18761,7 @@
       </p:sp>
       <p:sp>
         <p:nvSpPr>
-          <p:cNvPr id="28" name="Text 26"/>
+          <p:cNvPr id="17" name="Text 15"/>
           <p:cNvSpPr/>
           <p:nvPr/>
         </p:nvSpPr>
@@ -20695,7 +18800,7 @@
       </p:sp>
       <p:sp>
         <p:nvSpPr>
-          <p:cNvPr id="29" name="Text 27"/>
+          <p:cNvPr id="18" name="Text 16"/>
           <p:cNvSpPr/>
           <p:nvPr/>
         </p:nvSpPr>
@@ -20734,7 +18839,7 @@
       </p:sp>
       <p:sp>
         <p:nvSpPr>
-          <p:cNvPr id="30" name="Shape 28"/>
+          <p:cNvPr id="19" name="Shape 17"/>
           <p:cNvSpPr/>
           <p:nvPr/>
         </p:nvSpPr>
@@ -20761,7 +18866,7 @@
       </p:sp>
       <p:sp>
         <p:nvSpPr>
-          <p:cNvPr id="31" name="Text 29"/>
+          <p:cNvPr id="20" name="Text 18"/>
           <p:cNvSpPr/>
           <p:nvPr/>
         </p:nvSpPr>
@@ -20800,7 +18905,7 @@
       </p:sp>
       <p:sp>
         <p:nvSpPr>
-          <p:cNvPr id="32" name="Text 30"/>
+          <p:cNvPr id="21" name="Text 19"/>
           <p:cNvSpPr/>
           <p:nvPr/>
         </p:nvSpPr>
@@ -20839,7 +18944,7 @@
       </p:sp>
       <p:sp>
         <p:nvSpPr>
-          <p:cNvPr id="33" name="Shape 31"/>
+          <p:cNvPr id="22" name="Shape 20"/>
           <p:cNvSpPr/>
           <p:nvPr/>
         </p:nvSpPr>
@@ -20866,7 +18971,7 @@
       </p:sp>
       <p:sp>
         <p:nvSpPr>
-          <p:cNvPr id="34" name="Text 32"/>
+          <p:cNvPr id="23" name="Text 21"/>
           <p:cNvSpPr/>
           <p:nvPr/>
         </p:nvSpPr>
@@ -20905,7 +19010,7 @@
       </p:sp>
       <p:sp>
         <p:nvSpPr>
-          <p:cNvPr id="35" name="Text 33"/>
+          <p:cNvPr id="24" name="Text 22"/>
           <p:cNvSpPr/>
           <p:nvPr/>
         </p:nvSpPr>
@@ -20944,7 +19049,7 @@
       </p:sp>
       <p:sp>
         <p:nvSpPr>
-          <p:cNvPr id="36" name="Shape 34"/>
+          <p:cNvPr id="25" name="Shape 23"/>
           <p:cNvSpPr/>
           <p:nvPr/>
         </p:nvSpPr>
@@ -20971,7 +19076,7 @@
       </p:sp>
       <p:sp>
         <p:nvSpPr>
-          <p:cNvPr id="37" name="Text 35"/>
+          <p:cNvPr id="26" name="Text 24"/>
           <p:cNvSpPr/>
           <p:nvPr/>
         </p:nvSpPr>
@@ -21010,7 +19115,7 @@
       </p:sp>
       <p:sp>
         <p:nvSpPr>
-          <p:cNvPr id="38" name="Text 36"/>
+          <p:cNvPr id="27" name="Text 25"/>
           <p:cNvSpPr/>
           <p:nvPr/>
         </p:nvSpPr>
@@ -21049,7 +19154,7 @@
       </p:sp>
       <p:sp>
         <p:nvSpPr>
-          <p:cNvPr id="39" name="Shape 37"/>
+          <p:cNvPr id="28" name="Shape 26"/>
           <p:cNvSpPr/>
           <p:nvPr/>
         </p:nvSpPr>
@@ -21076,7 +19181,7 @@
       </p:sp>
       <p:sp>
         <p:nvSpPr>
-          <p:cNvPr id="40" name="Text 38"/>
+          <p:cNvPr id="29" name="Text 27"/>
           <p:cNvSpPr/>
           <p:nvPr/>
         </p:nvSpPr>
@@ -21115,7 +19220,7 @@
       </p:sp>
       <p:sp>
         <p:nvSpPr>
-          <p:cNvPr id="41" name="Text 39"/>
+          <p:cNvPr id="30" name="Text 28"/>
           <p:cNvSpPr/>
           <p:nvPr/>
         </p:nvSpPr>
@@ -21154,7 +19259,7 @@
       </p:sp>
       <p:sp>
         <p:nvSpPr>
-          <p:cNvPr id="42" name="Shape 40"/>
+          <p:cNvPr id="31" name="Shape 29"/>
           <p:cNvSpPr/>
           <p:nvPr/>
         </p:nvSpPr>
@@ -21181,7 +19286,7 @@
       </p:sp>
       <p:sp>
         <p:nvSpPr>
-          <p:cNvPr id="43" name="Text 41"/>
+          <p:cNvPr id="32" name="Text 30"/>
           <p:cNvSpPr/>
           <p:nvPr/>
         </p:nvSpPr>
@@ -21220,7 +19325,7 @@
       </p:sp>
       <p:sp>
         <p:nvSpPr>
-          <p:cNvPr id="44" name="Text 42"/>
+          <p:cNvPr id="33" name="Text 31"/>
           <p:cNvSpPr/>
           <p:nvPr/>
         </p:nvSpPr>
@@ -21308,329 +19413,7 @@
       </p:grpSpPr>
       <p:sp>
         <p:nvSpPr>
-          <p:cNvPr id="2" name="Shape 0"/>
-          <p:cNvSpPr/>
-          <p:nvPr/>
-        </p:nvSpPr>
-        <p:spPr>
-          <a:xfrm>
-            <a:off x="640080" y="201168"/>
-            <a:ext cx="2073859" cy="502920"/>
-          </a:xfrm>
-          <a:prstGeom prst="roundRect">
-            <a:avLst>
-              <a:gd name="adj" fmla="val 9091"/>
-            </a:avLst>
-          </a:prstGeom>
-          <a:solidFill>
-            <a:srgbClr val="E4EAF4"/>
-          </a:solidFill>
-          <a:ln/>
-        </p:spPr>
-      </p:sp>
-      <p:sp>
-        <p:nvSpPr>
-          <p:cNvPr id="3" name="Text 1"/>
-          <p:cNvSpPr/>
-          <p:nvPr/>
-        </p:nvSpPr>
-        <p:spPr>
-          <a:xfrm>
-            <a:off x="640080" y="201168"/>
-            <a:ext cx="2073859" cy="502920"/>
-          </a:xfrm>
-          <a:prstGeom prst="rect">
-            <a:avLst/>
-          </a:prstGeom>
-          <a:noFill/>
-          <a:ln/>
-        </p:spPr>
-        <p:txBody>
-          <a:bodyPr wrap="square" lIns="254" tIns="254" rIns="254" bIns="254" rtlCol="0" anchor="ctr"/>
-          <a:lstStyle/>
-          <a:p>
-            <a:pPr algn="ctr" indent="0" marL="0">
-              <a:buNone/>
-            </a:pPr>
-            <a:r>
-              <a:rPr lang="en-US" sz="900" dirty="0">
-                <a:solidFill>
-                  <a:srgbClr val="5A6478"/>
-                </a:solidFill>
-                <a:latin typeface="Calibri" pitchFamily="34" charset="0"/>
-                <a:ea typeface="Calibri" pitchFamily="34" charset="-122"/>
-                <a:cs typeface="Calibri" pitchFamily="34" charset="-120"/>
-              </a:rPr>
-              <a:t>Preliminaries</a:t>
-            </a:r>
-            <a:endParaRPr lang="en-US" sz="900" dirty="0"/>
-          </a:p>
-        </p:txBody>
-      </p:sp>
-      <p:sp>
-        <p:nvSpPr>
-          <p:cNvPr id="4" name="Shape 2"/>
-          <p:cNvSpPr/>
-          <p:nvPr/>
-        </p:nvSpPr>
-        <p:spPr>
-          <a:xfrm>
-            <a:off x="2841955" y="201168"/>
-            <a:ext cx="2073859" cy="502920"/>
-          </a:xfrm>
-          <a:prstGeom prst="roundRect">
-            <a:avLst>
-              <a:gd name="adj" fmla="val 9091"/>
-            </a:avLst>
-          </a:prstGeom>
-          <a:solidFill>
-            <a:srgbClr val="1E2761"/>
-          </a:solidFill>
-          <a:ln/>
-        </p:spPr>
-      </p:sp>
-      <p:sp>
-        <p:nvSpPr>
-          <p:cNvPr id="5" name="Text 3"/>
-          <p:cNvSpPr/>
-          <p:nvPr/>
-        </p:nvSpPr>
-        <p:spPr>
-          <a:xfrm>
-            <a:off x="2841955" y="201168"/>
-            <a:ext cx="2073859" cy="502920"/>
-          </a:xfrm>
-          <a:prstGeom prst="rect">
-            <a:avLst/>
-          </a:prstGeom>
-          <a:noFill/>
-          <a:ln/>
-        </p:spPr>
-        <p:txBody>
-          <a:bodyPr wrap="square" lIns="254" tIns="254" rIns="254" bIns="254" rtlCol="0" anchor="ctr"/>
-          <a:lstStyle/>
-          <a:p>
-            <a:pPr algn="ctr" indent="0" marL="0">
-              <a:buNone/>
-            </a:pPr>
-            <a:r>
-              <a:rPr lang="en-US" sz="900" b="1" dirty="0">
-                <a:solidFill>
-                  <a:srgbClr val="FFFFFF"/>
-                </a:solidFill>
-                <a:latin typeface="Calibri" pitchFamily="34" charset="0"/>
-                <a:ea typeface="Calibri" pitchFamily="34" charset="-122"/>
-                <a:cs typeface="Calibri" pitchFamily="34" charset="-120"/>
-              </a:rPr>
-              <a:t>Demo:</a:t>
-            </a:r>
-            <a:endParaRPr lang="en-US" sz="900" dirty="0"/>
-          </a:p>
-          <a:p>
-            <a:pPr algn="ctr" indent="0" marL="0">
-              <a:buNone/>
-            </a:pPr>
-            <a:r>
-              <a:rPr lang="en-US" sz="900" b="1" dirty="0">
-                <a:solidFill>
-                  <a:srgbClr val="FFFFFF"/>
-                </a:solidFill>
-                <a:latin typeface="Calibri" pitchFamily="34" charset="0"/>
-                <a:ea typeface="Calibri" pitchFamily="34" charset="-122"/>
-                <a:cs typeface="Calibri" pitchFamily="34" charset="-120"/>
-              </a:rPr>
-              <a:t>Isolette (SysMLv2 → Rust)</a:t>
-            </a:r>
-            <a:endParaRPr lang="en-US" sz="900" dirty="0"/>
-          </a:p>
-        </p:txBody>
-      </p:sp>
-      <p:sp>
-        <p:nvSpPr>
-          <p:cNvPr id="6" name="Shape 4"/>
-          <p:cNvSpPr/>
-          <p:nvPr/>
-        </p:nvSpPr>
-        <p:spPr>
-          <a:xfrm>
-            <a:off x="5043830" y="201168"/>
-            <a:ext cx="2073859" cy="502920"/>
-          </a:xfrm>
-          <a:prstGeom prst="roundRect">
-            <a:avLst>
-              <a:gd name="adj" fmla="val 9091"/>
-            </a:avLst>
-          </a:prstGeom>
-          <a:solidFill>
-            <a:srgbClr val="E4EAF4"/>
-          </a:solidFill>
-          <a:ln/>
-        </p:spPr>
-      </p:sp>
-      <p:sp>
-        <p:nvSpPr>
-          <p:cNvPr id="7" name="Text 5"/>
-          <p:cNvSpPr/>
-          <p:nvPr/>
-        </p:nvSpPr>
-        <p:spPr>
-          <a:xfrm>
-            <a:off x="5043830" y="201168"/>
-            <a:ext cx="2073859" cy="502920"/>
-          </a:xfrm>
-          <a:prstGeom prst="rect">
-            <a:avLst/>
-          </a:prstGeom>
-          <a:noFill/>
-          <a:ln/>
-        </p:spPr>
-        <p:txBody>
-          <a:bodyPr wrap="square" lIns="254" tIns="254" rIns="254" bIns="254" rtlCol="0" anchor="ctr"/>
-          <a:lstStyle/>
-          <a:p>
-            <a:pPr algn="ctr" indent="0" marL="0">
-              <a:buNone/>
-            </a:pPr>
-            <a:r>
-              <a:rPr lang="en-US" sz="900" dirty="0">
-                <a:solidFill>
-                  <a:srgbClr val="5A6478"/>
-                </a:solidFill>
-                <a:latin typeface="Calibri" pitchFamily="34" charset="0"/>
-                <a:ea typeface="Calibri" pitchFamily="34" charset="-122"/>
-                <a:cs typeface="Calibri" pitchFamily="34" charset="-120"/>
-              </a:rPr>
-              <a:t>Other Ecosystems</a:t>
-            </a:r>
-            <a:endParaRPr lang="en-US" sz="900" dirty="0"/>
-          </a:p>
-        </p:txBody>
-      </p:sp>
-      <p:sp>
-        <p:nvSpPr>
-          <p:cNvPr id="8" name="Shape 6"/>
-          <p:cNvSpPr/>
-          <p:nvPr/>
-        </p:nvSpPr>
-        <p:spPr>
-          <a:xfrm>
-            <a:off x="7245706" y="201168"/>
-            <a:ext cx="2073859" cy="502920"/>
-          </a:xfrm>
-          <a:prstGeom prst="roundRect">
-            <a:avLst>
-              <a:gd name="adj" fmla="val 9091"/>
-            </a:avLst>
-          </a:prstGeom>
-          <a:solidFill>
-            <a:srgbClr val="E4EAF4"/>
-          </a:solidFill>
-          <a:ln/>
-        </p:spPr>
-      </p:sp>
-      <p:sp>
-        <p:nvSpPr>
-          <p:cNvPr id="9" name="Text 7"/>
-          <p:cNvSpPr/>
-          <p:nvPr/>
-        </p:nvSpPr>
-        <p:spPr>
-          <a:xfrm>
-            <a:off x="7245706" y="201168"/>
-            <a:ext cx="2073859" cy="502920"/>
-          </a:xfrm>
-          <a:prstGeom prst="rect">
-            <a:avLst/>
-          </a:prstGeom>
-          <a:noFill/>
-          <a:ln/>
-        </p:spPr>
-        <p:txBody>
-          <a:bodyPr wrap="square" lIns="254" tIns="254" rIns="254" bIns="254" rtlCol="0" anchor="ctr"/>
-          <a:lstStyle/>
-          <a:p>
-            <a:pPr algn="ctr" indent="0" marL="0">
-              <a:buNone/>
-            </a:pPr>
-            <a:r>
-              <a:rPr lang="en-US" sz="900" dirty="0">
-                <a:solidFill>
-                  <a:srgbClr val="5A6478"/>
-                </a:solidFill>
-                <a:latin typeface="Calibri" pitchFamily="34" charset="0"/>
-                <a:ea typeface="Calibri" pitchFamily="34" charset="-122"/>
-                <a:cs typeface="Calibri" pitchFamily="34" charset="-120"/>
-              </a:rPr>
-              <a:t>AI in the Loop</a:t>
-            </a:r>
-            <a:endParaRPr lang="en-US" sz="900" dirty="0"/>
-          </a:p>
-        </p:txBody>
-      </p:sp>
-      <p:sp>
-        <p:nvSpPr>
-          <p:cNvPr id="10" name="Shape 8"/>
-          <p:cNvSpPr/>
-          <p:nvPr/>
-        </p:nvSpPr>
-        <p:spPr>
-          <a:xfrm>
-            <a:off x="9447581" y="201168"/>
-            <a:ext cx="2073859" cy="502920"/>
-          </a:xfrm>
-          <a:prstGeom prst="roundRect">
-            <a:avLst>
-              <a:gd name="adj" fmla="val 9091"/>
-            </a:avLst>
-          </a:prstGeom>
-          <a:solidFill>
-            <a:srgbClr val="E4EAF4"/>
-          </a:solidFill>
-          <a:ln/>
-        </p:spPr>
-      </p:sp>
-      <p:sp>
-        <p:nvSpPr>
-          <p:cNvPr id="11" name="Text 9"/>
-          <p:cNvSpPr/>
-          <p:nvPr/>
-        </p:nvSpPr>
-        <p:spPr>
-          <a:xfrm>
-            <a:off x="9447581" y="201168"/>
-            <a:ext cx="2073859" cy="502920"/>
-          </a:xfrm>
-          <a:prstGeom prst="rect">
-            <a:avLst/>
-          </a:prstGeom>
-          <a:noFill/>
-          <a:ln/>
-        </p:spPr>
-        <p:txBody>
-          <a:bodyPr wrap="square" lIns="254" tIns="254" rIns="254" bIns="254" rtlCol="0" anchor="ctr"/>
-          <a:lstStyle/>
-          <a:p>
-            <a:pPr algn="ctr" indent="0" marL="0">
-              <a:buNone/>
-            </a:pPr>
-            <a:r>
-              <a:rPr lang="en-US" sz="900" dirty="0">
-                <a:solidFill>
-                  <a:srgbClr val="5A6478"/>
-                </a:solidFill>
-                <a:latin typeface="Calibri" pitchFamily="34" charset="0"/>
-                <a:ea typeface="Calibri" pitchFamily="34" charset="-122"/>
-                <a:cs typeface="Calibri" pitchFamily="34" charset="-120"/>
-              </a:rPr>
-              <a:t>Close</a:t>
-            </a:r>
-            <a:endParaRPr lang="en-US" sz="900" dirty="0"/>
-          </a:p>
-        </p:txBody>
-      </p:sp>
-      <p:sp>
-        <p:nvSpPr>
-          <p:cNvPr id="12" name="Text 10"/>
+          <p:cNvPr id="2" name="Text 0"/>
           <p:cNvSpPr/>
           <p:nvPr/>
         </p:nvSpPr>
@@ -21669,7 +19452,7 @@
       </p:sp>
       <p:sp>
         <p:nvSpPr>
-          <p:cNvPr id="13" name="Text 11"/>
+          <p:cNvPr id="3" name="Text 1"/>
           <p:cNvSpPr/>
           <p:nvPr/>
         </p:nvSpPr>
@@ -21708,7 +19491,7 @@
       </p:sp>
       <p:sp>
         <p:nvSpPr>
-          <p:cNvPr id="14" name="Text 12"/>
+          <p:cNvPr id="4" name="Text 2"/>
           <p:cNvSpPr/>
           <p:nvPr/>
         </p:nvSpPr>
@@ -21747,7 +19530,7 @@
       </p:sp>
       <p:sp>
         <p:nvSpPr>
-          <p:cNvPr id="15" name="Text 13"/>
+          <p:cNvPr id="5" name="Text 3"/>
           <p:cNvSpPr/>
           <p:nvPr/>
         </p:nvSpPr>
@@ -21803,7 +19586,7 @@
       </p:sp>
       <p:sp>
         <p:nvSpPr>
-          <p:cNvPr id="16" name="Text 14"/>
+          <p:cNvPr id="6" name="Text 4"/>
           <p:cNvSpPr/>
           <p:nvPr/>
         </p:nvSpPr>
@@ -21842,7 +19625,7 @@
       </p:sp>
       <p:sp>
         <p:nvSpPr>
-          <p:cNvPr id="17" name="Shape 15"/>
+          <p:cNvPr id="7" name="Shape 5"/>
           <p:cNvSpPr/>
           <p:nvPr/>
         </p:nvSpPr>
@@ -21869,7 +19652,7 @@
       </p:sp>
       <p:sp>
         <p:nvSpPr>
-          <p:cNvPr id="18" name="Text 16"/>
+          <p:cNvPr id="8" name="Text 6"/>
           <p:cNvSpPr/>
           <p:nvPr/>
         </p:nvSpPr>

--- a/docs/video_slides_draft.pptx
+++ b/docs/video_slides_draft.pptx
@@ -25,9 +25,12 @@
     <p:sldId id="273" r:id="rId19"/>
     <p:sldId id="274" r:id="rId20"/>
     <p:sldId id="275" r:id="rId21"/>
+    <p:sldId id="276" r:id="rId22"/>
+    <p:sldId id="277" r:id="rId23"/>
+    <p:sldId id="278" r:id="rId24"/>
   </p:sldIdLst>
   <p:notesMasterIdLst>
-    <p:notesMasterId r:id="rId22"/>
+    <p:notesMasterId r:id="rId25"/>
   </p:notesMasterIdLst>
   <p:sldSz cx="12192000" cy="6858000"/>
   <p:notesSz cx="6858000" cy="12192000"/>
@@ -609,7 +612,7 @@
           <a:p>
             <a:r>
               <a:rPr lang="en-US" dirty="0"/>
-              <a:t>Single benign beat (per user deck edit, restored 2026-08-27): the Table A-12 upper-alarm ceiling widened 102 -&gt; 103 in the shared GUMBO library constant. Beats: appraisal fails, gumbo_library attributed, all else green (dwell: 'sanction, not semantics') -&gt; ruling diff -&gt; bless -&gt; spec-first green -&gt; promote (real codegen; speed-ramp) -&gt; re-proves ALL GREEN; offered diff = the regenerated shared-library constant. The breaking spec beat lives elsewhere (breaking-impl is Act V/scene 2, breaking-contract is Act IV/scene 14), so Act II stays the clean benign-model story.
+              <a:t>Beats: readiness gate green -&gt; one full episode -&gt; per-crate checklist all green. Dwell on the final checklist - it is the frame every later refusal is compared against.
 Watch-for line doubles as the VO opener over the terminal cut. Full runbook: docs/video_recording_plan.md.</a:t>
             </a:r>
             <a:endParaRPr lang="en-US" dirty="0"/>
@@ -698,7 +701,7 @@
           <a:p>
             <a:r>
               <a:rPr lang="en-US" dirty="0"/>
-              <a:t>Beats: equivalent NORMAL-mode guard rewrite (x&gt;y -&gt; y&lt;x), outside every marker block -&gt; l1a hash moves -&gt; files entry passes via l2 refinement (slices intact) -&gt; the l1b contracts entry stays clean -&gt; confirmation chain RE-VERIFIES the rewrite green. The mirror of Act II's benign spec beat, one artifact class down: a developer-owned region has no blessed bytes to match, so its attested properties are contracts (intact) + provability (re-verified live).
+              <a:t>Single benign beat (per user deck edit, restored 2026-08-27): the Table A-12 upper-alarm ceiling widened 102 -&gt; 103 in the shared GUMBO library constant. Beats: appraisal fails, gumbo_library attributed, all else green (dwell: 'sanction, not semantics') -&gt; ruling diff -&gt; bless -&gt; spec-first green -&gt; promote (real codegen; speed-ramp) -&gt; re-proves ALL GREEN; offered diff = the regenerated shared-library constant. The breaking spec beat lives elsewhere (breaking-impl is Act V/scene 2, breaking-contract is Act IV/scene 14), so Act II stays the clean benign-model story.
 Watch-for line doubles as the VO opener over the terminal cut. Full runbook: docs/video_recording_plan.md.</a:t>
             </a:r>
             <a:endParaRPr lang="en-US" dirty="0"/>
@@ -787,7 +790,7 @@
           <a:p>
             <a:r>
               <a:rPr lang="en-US" dirty="0"/>
-              <a:t>The report emits NO slice for compute_cases realizations, so the weakened REQ_MHS_2 lands between l2 slices. Beats: launder (weaken REQ_MHS_2 ensures + invert impl) -&gt; cargo-verus SUCCEEDS (self-consistent) -&gt; the l1b MARKER tier (a new Copland protocol: readfile_marker_range over every contract-block byte) refuses -&gt; its repair rung splices the golden contract back -&gt; the restored TRUE contract refutes the still-inverted impl: end on the exposed Verus refusal (verus_targ Appraisal was not successful). Discovered while building this demo; the marker-coverage lint now enforces the invariant. Do NOT auto-repair to green - the exposure IS the beat; the impl repair is Act V's ladder. Slide-C candidate row.
+              <a:t>Beats: equivalent NORMAL-mode guard rewrite (x&gt;y -&gt; y&lt;x), outside every marker block -&gt; l1a hash moves -&gt; files entry passes via l2 refinement (slices intact) -&gt; the l1b contracts entry stays clean -&gt; confirmation chain RE-VERIFIES the rewrite green. The mirror of Act II's benign spec beat, one artifact class down: a developer-owned region has no blessed bytes to match, so its attested properties are contracts (intact) + provability (re-verified live).
 Watch-for line doubles as the VO opener over the terminal cut. Full runbook: docs/video_recording_plan.md.</a:t>
             </a:r>
             <a:endParaRPr lang="en-US" dirty="0"/>
@@ -876,7 +879,7 @@
           <a:p>
             <a:r>
               <a:rPr lang="en-US" dirty="0"/>
-              <a:t>Beats: dummy-bad-impl diff (take the [v]iew - VSCode diff D1 on camera) -&gt; contracts-intact rung exhausts -&gt; impl rung restores crate-scoped -&gt; restart -&gt; re-attested clean.
+              <a:t>The report emits NO slice for compute_cases realizations, so the weakened REQ_MHS_2 lands between l2 slices. Beats: launder (weaken REQ_MHS_2 ensures + invert impl) -&gt; cargo-verus SUCCEEDS (self-consistent) -&gt; the l1b MARKER tier (a new Copland protocol: readfile_marker_range over every contract-block byte) refuses -&gt; its repair rung splices the golden contract back -&gt; the restored TRUE contract refutes the still-inverted impl: end on the exposed Verus refusal (verus_targ Appraisal was not successful). Discovered while building this demo; the marker-coverage lint now enforces the invariant. Do NOT auto-repair to green - the exposure IS the beat; the impl repair is Act V's ladder. Slide-C candidate row.
 Watch-for line doubles as the VO opener over the terminal cut. Full runbook: docs/video_recording_plan.md.</a:t>
             </a:r>
             <a:endParaRPr lang="en-US" dirty="0"/>
@@ -965,7 +968,7 @@
           <a:p>
             <a:r>
               <a:rPr lang="en-US" dirty="0"/>
-              <a:t>Scene 6 beats: three tampers, three attributed refusals (signature -&gt; anchor -&gt; derivability); optionally the flipped-evidence-byte diff on camera. Scene 7 beats: wrapper edit (take the [v]iew, diff D10) -&gt; readiness still passes -&gt; tool hash refutes, every proof cell poisons to ? - dwell, this is the act's money shot. --restore-tools recovery in VO only.
+              <a:t>Beats: dummy-bad-impl diff (take the [v]iew - VSCode diff D1 on camera) -&gt; contracts-intact rung exhausts -&gt; impl rung restores crate-scoped -&gt; restart -&gt; re-attested clean.
 Watch-for line doubles as the VO opener over the terminal cut. Full runbook: docs/video_recording_plan.md.</a:t>
             </a:r>
             <a:endParaRPr lang="en-US" dirty="0"/>
@@ -1054,7 +1057,7 @@
           <a:p>
             <a:r>
               <a:rPr lang="en-US" dirty="0"/>
-              <a:t>The detector escalation that closes the demo. BEAT 1 (scene 9, axioms): two-grid view - the verus grid all green (cargo-verus succeeds) beside the proof-escape grid refusing the exact crate and naming the construct (ADMIT: assume 0-&gt;1; SMUGGLE: broadcast 0-&gt;1, external_body 0-&gt;1). The CHEAT SCAN catches what the outcome cannot - a construct appeared. BEAT 2 (scene 12, FFI): the heat command inverted behind external_body (diff D18) -&gt; every proof passes AND the cheat scan is SILENT (no construct) -&gt; only the GENSRC byte anchor refuses, naming the file -&gt; diagnosis rung classifies -&gt; repair by regeneration (speed-ramp). Three detectors, three blind spots: outcome (blind to both), construct scan (catches beat 1), byte anchor (catches beat 2). Close naming scenes 10-11 (slide C carries the rest).
+              <a:t>Scene 6 beats: three tampers, three attributed refusals (signature -&gt; anchor -&gt; derivability); optionally the flipped-evidence-byte diff on camera. Scene 7 beats: wrapper edit (take the [v]iew, diff D10) -&gt; readiness still passes -&gt; tool hash refutes, every proof cell poisons to ? - dwell, this is the act's money shot. --restore-tools recovery in VO only.
 Watch-for line doubles as the VO opener over the terminal cut. Full runbook: docs/video_recording_plan.md.</a:t>
             </a:r>
             <a:endParaRPr lang="en-US" dirty="0"/>
@@ -1143,7 +1146,8 @@
           <a:p>
             <a:r>
               <a:rPr lang="en-US" dirty="0"/>
-              <a:t>High-level breadth slide (section 3 opener) - card grid, per user edits 2026-08-30. Four artifact pipelines: the isolette (SysML-&gt;HAMR-&gt;Rust/Verus, the demo, highlighted), AADL-&gt;HAMR-&gt;Slang/Logika (temp-control), standalone Rust/Verus (find-max-verus; AutoVerus + KU Dogtreat repair experiments), and the interactive theorem provers Lean &amp; Rocq (blessed statements, tactic/LLM repair). Title = the artifact pipeline; caption = example system(s). Repair-strategy breadth lands per-card where it defines the ecosystem.</a:t>
+              <a:t>The detector escalation that closes the demo. BEAT 1 (scene 9, axioms): two-grid view - the verus grid all green (cargo-verus succeeds) beside the proof-escape grid refusing the exact crate and naming the construct (ADMIT: assume 0-&gt;1; SMUGGLE: broadcast 0-&gt;1, external_body 0-&gt;1). The CHEAT SCAN catches what the outcome cannot - a construct appeared. BEAT 2 (scene 12, FFI): the heat command inverted behind external_body (diff D18) -&gt; every proof passes AND the cheat scan is SILENT (no construct) -&gt; only the GENSRC byte anchor refuses, naming the file -&gt; diagnosis rung classifies -&gt; repair by regeneration (speed-ramp). Three detectors, three blind spots: outcome (blind to both), construct scan (catches beat 1), byte anchor (catches beat 2). Close naming scenes 10-11 (slide C carries the rest).
+Watch-for line doubles as the VO opener over the terminal cut. Full runbook: docs/video_recording_plan.md.</a:t>
             </a:r>
             <a:endParaRPr lang="en-US" dirty="0"/>
           </a:p>
@@ -1231,10 +1235,7 @@
           <a:p>
             <a:r>
               <a:rPr lang="en-US" dirty="0"/>
-              <a:t>Capstone slide 1 of 3 (theme: 'AI in the loop' as the big title, a descriptive caption beneath - B and C reuse the header).
-One idea: AI helps everywhere EXCEPT the judges. The top three stages (model, implementation, proofs) are AI-assisted; the bottom two (verification/appraisal, evidence/trust state) are AI-free by design - the shaded band.
-The Proofs row is where the repair-strategy breadth lands (deferred from the ecosystems slide): tactic portfolio, LLM (API + desktop sessions), AutoVerus, KU Dogtreat linear planner.
-Motivation flip (speaker, sets up the close): as more lifecycle artifacts ARE AI-generated, lifecycle attestation is what makes them trustworthy - provenance and evidence, not provider assurances.</a:t>
+              <a:t>Section transition: ~5 seconds, then the ecosystems card grid.</a:t>
             </a:r>
             <a:endParaRPr lang="en-US" dirty="0"/>
           </a:p>
@@ -1322,10 +1323,7 @@
           <a:p>
             <a:r>
               <a:rPr lang="en-US" dirty="0"/>
-              <a:t>Capstone slide 2 of 3 (theme: 'AI in the loop' big title + caption). The one idea: AI built the entire attestation stack, and that stack is held to the same measured discipline it enforces.
-Counts current 2026-08-30: 12 new + 7 upgraded asp-libs binaries (git-attested, separate repo); 42 provisioned Copland protocol dirs (the newest, the l1b marker tier, was built in this very session - a callback available if wanted); 7 red-team attack classes.
-cvm-mcp aside (15 s): an AI-built MCP interface so AI agents can drive attestation - AI both built the loop and can drive it.
-Git provenance deliberately de-emphasized per user; the point is the self-application (the reflexive footer), not the Co-Authored-By trailers.</a:t>
+              <a:t>High-level breadth slide (section 3 opener) - card grid, per user edits 2026-08-30. Four artifact pipelines: the isolette (SysML-&gt;HAMR-&gt;Rust/Verus, the demo, highlighted), AADL-&gt;HAMR-&gt;Slang/Logika (temp-control), standalone Rust/Verus (find-max-verus; AutoVerus + KU Dogtreat repair experiments), and the interactive theorem provers Lean &amp; Rocq (blessed statements, tactic/LLM repair). Title = the artifact pipeline; caption = example system(s). Repair-strategy breadth lands per-card where it defines the ecosystem.</a:t>
             </a:r>
             <a:endParaRPr lang="en-US" dirty="0"/>
           </a:p>
@@ -1413,11 +1411,7 @@
           <a:p>
             <a:r>
               <a:rPr lang="en-US" dirty="0"/>
-              <a:t>Capstone slide 3 of 3 (title 'AI attacked the loop'). The same sessions red-teamed the stack they built; every attack was green across every EXISTING tier when found, and each forced a new measurement capability - defense-in-depth measured into existence.
-7 attacks -&gt; 4 measurement capabilities: cheat scan (ADMIT, SMUGGLE), sysproof file hashes (SHRINK, SWAP), gensrc measurement (STALE, INVERT), and the l1b marker tier + coverage lint (LAUNDER, highlighted - found this session).
-STALE vs INVERT are two different blind spots of 'verification succeeded': STALE = a stale cached verdict (verified over old bytes); INVERT = unverified code out of the proof's scope. Same detector (gensrc bytes), different evasion.
-LAUNDER is the reflexive one: it exposed a COVERAGE gap in the measurement itself (the report emits no compute_cases slice), so it forced a detector PLUS a provisioning invariant. Root cause is upstream (HAMR report emission) - see draft_hamr_report_contract_coverage.md.
-Speaker: the escalating lesson of 9-&gt;12 is that 'verification succeeded' and 'no cheats present' are both weaker claims than 'these are the blessed bytes.'</a:t>
+              <a:t>Section transition: ~5 seconds, then the three capstone slides.</a:t>
             </a:r>
             <a:endParaRPr lang="en-US" dirty="0"/>
           </a:p>
@@ -1505,8 +1499,8 @@
           <a:p>
             <a:r>
               <a:rPr lang="en-US" dirty="0"/>
-              <a:t>~15 seconds on first appearance; afterwards it rides on transition slides for free.
-Design decision: one master/layout holds the strip text so a section rename is a single edit. Header titles are provisional.</a:t>
+              <a:t>~15 seconds on first appearance; the same slide reprises before each later section with that section highlighted (deck positions 8, 17, 19).
+Design decision: one generator function holds the strip so a section rename is a single edit. Header titles are provisional.</a:t>
             </a:r>
             <a:endParaRPr lang="en-US" dirty="0"/>
           </a:p>
@@ -1594,8 +1588,10 @@
           <a:p>
             <a:r>
               <a:rPr lang="en-US" dirty="0"/>
-              <a:t>Collection point for every reference in the deck - keep this slide current as sections are added. Numbers follow first on-slide citation ([1] on the lifecycle slide; [2]-[6] on the core-stack slide; [7]-[13] on the isolette slide); groupings kept, so numbers read out of order here on purpose.
-DOIs on record in docs/video_slide_drafts.md.</a:t>
+              <a:t>Capstone slide 1 of 3 (theme: 'AI in the loop' as the big title, a descriptive caption beneath - B and C reuse the header).
+One idea: AI helps everywhere EXCEPT the judges. The top three stages (model, implementation, proofs) are AI-assisted; the bottom two (verification/appraisal, evidence/trust state) are AI-free by design - the shaded band.
+The Proofs row is where the repair-strategy breadth lands (deferred from the ecosystems slide): tactic portfolio, LLM (API + desktop sessions), AutoVerus, KU Dogtreat linear planner.
+Motivation flip (speaker, sets up the close): as more lifecycle artifacts ARE AI-generated, lifecycle attestation is what makes them trustworthy - provenance and evidence, not provider assurances.</a:t>
             </a:r>
             <a:endParaRPr lang="en-US" dirty="0"/>
           </a:p>
@@ -1619,6 +1615,278 @@
             <a:fld id="{F7021451-1387-4CA6-816F-3879F97B5CBC}" type="slidenum">
               <a:rPr lang="en-US"/>
               <a:t>20</a:t>
+            </a:fld>
+            <a:endParaRPr lang="en-US"/>
+          </a:p>
+        </p:txBody>
+      </p:sp>
+    </p:spTree>
+    <p:extLst>
+      <p:ext uri="{BB962C8B-B14F-4D97-AF65-F5344CB8AC3E}">
+        <p14:creationId xmlns:p14="http://schemas.microsoft.com/office/powerpoint/2010/main" val="1024086991"/>
+      </p:ext>
+    </p:extLst>
+  </p:cSld>
+  <p:clrMapOvr>
+    <a:masterClrMapping/>
+  </p:clrMapOvr>
+</p:notes>
+</file>
+
+<file path=ppt/notesSlides/notesSlide21.xml><?xml version="1.0" encoding="utf-8"?>
+<p:notes xmlns:a="http://schemas.openxmlformats.org/drawingml/2006/main" xmlns:r="http://schemas.openxmlformats.org/officeDocument/2006/relationships" xmlns:p="http://schemas.openxmlformats.org/presentationml/2006/main">
+  <p:cSld>
+    <p:spTree>
+      <p:nvGrpSpPr>
+        <p:cNvPr id="1" name=""/>
+        <p:cNvGrpSpPr/>
+        <p:nvPr/>
+      </p:nvGrpSpPr>
+      <p:grpSpPr>
+        <a:xfrm>
+          <a:off x="0" y="0"/>
+          <a:ext cx="0" cy="0"/>
+          <a:chOff x="0" y="0"/>
+          <a:chExt cx="0" cy="0"/>
+        </a:xfrm>
+      </p:grpSpPr>
+      <p:sp>
+        <p:nvSpPr>
+          <p:cNvPr id="2" name="Slide Image Placeholder 1"/>
+          <p:cNvSpPr>
+            <a:spLocks noGrp="1" noRot="1" noChangeAspect="1"/>
+          </p:cNvSpPr>
+          <p:nvPr>
+            <p:ph type="sldImg"/>
+          </p:nvPr>
+        </p:nvSpPr>
+        <p:spPr/>
+      </p:sp>
+      <p:sp>
+        <p:nvSpPr>
+          <p:cNvPr id="3" name="Notes Placeholder 2"/>
+          <p:cNvSpPr>
+            <a:spLocks noGrp="1"/>
+          </p:cNvSpPr>
+          <p:nvPr>
+            <p:ph type="body" idx="1"/>
+          </p:nvPr>
+        </p:nvSpPr>
+        <p:spPr/>
+        <p:txBody>
+          <a:bodyPr/>
+          <a:lstStyle/>
+          <a:p>
+            <a:r>
+              <a:rPr lang="en-US" dirty="0"/>
+              <a:t>Capstone slide 2 of 3 (theme: 'AI in the loop' big title + caption). The one idea: AI built the entire attestation stack, and that stack is held to the same measured discipline it enforces.
+Counts current 2026-08-30: 12 new + 7 upgraded asp-libs binaries (git-attested, separate repo); 42 provisioned Copland protocol dirs (the newest, the l1b marker tier, was built in this very session - a callback available if wanted); 7 red-team attack classes.
+cvm-mcp aside (15 s): an AI-built MCP interface so AI agents can drive attestation - AI both built the loop and can drive it.
+Git provenance deliberately de-emphasized per user; the point is the self-application (the reflexive footer), not the Co-Authored-By trailers.</a:t>
+            </a:r>
+            <a:endParaRPr lang="en-US" dirty="0"/>
+          </a:p>
+        </p:txBody>
+      </p:sp>
+      <p:sp>
+        <p:nvSpPr>
+          <p:cNvPr id="4" name="Slide Number Placeholder 3"/>
+          <p:cNvSpPr>
+            <a:spLocks noGrp="1"/>
+          </p:cNvSpPr>
+          <p:nvPr>
+            <p:ph type="sldNum" sz="quarter" idx="10"/>
+          </p:nvPr>
+        </p:nvSpPr>
+        <p:spPr/>
+        <p:txBody>
+          <a:bodyPr/>
+          <a:lstStyle/>
+          <a:p>
+            <a:fld id="{F7021451-1387-4CA6-816F-3879F97B5CBC}" type="slidenum">
+              <a:rPr lang="en-US"/>
+              <a:t>21</a:t>
+            </a:fld>
+            <a:endParaRPr lang="en-US"/>
+          </a:p>
+        </p:txBody>
+      </p:sp>
+    </p:spTree>
+    <p:extLst>
+      <p:ext uri="{BB962C8B-B14F-4D97-AF65-F5344CB8AC3E}">
+        <p14:creationId xmlns:p14="http://schemas.microsoft.com/office/powerpoint/2010/main" val="1024086991"/>
+      </p:ext>
+    </p:extLst>
+  </p:cSld>
+  <p:clrMapOvr>
+    <a:masterClrMapping/>
+  </p:clrMapOvr>
+</p:notes>
+</file>
+
+<file path=ppt/notesSlides/notesSlide22.xml><?xml version="1.0" encoding="utf-8"?>
+<p:notes xmlns:a="http://schemas.openxmlformats.org/drawingml/2006/main" xmlns:r="http://schemas.openxmlformats.org/officeDocument/2006/relationships" xmlns:p="http://schemas.openxmlformats.org/presentationml/2006/main">
+  <p:cSld>
+    <p:spTree>
+      <p:nvGrpSpPr>
+        <p:cNvPr id="1" name=""/>
+        <p:cNvGrpSpPr/>
+        <p:nvPr/>
+      </p:nvGrpSpPr>
+      <p:grpSpPr>
+        <a:xfrm>
+          <a:off x="0" y="0"/>
+          <a:ext cx="0" cy="0"/>
+          <a:chOff x="0" y="0"/>
+          <a:chExt cx="0" cy="0"/>
+        </a:xfrm>
+      </p:grpSpPr>
+      <p:sp>
+        <p:nvSpPr>
+          <p:cNvPr id="2" name="Slide Image Placeholder 1"/>
+          <p:cNvSpPr>
+            <a:spLocks noGrp="1" noRot="1" noChangeAspect="1"/>
+          </p:cNvSpPr>
+          <p:nvPr>
+            <p:ph type="sldImg"/>
+          </p:nvPr>
+        </p:nvSpPr>
+        <p:spPr/>
+      </p:sp>
+      <p:sp>
+        <p:nvSpPr>
+          <p:cNvPr id="3" name="Notes Placeholder 2"/>
+          <p:cNvSpPr>
+            <a:spLocks noGrp="1"/>
+          </p:cNvSpPr>
+          <p:nvPr>
+            <p:ph type="body" idx="1"/>
+          </p:nvPr>
+        </p:nvSpPr>
+        <p:spPr/>
+        <p:txBody>
+          <a:bodyPr/>
+          <a:lstStyle/>
+          <a:p>
+            <a:r>
+              <a:rPr lang="en-US" dirty="0"/>
+              <a:t>Capstone slide 3 of 3 (title 'AI attacked the loop'). The same sessions red-teamed the stack they built; every attack was green across every EXISTING tier when found, and each forced a new measurement capability - defense-in-depth measured into existence.
+7 attacks -&gt; 4 measurement capabilities: cheat scan (ADMIT, SMUGGLE), sysproof file hashes (SHRINK, SWAP), gensrc measurement (STALE, INVERT), and the l1b marker tier + coverage lint (LAUNDER, highlighted - found this session).
+STALE vs INVERT are two different blind spots of 'verification succeeded': STALE = a stale cached verdict (verified over old bytes); INVERT = unverified code out of the proof's scope. Same detector (gensrc bytes), different evasion.
+LAUNDER is the reflexive one: it exposed a COVERAGE gap in the measurement itself (the report emits no compute_cases slice), so it forced a detector PLUS a provisioning invariant. Root cause is upstream (HAMR report emission) - see draft_hamr_report_contract_coverage.md.
+Speaker: the escalating lesson of 9-&gt;12 is that 'verification succeeded' and 'no cheats present' are both weaker claims than 'these are the blessed bytes.'</a:t>
+            </a:r>
+            <a:endParaRPr lang="en-US" dirty="0"/>
+          </a:p>
+        </p:txBody>
+      </p:sp>
+      <p:sp>
+        <p:nvSpPr>
+          <p:cNvPr id="4" name="Slide Number Placeholder 3"/>
+          <p:cNvSpPr>
+            <a:spLocks noGrp="1"/>
+          </p:cNvSpPr>
+          <p:nvPr>
+            <p:ph type="sldNum" sz="quarter" idx="10"/>
+          </p:nvPr>
+        </p:nvSpPr>
+        <p:spPr/>
+        <p:txBody>
+          <a:bodyPr/>
+          <a:lstStyle/>
+          <a:p>
+            <a:fld id="{F7021451-1387-4CA6-816F-3879F97B5CBC}" type="slidenum">
+              <a:rPr lang="en-US"/>
+              <a:t>22</a:t>
+            </a:fld>
+            <a:endParaRPr lang="en-US"/>
+          </a:p>
+        </p:txBody>
+      </p:sp>
+    </p:spTree>
+    <p:extLst>
+      <p:ext uri="{BB962C8B-B14F-4D97-AF65-F5344CB8AC3E}">
+        <p14:creationId xmlns:p14="http://schemas.microsoft.com/office/powerpoint/2010/main" val="1024086991"/>
+      </p:ext>
+    </p:extLst>
+  </p:cSld>
+  <p:clrMapOvr>
+    <a:masterClrMapping/>
+  </p:clrMapOvr>
+</p:notes>
+</file>
+
+<file path=ppt/notesSlides/notesSlide23.xml><?xml version="1.0" encoding="utf-8"?>
+<p:notes xmlns:a="http://schemas.openxmlformats.org/drawingml/2006/main" xmlns:r="http://schemas.openxmlformats.org/officeDocument/2006/relationships" xmlns:p="http://schemas.openxmlformats.org/presentationml/2006/main">
+  <p:cSld>
+    <p:spTree>
+      <p:nvGrpSpPr>
+        <p:cNvPr id="1" name=""/>
+        <p:cNvGrpSpPr/>
+        <p:nvPr/>
+      </p:nvGrpSpPr>
+      <p:grpSpPr>
+        <a:xfrm>
+          <a:off x="0" y="0"/>
+          <a:ext cx="0" cy="0"/>
+          <a:chOff x="0" y="0"/>
+          <a:chExt cx="0" cy="0"/>
+        </a:xfrm>
+      </p:grpSpPr>
+      <p:sp>
+        <p:nvSpPr>
+          <p:cNvPr id="2" name="Slide Image Placeholder 1"/>
+          <p:cNvSpPr>
+            <a:spLocks noGrp="1" noRot="1" noChangeAspect="1"/>
+          </p:cNvSpPr>
+          <p:nvPr>
+            <p:ph type="sldImg"/>
+          </p:nvPr>
+        </p:nvSpPr>
+        <p:spPr/>
+      </p:sp>
+      <p:sp>
+        <p:nvSpPr>
+          <p:cNvPr id="3" name="Notes Placeholder 2"/>
+          <p:cNvSpPr>
+            <a:spLocks noGrp="1"/>
+          </p:cNvSpPr>
+          <p:nvPr>
+            <p:ph type="body" idx="1"/>
+          </p:nvPr>
+        </p:nvSpPr>
+        <p:spPr/>
+        <p:txBody>
+          <a:bodyPr/>
+          <a:lstStyle/>
+          <a:p>
+            <a:r>
+              <a:rPr lang="en-US" dirty="0"/>
+              <a:t>Collection point for every reference in the deck - keep this slide current as sections are added. Numbers follow first on-slide citation ([1] on the lifecycle slide; [2]-[6] on the core-stack slide; [7]-[13] on the isolette slide); groupings kept, so numbers read out of order here on purpose.
+DOIs on record in docs/video_slide_drafts.md.</a:t>
+            </a:r>
+            <a:endParaRPr lang="en-US" dirty="0"/>
+          </a:p>
+        </p:txBody>
+      </p:sp>
+      <p:sp>
+        <p:nvSpPr>
+          <p:cNvPr id="4" name="Slide Number Placeholder 3"/>
+          <p:cNvSpPr>
+            <a:spLocks noGrp="1"/>
+          </p:cNvSpPr>
+          <p:nvPr>
+            <p:ph type="sldNum" sz="quarter" idx="10"/>
+          </p:nvPr>
+        </p:nvSpPr>
+        <p:spPr/>
+        <p:txBody>
+          <a:bodyPr/>
+          <a:lstStyle/>
+          <a:p>
+            <a:fld id="{F7021451-1387-4CA6-816F-3879F97B5CBC}" type="slidenum">
+              <a:rPr lang="en-US"/>
+              <a:t>23</a:t>
             </a:fld>
             <a:endParaRPr lang="en-US"/>
           </a:p>
@@ -2138,11 +2406,7 @@
           <a:p>
             <a:r>
               <a:rPr lang="en-US" dirty="0"/>
-              <a:t>This slide IS the section transition into the demo (strip: Demo segment highlighted).
-The tiers callout is the bridge: these keys are the glossary's entry keys, and every checklist row in the scenes is one of them.
-Spoken line on the why-beat: 'the table you just saw, instantiated.'
-Held back on purpose (scene 9's reveal): cheat-tier depth stats - 86 blessed external_body sites, 10 scanned crates.
-Numbers verified exact 2026-08-25 (l1a targets, l2 slices, verus term, pub-proof-fn count); provision-dependent - re-verify before recording day.</a:t>
+              <a:t>Section transition into the demo: ~5 seconds, then straight into the isolette slide.</a:t>
             </a:r>
             <a:endParaRPr lang="en-US" dirty="0"/>
           </a:p>
@@ -2230,8 +2494,11 @@
           <a:p>
             <a:r>
               <a:rPr lang="en-US" dirty="0"/>
-              <a:t>Beats: readiness gate green -&gt; one full episode -&gt; per-crate checklist all green. Dwell on the final checklist - it is the frame every later refusal is compared against.
-Watch-for line doubles as the VO opener over the terminal cut. Full runbook: docs/video_recording_plan.md.</a:t>
+              <a:t>This slide IS the section transition into the demo (strip: Demo segment highlighted).
+The tiers callout is the bridge: these keys are the glossary's entry keys, and every checklist row in the scenes is one of them.
+Spoken line on the why-beat: 'the table you just saw, instantiated.'
+Held back on purpose (scene 9's reveal): cheat-tier depth stats - 86 blessed external_body sites, 10 scanned crates.
+Numbers verified exact 2026-08-25 (l1a targets, l2 slices, verus term, pub-proof-fn count); provision-dependent - re-verify before recording day.</a:t>
             </a:r>
             <a:endParaRPr lang="en-US" dirty="0"/>
           </a:p>
@@ -3343,7 +3610,7 @@
                 <a:ea typeface="Calibri" pitchFamily="34" charset="-122"/>
                 <a:cs typeface="Calibri" pitchFamily="34" charset="-120"/>
               </a:rPr>
-              <a:t>ACT II</a:t>
+              <a:t>ACT I</a:t>
             </a:r>
             <a:endParaRPr lang="en-US" sz="1800" dirty="0"/>
           </a:p>
@@ -3382,7 +3649,7 @@
                 <a:ea typeface="Cambria" pitchFamily="34" charset="-122"/>
                 <a:cs typeface="Cambria" pitchFamily="34" charset="-120"/>
               </a:rPr>
-              <a:t>Spec drift: benign, promote then re-verify</a:t>
+              <a:t>The consistent baseline</a:t>
             </a:r>
             <a:endParaRPr lang="en-US" sz="4000" dirty="0"/>
           </a:p>
@@ -3421,7 +3688,7 @@
                 <a:ea typeface="Calibri" pitchFamily="34" charset="-122"/>
                 <a:cs typeface="Calibri" pitchFamily="34" charset="-120"/>
               </a:rPr>
-              <a:t>Demo scene 3</a:t>
+              <a:t>Demo scene 1</a:t>
             </a:r>
             <a:endParaRPr lang="en-US" sz="1500" dirty="0"/>
           </a:p>
@@ -3460,7 +3727,24 @@
                 <a:ea typeface="Calibri" pitchFamily="34" charset="-122"/>
                 <a:cs typeface="Calibri" pitchFamily="34" charset="-120"/>
               </a:rPr>
-              <a:t>A benign change in requirements — the temperature alarm range widened — model appraisal fails quickly.  Administrator re-blesses new spec, all contract appraisals again pass.</a:t>
+              <a:t>All artifacts start in a “pass” state with integrity against golden values and </a:t>
+            </a:r>
+            <a:endParaRPr lang="en-US" sz="2000" dirty="0"/>
+          </a:p>
+          <a:p>
+            <a:pPr indent="0" marL="0">
+              <a:buNone/>
+            </a:pPr>
+            <a:r>
+              <a:rPr lang="en-US" sz="2000" i="1" dirty="0">
+                <a:solidFill>
+                  <a:srgbClr val="212121"/>
+                </a:solidFill>
+                <a:latin typeface="Calibri" pitchFamily="34" charset="0"/>
+                <a:ea typeface="Calibri" pitchFamily="34" charset="-122"/>
+                <a:cs typeface="Calibri" pitchFamily="34" charset="-120"/>
+              </a:rPr>
+              <a:t>implementations meet their contracts.</a:t>
             </a:r>
             <a:endParaRPr lang="en-US" sz="2000" dirty="0"/>
           </a:p>
@@ -3499,7 +3783,107 @@
                 <a:ea typeface="Courier New" pitchFamily="34" charset="-122"/>
                 <a:cs typeface="Courier New" pitchFamily="34" charset="-120"/>
               </a:rPr>
-              <a:t>./examples/demo_isolette.sh --scenes 3 --drift range         (ruling at the prompt: bless)</a:t>
+              <a:t>./examples/demo_isolette.sh --scenes 1</a:t>
+            </a:r>
+            <a:endParaRPr lang="en-US" sz="1100" dirty="0"/>
+          </a:p>
+        </p:txBody>
+      </p:sp>
+      <p:sp>
+        <p:nvSpPr>
+          <p:cNvPr id="7" name="Shape 5"/>
+          <p:cNvSpPr/>
+          <p:nvPr/>
+        </p:nvSpPr>
+        <p:spPr>
+          <a:xfrm>
+            <a:off x="6172200" y="5660136"/>
+            <a:ext cx="2734056" cy="731520"/>
+          </a:xfrm>
+          <a:prstGeom prst="roundRect">
+            <a:avLst>
+              <a:gd name="adj" fmla="val 8750"/>
+            </a:avLst>
+          </a:prstGeom>
+          <a:solidFill>
+            <a:srgbClr val="F2F4F8"/>
+          </a:solidFill>
+          <a:ln w="12700">
+            <a:solidFill>
+              <a:srgbClr val="CADCFC"/>
+            </a:solidFill>
+            <a:prstDash val="solid"/>
+          </a:ln>
+        </p:spPr>
+      </p:sp>
+      <p:sp>
+        <p:nvSpPr>
+          <p:cNvPr id="8" name="Text 6"/>
+          <p:cNvSpPr/>
+          <p:nvPr/>
+        </p:nvSpPr>
+        <p:spPr>
+          <a:xfrm>
+            <a:off x="6309360" y="5660136"/>
+            <a:ext cx="2587752" cy="731520"/>
+          </a:xfrm>
+          <a:prstGeom prst="rect">
+            <a:avLst/>
+          </a:prstGeom>
+          <a:noFill/>
+          <a:ln/>
+        </p:spPr>
+        <p:txBody>
+          <a:bodyPr wrap="square" lIns="0" tIns="0" rIns="0" bIns="0" rtlCol="0" anchor="ctr"/>
+          <a:lstStyle/>
+          <a:p>
+            <a:pPr algn="l" indent="0" marL="0">
+              <a:buNone/>
+            </a:pPr>
+            <a:r>
+              <a:rPr lang="en-US" sz="1100" dirty="0">
+                <a:solidFill>
+                  <a:srgbClr val="212121"/>
+                </a:solidFill>
+                <a:latin typeface="Courier New" pitchFamily="34" charset="0"/>
+                <a:ea typeface="Courier New" pitchFamily="34" charset="-122"/>
+                <a:cs typeface="Courier New" pitchFamily="34" charset="-120"/>
+              </a:rPr>
+              <a:t>✓ attested   </a:t>
+            </a:r>
+            <a:endParaRPr lang="en-US" sz="1100" dirty="0"/>
+          </a:p>
+          <a:p>
+            <a:pPr algn="l" indent="0" marL="0">
+              <a:buNone/>
+            </a:pPr>
+            <a:r>
+              <a:rPr lang="en-US" sz="1100" dirty="0">
+                <a:solidFill>
+                  <a:srgbClr val="212121"/>
+                </a:solidFill>
+                <a:latin typeface="Courier New" pitchFamily="34" charset="0"/>
+                <a:ea typeface="Courier New" pitchFamily="34" charset="-122"/>
+                <a:cs typeface="Courier New" pitchFamily="34" charset="-120"/>
+              </a:rPr>
+              <a:t>✗ refuted</a:t>
+            </a:r>
+            <a:endParaRPr lang="en-US" sz="1100" dirty="0"/>
+          </a:p>
+          <a:p>
+            <a:pPr algn="l" indent="0" marL="0">
+              <a:buNone/>
+            </a:pPr>
+            <a:r>
+              <a:rPr lang="en-US" sz="1100" dirty="0">
+                <a:solidFill>
+                  <a:srgbClr val="212121"/>
+                </a:solidFill>
+                <a:latin typeface="Courier New" pitchFamily="34" charset="0"/>
+                <a:ea typeface="Courier New" pitchFamily="34" charset="-122"/>
+                <a:cs typeface="Courier New" pitchFamily="34" charset="-120"/>
+              </a:rPr>
+              <a:t>? poisoned (untrustworthy)</a:t>
             </a:r>
             <a:endParaRPr lang="en-US" sz="1100" dirty="0"/>
           </a:p>
@@ -3570,7 +3954,7 @@
                 <a:ea typeface="Calibri" pitchFamily="34" charset="-122"/>
                 <a:cs typeface="Calibri" pitchFamily="34" charset="-120"/>
               </a:rPr>
-              <a:t>ACT III</a:t>
+              <a:t>ACT II</a:t>
             </a:r>
             <a:endParaRPr lang="en-US" sz="1800" dirty="0"/>
           </a:p>
@@ -3609,7 +3993,7 @@
                 <a:ea typeface="Cambria" pitchFamily="34" charset="-122"/>
                 <a:cs typeface="Cambria" pitchFamily="34" charset="-120"/>
               </a:rPr>
-              <a:t>Implementation drift: benign, re-verify</a:t>
+              <a:t>Spec drift: benign, promote then re-verify</a:t>
             </a:r>
             <a:endParaRPr lang="en-US" sz="4000" dirty="0"/>
           </a:p>
@@ -3648,7 +4032,7 @@
                 <a:ea typeface="Calibri" pitchFamily="34" charset="-122"/>
                 <a:cs typeface="Calibri" pitchFamily="34" charset="-120"/>
               </a:rPr>
-              <a:t>Demo scene 13</a:t>
+              <a:t>Demo scene 3</a:t>
             </a:r>
             <a:endParaRPr lang="en-US" sz="1500" dirty="0"/>
           </a:p>
@@ -3687,38 +4071,7 @@
                 <a:ea typeface="Calibri" pitchFamily="34" charset="-122"/>
                 <a:cs typeface="Calibri" pitchFamily="34" charset="-120"/>
               </a:rPr>
-              <a:t>A developer rewrites semantically equivalent implementation logic.  The hash moves, but </a:t>
-            </a:r>
-            <a:endParaRPr lang="en-US" sz="2000" dirty="0"/>
-          </a:p>
-          <a:p>
-            <a:pPr indent="0" marL="0">
-              <a:buNone/>
-            </a:pPr>
-            <a:r>
-              <a:rPr lang="en-US" sz="2000" b="1" i="1" dirty="0">
-                <a:solidFill>
-                  <a:srgbClr val="212121"/>
-                </a:solidFill>
-                <a:latin typeface="Calibri" pitchFamily="34" charset="0"/>
-                <a:ea typeface="Calibri" pitchFamily="34" charset="-122"/>
-                <a:cs typeface="Calibri" pitchFamily="34" charset="-120"/>
-              </a:rPr>
-              <a:t>every contract slice maintains integrity</a:t>
-            </a:r>
-            <a:pPr indent="0" marL="0">
-              <a:buNone/>
-            </a:pPr>
-            <a:r>
-              <a:rPr lang="en-US" sz="2000" i="1" dirty="0">
-                <a:solidFill>
-                  <a:srgbClr val="212121"/>
-                </a:solidFill>
-                <a:latin typeface="Calibri" pitchFamily="34" charset="0"/>
-                <a:ea typeface="Calibri" pitchFamily="34" charset="-122"/>
-                <a:cs typeface="Calibri" pitchFamily="34" charset="-120"/>
-              </a:rPr>
-              <a:t>, and the proofs re-verify: the benign change survives.</a:t>
+              <a:t>A benign change in requirements — the temperature alarm range widened — model appraisal fails quickly.  Administrator re-blesses new spec, all contract appraisals again pass.</a:t>
             </a:r>
             <a:endParaRPr lang="en-US" sz="2000" dirty="0"/>
           </a:p>
@@ -3757,7 +4110,7 @@
                 <a:ea typeface="Courier New" pitchFamily="34" charset="-122"/>
                 <a:cs typeface="Courier New" pitchFamily="34" charset="-120"/>
               </a:rPr>
-              <a:t>./examples/demo_isolette.sh --scenes 13</a:t>
+              <a:t>./examples/demo_isolette.sh --scenes 3 --drift range         (ruling at the prompt: bless)</a:t>
             </a:r>
             <a:endParaRPr lang="en-US" sz="1100" dirty="0"/>
           </a:p>
@@ -3828,7 +4181,7 @@
                 <a:ea typeface="Calibri" pitchFamily="34" charset="-122"/>
                 <a:cs typeface="Calibri" pitchFamily="34" charset="-120"/>
               </a:rPr>
-              <a:t>ACT IV</a:t>
+              <a:t>ACT III</a:t>
             </a:r>
             <a:endParaRPr lang="en-US" sz="1800" dirty="0"/>
           </a:p>
@@ -3867,7 +4220,7 @@
                 <a:ea typeface="Cambria" pitchFamily="34" charset="-122"/>
                 <a:cs typeface="Cambria" pitchFamily="34" charset="-120"/>
               </a:rPr>
-              <a:t>Contract drift: breaking, restore then attempt re-verification</a:t>
+              <a:t>Implementation drift: benign, re-verify</a:t>
             </a:r>
             <a:endParaRPr lang="en-US" sz="4000" dirty="0"/>
           </a:p>
@@ -3881,7 +4234,7 @@
         </p:nvSpPr>
         <p:spPr>
           <a:xfrm>
-            <a:off x="822960" y="3236976"/>
+            <a:off x="822960" y="3154680"/>
             <a:ext cx="10515600" cy="411480"/>
           </a:xfrm>
           <a:prstGeom prst="rect">
@@ -3906,7 +4259,7 @@
                 <a:ea typeface="Calibri" pitchFamily="34" charset="-122"/>
                 <a:cs typeface="Calibri" pitchFamily="34" charset="-120"/>
               </a:rPr>
-              <a:t>Demo scene 14</a:t>
+              <a:t>Demo scene 13</a:t>
             </a:r>
             <a:endParaRPr lang="en-US" sz="1500" dirty="0"/>
           </a:p>
@@ -3945,8 +4298,11 @@
                 <a:ea typeface="Calibri" pitchFamily="34" charset="-122"/>
                 <a:cs typeface="Calibri" pitchFamily="34" charset="-120"/>
               </a:rPr>
-              <a:t>The model is untouched, but a live Verus contract is weakened (</a:t>
-            </a:r>
+              <a:t>A developer rewrites semantically equivalent implementation logic.  The hash moves, but </a:t>
+            </a:r>
+            <a:endParaRPr lang="en-US" sz="2000" dirty="0"/>
+          </a:p>
+          <a:p>
             <a:pPr indent="0" marL="0">
               <a:buNone/>
             </a:pPr>
@@ -3959,7 +4315,7 @@
                 <a:ea typeface="Calibri" pitchFamily="34" charset="-122"/>
                 <a:cs typeface="Calibri" pitchFamily="34" charset="-120"/>
               </a:rPr>
-              <a:t>after codegen, but before verification</a:t>
+              <a:t>every contract slice maintains integrity</a:t>
             </a:r>
             <a:pPr indent="0" marL="0">
               <a:buNone/>
@@ -3973,7 +4329,7 @@
                 <a:ea typeface="Calibri" pitchFamily="34" charset="-122"/>
                 <a:cs typeface="Calibri" pitchFamily="34" charset="-120"/>
               </a:rPr>
-              <a:t>) and the code is inverted to match — verus checks pass.  Contract repair (restoring the true Verus contract) exposes the verification failure.</a:t>
+              <a:t>, and the proofs re-verify: the benign change survives.</a:t>
             </a:r>
             <a:endParaRPr lang="en-US" sz="2000" dirty="0"/>
           </a:p>
@@ -4012,7 +4368,7 @@
                 <a:ea typeface="Courier New" pitchFamily="34" charset="-122"/>
                 <a:cs typeface="Courier New" pitchFamily="34" charset="-120"/>
               </a:rPr>
-              <a:t>./examples/demo_isolette.sh --scenes 14</a:t>
+              <a:t>./examples/demo_isolette.sh --scenes 13</a:t>
             </a:r>
             <a:endParaRPr lang="en-US" sz="1100" dirty="0"/>
           </a:p>
@@ -4083,7 +4439,7 @@
                 <a:ea typeface="Calibri" pitchFamily="34" charset="-122"/>
                 <a:cs typeface="Calibri" pitchFamily="34" charset="-120"/>
               </a:rPr>
-              <a:t>ACT V</a:t>
+              <a:t>ACT IV</a:t>
             </a:r>
             <a:endParaRPr lang="en-US" sz="1800" dirty="0"/>
           </a:p>
@@ -4122,7 +4478,7 @@
                 <a:ea typeface="Cambria" pitchFamily="34" charset="-122"/>
                 <a:cs typeface="Cambria" pitchFamily="34" charset="-120"/>
               </a:rPr>
-              <a:t>Implementation drift: breaking, diagnose then repair</a:t>
+              <a:t>Contract drift: breaking, restore then attempt re-verification</a:t>
             </a:r>
             <a:endParaRPr lang="en-US" sz="4000" dirty="0"/>
           </a:p>
@@ -4161,7 +4517,7 @@
                 <a:ea typeface="Calibri" pitchFamily="34" charset="-122"/>
                 <a:cs typeface="Calibri" pitchFamily="34" charset="-120"/>
               </a:rPr>
-              <a:t>Demo scene 2</a:t>
+              <a:t>Demo scene 14</a:t>
             </a:r>
             <a:endParaRPr lang="en-US" sz="1500" dirty="0"/>
           </a:p>
@@ -4200,7 +4556,7 @@
                 <a:ea typeface="Calibri" pitchFamily="34" charset="-122"/>
                 <a:cs typeface="Calibri" pitchFamily="34" charset="-120"/>
               </a:rPr>
-              <a:t>Implementation code (developer-owned) changes, breaking a Verus contract.  Blackboard loop diagnoses, repairs, then </a:t>
+              <a:t>The model is untouched, but a live Verus contract is weakened (</a:t>
             </a:r>
             <a:pPr indent="0" marL="0">
               <a:buNone/>
@@ -4214,7 +4570,7 @@
                 <a:ea typeface="Calibri" pitchFamily="34" charset="-122"/>
                 <a:cs typeface="Calibri" pitchFamily="34" charset="-120"/>
               </a:rPr>
-              <a:t>returns the artifact to good standing only by re-measurement</a:t>
+              <a:t>after codegen, but before verification</a:t>
             </a:r>
             <a:pPr indent="0" marL="0">
               <a:buNone/>
@@ -4228,7 +4584,7 @@
                 <a:ea typeface="Calibri" pitchFamily="34" charset="-122"/>
                 <a:cs typeface="Calibri" pitchFamily="34" charset="-120"/>
               </a:rPr>
-              <a:t>.</a:t>
+              <a:t>) and the code is inverted to match — verus checks pass.  Contract repair (restoring the true Verus contract) exposes the verification failure.</a:t>
             </a:r>
             <a:endParaRPr lang="en-US" sz="2000" dirty="0"/>
           </a:p>
@@ -4267,7 +4623,7 @@
                 <a:ea typeface="Courier New" pitchFamily="34" charset="-122"/>
                 <a:cs typeface="Courier New" pitchFamily="34" charset="-120"/>
               </a:rPr>
-              <a:t>./examples/demo_isolette.sh --scenes 2</a:t>
+              <a:t>./examples/demo_isolette.sh --scenes 14</a:t>
             </a:r>
             <a:endParaRPr lang="en-US" sz="1100" dirty="0"/>
           </a:p>
@@ -4338,7 +4694,7 @@
                 <a:ea typeface="Calibri" pitchFamily="34" charset="-122"/>
                 <a:cs typeface="Calibri" pitchFamily="34" charset="-120"/>
               </a:rPr>
-              <a:t>ACT VI</a:t>
+              <a:t>ACT V</a:t>
             </a:r>
             <a:endParaRPr lang="en-US" sz="1800" dirty="0"/>
           </a:p>
@@ -4377,7 +4733,7 @@
                 <a:ea typeface="Cambria" pitchFamily="34" charset="-122"/>
                 <a:cs typeface="Cambria" pitchFamily="34" charset="-120"/>
               </a:rPr>
-              <a:t>Baseline drift:  tampered evidence bundle, protocol, tooling</a:t>
+              <a:t>Implementation drift: breaking, diagnose then repair</a:t>
             </a:r>
             <a:endParaRPr lang="en-US" sz="4000" dirty="0"/>
           </a:p>
@@ -4416,7 +4772,7 @@
                 <a:ea typeface="Calibri" pitchFamily="34" charset="-122"/>
                 <a:cs typeface="Calibri" pitchFamily="34" charset="-120"/>
               </a:rPr>
-              <a:t>Demo scenes 6 + 7</a:t>
+              <a:t>Demo scene 2</a:t>
             </a:r>
             <a:endParaRPr lang="en-US" sz="1500" dirty="0"/>
           </a:p>
@@ -4455,7 +4811,7 @@
                 <a:ea typeface="Calibri" pitchFamily="34" charset="-122"/>
                 <a:cs typeface="Calibri" pitchFamily="34" charset="-120"/>
               </a:rPr>
-              <a:t>The signed golden evidence bundle, an installed (live) golden value in the appraisal protocol, then the verification tool itself — each tamper attributed, </a:t>
+              <a:t>Implementation code (developer-owned) changes, breaking a Verus contract.  Blackboard loop diagnoses, repairs, then </a:t>
             </a:r>
             <a:pPr indent="0" marL="0">
               <a:buNone/>
@@ -4469,7 +4825,7 @@
                 <a:ea typeface="Calibri" pitchFamily="34" charset="-122"/>
                 <a:cs typeface="Calibri" pitchFamily="34" charset="-120"/>
               </a:rPr>
-              <a:t>each refused by cryptographic checks</a:t>
+              <a:t>returns the artifact to good standing only by re-measurement</a:t>
             </a:r>
             <a:pPr indent="0" marL="0">
               <a:buNone/>
@@ -4522,7 +4878,7 @@
                 <a:ea typeface="Courier New" pitchFamily="34" charset="-122"/>
                 <a:cs typeface="Courier New" pitchFamily="34" charset="-120"/>
               </a:rPr>
-              <a:t>./examples/demo_isolette.sh --scenes "6 7"</a:t>
+              <a:t>./examples/demo_isolette.sh --scenes 2</a:t>
             </a:r>
             <a:endParaRPr lang="en-US" sz="1100" dirty="0"/>
           </a:p>
@@ -4593,7 +4949,7 @@
                 <a:ea typeface="Calibri" pitchFamily="34" charset="-122"/>
                 <a:cs typeface="Calibri" pitchFamily="34" charset="-120"/>
               </a:rPr>
-              <a:t>ACT VII</a:t>
+              <a:t>ACT VI</a:t>
             </a:r>
             <a:endParaRPr lang="en-US" sz="1800" dirty="0"/>
           </a:p>
@@ -4632,7 +4988,7 @@
                 <a:ea typeface="Cambria" pitchFamily="34" charset="-122"/>
                 <a:cs typeface="Cambria" pitchFamily="34" charset="-120"/>
               </a:rPr>
-              <a:t>Axiom drift:  semantic measurement detects axioms and unsound proof techniques</a:t>
+              <a:t>Baseline drift:  tampered evidence bundle, protocol, tooling</a:t>
             </a:r>
             <a:endParaRPr lang="en-US" sz="4000" dirty="0"/>
           </a:p>
@@ -4671,7 +5027,7 @@
                 <a:ea typeface="Calibri" pitchFamily="34" charset="-122"/>
                 <a:cs typeface="Calibri" pitchFamily="34" charset="-120"/>
               </a:rPr>
-              <a:t>Demo scenes 9 + 12</a:t>
+              <a:t>Demo scenes 6 + 7</a:t>
             </a:r>
             <a:endParaRPr lang="en-US" sz="1500" dirty="0"/>
           </a:p>
@@ -4710,7 +5066,7 @@
                 <a:ea typeface="Calibri" pitchFamily="34" charset="-122"/>
                 <a:cs typeface="Calibri" pitchFamily="34" charset="-120"/>
               </a:rPr>
-              <a:t>Proofs verify, but measurement detects </a:t>
+              <a:t>The signed golden evidence bundle, an installed (live) golden value in the appraisal protocol, then the verification tool itself — each tamper attributed, </a:t>
             </a:r>
             <a:pPr indent="0" marL="0">
               <a:buNone/>
@@ -4724,11 +5080,8 @@
                 <a:ea typeface="Calibri" pitchFamily="34" charset="-122"/>
                 <a:cs typeface="Calibri" pitchFamily="34" charset="-120"/>
               </a:rPr>
-              <a:t>subtle cheating in proof attempts, </a:t>
-            </a:r>
-            <a:endParaRPr lang="en-US" sz="2000" dirty="0"/>
-          </a:p>
-          <a:p>
+              <a:t>each refused by cryptographic checks</a:t>
+            </a:r>
             <a:pPr indent="0" marL="0">
               <a:buNone/>
             </a:pPr>
@@ -4741,7 +5094,7 @@
                 <a:ea typeface="Calibri" pitchFamily="34" charset="-122"/>
                 <a:cs typeface="Calibri" pitchFamily="34" charset="-120"/>
               </a:rPr>
-              <a:t>that would otherwise undermine verification soundness.</a:t>
+              <a:t>.</a:t>
             </a:r>
             <a:endParaRPr lang="en-US" sz="2000" dirty="0"/>
           </a:p>
@@ -4780,7 +5133,7 @@
                 <a:ea typeface="Courier New" pitchFamily="34" charset="-122"/>
                 <a:cs typeface="Courier New" pitchFamily="34" charset="-120"/>
               </a:rPr>
-              <a:t>./examples/demo_isolette.sh --scenes "9 12"</a:t>
+              <a:t>./examples/demo_isolette.sh --scenes "6 7"</a:t>
             </a:r>
             <a:endParaRPr lang="en-US" sz="1100" dirty="0"/>
           </a:p>
@@ -4826,8 +5179,8 @@
         </p:nvSpPr>
         <p:spPr>
           <a:xfrm>
-            <a:off x="640080" y="365760"/>
-            <a:ext cx="10972800" cy="640080"/>
+            <a:off x="822960" y="1828800"/>
+            <a:ext cx="10515600" cy="457200"/>
           </a:xfrm>
           <a:prstGeom prst="rect">
             <a:avLst/>
@@ -4843,7 +5196,46 @@
               <a:buNone/>
             </a:pPr>
             <a:r>
-              <a:rPr lang="en-US" sz="3400" b="1" dirty="0">
+              <a:rPr lang="en-US" sz="1800" b="1" spc="300" kern="0" dirty="0">
+                <a:solidFill>
+                  <a:srgbClr val="5A6478"/>
+                </a:solidFill>
+                <a:latin typeface="Calibri" pitchFamily="34" charset="0"/>
+                <a:ea typeface="Calibri" pitchFamily="34" charset="-122"/>
+                <a:cs typeface="Calibri" pitchFamily="34" charset="-120"/>
+              </a:rPr>
+              <a:t>ACT VII</a:t>
+            </a:r>
+            <a:endParaRPr lang="en-US" sz="1800" dirty="0"/>
+          </a:p>
+        </p:txBody>
+      </p:sp>
+      <p:sp>
+        <p:nvSpPr>
+          <p:cNvPr id="3" name="Text 1"/>
+          <p:cNvSpPr/>
+          <p:nvPr/>
+        </p:nvSpPr>
+        <p:spPr>
+          <a:xfrm>
+            <a:off x="822960" y="2286000"/>
+            <a:ext cx="10515600" cy="822960"/>
+          </a:xfrm>
+          <a:prstGeom prst="rect">
+            <a:avLst/>
+          </a:prstGeom>
+          <a:noFill/>
+          <a:ln/>
+        </p:spPr>
+        <p:txBody>
+          <a:bodyPr wrap="square" lIns="0" tIns="0" rIns="0" bIns="0" rtlCol="0" anchor="ctr"/>
+          <a:lstStyle/>
+          <a:p>
+            <a:pPr indent="0" marL="0">
+              <a:buNone/>
+            </a:pPr>
+            <a:r>
+              <a:rPr lang="en-US" sz="4000" b="1" dirty="0">
                 <a:solidFill>
                   <a:srgbClr val="1E2761"/>
                 </a:solidFill>
@@ -4851,22 +5243,22 @@
                 <a:ea typeface="Cambria" pitchFamily="34" charset="-122"/>
                 <a:cs typeface="Cambria" pitchFamily="34" charset="-120"/>
               </a:rPr>
-              <a:t>One blackboard, many artifact pipelines</a:t>
-            </a:r>
-            <a:endParaRPr lang="en-US" sz="3400" dirty="0"/>
+              <a:t>Axiom drift:  semantic measurement detects axioms and unsound proof techniques</a:t>
+            </a:r>
+            <a:endParaRPr lang="en-US" sz="4000" dirty="0"/>
           </a:p>
         </p:txBody>
       </p:sp>
       <p:sp>
         <p:nvSpPr>
-          <p:cNvPr id="3" name="Text 1"/>
-          <p:cNvSpPr/>
-          <p:nvPr/>
-        </p:nvSpPr>
-        <p:spPr>
-          <a:xfrm>
-            <a:off x="640080" y="1024128"/>
-            <a:ext cx="10972800" cy="457200"/>
+          <p:cNvPr id="4" name="Text 2"/>
+          <p:cNvSpPr/>
+          <p:nvPr/>
+        </p:nvSpPr>
+        <p:spPr>
+          <a:xfrm>
+            <a:off x="822960" y="3236976"/>
+            <a:ext cx="10515600" cy="411480"/>
           </a:xfrm>
           <a:prstGeom prst="rect">
             <a:avLst/>
@@ -4884,95 +5276,28 @@
             <a:r>
               <a:rPr lang="en-US" sz="1500" i="1" dirty="0">
                 <a:solidFill>
-                  <a:srgbClr val="212121"/>
-                </a:solidFill>
-                <a:latin typeface="Calibri" pitchFamily="34" charset="0"/>
-                <a:ea typeface="Calibri" pitchFamily="34" charset="-122"/>
-                <a:cs typeface="Calibri" pitchFamily="34" charset="-120"/>
-              </a:rPr>
-              <a:t>The blackboard infrastructure and artifact classes don’t change — only the </a:t>
-            </a:r>
-            <a:pPr indent="0" marL="0">
-              <a:buNone/>
-            </a:pPr>
-            <a:r>
-              <a:rPr lang="en-US" sz="1500" b="1" i="1" dirty="0">
-                <a:solidFill>
-                  <a:srgbClr val="212121"/>
-                </a:solidFill>
-                <a:latin typeface="Calibri" pitchFamily="34" charset="0"/>
-                <a:ea typeface="Calibri" pitchFamily="34" charset="-122"/>
-                <a:cs typeface="Calibri" pitchFamily="34" charset="-120"/>
-              </a:rPr>
-              <a:t>pipeline around them does</a:t>
-            </a:r>
-            <a:pPr indent="0" marL="0">
-              <a:buNone/>
-            </a:pPr>
-            <a:r>
-              <a:rPr lang="en-US" sz="1500" i="1" dirty="0">
-                <a:solidFill>
-                  <a:srgbClr val="212121"/>
-                </a:solidFill>
-                <a:latin typeface="Calibri" pitchFamily="34" charset="0"/>
-                <a:ea typeface="Calibri" pitchFamily="34" charset="-122"/>
-                <a:cs typeface="Calibri" pitchFamily="34" charset="-120"/>
-              </a:rPr>
-              <a:t>: modeling language, prover, </a:t>
+                  <a:srgbClr val="5A6478"/>
+                </a:solidFill>
+                <a:latin typeface="Calibri" pitchFamily="34" charset="0"/>
+                <a:ea typeface="Calibri" pitchFamily="34" charset="-122"/>
+                <a:cs typeface="Calibri" pitchFamily="34" charset="-120"/>
+              </a:rPr>
+              <a:t>Demo scenes 9 + 12</a:t>
             </a:r>
             <a:endParaRPr lang="en-US" sz="1500" dirty="0"/>
           </a:p>
-          <a:p>
-            <a:pPr indent="0" marL="0">
-              <a:buNone/>
-            </a:pPr>
-            <a:r>
-              <a:rPr lang="en-US" sz="1500" i="1" dirty="0">
-                <a:solidFill>
-                  <a:srgbClr val="212121"/>
-                </a:solidFill>
-                <a:latin typeface="Calibri" pitchFamily="34" charset="0"/>
-                <a:ea typeface="Calibri" pitchFamily="34" charset="-122"/>
-                <a:cs typeface="Calibri" pitchFamily="34" charset="-120"/>
-              </a:rPr>
-              <a:t>target runtime, and attestation primitives.</a:t>
-            </a:r>
-            <a:endParaRPr lang="en-US" sz="1500" dirty="0"/>
-          </a:p>
         </p:txBody>
       </p:sp>
       <p:sp>
         <p:nvSpPr>
-          <p:cNvPr id="4" name="Shape 2"/>
-          <p:cNvSpPr/>
-          <p:nvPr/>
-        </p:nvSpPr>
-        <p:spPr>
-          <a:xfrm>
-            <a:off x="640080" y="1645920"/>
-            <a:ext cx="5349240" cy="2148840"/>
-          </a:xfrm>
-          <a:prstGeom prst="roundRect">
-            <a:avLst>
-              <a:gd name="adj" fmla="val 2553"/>
-            </a:avLst>
-          </a:prstGeom>
-          <a:solidFill>
-            <a:srgbClr val="1E2761"/>
-          </a:solidFill>
-          <a:ln/>
-        </p:spPr>
-      </p:sp>
-      <p:sp>
-        <p:nvSpPr>
           <p:cNvPr id="5" name="Text 3"/>
           <p:cNvSpPr/>
           <p:nvPr/>
         </p:nvSpPr>
         <p:spPr>
           <a:xfrm>
-            <a:off x="868680" y="1755648"/>
-            <a:ext cx="4892040" cy="329184"/>
+            <a:off x="822960" y="3977640"/>
+            <a:ext cx="10241280" cy="1280160"/>
           </a:xfrm>
           <a:prstGeom prst="rect">
             <a:avLst/>
@@ -4984,21 +5309,52 @@
           <a:bodyPr wrap="square" lIns="0" tIns="0" rIns="0" bIns="0" rtlCol="0" anchor="ctr"/>
           <a:lstStyle/>
           <a:p>
-            <a:pPr algn="l" indent="0" marL="0">
-              <a:buNone/>
-            </a:pPr>
-            <a:r>
-              <a:rPr lang="en-US" sz="1550" b="1" dirty="0">
-                <a:solidFill>
-                  <a:srgbClr val="FFFFFF"/>
-                </a:solidFill>
-                <a:latin typeface="Calibri" pitchFamily="34" charset="0"/>
-                <a:ea typeface="Calibri" pitchFamily="34" charset="-122"/>
-                <a:cs typeface="Calibri" pitchFamily="34" charset="-120"/>
-              </a:rPr>
-              <a:t>SysML v2 → HAMR → Rust / Verus</a:t>
-            </a:r>
-            <a:endParaRPr lang="en-US" sz="1550" dirty="0"/>
+            <a:pPr indent="0" marL="0">
+              <a:buNone/>
+            </a:pPr>
+            <a:r>
+              <a:rPr lang="en-US" sz="2000" i="1" dirty="0">
+                <a:solidFill>
+                  <a:srgbClr val="212121"/>
+                </a:solidFill>
+                <a:latin typeface="Calibri" pitchFamily="34" charset="0"/>
+                <a:ea typeface="Calibri" pitchFamily="34" charset="-122"/>
+                <a:cs typeface="Calibri" pitchFamily="34" charset="-120"/>
+              </a:rPr>
+              <a:t>Proofs verify, but measurement detects </a:t>
+            </a:r>
+            <a:pPr indent="0" marL="0">
+              <a:buNone/>
+            </a:pPr>
+            <a:r>
+              <a:rPr lang="en-US" sz="2000" b="1" i="1" dirty="0">
+                <a:solidFill>
+                  <a:srgbClr val="212121"/>
+                </a:solidFill>
+                <a:latin typeface="Calibri" pitchFamily="34" charset="0"/>
+                <a:ea typeface="Calibri" pitchFamily="34" charset="-122"/>
+                <a:cs typeface="Calibri" pitchFamily="34" charset="-120"/>
+              </a:rPr>
+              <a:t>subtle cheating in proof attempts, </a:t>
+            </a:r>
+            <a:endParaRPr lang="en-US" sz="2000" dirty="0"/>
+          </a:p>
+          <a:p>
+            <a:pPr indent="0" marL="0">
+              <a:buNone/>
+            </a:pPr>
+            <a:r>
+              <a:rPr lang="en-US" sz="2000" i="1" dirty="0">
+                <a:solidFill>
+                  <a:srgbClr val="212121"/>
+                </a:solidFill>
+                <a:latin typeface="Calibri" pitchFamily="34" charset="0"/>
+                <a:ea typeface="Calibri" pitchFamily="34" charset="-122"/>
+                <a:cs typeface="Calibri" pitchFamily="34" charset="-120"/>
+              </a:rPr>
+              <a:t>that would otherwise undermine verification soundness.</a:t>
+            </a:r>
+            <a:endParaRPr lang="en-US" sz="2000" dirty="0"/>
           </a:p>
         </p:txBody>
       </p:sp>
@@ -5010,8 +5366,8 @@
         </p:nvSpPr>
         <p:spPr>
           <a:xfrm>
-            <a:off x="877824" y="2103120"/>
-            <a:ext cx="4892040" cy="256032"/>
+            <a:off x="822960" y="6053328"/>
+            <a:ext cx="10515600" cy="603504"/>
           </a:xfrm>
           <a:prstGeom prst="rect">
             <a:avLst/>
@@ -5023,755 +5379,21 @@
           <a:bodyPr wrap="square" lIns="0" tIns="0" rIns="0" bIns="0" rtlCol="0" anchor="ctr"/>
           <a:lstStyle/>
           <a:p>
-            <a:pPr algn="l" indent="0" marL="0">
-              <a:buNone/>
-            </a:pPr>
-            <a:r>
-              <a:rPr lang="en-US" sz="1050" i="1" dirty="0">
-                <a:solidFill>
-                  <a:srgbClr val="CADCFC"/>
-                </a:solidFill>
-                <a:latin typeface="Calibri" pitchFamily="34" charset="0"/>
-                <a:ea typeface="Calibri" pitchFamily="34" charset="-122"/>
-                <a:cs typeface="Calibri" pitchFamily="34" charset="-120"/>
-              </a:rPr>
-              <a:t>isolette</a:t>
-            </a:r>
-            <a:pPr algn="l" indent="0" marL="0">
-              <a:buNone/>
-            </a:pPr>
-            <a:r>
-              <a:rPr lang="en-US" sz="1050" b="1" i="1" dirty="0">
-                <a:solidFill>
-                  <a:srgbClr val="CADCFC"/>
-                </a:solidFill>
-                <a:latin typeface="Calibri" pitchFamily="34" charset="0"/>
-                <a:ea typeface="Calibri" pitchFamily="34" charset="-122"/>
-                <a:cs typeface="Calibri" pitchFamily="34" charset="-120"/>
-              </a:rPr>
-              <a:t>   ◀ the demo</a:t>
-            </a:r>
-            <a:endParaRPr lang="en-US" sz="1050" dirty="0"/>
-          </a:p>
-        </p:txBody>
-      </p:sp>
-      <p:sp>
-        <p:nvSpPr>
-          <p:cNvPr id="7" name="Text 5"/>
-          <p:cNvSpPr/>
-          <p:nvPr/>
-        </p:nvSpPr>
-        <p:spPr>
-          <a:xfrm>
-            <a:off x="914400" y="2423160"/>
-            <a:ext cx="4846320" cy="1252728"/>
-          </a:xfrm>
-          <a:prstGeom prst="rect">
-            <a:avLst/>
-          </a:prstGeom>
-          <a:noFill/>
-          <a:ln/>
-        </p:spPr>
-        <p:txBody>
-          <a:bodyPr wrap="square" lIns="0" tIns="0" rIns="0" bIns="0" rtlCol="0" anchor="t"/>
-          <a:lstStyle/>
-          <a:p>
-            <a:pPr algn="l" marL="342900" indent="-342900">
-              <a:spcAft>
-                <a:spcPts val="400"/>
-              </a:spcAft>
-              <a:buSzPct val="100000"/>
-              <a:buChar char="•"/>
-            </a:pPr>
-            <a:r>
-              <a:rPr lang="en-US" sz="1200" dirty="0">
-                <a:solidFill>
-                  <a:srgbClr val="CADCFC"/>
-                </a:solidFill>
-                <a:latin typeface="Calibri" pitchFamily="34" charset="0"/>
-                <a:ea typeface="Calibri" pitchFamily="34" charset="-122"/>
-                <a:cs typeface="Calibri" pitchFamily="34" charset="-120"/>
-              </a:rPr>
-              <a:t>SysMLv2 GUMBO component contracts</a:t>
-            </a:r>
-            <a:endParaRPr lang="en-US" sz="1200" dirty="0"/>
-          </a:p>
-          <a:p>
-            <a:pPr algn="l" marL="342900" indent="-342900">
-              <a:spcAft>
-                <a:spcPts val="400"/>
-              </a:spcAft>
-              <a:buSzPct val="100000"/>
-              <a:buChar char="•"/>
-            </a:pPr>
-            <a:r>
-              <a:rPr lang="en-US" sz="1200" dirty="0">
-                <a:solidFill>
-                  <a:srgbClr val="CADCFC"/>
-                </a:solidFill>
-                <a:latin typeface="Calibri" pitchFamily="34" charset="0"/>
-                <a:ea typeface="Calibri" pitchFamily="34" charset="-122"/>
-                <a:cs typeface="Calibri" pitchFamily="34" charset="-120"/>
-              </a:rPr>
-              <a:t>seL4 / Microkit runtime target</a:t>
-            </a:r>
-            <a:endParaRPr lang="en-US" sz="1200" dirty="0"/>
-          </a:p>
-          <a:p>
-            <a:pPr algn="l" marL="342900" indent="-342900">
-              <a:spcAft>
-                <a:spcPts val="400"/>
-              </a:spcAft>
-              <a:buSzPct val="100000"/>
-              <a:buChar char="•"/>
-            </a:pPr>
-            <a:r>
-              <a:rPr lang="en-US" sz="1200" dirty="0">
-                <a:solidFill>
-                  <a:srgbClr val="CADCFC"/>
-                </a:solidFill>
-                <a:latin typeface="Calibri" pitchFamily="34" charset="0"/>
-                <a:ea typeface="Calibri" pitchFamily="34" charset="-122"/>
-                <a:cs typeface="Calibri" pitchFamily="34" charset="-120"/>
-              </a:rPr>
-              <a:t>Every artifact class measured</a:t>
-            </a:r>
-            <a:endParaRPr lang="en-US" sz="1200" dirty="0"/>
-          </a:p>
-        </p:txBody>
-      </p:sp>
-      <p:sp>
-        <p:nvSpPr>
-          <p:cNvPr id="8" name="Shape 6"/>
-          <p:cNvSpPr/>
-          <p:nvPr/>
-        </p:nvSpPr>
-        <p:spPr>
-          <a:xfrm>
-            <a:off x="6263640" y="1645920"/>
-            <a:ext cx="5349240" cy="2148840"/>
-          </a:xfrm>
-          <a:prstGeom prst="roundRect">
-            <a:avLst>
-              <a:gd name="adj" fmla="val 2553"/>
-            </a:avLst>
-          </a:prstGeom>
-          <a:solidFill>
-            <a:srgbClr val="F2F4F8"/>
-          </a:solidFill>
-          <a:ln w="12700">
-            <a:solidFill>
-              <a:srgbClr val="CADCFC"/>
-            </a:solidFill>
-            <a:prstDash val="solid"/>
-          </a:ln>
-        </p:spPr>
-      </p:sp>
-      <p:sp>
-        <p:nvSpPr>
-          <p:cNvPr id="9" name="Text 7"/>
-          <p:cNvSpPr/>
-          <p:nvPr/>
-        </p:nvSpPr>
-        <p:spPr>
-          <a:xfrm>
-            <a:off x="6492240" y="1755648"/>
-            <a:ext cx="4892040" cy="329184"/>
-          </a:xfrm>
-          <a:prstGeom prst="rect">
-            <a:avLst/>
-          </a:prstGeom>
-          <a:noFill/>
-          <a:ln/>
-        </p:spPr>
-        <p:txBody>
-          <a:bodyPr wrap="square" lIns="0" tIns="0" rIns="0" bIns="0" rtlCol="0" anchor="ctr"/>
-          <a:lstStyle/>
-          <a:p>
-            <a:pPr algn="l" indent="0" marL="0">
-              <a:buNone/>
-            </a:pPr>
-            <a:r>
-              <a:rPr lang="en-US" sz="1550" b="1" dirty="0">
-                <a:solidFill>
-                  <a:srgbClr val="1E2761"/>
-                </a:solidFill>
-                <a:latin typeface="Calibri" pitchFamily="34" charset="0"/>
-                <a:ea typeface="Calibri" pitchFamily="34" charset="-122"/>
-                <a:cs typeface="Calibri" pitchFamily="34" charset="-120"/>
-              </a:rPr>
-              <a:t>AADL → HAMR → Slang / Logika</a:t>
-            </a:r>
-            <a:endParaRPr lang="en-US" sz="1550" dirty="0"/>
-          </a:p>
-        </p:txBody>
-      </p:sp>
-      <p:sp>
-        <p:nvSpPr>
-          <p:cNvPr id="10" name="Text 8"/>
-          <p:cNvSpPr/>
-          <p:nvPr/>
-        </p:nvSpPr>
-        <p:spPr>
-          <a:xfrm>
-            <a:off x="6501384" y="2103120"/>
-            <a:ext cx="4892040" cy="256032"/>
-          </a:xfrm>
-          <a:prstGeom prst="rect">
-            <a:avLst/>
-          </a:prstGeom>
-          <a:noFill/>
-          <a:ln/>
-        </p:spPr>
-        <p:txBody>
-          <a:bodyPr wrap="square" lIns="0" tIns="0" rIns="0" bIns="0" rtlCol="0" anchor="ctr"/>
-          <a:lstStyle/>
-          <a:p>
-            <a:pPr algn="l" indent="0" marL="0">
-              <a:buNone/>
-            </a:pPr>
-            <a:r>
-              <a:rPr lang="en-US" sz="1050" i="1" dirty="0">
+            <a:pPr indent="0" marL="0">
+              <a:buNone/>
+            </a:pPr>
+            <a:r>
+              <a:rPr lang="en-US" sz="1100" dirty="0">
                 <a:solidFill>
                   <a:srgbClr val="5A6478"/>
                 </a:solidFill>
-                <a:latin typeface="Calibri" pitchFamily="34" charset="0"/>
-                <a:ea typeface="Calibri" pitchFamily="34" charset="-122"/>
-                <a:cs typeface="Calibri" pitchFamily="34" charset="-120"/>
-              </a:rPr>
-              <a:t>temp-control</a:t>
-            </a:r>
-            <a:endParaRPr lang="en-US" sz="1050" dirty="0"/>
-          </a:p>
-        </p:txBody>
-      </p:sp>
-      <p:sp>
-        <p:nvSpPr>
-          <p:cNvPr id="11" name="Text 9"/>
-          <p:cNvSpPr/>
-          <p:nvPr/>
-        </p:nvSpPr>
-        <p:spPr>
-          <a:xfrm>
-            <a:off x="6537960" y="2423160"/>
-            <a:ext cx="4846320" cy="1252728"/>
-          </a:xfrm>
-          <a:prstGeom prst="rect">
-            <a:avLst/>
-          </a:prstGeom>
-          <a:noFill/>
-          <a:ln/>
-        </p:spPr>
-        <p:txBody>
-          <a:bodyPr wrap="square" lIns="0" tIns="0" rIns="0" bIns="0" rtlCol="0" anchor="t"/>
-          <a:lstStyle/>
-          <a:p>
-            <a:pPr algn="l" marL="342900" indent="-342900">
-              <a:spcAft>
-                <a:spcPts val="400"/>
-              </a:spcAft>
-              <a:buSzPct val="100000"/>
-              <a:buChar char="•"/>
-            </a:pPr>
-            <a:r>
-              <a:rPr lang="en-US" sz="1200" dirty="0">
-                <a:solidFill>
-                  <a:srgbClr val="212121"/>
-                </a:solidFill>
-                <a:latin typeface="Calibri" pitchFamily="34" charset="0"/>
-                <a:ea typeface="Calibri" pitchFamily="34" charset="-122"/>
-                <a:cs typeface="Calibri" pitchFamily="34" charset="-120"/>
-              </a:rPr>
-              <a:t>AADL GUMBO component contracts</a:t>
-            </a:r>
-            <a:endParaRPr lang="en-US" sz="1200" dirty="0"/>
-          </a:p>
-          <a:p>
-            <a:pPr algn="l" marL="342900" indent="-342900">
-              <a:spcAft>
-                <a:spcPts val="400"/>
-              </a:spcAft>
-              <a:buSzPct val="100000"/>
-              <a:buChar char="•"/>
-            </a:pPr>
-            <a:r>
-              <a:rPr lang="en-US" sz="1200" dirty="0">
-                <a:solidFill>
-                  <a:srgbClr val="212121"/>
-                </a:solidFill>
-                <a:latin typeface="Calibri" pitchFamily="34" charset="0"/>
-                <a:ea typeface="Calibri" pitchFamily="34" charset="-122"/>
-                <a:cs typeface="Calibri" pitchFamily="34" charset="-120"/>
-              </a:rPr>
-              <a:t>JVM runtime target</a:t>
-            </a:r>
-            <a:endParaRPr lang="en-US" sz="1200" dirty="0"/>
-          </a:p>
-          <a:p>
-            <a:pPr algn="l" marL="342900" indent="-342900">
-              <a:spcAft>
-                <a:spcPts val="400"/>
-              </a:spcAft>
-              <a:buSzPct val="100000"/>
-              <a:buChar char="•"/>
-            </a:pPr>
-            <a:r>
-              <a:rPr lang="en-US" sz="1200" dirty="0">
-                <a:solidFill>
-                  <a:srgbClr val="212121"/>
-                </a:solidFill>
-                <a:latin typeface="Calibri" pitchFamily="34" charset="0"/>
-                <a:ea typeface="Calibri" pitchFamily="34" charset="-122"/>
-                <a:cs typeface="Calibri" pitchFamily="34" charset="-120"/>
-              </a:rPr>
-              <a:t>Same blackboard, similar Copland protocols to SysMLv2 pipeline</a:t>
-            </a:r>
-            <a:endParaRPr lang="en-US" sz="1200" dirty="0"/>
-          </a:p>
-        </p:txBody>
-      </p:sp>
-      <p:sp>
-        <p:nvSpPr>
-          <p:cNvPr id="12" name="Shape 10"/>
-          <p:cNvSpPr/>
-          <p:nvPr/>
-        </p:nvSpPr>
-        <p:spPr>
-          <a:xfrm>
-            <a:off x="640080" y="4069080"/>
-            <a:ext cx="5349240" cy="2148840"/>
-          </a:xfrm>
-          <a:prstGeom prst="roundRect">
-            <a:avLst>
-              <a:gd name="adj" fmla="val 2553"/>
-            </a:avLst>
-          </a:prstGeom>
-          <a:solidFill>
-            <a:srgbClr val="F2F4F8"/>
-          </a:solidFill>
-          <a:ln w="12700">
-            <a:solidFill>
-              <a:srgbClr val="CADCFC"/>
-            </a:solidFill>
-            <a:prstDash val="solid"/>
-          </a:ln>
-        </p:spPr>
-      </p:sp>
-      <p:sp>
-        <p:nvSpPr>
-          <p:cNvPr id="13" name="Text 11"/>
-          <p:cNvSpPr/>
-          <p:nvPr/>
-        </p:nvSpPr>
-        <p:spPr>
-          <a:xfrm>
-            <a:off x="868680" y="4178808"/>
-            <a:ext cx="4892040" cy="329184"/>
-          </a:xfrm>
-          <a:prstGeom prst="rect">
-            <a:avLst/>
-          </a:prstGeom>
-          <a:noFill/>
-          <a:ln/>
-        </p:spPr>
-        <p:txBody>
-          <a:bodyPr wrap="square" lIns="0" tIns="0" rIns="0" bIns="0" rtlCol="0" anchor="ctr"/>
-          <a:lstStyle/>
-          <a:p>
-            <a:pPr algn="l" indent="0" marL="0">
-              <a:buNone/>
-            </a:pPr>
-            <a:r>
-              <a:rPr lang="en-US" sz="1550" b="1" dirty="0">
-                <a:solidFill>
-                  <a:srgbClr val="1E2761"/>
-                </a:solidFill>
-                <a:latin typeface="Calibri" pitchFamily="34" charset="0"/>
-                <a:ea typeface="Calibri" pitchFamily="34" charset="-122"/>
-                <a:cs typeface="Calibri" pitchFamily="34" charset="-120"/>
-              </a:rPr>
-              <a:t>Standalone Rust / Verus</a:t>
-            </a:r>
-            <a:endParaRPr lang="en-US" sz="1550" dirty="0"/>
-          </a:p>
-        </p:txBody>
-      </p:sp>
-      <p:sp>
-        <p:nvSpPr>
-          <p:cNvPr id="14" name="Text 12"/>
-          <p:cNvSpPr/>
-          <p:nvPr/>
-        </p:nvSpPr>
-        <p:spPr>
-          <a:xfrm>
-            <a:off x="877824" y="4526280"/>
-            <a:ext cx="4892040" cy="256032"/>
-          </a:xfrm>
-          <a:prstGeom prst="rect">
-            <a:avLst/>
-          </a:prstGeom>
-          <a:noFill/>
-          <a:ln/>
-        </p:spPr>
-        <p:txBody>
-          <a:bodyPr wrap="square" lIns="0" tIns="0" rIns="0" bIns="0" rtlCol="0" anchor="ctr"/>
-          <a:lstStyle/>
-          <a:p>
-            <a:pPr algn="l" indent="0" marL="0">
-              <a:buNone/>
-            </a:pPr>
-            <a:r>
-              <a:rPr lang="en-US" sz="1050" i="1" dirty="0">
-                <a:solidFill>
-                  <a:srgbClr val="5A6478"/>
-                </a:solidFill>
-                <a:latin typeface="Calibri" pitchFamily="34" charset="0"/>
-                <a:ea typeface="Calibri" pitchFamily="34" charset="-122"/>
-                <a:cs typeface="Calibri" pitchFamily="34" charset="-120"/>
-              </a:rPr>
-              <a:t>find-max-verus</a:t>
-            </a:r>
-            <a:endParaRPr lang="en-US" sz="1050" dirty="0"/>
-          </a:p>
-        </p:txBody>
-      </p:sp>
-      <p:sp>
-        <p:nvSpPr>
-          <p:cNvPr id="15" name="Text 13"/>
-          <p:cNvSpPr/>
-          <p:nvPr/>
-        </p:nvSpPr>
-        <p:spPr>
-          <a:xfrm>
-            <a:off x="914400" y="4846320"/>
-            <a:ext cx="4846320" cy="1252728"/>
-          </a:xfrm>
-          <a:prstGeom prst="rect">
-            <a:avLst/>
-          </a:prstGeom>
-          <a:noFill/>
-          <a:ln/>
-        </p:spPr>
-        <p:txBody>
-          <a:bodyPr wrap="square" lIns="0" tIns="0" rIns="0" bIns="0" rtlCol="0" anchor="t"/>
-          <a:lstStyle/>
-          <a:p>
-            <a:pPr algn="l" marL="342900" indent="-342900">
-              <a:spcAft>
-                <a:spcPts val="400"/>
-              </a:spcAft>
-              <a:buSzPct val="100000"/>
-              <a:buChar char="•"/>
-            </a:pPr>
-            <a:r>
-              <a:rPr lang="en-US" sz="1200" dirty="0">
-                <a:solidFill>
-                  <a:srgbClr val="212121"/>
-                </a:solidFill>
-                <a:latin typeface="Calibri" pitchFamily="34" charset="0"/>
-                <a:ea typeface="Calibri" pitchFamily="34" charset="-122"/>
-                <a:cs typeface="Calibri" pitchFamily="34" charset="-120"/>
-              </a:rPr>
-              <a:t>Contracts + proofs written directly in Verus</a:t>
-            </a:r>
-            <a:endParaRPr lang="en-US" sz="1200" dirty="0"/>
-          </a:p>
-          <a:p>
-            <a:pPr algn="l" marL="342900" indent="-342900">
-              <a:spcAft>
-                <a:spcPts val="400"/>
-              </a:spcAft>
-              <a:buSzPct val="100000"/>
-              <a:buChar char="•"/>
-            </a:pPr>
-            <a:r>
-              <a:rPr lang="en-US" sz="1200" dirty="0">
-                <a:solidFill>
-                  <a:srgbClr val="212121"/>
-                </a:solidFill>
-                <a:latin typeface="Calibri" pitchFamily="34" charset="0"/>
-                <a:ea typeface="Calibri" pitchFamily="34" charset="-122"/>
-                <a:cs typeface="Calibri" pitchFamily="34" charset="-120"/>
-              </a:rPr>
-              <a:t>No model, no codegen — implementation + proof classes only</a:t>
-            </a:r>
-            <a:endParaRPr lang="en-US" sz="1200" dirty="0"/>
-          </a:p>
-          <a:p>
-            <a:pPr algn="l" marL="342900" indent="-342900">
-              <a:spcAft>
-                <a:spcPts val="400"/>
-              </a:spcAft>
-              <a:buSzPct val="100000"/>
-              <a:buChar char="•"/>
-            </a:pPr>
-            <a:r>
-              <a:rPr lang="en-US" sz="1200" dirty="0">
-                <a:solidFill>
-                  <a:srgbClr val="212121"/>
-                </a:solidFill>
-                <a:latin typeface="Calibri" pitchFamily="34" charset="0"/>
-                <a:ea typeface="Calibri" pitchFamily="34" charset="-122"/>
-                <a:cs typeface="Calibri" pitchFamily="34" charset="-120"/>
-              </a:rPr>
-              <a:t>Proof-repair experiments</a:t>
-            </a:r>
-            <a:endParaRPr lang="en-US" sz="1200" dirty="0"/>
-          </a:p>
-          <a:p>
-            <a:pPr marL="800100" lvl="1" indent="-342900">
-              <a:spcAft>
-                <a:spcPts val="400"/>
-              </a:spcAft>
-              <a:buSzPct val="100000"/>
-              <a:buFont typeface="Courier New" panose="02070309020205020404" pitchFamily="49" charset="0"/>
-              <a:buChar char="o"/>
-            </a:pPr>
-            <a:r>
-              <a:rPr lang="en-US" sz="1200" dirty="0">
-                <a:solidFill>
-                  <a:srgbClr val="212121"/>
-                </a:solidFill>
-                <a:latin typeface="Calibri" pitchFamily="34" charset="0"/>
-                <a:ea typeface="Calibri" pitchFamily="34" charset="-122"/>
-                <a:cs typeface="Calibri" pitchFamily="34" charset="-120"/>
-              </a:rPr>
-              <a:t>AutoVerus</a:t>
-            </a:r>
-            <a:endParaRPr lang="en-US" sz="1200" dirty="0"/>
-          </a:p>
-          <a:p>
-            <a:pPr marL="800100" lvl="1" indent="-342900">
-              <a:spcAft>
-                <a:spcPts val="400"/>
-              </a:spcAft>
-              <a:buSzPct val="100000"/>
-              <a:buFont typeface="Courier New" panose="02070309020205020404" pitchFamily="49" charset="0"/>
-              <a:buChar char="o"/>
-            </a:pPr>
-            <a:r>
-              <a:rPr lang="en-US" sz="1200" dirty="0">
-                <a:solidFill>
-                  <a:srgbClr val="212121"/>
-                </a:solidFill>
-                <a:latin typeface="Calibri" pitchFamily="34" charset="0"/>
-                <a:ea typeface="Calibri" pitchFamily="34" charset="-122"/>
-                <a:cs typeface="Calibri" pitchFamily="34" charset="-120"/>
-              </a:rPr>
-              <a:t>KU Dogtreat linear planner</a:t>
-            </a:r>
-            <a:endParaRPr lang="en-US" sz="1200" dirty="0"/>
-          </a:p>
-        </p:txBody>
-      </p:sp>
-      <p:sp>
-        <p:nvSpPr>
-          <p:cNvPr id="16" name="Shape 14"/>
-          <p:cNvSpPr/>
-          <p:nvPr/>
-        </p:nvSpPr>
-        <p:spPr>
-          <a:xfrm>
-            <a:off x="6263640" y="4069080"/>
-            <a:ext cx="5349240" cy="2148840"/>
-          </a:xfrm>
-          <a:prstGeom prst="roundRect">
-            <a:avLst>
-              <a:gd name="adj" fmla="val 2553"/>
-            </a:avLst>
-          </a:prstGeom>
-          <a:solidFill>
-            <a:srgbClr val="F2F4F8"/>
-          </a:solidFill>
-          <a:ln w="12700">
-            <a:solidFill>
-              <a:srgbClr val="CADCFC"/>
-            </a:solidFill>
-            <a:prstDash val="solid"/>
-          </a:ln>
-        </p:spPr>
-      </p:sp>
-      <p:sp>
-        <p:nvSpPr>
-          <p:cNvPr id="17" name="Text 15"/>
-          <p:cNvSpPr/>
-          <p:nvPr/>
-        </p:nvSpPr>
-        <p:spPr>
-          <a:xfrm>
-            <a:off x="6492240" y="4178808"/>
-            <a:ext cx="4892040" cy="329184"/>
-          </a:xfrm>
-          <a:prstGeom prst="rect">
-            <a:avLst/>
-          </a:prstGeom>
-          <a:noFill/>
-          <a:ln/>
-        </p:spPr>
-        <p:txBody>
-          <a:bodyPr wrap="square" lIns="0" tIns="0" rIns="0" bIns="0" rtlCol="0" anchor="ctr"/>
-          <a:lstStyle/>
-          <a:p>
-            <a:pPr algn="l" indent="0" marL="0">
-              <a:buNone/>
-            </a:pPr>
-            <a:r>
-              <a:rPr lang="en-US" sz="1550" b="1" dirty="0">
-                <a:solidFill>
-                  <a:srgbClr val="1E2761"/>
-                </a:solidFill>
-                <a:latin typeface="Calibri" pitchFamily="34" charset="0"/>
-                <a:ea typeface="Calibri" pitchFamily="34" charset="-122"/>
-                <a:cs typeface="Calibri" pitchFamily="34" charset="-120"/>
-              </a:rPr>
-              <a:t>Interactive Theorem Provers:  Lean / Rocq</a:t>
-            </a:r>
-            <a:endParaRPr lang="en-US" sz="1550" dirty="0"/>
-          </a:p>
-        </p:txBody>
-      </p:sp>
-      <p:sp>
-        <p:nvSpPr>
-          <p:cNvPr id="18" name="Text 16"/>
-          <p:cNvSpPr/>
-          <p:nvPr/>
-        </p:nvSpPr>
-        <p:spPr>
-          <a:xfrm>
-            <a:off x="6501384" y="4526280"/>
-            <a:ext cx="4892040" cy="256032"/>
-          </a:xfrm>
-          <a:prstGeom prst="rect">
-            <a:avLst/>
-          </a:prstGeom>
-          <a:noFill/>
-          <a:ln/>
-        </p:spPr>
-        <p:txBody>
-          <a:bodyPr wrap="square" lIns="0" tIns="0" rIns="0" bIns="0" rtlCol="0" anchor="ctr"/>
-          <a:lstStyle/>
-          <a:p>
-            <a:pPr algn="l" indent="0" marL="0">
-              <a:buNone/>
-            </a:pPr>
-            <a:r>
-              <a:rPr lang="en-US" sz="1050" i="1" dirty="0">
-                <a:solidFill>
-                  <a:srgbClr val="5A6478"/>
-                </a:solidFill>
-                <a:latin typeface="Calibri" pitchFamily="34" charset="0"/>
-                <a:ea typeface="Calibri" pitchFamily="34" charset="-122"/>
-                <a:cs typeface="Calibri" pitchFamily="34" charset="-120"/>
-              </a:rPr>
-              <a:t>landing-gear, temp-control</a:t>
-            </a:r>
-            <a:endParaRPr lang="en-US" sz="1050" dirty="0"/>
-          </a:p>
-        </p:txBody>
-      </p:sp>
-      <p:sp>
-        <p:nvSpPr>
-          <p:cNvPr id="19" name="Text 17"/>
-          <p:cNvSpPr/>
-          <p:nvPr/>
-        </p:nvSpPr>
-        <p:spPr>
-          <a:xfrm>
-            <a:off x="6537960" y="4846320"/>
-            <a:ext cx="4846320" cy="1252728"/>
-          </a:xfrm>
-          <a:prstGeom prst="rect">
-            <a:avLst/>
-          </a:prstGeom>
-          <a:noFill/>
-          <a:ln/>
-        </p:spPr>
-        <p:txBody>